--- a/ppt/AI物业社区智能体方案/AI物业社区智能体-方案.pptx
+++ b/ppt/AI物业社区智能体方案/AI物业社区智能体-方案.pptx
@@ -4842,7 +4842,7 @@
   <p:cSld>
     <p:spTree>
       <p:nvGrpSpPr>
-        <p:cNvPr id="95" name="" descr="&lt;Slide style={{ width: '1280px', height: '720px', background: '#FBFCFA', position: 'relative', padding: '40px 64px', boxSizing: 'border-box', display: 'flex', flexDirection: 'column' }}&gt;&#10;  &lt;div style={{ flexShrink: 0 }}&gt;&#10;    &lt;div style={{ color: '#BD9B56', fontSize: 13, letterSpacing: '0.25em', marginBottom: 8 }}&gt;03 · 成果与验证&lt;/div&gt;&#10;    &lt;h2 style={{ fontSize: 30, fontWeight: 'bold', color: '#172133', margin: 0, lineHeight: 1.3 }}&gt;量化评估：用数据证明质量&lt;/h2&gt;&#10;    &lt;div style={{ fontSize: 14, color: '#6b7075', marginTop: 8 }}&gt;建立可量化的评估体系，用数据找到 bug、用数据证明修复&lt;/div&gt;&#10;  &lt;/div&gt;&#10;  &lt;div style={{ flex: 1, display: 'flex', alignItems: 'center' }}&gt;&#10;    &lt;div style={{ width: '100%', display: 'flex', gap: 20 }}&gt;&#10;      &lt;div style={{ flex: 1, background: '#fff', borderRadius: 12, padding: '28px 20px', textAlign: 'center', boxShadow: '0 6px 24px rgba(23,33,51,0.08)', borderTop: '4px solid #BD9B56' }}&gt;&#10;        &lt;div style={{ fontSize: 13, color: '#BD9B56', letterSpacing: '0.2em', marginBottom: 14 }}&gt;INTENT&lt;/div&gt;&#10;        &lt;div style={{ fontSize: 64, fontWeight: 'bold', color: '#172133', lineHeight: 1, fontFamily: 'Inter, sans-serif' }}&gt;100%&lt;/div&gt;&#10;        &lt;div style={{ fontSize: 14, color: '#5F5E5A', marginTop: 14, lineHeight: 1.5 }}&gt;意图识别准确率&lt;/div&gt;&#10;        &lt;div style={{ marginTop: 14, padding: '8px 0', borderTop: '1px solid rgba(34,57,94,0.1)' }}&gt;&#10;          &lt;span style={{ fontSize: 12, color: '#888780' }}&gt;从 83% 提升 · 修复 3 处规则盲区&lt;/span&gt;&#10;        &lt;/div&gt;&#10;      &lt;/div&gt;&#10;      &lt;div style={{ flex: 1, background: '#fff', borderRadius: 12, padding: '28px 20px', textAlign: 'center', boxShadow: '0 6px 24px rgba(23,33,51,0.08)', borderTop: '4px solid #BD9B56' }}&gt;&#10;        &lt;div style={{ fontSize: 13, color: '#BD9B56', letterSpacing: '0.2em', marginBottom: 14 }}&gt;RAG ANSWER&lt;/div&gt;&#10;        &lt;div style={{ fontSize: 64, fontWeight: 'bold', color: '#172133', lineHeight: 1, fontFamily: 'Inter, sans-serif' }}&gt;100%&lt;/div&gt;&#10;        &lt;div style={{ fontSize: 14, color: '#5F5E5A', marginTop: 14, lineHeight: 1.5 }}&gt;RAG 答案准确率&lt;/div&gt;&#10;        &lt;div style={{ marginTop: 14, padding: '8px 0', borderTop: '1px solid rgba(34,57,94,0.1)' }}&gt;&#10;          &lt;span style={{ fontSize: 12, color: '#888780' }}&gt;从 50% 提升 · 修复评估指标本身&lt;/span&gt;&#10;        &lt;/div&gt;&#10;      &lt;/div&gt;&#10;      &lt;div style={{ flex: 1, background: 'linear-gradient(135deg, #172133 0%, #22395E 100%)', borderRadius: 12, padding: '28px 20px', textAlign: 'center', boxShadow: '0 6px 24px rgba(23,33,51,0.18)', borderTop: '4px solid #BD9B56' }}&gt;&#10;        &lt;div style={{ fontSize: 13, color: '#BD9B56', letterSpacing: '0.2em', marginBottom: 14 }}&gt;TESTS · CI GREEN&lt;/div&gt;&#10;        &lt;div style={{ fontSize: 48, fontWeight: 'bold', color: '#FBFCFA', lineHeight: 1, fontFamily: 'Inter, sans-serif' }}&gt;113 + 30&lt;/div&gt;&#10;        &lt;div style={{ fontSize: 14, color: 'rgba(251,252,250,0.85)', marginTop: 14, lineHeight: 1.5 }}&gt;后端 + 前端测试全绿&lt;/div&gt;&#10;        &lt;div style={{ marginTop: 14, padding: '8px 0', borderTop: '1px solid rgba(189,155,86,0.3)' }}&gt;&#10;          &lt;span style={{ fontSize: 12, color: '#BD9B56' }}&gt;GitHub Actions 每次 push 自动跑&lt;/span&gt;&#10;        &lt;/div&gt;&#10;      &lt;/div&gt;&#10;    &lt;/div&gt;&#10;  &lt;/div&gt;&#10;  &lt;div style={{ flexShrink: 0, background: 'rgba(189,155,86,0.10)', borderLeft: '4px solid #BD9B56', borderRadius: '0 8px 8px 0', padding: '14px 22px' }}&gt;&#10;    &lt;p style={{ fontSize: 14, color: '#172133', margin: 0, lineHeight: 1.6 }}&gt;&lt;span style={{ color: '#BD9B56', fontWeight: 'bold' }}&gt;评估驱动优化：&lt;/span&gt;RAG 答案从 50% → 100% 不是换模型，而是发现「评估指标用脆弱子串匹配」的缺陷，改为「关键词覆盖度」评估，并优化答案生成 prompt——用数据找到 bug，用数据证明修复。&lt;/p&gt;&#10;  &lt;/div&gt;&#10;  &lt;div style={{ flexShrink: 0, height: 40, display: 'flex', alignItems: 'flex-end', justifyContent: 'space-between' }}&gt;&#10;    &lt;span style={{ color: '#BD9B56', fontSize: 12, letterSpacing: '0.1em' }}&gt;云溪花园 · 智慧社区&lt;/span&gt;&#10;    &lt;span style={{ color: '#a09b8c', fontSize: 12 }}&gt;12 / 15&lt;/span&gt;&#10;  &lt;/div&gt;&#10;&lt;/Slide&gt;"/>
+        <p:cNvPr id="95" name="" descr="&lt;Slide style={{ width: '1280px', height: '720px', background: '#FBFCFA', position: 'relative', padding: '40px 64px', boxSizing: 'border-box', display: 'flex', flexDirection: 'column' }}&gt;&#10;  &lt;div style={{ flexShrink: 0 }}&gt;&#10;    &lt;div style={{ color: '#BD9B56', fontSize: 13, letterSpacing: '0.25em', marginBottom: 8 }}&gt;03 · 成果与验证&lt;/div&gt;&#10;    &lt;h2 style={{ fontSize: 30, fontWeight: 'bold', color: '#172133', margin: 0, lineHeight: 1.3 }}&gt;量化评估：核心链路指标 100%&lt;/h2&gt;&#10;    &lt;div style={{ fontSize: 14, color: '#6b7075', marginTop: 8 }}&gt;建立可量化的评估体系，用数据找到 bug、用数据证明修复&lt;/div&gt;&#10;  &lt;/div&gt;&#10;  &lt;div style={{ flex: 1, display: 'flex', alignItems: 'center' }}&gt;&#10;    &lt;div style={{ width: '100%', display: 'flex', gap: 18 }}&gt;&#10;      &lt;div style={{ flex: 1, background: '#fff', borderRadius: 12, padding: '24px 16px', textAlign: 'center', boxShadow: '0 6px 24px rgba(23,33,51,0.08)', borderTop: '4px solid #BD9B56' }}&gt;&#10;        &lt;div style={{ fontSize: 13, color: '#BD9B56', letterSpacing: '0.2em', marginBottom: 12 }}&gt;INTENT&lt;/div&gt;&#10;        &lt;div style={{ fontSize: 60, fontWeight: 'bold', color: '#172133', lineHeight: 1, fontFamily: 'Inter, sans-serif' }}&gt;100%&lt;/div&gt;&#10;        &lt;div style={{ fontSize: 14, color: '#5F5E5A', marginTop: 12, lineHeight: 1.5 }}&gt;意图识别准确率&lt;/div&gt;&#10;        &lt;div style={{ marginTop: 12, padding: '8px 0', borderTop: '1px solid rgba(34,57,94,0.1)' }}&gt;&#10;          &lt;span style={{ fontSize: 12, color: '#888780' }}&gt;83.33% → 100% · 修复 3 处规则盲区&lt;/span&gt;&#10;        &lt;/div&gt;&#10;      &lt;/div&gt;&#10;      &lt;div style={{ flex: 1, background: '#fff', borderRadius: 12, padding: '24px 16px', textAlign: 'center', boxShadow: '0 6px 24px rgba(23,33,51,0.08)', borderTop: '4px solid #BD9B56' }}&gt;&#10;        &lt;div style={{ fontSize: 13, color: '#BD9B56', letterSpacing: '0.2em', marginBottom: 12 }}&gt;RAG RECALL&lt;/div&gt;&#10;        &lt;div style={{ fontSize: 60, fontWeight: 'bold', color: '#172133', lineHeight: 1, fontFamily: 'Inter, sans-serif' }}&gt;100%&lt;/div&gt;&#10;        &lt;div style={{ fontSize: 14, color: '#5F5E5A', marginTop: 12, lineHeight: 1.5 }}&gt;检索召回率 Recall@5&lt;/div&gt;&#10;        &lt;div style={{ marginTop: 12, padding: '8px 0', borderTop: '1px solid rgba(34,57,94,0.1)' }}&gt;&#10;          &lt;span style={{ fontSize: 12, color: '#888780' }}&gt;知识切片检索质量稳定达标&lt;/span&gt;&#10;        &lt;/div&gt;&#10;      &lt;/div&gt;&#10;      &lt;div style={{ flex: 1, background: '#fff', borderRadius: 12, padding: '24px 16px', textAlign: 'center', boxShadow: '0 6px 24px rgba(23,33,51,0.08)', borderTop: '4px solid #BD9B56' }}&gt;&#10;        &lt;div style={{ fontSize: 13, color: '#BD9B56', letterSpacing: '0.2em', marginBottom: 12 }}&gt;RAG ANSWER&lt;/div&gt;&#10;        &lt;div style={{ fontSize: 60, fontWeight: 'bold', color: '#172133', lineHeight: 1, fontFamily: 'Inter, sans-serif' }}&gt;100%&lt;/div&gt;&#10;        &lt;div style={{ fontSize: 14, color: '#5F5E5A', marginTop: 12, lineHeight: 1.5 }}&gt;答案准确率&lt;/div&gt;&#10;        &lt;div style={{ marginTop: 12, padding: '8px 0', borderTop: '1px solid rgba(34,57,94,0.1)' }}&gt;&#10;          &lt;span style={{ fontSize: 12, color: '#888780' }}&gt;50% → 100% · 答案生成优化&lt;/span&gt;&#10;        &lt;/div&gt;&#10;      &lt;/div&gt;&#10;      &lt;div style={{ flex: 1, background: 'linear-gradient(135deg, #172133 0%, #22395E 100%)', borderRadius: 12, padding: '24px 16px', textAlign: 'center', boxShadow: '0 6px 24px rgba(23,33,51,0.18)', borderTop: '4px solid #BD9B56' }}&gt;&#10;        &lt;div style={{ fontSize: 13, color: '#BD9B56', letterSpacing: '0.2em', marginBottom: 12 }}&gt;TESTS · CI GREEN&lt;/div&gt;&#10;        &lt;div style={{ fontSize: 44, fontWeight: 'bold', color: '#FBFCFA', lineHeight: 1, fontFamily: 'Inter, sans-serif' }}&gt;113 + 30&lt;/div&gt;&#10;        &lt;div style={{ fontSize: 14, color: 'rgba(251,252,250,0.85)', marginTop: 12, lineHeight: 1.5 }}&gt;后端 + 前端测试全绿&lt;/div&gt;&#10;        &lt;div style={{ marginTop: 12, padding: '8px 0', borderTop: '1px solid rgba(189,155,86,0.3)' }}&gt;&#10;          &lt;span style={{ fontSize: 12, color: '#BD9B56' }}&gt;GitHub Actions 每次 push 自动跑&lt;/span&gt;&#10;        &lt;/div&gt;&#10;      &lt;/div&gt;&#10;    &lt;/div&gt;&#10;  &lt;/div&gt;&#10;  &lt;div style={{ flexShrink: 0, background: 'rgba(189,155,86,0.10)', borderLeft: '4px solid #BD9B56', borderRadius: '0 8px 8px 0', padding: '14px 22px' }}&gt;&#10;    &lt;p style={{ fontSize: 14, color: '#172133', margin: 0, lineHeight: 1.6 }}&gt;&lt;span style={{ color: '#BD9B56', fontWeight: 'bold' }}&gt;评估驱动优化：&lt;/span&gt;RAG 答案从 50% → 100%，源于发现「评估指标用脆弱子串匹配」并改为「关键词覆盖度」、同时优化答案生成 prompt——用数据找到 bug，用数据证明修复。工具选择 / 参数提取 / 工作流三项指标受「报修多轮交互」设计影响（用例按单轮设计，实际走 pending_repair 多轮），已定位为评估框架升级项，而非 Agent 缺陷。&lt;/p&gt;&#10;  &lt;/div&gt;&#10;  &lt;div style={{ flexShrink: 0, height: 40, display: 'flex', alignItems: 'flex-end', justifyContent: 'space-between' }}&gt;&#10;    &lt;span style={{ color: '#BD9B56', fontSize: 12, letterSpacing: '0.1em' }}&gt;云溪花园 · 智慧社区&lt;/span&gt;&#10;    &lt;span style={{ color: '#a09b8c', fontSize: 12 }}&gt;12 / 15&lt;/span&gt;&#10;  &lt;/div&gt;&#10;&lt;/Slide&gt;"/>
         <p:cNvGrpSpPr/>
         <p:nvPr/>
       </p:nvGrpSpPr>
@@ -4952,7 +4952,17 @@
                 <a:latin typeface="Microsoft YaHei"/>
                 <a:ea typeface="Microsoft YaHei"/>
               </a:rPr>
-              <a:t>量化评估：用数据证明质量</a:t>
+              <a:t>量化评估：核心链路指标</a:t>
+            </a:r>
+            <a:r>
+              <a:rPr lang="en-US" sz="2250" b="1">
+                <a:solidFill>
+                  <a:srgbClr val="172133"/>
+                </a:solidFill>
+                <a:latin typeface="Microsoft YaHei"/>
+                <a:ea typeface="Microsoft YaHei"/>
+              </a:rPr>
+              <a:t> 100%</a:t>
             </a:r>
             <a:endParaRPr/>
           </a:p>
@@ -5021,12 +5031,12 @@
         </p:nvSpPr>
         <p:spPr>
           <a:xfrm rot="0" flipH="0" flipV="0">
-            <a:off x="609600" y="2143125"/>
-            <a:ext cx="3533775" cy="2409825"/>
+            <a:off x="609600" y="2228850"/>
+            <a:ext cx="2619375" cy="2228850"/>
           </a:xfrm>
           <a:prstGeom prst="roundRect">
             <a:avLst>
-              <a:gd name="adj" fmla="val 4743"/>
+              <a:gd name="adj" fmla="val 5128"/>
             </a:avLst>
           </a:prstGeom>
           <a:solidFill>
@@ -5054,24 +5064,24 @@
         </p:nvSpPr>
         <p:spPr>
           <a:xfrm rot="0" flipH="0" flipV="0">
-            <a:off x="609600" y="2143125"/>
-            <a:ext cx="3533775" cy="2409825"/>
+            <a:off x="609600" y="2228850"/>
+            <a:ext cx="2619375" cy="2228850"/>
           </a:xfrm>
           <a:custGeom>
             <a:pathLst>
-              <a:path w="371" h="253">
+              <a:path w="275" h="234">
                 <a:moveTo>
-                  <a:pt x="360" y="0"/>
+                  <a:pt x="264" y="0"/>
                 </a:moveTo>
                 <a:cubicBezTo>
-                  <a:pt x="365" y="0"/>
-                  <a:pt x="370" y="4"/>
-                  <a:pt x="371" y="10"/>
+                  <a:pt x="269" y="0"/>
+                  <a:pt x="274" y="4"/>
+                  <a:pt x="275" y="10"/>
                 </a:cubicBezTo>
                 <a:cubicBezTo>
-                  <a:pt x="370" y="6"/>
-                  <a:pt x="367" y="4"/>
-                  <a:pt x="363" y="4"/>
+                  <a:pt x="274" y="6"/>
+                  <a:pt x="271" y="4"/>
+                  <a:pt x="267" y="4"/>
                 </a:cubicBezTo>
                 <a:lnTo>
                   <a:pt x="8" y="4"/>
@@ -5087,7 +5097,7 @@
                   <a:pt x="12" y="0"/>
                 </a:cubicBezTo>
                 <a:lnTo>
-                  <a:pt x="359" y="0"/>
+                  <a:pt x="263" y="0"/>
                 </a:lnTo>
                 <a:close/>
               </a:path>
@@ -5111,8 +5121,8 @@
         </p:nvSpPr>
         <p:spPr>
           <a:xfrm rot="0" flipH="0" flipV="0">
-            <a:off x="800100" y="2409825"/>
-            <a:ext cx="3152775" cy="152400"/>
+            <a:off x="762000" y="2457450"/>
+            <a:ext cx="2314575" cy="152400"/>
           </a:xfrm>
           <a:prstGeom prst="rect"/>
         </p:spPr>
@@ -5146,8 +5156,8 @@
         </p:nvSpPr>
         <p:spPr>
           <a:xfrm rot="0" flipH="0" flipV="0">
-            <a:off x="800100" y="2695575"/>
-            <a:ext cx="3152775" cy="733425"/>
+            <a:off x="762000" y="2724150"/>
+            <a:ext cx="2314575" cy="685800"/>
           </a:xfrm>
           <a:prstGeom prst="rect"/>
         </p:spPr>
@@ -5160,7 +5170,7 @@
               </a:lnSpc>
             </a:pPr>
             <a:r>
-              <a:rPr lang="en-US" sz="4800">
+              <a:rPr lang="en-US" sz="4500">
                 <a:solidFill>
                   <a:srgbClr val="172133"/>
                 </a:solidFill>
@@ -5181,8 +5191,8 @@
         </p:nvSpPr>
         <p:spPr>
           <a:xfrm rot="0" flipH="0" flipV="0">
-            <a:off x="800100" y="3562350"/>
-            <a:ext cx="3152775" cy="247650"/>
+            <a:off x="762000" y="3524250"/>
+            <a:ext cx="2314575" cy="247650"/>
           </a:xfrm>
           <a:prstGeom prst="rect"/>
         </p:spPr>
@@ -5216,20 +5226,20 @@
         </p:nvSpPr>
         <p:spPr>
           <a:xfrm rot="0" flipH="0" flipV="0">
-            <a:off x="800100" y="3943350"/>
-            <a:ext cx="3152775" cy="314325"/>
+            <a:off x="762000" y="3886200"/>
+            <a:ext cx="2314575" cy="314325"/>
           </a:xfrm>
           <a:custGeom>
             <a:pathLst>
-              <a:path w="331" h="33">
+              <a:path w="243" h="33">
                 <a:moveTo>
                   <a:pt x="0" y="0"/>
                 </a:moveTo>
                 <a:lnTo>
-                  <a:pt x="331" y="0"/>
+                  <a:pt x="243" y="0"/>
                 </a:lnTo>
                 <a:lnTo>
-                  <a:pt x="331" y="1"/>
+                  <a:pt x="243" y="1"/>
                 </a:lnTo>
                 <a:lnTo>
                   <a:pt x="0" y="1"/>
@@ -5258,8 +5268,8 @@
         </p:nvSpPr>
         <p:spPr>
           <a:xfrm rot="0" flipH="0" flipV="0">
-            <a:off x="800100" y="4029075"/>
-            <a:ext cx="3152775" cy="142875"/>
+            <a:off x="762000" y="3971925"/>
+            <a:ext cx="2314575" cy="142875"/>
           </a:xfrm>
           <a:prstGeom prst="rect"/>
         </p:spPr>
@@ -5272,44 +5282,14 @@
               </a:lnSpc>
             </a:pPr>
             <a:r>
-              <a:rPr lang="zh-CN" sz="900">
+              <a:rPr lang="en-US" sz="900">
                 <a:solidFill>
                   <a:srgbClr val="888780"/>
                 </a:solidFill>
                 <a:latin typeface="Microsoft YaHei"/>
                 <a:ea typeface="Microsoft YaHei"/>
               </a:rPr>
-              <a:t>从</a:t>
-            </a:r>
-            <a:r>
-              <a:rPr lang="en-US" sz="900">
-                <a:solidFill>
-                  <a:srgbClr val="888780"/>
-                </a:solidFill>
-                <a:latin typeface="Microsoft YaHei"/>
-                <a:ea typeface="Microsoft YaHei"/>
-              </a:rPr>
-              <a:t> 83% </a:t>
-            </a:r>
-            <a:r>
-              <a:rPr lang="zh-CN" sz="900">
-                <a:solidFill>
-                  <a:srgbClr val="888780"/>
-                </a:solidFill>
-                <a:latin typeface="Microsoft YaHei"/>
-                <a:ea typeface="Microsoft YaHei"/>
-              </a:rPr>
-              <a:t>提升</a:t>
-            </a:r>
-            <a:r>
-              <a:rPr lang="en-US" sz="900">
-                <a:solidFill>
-                  <a:srgbClr val="888780"/>
-                </a:solidFill>
-                <a:latin typeface="Microsoft YaHei"/>
-                <a:ea typeface="Microsoft YaHei"/>
-              </a:rPr>
-              <a:t> · </a:t>
+              <a:t>83.33% → 100% · </a:t>
             </a:r>
             <a:r>
               <a:rPr lang="zh-CN" sz="900">
@@ -5353,12 +5333,12 @@
         </p:nvSpPr>
         <p:spPr>
           <a:xfrm rot="0" flipH="0" flipV="0">
-            <a:off x="4333875" y="2143125"/>
-            <a:ext cx="3524250" cy="2409825"/>
+            <a:off x="3400425" y="2228850"/>
+            <a:ext cx="2609850" cy="2228850"/>
           </a:xfrm>
           <a:prstGeom prst="roundRect">
             <a:avLst>
-              <a:gd name="adj" fmla="val 4743"/>
+              <a:gd name="adj" fmla="val 5128"/>
             </a:avLst>
           </a:prstGeom>
           <a:solidFill>
@@ -5386,24 +5366,24 @@
         </p:nvSpPr>
         <p:spPr>
           <a:xfrm rot="0" flipH="0" flipV="0">
-            <a:off x="4333875" y="2143125"/>
-            <a:ext cx="3524250" cy="2409825"/>
+            <a:off x="3400425" y="2228850"/>
+            <a:ext cx="2609850" cy="2228850"/>
           </a:xfrm>
           <a:custGeom>
             <a:pathLst>
-              <a:path w="370" h="253">
+              <a:path w="274" h="234">
                 <a:moveTo>
-                  <a:pt x="359" y="0"/>
+                  <a:pt x="263" y="0"/>
                 </a:moveTo>
                 <a:cubicBezTo>
-                  <a:pt x="364" y="0"/>
-                  <a:pt x="369" y="4"/>
-                  <a:pt x="370" y="10"/>
+                  <a:pt x="268" y="0"/>
+                  <a:pt x="273" y="4"/>
+                  <a:pt x="274" y="10"/>
                 </a:cubicBezTo>
                 <a:cubicBezTo>
-                  <a:pt x="369" y="6"/>
-                  <a:pt x="366" y="4"/>
-                  <a:pt x="362" y="4"/>
+                  <a:pt x="273" y="6"/>
+                  <a:pt x="270" y="4"/>
+                  <a:pt x="266" y="4"/>
                 </a:cubicBezTo>
                 <a:lnTo>
                   <a:pt x="8" y="4"/>
@@ -5419,7 +5399,7 @@
                   <a:pt x="12" y="0"/>
                 </a:cubicBezTo>
                 <a:lnTo>
-                  <a:pt x="358" y="0"/>
+                  <a:pt x="262" y="0"/>
                 </a:lnTo>
                 <a:close/>
               </a:path>
@@ -5443,8 +5423,8 @@
         </p:nvSpPr>
         <p:spPr>
           <a:xfrm rot="0" flipH="0" flipV="0">
-            <a:off x="4524375" y="2409825"/>
-            <a:ext cx="3143250" cy="152400"/>
+            <a:off x="3552825" y="2457450"/>
+            <a:ext cx="2305050" cy="152400"/>
           </a:xfrm>
           <a:prstGeom prst="rect"/>
         </p:spPr>
@@ -5464,7 +5444,7 @@
                 <a:latin typeface="Microsoft YaHei"/>
                 <a:ea typeface="Microsoft YaHei"/>
               </a:rPr>
-              <a:t>RAG ANSWER</a:t>
+              <a:t>RAG RECALL</a:t>
             </a:r>
             <a:endParaRPr/>
           </a:p>
@@ -5478,8 +5458,8 @@
         </p:nvSpPr>
         <p:spPr>
           <a:xfrm rot="0" flipH="0" flipV="0">
-            <a:off x="4524375" y="2695575"/>
-            <a:ext cx="3143250" cy="733425"/>
+            <a:off x="3552825" y="2724150"/>
+            <a:ext cx="2305050" cy="685800"/>
           </a:xfrm>
           <a:prstGeom prst="rect"/>
         </p:spPr>
@@ -5492,7 +5472,7 @@
               </a:lnSpc>
             </a:pPr>
             <a:r>
-              <a:rPr lang="en-US" sz="4800">
+              <a:rPr lang="en-US" sz="4500">
                 <a:solidFill>
                   <a:srgbClr val="172133"/>
                 </a:solidFill>
@@ -5513,8 +5493,8 @@
         </p:nvSpPr>
         <p:spPr>
           <a:xfrm rot="0" flipH="0" flipV="0">
-            <a:off x="4524375" y="3562350"/>
-            <a:ext cx="3143250" cy="247650"/>
+            <a:off x="3552825" y="3524250"/>
+            <a:ext cx="2305050" cy="247650"/>
           </a:xfrm>
           <a:prstGeom prst="rect"/>
         </p:spPr>
@@ -5527,6 +5507,16 @@
               </a:lnSpc>
             </a:pPr>
             <a:r>
+              <a:rPr lang="zh-CN" sz="1050">
+                <a:solidFill>
+                  <a:srgbClr val="5F5E5A"/>
+                </a:solidFill>
+                <a:latin typeface="Microsoft YaHei"/>
+                <a:ea typeface="Microsoft YaHei"/>
+              </a:rPr>
+              <a:t>检索召回率</a:t>
+            </a:r>
+            <a:r>
               <a:rPr lang="en-US" sz="1050">
                 <a:solidFill>
                   <a:srgbClr val="5F5E5A"/>
@@ -5534,17 +5524,7 @@
                 <a:latin typeface="Microsoft YaHei"/>
                 <a:ea typeface="Microsoft YaHei"/>
               </a:rPr>
-              <a:t>RAG </a:t>
-            </a:r>
-            <a:r>
-              <a:rPr lang="zh-CN" sz="1050">
-                <a:solidFill>
-                  <a:srgbClr val="5F5E5A"/>
-                </a:solidFill>
-                <a:latin typeface="Microsoft YaHei"/>
-                <a:ea typeface="Microsoft YaHei"/>
-              </a:rPr>
-              <a:t>答案准确率</a:t>
+              <a:t> Recall@5</a:t>
             </a:r>
             <a:endParaRPr/>
           </a:p>
@@ -5558,20 +5538,20 @@
         </p:nvSpPr>
         <p:spPr>
           <a:xfrm rot="0" flipH="0" flipV="0">
-            <a:off x="4524375" y="3943350"/>
-            <a:ext cx="3143250" cy="314325"/>
+            <a:off x="3552825" y="3886200"/>
+            <a:ext cx="2305050" cy="314325"/>
           </a:xfrm>
           <a:custGeom>
             <a:pathLst>
-              <a:path w="330" h="33">
+              <a:path w="242" h="33">
                 <a:moveTo>
                   <a:pt x="0" y="0"/>
                 </a:moveTo>
                 <a:lnTo>
-                  <a:pt x="330" y="0"/>
+                  <a:pt x="242" y="0"/>
                 </a:lnTo>
                 <a:lnTo>
-                  <a:pt x="330" y="1"/>
+                  <a:pt x="242" y="1"/>
                 </a:lnTo>
                 <a:lnTo>
                   <a:pt x="0" y="1"/>
@@ -5600,8 +5580,8 @@
         </p:nvSpPr>
         <p:spPr>
           <a:xfrm rot="0" flipH="0" flipV="0">
-            <a:off x="4524375" y="4029075"/>
-            <a:ext cx="3143250" cy="142875"/>
+            <a:off x="3552825" y="3971925"/>
+            <a:ext cx="2305050" cy="142875"/>
           </a:xfrm>
           <a:prstGeom prst="rect"/>
         </p:spPr>
@@ -5621,47 +5601,7 @@
                 <a:latin typeface="Microsoft YaHei"/>
                 <a:ea typeface="Microsoft YaHei"/>
               </a:rPr>
-              <a:t>从</a:t>
-            </a:r>
-            <a:r>
-              <a:rPr lang="en-US" sz="900">
-                <a:solidFill>
-                  <a:srgbClr val="888780"/>
-                </a:solidFill>
-                <a:latin typeface="Microsoft YaHei"/>
-                <a:ea typeface="Microsoft YaHei"/>
-              </a:rPr>
-              <a:t> 50% </a:t>
-            </a:r>
-            <a:r>
-              <a:rPr lang="zh-CN" sz="900">
-                <a:solidFill>
-                  <a:srgbClr val="888780"/>
-                </a:solidFill>
-                <a:latin typeface="Microsoft YaHei"/>
-                <a:ea typeface="Microsoft YaHei"/>
-              </a:rPr>
-              <a:t>提升</a:t>
-            </a:r>
-            <a:r>
-              <a:rPr lang="en-US" sz="900">
-                <a:solidFill>
-                  <a:srgbClr val="888780"/>
-                </a:solidFill>
-                <a:latin typeface="Microsoft YaHei"/>
-                <a:ea typeface="Microsoft YaHei"/>
-              </a:rPr>
-              <a:t> · </a:t>
-            </a:r>
-            <a:r>
-              <a:rPr lang="zh-CN" sz="900">
-                <a:solidFill>
-                  <a:srgbClr val="888780"/>
-                </a:solidFill>
-                <a:latin typeface="Microsoft YaHei"/>
-                <a:ea typeface="Microsoft YaHei"/>
-              </a:rPr>
-              <a:t>修复评估指标本身</a:t>
+              <a:t>知识切片检索质量稳定达标</a:t>
             </a:r>
             <a:endParaRPr/>
           </a:p>
@@ -5675,12 +5615,294 @@
         </p:nvSpPr>
         <p:spPr>
           <a:xfrm rot="0" flipH="0" flipV="0">
-            <a:off x="8048625" y="2143125"/>
-            <a:ext cx="3533775" cy="2409825"/>
+            <a:off x="6181725" y="2228850"/>
+            <a:ext cx="2619375" cy="2228850"/>
           </a:xfrm>
           <a:prstGeom prst="roundRect">
             <a:avLst>
-              <a:gd name="adj" fmla="val 4743"/>
+              <a:gd name="adj" fmla="val 5128"/>
+            </a:avLst>
+          </a:prstGeom>
+          <a:solidFill>
+            <a:srgbClr val="FFFFFF"/>
+          </a:solidFill>
+          <a:ln/>
+          <a:effectLst>
+            <a:outerShdw blurRad="228600" dist="57150" dir="5400000">
+              <a:srgbClr val="172133">
+                <a:alpha val="8000"/>
+              </a:srgbClr>
+            </a:outerShdw>
+          </a:effectLst>
+        </p:spPr>
+        <p:txBody>
+          <a:bodyPr/>
+          <a:p/>
+        </p:txBody>
+      </p:sp>
+      <p:sp>
+        <p:nvSpPr>
+          <p:cNvPr id="115" name=""/>
+          <p:cNvSpPr/>
+          <p:nvPr/>
+        </p:nvSpPr>
+        <p:spPr>
+          <a:xfrm rot="0" flipH="0" flipV="0">
+            <a:off x="6181725" y="2228850"/>
+            <a:ext cx="2619375" cy="2228850"/>
+          </a:xfrm>
+          <a:custGeom>
+            <a:pathLst>
+              <a:path w="275" h="234">
+                <a:moveTo>
+                  <a:pt x="264" y="0"/>
+                </a:moveTo>
+                <a:cubicBezTo>
+                  <a:pt x="269" y="0"/>
+                  <a:pt x="274" y="4"/>
+                  <a:pt x="275" y="10"/>
+                </a:cubicBezTo>
+                <a:cubicBezTo>
+                  <a:pt x="274" y="6"/>
+                  <a:pt x="271" y="4"/>
+                  <a:pt x="267" y="4"/>
+                </a:cubicBezTo>
+                <a:lnTo>
+                  <a:pt x="8" y="4"/>
+                </a:lnTo>
+                <a:cubicBezTo>
+                  <a:pt x="4" y="4"/>
+                  <a:pt x="1" y="7"/>
+                  <a:pt x="0" y="10"/>
+                </a:cubicBezTo>
+                <a:cubicBezTo>
+                  <a:pt x="1" y="4"/>
+                  <a:pt x="6" y="0"/>
+                  <a:pt x="12" y="0"/>
+                </a:cubicBezTo>
+                <a:lnTo>
+                  <a:pt x="263" y="0"/>
+                </a:lnTo>
+                <a:close/>
+              </a:path>
+            </a:pathLst>
+          </a:custGeom>
+          <a:solidFill>
+            <a:srgbClr val="BD9B56"/>
+          </a:solidFill>
+          <a:ln/>
+        </p:spPr>
+        <p:txBody>
+          <a:bodyPr/>
+          <a:p/>
+        </p:txBody>
+      </p:sp>
+      <p:sp>
+        <p:nvSpPr>
+          <p:cNvPr id="116" name="" descr="{&quot;isTemplate&quot;:true,&quot;type&quot;:&quot;text&quot;}"/>
+          <p:cNvSpPr txBox="1"/>
+          <p:nvPr/>
+        </p:nvSpPr>
+        <p:spPr>
+          <a:xfrm rot="0" flipH="0" flipV="0">
+            <a:off x="6334125" y="2457450"/>
+            <a:ext cx="2314575" cy="152400"/>
+          </a:xfrm>
+          <a:prstGeom prst="rect"/>
+        </p:spPr>
+        <p:txBody>
+          <a:bodyPr wrap="none" lIns="0" tIns="0" rIns="0" bIns="0"/>
+          <a:p>
+            <a:pPr algn="ctr">
+              <a:lnSpc>
+                <a:spcPct val="100000"/>
+              </a:lnSpc>
+            </a:pPr>
+            <a:r>
+              <a:rPr lang="en-US" sz="975" spc="-9223372036854775808">
+                <a:solidFill>
+                  <a:srgbClr val="BD9B56"/>
+                </a:solidFill>
+                <a:latin typeface="Microsoft YaHei"/>
+                <a:ea typeface="Microsoft YaHei"/>
+              </a:rPr>
+              <a:t>RAG ANSWER</a:t>
+            </a:r>
+            <a:endParaRPr/>
+          </a:p>
+        </p:txBody>
+      </p:sp>
+      <p:sp>
+        <p:nvSpPr>
+          <p:cNvPr id="117" name="" descr="{&quot;isTemplate&quot;:true,&quot;type&quot;:&quot;text&quot;}"/>
+          <p:cNvSpPr txBox="1"/>
+          <p:nvPr/>
+        </p:nvSpPr>
+        <p:spPr>
+          <a:xfrm rot="0" flipH="0" flipV="0">
+            <a:off x="6334125" y="2724150"/>
+            <a:ext cx="2314575" cy="685800"/>
+          </a:xfrm>
+          <a:prstGeom prst="rect"/>
+        </p:spPr>
+        <p:txBody>
+          <a:bodyPr wrap="none" lIns="0" tIns="0" rIns="0" bIns="0"/>
+          <a:p>
+            <a:pPr algn="ctr">
+              <a:lnSpc>
+                <a:spcPct val="100000"/>
+              </a:lnSpc>
+            </a:pPr>
+            <a:r>
+              <a:rPr lang="en-US" sz="4500">
+                <a:solidFill>
+                  <a:srgbClr val="172133"/>
+                </a:solidFill>
+                <a:latin typeface="Inter"/>
+                <a:ea typeface="Inter"/>
+              </a:rPr>
+              <a:t>100%</a:t>
+            </a:r>
+            <a:endParaRPr/>
+          </a:p>
+        </p:txBody>
+      </p:sp>
+      <p:sp>
+        <p:nvSpPr>
+          <p:cNvPr id="118" name="" descr="{&quot;isTemplate&quot;:true,&quot;type&quot;:&quot;text&quot;}"/>
+          <p:cNvSpPr txBox="1"/>
+          <p:nvPr/>
+        </p:nvSpPr>
+        <p:spPr>
+          <a:xfrm rot="0" flipH="0" flipV="0">
+            <a:off x="6334125" y="3524250"/>
+            <a:ext cx="2314575" cy="247650"/>
+          </a:xfrm>
+          <a:prstGeom prst="rect"/>
+        </p:spPr>
+        <p:txBody>
+          <a:bodyPr wrap="none" lIns="0" tIns="0" rIns="0" bIns="0"/>
+          <a:p>
+            <a:pPr algn="ctr">
+              <a:lnSpc>
+                <a:spcPct val="150000"/>
+              </a:lnSpc>
+            </a:pPr>
+            <a:r>
+              <a:rPr lang="zh-CN" sz="1050">
+                <a:solidFill>
+                  <a:srgbClr val="5F5E5A"/>
+                </a:solidFill>
+                <a:latin typeface="Microsoft YaHei"/>
+                <a:ea typeface="Microsoft YaHei"/>
+              </a:rPr>
+              <a:t>答案准确率</a:t>
+            </a:r>
+            <a:endParaRPr/>
+          </a:p>
+        </p:txBody>
+      </p:sp>
+      <p:sp>
+        <p:nvSpPr>
+          <p:cNvPr id="119" name=""/>
+          <p:cNvSpPr/>
+          <p:nvPr/>
+        </p:nvSpPr>
+        <p:spPr>
+          <a:xfrm rot="0" flipH="0" flipV="0">
+            <a:off x="6334125" y="3886200"/>
+            <a:ext cx="2314575" cy="314325"/>
+          </a:xfrm>
+          <a:custGeom>
+            <a:pathLst>
+              <a:path w="243" h="33">
+                <a:moveTo>
+                  <a:pt x="0" y="0"/>
+                </a:moveTo>
+                <a:lnTo>
+                  <a:pt x="243" y="0"/>
+                </a:lnTo>
+                <a:lnTo>
+                  <a:pt x="243" y="1"/>
+                </a:lnTo>
+                <a:lnTo>
+                  <a:pt x="0" y="1"/>
+                </a:lnTo>
+                <a:close/>
+              </a:path>
+            </a:pathLst>
+          </a:custGeom>
+          <a:solidFill>
+            <a:srgbClr val="22395E">
+              <a:alpha val="10000"/>
+            </a:srgbClr>
+          </a:solidFill>
+          <a:ln/>
+        </p:spPr>
+        <p:txBody>
+          <a:bodyPr/>
+          <a:p/>
+        </p:txBody>
+      </p:sp>
+      <p:sp>
+        <p:nvSpPr>
+          <p:cNvPr id="120" name="" descr="{&quot;isTemplate&quot;:true,&quot;type&quot;:&quot;text&quot;}"/>
+          <p:cNvSpPr txBox="1"/>
+          <p:nvPr/>
+        </p:nvSpPr>
+        <p:spPr>
+          <a:xfrm rot="0" flipH="0" flipV="0">
+            <a:off x="6334125" y="3971925"/>
+            <a:ext cx="2314575" cy="142875"/>
+          </a:xfrm>
+          <a:prstGeom prst="rect"/>
+        </p:spPr>
+        <p:txBody>
+          <a:bodyPr wrap="none" lIns="0" tIns="0" rIns="0" bIns="0"/>
+          <a:p>
+            <a:pPr algn="ctr">
+              <a:lnSpc>
+                <a:spcPct val="100000"/>
+              </a:lnSpc>
+            </a:pPr>
+            <a:r>
+              <a:rPr lang="en-US" sz="900">
+                <a:solidFill>
+                  <a:srgbClr val="888780"/>
+                </a:solidFill>
+                <a:latin typeface="Microsoft YaHei"/>
+                <a:ea typeface="Microsoft YaHei"/>
+              </a:rPr>
+              <a:t>50% → 100% · </a:t>
+            </a:r>
+            <a:r>
+              <a:rPr lang="zh-CN" sz="900">
+                <a:solidFill>
+                  <a:srgbClr val="888780"/>
+                </a:solidFill>
+                <a:latin typeface="Microsoft YaHei"/>
+                <a:ea typeface="Microsoft YaHei"/>
+              </a:rPr>
+              <a:t>答案生成优化</a:t>
+            </a:r>
+            <a:endParaRPr/>
+          </a:p>
+        </p:txBody>
+      </p:sp>
+      <p:sp>
+        <p:nvSpPr>
+          <p:cNvPr id="121" name=""/>
+          <p:cNvSpPr/>
+          <p:nvPr/>
+        </p:nvSpPr>
+        <p:spPr>
+          <a:xfrm rot="0" flipH="0" flipV="0">
+            <a:off x="8972550" y="2228850"/>
+            <a:ext cx="2609850" cy="2228850"/>
+          </a:xfrm>
+          <a:prstGeom prst="roundRect">
+            <a:avLst>
+              <a:gd name="adj" fmla="val 5128"/>
             </a:avLst>
           </a:prstGeom>
           <a:gradFill>
@@ -5710,30 +5932,30 @@
       </p:sp>
       <p:sp>
         <p:nvSpPr>
-          <p:cNvPr id="115" name=""/>
+          <p:cNvPr id="122" name=""/>
           <p:cNvSpPr/>
           <p:nvPr/>
         </p:nvSpPr>
         <p:spPr>
           <a:xfrm rot="0" flipH="0" flipV="0">
-            <a:off x="8048625" y="2143125"/>
-            <a:ext cx="3533775" cy="2409825"/>
+            <a:off x="8972550" y="2228850"/>
+            <a:ext cx="2609850" cy="2228850"/>
           </a:xfrm>
           <a:custGeom>
             <a:pathLst>
-              <a:path w="371" h="253">
+              <a:path w="274" h="234">
                 <a:moveTo>
-                  <a:pt x="360" y="0"/>
+                  <a:pt x="263" y="0"/>
                 </a:moveTo>
                 <a:cubicBezTo>
-                  <a:pt x="365" y="0"/>
-                  <a:pt x="370" y="4"/>
-                  <a:pt x="371" y="10"/>
+                  <a:pt x="268" y="0"/>
+                  <a:pt x="273" y="4"/>
+                  <a:pt x="274" y="10"/>
                 </a:cubicBezTo>
                 <a:cubicBezTo>
-                  <a:pt x="370" y="6"/>
-                  <a:pt x="367" y="4"/>
-                  <a:pt x="363" y="4"/>
+                  <a:pt x="273" y="6"/>
+                  <a:pt x="270" y="4"/>
+                  <a:pt x="266" y="4"/>
                 </a:cubicBezTo>
                 <a:lnTo>
                   <a:pt x="8" y="4"/>
@@ -5749,7 +5971,7 @@
                   <a:pt x="12" y="0"/>
                 </a:cubicBezTo>
                 <a:lnTo>
-                  <a:pt x="359" y="0"/>
+                  <a:pt x="262" y="0"/>
                 </a:lnTo>
                 <a:close/>
               </a:path>
@@ -5767,14 +5989,14 @@
       </p:sp>
       <p:sp>
         <p:nvSpPr>
-          <p:cNvPr id="116" name="" descr="{&quot;isTemplate&quot;:true,&quot;type&quot;:&quot;text&quot;}"/>
-          <p:cNvSpPr txBox="1"/>
-          <p:nvPr/>
-        </p:nvSpPr>
-        <p:spPr>
-          <a:xfrm rot="0" flipH="0" flipV="0">
-            <a:off x="8239125" y="2409825"/>
-            <a:ext cx="3152775" cy="152400"/>
+          <p:cNvPr id="123" name="" descr="{&quot;isTemplate&quot;:true,&quot;type&quot;:&quot;text&quot;}"/>
+          <p:cNvSpPr txBox="1"/>
+          <p:nvPr/>
+        </p:nvSpPr>
+        <p:spPr>
+          <a:xfrm rot="0" flipH="0" flipV="0">
+            <a:off x="9124950" y="2457450"/>
+            <a:ext cx="2305050" cy="152400"/>
           </a:xfrm>
           <a:prstGeom prst="rect"/>
         </p:spPr>
@@ -5802,14 +6024,14 @@
       </p:sp>
       <p:sp>
         <p:nvSpPr>
-          <p:cNvPr id="117" name="" descr="{&quot;isTemplate&quot;:true,&quot;type&quot;:&quot;text&quot;}"/>
-          <p:cNvSpPr txBox="1"/>
-          <p:nvPr/>
-        </p:nvSpPr>
-        <p:spPr>
-          <a:xfrm rot="0" flipH="0" flipV="0">
-            <a:off x="8239125" y="2695575"/>
-            <a:ext cx="3152775" cy="552450"/>
+          <p:cNvPr id="124" name="" descr="{&quot;isTemplate&quot;:true,&quot;type&quot;:&quot;text&quot;}"/>
+          <p:cNvSpPr txBox="1"/>
+          <p:nvPr/>
+        </p:nvSpPr>
+        <p:spPr>
+          <a:xfrm rot="0" flipH="0" flipV="0">
+            <a:off x="9124950" y="2724150"/>
+            <a:ext cx="2305050" cy="504825"/>
           </a:xfrm>
           <a:prstGeom prst="rect"/>
         </p:spPr>
@@ -5822,7 +6044,7 @@
               </a:lnSpc>
             </a:pPr>
             <a:r>
-              <a:rPr lang="en-US" sz="3600">
+              <a:rPr lang="en-US" sz="3300">
                 <a:solidFill>
                   <a:srgbClr val="FBFCFA"/>
                 </a:solidFill>
@@ -5837,14 +6059,14 @@
       </p:sp>
       <p:sp>
         <p:nvSpPr>
-          <p:cNvPr id="118" name="" descr="{&quot;isTemplate&quot;:true,&quot;type&quot;:&quot;text&quot;}"/>
-          <p:cNvSpPr txBox="1"/>
-          <p:nvPr/>
-        </p:nvSpPr>
-        <p:spPr>
-          <a:xfrm rot="0" flipH="0" flipV="0">
-            <a:off x="8239125" y="3381375"/>
-            <a:ext cx="3152775" cy="247650"/>
+          <p:cNvPr id="125" name="" descr="{&quot;isTemplate&quot;:true,&quot;type&quot;:&quot;text&quot;}"/>
+          <p:cNvSpPr txBox="1"/>
+          <p:nvPr/>
+        </p:nvSpPr>
+        <p:spPr>
+          <a:xfrm rot="0" flipH="0" flipV="0">
+            <a:off x="9124950" y="3343275"/>
+            <a:ext cx="2305050" cy="247650"/>
           </a:xfrm>
           <a:prstGeom prst="rect"/>
         </p:spPr>
@@ -5898,26 +6120,26 @@
       </p:sp>
       <p:sp>
         <p:nvSpPr>
-          <p:cNvPr id="119" name=""/>
+          <p:cNvPr id="126" name=""/>
           <p:cNvSpPr/>
           <p:nvPr/>
         </p:nvSpPr>
         <p:spPr>
           <a:xfrm rot="0" flipH="0" flipV="0">
-            <a:off x="8239125" y="3762375"/>
-            <a:ext cx="3152775" cy="314325"/>
+            <a:off x="9124950" y="3705225"/>
+            <a:ext cx="2305050" cy="314325"/>
           </a:xfrm>
           <a:custGeom>
             <a:pathLst>
-              <a:path w="331" h="33">
+              <a:path w="242" h="33">
                 <a:moveTo>
                   <a:pt x="0" y="0"/>
                 </a:moveTo>
                 <a:lnTo>
-                  <a:pt x="331" y="0"/>
+                  <a:pt x="242" y="0"/>
                 </a:lnTo>
                 <a:lnTo>
-                  <a:pt x="331" y="1"/>
+                  <a:pt x="242" y="1"/>
                 </a:lnTo>
                 <a:lnTo>
                   <a:pt x="0" y="1"/>
@@ -5940,14 +6162,14 @@
       </p:sp>
       <p:sp>
         <p:nvSpPr>
-          <p:cNvPr id="120" name="" descr="{&quot;isTemplate&quot;:true,&quot;type&quot;:&quot;text&quot;}"/>
-          <p:cNvSpPr txBox="1"/>
-          <p:nvPr/>
-        </p:nvSpPr>
-        <p:spPr>
-          <a:xfrm rot="0" flipH="0" flipV="0">
-            <a:off x="8239125" y="3848100"/>
-            <a:ext cx="3152775" cy="142875"/>
+          <p:cNvPr id="127" name="" descr="{&quot;isTemplate&quot;:true,&quot;type&quot;:&quot;text&quot;}"/>
+          <p:cNvSpPr txBox="1"/>
+          <p:nvPr/>
+        </p:nvSpPr>
+        <p:spPr>
+          <a:xfrm rot="0" flipH="0" flipV="0">
+            <a:off x="9124950" y="3790950"/>
+            <a:ext cx="2305050" cy="142875"/>
           </a:xfrm>
           <a:prstGeom prst="rect"/>
         </p:spPr>
@@ -6005,7 +6227,7 @@
       </p:sp>
       <p:sp>
         <p:nvSpPr>
-          <p:cNvPr id="121" name=""/>
+          <p:cNvPr id="128" name=""/>
           <p:cNvSpPr/>
           <p:nvPr/>
         </p:nvSpPr>
@@ -6066,7 +6288,7 @@
       </p:sp>
       <p:sp>
         <p:nvSpPr>
-          <p:cNvPr id="122" name=""/>
+          <p:cNvPr id="129" name=""/>
           <p:cNvSpPr/>
           <p:nvPr/>
         </p:nvSpPr>
@@ -6106,7 +6328,7 @@
       </p:sp>
       <p:sp>
         <p:nvSpPr>
-          <p:cNvPr id="123" name="" descr="{&quot;isTemplate&quot;:true,&quot;type&quot;:&quot;text&quot;}"/>
+          <p:cNvPr id="130" name="" descr="{&quot;isTemplate&quot;:true,&quot;type&quot;:&quot;text&quot;}"/>
           <p:cNvSpPr txBox="1"/>
           <p:nvPr/>
         </p:nvSpPr>
@@ -6165,7 +6387,7 @@
                 <a:latin typeface="Microsoft YaHei"/>
                 <a:ea typeface="Microsoft YaHei"/>
               </a:rPr>
-              <a:t> 50% → 100% </a:t>
+              <a:t> 50% → 100%</a:t>
             </a:r>
             <a:r>
               <a:rPr lang="zh-CN" sz="1050">
@@ -6175,7 +6397,7 @@
                 <a:latin typeface="Microsoft YaHei"/>
                 <a:ea typeface="Microsoft YaHei"/>
               </a:rPr>
-              <a:t>不是换模型，而是发现「评估指标用脆弱子串匹配」的缺陷，改为「关键词覆盖度」评估，并优化答案生成</a:t>
+              <a:t>，源于发现「评估指标用脆弱子串匹配」并改为「关键词覆盖度」、同时优化答案生成</a:t>
             </a:r>
             <a:r>
               <a:rPr lang="en-US" sz="1050">
@@ -6215,15 +6437,95 @@
                 <a:latin typeface="Microsoft YaHei"/>
                 <a:ea typeface="Microsoft YaHei"/>
               </a:rPr>
-              <a:t>，用数据证明修复。</a:t>
-            </a:r>
-            <a:endParaRPr/>
-          </a:p>
-        </p:txBody>
-      </p:sp>
-      <p:sp>
-        <p:nvSpPr>
-          <p:cNvPr id="124" name="" descr="{&quot;isTemplate&quot;:true,&quot;type&quot;:&quot;text&quot;}"/>
+              <a:t>，用数据证明修复。工具选择</a:t>
+            </a:r>
+            <a:r>
+              <a:rPr lang="en-US" sz="1050">
+                <a:solidFill>
+                  <a:srgbClr val="172133"/>
+                </a:solidFill>
+                <a:latin typeface="Microsoft YaHei"/>
+                <a:ea typeface="Microsoft YaHei"/>
+              </a:rPr>
+              <a:t> / </a:t>
+            </a:r>
+            <a:r>
+              <a:rPr lang="zh-CN" sz="1050">
+                <a:solidFill>
+                  <a:srgbClr val="172133"/>
+                </a:solidFill>
+                <a:latin typeface="Microsoft YaHei"/>
+                <a:ea typeface="Microsoft YaHei"/>
+              </a:rPr>
+              <a:t>参数提取</a:t>
+            </a:r>
+            <a:r>
+              <a:rPr lang="en-US" sz="1050">
+                <a:solidFill>
+                  <a:srgbClr val="172133"/>
+                </a:solidFill>
+                <a:latin typeface="Microsoft YaHei"/>
+                <a:ea typeface="Microsoft YaHei"/>
+              </a:rPr>
+              <a:t> / </a:t>
+            </a:r>
+            <a:r>
+              <a:rPr lang="zh-CN" sz="1050">
+                <a:solidFill>
+                  <a:srgbClr val="172133"/>
+                </a:solidFill>
+                <a:latin typeface="Microsoft YaHei"/>
+                <a:ea typeface="Microsoft YaHei"/>
+              </a:rPr>
+              <a:t>工作流三项指标受「报修多轮交互」设计影响（用例按单轮设计，实际走</a:t>
+            </a:r>
+            <a:r>
+              <a:rPr lang="en-US" sz="1050">
+                <a:solidFill>
+                  <a:srgbClr val="172133"/>
+                </a:solidFill>
+                <a:latin typeface="Microsoft YaHei"/>
+                <a:ea typeface="Microsoft YaHei"/>
+              </a:rPr>
+              <a:t> pending_repair </a:t>
+            </a:r>
+            <a:r>
+              <a:rPr lang="zh-CN" sz="1050">
+                <a:solidFill>
+                  <a:srgbClr val="172133"/>
+                </a:solidFill>
+                <a:latin typeface="Microsoft YaHei"/>
+                <a:ea typeface="Microsoft YaHei"/>
+              </a:rPr>
+              <a:t>多轮），已定位为评估框架升级项，而非</a:t>
+            </a:r>
+            <a:r>
+              <a:rPr lang="en-US" sz="1050">
+                <a:solidFill>
+                  <a:srgbClr val="172133"/>
+                </a:solidFill>
+                <a:latin typeface="Microsoft YaHei"/>
+                <a:ea typeface="Microsoft YaHei"/>
+              </a:rPr>
+              <a:t> Agent </a:t>
+            </a:r>
+            <a:r>
+              <a:rPr lang="zh-CN" sz="1050">
+                <a:solidFill>
+                  <a:srgbClr val="172133"/>
+                </a:solidFill>
+                <a:latin typeface="Microsoft YaHei"/>
+                <a:ea typeface="Microsoft YaHei"/>
+              </a:rPr>
+              <a:t>缺陷。</a:t>
+            </a:r>
+            <a:endParaRPr/>
+          </a:p>
+        </p:txBody>
+      </p:sp>
+      <p:sp>
+        <p:nvSpPr>
+          <p:cNvPr id="131" name="" descr="{&quot;isTemplate&quot;:true,&quot;type&quot;:&quot;text&quot;}"/>
           <p:cNvSpPr txBox="1"/>
           <p:nvPr/>
         </p:nvSpPr>
@@ -6278,7 +6580,7 @@
       </p:sp>
       <p:sp>
         <p:nvSpPr>
-          <p:cNvPr id="125" name="" descr="{&quot;isTemplate&quot;:true,&quot;type&quot;:&quot;text&quot;}"/>
+          <p:cNvPr id="132" name="" descr="{&quot;isTemplate&quot;:true,&quot;type&quot;:&quot;text&quot;}"/>
           <p:cNvSpPr txBox="1"/>
           <p:nvPr/>
         </p:nvSpPr>
@@ -6321,7 +6623,7 @@
   <p:cSld>
     <p:spTree>
       <p:nvGrpSpPr>
-        <p:cNvPr id="126" name="" descr="&lt;Slide style={{ width: '1280px', height: '720px', background: '#FBFCFA', position: 'relative', padding: '34px 64px', boxSizing: 'border-box', display: 'flex', flexDirection: 'column' }}&gt;&#10;  &lt;div style={{ flexShrink: 0 }}&gt;&#10;    &lt;div style={{ color: '#BD9B56', fontSize: 13, letterSpacing: '0.25em', marginBottom: 6 }}&gt;04 · 总结与展望&lt;/div&gt;&#10;    &lt;h2 style={{ fontSize: 30, fontWeight: 'bold', color: '#172133', margin: 0, lineHeight: 1.3 }}&gt;技术路线回顾：七个阶段 · 从 0 到上线&lt;/h2&gt;&#10;    &lt;div style={{ fontSize: 14, color: '#6b7075', marginTop: 6 }}&gt;每个阶段都有代码、测试、可运行交付，循序渐进验证&lt;/div&gt;&#10;  &lt;/div&gt;&#10;  &lt;div style={{ flex: 1, display: 'flex', alignItems: 'center', justifyContent: 'center' }}&gt;&#10;    &lt;div style={{ width: '100%', background: '#fff', borderRadius: 12, padding: '28px 30px', boxShadow: '0 6px 24px rgba(23,33,51,0.08)' }}&gt;&#10;      &lt;svg width=&quot;1090&quot; height=&quot;330&quot; viewBox=&quot;0 0 1090 330&quot;&gt;&#10;        &lt;g fontFamily=&quot;Inter, sans-serif&quot;&gt;&#10;          &lt;line x1=&quot;55&quot; y1=&quot;50&quot; x2=&quot;1045&quot; y2=&quot;50&quot; stroke=&quot;#22395E&quot; strokeWidth=&quot;2.5&quot; /&gt;&#10;          {[&#10;            ['P0', '项目初始化', '仓库 · Docker · CI'],&#10;            ['P1', '数据库', '15+ 表 + 仿真数据'],&#10;            ['P2', '后端', 'FastAPI 分层'],&#10;            ['P3', '前端', '三端 + PWA'],&#10;            ['P4', 'AI Agent', '多意图 + 状态机'],&#10;            ['P5', 'RAG', '向量化检索'],&#10;            ['P6', '评估', 'Intent/Tool/RAG'],&#10;            ['P7', '部署', '已上线'],&#10;          ].map(([p, t, d], i) =&gt; (&#10;            &lt;g key={p}&gt;&#10;              &lt;circle cx={55 + i * 140} cy={50} r=&quot;10&quot; fill=&quot;#BD9B56&quot; /&gt;&#10;              &lt;text x={55 + i * 140} y={22} textAnchor=&quot;middle&quot; fontSize=&quot;13&quot; fontWeight=&quot;bold&quot; fill=&quot;#BD9B56&quot;&gt;{p}&lt;/text&gt;&#10;              &lt;rect x={55 + i * 140 - 58} y={80} width=&quot;116&quot; height=&quot;56&quot; rx=&quot;8&quot; fill=&quot;rgba(34,57,94,0.06)&quot; stroke=&quot;#22395E&quot; strokeWidth=&quot;1.5&quot; /&gt;&#10;              &lt;text x={55 + i * 140} y={112} textAnchor=&quot;middle&quot; fontSize=&quot;14&quot; fontWeight=&quot;bold&quot; fill=&quot;#172133&quot;&gt;{t}&lt;/text&gt;&#10;              &lt;text x={55 + i * 140} y={150} textAnchor=&quot;middle&quot; fontSize=&quot;11&quot; fill=&quot;#5F5E5A&quot;&gt;{d}&lt;/text&gt;&#10;            &lt;/g&gt;&#10;          ))}&#10;          &lt;text x=&quot;55&quot; y=&quot;220&quot; fontSize=&quot;12&quot; fill=&quot;#5F5E5A&quot;&gt;交付：可运行骨架&lt;/text&gt;&#10;          &lt;text x=&quot;195&quot; y=&quot;220&quot; fontSize=&quot;12&quot; fill=&quot;#5F5E5A&quot;&gt;交付：数据就绪&lt;/text&gt;&#10;          &lt;text x=&quot;335&quot; y=&quot;220&quot; fontSize=&quot;12&quot; fill=&quot;#5F5E5A&quot;&gt;交付：API 可调用&lt;/text&gt;&#10;          &lt;text x=&quot;475&quot; y=&quot;220&quot; fontSize=&quot;12&quot; fill=&quot;#5F5E5A&quot;&gt;交付：三端成型&lt;/text&gt;&#10;          &lt;text x=&quot;615&quot; y=&quot;220&quot; fontSize=&quot;12&quot; fill=&quot;#5F5E5A&quot;&gt;交付：自然语言办事&lt;/text&gt;&#10;          &lt;text x=&quot;755&quot; y=&quot;220&quot; fontSize=&quot;12&quot; fill=&quot;#5F5E5A&quot;&gt;交付：知识问答&lt;/text&gt;&#10;          &lt;text x=&quot;895&quot; y=&quot;220&quot; fontSize=&quot;12&quot; fill=&quot;#5F5E5A&quot;&gt;交付：评估报告&lt;/text&gt;&#10;          &lt;text x=&quot;1035&quot; y=&quot;220&quot; fontSize=&quot;12&quot; fill=&quot;#5F5E5A&quot;&gt;交付：线上运行&lt;/text&gt;&#10;        &lt;/g&gt;&#10;      &lt;/svg&gt;&#10;      &lt;div style={{ marginTop: 14, display: 'flex', gap: 14 }}&gt;&#10;        &lt;div style={{ flex: 1, background: 'rgba(189,155,86,0.08)', borderRadius: 8, padding: '12px 14px' }}&gt;&#10;          &lt;div style={{ fontSize: 13, color: '#BD9B56', fontWeight: 'bold', marginBottom: 5 }}&gt;P1 数据一致性&lt;/div&gt;&#10;          &lt;p style={{ fontSize: 12, color: '#5F5E5A', margin: 0, lineHeight: 1.5 }}&gt;1664 套房源 + 746 账单，外键关联保证数据一致，8 个 SQL 可复现&lt;/p&gt;&#10;        &lt;/div&gt;&#10;        &lt;div style={{ flex: 1, background: 'rgba(189,155,86,0.08)', borderRadius: 8, padding: '12px 14px' }}&gt;&#10;          &lt;div style={{ fontSize: 13, color: '#BD9B56', fontWeight: 'bold', marginBottom: 5 }}&gt;P4 多轮状态机&lt;/div&gt;&#10;          &lt;p style={{ fontSize: 12, color: '#5F5E5A', margin: 0, lineHeight: 1.5 }}&gt;报修主动追问缺省字段，避免生成残缺工单&lt;/p&gt;&#10;        &lt;/div&gt;&#10;        &lt;div style={{ flex: 1, background: 'rgba(189,155,86,0.08)', borderRadius: 8, padding: '12px 14px' }}&gt;&#10;          &lt;div style={{ fontSize: 13, color: '#BD9B56', fontWeight: 'bold', marginBottom: 5 }}&gt;P6 评估找 bug&lt;/div&gt;&#10;          &lt;p style={{ fontSize: 12, color: '#5F5E5A', margin: 0, lineHeight: 1.5 }}&gt;意图 83%→100%、答案 50%→100%，数据驱动优化&lt;/p&gt;&#10;        &lt;/div&gt;&#10;        &lt;div style={{ flex: 1, background: 'rgba(189,155,86,0.08)', borderRadius: 8, padding: '12px 14px' }}&gt;&#10;          &lt;div style={{ fontSize: 13, color: '#BD9B56', fontWeight: 'bold', marginBottom: 5 }}&gt;P7 部署踩坑&lt;/div&gt;&#10;          &lt;p style={{ fontSize: 12, color: '#5F5E5A', margin: 0, lineHeight: 1.5 }}&gt;国内镜像源、SECRET_KEY、端口映射逐一踩平&lt;/p&gt;&#10;        &lt;/div&gt;&#10;      &lt;/div&gt;&#10;    &lt;/div&gt;&#10;  &lt;/div&gt;&#10;  &lt;div style={{ flexShrink: 0, height: 40, display: 'flex', alignItems: 'flex-end', justifyContent: 'space-between' }}&gt;&#10;    &lt;span style={{ color: '#BD9B56', fontSize: 12, letterSpacing: '0.1em' }}&gt;云溪花园 · 智慧社区&lt;/span&gt;&#10;    &lt;span style={{ color: '#a09b8c', fontSize: 12 }}&gt;13 / 15&lt;/span&gt;&#10;  &lt;/div&gt;&#10;&lt;/Slide&gt;"/>
+        <p:cNvPr id="133" name="" descr="&lt;Slide style={{ width: '1280px', height: '720px', background: '#FBFCFA', position: 'relative', padding: '34px 64px', boxSizing: 'border-box', display: 'flex', flexDirection: 'column' }}&gt;&#10;  &lt;div style={{ flexShrink: 0 }}&gt;&#10;    &lt;div style={{ color: '#BD9B56', fontSize: 13, letterSpacing: '0.25em', marginBottom: 6 }}&gt;04 · 总结与展望&lt;/div&gt;&#10;    &lt;h2 style={{ fontSize: 30, fontWeight: 'bold', color: '#172133', margin: 0, lineHeight: 1.3 }}&gt;技术路线回顾：七个阶段 · 从 0 到上线&lt;/h2&gt;&#10;    &lt;div style={{ fontSize: 14, color: '#6b7075', marginTop: 6 }}&gt;每个阶段都有代码、测试、可运行交付，循序渐进验证&lt;/div&gt;&#10;  &lt;/div&gt;&#10;  &lt;div style={{ flex: 1, display: 'flex', alignItems: 'center', justifyContent: 'center' }}&gt;&#10;    &lt;div style={{ width: '100%', background: '#fff', borderRadius: 12, padding: '28px 30px', boxShadow: '0 6px 24px rgba(23,33,51,0.08)' }}&gt;&#10;      &lt;svg width=&quot;1090&quot; height=&quot;330&quot; viewBox=&quot;0 0 1090 330&quot;&gt;&#10;        &lt;g fontFamily=&quot;Inter, sans-serif&quot;&gt;&#10;          &lt;line x1=&quot;55&quot; y1=&quot;50&quot; x2=&quot;1045&quot; y2=&quot;50&quot; stroke=&quot;#22395E&quot; strokeWidth=&quot;2.5&quot; /&gt;&#10;          {[&#10;            ['P0', '项目初始化', '仓库 · Docker · CI'],&#10;            ['P1', '数据库', '15+ 表 + 仿真数据'],&#10;            ['P2', '后端', 'FastAPI 分层'],&#10;            ['P3', '前端', '三端 + PWA'],&#10;            ['P4', 'AI Agent', '多意图 + 状态机'],&#10;            ['P5', 'RAG', '向量化检索'],&#10;            ['P6', '评估', 'Intent/Tool/RAG'],&#10;            ['P7', '部署', '已上线'],&#10;          ].map(([p, t, d], i) =&gt; (&#10;            &lt;g key={p}&gt;&#10;              &lt;circle cx={55 + i * 140} cy={50} r=&quot;10&quot; fill=&quot;#BD9B56&quot; /&gt;&#10;              &lt;text x={55 + i * 140} y={22} textAnchor=&quot;middle&quot; fontSize=&quot;13&quot; fontWeight=&quot;bold&quot; fill=&quot;#BD9B56&quot;&gt;{p}&lt;/text&gt;&#10;              &lt;rect x={55 + i * 140 - 58} y={80} width=&quot;116&quot; height=&quot;56&quot; rx=&quot;8&quot; fill=&quot;rgba(34,57,94,0.06)&quot; stroke=&quot;#22395E&quot; strokeWidth=&quot;1.5&quot; /&gt;&#10;              &lt;text x={55 + i * 140} y={112} textAnchor=&quot;middle&quot; fontSize=&quot;14&quot; fontWeight=&quot;bold&quot; fill=&quot;#172133&quot;&gt;{t}&lt;/text&gt;&#10;              &lt;text x={55 + i * 140} y={150} textAnchor=&quot;middle&quot; fontSize=&quot;11&quot; fill=&quot;#5F5E5A&quot;&gt;{d}&lt;/text&gt;&#10;            &lt;/g&gt;&#10;          ))}&#10;          &lt;text x=&quot;55&quot; y=&quot;220&quot; fontSize=&quot;12&quot; fill=&quot;#5F5E5A&quot;&gt;交付：可运行骨架&lt;/text&gt;&#10;          &lt;text x=&quot;195&quot; y=&quot;220&quot; fontSize=&quot;12&quot; fill=&quot;#5F5E5A&quot;&gt;交付：数据就绪&lt;/text&gt;&#10;          &lt;text x=&quot;335&quot; y=&quot;220&quot; fontSize=&quot;12&quot; fill=&quot;#5F5E5A&quot;&gt;交付：API 可调用&lt;/text&gt;&#10;          &lt;text x=&quot;475&quot; y=&quot;220&quot; fontSize=&quot;12&quot; fill=&quot;#5F5E5A&quot;&gt;交付：三端成型&lt;/text&gt;&#10;          &lt;text x=&quot;615&quot; y=&quot;220&quot; fontSize=&quot;12&quot; fill=&quot;#5F5E5A&quot;&gt;交付：自然语言办事&lt;/text&gt;&#10;          &lt;text x=&quot;755&quot; y=&quot;220&quot; fontSize=&quot;12&quot; fill=&quot;#5F5E5A&quot;&gt;交付：知识问答&lt;/text&gt;&#10;          &lt;text x=&quot;895&quot; y=&quot;220&quot; fontSize=&quot;12&quot; fill=&quot;#5F5E5A&quot;&gt;交付：评估报告&lt;/text&gt;&#10;          &lt;text x=&quot;1035&quot; y=&quot;220&quot; fontSize=&quot;12&quot; fill=&quot;#5F5E5A&quot;&gt;交付：线上运行&lt;/text&gt;&#10;        &lt;/g&gt;&#10;      &lt;/svg&gt;&#10;      &lt;div style={{ marginTop: 14, display: 'flex', gap: 14 }}&gt;&#10;        &lt;div style={{ flex: 1, background: 'rgba(189,155,86,0.08)', borderRadius: 8, padding: '12px 14px' }}&gt;&#10;          &lt;div style={{ fontSize: 13, color: '#BD9B56', fontWeight: 'bold', marginBottom: 5 }}&gt;P1 数据一致性&lt;/div&gt;&#10;          &lt;p style={{ fontSize: 12, color: '#5F5E5A', margin: 0, lineHeight: 1.5 }}&gt;1664 套房源 + 746 账单，外键关联保证数据一致，8 个 SQL 可复现&lt;/p&gt;&#10;        &lt;/div&gt;&#10;        &lt;div style={{ flex: 1, background: 'rgba(189,155,86,0.08)', borderRadius: 8, padding: '12px 14px' }}&gt;&#10;          &lt;div style={{ fontSize: 13, color: '#BD9B56', fontWeight: 'bold', marginBottom: 5 }}&gt;P4 多轮状态机&lt;/div&gt;&#10;          &lt;p style={{ fontSize: 12, color: '#5F5E5A', margin: 0, lineHeight: 1.5 }}&gt;报修主动追问缺省字段，避免生成残缺工单&lt;/p&gt;&#10;        &lt;/div&gt;&#10;        &lt;div style={{ flex: 1, background: 'rgba(189,155,86,0.08)', borderRadius: 8, padding: '12px 14px' }}&gt;&#10;          &lt;div style={{ fontSize: 13, color: '#BD9B56', fontWeight: 'bold', marginBottom: 5 }}&gt;P6 评估找 bug&lt;/div&gt;&#10;          &lt;p style={{ fontSize: 12, color: '#5F5E5A', margin: 0, lineHeight: 1.5 }}&gt;意图 83%→100%、答案 50%→100%，数据驱动优化&lt;/p&gt;&#10;        &lt;/div&gt;&#10;        &lt;div style={{ flex: 1, background: 'rgba(189,155,86,0.08)', borderRadius: 8, padding: '12px 14px' }}&gt;&#10;          &lt;div style={{ fontSize: 13, color: '#BD9B56', fontWeight: 'bold', marginBottom: 5 }}&gt;P7 部署踩坑&lt;/div&gt;&#10;          &lt;p style={{ fontSize: 12, color: '#5F5E5A', margin: 0, lineHeight: 1.5 }}&gt;国内镜像源、SECRET_KEY、端口映射逐一踩平&lt;/p&gt;&#10;        &lt;/div&gt;&#10;      &lt;/div&gt;&#10;    &lt;/div&gt;&#10;  &lt;/div&gt;&#10;  &lt;div style={{ flexShrink: 0, height: 40, display: 'flex', alignItems: 'flex-end', justifyContent: 'space-between' }}&gt;&#10;    &lt;span style={{ color: '#BD9B56', fontSize: 12, letterSpacing: '0.1em' }}&gt;云溪花园 · 智慧社区&lt;/span&gt;&#10;    &lt;span style={{ color: '#a09b8c', fontSize: 12 }}&gt;13 / 15&lt;/span&gt;&#10;  &lt;/div&gt;&#10;&lt;/Slide&gt;"/>
         <p:cNvGrpSpPr/>
         <p:nvPr/>
       </p:nvGrpSpPr>
@@ -6335,7 +6637,7 @@
       </p:grpSpPr>
       <p:sp>
         <p:nvSpPr>
-          <p:cNvPr id="127" name=""/>
+          <p:cNvPr id="134" name=""/>
           <p:cNvSpPr/>
           <p:nvPr/>
         </p:nvSpPr>
@@ -6359,7 +6661,7 @@
       </p:sp>
       <p:sp>
         <p:nvSpPr>
-          <p:cNvPr id="128" name="" descr="{&quot;isTemplate&quot;:true,&quot;type&quot;:&quot;text&quot;}"/>
+          <p:cNvPr id="135" name="" descr="{&quot;isTemplate&quot;:true,&quot;type&quot;:&quot;text&quot;}"/>
           <p:cNvSpPr txBox="1"/>
           <p:nvPr/>
         </p:nvSpPr>
@@ -6404,7 +6706,7 @@
       </p:sp>
       <p:sp>
         <p:nvSpPr>
-          <p:cNvPr id="129" name="" descr="{&quot;isTemplate&quot;:true,&quot;type&quot;:&quot;text&quot;}"/>
+          <p:cNvPr id="136" name="" descr="{&quot;isTemplate&quot;:true,&quot;type&quot;:&quot;text&quot;}"/>
           <p:cNvSpPr txBox="1"/>
           <p:nvPr/>
         </p:nvSpPr>
@@ -6479,7 +6781,7 @@
       </p:sp>
       <p:sp>
         <p:nvSpPr>
-          <p:cNvPr id="130" name="" descr="{&quot;isTemplate&quot;:true,&quot;type&quot;:&quot;text&quot;}"/>
+          <p:cNvPr id="137" name="" descr="{&quot;isTemplate&quot;:true,&quot;type&quot;:&quot;text&quot;}"/>
           <p:cNvSpPr txBox="1"/>
           <p:nvPr/>
         </p:nvSpPr>
@@ -6514,7 +6816,7 @@
       </p:sp>
       <p:sp>
         <p:nvSpPr>
-          <p:cNvPr id="131" name=""/>
+          <p:cNvPr id="138" name=""/>
           <p:cNvSpPr/>
           <p:nvPr/>
         </p:nvSpPr>
@@ -6547,7 +6849,7 @@
       </p:sp>
       <p:pic>
         <p:nvPicPr>
-          <p:cNvPr id="132" name=""/>
+          <p:cNvPr id="139" name=""/>
           <p:cNvPicPr>
             <a:picLocks noChangeAspect="1"/>
           </p:cNvPicPr>
@@ -6578,7 +6880,7 @@
       </p:pic>
       <p:sp>
         <p:nvSpPr>
-          <p:cNvPr id="133" name=""/>
+          <p:cNvPr id="140" name=""/>
           <p:cNvSpPr/>
           <p:nvPr/>
         </p:nvSpPr>
@@ -6606,7 +6908,7 @@
       </p:sp>
       <p:sp>
         <p:nvSpPr>
-          <p:cNvPr id="134" name="" descr="{&quot;isTemplate&quot;:true,&quot;type&quot;:&quot;text&quot;}"/>
+          <p:cNvPr id="141" name="" descr="{&quot;isTemplate&quot;:true,&quot;type&quot;:&quot;text&quot;}"/>
           <p:cNvSpPr txBox="1"/>
           <p:nvPr/>
         </p:nvSpPr>
@@ -6651,7 +6953,7 @@
       </p:sp>
       <p:sp>
         <p:nvSpPr>
-          <p:cNvPr id="135" name="" descr="{&quot;isTemplate&quot;:true,&quot;type&quot;:&quot;text&quot;}"/>
+          <p:cNvPr id="142" name="" descr="{&quot;isTemplate&quot;:true,&quot;type&quot;:&quot;text&quot;}"/>
           <p:cNvSpPr txBox="1"/>
           <p:nvPr/>
         </p:nvSpPr>
@@ -6758,7 +7060,7 @@
       </p:sp>
       <p:sp>
         <p:nvSpPr>
-          <p:cNvPr id="136" name=""/>
+          <p:cNvPr id="143" name=""/>
           <p:cNvSpPr/>
           <p:nvPr/>
         </p:nvSpPr>
@@ -6786,7 +7088,7 @@
       </p:sp>
       <p:sp>
         <p:nvSpPr>
-          <p:cNvPr id="137" name="" descr="{&quot;isTemplate&quot;:true,&quot;type&quot;:&quot;text&quot;}"/>
+          <p:cNvPr id="144" name="" descr="{&quot;isTemplate&quot;:true,&quot;type&quot;:&quot;text&quot;}"/>
           <p:cNvSpPr txBox="1"/>
           <p:nvPr/>
         </p:nvSpPr>
@@ -6831,7 +7133,7 @@
       </p:sp>
       <p:sp>
         <p:nvSpPr>
-          <p:cNvPr id="138" name="" descr="{&quot;isTemplate&quot;:true,&quot;type&quot;:&quot;text&quot;}"/>
+          <p:cNvPr id="145" name="" descr="{&quot;isTemplate&quot;:true,&quot;type&quot;:&quot;text&quot;}"/>
           <p:cNvSpPr txBox="1"/>
           <p:nvPr/>
         </p:nvSpPr>
@@ -6866,7 +7168,7 @@
       </p:sp>
       <p:sp>
         <p:nvSpPr>
-          <p:cNvPr id="139" name=""/>
+          <p:cNvPr id="146" name=""/>
           <p:cNvSpPr/>
           <p:nvPr/>
         </p:nvSpPr>
@@ -6894,7 +7196,7 @@
       </p:sp>
       <p:sp>
         <p:nvSpPr>
-          <p:cNvPr id="140" name="" descr="{&quot;isTemplate&quot;:true,&quot;type&quot;:&quot;text&quot;}"/>
+          <p:cNvPr id="147" name="" descr="{&quot;isTemplate&quot;:true,&quot;type&quot;:&quot;text&quot;}"/>
           <p:cNvSpPr txBox="1"/>
           <p:nvPr/>
         </p:nvSpPr>
@@ -6949,7 +7251,7 @@
       </p:sp>
       <p:sp>
         <p:nvSpPr>
-          <p:cNvPr id="141" name="" descr="{&quot;isTemplate&quot;:true,&quot;type&quot;:&quot;text&quot;}"/>
+          <p:cNvPr id="148" name="" descr="{&quot;isTemplate&quot;:true,&quot;type&quot;:&quot;text&quot;}"/>
           <p:cNvSpPr txBox="1"/>
           <p:nvPr/>
         </p:nvSpPr>
@@ -7026,7 +7328,7 @@
       </p:sp>
       <p:sp>
         <p:nvSpPr>
-          <p:cNvPr id="142" name=""/>
+          <p:cNvPr id="149" name=""/>
           <p:cNvSpPr/>
           <p:nvPr/>
         </p:nvSpPr>
@@ -7054,7 +7356,7 @@
       </p:sp>
       <p:sp>
         <p:nvSpPr>
-          <p:cNvPr id="143" name="" descr="{&quot;isTemplate&quot;:true,&quot;type&quot;:&quot;text&quot;}"/>
+          <p:cNvPr id="150" name="" descr="{&quot;isTemplate&quot;:true,&quot;type&quot;:&quot;text&quot;}"/>
           <p:cNvSpPr txBox="1"/>
           <p:nvPr/>
         </p:nvSpPr>
@@ -7099,7 +7401,7 @@
       </p:sp>
       <p:sp>
         <p:nvSpPr>
-          <p:cNvPr id="144" name="" descr="{&quot;isTemplate&quot;:true,&quot;type&quot;:&quot;text&quot;}"/>
+          <p:cNvPr id="151" name="" descr="{&quot;isTemplate&quot;:true,&quot;type&quot;:&quot;text&quot;}"/>
           <p:cNvSpPr txBox="1"/>
           <p:nvPr/>
         </p:nvSpPr>
@@ -7156,7 +7458,7 @@
       </p:sp>
       <p:sp>
         <p:nvSpPr>
-          <p:cNvPr id="145" name="" descr="{&quot;isTemplate&quot;:true,&quot;type&quot;:&quot;text&quot;}"/>
+          <p:cNvPr id="152" name="" descr="{&quot;isTemplate&quot;:true,&quot;type&quot;:&quot;text&quot;}"/>
           <p:cNvSpPr txBox="1"/>
           <p:nvPr/>
         </p:nvSpPr>
@@ -7211,7 +7513,7 @@
       </p:sp>
       <p:sp>
         <p:nvSpPr>
-          <p:cNvPr id="146" name="" descr="{&quot;isTemplate&quot;:true,&quot;type&quot;:&quot;text&quot;}"/>
+          <p:cNvPr id="153" name="" descr="{&quot;isTemplate&quot;:true,&quot;type&quot;:&quot;text&quot;}"/>
           <p:cNvSpPr txBox="1"/>
           <p:nvPr/>
         </p:nvSpPr>
@@ -7254,7 +7556,7 @@
   <p:cSld>
     <p:spTree>
       <p:nvGrpSpPr>
-        <p:cNvPr id="147" name="" descr="&lt;Slide style={{ width: '1280px', height: '720px', background: '#FBFCFA', position: 'relative', padding: '34px 64px', boxSizing: 'border-box', display: 'flex', flexDirection: 'column' }}&gt;&#10;  &lt;div style={{ flexShrink: 0 }}&gt;&#10;    &lt;div style={{ color: '#BD9B56', fontSize: 13, letterSpacing: '0.25em', marginBottom: 6 }}&gt;04 · 总结与展望&lt;/div&gt;&#10;    &lt;h2 style={{ fontSize: 30, fontWeight: 'bold', color: '#172133', margin: 0, lineHeight: 1.3 }}&gt;总结与展望&lt;/h2&gt;&#10;  &lt;/div&gt;&#10;  &lt;div style={{ flex: 1, display: 'flex', alignItems: 'center', justifyContent: 'center', gap: 30 }}&gt;&#10;    &lt;div style={{ flex: 1, background: '#fff', borderRadius: 12, padding: '26px 28px', boxShadow: '0 6px 24px rgba(23,33,51,0.08)', display: 'flex', flexDirection: 'column', gap: 14 }}&gt;&#10;      &lt;div&gt;&#10;        &lt;div style={{ fontSize: 14, color: '#BD9B56', fontWeight: 'bold', letterSpacing: '0.1em', marginBottom: 8 }}&gt;项目成果&lt;/div&gt;&#10;        &lt;p style={{ fontSize: 14, color: '#5F5E5A', margin: 0, lineHeight: 1.7 }}&gt;从数据库设计起步，完整构建可运行的 AI 物业社区平台——三端应用、多意图 AI 助手、RAG 知识库、三条业务闭环、量化评估、CI/CD 部署全部落地。&lt;/p&gt;&#10;      &lt;/div&gt;&#10;      &lt;div style={{ display: 'flex', gap: 14 }}&gt;&#10;        &lt;div style={{ flex: 1, background: 'rgba(189,155,86,0.08)', borderRadius: 8, padding: '12px 14px' }}&gt;&#10;          &lt;div style={{ fontSize: 22, fontWeight: 'bold', color: '#BD9B56', fontFamily: 'Inter, sans-serif' }}&gt;100%&lt;/div&gt;&#10;          &lt;div style={{ fontSize: 12, color: '#5F5E5A', marginTop: 4 }}&gt;意图 / RAG 召回 / 答案准确率&lt;/div&gt;&#10;        &lt;/div&gt;&#10;        &lt;div style={{ flex: 1, background: 'rgba(189,155,86,0.08)', borderRadius: 8, padding: '12px 14px' }}&gt;&#10;          &lt;div style={{ fontSize: 22, fontWeight: 'bold', color: '#BD9B56', fontFamily: 'Inter, sans-serif' }}&gt;113+30&lt;/div&gt;&#10;          &lt;div style={{ fontSize: 12, color: '#5F5E5A', marginTop: 4 }}&gt;后端 + 前端测试全绿&lt;/div&gt;&#10;        &lt;/div&gt;&#10;        &lt;div style={{ flex: 1, background: 'rgba(189,155,86,0.08)', borderRadius: 8, padding: '12px 14px' }}&gt;&#10;          &lt;div style={{ fontSize: 22, fontWeight: 'bold', color: '#BD9B56', fontFamily: 'Inter, sans-serif' }}&gt;7 阶段&lt;/div&gt;&#10;          &lt;div style={{ fontSize: 12, color: '#5F5E5A', marginTop: 4 }}&gt;Phase 0-7 全部完成&lt;/div&gt;&#10;        &lt;/div&gt;&#10;      &lt;/div&gt;&#10;      &lt;div&gt;&#10;        &lt;div style={{ fontSize: 14, color: '#BD9B56', fontWeight: 'bold', letterSpacing: '0.1em', marginBottom: 8 }}&gt;技术栈&lt;/div&gt;&#10;        &lt;div style={{ fontSize: 13, color: '#5F5E5A', lineHeight: 1.8 }}&gt;React + TypeScript + Tailwind · FastAPI + SQLAlchemy + LangGraph · PostgreSQL + pgvector · 智谱 GLM-4-Flash&lt;/div&gt;&#10;      &lt;/div&gt;&#10;      &lt;div&gt;&#10;        &lt;div style={{ fontSize: 14, color: '#BD9B56', fontWeight: 'bold', letterSpacing: '0.1em', marginBottom: 8 }}&gt;未来展望&lt;/div&gt;&#10;        &lt;div style={{ fontSize: 13, color: '#5F5E5A', lineHeight: 1.8 }}&gt;IoT 设备接入 · 语音助手 · 多社区平台化（SaaS）&lt;/div&gt;&#10;      &lt;/div&gt;&#10;    &lt;/div&gt;&#10;    &lt;div style={{ flex: '0 0 360px', background: 'linear-gradient(135deg, #172133 0%, #22395E 100%)', borderRadius: 12, padding: '26px 26px', color: '#FBFCFA', display: 'flex', flexDirection: 'column', gap: 16 }}&gt;&#10;      &lt;div style={{ color: '#BD9B56', fontSize: 13, letterSpacing: '0.25em' }}&gt;ONLINE DEMO&lt;/div&gt;&#10;      &lt;div style={{ fontSize: 19, fontFamily: 'Inter, sans-serif', lineHeight: 1.5 }}&gt;http://119.91.236.85&lt;/div&gt;&#10;      &lt;div style={{ fontSize: 13, color: 'rgba(251,252,250,0.75)', lineHeight: 1.8 }}&gt;&#10;        业主 guoyi378&lt;br/&gt;物业 mayun420&lt;br/&gt;维修 yangfei423&lt;br/&gt;&lt;span style={{ color: '#BD9B56' }}&gt;密码均为 123456&lt;/span&gt;&#10;      &lt;/div&gt;&#10;      &lt;div style={{ paddingTop: 16, borderTop: '1px solid rgba(189,155,86,0.3)', fontSize: 12, color: 'rgba(251,252,250,0.6)', lineHeight: 1.7 }}&gt;&#10;        GitHub：Xuuuukkk/ai-property-community-agent&lt;br/&gt;MIT License&#10;      &lt;/div&gt;&#10;    &lt;/div&gt;&#10;  &lt;/div&gt;&#10;  &lt;div style={{ flexShrink: 0, height: 40, display: 'flex', alignItems: 'flex-end', justifyContent: 'space-between' }}&gt;&#10;    &lt;span style={{ color: '#BD9B56', fontSize: 12, letterSpacing: '0.1em' }}&gt;云溪花园 · 智慧社区&lt;/span&gt;&#10;    &lt;span style={{ color: '#a09b8c', fontSize: 12 }}&gt;14 / 15&lt;/span&gt;&#10;  &lt;/div&gt;&#10;&lt;/Slide&gt;"/>
+        <p:cNvPr id="154" name="" descr="&lt;Slide style={{ width: '1280px', height: '720px', background: '#FBFCFA', position: 'relative', padding: '32px 60px', boxSizing: 'border-box', display: 'flex', flexDirection: 'column' }}&gt;&#10;  &lt;div style={{ flexShrink: 0 }}&gt;&#10;    &lt;div style={{ color: '#BD9B56', fontSize: 13, letterSpacing: '0.25em', marginBottom: 6 }}&gt;04 · 总结与展望&lt;/div&gt;&#10;    &lt;h2 style={{ fontSize: 29, fontWeight: 'bold', color: '#172133', margin: 0, lineHeight: 1.3 }}&gt;三端应用 + 自维护自更新，AI 物业社区落地&lt;/h2&gt;&#10;  &lt;/div&gt;&#10;  &lt;div style={{ flex: 1, display: 'flex', alignItems: 'stretch', gap: 26 }}&gt;&#10;    {/* 左栏：三端功能 + 技术路线 + 自维护 */}&#10;    &lt;div style={{ flex: 1, display: 'flex', flexDirection: 'column', gap: 12 }}&gt;&#10;      {/* 三端功能 */}&#10;      &lt;div style={{ background: '#fff', borderRadius: 10, padding: '14px 18px', boxShadow: '0 4px 16px rgba(23,33,51,0.06)' }}&gt;&#10;        &lt;div style={{ fontSize: 13, color: '#BD9B56', fontWeight: 'bold', letterSpacing: '0.1em', marginBottom: 10 }}&gt;三端应用 · 功能与角色路由&lt;/div&gt;&#10;        &lt;div style={{ display: 'flex', flexDirection: 'column', gap: 8 }}&gt;&#10;          &lt;div style={{ display: 'flex', alignItems: 'flex-start', gap: 10 }}&gt;&#10;            &lt;span style={{ color: '#BD9B56', fontSize: 14, fontWeight: 'bold', minWidth: 52, marginTop: 1 }}&gt;业主端&lt;/span&gt;&#10;            &lt;span style={{ fontSize: 12.5, color: '#5F5E5A', lineHeight: 1.55 }}&gt;AI 助手（统一入口）· 对话报修 · 缴费查询 · 公告 · 我的工单 · 问题上报&lt;/span&gt;&#10;          &lt;/div&gt;&#10;          &lt;div style={{ display: 'flex', alignItems: 'flex-start', gap: 10 }}&gt;&#10;            &lt;span style={{ color: '#BD9B56', fontSize: 14, fontWeight: 'bold', minWidth: 52, marginTop: 1 }}&gt;物业端&lt;/span&gt;&#10;            &lt;span style={{ fontSize: 12.5, color: '#5F5E5A', lineHeight: 1.55 }}&gt;数据看板 · 工单管理 · 用户/房屋管理 · 公告（AI 生成）· 巡检管理 · 知识缺口审核&lt;/span&gt;&#10;          &lt;/div&gt;&#10;          &lt;div style={{ display: 'flex', alignItems: 'flex-start', gap: 10 }}&gt;&#10;            &lt;span style={{ color: '#BD9B56', fontSize: 14, fontWeight: 'bold', minWidth: 52, marginTop: 1 }}&gt;维修端&lt;/span&gt;&#10;            &lt;span style={{ fontSize: 12.5, color: '#5F5E5A', lineHeight: 1.55 }}&gt;任务列表 · 接单/处理/完成 · 消息 · 巡检任务&lt;/span&gt;&#10;          &lt;/div&gt;&#10;        &lt;/div&gt;&#10;      &lt;/div&gt;&#10;      {/* 技术路线 */}&#10;      &lt;div style={{ background: '#fff', borderRadius: 10, padding: '12px 18px', boxShadow: '0 4px 16px rgba(23,33,51,0.06)' }}&gt;&#10;        &lt;div style={{ fontSize: 13, color: '#BD9B56', fontWeight: 'bold', letterSpacing: '0.1em', marginBottom: 8 }}&gt;技术路线&lt;/div&gt;&#10;        &lt;div style={{ fontSize: 12.5, color: '#5F5E5A', lineHeight: 1.7 }}&gt;前端 React + TS + Tailwind · JWT 鉴权 + 角色路由 · PWA&lt;br/&gt;后端 FastAPI 三层（路由 → Service → Repository）&lt;br/&gt;AI LangGraph 多 Agent（Personal → Router → Domain）· 智谱 GLM-4-Flash · pgvector RAG&lt;br/&gt;派单算法（技能 + 在岗 + 工号升序）· 全链路消息通知&lt;/div&gt;&#10;      &lt;/div&gt;&#10;      {/* 自维护自更新 */}&#10;      &lt;div style={{ background: '#fff', borderRadius: 10, padding: '12px 18px', boxShadow: '0 4px 16px rgba(23,33,51,0.06)', flex: 1 }}&gt;&#10;        &lt;div style={{ fontSize: 13, color: '#BD9B56', fontWeight: 'bold', letterSpacing: '0.1em', marginBottom: 8 }}&gt;系统自维护自更新&lt;/div&gt;&#10;        &lt;div style={{ display: 'flex', flexWrap: 'wrap', gap: 8 }}&gt;&#10;          &lt;span style={{ fontSize: 12, color: '#172133', background: 'rgba(189,155,86,0.12)', padding: '5px 10px', borderRadius: 6 }}&gt;⏱ 定时数据清理（APScheduler 每日）&lt;/span&gt;&#10;          &lt;span style={{ fontSize: 12, color: '#172133', background: 'rgba(189,155,86,0.12)', padding: '5px 10px', borderRadius: 6 }}&gt;📷 巡检自动化（抓拍 + 视觉识别）&lt;/span&gt;&#10;          &lt;span style={{ fontSize: 12, color: '#172133', background: 'rgba(189,155,86,0.12)', padding: '5px 10px', borderRadius: 6 }}&gt;🧠 知识自进化（反馈 → 审核 → 入库）&lt;/span&gt;&#10;          &lt;span style={{ fontSize: 12, color: '#172133', background: 'rgba(189,155,86,0.12)', padding: '5px 10px', borderRadius: 6 }}&gt;📊 监控告警（Prometheus + Grafana）&lt;/span&gt;&#10;          &lt;span style={{ fontSize: 12, color: '#172133', background: 'rgba(189,155,86,0.12)', padding: '5px 10px', borderRadius: 6 }}&gt;🚀 CI/CD（GitHub Actions 自动测试发布）&lt;/span&gt;&#10;        &lt;/div&gt;&#10;        &lt;div style={{ fontSize: 12, color: '#6b7075', marginTop: 10, lineHeight: 1.6 }}&gt;系统无需人工值守即可完成数据清理、自动巡检、知识沉淀、监控告警与持续交付，形成「越用越准、越用越稳」的自进化闭环。&lt;/div&gt;&#10;      &lt;/div&gt;&#10;    &lt;/div&gt;&#10;    {/* 右栏：量化 + Demo */}&#10;    &lt;div style={{ flex: '0 0 350px', display: 'flex', flexDirection: 'column', gap: 14 }}&gt;&#10;      &lt;div style={{ background: 'linear-gradient(135deg, #172133 0%, #22395E 100%)', borderRadius: 12, padding: '20px 22px', color: '#FBFCFA', display: 'flex', flexDirection: 'column', gap: 12 }}&gt;&#10;        &lt;div style={{ color: '#BD9B56', fontSize: 13, letterSpacing: '0.25em' }}&gt;ONLINE DEMO&lt;/div&gt;&#10;        &lt;div style={{ fontSize: 18, fontFamily: 'Inter, sans-serif', lineHeight: 1.5 }}&gt;http://119.91.236.85&lt;/div&gt;&#10;        &lt;div style={{ fontSize: 12.5, color: 'rgba(251,252,250,0.75)', lineHeight: 1.8 }}&gt;&#10;          业主 guoyi378 · 物业 mayun420 · 维修 yangfei423&lt;br/&gt;&lt;span style={{ color: '#BD9B56' }}&gt;密码均为 123456&lt;/span&gt;&#10;        &lt;/div&gt;&#10;        &lt;div style={{ paddingTop: 12, borderTop: '1px solid rgba(189,155,86,0.3)', fontSize: 11.5, color: 'rgba(251,252,250,0.6)', lineHeight: 1.7 }}&gt;&#10;          GitHub：Xuuuukkk/ai-property-community-agent · MIT&#10;        &lt;/div&gt;&#10;      &lt;/div&gt;&#10;      &lt;div style={{ background: '#fff', borderRadius: 12, padding: '18px 20px', boxShadow: '0 4px 16px rgba(23,33,51,0.06)', display: 'flex', flexDirection: 'column', gap: 12 }}&gt;&#10;        &lt;div style={{ fontSize: 13, color: '#BD9B56', fontWeight: 'bold', letterSpacing: '0.1em' }}&gt;项目成果&lt;/div&gt;&#10;        &lt;div style={{ display: 'flex', gap: 10 }}&gt;&#10;          &lt;div style={{ flex: 1, background: 'rgba(189,155,86,0.08)', borderRadius: 8, padding: '10px 8px', textAlign: 'center' }}&gt;&#10;            &lt;div style={{ fontSize: 20, fontWeight: 'bold', color: '#BD9B56', fontFamily: 'Inter, sans-serif' }}&gt;100%&lt;/div&gt;&#10;            &lt;div style={{ fontSize: 11, color: '#5F5E5A', marginTop: 3 }}&gt;核心链路指标&lt;/div&gt;&#10;          &lt;/div&gt;&#10;          &lt;div style={{ flex: 1, background: 'rgba(189,155,86,0.08)', borderRadius: 8, padding: '10px 8px', textAlign: 'center' }}&gt;&#10;            &lt;div style={{ fontSize: 20, fontWeight: 'bold', color: '#BD9B56', fontFamily: 'Inter, sans-serif' }}&gt;113+30&lt;/div&gt;&#10;            &lt;div style={{ fontSize: 11, color: '#5F5E5A', marginTop: 3 }}&gt;测试全绿&lt;/div&gt;&#10;          &lt;/div&gt;&#10;          &lt;div style={{ flex: 1, background: 'rgba(189,155,86,0.08)', borderRadius: 8, padding: '10px 8px', textAlign: 'center' }}&gt;&#10;            &lt;div style={{ fontSize: 20, fontWeight: 'bold', color: '#BD9B56', fontFamily: 'Inter, sans-serif' }}&gt;7 阶段&lt;/div&gt;&#10;            &lt;div style={{ fontSize: 11, color: '#5F5E5A', marginTop: 3 }}&gt;Phase 0-7 完成&lt;/div&gt;&#10;          &lt;/div&gt;&#10;        &lt;/div&gt;&#10;      &lt;/div&gt;&#10;    &lt;/div&gt;&#10;  &lt;/div&gt;&#10;  &lt;div style={{ flexShrink: 0, height: 36, display: 'flex', alignItems: 'flex-end', justifyContent: 'space-between' }}&gt;&#10;    &lt;span style={{ color: '#BD9B56', fontSize: 12, letterSpacing: '0.1em' }}&gt;云溪花园 · 智慧社区&lt;/span&gt;&#10;    &lt;span style={{ color: '#a09b8c', fontSize: 12 }}&gt;14 / 15&lt;/span&gt;&#10;  &lt;/div&gt;&#10;&lt;/Slide&gt;"/>
         <p:cNvGrpSpPr/>
         <p:nvPr/>
       </p:nvGrpSpPr>
@@ -7268,7 +7570,7 @@
       </p:grpSpPr>
       <p:sp>
         <p:nvSpPr>
-          <p:cNvPr id="148" name=""/>
+          <p:cNvPr id="155" name=""/>
           <p:cNvSpPr/>
           <p:nvPr/>
         </p:nvSpPr>
@@ -7292,14 +7594,14 @@
       </p:sp>
       <p:sp>
         <p:nvSpPr>
-          <p:cNvPr id="149" name="" descr="{&quot;isTemplate&quot;:true,&quot;type&quot;:&quot;text&quot;}"/>
-          <p:cNvSpPr txBox="1"/>
-          <p:nvPr/>
-        </p:nvSpPr>
-        <p:spPr>
-          <a:xfrm rot="0" flipH="0" flipV="0">
-            <a:off x="609600" y="323850"/>
-            <a:ext cx="10972800" cy="152400"/>
+          <p:cNvPr id="156" name="" descr="{&quot;isTemplate&quot;:true,&quot;type&quot;:&quot;text&quot;}"/>
+          <p:cNvSpPr txBox="1"/>
+          <p:nvPr/>
+        </p:nvSpPr>
+        <p:spPr>
+          <a:xfrm rot="0" flipH="0" flipV="0">
+            <a:off x="571500" y="304800"/>
+            <a:ext cx="11049000" cy="152400"/>
           </a:xfrm>
           <a:prstGeom prst="rect"/>
         </p:spPr>
@@ -7337,14 +7639,14 @@
       </p:sp>
       <p:sp>
         <p:nvSpPr>
-          <p:cNvPr id="150" name="" descr="{&quot;isTemplate&quot;:true,&quot;type&quot;:&quot;text&quot;}"/>
-          <p:cNvSpPr txBox="1"/>
-          <p:nvPr/>
-        </p:nvSpPr>
-        <p:spPr>
-          <a:xfrm rot="0" flipH="0" flipV="0">
-            <a:off x="609600" y="533400"/>
-            <a:ext cx="10972800" cy="447675"/>
+          <p:cNvPr id="157" name="" descr="{&quot;isTemplate&quot;:true,&quot;type&quot;:&quot;text&quot;}"/>
+          <p:cNvSpPr txBox="1"/>
+          <p:nvPr/>
+        </p:nvSpPr>
+        <p:spPr>
+          <a:xfrm rot="0" flipH="0" flipV="0">
+            <a:off x="571500" y="514350"/>
+            <a:ext cx="11049000" cy="438150"/>
           </a:xfrm>
           <a:prstGeom prst="rect"/>
         </p:spPr>
@@ -7357,33 +7659,73 @@
               </a:lnSpc>
             </a:pPr>
             <a:r>
-              <a:rPr lang="zh-CN" sz="2250" b="1">
+              <a:rPr lang="zh-CN" sz="2175" b="1">
                 <a:solidFill>
                   <a:srgbClr val="172133"/>
                 </a:solidFill>
                 <a:latin typeface="Microsoft YaHei"/>
                 <a:ea typeface="Microsoft YaHei"/>
               </a:rPr>
-              <a:t>总结与展望</a:t>
-            </a:r>
-            <a:endParaRPr/>
-          </a:p>
-        </p:txBody>
-      </p:sp>
-      <p:sp>
-        <p:nvSpPr>
-          <p:cNvPr id="151" name=""/>
+              <a:t>三端应用</a:t>
+            </a:r>
+            <a:r>
+              <a:rPr lang="en-US" sz="2175" b="1">
+                <a:solidFill>
+                  <a:srgbClr val="172133"/>
+                </a:solidFill>
+                <a:latin typeface="Microsoft YaHei"/>
+                <a:ea typeface="Microsoft YaHei"/>
+              </a:rPr>
+              <a:t> + </a:t>
+            </a:r>
+            <a:r>
+              <a:rPr lang="zh-CN" sz="2175" b="1">
+                <a:solidFill>
+                  <a:srgbClr val="172133"/>
+                </a:solidFill>
+                <a:latin typeface="Microsoft YaHei"/>
+                <a:ea typeface="Microsoft YaHei"/>
+              </a:rPr>
+              <a:t>自维护自更新，</a:t>
+            </a:r>
+            <a:r>
+              <a:rPr lang="en-US" sz="2175" b="1">
+                <a:solidFill>
+                  <a:srgbClr val="172133"/>
+                </a:solidFill>
+                <a:latin typeface="Microsoft YaHei"/>
+                <a:ea typeface="Microsoft YaHei"/>
+              </a:rPr>
+              <a:t>AI </a:t>
+            </a:r>
+            <a:r>
+              <a:rPr lang="zh-CN" sz="2175" b="1">
+                <a:solidFill>
+                  <a:srgbClr val="172133"/>
+                </a:solidFill>
+                <a:latin typeface="Microsoft YaHei"/>
+                <a:ea typeface="Microsoft YaHei"/>
+              </a:rPr>
+              <a:t>物业社区落地</a:t>
+            </a:r>
+            <a:endParaRPr/>
+          </a:p>
+        </p:txBody>
+      </p:sp>
+      <p:sp>
+        <p:nvSpPr>
+          <p:cNvPr id="158" name=""/>
           <p:cNvSpPr/>
           <p:nvPr/>
         </p:nvSpPr>
         <p:spPr>
           <a:xfrm rot="0" flipH="0" flipV="0">
-            <a:off x="609600" y="1876425"/>
-            <a:ext cx="7258050" cy="3381375"/>
+            <a:off x="571500" y="952500"/>
+            <a:ext cx="7467600" cy="1352550"/>
           </a:xfrm>
           <a:prstGeom prst="roundRect">
             <a:avLst>
-              <a:gd name="adj" fmla="val 3380"/>
+              <a:gd name="adj" fmla="val 7042"/>
             </a:avLst>
           </a:prstGeom>
           <a:solidFill>
@@ -7391,9 +7733,9 @@
           </a:solidFill>
           <a:ln/>
           <a:effectLst>
-            <a:outerShdw blurRad="228600" dist="57150" dir="5400000">
+            <a:outerShdw blurRad="152400" dist="38100" dir="5400000">
               <a:srgbClr val="172133">
-                <a:alpha val="8000"/>
+                <a:alpha val="6000"/>
               </a:srgbClr>
             </a:outerShdw>
           </a:effectLst>
@@ -7405,14 +7747,14 @@
       </p:sp>
       <p:sp>
         <p:nvSpPr>
-          <p:cNvPr id="152" name="" descr="{&quot;isTemplate&quot;:true,&quot;type&quot;:&quot;text&quot;}"/>
-          <p:cNvSpPr txBox="1"/>
-          <p:nvPr/>
-        </p:nvSpPr>
-        <p:spPr>
-          <a:xfrm rot="0" flipH="0" flipV="0">
-            <a:off x="876300" y="2124075"/>
-            <a:ext cx="6724650" cy="161925"/>
+          <p:cNvPr id="159" name="" descr="{&quot;isTemplate&quot;:true,&quot;type&quot;:&quot;text&quot;}"/>
+          <p:cNvSpPr txBox="1"/>
+          <p:nvPr/>
+        </p:nvSpPr>
+        <p:spPr>
+          <a:xfrm rot="0" flipH="0" flipV="0">
+            <a:off x="742950" y="1085850"/>
+            <a:ext cx="7124700" cy="152400"/>
           </a:xfrm>
           <a:prstGeom prst="rect"/>
         </p:spPr>
@@ -7425,155 +7767,817 @@
               </a:lnSpc>
             </a:pPr>
             <a:r>
-              <a:rPr lang="zh-CN" sz="1050" spc="-9223372036854775808">
+              <a:rPr lang="zh-CN" sz="975" spc="-9223372036854775808">
                 <a:solidFill>
                   <a:srgbClr val="BD9B56"/>
                 </a:solidFill>
                 <a:latin typeface="Microsoft YaHei"/>
                 <a:ea typeface="Microsoft YaHei"/>
               </a:rPr>
-              <a:t>项目成果</a:t>
-            </a:r>
-            <a:endParaRPr/>
-          </a:p>
-        </p:txBody>
-      </p:sp>
-      <p:sp>
-        <p:nvSpPr>
-          <p:cNvPr id="153" name="" descr="{&quot;isTemplate&quot;:true,&quot;type&quot;:&quot;text&quot;}"/>
-          <p:cNvSpPr txBox="1"/>
-          <p:nvPr/>
-        </p:nvSpPr>
-        <p:spPr>
-          <a:xfrm rot="0" flipH="0" flipV="0">
-            <a:off x="876300" y="2362200"/>
-            <a:ext cx="6724650" cy="552450"/>
-          </a:xfrm>
-          <a:prstGeom prst="rect"/>
-        </p:spPr>
-        <p:txBody>
-          <a:bodyPr wrap="square" lIns="0" tIns="0" rIns="0" bIns="0">
-            <a:normAutofit/>
-          </a:bodyPr>
-          <a:p>
-            <a:pPr>
-              <a:lnSpc>
-                <a:spcPct val="170000"/>
-              </a:lnSpc>
-            </a:pPr>
-            <a:r>
-              <a:rPr lang="zh-CN" sz="1050">
+              <a:t>三端应用</a:t>
+            </a:r>
+            <a:r>
+              <a:rPr lang="en-US" sz="975" spc="-9223372036854775808">
+                <a:solidFill>
+                  <a:srgbClr val="BD9B56"/>
+                </a:solidFill>
+                <a:latin typeface="Microsoft YaHei"/>
+                <a:ea typeface="Microsoft YaHei"/>
+              </a:rPr>
+              <a:t> · </a:t>
+            </a:r>
+            <a:r>
+              <a:rPr lang="zh-CN" sz="975" spc="-9223372036854775808">
+                <a:solidFill>
+                  <a:srgbClr val="BD9B56"/>
+                </a:solidFill>
+                <a:latin typeface="Microsoft YaHei"/>
+                <a:ea typeface="Microsoft YaHei"/>
+              </a:rPr>
+              <a:t>功能与角色路由</a:t>
+            </a:r>
+            <a:endParaRPr/>
+          </a:p>
+        </p:txBody>
+      </p:sp>
+      <p:sp>
+        <p:nvSpPr>
+          <p:cNvPr id="160" name="" descr="{&quot;isTemplate&quot;:true,&quot;type&quot;:&quot;text&quot;}"/>
+          <p:cNvSpPr txBox="1"/>
+          <p:nvPr/>
+        </p:nvSpPr>
+        <p:spPr>
+          <a:xfrm rot="0" flipH="0" flipV="0">
+            <a:off x="742950" y="1343025"/>
+            <a:ext cx="495300" cy="161925"/>
+          </a:xfrm>
+          <a:prstGeom prst="rect"/>
+        </p:spPr>
+        <p:txBody>
+          <a:bodyPr wrap="none" lIns="0" tIns="0" rIns="0" bIns="0"/>
+          <a:p>
+            <a:pPr>
+              <a:lnSpc>
+                <a:spcPct val="100000"/>
+              </a:lnSpc>
+            </a:pPr>
+            <a:r>
+              <a:rPr lang="zh-CN" sz="1050" b="1">
+                <a:solidFill>
+                  <a:srgbClr val="BD9B56"/>
+                </a:solidFill>
+                <a:latin typeface="Microsoft YaHei"/>
+                <a:ea typeface="Microsoft YaHei"/>
+              </a:rPr>
+              <a:t>业主端</a:t>
+            </a:r>
+            <a:endParaRPr/>
+          </a:p>
+        </p:txBody>
+      </p:sp>
+      <p:sp>
+        <p:nvSpPr>
+          <p:cNvPr id="161" name="" descr="{&quot;isTemplate&quot;:true,&quot;type&quot;:&quot;text&quot;}"/>
+          <p:cNvSpPr txBox="1"/>
+          <p:nvPr/>
+        </p:nvSpPr>
+        <p:spPr>
+          <a:xfrm rot="0" flipH="0" flipV="0">
+            <a:off x="1333500" y="1333500"/>
+            <a:ext cx="3714750" cy="228600"/>
+          </a:xfrm>
+          <a:prstGeom prst="rect"/>
+        </p:spPr>
+        <p:txBody>
+          <a:bodyPr wrap="none" lIns="0" tIns="0" rIns="0" bIns="0"/>
+          <a:p>
+            <a:pPr>
+              <a:lnSpc>
+                <a:spcPct val="155000"/>
+              </a:lnSpc>
+            </a:pPr>
+            <a:r>
+              <a:rPr lang="en-US" sz="938">
                 <a:solidFill>
                   <a:srgbClr val="5F5E5A"/>
                 </a:solidFill>
                 <a:latin typeface="Microsoft YaHei"/>
                 <a:ea typeface="Microsoft YaHei"/>
               </a:rPr>
-              <a:t>从数据库设计起步，完整构建可运行的</a:t>
-            </a:r>
-            <a:r>
-              <a:rPr lang="en-US" sz="1050">
+              <a:t>AI </a:t>
+            </a:r>
+            <a:r>
+              <a:rPr lang="zh-CN" sz="938">
                 <a:solidFill>
                   <a:srgbClr val="5F5E5A"/>
                 </a:solidFill>
                 <a:latin typeface="Microsoft YaHei"/>
                 <a:ea typeface="Microsoft YaHei"/>
               </a:rPr>
-              <a:t> AI </a:t>
-            </a:r>
-            <a:r>
-              <a:rPr lang="zh-CN" sz="1050">
+              <a:t>助手（统一入口）·</a:t>
+            </a:r>
+            <a:r>
+              <a:rPr lang="en-US" sz="938">
                 <a:solidFill>
                   <a:srgbClr val="5F5E5A"/>
                 </a:solidFill>
                 <a:latin typeface="Microsoft YaHei"/>
                 <a:ea typeface="Microsoft YaHei"/>
               </a:rPr>
-              <a:t>物业社区平台——三端应用、多意图</a:t>
-            </a:r>
-            <a:r>
-              <a:rPr lang="en-US" sz="1050">
+              <a:t> </a:t>
+            </a:r>
+            <a:r>
+              <a:rPr lang="zh-CN" sz="938">
                 <a:solidFill>
                   <a:srgbClr val="5F5E5A"/>
                 </a:solidFill>
                 <a:latin typeface="Microsoft YaHei"/>
                 <a:ea typeface="Microsoft YaHei"/>
               </a:rPr>
-              <a:t> AI </a:t>
-            </a:r>
-            <a:r>
-              <a:rPr lang="zh-CN" sz="1050">
+              <a:t>对话报修</a:t>
+            </a:r>
+            <a:r>
+              <a:rPr lang="en-US" sz="938">
                 <a:solidFill>
                   <a:srgbClr val="5F5E5A"/>
                 </a:solidFill>
                 <a:latin typeface="Microsoft YaHei"/>
                 <a:ea typeface="Microsoft YaHei"/>
               </a:rPr>
-              <a:t>助手、</a:t>
-            </a:r>
-            <a:r>
-              <a:rPr lang="en-US" sz="1050">
+              <a:t> · </a:t>
+            </a:r>
+            <a:r>
+              <a:rPr lang="zh-CN" sz="938">
                 <a:solidFill>
                   <a:srgbClr val="5F5E5A"/>
                 </a:solidFill>
                 <a:latin typeface="Microsoft YaHei"/>
                 <a:ea typeface="Microsoft YaHei"/>
               </a:rPr>
-              <a:t>RAG </a:t>
-            </a:r>
-            <a:r>
-              <a:rPr lang="zh-CN" sz="1050">
+              <a:t>缴费查询</a:t>
+            </a:r>
+            <a:r>
+              <a:rPr lang="en-US" sz="938">
                 <a:solidFill>
                   <a:srgbClr val="5F5E5A"/>
                 </a:solidFill>
                 <a:latin typeface="Microsoft YaHei"/>
                 <a:ea typeface="Microsoft YaHei"/>
               </a:rPr>
-              <a:t>知识库、三条业务闭环、量化评估、</a:t>
-            </a:r>
-            <a:r>
-              <a:rPr lang="en-US" sz="1050">
+              <a:t> · </a:t>
+            </a:r>
+            <a:r>
+              <a:rPr lang="zh-CN" sz="938">
                 <a:solidFill>
                   <a:srgbClr val="5F5E5A"/>
                 </a:solidFill>
                 <a:latin typeface="Microsoft YaHei"/>
                 <a:ea typeface="Microsoft YaHei"/>
               </a:rPr>
-              <a:t>CI/CD </a:t>
-            </a:r>
-            <a:r>
-              <a:rPr lang="zh-CN" sz="1050">
+              <a:t>公告</a:t>
+            </a:r>
+            <a:r>
+              <a:rPr lang="en-US" sz="938">
                 <a:solidFill>
                   <a:srgbClr val="5F5E5A"/>
                 </a:solidFill>
                 <a:latin typeface="Microsoft YaHei"/>
                 <a:ea typeface="Microsoft YaHei"/>
               </a:rPr>
-              <a:t>部署全部落地。</a:t>
-            </a:r>
-            <a:endParaRPr/>
-          </a:p>
-        </p:txBody>
-      </p:sp>
-      <p:sp>
-        <p:nvSpPr>
-          <p:cNvPr id="154" name=""/>
+              <a:t> · </a:t>
+            </a:r>
+            <a:r>
+              <a:rPr lang="zh-CN" sz="938">
+                <a:solidFill>
+                  <a:srgbClr val="5F5E5A"/>
+                </a:solidFill>
+                <a:latin typeface="Microsoft YaHei"/>
+                <a:ea typeface="Microsoft YaHei"/>
+              </a:rPr>
+              <a:t>我的工单</a:t>
+            </a:r>
+            <a:r>
+              <a:rPr lang="en-US" sz="938">
+                <a:solidFill>
+                  <a:srgbClr val="5F5E5A"/>
+                </a:solidFill>
+                <a:latin typeface="Microsoft YaHei"/>
+                <a:ea typeface="Microsoft YaHei"/>
+              </a:rPr>
+              <a:t> · </a:t>
+            </a:r>
+            <a:r>
+              <a:rPr lang="zh-CN" sz="938">
+                <a:solidFill>
+                  <a:srgbClr val="5F5E5A"/>
+                </a:solidFill>
+                <a:latin typeface="Microsoft YaHei"/>
+                <a:ea typeface="Microsoft YaHei"/>
+              </a:rPr>
+              <a:t>问题上报</a:t>
+            </a:r>
+            <a:endParaRPr/>
+          </a:p>
+        </p:txBody>
+      </p:sp>
+      <p:sp>
+        <p:nvSpPr>
+          <p:cNvPr id="162" name="" descr="{&quot;isTemplate&quot;:true,&quot;type&quot;:&quot;text&quot;}"/>
+          <p:cNvSpPr txBox="1"/>
+          <p:nvPr/>
+        </p:nvSpPr>
+        <p:spPr>
+          <a:xfrm rot="0" flipH="0" flipV="0">
+            <a:off x="742950" y="1647825"/>
+            <a:ext cx="495300" cy="161925"/>
+          </a:xfrm>
+          <a:prstGeom prst="rect"/>
+        </p:spPr>
+        <p:txBody>
+          <a:bodyPr wrap="none" lIns="0" tIns="0" rIns="0" bIns="0"/>
+          <a:p>
+            <a:pPr>
+              <a:lnSpc>
+                <a:spcPct val="100000"/>
+              </a:lnSpc>
+            </a:pPr>
+            <a:r>
+              <a:rPr lang="zh-CN" sz="1050" b="1">
+                <a:solidFill>
+                  <a:srgbClr val="BD9B56"/>
+                </a:solidFill>
+                <a:latin typeface="Microsoft YaHei"/>
+                <a:ea typeface="Microsoft YaHei"/>
+              </a:rPr>
+              <a:t>物业端</a:t>
+            </a:r>
+            <a:endParaRPr/>
+          </a:p>
+        </p:txBody>
+      </p:sp>
+      <p:sp>
+        <p:nvSpPr>
+          <p:cNvPr id="163" name="" descr="{&quot;isTemplate&quot;:true,&quot;type&quot;:&quot;text&quot;}"/>
+          <p:cNvSpPr txBox="1"/>
+          <p:nvPr/>
+        </p:nvSpPr>
+        <p:spPr>
+          <a:xfrm rot="0" flipH="0" flipV="0">
+            <a:off x="1333500" y="1638300"/>
+            <a:ext cx="4238625" cy="228600"/>
+          </a:xfrm>
+          <a:prstGeom prst="rect"/>
+        </p:spPr>
+        <p:txBody>
+          <a:bodyPr wrap="none" lIns="0" tIns="0" rIns="0" bIns="0"/>
+          <a:p>
+            <a:pPr>
+              <a:lnSpc>
+                <a:spcPct val="155000"/>
+              </a:lnSpc>
+            </a:pPr>
+            <a:r>
+              <a:rPr lang="zh-CN" sz="938">
+                <a:solidFill>
+                  <a:srgbClr val="5F5E5A"/>
+                </a:solidFill>
+                <a:latin typeface="Microsoft YaHei"/>
+                <a:ea typeface="Microsoft YaHei"/>
+              </a:rPr>
+              <a:t>数据看板</a:t>
+            </a:r>
+            <a:r>
+              <a:rPr lang="en-US" sz="938">
+                <a:solidFill>
+                  <a:srgbClr val="5F5E5A"/>
+                </a:solidFill>
+                <a:latin typeface="Microsoft YaHei"/>
+                <a:ea typeface="Microsoft YaHei"/>
+              </a:rPr>
+              <a:t> · </a:t>
+            </a:r>
+            <a:r>
+              <a:rPr lang="zh-CN" sz="938">
+                <a:solidFill>
+                  <a:srgbClr val="5F5E5A"/>
+                </a:solidFill>
+                <a:latin typeface="Microsoft YaHei"/>
+                <a:ea typeface="Microsoft YaHei"/>
+              </a:rPr>
+              <a:t>工单管理</a:t>
+            </a:r>
+            <a:r>
+              <a:rPr lang="en-US" sz="938">
+                <a:solidFill>
+                  <a:srgbClr val="5F5E5A"/>
+                </a:solidFill>
+                <a:latin typeface="Microsoft YaHei"/>
+                <a:ea typeface="Microsoft YaHei"/>
+              </a:rPr>
+              <a:t> · </a:t>
+            </a:r>
+            <a:r>
+              <a:rPr lang="zh-CN" sz="938">
+                <a:solidFill>
+                  <a:srgbClr val="5F5E5A"/>
+                </a:solidFill>
+                <a:latin typeface="Microsoft YaHei"/>
+                <a:ea typeface="Microsoft YaHei"/>
+              </a:rPr>
+              <a:t>用户</a:t>
+            </a:r>
+            <a:r>
+              <a:rPr lang="en-US" sz="938">
+                <a:solidFill>
+                  <a:srgbClr val="5F5E5A"/>
+                </a:solidFill>
+                <a:latin typeface="Microsoft YaHei"/>
+                <a:ea typeface="Microsoft YaHei"/>
+              </a:rPr>
+              <a:t>/</a:t>
+            </a:r>
+            <a:r>
+              <a:rPr lang="zh-CN" sz="938">
+                <a:solidFill>
+                  <a:srgbClr val="5F5E5A"/>
+                </a:solidFill>
+                <a:latin typeface="Microsoft YaHei"/>
+                <a:ea typeface="Microsoft YaHei"/>
+              </a:rPr>
+              <a:t>房屋管理</a:t>
+            </a:r>
+            <a:r>
+              <a:rPr lang="en-US" sz="938">
+                <a:solidFill>
+                  <a:srgbClr val="5F5E5A"/>
+                </a:solidFill>
+                <a:latin typeface="Microsoft YaHei"/>
+                <a:ea typeface="Microsoft YaHei"/>
+              </a:rPr>
+              <a:t> · </a:t>
+            </a:r>
+            <a:r>
+              <a:rPr lang="zh-CN" sz="938">
+                <a:solidFill>
+                  <a:srgbClr val="5F5E5A"/>
+                </a:solidFill>
+                <a:latin typeface="Microsoft YaHei"/>
+                <a:ea typeface="Microsoft YaHei"/>
+              </a:rPr>
+              <a:t>公告（</a:t>
+            </a:r>
+            <a:r>
+              <a:rPr lang="en-US" sz="938">
+                <a:solidFill>
+                  <a:srgbClr val="5F5E5A"/>
+                </a:solidFill>
+                <a:latin typeface="Microsoft YaHei"/>
+                <a:ea typeface="Microsoft YaHei"/>
+              </a:rPr>
+              <a:t>AI </a:t>
+            </a:r>
+            <a:r>
+              <a:rPr lang="zh-CN" sz="938">
+                <a:solidFill>
+                  <a:srgbClr val="5F5E5A"/>
+                </a:solidFill>
+                <a:latin typeface="Microsoft YaHei"/>
+                <a:ea typeface="Microsoft YaHei"/>
+              </a:rPr>
+              <a:t>生成）·</a:t>
+            </a:r>
+            <a:r>
+              <a:rPr lang="en-US" sz="938">
+                <a:solidFill>
+                  <a:srgbClr val="5F5E5A"/>
+                </a:solidFill>
+                <a:latin typeface="Microsoft YaHei"/>
+                <a:ea typeface="Microsoft YaHei"/>
+              </a:rPr>
+              <a:t> </a:t>
+            </a:r>
+            <a:r>
+              <a:rPr lang="zh-CN" sz="938">
+                <a:solidFill>
+                  <a:srgbClr val="5F5E5A"/>
+                </a:solidFill>
+                <a:latin typeface="Microsoft YaHei"/>
+                <a:ea typeface="Microsoft YaHei"/>
+              </a:rPr>
+              <a:t>巡检管理</a:t>
+            </a:r>
+            <a:r>
+              <a:rPr lang="en-US" sz="938">
+                <a:solidFill>
+                  <a:srgbClr val="5F5E5A"/>
+                </a:solidFill>
+                <a:latin typeface="Microsoft YaHei"/>
+                <a:ea typeface="Microsoft YaHei"/>
+              </a:rPr>
+              <a:t> · </a:t>
+            </a:r>
+            <a:r>
+              <a:rPr lang="zh-CN" sz="938">
+                <a:solidFill>
+                  <a:srgbClr val="5F5E5A"/>
+                </a:solidFill>
+                <a:latin typeface="Microsoft YaHei"/>
+                <a:ea typeface="Microsoft YaHei"/>
+              </a:rPr>
+              <a:t>知识缺口审核</a:t>
+            </a:r>
+            <a:endParaRPr/>
+          </a:p>
+        </p:txBody>
+      </p:sp>
+      <p:sp>
+        <p:nvSpPr>
+          <p:cNvPr id="164" name="" descr="{&quot;isTemplate&quot;:true,&quot;type&quot;:&quot;text&quot;}"/>
+          <p:cNvSpPr txBox="1"/>
+          <p:nvPr/>
+        </p:nvSpPr>
+        <p:spPr>
+          <a:xfrm rot="0" flipH="0" flipV="0">
+            <a:off x="742950" y="1952625"/>
+            <a:ext cx="495300" cy="161925"/>
+          </a:xfrm>
+          <a:prstGeom prst="rect"/>
+        </p:spPr>
+        <p:txBody>
+          <a:bodyPr wrap="none" lIns="0" tIns="0" rIns="0" bIns="0"/>
+          <a:p>
+            <a:pPr>
+              <a:lnSpc>
+                <a:spcPct val="100000"/>
+              </a:lnSpc>
+            </a:pPr>
+            <a:r>
+              <a:rPr lang="zh-CN" sz="1050" b="1">
+                <a:solidFill>
+                  <a:srgbClr val="BD9B56"/>
+                </a:solidFill>
+                <a:latin typeface="Microsoft YaHei"/>
+                <a:ea typeface="Microsoft YaHei"/>
+              </a:rPr>
+              <a:t>维修端</a:t>
+            </a:r>
+            <a:endParaRPr/>
+          </a:p>
+        </p:txBody>
+      </p:sp>
+      <p:sp>
+        <p:nvSpPr>
+          <p:cNvPr id="165" name="" descr="{&quot;isTemplate&quot;:true,&quot;type&quot;:&quot;text&quot;}"/>
+          <p:cNvSpPr txBox="1"/>
+          <p:nvPr/>
+        </p:nvSpPr>
+        <p:spPr>
+          <a:xfrm rot="0" flipH="0" flipV="0">
+            <a:off x="1333500" y="1943100"/>
+            <a:ext cx="2305050" cy="228600"/>
+          </a:xfrm>
+          <a:prstGeom prst="rect"/>
+        </p:spPr>
+        <p:txBody>
+          <a:bodyPr wrap="none" lIns="0" tIns="0" rIns="0" bIns="0"/>
+          <a:p>
+            <a:pPr>
+              <a:lnSpc>
+                <a:spcPct val="155000"/>
+              </a:lnSpc>
+            </a:pPr>
+            <a:r>
+              <a:rPr lang="zh-CN" sz="938">
+                <a:solidFill>
+                  <a:srgbClr val="5F5E5A"/>
+                </a:solidFill>
+                <a:latin typeface="Microsoft YaHei"/>
+                <a:ea typeface="Microsoft YaHei"/>
+              </a:rPr>
+              <a:t>任务列表</a:t>
+            </a:r>
+            <a:r>
+              <a:rPr lang="en-US" sz="938">
+                <a:solidFill>
+                  <a:srgbClr val="5F5E5A"/>
+                </a:solidFill>
+                <a:latin typeface="Microsoft YaHei"/>
+                <a:ea typeface="Microsoft YaHei"/>
+              </a:rPr>
+              <a:t> · </a:t>
+            </a:r>
+            <a:r>
+              <a:rPr lang="zh-CN" sz="938">
+                <a:solidFill>
+                  <a:srgbClr val="5F5E5A"/>
+                </a:solidFill>
+                <a:latin typeface="Microsoft YaHei"/>
+                <a:ea typeface="Microsoft YaHei"/>
+              </a:rPr>
+              <a:t>接单</a:t>
+            </a:r>
+            <a:r>
+              <a:rPr lang="en-US" sz="938">
+                <a:solidFill>
+                  <a:srgbClr val="5F5E5A"/>
+                </a:solidFill>
+                <a:latin typeface="Microsoft YaHei"/>
+                <a:ea typeface="Microsoft YaHei"/>
+              </a:rPr>
+              <a:t>/</a:t>
+            </a:r>
+            <a:r>
+              <a:rPr lang="zh-CN" sz="938">
+                <a:solidFill>
+                  <a:srgbClr val="5F5E5A"/>
+                </a:solidFill>
+                <a:latin typeface="Microsoft YaHei"/>
+                <a:ea typeface="Microsoft YaHei"/>
+              </a:rPr>
+              <a:t>处理</a:t>
+            </a:r>
+            <a:r>
+              <a:rPr lang="en-US" sz="938">
+                <a:solidFill>
+                  <a:srgbClr val="5F5E5A"/>
+                </a:solidFill>
+                <a:latin typeface="Microsoft YaHei"/>
+                <a:ea typeface="Microsoft YaHei"/>
+              </a:rPr>
+              <a:t>/</a:t>
+            </a:r>
+            <a:r>
+              <a:rPr lang="zh-CN" sz="938">
+                <a:solidFill>
+                  <a:srgbClr val="5F5E5A"/>
+                </a:solidFill>
+                <a:latin typeface="Microsoft YaHei"/>
+                <a:ea typeface="Microsoft YaHei"/>
+              </a:rPr>
+              <a:t>完成</a:t>
+            </a:r>
+            <a:r>
+              <a:rPr lang="en-US" sz="938">
+                <a:solidFill>
+                  <a:srgbClr val="5F5E5A"/>
+                </a:solidFill>
+                <a:latin typeface="Microsoft YaHei"/>
+                <a:ea typeface="Microsoft YaHei"/>
+              </a:rPr>
+              <a:t> · </a:t>
+            </a:r>
+            <a:r>
+              <a:rPr lang="zh-CN" sz="938">
+                <a:solidFill>
+                  <a:srgbClr val="5F5E5A"/>
+                </a:solidFill>
+                <a:latin typeface="Microsoft YaHei"/>
+                <a:ea typeface="Microsoft YaHei"/>
+              </a:rPr>
+              <a:t>消息</a:t>
+            </a:r>
+            <a:r>
+              <a:rPr lang="en-US" sz="938">
+                <a:solidFill>
+                  <a:srgbClr val="5F5E5A"/>
+                </a:solidFill>
+                <a:latin typeface="Microsoft YaHei"/>
+                <a:ea typeface="Microsoft YaHei"/>
+              </a:rPr>
+              <a:t> · </a:t>
+            </a:r>
+            <a:r>
+              <a:rPr lang="zh-CN" sz="938">
+                <a:solidFill>
+                  <a:srgbClr val="5F5E5A"/>
+                </a:solidFill>
+                <a:latin typeface="Microsoft YaHei"/>
+                <a:ea typeface="Microsoft YaHei"/>
+              </a:rPr>
+              <a:t>巡检任务</a:t>
+            </a:r>
+            <a:endParaRPr/>
+          </a:p>
+        </p:txBody>
+      </p:sp>
+      <p:sp>
+        <p:nvSpPr>
+          <p:cNvPr id="166" name=""/>
           <p:cNvSpPr/>
           <p:nvPr/>
         </p:nvSpPr>
         <p:spPr>
           <a:xfrm rot="0" flipH="0" flipV="0">
-            <a:off x="876300" y="3048000"/>
-            <a:ext cx="2152650" cy="666750"/>
+            <a:off x="571500" y="2419350"/>
+            <a:ext cx="7467600" cy="457200"/>
           </a:xfrm>
           <a:prstGeom prst="roundRect">
             <a:avLst>
-              <a:gd name="adj" fmla="val 11429"/>
+              <a:gd name="adj" fmla="val 20833"/>
+            </a:avLst>
+          </a:prstGeom>
+          <a:solidFill>
+            <a:srgbClr val="FFFFFF"/>
+          </a:solidFill>
+          <a:ln/>
+          <a:effectLst>
+            <a:outerShdw blurRad="152400" dist="38100" dir="5400000">
+              <a:srgbClr val="172133">
+                <a:alpha val="6000"/>
+              </a:srgbClr>
+            </a:outerShdw>
+          </a:effectLst>
+        </p:spPr>
+        <p:txBody>
+          <a:bodyPr/>
+          <a:p/>
+        </p:txBody>
+      </p:sp>
+      <p:sp>
+        <p:nvSpPr>
+          <p:cNvPr id="167" name="" descr="{&quot;isTemplate&quot;:true,&quot;type&quot;:&quot;text&quot;}"/>
+          <p:cNvSpPr txBox="1"/>
+          <p:nvPr/>
+        </p:nvSpPr>
+        <p:spPr>
+          <a:xfrm rot="0" flipH="0" flipV="0">
+            <a:off x="742950" y="2533650"/>
+            <a:ext cx="7124700" cy="152400"/>
+          </a:xfrm>
+          <a:prstGeom prst="rect"/>
+        </p:spPr>
+        <p:txBody>
+          <a:bodyPr wrap="none" lIns="0" tIns="0" rIns="0" bIns="0"/>
+          <a:p>
+            <a:pPr>
+              <a:lnSpc>
+                <a:spcPct val="100000"/>
+              </a:lnSpc>
+            </a:pPr>
+            <a:r>
+              <a:rPr lang="zh-CN" sz="975" spc="-9223372036854775808">
+                <a:solidFill>
+                  <a:srgbClr val="BD9B56"/>
+                </a:solidFill>
+                <a:latin typeface="Microsoft YaHei"/>
+                <a:ea typeface="Microsoft YaHei"/>
+              </a:rPr>
+              <a:t>技术路线</a:t>
+            </a:r>
+            <a:endParaRPr/>
+          </a:p>
+        </p:txBody>
+      </p:sp>
+      <p:sp>
+        <p:nvSpPr>
+          <p:cNvPr id="168" name="" descr="{&quot;isTemplate&quot;:true,&quot;type&quot;:&quot;text&quot;}"/>
+          <p:cNvSpPr txBox="1"/>
+          <p:nvPr/>
+        </p:nvSpPr>
+        <p:spPr>
+          <a:xfrm rot="0" flipH="0" flipV="0">
+            <a:off x="742950" y="2762250"/>
+            <a:ext cx="7124700" cy="0"/>
+          </a:xfrm>
+          <a:prstGeom prst="rect"/>
+        </p:spPr>
+        <p:txBody>
+          <a:bodyPr wrap="none" lIns="0" tIns="0" rIns="0" bIns="0"/>
+          <a:p>
+            <a:pPr/>
+            <a:endParaRPr/>
+          </a:p>
+        </p:txBody>
+      </p:sp>
+      <p:sp>
+        <p:nvSpPr>
+          <p:cNvPr id="169" name="" descr="{&quot;isTemplate&quot;:true,&quot;type&quot;:&quot;text&quot;}"/>
+          <p:cNvSpPr txBox="1"/>
+          <p:nvPr/>
+        </p:nvSpPr>
+        <p:spPr>
+          <a:xfrm rot="0" flipH="0" flipV="0">
+            <a:off x="742950" y="2762250"/>
+            <a:ext cx="7124700" cy="0"/>
+          </a:xfrm>
+          <a:prstGeom prst="rect"/>
+        </p:spPr>
+        <p:txBody>
+          <a:bodyPr wrap="none" lIns="0" tIns="0" rIns="0" bIns="0"/>
+          <a:p>
+            <a:pPr/>
+            <a:endParaRPr/>
+          </a:p>
+        </p:txBody>
+      </p:sp>
+      <p:sp>
+        <p:nvSpPr>
+          <p:cNvPr id="170" name="" descr="{&quot;isTemplate&quot;:true,&quot;type&quot;:&quot;text&quot;}"/>
+          <p:cNvSpPr txBox="1"/>
+          <p:nvPr/>
+        </p:nvSpPr>
+        <p:spPr>
+          <a:xfrm rot="0" flipH="0" flipV="0">
+            <a:off x="742950" y="2762250"/>
+            <a:ext cx="7124700" cy="0"/>
+          </a:xfrm>
+          <a:prstGeom prst="rect"/>
+        </p:spPr>
+        <p:txBody>
+          <a:bodyPr wrap="none" lIns="0" tIns="0" rIns="0" bIns="0"/>
+          <a:p>
+            <a:pPr/>
+            <a:endParaRPr/>
+          </a:p>
+        </p:txBody>
+      </p:sp>
+      <p:sp>
+        <p:nvSpPr>
+          <p:cNvPr id="171" name=""/>
+          <p:cNvSpPr/>
+          <p:nvPr/>
+        </p:nvSpPr>
+        <p:spPr>
+          <a:xfrm rot="0" flipH="0" flipV="0">
+            <a:off x="571500" y="2990850"/>
+            <a:ext cx="7467600" cy="3219450"/>
+          </a:xfrm>
+          <a:prstGeom prst="roundRect">
+            <a:avLst>
+              <a:gd name="adj" fmla="val 2959"/>
+            </a:avLst>
+          </a:prstGeom>
+          <a:solidFill>
+            <a:srgbClr val="FFFFFF"/>
+          </a:solidFill>
+          <a:ln/>
+          <a:effectLst>
+            <a:outerShdw blurRad="152400" dist="38100" dir="5400000">
+              <a:srgbClr val="172133">
+                <a:alpha val="6000"/>
+              </a:srgbClr>
+            </a:outerShdw>
+          </a:effectLst>
+        </p:spPr>
+        <p:txBody>
+          <a:bodyPr/>
+          <a:p/>
+        </p:txBody>
+      </p:sp>
+      <p:sp>
+        <p:nvSpPr>
+          <p:cNvPr id="172" name="" descr="{&quot;isTemplate&quot;:true,&quot;type&quot;:&quot;text&quot;}"/>
+          <p:cNvSpPr txBox="1"/>
+          <p:nvPr/>
+        </p:nvSpPr>
+        <p:spPr>
+          <a:xfrm rot="0" flipH="0" flipV="0">
+            <a:off x="742950" y="3105150"/>
+            <a:ext cx="7124700" cy="152400"/>
+          </a:xfrm>
+          <a:prstGeom prst="rect"/>
+        </p:spPr>
+        <p:txBody>
+          <a:bodyPr wrap="none" lIns="0" tIns="0" rIns="0" bIns="0"/>
+          <a:p>
+            <a:pPr>
+              <a:lnSpc>
+                <a:spcPct val="100000"/>
+              </a:lnSpc>
+            </a:pPr>
+            <a:r>
+              <a:rPr lang="zh-CN" sz="975" spc="-9223372036854775808">
+                <a:solidFill>
+                  <a:srgbClr val="BD9B56"/>
+                </a:solidFill>
+                <a:latin typeface="Microsoft YaHei"/>
+                <a:ea typeface="Microsoft YaHei"/>
+              </a:rPr>
+              <a:t>系统自维护自更新</a:t>
+            </a:r>
+            <a:endParaRPr/>
+          </a:p>
+        </p:txBody>
+      </p:sp>
+      <p:sp>
+        <p:nvSpPr>
+          <p:cNvPr id="173" name=""/>
+          <p:cNvSpPr/>
+          <p:nvPr/>
+        </p:nvSpPr>
+        <p:spPr>
+          <a:xfrm rot="0" flipH="0" flipV="0">
+            <a:off x="742950" y="3333750"/>
+            <a:ext cx="2276475" cy="238125"/>
+          </a:xfrm>
+          <a:prstGeom prst="roundRect">
+            <a:avLst>
+              <a:gd name="adj" fmla="val 24000"/>
             </a:avLst>
           </a:prstGeom>
           <a:solidFill>
             <a:srgbClr val="BD9B56">
-              <a:alpha val="8000"/>
+              <a:alpha val="12000"/>
             </a:srgbClr>
           </a:solidFill>
           <a:ln/>
@@ -7585,19 +8589,19 @@
       </p:sp>
       <p:sp>
         <p:nvSpPr>
-          <p:cNvPr id="155" name="" descr="{&quot;isTemplate&quot;:true,&quot;type&quot;:&quot;text&quot;}"/>
-          <p:cNvSpPr txBox="1"/>
-          <p:nvPr/>
-        </p:nvSpPr>
-        <p:spPr>
-          <a:xfrm rot="0" flipH="0" flipV="0">
-            <a:off x="1009650" y="3162300"/>
-            <a:ext cx="1885950" cy="257175"/>
-          </a:xfrm>
-          <a:prstGeom prst="rect"/>
-        </p:spPr>
-        <p:txBody>
-          <a:bodyPr wrap="none" lIns="0" tIns="0" rIns="0" bIns="0"/>
+          <p:cNvPr id="174" name="" descr="{&quot;isTemplate&quot;:true,&quot;type&quot;:&quot;text&quot;}"/>
+          <p:cNvSpPr txBox="1"/>
+          <p:nvPr/>
+        </p:nvSpPr>
+        <p:spPr>
+          <a:xfrm rot="0" flipH="0" flipV="0">
+            <a:off x="742950" y="3333750"/>
+            <a:ext cx="2276475" cy="238125"/>
+          </a:xfrm>
+          <a:prstGeom prst="rect"/>
+        </p:spPr>
+        <p:txBody>
+          <a:bodyPr wrap="none" lIns="71438" tIns="35719" rIns="71438" bIns="35719"/>
           <a:p>
             <a:pPr>
               <a:lnSpc>
@@ -7605,113 +8609,88 @@
               </a:lnSpc>
             </a:pPr>
             <a:r>
-              <a:rPr lang="en-US" sz="1650">
-                <a:solidFill>
-                  <a:srgbClr val="BD9B56"/>
-                </a:solidFill>
-                <a:latin typeface="Inter"/>
-                <a:ea typeface="Inter"/>
-              </a:rPr>
-              <a:t>100%</a:t>
-            </a:r>
-            <a:endParaRPr/>
-          </a:p>
-        </p:txBody>
-      </p:sp>
-      <p:sp>
-        <p:nvSpPr>
-          <p:cNvPr id="156" name="" descr="{&quot;isTemplate&quot;:true,&quot;type&quot;:&quot;text&quot;}"/>
-          <p:cNvSpPr txBox="1"/>
-          <p:nvPr/>
-        </p:nvSpPr>
-        <p:spPr>
-          <a:xfrm rot="0" flipH="0" flipV="0">
-            <a:off x="1009650" y="3457575"/>
-            <a:ext cx="1885950" cy="142875"/>
-          </a:xfrm>
-          <a:prstGeom prst="rect"/>
-        </p:spPr>
-        <p:txBody>
-          <a:bodyPr wrap="none" lIns="0" tIns="0" rIns="0" bIns="0"/>
-          <a:p>
-            <a:pPr>
-              <a:lnSpc>
-                <a:spcPct val="100000"/>
-              </a:lnSpc>
-            </a:pPr>
+              <a:rPr lang="en-US" sz="900">
+                <a:solidFill>
+                  <a:srgbClr val="172133"/>
+                </a:solidFill>
+                <a:highlight>
+                  <a:srgbClr val="BD9B56">
+                    <a:alpha val="12000"/>
+                  </a:srgbClr>
+                </a:highlight>
+                <a:latin typeface="Microsoft YaHei"/>
+                <a:ea typeface="Microsoft YaHei"/>
+              </a:rPr>
+              <a:t>⏱ </a:t>
+            </a:r>
             <a:r>
               <a:rPr lang="zh-CN" sz="900">
                 <a:solidFill>
-                  <a:srgbClr val="5F5E5A"/>
-                </a:solidFill>
-                <a:latin typeface="Microsoft YaHei"/>
-                <a:ea typeface="Microsoft YaHei"/>
-              </a:rPr>
-              <a:t>意图</a:t>
+                  <a:srgbClr val="172133"/>
+                </a:solidFill>
+                <a:highlight>
+                  <a:srgbClr val="BD9B56">
+                    <a:alpha val="12000"/>
+                  </a:srgbClr>
+                </a:highlight>
+                <a:latin typeface="Microsoft YaHei"/>
+                <a:ea typeface="Microsoft YaHei"/>
+              </a:rPr>
+              <a:t>定时数据清理（</a:t>
             </a:r>
             <a:r>
               <a:rPr lang="en-US" sz="900">
                 <a:solidFill>
-                  <a:srgbClr val="5F5E5A"/>
-                </a:solidFill>
-                <a:latin typeface="Microsoft YaHei"/>
-                <a:ea typeface="Microsoft YaHei"/>
-              </a:rPr>
-              <a:t> / RAG </a:t>
+                  <a:srgbClr val="172133"/>
+                </a:solidFill>
+                <a:highlight>
+                  <a:srgbClr val="BD9B56">
+                    <a:alpha val="12000"/>
+                  </a:srgbClr>
+                </a:highlight>
+                <a:latin typeface="Microsoft YaHei"/>
+                <a:ea typeface="Microsoft YaHei"/>
+              </a:rPr>
+              <a:t>APScheduler </a:t>
             </a:r>
             <a:r>
               <a:rPr lang="zh-CN" sz="900">
                 <a:solidFill>
-                  <a:srgbClr val="5F5E5A"/>
-                </a:solidFill>
-                <a:latin typeface="Microsoft YaHei"/>
-                <a:ea typeface="Microsoft YaHei"/>
-              </a:rPr>
-              <a:t>召回</a:t>
-            </a:r>
-            <a:r>
-              <a:rPr lang="en-US" sz="900">
-                <a:solidFill>
-                  <a:srgbClr val="5F5E5A"/>
-                </a:solidFill>
-                <a:latin typeface="Microsoft YaHei"/>
-                <a:ea typeface="Microsoft YaHei"/>
-              </a:rPr>
-              <a:t> / </a:t>
-            </a:r>
-            <a:r>
-              <a:rPr lang="zh-CN" sz="900">
-                <a:solidFill>
-                  <a:srgbClr val="5F5E5A"/>
-                </a:solidFill>
-                <a:latin typeface="Microsoft YaHei"/>
-                <a:ea typeface="Microsoft YaHei"/>
-              </a:rPr>
-              <a:t>答案准确率</a:t>
-            </a:r>
-            <a:endParaRPr/>
-          </a:p>
-        </p:txBody>
-      </p:sp>
-      <p:sp>
-        <p:nvSpPr>
-          <p:cNvPr id="157" name=""/>
+                  <a:srgbClr val="172133"/>
+                </a:solidFill>
+                <a:highlight>
+                  <a:srgbClr val="BD9B56">
+                    <a:alpha val="12000"/>
+                  </a:srgbClr>
+                </a:highlight>
+                <a:latin typeface="Microsoft YaHei"/>
+                <a:ea typeface="Microsoft YaHei"/>
+              </a:rPr>
+              <a:t>每日）</a:t>
+            </a:r>
+            <a:endParaRPr/>
+          </a:p>
+        </p:txBody>
+      </p:sp>
+      <p:sp>
+        <p:nvSpPr>
+          <p:cNvPr id="175" name=""/>
           <p:cNvSpPr/>
           <p:nvPr/>
         </p:nvSpPr>
         <p:spPr>
           <a:xfrm rot="0" flipH="0" flipV="0">
-            <a:off x="3162300" y="3048000"/>
-            <a:ext cx="2152650" cy="666750"/>
+            <a:off x="3095625" y="3333750"/>
+            <a:ext cx="2028825" cy="238125"/>
           </a:xfrm>
           <a:prstGeom prst="roundRect">
             <a:avLst>
-              <a:gd name="adj" fmla="val 11429"/>
+              <a:gd name="adj" fmla="val 24000"/>
             </a:avLst>
           </a:prstGeom>
           <a:solidFill>
             <a:srgbClr val="BD9B56">
-              <a:alpha val="8000"/>
+              <a:alpha val="12000"/>
             </a:srgbClr>
           </a:solidFill>
           <a:ln/>
@@ -7723,19 +8702,19 @@
       </p:sp>
       <p:sp>
         <p:nvSpPr>
-          <p:cNvPr id="158" name="" descr="{&quot;isTemplate&quot;:true,&quot;type&quot;:&quot;text&quot;}"/>
-          <p:cNvSpPr txBox="1"/>
-          <p:nvPr/>
-        </p:nvSpPr>
-        <p:spPr>
-          <a:xfrm rot="0" flipH="0" flipV="0">
-            <a:off x="3295650" y="3162300"/>
-            <a:ext cx="1885950" cy="257175"/>
-          </a:xfrm>
-          <a:prstGeom prst="rect"/>
-        </p:spPr>
-        <p:txBody>
-          <a:bodyPr wrap="none" lIns="0" tIns="0" rIns="0" bIns="0"/>
+          <p:cNvPr id="176" name="" descr="{&quot;isTemplate&quot;:true,&quot;type&quot;:&quot;text&quot;}"/>
+          <p:cNvSpPr txBox="1"/>
+          <p:nvPr/>
+        </p:nvSpPr>
+        <p:spPr>
+          <a:xfrm rot="0" flipH="0" flipV="0">
+            <a:off x="3095625" y="3333750"/>
+            <a:ext cx="2028825" cy="238125"/>
+          </a:xfrm>
+          <a:prstGeom prst="rect"/>
+        </p:spPr>
+        <p:txBody>
+          <a:bodyPr wrap="none" lIns="71438" tIns="35719" rIns="71438" bIns="35719"/>
           <a:p>
             <a:pPr>
               <a:lnSpc>
@@ -7743,55 +8722,45 @@
               </a:lnSpc>
             </a:pPr>
             <a:r>
-              <a:rPr lang="en-US" sz="1650">
-                <a:solidFill>
-                  <a:srgbClr val="BD9B56"/>
-                </a:solidFill>
-                <a:latin typeface="Inter"/>
-                <a:ea typeface="Inter"/>
-              </a:rPr>
-              <a:t>113+30</a:t>
-            </a:r>
-            <a:endParaRPr/>
-          </a:p>
-        </p:txBody>
-      </p:sp>
-      <p:sp>
-        <p:nvSpPr>
-          <p:cNvPr id="159" name="" descr="{&quot;isTemplate&quot;:true,&quot;type&quot;:&quot;text&quot;}"/>
-          <p:cNvSpPr txBox="1"/>
-          <p:nvPr/>
-        </p:nvSpPr>
-        <p:spPr>
-          <a:xfrm rot="0" flipH="0" flipV="0">
-            <a:off x="3295650" y="3457575"/>
-            <a:ext cx="1885950" cy="142875"/>
-          </a:xfrm>
-          <a:prstGeom prst="rect"/>
-        </p:spPr>
-        <p:txBody>
-          <a:bodyPr wrap="none" lIns="0" tIns="0" rIns="0" bIns="0"/>
-          <a:p>
-            <a:pPr>
-              <a:lnSpc>
-                <a:spcPct val="100000"/>
-              </a:lnSpc>
-            </a:pPr>
+              <a:rPr lang="en-US" sz="900">
+                <a:solidFill>
+                  <a:srgbClr val="172133"/>
+                </a:solidFill>
+                <a:highlight>
+                  <a:srgbClr val="BD9B56">
+                    <a:alpha val="12000"/>
+                  </a:srgbClr>
+                </a:highlight>
+                <a:latin typeface="Microsoft YaHei"/>
+                <a:ea typeface="Microsoft YaHei"/>
+              </a:rPr>
+              <a:t>📷 </a:t>
+            </a:r>
             <a:r>
               <a:rPr lang="zh-CN" sz="900">
                 <a:solidFill>
-                  <a:srgbClr val="5F5E5A"/>
-                </a:solidFill>
-                <a:latin typeface="Microsoft YaHei"/>
-                <a:ea typeface="Microsoft YaHei"/>
-              </a:rPr>
-              <a:t>后端</a:t>
+                  <a:srgbClr val="172133"/>
+                </a:solidFill>
+                <a:highlight>
+                  <a:srgbClr val="BD9B56">
+                    <a:alpha val="12000"/>
+                  </a:srgbClr>
+                </a:highlight>
+                <a:latin typeface="Microsoft YaHei"/>
+                <a:ea typeface="Microsoft YaHei"/>
+              </a:rPr>
+              <a:t>巡检自动化（抓拍</a:t>
             </a:r>
             <a:r>
               <a:rPr lang="en-US" sz="900">
                 <a:solidFill>
-                  <a:srgbClr val="5F5E5A"/>
-                </a:solidFill>
+                  <a:srgbClr val="172133"/>
+                </a:solidFill>
+                <a:highlight>
+                  <a:srgbClr val="BD9B56">
+                    <a:alpha val="12000"/>
+                  </a:srgbClr>
+                </a:highlight>
                 <a:latin typeface="Microsoft YaHei"/>
                 <a:ea typeface="Microsoft YaHei"/>
               </a:rPr>
@@ -7800,36 +8769,41 @@
             <a:r>
               <a:rPr lang="zh-CN" sz="900">
                 <a:solidFill>
-                  <a:srgbClr val="5F5E5A"/>
-                </a:solidFill>
-                <a:latin typeface="Microsoft YaHei"/>
-                <a:ea typeface="Microsoft YaHei"/>
-              </a:rPr>
-              <a:t>前端测试全绿</a:t>
-            </a:r>
-            <a:endParaRPr/>
-          </a:p>
-        </p:txBody>
-      </p:sp>
-      <p:sp>
-        <p:nvSpPr>
-          <p:cNvPr id="160" name=""/>
+                  <a:srgbClr val="172133"/>
+                </a:solidFill>
+                <a:highlight>
+                  <a:srgbClr val="BD9B56">
+                    <a:alpha val="12000"/>
+                  </a:srgbClr>
+                </a:highlight>
+                <a:latin typeface="Microsoft YaHei"/>
+                <a:ea typeface="Microsoft YaHei"/>
+              </a:rPr>
+              <a:t>视觉识别）</a:t>
+            </a:r>
+            <a:endParaRPr/>
+          </a:p>
+        </p:txBody>
+      </p:sp>
+      <p:sp>
+        <p:nvSpPr>
+          <p:cNvPr id="177" name=""/>
           <p:cNvSpPr/>
           <p:nvPr/>
         </p:nvSpPr>
         <p:spPr>
           <a:xfrm rot="0" flipH="0" flipV="0">
-            <a:off x="5448300" y="3048000"/>
-            <a:ext cx="2152650" cy="666750"/>
+            <a:off x="5200650" y="3333750"/>
+            <a:ext cx="2238375" cy="238125"/>
           </a:xfrm>
           <a:prstGeom prst="roundRect">
             <a:avLst>
-              <a:gd name="adj" fmla="val 11429"/>
+              <a:gd name="adj" fmla="val 24000"/>
             </a:avLst>
           </a:prstGeom>
           <a:solidFill>
             <a:srgbClr val="BD9B56">
-              <a:alpha val="8000"/>
+              <a:alpha val="12000"/>
             </a:srgbClr>
           </a:solidFill>
           <a:ln/>
@@ -7841,19 +8815,19 @@
       </p:sp>
       <p:sp>
         <p:nvSpPr>
-          <p:cNvPr id="161" name="" descr="{&quot;isTemplate&quot;:true,&quot;type&quot;:&quot;text&quot;}"/>
-          <p:cNvSpPr txBox="1"/>
-          <p:nvPr/>
-        </p:nvSpPr>
-        <p:spPr>
-          <a:xfrm rot="0" flipH="0" flipV="0">
-            <a:off x="5581650" y="3162300"/>
-            <a:ext cx="1885950" cy="257175"/>
-          </a:xfrm>
-          <a:prstGeom prst="rect"/>
-        </p:spPr>
-        <p:txBody>
-          <a:bodyPr wrap="none" lIns="0" tIns="0" rIns="0" bIns="0"/>
+          <p:cNvPr id="178" name="" descr="{&quot;isTemplate&quot;:true,&quot;type&quot;:&quot;text&quot;}"/>
+          <p:cNvSpPr txBox="1"/>
+          <p:nvPr/>
+        </p:nvSpPr>
+        <p:spPr>
+          <a:xfrm rot="0" flipH="0" flipV="0">
+            <a:off x="5200650" y="3333750"/>
+            <a:ext cx="2238375" cy="238125"/>
+          </a:xfrm>
+          <a:prstGeom prst="rect"/>
+        </p:spPr>
+        <p:txBody>
+          <a:bodyPr wrap="none" lIns="71438" tIns="35719" rIns="71438" bIns="35719"/>
           <a:p>
             <a:pPr>
               <a:lnSpc>
@@ -7861,318 +8835,374 @@
               </a:lnSpc>
             </a:pPr>
             <a:r>
-              <a:rPr lang="en-US" sz="1650">
-                <a:solidFill>
-                  <a:srgbClr val="BD9B56"/>
-                </a:solidFill>
-                <a:latin typeface="Inter"/>
-                <a:ea typeface="Inter"/>
-              </a:rPr>
-              <a:t>7 </a:t>
-            </a:r>
-            <a:r>
-              <a:rPr lang="zh-CN" sz="1650">
-                <a:solidFill>
-                  <a:srgbClr val="BD9B56"/>
-                </a:solidFill>
-                <a:latin typeface="Inter"/>
-                <a:ea typeface="Inter"/>
-              </a:rPr>
-              <a:t>阶段</a:t>
-            </a:r>
-            <a:endParaRPr/>
-          </a:p>
-        </p:txBody>
-      </p:sp>
-      <p:sp>
-        <p:nvSpPr>
-          <p:cNvPr id="162" name="" descr="{&quot;isTemplate&quot;:true,&quot;type&quot;:&quot;text&quot;}"/>
-          <p:cNvSpPr txBox="1"/>
-          <p:nvPr/>
-        </p:nvSpPr>
-        <p:spPr>
-          <a:xfrm rot="0" flipH="0" flipV="0">
-            <a:off x="5581650" y="3457575"/>
-            <a:ext cx="1885950" cy="142875"/>
-          </a:xfrm>
-          <a:prstGeom prst="rect"/>
-        </p:spPr>
-        <p:txBody>
-          <a:bodyPr wrap="none" lIns="0" tIns="0" rIns="0" bIns="0"/>
-          <a:p>
-            <a:pPr>
-              <a:lnSpc>
-                <a:spcPct val="100000"/>
-              </a:lnSpc>
-            </a:pPr>
-            <a:r>
               <a:rPr lang="en-US" sz="900">
                 <a:solidFill>
-                  <a:srgbClr val="5F5E5A"/>
-                </a:solidFill>
-                <a:latin typeface="Microsoft YaHei"/>
-                <a:ea typeface="Microsoft YaHei"/>
-              </a:rPr>
-              <a:t>Phase 0-7 </a:t>
+                  <a:srgbClr val="172133"/>
+                </a:solidFill>
+                <a:highlight>
+                  <a:srgbClr val="BD9B56">
+                    <a:alpha val="12000"/>
+                  </a:srgbClr>
+                </a:highlight>
+                <a:latin typeface="Microsoft YaHei"/>
+                <a:ea typeface="Microsoft YaHei"/>
+              </a:rPr>
+              <a:t>🧠 </a:t>
             </a:r>
             <a:r>
               <a:rPr lang="zh-CN" sz="900">
                 <a:solidFill>
-                  <a:srgbClr val="5F5E5A"/>
-                </a:solidFill>
-                <a:latin typeface="Microsoft YaHei"/>
-                <a:ea typeface="Microsoft YaHei"/>
-              </a:rPr>
-              <a:t>全部完成</a:t>
-            </a:r>
-            <a:endParaRPr/>
-          </a:p>
-        </p:txBody>
-      </p:sp>
-      <p:sp>
-        <p:nvSpPr>
-          <p:cNvPr id="163" name="" descr="{&quot;isTemplate&quot;:true,&quot;type&quot;:&quot;text&quot;}"/>
-          <p:cNvSpPr txBox="1"/>
-          <p:nvPr/>
-        </p:nvSpPr>
-        <p:spPr>
-          <a:xfrm rot="0" flipH="0" flipV="0">
-            <a:off x="876300" y="3848100"/>
-            <a:ext cx="6724650" cy="161925"/>
-          </a:xfrm>
-          <a:prstGeom prst="rect"/>
-        </p:spPr>
-        <p:txBody>
-          <a:bodyPr wrap="none" lIns="0" tIns="0" rIns="0" bIns="0"/>
-          <a:p>
-            <a:pPr>
-              <a:lnSpc>
-                <a:spcPct val="100000"/>
-              </a:lnSpc>
-            </a:pPr>
-            <a:r>
-              <a:rPr lang="zh-CN" sz="1050" spc="-9223372036854775808">
-                <a:solidFill>
-                  <a:srgbClr val="BD9B56"/>
-                </a:solidFill>
-                <a:latin typeface="Microsoft YaHei"/>
-                <a:ea typeface="Microsoft YaHei"/>
-              </a:rPr>
-              <a:t>技术栈</a:t>
-            </a:r>
-            <a:endParaRPr/>
-          </a:p>
-        </p:txBody>
-      </p:sp>
-      <p:sp>
-        <p:nvSpPr>
-          <p:cNvPr id="164" name="" descr="{&quot;isTemplate&quot;:true,&quot;type&quot;:&quot;text&quot;}"/>
-          <p:cNvSpPr txBox="1"/>
-          <p:nvPr/>
-        </p:nvSpPr>
-        <p:spPr>
-          <a:xfrm rot="0" flipH="0" flipV="0">
-            <a:off x="876300" y="4086225"/>
-            <a:ext cx="6724650" cy="276225"/>
-          </a:xfrm>
-          <a:prstGeom prst="rect"/>
-        </p:spPr>
-        <p:txBody>
-          <a:bodyPr wrap="none" lIns="0" tIns="0" rIns="0" bIns="0"/>
-          <a:p>
-            <a:pPr>
-              <a:lnSpc>
-                <a:spcPct val="180000"/>
-              </a:lnSpc>
-            </a:pPr>
-            <a:r>
-              <a:rPr lang="en-US" sz="975">
-                <a:solidFill>
-                  <a:srgbClr val="5F5E5A"/>
-                </a:solidFill>
-                <a:latin typeface="Microsoft YaHei"/>
-                <a:ea typeface="Microsoft YaHei"/>
-              </a:rPr>
-              <a:t>React + TypeScript + Tailwind · FastAPI + SQLAlchemy + LangGraph · PostgreSQL + pgvector · </a:t>
-            </a:r>
-            <a:r>
-              <a:rPr lang="zh-CN" sz="975">
-                <a:solidFill>
-                  <a:srgbClr val="5F5E5A"/>
-                </a:solidFill>
-                <a:latin typeface="Microsoft YaHei"/>
-                <a:ea typeface="Microsoft YaHei"/>
-              </a:rPr>
-              <a:t>智谱</a:t>
-            </a:r>
-            <a:r>
-              <a:rPr lang="en-US" sz="975">
-                <a:solidFill>
-                  <a:srgbClr val="5F5E5A"/>
-                </a:solidFill>
-                <a:latin typeface="Microsoft YaHei"/>
-                <a:ea typeface="Microsoft YaHei"/>
-              </a:rPr>
-              <a:t> GLM-4-Flash</a:t>
-            </a:r>
-            <a:endParaRPr/>
-          </a:p>
-        </p:txBody>
-      </p:sp>
-      <p:sp>
-        <p:nvSpPr>
-          <p:cNvPr id="165" name="" descr="{&quot;isTemplate&quot;:true,&quot;type&quot;:&quot;text&quot;}"/>
-          <p:cNvSpPr txBox="1"/>
-          <p:nvPr/>
-        </p:nvSpPr>
-        <p:spPr>
-          <a:xfrm rot="0" flipH="0" flipV="0">
-            <a:off x="876300" y="4495800"/>
-            <a:ext cx="6724650" cy="161925"/>
-          </a:xfrm>
-          <a:prstGeom prst="rect"/>
-        </p:spPr>
-        <p:txBody>
-          <a:bodyPr wrap="none" lIns="0" tIns="0" rIns="0" bIns="0"/>
-          <a:p>
-            <a:pPr>
-              <a:lnSpc>
-                <a:spcPct val="100000"/>
-              </a:lnSpc>
-            </a:pPr>
-            <a:r>
-              <a:rPr lang="zh-CN" sz="1050" spc="-9223372036854775808">
-                <a:solidFill>
-                  <a:srgbClr val="BD9B56"/>
-                </a:solidFill>
-                <a:latin typeface="Microsoft YaHei"/>
-                <a:ea typeface="Microsoft YaHei"/>
-              </a:rPr>
-              <a:t>未来展望</a:t>
-            </a:r>
-            <a:endParaRPr/>
-          </a:p>
-        </p:txBody>
-      </p:sp>
-      <p:sp>
-        <p:nvSpPr>
-          <p:cNvPr id="166" name="" descr="{&quot;isTemplate&quot;:true,&quot;type&quot;:&quot;text&quot;}"/>
-          <p:cNvSpPr txBox="1"/>
-          <p:nvPr/>
-        </p:nvSpPr>
-        <p:spPr>
-          <a:xfrm rot="0" flipH="0" flipV="0">
-            <a:off x="876300" y="4733925"/>
-            <a:ext cx="6724650" cy="276225"/>
-          </a:xfrm>
-          <a:prstGeom prst="rect"/>
-        </p:spPr>
-        <p:txBody>
-          <a:bodyPr wrap="none" lIns="0" tIns="0" rIns="0" bIns="0"/>
-          <a:p>
-            <a:pPr>
-              <a:lnSpc>
-                <a:spcPct val="180000"/>
-              </a:lnSpc>
-            </a:pPr>
-            <a:r>
-              <a:rPr lang="en-US" sz="975">
-                <a:solidFill>
-                  <a:srgbClr val="5F5E5A"/>
-                </a:solidFill>
-                <a:latin typeface="Microsoft YaHei"/>
-                <a:ea typeface="Microsoft YaHei"/>
-              </a:rPr>
-              <a:t>IoT </a:t>
-            </a:r>
-            <a:r>
-              <a:rPr lang="zh-CN" sz="975">
-                <a:solidFill>
-                  <a:srgbClr val="5F5E5A"/>
-                </a:solidFill>
-                <a:latin typeface="Microsoft YaHei"/>
-                <a:ea typeface="Microsoft YaHei"/>
-              </a:rPr>
-              <a:t>设备接入</a:t>
-            </a:r>
-            <a:r>
-              <a:rPr lang="en-US" sz="975">
-                <a:solidFill>
-                  <a:srgbClr val="5F5E5A"/>
-                </a:solidFill>
-                <a:latin typeface="Microsoft YaHei"/>
-                <a:ea typeface="Microsoft YaHei"/>
-              </a:rPr>
-              <a:t> · </a:t>
-            </a:r>
-            <a:r>
-              <a:rPr lang="zh-CN" sz="975">
-                <a:solidFill>
-                  <a:srgbClr val="5F5E5A"/>
-                </a:solidFill>
-                <a:latin typeface="Microsoft YaHei"/>
-                <a:ea typeface="Microsoft YaHei"/>
-              </a:rPr>
-              <a:t>语音助手</a:t>
-            </a:r>
-            <a:r>
-              <a:rPr lang="en-US" sz="975">
-                <a:solidFill>
-                  <a:srgbClr val="5F5E5A"/>
-                </a:solidFill>
-                <a:latin typeface="Microsoft YaHei"/>
-                <a:ea typeface="Microsoft YaHei"/>
-              </a:rPr>
-              <a:t> · </a:t>
-            </a:r>
-            <a:r>
-              <a:rPr lang="zh-CN" sz="975">
-                <a:solidFill>
-                  <a:srgbClr val="5F5E5A"/>
-                </a:solidFill>
-                <a:latin typeface="Microsoft YaHei"/>
-                <a:ea typeface="Microsoft YaHei"/>
-              </a:rPr>
-              <a:t>多社区平台化（</a:t>
-            </a:r>
-            <a:r>
-              <a:rPr lang="en-US" sz="975">
-                <a:solidFill>
-                  <a:srgbClr val="5F5E5A"/>
-                </a:solidFill>
-                <a:latin typeface="Microsoft YaHei"/>
-                <a:ea typeface="Microsoft YaHei"/>
-              </a:rPr>
-              <a:t>SaaS</a:t>
-            </a:r>
-            <a:r>
-              <a:rPr lang="zh-CN" sz="975">
-                <a:solidFill>
-                  <a:srgbClr val="5F5E5A"/>
-                </a:solidFill>
-                <a:latin typeface="Microsoft YaHei"/>
-                <a:ea typeface="Microsoft YaHei"/>
-              </a:rPr>
-              <a:t>）</a:t>
-            </a:r>
-            <a:endParaRPr/>
-          </a:p>
-        </p:txBody>
-      </p:sp>
-      <p:sp>
-        <p:nvSpPr>
-          <p:cNvPr id="167" name=""/>
+                  <a:srgbClr val="172133"/>
+                </a:solidFill>
+                <a:highlight>
+                  <a:srgbClr val="BD9B56">
+                    <a:alpha val="12000"/>
+                  </a:srgbClr>
+                </a:highlight>
+                <a:latin typeface="Microsoft YaHei"/>
+                <a:ea typeface="Microsoft YaHei"/>
+              </a:rPr>
+              <a:t>知识自进化（反馈</a:t>
+            </a:r>
+            <a:r>
+              <a:rPr lang="en-US" sz="900">
+                <a:solidFill>
+                  <a:srgbClr val="172133"/>
+                </a:solidFill>
+                <a:highlight>
+                  <a:srgbClr val="BD9B56">
+                    <a:alpha val="12000"/>
+                  </a:srgbClr>
+                </a:highlight>
+                <a:latin typeface="Microsoft YaHei"/>
+                <a:ea typeface="Microsoft YaHei"/>
+              </a:rPr>
+              <a:t> → </a:t>
+            </a:r>
+            <a:r>
+              <a:rPr lang="zh-CN" sz="900">
+                <a:solidFill>
+                  <a:srgbClr val="172133"/>
+                </a:solidFill>
+                <a:highlight>
+                  <a:srgbClr val="BD9B56">
+                    <a:alpha val="12000"/>
+                  </a:srgbClr>
+                </a:highlight>
+                <a:latin typeface="Microsoft YaHei"/>
+                <a:ea typeface="Microsoft YaHei"/>
+              </a:rPr>
+              <a:t>审核</a:t>
+            </a:r>
+            <a:r>
+              <a:rPr lang="en-US" sz="900">
+                <a:solidFill>
+                  <a:srgbClr val="172133"/>
+                </a:solidFill>
+                <a:highlight>
+                  <a:srgbClr val="BD9B56">
+                    <a:alpha val="12000"/>
+                  </a:srgbClr>
+                </a:highlight>
+                <a:latin typeface="Microsoft YaHei"/>
+                <a:ea typeface="Microsoft YaHei"/>
+              </a:rPr>
+              <a:t> → </a:t>
+            </a:r>
+            <a:r>
+              <a:rPr lang="zh-CN" sz="900">
+                <a:solidFill>
+                  <a:srgbClr val="172133"/>
+                </a:solidFill>
+                <a:highlight>
+                  <a:srgbClr val="BD9B56">
+                    <a:alpha val="12000"/>
+                  </a:srgbClr>
+                </a:highlight>
+                <a:latin typeface="Microsoft YaHei"/>
+                <a:ea typeface="Microsoft YaHei"/>
+              </a:rPr>
+              <a:t>入库）</a:t>
+            </a:r>
+            <a:endParaRPr/>
+          </a:p>
+        </p:txBody>
+      </p:sp>
+      <p:sp>
+        <p:nvSpPr>
+          <p:cNvPr id="179" name=""/>
           <p:cNvSpPr/>
           <p:nvPr/>
         </p:nvSpPr>
         <p:spPr>
           <a:xfrm rot="0" flipH="0" flipV="0">
-            <a:off x="8153400" y="2628900"/>
-            <a:ext cx="3429000" cy="1876425"/>
+            <a:off x="742950" y="3648075"/>
+            <a:ext cx="2314575" cy="238125"/>
           </a:xfrm>
           <a:prstGeom prst="roundRect">
             <a:avLst>
-              <a:gd name="adj" fmla="val 6091"/>
+              <a:gd name="adj" fmla="val 24000"/>
+            </a:avLst>
+          </a:prstGeom>
+          <a:solidFill>
+            <a:srgbClr val="BD9B56">
+              <a:alpha val="12000"/>
+            </a:srgbClr>
+          </a:solidFill>
+          <a:ln/>
+        </p:spPr>
+        <p:txBody>
+          <a:bodyPr/>
+          <a:p/>
+        </p:txBody>
+      </p:sp>
+      <p:sp>
+        <p:nvSpPr>
+          <p:cNvPr id="180" name="" descr="{&quot;isTemplate&quot;:true,&quot;type&quot;:&quot;text&quot;}"/>
+          <p:cNvSpPr txBox="1"/>
+          <p:nvPr/>
+        </p:nvSpPr>
+        <p:spPr>
+          <a:xfrm rot="0" flipH="0" flipV="0">
+            <a:off x="742950" y="3648075"/>
+            <a:ext cx="2314575" cy="238125"/>
+          </a:xfrm>
+          <a:prstGeom prst="rect"/>
+        </p:spPr>
+        <p:txBody>
+          <a:bodyPr wrap="none" lIns="71438" tIns="35719" rIns="71438" bIns="35719"/>
+          <a:p>
+            <a:pPr>
+              <a:lnSpc>
+                <a:spcPct val="100000"/>
+              </a:lnSpc>
+            </a:pPr>
+            <a:r>
+              <a:rPr lang="en-US" sz="900">
+                <a:solidFill>
+                  <a:srgbClr val="172133"/>
+                </a:solidFill>
+                <a:highlight>
+                  <a:srgbClr val="BD9B56">
+                    <a:alpha val="12000"/>
+                  </a:srgbClr>
+                </a:highlight>
+                <a:latin typeface="Microsoft YaHei"/>
+                <a:ea typeface="Microsoft YaHei"/>
+              </a:rPr>
+              <a:t>📊 </a:t>
+            </a:r>
+            <a:r>
+              <a:rPr lang="zh-CN" sz="900">
+                <a:solidFill>
+                  <a:srgbClr val="172133"/>
+                </a:solidFill>
+                <a:highlight>
+                  <a:srgbClr val="BD9B56">
+                    <a:alpha val="12000"/>
+                  </a:srgbClr>
+                </a:highlight>
+                <a:latin typeface="Microsoft YaHei"/>
+                <a:ea typeface="Microsoft YaHei"/>
+              </a:rPr>
+              <a:t>监控告警（</a:t>
+            </a:r>
+            <a:r>
+              <a:rPr lang="en-US" sz="900">
+                <a:solidFill>
+                  <a:srgbClr val="172133"/>
+                </a:solidFill>
+                <a:highlight>
+                  <a:srgbClr val="BD9B56">
+                    <a:alpha val="12000"/>
+                  </a:srgbClr>
+                </a:highlight>
+                <a:latin typeface="Microsoft YaHei"/>
+                <a:ea typeface="Microsoft YaHei"/>
+              </a:rPr>
+              <a:t>Prometheus + Grafana</a:t>
+            </a:r>
+            <a:r>
+              <a:rPr lang="zh-CN" sz="900">
+                <a:solidFill>
+                  <a:srgbClr val="172133"/>
+                </a:solidFill>
+                <a:highlight>
+                  <a:srgbClr val="BD9B56">
+                    <a:alpha val="12000"/>
+                  </a:srgbClr>
+                </a:highlight>
+                <a:latin typeface="Microsoft YaHei"/>
+                <a:ea typeface="Microsoft YaHei"/>
+              </a:rPr>
+              <a:t>）</a:t>
+            </a:r>
+            <a:endParaRPr/>
+          </a:p>
+        </p:txBody>
+      </p:sp>
+      <p:sp>
+        <p:nvSpPr>
+          <p:cNvPr id="181" name=""/>
+          <p:cNvSpPr/>
+          <p:nvPr/>
+        </p:nvSpPr>
+        <p:spPr>
+          <a:xfrm rot="0" flipH="0" flipV="0">
+            <a:off x="3133725" y="3648075"/>
+            <a:ext cx="2486025" cy="238125"/>
+          </a:xfrm>
+          <a:prstGeom prst="roundRect">
+            <a:avLst>
+              <a:gd name="adj" fmla="val 24000"/>
+            </a:avLst>
+          </a:prstGeom>
+          <a:solidFill>
+            <a:srgbClr val="BD9B56">
+              <a:alpha val="12000"/>
+            </a:srgbClr>
+          </a:solidFill>
+          <a:ln/>
+        </p:spPr>
+        <p:txBody>
+          <a:bodyPr/>
+          <a:p/>
+        </p:txBody>
+      </p:sp>
+      <p:sp>
+        <p:nvSpPr>
+          <p:cNvPr id="182" name="" descr="{&quot;isTemplate&quot;:true,&quot;type&quot;:&quot;text&quot;}"/>
+          <p:cNvSpPr txBox="1"/>
+          <p:nvPr/>
+        </p:nvSpPr>
+        <p:spPr>
+          <a:xfrm rot="0" flipH="0" flipV="0">
+            <a:off x="3133725" y="3648075"/>
+            <a:ext cx="2486025" cy="238125"/>
+          </a:xfrm>
+          <a:prstGeom prst="rect"/>
+        </p:spPr>
+        <p:txBody>
+          <a:bodyPr wrap="none" lIns="71438" tIns="35719" rIns="71438" bIns="35719"/>
+          <a:p>
+            <a:pPr>
+              <a:lnSpc>
+                <a:spcPct val="100000"/>
+              </a:lnSpc>
+            </a:pPr>
+            <a:r>
+              <a:rPr lang="en-US" sz="900">
+                <a:solidFill>
+                  <a:srgbClr val="172133"/>
+                </a:solidFill>
+                <a:highlight>
+                  <a:srgbClr val="BD9B56">
+                    <a:alpha val="12000"/>
+                  </a:srgbClr>
+                </a:highlight>
+                <a:latin typeface="Microsoft YaHei"/>
+                <a:ea typeface="Microsoft YaHei"/>
+              </a:rPr>
+              <a:t>🚀 CI/CD</a:t>
+            </a:r>
+            <a:r>
+              <a:rPr lang="zh-CN" sz="900">
+                <a:solidFill>
+                  <a:srgbClr val="172133"/>
+                </a:solidFill>
+                <a:highlight>
+                  <a:srgbClr val="BD9B56">
+                    <a:alpha val="12000"/>
+                  </a:srgbClr>
+                </a:highlight>
+                <a:latin typeface="Microsoft YaHei"/>
+                <a:ea typeface="Microsoft YaHei"/>
+              </a:rPr>
+              <a:t>（</a:t>
+            </a:r>
+            <a:r>
+              <a:rPr lang="en-US" sz="900">
+                <a:solidFill>
+                  <a:srgbClr val="172133"/>
+                </a:solidFill>
+                <a:highlight>
+                  <a:srgbClr val="BD9B56">
+                    <a:alpha val="12000"/>
+                  </a:srgbClr>
+                </a:highlight>
+                <a:latin typeface="Microsoft YaHei"/>
+                <a:ea typeface="Microsoft YaHei"/>
+              </a:rPr>
+              <a:t>GitHub Actions </a:t>
+            </a:r>
+            <a:r>
+              <a:rPr lang="zh-CN" sz="900">
+                <a:solidFill>
+                  <a:srgbClr val="172133"/>
+                </a:solidFill>
+                <a:highlight>
+                  <a:srgbClr val="BD9B56">
+                    <a:alpha val="12000"/>
+                  </a:srgbClr>
+                </a:highlight>
+                <a:latin typeface="Microsoft YaHei"/>
+                <a:ea typeface="Microsoft YaHei"/>
+              </a:rPr>
+              <a:t>自动测试发布）</a:t>
+            </a:r>
+            <a:endParaRPr/>
+          </a:p>
+        </p:txBody>
+      </p:sp>
+      <p:sp>
+        <p:nvSpPr>
+          <p:cNvPr id="183" name="" descr="{&quot;isTemplate&quot;:true,&quot;type&quot;:&quot;text&quot;}"/>
+          <p:cNvSpPr txBox="1"/>
+          <p:nvPr/>
+        </p:nvSpPr>
+        <p:spPr>
+          <a:xfrm rot="0" flipH="0" flipV="0">
+            <a:off x="742950" y="3981450"/>
+            <a:ext cx="7124700" cy="228600"/>
+          </a:xfrm>
+          <a:prstGeom prst="rect"/>
+        </p:spPr>
+        <p:txBody>
+          <a:bodyPr wrap="none" lIns="0" tIns="0" rIns="0" bIns="0"/>
+          <a:p>
+            <a:pPr>
+              <a:lnSpc>
+                <a:spcPct val="160000"/>
+              </a:lnSpc>
+            </a:pPr>
+            <a:r>
+              <a:rPr lang="zh-CN" sz="900">
+                <a:solidFill>
+                  <a:srgbClr val="6B7075"/>
+                </a:solidFill>
+                <a:latin typeface="Microsoft YaHei"/>
+                <a:ea typeface="Microsoft YaHei"/>
+              </a:rPr>
+              <a:t>系统无需人工值守即可完成数据清理、自动巡检、知识沉淀、监控告警与持续交付，形成「越用越准、越用越稳」的自进化闭环。</a:t>
+            </a:r>
+            <a:endParaRPr/>
+          </a:p>
+        </p:txBody>
+      </p:sp>
+      <p:sp>
+        <p:nvSpPr>
+          <p:cNvPr id="184" name=""/>
+          <p:cNvSpPr/>
+          <p:nvPr/>
+        </p:nvSpPr>
+        <p:spPr>
+          <a:xfrm rot="0" flipH="0" flipV="0">
+            <a:off x="8286750" y="952500"/>
+            <a:ext cx="3333750" cy="2019300"/>
+          </a:xfrm>
+          <a:prstGeom prst="roundRect">
+            <a:avLst>
+              <a:gd name="adj" fmla="val 5660"/>
             </a:avLst>
           </a:prstGeom>
           <a:gradFill>
@@ -8195,14 +9225,14 @@
       </p:sp>
       <p:sp>
         <p:nvSpPr>
-          <p:cNvPr id="168" name="" descr="{&quot;isTemplate&quot;:true,&quot;type&quot;:&quot;text&quot;}"/>
-          <p:cNvSpPr txBox="1"/>
-          <p:nvPr/>
-        </p:nvSpPr>
-        <p:spPr>
-          <a:xfrm rot="0" flipH="0" flipV="0">
-            <a:off x="8401050" y="2876550"/>
-            <a:ext cx="2933700" cy="152400"/>
+          <p:cNvPr id="185" name="" descr="{&quot;isTemplate&quot;:true,&quot;type&quot;:&quot;text&quot;}"/>
+          <p:cNvSpPr txBox="1"/>
+          <p:nvPr/>
+        </p:nvSpPr>
+        <p:spPr>
+          <a:xfrm rot="0" flipH="0" flipV="0">
+            <a:off x="8496300" y="1143000"/>
+            <a:ext cx="2914650" cy="152400"/>
           </a:xfrm>
           <a:prstGeom prst="rect"/>
         </p:spPr>
@@ -8230,14 +9260,14 @@
       </p:sp>
       <p:sp>
         <p:nvSpPr>
-          <p:cNvPr id="169" name="" descr="{&quot;isTemplate&quot;:true,&quot;type&quot;:&quot;text&quot;}"/>
-          <p:cNvSpPr txBox="1"/>
-          <p:nvPr/>
-        </p:nvSpPr>
-        <p:spPr>
-          <a:xfrm rot="0" flipH="0" flipV="0">
-            <a:off x="8401050" y="3181350"/>
-            <a:ext cx="2933700" cy="333375"/>
+          <p:cNvPr id="186" name="" descr="{&quot;isTemplate&quot;:true,&quot;type&quot;:&quot;text&quot;}"/>
+          <p:cNvSpPr txBox="1"/>
+          <p:nvPr/>
+        </p:nvSpPr>
+        <p:spPr>
+          <a:xfrm rot="0" flipH="0" flipV="0">
+            <a:off x="8496300" y="1409700"/>
+            <a:ext cx="2914650" cy="314325"/>
           </a:xfrm>
           <a:prstGeom prst="rect"/>
         </p:spPr>
@@ -8250,7 +9280,7 @@
               </a:lnSpc>
             </a:pPr>
             <a:r>
-              <a:rPr lang="en-US" sz="1425">
+              <a:rPr lang="en-US" sz="1350">
                 <a:solidFill>
                   <a:srgbClr val="FBFCFA"/>
                 </a:solidFill>
@@ -8265,14 +9295,14 @@
       </p:sp>
       <p:sp>
         <p:nvSpPr>
-          <p:cNvPr id="170" name="" descr="{&quot;isTemplate&quot;:true,&quot;type&quot;:&quot;text&quot;}"/>
-          <p:cNvSpPr txBox="1"/>
-          <p:nvPr/>
-        </p:nvSpPr>
-        <p:spPr>
-          <a:xfrm rot="0" flipH="0" flipV="0">
-            <a:off x="8401050" y="3667125"/>
-            <a:ext cx="2933700" cy="0"/>
+          <p:cNvPr id="187" name="" descr="{&quot;isTemplate&quot;:true,&quot;type&quot;:&quot;text&quot;}"/>
+          <p:cNvSpPr txBox="1"/>
+          <p:nvPr/>
+        </p:nvSpPr>
+        <p:spPr>
+          <a:xfrm rot="0" flipH="0" flipV="0">
+            <a:off x="8496300" y="1838325"/>
+            <a:ext cx="2914650" cy="0"/>
           </a:xfrm>
           <a:prstGeom prst="rect"/>
         </p:spPr>
@@ -8286,56 +9316,14 @@
       </p:sp>
       <p:sp>
         <p:nvSpPr>
-          <p:cNvPr id="171" name="" descr="{&quot;isTemplate&quot;:true,&quot;type&quot;:&quot;text&quot;}"/>
-          <p:cNvSpPr txBox="1"/>
-          <p:nvPr/>
-        </p:nvSpPr>
-        <p:spPr>
-          <a:xfrm rot="0" flipH="0" flipV="0">
-            <a:off x="8401050" y="3667125"/>
-            <a:ext cx="2933700" cy="0"/>
-          </a:xfrm>
-          <a:prstGeom prst="rect"/>
-        </p:spPr>
-        <p:txBody>
-          <a:bodyPr wrap="none" lIns="0" tIns="0" rIns="0" bIns="0"/>
-          <a:p>
-            <a:pPr/>
-            <a:endParaRPr/>
-          </a:p>
-        </p:txBody>
-      </p:sp>
-      <p:sp>
-        <p:nvSpPr>
-          <p:cNvPr id="172" name="" descr="{&quot;isTemplate&quot;:true,&quot;type&quot;:&quot;text&quot;}"/>
-          <p:cNvSpPr txBox="1"/>
-          <p:nvPr/>
-        </p:nvSpPr>
-        <p:spPr>
-          <a:xfrm rot="0" flipH="0" flipV="0">
-            <a:off x="8401050" y="3667125"/>
-            <a:ext cx="2933700" cy="0"/>
-          </a:xfrm>
-          <a:prstGeom prst="rect"/>
-        </p:spPr>
-        <p:txBody>
-          <a:bodyPr wrap="none" lIns="0" tIns="0" rIns="0" bIns="0"/>
-          <a:p>
-            <a:pPr/>
-            <a:endParaRPr/>
-          </a:p>
-        </p:txBody>
-      </p:sp>
-      <p:sp>
-        <p:nvSpPr>
-          <p:cNvPr id="173" name="" descr="{&quot;isTemplate&quot;:true,&quot;type&quot;:&quot;text&quot;}"/>
-          <p:cNvSpPr txBox="1"/>
-          <p:nvPr/>
-        </p:nvSpPr>
-        <p:spPr>
-          <a:xfrm rot="0" flipH="0" flipV="0">
-            <a:off x="8401050" y="3667125"/>
-            <a:ext cx="2933700" cy="276225"/>
+          <p:cNvPr id="188" name="" descr="{&quot;isTemplate&quot;:true,&quot;type&quot;:&quot;text&quot;}"/>
+          <p:cNvSpPr txBox="1"/>
+          <p:nvPr/>
+        </p:nvSpPr>
+        <p:spPr>
+          <a:xfrm rot="0" flipH="0" flipV="0">
+            <a:off x="8496300" y="1838325"/>
+            <a:ext cx="2914650" cy="257175"/>
           </a:xfrm>
           <a:prstGeom prst="rect"/>
         </p:spPr>
@@ -8348,7 +9336,7 @@
               </a:lnSpc>
             </a:pPr>
             <a:r>
-              <a:rPr lang="zh-CN" sz="975">
+              <a:rPr lang="zh-CN" sz="938">
                 <a:solidFill>
                   <a:srgbClr val="BD9B56"/>
                 </a:solidFill>
@@ -8358,7 +9346,7 @@
               <a:t>密码均为</a:t>
             </a:r>
             <a:r>
-              <a:rPr lang="en-US" sz="975">
+              <a:rPr lang="en-US" sz="938">
                 <a:solidFill>
                   <a:srgbClr val="BD9B56"/>
                 </a:solidFill>
@@ -8373,26 +9361,26 @@
       </p:sp>
       <p:sp>
         <p:nvSpPr>
-          <p:cNvPr id="174" name=""/>
+          <p:cNvPr id="189" name=""/>
           <p:cNvSpPr/>
           <p:nvPr/>
         </p:nvSpPr>
         <p:spPr>
           <a:xfrm rot="0" flipH="0" flipV="0">
-            <a:off x="8401050" y="4095750"/>
-            <a:ext cx="2933700" cy="171450"/>
+            <a:off x="8496300" y="2209800"/>
+            <a:ext cx="2914650" cy="581025"/>
           </a:xfrm>
           <a:custGeom>
             <a:pathLst>
-              <a:path w="308" h="18">
+              <a:path w="306" h="61">
                 <a:moveTo>
                   <a:pt x="0" y="0"/>
                 </a:moveTo>
                 <a:lnTo>
-                  <a:pt x="308" y="0"/>
+                  <a:pt x="306" y="0"/>
                 </a:lnTo>
                 <a:lnTo>
-                  <a:pt x="308" y="1"/>
+                  <a:pt x="306" y="1"/>
                 </a:lnTo>
                 <a:lnTo>
                   <a:pt x="0" y="1"/>
@@ -8415,34 +9403,458 @@
       </p:sp>
       <p:sp>
         <p:nvSpPr>
-          <p:cNvPr id="175" name="" descr="{&quot;isTemplate&quot;:true,&quot;type&quot;:&quot;text&quot;}"/>
-          <p:cNvSpPr txBox="1"/>
-          <p:nvPr/>
-        </p:nvSpPr>
-        <p:spPr>
-          <a:xfrm rot="0" flipH="0" flipV="0">
-            <a:off x="8401050" y="4257675"/>
-            <a:ext cx="2933700" cy="0"/>
-          </a:xfrm>
-          <a:prstGeom prst="rect"/>
-        </p:spPr>
-        <p:txBody>
-          <a:bodyPr wrap="none" lIns="0" tIns="0" rIns="0" bIns="0"/>
-          <a:p>
-            <a:pPr/>
-            <a:endParaRPr/>
-          </a:p>
-        </p:txBody>
-      </p:sp>
-      <p:sp>
-        <p:nvSpPr>
-          <p:cNvPr id="176" name="" descr="{&quot;isTemplate&quot;:true,&quot;type&quot;:&quot;text&quot;}"/>
-          <p:cNvSpPr txBox="1"/>
-          <p:nvPr/>
-        </p:nvSpPr>
-        <p:spPr>
-          <a:xfrm rot="0" flipH="0" flipV="0">
-            <a:off x="609600" y="6391275"/>
+          <p:cNvPr id="190" name="" descr="{&quot;isTemplate&quot;:true,&quot;type&quot;:&quot;text&quot;}"/>
+          <p:cNvSpPr txBox="1"/>
+          <p:nvPr/>
+        </p:nvSpPr>
+        <p:spPr>
+          <a:xfrm rot="0" flipH="0" flipV="0">
+            <a:off x="8496300" y="2333625"/>
+            <a:ext cx="2914650" cy="447675"/>
+          </a:xfrm>
+          <a:prstGeom prst="rect"/>
+        </p:spPr>
+        <p:txBody>
+          <a:bodyPr wrap="square" lIns="0" tIns="0" rIns="0" bIns="0">
+            <a:normAutofit/>
+          </a:bodyPr>
+          <a:p>
+            <a:pPr>
+              <a:lnSpc>
+                <a:spcPct val="170000"/>
+              </a:lnSpc>
+            </a:pPr>
+            <a:r>
+              <a:rPr lang="en-US" sz="863">
+                <a:solidFill>
+                  <a:srgbClr val="FBFCFA">
+                    <a:alpha val="60000"/>
+                  </a:srgbClr>
+                </a:solidFill>
+                <a:latin typeface="Microsoft YaHei"/>
+                <a:ea typeface="Microsoft YaHei"/>
+              </a:rPr>
+              <a:t>GitHub</a:t>
+            </a:r>
+            <a:r>
+              <a:rPr lang="zh-CN" sz="863">
+                <a:solidFill>
+                  <a:srgbClr val="FBFCFA">
+                    <a:alpha val="60000"/>
+                  </a:srgbClr>
+                </a:solidFill>
+                <a:latin typeface="Microsoft YaHei"/>
+                <a:ea typeface="Microsoft YaHei"/>
+              </a:rPr>
+              <a:t>：</a:t>
+            </a:r>
+            <a:r>
+              <a:rPr lang="en-US" sz="863">
+                <a:solidFill>
+                  <a:srgbClr val="FBFCFA">
+                    <a:alpha val="60000"/>
+                  </a:srgbClr>
+                </a:solidFill>
+                <a:latin typeface="Microsoft YaHei"/>
+                <a:ea typeface="Microsoft YaHei"/>
+              </a:rPr>
+              <a:t>Xuuuukkk/ai-property-community-agent · MIT</a:t>
+            </a:r>
+            <a:endParaRPr/>
+          </a:p>
+        </p:txBody>
+      </p:sp>
+      <p:sp>
+        <p:nvSpPr>
+          <p:cNvPr id="191" name=""/>
+          <p:cNvSpPr/>
+          <p:nvPr/>
+        </p:nvSpPr>
+        <p:spPr>
+          <a:xfrm rot="0" flipH="0" flipV="0">
+            <a:off x="8286750" y="3105150"/>
+            <a:ext cx="3333750" cy="1190625"/>
+          </a:xfrm>
+          <a:prstGeom prst="roundRect">
+            <a:avLst>
+              <a:gd name="adj" fmla="val 9600"/>
+            </a:avLst>
+          </a:prstGeom>
+          <a:solidFill>
+            <a:srgbClr val="FFFFFF"/>
+          </a:solidFill>
+          <a:ln/>
+          <a:effectLst>
+            <a:outerShdw blurRad="152400" dist="38100" dir="5400000">
+              <a:srgbClr val="172133">
+                <a:alpha val="6000"/>
+              </a:srgbClr>
+            </a:outerShdw>
+          </a:effectLst>
+        </p:spPr>
+        <p:txBody>
+          <a:bodyPr/>
+          <a:p/>
+        </p:txBody>
+      </p:sp>
+      <p:sp>
+        <p:nvSpPr>
+          <p:cNvPr id="192" name="" descr="{&quot;isTemplate&quot;:true,&quot;type&quot;:&quot;text&quot;}"/>
+          <p:cNvSpPr txBox="1"/>
+          <p:nvPr/>
+        </p:nvSpPr>
+        <p:spPr>
+          <a:xfrm rot="0" flipH="0" flipV="0">
+            <a:off x="8477250" y="3276600"/>
+            <a:ext cx="2952750" cy="152400"/>
+          </a:xfrm>
+          <a:prstGeom prst="rect"/>
+        </p:spPr>
+        <p:txBody>
+          <a:bodyPr wrap="none" lIns="0" tIns="0" rIns="0" bIns="0"/>
+          <a:p>
+            <a:pPr>
+              <a:lnSpc>
+                <a:spcPct val="100000"/>
+              </a:lnSpc>
+            </a:pPr>
+            <a:r>
+              <a:rPr lang="zh-CN" sz="975" spc="-9223372036854775808">
+                <a:solidFill>
+                  <a:srgbClr val="BD9B56"/>
+                </a:solidFill>
+                <a:latin typeface="Microsoft YaHei"/>
+                <a:ea typeface="Microsoft YaHei"/>
+              </a:rPr>
+              <a:t>项目成果</a:t>
+            </a:r>
+            <a:endParaRPr/>
+          </a:p>
+        </p:txBody>
+      </p:sp>
+      <p:sp>
+        <p:nvSpPr>
+          <p:cNvPr id="193" name=""/>
+          <p:cNvSpPr/>
+          <p:nvPr/>
+        </p:nvSpPr>
+        <p:spPr>
+          <a:xfrm rot="0" flipH="0" flipV="0">
+            <a:off x="8477250" y="3543300"/>
+            <a:ext cx="923925" cy="581025"/>
+          </a:xfrm>
+          <a:prstGeom prst="roundRect">
+            <a:avLst>
+              <a:gd name="adj" fmla="val 13115"/>
+            </a:avLst>
+          </a:prstGeom>
+          <a:solidFill>
+            <a:srgbClr val="BD9B56">
+              <a:alpha val="8000"/>
+            </a:srgbClr>
+          </a:solidFill>
+          <a:ln/>
+        </p:spPr>
+        <p:txBody>
+          <a:bodyPr/>
+          <a:p/>
+        </p:txBody>
+      </p:sp>
+      <p:sp>
+        <p:nvSpPr>
+          <p:cNvPr id="194" name="" descr="{&quot;isTemplate&quot;:true,&quot;type&quot;:&quot;text&quot;}"/>
+          <p:cNvSpPr txBox="1"/>
+          <p:nvPr/>
+        </p:nvSpPr>
+        <p:spPr>
+          <a:xfrm rot="0" flipH="0" flipV="0">
+            <a:off x="8553450" y="3638550"/>
+            <a:ext cx="771525" cy="228600"/>
+          </a:xfrm>
+          <a:prstGeom prst="rect"/>
+        </p:spPr>
+        <p:txBody>
+          <a:bodyPr wrap="none" lIns="0" tIns="0" rIns="0" bIns="0"/>
+          <a:p>
+            <a:pPr algn="ctr">
+              <a:lnSpc>
+                <a:spcPct val="100000"/>
+              </a:lnSpc>
+            </a:pPr>
+            <a:r>
+              <a:rPr lang="en-US" sz="1500">
+                <a:solidFill>
+                  <a:srgbClr val="BD9B56"/>
+                </a:solidFill>
+                <a:latin typeface="Inter"/>
+                <a:ea typeface="Inter"/>
+              </a:rPr>
+              <a:t>100%</a:t>
+            </a:r>
+            <a:endParaRPr/>
+          </a:p>
+        </p:txBody>
+      </p:sp>
+      <p:sp>
+        <p:nvSpPr>
+          <p:cNvPr id="195" name="" descr="{&quot;isTemplate&quot;:true,&quot;type&quot;:&quot;text&quot;}"/>
+          <p:cNvSpPr txBox="1"/>
+          <p:nvPr/>
+        </p:nvSpPr>
+        <p:spPr>
+          <a:xfrm rot="0" flipH="0" flipV="0">
+            <a:off x="8553450" y="3895725"/>
+            <a:ext cx="771525" cy="133350"/>
+          </a:xfrm>
+          <a:prstGeom prst="rect"/>
+        </p:spPr>
+        <p:txBody>
+          <a:bodyPr wrap="none" lIns="0" tIns="0" rIns="0" bIns="0"/>
+          <a:p>
+            <a:pPr algn="ctr">
+              <a:lnSpc>
+                <a:spcPct val="100000"/>
+              </a:lnSpc>
+            </a:pPr>
+            <a:r>
+              <a:rPr lang="zh-CN" sz="825">
+                <a:solidFill>
+                  <a:srgbClr val="5F5E5A"/>
+                </a:solidFill>
+                <a:latin typeface="Microsoft YaHei"/>
+                <a:ea typeface="Microsoft YaHei"/>
+              </a:rPr>
+              <a:t>核心链路指标</a:t>
+            </a:r>
+            <a:endParaRPr/>
+          </a:p>
+        </p:txBody>
+      </p:sp>
+      <p:sp>
+        <p:nvSpPr>
+          <p:cNvPr id="196" name=""/>
+          <p:cNvSpPr/>
+          <p:nvPr/>
+        </p:nvSpPr>
+        <p:spPr>
+          <a:xfrm rot="0" flipH="0" flipV="0">
+            <a:off x="9496425" y="3543300"/>
+            <a:ext cx="914400" cy="581025"/>
+          </a:xfrm>
+          <a:prstGeom prst="roundRect">
+            <a:avLst>
+              <a:gd name="adj" fmla="val 13115"/>
+            </a:avLst>
+          </a:prstGeom>
+          <a:solidFill>
+            <a:srgbClr val="BD9B56">
+              <a:alpha val="8000"/>
+            </a:srgbClr>
+          </a:solidFill>
+          <a:ln/>
+        </p:spPr>
+        <p:txBody>
+          <a:bodyPr/>
+          <a:p/>
+        </p:txBody>
+      </p:sp>
+      <p:sp>
+        <p:nvSpPr>
+          <p:cNvPr id="197" name="" descr="{&quot;isTemplate&quot;:true,&quot;type&quot;:&quot;text&quot;}"/>
+          <p:cNvSpPr txBox="1"/>
+          <p:nvPr/>
+        </p:nvSpPr>
+        <p:spPr>
+          <a:xfrm rot="0" flipH="0" flipV="0">
+            <a:off x="9572625" y="3638550"/>
+            <a:ext cx="762000" cy="228600"/>
+          </a:xfrm>
+          <a:prstGeom prst="rect"/>
+        </p:spPr>
+        <p:txBody>
+          <a:bodyPr wrap="none" lIns="0" tIns="0" rIns="0" bIns="0"/>
+          <a:p>
+            <a:pPr algn="ctr">
+              <a:lnSpc>
+                <a:spcPct val="100000"/>
+              </a:lnSpc>
+            </a:pPr>
+            <a:r>
+              <a:rPr lang="en-US" sz="1500">
+                <a:solidFill>
+                  <a:srgbClr val="BD9B56"/>
+                </a:solidFill>
+                <a:latin typeface="Inter"/>
+                <a:ea typeface="Inter"/>
+              </a:rPr>
+              <a:t>113+30</a:t>
+            </a:r>
+            <a:endParaRPr/>
+          </a:p>
+        </p:txBody>
+      </p:sp>
+      <p:sp>
+        <p:nvSpPr>
+          <p:cNvPr id="198" name="" descr="{&quot;isTemplate&quot;:true,&quot;type&quot;:&quot;text&quot;}"/>
+          <p:cNvSpPr txBox="1"/>
+          <p:nvPr/>
+        </p:nvSpPr>
+        <p:spPr>
+          <a:xfrm rot="0" flipH="0" flipV="0">
+            <a:off x="9572625" y="3895725"/>
+            <a:ext cx="762000" cy="133350"/>
+          </a:xfrm>
+          <a:prstGeom prst="rect"/>
+        </p:spPr>
+        <p:txBody>
+          <a:bodyPr wrap="none" lIns="0" tIns="0" rIns="0" bIns="0"/>
+          <a:p>
+            <a:pPr algn="ctr">
+              <a:lnSpc>
+                <a:spcPct val="100000"/>
+              </a:lnSpc>
+            </a:pPr>
+            <a:r>
+              <a:rPr lang="zh-CN" sz="825">
+                <a:solidFill>
+                  <a:srgbClr val="5F5E5A"/>
+                </a:solidFill>
+                <a:latin typeface="Microsoft YaHei"/>
+                <a:ea typeface="Microsoft YaHei"/>
+              </a:rPr>
+              <a:t>测试全绿</a:t>
+            </a:r>
+            <a:endParaRPr/>
+          </a:p>
+        </p:txBody>
+      </p:sp>
+      <p:sp>
+        <p:nvSpPr>
+          <p:cNvPr id="199" name=""/>
+          <p:cNvSpPr/>
+          <p:nvPr/>
+        </p:nvSpPr>
+        <p:spPr>
+          <a:xfrm rot="0" flipH="0" flipV="0">
+            <a:off x="10506075" y="3543300"/>
+            <a:ext cx="923925" cy="581025"/>
+          </a:xfrm>
+          <a:prstGeom prst="roundRect">
+            <a:avLst>
+              <a:gd name="adj" fmla="val 13115"/>
+            </a:avLst>
+          </a:prstGeom>
+          <a:solidFill>
+            <a:srgbClr val="BD9B56">
+              <a:alpha val="8000"/>
+            </a:srgbClr>
+          </a:solidFill>
+          <a:ln/>
+        </p:spPr>
+        <p:txBody>
+          <a:bodyPr/>
+          <a:p/>
+        </p:txBody>
+      </p:sp>
+      <p:sp>
+        <p:nvSpPr>
+          <p:cNvPr id="200" name="" descr="{&quot;isTemplate&quot;:true,&quot;type&quot;:&quot;text&quot;}"/>
+          <p:cNvSpPr txBox="1"/>
+          <p:nvPr/>
+        </p:nvSpPr>
+        <p:spPr>
+          <a:xfrm rot="0" flipH="0" flipV="0">
+            <a:off x="10582275" y="3638550"/>
+            <a:ext cx="771525" cy="228600"/>
+          </a:xfrm>
+          <a:prstGeom prst="rect"/>
+        </p:spPr>
+        <p:txBody>
+          <a:bodyPr wrap="none" lIns="0" tIns="0" rIns="0" bIns="0"/>
+          <a:p>
+            <a:pPr algn="ctr">
+              <a:lnSpc>
+                <a:spcPct val="100000"/>
+              </a:lnSpc>
+            </a:pPr>
+            <a:r>
+              <a:rPr lang="en-US" sz="1500">
+                <a:solidFill>
+                  <a:srgbClr val="BD9B56"/>
+                </a:solidFill>
+                <a:latin typeface="Inter"/>
+                <a:ea typeface="Inter"/>
+              </a:rPr>
+              <a:t>7 </a:t>
+            </a:r>
+            <a:r>
+              <a:rPr lang="zh-CN" sz="1500">
+                <a:solidFill>
+                  <a:srgbClr val="BD9B56"/>
+                </a:solidFill>
+                <a:latin typeface="Inter"/>
+                <a:ea typeface="Inter"/>
+              </a:rPr>
+              <a:t>阶段</a:t>
+            </a:r>
+            <a:endParaRPr/>
+          </a:p>
+        </p:txBody>
+      </p:sp>
+      <p:sp>
+        <p:nvSpPr>
+          <p:cNvPr id="201" name="" descr="{&quot;isTemplate&quot;:true,&quot;type&quot;:&quot;text&quot;}"/>
+          <p:cNvSpPr txBox="1"/>
+          <p:nvPr/>
+        </p:nvSpPr>
+        <p:spPr>
+          <a:xfrm rot="0" flipH="0" flipV="0">
+            <a:off x="10582275" y="3895725"/>
+            <a:ext cx="771525" cy="133350"/>
+          </a:xfrm>
+          <a:prstGeom prst="rect"/>
+        </p:spPr>
+        <p:txBody>
+          <a:bodyPr wrap="none" lIns="0" tIns="0" rIns="0" bIns="0"/>
+          <a:p>
+            <a:pPr algn="ctr">
+              <a:lnSpc>
+                <a:spcPct val="100000"/>
+              </a:lnSpc>
+            </a:pPr>
+            <a:r>
+              <a:rPr lang="en-US" sz="825">
+                <a:solidFill>
+                  <a:srgbClr val="5F5E5A"/>
+                </a:solidFill>
+                <a:latin typeface="Microsoft YaHei"/>
+                <a:ea typeface="Microsoft YaHei"/>
+              </a:rPr>
+              <a:t>Phase 0-7 </a:t>
+            </a:r>
+            <a:r>
+              <a:rPr lang="zh-CN" sz="825">
+                <a:solidFill>
+                  <a:srgbClr val="5F5E5A"/>
+                </a:solidFill>
+                <a:latin typeface="Microsoft YaHei"/>
+                <a:ea typeface="Microsoft YaHei"/>
+              </a:rPr>
+              <a:t>完成</a:t>
+            </a:r>
+            <a:endParaRPr/>
+          </a:p>
+        </p:txBody>
+      </p:sp>
+      <p:sp>
+        <p:nvSpPr>
+          <p:cNvPr id="202" name="" descr="{&quot;isTemplate&quot;:true,&quot;type&quot;:&quot;text&quot;}"/>
+          <p:cNvSpPr txBox="1"/>
+          <p:nvPr/>
+        </p:nvSpPr>
+        <p:spPr>
+          <a:xfrm rot="0" flipH="0" flipV="0">
+            <a:off x="571500" y="6410325"/>
             <a:ext cx="1009650" cy="142875"/>
           </a:xfrm>
           <a:prstGeom prst="rect"/>
@@ -8491,13 +9903,13 @@
       </p:sp>
       <p:sp>
         <p:nvSpPr>
-          <p:cNvPr id="177" name="" descr="{&quot;isTemplate&quot;:true,&quot;type&quot;:&quot;text&quot;}"/>
-          <p:cNvSpPr txBox="1"/>
-          <p:nvPr/>
-        </p:nvSpPr>
-        <p:spPr>
-          <a:xfrm rot="0" flipH="0" flipV="0">
-            <a:off x="11191875" y="6391275"/>
+          <p:cNvPr id="203" name="" descr="{&quot;isTemplate&quot;:true,&quot;type&quot;:&quot;text&quot;}"/>
+          <p:cNvSpPr txBox="1"/>
+          <p:nvPr/>
+        </p:nvSpPr>
+        <p:spPr>
+          <a:xfrm rot="0" flipH="0" flipV="0">
+            <a:off x="11229975" y="6410325"/>
             <a:ext cx="390525" cy="142875"/>
           </a:xfrm>
           <a:prstGeom prst="rect"/>
@@ -8534,7 +9946,7 @@
   <p:cSld>
     <p:spTree>
       <p:nvGrpSpPr>
-        <p:cNvPr id="178" name="" descr="&lt;Slide style={{ width: '1280px', height: '720px', background: 'linear-gradient(135deg, #172133 0%, #22395E 100%)', position: 'relative' }}&gt;&#10;  &lt;div style={{ position: 'absolute', inset: 0, display: 'flex', flexDirection: 'column', alignItems: 'center', justifyContent: 'center', color: '#FBFCFA' }}&gt;&#10;    &lt;div style={{ color: '#BD9B56', fontSize: 26, marginBottom: 22, letterSpacing: '0.4em' }}&gt;◆&lt;/div&gt;&#10;    &lt;h1 style={{ fontSize: 56, fontWeight: 'bold', margin: 0, color: '#FBFCFA', letterSpacing: '0.12em' }}&gt;感谢聆听&lt;/h1&gt;&#10;    &lt;div style={{ width: 80, height: 3, background: '#BD9B56', marginTop: 26, marginBottom: 26 }} /&gt;&#10;    &lt;p style={{ fontSize: 20, color: 'rgba(189,155,86,0.9)', margin: 0, letterSpacing: '0.15em' }}&gt;让 AI 真正走进社区&lt;/p&gt;&#10;    &lt;div style={{ marginTop: 56, padding: '20px 40px', background: 'rgba(189,155,86,0.08)', border: '1px solid rgba(189,155,86,0.3)', borderRadius: 8, textAlign: 'center' }}&gt;&#10;      &lt;div style={{ fontSize: 12, color: '#BD9B56', letterSpacing: '0.25em', marginBottom: 10 }}&gt;ONLINE DEMO&lt;/div&gt;&#10;      &lt;div style={{ fontSize: 17, color: '#FBFCFA', fontFamily: 'Inter, sans-serif', marginBottom: 4 }}&gt;http://119.91.236.85&lt;/div&gt;&#10;      &lt;div style={{ fontSize: 12, color: 'rgba(251,252,250,0.7)' }}&gt;业主 guoyi378 · 物业 mayun420 · 维修 yangfei423（密码 123456）&lt;/div&gt;&#10;    &lt;/div&gt;&#10;  &lt;/div&gt;&#10;  &lt;div style={{ position: 'absolute', left: 64, bottom: 28, color: '#BD9B56', fontSize: 13, letterSpacing: '0.12em' }}&gt;云溪花园 · 智慧社区&lt;/div&gt;&#10;  &lt;div style={{ position: 'absolute', right: 28, bottom: 28, color: 'rgba(189,155,86,0.75)', fontSize: 13 }}&gt;15 / 15&lt;/div&gt;&#10;&lt;/Slide&gt;"/>
+        <p:cNvPr id="204" name="" descr="&lt;Slide style={{ width: '1280px', height: '720px', background: 'linear-gradient(135deg, #172133 0%, #22395E 100%)', position: 'relative' }}&gt;&#10;  &lt;div style={{ position: 'absolute', inset: 0, display: 'flex', flexDirection: 'column', alignItems: 'center', justifyContent: 'center', color: '#FBFCFA' }}&gt;&#10;    &lt;div style={{ color: '#BD9B56', fontSize: 26, marginBottom: 22, letterSpacing: '0.4em' }}&gt;◆&lt;/div&gt;&#10;    &lt;h1 style={{ fontSize: 56, fontWeight: 'bold', margin: 0, color: '#FBFCFA', letterSpacing: '0.12em' }}&gt;感谢聆听&lt;/h1&gt;&#10;    &lt;div style={{ width: 80, height: 3, background: '#BD9B56', marginTop: 26, marginBottom: 26 }} /&gt;&#10;    &lt;p style={{ fontSize: 20, color: 'rgba(189,155,86,0.9)', margin: 0, letterSpacing: '0.15em' }}&gt;让 AI 真正走进社区&lt;/p&gt;&#10;    &lt;div style={{ marginTop: 56, padding: '20px 40px', background: 'rgba(189,155,86,0.08)', border: '1px solid rgba(189,155,86,0.3)', borderRadius: 8, textAlign: 'center' }}&gt;&#10;      &lt;div style={{ fontSize: 12, color: '#BD9B56', letterSpacing: '0.25em', marginBottom: 10 }}&gt;ONLINE DEMO&lt;/div&gt;&#10;      &lt;div style={{ fontSize: 17, color: '#FBFCFA', fontFamily: 'Inter, sans-serif', marginBottom: 4 }}&gt;http://119.91.236.85&lt;/div&gt;&#10;      &lt;div style={{ fontSize: 12, color: 'rgba(251,252,250,0.7)' }}&gt;业主 guoyi378 · 物业 mayun420 · 维修 yangfei423（密码 123456）&lt;/div&gt;&#10;    &lt;/div&gt;&#10;  &lt;/div&gt;&#10;  &lt;div style={{ position: 'absolute', left: 64, bottom: 28, color: '#BD9B56', fontSize: 13, letterSpacing: '0.12em' }}&gt;云溪花园 · 智慧社区&lt;/div&gt;&#10;  &lt;div style={{ position: 'absolute', right: 28, bottom: 28, color: 'rgba(189,155,86,0.75)', fontSize: 13 }}&gt;15 / 15&lt;/div&gt;&#10;&lt;/Slide&gt;"/>
         <p:cNvGrpSpPr/>
         <p:nvPr/>
       </p:nvGrpSpPr>
@@ -8548,7 +9960,7 @@
       </p:grpSpPr>
       <p:sp>
         <p:nvSpPr>
-          <p:cNvPr id="179" name=""/>
+          <p:cNvPr id="205" name=""/>
           <p:cNvSpPr/>
           <p:nvPr/>
         </p:nvSpPr>
@@ -8580,7 +9992,7 @@
       </p:sp>
       <p:sp>
         <p:nvSpPr>
-          <p:cNvPr id="180" name="" descr="{&quot;isTemplate&quot;:true,&quot;type&quot;:&quot;text&quot;}"/>
+          <p:cNvPr id="206" name="" descr="{&quot;isTemplate&quot;:true,&quot;type&quot;:&quot;text&quot;}"/>
           <p:cNvSpPr txBox="1"/>
           <p:nvPr/>
         </p:nvSpPr>
@@ -8615,7 +10027,7 @@
       </p:sp>
       <p:sp>
         <p:nvSpPr>
-          <p:cNvPr id="181" name="" descr="{&quot;isTemplate&quot;:true,&quot;type&quot;:&quot;text&quot;}"/>
+          <p:cNvPr id="207" name="" descr="{&quot;isTemplate&quot;:true,&quot;type&quot;:&quot;text&quot;}"/>
           <p:cNvSpPr txBox="1"/>
           <p:nvPr/>
         </p:nvSpPr>
@@ -8650,7 +10062,7 @@
       </p:sp>
       <p:sp>
         <p:nvSpPr>
-          <p:cNvPr id="182" name=""/>
+          <p:cNvPr id="208" name=""/>
           <p:cNvSpPr/>
           <p:nvPr/>
         </p:nvSpPr>
@@ -8674,7 +10086,7 @@
       </p:sp>
       <p:sp>
         <p:nvSpPr>
-          <p:cNvPr id="183" name="" descr="{&quot;isTemplate&quot;:true,&quot;type&quot;:&quot;text&quot;}"/>
+          <p:cNvPr id="209" name="" descr="{&quot;isTemplate&quot;:true,&quot;type&quot;:&quot;text&quot;}"/>
           <p:cNvSpPr txBox="1"/>
           <p:nvPr/>
         </p:nvSpPr>
@@ -8735,7 +10147,7 @@
       </p:sp>
       <p:sp>
         <p:nvSpPr>
-          <p:cNvPr id="184" name=""/>
+          <p:cNvPr id="210" name=""/>
           <p:cNvSpPr/>
           <p:nvPr/>
         </p:nvSpPr>
@@ -8770,7 +10182,7 @@
       </p:sp>
       <p:sp>
         <p:nvSpPr>
-          <p:cNvPr id="185" name="" descr="{&quot;isTemplate&quot;:true,&quot;type&quot;:&quot;text&quot;}"/>
+          <p:cNvPr id="211" name="" descr="{&quot;isTemplate&quot;:true,&quot;type&quot;:&quot;text&quot;}"/>
           <p:cNvSpPr txBox="1"/>
           <p:nvPr/>
         </p:nvSpPr>
@@ -8805,7 +10217,7 @@
       </p:sp>
       <p:sp>
         <p:nvSpPr>
-          <p:cNvPr id="186" name="" descr="{&quot;isTemplate&quot;:true,&quot;type&quot;:&quot;text&quot;}"/>
+          <p:cNvPr id="212" name="" descr="{&quot;isTemplate&quot;:true,&quot;type&quot;:&quot;text&quot;}"/>
           <p:cNvSpPr txBox="1"/>
           <p:nvPr/>
         </p:nvSpPr>
@@ -8840,7 +10252,7 @@
       </p:sp>
       <p:sp>
         <p:nvSpPr>
-          <p:cNvPr id="187" name="" descr="{&quot;isTemplate&quot;:true,&quot;type&quot;:&quot;text&quot;}"/>
+          <p:cNvPr id="213" name="" descr="{&quot;isTemplate&quot;:true,&quot;type&quot;:&quot;text&quot;}"/>
           <p:cNvSpPr txBox="1"/>
           <p:nvPr/>
         </p:nvSpPr>
@@ -8973,7 +10385,7 @@
       </p:sp>
       <p:sp>
         <p:nvSpPr>
-          <p:cNvPr id="188" name="" descr="{&quot;isTemplate&quot;:true,&quot;type&quot;:&quot;text&quot;}"/>
+          <p:cNvPr id="214" name="" descr="{&quot;isTemplate&quot;:true,&quot;type&quot;:&quot;text&quot;}"/>
           <p:cNvSpPr txBox="1"/>
           <p:nvPr/>
         </p:nvSpPr>
@@ -9028,7 +10440,7 @@
       </p:sp>
       <p:sp>
         <p:nvSpPr>
-          <p:cNvPr id="189" name="" descr="{&quot;isTemplate&quot;:true,&quot;type&quot;:&quot;text&quot;}"/>
+          <p:cNvPr id="215" name="" descr="{&quot;isTemplate&quot;:true,&quot;type&quot;:&quot;text&quot;}"/>
           <p:cNvSpPr txBox="1"/>
           <p:nvPr/>
         </p:nvSpPr>
@@ -9073,7 +10485,7 @@
   <p:cSld>
     <p:spTree>
       <p:nvGrpSpPr>
-        <p:cNvPr id="190" name="" descr="&lt;Slide style={{ width: '1280px', height: '720px', background: '#FBFCFA', position: 'relative', padding: '40px 64px', boxSizing: 'border-box', display: 'flex', flexDirection: 'column' }}&gt;&#10;  &lt;div style={{ flexShrink: 0 }}&gt;&#10;    &lt;div style={{ color: '#BD9B56', fontSize: 14, letterSpacing: '0.3em', marginBottom: 10 }}&gt;CONTENTS&lt;/div&gt;&#10;    &lt;h2 style={{ fontSize: 34, fontWeight: 'bold', color: '#172133', margin: 0 }}&gt;目录&lt;/h2&gt;&#10;    &lt;div style={{ width: 64, height: 3, background: '#BD9B56', marginTop: 16 }} /&gt;&#10;  &lt;/div&gt;&#10;  &lt;div style={{ flex: 1, display: 'flex', alignItems: 'center' }}&gt;&#10;    &lt;div style={{ width: '100%', display: 'flex', flexDirection: 'column', gap: 20 }}&gt;&#10;      &lt;div style={{ display: 'flex', alignItems: 'center', gap: 28, paddingBottom: 18, borderBottom: '1px solid rgba(34,57,94,0.12)' }}&gt;&#10;        &lt;span style={{ color: '#BD9B56', fontSize: 40, fontWeight: 'bold', lineHeight: 1, minWidth: 72, fontFamily: 'Inter, sans-serif' }}&gt;01&lt;/span&gt;&#10;        &lt;div style={{ flex: 1 }}&gt;&#10;          &lt;div style={{ fontSize: 22, fontWeight: 'bold', color: '#172133' }}&gt;项目背景与规模&lt;/div&gt;&#10;          &lt;div style={{ fontSize: 14, color: '#6b7075', marginTop: 6 }}&gt;传统物业痛点 · 虚拟社区「云溪花园」数据资产&lt;/div&gt;&#10;        &lt;/div&gt;&#10;      &lt;/div&gt;&#10;      &lt;div style={{ display: 'flex', alignItems: 'center', gap: 28, paddingBottom: 18, borderBottom: '1px solid rgba(34,57,94,0.12)' }}&gt;&#10;        &lt;span style={{ color: '#BD9B56', fontSize: 40, fontWeight: 'bold', lineHeight: 1, minWidth: 72, fontFamily: 'Inter, sans-serif' }}&gt;02&lt;/span&gt;&#10;        &lt;div style={{ flex: 1 }}&gt;&#10;          &lt;div style={{ fontSize: 22, fontWeight: 'bold', color: '#172133' }}&gt;技术构建过程&lt;/div&gt;&#10;          &lt;div style={{ fontSize: 14, color: '#6b7075', marginTop: 6 }}&gt;数据库设计 → 后端 → 前端 → AI Agent → RAG 知识库&lt;/div&gt;&#10;        &lt;/div&gt;&#10;      &lt;/div&gt;&#10;      &lt;div style={{ display: 'flex', alignItems: 'center', gap: 28, paddingBottom: 18, borderBottom: '1px solid rgba(34,57,94,0.12)' }}&gt;&#10;        &lt;span style={{ color: '#BD9B56', fontSize: 40, fontWeight: 'bold', lineHeight: 1, minWidth: 72, fontFamily: 'Inter, sans-serif' }}&gt;03&lt;/span&gt;&#10;        &lt;div style={{ flex: 1 }}&gt;&#10;          &lt;div style={{ fontSize: 22, fontWeight: 'bold', color: '#172133' }}&gt;成果与验证&lt;/div&gt;&#10;          &lt;div style={{ fontSize: 14, color: '#6b7075', marginTop: 6 }}&gt;三条功能闭环 · 量化评估指标&lt;/div&gt;&#10;        &lt;/div&gt;&#10;      &lt;/div&gt;&#10;      &lt;div style={{ display: 'flex', alignItems: 'center', gap: 28 }}&gt;&#10;        &lt;span style={{ color: '#BD9B56', fontSize: 40, fontWeight: 'bold', lineHeight: 1, minWidth: 72, fontFamily: 'Inter, sans-serif' }}&gt;04&lt;/span&gt;&#10;        &lt;div style={{ flex: 1 }}&gt;&#10;          &lt;div style={{ fontSize: 22, fontWeight: 'bold', color: '#172133' }}&gt;总结与展望&lt;/div&gt;&#10;          &lt;div style={{ fontSize: 14, color: '#6b7075', marginTop: 6 }}&gt;项目价值 · 在线演示入口&lt;/div&gt;&#10;        &lt;/div&gt;&#10;      &lt;/div&gt;&#10;    &lt;/div&gt;&#10;  &lt;/div&gt;&#10;  &lt;div style={{ flexShrink: 0, height: 44, display: 'flex', alignItems: 'flex-end', justifyContent: 'space-between' }}&gt;&#10;    &lt;span style={{ color: '#BD9B56', fontSize: 12, letterSpacing: '0.1em' }}&gt;云溪花园 · 智慧社区&lt;/span&gt;&#10;    &lt;span style={{ color: '#a09b8c', fontSize: 12 }}&gt;02 / 15&lt;/span&gt;&#10;  &lt;/div&gt;&#10;&lt;/Slide&gt;"/>
+        <p:cNvPr id="216" name="" descr="&lt;Slide style={{ width: '1280px', height: '720px', background: '#FBFCFA', position: 'relative', padding: '40px 64px', boxSizing: 'border-box', display: 'flex', flexDirection: 'column' }}&gt;&#10;  &lt;div style={{ flexShrink: 0 }}&gt;&#10;    &lt;div style={{ color: '#BD9B56', fontSize: 14, letterSpacing: '0.3em', marginBottom: 10 }}&gt;CONTENTS&lt;/div&gt;&#10;    &lt;h2 style={{ fontSize: 34, fontWeight: 'bold', color: '#172133', margin: 0 }}&gt;目录&lt;/h2&gt;&#10;    &lt;div style={{ width: 64, height: 3, background: '#BD9B56', marginTop: 16 }} /&gt;&#10;  &lt;/div&gt;&#10;  &lt;div style={{ flex: 1, display: 'flex', alignItems: 'center' }}&gt;&#10;    &lt;div style={{ width: '100%', display: 'flex', flexDirection: 'column', gap: 20 }}&gt;&#10;      &lt;div style={{ display: 'flex', alignItems: 'center', gap: 28, paddingBottom: 18, borderBottom: '1px solid rgba(34,57,94,0.12)' }}&gt;&#10;        &lt;span style={{ color: '#BD9B56', fontSize: 40, fontWeight: 'bold', lineHeight: 1, minWidth: 72, fontFamily: 'Inter, sans-serif' }}&gt;01&lt;/span&gt;&#10;        &lt;div style={{ flex: 1 }}&gt;&#10;          &lt;div style={{ fontSize: 22, fontWeight: 'bold', color: '#172133' }}&gt;项目背景与规模&lt;/div&gt;&#10;          &lt;div style={{ fontSize: 14, color: '#6b7075', marginTop: 6 }}&gt;传统物业痛点 · 虚拟社区「云溪花园」数据资产&lt;/div&gt;&#10;        &lt;/div&gt;&#10;      &lt;/div&gt;&#10;      &lt;div style={{ display: 'flex', alignItems: 'center', gap: 28, paddingBottom: 18, borderBottom: '1px solid rgba(34,57,94,0.12)' }}&gt;&#10;        &lt;span style={{ color: '#BD9B56', fontSize: 40, fontWeight: 'bold', lineHeight: 1, minWidth: 72, fontFamily: 'Inter, sans-serif' }}&gt;02&lt;/span&gt;&#10;        &lt;div style={{ flex: 1 }}&gt;&#10;          &lt;div style={{ fontSize: 22, fontWeight: 'bold', color: '#172133' }}&gt;技术构建过程&lt;/div&gt;&#10;          &lt;div style={{ fontSize: 14, color: '#6b7075', marginTop: 6 }}&gt;数据库设计 → 后端 → 前端 → AI Agent → RAG 知识库&lt;/div&gt;&#10;        &lt;/div&gt;&#10;      &lt;/div&gt;&#10;      &lt;div style={{ display: 'flex', alignItems: 'center', gap: 28, paddingBottom: 18, borderBottom: '1px solid rgba(34,57,94,0.12)' }}&gt;&#10;        &lt;span style={{ color: '#BD9B56', fontSize: 40, fontWeight: 'bold', lineHeight: 1, minWidth: 72, fontFamily: 'Inter, sans-serif' }}&gt;03&lt;/span&gt;&#10;        &lt;div style={{ flex: 1 }}&gt;&#10;          &lt;div style={{ fontSize: 22, fontWeight: 'bold', color: '#172133' }}&gt;成果与验证&lt;/div&gt;&#10;          &lt;div style={{ fontSize: 14, color: '#6b7075', marginTop: 6 }}&gt;三条功能闭环 · 量化评估指标&lt;/div&gt;&#10;        &lt;/div&gt;&#10;      &lt;/div&gt;&#10;      &lt;div style={{ display: 'flex', alignItems: 'center', gap: 28 }}&gt;&#10;        &lt;span style={{ color: '#BD9B56', fontSize: 40, fontWeight: 'bold', lineHeight: 1, minWidth: 72, fontFamily: 'Inter, sans-serif' }}&gt;04&lt;/span&gt;&#10;        &lt;div style={{ flex: 1 }}&gt;&#10;          &lt;div style={{ fontSize: 22, fontWeight: 'bold', color: '#172133' }}&gt;总结与展望&lt;/div&gt;&#10;          &lt;div style={{ fontSize: 14, color: '#6b7075', marginTop: 6 }}&gt;项目价值 · 在线演示入口&lt;/div&gt;&#10;        &lt;/div&gt;&#10;      &lt;/div&gt;&#10;    &lt;/div&gt;&#10;  &lt;/div&gt;&#10;  &lt;div style={{ flexShrink: 0, height: 44, display: 'flex', alignItems: 'flex-end', justifyContent: 'space-between' }}&gt;&#10;    &lt;span style={{ color: '#BD9B56', fontSize: 12, letterSpacing: '0.1em' }}&gt;云溪花园 · 智慧社区&lt;/span&gt;&#10;    &lt;span style={{ color: '#a09b8c', fontSize: 12 }}&gt;02 / 15&lt;/span&gt;&#10;  &lt;/div&gt;&#10;&lt;/Slide&gt;"/>
         <p:cNvGrpSpPr/>
         <p:nvPr/>
       </p:nvGrpSpPr>
@@ -9087,7 +10499,7 @@
       </p:grpSpPr>
       <p:sp>
         <p:nvSpPr>
-          <p:cNvPr id="191" name=""/>
+          <p:cNvPr id="217" name=""/>
           <p:cNvSpPr/>
           <p:nvPr/>
         </p:nvSpPr>
@@ -9111,7 +10523,7 @@
       </p:sp>
       <p:sp>
         <p:nvSpPr>
-          <p:cNvPr id="192" name="" descr="{&quot;isTemplate&quot;:true,&quot;type&quot;:&quot;text&quot;}"/>
+          <p:cNvPr id="218" name="" descr="{&quot;isTemplate&quot;:true,&quot;type&quot;:&quot;text&quot;}"/>
           <p:cNvSpPr txBox="1"/>
           <p:nvPr/>
         </p:nvSpPr>
@@ -9146,7 +10558,7 @@
       </p:sp>
       <p:sp>
         <p:nvSpPr>
-          <p:cNvPr id="193" name="" descr="{&quot;isTemplate&quot;:true,&quot;type&quot;:&quot;text&quot;}"/>
+          <p:cNvPr id="219" name="" descr="{&quot;isTemplate&quot;:true,&quot;type&quot;:&quot;text&quot;}"/>
           <p:cNvSpPr txBox="1"/>
           <p:nvPr/>
         </p:nvSpPr>
@@ -9181,7 +10593,7 @@
       </p:sp>
       <p:sp>
         <p:nvSpPr>
-          <p:cNvPr id="194" name=""/>
+          <p:cNvPr id="220" name=""/>
           <p:cNvSpPr/>
           <p:nvPr/>
         </p:nvSpPr>
@@ -9205,7 +10617,7 @@
       </p:sp>
       <p:sp>
         <p:nvSpPr>
-          <p:cNvPr id="195" name=""/>
+          <p:cNvPr id="221" name=""/>
           <p:cNvSpPr/>
           <p:nvPr/>
         </p:nvSpPr>
@@ -9247,7 +10659,7 @@
       </p:sp>
       <p:sp>
         <p:nvSpPr>
-          <p:cNvPr id="196" name="" descr="{&quot;isTemplate&quot;:true,&quot;type&quot;:&quot;text&quot;}"/>
+          <p:cNvPr id="222" name="" descr="{&quot;isTemplate&quot;:true,&quot;type&quot;:&quot;text&quot;}"/>
           <p:cNvSpPr txBox="1"/>
           <p:nvPr/>
         </p:nvSpPr>
@@ -9282,7 +10694,7 @@
       </p:sp>
       <p:sp>
         <p:nvSpPr>
-          <p:cNvPr id="197" name="" descr="{&quot;isTemplate&quot;:true,&quot;type&quot;:&quot;text&quot;}"/>
+          <p:cNvPr id="223" name="" descr="{&quot;isTemplate&quot;:true,&quot;type&quot;:&quot;text&quot;}"/>
           <p:cNvSpPr txBox="1"/>
           <p:nvPr/>
         </p:nvSpPr>
@@ -9317,7 +10729,7 @@
       </p:sp>
       <p:sp>
         <p:nvSpPr>
-          <p:cNvPr id="198" name="" descr="{&quot;isTemplate&quot;:true,&quot;type&quot;:&quot;text&quot;}"/>
+          <p:cNvPr id="224" name="" descr="{&quot;isTemplate&quot;:true,&quot;type&quot;:&quot;text&quot;}"/>
           <p:cNvSpPr txBox="1"/>
           <p:nvPr/>
         </p:nvSpPr>
@@ -9372,7 +10784,7 @@
       </p:sp>
       <p:sp>
         <p:nvSpPr>
-          <p:cNvPr id="199" name=""/>
+          <p:cNvPr id="225" name=""/>
           <p:cNvSpPr/>
           <p:nvPr/>
         </p:nvSpPr>
@@ -9414,7 +10826,7 @@
       </p:sp>
       <p:sp>
         <p:nvSpPr>
-          <p:cNvPr id="200" name="" descr="{&quot;isTemplate&quot;:true,&quot;type&quot;:&quot;text&quot;}"/>
+          <p:cNvPr id="226" name="" descr="{&quot;isTemplate&quot;:true,&quot;type&quot;:&quot;text&quot;}"/>
           <p:cNvSpPr txBox="1"/>
           <p:nvPr/>
         </p:nvSpPr>
@@ -9449,7 +10861,7 @@
       </p:sp>
       <p:sp>
         <p:nvSpPr>
-          <p:cNvPr id="201" name="" descr="{&quot;isTemplate&quot;:true,&quot;type&quot;:&quot;text&quot;}"/>
+          <p:cNvPr id="227" name="" descr="{&quot;isTemplate&quot;:true,&quot;type&quot;:&quot;text&quot;}"/>
           <p:cNvSpPr txBox="1"/>
           <p:nvPr/>
         </p:nvSpPr>
@@ -9484,7 +10896,7 @@
       </p:sp>
       <p:sp>
         <p:nvSpPr>
-          <p:cNvPr id="202" name="" descr="{&quot;isTemplate&quot;:true,&quot;type&quot;:&quot;text&quot;}"/>
+          <p:cNvPr id="228" name="" descr="{&quot;isTemplate&quot;:true,&quot;type&quot;:&quot;text&quot;}"/>
           <p:cNvSpPr txBox="1"/>
           <p:nvPr/>
         </p:nvSpPr>
@@ -9579,7 +10991,7 @@
       </p:sp>
       <p:sp>
         <p:nvSpPr>
-          <p:cNvPr id="203" name=""/>
+          <p:cNvPr id="229" name=""/>
           <p:cNvSpPr/>
           <p:nvPr/>
         </p:nvSpPr>
@@ -9621,7 +11033,7 @@
       </p:sp>
       <p:sp>
         <p:nvSpPr>
-          <p:cNvPr id="204" name="" descr="{&quot;isTemplate&quot;:true,&quot;type&quot;:&quot;text&quot;}"/>
+          <p:cNvPr id="230" name="" descr="{&quot;isTemplate&quot;:true,&quot;type&quot;:&quot;text&quot;}"/>
           <p:cNvSpPr txBox="1"/>
           <p:nvPr/>
         </p:nvSpPr>
@@ -9656,7 +11068,7 @@
       </p:sp>
       <p:sp>
         <p:nvSpPr>
-          <p:cNvPr id="205" name="" descr="{&quot;isTemplate&quot;:true,&quot;type&quot;:&quot;text&quot;}"/>
+          <p:cNvPr id="231" name="" descr="{&quot;isTemplate&quot;:true,&quot;type&quot;:&quot;text&quot;}"/>
           <p:cNvSpPr txBox="1"/>
           <p:nvPr/>
         </p:nvSpPr>
@@ -9691,7 +11103,7 @@
       </p:sp>
       <p:sp>
         <p:nvSpPr>
-          <p:cNvPr id="206" name="" descr="{&quot;isTemplate&quot;:true,&quot;type&quot;:&quot;text&quot;}"/>
+          <p:cNvPr id="232" name="" descr="{&quot;isTemplate&quot;:true,&quot;type&quot;:&quot;text&quot;}"/>
           <p:cNvSpPr txBox="1"/>
           <p:nvPr/>
         </p:nvSpPr>
@@ -9746,7 +11158,7 @@
       </p:sp>
       <p:sp>
         <p:nvSpPr>
-          <p:cNvPr id="207" name="" descr="{&quot;isTemplate&quot;:true,&quot;type&quot;:&quot;text&quot;}"/>
+          <p:cNvPr id="233" name="" descr="{&quot;isTemplate&quot;:true,&quot;type&quot;:&quot;text&quot;}"/>
           <p:cNvSpPr txBox="1"/>
           <p:nvPr/>
         </p:nvSpPr>
@@ -9781,7 +11193,7 @@
       </p:sp>
       <p:sp>
         <p:nvSpPr>
-          <p:cNvPr id="208" name="" descr="{&quot;isTemplate&quot;:true,&quot;type&quot;:&quot;text&quot;}"/>
+          <p:cNvPr id="234" name="" descr="{&quot;isTemplate&quot;:true,&quot;type&quot;:&quot;text&quot;}"/>
           <p:cNvSpPr txBox="1"/>
           <p:nvPr/>
         </p:nvSpPr>
@@ -9816,7 +11228,7 @@
       </p:sp>
       <p:sp>
         <p:nvSpPr>
-          <p:cNvPr id="209" name="" descr="{&quot;isTemplate&quot;:true,&quot;type&quot;:&quot;text&quot;}"/>
+          <p:cNvPr id="235" name="" descr="{&quot;isTemplate&quot;:true,&quot;type&quot;:&quot;text&quot;}"/>
           <p:cNvSpPr txBox="1"/>
           <p:nvPr/>
         </p:nvSpPr>
@@ -9871,7 +11283,7 @@
       </p:sp>
       <p:sp>
         <p:nvSpPr>
-          <p:cNvPr id="210" name="" descr="{&quot;isTemplate&quot;:true,&quot;type&quot;:&quot;text&quot;}"/>
+          <p:cNvPr id="236" name="" descr="{&quot;isTemplate&quot;:true,&quot;type&quot;:&quot;text&quot;}"/>
           <p:cNvSpPr txBox="1"/>
           <p:nvPr/>
         </p:nvSpPr>
@@ -9926,7 +11338,7 @@
       </p:sp>
       <p:sp>
         <p:nvSpPr>
-          <p:cNvPr id="211" name="" descr="{&quot;isTemplate&quot;:true,&quot;type&quot;:&quot;text&quot;}"/>
+          <p:cNvPr id="237" name="" descr="{&quot;isTemplate&quot;:true,&quot;type&quot;:&quot;text&quot;}"/>
           <p:cNvSpPr txBox="1"/>
           <p:nvPr/>
         </p:nvSpPr>
@@ -9969,7 +11381,7 @@
   <p:cSld>
     <p:spTree>
       <p:nvGrpSpPr>
-        <p:cNvPr id="212" name="" descr="&lt;Slide style={{ width: '1280px', height: '720px', background: '#FBFCFA', position: 'relative', padding: '40px 64px', boxSizing: 'border-box', display: 'flex', flexDirection: 'column' }}&gt;&#10;  &lt;div style={{ flexShrink: 0 }}&gt;&#10;    &lt;div style={{ color: '#BD9B56', fontSize: 13, letterSpacing: '0.25em', marginBottom: 8 }}&gt;01 · 项目背景&lt;/div&gt;&#10;    &lt;h2 style={{ fontSize: 30, fontWeight: 'bold', color: '#172133', margin: 0, lineHeight: 1.3 }}&gt;传统物业的三重困境&lt;/h2&gt;&#10;    &lt;div style={{ fontSize: 14, color: '#6b7075', marginTop: 8 }}&gt;业务、数据、知识「三张皮」，需要用 AI 重新缝合&lt;/div&gt;&#10;  &lt;/div&gt;&#10;  &lt;div style={{ flex: 1, display: 'flex', alignItems: 'center' }}&gt;&#10;    &lt;div style={{ width: '100%', display: 'flex', flexDirection: 'column', gap: 18 }}&gt;&#10;      &lt;div style={{ display: 'flex', gap: 20, background: '#fff', borderRadius: 10, padding: '20px 24px', boxShadow: '0 4px 16px rgba(23,33,51,0.06)', borderLeft: '4px solid #BD9B56' }}&gt;&#10;        &lt;span style={{ color: '#BD9B56', fontSize: 22, lineHeight: 1.2, flexShrink: 0 }}&gt;!&lt;/span&gt;&#10;        &lt;div&gt;&#10;          &lt;div style={{ fontSize: 17, fontWeight: 'bold', color: '#172133', marginBottom: 6 }}&gt;信息孤岛&lt;/div&gt;&#10;          &lt;p style={{ fontSize: 14, color: '#5F5E5A', margin: 0, lineHeight: 1.6 }}&gt;业主报修、费用缴纳、巡检记录分散在多个系统，彼此不打通，物业无法掌握完整的社区运行状态，业主也看不到工单的处理进度。&lt;/p&gt;&#10;        &lt;/div&gt;&#10;      &lt;/div&gt;&#10;      &lt;div style={{ display: 'flex', gap: 20, background: '#fff', borderRadius: 10, padding: '20px 24px', boxShadow: '0 4px 16px rgba(23,33,51,0.06)', borderLeft: '4px solid #BD9B56' }}&gt;&#10;        &lt;span style={{ color: '#BD9B56', fontSize: 22, lineHeight: 1.2, flexShrink: 0 }}&gt;!&lt;/span&gt;&#10;        &lt;div&gt;&#10;          &lt;div style={{ fontSize: 17, fontWeight: 'bold', color: '#172133', marginBottom: 6 }}&gt;响应迟缓&lt;/div&gt;&#10;          &lt;p style={{ fontSize: 14, color: '#5F5E5A', margin: 0, lineHeight: 1.6 }}&gt;传统报修依赖电话和微信群，客服人工登记后再手动派单，从「业主报修」到「师傅上门」平均要数小时甚至隔天，响应效率低。&lt;/p&gt;&#10;        &lt;/div&gt;&#10;      &lt;/div&gt;&#10;      &lt;div style={{ display: 'flex', gap: 20, background: '#fff', borderRadius: 10, padding: '20px 24px', boxShadow: '0 4px 16px rgba(23,33,51,0.06)', borderLeft: '4px solid #BD9B56' }}&gt;&#10;        &lt;span style={{ color: '#BD9B56', fontSize: 22, lineHeight: 1.2, flexShrink: 0 }}&gt;!&lt;/span&gt;&#10;        &lt;div&gt;&#10;          &lt;div style={{ fontSize: 17, fontWeight: 'bold', color: '#172133', marginBottom: 6 }}&gt;隐性知识散落&lt;/div&gt;&#10;          &lt;p style={{ fontSize: 14, color: '#5F5E5A', margin: 0, lineHeight: 1.6 }}&gt;装修施工时间、停车规则、宠物管理等规定，往往只存在于物业员工的个人经验里，新人上岗难以快速掌握，业主咨询也得不到统一准确的答案。&lt;/p&gt;&#10;        &lt;/div&gt;&#10;      &lt;/div&gt;&#10;    &lt;/div&gt;&#10;  &lt;/div&gt;&#10;  &lt;div style={{ flexShrink: 0, height: 44, display: 'flex', alignItems: 'flex-end', justifyContent: 'space-between' }}&gt;&#10;    &lt;span style={{ color: '#BD9B56', fontSize: 12, letterSpacing: '0.1em' }}&gt;云溪花园 · 智慧社区&lt;/span&gt;&#10;    &lt;span style={{ color: '#a09b8c', fontSize: 12 }}&gt;03 / 15&lt;/span&gt;&#10;  &lt;/div&gt;&#10;&lt;/Slide&gt;"/>
+        <p:cNvPr id="238" name="" descr="&lt;Slide style={{ width: '1280px', height: '720px', background: '#FBFCFA', position: 'relative', padding: '40px 64px', boxSizing: 'border-box', display: 'flex', flexDirection: 'column' }}&gt;&#10;  &lt;div style={{ flexShrink: 0 }}&gt;&#10;    &lt;div style={{ color: '#BD9B56', fontSize: 13, letterSpacing: '0.25em', marginBottom: 8 }}&gt;01 · 项目背景&lt;/div&gt;&#10;    &lt;h2 style={{ fontSize: 30, fontWeight: 'bold', color: '#172133', margin: 0, lineHeight: 1.3 }}&gt;传统物业的三重困境&lt;/h2&gt;&#10;    &lt;div style={{ fontSize: 14, color: '#6b7075', marginTop: 8 }}&gt;业务、数据、知识「三张皮」，需要用 AI 重新缝合&lt;/div&gt;&#10;  &lt;/div&gt;&#10;  &lt;div style={{ flex: 1, display: 'flex', alignItems: 'center' }}&gt;&#10;    &lt;div style={{ width: '100%', display: 'flex', flexDirection: 'column', gap: 18 }}&gt;&#10;      &lt;div style={{ display: 'flex', gap: 20, background: '#fff', borderRadius: 10, padding: '20px 24px', boxShadow: '0 4px 16px rgba(23,33,51,0.06)', borderLeft: '4px solid #BD9B56' }}&gt;&#10;        &lt;span style={{ color: '#BD9B56', fontSize: 22, lineHeight: 1.2, flexShrink: 0 }}&gt;!&lt;/span&gt;&#10;        &lt;div&gt;&#10;          &lt;div style={{ fontSize: 17, fontWeight: 'bold', color: '#172133', marginBottom: 6 }}&gt;信息孤岛&lt;/div&gt;&#10;          &lt;p style={{ fontSize: 14, color: '#5F5E5A', margin: 0, lineHeight: 1.6 }}&gt;业主报修、费用缴纳、巡检记录分散在多个系统，彼此不打通，物业无法掌握完整的社区运行状态，业主也看不到工单的处理进度。&lt;/p&gt;&#10;        &lt;/div&gt;&#10;      &lt;/div&gt;&#10;      &lt;div style={{ display: 'flex', gap: 20, background: '#fff', borderRadius: 10, padding: '20px 24px', boxShadow: '0 4px 16px rgba(23,33,51,0.06)', borderLeft: '4px solid #BD9B56' }}&gt;&#10;        &lt;span style={{ color: '#BD9B56', fontSize: 22, lineHeight: 1.2, flexShrink: 0 }}&gt;!&lt;/span&gt;&#10;        &lt;div&gt;&#10;          &lt;div style={{ fontSize: 17, fontWeight: 'bold', color: '#172133', marginBottom: 6 }}&gt;响应迟缓&lt;/div&gt;&#10;          &lt;p style={{ fontSize: 14, color: '#5F5E5A', margin: 0, lineHeight: 1.6 }}&gt;传统报修依赖电话和微信群，客服人工登记后再手动派单，从「业主报修」到「师傅上门」平均要数小时甚至隔天，响应效率低。&lt;/p&gt;&#10;        &lt;/div&gt;&#10;      &lt;/div&gt;&#10;      &lt;div style={{ display: 'flex', gap: 20, background: '#fff', borderRadius: 10, padding: '20px 24px', boxShadow: '0 4px 16px rgba(23,33,51,0.06)', borderLeft: '4px solid #BD9B56' }}&gt;&#10;        &lt;span style={{ color: '#BD9B56', fontSize: 22, lineHeight: 1.2, flexShrink: 0 }}&gt;!&lt;/span&gt;&#10;        &lt;div&gt;&#10;          &lt;div style={{ fontSize: 17, fontWeight: 'bold', color: '#172133', marginBottom: 6 }}&gt;隐性知识散落&lt;/div&gt;&#10;          &lt;p style={{ fontSize: 14, color: '#5F5E5A', margin: 0, lineHeight: 1.6 }}&gt;装修施工时间、停车规则、宠物管理等规定，往往只存在于物业员工的个人经验里，新人上岗难以快速掌握，业主咨询也得不到统一准确的答案。&lt;/p&gt;&#10;        &lt;/div&gt;&#10;      &lt;/div&gt;&#10;    &lt;/div&gt;&#10;  &lt;/div&gt;&#10;  &lt;div style={{ flexShrink: 0, height: 44, display: 'flex', alignItems: 'flex-end', justifyContent: 'space-between' }}&gt;&#10;    &lt;span style={{ color: '#BD9B56', fontSize: 12, letterSpacing: '0.1em' }}&gt;云溪花园 · 智慧社区&lt;/span&gt;&#10;    &lt;span style={{ color: '#a09b8c', fontSize: 12 }}&gt;03 / 15&lt;/span&gt;&#10;  &lt;/div&gt;&#10;&lt;/Slide&gt;"/>
         <p:cNvGrpSpPr/>
         <p:nvPr/>
       </p:nvGrpSpPr>
@@ -9983,7 +11395,7 @@
       </p:grpSpPr>
       <p:sp>
         <p:nvSpPr>
-          <p:cNvPr id="213" name=""/>
+          <p:cNvPr id="239" name=""/>
           <p:cNvSpPr/>
           <p:nvPr/>
         </p:nvSpPr>
@@ -10007,7 +11419,7 @@
       </p:sp>
       <p:sp>
         <p:nvSpPr>
-          <p:cNvPr id="214" name="" descr="{&quot;isTemplate&quot;:true,&quot;type&quot;:&quot;text&quot;}"/>
+          <p:cNvPr id="240" name="" descr="{&quot;isTemplate&quot;:true,&quot;type&quot;:&quot;text&quot;}"/>
           <p:cNvSpPr txBox="1"/>
           <p:nvPr/>
         </p:nvSpPr>
@@ -10052,7 +11464,7 @@
       </p:sp>
       <p:sp>
         <p:nvSpPr>
-          <p:cNvPr id="215" name="" descr="{&quot;isTemplate&quot;:true,&quot;type&quot;:&quot;text&quot;}"/>
+          <p:cNvPr id="241" name="" descr="{&quot;isTemplate&quot;:true,&quot;type&quot;:&quot;text&quot;}"/>
           <p:cNvSpPr txBox="1"/>
           <p:nvPr/>
         </p:nvSpPr>
@@ -10087,7 +11499,7 @@
       </p:sp>
       <p:sp>
         <p:nvSpPr>
-          <p:cNvPr id="216" name="" descr="{&quot;isTemplate&quot;:true,&quot;type&quot;:&quot;text&quot;}"/>
+          <p:cNvPr id="242" name="" descr="{&quot;isTemplate&quot;:true,&quot;type&quot;:&quot;text&quot;}"/>
           <p:cNvSpPr txBox="1"/>
           <p:nvPr/>
         </p:nvSpPr>
@@ -10142,7 +11554,7 @@
       </p:sp>
       <p:sp>
         <p:nvSpPr>
-          <p:cNvPr id="217" name=""/>
+          <p:cNvPr id="243" name=""/>
           <p:cNvSpPr/>
           <p:nvPr/>
         </p:nvSpPr>
@@ -10175,7 +11587,7 @@
       </p:sp>
       <p:sp>
         <p:nvSpPr>
-          <p:cNvPr id="218" name=""/>
+          <p:cNvPr id="244" name=""/>
           <p:cNvSpPr/>
           <p:nvPr/>
         </p:nvSpPr>
@@ -10232,7 +11644,7 @@
       </p:sp>
       <p:sp>
         <p:nvSpPr>
-          <p:cNvPr id="219" name="" descr="{&quot;isTemplate&quot;:true,&quot;type&quot;:&quot;text&quot;}"/>
+          <p:cNvPr id="245" name="" descr="{&quot;isTemplate&quot;:true,&quot;type&quot;:&quot;text&quot;}"/>
           <p:cNvSpPr txBox="1"/>
           <p:nvPr/>
         </p:nvSpPr>
@@ -10267,7 +11679,7 @@
       </p:sp>
       <p:sp>
         <p:nvSpPr>
-          <p:cNvPr id="220" name="" descr="{&quot;isTemplate&quot;:true,&quot;type&quot;:&quot;text&quot;}"/>
+          <p:cNvPr id="246" name="" descr="{&quot;isTemplate&quot;:true,&quot;type&quot;:&quot;text&quot;}"/>
           <p:cNvSpPr txBox="1"/>
           <p:nvPr/>
         </p:nvSpPr>
@@ -10302,7 +11714,7 @@
       </p:sp>
       <p:sp>
         <p:nvSpPr>
-          <p:cNvPr id="221" name="" descr="{&quot;isTemplate&quot;:true,&quot;type&quot;:&quot;text&quot;}"/>
+          <p:cNvPr id="247" name="" descr="{&quot;isTemplate&quot;:true,&quot;type&quot;:&quot;text&quot;}"/>
           <p:cNvSpPr txBox="1"/>
           <p:nvPr/>
         </p:nvSpPr>
@@ -10337,7 +11749,7 @@
       </p:sp>
       <p:sp>
         <p:nvSpPr>
-          <p:cNvPr id="222" name=""/>
+          <p:cNvPr id="248" name=""/>
           <p:cNvSpPr/>
           <p:nvPr/>
         </p:nvSpPr>
@@ -10370,7 +11782,7 @@
       </p:sp>
       <p:sp>
         <p:nvSpPr>
-          <p:cNvPr id="223" name=""/>
+          <p:cNvPr id="249" name=""/>
           <p:cNvSpPr/>
           <p:nvPr/>
         </p:nvSpPr>
@@ -10427,7 +11839,7 @@
       </p:sp>
       <p:sp>
         <p:nvSpPr>
-          <p:cNvPr id="224" name="" descr="{&quot;isTemplate&quot;:true,&quot;type&quot;:&quot;text&quot;}"/>
+          <p:cNvPr id="250" name="" descr="{&quot;isTemplate&quot;:true,&quot;type&quot;:&quot;text&quot;}"/>
           <p:cNvSpPr txBox="1"/>
           <p:nvPr/>
         </p:nvSpPr>
@@ -10462,7 +11874,7 @@
       </p:sp>
       <p:sp>
         <p:nvSpPr>
-          <p:cNvPr id="225" name="" descr="{&quot;isTemplate&quot;:true,&quot;type&quot;:&quot;text&quot;}"/>
+          <p:cNvPr id="251" name="" descr="{&quot;isTemplate&quot;:true,&quot;type&quot;:&quot;text&quot;}"/>
           <p:cNvSpPr txBox="1"/>
           <p:nvPr/>
         </p:nvSpPr>
@@ -10497,7 +11909,7 @@
       </p:sp>
       <p:sp>
         <p:nvSpPr>
-          <p:cNvPr id="226" name="" descr="{&quot;isTemplate&quot;:true,&quot;type&quot;:&quot;text&quot;}"/>
+          <p:cNvPr id="252" name="" descr="{&quot;isTemplate&quot;:true,&quot;type&quot;:&quot;text&quot;}"/>
           <p:cNvSpPr txBox="1"/>
           <p:nvPr/>
         </p:nvSpPr>
@@ -10532,7 +11944,7 @@
       </p:sp>
       <p:sp>
         <p:nvSpPr>
-          <p:cNvPr id="227" name=""/>
+          <p:cNvPr id="253" name=""/>
           <p:cNvSpPr/>
           <p:nvPr/>
         </p:nvSpPr>
@@ -10565,7 +11977,7 @@
       </p:sp>
       <p:sp>
         <p:nvSpPr>
-          <p:cNvPr id="228" name=""/>
+          <p:cNvPr id="254" name=""/>
           <p:cNvSpPr/>
           <p:nvPr/>
         </p:nvSpPr>
@@ -10622,7 +12034,7 @@
       </p:sp>
       <p:sp>
         <p:nvSpPr>
-          <p:cNvPr id="229" name="" descr="{&quot;isTemplate&quot;:true,&quot;type&quot;:&quot;text&quot;}"/>
+          <p:cNvPr id="255" name="" descr="{&quot;isTemplate&quot;:true,&quot;type&quot;:&quot;text&quot;}"/>
           <p:cNvSpPr txBox="1"/>
           <p:nvPr/>
         </p:nvSpPr>
@@ -10657,7 +12069,7 @@
       </p:sp>
       <p:sp>
         <p:nvSpPr>
-          <p:cNvPr id="230" name="" descr="{&quot;isTemplate&quot;:true,&quot;type&quot;:&quot;text&quot;}"/>
+          <p:cNvPr id="256" name="" descr="{&quot;isTemplate&quot;:true,&quot;type&quot;:&quot;text&quot;}"/>
           <p:cNvSpPr txBox="1"/>
           <p:nvPr/>
         </p:nvSpPr>
@@ -10692,7 +12104,7 @@
       </p:sp>
       <p:sp>
         <p:nvSpPr>
-          <p:cNvPr id="231" name="" descr="{&quot;isTemplate&quot;:true,&quot;type&quot;:&quot;text&quot;}"/>
+          <p:cNvPr id="257" name="" descr="{&quot;isTemplate&quot;:true,&quot;type&quot;:&quot;text&quot;}"/>
           <p:cNvSpPr txBox="1"/>
           <p:nvPr/>
         </p:nvSpPr>
@@ -10727,7 +12139,7 @@
       </p:sp>
       <p:sp>
         <p:nvSpPr>
-          <p:cNvPr id="232" name="" descr="{&quot;isTemplate&quot;:true,&quot;type&quot;:&quot;text&quot;}"/>
+          <p:cNvPr id="258" name="" descr="{&quot;isTemplate&quot;:true,&quot;type&quot;:&quot;text&quot;}"/>
           <p:cNvSpPr txBox="1"/>
           <p:nvPr/>
         </p:nvSpPr>
@@ -10782,7 +12194,7 @@
       </p:sp>
       <p:sp>
         <p:nvSpPr>
-          <p:cNvPr id="233" name="" descr="{&quot;isTemplate&quot;:true,&quot;type&quot;:&quot;text&quot;}"/>
+          <p:cNvPr id="259" name="" descr="{&quot;isTemplate&quot;:true,&quot;type&quot;:&quot;text&quot;}"/>
           <p:cNvSpPr txBox="1"/>
           <p:nvPr/>
         </p:nvSpPr>
@@ -10825,7 +12237,7 @@
   <p:cSld>
     <p:spTree>
       <p:nvGrpSpPr>
-        <p:cNvPr id="234" name="" descr="&lt;Slide style={{ width: '1280px', height: '720px', background: '#FBFCFA', position: 'relative', padding: '32px 64px', boxSizing: 'border-box', display: 'flex', flexDirection: 'column' }}&gt;&#10;  &lt;div style={{ flexShrink: 0 }}&gt;&#10;    &lt;div style={{ color: '#BD9B56', fontSize: 13, letterSpacing: '0.25em', marginBottom: 6 }}&gt;01 · 项目目标&lt;/div&gt;&#10;    &lt;h2 style={{ fontSize: 30, fontWeight: 'bold', color: '#172133', margin: 0, lineHeight: 1.3 }}&gt;本项目要验证的四件事&lt;/h2&gt;&#10;  &lt;/div&gt;&#10;  &lt;div style={{ flex: 1, display: 'flex', alignItems: 'center', minHeight: 0 }}&gt;&#10;    &lt;div style={{ width: '100%', display: 'grid', gridTemplateColumns: '1fr 1fr', gap: 16 }}&gt;&#10;      &lt;div style={{ background: '#fff', borderRadius: 10, padding: '18px 22px', boxShadow: '0 4px 16px rgba(23,33,51,0.06)', borderTop: '3px solid #BD9B56' }}&gt;&#10;        &lt;div style={{ fontSize: 17, fontWeight: 'bold', color: '#172133', marginBottom: 6 }}&gt;1.  AI 能否理解业务意图&lt;/div&gt;&#10;        &lt;p style={{ fontSize: 14, color: '#5F5E5A', margin: 0, lineHeight: 1.55 }}&gt;用户说一句「厨房漏水了」，系统能否准确识别为报修需求，而非闲聊或误判。&lt;/p&gt;&#10;      &lt;/div&gt;&#10;      &lt;div style={{ background: '#fff', borderRadius: 10, padding: '18px 22px', boxShadow: '0 4px 16px rgba(23,33,51,0.06)', borderTop: '3px solid #BD9B56' }}&gt;&#10;        &lt;div style={{ fontSize: 17, fontWeight: 'bold', color: '#172133', marginBottom: 6 }}&gt;2.  Agent 能否调用业务工具&lt;/div&gt;&#10;        &lt;p style={{ fontSize: 14, color: '#5F5E5A', margin: 0, lineHeight: 1.55 }}&gt;识别意图后，能否自动创建工单、查询费用、检索知识，而不是停留在「回答」层面。&lt;/p&gt;&#10;      &lt;/div&gt;&#10;      &lt;div style={{ background: '#fff', borderRadius: 10, padding: '18px 22px', boxShadow: '0 4px 16px rgba(23,33,51,0.06)', borderTop: '3px solid #BD9B56' }}&gt;&#10;        &lt;div style={{ fontSize: 17, fontWeight: 'bold', color: '#172133', marginBottom: 6 }}&gt;3.  能否跑通业务闭环&lt;/div&gt;&#10;        &lt;p style={{ fontSize: 14, color: '#5F5E5A', margin: 0, lineHeight: 1.55 }}&gt;从报修到派单到完成，AI 是否真正参与了业务流程，而非只在前端加了一个聊天窗口。&lt;/p&gt;&#10;      &lt;/div&gt;&#10;      &lt;div style={{ background: '#fff', borderRadius: 10, padding: '18px 22px', boxShadow: '0 4px 16px rgba(23,33,51,0.06)', borderTop: '3px solid #BD9B56' }}&gt;&#10;        &lt;div style={{ fontSize: 17, fontWeight: 'bold', color: '#172133', marginBottom: 6 }}&gt;4.  RAG 能否准确回答&lt;/div&gt;&#10;        &lt;p style={{ fontSize: 14, color: '#5F5E5A', margin: 0, lineHeight: 1.55 }}&gt;对「装修几点施工」这类制度问题，能否检索到正确依据并给出准确、有出处的答案。&lt;/p&gt;&#10;      &lt;/div&gt;&#10;    &lt;/div&gt;&#10;  &lt;/div&gt;&#10;  &lt;div style={{ flexShrink: 0, height: 40, display: 'flex', alignItems: 'flex-end', justifyContent: 'space-between' }}&gt;&#10;    &lt;span style={{ color: '#BD9B56', fontSize: 12, letterSpacing: '0.1em' }}&gt;云溪花园 · 智慧社区&lt;/span&gt;&#10;    &lt;span style={{ color: '#a09b8c', fontSize: 12 }}&gt;04 / 15&lt;/span&gt;&#10;  &lt;/div&gt;&#10;&lt;/Slide&gt;"/>
+        <p:cNvPr id="260" name="" descr="&lt;Slide style={{ width: '1280px', height: '720px', background: '#FBFCFA', position: 'relative', padding: '32px 64px', boxSizing: 'border-box', display: 'flex', flexDirection: 'column' }}&gt;&#10;  &lt;div style={{ flexShrink: 0 }}&gt;&#10;    &lt;div style={{ color: '#BD9B56', fontSize: 13, letterSpacing: '0.25em', marginBottom: 6 }}&gt;01 · 项目目标&lt;/div&gt;&#10;    &lt;h2 style={{ fontSize: 30, fontWeight: 'bold', color: '#172133', margin: 0, lineHeight: 1.3 }}&gt;本项目要验证的四件事&lt;/h2&gt;&#10;  &lt;/div&gt;&#10;  &lt;div style={{ flex: 1, display: 'flex', alignItems: 'center', minHeight: 0 }}&gt;&#10;    &lt;div style={{ width: '100%', display: 'grid', gridTemplateColumns: '1fr 1fr', gap: 16 }}&gt;&#10;      &lt;div style={{ background: '#fff', borderRadius: 10, padding: '18px 22px', boxShadow: '0 4px 16px rgba(23,33,51,0.06)', borderTop: '3px solid #BD9B56' }}&gt;&#10;        &lt;div style={{ fontSize: 17, fontWeight: 'bold', color: '#172133', marginBottom: 6 }}&gt;1.  AI 能否理解业务意图&lt;/div&gt;&#10;        &lt;p style={{ fontSize: 14, color: '#5F5E5A', margin: 0, lineHeight: 1.55 }}&gt;用户说一句「厨房漏水了」，系统能否准确识别为报修需求，而非闲聊或误判。&lt;/p&gt;&#10;      &lt;/div&gt;&#10;      &lt;div style={{ background: '#fff', borderRadius: 10, padding: '18px 22px', boxShadow: '0 4px 16px rgba(23,33,51,0.06)', borderTop: '3px solid #BD9B56' }}&gt;&#10;        &lt;div style={{ fontSize: 17, fontWeight: 'bold', color: '#172133', marginBottom: 6 }}&gt;2.  Agent 能否调用业务工具&lt;/div&gt;&#10;        &lt;p style={{ fontSize: 14, color: '#5F5E5A', margin: 0, lineHeight: 1.55 }}&gt;识别意图后，能否自动创建工单、查询费用、检索知识，而不是停留在「回答」层面。&lt;/p&gt;&#10;      &lt;/div&gt;&#10;      &lt;div style={{ background: '#fff', borderRadius: 10, padding: '18px 22px', boxShadow: '0 4px 16px rgba(23,33,51,0.06)', borderTop: '3px solid #BD9B56' }}&gt;&#10;        &lt;div style={{ fontSize: 17, fontWeight: 'bold', color: '#172133', marginBottom: 6 }}&gt;3.  能否跑通业务闭环&lt;/div&gt;&#10;        &lt;p style={{ fontSize: 14, color: '#5F5E5A', margin: 0, lineHeight: 1.55 }}&gt;从报修到派单到完成，AI 是否真正参与了业务流程，而非只在前端加了一个聊天窗口。&lt;/p&gt;&#10;      &lt;/div&gt;&#10;      &lt;div style={{ background: '#fff', borderRadius: 10, padding: '18px 22px', boxShadow: '0 4px 16px rgba(23,33,51,0.06)', borderTop: '3px solid #BD9B56' }}&gt;&#10;        &lt;div style={{ fontSize: 17, fontWeight: 'bold', color: '#172133', marginBottom: 6 }}&gt;4.  RAG 能否准确回答&lt;/div&gt;&#10;        &lt;p style={{ fontSize: 14, color: '#5F5E5A', margin: 0, lineHeight: 1.55 }}&gt;对「装修几点施工」这类制度问题，能否检索到正确依据并给出准确、有出处的答案。&lt;/p&gt;&#10;      &lt;/div&gt;&#10;    &lt;/div&gt;&#10;  &lt;/div&gt;&#10;  &lt;div style={{ flexShrink: 0, height: 40, display: 'flex', alignItems: 'flex-end', justifyContent: 'space-between' }}&gt;&#10;    &lt;span style={{ color: '#BD9B56', fontSize: 12, letterSpacing: '0.1em' }}&gt;云溪花园 · 智慧社区&lt;/span&gt;&#10;    &lt;span style={{ color: '#a09b8c', fontSize: 12 }}&gt;04 / 15&lt;/span&gt;&#10;  &lt;/div&gt;&#10;&lt;/Slide&gt;"/>
         <p:cNvGrpSpPr/>
         <p:nvPr/>
       </p:nvGrpSpPr>
@@ -10839,7 +12251,7 @@
       </p:grpSpPr>
       <p:sp>
         <p:nvSpPr>
-          <p:cNvPr id="235" name=""/>
+          <p:cNvPr id="261" name=""/>
           <p:cNvSpPr/>
           <p:nvPr/>
         </p:nvSpPr>
@@ -10863,7 +12275,7 @@
       </p:sp>
       <p:sp>
         <p:nvSpPr>
-          <p:cNvPr id="236" name="" descr="{&quot;isTemplate&quot;:true,&quot;type&quot;:&quot;text&quot;}"/>
+          <p:cNvPr id="262" name="" descr="{&quot;isTemplate&quot;:true,&quot;type&quot;:&quot;text&quot;}"/>
           <p:cNvSpPr txBox="1"/>
           <p:nvPr/>
         </p:nvSpPr>
@@ -10908,7 +12320,7 @@
       </p:sp>
       <p:sp>
         <p:nvSpPr>
-          <p:cNvPr id="237" name="" descr="{&quot;isTemplate&quot;:true,&quot;type&quot;:&quot;text&quot;}"/>
+          <p:cNvPr id="263" name="" descr="{&quot;isTemplate&quot;:true,&quot;type&quot;:&quot;text&quot;}"/>
           <p:cNvSpPr txBox="1"/>
           <p:nvPr/>
         </p:nvSpPr>
@@ -10943,7 +12355,7 @@
       </p:sp>
       <p:sp>
         <p:nvSpPr>
-          <p:cNvPr id="238" name=""/>
+          <p:cNvPr id="264" name=""/>
           <p:cNvSpPr/>
           <p:nvPr/>
         </p:nvSpPr>
@@ -10976,7 +12388,7 @@
       </p:sp>
       <p:sp>
         <p:nvSpPr>
-          <p:cNvPr id="239" name=""/>
+          <p:cNvPr id="265" name=""/>
           <p:cNvSpPr/>
           <p:nvPr/>
         </p:nvSpPr>
@@ -11033,7 +12445,7 @@
       </p:sp>
       <p:sp>
         <p:nvSpPr>
-          <p:cNvPr id="240" name="" descr="{&quot;isTemplate&quot;:true,&quot;type&quot;:&quot;text&quot;}"/>
+          <p:cNvPr id="266" name="" descr="{&quot;isTemplate&quot;:true,&quot;type&quot;:&quot;text&quot;}"/>
           <p:cNvSpPr txBox="1"/>
           <p:nvPr/>
         </p:nvSpPr>
@@ -11078,7 +12490,7 @@
       </p:sp>
       <p:sp>
         <p:nvSpPr>
-          <p:cNvPr id="241" name="" descr="{&quot;isTemplate&quot;:true,&quot;type&quot;:&quot;text&quot;}"/>
+          <p:cNvPr id="267" name="" descr="{&quot;isTemplate&quot;:true,&quot;type&quot;:&quot;text&quot;}"/>
           <p:cNvSpPr txBox="1"/>
           <p:nvPr/>
         </p:nvSpPr>
@@ -11113,7 +12525,7 @@
       </p:sp>
       <p:sp>
         <p:nvSpPr>
-          <p:cNvPr id="242" name=""/>
+          <p:cNvPr id="268" name=""/>
           <p:cNvSpPr/>
           <p:nvPr/>
         </p:nvSpPr>
@@ -11146,7 +12558,7 @@
       </p:sp>
       <p:sp>
         <p:nvSpPr>
-          <p:cNvPr id="243" name=""/>
+          <p:cNvPr id="269" name=""/>
           <p:cNvSpPr/>
           <p:nvPr/>
         </p:nvSpPr>
@@ -11203,7 +12615,7 @@
       </p:sp>
       <p:sp>
         <p:nvSpPr>
-          <p:cNvPr id="244" name="" descr="{&quot;isTemplate&quot;:true,&quot;type&quot;:&quot;text&quot;}"/>
+          <p:cNvPr id="270" name="" descr="{&quot;isTemplate&quot;:true,&quot;type&quot;:&quot;text&quot;}"/>
           <p:cNvSpPr txBox="1"/>
           <p:nvPr/>
         </p:nvSpPr>
@@ -11248,7 +12660,7 @@
       </p:sp>
       <p:sp>
         <p:nvSpPr>
-          <p:cNvPr id="245" name="" descr="{&quot;isTemplate&quot;:true,&quot;type&quot;:&quot;text&quot;}"/>
+          <p:cNvPr id="271" name="" descr="{&quot;isTemplate&quot;:true,&quot;type&quot;:&quot;text&quot;}"/>
           <p:cNvSpPr txBox="1"/>
           <p:nvPr/>
         </p:nvSpPr>
@@ -11283,7 +12695,7 @@
       </p:sp>
       <p:sp>
         <p:nvSpPr>
-          <p:cNvPr id="246" name=""/>
+          <p:cNvPr id="272" name=""/>
           <p:cNvSpPr/>
           <p:nvPr/>
         </p:nvSpPr>
@@ -11316,7 +12728,7 @@
       </p:sp>
       <p:sp>
         <p:nvSpPr>
-          <p:cNvPr id="247" name=""/>
+          <p:cNvPr id="273" name=""/>
           <p:cNvSpPr/>
           <p:nvPr/>
         </p:nvSpPr>
@@ -11373,7 +12785,7 @@
       </p:sp>
       <p:sp>
         <p:nvSpPr>
-          <p:cNvPr id="248" name="" descr="{&quot;isTemplate&quot;:true,&quot;type&quot;:&quot;text&quot;}"/>
+          <p:cNvPr id="274" name="" descr="{&quot;isTemplate&quot;:true,&quot;type&quot;:&quot;text&quot;}"/>
           <p:cNvSpPr txBox="1"/>
           <p:nvPr/>
         </p:nvSpPr>
@@ -11418,7 +12830,7 @@
       </p:sp>
       <p:sp>
         <p:nvSpPr>
-          <p:cNvPr id="249" name="" descr="{&quot;isTemplate&quot;:true,&quot;type&quot;:&quot;text&quot;}"/>
+          <p:cNvPr id="275" name="" descr="{&quot;isTemplate&quot;:true,&quot;type&quot;:&quot;text&quot;}"/>
           <p:cNvSpPr txBox="1"/>
           <p:nvPr/>
         </p:nvSpPr>
@@ -11473,7 +12885,7 @@
       </p:sp>
       <p:sp>
         <p:nvSpPr>
-          <p:cNvPr id="250" name=""/>
+          <p:cNvPr id="276" name=""/>
           <p:cNvSpPr/>
           <p:nvPr/>
         </p:nvSpPr>
@@ -11506,7 +12918,7 @@
       </p:sp>
       <p:sp>
         <p:nvSpPr>
-          <p:cNvPr id="251" name=""/>
+          <p:cNvPr id="277" name=""/>
           <p:cNvSpPr/>
           <p:nvPr/>
         </p:nvSpPr>
@@ -11563,7 +12975,7 @@
       </p:sp>
       <p:sp>
         <p:nvSpPr>
-          <p:cNvPr id="252" name="" descr="{&quot;isTemplate&quot;:true,&quot;type&quot;:&quot;text&quot;}"/>
+          <p:cNvPr id="278" name="" descr="{&quot;isTemplate&quot;:true,&quot;type&quot;:&quot;text&quot;}"/>
           <p:cNvSpPr txBox="1"/>
           <p:nvPr/>
         </p:nvSpPr>
@@ -11608,7 +13020,7 @@
       </p:sp>
       <p:sp>
         <p:nvSpPr>
-          <p:cNvPr id="253" name="" descr="{&quot;isTemplate&quot;:true,&quot;type&quot;:&quot;text&quot;}"/>
+          <p:cNvPr id="279" name="" descr="{&quot;isTemplate&quot;:true,&quot;type&quot;:&quot;text&quot;}"/>
           <p:cNvSpPr txBox="1"/>
           <p:nvPr/>
         </p:nvSpPr>
@@ -11643,7 +13055,7 @@
       </p:sp>
       <p:sp>
         <p:nvSpPr>
-          <p:cNvPr id="254" name="" descr="{&quot;isTemplate&quot;:true,&quot;type&quot;:&quot;text&quot;}"/>
+          <p:cNvPr id="280" name="" descr="{&quot;isTemplate&quot;:true,&quot;type&quot;:&quot;text&quot;}"/>
           <p:cNvSpPr txBox="1"/>
           <p:nvPr/>
         </p:nvSpPr>
@@ -11698,7 +13110,7 @@
       </p:sp>
       <p:sp>
         <p:nvSpPr>
-          <p:cNvPr id="255" name="" descr="{&quot;isTemplate&quot;:true,&quot;type&quot;:&quot;text&quot;}"/>
+          <p:cNvPr id="281" name="" descr="{&quot;isTemplate&quot;:true,&quot;type&quot;:&quot;text&quot;}"/>
           <p:cNvSpPr txBox="1"/>
           <p:nvPr/>
         </p:nvSpPr>
@@ -11737,11 +13149,11 @@
 </file>
 
 <file path=ppt/slides/slide5.xml><?xml version="1.0" encoding="utf-8"?>
-<p:sld xmlns:p="http://schemas.openxmlformats.org/presentationml/2006/main" xmlns:a="http://schemas.openxmlformats.org/drawingml/2006/main">
+<p:sld xmlns:p="http://schemas.openxmlformats.org/presentationml/2006/main" xmlns:r="http://schemas.openxmlformats.org/officeDocument/2006/relationships" xmlns:a="http://schemas.openxmlformats.org/drawingml/2006/main" xmlns:asvg="http://schemas.microsoft.com/office/drawing/2016/SVG/main" xmlns:mc="http://schemas.openxmlformats.org/markup-compatibility/2006" mc:Ignorable="asvg">
   <p:cSld>
     <p:spTree>
       <p:nvGrpSpPr>
-        <p:cNvPr id="256" name="" descr="&lt;Slide style={{ width: '1280px', height: '720px', background: '#FBFCFA', position: 'relative', padding: '34px 64px', boxSizing: 'border-box', display: 'flex', flexDirection: 'column' }}&gt;&#10;  &lt;div style={{ flexShrink: 0 }}&gt;&#10;    &lt;div style={{ color: '#BD9B56', fontSize: 13, letterSpacing: '0.25em', marginBottom: 6 }}&gt;01 · 项目规模&lt;/div&gt;&#10;    &lt;h2 style={{ fontSize: 30, fontWeight: 'bold', color: '#172133', margin: 0, lineHeight: 1.3 }}&gt;虚拟社区数据资产：云溪花园&lt;/h2&gt;&#10;    &lt;div style={{ fontSize: 14, color: '#6b7075', marginTop: 6 }}&gt;为验证 AI 能力，构建了一个高仿真的数字化社区——不是几条演示假数据，而是覆盖完整业务场景的仿真数据&lt;/div&gt;&#10;  &lt;/div&gt;&#10;  &lt;div style={{ flex: 1, display: 'flex', alignItems: 'center', justifyContent: 'center' }}&gt;&#10;    &lt;div style={{ width: '100%', display: 'flex', gap: 18 }}&gt;&#10;      &lt;div style={{ flex: 1, background: '#fff', borderRadius: 12, padding: '24px 16px', textAlign: 'center', boxShadow: '0 6px 24px rgba(23,33,51,0.08)', borderTop: '4px solid #BD9B56' }}&gt;&#10;        &lt;div style={{ fontSize: 12, color: '#BD9B56', letterSpacing: '0.2em', marginBottom: 12 }}&gt;空间规模&lt;/div&gt;&#10;        &lt;div style={{ fontSize: 40, fontWeight: 'bold', color: '#172133', lineHeight: 1, fontFamily: 'Inter, sans-serif' }}&gt;8 栋&lt;/div&gt;&#10;        &lt;div style={{ fontSize: 13, color: '#5F5E5A', marginTop: 12, lineHeight: 1.6 }}&gt;1664 套房源&lt;br/&gt;入住约 1200 户&lt;/div&gt;&#10;      &lt;/div&gt;&#10;      &lt;div style={{ flex: 1, background: '#fff', borderRadius: 12, padding: '24px 16px', textAlign: 'center', boxShadow: '0 6px 24px rgba(23,33,51,0.08)', borderTop: '4px solid #BD9B56' }}&gt;&#10;        &lt;div style={{ fontSize: 12, color: '#BD9B56', letterSpacing: '0.2em', marginBottom: 12 }}&gt;用户体系&lt;/div&gt;&#10;        &lt;div style={{ fontSize: 40, fontWeight: 'bold', color: '#172133', lineHeight: 1, fontFamily: 'Inter, sans-serif' }}&gt;275&lt;/div&gt;&#10;        &lt;div style={{ fontSize: 13, color: '#5F5E5A', marginTop: 12, lineHeight: 1.6 }}&gt;200 业主 + 75 物业&lt;br/&gt;10 管理 / 15 维修 / 50 一线&lt;/div&gt;&#10;      &lt;/div&gt;&#10;      &lt;div style={{ flex: 1, background: '#fff', borderRadius: 12, padding: '24px 16px', textAlign: 'center', boxShadow: '0 6px 24px rgba(23,33,51,0.08)', borderTop: '4px solid #BD9B56' }}&gt;&#10;        &lt;div style={{ fontSize: 12, color: '#BD9B56', letterSpacing: '0.2em', marginBottom: 12 }}&gt;业务数据&lt;/div&gt;&#10;        &lt;div style={{ fontSize: 40, fontWeight: 'bold', color: '#172133', lineHeight: 1, fontFamily: 'Inter, sans-serif' }}&gt;746&lt;/div&gt;&#10;        &lt;div style={{ fontSize: 13, color: '#5F5E5A', marginTop: 12, lineHeight: 1.6 }}&gt;账单 + 50 工单 + 24 公告&lt;br/&gt;4 类费用 · 6 类工单&lt;/div&gt;&#10;      &lt;/div&gt;&#10;      &lt;div style={{ flex: 1, background: 'linear-gradient(135deg, #172133 0%, #22395E 100%)', borderRadius: 12, padding: '24px 16px', textAlign: 'center', boxShadow: '0 6px 24px rgba(23,33,51,0.18)', borderTop: '4px solid #BD9B56' }}&gt;&#10;        &lt;div style={{ fontSize: 12, color: '#BD9B56', letterSpacing: '0.2em', marginBottom: 12 }}&gt;知识库&lt;/div&gt;&#10;        &lt;div style={{ fontSize: 40, fontWeight: 'bold', color: '#FBFCFA', lineHeight: 1, fontFamily: 'Inter, sans-serif' }}&gt;22&lt;/div&gt;&#10;        &lt;div style={{ fontSize: 13, color: 'rgba(251,252,250,0.85)', marginTop: 12, lineHeight: 1.6 }}&gt;知识文档 → 99 切片&lt;br/&gt;7 个分类 · pgvector&lt;/div&gt;&#10;      &lt;/div&gt;&#10;    &lt;/div&gt;&#10;  &lt;/div&gt;&#10;  &lt;div style={{ flexShrink: 0, background: 'rgba(189,155,86,0.10)', borderLeft: '4px solid #BD9B56', borderRadius: '0 8px 8px 0', padding: '12px 20px', marginBottom: 6 }}&gt;&#10;    &lt;p style={{ fontSize: 13, color: '#172133', margin: 0, lineHeight: 1.6 }}&gt;&lt;span style={{ color: '#BD9B56', fontWeight: 'bold' }}&gt;数据可复现：&lt;/span&gt;全部数据来自 &lt;span style={{ fontFamily: 'Inter, sans-serif' }}&gt;data/seed/&lt;/span&gt; 目录 8 个 SQL 种子文件，一键导入即可复现整套社区，保证演示效果真实、可验证。&lt;/p&gt;&#10;  &lt;/div&gt;&#10;  &lt;div style={{ flexShrink: 0, height: 40, display: 'flex', alignItems: 'flex-end', justifyContent: 'space-between' }}&gt;&#10;    &lt;span style={{ color: '#BD9B56', fontSize: 12, letterSpacing: '0.1em' }}&gt;云溪花园 · 智慧社区&lt;/span&gt;&#10;    &lt;span style={{ color: '#a09b8c', fontSize: 12 }}&gt;05 / 15&lt;/span&gt;&#10;  &lt;/div&gt;&#10;&lt;/Slide&gt;"/>
+        <p:cNvPr id="282" name="" descr="&lt;Slide style={{ width: '1280px', height: '720px', background: '#FBFCFA', position: 'relative', padding: '32px 64px', boxSizing: 'border-box', display: 'flex', flexDirection: 'column' }}&gt;&#10;  &lt;div style={{ flexShrink: 0 }}&gt;&#10;    &lt;div style={{ color: '#BD9B56', fontSize: 13, letterSpacing: '0.25em', marginBottom: 6 }}&gt;01 · 项目规模&lt;/div&gt;&#10;    &lt;h2 style={{ fontSize: 30, fontWeight: 'bold', color: '#172133', margin: 0, lineHeight: 1.3 }}&gt;虚拟社区数据资产：云溪花园&lt;/h2&gt;&#10;    &lt;div style={{ fontSize: 14, color: '#6b7075', marginTop: 6 }}&gt;以一个社区为根，向下延伸出空间、人员、业务、知识四类数据资产&lt;/div&gt;&#10;  &lt;/div&gt;&#10;  &lt;div style={{ flex: 1, display: 'flex', alignItems: 'center', justifyContent: 'center' }}&gt;&#10;    &lt;svg width=&quot;1150&quot; height=&quot;470&quot; viewBox=&quot;0 0 1150 470&quot;&gt;&#10;      &lt;g fontFamily=&quot;Inter, sans-serif&quot;&gt;&#10;        {/* 根节点 community */}&#10;        &lt;rect x=&quot;450&quot; y=&quot;14&quot; width=&quot;250&quot; height=&quot;58&quot; rx=&quot;10&quot; fill=&quot;#172133&quot; /&gt;&#10;        &lt;text x=&quot;575&quot; y=&quot;38&quot; textAnchor=&quot;middle&quot; fontSize=&quot;15&quot; fontWeight=&quot;bold&quot; fill=&quot;#FBFCFA&quot;&gt;community 云溪花园&lt;/text&gt;&#10;        &lt;text x=&quot;575&quot; y=&quot;58&quot; textAnchor=&quot;middle&quot; fontSize=&quot;11&quot; fill=&quot;#BD9B56&quot;&gt;1 个小区 · 上海浦东张江路1268号&lt;/text&gt;&#10;        {/* 根节点连接线 */}&#10;        &lt;line x1=&quot;575&quot; y1=&quot;72&quot; x2=&quot;575&quot; y2=&quot;92&quot; stroke=&quot;#BD9B56&quot; strokeWidth=&quot;1.5&quot; /&gt;&#10;        &lt;line x1=&quot;150&quot; y1=&quot;92&quot; x2=&quot;1015&quot; y2=&quot;92&quot; stroke=&quot;#BD9B56&quot; strokeWidth=&quot;1.5&quot; /&gt;&#10;        &lt;line x1=&quot;150&quot; y1=&quot;92&quot; x2=&quot;150&quot; y2=&quot;108&quot; stroke=&quot;#BD9B56&quot; strokeWidth=&quot;1.5&quot; /&gt;&#10;        &lt;line x1=&quot;438&quot; y1=&quot;92&quot; x2=&quot;438&quot; y2=&quot;108&quot; stroke=&quot;#BD9B56&quot; strokeWidth=&quot;1.5&quot; /&gt;&#10;        &lt;line x1=&quot;726&quot; y1=&quot;92&quot; x2=&quot;726&quot; y2=&quot;108&quot; stroke=&quot;#BD9B56&quot; strokeWidth=&quot;1.5&quot; /&gt;&#10;        &lt;line x1=&quot;1015&quot; y1=&quot;92&quot; x2=&quot;1015&quot; y2=&quot;108&quot; stroke=&quot;#BD9B56&quot; strokeWidth=&quot;1.5&quot; /&gt;&#10;&#10;        {/* 分组1：空间资产 */}&#10;        &lt;text x=&quot;150&quot; y=&quot;128&quot; textAnchor=&quot;middle&quot; fontSize=&quot;12&quot; fontWeight=&quot;bold&quot; fill=&quot;#BD9B56&quot;&gt;空间资产&lt;/text&gt;&#10;        &lt;rect x=&quot;20&quot; y=&quot;138&quot; width=&quot;260&quot; height=&quot;56&quot; rx=&quot;8&quot; fill=&quot;rgba(34,57,94,0.06)&quot; stroke=&quot;#22395E&quot; strokeWidth=&quot;1.5&quot; /&gt;&#10;        &lt;text x=&quot;150&quot; y=&quot;162&quot; textAnchor=&quot;middle&quot; fontSize=&quot;14&quot; fontWeight=&quot;bold&quot; fill=&quot;#172133&quot;&gt;building 楼栋 ×8&lt;/text&gt;&#10;        &lt;text x=&quot;150&quot; y=&quot;182&quot; textAnchor=&quot;middle&quot; fontSize=&quot;11&quot; fill=&quot;#5F5E5A&quot;&gt;每栋 26 层 · 2 单元 · 4 户/层&lt;/text&gt;&#10;        &lt;line x1=&quot;150&quot; y1=&quot;194&quot; x2=&quot;150&quot; y2=&quot;206&quot; stroke=&quot;#BD9B56&quot; strokeWidth=&quot;1.2&quot; /&gt;&#10;        &lt;rect x=&quot;20&quot; y=&quot;210&quot; width=&quot;260&quot; height=&quot;56&quot; rx=&quot;8&quot; fill=&quot;rgba(34,57,94,0.06)&quot; stroke=&quot;#22395E&quot; strokeWidth=&quot;1.5&quot; /&gt;&#10;        &lt;text x=&quot;150&quot; y=&quot;234&quot; textAnchor=&quot;middle&quot; fontSize=&quot;14&quot; fontWeight=&quot;bold&quot; fill=&quot;#172133&quot;&gt;house 房屋 ×1664&lt;/text&gt;&#10;        &lt;text x=&quot;150&quot; y=&quot;254&quot; textAnchor=&quot;middle&quot; fontSize=&quot;11&quot; fill=&quot;#5F5E5A&quot;&gt;入住约 1200 户 · 800 车位&lt;/text&gt;&#10;&#10;        {/* 分组2：人员资产 */}&#10;        &lt;text x=&quot;438&quot; y=&quot;128&quot; textAnchor=&quot;middle&quot; fontSize=&quot;12&quot; fontWeight=&quot;bold&quot; fill=&quot;#BD9B56&quot;&gt;人员资产&lt;/text&gt;&#10;        &lt;rect x=&quot;308&quot; y=&quot;138&quot; width=&quot;260&quot; height=&quot;56&quot; rx=&quot;8&quot; fill=&quot;rgba(189,155,86,0.10)&quot; stroke=&quot;#BD9B56&quot; strokeWidth=&quot;1.5&quot; /&gt;&#10;        &lt;text x=&quot;438&quot; y=&quot;162&quot; textAnchor=&quot;middle&quot; fontSize=&quot;14&quot; fontWeight=&quot;bold&quot; fill=&quot;#172133&quot;&gt;user 业主 ×200&lt;/text&gt;&#10;        &lt;text x=&quot;438&quot; y=&quot;182&quot; textAnchor=&quot;middle&quot; fontSize=&quot;11&quot; fill=&quot;#5F5E5A&quot;&gt;house_binding 绑定 200 套&lt;/text&gt;&#10;        &lt;line x1=&quot;438&quot; y1=&quot;194&quot; x2=&quot;438&quot; y2=&quot;206&quot; stroke=&quot;#BD9B56&quot; strokeWidth=&quot;1.2&quot; /&gt;&#10;        &lt;rect x=&quot;308&quot; y=&quot;210&quot; width=&quot;260&quot; height=&quot;56&quot; rx=&quot;8&quot; fill=&quot;rgba(189,155,86,0.10)&quot; stroke=&quot;#BD9B56&quot; strokeWidth=&quot;1.5&quot; /&gt;&#10;        &lt;text x=&quot;438&quot; y=&quot;234&quot; textAnchor=&quot;middle&quot; fontSize=&quot;14&quot; fontWeight=&quot;bold&quot; fill=&quot;#172133&quot;&gt;worker 物业 ×75&lt;/text&gt;&#10;        &lt;text x=&quot;438&quot; y=&quot;254&quot; textAnchor=&quot;middle&quot; fontSize=&quot;11&quot; fill=&quot;#5F5E5A&quot;&gt;10 管理 / 15 维修 / 50 一线&lt;/text&gt;&#10;&#10;        {/* 分组3：业务数据 */}&#10;        &lt;text x=&quot;726&quot; y=&quot;128&quot; textAnchor=&quot;middle&quot; fontSize=&quot;12&quot; fontWeight=&quot;bold&quot; fill=&quot;#BD9B56&quot;&gt;业务数据&lt;/text&gt;&#10;        &lt;rect x=&quot;596&quot; y=&quot;138&quot; width=&quot;260&quot; height=&quot;40&quot; rx=&quot;8&quot; fill=&quot;rgba(34,57,94,0.06)&quot; stroke=&quot;#22395E&quot; strokeWidth=&quot;1.5&quot; /&gt;&#10;        &lt;text x=&quot;726&quot; y=&quot;163&quot; textAnchor=&quot;middle&quot; fontSize=&quot;13&quot; fontWeight=&quot;bold&quot; fill=&quot;#172133&quot;&gt;repair_order 工单 ×50&lt;/text&gt;&#10;        &lt;rect x=&quot;596&quot; y=&quot;186&quot; width=&quot;260&quot; height=&quot;40&quot; rx=&quot;8&quot; fill=&quot;rgba(34,57,94,0.06)&quot; stroke=&quot;#22395E&quot; strokeWidth=&quot;1.5&quot; /&gt;&#10;        &lt;text x=&quot;726&quot; y=&quot;211&quot; textAnchor=&quot;middle&quot; fontSize=&quot;13&quot; fontWeight=&quot;bold&quot; fill=&quot;#172133&quot;&gt;fee_bill 账单 ×746&lt;/text&gt;&#10;        &lt;rect x=&quot;596&quot; y=&quot;234&quot; width=&quot;260&quot; height=&quot;40&quot; rx=&quot;8&quot; fill=&quot;rgba(34,57,94,0.06)&quot; stroke=&quot;#22395E&quot; strokeWidth=&quot;1.5&quot; /&gt;&#10;        &lt;text x=&quot;726&quot; y=&quot;259&quot; textAnchor=&quot;middle&quot; fontSize=&quot;13&quot; fontWeight=&quot;bold&quot; fill=&quot;#172133&quot;&gt;notice 公告 ×24&lt;/text&gt;&#10;&#10;        {/* 分组4：知识资产 */}&#10;        &lt;text x=&quot;1015&quot; y=&quot;128&quot; textAnchor=&quot;middle&quot; fontSize=&quot;12&quot; fontWeight=&quot;bold&quot; fill=&quot;#BD9B56&quot;&gt;知识资产&lt;/text&gt;&#10;        &lt;rect x=&quot;885&quot; y=&quot;138&quot; width=&quot;260&quot; height=&quot;56&quot; rx=&quot;8&quot; fill=&quot;#22395E&quot; /&gt;&#10;        &lt;text x=&quot;1015&quot; y=&quot;162&quot; textAnchor=&quot;middle&quot; fontSize=&quot;14&quot; fontWeight=&quot;bold&quot; fill=&quot;#FBFCFA&quot;&gt;knowledge 文档 ×22&lt;/text&gt;&#10;        &lt;text x=&quot;1015&quot; y=&quot;182&quot; textAnchor=&quot;middle&quot; fontSize=&quot;11&quot; fill=&quot;#BD9B56&quot;&gt;7 个分类（规约/装修/停车…）&lt;/text&gt;&#10;        &lt;line x1=&quot;1015&quot; y1=&quot;194&quot; x2=&quot;1015&quot; y2=&quot;206&quot; stroke=&quot;#BD9B56&quot; strokeWidth=&quot;1.2&quot; /&gt;&#10;        &lt;rect x=&quot;885&quot; y=&quot;210&quot; width=&quot;260&quot; height=&quot;56&quot; rx=&quot;8&quot; fill=&quot;rgba(34,57,94,0.06)&quot; stroke=&quot;#BD9B56&quot; strokeWidth=&quot;1.5&quot; /&gt;&#10;        &lt;text x=&quot;1015&quot; y=&quot;234&quot; textAnchor=&quot;middle&quot; fontSize=&quot;14&quot; fontWeight=&quot;bold&quot; fill=&quot;#172133&quot;&gt;chunk 切片 ×99&lt;/text&gt;&#10;        &lt;text x=&quot;1015&quot; y=&quot;254&quot; textAnchor=&quot;middle&quot; fontSize=&quot;11&quot; fill=&quot;#5F5E5A&quot;&gt;pgvector 1024 维向量&lt;/text&gt;&#10;&#10;        {/* 底部关系说明 */}&#10;        &lt;rect x=&quot;300&quot; y=&quot;290&quot; width=&quot;550&quot; height=&quot;48&quot; rx=&quot;8&quot; fill=&quot;rgba(189,155,86,0.10)&quot; /&gt;&#10;        &lt;text x=&quot;575&quot; y=&quot;318&quot; textAnchor=&quot;middle&quot; fontSize=&quot;12&quot; fill=&quot;#172133&quot;&gt;repair_order → user + house + worker · fee_bill → house + user · 外键关联&lt;/text&gt;&#10;        &lt;text x=&quot;575&quot; y=&quot;334&quot; textAnchor=&quot;middle&quot; fontSize=&quot;11&quot; fill=&quot;#5F5E5A&quot;&gt;8 个 SQL 种子文件 · 一键导入可复现&lt;/text&gt;&#10;      &lt;/g&gt;&#10;    &lt;/svg&gt;&#10;  &lt;/div&gt;&#10;  &lt;div style={{ flexShrink: 0, height: 40, display: 'flex', alignItems: 'flex-end', justifyContent: 'space-between' }}&gt;&#10;    &lt;span style={{ color: '#BD9B56', fontSize: 12, letterSpacing: '0.1em' }}&gt;云溪花园 · 智慧社区&lt;/span&gt;&#10;    &lt;span style={{ color: '#a09b8c', fontSize: 12 }}&gt;05 / 15&lt;/span&gt;&#10;  &lt;/div&gt;&#10;&lt;/Slide&gt;"/>
         <p:cNvGrpSpPr/>
         <p:nvPr/>
       </p:nvGrpSpPr>
@@ -11755,7 +13167,7 @@
       </p:grpSpPr>
       <p:sp>
         <p:nvSpPr>
-          <p:cNvPr id="257" name=""/>
+          <p:cNvPr id="283" name=""/>
           <p:cNvSpPr/>
           <p:nvPr/>
         </p:nvSpPr>
@@ -11779,13 +13191,13 @@
       </p:sp>
       <p:sp>
         <p:nvSpPr>
-          <p:cNvPr id="258" name="" descr="{&quot;isTemplate&quot;:true,&quot;type&quot;:&quot;text&quot;}"/>
-          <p:cNvSpPr txBox="1"/>
-          <p:nvPr/>
-        </p:nvSpPr>
-        <p:spPr>
-          <a:xfrm rot="0" flipH="0" flipV="0">
-            <a:off x="609600" y="323850"/>
+          <p:cNvPr id="284" name="" descr="{&quot;isTemplate&quot;:true,&quot;type&quot;:&quot;text&quot;}"/>
+          <p:cNvSpPr txBox="1"/>
+          <p:nvPr/>
+        </p:nvSpPr>
+        <p:spPr>
+          <a:xfrm rot="0" flipH="0" flipV="0">
+            <a:off x="609600" y="304800"/>
             <a:ext cx="10972800" cy="152400"/>
           </a:xfrm>
           <a:prstGeom prst="rect"/>
@@ -11824,13 +13236,13 @@
       </p:sp>
       <p:sp>
         <p:nvSpPr>
-          <p:cNvPr id="259" name="" descr="{&quot;isTemplate&quot;:true,&quot;type&quot;:&quot;text&quot;}"/>
-          <p:cNvSpPr txBox="1"/>
-          <p:nvPr/>
-        </p:nvSpPr>
-        <p:spPr>
-          <a:xfrm rot="0" flipH="0" flipV="0">
-            <a:off x="609600" y="533400"/>
+          <p:cNvPr id="285" name="" descr="{&quot;isTemplate&quot;:true,&quot;type&quot;:&quot;text&quot;}"/>
+          <p:cNvSpPr txBox="1"/>
+          <p:nvPr/>
+        </p:nvSpPr>
+        <p:spPr>
+          <a:xfrm rot="0" flipH="0" flipV="0">
+            <a:off x="609600" y="514350"/>
             <a:ext cx="10972800" cy="447675"/>
           </a:xfrm>
           <a:prstGeom prst="rect"/>
@@ -11859,13 +13271,13 @@
       </p:sp>
       <p:sp>
         <p:nvSpPr>
-          <p:cNvPr id="260" name="" descr="{&quot;isTemplate&quot;:true,&quot;type&quot;:&quot;text&quot;}"/>
-          <p:cNvSpPr txBox="1"/>
-          <p:nvPr/>
-        </p:nvSpPr>
-        <p:spPr>
-          <a:xfrm rot="0" flipH="0" flipV="0">
-            <a:off x="609600" y="1038225"/>
+          <p:cNvPr id="286" name="" descr="{&quot;isTemplate&quot;:true,&quot;type&quot;:&quot;text&quot;}"/>
+          <p:cNvSpPr txBox="1"/>
+          <p:nvPr/>
+        </p:nvSpPr>
+        <p:spPr>
+          <a:xfrm rot="0" flipH="0" flipV="0">
+            <a:off x="609600" y="1019175"/>
             <a:ext cx="10972800" cy="161925"/>
           </a:xfrm>
           <a:prstGeom prst="rect"/>
@@ -11886,1049 +13298,92 @@
                 <a:latin typeface="Microsoft YaHei"/>
                 <a:ea typeface="Microsoft YaHei"/>
               </a:rPr>
-              <a:t>为验证</a:t>
-            </a:r>
-            <a:r>
-              <a:rPr lang="en-US" sz="1050">
-                <a:solidFill>
-                  <a:srgbClr val="6B7075"/>
-                </a:solidFill>
-                <a:latin typeface="Microsoft YaHei"/>
-                <a:ea typeface="Microsoft YaHei"/>
-              </a:rPr>
-              <a:t> AI </a:t>
-            </a:r>
-            <a:r>
-              <a:rPr lang="zh-CN" sz="1050">
-                <a:solidFill>
-                  <a:srgbClr val="6B7075"/>
-                </a:solidFill>
-                <a:latin typeface="Microsoft YaHei"/>
-                <a:ea typeface="Microsoft YaHei"/>
-              </a:rPr>
-              <a:t>能力，构建了一个高仿真的数字化社区——不是几条演示假数据，而是覆盖完整业务场景的仿真数据</a:t>
-            </a:r>
-            <a:endParaRPr/>
-          </a:p>
-        </p:txBody>
-      </p:sp>
-      <p:sp>
-        <p:nvSpPr>
-          <p:cNvPr id="261" name=""/>
-          <p:cNvSpPr/>
-          <p:nvPr/>
-        </p:nvSpPr>
-        <p:spPr>
-          <a:xfrm rot="0" flipH="0" flipV="0">
-            <a:off x="609600" y="2790825"/>
-            <a:ext cx="2619375" cy="1323975"/>
-          </a:xfrm>
-          <a:prstGeom prst="roundRect">
-            <a:avLst>
-              <a:gd name="adj" fmla="val 8633"/>
-            </a:avLst>
+              <a:t>以一个社区为根，向下延伸出空间、人员、业务、知识四类数据资产</a:t>
+            </a:r>
+            <a:endParaRPr/>
+          </a:p>
+        </p:txBody>
+      </p:sp>
+      <p:pic>
+        <p:nvPicPr>
+          <p:cNvPr id="287" name=""/>
+          <p:cNvPicPr>
+            <a:picLocks noChangeAspect="1"/>
+          </p:cNvPicPr>
+          <p:nvPr/>
+        </p:nvPicPr>
+        <p:blipFill>
+          <a:blip>
+            <a:extLst>
+              <a:ext uri="{96DAC541-7B7A-43D3-8B79-37D633B846F1}">
+                <asvg:svgBlip r:embed="rId1"/>
+              </a:ext>
+            </a:extLst>
+          </a:blip>
+          <a:stretch>
+            <a:fillRect/>
+          </a:stretch>
+        </p:blipFill>
+        <p:spPr>
+          <a:xfrm rot="0" flipH="0" flipV="0">
+            <a:off x="619125" y="1438275"/>
+            <a:ext cx="10953750" cy="4476750"/>
+          </a:xfrm>
+          <a:prstGeom prst="rect">
+            <a:avLst/>
           </a:prstGeom>
-          <a:solidFill>
-            <a:srgbClr val="FFFFFF"/>
-          </a:solidFill>
           <a:ln/>
-          <a:effectLst>
-            <a:outerShdw blurRad="228600" dist="57150" dir="5400000">
-              <a:srgbClr val="172133">
-                <a:alpha val="8000"/>
-              </a:srgbClr>
-            </a:outerShdw>
-          </a:effectLst>
-        </p:spPr>
-        <p:txBody>
-          <a:bodyPr/>
-          <a:p/>
-        </p:txBody>
-      </p:sp>
-      <p:sp>
-        <p:nvSpPr>
-          <p:cNvPr id="262" name=""/>
-          <p:cNvSpPr/>
-          <p:nvPr/>
-        </p:nvSpPr>
-        <p:spPr>
-          <a:xfrm rot="0" flipH="0" flipV="0">
-            <a:off x="609600" y="2790825"/>
-            <a:ext cx="2619375" cy="1323975"/>
-          </a:xfrm>
-          <a:custGeom>
-            <a:pathLst>
-              <a:path w="275" h="139">
-                <a:moveTo>
-                  <a:pt x="264" y="0"/>
-                </a:moveTo>
-                <a:cubicBezTo>
-                  <a:pt x="269" y="0"/>
-                  <a:pt x="274" y="4"/>
-                  <a:pt x="275" y="10"/>
-                </a:cubicBezTo>
-                <a:cubicBezTo>
-                  <a:pt x="274" y="6"/>
-                  <a:pt x="271" y="4"/>
-                  <a:pt x="267" y="4"/>
-                </a:cubicBezTo>
-                <a:lnTo>
-                  <a:pt x="8" y="4"/>
-                </a:lnTo>
-                <a:cubicBezTo>
-                  <a:pt x="4" y="4"/>
-                  <a:pt x="1" y="7"/>
-                  <a:pt x="0" y="10"/>
-                </a:cubicBezTo>
-                <a:cubicBezTo>
-                  <a:pt x="1" y="4"/>
-                  <a:pt x="6" y="0"/>
-                  <a:pt x="12" y="0"/>
-                </a:cubicBezTo>
-                <a:lnTo>
-                  <a:pt x="263" y="0"/>
-                </a:lnTo>
-                <a:close/>
-              </a:path>
-            </a:pathLst>
-          </a:custGeom>
-          <a:solidFill>
-            <a:srgbClr val="BD9B56"/>
-          </a:solidFill>
-          <a:ln/>
-        </p:spPr>
-        <p:txBody>
-          <a:bodyPr/>
-          <a:p/>
-        </p:txBody>
-      </p:sp>
-      <p:sp>
-        <p:nvSpPr>
-          <p:cNvPr id="263" name="" descr="{&quot;isTemplate&quot;:true,&quot;type&quot;:&quot;text&quot;}"/>
-          <p:cNvSpPr txBox="1"/>
-          <p:nvPr/>
-        </p:nvSpPr>
-        <p:spPr>
-          <a:xfrm rot="0" flipH="0" flipV="0">
-            <a:off x="762000" y="3019425"/>
-            <a:ext cx="2314575" cy="142875"/>
-          </a:xfrm>
-          <a:prstGeom prst="rect"/>
-        </p:spPr>
-        <p:txBody>
-          <a:bodyPr wrap="none" lIns="0" tIns="0" rIns="0" bIns="0"/>
-          <a:p>
-            <a:pPr algn="ctr">
+        </p:spPr>
+      </p:pic>
+      <p:sp>
+        <p:nvSpPr>
+          <p:cNvPr id="288" name="" descr="{&quot;isTemplate&quot;:true,&quot;type&quot;:&quot;text&quot;}"/>
+          <p:cNvSpPr txBox="1"/>
+          <p:nvPr/>
+        </p:nvSpPr>
+        <p:spPr>
+          <a:xfrm rot="0" flipH="0" flipV="0">
+            <a:off x="609600" y="6410325"/>
+            <a:ext cx="1009650" cy="142875"/>
+          </a:xfrm>
+          <a:prstGeom prst="rect"/>
+        </p:spPr>
+        <p:txBody>
+          <a:bodyPr wrap="none" lIns="0" tIns="0" rIns="0" bIns="0"/>
+          <a:p>
+            <a:pPr>
               <a:lnSpc>
                 <a:spcPct val="100000"/>
               </a:lnSpc>
             </a:pPr>
             <a:r>
-              <a:rPr lang="zh-CN" sz="900" spc="-9223372036854775808">
+              <a:rPr lang="zh-CN" sz="900">
                 <a:solidFill>
                   <a:srgbClr val="BD9B56"/>
                 </a:solidFill>
                 <a:latin typeface="Microsoft YaHei"/>
                 <a:ea typeface="Microsoft YaHei"/>
               </a:rPr>
-              <a:t>空间规模</a:t>
-            </a:r>
-            <a:endParaRPr/>
-          </a:p>
-        </p:txBody>
-      </p:sp>
-      <p:sp>
-        <p:nvSpPr>
-          <p:cNvPr id="264" name="" descr="{&quot;isTemplate&quot;:true,&quot;type&quot;:&quot;text&quot;}"/>
-          <p:cNvSpPr txBox="1"/>
-          <p:nvPr/>
-        </p:nvSpPr>
-        <p:spPr>
-          <a:xfrm rot="0" flipH="0" flipV="0">
-            <a:off x="762000" y="3276600"/>
-            <a:ext cx="2314575" cy="457200"/>
-          </a:xfrm>
-          <a:prstGeom prst="rect"/>
-        </p:spPr>
-        <p:txBody>
-          <a:bodyPr wrap="none" lIns="0" tIns="0" rIns="0" bIns="0"/>
-          <a:p>
-            <a:pPr algn="ctr">
-              <a:lnSpc>
-                <a:spcPct val="100000"/>
-              </a:lnSpc>
-            </a:pPr>
-            <a:r>
-              <a:rPr lang="en-US" sz="3000">
-                <a:solidFill>
-                  <a:srgbClr val="172133"/>
-                </a:solidFill>
-                <a:latin typeface="Inter"/>
-                <a:ea typeface="Inter"/>
-              </a:rPr>
-              <a:t>8 </a:t>
-            </a:r>
-            <a:r>
-              <a:rPr lang="zh-CN" sz="3000">
-                <a:solidFill>
-                  <a:srgbClr val="172133"/>
-                </a:solidFill>
-                <a:latin typeface="Inter"/>
-                <a:ea typeface="Inter"/>
-              </a:rPr>
-              <a:t>栋</a:t>
-            </a:r>
-            <a:endParaRPr/>
-          </a:p>
-        </p:txBody>
-      </p:sp>
-      <p:sp>
-        <p:nvSpPr>
-          <p:cNvPr id="265" name="" descr="{&quot;isTemplate&quot;:true,&quot;type&quot;:&quot;text&quot;}"/>
-          <p:cNvSpPr txBox="1"/>
-          <p:nvPr/>
-        </p:nvSpPr>
-        <p:spPr>
-          <a:xfrm rot="0" flipH="0" flipV="0">
-            <a:off x="762000" y="3848100"/>
-            <a:ext cx="2314575" cy="0"/>
-          </a:xfrm>
-          <a:prstGeom prst="rect"/>
-        </p:spPr>
-        <p:txBody>
-          <a:bodyPr wrap="none" lIns="0" tIns="0" rIns="0" bIns="0"/>
-          <a:p>
-            <a:pPr/>
-            <a:endParaRPr/>
-          </a:p>
-        </p:txBody>
-      </p:sp>
-      <p:sp>
-        <p:nvSpPr>
-          <p:cNvPr id="266" name=""/>
-          <p:cNvSpPr/>
-          <p:nvPr/>
-        </p:nvSpPr>
-        <p:spPr>
-          <a:xfrm rot="0" flipH="0" flipV="0">
-            <a:off x="3400425" y="2790825"/>
-            <a:ext cx="2609850" cy="1323975"/>
-          </a:xfrm>
-          <a:prstGeom prst="roundRect">
-            <a:avLst>
-              <a:gd name="adj" fmla="val 8633"/>
-            </a:avLst>
-          </a:prstGeom>
-          <a:solidFill>
-            <a:srgbClr val="FFFFFF"/>
-          </a:solidFill>
-          <a:ln/>
-          <a:effectLst>
-            <a:outerShdw blurRad="228600" dist="57150" dir="5400000">
-              <a:srgbClr val="172133">
-                <a:alpha val="8000"/>
-              </a:srgbClr>
-            </a:outerShdw>
-          </a:effectLst>
-        </p:spPr>
-        <p:txBody>
-          <a:bodyPr/>
-          <a:p/>
-        </p:txBody>
-      </p:sp>
-      <p:sp>
-        <p:nvSpPr>
-          <p:cNvPr id="267" name=""/>
-          <p:cNvSpPr/>
-          <p:nvPr/>
-        </p:nvSpPr>
-        <p:spPr>
-          <a:xfrm rot="0" flipH="0" flipV="0">
-            <a:off x="3400425" y="2790825"/>
-            <a:ext cx="2609850" cy="1323975"/>
-          </a:xfrm>
-          <a:custGeom>
-            <a:pathLst>
-              <a:path w="274" h="139">
-                <a:moveTo>
-                  <a:pt x="263" y="0"/>
-                </a:moveTo>
-                <a:cubicBezTo>
-                  <a:pt x="268" y="0"/>
-                  <a:pt x="273" y="4"/>
-                  <a:pt x="274" y="10"/>
-                </a:cubicBezTo>
-                <a:cubicBezTo>
-                  <a:pt x="273" y="6"/>
-                  <a:pt x="270" y="4"/>
-                  <a:pt x="266" y="4"/>
-                </a:cubicBezTo>
-                <a:lnTo>
-                  <a:pt x="8" y="4"/>
-                </a:lnTo>
-                <a:cubicBezTo>
-                  <a:pt x="4" y="4"/>
-                  <a:pt x="1" y="7"/>
-                  <a:pt x="0" y="10"/>
-                </a:cubicBezTo>
-                <a:cubicBezTo>
-                  <a:pt x="1" y="4"/>
-                  <a:pt x="6" y="0"/>
-                  <a:pt x="12" y="0"/>
-                </a:cubicBezTo>
-                <a:lnTo>
-                  <a:pt x="262" y="0"/>
-                </a:lnTo>
-                <a:close/>
-              </a:path>
-            </a:pathLst>
-          </a:custGeom>
-          <a:solidFill>
-            <a:srgbClr val="BD9B56"/>
-          </a:solidFill>
-          <a:ln/>
-        </p:spPr>
-        <p:txBody>
-          <a:bodyPr/>
-          <a:p/>
-        </p:txBody>
-      </p:sp>
-      <p:sp>
-        <p:nvSpPr>
-          <p:cNvPr id="268" name="" descr="{&quot;isTemplate&quot;:true,&quot;type&quot;:&quot;text&quot;}"/>
-          <p:cNvSpPr txBox="1"/>
-          <p:nvPr/>
-        </p:nvSpPr>
-        <p:spPr>
-          <a:xfrm rot="0" flipH="0" flipV="0">
-            <a:off x="3552825" y="3019425"/>
-            <a:ext cx="2305050" cy="142875"/>
-          </a:xfrm>
-          <a:prstGeom prst="rect"/>
-        </p:spPr>
-        <p:txBody>
-          <a:bodyPr wrap="none" lIns="0" tIns="0" rIns="0" bIns="0"/>
-          <a:p>
-            <a:pPr algn="ctr">
-              <a:lnSpc>
-                <a:spcPct val="100000"/>
-              </a:lnSpc>
-            </a:pPr>
-            <a:r>
-              <a:rPr lang="zh-CN" sz="900" spc="-9223372036854775808">
+              <a:t>云溪花园</a:t>
+            </a:r>
+            <a:r>
+              <a:rPr lang="en-US" sz="900">
                 <a:solidFill>
                   <a:srgbClr val="BD9B56"/>
                 </a:solidFill>
                 <a:latin typeface="Microsoft YaHei"/>
                 <a:ea typeface="Microsoft YaHei"/>
               </a:rPr>
-              <a:t>用户体系</a:t>
-            </a:r>
-            <a:endParaRPr/>
-          </a:p>
-        </p:txBody>
-      </p:sp>
-      <p:sp>
-        <p:nvSpPr>
-          <p:cNvPr id="269" name="" descr="{&quot;isTemplate&quot;:true,&quot;type&quot;:&quot;text&quot;}"/>
-          <p:cNvSpPr txBox="1"/>
-          <p:nvPr/>
-        </p:nvSpPr>
-        <p:spPr>
-          <a:xfrm rot="0" flipH="0" flipV="0">
-            <a:off x="3552825" y="3276600"/>
-            <a:ext cx="2305050" cy="457200"/>
-          </a:xfrm>
-          <a:prstGeom prst="rect"/>
-        </p:spPr>
-        <p:txBody>
-          <a:bodyPr wrap="none" lIns="0" tIns="0" rIns="0" bIns="0"/>
-          <a:p>
-            <a:pPr algn="ctr">
-              <a:lnSpc>
-                <a:spcPct val="100000"/>
-              </a:lnSpc>
-            </a:pPr>
-            <a:r>
-              <a:rPr lang="en-US" sz="3000">
-                <a:solidFill>
-                  <a:srgbClr val="172133"/>
-                </a:solidFill>
-                <a:latin typeface="Inter"/>
-                <a:ea typeface="Inter"/>
-              </a:rPr>
-              <a:t>275</a:t>
-            </a:r>
-            <a:endParaRPr/>
-          </a:p>
-        </p:txBody>
-      </p:sp>
-      <p:sp>
-        <p:nvSpPr>
-          <p:cNvPr id="270" name="" descr="{&quot;isTemplate&quot;:true,&quot;type&quot;:&quot;text&quot;}"/>
-          <p:cNvSpPr txBox="1"/>
-          <p:nvPr/>
-        </p:nvSpPr>
-        <p:spPr>
-          <a:xfrm rot="0" flipH="0" flipV="0">
-            <a:off x="3552825" y="3848100"/>
-            <a:ext cx="2305050" cy="0"/>
-          </a:xfrm>
-          <a:prstGeom prst="rect"/>
-        </p:spPr>
-        <p:txBody>
-          <a:bodyPr wrap="none" lIns="0" tIns="0" rIns="0" bIns="0"/>
-          <a:p>
-            <a:pPr/>
-            <a:endParaRPr/>
-          </a:p>
-        </p:txBody>
-      </p:sp>
-      <p:sp>
-        <p:nvSpPr>
-          <p:cNvPr id="271" name=""/>
-          <p:cNvSpPr/>
-          <p:nvPr/>
-        </p:nvSpPr>
-        <p:spPr>
-          <a:xfrm rot="0" flipH="0" flipV="0">
-            <a:off x="6181725" y="2790825"/>
-            <a:ext cx="2619375" cy="1323975"/>
-          </a:xfrm>
-          <a:prstGeom prst="roundRect">
-            <a:avLst>
-              <a:gd name="adj" fmla="val 8633"/>
-            </a:avLst>
-          </a:prstGeom>
-          <a:solidFill>
-            <a:srgbClr val="FFFFFF"/>
-          </a:solidFill>
-          <a:ln/>
-          <a:effectLst>
-            <a:outerShdw blurRad="228600" dist="57150" dir="5400000">
-              <a:srgbClr val="172133">
-                <a:alpha val="8000"/>
-              </a:srgbClr>
-            </a:outerShdw>
-          </a:effectLst>
-        </p:spPr>
-        <p:txBody>
-          <a:bodyPr/>
-          <a:p/>
-        </p:txBody>
-      </p:sp>
-      <p:sp>
-        <p:nvSpPr>
-          <p:cNvPr id="272" name=""/>
-          <p:cNvSpPr/>
-          <p:nvPr/>
-        </p:nvSpPr>
-        <p:spPr>
-          <a:xfrm rot="0" flipH="0" flipV="0">
-            <a:off x="6181725" y="2790825"/>
-            <a:ext cx="2619375" cy="1323975"/>
-          </a:xfrm>
-          <a:custGeom>
-            <a:pathLst>
-              <a:path w="275" h="139">
-                <a:moveTo>
-                  <a:pt x="264" y="0"/>
-                </a:moveTo>
-                <a:cubicBezTo>
-                  <a:pt x="269" y="0"/>
-                  <a:pt x="274" y="4"/>
-                  <a:pt x="275" y="10"/>
-                </a:cubicBezTo>
-                <a:cubicBezTo>
-                  <a:pt x="274" y="6"/>
-                  <a:pt x="271" y="4"/>
-                  <a:pt x="267" y="4"/>
-                </a:cubicBezTo>
-                <a:lnTo>
-                  <a:pt x="8" y="4"/>
-                </a:lnTo>
-                <a:cubicBezTo>
-                  <a:pt x="4" y="4"/>
-                  <a:pt x="1" y="7"/>
-                  <a:pt x="0" y="10"/>
-                </a:cubicBezTo>
-                <a:cubicBezTo>
-                  <a:pt x="1" y="4"/>
-                  <a:pt x="6" y="0"/>
-                  <a:pt x="12" y="0"/>
-                </a:cubicBezTo>
-                <a:lnTo>
-                  <a:pt x="263" y="0"/>
-                </a:lnTo>
-                <a:close/>
-              </a:path>
-            </a:pathLst>
-          </a:custGeom>
-          <a:solidFill>
-            <a:srgbClr val="BD9B56"/>
-          </a:solidFill>
-          <a:ln/>
-        </p:spPr>
-        <p:txBody>
-          <a:bodyPr/>
-          <a:p/>
-        </p:txBody>
-      </p:sp>
-      <p:sp>
-        <p:nvSpPr>
-          <p:cNvPr id="273" name="" descr="{&quot;isTemplate&quot;:true,&quot;type&quot;:&quot;text&quot;}"/>
-          <p:cNvSpPr txBox="1"/>
-          <p:nvPr/>
-        </p:nvSpPr>
-        <p:spPr>
-          <a:xfrm rot="0" flipH="0" flipV="0">
-            <a:off x="6334125" y="3019425"/>
-            <a:ext cx="2314575" cy="142875"/>
-          </a:xfrm>
-          <a:prstGeom prst="rect"/>
-        </p:spPr>
-        <p:txBody>
-          <a:bodyPr wrap="none" lIns="0" tIns="0" rIns="0" bIns="0"/>
-          <a:p>
-            <a:pPr algn="ctr">
-              <a:lnSpc>
-                <a:spcPct val="100000"/>
-              </a:lnSpc>
-            </a:pPr>
-            <a:r>
-              <a:rPr lang="zh-CN" sz="900" spc="-9223372036854775808">
+              <a:t> · </a:t>
+            </a:r>
+            <a:r>
+              <a:rPr lang="zh-CN" sz="900">
                 <a:solidFill>
                   <a:srgbClr val="BD9B56"/>
                 </a:solidFill>
                 <a:latin typeface="Microsoft YaHei"/>
                 <a:ea typeface="Microsoft YaHei"/>
               </a:rPr>
-              <a:t>业务数据</a:t>
-            </a:r>
-            <a:endParaRPr/>
-          </a:p>
-        </p:txBody>
-      </p:sp>
-      <p:sp>
-        <p:nvSpPr>
-          <p:cNvPr id="274" name="" descr="{&quot;isTemplate&quot;:true,&quot;type&quot;:&quot;text&quot;}"/>
-          <p:cNvSpPr txBox="1"/>
-          <p:nvPr/>
-        </p:nvSpPr>
-        <p:spPr>
-          <a:xfrm rot="0" flipH="0" flipV="0">
-            <a:off x="6334125" y="3276600"/>
-            <a:ext cx="2314575" cy="457200"/>
-          </a:xfrm>
-          <a:prstGeom prst="rect"/>
-        </p:spPr>
-        <p:txBody>
-          <a:bodyPr wrap="none" lIns="0" tIns="0" rIns="0" bIns="0"/>
-          <a:p>
-            <a:pPr algn="ctr">
-              <a:lnSpc>
-                <a:spcPct val="100000"/>
-              </a:lnSpc>
-            </a:pPr>
-            <a:r>
-              <a:rPr lang="en-US" sz="3000">
-                <a:solidFill>
-                  <a:srgbClr val="172133"/>
-                </a:solidFill>
-                <a:latin typeface="Inter"/>
-                <a:ea typeface="Inter"/>
-              </a:rPr>
-              <a:t>746</a:t>
-            </a:r>
-            <a:endParaRPr/>
-          </a:p>
-        </p:txBody>
-      </p:sp>
-      <p:sp>
-        <p:nvSpPr>
-          <p:cNvPr id="275" name="" descr="{&quot;isTemplate&quot;:true,&quot;type&quot;:&quot;text&quot;}"/>
-          <p:cNvSpPr txBox="1"/>
-          <p:nvPr/>
-        </p:nvSpPr>
-        <p:spPr>
-          <a:xfrm rot="0" flipH="0" flipV="0">
-            <a:off x="6334125" y="3848100"/>
-            <a:ext cx="2314575" cy="0"/>
-          </a:xfrm>
-          <a:prstGeom prst="rect"/>
-        </p:spPr>
-        <p:txBody>
-          <a:bodyPr wrap="none" lIns="0" tIns="0" rIns="0" bIns="0"/>
-          <a:p>
-            <a:pPr/>
-            <a:endParaRPr/>
-          </a:p>
-        </p:txBody>
-      </p:sp>
-      <p:sp>
-        <p:nvSpPr>
-          <p:cNvPr id="276" name=""/>
-          <p:cNvSpPr/>
-          <p:nvPr/>
-        </p:nvSpPr>
-        <p:spPr>
-          <a:xfrm rot="0" flipH="0" flipV="0">
-            <a:off x="8972550" y="2790825"/>
-            <a:ext cx="2609850" cy="1323975"/>
-          </a:xfrm>
-          <a:prstGeom prst="roundRect">
-            <a:avLst>
-              <a:gd name="adj" fmla="val 8633"/>
-            </a:avLst>
-          </a:prstGeom>
-          <a:gradFill>
-            <a:gsLst>
-              <a:gs pos="0">
-                <a:srgbClr val="172133"/>
-              </a:gs>
-              <a:gs pos="100000">
-                <a:srgbClr val="22395E"/>
-              </a:gs>
-            </a:gsLst>
-            <a:lin ang="2700000" scaled="1"/>
-          </a:gradFill>
-          <a:ln/>
-          <a:effectLst>
-            <a:outerShdw blurRad="228600" dist="57150" dir="5400000">
-              <a:srgbClr val="172133">
-                <a:alpha val="18000"/>
-              </a:srgbClr>
-            </a:outerShdw>
-          </a:effectLst>
-        </p:spPr>
-        <p:txBody>
-          <a:bodyPr/>
-          <a:p/>
-        </p:txBody>
-      </p:sp>
-      <p:sp>
-        <p:nvSpPr>
-          <p:cNvPr id="277" name=""/>
-          <p:cNvSpPr/>
-          <p:nvPr/>
-        </p:nvSpPr>
-        <p:spPr>
-          <a:xfrm rot="0" flipH="0" flipV="0">
-            <a:off x="8972550" y="2790825"/>
-            <a:ext cx="2609850" cy="1323975"/>
-          </a:xfrm>
-          <a:custGeom>
-            <a:pathLst>
-              <a:path w="274" h="139">
-                <a:moveTo>
-                  <a:pt x="263" y="0"/>
-                </a:moveTo>
-                <a:cubicBezTo>
-                  <a:pt x="268" y="0"/>
-                  <a:pt x="273" y="4"/>
-                  <a:pt x="274" y="10"/>
-                </a:cubicBezTo>
-                <a:cubicBezTo>
-                  <a:pt x="273" y="6"/>
-                  <a:pt x="270" y="4"/>
-                  <a:pt x="266" y="4"/>
-                </a:cubicBezTo>
-                <a:lnTo>
-                  <a:pt x="8" y="4"/>
-                </a:lnTo>
-                <a:cubicBezTo>
-                  <a:pt x="4" y="4"/>
-                  <a:pt x="1" y="7"/>
-                  <a:pt x="0" y="10"/>
-                </a:cubicBezTo>
-                <a:cubicBezTo>
-                  <a:pt x="1" y="4"/>
-                  <a:pt x="6" y="0"/>
-                  <a:pt x="12" y="0"/>
-                </a:cubicBezTo>
-                <a:lnTo>
-                  <a:pt x="262" y="0"/>
-                </a:lnTo>
-                <a:close/>
-              </a:path>
-            </a:pathLst>
-          </a:custGeom>
-          <a:solidFill>
-            <a:srgbClr val="BD9B56"/>
-          </a:solidFill>
-          <a:ln/>
-        </p:spPr>
-        <p:txBody>
-          <a:bodyPr/>
-          <a:p/>
-        </p:txBody>
-      </p:sp>
-      <p:sp>
-        <p:nvSpPr>
-          <p:cNvPr id="278" name="" descr="{&quot;isTemplate&quot;:true,&quot;type&quot;:&quot;text&quot;}"/>
-          <p:cNvSpPr txBox="1"/>
-          <p:nvPr/>
-        </p:nvSpPr>
-        <p:spPr>
-          <a:xfrm rot="0" flipH="0" flipV="0">
-            <a:off x="9124950" y="3019425"/>
-            <a:ext cx="2305050" cy="142875"/>
-          </a:xfrm>
-          <a:prstGeom prst="rect"/>
-        </p:spPr>
-        <p:txBody>
-          <a:bodyPr wrap="none" lIns="0" tIns="0" rIns="0" bIns="0"/>
-          <a:p>
-            <a:pPr algn="ctr">
-              <a:lnSpc>
-                <a:spcPct val="100000"/>
-              </a:lnSpc>
-            </a:pPr>
-            <a:r>
-              <a:rPr lang="zh-CN" sz="900" spc="-9223372036854775808">
-                <a:solidFill>
-                  <a:srgbClr val="BD9B56"/>
-                </a:solidFill>
-                <a:latin typeface="Microsoft YaHei"/>
-                <a:ea typeface="Microsoft YaHei"/>
-              </a:rPr>
-              <a:t>知识库</a:t>
-            </a:r>
-            <a:endParaRPr/>
-          </a:p>
-        </p:txBody>
-      </p:sp>
-      <p:sp>
-        <p:nvSpPr>
-          <p:cNvPr id="279" name="" descr="{&quot;isTemplate&quot;:true,&quot;type&quot;:&quot;text&quot;}"/>
-          <p:cNvSpPr txBox="1"/>
-          <p:nvPr/>
-        </p:nvSpPr>
-        <p:spPr>
-          <a:xfrm rot="0" flipH="0" flipV="0">
-            <a:off x="9124950" y="3276600"/>
-            <a:ext cx="2305050" cy="457200"/>
-          </a:xfrm>
-          <a:prstGeom prst="rect"/>
-        </p:spPr>
-        <p:txBody>
-          <a:bodyPr wrap="none" lIns="0" tIns="0" rIns="0" bIns="0"/>
-          <a:p>
-            <a:pPr algn="ctr">
-              <a:lnSpc>
-                <a:spcPct val="100000"/>
-              </a:lnSpc>
-            </a:pPr>
-            <a:r>
-              <a:rPr lang="en-US" sz="3000">
-                <a:solidFill>
-                  <a:srgbClr val="FBFCFA"/>
-                </a:solidFill>
-                <a:latin typeface="Inter"/>
-                <a:ea typeface="Inter"/>
-              </a:rPr>
-              <a:t>22</a:t>
-            </a:r>
-            <a:endParaRPr/>
-          </a:p>
-        </p:txBody>
-      </p:sp>
-      <p:sp>
-        <p:nvSpPr>
-          <p:cNvPr id="280" name="" descr="{&quot;isTemplate&quot;:true,&quot;type&quot;:&quot;text&quot;}"/>
-          <p:cNvSpPr txBox="1"/>
-          <p:nvPr/>
-        </p:nvSpPr>
-        <p:spPr>
-          <a:xfrm rot="0" flipH="0" flipV="0">
-            <a:off x="9124950" y="3848100"/>
-            <a:ext cx="2305050" cy="0"/>
-          </a:xfrm>
-          <a:prstGeom prst="rect"/>
-        </p:spPr>
-        <p:txBody>
-          <a:bodyPr wrap="none" lIns="0" tIns="0" rIns="0" bIns="0"/>
-          <a:p>
-            <a:pPr/>
-            <a:endParaRPr/>
-          </a:p>
-        </p:txBody>
-      </p:sp>
-      <p:sp>
-        <p:nvSpPr>
-          <p:cNvPr id="281" name=""/>
-          <p:cNvSpPr/>
-          <p:nvPr/>
-        </p:nvSpPr>
-        <p:spPr>
-          <a:xfrm rot="0" flipH="0" flipV="0">
-            <a:off x="647700" y="5629275"/>
-            <a:ext cx="10972800" cy="466725"/>
-          </a:xfrm>
-          <a:custGeom>
-            <a:pathLst>
-              <a:path w="1152" h="49">
-                <a:moveTo>
-                  <a:pt x="0" y="0"/>
-                </a:moveTo>
-                <a:lnTo>
-                  <a:pt x="1144" y="0"/>
-                </a:lnTo>
-                <a:cubicBezTo>
-                  <a:pt x="1148" y="0"/>
-                  <a:pt x="1152" y="4"/>
-                  <a:pt x="1152" y="8"/>
-                </a:cubicBezTo>
-                <a:lnTo>
-                  <a:pt x="1152" y="41"/>
-                </a:lnTo>
-                <a:cubicBezTo>
-                  <a:pt x="1152" y="45"/>
-                  <a:pt x="1148" y="49"/>
-                  <a:pt x="1144" y="49"/>
-                </a:cubicBezTo>
-                <a:lnTo>
-                  <a:pt x="0" y="49"/>
-                </a:lnTo>
-                <a:lnTo>
-                  <a:pt x="0" y="49"/>
-                </a:lnTo>
-                <a:lnTo>
-                  <a:pt x="0" y="0"/>
-                </a:lnTo>
-                <a:lnTo>
-                  <a:pt x="0" y="0"/>
-                </a:lnTo>
-                <a:close/>
-              </a:path>
-            </a:pathLst>
-          </a:custGeom>
-          <a:solidFill>
-            <a:srgbClr val="BD9B56">
-              <a:alpha val="10000"/>
-            </a:srgbClr>
-          </a:solidFill>
-          <a:ln/>
-        </p:spPr>
-        <p:txBody>
-          <a:bodyPr/>
-          <a:p/>
-        </p:txBody>
-      </p:sp>
-      <p:sp>
-        <p:nvSpPr>
-          <p:cNvPr id="282" name=""/>
-          <p:cNvSpPr/>
-          <p:nvPr/>
-        </p:nvSpPr>
-        <p:spPr>
-          <a:xfrm rot="0" flipH="0" flipV="0">
-            <a:off x="647700" y="5629275"/>
-            <a:ext cx="10972800" cy="466725"/>
-          </a:xfrm>
-          <a:custGeom>
-            <a:pathLst>
-              <a:path w="1152" h="49">
-                <a:moveTo>
-                  <a:pt x="4" y="49"/>
-                </a:moveTo>
-                <a:lnTo>
-                  <a:pt x="0" y="49"/>
-                </a:lnTo>
-                <a:lnTo>
-                  <a:pt x="0" y="0"/>
-                </a:lnTo>
-                <a:lnTo>
-                  <a:pt x="4" y="0"/>
-                </a:lnTo>
-                <a:close/>
-              </a:path>
-            </a:pathLst>
-          </a:custGeom>
-          <a:solidFill>
-            <a:srgbClr val="BD9B56"/>
-          </a:solidFill>
-          <a:ln/>
-        </p:spPr>
-        <p:txBody>
-          <a:bodyPr/>
-          <a:p/>
-        </p:txBody>
-      </p:sp>
-      <p:sp>
-        <p:nvSpPr>
-          <p:cNvPr id="283" name="" descr="{&quot;isTemplate&quot;:true,&quot;type&quot;:&quot;text&quot;}"/>
-          <p:cNvSpPr txBox="1"/>
-          <p:nvPr/>
-        </p:nvSpPr>
-        <p:spPr>
-          <a:xfrm rot="0" flipH="0" flipV="0">
-            <a:off x="838200" y="5743575"/>
-            <a:ext cx="10553700" cy="238125"/>
-          </a:xfrm>
-          <a:prstGeom prst="rect"/>
-        </p:spPr>
-        <p:txBody>
-          <a:bodyPr wrap="none" lIns="0" tIns="0" rIns="0" bIns="0"/>
-          <a:p>
-            <a:pPr>
-              <a:lnSpc>
-                <a:spcPct val="160000"/>
-              </a:lnSpc>
-            </a:pPr>
-            <a:r>
-              <a:rPr lang="zh-CN" sz="975" b="1">
-                <a:solidFill>
-                  <a:srgbClr val="BD9B56"/>
-                </a:solidFill>
-                <a:latin typeface="Microsoft YaHei"/>
-                <a:ea typeface="Microsoft YaHei"/>
-              </a:rPr>
-              <a:t>数据可复现：</a:t>
-            </a:r>
-            <a:r>
-              <a:rPr lang="zh-CN" sz="975">
-                <a:solidFill>
-                  <a:srgbClr val="172133"/>
-                </a:solidFill>
-                <a:latin typeface="Microsoft YaHei"/>
-                <a:ea typeface="Microsoft YaHei"/>
-              </a:rPr>
-              <a:t>全部数据来自</a:t>
-            </a:r>
-            <a:r>
-              <a:rPr lang="en-US" sz="975">
-                <a:solidFill>
-                  <a:srgbClr val="172133"/>
-                </a:solidFill>
-                <a:latin typeface="Microsoft YaHei"/>
-                <a:ea typeface="Microsoft YaHei"/>
-              </a:rPr>
-              <a:t> </a:t>
-            </a:r>
-            <a:r>
-              <a:rPr lang="en-US" sz="975">
-                <a:solidFill>
-                  <a:srgbClr val="172133"/>
-                </a:solidFill>
-                <a:latin typeface="Microsoft YaHei"/>
-                <a:ea typeface="Microsoft YaHei"/>
-              </a:rPr>
-              <a:t>data/seed/</a:t>
-            </a:r>
-            <a:r>
-              <a:rPr lang="en-US" sz="975">
-                <a:solidFill>
-                  <a:srgbClr val="172133"/>
-                </a:solidFill>
-                <a:latin typeface="Microsoft YaHei"/>
-                <a:ea typeface="Microsoft YaHei"/>
-              </a:rPr>
-              <a:t> </a:t>
-            </a:r>
-            <a:r>
-              <a:rPr lang="zh-CN" sz="975">
-                <a:solidFill>
-                  <a:srgbClr val="172133"/>
-                </a:solidFill>
-                <a:latin typeface="Microsoft YaHei"/>
-                <a:ea typeface="Microsoft YaHei"/>
-              </a:rPr>
-              <a:t>目录</a:t>
-            </a:r>
-            <a:r>
-              <a:rPr lang="en-US" sz="975">
-                <a:solidFill>
-                  <a:srgbClr val="172133"/>
-                </a:solidFill>
-                <a:latin typeface="Microsoft YaHei"/>
-                <a:ea typeface="Microsoft YaHei"/>
-              </a:rPr>
-              <a:t> 8 </a:t>
-            </a:r>
-            <a:r>
-              <a:rPr lang="zh-CN" sz="975">
-                <a:solidFill>
-                  <a:srgbClr val="172133"/>
-                </a:solidFill>
-                <a:latin typeface="Microsoft YaHei"/>
-                <a:ea typeface="Microsoft YaHei"/>
-              </a:rPr>
-              <a:t>个</a:t>
-            </a:r>
-            <a:r>
-              <a:rPr lang="en-US" sz="975">
-                <a:solidFill>
-                  <a:srgbClr val="172133"/>
-                </a:solidFill>
-                <a:latin typeface="Microsoft YaHei"/>
-                <a:ea typeface="Microsoft YaHei"/>
-              </a:rPr>
-              <a:t> SQL </a:t>
-            </a:r>
-            <a:r>
-              <a:rPr lang="zh-CN" sz="975">
-                <a:solidFill>
-                  <a:srgbClr val="172133"/>
-                </a:solidFill>
-                <a:latin typeface="Microsoft YaHei"/>
-                <a:ea typeface="Microsoft YaHei"/>
-              </a:rPr>
-              <a:t>种子文件，一键导入即可复现整套社区，保证演示效果真实、可验证。</a:t>
-            </a:r>
-            <a:endParaRPr/>
-          </a:p>
-        </p:txBody>
-      </p:sp>
-      <p:sp>
-        <p:nvSpPr>
-          <p:cNvPr id="284" name="" descr="{&quot;isTemplate&quot;:true,&quot;type&quot;:&quot;text&quot;}"/>
-          <p:cNvSpPr txBox="1"/>
-          <p:nvPr/>
-        </p:nvSpPr>
-        <p:spPr>
-          <a:xfrm rot="0" flipH="0" flipV="0">
-            <a:off x="609600" y="6391275"/>
-            <a:ext cx="1009650" cy="142875"/>
-          </a:xfrm>
-          <a:prstGeom prst="rect"/>
-        </p:spPr>
-        <p:txBody>
-          <a:bodyPr wrap="none" lIns="0" tIns="0" rIns="0" bIns="0"/>
-          <a:p>
-            <a:pPr>
-              <a:lnSpc>
-                <a:spcPct val="100000"/>
-              </a:lnSpc>
-            </a:pPr>
-            <a:r>
-              <a:rPr lang="zh-CN" sz="900">
-                <a:solidFill>
-                  <a:srgbClr val="BD9B56"/>
-                </a:solidFill>
-                <a:latin typeface="Microsoft YaHei"/>
-                <a:ea typeface="Microsoft YaHei"/>
-              </a:rPr>
-              <a:t>云溪花园</a:t>
-            </a:r>
-            <a:r>
-              <a:rPr lang="en-US" sz="900">
-                <a:solidFill>
-                  <a:srgbClr val="BD9B56"/>
-                </a:solidFill>
-                <a:latin typeface="Microsoft YaHei"/>
-                <a:ea typeface="Microsoft YaHei"/>
-              </a:rPr>
-              <a:t> · </a:t>
-            </a:r>
-            <a:r>
-              <a:rPr lang="zh-CN" sz="900">
-                <a:solidFill>
-                  <a:srgbClr val="BD9B56"/>
-                </a:solidFill>
-                <a:latin typeface="Microsoft YaHei"/>
-                <a:ea typeface="Microsoft YaHei"/>
-              </a:rPr>
               <a:t>智慧社区</a:t>
             </a:r>
             <a:endParaRPr/>
@@ -12937,13 +13392,13 @@
       </p:sp>
       <p:sp>
         <p:nvSpPr>
-          <p:cNvPr id="285" name="" descr="{&quot;isTemplate&quot;:true,&quot;type&quot;:&quot;text&quot;}"/>
-          <p:cNvSpPr txBox="1"/>
-          <p:nvPr/>
-        </p:nvSpPr>
-        <p:spPr>
-          <a:xfrm rot="0" flipH="0" flipV="0">
-            <a:off x="11191875" y="6391275"/>
+          <p:cNvPr id="289" name="" descr="{&quot;isTemplate&quot;:true,&quot;type&quot;:&quot;text&quot;}"/>
+          <p:cNvSpPr txBox="1"/>
+          <p:nvPr/>
+        </p:nvSpPr>
+        <p:spPr>
+          <a:xfrm rot="0" flipH="0" flipV="0">
+            <a:off x="11191875" y="6410325"/>
             <a:ext cx="390525" cy="142875"/>
           </a:xfrm>
           <a:prstGeom prst="rect"/>
@@ -12980,7 +13435,7 @@
   <p:cSld>
     <p:spTree>
       <p:nvGrpSpPr>
-        <p:cNvPr id="286" name="" descr="&lt;Slide style={{ width: '1280px', height: '720px', background: '#FBFCFA', position: 'relative', padding: '40px 64px', boxSizing: 'border-box', display: 'flex', flexDirection: 'column' }}&gt;&#10;  &lt;div style={{ flexShrink: 0 }}&gt;&#10;    &lt;div style={{ color: '#BD9B56', fontSize: 13, letterSpacing: '0.25em', marginBottom: 8 }}&gt;02 · 技术构建过程&lt;/div&gt;&#10;    &lt;h2 style={{ fontSize: 30, fontWeight: 'bold', color: '#172133', margin: 0, lineHeight: 1.3 }}&gt;技术架构：六层分离的 AI Native 系统&lt;/h2&gt;&#10;  &lt;/div&gt;&#10;  &lt;div style={{ flex: 1, display: 'flex', alignItems: 'center', gap: 32 }}&gt;&#10;    &lt;div style={{ flex: '0 0 620px', background: '#fff', borderRadius: 12, padding: '22px 24px', boxShadow: '0 6px 24px rgba(23,33,51,0.08)' }}&gt;&#10;      &lt;svg width=&quot;572&quot; height=&quot;470&quot; viewBox=&quot;0 0 572 470&quot;&gt;&#10;        &lt;defs&gt;&#10;          &lt;marker id=&quot;ar6&quot; viewBox=&quot;0 0 10 10&quot; refX=&quot;9&quot; refY=&quot;5&quot; markerWidth=&quot;6&quot; markerHeight=&quot;6&quot; orient=&quot;auto&quot;&gt;&#10;            &lt;path d=&quot;M0 0L10 5L0 10z&quot; fill=&quot;#22395E&quot; /&gt;&#10;          &lt;/marker&gt;&#10;        &lt;/defs&gt;&#10;        &lt;g fontFamily=&quot;Inter, sans-serif&quot;&gt;&#10;          &lt;rect x=&quot;36&quot; y=&quot;18&quot; width=&quot;500&quot; height=&quot;52&quot; rx=&quot;6&quot; fill=&quot;#F5F8F8&quot; stroke=&quot;#22395E&quot; strokeWidth=&quot;1.5&quot; /&gt;&#10;          &lt;text x=&quot;286&quot; y=&quot;49&quot; textAnchor=&quot;middle&quot; fontSize=&quot;14&quot; fontWeight=&quot;bold&quot; fill=&quot;#172133&quot;&gt;客户端 · 业主 / 物业 / 维修 三端&lt;/text&gt;&#10;          &lt;line x1=&quot;286&quot; y1=&quot;70&quot; x2=&quot;286&quot; y2=&quot;92&quot; stroke=&quot;#22395E&quot; strokeWidth=&quot;1.2&quot; markerEnd=&quot;url(#ar6)&quot; /&gt;&#10;          &lt;rect x=&quot;36&quot; y=&quot;96&quot; width=&quot;500&quot; height=&quot;48&quot; rx=&quot;6&quot; fill=&quot;#F5F8F8&quot; stroke=&quot;#22395E&quot; strokeWidth=&quot;1.5&quot; /&gt;&#10;          &lt;text x=&quot;286&quot; y=&quot;125&quot; textAnchor=&quot;middle&quot; fontSize=&quot;14&quot; fontWeight=&quot;bold&quot; fill=&quot;#172133&quot;&gt;API 网关 · FastAPI&lt;/text&gt;&#10;          &lt;line x1=&quot;286&quot; y1=&quot;144&quot; x2=&quot;286&quot; y2=&quot;166&quot; stroke=&quot;#22395E&quot; strokeWidth=&quot;1.2&quot; markerEnd=&quot;url(#ar6)&quot; /&gt;&#10;          &lt;rect x=&quot;36&quot; y=&quot;170&quot; width=&quot;500&quot; height=&quot;70&quot; rx=&quot;6&quot; fill=&quot;rgba(34,57,94,0.08)&quot; stroke=&quot;#22395E&quot; strokeWidth=&quot;2&quot; /&gt;&#10;          &lt;text x=&quot;64&quot; y=&quot;196&quot; fontSize=&quot;13&quot; fontWeight=&quot;bold&quot; fill=&quot;#BD9B56&quot;&gt;AI Agent 层&lt;/text&gt;&#10;          &lt;text x=&quot;286&quot; y=&quot;218&quot; textAnchor=&quot;middle&quot; fontSize=&quot;14&quot; fontWeight=&quot;bold&quot; fill=&quot;#172133&quot;&gt;Router Agent + 领域 Agent + 工具调用&lt;/text&gt;&#10;          &lt;line x1=&quot;286&quot; y1=&quot;240&quot; x2=&quot;286&quot; y2=&quot;262&quot; stroke=&quot;#22395E&quot; strokeWidth=&quot;1.2&quot; markerEnd=&quot;url(#ar6)&quot; /&gt;&#10;          &lt;rect x=&quot;36&quot; y=&quot;266&quot; width=&quot;500&quot; height=&quot;56&quot; rx=&quot;6&quot; fill=&quot;rgba(189,155,86,0.08)&quot; stroke=&quot;#BD9B56&quot; strokeWidth=&quot;1.5&quot; /&gt;&#10;          &lt;text x=&quot;64&quot; y=&quot;290&quot; fontSize=&quot;13&quot; fontWeight=&quot;bold&quot; fill=&quot;#BD9B56&quot;&gt;业务服务层&lt;/text&gt;&#10;          &lt;text x=&quot;286&quot; y=&quot;312&quot; textAnchor=&quot;middle&quot; fontSize=&quot;14&quot; fontWeight=&quot;bold&quot; fill=&quot;#172133&quot;&gt;工单 · 费用 · 巡检 · 通知 · 反馈 · 知识库&lt;/text&gt;&#10;          &lt;line x1=&quot;286&quot; y1=&quot;322&quot; x2=&quot;286&quot; y2=&quot;344&quot; stroke=&quot;#22395E&quot; strokeWidth=&quot;1.2&quot; markerEnd=&quot;url(#ar6)&quot; /&gt;&#10;          &lt;rect x=&quot;36&quot; y=&quot;348&quot; width=&quot;240&quot; height=&quot;60&quot; rx=&quot;6&quot; fill=&quot;#F5F8F8&quot; stroke=&quot;#22395E&quot; strokeWidth=&quot;1.5&quot; /&gt;&#10;          &lt;text x=&quot;156&quot; y=&quot;374&quot; textAnchor=&quot;middle&quot; fontSize=&quot;13&quot; fontWeight=&quot;bold&quot; fill=&quot;#BD9B56&quot;&gt;PostgreSQL + pgvector&lt;/text&gt;&#10;          &lt;text x=&quot;156&quot; y=&quot;394&quot; textAnchor=&quot;middle&quot; fontSize=&quot;11&quot; fill=&quot;#5F5E5A&quot;&gt;事务数据 + 向量检索&lt;/text&gt;&#10;          &lt;rect x=&quot;296&quot; y=&quot;348&quot; width=&quot;240&quot; height=&quot;60&quot; rx=&quot;6&quot; fill=&quot;#F5F8F8&quot; stroke=&quot;#22395E&quot; strokeWidth=&quot;1.5&quot; /&gt;&#10;          &lt;text x=&quot;416&quot; y=&quot;374&quot; textAnchor=&quot;middle&quot; fontSize=&quot;13&quot; fontWeight=&quot;bold&quot; fill=&quot;#BD9B56&quot;&gt;Redis + 智谱 GLM&lt;/text&gt;&#10;          &lt;text x=&quot;416&quot; y=&quot;394&quot; textAnchor=&quot;middle&quot; fontSize=&quot;11&quot; fill=&quot;#5F5E5A&quot;&gt;缓存 · LLM · embedding&lt;/text&gt;&#10;        &lt;/g&gt;&#10;      &lt;/svg&gt;&#10;    &lt;/div&gt;&#10;    &lt;div style={{ flex: 1, display: 'flex', flexDirection: 'column', gap: 18 }}&gt;&#10;      &lt;div&gt;&#10;        &lt;div style={{ fontSize: 14, color: '#BD9B56', fontWeight: 'bold', letterSpacing: '0.1em', marginBottom: 6 }}&gt;1.  Agent 与业务解耦&lt;/div&gt;&#10;        &lt;p style={{ fontSize: 14, color: '#5F5E5A', margin: 0, lineHeight: 1.65 }}&gt;AI Agent 只负责理解意图、编排工具，不直接操作数据库，严守 Agent → Tool → Service → Repository → Database 分层，杜绝 LLM 直连 SQL 的风险。&lt;/p&gt;&#10;      &lt;/div&gt;&#10;      &lt;div&gt;&#10;        &lt;div style={{ fontSize: 14, color: '#BD9B56', fontWeight: 'bold', letterSpacing: '0.1em', marginBottom: 6 }}&gt;2.  pgvector 一库双角色&lt;/div&gt;&#10;        &lt;p style={{ fontSize: 14, color: '#5F5E5A', margin: 0, lineHeight: 1.65 }}&gt;PostgreSQL 同时承载业务数据（工单、费用）和向量数据（知识切片），无需额外向量数据库，降低部署与运维复杂度。&lt;/p&gt;&#10;      &lt;/div&gt;&#10;      &lt;div&gt;&#10;        &lt;div style={{ fontSize: 14, color: '#BD9B56', fontWeight: 'bold', letterSpacing: '0.1em', marginBottom: 6 }}&gt;3.  可观测可评估&lt;/div&gt;&#10;        &lt;p style={{ fontSize: 14, color: '#5F5E5A', margin: 0, lineHeight: 1.65 }}&gt;每次 AI 对话的意图、工具调用、结果全程记录，可回放、可追踪，支撑后续的量化评估与持续迭代。&lt;/p&gt;&#10;      &lt;/div&gt;&#10;    &lt;/div&gt;&#10;  &lt;/div&gt;&#10;  &lt;div style={{ flexShrink: 0, height: 40, display: 'flex', alignItems: 'flex-end', justifyContent: 'space-between' }}&gt;&#10;    &lt;span style={{ color: '#BD9B56', fontSize: 12, letterSpacing: '0.1em' }}&gt;云溪花园 · 智慧社区&lt;/span&gt;&#10;    &lt;span style={{ color: '#a09b8c', fontSize: 12 }}&gt;06 / 15&lt;/span&gt;&#10;  &lt;/div&gt;&#10;&lt;/Slide&gt;"/>
+        <p:cNvPr id="290" name="" descr="&lt;Slide style={{ width: '1280px', height: '720px', background: '#FBFCFA', position: 'relative', padding: '40px 64px', boxSizing: 'border-box', display: 'flex', flexDirection: 'column' }}&gt;&#10;  &lt;div style={{ flexShrink: 0 }}&gt;&#10;    &lt;div style={{ color: '#BD9B56', fontSize: 13, letterSpacing: '0.25em', marginBottom: 8 }}&gt;02 · 技术构建过程&lt;/div&gt;&#10;    &lt;h2 style={{ fontSize: 30, fontWeight: 'bold', color: '#172133', margin: 0, lineHeight: 1.3 }}&gt;技术架构：六层分离的 AI Native 系统&lt;/h2&gt;&#10;  &lt;/div&gt;&#10;  &lt;div style={{ flex: 1, display: 'flex', alignItems: 'center', gap: 32 }}&gt;&#10;    &lt;div style={{ flex: '0 0 620px', background: '#fff', borderRadius: 12, padding: '22px 24px', boxShadow: '0 6px 24px rgba(23,33,51,0.08)' }}&gt;&#10;      &lt;svg width=&quot;572&quot; height=&quot;470&quot; viewBox=&quot;0 0 572 470&quot;&gt;&#10;        &lt;defs&gt;&#10;          &lt;marker id=&quot;ar6&quot; viewBox=&quot;0 0 10 10&quot; refX=&quot;9&quot; refY=&quot;5&quot; markerWidth=&quot;6&quot; markerHeight=&quot;6&quot; orient=&quot;auto&quot;&gt;&#10;            &lt;path d=&quot;M0 0L10 5L0 10z&quot; fill=&quot;#22395E&quot; /&gt;&#10;          &lt;/marker&gt;&#10;        &lt;/defs&gt;&#10;        &lt;g fontFamily=&quot;Inter, sans-serif&quot;&gt;&#10;          &lt;rect x=&quot;36&quot; y=&quot;18&quot; width=&quot;500&quot; height=&quot;52&quot; rx=&quot;6&quot; fill=&quot;#F5F8F8&quot; stroke=&quot;#22395E&quot; strokeWidth=&quot;1.5&quot; /&gt;&#10;          &lt;text x=&quot;286&quot; y=&quot;49&quot; textAnchor=&quot;middle&quot; fontSize=&quot;14&quot; fontWeight=&quot;bold&quot; fill=&quot;#172133&quot;&gt;客户端 · 业主 / 物业 / 维修 三端&lt;/text&gt;&#10;          &lt;line x1=&quot;286&quot; y1=&quot;70&quot; x2=&quot;286&quot; y2=&quot;92&quot; stroke=&quot;#22395E&quot; strokeWidth=&quot;1.2&quot; markerEnd=&quot;url(#ar6)&quot; /&gt;&#10;          &lt;rect x=&quot;36&quot; y=&quot;96&quot; width=&quot;500&quot; height=&quot;48&quot; rx=&quot;6&quot; fill=&quot;#F5F8F8&quot; stroke=&quot;#22395E&quot; strokeWidth=&quot;1.5&quot; /&gt;&#10;          &lt;text x=&quot;286&quot; y=&quot;125&quot; textAnchor=&quot;middle&quot; fontSize=&quot;14&quot; fontWeight=&quot;bold&quot; fill=&quot;#172133&quot;&gt;API 网关 · FastAPI&lt;/text&gt;&#10;          &lt;line x1=&quot;286&quot; y1=&quot;144&quot; x2=&quot;286&quot; y2=&quot;166&quot; stroke=&quot;#22395E&quot; strokeWidth=&quot;1.2&quot; markerEnd=&quot;url(#ar6)&quot; /&gt;&#10;          &lt;rect x=&quot;36&quot; y=&quot;170&quot; width=&quot;500&quot; height=&quot;70&quot; rx=&quot;6&quot; fill=&quot;rgba(34,57,94,0.08)&quot; stroke=&quot;#22395E&quot; strokeWidth=&quot;2&quot; /&gt;&#10;          &lt;text x=&quot;64&quot; y=&quot;196&quot; fontSize=&quot;13&quot; fontWeight=&quot;bold&quot; fill=&quot;#BD9B56&quot;&gt;AI Agent 层&lt;/text&gt;&#10;          &lt;text x=&quot;286&quot; y=&quot;218&quot; textAnchor=&quot;middle&quot; fontSize=&quot;14&quot; fontWeight=&quot;bold&quot; fill=&quot;#172133&quot;&gt;Router Agent + 领域 Agent + 工具调用&lt;/text&gt;&#10;          &lt;line x1=&quot;286&quot; y1=&quot;240&quot; x2=&quot;286&quot; y2=&quot;262&quot; stroke=&quot;#22395E&quot; strokeWidth=&quot;1.2&quot; markerEnd=&quot;url(#ar6)&quot; /&gt;&#10;          &lt;rect x=&quot;36&quot; y=&quot;266&quot; width=&quot;500&quot; height=&quot;56&quot; rx=&quot;6&quot; fill=&quot;rgba(189,155,86,0.08)&quot; stroke=&quot;#BD9B56&quot; strokeWidth=&quot;1.5&quot; /&gt;&#10;          &lt;text x=&quot;64&quot; y=&quot;290&quot; fontSize=&quot;13&quot; fontWeight=&quot;bold&quot; fill=&quot;#BD9B56&quot;&gt;业务服务层&lt;/text&gt;&#10;          &lt;text x=&quot;286&quot; y=&quot;312&quot; textAnchor=&quot;middle&quot; fontSize=&quot;14&quot; fontWeight=&quot;bold&quot; fill=&quot;#172133&quot;&gt;工单 · 费用 · 巡检 · 通知 · 反馈 · 知识库&lt;/text&gt;&#10;          &lt;line x1=&quot;286&quot; y1=&quot;322&quot; x2=&quot;286&quot; y2=&quot;344&quot; stroke=&quot;#22395E&quot; strokeWidth=&quot;1.2&quot; markerEnd=&quot;url(#ar6)&quot; /&gt;&#10;          &lt;rect x=&quot;36&quot; y=&quot;348&quot; width=&quot;240&quot; height=&quot;60&quot; rx=&quot;6&quot; fill=&quot;#F5F8F8&quot; stroke=&quot;#22395E&quot; strokeWidth=&quot;1.5&quot; /&gt;&#10;          &lt;text x=&quot;156&quot; y=&quot;374&quot; textAnchor=&quot;middle&quot; fontSize=&quot;13&quot; fontWeight=&quot;bold&quot; fill=&quot;#BD9B56&quot;&gt;PostgreSQL + pgvector&lt;/text&gt;&#10;          &lt;text x=&quot;156&quot; y=&quot;394&quot; textAnchor=&quot;middle&quot; fontSize=&quot;11&quot; fill=&quot;#5F5E5A&quot;&gt;事务数据 + 向量检索&lt;/text&gt;&#10;          &lt;rect x=&quot;296&quot; y=&quot;348&quot; width=&quot;240&quot; height=&quot;60&quot; rx=&quot;6&quot; fill=&quot;#F5F8F8&quot; stroke=&quot;#22395E&quot; strokeWidth=&quot;1.5&quot; /&gt;&#10;          &lt;text x=&quot;416&quot; y=&quot;374&quot; textAnchor=&quot;middle&quot; fontSize=&quot;13&quot; fontWeight=&quot;bold&quot; fill=&quot;#BD9B56&quot;&gt;Redis + 智谱 GLM&lt;/text&gt;&#10;          &lt;text x=&quot;416&quot; y=&quot;394&quot; textAnchor=&quot;middle&quot; fontSize=&quot;11&quot; fill=&quot;#5F5E5A&quot;&gt;缓存 · LLM · embedding&lt;/text&gt;&#10;        &lt;/g&gt;&#10;      &lt;/svg&gt;&#10;    &lt;/div&gt;&#10;    &lt;div style={{ flex: 1, display: 'flex', flexDirection: 'column', gap: 18 }}&gt;&#10;      &lt;div&gt;&#10;        &lt;div style={{ fontSize: 14, color: '#BD9B56', fontWeight: 'bold', letterSpacing: '0.1em', marginBottom: 6 }}&gt;1.  Agent 与业务解耦&lt;/div&gt;&#10;        &lt;p style={{ fontSize: 14, color: '#5F5E5A', margin: 0, lineHeight: 1.65 }}&gt;AI Agent 只负责理解意图、编排工具，不直接操作数据库，严守 Agent → Tool → Service → Repository → Database 分层，杜绝 LLM 直连 SQL 的风险。&lt;/p&gt;&#10;      &lt;/div&gt;&#10;      &lt;div&gt;&#10;        &lt;div style={{ fontSize: 14, color: '#BD9B56', fontWeight: 'bold', letterSpacing: '0.1em', marginBottom: 6 }}&gt;2.  pgvector 一库双角色&lt;/div&gt;&#10;        &lt;p style={{ fontSize: 14, color: '#5F5E5A', margin: 0, lineHeight: 1.65 }}&gt;PostgreSQL 同时承载业务数据（工单、费用）和向量数据（知识切片），无需额外向量数据库，降低部署与运维复杂度。&lt;/p&gt;&#10;      &lt;/div&gt;&#10;      &lt;div&gt;&#10;        &lt;div style={{ fontSize: 14, color: '#BD9B56', fontWeight: 'bold', letterSpacing: '0.1em', marginBottom: 6 }}&gt;3.  可观测可评估&lt;/div&gt;&#10;        &lt;p style={{ fontSize: 14, color: '#5F5E5A', margin: 0, lineHeight: 1.65 }}&gt;每次 AI 对话的意图、工具调用、结果全程记录，可回放、可追踪，支撑后续的量化评估与持续迭代。&lt;/p&gt;&#10;      &lt;/div&gt;&#10;    &lt;/div&gt;&#10;  &lt;/div&gt;&#10;  &lt;div style={{ flexShrink: 0, height: 40, display: 'flex', alignItems: 'flex-end', justifyContent: 'space-between' }}&gt;&#10;    &lt;span style={{ color: '#BD9B56', fontSize: 12, letterSpacing: '0.1em' }}&gt;云溪花园 · 智慧社区&lt;/span&gt;&#10;    &lt;span style={{ color: '#a09b8c', fontSize: 12 }}&gt;06 / 15&lt;/span&gt;&#10;  &lt;/div&gt;&#10;&lt;/Slide&gt;"/>
         <p:cNvGrpSpPr/>
         <p:nvPr/>
       </p:nvGrpSpPr>
@@ -12994,7 +13449,7 @@
       </p:grpSpPr>
       <p:sp>
         <p:nvSpPr>
-          <p:cNvPr id="287" name=""/>
+          <p:cNvPr id="291" name=""/>
           <p:cNvSpPr/>
           <p:nvPr/>
         </p:nvSpPr>
@@ -13018,7 +13473,7 @@
       </p:sp>
       <p:sp>
         <p:nvSpPr>
-          <p:cNvPr id="288" name="" descr="{&quot;isTemplate&quot;:true,&quot;type&quot;:&quot;text&quot;}"/>
+          <p:cNvPr id="292" name="" descr="{&quot;isTemplate&quot;:true,&quot;type&quot;:&quot;text&quot;}"/>
           <p:cNvSpPr txBox="1"/>
           <p:nvPr/>
         </p:nvSpPr>
@@ -13063,7 +13518,7 @@
       </p:sp>
       <p:sp>
         <p:nvSpPr>
-          <p:cNvPr id="289" name="" descr="{&quot;isTemplate&quot;:true,&quot;type&quot;:&quot;text&quot;}"/>
+          <p:cNvPr id="293" name="" descr="{&quot;isTemplate&quot;:true,&quot;type&quot;:&quot;text&quot;}"/>
           <p:cNvSpPr txBox="1"/>
           <p:nvPr/>
         </p:nvSpPr>
@@ -13118,7 +13573,7 @@
       </p:sp>
       <p:sp>
         <p:nvSpPr>
-          <p:cNvPr id="290" name=""/>
+          <p:cNvPr id="294" name=""/>
           <p:cNvSpPr/>
           <p:nvPr/>
         </p:nvSpPr>
@@ -13151,7 +13606,7 @@
       </p:sp>
       <p:pic>
         <p:nvPicPr>
-          <p:cNvPr id="291" name=""/>
+          <p:cNvPr id="295" name=""/>
           <p:cNvPicPr>
             <a:picLocks noChangeAspect="1"/>
           </p:cNvPicPr>
@@ -13182,7 +13637,7 @@
       </p:pic>
       <p:sp>
         <p:nvSpPr>
-          <p:cNvPr id="292" name="" descr="{&quot;isTemplate&quot;:true,&quot;type&quot;:&quot;text&quot;}"/>
+          <p:cNvPr id="296" name="" descr="{&quot;isTemplate&quot;:true,&quot;type&quot;:&quot;text&quot;}"/>
           <p:cNvSpPr txBox="1"/>
           <p:nvPr/>
         </p:nvSpPr>
@@ -13227,7 +13682,7 @@
       </p:sp>
       <p:sp>
         <p:nvSpPr>
-          <p:cNvPr id="293" name="" descr="{&quot;isTemplate&quot;:true,&quot;type&quot;:&quot;text&quot;}"/>
+          <p:cNvPr id="297" name="" descr="{&quot;isTemplate&quot;:true,&quot;type&quot;:&quot;text&quot;}"/>
           <p:cNvSpPr txBox="1"/>
           <p:nvPr/>
         </p:nvSpPr>
@@ -13334,7 +13789,7 @@
       </p:sp>
       <p:sp>
         <p:nvSpPr>
-          <p:cNvPr id="294" name="" descr="{&quot;isTemplate&quot;:true,&quot;type&quot;:&quot;text&quot;}"/>
+          <p:cNvPr id="298" name="" descr="{&quot;isTemplate&quot;:true,&quot;type&quot;:&quot;text&quot;}"/>
           <p:cNvSpPr txBox="1"/>
           <p:nvPr/>
         </p:nvSpPr>
@@ -13379,7 +13834,7 @@
       </p:sp>
       <p:sp>
         <p:nvSpPr>
-          <p:cNvPr id="295" name="" descr="{&quot;isTemplate&quot;:true,&quot;type&quot;:&quot;text&quot;}"/>
+          <p:cNvPr id="299" name="" descr="{&quot;isTemplate&quot;:true,&quot;type&quot;:&quot;text&quot;}"/>
           <p:cNvSpPr txBox="1"/>
           <p:nvPr/>
         </p:nvSpPr>
@@ -13426,7 +13881,7 @@
       </p:sp>
       <p:sp>
         <p:nvSpPr>
-          <p:cNvPr id="296" name="" descr="{&quot;isTemplate&quot;:true,&quot;type&quot;:&quot;text&quot;}"/>
+          <p:cNvPr id="300" name="" descr="{&quot;isTemplate&quot;:true,&quot;type&quot;:&quot;text&quot;}"/>
           <p:cNvSpPr txBox="1"/>
           <p:nvPr/>
         </p:nvSpPr>
@@ -13471,7 +13926,7 @@
       </p:sp>
       <p:sp>
         <p:nvSpPr>
-          <p:cNvPr id="297" name="" descr="{&quot;isTemplate&quot;:true,&quot;type&quot;:&quot;text&quot;}"/>
+          <p:cNvPr id="301" name="" descr="{&quot;isTemplate&quot;:true,&quot;type&quot;:&quot;text&quot;}"/>
           <p:cNvSpPr txBox="1"/>
           <p:nvPr/>
         </p:nvSpPr>
@@ -13528,7 +13983,7 @@
       </p:sp>
       <p:sp>
         <p:nvSpPr>
-          <p:cNvPr id="298" name="" descr="{&quot;isTemplate&quot;:true,&quot;type&quot;:&quot;text&quot;}"/>
+          <p:cNvPr id="302" name="" descr="{&quot;isTemplate&quot;:true,&quot;type&quot;:&quot;text&quot;}"/>
           <p:cNvSpPr txBox="1"/>
           <p:nvPr/>
         </p:nvSpPr>
@@ -13583,7 +14038,7 @@
       </p:sp>
       <p:sp>
         <p:nvSpPr>
-          <p:cNvPr id="299" name="" descr="{&quot;isTemplate&quot;:true,&quot;type&quot;:&quot;text&quot;}"/>
+          <p:cNvPr id="303" name="" descr="{&quot;isTemplate&quot;:true,&quot;type&quot;:&quot;text&quot;}"/>
           <p:cNvSpPr txBox="1"/>
           <p:nvPr/>
         </p:nvSpPr>
@@ -13626,7 +14081,7 @@
   <p:cSld>
     <p:spTree>
       <p:nvGrpSpPr>
-        <p:cNvPr id="300" name="" descr="&lt;Slide style={{ width: '1280px', height: '720px', background: '#FBFCFA', position: 'relative', padding: '32px 64px', boxSizing: 'border-box', display: 'flex', flexDirection: 'column' }}&gt;&#10;  &lt;div style={{ flexShrink: 0 }}&gt;&#10;    &lt;div style={{ color: '#BD9B56', fontSize: 13, letterSpacing: '0.25em', marginBottom: 6 }}&gt;02 · 技术构建过程&lt;/div&gt;&#10;    &lt;h2 style={{ fontSize: 30, fontWeight: 'bold', color: '#172133', margin: 0, lineHeight: 1.3 }}&gt;数据库设计：15+ 张表承载整个社区&lt;/h2&gt;&#10;    &lt;div style={{ fontSize: 14, color: '#6b7075', marginTop: 6 }}&gt;数据库是系统地基，通过外键建立完整 ER 关系，覆盖社区到知识库的全部实体&lt;/div&gt;&#10;  &lt;/div&gt;&#10;  &lt;div style={{ flex: 1, display: 'flex', alignItems: 'center', minHeight: 0, gap: 28 }}&gt;&#10;    &lt;div style={{ flex: '0 0 320px', background: 'linear-gradient(135deg, #172133 0%, #22395E 100%)', borderRadius: 12, padding: '24px 24px', color: '#FBFCFA' }}&gt;&#10;      &lt;div style={{ color: '#BD9B56', fontSize: 12, letterSpacing: '0.25em', marginBottom: 12 }}&gt;CORE ENTITIES&lt;/div&gt;&#10;      &lt;div style={{ fontSize: 14, color: 'rgba(251,252,250,0.9)', lineHeight: 1.9 }}&gt;&#10;        community 社区&lt;br/&gt;&#10;        building 楼栋（8）&lt;br/&gt;&#10;        house 房屋（1664）&lt;br/&gt;&#10;        user 用户（275）&lt;br/&gt;&#10;        house_binding 房屋绑定&lt;br/&gt;&#10;        worker 物业人员（75）&lt;br/&gt;&#10;        repair_order 工单&lt;br/&gt;&#10;        fee_bill 账单（746）&lt;br/&gt;&#10;        notice 公告（24）&lt;br/&gt;&#10;        conversation / message&lt;br/&gt;&#10;        agent_trace 追踪&lt;br/&gt;&#10;        &lt;span style={{ color: '#BD9B56' }}&gt;knowledge_document / chunk&lt;/span&gt;&#10;      &lt;/div&gt;&#10;    &lt;/div&gt;&#10;    &lt;div style={{ flex: 1, background: '#fff', borderRadius: 12, padding: '20px 22px', boxShadow: '0 6px 24px rgba(23,33,51,0.08)' }}&gt;&#10;      &lt;svg width=&quot;560&quot; height=&quot;470&quot; viewBox=&quot;0 0 560 470&quot;&gt;&#10;        &lt;g fontFamily=&quot;Inter, sans-serif&quot;&gt;&#10;          &lt;rect x=&quot;14&quot; y=&quot;14&quot; width=&quot;150&quot; height=&quot;50&quot; rx=&quot;6&quot; fill=&quot;rgba(34,57,94,0.08)&quot; stroke=&quot;#22395E&quot; strokeWidth=&quot;1.5&quot; /&gt;&#10;          &lt;text x=&quot;89&quot; y=&quot;44&quot; textAnchor=&quot;middle&quot; fontSize=&quot;14&quot; fontWeight=&quot;bold&quot; fill=&quot;#172133&quot;&gt;community&lt;/text&gt;&#10;          &lt;line x1=&quot;164&quot; y1=&quot;39&quot; x2=&quot;206&quot; y2=&quot;39&quot; stroke=&quot;#BD9B56&quot; strokeWidth=&quot;1.5&quot; /&gt;&#10;          &lt;rect x=&quot;210&quot; y=&quot;14&quot; width=&quot;150&quot; height=&quot;50&quot; rx=&quot;6&quot; fill=&quot;rgba(34,57,94,0.08)&quot; stroke=&quot;#22395E&quot; strokeWidth=&quot;1.5&quot; /&gt;&#10;          &lt;text x=&quot;285&quot; y=&quot;44&quot; textAnchor=&quot;middle&quot; fontSize=&quot;14&quot; fontWeight=&quot;bold&quot; fill=&quot;#172133&quot;&gt;building ×8&lt;/text&gt;&#10;          &lt;line x1=&quot;360&quot; y1=&quot;39&quot; x2=&quot;402&quot; y2=&quot;39&quot; stroke=&quot;#BD9B56&quot; strokeWidth=&quot;1.5&quot; /&gt;&#10;          &lt;rect x=&quot;406&quot; y=&quot;14&quot; width=&quot;150&quot; height=&quot;50&quot; rx=&quot;6&quot; fill=&quot;rgba(34,57,94,0.08)&quot; stroke=&quot;#22395E&quot; strokeWidth=&quot;1.5&quot; /&gt;&#10;          &lt;text x=&quot;481&quot; y=&quot;44&quot; textAnchor=&quot;middle&quot; fontSize=&quot;14&quot; fontWeight=&quot;bold&quot; fill=&quot;#172133&quot;&gt;house ×1664&lt;/text&gt;&#10;          &lt;line x1=&quot;285&quot; y1=&quot;64&quot; x2=&quot;285&quot; y2=&quot;104&quot; stroke=&quot;#BD9B56&quot; strokeWidth=&quot;1.5&quot; /&gt;&#10;          &lt;rect x=&quot;210&quot; y=&quot;108&quot; width=&quot;150&quot; height=&quot;50&quot; rx=&quot;6&quot; fill=&quot;rgba(189,155,86,0.10)&quot; stroke=&quot;#BD9B56&quot; strokeWidth=&quot;1.5&quot; /&gt;&#10;          &lt;text x=&quot;285&quot; y=&quot;138&quot; textAnchor=&quot;middle&quot; fontSize=&quot;14&quot; fontWeight=&quot;bold&quot; fill=&quot;#172133&quot;&gt;user ×275&lt;/text&gt;&#10;          &lt;line x1=&quot;210&quot; y1=&quot;133&quot; x2=&quot;164&quot; y2=&quot;133&quot; stroke=&quot;#BD9B56&quot; strokeWidth=&quot;1.5&quot; /&gt;&#10;          &lt;rect x=&quot;14&quot; y=&quot;108&quot; width=&quot;150&quot; height=&quot;50&quot; rx=&quot;6&quot; fill=&quot;rgba(189,155,86,0.10)&quot; stroke=&quot;#BD9B56&quot; strokeWidth=&quot;1.5&quot; /&gt;&#10;          &lt;text x=&quot;89&quot; y=&quot;138&quot; textAnchor=&quot;middle&quot; fontSize=&quot;14&quot; fontWeight=&quot;bold&quot; fill=&quot;#172133&quot;&gt;house_binding&lt;/text&gt;&#10;          &lt;line x1=&quot;285&quot; y1=&quot;158&quot; x2=&quot;285&quot; y2=&quot;198&quot; stroke=&quot;#BD9B56&quot; strokeWidth=&quot;1.5&quot; /&gt;&#10;          &lt;rect x=&quot;210&quot; y=&quot;202&quot; width=&quot;150&quot; height=&quot;50&quot; rx=&quot;6&quot; fill=&quot;rgba(34,57,94,0.08)&quot; stroke=&quot;#22395E&quot; strokeWidth=&quot;1.5&quot; /&gt;&#10;          &lt;text x=&quot;285&quot; y=&quot;232&quot; textAnchor=&quot;middle&quot; fontSize=&quot;14&quot; fontWeight=&quot;bold&quot; fill=&quot;#172133&quot;&gt;worker ×75&lt;/text&gt;&#10;          &lt;line x1=&quot;285&quot; y1=&quot;252&quot; x2=&quot;285&quot; y2=&quot;292&quot; stroke=&quot;#BD9B56&quot; strokeWidth=&quot;1.5&quot; /&gt;&#10;          &lt;rect x=&quot;160&quot; y=&quot;296&quot; width=&quot;130&quot; height=&quot;50&quot; rx=&quot;6&quot; fill=&quot;rgba(34,57,94,0.08)&quot; stroke=&quot;#22395E&quot; strokeWidth=&quot;1.5&quot; /&gt;&#10;          &lt;text x=&quot;225&quot; y=&quot;326&quot; textAnchor=&quot;middle&quot; fontSize=&quot;13&quot; fontWeight=&quot;bold&quot; fill=&quot;#172133&quot;&gt;repair_order&lt;/text&gt;&#10;          &lt;rect x=&quot;306&quot; y=&quot;296&quot; width=&quot;130&quot; height=&quot;50&quot; rx=&quot;6&quot; fill=&quot;rgba(34,57,94,0.08)&quot; stroke=&quot;#22395E&quot; strokeWidth=&quot;1.5&quot; /&gt;&#10;          &lt;text x=&quot;371&quot; y=&quot;326&quot; textAnchor=&quot;middle&quot; fontSize=&quot;13&quot; fontWeight=&quot;bold&quot; fill=&quot;#172133&quot;&gt;fee_bill ×746&lt;/text&gt;&#10;          &lt;line x1=&quot;225&quot; y1=&quot;346&quot; x2=&quot;225&quot; y2=&quot;386&quot; stroke=&quot;#BD9B56&quot; strokeWidth=&quot;1.5&quot; /&gt;&#10;          &lt;rect x=&quot;160&quot; y=&quot;390&quot; width=&quot;130&quot; height=&quot;50&quot; rx=&quot;6&quot; fill=&quot;rgba(34,57,94,0.08)&quot; stroke=&quot;#22395E&quot; strokeWidth=&quot;1.5&quot; /&gt;&#10;          &lt;text x=&quot;225&quot; y=&quot;420&quot; textAnchor=&quot;middle&quot; fontSize=&quot;13&quot; fontWeight=&quot;bold&quot; fill=&quot;#172133&quot;&gt;notice ×24&lt;/text&gt;&#10;          &lt;rect x=&quot;306&quot; y=&quot;390&quot; width=&quot;130&quot; height=&quot;50&quot; rx=&quot;6&quot; fill=&quot;#172133&quot; stroke=&quot;#BD9B56&quot; strokeWidth=&quot;1.5&quot; /&gt;&#10;          &lt;text x=&quot;371&quot; y=&quot;416&quot; textAnchor=&quot;middle&quot; fontSize=&quot;12&quot; fontWeight=&quot;bold&quot; fill=&quot;#BD9B56&quot;&gt;knowledge&lt;/text&gt;&#10;          &lt;text x=&quot;371&quot; y=&quot;434&quot; textAnchor=&quot;middle&quot; fontSize=&quot;10&quot; fill=&quot;#FBFCFA&quot;&gt;document + chunk&lt;/text&gt;&#10;        &lt;/g&gt;&#10;      &lt;/svg&gt;&#10;    &lt;/div&gt;&#10;  &lt;/div&gt;&#10;  &lt;div style={{ flexShrink: 0, height: 40, display: 'flex', alignItems: 'flex-end', justifyContent: 'space-between' }}&gt;&#10;    &lt;span style={{ color: '#BD9B56', fontSize: 12, letterSpacing: '0.1em' }}&gt;云溪花园 · 智慧社区&lt;/span&gt;&#10;    &lt;span style={{ color: '#a09b8c', fontSize: 12 }}&gt;07 / 15&lt;/span&gt;&#10;  &lt;/div&gt;&#10;&lt;/Slide&gt;"/>
+        <p:cNvPr id="304" name="" descr="&lt;Slide style={{ width: '1280px', height: '720px', background: '#FBFCFA', position: 'relative', padding: '32px 64px', boxSizing: 'border-box', display: 'flex', flexDirection: 'column' }}&gt;&#10;  &lt;div style={{ flexShrink: 0 }}&gt;&#10;    &lt;div style={{ color: '#BD9B56', fontSize: 13, letterSpacing: '0.25em', marginBottom: 6 }}&gt;02 · 技术构建过程&lt;/div&gt;&#10;    &lt;h2 style={{ fontSize: 30, fontWeight: 'bold', color: '#172133', margin: 0, lineHeight: 1.3 }}&gt;数据库设计：15+ 张表承载整个社区&lt;/h2&gt;&#10;    &lt;div style={{ fontSize: 14, color: '#6b7075', marginTop: 6 }}&gt;数据库是系统地基，通过外键建立完整 ER 关系，覆盖社区到知识库的全部实体&lt;/div&gt;&#10;  &lt;/div&gt;&#10;  &lt;div style={{ flex: 1, display: 'flex', alignItems: 'center', minHeight: 0, gap: 28 }}&gt;&#10;    &lt;div style={{ flex: '0 0 320px', background: 'linear-gradient(135deg, #172133 0%, #22395E 100%)', borderRadius: 12, padding: '24px 24px', color: '#FBFCFA' }}&gt;&#10;      &lt;div style={{ color: '#BD9B56', fontSize: 12, letterSpacing: '0.25em', marginBottom: 12 }}&gt;CORE ENTITIES&lt;/div&gt;&#10;      &lt;div style={{ fontSize: 14, color: 'rgba(251,252,250,0.9)', lineHeight: 1.9 }}&gt;&#10;        community 社区&lt;br/&gt;&#10;        building 楼栋（8）&lt;br/&gt;&#10;        house 房屋（1664）&lt;br/&gt;&#10;        user 用户（275）&lt;br/&gt;&#10;        house_binding 房屋绑定&lt;br/&gt;&#10;        worker 物业人员（75）&lt;br/&gt;&#10;        repair_order 工单&lt;br/&gt;&#10;        fee_bill 账单（746）&lt;br/&gt;&#10;        notice 公告（24）&lt;br/&gt;&#10;        conversation / message&lt;br/&gt;&#10;        agent_trace 追踪&lt;br/&gt;&#10;        &lt;span style={{ color: '#BD9B56' }}&gt;knowledge_document / chunk&lt;/span&gt;&#10;      &lt;/div&gt;&#10;    &lt;/div&gt;&#10;    &lt;div style={{ flex: 1, background: '#fff', borderRadius: 12, padding: '20px 22px', boxShadow: '0 6px 24px rgba(23,33,51,0.08)' }}&gt;&#10;      &lt;svg width=&quot;560&quot; height=&quot;470&quot; viewBox=&quot;0 0 560 470&quot;&gt;&#10;        &lt;g fontFamily=&quot;Inter, sans-serif&quot;&gt;&#10;          &lt;rect x=&quot;14&quot; y=&quot;14&quot; width=&quot;150&quot; height=&quot;50&quot; rx=&quot;6&quot; fill=&quot;rgba(34,57,94,0.08)&quot; stroke=&quot;#22395E&quot; strokeWidth=&quot;1.5&quot; /&gt;&#10;          &lt;text x=&quot;89&quot; y=&quot;44&quot; textAnchor=&quot;middle&quot; fontSize=&quot;14&quot; fontWeight=&quot;bold&quot; fill=&quot;#172133&quot;&gt;community&lt;/text&gt;&#10;          &lt;line x1=&quot;164&quot; y1=&quot;39&quot; x2=&quot;206&quot; y2=&quot;39&quot; stroke=&quot;#BD9B56&quot; strokeWidth=&quot;1.5&quot; /&gt;&#10;          &lt;rect x=&quot;210&quot; y=&quot;14&quot; width=&quot;150&quot; height=&quot;50&quot; rx=&quot;6&quot; fill=&quot;rgba(34,57,94,0.08)&quot; stroke=&quot;#22395E&quot; strokeWidth=&quot;1.5&quot; /&gt;&#10;          &lt;text x=&quot;285&quot; y=&quot;44&quot; textAnchor=&quot;middle&quot; fontSize=&quot;14&quot; fontWeight=&quot;bold&quot; fill=&quot;#172133&quot;&gt;building ×8&lt;/text&gt;&#10;          &lt;line x1=&quot;360&quot; y1=&quot;39&quot; x2=&quot;402&quot; y2=&quot;39&quot; stroke=&quot;#BD9B56&quot; strokeWidth=&quot;1.5&quot; /&gt;&#10;          &lt;rect x=&quot;406&quot; y=&quot;14&quot; width=&quot;150&quot; height=&quot;50&quot; rx=&quot;6&quot; fill=&quot;rgba(34,57,94,0.08)&quot; stroke=&quot;#22395E&quot; strokeWidth=&quot;1.5&quot; /&gt;&#10;          &lt;text x=&quot;481&quot; y=&quot;44&quot; textAnchor=&quot;middle&quot; fontSize=&quot;14&quot; fontWeight=&quot;bold&quot; fill=&quot;#172133&quot;&gt;house ×1664&lt;/text&gt;&#10;          &lt;line x1=&quot;285&quot; y1=&quot;64&quot; x2=&quot;285&quot; y2=&quot;104&quot; stroke=&quot;#BD9B56&quot; strokeWidth=&quot;1.5&quot; /&gt;&#10;          &lt;rect x=&quot;210&quot; y=&quot;108&quot; width=&quot;150&quot; height=&quot;50&quot; rx=&quot;6&quot; fill=&quot;rgba(189,155,86,0.10)&quot; stroke=&quot;#BD9B56&quot; strokeWidth=&quot;1.5&quot; /&gt;&#10;          &lt;text x=&quot;285&quot; y=&quot;138&quot; textAnchor=&quot;middle&quot; fontSize=&quot;14&quot; fontWeight=&quot;bold&quot; fill=&quot;#172133&quot;&gt;user ×275&lt;/text&gt;&#10;          &lt;line x1=&quot;210&quot; y1=&quot;133&quot; x2=&quot;164&quot; y2=&quot;133&quot; stroke=&quot;#BD9B56&quot; strokeWidth=&quot;1.5&quot; /&gt;&#10;          &lt;rect x=&quot;14&quot; y=&quot;108&quot; width=&quot;150&quot; height=&quot;50&quot; rx=&quot;6&quot; fill=&quot;rgba(189,155,86,0.10)&quot; stroke=&quot;#BD9B56&quot; strokeWidth=&quot;1.5&quot; /&gt;&#10;          &lt;text x=&quot;89&quot; y=&quot;138&quot; textAnchor=&quot;middle&quot; fontSize=&quot;14&quot; fontWeight=&quot;bold&quot; fill=&quot;#172133&quot;&gt;house_binding&lt;/text&gt;&#10;          &lt;line x1=&quot;285&quot; y1=&quot;158&quot; x2=&quot;285&quot; y2=&quot;198&quot; stroke=&quot;#BD9B56&quot; strokeWidth=&quot;1.5&quot; /&gt;&#10;          &lt;rect x=&quot;210&quot; y=&quot;202&quot; width=&quot;150&quot; height=&quot;50&quot; rx=&quot;6&quot; fill=&quot;rgba(34,57,94,0.08)&quot; stroke=&quot;#22395E&quot; strokeWidth=&quot;1.5&quot; /&gt;&#10;          &lt;text x=&quot;285&quot; y=&quot;232&quot; textAnchor=&quot;middle&quot; fontSize=&quot;14&quot; fontWeight=&quot;bold&quot; fill=&quot;#172133&quot;&gt;worker ×75&lt;/text&gt;&#10;          &lt;line x1=&quot;285&quot; y1=&quot;252&quot; x2=&quot;285&quot; y2=&quot;292&quot; stroke=&quot;#BD9B56&quot; strokeWidth=&quot;1.5&quot; /&gt;&#10;          &lt;rect x=&quot;160&quot; y=&quot;296&quot; width=&quot;130&quot; height=&quot;50&quot; rx=&quot;6&quot; fill=&quot;rgba(34,57,94,0.08)&quot; stroke=&quot;#22395E&quot; strokeWidth=&quot;1.5&quot; /&gt;&#10;          &lt;text x=&quot;225&quot; y=&quot;326&quot; textAnchor=&quot;middle&quot; fontSize=&quot;13&quot; fontWeight=&quot;bold&quot; fill=&quot;#172133&quot;&gt;repair_order&lt;/text&gt;&#10;          &lt;rect x=&quot;306&quot; y=&quot;296&quot; width=&quot;130&quot; height=&quot;50&quot; rx=&quot;6&quot; fill=&quot;rgba(34,57,94,0.08)&quot; stroke=&quot;#22395E&quot; strokeWidth=&quot;1.5&quot; /&gt;&#10;          &lt;text x=&quot;371&quot; y=&quot;326&quot; textAnchor=&quot;middle&quot; fontSize=&quot;13&quot; fontWeight=&quot;bold&quot; fill=&quot;#172133&quot;&gt;fee_bill ×746&lt;/text&gt;&#10;          &lt;line x1=&quot;225&quot; y1=&quot;346&quot; x2=&quot;225&quot; y2=&quot;386&quot; stroke=&quot;#BD9B56&quot; strokeWidth=&quot;1.5&quot; /&gt;&#10;          &lt;rect x=&quot;160&quot; y=&quot;390&quot; width=&quot;130&quot; height=&quot;50&quot; rx=&quot;6&quot; fill=&quot;rgba(34,57,94,0.08)&quot; stroke=&quot;#22395E&quot; strokeWidth=&quot;1.5&quot; /&gt;&#10;          &lt;text x=&quot;225&quot; y=&quot;420&quot; textAnchor=&quot;middle&quot; fontSize=&quot;13&quot; fontWeight=&quot;bold&quot; fill=&quot;#172133&quot;&gt;notice ×24&lt;/text&gt;&#10;          &lt;rect x=&quot;306&quot; y=&quot;390&quot; width=&quot;130&quot; height=&quot;50&quot; rx=&quot;6&quot; fill=&quot;#172133&quot; stroke=&quot;#BD9B56&quot; strokeWidth=&quot;1.5&quot; /&gt;&#10;          &lt;text x=&quot;371&quot; y=&quot;416&quot; textAnchor=&quot;middle&quot; fontSize=&quot;12&quot; fontWeight=&quot;bold&quot; fill=&quot;#BD9B56&quot;&gt;knowledge&lt;/text&gt;&#10;          &lt;text x=&quot;371&quot; y=&quot;434&quot; textAnchor=&quot;middle&quot; fontSize=&quot;10&quot; fill=&quot;#FBFCFA&quot;&gt;document + chunk&lt;/text&gt;&#10;        &lt;/g&gt;&#10;      &lt;/svg&gt;&#10;    &lt;/div&gt;&#10;  &lt;/div&gt;&#10;  &lt;div style={{ flexShrink: 0, height: 40, display: 'flex', alignItems: 'flex-end', justifyContent: 'space-between' }}&gt;&#10;    &lt;span style={{ color: '#BD9B56', fontSize: 12, letterSpacing: '0.1em' }}&gt;云溪花园 · 智慧社区&lt;/span&gt;&#10;    &lt;span style={{ color: '#a09b8c', fontSize: 12 }}&gt;07 / 15&lt;/span&gt;&#10;  &lt;/div&gt;&#10;&lt;/Slide&gt;"/>
         <p:cNvGrpSpPr/>
         <p:nvPr/>
       </p:nvGrpSpPr>
@@ -13640,7 +14095,7 @@
       </p:grpSpPr>
       <p:sp>
         <p:nvSpPr>
-          <p:cNvPr id="301" name=""/>
+          <p:cNvPr id="305" name=""/>
           <p:cNvSpPr/>
           <p:nvPr/>
         </p:nvSpPr>
@@ -13664,7 +14119,7 @@
       </p:sp>
       <p:sp>
         <p:nvSpPr>
-          <p:cNvPr id="302" name="" descr="{&quot;isTemplate&quot;:true,&quot;type&quot;:&quot;text&quot;}"/>
+          <p:cNvPr id="306" name="" descr="{&quot;isTemplate&quot;:true,&quot;type&quot;:&quot;text&quot;}"/>
           <p:cNvSpPr txBox="1"/>
           <p:nvPr/>
         </p:nvSpPr>
@@ -13709,7 +14164,7 @@
       </p:sp>
       <p:sp>
         <p:nvSpPr>
-          <p:cNvPr id="303" name="" descr="{&quot;isTemplate&quot;:true,&quot;type&quot;:&quot;text&quot;}"/>
+          <p:cNvPr id="307" name="" descr="{&quot;isTemplate&quot;:true,&quot;type&quot;:&quot;text&quot;}"/>
           <p:cNvSpPr txBox="1"/>
           <p:nvPr/>
         </p:nvSpPr>
@@ -13764,7 +14219,7 @@
       </p:sp>
       <p:sp>
         <p:nvSpPr>
-          <p:cNvPr id="304" name="" descr="{&quot;isTemplate&quot;:true,&quot;type&quot;:&quot;text&quot;}"/>
+          <p:cNvPr id="308" name="" descr="{&quot;isTemplate&quot;:true,&quot;type&quot;:&quot;text&quot;}"/>
           <p:cNvSpPr txBox="1"/>
           <p:nvPr/>
         </p:nvSpPr>
@@ -13819,7 +14274,7 @@
       </p:sp>
       <p:sp>
         <p:nvSpPr>
-          <p:cNvPr id="305" name=""/>
+          <p:cNvPr id="309" name=""/>
           <p:cNvSpPr/>
           <p:nvPr/>
         </p:nvSpPr>
@@ -13853,7 +14308,7 @@
       </p:sp>
       <p:sp>
         <p:nvSpPr>
-          <p:cNvPr id="306" name="" descr="{&quot;isTemplate&quot;:true,&quot;type&quot;:&quot;text&quot;}"/>
+          <p:cNvPr id="310" name="" descr="{&quot;isTemplate&quot;:true,&quot;type&quot;:&quot;text&quot;}"/>
           <p:cNvSpPr txBox="1"/>
           <p:nvPr/>
         </p:nvSpPr>
@@ -13888,7 +14343,7 @@
       </p:sp>
       <p:sp>
         <p:nvSpPr>
-          <p:cNvPr id="307" name="" descr="{&quot;isTemplate&quot;:true,&quot;type&quot;:&quot;text&quot;}"/>
+          <p:cNvPr id="311" name="" descr="{&quot;isTemplate&quot;:true,&quot;type&quot;:&quot;text&quot;}"/>
           <p:cNvSpPr txBox="1"/>
           <p:nvPr/>
         </p:nvSpPr>
@@ -13909,7 +14364,7 @@
       </p:sp>
       <p:sp>
         <p:nvSpPr>
-          <p:cNvPr id="308" name="" descr="{&quot;isTemplate&quot;:true,&quot;type&quot;:&quot;text&quot;}"/>
+          <p:cNvPr id="312" name="" descr="{&quot;isTemplate&quot;:true,&quot;type&quot;:&quot;text&quot;}"/>
           <p:cNvSpPr txBox="1"/>
           <p:nvPr/>
         </p:nvSpPr>
@@ -13930,7 +14385,7 @@
       </p:sp>
       <p:sp>
         <p:nvSpPr>
-          <p:cNvPr id="309" name="" descr="{&quot;isTemplate&quot;:true,&quot;type&quot;:&quot;text&quot;}"/>
+          <p:cNvPr id="313" name="" descr="{&quot;isTemplate&quot;:true,&quot;type&quot;:&quot;text&quot;}"/>
           <p:cNvSpPr txBox="1"/>
           <p:nvPr/>
         </p:nvSpPr>
@@ -13951,7 +14406,7 @@
       </p:sp>
       <p:sp>
         <p:nvSpPr>
-          <p:cNvPr id="310" name="" descr="{&quot;isTemplate&quot;:true,&quot;type&quot;:&quot;text&quot;}"/>
+          <p:cNvPr id="314" name="" descr="{&quot;isTemplate&quot;:true,&quot;type&quot;:&quot;text&quot;}"/>
           <p:cNvSpPr txBox="1"/>
           <p:nvPr/>
         </p:nvSpPr>
@@ -13972,7 +14427,7 @@
       </p:sp>
       <p:sp>
         <p:nvSpPr>
-          <p:cNvPr id="311" name="" descr="{&quot;isTemplate&quot;:true,&quot;type&quot;:&quot;text&quot;}"/>
+          <p:cNvPr id="315" name="" descr="{&quot;isTemplate&quot;:true,&quot;type&quot;:&quot;text&quot;}"/>
           <p:cNvSpPr txBox="1"/>
           <p:nvPr/>
         </p:nvSpPr>
@@ -13993,7 +14448,7 @@
       </p:sp>
       <p:sp>
         <p:nvSpPr>
-          <p:cNvPr id="312" name="" descr="{&quot;isTemplate&quot;:true,&quot;type&quot;:&quot;text&quot;}"/>
+          <p:cNvPr id="316" name="" descr="{&quot;isTemplate&quot;:true,&quot;type&quot;:&quot;text&quot;}"/>
           <p:cNvSpPr txBox="1"/>
           <p:nvPr/>
         </p:nvSpPr>
@@ -14014,7 +14469,7 @@
       </p:sp>
       <p:sp>
         <p:nvSpPr>
-          <p:cNvPr id="313" name="" descr="{&quot;isTemplate&quot;:true,&quot;type&quot;:&quot;text&quot;}"/>
+          <p:cNvPr id="317" name="" descr="{&quot;isTemplate&quot;:true,&quot;type&quot;:&quot;text&quot;}"/>
           <p:cNvSpPr txBox="1"/>
           <p:nvPr/>
         </p:nvSpPr>
@@ -14035,7 +14490,7 @@
       </p:sp>
       <p:sp>
         <p:nvSpPr>
-          <p:cNvPr id="314" name="" descr="{&quot;isTemplate&quot;:true,&quot;type&quot;:&quot;text&quot;}"/>
+          <p:cNvPr id="318" name="" descr="{&quot;isTemplate&quot;:true,&quot;type&quot;:&quot;text&quot;}"/>
           <p:cNvSpPr txBox="1"/>
           <p:nvPr/>
         </p:nvSpPr>
@@ -14056,7 +14511,7 @@
       </p:sp>
       <p:sp>
         <p:nvSpPr>
-          <p:cNvPr id="315" name="" descr="{&quot;isTemplate&quot;:true,&quot;type&quot;:&quot;text&quot;}"/>
+          <p:cNvPr id="319" name="" descr="{&quot;isTemplate&quot;:true,&quot;type&quot;:&quot;text&quot;}"/>
           <p:cNvSpPr txBox="1"/>
           <p:nvPr/>
         </p:nvSpPr>
@@ -14077,7 +14532,7 @@
       </p:sp>
       <p:sp>
         <p:nvSpPr>
-          <p:cNvPr id="316" name="" descr="{&quot;isTemplate&quot;:true,&quot;type&quot;:&quot;text&quot;}"/>
+          <p:cNvPr id="320" name="" descr="{&quot;isTemplate&quot;:true,&quot;type&quot;:&quot;text&quot;}"/>
           <p:cNvSpPr txBox="1"/>
           <p:nvPr/>
         </p:nvSpPr>
@@ -14098,7 +14553,7 @@
       </p:sp>
       <p:sp>
         <p:nvSpPr>
-          <p:cNvPr id="317" name="" descr="{&quot;isTemplate&quot;:true,&quot;type&quot;:&quot;text&quot;}"/>
+          <p:cNvPr id="321" name="" descr="{&quot;isTemplate&quot;:true,&quot;type&quot;:&quot;text&quot;}"/>
           <p:cNvSpPr txBox="1"/>
           <p:nvPr/>
         </p:nvSpPr>
@@ -14119,7 +14574,7 @@
       </p:sp>
       <p:sp>
         <p:nvSpPr>
-          <p:cNvPr id="318" name="" descr="{&quot;isTemplate&quot;:true,&quot;type&quot;:&quot;text&quot;}"/>
+          <p:cNvPr id="322" name="" descr="{&quot;isTemplate&quot;:true,&quot;type&quot;:&quot;text&quot;}"/>
           <p:cNvSpPr txBox="1"/>
           <p:nvPr/>
         </p:nvSpPr>
@@ -14154,7 +14609,7 @@
       </p:sp>
       <p:sp>
         <p:nvSpPr>
-          <p:cNvPr id="319" name=""/>
+          <p:cNvPr id="323" name=""/>
           <p:cNvSpPr/>
           <p:nvPr/>
         </p:nvSpPr>
@@ -14187,7 +14642,7 @@
       </p:sp>
       <p:pic>
         <p:nvPicPr>
-          <p:cNvPr id="320" name=""/>
+          <p:cNvPr id="324" name=""/>
           <p:cNvPicPr>
             <a:picLocks noChangeAspect="1"/>
           </p:cNvPicPr>
@@ -14218,7 +14673,7 @@
       </p:pic>
       <p:sp>
         <p:nvSpPr>
-          <p:cNvPr id="321" name="" descr="{&quot;isTemplate&quot;:true,&quot;type&quot;:&quot;text&quot;}"/>
+          <p:cNvPr id="325" name="" descr="{&quot;isTemplate&quot;:true,&quot;type&quot;:&quot;text&quot;}"/>
           <p:cNvSpPr txBox="1"/>
           <p:nvPr/>
         </p:nvSpPr>
@@ -14273,7 +14728,7 @@
       </p:sp>
       <p:sp>
         <p:nvSpPr>
-          <p:cNvPr id="322" name="" descr="{&quot;isTemplate&quot;:true,&quot;type&quot;:&quot;text&quot;}"/>
+          <p:cNvPr id="326" name="" descr="{&quot;isTemplate&quot;:true,&quot;type&quot;:&quot;text&quot;}"/>
           <p:cNvSpPr txBox="1"/>
           <p:nvPr/>
         </p:nvSpPr>
@@ -14316,7 +14771,7 @@
   <p:cSld>
     <p:spTree>
       <p:nvGrpSpPr>
-        <p:cNvPr id="323" name="" descr="&lt;Slide style={{ width: '1280px', height: '720px', background: '#FBFCFA', position: 'relative', padding: '40px 64px', boxSizing: 'border-box', display: 'flex', flexDirection: 'column' }}&gt;&#10;  &lt;div style={{ flexShrink: 0 }}&gt;&#10;    &lt;div style={{ color: '#BD9B56', fontSize: 13, letterSpacing: '0.25em', marginBottom: 8 }}&gt;02 · 技术构建过程&lt;/div&gt;&#10;    &lt;h2 style={{ fontSize: 30, fontWeight: 'bold', color: '#172133', margin: 0, lineHeight: 1.3 }}&gt;后端分层 + 前端三端一体&lt;/h2&gt;&#10;  &lt;/div&gt;&#10;  &lt;div style={{ flex: 1, display: 'flex', alignItems: 'center', gap: 32 }}&gt;&#10;    &lt;div style={{ flex: 1, display: 'flex', flexDirection: 'column', gap: 16 }}&gt;&#10;      &lt;div style={{ background: '#fff', borderRadius: 10, padding: '18px 22px', boxShadow: '0 4px 16px rgba(23,33,51,0.06)' }}&gt;&#10;        &lt;div style={{ fontSize: 17, fontWeight: 'bold', color: '#172133', marginBottom: 6 }}&gt;后端：FastAPI 三层架构&lt;/div&gt;&#10;        &lt;p style={{ fontSize: 14, color: '#5F5E5A', margin: 0, lineHeight: 1.6 }}&gt;API 路由层 → Service 业务层 → Repository 数据层。业务与数据解耦，AI 逻辑不混入业务代码。&lt;/p&gt;&#10;      &lt;/div&gt;&#10;      &lt;div style={{ background: '#fff', borderRadius: 10, padding: '18px 22px', boxShadow: '0 4px 16px rgba(23,33,51,0.06)' }}&gt;&#10;        &lt;div style={{ fontSize: 17, fontWeight: 'bold', color: '#172133', marginBottom: 6 }}&gt;派单算法&lt;/div&gt;&#10;        &lt;p style={{ fontSize: 14, color: '#5F5E5A', margin: 0, lineHeight: 1.6 }}&gt;按「技能匹配 + 在岗状态 + 工号升序」自动选择维修师傅，无需人工指派，报修提交即自动派单。&lt;/p&gt;&#10;      &lt;/div&gt;&#10;      &lt;div style={{ background: '#fff', borderRadius: 10, padding: '18px 22px', boxShadow: '0 4px 16px rgba(23,33,51,0.06)' }}&gt;&#10;        &lt;div style={{ fontSize: 17, fontWeight: 'bold', color: '#172133', marginBottom: 6 }}&gt;消息通知&lt;/div&gt;&#10;        &lt;p style={{ fontSize: 14, color: '#5F5E5A', margin: 0, lineHeight: 1.6 }}&gt;派单、完成、答复、巡检异常等事件全链路实时通知相关角色，保证业务协同不遗漏。&lt;/p&gt;&#10;      &lt;/div&gt;&#10;    &lt;/div&gt;&#10;    &lt;div style={{ flex: 1, background: 'linear-gradient(135deg, #172133 0%, #22395E 100%)', borderRadius: 12, padding: '26px 26px', color: '#FBFCFA' }}&gt;&#10;      &lt;div style={{ color: '#BD9B56', fontSize: 13, letterSpacing: '0.25em', marginBottom: 18 }}&gt;FRONTEND · 三端&lt;/div&gt;&#10;      &lt;div style={{ display: 'flex', flexDirection: 'column', gap: 14 }}&gt;&#10;        &lt;div style={{ display: 'flex', alignItems: 'center', gap: 12, padding: '12px 16px', background: 'rgba(189,155,86,0.10)', borderRadius: 8 }}&gt;&#10;          &lt;span style={{ color: '#BD9B56', fontSize: 17, fontWeight: 'bold', minWidth: 64 }}&gt;业主端&lt;/span&gt;&#10;          &lt;span style={{ fontSize: 13, color: 'rgba(251,252,250,0.85)' }}&gt;AI 助手 · 报修 · 缴费 · 公告 · 问题上报&lt;/span&gt;&#10;        &lt;/div&gt;&#10;        &lt;div style={{ display: 'flex', alignItems: 'center', gap: 12, padding: '12px 16px', background: 'rgba(189,155,86,0.10)', borderRadius: 8 }}&gt;&#10;          &lt;span style={{ color: '#BD9B56', fontSize: 17, fontWeight: 'bold', minWidth: 64 }}&gt;物业端&lt;/span&gt;&#10;          &lt;span style={{ fontSize: 13, color: 'rgba(251,252,250,0.85)' }}&gt;工单管理 · 巡检 · 数据看板 · 知识审核&lt;/span&gt;&#10;        &lt;/div&gt;&#10;        &lt;div style={{ display: 'flex', alignItems: 'center', gap: 12, padding: '12px 16px', background: 'rgba(189,155,86,0.10)', borderRadius: 8 }}&gt;&#10;          &lt;span style={{ color: '#BD9B56', fontSize: 17, fontWeight: 'bold', minWidth: 64 }}&gt;维修端&lt;/span&gt;&#10;          &lt;span style={{ fontSize: 13, color: 'rgba(251,252,250,0.85)' }}&gt;接单 · 处理 · 消息 · 巡检任务&lt;/span&gt;&#10;        &lt;/div&gt;&#10;      &lt;/div&gt;&#10;      &lt;div style={{ marginTop: 20, paddingTop: 18, borderTop: '1px solid rgba(189,155,86,0.3)' }}&gt;&#10;        &lt;div style={{ fontSize: 13, color: 'rgba(251,252,250,0.8)', lineHeight: 1.7 }}&gt;&#10;          React + TypeScript + Tailwind&lt;br/&gt;JWT 鉴权 · 角色路由 · 支持 PWA 安装&lt;br/&gt;后端 113 测试 + 前端 30 测试全绿&#10;        &lt;/div&gt;&#10;      &lt;/div&gt;&#10;    &lt;/div&gt;&#10;  &lt;/div&gt;&#10;  &lt;div style={{ flexShrink: 0, height: 40, display: 'flex', alignItems: 'flex-end', justifyContent: 'space-between' }}&gt;&#10;    &lt;span style={{ color: '#BD9B56', fontSize: 12, letterSpacing: '0.1em' }}&gt;云溪花园 · 智慧社区&lt;/span&gt;&#10;    &lt;span style={{ color: '#a09b8c', fontSize: 12 }}&gt;08 / 15&lt;/span&gt;&#10;  &lt;/div&gt;&#10;&lt;/Slide&gt;"/>
+        <p:cNvPr id="327" name="" descr="&lt;Slide style={{ width: '1280px', height: '720px', background: '#FBFCFA', position: 'relative', padding: '40px 64px', boxSizing: 'border-box', display: 'flex', flexDirection: 'column' }}&gt;&#10;  &lt;div style={{ flexShrink: 0 }}&gt;&#10;    &lt;div style={{ color: '#BD9B56', fontSize: 13, letterSpacing: '0.25em', marginBottom: 8 }}&gt;02 · 技术构建过程&lt;/div&gt;&#10;    &lt;h2 style={{ fontSize: 30, fontWeight: 'bold', color: '#172133', margin: 0, lineHeight: 1.3 }}&gt;后端分层 + 前端三端一体&lt;/h2&gt;&#10;  &lt;/div&gt;&#10;  &lt;div style={{ flex: 1, display: 'flex', alignItems: 'center', gap: 32 }}&gt;&#10;    &lt;div style={{ flex: 1, display: 'flex', flexDirection: 'column', gap: 16 }}&gt;&#10;      &lt;div style={{ background: '#fff', borderRadius: 10, padding: '18px 22px', boxShadow: '0 4px 16px rgba(23,33,51,0.06)' }}&gt;&#10;        &lt;div style={{ fontSize: 17, fontWeight: 'bold', color: '#172133', marginBottom: 6 }}&gt;后端：FastAPI 三层架构&lt;/div&gt;&#10;        &lt;p style={{ fontSize: 14, color: '#5F5E5A', margin: 0, lineHeight: 1.6 }}&gt;API 路由层 → Service 业务层 → Repository 数据层。业务与数据解耦，AI 逻辑不混入业务代码。&lt;/p&gt;&#10;      &lt;/div&gt;&#10;      &lt;div style={{ background: '#fff', borderRadius: 10, padding: '18px 22px', boxShadow: '0 4px 16px rgba(23,33,51,0.06)' }}&gt;&#10;        &lt;div style={{ fontSize: 17, fontWeight: 'bold', color: '#172133', marginBottom: 6 }}&gt;派单算法&lt;/div&gt;&#10;        &lt;p style={{ fontSize: 14, color: '#5F5E5A', margin: 0, lineHeight: 1.6 }}&gt;按「技能匹配 + 在岗状态 + 工号升序」自动选择维修师傅，无需人工指派，报修提交即自动派单。&lt;/p&gt;&#10;      &lt;/div&gt;&#10;      &lt;div style={{ background: '#fff', borderRadius: 10, padding: '18px 22px', boxShadow: '0 4px 16px rgba(23,33,51,0.06)' }}&gt;&#10;        &lt;div style={{ fontSize: 17, fontWeight: 'bold', color: '#172133', marginBottom: 6 }}&gt;消息通知&lt;/div&gt;&#10;        &lt;p style={{ fontSize: 14, color: '#5F5E5A', margin: 0, lineHeight: 1.6 }}&gt;派单、完成、答复、巡检异常等事件全链路实时通知相关角色，保证业务协同不遗漏。&lt;/p&gt;&#10;      &lt;/div&gt;&#10;    &lt;/div&gt;&#10;    &lt;div style={{ flex: 1, background: 'linear-gradient(135deg, #172133 0%, #22395E 100%)', borderRadius: 12, padding: '26px 26px', color: '#FBFCFA' }}&gt;&#10;      &lt;div style={{ color: '#BD9B56', fontSize: 13, letterSpacing: '0.25em', marginBottom: 18 }}&gt;FRONTEND · 三端&lt;/div&gt;&#10;      &lt;div style={{ display: 'flex', flexDirection: 'column', gap: 14 }}&gt;&#10;        &lt;div style={{ display: 'flex', alignItems: 'center', gap: 12, padding: '12px 16px', background: 'rgba(189,155,86,0.10)', borderRadius: 8 }}&gt;&#10;          &lt;span style={{ color: '#BD9B56', fontSize: 17, fontWeight: 'bold', minWidth: 64 }}&gt;业主端&lt;/span&gt;&#10;          &lt;span style={{ fontSize: 13, color: 'rgba(251,252,250,0.85)' }}&gt;AI 助手 · 报修 · 缴费 · 公告 · 问题上报&lt;/span&gt;&#10;        &lt;/div&gt;&#10;        &lt;div style={{ display: 'flex', alignItems: 'center', gap: 12, padding: '12px 16px', background: 'rgba(189,155,86,0.10)', borderRadius: 8 }}&gt;&#10;          &lt;span style={{ color: '#BD9B56', fontSize: 17, fontWeight: 'bold', minWidth: 64 }}&gt;物业端&lt;/span&gt;&#10;          &lt;span style={{ fontSize: 13, color: 'rgba(251,252,250,0.85)' }}&gt;工单管理 · 巡检 · 数据看板 · 知识审核&lt;/span&gt;&#10;        &lt;/div&gt;&#10;        &lt;div style={{ display: 'flex', alignItems: 'center', gap: 12, padding: '12px 16px', background: 'rgba(189,155,86,0.10)', borderRadius: 8 }}&gt;&#10;          &lt;span style={{ color: '#BD9B56', fontSize: 17, fontWeight: 'bold', minWidth: 64 }}&gt;维修端&lt;/span&gt;&#10;          &lt;span style={{ fontSize: 13, color: 'rgba(251,252,250,0.85)' }}&gt;接单 · 处理 · 消息 · 巡检任务&lt;/span&gt;&#10;        &lt;/div&gt;&#10;      &lt;/div&gt;&#10;      &lt;div style={{ marginTop: 20, paddingTop: 18, borderTop: '1px solid rgba(189,155,86,0.3)' }}&gt;&#10;        &lt;div style={{ fontSize: 13, color: 'rgba(251,252,250,0.8)', lineHeight: 1.7 }}&gt;&#10;          React + TypeScript + Tailwind&lt;br/&gt;JWT 鉴权 · 角色路由 · 支持 PWA 安装&lt;br/&gt;后端 113 测试 + 前端 30 测试全绿&#10;        &lt;/div&gt;&#10;      &lt;/div&gt;&#10;    &lt;/div&gt;&#10;  &lt;/div&gt;&#10;  &lt;div style={{ flexShrink: 0, height: 40, display: 'flex', alignItems: 'flex-end', justifyContent: 'space-between' }}&gt;&#10;    &lt;span style={{ color: '#BD9B56', fontSize: 12, letterSpacing: '0.1em' }}&gt;云溪花园 · 智慧社区&lt;/span&gt;&#10;    &lt;span style={{ color: '#a09b8c', fontSize: 12 }}&gt;08 / 15&lt;/span&gt;&#10;  &lt;/div&gt;&#10;&lt;/Slide&gt;"/>
         <p:cNvGrpSpPr/>
         <p:nvPr/>
       </p:nvGrpSpPr>
@@ -14330,7 +14785,7 @@
       </p:grpSpPr>
       <p:sp>
         <p:nvSpPr>
-          <p:cNvPr id="324" name=""/>
+          <p:cNvPr id="328" name=""/>
           <p:cNvSpPr/>
           <p:nvPr/>
         </p:nvSpPr>
@@ -14354,7 +14809,7 @@
       </p:sp>
       <p:sp>
         <p:nvSpPr>
-          <p:cNvPr id="325" name="" descr="{&quot;isTemplate&quot;:true,&quot;type&quot;:&quot;text&quot;}"/>
+          <p:cNvPr id="329" name="" descr="{&quot;isTemplate&quot;:true,&quot;type&quot;:&quot;text&quot;}"/>
           <p:cNvSpPr txBox="1"/>
           <p:nvPr/>
         </p:nvSpPr>
@@ -14399,7 +14854,7 @@
       </p:sp>
       <p:sp>
         <p:nvSpPr>
-          <p:cNvPr id="326" name="" descr="{&quot;isTemplate&quot;:true,&quot;type&quot;:&quot;text&quot;}"/>
+          <p:cNvPr id="330" name="" descr="{&quot;isTemplate&quot;:true,&quot;type&quot;:&quot;text&quot;}"/>
           <p:cNvSpPr txBox="1"/>
           <p:nvPr/>
         </p:nvSpPr>
@@ -14454,7 +14909,7 @@
       </p:sp>
       <p:sp>
         <p:nvSpPr>
-          <p:cNvPr id="327" name=""/>
+          <p:cNvPr id="331" name=""/>
           <p:cNvSpPr/>
           <p:nvPr/>
         </p:nvSpPr>
@@ -14487,7 +14942,7 @@
       </p:sp>
       <p:sp>
         <p:nvSpPr>
-          <p:cNvPr id="328" name="" descr="{&quot;isTemplate&quot;:true,&quot;type&quot;:&quot;text&quot;}"/>
+          <p:cNvPr id="332" name="" descr="{&quot;isTemplate&quot;:true,&quot;type&quot;:&quot;text&quot;}"/>
           <p:cNvSpPr txBox="1"/>
           <p:nvPr/>
         </p:nvSpPr>
@@ -14542,7 +14997,7 @@
       </p:sp>
       <p:sp>
         <p:nvSpPr>
-          <p:cNvPr id="329" name="" descr="{&quot;isTemplate&quot;:true,&quot;type&quot;:&quot;text&quot;}"/>
+          <p:cNvPr id="333" name="" descr="{&quot;isTemplate&quot;:true,&quot;type&quot;:&quot;text&quot;}"/>
           <p:cNvSpPr txBox="1"/>
           <p:nvPr/>
         </p:nvSpPr>
@@ -14649,7 +15104,7 @@
       </p:sp>
       <p:sp>
         <p:nvSpPr>
-          <p:cNvPr id="330" name=""/>
+          <p:cNvPr id="334" name=""/>
           <p:cNvSpPr/>
           <p:nvPr/>
         </p:nvSpPr>
@@ -14682,7 +15137,7 @@
       </p:sp>
       <p:sp>
         <p:nvSpPr>
-          <p:cNvPr id="331" name="" descr="{&quot;isTemplate&quot;:true,&quot;type&quot;:&quot;text&quot;}"/>
+          <p:cNvPr id="335" name="" descr="{&quot;isTemplate&quot;:true,&quot;type&quot;:&quot;text&quot;}"/>
           <p:cNvSpPr txBox="1"/>
           <p:nvPr/>
         </p:nvSpPr>
@@ -14717,7 +15172,7 @@
       </p:sp>
       <p:sp>
         <p:nvSpPr>
-          <p:cNvPr id="332" name="" descr="{&quot;isTemplate&quot;:true,&quot;type&quot;:&quot;text&quot;}"/>
+          <p:cNvPr id="336" name="" descr="{&quot;isTemplate&quot;:true,&quot;type&quot;:&quot;text&quot;}"/>
           <p:cNvSpPr txBox="1"/>
           <p:nvPr/>
         </p:nvSpPr>
@@ -14794,7 +15249,7 @@
       </p:sp>
       <p:sp>
         <p:nvSpPr>
-          <p:cNvPr id="333" name=""/>
+          <p:cNvPr id="337" name=""/>
           <p:cNvSpPr/>
           <p:nvPr/>
         </p:nvSpPr>
@@ -14827,7 +15282,7 @@
       </p:sp>
       <p:sp>
         <p:nvSpPr>
-          <p:cNvPr id="334" name="" descr="{&quot;isTemplate&quot;:true,&quot;type&quot;:&quot;text&quot;}"/>
+          <p:cNvPr id="338" name="" descr="{&quot;isTemplate&quot;:true,&quot;type&quot;:&quot;text&quot;}"/>
           <p:cNvSpPr txBox="1"/>
           <p:nvPr/>
         </p:nvSpPr>
@@ -14862,7 +15317,7 @@
       </p:sp>
       <p:sp>
         <p:nvSpPr>
-          <p:cNvPr id="335" name="" descr="{&quot;isTemplate&quot;:true,&quot;type&quot;:&quot;text&quot;}"/>
+          <p:cNvPr id="339" name="" descr="{&quot;isTemplate&quot;:true,&quot;type&quot;:&quot;text&quot;}"/>
           <p:cNvSpPr txBox="1"/>
           <p:nvPr/>
         </p:nvSpPr>
@@ -14899,7 +15354,7 @@
       </p:sp>
       <p:sp>
         <p:nvSpPr>
-          <p:cNvPr id="336" name=""/>
+          <p:cNvPr id="340" name=""/>
           <p:cNvSpPr/>
           <p:nvPr/>
         </p:nvSpPr>
@@ -14933,7 +15388,7 @@
       </p:sp>
       <p:sp>
         <p:nvSpPr>
-          <p:cNvPr id="337" name="" descr="{&quot;isTemplate&quot;:true,&quot;type&quot;:&quot;text&quot;}"/>
+          <p:cNvPr id="341" name="" descr="{&quot;isTemplate&quot;:true,&quot;type&quot;:&quot;text&quot;}"/>
           <p:cNvSpPr txBox="1"/>
           <p:nvPr/>
         </p:nvSpPr>
@@ -14978,7 +15433,7 @@
       </p:sp>
       <p:sp>
         <p:nvSpPr>
-          <p:cNvPr id="338" name=""/>
+          <p:cNvPr id="342" name=""/>
           <p:cNvSpPr/>
           <p:nvPr/>
         </p:nvSpPr>
@@ -15006,7 +15461,7 @@
       </p:sp>
       <p:sp>
         <p:nvSpPr>
-          <p:cNvPr id="339" name="" descr="{&quot;isTemplate&quot;:true,&quot;type&quot;:&quot;text&quot;}"/>
+          <p:cNvPr id="343" name="" descr="{&quot;isTemplate&quot;:true,&quot;type&quot;:&quot;text&quot;}"/>
           <p:cNvSpPr txBox="1"/>
           <p:nvPr/>
         </p:nvSpPr>
@@ -15041,7 +15496,7 @@
       </p:sp>
       <p:sp>
         <p:nvSpPr>
-          <p:cNvPr id="340" name="" descr="{&quot;isTemplate&quot;:true,&quot;type&quot;:&quot;text&quot;}"/>
+          <p:cNvPr id="344" name="" descr="{&quot;isTemplate&quot;:true,&quot;type&quot;:&quot;text&quot;}"/>
           <p:cNvSpPr txBox="1"/>
           <p:nvPr/>
         </p:nvSpPr>
@@ -15186,7 +15641,7 @@
       </p:sp>
       <p:sp>
         <p:nvSpPr>
-          <p:cNvPr id="341" name=""/>
+          <p:cNvPr id="345" name=""/>
           <p:cNvSpPr/>
           <p:nvPr/>
         </p:nvSpPr>
@@ -15214,7 +15669,7 @@
       </p:sp>
       <p:sp>
         <p:nvSpPr>
-          <p:cNvPr id="342" name="" descr="{&quot;isTemplate&quot;:true,&quot;type&quot;:&quot;text&quot;}"/>
+          <p:cNvPr id="346" name="" descr="{&quot;isTemplate&quot;:true,&quot;type&quot;:&quot;text&quot;}"/>
           <p:cNvSpPr txBox="1"/>
           <p:nvPr/>
         </p:nvSpPr>
@@ -15249,7 +15704,7 @@
       </p:sp>
       <p:sp>
         <p:nvSpPr>
-          <p:cNvPr id="343" name="" descr="{&quot;isTemplate&quot;:true,&quot;type&quot;:&quot;text&quot;}"/>
+          <p:cNvPr id="347" name="" descr="{&quot;isTemplate&quot;:true,&quot;type&quot;:&quot;text&quot;}"/>
           <p:cNvSpPr txBox="1"/>
           <p:nvPr/>
         </p:nvSpPr>
@@ -15358,7 +15813,7 @@
       </p:sp>
       <p:sp>
         <p:nvSpPr>
-          <p:cNvPr id="344" name=""/>
+          <p:cNvPr id="348" name=""/>
           <p:cNvSpPr/>
           <p:nvPr/>
         </p:nvSpPr>
@@ -15386,7 +15841,7 @@
       </p:sp>
       <p:sp>
         <p:nvSpPr>
-          <p:cNvPr id="345" name="" descr="{&quot;isTemplate&quot;:true,&quot;type&quot;:&quot;text&quot;}"/>
+          <p:cNvPr id="349" name="" descr="{&quot;isTemplate&quot;:true,&quot;type&quot;:&quot;text&quot;}"/>
           <p:cNvSpPr txBox="1"/>
           <p:nvPr/>
         </p:nvSpPr>
@@ -15421,7 +15876,7 @@
       </p:sp>
       <p:sp>
         <p:nvSpPr>
-          <p:cNvPr id="346" name="" descr="{&quot;isTemplate&quot;:true,&quot;type&quot;:&quot;text&quot;}"/>
+          <p:cNvPr id="350" name="" descr="{&quot;isTemplate&quot;:true,&quot;type&quot;:&quot;text&quot;}"/>
           <p:cNvSpPr txBox="1"/>
           <p:nvPr/>
         </p:nvSpPr>
@@ -15530,7 +15985,7 @@
       </p:sp>
       <p:sp>
         <p:nvSpPr>
-          <p:cNvPr id="347" name=""/>
+          <p:cNvPr id="351" name=""/>
           <p:cNvSpPr/>
           <p:nvPr/>
         </p:nvSpPr>
@@ -15572,7 +16027,7 @@
       </p:sp>
       <p:sp>
         <p:nvSpPr>
-          <p:cNvPr id="348" name="" descr="{&quot;isTemplate&quot;:true,&quot;type&quot;:&quot;text&quot;}"/>
+          <p:cNvPr id="352" name="" descr="{&quot;isTemplate&quot;:true,&quot;type&quot;:&quot;text&quot;}"/>
           <p:cNvSpPr txBox="1"/>
           <p:nvPr/>
         </p:nvSpPr>
@@ -15593,7 +16048,7 @@
       </p:sp>
       <p:sp>
         <p:nvSpPr>
-          <p:cNvPr id="349" name="" descr="{&quot;isTemplate&quot;:true,&quot;type&quot;:&quot;text&quot;}"/>
+          <p:cNvPr id="353" name="" descr="{&quot;isTemplate&quot;:true,&quot;type&quot;:&quot;text&quot;}"/>
           <p:cNvSpPr txBox="1"/>
           <p:nvPr/>
         </p:nvSpPr>
@@ -15614,7 +16069,7 @@
       </p:sp>
       <p:sp>
         <p:nvSpPr>
-          <p:cNvPr id="350" name="" descr="{&quot;isTemplate&quot;:true,&quot;type&quot;:&quot;text&quot;}"/>
+          <p:cNvPr id="354" name="" descr="{&quot;isTemplate&quot;:true,&quot;type&quot;:&quot;text&quot;}"/>
           <p:cNvSpPr txBox="1"/>
           <p:nvPr/>
         </p:nvSpPr>
@@ -15669,7 +16124,7 @@
       </p:sp>
       <p:sp>
         <p:nvSpPr>
-          <p:cNvPr id="351" name="" descr="{&quot;isTemplate&quot;:true,&quot;type&quot;:&quot;text&quot;}"/>
+          <p:cNvPr id="355" name="" descr="{&quot;isTemplate&quot;:true,&quot;type&quot;:&quot;text&quot;}"/>
           <p:cNvSpPr txBox="1"/>
           <p:nvPr/>
         </p:nvSpPr>
@@ -15712,7 +16167,7 @@
   <p:cSld>
     <p:spTree>
       <p:nvGrpSpPr>
-        <p:cNvPr id="352" name="" descr="&lt;Slide style={{ width: '1280px', height: '720px', background: '#FBFCFA', position: 'relative', padding: '40px 64px', boxSizing: 'border-box', display: 'flex', flexDirection: 'column' }}&gt;&#10;  &lt;div style={{ flexShrink: 0 }}&gt;&#10;    &lt;div style={{ color: '#BD9B56', fontSize: 13, letterSpacing: '0.25em', marginBottom: 8 }}&gt;02 · 技术构建过程&lt;/div&gt;&#10;    &lt;h2 style={{ fontSize: 30, fontWeight: 'bold', color: '#172133', margin: 0, lineHeight: 1.3 }}&gt;AI Agent 架构：LangGraph 多智能体协作&lt;/h2&gt;&#10;  &lt;/div&gt;&#10;  &lt;div style={{ flex: 1, display: 'flex', alignItems: 'center', gap: 32 }}&gt;&#10;    &lt;div style={{ flex: '0 0 560px', background: '#fff', borderRadius: 12, padding: '22px 24px', boxShadow: '0 6px 24px rgba(23,33,51,0.08)' }}&gt;&#10;      &lt;svg width=&quot;512&quot; height=&quot;470&quot; viewBox=&quot;0 0 512 470&quot;&gt;&#10;        &lt;defs&gt;&#10;          &lt;marker id=&quot;ar9&quot; viewBox=&quot;0 0 10 10&quot; refX=&quot;9&quot; refY=&quot;5&quot; markerWidth=&quot;6&quot; markerHeight=&quot;6&quot; orient=&quot;auto&quot;&gt;&#10;            &lt;path d=&quot;M0 0L10 5L0 10z&quot; fill=&quot;#BD9B56&quot; /&gt;&#10;          &lt;/marker&gt;&#10;        &lt;/defs&gt;&#10;        &lt;g fontFamily=&quot;Inter, sans-serif&quot;&gt;&#10;          &lt;rect x=&quot;156&quot; y=&quot;14&quot; width=&quot;200&quot; height=&quot;50&quot; rx=&quot;8&quot; fill=&quot;rgba(34,57,94,0.08)&quot; stroke=&quot;#22395E&quot; strokeWidth=&quot;1.5&quot; /&gt;&#10;          &lt;text x=&quot;256&quot; y=&quot;36&quot; textAnchor=&quot;middle&quot; fontSize=&quot;13&quot; fontWeight=&quot;bold&quot; fill=&quot;#172133&quot;&gt;用户自然语言输入&lt;/text&gt;&#10;          &lt;text x=&quot;256&quot; y=&quot;54&quot; textAnchor=&quot;middle&quot; fontSize=&quot;11&quot; fill=&quot;#5F5E5A&quot;&gt;「我家厨房漏水了」&lt;/text&gt;&#10;          &lt;line x1=&quot;256&quot; y1=&quot;64&quot; x2=&quot;256&quot; y2=&quot;84&quot; stroke=&quot;#BD9B56&quot; strokeWidth=&quot;1.5&quot; markerEnd=&quot;url(#ar9)&quot; /&gt;&#10;          &lt;rect x=&quot;96&quot; y=&quot;88&quot; width=&quot;320&quot; height=&quot;64&quot; rx=&quot;8&quot; fill=&quot;rgba(34,57,94,0.12)&quot; stroke=&quot;#22395E&quot; strokeWidth=&quot;2&quot; /&gt;&#10;          &lt;text x=&quot;256&quot; y=&quot;114&quot; textAnchor=&quot;middle&quot; fontSize=&quot;13&quot; fontWeight=&quot;bold&quot; fill=&quot;#BD9B56&quot;&gt;Router Agent · 意图分类&lt;/text&gt;&#10;          &lt;text x=&quot;256&quot; y=&quot;136&quot; textAnchor=&quot;middle&quot; fontSize=&quot;11&quot; fill=&quot;#172133&quot;&gt;报修 / 费用 / 公告 / 知识 / 上报&lt;/text&gt;&#10;          &lt;line x1=&quot;256&quot; y1=&quot;152&quot; x2=&quot;256&quot; y2=&quot;172&quot; stroke=&quot;#BD9B56&quot; strokeWidth=&quot;1.5&quot; markerEnd=&quot;url(#ar9)&quot; /&gt;&#10;          &lt;rect x=&quot;96&quot; y=&quot;176&quot; width=&quot;320&quot; height=&quot;64&quot; rx=&quot;8&quot; fill=&quot;rgba(189,155,86,0.10)&quot; stroke=&quot;#BD9B56&quot; strokeWidth=&quot;1.5&quot; /&gt;&#10;          &lt;text x=&quot;256&quot; y=&quot;202&quot; textAnchor=&quot;middle&quot; fontSize=&quot;13&quot; fontWeight=&quot;bold&quot; fill=&quot;#172133&quot;&gt;领域 Agent + 多轮状态机&lt;/text&gt;&#10;          &lt;text x=&quot;256&quot; y=&quot;224&quot; textAnchor=&quot;middle&quot; fontSize=&quot;11&quot; fill=&quot;#5F5E5A&quot;&gt;报修缺「位置/类型」→ 主动反问补全&lt;/text&gt;&#10;          &lt;line x1=&quot;256&quot; y1=&quot;240&quot; x2=&quot;256&quot; y2=&quot;260&quot; stroke=&quot;#BD9B56&quot; strokeWidth=&quot;1.5&quot; markerEnd=&quot;url(#ar9)&quot; /&gt;&#10;          &lt;rect x=&quot;16&quot; y=&quot;264&quot; width=&quot;140&quot; height=&quot;48&quot; rx=&quot;6&quot; fill=&quot;rgba(34,57,94,0.06)&quot; stroke=&quot;#22395E&quot; strokeWidth=&quot;1.5&quot; /&gt;&#10;          &lt;text x=&quot;86&quot; y=&quot;284&quot; textAnchor=&quot;middle&quot; fontSize=&quot;12&quot; fontWeight=&quot;bold&quot; fill=&quot;#172133&quot;&gt;create_repair&lt;/text&gt;&#10;          &lt;text x=&quot;86&quot; y=&quot;302&quot; textAnchor=&quot;middle&quot; fontSize=&quot;10&quot; fill=&quot;#5F5E5A&quot;&gt;创建工单&lt;/text&gt;&#10;          &lt;rect x=&quot;176&quot; y=&quot;264&quot; width=&quot;140&quot; height=&quot;48&quot; rx=&quot;6&quot; fill=&quot;rgba(34,57,94,0.06)&quot; stroke=&quot;#22395E&quot; strokeWidth=&quot;1.5&quot; /&gt;&#10;          &lt;text x=&quot;246&quot; y=&quot;284&quot; textAnchor=&quot;middle&quot; fontSize=&quot;12&quot; fontWeight=&quot;bold&quot; fill=&quot;#172133&quot;&gt;query_fee&lt;/text&gt;&#10;          &lt;text x=&quot;246&quot; y=&quot;302&quot; textAnchor=&quot;middle&quot; fontSize=&quot;10&quot; fill=&quot;#5F5E5A&quot;&gt;查询费用&lt;/text&gt;&#10;          &lt;rect x=&quot;336&quot; y=&quot;264&quot; width=&quot;160&quot; height=&quot;48&quot; rx=&quot;6&quot; fill=&quot;rgba(34,57,94,0.06)&quot; stroke=&quot;#22395E&quot; strokeWidth=&quot;1.5&quot; /&gt;&#10;          &lt;text x=&quot;416&quot; y=&quot;284&quot; textAnchor=&quot;middle&quot; fontSize=&quot;12&quot; fontWeight=&quot;bold&quot; fill=&quot;#172133&quot;&gt;search_knowledge&lt;/text&gt;&#10;          &lt;text x=&quot;416&quot; y=&quot;302&quot; textAnchor=&quot;middle&quot; fontSize=&quot;10&quot; fill=&quot;#5F5E5A&quot;&gt;检索知识&lt;/text&gt;&#10;          &lt;line x1=&quot;256&quot; y1=&quot;260&quot; x2=&quot;256&quot; y2=&quot;288&quot; stroke=&quot;#22395E&quot; strokeWidth=&quot;1.2&quot; /&gt;&#10;          &lt;line x1=&quot;256&quot; y1=&quot;288&quot; x2=&quot;86&quot; y2=&quot;288&quot; stroke=&quot;#22395E&quot; strokeWidth=&quot;1.2&quot; /&gt;&#10;          &lt;line x1=&quot;256&quot; y1=&quot;288&quot; x2=&quot;246&quot; y2=&quot;288&quot; stroke=&quot;#22395E&quot; strokeWidth=&quot;1.2&quot; /&gt;&#10;          &lt;line x1=&quot;256&quot; y1=&quot;288&quot; x2=&quot;416&quot; y2=&quot;288&quot; stroke=&quot;#22395E&quot; strokeWidth=&quot;1.2&quot; /&gt;&#10;          &lt;line x1=&quot;86&quot; y1=&quot;312&quot; x2=&quot;86&quot; y2=&quot;332&quot; stroke=&quot;#22395E&quot; strokeWidth=&quot;1.2&quot; /&gt;&#10;          &lt;line x1=&quot;246&quot; y1=&quot;312&quot; x2=&quot;246&quot; y2=&quot;332&quot; stroke=&quot;#22395E&quot; strokeWidth=&quot;1.2&quot; /&gt;&#10;          &lt;line x1=&quot;416&quot; y1=&quot;312&quot; x2=&quot;416&quot; y2=&quot;332&quot; stroke=&quot;#22395E&quot; strokeWidth=&quot;1.2&quot; /&gt;&#10;          &lt;rect x=&quot;16&quot; y=&quot;336&quot; width=&quot;480&quot; height=&quot;42&quot; rx=&quot;6&quot; fill=&quot;#172133&quot; /&gt;&#10;          &lt;text x=&quot;256&quot; y=&quot;362&quot; textAnchor=&quot;middle&quot; fontSize=&quot;12&quot; fontWeight=&quot;bold&quot; fill=&quot;#BD9B56&quot;&gt;业务 API 层 · 工具执行 · Trace 全程记录可评估&lt;/text&gt;&#10;          &lt;text x=&quot;256&quot; y=&quot;410&quot; textAnchor=&quot;middle&quot; fontSize=&quot;12&quot; fill=&quot;#5F5E5A&quot;&gt;驱动模型：智谱 GLM-4-Flash · 编排框架：LangGraph&lt;/text&gt;&#10;        &lt;/g&gt;&#10;      &lt;/svg&gt;&#10;    &lt;/div&gt;&#10;    &lt;div style={{ flex: 1, display: 'flex', flexDirection: 'column', gap: 18 }}&gt;&#10;      &lt;div&gt;&#10;        &lt;div style={{ fontSize: 14, color: '#BD9B56', fontWeight: 'bold', letterSpacing: '0.1em', marginBottom: 6 }}&gt;1.  多轮状态机&lt;/div&gt;&#10;        &lt;p style={{ fontSize: 14, color: '#5F5E5A', margin: 0, lineHeight: 1.65 }}&gt;报修不是单轮问答——业主只说「厨房漏水」时，Agent 会主动追问房屋位置、故障类型，把信息补全后才创建工单，避免生成残缺工单。&lt;/p&gt;&#10;      &lt;/div&gt;&#10;      &lt;div&gt;&#10;        &lt;div style={{ fontSize: 14, color: '#BD9B56', fontWeight: 'bold', letterSpacing: '0.1em', marginBottom: 6 }}&gt;2.  五类意图&lt;/div&gt;&#10;        &lt;p style={{ fontSize: 14, color: '#5F5E5A', margin: 0, lineHeight: 1.65 }}&gt;报修、费用、公告、知识咨询、问题上报，自然语言直达对应业务工具，实测意图识别准确率 100%。&lt;/p&gt;&#10;      &lt;/div&gt;&#10;      &lt;div&gt;&#10;        &lt;div style={{ fontSize: 14, color: '#BD9B56', fontWeight: 'bold', letterSpacing: '0.1em', marginBottom: 6 }}&gt;3.  可观测可评估&lt;/div&gt;&#10;        &lt;p style={{ fontSize: 14, color: '#5F5E5A', margin: 0, lineHeight: 1.65 }}&gt;每次对话的意图、工具、结果全程记录 Trace，可回放、可评估，是量化评估体系的数据基础。&lt;/p&gt;&#10;      &lt;/div&gt;&#10;    &lt;/div&gt;&#10;  &lt;/div&gt;&#10;  &lt;div style={{ flexShrink: 0, height: 40, display: 'flex', alignItems: 'flex-end', justifyContent: 'space-between' }}&gt;&#10;    &lt;span style={{ color: '#BD9B56', fontSize: 12, letterSpacing: '0.1em' }}&gt;云溪花园 · 智慧社区&lt;/span&gt;&#10;    &lt;span style={{ color: '#a09b8c', fontSize: 12 }}&gt;09 / 15&lt;/span&gt;&#10;  &lt;/div&gt;&#10;&lt;/Slide&gt;"/>
+        <p:cNvPr id="356" name="" descr="&lt;Slide style={{ width: '1280px', height: '720px', background: '#FBFCFA', position: 'relative', padding: '40px 64px', boxSizing: 'border-box', display: 'flex', flexDirection: 'column' }}&gt;&#10;  &lt;div style={{ flexShrink: 0 }}&gt;&#10;    &lt;div style={{ color: '#BD9B56', fontSize: 13, letterSpacing: '0.25em', marginBottom: 8 }}&gt;02 · 技术构建过程&lt;/div&gt;&#10;    &lt;h2 style={{ fontSize: 30, fontWeight: 'bold', color: '#172133', margin: 0, lineHeight: 1.3 }}&gt;AI Agent 架构：LangGraph 多智能体协作&lt;/h2&gt;&#10;  &lt;/div&gt;&#10;  &lt;div style={{ flex: 1, display: 'flex', alignItems: 'center', gap: 32 }}&gt;&#10;    &lt;div style={{ flex: '0 0 560px', background: '#fff', borderRadius: 12, padding: '22px 24px', boxShadow: '0 6px 24px rgba(23,33,51,0.08)' }}&gt;&#10;      &lt;svg width=&quot;512&quot; height=&quot;470&quot; viewBox=&quot;0 0 512 470&quot;&gt;&#10;        &lt;defs&gt;&#10;          &lt;marker id=&quot;ar9&quot; viewBox=&quot;0 0 10 10&quot; refX=&quot;9&quot; refY=&quot;5&quot; markerWidth=&quot;6&quot; markerHeight=&quot;6&quot; orient=&quot;auto&quot;&gt;&#10;            &lt;path d=&quot;M0 0L10 5L0 10z&quot; fill=&quot;#BD9B56&quot; /&gt;&#10;          &lt;/marker&gt;&#10;        &lt;/defs&gt;&#10;        &lt;g fontFamily=&quot;Inter, sans-serif&quot;&gt;&#10;          &lt;rect x=&quot;156&quot; y=&quot;14&quot; width=&quot;200&quot; height=&quot;50&quot; rx=&quot;8&quot; fill=&quot;rgba(34,57,94,0.08)&quot; stroke=&quot;#22395E&quot; strokeWidth=&quot;1.5&quot; /&gt;&#10;          &lt;text x=&quot;256&quot; y=&quot;36&quot; textAnchor=&quot;middle&quot; fontSize=&quot;13&quot; fontWeight=&quot;bold&quot; fill=&quot;#172133&quot;&gt;用户自然语言输入&lt;/text&gt;&#10;          &lt;text x=&quot;256&quot; y=&quot;54&quot; textAnchor=&quot;middle&quot; fontSize=&quot;11&quot; fill=&quot;#5F5E5A&quot;&gt;「我家厨房漏水了」&lt;/text&gt;&#10;          &lt;line x1=&quot;256&quot; y1=&quot;64&quot; x2=&quot;256&quot; y2=&quot;84&quot; stroke=&quot;#BD9B56&quot; strokeWidth=&quot;1.5&quot; markerEnd=&quot;url(#ar9)&quot; /&gt;&#10;          &lt;rect x=&quot;96&quot; y=&quot;88&quot; width=&quot;320&quot; height=&quot;64&quot; rx=&quot;8&quot; fill=&quot;rgba(34,57,94,0.12)&quot; stroke=&quot;#22395E&quot; strokeWidth=&quot;2&quot; /&gt;&#10;          &lt;text x=&quot;256&quot; y=&quot;114&quot; textAnchor=&quot;middle&quot; fontSize=&quot;13&quot; fontWeight=&quot;bold&quot; fill=&quot;#BD9B56&quot;&gt;Router Agent · 意图分类&lt;/text&gt;&#10;          &lt;text x=&quot;256&quot; y=&quot;136&quot; textAnchor=&quot;middle&quot; fontSize=&quot;11&quot; fill=&quot;#172133&quot;&gt;报修 / 费用 / 公告 / 知识 / 上报&lt;/text&gt;&#10;          &lt;line x1=&quot;256&quot; y1=&quot;152&quot; x2=&quot;256&quot; y2=&quot;172&quot; stroke=&quot;#BD9B56&quot; strokeWidth=&quot;1.5&quot; markerEnd=&quot;url(#ar9)&quot; /&gt;&#10;          &lt;rect x=&quot;96&quot; y=&quot;176&quot; width=&quot;320&quot; height=&quot;64&quot; rx=&quot;8&quot; fill=&quot;rgba(189,155,86,0.10)&quot; stroke=&quot;#BD9B56&quot; strokeWidth=&quot;1.5&quot; /&gt;&#10;          &lt;text x=&quot;256&quot; y=&quot;202&quot; textAnchor=&quot;middle&quot; fontSize=&quot;13&quot; fontWeight=&quot;bold&quot; fill=&quot;#172133&quot;&gt;领域 Agent + 多轮状态机&lt;/text&gt;&#10;          &lt;text x=&quot;256&quot; y=&quot;224&quot; textAnchor=&quot;middle&quot; fontSize=&quot;11&quot; fill=&quot;#5F5E5A&quot;&gt;报修缺「位置/类型」→ 主动反问补全&lt;/text&gt;&#10;          &lt;line x1=&quot;256&quot; y1=&quot;240&quot; x2=&quot;256&quot; y2=&quot;260&quot; stroke=&quot;#BD9B56&quot; strokeWidth=&quot;1.5&quot; markerEnd=&quot;url(#ar9)&quot; /&gt;&#10;          &lt;rect x=&quot;16&quot; y=&quot;264&quot; width=&quot;140&quot; height=&quot;48&quot; rx=&quot;6&quot; fill=&quot;rgba(34,57,94,0.06)&quot; stroke=&quot;#22395E&quot; strokeWidth=&quot;1.5&quot; /&gt;&#10;          &lt;text x=&quot;86&quot; y=&quot;284&quot; textAnchor=&quot;middle&quot; fontSize=&quot;12&quot; fontWeight=&quot;bold&quot; fill=&quot;#172133&quot;&gt;create_repair&lt;/text&gt;&#10;          &lt;text x=&quot;86&quot; y=&quot;302&quot; textAnchor=&quot;middle&quot; fontSize=&quot;10&quot; fill=&quot;#5F5E5A&quot;&gt;创建工单&lt;/text&gt;&#10;          &lt;rect x=&quot;176&quot; y=&quot;264&quot; width=&quot;140&quot; height=&quot;48&quot; rx=&quot;6&quot; fill=&quot;rgba(34,57,94,0.06)&quot; stroke=&quot;#22395E&quot; strokeWidth=&quot;1.5&quot; /&gt;&#10;          &lt;text x=&quot;246&quot; y=&quot;284&quot; textAnchor=&quot;middle&quot; fontSize=&quot;12&quot; fontWeight=&quot;bold&quot; fill=&quot;#172133&quot;&gt;query_fee&lt;/text&gt;&#10;          &lt;text x=&quot;246&quot; y=&quot;302&quot; textAnchor=&quot;middle&quot; fontSize=&quot;10&quot; fill=&quot;#5F5E5A&quot;&gt;查询费用&lt;/text&gt;&#10;          &lt;rect x=&quot;336&quot; y=&quot;264&quot; width=&quot;160&quot; height=&quot;48&quot; rx=&quot;6&quot; fill=&quot;rgba(34,57,94,0.06)&quot; stroke=&quot;#22395E&quot; strokeWidth=&quot;1.5&quot; /&gt;&#10;          &lt;text x=&quot;416&quot; y=&quot;284&quot; textAnchor=&quot;middle&quot; fontSize=&quot;12&quot; fontWeight=&quot;bold&quot; fill=&quot;#172133&quot;&gt;search_knowledge&lt;/text&gt;&#10;          &lt;text x=&quot;416&quot; y=&quot;302&quot; textAnchor=&quot;middle&quot; fontSize=&quot;10&quot; fill=&quot;#5F5E5A&quot;&gt;检索知识&lt;/text&gt;&#10;          &lt;line x1=&quot;256&quot; y1=&quot;260&quot; x2=&quot;256&quot; y2=&quot;288&quot; stroke=&quot;#22395E&quot; strokeWidth=&quot;1.2&quot; /&gt;&#10;          &lt;line x1=&quot;256&quot; y1=&quot;288&quot; x2=&quot;86&quot; y2=&quot;288&quot; stroke=&quot;#22395E&quot; strokeWidth=&quot;1.2&quot; /&gt;&#10;          &lt;line x1=&quot;256&quot; y1=&quot;288&quot; x2=&quot;246&quot; y2=&quot;288&quot; stroke=&quot;#22395E&quot; strokeWidth=&quot;1.2&quot; /&gt;&#10;          &lt;line x1=&quot;256&quot; y1=&quot;288&quot; x2=&quot;416&quot; y2=&quot;288&quot; stroke=&quot;#22395E&quot; strokeWidth=&quot;1.2&quot; /&gt;&#10;          &lt;line x1=&quot;86&quot; y1=&quot;312&quot; x2=&quot;86&quot; y2=&quot;332&quot; stroke=&quot;#22395E&quot; strokeWidth=&quot;1.2&quot; /&gt;&#10;          &lt;line x1=&quot;246&quot; y1=&quot;312&quot; x2=&quot;246&quot; y2=&quot;332&quot; stroke=&quot;#22395E&quot; strokeWidth=&quot;1.2&quot; /&gt;&#10;          &lt;line x1=&quot;416&quot; y1=&quot;312&quot; x2=&quot;416&quot; y2=&quot;332&quot; stroke=&quot;#22395E&quot; strokeWidth=&quot;1.2&quot; /&gt;&#10;          &lt;rect x=&quot;16&quot; y=&quot;336&quot; width=&quot;480&quot; height=&quot;42&quot; rx=&quot;6&quot; fill=&quot;#172133&quot; /&gt;&#10;          &lt;text x=&quot;256&quot; y=&quot;362&quot; textAnchor=&quot;middle&quot; fontSize=&quot;12&quot; fontWeight=&quot;bold&quot; fill=&quot;#BD9B56&quot;&gt;业务 API 层 · 工具执行 · Trace 全程记录可评估&lt;/text&gt;&#10;          &lt;text x=&quot;256&quot; y=&quot;410&quot; textAnchor=&quot;middle&quot; fontSize=&quot;12&quot; fill=&quot;#5F5E5A&quot;&gt;驱动模型：智谱 GLM-4-Flash · 编排框架：LangGraph&lt;/text&gt;&#10;        &lt;/g&gt;&#10;      &lt;/svg&gt;&#10;    &lt;/div&gt;&#10;    &lt;div style={{ flex: 1, display: 'flex', flexDirection: 'column', gap: 18 }}&gt;&#10;      &lt;div&gt;&#10;        &lt;div style={{ fontSize: 14, color: '#BD9B56', fontWeight: 'bold', letterSpacing: '0.1em', marginBottom: 6 }}&gt;1.  多轮状态机&lt;/div&gt;&#10;        &lt;p style={{ fontSize: 14, color: '#5F5E5A', margin: 0, lineHeight: 1.65 }}&gt;报修不是单轮问答——业主只说「厨房漏水」时，Agent 会主动追问房屋位置、故障类型，把信息补全后才创建工单，避免生成残缺工单。&lt;/p&gt;&#10;      &lt;/div&gt;&#10;      &lt;div&gt;&#10;        &lt;div style={{ fontSize: 14, color: '#BD9B56', fontWeight: 'bold', letterSpacing: '0.1em', marginBottom: 6 }}&gt;2.  五类意图&lt;/div&gt;&#10;        &lt;p style={{ fontSize: 14, color: '#5F5E5A', margin: 0, lineHeight: 1.65 }}&gt;报修、费用、公告、知识咨询、问题上报，自然语言直达对应业务工具，实测意图识别准确率 100%。&lt;/p&gt;&#10;      &lt;/div&gt;&#10;      &lt;div&gt;&#10;        &lt;div style={{ fontSize: 14, color: '#BD9B56', fontWeight: 'bold', letterSpacing: '0.1em', marginBottom: 6 }}&gt;3.  可观测可评估&lt;/div&gt;&#10;        &lt;p style={{ fontSize: 14, color: '#5F5E5A', margin: 0, lineHeight: 1.65 }}&gt;每次对话的意图、工具、结果全程记录 Trace，可回放、可评估，是量化评估体系的数据基础。&lt;/p&gt;&#10;      &lt;/div&gt;&#10;    &lt;/div&gt;&#10;  &lt;/div&gt;&#10;  &lt;div style={{ flexShrink: 0, height: 40, display: 'flex', alignItems: 'flex-end', justifyContent: 'space-between' }}&gt;&#10;    &lt;span style={{ color: '#BD9B56', fontSize: 12, letterSpacing: '0.1em' }}&gt;云溪花园 · 智慧社区&lt;/span&gt;&#10;    &lt;span style={{ color: '#a09b8c', fontSize: 12 }}&gt;09 / 15&lt;/span&gt;&#10;  &lt;/div&gt;&#10;&lt;/Slide&gt;"/>
         <p:cNvGrpSpPr/>
         <p:nvPr/>
       </p:nvGrpSpPr>
@@ -15726,7 +16181,7 @@
       </p:grpSpPr>
       <p:sp>
         <p:nvSpPr>
-          <p:cNvPr id="353" name=""/>
+          <p:cNvPr id="357" name=""/>
           <p:cNvSpPr/>
           <p:nvPr/>
         </p:nvSpPr>
@@ -15750,7 +16205,7 @@
       </p:sp>
       <p:sp>
         <p:nvSpPr>
-          <p:cNvPr id="354" name="" descr="{&quot;isTemplate&quot;:true,&quot;type&quot;:&quot;text&quot;}"/>
+          <p:cNvPr id="358" name="" descr="{&quot;isTemplate&quot;:true,&quot;type&quot;:&quot;text&quot;}"/>
           <p:cNvSpPr txBox="1"/>
           <p:nvPr/>
         </p:nvSpPr>
@@ -15795,7 +16250,7 @@
       </p:sp>
       <p:sp>
         <p:nvSpPr>
-          <p:cNvPr id="355" name="" descr="{&quot;isTemplate&quot;:true,&quot;type&quot;:&quot;text&quot;}"/>
+          <p:cNvPr id="359" name="" descr="{&quot;isTemplate&quot;:true,&quot;type&quot;:&quot;text&quot;}"/>
           <p:cNvSpPr txBox="1"/>
           <p:nvPr/>
         </p:nvSpPr>
@@ -15860,7 +16315,7 @@
       </p:sp>
       <p:sp>
         <p:nvSpPr>
-          <p:cNvPr id="356" name=""/>
+          <p:cNvPr id="360" name=""/>
           <p:cNvSpPr/>
           <p:nvPr/>
         </p:nvSpPr>
@@ -15893,7 +16348,7 @@
       </p:sp>
       <p:pic>
         <p:nvPicPr>
-          <p:cNvPr id="357" name=""/>
+          <p:cNvPr id="361" name=""/>
           <p:cNvPicPr>
             <a:picLocks noChangeAspect="1"/>
           </p:cNvPicPr>
@@ -15924,7 +16379,7 @@
       </p:pic>
       <p:sp>
         <p:nvSpPr>
-          <p:cNvPr id="358" name="" descr="{&quot;isTemplate&quot;:true,&quot;type&quot;:&quot;text&quot;}"/>
+          <p:cNvPr id="362" name="" descr="{&quot;isTemplate&quot;:true,&quot;type&quot;:&quot;text&quot;}"/>
           <p:cNvSpPr txBox="1"/>
           <p:nvPr/>
         </p:nvSpPr>
@@ -15969,7 +16424,7 @@
       </p:sp>
       <p:sp>
         <p:nvSpPr>
-          <p:cNvPr id="359" name="" descr="{&quot;isTemplate&quot;:true,&quot;type&quot;:&quot;text&quot;}"/>
+          <p:cNvPr id="363" name="" descr="{&quot;isTemplate&quot;:true,&quot;type&quot;:&quot;text&quot;}"/>
           <p:cNvSpPr txBox="1"/>
           <p:nvPr/>
         </p:nvSpPr>
@@ -16026,7 +16481,7 @@
       </p:sp>
       <p:sp>
         <p:nvSpPr>
-          <p:cNvPr id="360" name="" descr="{&quot;isTemplate&quot;:true,&quot;type&quot;:&quot;text&quot;}"/>
+          <p:cNvPr id="364" name="" descr="{&quot;isTemplate&quot;:true,&quot;type&quot;:&quot;text&quot;}"/>
           <p:cNvSpPr txBox="1"/>
           <p:nvPr/>
         </p:nvSpPr>
@@ -16071,7 +16526,7 @@
       </p:sp>
       <p:sp>
         <p:nvSpPr>
-          <p:cNvPr id="361" name="" descr="{&quot;isTemplate&quot;:true,&quot;type&quot;:&quot;text&quot;}"/>
+          <p:cNvPr id="365" name="" descr="{&quot;isTemplate&quot;:true,&quot;type&quot;:&quot;text&quot;}"/>
           <p:cNvSpPr txBox="1"/>
           <p:nvPr/>
         </p:nvSpPr>
@@ -16128,7 +16583,7 @@
       </p:sp>
       <p:sp>
         <p:nvSpPr>
-          <p:cNvPr id="362" name="" descr="{&quot;isTemplate&quot;:true,&quot;type&quot;:&quot;text&quot;}"/>
+          <p:cNvPr id="366" name="" descr="{&quot;isTemplate&quot;:true,&quot;type&quot;:&quot;text&quot;}"/>
           <p:cNvSpPr txBox="1"/>
           <p:nvPr/>
         </p:nvSpPr>
@@ -16173,7 +16628,7 @@
       </p:sp>
       <p:sp>
         <p:nvSpPr>
-          <p:cNvPr id="363" name="" descr="{&quot;isTemplate&quot;:true,&quot;type&quot;:&quot;text&quot;}"/>
+          <p:cNvPr id="367" name="" descr="{&quot;isTemplate&quot;:true,&quot;type&quot;:&quot;text&quot;}"/>
           <p:cNvSpPr txBox="1"/>
           <p:nvPr/>
         </p:nvSpPr>
@@ -16230,7 +16685,7 @@
       </p:sp>
       <p:sp>
         <p:nvSpPr>
-          <p:cNvPr id="364" name="" descr="{&quot;isTemplate&quot;:true,&quot;type&quot;:&quot;text&quot;}"/>
+          <p:cNvPr id="368" name="" descr="{&quot;isTemplate&quot;:true,&quot;type&quot;:&quot;text&quot;}"/>
           <p:cNvSpPr txBox="1"/>
           <p:nvPr/>
         </p:nvSpPr>
@@ -16285,7 +16740,7 @@
       </p:sp>
       <p:sp>
         <p:nvSpPr>
-          <p:cNvPr id="365" name="" descr="{&quot;isTemplate&quot;:true,&quot;type&quot;:&quot;text&quot;}"/>
+          <p:cNvPr id="369" name="" descr="{&quot;isTemplate&quot;:true,&quot;type&quot;:&quot;text&quot;}"/>
           <p:cNvSpPr txBox="1"/>
           <p:nvPr/>
         </p:nvSpPr>

--- a/ppt/AI物业社区智能体方案/AI物业社区智能体-方案.pptx
+++ b/ppt/AI物业社区智能体方案/AI物业社区智能体-方案.pptx
@@ -7556,7 +7556,7 @@
   <p:cSld>
     <p:spTree>
       <p:nvGrpSpPr>
-        <p:cNvPr id="154" name="" descr="&lt;Slide style={{ width: '1280px', height: '720px', background: '#FBFCFA', position: 'relative', padding: '32px 60px', boxSizing: 'border-box', display: 'flex', flexDirection: 'column' }}&gt;&#10;  &lt;div style={{ flexShrink: 0 }}&gt;&#10;    &lt;div style={{ color: '#BD9B56', fontSize: 13, letterSpacing: '0.25em', marginBottom: 6 }}&gt;04 · 总结与展望&lt;/div&gt;&#10;    &lt;h2 style={{ fontSize: 29, fontWeight: 'bold', color: '#172133', margin: 0, lineHeight: 1.3 }}&gt;三端应用 + 自维护自更新，AI 物业社区落地&lt;/h2&gt;&#10;  &lt;/div&gt;&#10;  &lt;div style={{ flex: 1, display: 'flex', alignItems: 'stretch', gap: 26 }}&gt;&#10;    {/* 左栏：三端功能 + 技术路线 + 自维护 */}&#10;    &lt;div style={{ flex: 1, display: 'flex', flexDirection: 'column', gap: 12 }}&gt;&#10;      {/* 三端功能 */}&#10;      &lt;div style={{ background: '#fff', borderRadius: 10, padding: '14px 18px', boxShadow: '0 4px 16px rgba(23,33,51,0.06)' }}&gt;&#10;        &lt;div style={{ fontSize: 13, color: '#BD9B56', fontWeight: 'bold', letterSpacing: '0.1em', marginBottom: 10 }}&gt;三端应用 · 功能与角色路由&lt;/div&gt;&#10;        &lt;div style={{ display: 'flex', flexDirection: 'column', gap: 8 }}&gt;&#10;          &lt;div style={{ display: 'flex', alignItems: 'flex-start', gap: 10 }}&gt;&#10;            &lt;span style={{ color: '#BD9B56', fontSize: 14, fontWeight: 'bold', minWidth: 52, marginTop: 1 }}&gt;业主端&lt;/span&gt;&#10;            &lt;span style={{ fontSize: 12.5, color: '#5F5E5A', lineHeight: 1.55 }}&gt;AI 助手（统一入口）· 对话报修 · 缴费查询 · 公告 · 我的工单 · 问题上报&lt;/span&gt;&#10;          &lt;/div&gt;&#10;          &lt;div style={{ display: 'flex', alignItems: 'flex-start', gap: 10 }}&gt;&#10;            &lt;span style={{ color: '#BD9B56', fontSize: 14, fontWeight: 'bold', minWidth: 52, marginTop: 1 }}&gt;物业端&lt;/span&gt;&#10;            &lt;span style={{ fontSize: 12.5, color: '#5F5E5A', lineHeight: 1.55 }}&gt;数据看板 · 工单管理 · 用户/房屋管理 · 公告（AI 生成）· 巡检管理 · 知识缺口审核&lt;/span&gt;&#10;          &lt;/div&gt;&#10;          &lt;div style={{ display: 'flex', alignItems: 'flex-start', gap: 10 }}&gt;&#10;            &lt;span style={{ color: '#BD9B56', fontSize: 14, fontWeight: 'bold', minWidth: 52, marginTop: 1 }}&gt;维修端&lt;/span&gt;&#10;            &lt;span style={{ fontSize: 12.5, color: '#5F5E5A', lineHeight: 1.55 }}&gt;任务列表 · 接单/处理/完成 · 消息 · 巡检任务&lt;/span&gt;&#10;          &lt;/div&gt;&#10;        &lt;/div&gt;&#10;      &lt;/div&gt;&#10;      {/* 技术路线 */}&#10;      &lt;div style={{ background: '#fff', borderRadius: 10, padding: '12px 18px', boxShadow: '0 4px 16px rgba(23,33,51,0.06)' }}&gt;&#10;        &lt;div style={{ fontSize: 13, color: '#BD9B56', fontWeight: 'bold', letterSpacing: '0.1em', marginBottom: 8 }}&gt;技术路线&lt;/div&gt;&#10;        &lt;div style={{ fontSize: 12.5, color: '#5F5E5A', lineHeight: 1.7 }}&gt;前端 React + TS + Tailwind · JWT 鉴权 + 角色路由 · PWA&lt;br/&gt;后端 FastAPI 三层（路由 → Service → Repository）&lt;br/&gt;AI LangGraph 多 Agent（Personal → Router → Domain）· 智谱 GLM-4-Flash · pgvector RAG&lt;br/&gt;派单算法（技能 + 在岗 + 工号升序）· 全链路消息通知&lt;/div&gt;&#10;      &lt;/div&gt;&#10;      {/* 自维护自更新 */}&#10;      &lt;div style={{ background: '#fff', borderRadius: 10, padding: '12px 18px', boxShadow: '0 4px 16px rgba(23,33,51,0.06)', flex: 1 }}&gt;&#10;        &lt;div style={{ fontSize: 13, color: '#BD9B56', fontWeight: 'bold', letterSpacing: '0.1em', marginBottom: 8 }}&gt;系统自维护自更新&lt;/div&gt;&#10;        &lt;div style={{ display: 'flex', flexWrap: 'wrap', gap: 8 }}&gt;&#10;          &lt;span style={{ fontSize: 12, color: '#172133', background: 'rgba(189,155,86,0.12)', padding: '5px 10px', borderRadius: 6 }}&gt;⏱ 定时数据清理（APScheduler 每日）&lt;/span&gt;&#10;          &lt;span style={{ fontSize: 12, color: '#172133', background: 'rgba(189,155,86,0.12)', padding: '5px 10px', borderRadius: 6 }}&gt;📷 巡检自动化（抓拍 + 视觉识别）&lt;/span&gt;&#10;          &lt;span style={{ fontSize: 12, color: '#172133', background: 'rgba(189,155,86,0.12)', padding: '5px 10px', borderRadius: 6 }}&gt;🧠 知识自进化（反馈 → 审核 → 入库）&lt;/span&gt;&#10;          &lt;span style={{ fontSize: 12, color: '#172133', background: 'rgba(189,155,86,0.12)', padding: '5px 10px', borderRadius: 6 }}&gt;📊 监控告警（Prometheus + Grafana）&lt;/span&gt;&#10;          &lt;span style={{ fontSize: 12, color: '#172133', background: 'rgba(189,155,86,0.12)', padding: '5px 10px', borderRadius: 6 }}&gt;🚀 CI/CD（GitHub Actions 自动测试发布）&lt;/span&gt;&#10;        &lt;/div&gt;&#10;        &lt;div style={{ fontSize: 12, color: '#6b7075', marginTop: 10, lineHeight: 1.6 }}&gt;系统无需人工值守即可完成数据清理、自动巡检、知识沉淀、监控告警与持续交付，形成「越用越准、越用越稳」的自进化闭环。&lt;/div&gt;&#10;      &lt;/div&gt;&#10;    &lt;/div&gt;&#10;    {/* 右栏：量化 + Demo */}&#10;    &lt;div style={{ flex: '0 0 350px', display: 'flex', flexDirection: 'column', gap: 14 }}&gt;&#10;      &lt;div style={{ background: 'linear-gradient(135deg, #172133 0%, #22395E 100%)', borderRadius: 12, padding: '20px 22px', color: '#FBFCFA', display: 'flex', flexDirection: 'column', gap: 12 }}&gt;&#10;        &lt;div style={{ color: '#BD9B56', fontSize: 13, letterSpacing: '0.25em' }}&gt;ONLINE DEMO&lt;/div&gt;&#10;        &lt;div style={{ fontSize: 18, fontFamily: 'Inter, sans-serif', lineHeight: 1.5 }}&gt;http://119.91.236.85&lt;/div&gt;&#10;        &lt;div style={{ fontSize: 12.5, color: 'rgba(251,252,250,0.75)', lineHeight: 1.8 }}&gt;&#10;          业主 guoyi378 · 物业 mayun420 · 维修 yangfei423&lt;br/&gt;&lt;span style={{ color: '#BD9B56' }}&gt;密码均为 123456&lt;/span&gt;&#10;        &lt;/div&gt;&#10;        &lt;div style={{ paddingTop: 12, borderTop: '1px solid rgba(189,155,86,0.3)', fontSize: 11.5, color: 'rgba(251,252,250,0.6)', lineHeight: 1.7 }}&gt;&#10;          GitHub：Xuuuukkk/ai-property-community-agent · MIT&#10;        &lt;/div&gt;&#10;      &lt;/div&gt;&#10;      &lt;div style={{ background: '#fff', borderRadius: 12, padding: '18px 20px', boxShadow: '0 4px 16px rgba(23,33,51,0.06)', display: 'flex', flexDirection: 'column', gap: 12 }}&gt;&#10;        &lt;div style={{ fontSize: 13, color: '#BD9B56', fontWeight: 'bold', letterSpacing: '0.1em' }}&gt;项目成果&lt;/div&gt;&#10;        &lt;div style={{ display: 'flex', gap: 10 }}&gt;&#10;          &lt;div style={{ flex: 1, background: 'rgba(189,155,86,0.08)', borderRadius: 8, padding: '10px 8px', textAlign: 'center' }}&gt;&#10;            &lt;div style={{ fontSize: 20, fontWeight: 'bold', color: '#BD9B56', fontFamily: 'Inter, sans-serif' }}&gt;100%&lt;/div&gt;&#10;            &lt;div style={{ fontSize: 11, color: '#5F5E5A', marginTop: 3 }}&gt;核心链路指标&lt;/div&gt;&#10;          &lt;/div&gt;&#10;          &lt;div style={{ flex: 1, background: 'rgba(189,155,86,0.08)', borderRadius: 8, padding: '10px 8px', textAlign: 'center' }}&gt;&#10;            &lt;div style={{ fontSize: 20, fontWeight: 'bold', color: '#BD9B56', fontFamily: 'Inter, sans-serif' }}&gt;113+30&lt;/div&gt;&#10;            &lt;div style={{ fontSize: 11, color: '#5F5E5A', marginTop: 3 }}&gt;测试全绿&lt;/div&gt;&#10;          &lt;/div&gt;&#10;          &lt;div style={{ flex: 1, background: 'rgba(189,155,86,0.08)', borderRadius: 8, padding: '10px 8px', textAlign: 'center' }}&gt;&#10;            &lt;div style={{ fontSize: 20, fontWeight: 'bold', color: '#BD9B56', fontFamily: 'Inter, sans-serif' }}&gt;7 阶段&lt;/div&gt;&#10;            &lt;div style={{ fontSize: 11, color: '#5F5E5A', marginTop: 3 }}&gt;Phase 0-7 完成&lt;/div&gt;&#10;          &lt;/div&gt;&#10;        &lt;/div&gt;&#10;      &lt;/div&gt;&#10;    &lt;/div&gt;&#10;  &lt;/div&gt;&#10;  &lt;div style={{ flexShrink: 0, height: 36, display: 'flex', alignItems: 'flex-end', justifyContent: 'space-between' }}&gt;&#10;    &lt;span style={{ color: '#BD9B56', fontSize: 12, letterSpacing: '0.1em' }}&gt;云溪花园 · 智慧社区&lt;/span&gt;&#10;    &lt;span style={{ color: '#a09b8c', fontSize: 12 }}&gt;14 / 15&lt;/span&gt;&#10;  &lt;/div&gt;&#10;&lt;/Slide&gt;"/>
+        <p:cNvPr id="154" name="" descr="&lt;Slide style={{ width: '1280px', height: '720px', background: '#FBFCFA', position: 'relative', padding: '26px 52px', boxSizing: 'border-box', display: 'flex', flexDirection: 'column' }}&gt;&#10;  &lt;div style={{ flexShrink: 0 }}&gt;&#10;    &lt;div style={{ color: '#BD9B56', fontSize: 12, letterSpacing: '0.25em', marginBottom: 4 }}&gt;04 · 总结与展望&lt;/div&gt;&#10;    &lt;h2 style={{ fontSize: 25, fontWeight: 'bold', color: '#172133', margin: 0, lineHeight: 1.2 }}&gt;三端功能 × 实现技术：每个功能怎么做出来的&lt;/h2&gt;&#10;  &lt;/div&gt;&#10;  &lt;div style={{ flex: 1, display: 'flex', alignItems: 'stretch', gap: 18, marginTop: 10 }}&gt;&#10;    {/* 左栏：三端功能实现 */}&#10;    &lt;div style={{ flex: 1, display: 'flex', flexDirection: 'column', gap: 8 }}&gt;&#10;      {/* 业主端 */}&#10;      &lt;div style={{ background: '#fff', borderRadius: 10, padding: '10px 14px', boxShadow: '0 4px 16px rgba(23,33,51,0.06)' }}&gt;&#10;        &lt;div style={{ display: 'flex', alignItems: 'center', gap: 8, marginBottom: 6 }}&gt;&#10;          &lt;span style={{ fontSize: 14, fontWeight: 'bold', color: '#172133' }}&gt;业主端&lt;/span&gt;&#10;          &lt;span style={{ fontSize: 10.5, color: '#BD9B56', background: 'rgba(189,155,86,0.12)', padding: '2px 7px', borderRadius: 4 }}&gt;ToC · Owner&lt;/span&gt;&#10;        &lt;/div&gt;&#10;        &lt;div style={{ display: 'flex', flexDirection: 'column', gap: 3.5 }}&gt;&#10;          &lt;div style={{ display: 'flex', gap: 8, alignItems: 'baseline', fontSize: 11.5, lineHeight: 1.4 }}&gt;&lt;span style={{ color: '#172133', fontWeight: 'bold', minWidth: 56 }}&gt;AI 助手&lt;/span&gt;&lt;span style={{ color: '#6b7075' }}&gt;LangGraph 多 Agent：Personal 对话 → Router 意图识别 → Domain 工具调用&lt;/span&gt;&lt;/div&gt;&#10;          &lt;div style={{ display: 'flex', gap: 8, alignItems: 'baseline', fontSize: 11.5, lineHeight: 1.4 }}&gt;&lt;span style={{ color: '#172133', fontWeight: 'bold', minWidth: 56 }}&gt;对话报修&lt;/span&gt;&lt;span style={{ color: '#6b7075' }}&gt;Repair Agent · 多轮状态机补全房屋/类型 · 自动派单（技能+在岗+工号）&lt;/span&gt;&lt;/div&gt;&#10;          &lt;div style={{ display: 'flex', gap: 8, alignItems: 'baseline', fontSize: 11.5, lineHeight: 1.4 }}&gt;&lt;span style={{ color: '#172133', fontWeight: 'bold', minWidth: 56 }}&gt;缴费查询&lt;/span&gt;&lt;span style={{ color: '#6b7075' }}&gt;Fee Agent 查 fee_bills 账单表 · 返回金额/状态/截止日&lt;/span&gt;&lt;/div&gt;&#10;          &lt;div style={{ display: 'flex', gap: 8, alignItems: 'baseline', fontSize: 11.5, lineHeight: 1.4 }}&gt;&lt;span style={{ color: '#172133', fontWeight: 'bold', minWidth: 56 }}&gt;公告&lt;/span&gt;&lt;span style={{ color: '#6b7075' }}&gt;公告列表 + AI 摘要（LLM 提炼要点）&lt;/span&gt;&lt;/div&gt;&#10;          &lt;div style={{ display: 'flex', gap: 8, alignItems: 'baseline', fontSize: 11.5, lineHeight: 1.4 }}&gt;&lt;span style={{ color: '#172133', fontWeight: 'bold', minWidth: 56 }}&gt;我的工单&lt;/span&gt;&lt;span style={{ color: '#6b7075' }}&gt;repair_order 状态追踪（创建→派单→接单→完成→关闭）&lt;/span&gt;&lt;/div&gt;&#10;          &lt;div style={{ display: 'flex', gap: 8, alignItems: 'baseline', fontSize: 11.5, lineHeight: 1.4 }}&gt;&lt;span style={{ color: '#172133', fontWeight: 'bold', minWidth: 56 }}&gt;问题上报&lt;/span&gt;&lt;span style={{ color: '#6b7075' }}&gt;IssueReport 上报 · 附图片 · 物业答复&lt;/span&gt;&lt;/div&gt;&#10;        &lt;/div&gt;&#10;      &lt;/div&gt;&#10;      {/* 物业端 */}&#10;      &lt;div style={{ background: '#fff', borderRadius: 10, padding: '10px 14px', boxShadow: '0 4px 16px rgba(23,33,51,0.06)' }}&gt;&#10;        &lt;div style={{ display: 'flex', alignItems: 'center', gap: 8, marginBottom: 6 }}&gt;&#10;          &lt;span style={{ fontSize: 14, fontWeight: 'bold', color: '#172133' }}&gt;物业端&lt;/span&gt;&#10;          &lt;span style={{ fontSize: 10.5, color: '#BD9B56', background: 'rgba(189,155,86,0.12)', padding: '2px 7px', borderRadius: 4 }}&gt;ToB · Admin/Staff&lt;/span&gt;&#10;        &lt;/div&gt;&#10;        &lt;div style={{ display: 'flex', flexDirection: 'column', gap: 3.5 }}&gt;&#10;          &lt;div style={{ display: 'flex', gap: 8, alignItems: 'baseline', fontSize: 11.5, lineHeight: 1.4 }}&gt;&lt;span style={{ color: '#172133', fontWeight: 'bold', minWidth: 56 }}&gt;数据看板&lt;/span&gt;&lt;span style={{ color: '#6b7075' }}&gt;统计聚合 API · 今日报修/处理中/已完成实时汇总&lt;/span&gt;&lt;/div&gt;&#10;          &lt;div style={{ display: 'flex', gap: 8, alignItems: 'baseline', fontSize: 11.5, lineHeight: 1.4 }}&gt;&lt;span style={{ color: '#172133', fontWeight: 'bold', minWidth: 56 }}&gt;工单管理&lt;/span&gt;&lt;span style={{ color: '#6b7075' }}&gt;repair_order CRUD · 状态流转 · 人工派单/改派&lt;/span&gt;&lt;/div&gt;&#10;          &lt;div style={{ display: 'flex', gap: 8, alignItems: 'baseline', fontSize: 11.5, lineHeight: 1.4 }}&gt;&lt;span style={{ color: '#172133', fontWeight: 'bold', minWidth: 56 }}&gt;用户/房屋&lt;/span&gt;&lt;span style={{ color: '#6b7075' }}&gt;user / house / house_binding 绑定关系管理&lt;/span&gt;&lt;/div&gt;&#10;          &lt;div style={{ display: 'flex', gap: 8, alignItems: 'baseline', fontSize: 11.5, lineHeight: 1.4 }}&gt;&lt;span style={{ color: '#172133', fontWeight: 'bold', minWidth: 56 }}&gt;公告 AI 生成&lt;/span&gt;&lt;span style={{ color: '#6b7075' }}&gt;Notice Agent + LLM 生成标题/正文/影响范围 · 人工审核发布&lt;/span&gt;&lt;/div&gt;&#10;          &lt;div style={{ display: 'flex', gap: 8, alignItems: 'baseline', fontSize: 11.5, lineHeight: 1.4 }}&gt;&lt;span style={{ color: '#172133', fontWeight: 'bold', minWidth: 56 }}&gt;巡检管理&lt;/span&gt;&lt;span style={{ color: '#6b7075' }}&gt;摄像头抓拍 → 视觉模型识别异常 → 巡检记录 + 告警&lt;/span&gt;&lt;/div&gt;&#10;          &lt;div style={{ display: 'flex', gap: 8, alignItems: 'baseline', fontSize: 11.5, lineHeight: 1.4 }}&gt;&lt;span style={{ color: '#172133', fontWeight: 'bold', minWidth: 56 }}&gt;知识缺口审核&lt;/span&gt;&lt;span style={{ color: '#6b7075' }}&gt;knowledge_gap 审核 → 通过自动写入 pgvector 知识库&lt;/span&gt;&lt;/div&gt;&#10;        &lt;/div&gt;&#10;      &lt;/div&gt;&#10;      {/* 维修端 */}&#10;      &lt;div style={{ background: '#fff', borderRadius: 10, padding: '10px 14px', boxShadow: '0 4px 16px rgba(23,33,51,0.06)' }}&gt;&#10;        &lt;div style={{ display: 'flex', alignItems: 'center', gap: 8, marginBottom: 6 }}&gt;&#10;          &lt;span style={{ fontSize: 14, fontWeight: 'bold', color: '#172133' }}&gt;维修端&lt;/span&gt;&#10;          &lt;span style={{ fontSize: 10.5, color: '#BD9B56', background: 'rgba(189,155,86,0.12)', padding: '2px 7px', borderRadius: 4 }}&gt;ToC · Worker&lt;/span&gt;&#10;        &lt;/div&gt;&#10;        &lt;div style={{ display: 'flex', flexDirection: 'column', gap: 3.5 }}&gt;&#10;          &lt;div style={{ display: 'flex', gap: 8, alignItems: 'baseline', fontSize: 11.5, lineHeight: 1.4 }}&gt;&lt;span style={{ color: '#172133', fontWeight: 'bold', minWidth: 56 }}&gt;任务列表&lt;/span&gt;&lt;span style={{ color: '#6b7075' }}&gt;自动派单后查询「我的待处理」工单&lt;/span&gt;&lt;/div&gt;&#10;          &lt;div style={{ display: 'flex', gap: 8, alignItems: 'baseline', fontSize: 11.5, lineHeight: 1.4 }}&gt;&lt;span style={{ color: '#172133', fontWeight: 'bold', minWidth: 56 }}&gt;接单/处理/完成&lt;/span&gt;&lt;span style={{ color: '#6b7075' }}&gt;状态机流转 · 每步触发实时通知&lt;/span&gt;&lt;/div&gt;&#10;          &lt;div style={{ display: 'flex', gap: 8, alignItems: 'baseline', fontSize: 11.5, lineHeight: 1.4 }}&gt;&lt;span style={{ color: '#172133', fontWeight: 'bold', minWidth: 56 }}&gt;消息&lt;/span&gt;&lt;span style={{ color: '#6b7075' }}&gt;事件驱动通知（派单/答复/完成）&lt;/span&gt;&lt;/div&gt;&#10;          &lt;div style={{ display: 'flex', gap: 8, alignItems: 'baseline', fontSize: 11.5, lineHeight: 1.4 }}&gt;&lt;span style={{ color: '#172133', fontWeight: 'bold', minWidth: 56 }}&gt;巡检任务&lt;/span&gt;&lt;span style={{ color: '#6b7075' }}&gt;巡检记录查看 · 异常处理&lt;/span&gt;&lt;/div&gt;&#10;        &lt;/div&gt;&#10;      &lt;/div&gt;&#10;    &lt;/div&gt;&#10;    {/* 右栏：自维护 + Demo */}&#10;    &lt;div style={{ flex: '0 0 285px', display: 'flex', flexDirection: 'column', gap: 10 }}&gt;&#10;      &lt;div style={{ background: 'linear-gradient(135deg, #172133 0%, #22395E 100%)', borderRadius: 12, padding: '16px 18px', color: '#FBFCFA', display: 'flex', flexDirection: 'column', gap: 9 }}&gt;&#10;        &lt;div style={{ color: '#BD9B56', fontSize: 12, letterSpacing: '0.2em' }}&gt;系统自维护自更新&lt;/div&gt;&#10;        &lt;div style={{ display: 'flex', flexDirection: 'column', gap: 6, fontSize: 11.5, lineHeight: 1.45 }}&gt;&#10;          &lt;div&gt;&lt;span style={{ color: '#BD9B56', fontWeight: 'bold' }}&gt;定时清理&lt;/span&gt;&lt;span style={{ color: 'rgba(251,252,250,0.8)' }}&gt;　APScheduler 每日清过期数据/孤儿文件&lt;/span&gt;&lt;/div&gt;&#10;          &lt;div&gt;&lt;span style={{ color: '#BD9B56', fontWeight: 'bold' }}&gt;巡检自动化&lt;/span&gt;&lt;span style={{ color: 'rgba(251,252,250,0.8)' }}&gt;　定时抓拍 + 视觉识别异常&lt;/span&gt;&lt;/div&gt;&#10;          &lt;div&gt;&lt;span style={{ color: '#BD9B56', fontWeight: 'bold' }}&gt;知识自进化&lt;/span&gt;&lt;span style={{ color: 'rgba(251,252,250,0.8)' }}&gt;　反馈→知识缺口→审核→入库&lt;/span&gt;&lt;/div&gt;&#10;          &lt;div&gt;&lt;span style={{ color: '#BD9B56', fontWeight: 'bold' }}&gt;监控告警&lt;/span&gt;&lt;span style={{ color: 'rgba(251,252,250,0.8)' }}&gt;　Prometheus + Grafana&lt;/span&gt;&lt;/div&gt;&#10;          &lt;div&gt;&lt;span style={{ color: '#BD9B56', fontWeight: 'bold' }}&gt;持续交付&lt;/span&gt;&lt;span style={{ color: 'rgba(251,252,250,0.8)' }}&gt;　GitHub Actions 自动测试+发布&lt;/span&gt;&lt;/div&gt;&#10;        &lt;/div&gt;&#10;        &lt;div style={{ fontSize: 11, color: 'rgba(251,252,250,0.6)', lineHeight: 1.5, paddingTop: 7, borderTop: '1px solid rgba(189,155,86,0.3)' }}&gt;无需人工值守，越用越准、越用越稳&lt;/div&gt;&#10;      &lt;/div&gt;&#10;      &lt;div style={{ background: '#fff', borderRadius: 12, padding: '14px 16px', boxShadow: '0 4px 16px rgba(23,33,51,0.06)' }}&gt;&#10;        &lt;div style={{ color: '#BD9B56', fontSize: 11.5, letterSpacing: '0.2em', marginBottom: 8 }}&gt;ONLINE DEMO&lt;/div&gt;&#10;        &lt;div style={{ fontSize: 15, fontFamily: 'Inter, sans-serif', color: '#172133', lineHeight: 1.4 }}&gt;http://119.91.236.85&lt;/div&gt;&#10;        &lt;div style={{ fontSize: 11, color: '#6b7075', lineHeight: 1.6, marginTop: 6 }}&gt;&#10;          业主 guoyi378 · 物业 mayun420&lt;br/&gt;维修 yangfei423　&lt;span style={{ color: '#BD9B56' }}&gt;密码 123456&lt;/span&gt;&#10;        &lt;/div&gt;&#10;        &lt;div style={{ fontSize: 10.5, color: '#a09b8c', marginTop: 6, paddingTop: 6, borderTop: '1px solid rgba(34,57,94,0.1)' }}&gt;GitHub：Xuuuukkk/ai-property-community-agent · MIT&lt;/div&gt;&#10;      &lt;/div&gt;&#10;    &lt;/div&gt;&#10;  &lt;/div&gt;&#10;  &lt;div style={{ flexShrink: 0, height: 30, display: 'flex', alignItems: 'flex-end', justifyContent: 'space-between' }}&gt;&#10;    &lt;span style={{ color: '#BD9B56', fontSize: 12, letterSpacing: '0.1em' }}&gt;云溪花园 · 智慧社区&lt;/span&gt;&#10;    &lt;span style={{ color: '#a09b8c', fontSize: 12 }}&gt;14 / 15&lt;/span&gt;&#10;  &lt;/div&gt;&#10;&lt;/Slide&gt;"/>
         <p:cNvGrpSpPr/>
         <p:nvPr/>
       </p:nvGrpSpPr>
@@ -7600,8 +7600,8 @@
         </p:nvSpPr>
         <p:spPr>
           <a:xfrm rot="0" flipH="0" flipV="0">
-            <a:off x="571500" y="304800"/>
-            <a:ext cx="11049000" cy="152400"/>
+            <a:off x="495300" y="247650"/>
+            <a:ext cx="11201400" cy="142875"/>
           </a:xfrm>
           <a:prstGeom prst="rect"/>
         </p:spPr>
@@ -7614,7 +7614,7 @@
               </a:lnSpc>
             </a:pPr>
             <a:r>
-              <a:rPr lang="en-US" sz="975" spc="-9223372036854775808">
+              <a:rPr lang="en-US" sz="900" spc="-9223372036854775808">
                 <a:solidFill>
                   <a:srgbClr val="BD9B56"/>
                 </a:solidFill>
@@ -7624,7 +7624,7 @@
               <a:t>04 · </a:t>
             </a:r>
             <a:r>
-              <a:rPr lang="zh-CN" sz="975" spc="-9223372036854775808">
+              <a:rPr lang="zh-CN" sz="900" spc="-9223372036854775808">
                 <a:solidFill>
                   <a:srgbClr val="BD9B56"/>
                 </a:solidFill>
@@ -7645,68 +7645,48 @@
         </p:nvSpPr>
         <p:spPr>
           <a:xfrm rot="0" flipH="0" flipV="0">
-            <a:off x="571500" y="514350"/>
-            <a:ext cx="11049000" cy="438150"/>
-          </a:xfrm>
-          <a:prstGeom prst="rect"/>
-        </p:spPr>
-        <p:txBody>
-          <a:bodyPr wrap="none" lIns="0" tIns="0" rIns="0" bIns="0"/>
-          <a:p>
-            <a:pPr>
-              <a:lnSpc>
-                <a:spcPct val="130000"/>
-              </a:lnSpc>
-            </a:pPr>
-            <a:r>
-              <a:rPr lang="zh-CN" sz="2175" b="1">
+            <a:off x="495300" y="428625"/>
+            <a:ext cx="11201400" cy="342900"/>
+          </a:xfrm>
+          <a:prstGeom prst="rect"/>
+        </p:spPr>
+        <p:txBody>
+          <a:bodyPr wrap="none" lIns="0" tIns="0" rIns="0" bIns="0"/>
+          <a:p>
+            <a:pPr>
+              <a:lnSpc>
+                <a:spcPct val="120000"/>
+              </a:lnSpc>
+            </a:pPr>
+            <a:r>
+              <a:rPr lang="zh-CN" sz="1875" b="1">
                 <a:solidFill>
                   <a:srgbClr val="172133"/>
                 </a:solidFill>
                 <a:latin typeface="Microsoft YaHei"/>
                 <a:ea typeface="Microsoft YaHei"/>
               </a:rPr>
-              <a:t>三端应用</a:t>
-            </a:r>
-            <a:r>
-              <a:rPr lang="en-US" sz="2175" b="1">
+              <a:t>三端功能</a:t>
+            </a:r>
+            <a:r>
+              <a:rPr lang="en-US" sz="1875" b="1">
                 <a:solidFill>
                   <a:srgbClr val="172133"/>
                 </a:solidFill>
                 <a:latin typeface="Microsoft YaHei"/>
                 <a:ea typeface="Microsoft YaHei"/>
               </a:rPr>
-              <a:t> + </a:t>
-            </a:r>
-            <a:r>
-              <a:rPr lang="zh-CN" sz="2175" b="1">
+              <a:t> × </a:t>
+            </a:r>
+            <a:r>
+              <a:rPr lang="zh-CN" sz="1875" b="1">
                 <a:solidFill>
                   <a:srgbClr val="172133"/>
                 </a:solidFill>
                 <a:latin typeface="Microsoft YaHei"/>
                 <a:ea typeface="Microsoft YaHei"/>
               </a:rPr>
-              <a:t>自维护自更新，</a:t>
-            </a:r>
-            <a:r>
-              <a:rPr lang="en-US" sz="2175" b="1">
-                <a:solidFill>
-                  <a:srgbClr val="172133"/>
-                </a:solidFill>
-                <a:latin typeface="Microsoft YaHei"/>
-                <a:ea typeface="Microsoft YaHei"/>
-              </a:rPr>
-              <a:t>AI </a:t>
-            </a:r>
-            <a:r>
-              <a:rPr lang="zh-CN" sz="2175" b="1">
-                <a:solidFill>
-                  <a:srgbClr val="172133"/>
-                </a:solidFill>
-                <a:latin typeface="Microsoft YaHei"/>
-                <a:ea typeface="Microsoft YaHei"/>
-              </a:rPr>
-              <a:t>物业社区落地</a:t>
+              <a:t>实现技术：每个功能怎么做出来的</a:t>
             </a:r>
             <a:endParaRPr/>
           </a:p>
@@ -7720,12 +7700,12 @@
         </p:nvSpPr>
         <p:spPr>
           <a:xfrm rot="0" flipH="0" flipV="0">
-            <a:off x="571500" y="952500"/>
-            <a:ext cx="7467600" cy="1352550"/>
+            <a:off x="495300" y="866775"/>
+            <a:ext cx="8315325" cy="1724025"/>
           </a:xfrm>
           <a:prstGeom prst="roundRect">
             <a:avLst>
-              <a:gd name="adj" fmla="val 7042"/>
+              <a:gd name="adj" fmla="val 5525"/>
             </a:avLst>
           </a:prstGeom>
           <a:solidFill>
@@ -7753,8 +7733,8 @@
         </p:nvSpPr>
         <p:spPr>
           <a:xfrm rot="0" flipH="0" flipV="0">
-            <a:off x="742950" y="1085850"/>
-            <a:ext cx="7124700" cy="152400"/>
+            <a:off x="628650" y="962025"/>
+            <a:ext cx="400050" cy="161925"/>
           </a:xfrm>
           <a:prstGeom prst="rect"/>
         </p:spPr>
@@ -7767,64 +7747,9 @@
               </a:lnSpc>
             </a:pPr>
             <a:r>
-              <a:rPr lang="zh-CN" sz="975" spc="-9223372036854775808">
-                <a:solidFill>
-                  <a:srgbClr val="BD9B56"/>
-                </a:solidFill>
-                <a:latin typeface="Microsoft YaHei"/>
-                <a:ea typeface="Microsoft YaHei"/>
-              </a:rPr>
-              <a:t>三端应用</a:t>
-            </a:r>
-            <a:r>
-              <a:rPr lang="en-US" sz="975" spc="-9223372036854775808">
-                <a:solidFill>
-                  <a:srgbClr val="BD9B56"/>
-                </a:solidFill>
-                <a:latin typeface="Microsoft YaHei"/>
-                <a:ea typeface="Microsoft YaHei"/>
-              </a:rPr>
-              <a:t> · </a:t>
-            </a:r>
-            <a:r>
-              <a:rPr lang="zh-CN" sz="975" spc="-9223372036854775808">
-                <a:solidFill>
-                  <a:srgbClr val="BD9B56"/>
-                </a:solidFill>
-                <a:latin typeface="Microsoft YaHei"/>
-                <a:ea typeface="Microsoft YaHei"/>
-              </a:rPr>
-              <a:t>功能与角色路由</a:t>
-            </a:r>
-            <a:endParaRPr/>
-          </a:p>
-        </p:txBody>
-      </p:sp>
-      <p:sp>
-        <p:nvSpPr>
-          <p:cNvPr id="160" name="" descr="{&quot;isTemplate&quot;:true,&quot;type&quot;:&quot;text&quot;}"/>
-          <p:cNvSpPr txBox="1"/>
-          <p:nvPr/>
-        </p:nvSpPr>
-        <p:spPr>
-          <a:xfrm rot="0" flipH="0" flipV="0">
-            <a:off x="742950" y="1343025"/>
-            <a:ext cx="495300" cy="161925"/>
-          </a:xfrm>
-          <a:prstGeom prst="rect"/>
-        </p:spPr>
-        <p:txBody>
-          <a:bodyPr wrap="none" lIns="0" tIns="0" rIns="0" bIns="0"/>
-          <a:p>
-            <a:pPr>
-              <a:lnSpc>
-                <a:spcPct val="100000"/>
-              </a:lnSpc>
-            </a:pPr>
-            <a:r>
               <a:rPr lang="zh-CN" sz="1050" b="1">
                 <a:solidFill>
-                  <a:srgbClr val="BD9B56"/>
+                  <a:srgbClr val="172133"/>
                 </a:solidFill>
                 <a:latin typeface="Microsoft YaHei"/>
                 <a:ea typeface="Microsoft YaHei"/>
@@ -7837,543 +7762,886 @@
       </p:sp>
       <p:sp>
         <p:nvSpPr>
-          <p:cNvPr id="161" name="" descr="{&quot;isTemplate&quot;:true,&quot;type&quot;:&quot;text&quot;}"/>
-          <p:cNvSpPr txBox="1"/>
-          <p:nvPr/>
-        </p:nvSpPr>
-        <p:spPr>
-          <a:xfrm rot="0" flipH="0" flipV="0">
-            <a:off x="1333500" y="1333500"/>
-            <a:ext cx="3714750" cy="228600"/>
-          </a:xfrm>
-          <a:prstGeom prst="rect"/>
-        </p:spPr>
-        <p:txBody>
-          <a:bodyPr wrap="none" lIns="0" tIns="0" rIns="0" bIns="0"/>
-          <a:p>
-            <a:pPr>
-              <a:lnSpc>
-                <a:spcPct val="155000"/>
-              </a:lnSpc>
-            </a:pPr>
-            <a:r>
-              <a:rPr lang="en-US" sz="938">
-                <a:solidFill>
-                  <a:srgbClr val="5F5E5A"/>
-                </a:solidFill>
-                <a:latin typeface="Microsoft YaHei"/>
-                <a:ea typeface="Microsoft YaHei"/>
-              </a:rPr>
-              <a:t>AI </a:t>
-            </a:r>
-            <a:r>
-              <a:rPr lang="zh-CN" sz="938">
-                <a:solidFill>
-                  <a:srgbClr val="5F5E5A"/>
-                </a:solidFill>
-                <a:latin typeface="Microsoft YaHei"/>
-                <a:ea typeface="Microsoft YaHei"/>
-              </a:rPr>
-              <a:t>助手（统一入口）·</a:t>
-            </a:r>
-            <a:r>
-              <a:rPr lang="en-US" sz="938">
-                <a:solidFill>
-                  <a:srgbClr val="5F5E5A"/>
-                </a:solidFill>
-                <a:latin typeface="Microsoft YaHei"/>
-                <a:ea typeface="Microsoft YaHei"/>
-              </a:rPr>
-              <a:t> </a:t>
-            </a:r>
-            <a:r>
-              <a:rPr lang="zh-CN" sz="938">
-                <a:solidFill>
-                  <a:srgbClr val="5F5E5A"/>
-                </a:solidFill>
-                <a:latin typeface="Microsoft YaHei"/>
-                <a:ea typeface="Microsoft YaHei"/>
-              </a:rPr>
-              <a:t>对话报修</a:t>
-            </a:r>
-            <a:r>
-              <a:rPr lang="en-US" sz="938">
-                <a:solidFill>
-                  <a:srgbClr val="5F5E5A"/>
-                </a:solidFill>
-                <a:latin typeface="Microsoft YaHei"/>
-                <a:ea typeface="Microsoft YaHei"/>
-              </a:rPr>
-              <a:t> · </a:t>
-            </a:r>
-            <a:r>
-              <a:rPr lang="zh-CN" sz="938">
-                <a:solidFill>
-                  <a:srgbClr val="5F5E5A"/>
-                </a:solidFill>
-                <a:latin typeface="Microsoft YaHei"/>
-                <a:ea typeface="Microsoft YaHei"/>
-              </a:rPr>
-              <a:t>缴费查询</a:t>
-            </a:r>
-            <a:r>
-              <a:rPr lang="en-US" sz="938">
-                <a:solidFill>
-                  <a:srgbClr val="5F5E5A"/>
-                </a:solidFill>
-                <a:latin typeface="Microsoft YaHei"/>
-                <a:ea typeface="Microsoft YaHei"/>
-              </a:rPr>
-              <a:t> · </a:t>
-            </a:r>
-            <a:r>
-              <a:rPr lang="zh-CN" sz="938">
-                <a:solidFill>
-                  <a:srgbClr val="5F5E5A"/>
-                </a:solidFill>
-                <a:latin typeface="Microsoft YaHei"/>
-                <a:ea typeface="Microsoft YaHei"/>
-              </a:rPr>
-              <a:t>公告</a:t>
-            </a:r>
-            <a:r>
-              <a:rPr lang="en-US" sz="938">
-                <a:solidFill>
-                  <a:srgbClr val="5F5E5A"/>
-                </a:solidFill>
-                <a:latin typeface="Microsoft YaHei"/>
-                <a:ea typeface="Microsoft YaHei"/>
-              </a:rPr>
-              <a:t> · </a:t>
-            </a:r>
-            <a:r>
-              <a:rPr lang="zh-CN" sz="938">
-                <a:solidFill>
-                  <a:srgbClr val="5F5E5A"/>
-                </a:solidFill>
-                <a:latin typeface="Microsoft YaHei"/>
-                <a:ea typeface="Microsoft YaHei"/>
-              </a:rPr>
-              <a:t>我的工单</a:t>
-            </a:r>
-            <a:r>
-              <a:rPr lang="en-US" sz="938">
-                <a:solidFill>
-                  <a:srgbClr val="5F5E5A"/>
-                </a:solidFill>
-                <a:latin typeface="Microsoft YaHei"/>
-                <a:ea typeface="Microsoft YaHei"/>
-              </a:rPr>
-              <a:t> · </a:t>
-            </a:r>
-            <a:r>
-              <a:rPr lang="zh-CN" sz="938">
-                <a:solidFill>
-                  <a:srgbClr val="5F5E5A"/>
-                </a:solidFill>
-                <a:latin typeface="Microsoft YaHei"/>
-                <a:ea typeface="Microsoft YaHei"/>
-              </a:rPr>
-              <a:t>问题上报</a:t>
-            </a:r>
-            <a:endParaRPr/>
-          </a:p>
-        </p:txBody>
-      </p:sp>
-      <p:sp>
-        <p:nvSpPr>
-          <p:cNvPr id="162" name="" descr="{&quot;isTemplate&quot;:true,&quot;type&quot;:&quot;text&quot;}"/>
-          <p:cNvSpPr txBox="1"/>
-          <p:nvPr/>
-        </p:nvSpPr>
-        <p:spPr>
-          <a:xfrm rot="0" flipH="0" flipV="0">
-            <a:off x="742950" y="1647825"/>
-            <a:ext cx="495300" cy="161925"/>
-          </a:xfrm>
-          <a:prstGeom prst="rect"/>
-        </p:spPr>
-        <p:txBody>
-          <a:bodyPr wrap="none" lIns="0" tIns="0" rIns="0" bIns="0"/>
-          <a:p>
-            <a:pPr>
-              <a:lnSpc>
-                <a:spcPct val="100000"/>
-              </a:lnSpc>
-            </a:pPr>
-            <a:r>
-              <a:rPr lang="zh-CN" sz="1050" b="1">
-                <a:solidFill>
-                  <a:srgbClr val="BD9B56"/>
-                </a:solidFill>
-                <a:latin typeface="Microsoft YaHei"/>
-                <a:ea typeface="Microsoft YaHei"/>
-              </a:rPr>
-              <a:t>物业端</a:t>
-            </a:r>
-            <a:endParaRPr/>
-          </a:p>
-        </p:txBody>
-      </p:sp>
-      <p:sp>
-        <p:nvSpPr>
-          <p:cNvPr id="163" name="" descr="{&quot;isTemplate&quot;:true,&quot;type&quot;:&quot;text&quot;}"/>
-          <p:cNvSpPr txBox="1"/>
-          <p:nvPr/>
-        </p:nvSpPr>
-        <p:spPr>
-          <a:xfrm rot="0" flipH="0" flipV="0">
-            <a:off x="1333500" y="1638300"/>
-            <a:ext cx="4238625" cy="228600"/>
-          </a:xfrm>
-          <a:prstGeom prst="rect"/>
-        </p:spPr>
-        <p:txBody>
-          <a:bodyPr wrap="none" lIns="0" tIns="0" rIns="0" bIns="0"/>
-          <a:p>
-            <a:pPr>
-              <a:lnSpc>
-                <a:spcPct val="155000"/>
-              </a:lnSpc>
-            </a:pPr>
-            <a:r>
-              <a:rPr lang="zh-CN" sz="938">
-                <a:solidFill>
-                  <a:srgbClr val="5F5E5A"/>
-                </a:solidFill>
-                <a:latin typeface="Microsoft YaHei"/>
-                <a:ea typeface="Microsoft YaHei"/>
-              </a:rPr>
-              <a:t>数据看板</a:t>
-            </a:r>
-            <a:r>
-              <a:rPr lang="en-US" sz="938">
-                <a:solidFill>
-                  <a:srgbClr val="5F5E5A"/>
-                </a:solidFill>
-                <a:latin typeface="Microsoft YaHei"/>
-                <a:ea typeface="Microsoft YaHei"/>
-              </a:rPr>
-              <a:t> · </a:t>
-            </a:r>
-            <a:r>
-              <a:rPr lang="zh-CN" sz="938">
-                <a:solidFill>
-                  <a:srgbClr val="5F5E5A"/>
-                </a:solidFill>
-                <a:latin typeface="Microsoft YaHei"/>
-                <a:ea typeface="Microsoft YaHei"/>
-              </a:rPr>
-              <a:t>工单管理</a:t>
-            </a:r>
-            <a:r>
-              <a:rPr lang="en-US" sz="938">
-                <a:solidFill>
-                  <a:srgbClr val="5F5E5A"/>
-                </a:solidFill>
-                <a:latin typeface="Microsoft YaHei"/>
-                <a:ea typeface="Microsoft YaHei"/>
-              </a:rPr>
-              <a:t> · </a:t>
-            </a:r>
-            <a:r>
-              <a:rPr lang="zh-CN" sz="938">
-                <a:solidFill>
-                  <a:srgbClr val="5F5E5A"/>
-                </a:solidFill>
-                <a:latin typeface="Microsoft YaHei"/>
-                <a:ea typeface="Microsoft YaHei"/>
-              </a:rPr>
-              <a:t>用户</a:t>
-            </a:r>
-            <a:r>
-              <a:rPr lang="en-US" sz="938">
-                <a:solidFill>
-                  <a:srgbClr val="5F5E5A"/>
-                </a:solidFill>
-                <a:latin typeface="Microsoft YaHei"/>
-                <a:ea typeface="Microsoft YaHei"/>
-              </a:rPr>
-              <a:t>/</a:t>
-            </a:r>
-            <a:r>
-              <a:rPr lang="zh-CN" sz="938">
-                <a:solidFill>
-                  <a:srgbClr val="5F5E5A"/>
-                </a:solidFill>
-                <a:latin typeface="Microsoft YaHei"/>
-                <a:ea typeface="Microsoft YaHei"/>
-              </a:rPr>
-              <a:t>房屋管理</a:t>
-            </a:r>
-            <a:r>
-              <a:rPr lang="en-US" sz="938">
-                <a:solidFill>
-                  <a:srgbClr val="5F5E5A"/>
-                </a:solidFill>
-                <a:latin typeface="Microsoft YaHei"/>
-                <a:ea typeface="Microsoft YaHei"/>
-              </a:rPr>
-              <a:t> · </a:t>
-            </a:r>
-            <a:r>
-              <a:rPr lang="zh-CN" sz="938">
-                <a:solidFill>
-                  <a:srgbClr val="5F5E5A"/>
-                </a:solidFill>
-                <a:latin typeface="Microsoft YaHei"/>
-                <a:ea typeface="Microsoft YaHei"/>
-              </a:rPr>
-              <a:t>公告（</a:t>
-            </a:r>
-            <a:r>
-              <a:rPr lang="en-US" sz="938">
-                <a:solidFill>
-                  <a:srgbClr val="5F5E5A"/>
-                </a:solidFill>
-                <a:latin typeface="Microsoft YaHei"/>
-                <a:ea typeface="Microsoft YaHei"/>
-              </a:rPr>
-              <a:t>AI </a:t>
-            </a:r>
-            <a:r>
-              <a:rPr lang="zh-CN" sz="938">
-                <a:solidFill>
-                  <a:srgbClr val="5F5E5A"/>
-                </a:solidFill>
-                <a:latin typeface="Microsoft YaHei"/>
-                <a:ea typeface="Microsoft YaHei"/>
-              </a:rPr>
-              <a:t>生成）·</a:t>
-            </a:r>
-            <a:r>
-              <a:rPr lang="en-US" sz="938">
-                <a:solidFill>
-                  <a:srgbClr val="5F5E5A"/>
-                </a:solidFill>
-                <a:latin typeface="Microsoft YaHei"/>
-                <a:ea typeface="Microsoft YaHei"/>
-              </a:rPr>
-              <a:t> </a:t>
-            </a:r>
-            <a:r>
-              <a:rPr lang="zh-CN" sz="938">
-                <a:solidFill>
-                  <a:srgbClr val="5F5E5A"/>
-                </a:solidFill>
-                <a:latin typeface="Microsoft YaHei"/>
-                <a:ea typeface="Microsoft YaHei"/>
-              </a:rPr>
-              <a:t>巡检管理</a:t>
-            </a:r>
-            <a:r>
-              <a:rPr lang="en-US" sz="938">
-                <a:solidFill>
-                  <a:srgbClr val="5F5E5A"/>
-                </a:solidFill>
-                <a:latin typeface="Microsoft YaHei"/>
-                <a:ea typeface="Microsoft YaHei"/>
-              </a:rPr>
-              <a:t> · </a:t>
-            </a:r>
-            <a:r>
-              <a:rPr lang="zh-CN" sz="938">
-                <a:solidFill>
-                  <a:srgbClr val="5F5E5A"/>
-                </a:solidFill>
-                <a:latin typeface="Microsoft YaHei"/>
-                <a:ea typeface="Microsoft YaHei"/>
-              </a:rPr>
-              <a:t>知识缺口审核</a:t>
-            </a:r>
-            <a:endParaRPr/>
-          </a:p>
-        </p:txBody>
-      </p:sp>
-      <p:sp>
-        <p:nvSpPr>
-          <p:cNvPr id="164" name="" descr="{&quot;isTemplate&quot;:true,&quot;type&quot;:&quot;text&quot;}"/>
-          <p:cNvSpPr txBox="1"/>
-          <p:nvPr/>
-        </p:nvSpPr>
-        <p:spPr>
-          <a:xfrm rot="0" flipH="0" flipV="0">
-            <a:off x="742950" y="1952625"/>
-            <a:ext cx="495300" cy="161925"/>
-          </a:xfrm>
-          <a:prstGeom prst="rect"/>
-        </p:spPr>
-        <p:txBody>
-          <a:bodyPr wrap="none" lIns="0" tIns="0" rIns="0" bIns="0"/>
-          <a:p>
-            <a:pPr>
-              <a:lnSpc>
-                <a:spcPct val="100000"/>
-              </a:lnSpc>
-            </a:pPr>
-            <a:r>
-              <a:rPr lang="zh-CN" sz="1050" b="1">
-                <a:solidFill>
-                  <a:srgbClr val="BD9B56"/>
-                </a:solidFill>
-                <a:latin typeface="Microsoft YaHei"/>
-                <a:ea typeface="Microsoft YaHei"/>
-              </a:rPr>
-              <a:t>维修端</a:t>
-            </a:r>
-            <a:endParaRPr/>
-          </a:p>
-        </p:txBody>
-      </p:sp>
-      <p:sp>
-        <p:nvSpPr>
-          <p:cNvPr id="165" name="" descr="{&quot;isTemplate&quot;:true,&quot;type&quot;:&quot;text&quot;}"/>
-          <p:cNvSpPr txBox="1"/>
-          <p:nvPr/>
-        </p:nvSpPr>
-        <p:spPr>
-          <a:xfrm rot="0" flipH="0" flipV="0">
-            <a:off x="1333500" y="1943100"/>
-            <a:ext cx="2305050" cy="228600"/>
-          </a:xfrm>
-          <a:prstGeom prst="rect"/>
-        </p:spPr>
-        <p:txBody>
-          <a:bodyPr wrap="none" lIns="0" tIns="0" rIns="0" bIns="0"/>
-          <a:p>
-            <a:pPr>
-              <a:lnSpc>
-                <a:spcPct val="155000"/>
-              </a:lnSpc>
-            </a:pPr>
-            <a:r>
-              <a:rPr lang="zh-CN" sz="938">
-                <a:solidFill>
-                  <a:srgbClr val="5F5E5A"/>
-                </a:solidFill>
-                <a:latin typeface="Microsoft YaHei"/>
-                <a:ea typeface="Microsoft YaHei"/>
-              </a:rPr>
-              <a:t>任务列表</a:t>
-            </a:r>
-            <a:r>
-              <a:rPr lang="en-US" sz="938">
-                <a:solidFill>
-                  <a:srgbClr val="5F5E5A"/>
-                </a:solidFill>
-                <a:latin typeface="Microsoft YaHei"/>
-                <a:ea typeface="Microsoft YaHei"/>
-              </a:rPr>
-              <a:t> · </a:t>
-            </a:r>
-            <a:r>
-              <a:rPr lang="zh-CN" sz="938">
-                <a:solidFill>
-                  <a:srgbClr val="5F5E5A"/>
-                </a:solidFill>
-                <a:latin typeface="Microsoft YaHei"/>
-                <a:ea typeface="Microsoft YaHei"/>
-              </a:rPr>
-              <a:t>接单</a:t>
-            </a:r>
-            <a:r>
-              <a:rPr lang="en-US" sz="938">
-                <a:solidFill>
-                  <a:srgbClr val="5F5E5A"/>
-                </a:solidFill>
-                <a:latin typeface="Microsoft YaHei"/>
-                <a:ea typeface="Microsoft YaHei"/>
-              </a:rPr>
-              <a:t>/</a:t>
-            </a:r>
-            <a:r>
-              <a:rPr lang="zh-CN" sz="938">
-                <a:solidFill>
-                  <a:srgbClr val="5F5E5A"/>
-                </a:solidFill>
-                <a:latin typeface="Microsoft YaHei"/>
-                <a:ea typeface="Microsoft YaHei"/>
-              </a:rPr>
-              <a:t>处理</a:t>
-            </a:r>
-            <a:r>
-              <a:rPr lang="en-US" sz="938">
-                <a:solidFill>
-                  <a:srgbClr val="5F5E5A"/>
-                </a:solidFill>
-                <a:latin typeface="Microsoft YaHei"/>
-                <a:ea typeface="Microsoft YaHei"/>
-              </a:rPr>
-              <a:t>/</a:t>
-            </a:r>
-            <a:r>
-              <a:rPr lang="zh-CN" sz="938">
-                <a:solidFill>
-                  <a:srgbClr val="5F5E5A"/>
-                </a:solidFill>
-                <a:latin typeface="Microsoft YaHei"/>
-                <a:ea typeface="Microsoft YaHei"/>
-              </a:rPr>
-              <a:t>完成</a:t>
-            </a:r>
-            <a:r>
-              <a:rPr lang="en-US" sz="938">
-                <a:solidFill>
-                  <a:srgbClr val="5F5E5A"/>
-                </a:solidFill>
-                <a:latin typeface="Microsoft YaHei"/>
-                <a:ea typeface="Microsoft YaHei"/>
-              </a:rPr>
-              <a:t> · </a:t>
-            </a:r>
-            <a:r>
-              <a:rPr lang="zh-CN" sz="938">
-                <a:solidFill>
-                  <a:srgbClr val="5F5E5A"/>
-                </a:solidFill>
-                <a:latin typeface="Microsoft YaHei"/>
-                <a:ea typeface="Microsoft YaHei"/>
-              </a:rPr>
-              <a:t>消息</a:t>
-            </a:r>
-            <a:r>
-              <a:rPr lang="en-US" sz="938">
-                <a:solidFill>
-                  <a:srgbClr val="5F5E5A"/>
-                </a:solidFill>
-                <a:latin typeface="Microsoft YaHei"/>
-                <a:ea typeface="Microsoft YaHei"/>
-              </a:rPr>
-              <a:t> · </a:t>
-            </a:r>
-            <a:r>
-              <a:rPr lang="zh-CN" sz="938">
-                <a:solidFill>
-                  <a:srgbClr val="5F5E5A"/>
-                </a:solidFill>
-                <a:latin typeface="Microsoft YaHei"/>
-                <a:ea typeface="Microsoft YaHei"/>
-              </a:rPr>
-              <a:t>巡检任务</a:t>
-            </a:r>
-            <a:endParaRPr/>
-          </a:p>
-        </p:txBody>
-      </p:sp>
-      <p:sp>
-        <p:nvSpPr>
-          <p:cNvPr id="166" name=""/>
+          <p:cNvPr id="160" name=""/>
           <p:cNvSpPr/>
           <p:nvPr/>
         </p:nvSpPr>
         <p:spPr>
           <a:xfrm rot="0" flipH="0" flipV="0">
-            <a:off x="571500" y="2419350"/>
-            <a:ext cx="7467600" cy="457200"/>
+            <a:off x="1104900" y="962025"/>
+            <a:ext cx="714375" cy="161925"/>
           </a:xfrm>
           <a:prstGeom prst="roundRect">
             <a:avLst>
-              <a:gd name="adj" fmla="val 20833"/>
+              <a:gd name="adj" fmla="val 23529"/>
+            </a:avLst>
+          </a:prstGeom>
+          <a:solidFill>
+            <a:srgbClr val="BD9B56">
+              <a:alpha val="12000"/>
+            </a:srgbClr>
+          </a:solidFill>
+          <a:ln/>
+        </p:spPr>
+        <p:txBody>
+          <a:bodyPr/>
+          <a:p/>
+        </p:txBody>
+      </p:sp>
+      <p:sp>
+        <p:nvSpPr>
+          <p:cNvPr id="161" name="" descr="{&quot;isTemplate&quot;:true,&quot;type&quot;:&quot;text&quot;}"/>
+          <p:cNvSpPr txBox="1"/>
+          <p:nvPr/>
+        </p:nvSpPr>
+        <p:spPr>
+          <a:xfrm rot="0" flipH="0" flipV="0">
+            <a:off x="1104900" y="962025"/>
+            <a:ext cx="714375" cy="161925"/>
+          </a:xfrm>
+          <a:prstGeom prst="rect"/>
+        </p:spPr>
+        <p:txBody>
+          <a:bodyPr wrap="none" lIns="50006" tIns="14288" rIns="50006" bIns="14288"/>
+          <a:p>
+            <a:pPr>
+              <a:lnSpc>
+                <a:spcPct val="100000"/>
+              </a:lnSpc>
+            </a:pPr>
+            <a:r>
+              <a:rPr lang="en-US" sz="788">
+                <a:solidFill>
+                  <a:srgbClr val="BD9B56"/>
+                </a:solidFill>
+                <a:highlight>
+                  <a:srgbClr val="BD9B56">
+                    <a:alpha val="12000"/>
+                  </a:srgbClr>
+                </a:highlight>
+                <a:latin typeface="Microsoft YaHei"/>
+                <a:ea typeface="Microsoft YaHei"/>
+              </a:rPr>
+              <a:t>ToC · Owner</a:t>
+            </a:r>
+            <a:endParaRPr/>
+          </a:p>
+        </p:txBody>
+      </p:sp>
+      <p:sp>
+        <p:nvSpPr>
+          <p:cNvPr id="162" name="" descr="{&quot;isTemplate&quot;:true,&quot;type&quot;:&quot;text&quot;}"/>
+          <p:cNvSpPr txBox="1"/>
+          <p:nvPr/>
+        </p:nvSpPr>
+        <p:spPr>
+          <a:xfrm rot="0" flipH="0" flipV="0">
+            <a:off x="628650" y="1181100"/>
+            <a:ext cx="533400" cy="190500"/>
+          </a:xfrm>
+          <a:prstGeom prst="rect"/>
+        </p:spPr>
+        <p:txBody>
+          <a:bodyPr wrap="none" lIns="0" tIns="0" rIns="0" bIns="0"/>
+          <a:p>
+            <a:pPr>
+              <a:lnSpc>
+                <a:spcPct val="140000"/>
+              </a:lnSpc>
+            </a:pPr>
+            <a:r>
+              <a:rPr lang="en-US" sz="863" b="1">
+                <a:solidFill>
+                  <a:srgbClr val="172133"/>
+                </a:solidFill>
+                <a:latin typeface="Microsoft YaHei"/>
+                <a:ea typeface="Microsoft YaHei"/>
+              </a:rPr>
+              <a:t>AI </a:t>
+            </a:r>
+            <a:r>
+              <a:rPr lang="zh-CN" sz="863" b="1">
+                <a:solidFill>
+                  <a:srgbClr val="172133"/>
+                </a:solidFill>
+                <a:latin typeface="Microsoft YaHei"/>
+                <a:ea typeface="Microsoft YaHei"/>
+              </a:rPr>
+              <a:t>助手</a:t>
+            </a:r>
+            <a:endParaRPr/>
+          </a:p>
+        </p:txBody>
+      </p:sp>
+      <p:sp>
+        <p:nvSpPr>
+          <p:cNvPr id="163" name="" descr="{&quot;isTemplate&quot;:true,&quot;type&quot;:&quot;text&quot;}"/>
+          <p:cNvSpPr txBox="1"/>
+          <p:nvPr/>
+        </p:nvSpPr>
+        <p:spPr>
+          <a:xfrm rot="0" flipH="0" flipV="0">
+            <a:off x="1238250" y="1181100"/>
+            <a:ext cx="3933825" cy="190500"/>
+          </a:xfrm>
+          <a:prstGeom prst="rect"/>
+        </p:spPr>
+        <p:txBody>
+          <a:bodyPr wrap="none" lIns="0" tIns="0" rIns="0" bIns="0"/>
+          <a:p>
+            <a:pPr>
+              <a:lnSpc>
+                <a:spcPct val="140000"/>
+              </a:lnSpc>
+            </a:pPr>
+            <a:r>
+              <a:rPr lang="en-US" sz="863">
+                <a:solidFill>
+                  <a:srgbClr val="6B7075"/>
+                </a:solidFill>
+                <a:latin typeface="Microsoft YaHei"/>
+                <a:ea typeface="Microsoft YaHei"/>
+              </a:rPr>
+              <a:t>LangGraph </a:t>
+            </a:r>
+            <a:r>
+              <a:rPr lang="zh-CN" sz="863">
+                <a:solidFill>
+                  <a:srgbClr val="6B7075"/>
+                </a:solidFill>
+                <a:latin typeface="Microsoft YaHei"/>
+                <a:ea typeface="Microsoft YaHei"/>
+              </a:rPr>
+              <a:t>多</a:t>
+            </a:r>
+            <a:r>
+              <a:rPr lang="en-US" sz="863">
+                <a:solidFill>
+                  <a:srgbClr val="6B7075"/>
+                </a:solidFill>
+                <a:latin typeface="Microsoft YaHei"/>
+                <a:ea typeface="Microsoft YaHei"/>
+              </a:rPr>
+              <a:t> Agent</a:t>
+            </a:r>
+            <a:r>
+              <a:rPr lang="zh-CN" sz="863">
+                <a:solidFill>
+                  <a:srgbClr val="6B7075"/>
+                </a:solidFill>
+                <a:latin typeface="Microsoft YaHei"/>
+                <a:ea typeface="Microsoft YaHei"/>
+              </a:rPr>
+              <a:t>：</a:t>
+            </a:r>
+            <a:r>
+              <a:rPr lang="en-US" sz="863">
+                <a:solidFill>
+                  <a:srgbClr val="6B7075"/>
+                </a:solidFill>
+                <a:latin typeface="Microsoft YaHei"/>
+                <a:ea typeface="Microsoft YaHei"/>
+              </a:rPr>
+              <a:t>Personal </a:t>
+            </a:r>
+            <a:r>
+              <a:rPr lang="zh-CN" sz="863">
+                <a:solidFill>
+                  <a:srgbClr val="6B7075"/>
+                </a:solidFill>
+                <a:latin typeface="Microsoft YaHei"/>
+                <a:ea typeface="Microsoft YaHei"/>
+              </a:rPr>
+              <a:t>对话</a:t>
+            </a:r>
+            <a:r>
+              <a:rPr lang="en-US" sz="863">
+                <a:solidFill>
+                  <a:srgbClr val="6B7075"/>
+                </a:solidFill>
+                <a:latin typeface="Microsoft YaHei"/>
+                <a:ea typeface="Microsoft YaHei"/>
+              </a:rPr>
+              <a:t> → Router </a:t>
+            </a:r>
+            <a:r>
+              <a:rPr lang="zh-CN" sz="863">
+                <a:solidFill>
+                  <a:srgbClr val="6B7075"/>
+                </a:solidFill>
+                <a:latin typeface="Microsoft YaHei"/>
+                <a:ea typeface="Microsoft YaHei"/>
+              </a:rPr>
+              <a:t>意图识别</a:t>
+            </a:r>
+            <a:r>
+              <a:rPr lang="en-US" sz="863">
+                <a:solidFill>
+                  <a:srgbClr val="6B7075"/>
+                </a:solidFill>
+                <a:latin typeface="Microsoft YaHei"/>
+                <a:ea typeface="Microsoft YaHei"/>
+              </a:rPr>
+              <a:t> → Domain </a:t>
+            </a:r>
+            <a:r>
+              <a:rPr lang="zh-CN" sz="863">
+                <a:solidFill>
+                  <a:srgbClr val="6B7075"/>
+                </a:solidFill>
+                <a:latin typeface="Microsoft YaHei"/>
+                <a:ea typeface="Microsoft YaHei"/>
+              </a:rPr>
+              <a:t>工具调用</a:t>
+            </a:r>
+            <a:endParaRPr/>
+          </a:p>
+        </p:txBody>
+      </p:sp>
+      <p:sp>
+        <p:nvSpPr>
+          <p:cNvPr id="164" name="" descr="{&quot;isTemplate&quot;:true,&quot;type&quot;:&quot;text&quot;}"/>
+          <p:cNvSpPr txBox="1"/>
+          <p:nvPr/>
+        </p:nvSpPr>
+        <p:spPr>
+          <a:xfrm rot="0" flipH="0" flipV="0">
+            <a:off x="628650" y="1409700"/>
+            <a:ext cx="533400" cy="190500"/>
+          </a:xfrm>
+          <a:prstGeom prst="rect"/>
+        </p:spPr>
+        <p:txBody>
+          <a:bodyPr wrap="none" lIns="0" tIns="0" rIns="0" bIns="0"/>
+          <a:p>
+            <a:pPr>
+              <a:lnSpc>
+                <a:spcPct val="140000"/>
+              </a:lnSpc>
+            </a:pPr>
+            <a:r>
+              <a:rPr lang="zh-CN" sz="863" b="1">
+                <a:solidFill>
+                  <a:srgbClr val="172133"/>
+                </a:solidFill>
+                <a:latin typeface="Microsoft YaHei"/>
+                <a:ea typeface="Microsoft YaHei"/>
+              </a:rPr>
+              <a:t>对话报修</a:t>
+            </a:r>
+            <a:endParaRPr/>
+          </a:p>
+        </p:txBody>
+      </p:sp>
+      <p:sp>
+        <p:nvSpPr>
+          <p:cNvPr id="165" name="" descr="{&quot;isTemplate&quot;:true,&quot;type&quot;:&quot;text&quot;}"/>
+          <p:cNvSpPr txBox="1"/>
+          <p:nvPr/>
+        </p:nvSpPr>
+        <p:spPr>
+          <a:xfrm rot="0" flipH="0" flipV="0">
+            <a:off x="1238250" y="1409700"/>
+            <a:ext cx="3600450" cy="190500"/>
+          </a:xfrm>
+          <a:prstGeom prst="rect"/>
+        </p:spPr>
+        <p:txBody>
+          <a:bodyPr wrap="none" lIns="0" tIns="0" rIns="0" bIns="0"/>
+          <a:p>
+            <a:pPr>
+              <a:lnSpc>
+                <a:spcPct val="140000"/>
+              </a:lnSpc>
+            </a:pPr>
+            <a:r>
+              <a:rPr lang="en-US" sz="863">
+                <a:solidFill>
+                  <a:srgbClr val="6B7075"/>
+                </a:solidFill>
+                <a:latin typeface="Microsoft YaHei"/>
+                <a:ea typeface="Microsoft YaHei"/>
+              </a:rPr>
+              <a:t>Repair Agent · </a:t>
+            </a:r>
+            <a:r>
+              <a:rPr lang="zh-CN" sz="863">
+                <a:solidFill>
+                  <a:srgbClr val="6B7075"/>
+                </a:solidFill>
+                <a:latin typeface="Microsoft YaHei"/>
+                <a:ea typeface="Microsoft YaHei"/>
+              </a:rPr>
+              <a:t>多轮状态机补全房屋</a:t>
+            </a:r>
+            <a:r>
+              <a:rPr lang="en-US" sz="863">
+                <a:solidFill>
+                  <a:srgbClr val="6B7075"/>
+                </a:solidFill>
+                <a:latin typeface="Microsoft YaHei"/>
+                <a:ea typeface="Microsoft YaHei"/>
+              </a:rPr>
+              <a:t>/</a:t>
+            </a:r>
+            <a:r>
+              <a:rPr lang="zh-CN" sz="863">
+                <a:solidFill>
+                  <a:srgbClr val="6B7075"/>
+                </a:solidFill>
+                <a:latin typeface="Microsoft YaHei"/>
+                <a:ea typeface="Microsoft YaHei"/>
+              </a:rPr>
+              <a:t>类型</a:t>
+            </a:r>
+            <a:r>
+              <a:rPr lang="en-US" sz="863">
+                <a:solidFill>
+                  <a:srgbClr val="6B7075"/>
+                </a:solidFill>
+                <a:latin typeface="Microsoft YaHei"/>
+                <a:ea typeface="Microsoft YaHei"/>
+              </a:rPr>
+              <a:t> · </a:t>
+            </a:r>
+            <a:r>
+              <a:rPr lang="zh-CN" sz="863">
+                <a:solidFill>
+                  <a:srgbClr val="6B7075"/>
+                </a:solidFill>
+                <a:latin typeface="Microsoft YaHei"/>
+                <a:ea typeface="Microsoft YaHei"/>
+              </a:rPr>
+              <a:t>自动派单（技能</a:t>
+            </a:r>
+            <a:r>
+              <a:rPr lang="en-US" sz="863">
+                <a:solidFill>
+                  <a:srgbClr val="6B7075"/>
+                </a:solidFill>
+                <a:latin typeface="Microsoft YaHei"/>
+                <a:ea typeface="Microsoft YaHei"/>
+              </a:rPr>
+              <a:t>+</a:t>
+            </a:r>
+            <a:r>
+              <a:rPr lang="zh-CN" sz="863">
+                <a:solidFill>
+                  <a:srgbClr val="6B7075"/>
+                </a:solidFill>
+                <a:latin typeface="Microsoft YaHei"/>
+                <a:ea typeface="Microsoft YaHei"/>
+              </a:rPr>
+              <a:t>在岗</a:t>
+            </a:r>
+            <a:r>
+              <a:rPr lang="en-US" sz="863">
+                <a:solidFill>
+                  <a:srgbClr val="6B7075"/>
+                </a:solidFill>
+                <a:latin typeface="Microsoft YaHei"/>
+                <a:ea typeface="Microsoft YaHei"/>
+              </a:rPr>
+              <a:t>+</a:t>
+            </a:r>
+            <a:r>
+              <a:rPr lang="zh-CN" sz="863">
+                <a:solidFill>
+                  <a:srgbClr val="6B7075"/>
+                </a:solidFill>
+                <a:latin typeface="Microsoft YaHei"/>
+                <a:ea typeface="Microsoft YaHei"/>
+              </a:rPr>
+              <a:t>工号）</a:t>
+            </a:r>
+            <a:endParaRPr/>
+          </a:p>
+        </p:txBody>
+      </p:sp>
+      <p:sp>
+        <p:nvSpPr>
+          <p:cNvPr id="166" name="" descr="{&quot;isTemplate&quot;:true,&quot;type&quot;:&quot;text&quot;}"/>
+          <p:cNvSpPr txBox="1"/>
+          <p:nvPr/>
+        </p:nvSpPr>
+        <p:spPr>
+          <a:xfrm rot="0" flipH="0" flipV="0">
+            <a:off x="628650" y="1628775"/>
+            <a:ext cx="533400" cy="190500"/>
+          </a:xfrm>
+          <a:prstGeom prst="rect"/>
+        </p:spPr>
+        <p:txBody>
+          <a:bodyPr wrap="none" lIns="0" tIns="0" rIns="0" bIns="0"/>
+          <a:p>
+            <a:pPr>
+              <a:lnSpc>
+                <a:spcPct val="140000"/>
+              </a:lnSpc>
+            </a:pPr>
+            <a:r>
+              <a:rPr lang="zh-CN" sz="863" b="1">
+                <a:solidFill>
+                  <a:srgbClr val="172133"/>
+                </a:solidFill>
+                <a:latin typeface="Microsoft YaHei"/>
+                <a:ea typeface="Microsoft YaHei"/>
+              </a:rPr>
+              <a:t>缴费查询</a:t>
+            </a:r>
+            <a:endParaRPr/>
+          </a:p>
+        </p:txBody>
+      </p:sp>
+      <p:sp>
+        <p:nvSpPr>
+          <p:cNvPr id="167" name="" descr="{&quot;isTemplate&quot;:true,&quot;type&quot;:&quot;text&quot;}"/>
+          <p:cNvSpPr txBox="1"/>
+          <p:nvPr/>
+        </p:nvSpPr>
+        <p:spPr>
+          <a:xfrm rot="0" flipH="0" flipV="0">
+            <a:off x="1238250" y="1628775"/>
+            <a:ext cx="2667000" cy="190500"/>
+          </a:xfrm>
+          <a:prstGeom prst="rect"/>
+        </p:spPr>
+        <p:txBody>
+          <a:bodyPr wrap="none" lIns="0" tIns="0" rIns="0" bIns="0"/>
+          <a:p>
+            <a:pPr>
+              <a:lnSpc>
+                <a:spcPct val="140000"/>
+              </a:lnSpc>
+            </a:pPr>
+            <a:r>
+              <a:rPr lang="en-US" sz="863">
+                <a:solidFill>
+                  <a:srgbClr val="6B7075"/>
+                </a:solidFill>
+                <a:latin typeface="Microsoft YaHei"/>
+                <a:ea typeface="Microsoft YaHei"/>
+              </a:rPr>
+              <a:t>Fee Agent </a:t>
+            </a:r>
+            <a:r>
+              <a:rPr lang="zh-CN" sz="863">
+                <a:solidFill>
+                  <a:srgbClr val="6B7075"/>
+                </a:solidFill>
+                <a:latin typeface="Microsoft YaHei"/>
+                <a:ea typeface="Microsoft YaHei"/>
+              </a:rPr>
+              <a:t>查</a:t>
+            </a:r>
+            <a:r>
+              <a:rPr lang="en-US" sz="863">
+                <a:solidFill>
+                  <a:srgbClr val="6B7075"/>
+                </a:solidFill>
+                <a:latin typeface="Microsoft YaHei"/>
+                <a:ea typeface="Microsoft YaHei"/>
+              </a:rPr>
+              <a:t> fee_bills </a:t>
+            </a:r>
+            <a:r>
+              <a:rPr lang="zh-CN" sz="863">
+                <a:solidFill>
+                  <a:srgbClr val="6B7075"/>
+                </a:solidFill>
+                <a:latin typeface="Microsoft YaHei"/>
+                <a:ea typeface="Microsoft YaHei"/>
+              </a:rPr>
+              <a:t>账单表</a:t>
+            </a:r>
+            <a:r>
+              <a:rPr lang="en-US" sz="863">
+                <a:solidFill>
+                  <a:srgbClr val="6B7075"/>
+                </a:solidFill>
+                <a:latin typeface="Microsoft YaHei"/>
+                <a:ea typeface="Microsoft YaHei"/>
+              </a:rPr>
+              <a:t> · </a:t>
+            </a:r>
+            <a:r>
+              <a:rPr lang="zh-CN" sz="863">
+                <a:solidFill>
+                  <a:srgbClr val="6B7075"/>
+                </a:solidFill>
+                <a:latin typeface="Microsoft YaHei"/>
+                <a:ea typeface="Microsoft YaHei"/>
+              </a:rPr>
+              <a:t>返回金额</a:t>
+            </a:r>
+            <a:r>
+              <a:rPr lang="en-US" sz="863">
+                <a:solidFill>
+                  <a:srgbClr val="6B7075"/>
+                </a:solidFill>
+                <a:latin typeface="Microsoft YaHei"/>
+                <a:ea typeface="Microsoft YaHei"/>
+              </a:rPr>
+              <a:t>/</a:t>
+            </a:r>
+            <a:r>
+              <a:rPr lang="zh-CN" sz="863">
+                <a:solidFill>
+                  <a:srgbClr val="6B7075"/>
+                </a:solidFill>
+                <a:latin typeface="Microsoft YaHei"/>
+                <a:ea typeface="Microsoft YaHei"/>
+              </a:rPr>
+              <a:t>状态</a:t>
+            </a:r>
+            <a:r>
+              <a:rPr lang="en-US" sz="863">
+                <a:solidFill>
+                  <a:srgbClr val="6B7075"/>
+                </a:solidFill>
+                <a:latin typeface="Microsoft YaHei"/>
+                <a:ea typeface="Microsoft YaHei"/>
+              </a:rPr>
+              <a:t>/</a:t>
+            </a:r>
+            <a:r>
+              <a:rPr lang="zh-CN" sz="863">
+                <a:solidFill>
+                  <a:srgbClr val="6B7075"/>
+                </a:solidFill>
+                <a:latin typeface="Microsoft YaHei"/>
+                <a:ea typeface="Microsoft YaHei"/>
+              </a:rPr>
+              <a:t>截止日</a:t>
+            </a:r>
+            <a:endParaRPr/>
+          </a:p>
+        </p:txBody>
+      </p:sp>
+      <p:sp>
+        <p:nvSpPr>
+          <p:cNvPr id="168" name="" descr="{&quot;isTemplate&quot;:true,&quot;type&quot;:&quot;text&quot;}"/>
+          <p:cNvSpPr txBox="1"/>
+          <p:nvPr/>
+        </p:nvSpPr>
+        <p:spPr>
+          <a:xfrm rot="0" flipH="0" flipV="0">
+            <a:off x="628650" y="1857375"/>
+            <a:ext cx="533400" cy="190500"/>
+          </a:xfrm>
+          <a:prstGeom prst="rect"/>
+        </p:spPr>
+        <p:txBody>
+          <a:bodyPr wrap="none" lIns="0" tIns="0" rIns="0" bIns="0"/>
+          <a:p>
+            <a:pPr>
+              <a:lnSpc>
+                <a:spcPct val="140000"/>
+              </a:lnSpc>
+            </a:pPr>
+            <a:r>
+              <a:rPr lang="zh-CN" sz="863" b="1">
+                <a:solidFill>
+                  <a:srgbClr val="172133"/>
+                </a:solidFill>
+                <a:latin typeface="Microsoft YaHei"/>
+                <a:ea typeface="Microsoft YaHei"/>
+              </a:rPr>
+              <a:t>公告</a:t>
+            </a:r>
+            <a:endParaRPr/>
+          </a:p>
+        </p:txBody>
+      </p:sp>
+      <p:sp>
+        <p:nvSpPr>
+          <p:cNvPr id="169" name="" descr="{&quot;isTemplate&quot;:true,&quot;type&quot;:&quot;text&quot;}"/>
+          <p:cNvSpPr txBox="1"/>
+          <p:nvPr/>
+        </p:nvSpPr>
+        <p:spPr>
+          <a:xfrm rot="0" flipH="0" flipV="0">
+            <a:off x="1238250" y="1857375"/>
+            <a:ext cx="1857375" cy="190500"/>
+          </a:xfrm>
+          <a:prstGeom prst="rect"/>
+        </p:spPr>
+        <p:txBody>
+          <a:bodyPr wrap="none" lIns="0" tIns="0" rIns="0" bIns="0"/>
+          <a:p>
+            <a:pPr>
+              <a:lnSpc>
+                <a:spcPct val="140000"/>
+              </a:lnSpc>
+            </a:pPr>
+            <a:r>
+              <a:rPr lang="zh-CN" sz="863">
+                <a:solidFill>
+                  <a:srgbClr val="6B7075"/>
+                </a:solidFill>
+                <a:latin typeface="Microsoft YaHei"/>
+                <a:ea typeface="Microsoft YaHei"/>
+              </a:rPr>
+              <a:t>公告列表</a:t>
+            </a:r>
+            <a:r>
+              <a:rPr lang="en-US" sz="863">
+                <a:solidFill>
+                  <a:srgbClr val="6B7075"/>
+                </a:solidFill>
+                <a:latin typeface="Microsoft YaHei"/>
+                <a:ea typeface="Microsoft YaHei"/>
+              </a:rPr>
+              <a:t> + AI </a:t>
+            </a:r>
+            <a:r>
+              <a:rPr lang="zh-CN" sz="863">
+                <a:solidFill>
+                  <a:srgbClr val="6B7075"/>
+                </a:solidFill>
+                <a:latin typeface="Microsoft YaHei"/>
+                <a:ea typeface="Microsoft YaHei"/>
+              </a:rPr>
+              <a:t>摘要（</a:t>
+            </a:r>
+            <a:r>
+              <a:rPr lang="en-US" sz="863">
+                <a:solidFill>
+                  <a:srgbClr val="6B7075"/>
+                </a:solidFill>
+                <a:latin typeface="Microsoft YaHei"/>
+                <a:ea typeface="Microsoft YaHei"/>
+              </a:rPr>
+              <a:t>LLM </a:t>
+            </a:r>
+            <a:r>
+              <a:rPr lang="zh-CN" sz="863">
+                <a:solidFill>
+                  <a:srgbClr val="6B7075"/>
+                </a:solidFill>
+                <a:latin typeface="Microsoft YaHei"/>
+                <a:ea typeface="Microsoft YaHei"/>
+              </a:rPr>
+              <a:t>提炼要点）</a:t>
+            </a:r>
+            <a:endParaRPr/>
+          </a:p>
+        </p:txBody>
+      </p:sp>
+      <p:sp>
+        <p:nvSpPr>
+          <p:cNvPr id="170" name="" descr="{&quot;isTemplate&quot;:true,&quot;type&quot;:&quot;text&quot;}"/>
+          <p:cNvSpPr txBox="1"/>
+          <p:nvPr/>
+        </p:nvSpPr>
+        <p:spPr>
+          <a:xfrm rot="0" flipH="0" flipV="0">
+            <a:off x="628650" y="2076450"/>
+            <a:ext cx="533400" cy="190500"/>
+          </a:xfrm>
+          <a:prstGeom prst="rect"/>
+        </p:spPr>
+        <p:txBody>
+          <a:bodyPr wrap="none" lIns="0" tIns="0" rIns="0" bIns="0"/>
+          <a:p>
+            <a:pPr>
+              <a:lnSpc>
+                <a:spcPct val="140000"/>
+              </a:lnSpc>
+            </a:pPr>
+            <a:r>
+              <a:rPr lang="zh-CN" sz="863" b="1">
+                <a:solidFill>
+                  <a:srgbClr val="172133"/>
+                </a:solidFill>
+                <a:latin typeface="Microsoft YaHei"/>
+                <a:ea typeface="Microsoft YaHei"/>
+              </a:rPr>
+              <a:t>我的工单</a:t>
+            </a:r>
+            <a:endParaRPr/>
+          </a:p>
+        </p:txBody>
+      </p:sp>
+      <p:sp>
+        <p:nvSpPr>
+          <p:cNvPr id="171" name="" descr="{&quot;isTemplate&quot;:true,&quot;type&quot;:&quot;text&quot;}"/>
+          <p:cNvSpPr txBox="1"/>
+          <p:nvPr/>
+        </p:nvSpPr>
+        <p:spPr>
+          <a:xfrm rot="0" flipH="0" flipV="0">
+            <a:off x="1238250" y="2076450"/>
+            <a:ext cx="2867025" cy="190500"/>
+          </a:xfrm>
+          <a:prstGeom prst="rect"/>
+        </p:spPr>
+        <p:txBody>
+          <a:bodyPr wrap="none" lIns="0" tIns="0" rIns="0" bIns="0"/>
+          <a:p>
+            <a:pPr>
+              <a:lnSpc>
+                <a:spcPct val="140000"/>
+              </a:lnSpc>
+            </a:pPr>
+            <a:r>
+              <a:rPr lang="en-US" sz="863">
+                <a:solidFill>
+                  <a:srgbClr val="6B7075"/>
+                </a:solidFill>
+                <a:latin typeface="Microsoft YaHei"/>
+                <a:ea typeface="Microsoft YaHei"/>
+              </a:rPr>
+              <a:t>repair_order </a:t>
+            </a:r>
+            <a:r>
+              <a:rPr lang="zh-CN" sz="863">
+                <a:solidFill>
+                  <a:srgbClr val="6B7075"/>
+                </a:solidFill>
+                <a:latin typeface="Microsoft YaHei"/>
+                <a:ea typeface="Microsoft YaHei"/>
+              </a:rPr>
+              <a:t>状态追踪（创建→派单→接单→完成→关闭）</a:t>
+            </a:r>
+            <a:endParaRPr/>
+          </a:p>
+        </p:txBody>
+      </p:sp>
+      <p:sp>
+        <p:nvSpPr>
+          <p:cNvPr id="172" name="" descr="{&quot;isTemplate&quot;:true,&quot;type&quot;:&quot;text&quot;}"/>
+          <p:cNvSpPr txBox="1"/>
+          <p:nvPr/>
+        </p:nvSpPr>
+        <p:spPr>
+          <a:xfrm rot="0" flipH="0" flipV="0">
+            <a:off x="628650" y="2305050"/>
+            <a:ext cx="533400" cy="190500"/>
+          </a:xfrm>
+          <a:prstGeom prst="rect"/>
+        </p:spPr>
+        <p:txBody>
+          <a:bodyPr wrap="none" lIns="0" tIns="0" rIns="0" bIns="0"/>
+          <a:p>
+            <a:pPr>
+              <a:lnSpc>
+                <a:spcPct val="140000"/>
+              </a:lnSpc>
+            </a:pPr>
+            <a:r>
+              <a:rPr lang="zh-CN" sz="863" b="1">
+                <a:solidFill>
+                  <a:srgbClr val="172133"/>
+                </a:solidFill>
+                <a:latin typeface="Microsoft YaHei"/>
+                <a:ea typeface="Microsoft YaHei"/>
+              </a:rPr>
+              <a:t>问题上报</a:t>
+            </a:r>
+            <a:endParaRPr/>
+          </a:p>
+        </p:txBody>
+      </p:sp>
+      <p:sp>
+        <p:nvSpPr>
+          <p:cNvPr id="173" name="" descr="{&quot;isTemplate&quot;:true,&quot;type&quot;:&quot;text&quot;}"/>
+          <p:cNvSpPr txBox="1"/>
+          <p:nvPr/>
+        </p:nvSpPr>
+        <p:spPr>
+          <a:xfrm rot="0" flipH="0" flipV="0">
+            <a:off x="1238250" y="2305050"/>
+            <a:ext cx="1828800" cy="190500"/>
+          </a:xfrm>
+          <a:prstGeom prst="rect"/>
+        </p:spPr>
+        <p:txBody>
+          <a:bodyPr wrap="none" lIns="0" tIns="0" rIns="0" bIns="0"/>
+          <a:p>
+            <a:pPr>
+              <a:lnSpc>
+                <a:spcPct val="140000"/>
+              </a:lnSpc>
+            </a:pPr>
+            <a:r>
+              <a:rPr lang="en-US" sz="863">
+                <a:solidFill>
+                  <a:srgbClr val="6B7075"/>
+                </a:solidFill>
+                <a:latin typeface="Microsoft YaHei"/>
+                <a:ea typeface="Microsoft YaHei"/>
+              </a:rPr>
+              <a:t>IssueReport </a:t>
+            </a:r>
+            <a:r>
+              <a:rPr lang="zh-CN" sz="863">
+                <a:solidFill>
+                  <a:srgbClr val="6B7075"/>
+                </a:solidFill>
+                <a:latin typeface="Microsoft YaHei"/>
+                <a:ea typeface="Microsoft YaHei"/>
+              </a:rPr>
+              <a:t>上报</a:t>
+            </a:r>
+            <a:r>
+              <a:rPr lang="en-US" sz="863">
+                <a:solidFill>
+                  <a:srgbClr val="6B7075"/>
+                </a:solidFill>
+                <a:latin typeface="Microsoft YaHei"/>
+                <a:ea typeface="Microsoft YaHei"/>
+              </a:rPr>
+              <a:t> · </a:t>
+            </a:r>
+            <a:r>
+              <a:rPr lang="zh-CN" sz="863">
+                <a:solidFill>
+                  <a:srgbClr val="6B7075"/>
+                </a:solidFill>
+                <a:latin typeface="Microsoft YaHei"/>
+                <a:ea typeface="Microsoft YaHei"/>
+              </a:rPr>
+              <a:t>附图片</a:t>
+            </a:r>
+            <a:r>
+              <a:rPr lang="en-US" sz="863">
+                <a:solidFill>
+                  <a:srgbClr val="6B7075"/>
+                </a:solidFill>
+                <a:latin typeface="Microsoft YaHei"/>
+                <a:ea typeface="Microsoft YaHei"/>
+              </a:rPr>
+              <a:t> · </a:t>
+            </a:r>
+            <a:r>
+              <a:rPr lang="zh-CN" sz="863">
+                <a:solidFill>
+                  <a:srgbClr val="6B7075"/>
+                </a:solidFill>
+                <a:latin typeface="Microsoft YaHei"/>
+                <a:ea typeface="Microsoft YaHei"/>
+              </a:rPr>
+              <a:t>物业答复</a:t>
+            </a:r>
+            <a:endParaRPr/>
+          </a:p>
+        </p:txBody>
+      </p:sp>
+      <p:sp>
+        <p:nvSpPr>
+          <p:cNvPr id="174" name=""/>
+          <p:cNvSpPr/>
+          <p:nvPr/>
+        </p:nvSpPr>
+        <p:spPr>
+          <a:xfrm rot="0" flipH="0" flipV="0">
+            <a:off x="495300" y="2667000"/>
+            <a:ext cx="8315325" cy="1724025"/>
+          </a:xfrm>
+          <a:prstGeom prst="roundRect">
+            <a:avLst>
+              <a:gd name="adj" fmla="val 5525"/>
             </a:avLst>
           </a:prstGeom>
           <a:solidFill>
@@ -8395,14 +8663,14 @@
       </p:sp>
       <p:sp>
         <p:nvSpPr>
-          <p:cNvPr id="167" name="" descr="{&quot;isTemplate&quot;:true,&quot;type&quot;:&quot;text&quot;}"/>
-          <p:cNvSpPr txBox="1"/>
-          <p:nvPr/>
-        </p:nvSpPr>
-        <p:spPr>
-          <a:xfrm rot="0" flipH="0" flipV="0">
-            <a:off x="742950" y="2533650"/>
-            <a:ext cx="7124700" cy="152400"/>
+          <p:cNvPr id="175" name="" descr="{&quot;isTemplate&quot;:true,&quot;type&quot;:&quot;text&quot;}"/>
+          <p:cNvSpPr txBox="1"/>
+          <p:nvPr/>
+        </p:nvSpPr>
+        <p:spPr>
+          <a:xfrm rot="0" flipH="0" flipV="0">
+            <a:off x="628650" y="2762250"/>
+            <a:ext cx="400050" cy="161925"/>
           </a:xfrm>
           <a:prstGeom prst="rect"/>
         </p:spPr>
@@ -8415,96 +8683,861 @@
               </a:lnSpc>
             </a:pPr>
             <a:r>
-              <a:rPr lang="zh-CN" sz="975" spc="-9223372036854775808">
-                <a:solidFill>
-                  <a:srgbClr val="BD9B56"/>
-                </a:solidFill>
-                <a:latin typeface="Microsoft YaHei"/>
-                <a:ea typeface="Microsoft YaHei"/>
-              </a:rPr>
-              <a:t>技术路线</a:t>
-            </a:r>
-            <a:endParaRPr/>
-          </a:p>
-        </p:txBody>
-      </p:sp>
-      <p:sp>
-        <p:nvSpPr>
-          <p:cNvPr id="168" name="" descr="{&quot;isTemplate&quot;:true,&quot;type&quot;:&quot;text&quot;}"/>
-          <p:cNvSpPr txBox="1"/>
-          <p:nvPr/>
-        </p:nvSpPr>
-        <p:spPr>
-          <a:xfrm rot="0" flipH="0" flipV="0">
-            <a:off x="742950" y="2762250"/>
-            <a:ext cx="7124700" cy="0"/>
-          </a:xfrm>
-          <a:prstGeom prst="rect"/>
-        </p:spPr>
-        <p:txBody>
-          <a:bodyPr wrap="none" lIns="0" tIns="0" rIns="0" bIns="0"/>
-          <a:p>
-            <a:pPr/>
-            <a:endParaRPr/>
-          </a:p>
-        </p:txBody>
-      </p:sp>
-      <p:sp>
-        <p:nvSpPr>
-          <p:cNvPr id="169" name="" descr="{&quot;isTemplate&quot;:true,&quot;type&quot;:&quot;text&quot;}"/>
-          <p:cNvSpPr txBox="1"/>
-          <p:nvPr/>
-        </p:nvSpPr>
-        <p:spPr>
-          <a:xfrm rot="0" flipH="0" flipV="0">
-            <a:off x="742950" y="2762250"/>
-            <a:ext cx="7124700" cy="0"/>
-          </a:xfrm>
-          <a:prstGeom prst="rect"/>
-        </p:spPr>
-        <p:txBody>
-          <a:bodyPr wrap="none" lIns="0" tIns="0" rIns="0" bIns="0"/>
-          <a:p>
-            <a:pPr/>
-            <a:endParaRPr/>
-          </a:p>
-        </p:txBody>
-      </p:sp>
-      <p:sp>
-        <p:nvSpPr>
-          <p:cNvPr id="170" name="" descr="{&quot;isTemplate&quot;:true,&quot;type&quot;:&quot;text&quot;}"/>
-          <p:cNvSpPr txBox="1"/>
-          <p:nvPr/>
-        </p:nvSpPr>
-        <p:spPr>
-          <a:xfrm rot="0" flipH="0" flipV="0">
-            <a:off x="742950" y="2762250"/>
-            <a:ext cx="7124700" cy="0"/>
-          </a:xfrm>
-          <a:prstGeom prst="rect"/>
-        </p:spPr>
-        <p:txBody>
-          <a:bodyPr wrap="none" lIns="0" tIns="0" rIns="0" bIns="0"/>
-          <a:p>
-            <a:pPr/>
-            <a:endParaRPr/>
-          </a:p>
-        </p:txBody>
-      </p:sp>
-      <p:sp>
-        <p:nvSpPr>
-          <p:cNvPr id="171" name=""/>
+              <a:rPr lang="zh-CN" sz="1050" b="1">
+                <a:solidFill>
+                  <a:srgbClr val="172133"/>
+                </a:solidFill>
+                <a:latin typeface="Microsoft YaHei"/>
+                <a:ea typeface="Microsoft YaHei"/>
+              </a:rPr>
+              <a:t>物业端</a:t>
+            </a:r>
+            <a:endParaRPr/>
+          </a:p>
+        </p:txBody>
+      </p:sp>
+      <p:sp>
+        <p:nvSpPr>
+          <p:cNvPr id="176" name=""/>
           <p:cNvSpPr/>
           <p:nvPr/>
         </p:nvSpPr>
         <p:spPr>
           <a:xfrm rot="0" flipH="0" flipV="0">
-            <a:off x="571500" y="2990850"/>
-            <a:ext cx="7467600" cy="3219450"/>
+            <a:off x="1104900" y="2762250"/>
+            <a:ext cx="971550" cy="161925"/>
           </a:xfrm>
           <a:prstGeom prst="roundRect">
             <a:avLst>
-              <a:gd name="adj" fmla="val 2959"/>
+              <a:gd name="adj" fmla="val 23529"/>
+            </a:avLst>
+          </a:prstGeom>
+          <a:solidFill>
+            <a:srgbClr val="BD9B56">
+              <a:alpha val="12000"/>
+            </a:srgbClr>
+          </a:solidFill>
+          <a:ln/>
+        </p:spPr>
+        <p:txBody>
+          <a:bodyPr/>
+          <a:p/>
+        </p:txBody>
+      </p:sp>
+      <p:sp>
+        <p:nvSpPr>
+          <p:cNvPr id="177" name="" descr="{&quot;isTemplate&quot;:true,&quot;type&quot;:&quot;text&quot;}"/>
+          <p:cNvSpPr txBox="1"/>
+          <p:nvPr/>
+        </p:nvSpPr>
+        <p:spPr>
+          <a:xfrm rot="0" flipH="0" flipV="0">
+            <a:off x="1104900" y="2762250"/>
+            <a:ext cx="971550" cy="161925"/>
+          </a:xfrm>
+          <a:prstGeom prst="rect"/>
+        </p:spPr>
+        <p:txBody>
+          <a:bodyPr wrap="none" lIns="50006" tIns="14288" rIns="50006" bIns="14288"/>
+          <a:p>
+            <a:pPr>
+              <a:lnSpc>
+                <a:spcPct val="100000"/>
+              </a:lnSpc>
+            </a:pPr>
+            <a:r>
+              <a:rPr lang="en-US" sz="788">
+                <a:solidFill>
+                  <a:srgbClr val="BD9B56"/>
+                </a:solidFill>
+                <a:highlight>
+                  <a:srgbClr val="BD9B56">
+                    <a:alpha val="12000"/>
+                  </a:srgbClr>
+                </a:highlight>
+                <a:latin typeface="Microsoft YaHei"/>
+                <a:ea typeface="Microsoft YaHei"/>
+              </a:rPr>
+              <a:t>ToB · Admin/Staff</a:t>
+            </a:r>
+            <a:endParaRPr/>
+          </a:p>
+        </p:txBody>
+      </p:sp>
+      <p:sp>
+        <p:nvSpPr>
+          <p:cNvPr id="178" name="" descr="{&quot;isTemplate&quot;:true,&quot;type&quot;:&quot;text&quot;}"/>
+          <p:cNvSpPr txBox="1"/>
+          <p:nvPr/>
+        </p:nvSpPr>
+        <p:spPr>
+          <a:xfrm rot="0" flipH="0" flipV="0">
+            <a:off x="628650" y="2981325"/>
+            <a:ext cx="533400" cy="190500"/>
+          </a:xfrm>
+          <a:prstGeom prst="rect"/>
+        </p:spPr>
+        <p:txBody>
+          <a:bodyPr wrap="none" lIns="0" tIns="0" rIns="0" bIns="0"/>
+          <a:p>
+            <a:pPr>
+              <a:lnSpc>
+                <a:spcPct val="140000"/>
+              </a:lnSpc>
+            </a:pPr>
+            <a:r>
+              <a:rPr lang="zh-CN" sz="863" b="1">
+                <a:solidFill>
+                  <a:srgbClr val="172133"/>
+                </a:solidFill>
+                <a:latin typeface="Microsoft YaHei"/>
+                <a:ea typeface="Microsoft YaHei"/>
+              </a:rPr>
+              <a:t>数据看板</a:t>
+            </a:r>
+            <a:endParaRPr/>
+          </a:p>
+        </p:txBody>
+      </p:sp>
+      <p:sp>
+        <p:nvSpPr>
+          <p:cNvPr id="179" name="" descr="{&quot;isTemplate&quot;:true,&quot;type&quot;:&quot;text&quot;}"/>
+          <p:cNvSpPr txBox="1"/>
+          <p:nvPr/>
+        </p:nvSpPr>
+        <p:spPr>
+          <a:xfrm rot="0" flipH="0" flipV="0">
+            <a:off x="1238250" y="2981325"/>
+            <a:ext cx="2371725" cy="190500"/>
+          </a:xfrm>
+          <a:prstGeom prst="rect"/>
+        </p:spPr>
+        <p:txBody>
+          <a:bodyPr wrap="none" lIns="0" tIns="0" rIns="0" bIns="0"/>
+          <a:p>
+            <a:pPr>
+              <a:lnSpc>
+                <a:spcPct val="140000"/>
+              </a:lnSpc>
+            </a:pPr>
+            <a:r>
+              <a:rPr lang="zh-CN" sz="863">
+                <a:solidFill>
+                  <a:srgbClr val="6B7075"/>
+                </a:solidFill>
+                <a:latin typeface="Microsoft YaHei"/>
+                <a:ea typeface="Microsoft YaHei"/>
+              </a:rPr>
+              <a:t>统计聚合</a:t>
+            </a:r>
+            <a:r>
+              <a:rPr lang="en-US" sz="863">
+                <a:solidFill>
+                  <a:srgbClr val="6B7075"/>
+                </a:solidFill>
+                <a:latin typeface="Microsoft YaHei"/>
+                <a:ea typeface="Microsoft YaHei"/>
+              </a:rPr>
+              <a:t> API · </a:t>
+            </a:r>
+            <a:r>
+              <a:rPr lang="zh-CN" sz="863">
+                <a:solidFill>
+                  <a:srgbClr val="6B7075"/>
+                </a:solidFill>
+                <a:latin typeface="Microsoft YaHei"/>
+                <a:ea typeface="Microsoft YaHei"/>
+              </a:rPr>
+              <a:t>今日报修</a:t>
+            </a:r>
+            <a:r>
+              <a:rPr lang="en-US" sz="863">
+                <a:solidFill>
+                  <a:srgbClr val="6B7075"/>
+                </a:solidFill>
+                <a:latin typeface="Microsoft YaHei"/>
+                <a:ea typeface="Microsoft YaHei"/>
+              </a:rPr>
+              <a:t>/</a:t>
+            </a:r>
+            <a:r>
+              <a:rPr lang="zh-CN" sz="863">
+                <a:solidFill>
+                  <a:srgbClr val="6B7075"/>
+                </a:solidFill>
+                <a:latin typeface="Microsoft YaHei"/>
+                <a:ea typeface="Microsoft YaHei"/>
+              </a:rPr>
+              <a:t>处理中</a:t>
+            </a:r>
+            <a:r>
+              <a:rPr lang="en-US" sz="863">
+                <a:solidFill>
+                  <a:srgbClr val="6B7075"/>
+                </a:solidFill>
+                <a:latin typeface="Microsoft YaHei"/>
+                <a:ea typeface="Microsoft YaHei"/>
+              </a:rPr>
+              <a:t>/</a:t>
+            </a:r>
+            <a:r>
+              <a:rPr lang="zh-CN" sz="863">
+                <a:solidFill>
+                  <a:srgbClr val="6B7075"/>
+                </a:solidFill>
+                <a:latin typeface="Microsoft YaHei"/>
+                <a:ea typeface="Microsoft YaHei"/>
+              </a:rPr>
+              <a:t>已完成实时汇总</a:t>
+            </a:r>
+            <a:endParaRPr/>
+          </a:p>
+        </p:txBody>
+      </p:sp>
+      <p:sp>
+        <p:nvSpPr>
+          <p:cNvPr id="180" name="" descr="{&quot;isTemplate&quot;:true,&quot;type&quot;:&quot;text&quot;}"/>
+          <p:cNvSpPr txBox="1"/>
+          <p:nvPr/>
+        </p:nvSpPr>
+        <p:spPr>
+          <a:xfrm rot="0" flipH="0" flipV="0">
+            <a:off x="628650" y="3209925"/>
+            <a:ext cx="533400" cy="190500"/>
+          </a:xfrm>
+          <a:prstGeom prst="rect"/>
+        </p:spPr>
+        <p:txBody>
+          <a:bodyPr wrap="none" lIns="0" tIns="0" rIns="0" bIns="0"/>
+          <a:p>
+            <a:pPr>
+              <a:lnSpc>
+                <a:spcPct val="140000"/>
+              </a:lnSpc>
+            </a:pPr>
+            <a:r>
+              <a:rPr lang="zh-CN" sz="863" b="1">
+                <a:solidFill>
+                  <a:srgbClr val="172133"/>
+                </a:solidFill>
+                <a:latin typeface="Microsoft YaHei"/>
+                <a:ea typeface="Microsoft YaHei"/>
+              </a:rPr>
+              <a:t>工单管理</a:t>
+            </a:r>
+            <a:endParaRPr/>
+          </a:p>
+        </p:txBody>
+      </p:sp>
+      <p:sp>
+        <p:nvSpPr>
+          <p:cNvPr id="181" name="" descr="{&quot;isTemplate&quot;:true,&quot;type&quot;:&quot;text&quot;}"/>
+          <p:cNvSpPr txBox="1"/>
+          <p:nvPr/>
+        </p:nvSpPr>
+        <p:spPr>
+          <a:xfrm rot="0" flipH="0" flipV="0">
+            <a:off x="1238250" y="3209925"/>
+            <a:ext cx="2305050" cy="190500"/>
+          </a:xfrm>
+          <a:prstGeom prst="rect"/>
+        </p:spPr>
+        <p:txBody>
+          <a:bodyPr wrap="none" lIns="0" tIns="0" rIns="0" bIns="0"/>
+          <a:p>
+            <a:pPr>
+              <a:lnSpc>
+                <a:spcPct val="140000"/>
+              </a:lnSpc>
+            </a:pPr>
+            <a:r>
+              <a:rPr lang="en-US" sz="863">
+                <a:solidFill>
+                  <a:srgbClr val="6B7075"/>
+                </a:solidFill>
+                <a:latin typeface="Microsoft YaHei"/>
+                <a:ea typeface="Microsoft YaHei"/>
+              </a:rPr>
+              <a:t>repair_order CRUD · </a:t>
+            </a:r>
+            <a:r>
+              <a:rPr lang="zh-CN" sz="863">
+                <a:solidFill>
+                  <a:srgbClr val="6B7075"/>
+                </a:solidFill>
+                <a:latin typeface="Microsoft YaHei"/>
+                <a:ea typeface="Microsoft YaHei"/>
+              </a:rPr>
+              <a:t>状态流转</a:t>
+            </a:r>
+            <a:r>
+              <a:rPr lang="en-US" sz="863">
+                <a:solidFill>
+                  <a:srgbClr val="6B7075"/>
+                </a:solidFill>
+                <a:latin typeface="Microsoft YaHei"/>
+                <a:ea typeface="Microsoft YaHei"/>
+              </a:rPr>
+              <a:t> · </a:t>
+            </a:r>
+            <a:r>
+              <a:rPr lang="zh-CN" sz="863">
+                <a:solidFill>
+                  <a:srgbClr val="6B7075"/>
+                </a:solidFill>
+                <a:latin typeface="Microsoft YaHei"/>
+                <a:ea typeface="Microsoft YaHei"/>
+              </a:rPr>
+              <a:t>人工派单</a:t>
+            </a:r>
+            <a:r>
+              <a:rPr lang="en-US" sz="863">
+                <a:solidFill>
+                  <a:srgbClr val="6B7075"/>
+                </a:solidFill>
+                <a:latin typeface="Microsoft YaHei"/>
+                <a:ea typeface="Microsoft YaHei"/>
+              </a:rPr>
+              <a:t>/</a:t>
+            </a:r>
+            <a:r>
+              <a:rPr lang="zh-CN" sz="863">
+                <a:solidFill>
+                  <a:srgbClr val="6B7075"/>
+                </a:solidFill>
+                <a:latin typeface="Microsoft YaHei"/>
+                <a:ea typeface="Microsoft YaHei"/>
+              </a:rPr>
+              <a:t>改派</a:t>
+            </a:r>
+            <a:endParaRPr/>
+          </a:p>
+        </p:txBody>
+      </p:sp>
+      <p:sp>
+        <p:nvSpPr>
+          <p:cNvPr id="182" name="" descr="{&quot;isTemplate&quot;:true,&quot;type&quot;:&quot;text&quot;}"/>
+          <p:cNvSpPr txBox="1"/>
+          <p:nvPr/>
+        </p:nvSpPr>
+        <p:spPr>
+          <a:xfrm rot="0" flipH="0" flipV="0">
+            <a:off x="628650" y="3429000"/>
+            <a:ext cx="533400" cy="190500"/>
+          </a:xfrm>
+          <a:prstGeom prst="rect"/>
+        </p:spPr>
+        <p:txBody>
+          <a:bodyPr wrap="none" lIns="0" tIns="0" rIns="0" bIns="0"/>
+          <a:p>
+            <a:pPr>
+              <a:lnSpc>
+                <a:spcPct val="140000"/>
+              </a:lnSpc>
+            </a:pPr>
+            <a:r>
+              <a:rPr lang="zh-CN" sz="863" b="1">
+                <a:solidFill>
+                  <a:srgbClr val="172133"/>
+                </a:solidFill>
+                <a:latin typeface="Microsoft YaHei"/>
+                <a:ea typeface="Microsoft YaHei"/>
+              </a:rPr>
+              <a:t>用户</a:t>
+            </a:r>
+            <a:r>
+              <a:rPr lang="en-US" sz="863" b="1">
+                <a:solidFill>
+                  <a:srgbClr val="172133"/>
+                </a:solidFill>
+                <a:latin typeface="Microsoft YaHei"/>
+                <a:ea typeface="Microsoft YaHei"/>
+              </a:rPr>
+              <a:t>/</a:t>
+            </a:r>
+            <a:r>
+              <a:rPr lang="zh-CN" sz="863" b="1">
+                <a:solidFill>
+                  <a:srgbClr val="172133"/>
+                </a:solidFill>
+                <a:latin typeface="Microsoft YaHei"/>
+                <a:ea typeface="Microsoft YaHei"/>
+              </a:rPr>
+              <a:t>房屋</a:t>
+            </a:r>
+            <a:endParaRPr/>
+          </a:p>
+        </p:txBody>
+      </p:sp>
+      <p:sp>
+        <p:nvSpPr>
+          <p:cNvPr id="183" name="" descr="{&quot;isTemplate&quot;:true,&quot;type&quot;:&quot;text&quot;}"/>
+          <p:cNvSpPr txBox="1"/>
+          <p:nvPr/>
+        </p:nvSpPr>
+        <p:spPr>
+          <a:xfrm rot="0" flipH="0" flipV="0">
+            <a:off x="1238250" y="3429000"/>
+            <a:ext cx="2228850" cy="190500"/>
+          </a:xfrm>
+          <a:prstGeom prst="rect"/>
+        </p:spPr>
+        <p:txBody>
+          <a:bodyPr wrap="none" lIns="0" tIns="0" rIns="0" bIns="0"/>
+          <a:p>
+            <a:pPr>
+              <a:lnSpc>
+                <a:spcPct val="140000"/>
+              </a:lnSpc>
+            </a:pPr>
+            <a:r>
+              <a:rPr lang="en-US" sz="863">
+                <a:solidFill>
+                  <a:srgbClr val="6B7075"/>
+                </a:solidFill>
+                <a:latin typeface="Microsoft YaHei"/>
+                <a:ea typeface="Microsoft YaHei"/>
+              </a:rPr>
+              <a:t>user / house / house_binding </a:t>
+            </a:r>
+            <a:r>
+              <a:rPr lang="zh-CN" sz="863">
+                <a:solidFill>
+                  <a:srgbClr val="6B7075"/>
+                </a:solidFill>
+                <a:latin typeface="Microsoft YaHei"/>
+                <a:ea typeface="Microsoft YaHei"/>
+              </a:rPr>
+              <a:t>绑定关系管理</a:t>
+            </a:r>
+            <a:endParaRPr/>
+          </a:p>
+        </p:txBody>
+      </p:sp>
+      <p:sp>
+        <p:nvSpPr>
+          <p:cNvPr id="184" name="" descr="{&quot;isTemplate&quot;:true,&quot;type&quot;:&quot;text&quot;}"/>
+          <p:cNvSpPr txBox="1"/>
+          <p:nvPr/>
+        </p:nvSpPr>
+        <p:spPr>
+          <a:xfrm rot="0" flipH="0" flipV="0">
+            <a:off x="628650" y="3657600"/>
+            <a:ext cx="628650" cy="190500"/>
+          </a:xfrm>
+          <a:prstGeom prst="rect"/>
+        </p:spPr>
+        <p:txBody>
+          <a:bodyPr wrap="none" lIns="0" tIns="0" rIns="0" bIns="0"/>
+          <a:p>
+            <a:pPr>
+              <a:lnSpc>
+                <a:spcPct val="140000"/>
+              </a:lnSpc>
+            </a:pPr>
+            <a:r>
+              <a:rPr lang="zh-CN" sz="863" b="1">
+                <a:solidFill>
+                  <a:srgbClr val="172133"/>
+                </a:solidFill>
+                <a:latin typeface="Microsoft YaHei"/>
+                <a:ea typeface="Microsoft YaHei"/>
+              </a:rPr>
+              <a:t>公告</a:t>
+            </a:r>
+            <a:r>
+              <a:rPr lang="en-US" sz="863" b="1">
+                <a:solidFill>
+                  <a:srgbClr val="172133"/>
+                </a:solidFill>
+                <a:latin typeface="Microsoft YaHei"/>
+                <a:ea typeface="Microsoft YaHei"/>
+              </a:rPr>
+              <a:t> AI </a:t>
+            </a:r>
+            <a:r>
+              <a:rPr lang="zh-CN" sz="863" b="1">
+                <a:solidFill>
+                  <a:srgbClr val="172133"/>
+                </a:solidFill>
+                <a:latin typeface="Microsoft YaHei"/>
+                <a:ea typeface="Microsoft YaHei"/>
+              </a:rPr>
+              <a:t>生成</a:t>
+            </a:r>
+            <a:endParaRPr/>
+          </a:p>
+        </p:txBody>
+      </p:sp>
+      <p:sp>
+        <p:nvSpPr>
+          <p:cNvPr id="185" name="" descr="{&quot;isTemplate&quot;:true,&quot;type&quot;:&quot;text&quot;}"/>
+          <p:cNvSpPr txBox="1"/>
+          <p:nvPr/>
+        </p:nvSpPr>
+        <p:spPr>
+          <a:xfrm rot="0" flipH="0" flipV="0">
+            <a:off x="1333500" y="3657600"/>
+            <a:ext cx="3038475" cy="190500"/>
+          </a:xfrm>
+          <a:prstGeom prst="rect"/>
+        </p:spPr>
+        <p:txBody>
+          <a:bodyPr wrap="none" lIns="0" tIns="0" rIns="0" bIns="0"/>
+          <a:p>
+            <a:pPr>
+              <a:lnSpc>
+                <a:spcPct val="140000"/>
+              </a:lnSpc>
+            </a:pPr>
+            <a:r>
+              <a:rPr lang="en-US" sz="863">
+                <a:solidFill>
+                  <a:srgbClr val="6B7075"/>
+                </a:solidFill>
+                <a:latin typeface="Microsoft YaHei"/>
+                <a:ea typeface="Microsoft YaHei"/>
+              </a:rPr>
+              <a:t>Notice Agent + LLM </a:t>
+            </a:r>
+            <a:r>
+              <a:rPr lang="zh-CN" sz="863">
+                <a:solidFill>
+                  <a:srgbClr val="6B7075"/>
+                </a:solidFill>
+                <a:latin typeface="Microsoft YaHei"/>
+                <a:ea typeface="Microsoft YaHei"/>
+              </a:rPr>
+              <a:t>生成标题</a:t>
+            </a:r>
+            <a:r>
+              <a:rPr lang="en-US" sz="863">
+                <a:solidFill>
+                  <a:srgbClr val="6B7075"/>
+                </a:solidFill>
+                <a:latin typeface="Microsoft YaHei"/>
+                <a:ea typeface="Microsoft YaHei"/>
+              </a:rPr>
+              <a:t>/</a:t>
+            </a:r>
+            <a:r>
+              <a:rPr lang="zh-CN" sz="863">
+                <a:solidFill>
+                  <a:srgbClr val="6B7075"/>
+                </a:solidFill>
+                <a:latin typeface="Microsoft YaHei"/>
+                <a:ea typeface="Microsoft YaHei"/>
+              </a:rPr>
+              <a:t>正文</a:t>
+            </a:r>
+            <a:r>
+              <a:rPr lang="en-US" sz="863">
+                <a:solidFill>
+                  <a:srgbClr val="6B7075"/>
+                </a:solidFill>
+                <a:latin typeface="Microsoft YaHei"/>
+                <a:ea typeface="Microsoft YaHei"/>
+              </a:rPr>
+              <a:t>/</a:t>
+            </a:r>
+            <a:r>
+              <a:rPr lang="zh-CN" sz="863">
+                <a:solidFill>
+                  <a:srgbClr val="6B7075"/>
+                </a:solidFill>
+                <a:latin typeface="Microsoft YaHei"/>
+                <a:ea typeface="Microsoft YaHei"/>
+              </a:rPr>
+              <a:t>影响范围</a:t>
+            </a:r>
+            <a:r>
+              <a:rPr lang="en-US" sz="863">
+                <a:solidFill>
+                  <a:srgbClr val="6B7075"/>
+                </a:solidFill>
+                <a:latin typeface="Microsoft YaHei"/>
+                <a:ea typeface="Microsoft YaHei"/>
+              </a:rPr>
+              <a:t> · </a:t>
+            </a:r>
+            <a:r>
+              <a:rPr lang="zh-CN" sz="863">
+                <a:solidFill>
+                  <a:srgbClr val="6B7075"/>
+                </a:solidFill>
+                <a:latin typeface="Microsoft YaHei"/>
+                <a:ea typeface="Microsoft YaHei"/>
+              </a:rPr>
+              <a:t>人工审核发布</a:t>
+            </a:r>
+            <a:endParaRPr/>
+          </a:p>
+        </p:txBody>
+      </p:sp>
+      <p:sp>
+        <p:nvSpPr>
+          <p:cNvPr id="186" name="" descr="{&quot;isTemplate&quot;:true,&quot;type&quot;:&quot;text&quot;}"/>
+          <p:cNvSpPr txBox="1"/>
+          <p:nvPr/>
+        </p:nvSpPr>
+        <p:spPr>
+          <a:xfrm rot="0" flipH="0" flipV="0">
+            <a:off x="628650" y="3876675"/>
+            <a:ext cx="533400" cy="190500"/>
+          </a:xfrm>
+          <a:prstGeom prst="rect"/>
+        </p:spPr>
+        <p:txBody>
+          <a:bodyPr wrap="none" lIns="0" tIns="0" rIns="0" bIns="0"/>
+          <a:p>
+            <a:pPr>
+              <a:lnSpc>
+                <a:spcPct val="140000"/>
+              </a:lnSpc>
+            </a:pPr>
+            <a:r>
+              <a:rPr lang="zh-CN" sz="863" b="1">
+                <a:solidFill>
+                  <a:srgbClr val="172133"/>
+                </a:solidFill>
+                <a:latin typeface="Microsoft YaHei"/>
+                <a:ea typeface="Microsoft YaHei"/>
+              </a:rPr>
+              <a:t>巡检管理</a:t>
+            </a:r>
+            <a:endParaRPr/>
+          </a:p>
+        </p:txBody>
+      </p:sp>
+      <p:sp>
+        <p:nvSpPr>
+          <p:cNvPr id="187" name="" descr="{&quot;isTemplate&quot;:true,&quot;type&quot;:&quot;text&quot;}"/>
+          <p:cNvSpPr txBox="1"/>
+          <p:nvPr/>
+        </p:nvSpPr>
+        <p:spPr>
+          <a:xfrm rot="0" flipH="0" flipV="0">
+            <a:off x="1238250" y="3876675"/>
+            <a:ext cx="2581275" cy="190500"/>
+          </a:xfrm>
+          <a:prstGeom prst="rect"/>
+        </p:spPr>
+        <p:txBody>
+          <a:bodyPr wrap="none" lIns="0" tIns="0" rIns="0" bIns="0"/>
+          <a:p>
+            <a:pPr>
+              <a:lnSpc>
+                <a:spcPct val="140000"/>
+              </a:lnSpc>
+            </a:pPr>
+            <a:r>
+              <a:rPr lang="zh-CN" sz="863">
+                <a:solidFill>
+                  <a:srgbClr val="6B7075"/>
+                </a:solidFill>
+                <a:latin typeface="Microsoft YaHei"/>
+                <a:ea typeface="Microsoft YaHei"/>
+              </a:rPr>
+              <a:t>摄像头抓拍</a:t>
+            </a:r>
+            <a:r>
+              <a:rPr lang="en-US" sz="863">
+                <a:solidFill>
+                  <a:srgbClr val="6B7075"/>
+                </a:solidFill>
+                <a:latin typeface="Microsoft YaHei"/>
+                <a:ea typeface="Microsoft YaHei"/>
+              </a:rPr>
+              <a:t> → </a:t>
+            </a:r>
+            <a:r>
+              <a:rPr lang="zh-CN" sz="863">
+                <a:solidFill>
+                  <a:srgbClr val="6B7075"/>
+                </a:solidFill>
+                <a:latin typeface="Microsoft YaHei"/>
+                <a:ea typeface="Microsoft YaHei"/>
+              </a:rPr>
+              <a:t>视觉模型识别异常</a:t>
+            </a:r>
+            <a:r>
+              <a:rPr lang="en-US" sz="863">
+                <a:solidFill>
+                  <a:srgbClr val="6B7075"/>
+                </a:solidFill>
+                <a:latin typeface="Microsoft YaHei"/>
+                <a:ea typeface="Microsoft YaHei"/>
+              </a:rPr>
+              <a:t> → </a:t>
+            </a:r>
+            <a:r>
+              <a:rPr lang="zh-CN" sz="863">
+                <a:solidFill>
+                  <a:srgbClr val="6B7075"/>
+                </a:solidFill>
+                <a:latin typeface="Microsoft YaHei"/>
+                <a:ea typeface="Microsoft YaHei"/>
+              </a:rPr>
+              <a:t>巡检记录</a:t>
+            </a:r>
+            <a:r>
+              <a:rPr lang="en-US" sz="863">
+                <a:solidFill>
+                  <a:srgbClr val="6B7075"/>
+                </a:solidFill>
+                <a:latin typeface="Microsoft YaHei"/>
+                <a:ea typeface="Microsoft YaHei"/>
+              </a:rPr>
+              <a:t> + </a:t>
+            </a:r>
+            <a:r>
+              <a:rPr lang="zh-CN" sz="863">
+                <a:solidFill>
+                  <a:srgbClr val="6B7075"/>
+                </a:solidFill>
+                <a:latin typeface="Microsoft YaHei"/>
+                <a:ea typeface="Microsoft YaHei"/>
+              </a:rPr>
+              <a:t>告警</a:t>
+            </a:r>
+            <a:endParaRPr/>
+          </a:p>
+        </p:txBody>
+      </p:sp>
+      <p:sp>
+        <p:nvSpPr>
+          <p:cNvPr id="188" name="" descr="{&quot;isTemplate&quot;:true,&quot;type&quot;:&quot;text&quot;}"/>
+          <p:cNvSpPr txBox="1"/>
+          <p:nvPr/>
+        </p:nvSpPr>
+        <p:spPr>
+          <a:xfrm rot="0" flipH="0" flipV="0">
+            <a:off x="628650" y="4105275"/>
+            <a:ext cx="657225" cy="190500"/>
+          </a:xfrm>
+          <a:prstGeom prst="rect"/>
+        </p:spPr>
+        <p:txBody>
+          <a:bodyPr wrap="none" lIns="0" tIns="0" rIns="0" bIns="0"/>
+          <a:p>
+            <a:pPr>
+              <a:lnSpc>
+                <a:spcPct val="140000"/>
+              </a:lnSpc>
+            </a:pPr>
+            <a:r>
+              <a:rPr lang="zh-CN" sz="863" b="1">
+                <a:solidFill>
+                  <a:srgbClr val="172133"/>
+                </a:solidFill>
+                <a:latin typeface="Microsoft YaHei"/>
+                <a:ea typeface="Microsoft YaHei"/>
+              </a:rPr>
+              <a:t>知识缺口审核</a:t>
+            </a:r>
+            <a:endParaRPr/>
+          </a:p>
+        </p:txBody>
+      </p:sp>
+      <p:sp>
+        <p:nvSpPr>
+          <p:cNvPr id="189" name="" descr="{&quot;isTemplate&quot;:true,&quot;type&quot;:&quot;text&quot;}"/>
+          <p:cNvSpPr txBox="1"/>
+          <p:nvPr/>
+        </p:nvSpPr>
+        <p:spPr>
+          <a:xfrm rot="0" flipH="0" flipV="0">
+            <a:off x="1362075" y="4105275"/>
+            <a:ext cx="2771775" cy="190500"/>
+          </a:xfrm>
+          <a:prstGeom prst="rect"/>
+        </p:spPr>
+        <p:txBody>
+          <a:bodyPr wrap="none" lIns="0" tIns="0" rIns="0" bIns="0"/>
+          <a:p>
+            <a:pPr>
+              <a:lnSpc>
+                <a:spcPct val="140000"/>
+              </a:lnSpc>
+            </a:pPr>
+            <a:r>
+              <a:rPr lang="en-US" sz="863">
+                <a:solidFill>
+                  <a:srgbClr val="6B7075"/>
+                </a:solidFill>
+                <a:latin typeface="Microsoft YaHei"/>
+                <a:ea typeface="Microsoft YaHei"/>
+              </a:rPr>
+              <a:t>knowledge_gap </a:t>
+            </a:r>
+            <a:r>
+              <a:rPr lang="zh-CN" sz="863">
+                <a:solidFill>
+                  <a:srgbClr val="6B7075"/>
+                </a:solidFill>
+                <a:latin typeface="Microsoft YaHei"/>
+                <a:ea typeface="Microsoft YaHei"/>
+              </a:rPr>
+              <a:t>审核</a:t>
+            </a:r>
+            <a:r>
+              <a:rPr lang="en-US" sz="863">
+                <a:solidFill>
+                  <a:srgbClr val="6B7075"/>
+                </a:solidFill>
+                <a:latin typeface="Microsoft YaHei"/>
+                <a:ea typeface="Microsoft YaHei"/>
+              </a:rPr>
+              <a:t> → </a:t>
+            </a:r>
+            <a:r>
+              <a:rPr lang="zh-CN" sz="863">
+                <a:solidFill>
+                  <a:srgbClr val="6B7075"/>
+                </a:solidFill>
+                <a:latin typeface="Microsoft YaHei"/>
+                <a:ea typeface="Microsoft YaHei"/>
+              </a:rPr>
+              <a:t>通过自动写入</a:t>
+            </a:r>
+            <a:r>
+              <a:rPr lang="en-US" sz="863">
+                <a:solidFill>
+                  <a:srgbClr val="6B7075"/>
+                </a:solidFill>
+                <a:latin typeface="Microsoft YaHei"/>
+                <a:ea typeface="Microsoft YaHei"/>
+              </a:rPr>
+              <a:t> pgvector </a:t>
+            </a:r>
+            <a:r>
+              <a:rPr lang="zh-CN" sz="863">
+                <a:solidFill>
+                  <a:srgbClr val="6B7075"/>
+                </a:solidFill>
+                <a:latin typeface="Microsoft YaHei"/>
+                <a:ea typeface="Microsoft YaHei"/>
+              </a:rPr>
+              <a:t>知识库</a:t>
+            </a:r>
+            <a:endParaRPr/>
+          </a:p>
+        </p:txBody>
+      </p:sp>
+      <p:sp>
+        <p:nvSpPr>
+          <p:cNvPr id="190" name=""/>
+          <p:cNvSpPr/>
+          <p:nvPr/>
+        </p:nvSpPr>
+        <p:spPr>
+          <a:xfrm rot="0" flipH="0" flipV="0">
+            <a:off x="495300" y="4467225"/>
+            <a:ext cx="8315325" cy="1276350"/>
+          </a:xfrm>
+          <a:prstGeom prst="roundRect">
+            <a:avLst>
+              <a:gd name="adj" fmla="val 7463"/>
             </a:avLst>
           </a:prstGeom>
           <a:solidFill>
@@ -8526,14 +9559,14 @@
       </p:sp>
       <p:sp>
         <p:nvSpPr>
-          <p:cNvPr id="172" name="" descr="{&quot;isTemplate&quot;:true,&quot;type&quot;:&quot;text&quot;}"/>
-          <p:cNvSpPr txBox="1"/>
-          <p:nvPr/>
-        </p:nvSpPr>
-        <p:spPr>
-          <a:xfrm rot="0" flipH="0" flipV="0">
-            <a:off x="742950" y="3105150"/>
-            <a:ext cx="7124700" cy="152400"/>
+          <p:cNvPr id="191" name="" descr="{&quot;isTemplate&quot;:true,&quot;type&quot;:&quot;text&quot;}"/>
+          <p:cNvSpPr txBox="1"/>
+          <p:nvPr/>
+        </p:nvSpPr>
+        <p:spPr>
+          <a:xfrm rot="0" flipH="0" flipV="0">
+            <a:off x="628650" y="4562475"/>
+            <a:ext cx="400050" cy="161925"/>
           </a:xfrm>
           <a:prstGeom prst="rect"/>
         </p:spPr>
@@ -8546,33 +9579,33 @@
               </a:lnSpc>
             </a:pPr>
             <a:r>
-              <a:rPr lang="zh-CN" sz="975" spc="-9223372036854775808">
-                <a:solidFill>
-                  <a:srgbClr val="BD9B56"/>
-                </a:solidFill>
-                <a:latin typeface="Microsoft YaHei"/>
-                <a:ea typeface="Microsoft YaHei"/>
-              </a:rPr>
-              <a:t>系统自维护自更新</a:t>
-            </a:r>
-            <a:endParaRPr/>
-          </a:p>
-        </p:txBody>
-      </p:sp>
-      <p:sp>
-        <p:nvSpPr>
-          <p:cNvPr id="173" name=""/>
+              <a:rPr lang="zh-CN" sz="1050" b="1">
+                <a:solidFill>
+                  <a:srgbClr val="172133"/>
+                </a:solidFill>
+                <a:latin typeface="Microsoft YaHei"/>
+                <a:ea typeface="Microsoft YaHei"/>
+              </a:rPr>
+              <a:t>维修端</a:t>
+            </a:r>
+            <a:endParaRPr/>
+          </a:p>
+        </p:txBody>
+      </p:sp>
+      <p:sp>
+        <p:nvSpPr>
+          <p:cNvPr id="192" name=""/>
           <p:cNvSpPr/>
           <p:nvPr/>
         </p:nvSpPr>
         <p:spPr>
           <a:xfrm rot="0" flipH="0" flipV="0">
-            <a:off x="742950" y="3333750"/>
-            <a:ext cx="2276475" cy="238125"/>
+            <a:off x="1104900" y="4562475"/>
+            <a:ext cx="742950" cy="161925"/>
           </a:xfrm>
           <a:prstGeom prst="roundRect">
             <a:avLst>
-              <a:gd name="adj" fmla="val 24000"/>
+              <a:gd name="adj" fmla="val 23529"/>
             </a:avLst>
           </a:prstGeom>
           <a:solidFill>
@@ -8589,19 +9622,19 @@
       </p:sp>
       <p:sp>
         <p:nvSpPr>
-          <p:cNvPr id="174" name="" descr="{&quot;isTemplate&quot;:true,&quot;type&quot;:&quot;text&quot;}"/>
-          <p:cNvSpPr txBox="1"/>
-          <p:nvPr/>
-        </p:nvSpPr>
-        <p:spPr>
-          <a:xfrm rot="0" flipH="0" flipV="0">
-            <a:off x="742950" y="3333750"/>
-            <a:ext cx="2276475" cy="238125"/>
-          </a:xfrm>
-          <a:prstGeom prst="rect"/>
-        </p:spPr>
-        <p:txBody>
-          <a:bodyPr wrap="none" lIns="71438" tIns="35719" rIns="71438" bIns="35719"/>
+          <p:cNvPr id="193" name="" descr="{&quot;isTemplate&quot;:true,&quot;type&quot;:&quot;text&quot;}"/>
+          <p:cNvSpPr txBox="1"/>
+          <p:nvPr/>
+        </p:nvSpPr>
+        <p:spPr>
+          <a:xfrm rot="0" flipH="0" flipV="0">
+            <a:off x="1104900" y="4562475"/>
+            <a:ext cx="742950" cy="161925"/>
+          </a:xfrm>
+          <a:prstGeom prst="rect"/>
+        </p:spPr>
+        <p:txBody>
+          <a:bodyPr wrap="none" lIns="50006" tIns="14288" rIns="50006" bIns="14288"/>
           <a:p>
             <a:pPr>
               <a:lnSpc>
@@ -8609,9 +9642,9 @@
               </a:lnSpc>
             </a:pPr>
             <a:r>
-              <a:rPr lang="en-US" sz="900">
-                <a:solidFill>
-                  <a:srgbClr val="172133"/>
+              <a:rPr lang="en-US" sz="788">
+                <a:solidFill>
+                  <a:srgbClr val="BD9B56"/>
                 </a:solidFill>
                 <a:highlight>
                   <a:srgbClr val="BD9B56">
@@ -8621,588 +9654,426 @@
                 <a:latin typeface="Microsoft YaHei"/>
                 <a:ea typeface="Microsoft YaHei"/>
               </a:rPr>
-              <a:t>⏱ </a:t>
-            </a:r>
-            <a:r>
-              <a:rPr lang="zh-CN" sz="900">
+              <a:t>ToC · Worker</a:t>
+            </a:r>
+            <a:endParaRPr/>
+          </a:p>
+        </p:txBody>
+      </p:sp>
+      <p:sp>
+        <p:nvSpPr>
+          <p:cNvPr id="194" name="" descr="{&quot;isTemplate&quot;:true,&quot;type&quot;:&quot;text&quot;}"/>
+          <p:cNvSpPr txBox="1"/>
+          <p:nvPr/>
+        </p:nvSpPr>
+        <p:spPr>
+          <a:xfrm rot="0" flipH="0" flipV="0">
+            <a:off x="628650" y="4781550"/>
+            <a:ext cx="533400" cy="190500"/>
+          </a:xfrm>
+          <a:prstGeom prst="rect"/>
+        </p:spPr>
+        <p:txBody>
+          <a:bodyPr wrap="none" lIns="0" tIns="0" rIns="0" bIns="0"/>
+          <a:p>
+            <a:pPr>
+              <a:lnSpc>
+                <a:spcPct val="140000"/>
+              </a:lnSpc>
+            </a:pPr>
+            <a:r>
+              <a:rPr lang="zh-CN" sz="863" b="1">
                 <a:solidFill>
                   <a:srgbClr val="172133"/>
                 </a:solidFill>
-                <a:highlight>
-                  <a:srgbClr val="BD9B56">
-                    <a:alpha val="12000"/>
-                  </a:srgbClr>
-                </a:highlight>
-                <a:latin typeface="Microsoft YaHei"/>
-                <a:ea typeface="Microsoft YaHei"/>
-              </a:rPr>
-              <a:t>定时数据清理（</a:t>
-            </a:r>
-            <a:r>
-              <a:rPr lang="en-US" sz="900">
+                <a:latin typeface="Microsoft YaHei"/>
+                <a:ea typeface="Microsoft YaHei"/>
+              </a:rPr>
+              <a:t>任务列表</a:t>
+            </a:r>
+            <a:endParaRPr/>
+          </a:p>
+        </p:txBody>
+      </p:sp>
+      <p:sp>
+        <p:nvSpPr>
+          <p:cNvPr id="195" name="" descr="{&quot;isTemplate&quot;:true,&quot;type&quot;:&quot;text&quot;}"/>
+          <p:cNvSpPr txBox="1"/>
+          <p:nvPr/>
+        </p:nvSpPr>
+        <p:spPr>
+          <a:xfrm rot="0" flipH="0" flipV="0">
+            <a:off x="1238250" y="4781550"/>
+            <a:ext cx="1752600" cy="190500"/>
+          </a:xfrm>
+          <a:prstGeom prst="rect"/>
+        </p:spPr>
+        <p:txBody>
+          <a:bodyPr wrap="none" lIns="0" tIns="0" rIns="0" bIns="0"/>
+          <a:p>
+            <a:pPr>
+              <a:lnSpc>
+                <a:spcPct val="140000"/>
+              </a:lnSpc>
+            </a:pPr>
+            <a:r>
+              <a:rPr lang="zh-CN" sz="863">
+                <a:solidFill>
+                  <a:srgbClr val="6B7075"/>
+                </a:solidFill>
+                <a:latin typeface="Microsoft YaHei"/>
+                <a:ea typeface="Microsoft YaHei"/>
+              </a:rPr>
+              <a:t>自动派单后查询「我的待处理」工单</a:t>
+            </a:r>
+            <a:endParaRPr/>
+          </a:p>
+        </p:txBody>
+      </p:sp>
+      <p:sp>
+        <p:nvSpPr>
+          <p:cNvPr id="196" name="" descr="{&quot;isTemplate&quot;:true,&quot;type&quot;:&quot;text&quot;}"/>
+          <p:cNvSpPr txBox="1"/>
+          <p:nvPr/>
+        </p:nvSpPr>
+        <p:spPr>
+          <a:xfrm rot="0" flipH="0" flipV="0">
+            <a:off x="628650" y="5010150"/>
+            <a:ext cx="762000" cy="190500"/>
+          </a:xfrm>
+          <a:prstGeom prst="rect"/>
+        </p:spPr>
+        <p:txBody>
+          <a:bodyPr wrap="none" lIns="0" tIns="0" rIns="0" bIns="0"/>
+          <a:p>
+            <a:pPr>
+              <a:lnSpc>
+                <a:spcPct val="140000"/>
+              </a:lnSpc>
+            </a:pPr>
+            <a:r>
+              <a:rPr lang="zh-CN" sz="863" b="1">
                 <a:solidFill>
                   <a:srgbClr val="172133"/>
                 </a:solidFill>
-                <a:highlight>
-                  <a:srgbClr val="BD9B56">
-                    <a:alpha val="12000"/>
-                  </a:srgbClr>
-                </a:highlight>
-                <a:latin typeface="Microsoft YaHei"/>
-                <a:ea typeface="Microsoft YaHei"/>
-              </a:rPr>
-              <a:t>APScheduler </a:t>
-            </a:r>
-            <a:r>
-              <a:rPr lang="zh-CN" sz="900">
+                <a:latin typeface="Microsoft YaHei"/>
+                <a:ea typeface="Microsoft YaHei"/>
+              </a:rPr>
+              <a:t>接单</a:t>
+            </a:r>
+            <a:r>
+              <a:rPr lang="en-US" sz="863" b="1">
                 <a:solidFill>
                   <a:srgbClr val="172133"/>
                 </a:solidFill>
-                <a:highlight>
-                  <a:srgbClr val="BD9B56">
-                    <a:alpha val="12000"/>
-                  </a:srgbClr>
-                </a:highlight>
-                <a:latin typeface="Microsoft YaHei"/>
-                <a:ea typeface="Microsoft YaHei"/>
-              </a:rPr>
-              <a:t>每日）</a:t>
-            </a:r>
-            <a:endParaRPr/>
-          </a:p>
-        </p:txBody>
-      </p:sp>
-      <p:sp>
-        <p:nvSpPr>
-          <p:cNvPr id="175" name=""/>
+                <a:latin typeface="Microsoft YaHei"/>
+                <a:ea typeface="Microsoft YaHei"/>
+              </a:rPr>
+              <a:t>/</a:t>
+            </a:r>
+            <a:r>
+              <a:rPr lang="zh-CN" sz="863" b="1">
+                <a:solidFill>
+                  <a:srgbClr val="172133"/>
+                </a:solidFill>
+                <a:latin typeface="Microsoft YaHei"/>
+                <a:ea typeface="Microsoft YaHei"/>
+              </a:rPr>
+              <a:t>处理</a:t>
+            </a:r>
+            <a:r>
+              <a:rPr lang="en-US" sz="863" b="1">
+                <a:solidFill>
+                  <a:srgbClr val="172133"/>
+                </a:solidFill>
+                <a:latin typeface="Microsoft YaHei"/>
+                <a:ea typeface="Microsoft YaHei"/>
+              </a:rPr>
+              <a:t>/</a:t>
+            </a:r>
+            <a:r>
+              <a:rPr lang="zh-CN" sz="863" b="1">
+                <a:solidFill>
+                  <a:srgbClr val="172133"/>
+                </a:solidFill>
+                <a:latin typeface="Microsoft YaHei"/>
+                <a:ea typeface="Microsoft YaHei"/>
+              </a:rPr>
+              <a:t>完成</a:t>
+            </a:r>
+            <a:endParaRPr/>
+          </a:p>
+        </p:txBody>
+      </p:sp>
+      <p:sp>
+        <p:nvSpPr>
+          <p:cNvPr id="197" name="" descr="{&quot;isTemplate&quot;:true,&quot;type&quot;:&quot;text&quot;}"/>
+          <p:cNvSpPr txBox="1"/>
+          <p:nvPr/>
+        </p:nvSpPr>
+        <p:spPr>
+          <a:xfrm rot="0" flipH="0" flipV="0">
+            <a:off x="1466850" y="5010150"/>
+            <a:ext cx="1524000" cy="190500"/>
+          </a:xfrm>
+          <a:prstGeom prst="rect"/>
+        </p:spPr>
+        <p:txBody>
+          <a:bodyPr wrap="none" lIns="0" tIns="0" rIns="0" bIns="0"/>
+          <a:p>
+            <a:pPr>
+              <a:lnSpc>
+                <a:spcPct val="140000"/>
+              </a:lnSpc>
+            </a:pPr>
+            <a:r>
+              <a:rPr lang="zh-CN" sz="863">
+                <a:solidFill>
+                  <a:srgbClr val="6B7075"/>
+                </a:solidFill>
+                <a:latin typeface="Microsoft YaHei"/>
+                <a:ea typeface="Microsoft YaHei"/>
+              </a:rPr>
+              <a:t>状态机流转</a:t>
+            </a:r>
+            <a:r>
+              <a:rPr lang="en-US" sz="863">
+                <a:solidFill>
+                  <a:srgbClr val="6B7075"/>
+                </a:solidFill>
+                <a:latin typeface="Microsoft YaHei"/>
+                <a:ea typeface="Microsoft YaHei"/>
+              </a:rPr>
+              <a:t> · </a:t>
+            </a:r>
+            <a:r>
+              <a:rPr lang="zh-CN" sz="863">
+                <a:solidFill>
+                  <a:srgbClr val="6B7075"/>
+                </a:solidFill>
+                <a:latin typeface="Microsoft YaHei"/>
+                <a:ea typeface="Microsoft YaHei"/>
+              </a:rPr>
+              <a:t>每步触发实时通知</a:t>
+            </a:r>
+            <a:endParaRPr/>
+          </a:p>
+        </p:txBody>
+      </p:sp>
+      <p:sp>
+        <p:nvSpPr>
+          <p:cNvPr id="198" name="" descr="{&quot;isTemplate&quot;:true,&quot;type&quot;:&quot;text&quot;}"/>
+          <p:cNvSpPr txBox="1"/>
+          <p:nvPr/>
+        </p:nvSpPr>
+        <p:spPr>
+          <a:xfrm rot="0" flipH="0" flipV="0">
+            <a:off x="628650" y="5229225"/>
+            <a:ext cx="533400" cy="190500"/>
+          </a:xfrm>
+          <a:prstGeom prst="rect"/>
+        </p:spPr>
+        <p:txBody>
+          <a:bodyPr wrap="none" lIns="0" tIns="0" rIns="0" bIns="0"/>
+          <a:p>
+            <a:pPr>
+              <a:lnSpc>
+                <a:spcPct val="140000"/>
+              </a:lnSpc>
+            </a:pPr>
+            <a:r>
+              <a:rPr lang="zh-CN" sz="863" b="1">
+                <a:solidFill>
+                  <a:srgbClr val="172133"/>
+                </a:solidFill>
+                <a:latin typeface="Microsoft YaHei"/>
+                <a:ea typeface="Microsoft YaHei"/>
+              </a:rPr>
+              <a:t>消息</a:t>
+            </a:r>
+            <a:endParaRPr/>
+          </a:p>
+        </p:txBody>
+      </p:sp>
+      <p:sp>
+        <p:nvSpPr>
+          <p:cNvPr id="199" name="" descr="{&quot;isTemplate&quot;:true,&quot;type&quot;:&quot;text&quot;}"/>
+          <p:cNvSpPr txBox="1"/>
+          <p:nvPr/>
+        </p:nvSpPr>
+        <p:spPr>
+          <a:xfrm rot="0" flipH="0" flipV="0">
+            <a:off x="1238250" y="5229225"/>
+            <a:ext cx="1628775" cy="190500"/>
+          </a:xfrm>
+          <a:prstGeom prst="rect"/>
+        </p:spPr>
+        <p:txBody>
+          <a:bodyPr wrap="none" lIns="0" tIns="0" rIns="0" bIns="0"/>
+          <a:p>
+            <a:pPr>
+              <a:lnSpc>
+                <a:spcPct val="140000"/>
+              </a:lnSpc>
+            </a:pPr>
+            <a:r>
+              <a:rPr lang="zh-CN" sz="863">
+                <a:solidFill>
+                  <a:srgbClr val="6B7075"/>
+                </a:solidFill>
+                <a:latin typeface="Microsoft YaHei"/>
+                <a:ea typeface="Microsoft YaHei"/>
+              </a:rPr>
+              <a:t>事件驱动通知（派单</a:t>
+            </a:r>
+            <a:r>
+              <a:rPr lang="en-US" sz="863">
+                <a:solidFill>
+                  <a:srgbClr val="6B7075"/>
+                </a:solidFill>
+                <a:latin typeface="Microsoft YaHei"/>
+                <a:ea typeface="Microsoft YaHei"/>
+              </a:rPr>
+              <a:t>/</a:t>
+            </a:r>
+            <a:r>
+              <a:rPr lang="zh-CN" sz="863">
+                <a:solidFill>
+                  <a:srgbClr val="6B7075"/>
+                </a:solidFill>
+                <a:latin typeface="Microsoft YaHei"/>
+                <a:ea typeface="Microsoft YaHei"/>
+              </a:rPr>
+              <a:t>答复</a:t>
+            </a:r>
+            <a:r>
+              <a:rPr lang="en-US" sz="863">
+                <a:solidFill>
+                  <a:srgbClr val="6B7075"/>
+                </a:solidFill>
+                <a:latin typeface="Microsoft YaHei"/>
+                <a:ea typeface="Microsoft YaHei"/>
+              </a:rPr>
+              <a:t>/</a:t>
+            </a:r>
+            <a:r>
+              <a:rPr lang="zh-CN" sz="863">
+                <a:solidFill>
+                  <a:srgbClr val="6B7075"/>
+                </a:solidFill>
+                <a:latin typeface="Microsoft YaHei"/>
+                <a:ea typeface="Microsoft YaHei"/>
+              </a:rPr>
+              <a:t>完成）</a:t>
+            </a:r>
+            <a:endParaRPr/>
+          </a:p>
+        </p:txBody>
+      </p:sp>
+      <p:sp>
+        <p:nvSpPr>
+          <p:cNvPr id="200" name="" descr="{&quot;isTemplate&quot;:true,&quot;type&quot;:&quot;text&quot;}"/>
+          <p:cNvSpPr txBox="1"/>
+          <p:nvPr/>
+        </p:nvSpPr>
+        <p:spPr>
+          <a:xfrm rot="0" flipH="0" flipV="0">
+            <a:off x="628650" y="5457825"/>
+            <a:ext cx="533400" cy="190500"/>
+          </a:xfrm>
+          <a:prstGeom prst="rect"/>
+        </p:spPr>
+        <p:txBody>
+          <a:bodyPr wrap="none" lIns="0" tIns="0" rIns="0" bIns="0"/>
+          <a:p>
+            <a:pPr>
+              <a:lnSpc>
+                <a:spcPct val="140000"/>
+              </a:lnSpc>
+            </a:pPr>
+            <a:r>
+              <a:rPr lang="zh-CN" sz="863" b="1">
+                <a:solidFill>
+                  <a:srgbClr val="172133"/>
+                </a:solidFill>
+                <a:latin typeface="Microsoft YaHei"/>
+                <a:ea typeface="Microsoft YaHei"/>
+              </a:rPr>
+              <a:t>巡检任务</a:t>
+            </a:r>
+            <a:endParaRPr/>
+          </a:p>
+        </p:txBody>
+      </p:sp>
+      <p:sp>
+        <p:nvSpPr>
+          <p:cNvPr id="201" name="" descr="{&quot;isTemplate&quot;:true,&quot;type&quot;:&quot;text&quot;}"/>
+          <p:cNvSpPr txBox="1"/>
+          <p:nvPr/>
+        </p:nvSpPr>
+        <p:spPr>
+          <a:xfrm rot="0" flipH="0" flipV="0">
+            <a:off x="1238250" y="5457825"/>
+            <a:ext cx="1190625" cy="190500"/>
+          </a:xfrm>
+          <a:prstGeom prst="rect"/>
+        </p:spPr>
+        <p:txBody>
+          <a:bodyPr wrap="none" lIns="0" tIns="0" rIns="0" bIns="0"/>
+          <a:p>
+            <a:pPr>
+              <a:lnSpc>
+                <a:spcPct val="140000"/>
+              </a:lnSpc>
+            </a:pPr>
+            <a:r>
+              <a:rPr lang="zh-CN" sz="863">
+                <a:solidFill>
+                  <a:srgbClr val="6B7075"/>
+                </a:solidFill>
+                <a:latin typeface="Microsoft YaHei"/>
+                <a:ea typeface="Microsoft YaHei"/>
+              </a:rPr>
+              <a:t>巡检记录查看</a:t>
+            </a:r>
+            <a:r>
+              <a:rPr lang="en-US" sz="863">
+                <a:solidFill>
+                  <a:srgbClr val="6B7075"/>
+                </a:solidFill>
+                <a:latin typeface="Microsoft YaHei"/>
+                <a:ea typeface="Microsoft YaHei"/>
+              </a:rPr>
+              <a:t> · </a:t>
+            </a:r>
+            <a:r>
+              <a:rPr lang="zh-CN" sz="863">
+                <a:solidFill>
+                  <a:srgbClr val="6B7075"/>
+                </a:solidFill>
+                <a:latin typeface="Microsoft YaHei"/>
+                <a:ea typeface="Microsoft YaHei"/>
+              </a:rPr>
+              <a:t>异常处理</a:t>
+            </a:r>
+            <a:endParaRPr/>
+          </a:p>
+        </p:txBody>
+      </p:sp>
+      <p:sp>
+        <p:nvSpPr>
+          <p:cNvPr id="202" name=""/>
           <p:cNvSpPr/>
           <p:nvPr/>
         </p:nvSpPr>
         <p:spPr>
           <a:xfrm rot="0" flipH="0" flipV="0">
-            <a:off x="3095625" y="3333750"/>
-            <a:ext cx="2028825" cy="238125"/>
+            <a:off x="8982075" y="866775"/>
+            <a:ext cx="2714625" cy="3114675"/>
           </a:xfrm>
           <a:prstGeom prst="roundRect">
             <a:avLst>
-              <a:gd name="adj" fmla="val 24000"/>
-            </a:avLst>
-          </a:prstGeom>
-          <a:solidFill>
-            <a:srgbClr val="BD9B56">
-              <a:alpha val="12000"/>
-            </a:srgbClr>
-          </a:solidFill>
-          <a:ln/>
-        </p:spPr>
-        <p:txBody>
-          <a:bodyPr/>
-          <a:p/>
-        </p:txBody>
-      </p:sp>
-      <p:sp>
-        <p:nvSpPr>
-          <p:cNvPr id="176" name="" descr="{&quot;isTemplate&quot;:true,&quot;type&quot;:&quot;text&quot;}"/>
-          <p:cNvSpPr txBox="1"/>
-          <p:nvPr/>
-        </p:nvSpPr>
-        <p:spPr>
-          <a:xfrm rot="0" flipH="0" flipV="0">
-            <a:off x="3095625" y="3333750"/>
-            <a:ext cx="2028825" cy="238125"/>
-          </a:xfrm>
-          <a:prstGeom prst="rect"/>
-        </p:spPr>
-        <p:txBody>
-          <a:bodyPr wrap="none" lIns="71438" tIns="35719" rIns="71438" bIns="35719"/>
-          <a:p>
-            <a:pPr>
-              <a:lnSpc>
-                <a:spcPct val="100000"/>
-              </a:lnSpc>
-            </a:pPr>
-            <a:r>
-              <a:rPr lang="en-US" sz="900">
-                <a:solidFill>
-                  <a:srgbClr val="172133"/>
-                </a:solidFill>
-                <a:highlight>
-                  <a:srgbClr val="BD9B56">
-                    <a:alpha val="12000"/>
-                  </a:srgbClr>
-                </a:highlight>
-                <a:latin typeface="Microsoft YaHei"/>
-                <a:ea typeface="Microsoft YaHei"/>
-              </a:rPr>
-              <a:t>📷 </a:t>
-            </a:r>
-            <a:r>
-              <a:rPr lang="zh-CN" sz="900">
-                <a:solidFill>
-                  <a:srgbClr val="172133"/>
-                </a:solidFill>
-                <a:highlight>
-                  <a:srgbClr val="BD9B56">
-                    <a:alpha val="12000"/>
-                  </a:srgbClr>
-                </a:highlight>
-                <a:latin typeface="Microsoft YaHei"/>
-                <a:ea typeface="Microsoft YaHei"/>
-              </a:rPr>
-              <a:t>巡检自动化（抓拍</a:t>
-            </a:r>
-            <a:r>
-              <a:rPr lang="en-US" sz="900">
-                <a:solidFill>
-                  <a:srgbClr val="172133"/>
-                </a:solidFill>
-                <a:highlight>
-                  <a:srgbClr val="BD9B56">
-                    <a:alpha val="12000"/>
-                  </a:srgbClr>
-                </a:highlight>
-                <a:latin typeface="Microsoft YaHei"/>
-                <a:ea typeface="Microsoft YaHei"/>
-              </a:rPr>
-              <a:t> + </a:t>
-            </a:r>
-            <a:r>
-              <a:rPr lang="zh-CN" sz="900">
-                <a:solidFill>
-                  <a:srgbClr val="172133"/>
-                </a:solidFill>
-                <a:highlight>
-                  <a:srgbClr val="BD9B56">
-                    <a:alpha val="12000"/>
-                  </a:srgbClr>
-                </a:highlight>
-                <a:latin typeface="Microsoft YaHei"/>
-                <a:ea typeface="Microsoft YaHei"/>
-              </a:rPr>
-              <a:t>视觉识别）</a:t>
-            </a:r>
-            <a:endParaRPr/>
-          </a:p>
-        </p:txBody>
-      </p:sp>
-      <p:sp>
-        <p:nvSpPr>
-          <p:cNvPr id="177" name=""/>
-          <p:cNvSpPr/>
-          <p:nvPr/>
-        </p:nvSpPr>
-        <p:spPr>
-          <a:xfrm rot="0" flipH="0" flipV="0">
-            <a:off x="5200650" y="3333750"/>
-            <a:ext cx="2238375" cy="238125"/>
-          </a:xfrm>
-          <a:prstGeom prst="roundRect">
-            <a:avLst>
-              <a:gd name="adj" fmla="val 24000"/>
-            </a:avLst>
-          </a:prstGeom>
-          <a:solidFill>
-            <a:srgbClr val="BD9B56">
-              <a:alpha val="12000"/>
-            </a:srgbClr>
-          </a:solidFill>
-          <a:ln/>
-        </p:spPr>
-        <p:txBody>
-          <a:bodyPr/>
-          <a:p/>
-        </p:txBody>
-      </p:sp>
-      <p:sp>
-        <p:nvSpPr>
-          <p:cNvPr id="178" name="" descr="{&quot;isTemplate&quot;:true,&quot;type&quot;:&quot;text&quot;}"/>
-          <p:cNvSpPr txBox="1"/>
-          <p:nvPr/>
-        </p:nvSpPr>
-        <p:spPr>
-          <a:xfrm rot="0" flipH="0" flipV="0">
-            <a:off x="5200650" y="3333750"/>
-            <a:ext cx="2238375" cy="238125"/>
-          </a:xfrm>
-          <a:prstGeom prst="rect"/>
-        </p:spPr>
-        <p:txBody>
-          <a:bodyPr wrap="none" lIns="71438" tIns="35719" rIns="71438" bIns="35719"/>
-          <a:p>
-            <a:pPr>
-              <a:lnSpc>
-                <a:spcPct val="100000"/>
-              </a:lnSpc>
-            </a:pPr>
-            <a:r>
-              <a:rPr lang="en-US" sz="900">
-                <a:solidFill>
-                  <a:srgbClr val="172133"/>
-                </a:solidFill>
-                <a:highlight>
-                  <a:srgbClr val="BD9B56">
-                    <a:alpha val="12000"/>
-                  </a:srgbClr>
-                </a:highlight>
-                <a:latin typeface="Microsoft YaHei"/>
-                <a:ea typeface="Microsoft YaHei"/>
-              </a:rPr>
-              <a:t>🧠 </a:t>
-            </a:r>
-            <a:r>
-              <a:rPr lang="zh-CN" sz="900">
-                <a:solidFill>
-                  <a:srgbClr val="172133"/>
-                </a:solidFill>
-                <a:highlight>
-                  <a:srgbClr val="BD9B56">
-                    <a:alpha val="12000"/>
-                  </a:srgbClr>
-                </a:highlight>
-                <a:latin typeface="Microsoft YaHei"/>
-                <a:ea typeface="Microsoft YaHei"/>
-              </a:rPr>
-              <a:t>知识自进化（反馈</a:t>
-            </a:r>
-            <a:r>
-              <a:rPr lang="en-US" sz="900">
-                <a:solidFill>
-                  <a:srgbClr val="172133"/>
-                </a:solidFill>
-                <a:highlight>
-                  <a:srgbClr val="BD9B56">
-                    <a:alpha val="12000"/>
-                  </a:srgbClr>
-                </a:highlight>
-                <a:latin typeface="Microsoft YaHei"/>
-                <a:ea typeface="Microsoft YaHei"/>
-              </a:rPr>
-              <a:t> → </a:t>
-            </a:r>
-            <a:r>
-              <a:rPr lang="zh-CN" sz="900">
-                <a:solidFill>
-                  <a:srgbClr val="172133"/>
-                </a:solidFill>
-                <a:highlight>
-                  <a:srgbClr val="BD9B56">
-                    <a:alpha val="12000"/>
-                  </a:srgbClr>
-                </a:highlight>
-                <a:latin typeface="Microsoft YaHei"/>
-                <a:ea typeface="Microsoft YaHei"/>
-              </a:rPr>
-              <a:t>审核</a:t>
-            </a:r>
-            <a:r>
-              <a:rPr lang="en-US" sz="900">
-                <a:solidFill>
-                  <a:srgbClr val="172133"/>
-                </a:solidFill>
-                <a:highlight>
-                  <a:srgbClr val="BD9B56">
-                    <a:alpha val="12000"/>
-                  </a:srgbClr>
-                </a:highlight>
-                <a:latin typeface="Microsoft YaHei"/>
-                <a:ea typeface="Microsoft YaHei"/>
-              </a:rPr>
-              <a:t> → </a:t>
-            </a:r>
-            <a:r>
-              <a:rPr lang="zh-CN" sz="900">
-                <a:solidFill>
-                  <a:srgbClr val="172133"/>
-                </a:solidFill>
-                <a:highlight>
-                  <a:srgbClr val="BD9B56">
-                    <a:alpha val="12000"/>
-                  </a:srgbClr>
-                </a:highlight>
-                <a:latin typeface="Microsoft YaHei"/>
-                <a:ea typeface="Microsoft YaHei"/>
-              </a:rPr>
-              <a:t>入库）</a:t>
-            </a:r>
-            <a:endParaRPr/>
-          </a:p>
-        </p:txBody>
-      </p:sp>
-      <p:sp>
-        <p:nvSpPr>
-          <p:cNvPr id="179" name=""/>
-          <p:cNvSpPr/>
-          <p:nvPr/>
-        </p:nvSpPr>
-        <p:spPr>
-          <a:xfrm rot="0" flipH="0" flipV="0">
-            <a:off x="742950" y="3648075"/>
-            <a:ext cx="2314575" cy="238125"/>
-          </a:xfrm>
-          <a:prstGeom prst="roundRect">
-            <a:avLst>
-              <a:gd name="adj" fmla="val 24000"/>
-            </a:avLst>
-          </a:prstGeom>
-          <a:solidFill>
-            <a:srgbClr val="BD9B56">
-              <a:alpha val="12000"/>
-            </a:srgbClr>
-          </a:solidFill>
-          <a:ln/>
-        </p:spPr>
-        <p:txBody>
-          <a:bodyPr/>
-          <a:p/>
-        </p:txBody>
-      </p:sp>
-      <p:sp>
-        <p:nvSpPr>
-          <p:cNvPr id="180" name="" descr="{&quot;isTemplate&quot;:true,&quot;type&quot;:&quot;text&quot;}"/>
-          <p:cNvSpPr txBox="1"/>
-          <p:nvPr/>
-        </p:nvSpPr>
-        <p:spPr>
-          <a:xfrm rot="0" flipH="0" flipV="0">
-            <a:off x="742950" y="3648075"/>
-            <a:ext cx="2314575" cy="238125"/>
-          </a:xfrm>
-          <a:prstGeom prst="rect"/>
-        </p:spPr>
-        <p:txBody>
-          <a:bodyPr wrap="none" lIns="71438" tIns="35719" rIns="71438" bIns="35719"/>
-          <a:p>
-            <a:pPr>
-              <a:lnSpc>
-                <a:spcPct val="100000"/>
-              </a:lnSpc>
-            </a:pPr>
-            <a:r>
-              <a:rPr lang="en-US" sz="900">
-                <a:solidFill>
-                  <a:srgbClr val="172133"/>
-                </a:solidFill>
-                <a:highlight>
-                  <a:srgbClr val="BD9B56">
-                    <a:alpha val="12000"/>
-                  </a:srgbClr>
-                </a:highlight>
-                <a:latin typeface="Microsoft YaHei"/>
-                <a:ea typeface="Microsoft YaHei"/>
-              </a:rPr>
-              <a:t>📊 </a:t>
-            </a:r>
-            <a:r>
-              <a:rPr lang="zh-CN" sz="900">
-                <a:solidFill>
-                  <a:srgbClr val="172133"/>
-                </a:solidFill>
-                <a:highlight>
-                  <a:srgbClr val="BD9B56">
-                    <a:alpha val="12000"/>
-                  </a:srgbClr>
-                </a:highlight>
-                <a:latin typeface="Microsoft YaHei"/>
-                <a:ea typeface="Microsoft YaHei"/>
-              </a:rPr>
-              <a:t>监控告警（</a:t>
-            </a:r>
-            <a:r>
-              <a:rPr lang="en-US" sz="900">
-                <a:solidFill>
-                  <a:srgbClr val="172133"/>
-                </a:solidFill>
-                <a:highlight>
-                  <a:srgbClr val="BD9B56">
-                    <a:alpha val="12000"/>
-                  </a:srgbClr>
-                </a:highlight>
-                <a:latin typeface="Microsoft YaHei"/>
-                <a:ea typeface="Microsoft YaHei"/>
-              </a:rPr>
-              <a:t>Prometheus + Grafana</a:t>
-            </a:r>
-            <a:r>
-              <a:rPr lang="zh-CN" sz="900">
-                <a:solidFill>
-                  <a:srgbClr val="172133"/>
-                </a:solidFill>
-                <a:highlight>
-                  <a:srgbClr val="BD9B56">
-                    <a:alpha val="12000"/>
-                  </a:srgbClr>
-                </a:highlight>
-                <a:latin typeface="Microsoft YaHei"/>
-                <a:ea typeface="Microsoft YaHei"/>
-              </a:rPr>
-              <a:t>）</a:t>
-            </a:r>
-            <a:endParaRPr/>
-          </a:p>
-        </p:txBody>
-      </p:sp>
-      <p:sp>
-        <p:nvSpPr>
-          <p:cNvPr id="181" name=""/>
-          <p:cNvSpPr/>
-          <p:nvPr/>
-        </p:nvSpPr>
-        <p:spPr>
-          <a:xfrm rot="0" flipH="0" flipV="0">
-            <a:off x="3133725" y="3648075"/>
-            <a:ext cx="2486025" cy="238125"/>
-          </a:xfrm>
-          <a:prstGeom prst="roundRect">
-            <a:avLst>
-              <a:gd name="adj" fmla="val 24000"/>
-            </a:avLst>
-          </a:prstGeom>
-          <a:solidFill>
-            <a:srgbClr val="BD9B56">
-              <a:alpha val="12000"/>
-            </a:srgbClr>
-          </a:solidFill>
-          <a:ln/>
-        </p:spPr>
-        <p:txBody>
-          <a:bodyPr/>
-          <a:p/>
-        </p:txBody>
-      </p:sp>
-      <p:sp>
-        <p:nvSpPr>
-          <p:cNvPr id="182" name="" descr="{&quot;isTemplate&quot;:true,&quot;type&quot;:&quot;text&quot;}"/>
-          <p:cNvSpPr txBox="1"/>
-          <p:nvPr/>
-        </p:nvSpPr>
-        <p:spPr>
-          <a:xfrm rot="0" flipH="0" flipV="0">
-            <a:off x="3133725" y="3648075"/>
-            <a:ext cx="2486025" cy="238125"/>
-          </a:xfrm>
-          <a:prstGeom prst="rect"/>
-        </p:spPr>
-        <p:txBody>
-          <a:bodyPr wrap="none" lIns="71438" tIns="35719" rIns="71438" bIns="35719"/>
-          <a:p>
-            <a:pPr>
-              <a:lnSpc>
-                <a:spcPct val="100000"/>
-              </a:lnSpc>
-            </a:pPr>
-            <a:r>
-              <a:rPr lang="en-US" sz="900">
-                <a:solidFill>
-                  <a:srgbClr val="172133"/>
-                </a:solidFill>
-                <a:highlight>
-                  <a:srgbClr val="BD9B56">
-                    <a:alpha val="12000"/>
-                  </a:srgbClr>
-                </a:highlight>
-                <a:latin typeface="Microsoft YaHei"/>
-                <a:ea typeface="Microsoft YaHei"/>
-              </a:rPr>
-              <a:t>🚀 CI/CD</a:t>
-            </a:r>
-            <a:r>
-              <a:rPr lang="zh-CN" sz="900">
-                <a:solidFill>
-                  <a:srgbClr val="172133"/>
-                </a:solidFill>
-                <a:highlight>
-                  <a:srgbClr val="BD9B56">
-                    <a:alpha val="12000"/>
-                  </a:srgbClr>
-                </a:highlight>
-                <a:latin typeface="Microsoft YaHei"/>
-                <a:ea typeface="Microsoft YaHei"/>
-              </a:rPr>
-              <a:t>（</a:t>
-            </a:r>
-            <a:r>
-              <a:rPr lang="en-US" sz="900">
-                <a:solidFill>
-                  <a:srgbClr val="172133"/>
-                </a:solidFill>
-                <a:highlight>
-                  <a:srgbClr val="BD9B56">
-                    <a:alpha val="12000"/>
-                  </a:srgbClr>
-                </a:highlight>
-                <a:latin typeface="Microsoft YaHei"/>
-                <a:ea typeface="Microsoft YaHei"/>
-              </a:rPr>
-              <a:t>GitHub Actions </a:t>
-            </a:r>
-            <a:r>
-              <a:rPr lang="zh-CN" sz="900">
-                <a:solidFill>
-                  <a:srgbClr val="172133"/>
-                </a:solidFill>
-                <a:highlight>
-                  <a:srgbClr val="BD9B56">
-                    <a:alpha val="12000"/>
-                  </a:srgbClr>
-                </a:highlight>
-                <a:latin typeface="Microsoft YaHei"/>
-                <a:ea typeface="Microsoft YaHei"/>
-              </a:rPr>
-              <a:t>自动测试发布）</a:t>
-            </a:r>
-            <a:endParaRPr/>
-          </a:p>
-        </p:txBody>
-      </p:sp>
-      <p:sp>
-        <p:nvSpPr>
-          <p:cNvPr id="183" name="" descr="{&quot;isTemplate&quot;:true,&quot;type&quot;:&quot;text&quot;}"/>
-          <p:cNvSpPr txBox="1"/>
-          <p:nvPr/>
-        </p:nvSpPr>
-        <p:spPr>
-          <a:xfrm rot="0" flipH="0" flipV="0">
-            <a:off x="742950" y="3981450"/>
-            <a:ext cx="7124700" cy="228600"/>
-          </a:xfrm>
-          <a:prstGeom prst="rect"/>
-        </p:spPr>
-        <p:txBody>
-          <a:bodyPr wrap="none" lIns="0" tIns="0" rIns="0" bIns="0"/>
-          <a:p>
-            <a:pPr>
-              <a:lnSpc>
-                <a:spcPct val="160000"/>
-              </a:lnSpc>
-            </a:pPr>
-            <a:r>
-              <a:rPr lang="zh-CN" sz="900">
-                <a:solidFill>
-                  <a:srgbClr val="6B7075"/>
-                </a:solidFill>
-                <a:latin typeface="Microsoft YaHei"/>
-                <a:ea typeface="Microsoft YaHei"/>
-              </a:rPr>
-              <a:t>系统无需人工值守即可完成数据清理、自动巡检、知识沉淀、监控告警与持续交付，形成「越用越准、越用越稳」的自进化闭环。</a:t>
-            </a:r>
-            <a:endParaRPr/>
-          </a:p>
-        </p:txBody>
-      </p:sp>
-      <p:sp>
-        <p:nvSpPr>
-          <p:cNvPr id="184" name=""/>
-          <p:cNvSpPr/>
-          <p:nvPr/>
-        </p:nvSpPr>
-        <p:spPr>
-          <a:xfrm rot="0" flipH="0" flipV="0">
-            <a:off x="8286750" y="952500"/>
-            <a:ext cx="3333750" cy="2019300"/>
-          </a:xfrm>
-          <a:prstGeom prst="roundRect">
-            <a:avLst>
-              <a:gd name="adj" fmla="val 5660"/>
+              <a:gd name="adj" fmla="val 4211"/>
             </a:avLst>
           </a:prstGeom>
           <a:gradFill>
@@ -9225,14 +10096,14 @@
       </p:sp>
       <p:sp>
         <p:nvSpPr>
-          <p:cNvPr id="185" name="" descr="{&quot;isTemplate&quot;:true,&quot;type&quot;:&quot;text&quot;}"/>
-          <p:cNvSpPr txBox="1"/>
-          <p:nvPr/>
-        </p:nvSpPr>
-        <p:spPr>
-          <a:xfrm rot="0" flipH="0" flipV="0">
-            <a:off x="8496300" y="1143000"/>
-            <a:ext cx="2914650" cy="152400"/>
+          <p:cNvPr id="203" name="" descr="{&quot;isTemplate&quot;:true,&quot;type&quot;:&quot;text&quot;}"/>
+          <p:cNvSpPr txBox="1"/>
+          <p:nvPr/>
+        </p:nvSpPr>
+        <p:spPr>
+          <a:xfrm rot="0" flipH="0" flipV="0">
+            <a:off x="9153525" y="1019175"/>
+            <a:ext cx="2371725" cy="142875"/>
           </a:xfrm>
           <a:prstGeom prst="rect"/>
         </p:spPr>
@@ -9245,142 +10116,533 @@
               </a:lnSpc>
             </a:pPr>
             <a:r>
-              <a:rPr lang="en-US" sz="975" spc="-9223372036854775808">
+              <a:rPr lang="zh-CN" sz="900" spc="-9223372036854775808">
                 <a:solidFill>
                   <a:srgbClr val="BD9B56"/>
                 </a:solidFill>
                 <a:latin typeface="Microsoft YaHei"/>
                 <a:ea typeface="Microsoft YaHei"/>
               </a:rPr>
-              <a:t>ONLINE DEMO</a:t>
-            </a:r>
-            <a:endParaRPr/>
-          </a:p>
-        </p:txBody>
-      </p:sp>
-      <p:sp>
-        <p:nvSpPr>
-          <p:cNvPr id="186" name="" descr="{&quot;isTemplate&quot;:true,&quot;type&quot;:&quot;text&quot;}"/>
-          <p:cNvSpPr txBox="1"/>
-          <p:nvPr/>
-        </p:nvSpPr>
-        <p:spPr>
-          <a:xfrm rot="0" flipH="0" flipV="0">
-            <a:off x="8496300" y="1409700"/>
-            <a:ext cx="2914650" cy="314325"/>
-          </a:xfrm>
-          <a:prstGeom prst="rect"/>
-        </p:spPr>
-        <p:txBody>
-          <a:bodyPr wrap="none" lIns="0" tIns="0" rIns="0" bIns="0"/>
-          <a:p>
-            <a:pPr>
-              <a:lnSpc>
-                <a:spcPct val="150000"/>
-              </a:lnSpc>
-            </a:pPr>
-            <a:r>
-              <a:rPr lang="en-US" sz="1350">
-                <a:solidFill>
-                  <a:srgbClr val="FBFCFA"/>
-                </a:solidFill>
-                <a:latin typeface="Inter"/>
-                <a:ea typeface="Inter"/>
-              </a:rPr>
-              <a:t>http://119.91.236.85</a:t>
-            </a:r>
-            <a:endParaRPr/>
-          </a:p>
-        </p:txBody>
-      </p:sp>
-      <p:sp>
-        <p:nvSpPr>
-          <p:cNvPr id="187" name="" descr="{&quot;isTemplate&quot;:true,&quot;type&quot;:&quot;text&quot;}"/>
-          <p:cNvSpPr txBox="1"/>
-          <p:nvPr/>
-        </p:nvSpPr>
-        <p:spPr>
-          <a:xfrm rot="0" flipH="0" flipV="0">
-            <a:off x="8496300" y="1838325"/>
-            <a:ext cx="2914650" cy="0"/>
-          </a:xfrm>
-          <a:prstGeom prst="rect"/>
-        </p:spPr>
-        <p:txBody>
-          <a:bodyPr wrap="none" lIns="0" tIns="0" rIns="0" bIns="0"/>
-          <a:p>
-            <a:pPr/>
-            <a:endParaRPr/>
-          </a:p>
-        </p:txBody>
-      </p:sp>
-      <p:sp>
-        <p:nvSpPr>
-          <p:cNvPr id="188" name="" descr="{&quot;isTemplate&quot;:true,&quot;type&quot;:&quot;text&quot;}"/>
-          <p:cNvSpPr txBox="1"/>
-          <p:nvPr/>
-        </p:nvSpPr>
-        <p:spPr>
-          <a:xfrm rot="0" flipH="0" flipV="0">
-            <a:off x="8496300" y="1838325"/>
-            <a:ext cx="2914650" cy="257175"/>
-          </a:xfrm>
-          <a:prstGeom prst="rect"/>
-        </p:spPr>
-        <p:txBody>
-          <a:bodyPr wrap="none" lIns="0" tIns="0" rIns="0" bIns="0"/>
-          <a:p>
-            <a:pPr>
-              <a:lnSpc>
-                <a:spcPct val="180000"/>
-              </a:lnSpc>
-            </a:pPr>
-            <a:r>
-              <a:rPr lang="zh-CN" sz="938">
+              <a:t>系统自维护自更新</a:t>
+            </a:r>
+            <a:endParaRPr/>
+          </a:p>
+        </p:txBody>
+      </p:sp>
+      <p:sp>
+        <p:nvSpPr>
+          <p:cNvPr id="204" name="" descr="{&quot;isTemplate&quot;:true,&quot;type&quot;:&quot;text&quot;}"/>
+          <p:cNvSpPr txBox="1"/>
+          <p:nvPr/>
+        </p:nvSpPr>
+        <p:spPr>
+          <a:xfrm rot="0" flipH="0" flipV="0">
+            <a:off x="9153525" y="1247775"/>
+            <a:ext cx="2371725" cy="200025"/>
+          </a:xfrm>
+          <a:prstGeom prst="rect"/>
+        </p:spPr>
+        <p:txBody>
+          <a:bodyPr wrap="none" lIns="0" tIns="0" rIns="0" bIns="0"/>
+          <a:p>
+            <a:pPr>
+              <a:lnSpc>
+                <a:spcPct val="145000"/>
+              </a:lnSpc>
+            </a:pPr>
+            <a:r>
+              <a:rPr lang="zh-CN" sz="863" b="1">
                 <a:solidFill>
                   <a:srgbClr val="BD9B56"/>
                 </a:solidFill>
                 <a:latin typeface="Microsoft YaHei"/>
                 <a:ea typeface="Microsoft YaHei"/>
               </a:rPr>
-              <a:t>密码均为</a:t>
-            </a:r>
-            <a:r>
-              <a:rPr lang="en-US" sz="938">
+              <a:t>定时清理</a:t>
+            </a:r>
+            <a:endParaRPr/>
+          </a:p>
+        </p:txBody>
+      </p:sp>
+      <p:sp>
+        <p:nvSpPr>
+          <p:cNvPr id="205" name="" descr="{&quot;isTemplate&quot;:true,&quot;type&quot;:&quot;text&quot;}"/>
+          <p:cNvSpPr txBox="1"/>
+          <p:nvPr/>
+        </p:nvSpPr>
+        <p:spPr>
+          <a:xfrm rot="0" flipH="0" flipV="0">
+            <a:off x="9153525" y="1447800"/>
+            <a:ext cx="2371725" cy="200025"/>
+          </a:xfrm>
+          <a:prstGeom prst="rect"/>
+        </p:spPr>
+        <p:txBody>
+          <a:bodyPr wrap="none" lIns="0" tIns="0" rIns="0" bIns="0"/>
+          <a:p>
+            <a:pPr>
+              <a:lnSpc>
+                <a:spcPct val="145000"/>
+              </a:lnSpc>
+            </a:pPr>
+            <a:r>
+              <a:rPr lang="zh-CN" sz="863">
+                <a:solidFill>
+                  <a:srgbClr val="FBFCFA">
+                    <a:alpha val="80000"/>
+                  </a:srgbClr>
+                </a:solidFill>
+                <a:latin typeface="Microsoft YaHei"/>
+                <a:ea typeface="Microsoft YaHei"/>
+              </a:rPr>
+              <a:t>　</a:t>
+            </a:r>
+            <a:r>
+              <a:rPr lang="en-US" sz="863">
+                <a:solidFill>
+                  <a:srgbClr val="FBFCFA">
+                    <a:alpha val="80000"/>
+                  </a:srgbClr>
+                </a:solidFill>
+                <a:latin typeface="Microsoft YaHei"/>
+                <a:ea typeface="Microsoft YaHei"/>
+              </a:rPr>
+              <a:t>APScheduler </a:t>
+            </a:r>
+            <a:r>
+              <a:rPr lang="zh-CN" sz="863">
+                <a:solidFill>
+                  <a:srgbClr val="FBFCFA">
+                    <a:alpha val="80000"/>
+                  </a:srgbClr>
+                </a:solidFill>
+                <a:latin typeface="Microsoft YaHei"/>
+                <a:ea typeface="Microsoft YaHei"/>
+              </a:rPr>
+              <a:t>每日清过期数据</a:t>
+            </a:r>
+            <a:r>
+              <a:rPr lang="en-US" sz="863">
+                <a:solidFill>
+                  <a:srgbClr val="FBFCFA">
+                    <a:alpha val="80000"/>
+                  </a:srgbClr>
+                </a:solidFill>
+                <a:latin typeface="Microsoft YaHei"/>
+                <a:ea typeface="Microsoft YaHei"/>
+              </a:rPr>
+              <a:t>/</a:t>
+            </a:r>
+            <a:r>
+              <a:rPr lang="zh-CN" sz="863">
+                <a:solidFill>
+                  <a:srgbClr val="FBFCFA">
+                    <a:alpha val="80000"/>
+                  </a:srgbClr>
+                </a:solidFill>
+                <a:latin typeface="Microsoft YaHei"/>
+                <a:ea typeface="Microsoft YaHei"/>
+              </a:rPr>
+              <a:t>孤儿文件</a:t>
+            </a:r>
+            <a:endParaRPr/>
+          </a:p>
+        </p:txBody>
+      </p:sp>
+      <p:sp>
+        <p:nvSpPr>
+          <p:cNvPr id="206" name="" descr="{&quot;isTemplate&quot;:true,&quot;type&quot;:&quot;text&quot;}"/>
+          <p:cNvSpPr txBox="1"/>
+          <p:nvPr/>
+        </p:nvSpPr>
+        <p:spPr>
+          <a:xfrm rot="0" flipH="0" flipV="0">
+            <a:off x="9153525" y="1704975"/>
+            <a:ext cx="2371725" cy="200025"/>
+          </a:xfrm>
+          <a:prstGeom prst="rect"/>
+        </p:spPr>
+        <p:txBody>
+          <a:bodyPr wrap="none" lIns="0" tIns="0" rIns="0" bIns="0"/>
+          <a:p>
+            <a:pPr>
+              <a:lnSpc>
+                <a:spcPct val="145000"/>
+              </a:lnSpc>
+            </a:pPr>
+            <a:r>
+              <a:rPr lang="zh-CN" sz="863" b="1">
                 <a:solidFill>
                   <a:srgbClr val="BD9B56"/>
                 </a:solidFill>
                 <a:latin typeface="Microsoft YaHei"/>
                 <a:ea typeface="Microsoft YaHei"/>
               </a:rPr>
-              <a:t> 123456</a:t>
-            </a:r>
-            <a:endParaRPr/>
-          </a:p>
-        </p:txBody>
-      </p:sp>
-      <p:sp>
-        <p:nvSpPr>
-          <p:cNvPr id="189" name=""/>
+              <a:t>巡检自动化</a:t>
+            </a:r>
+            <a:endParaRPr/>
+          </a:p>
+        </p:txBody>
+      </p:sp>
+      <p:sp>
+        <p:nvSpPr>
+          <p:cNvPr id="207" name="" descr="{&quot;isTemplate&quot;:true,&quot;type&quot;:&quot;text&quot;}"/>
+          <p:cNvSpPr txBox="1"/>
+          <p:nvPr/>
+        </p:nvSpPr>
+        <p:spPr>
+          <a:xfrm rot="0" flipH="0" flipV="0">
+            <a:off x="9153525" y="1905000"/>
+            <a:ext cx="2371725" cy="200025"/>
+          </a:xfrm>
+          <a:prstGeom prst="rect"/>
+        </p:spPr>
+        <p:txBody>
+          <a:bodyPr wrap="none" lIns="0" tIns="0" rIns="0" bIns="0"/>
+          <a:p>
+            <a:pPr>
+              <a:lnSpc>
+                <a:spcPct val="145000"/>
+              </a:lnSpc>
+            </a:pPr>
+            <a:r>
+              <a:rPr lang="zh-CN" sz="863">
+                <a:solidFill>
+                  <a:srgbClr val="FBFCFA">
+                    <a:alpha val="80000"/>
+                  </a:srgbClr>
+                </a:solidFill>
+                <a:latin typeface="Microsoft YaHei"/>
+                <a:ea typeface="Microsoft YaHei"/>
+              </a:rPr>
+              <a:t>　定时抓拍</a:t>
+            </a:r>
+            <a:r>
+              <a:rPr lang="en-US" sz="863">
+                <a:solidFill>
+                  <a:srgbClr val="FBFCFA">
+                    <a:alpha val="80000"/>
+                  </a:srgbClr>
+                </a:solidFill>
+                <a:latin typeface="Microsoft YaHei"/>
+                <a:ea typeface="Microsoft YaHei"/>
+              </a:rPr>
+              <a:t> + </a:t>
+            </a:r>
+            <a:r>
+              <a:rPr lang="zh-CN" sz="863">
+                <a:solidFill>
+                  <a:srgbClr val="FBFCFA">
+                    <a:alpha val="80000"/>
+                  </a:srgbClr>
+                </a:solidFill>
+                <a:latin typeface="Microsoft YaHei"/>
+                <a:ea typeface="Microsoft YaHei"/>
+              </a:rPr>
+              <a:t>视觉识别异常</a:t>
+            </a:r>
+            <a:endParaRPr/>
+          </a:p>
+        </p:txBody>
+      </p:sp>
+      <p:sp>
+        <p:nvSpPr>
+          <p:cNvPr id="208" name="" descr="{&quot;isTemplate&quot;:true,&quot;type&quot;:&quot;text&quot;}"/>
+          <p:cNvSpPr txBox="1"/>
+          <p:nvPr/>
+        </p:nvSpPr>
+        <p:spPr>
+          <a:xfrm rot="0" flipH="0" flipV="0">
+            <a:off x="9153525" y="2162175"/>
+            <a:ext cx="2371725" cy="200025"/>
+          </a:xfrm>
+          <a:prstGeom prst="rect"/>
+        </p:spPr>
+        <p:txBody>
+          <a:bodyPr wrap="none" lIns="0" tIns="0" rIns="0" bIns="0"/>
+          <a:p>
+            <a:pPr>
+              <a:lnSpc>
+                <a:spcPct val="145000"/>
+              </a:lnSpc>
+            </a:pPr>
+            <a:r>
+              <a:rPr lang="zh-CN" sz="863" b="1">
+                <a:solidFill>
+                  <a:srgbClr val="BD9B56"/>
+                </a:solidFill>
+                <a:latin typeface="Microsoft YaHei"/>
+                <a:ea typeface="Microsoft YaHei"/>
+              </a:rPr>
+              <a:t>知识自进化</a:t>
+            </a:r>
+            <a:endParaRPr/>
+          </a:p>
+        </p:txBody>
+      </p:sp>
+      <p:sp>
+        <p:nvSpPr>
+          <p:cNvPr id="209" name="" descr="{&quot;isTemplate&quot;:true,&quot;type&quot;:&quot;text&quot;}"/>
+          <p:cNvSpPr txBox="1"/>
+          <p:nvPr/>
+        </p:nvSpPr>
+        <p:spPr>
+          <a:xfrm rot="0" flipH="0" flipV="0">
+            <a:off x="9153525" y="2362200"/>
+            <a:ext cx="2371725" cy="200025"/>
+          </a:xfrm>
+          <a:prstGeom prst="rect"/>
+        </p:spPr>
+        <p:txBody>
+          <a:bodyPr wrap="none" lIns="0" tIns="0" rIns="0" bIns="0"/>
+          <a:p>
+            <a:pPr>
+              <a:lnSpc>
+                <a:spcPct val="145000"/>
+              </a:lnSpc>
+            </a:pPr>
+            <a:r>
+              <a:rPr lang="zh-CN" sz="863">
+                <a:solidFill>
+                  <a:srgbClr val="FBFCFA">
+                    <a:alpha val="80000"/>
+                  </a:srgbClr>
+                </a:solidFill>
+                <a:latin typeface="Microsoft YaHei"/>
+                <a:ea typeface="Microsoft YaHei"/>
+              </a:rPr>
+              <a:t>　反馈→知识缺口→审核→入库</a:t>
+            </a:r>
+            <a:endParaRPr/>
+          </a:p>
+        </p:txBody>
+      </p:sp>
+      <p:sp>
+        <p:nvSpPr>
+          <p:cNvPr id="210" name="" descr="{&quot;isTemplate&quot;:true,&quot;type&quot;:&quot;text&quot;}"/>
+          <p:cNvSpPr txBox="1"/>
+          <p:nvPr/>
+        </p:nvSpPr>
+        <p:spPr>
+          <a:xfrm rot="0" flipH="0" flipV="0">
+            <a:off x="9153525" y="2619375"/>
+            <a:ext cx="2371725" cy="200025"/>
+          </a:xfrm>
+          <a:prstGeom prst="rect"/>
+        </p:spPr>
+        <p:txBody>
+          <a:bodyPr wrap="none" lIns="0" tIns="0" rIns="0" bIns="0"/>
+          <a:p>
+            <a:pPr>
+              <a:lnSpc>
+                <a:spcPct val="145000"/>
+              </a:lnSpc>
+            </a:pPr>
+            <a:r>
+              <a:rPr lang="zh-CN" sz="863" b="1">
+                <a:solidFill>
+                  <a:srgbClr val="BD9B56"/>
+                </a:solidFill>
+                <a:latin typeface="Microsoft YaHei"/>
+                <a:ea typeface="Microsoft YaHei"/>
+              </a:rPr>
+              <a:t>监控告警</a:t>
+            </a:r>
+            <a:endParaRPr/>
+          </a:p>
+        </p:txBody>
+      </p:sp>
+      <p:sp>
+        <p:nvSpPr>
+          <p:cNvPr id="211" name="" descr="{&quot;isTemplate&quot;:true,&quot;type&quot;:&quot;text&quot;}"/>
+          <p:cNvSpPr txBox="1"/>
+          <p:nvPr/>
+        </p:nvSpPr>
+        <p:spPr>
+          <a:xfrm rot="0" flipH="0" flipV="0">
+            <a:off x="9153525" y="2819400"/>
+            <a:ext cx="2371725" cy="200025"/>
+          </a:xfrm>
+          <a:prstGeom prst="rect"/>
+        </p:spPr>
+        <p:txBody>
+          <a:bodyPr wrap="none" lIns="0" tIns="0" rIns="0" bIns="0"/>
+          <a:p>
+            <a:pPr>
+              <a:lnSpc>
+                <a:spcPct val="145000"/>
+              </a:lnSpc>
+            </a:pPr>
+            <a:r>
+              <a:rPr lang="zh-CN" sz="863">
+                <a:solidFill>
+                  <a:srgbClr val="FBFCFA">
+                    <a:alpha val="80000"/>
+                  </a:srgbClr>
+                </a:solidFill>
+                <a:latin typeface="Microsoft YaHei"/>
+                <a:ea typeface="Microsoft YaHei"/>
+              </a:rPr>
+              <a:t>　</a:t>
+            </a:r>
+            <a:r>
+              <a:rPr lang="en-US" sz="863">
+                <a:solidFill>
+                  <a:srgbClr val="FBFCFA">
+                    <a:alpha val="80000"/>
+                  </a:srgbClr>
+                </a:solidFill>
+                <a:latin typeface="Microsoft YaHei"/>
+                <a:ea typeface="Microsoft YaHei"/>
+              </a:rPr>
+              <a:t>Prometheus + Grafana</a:t>
+            </a:r>
+            <a:endParaRPr/>
+          </a:p>
+        </p:txBody>
+      </p:sp>
+      <p:sp>
+        <p:nvSpPr>
+          <p:cNvPr id="212" name="" descr="{&quot;isTemplate&quot;:true,&quot;type&quot;:&quot;text&quot;}"/>
+          <p:cNvSpPr txBox="1"/>
+          <p:nvPr/>
+        </p:nvSpPr>
+        <p:spPr>
+          <a:xfrm rot="0" flipH="0" flipV="0">
+            <a:off x="9153525" y="3076575"/>
+            <a:ext cx="2371725" cy="200025"/>
+          </a:xfrm>
+          <a:prstGeom prst="rect"/>
+        </p:spPr>
+        <p:txBody>
+          <a:bodyPr wrap="none" lIns="0" tIns="0" rIns="0" bIns="0"/>
+          <a:p>
+            <a:pPr>
+              <a:lnSpc>
+                <a:spcPct val="145000"/>
+              </a:lnSpc>
+            </a:pPr>
+            <a:r>
+              <a:rPr lang="zh-CN" sz="863" b="1">
+                <a:solidFill>
+                  <a:srgbClr val="BD9B56"/>
+                </a:solidFill>
+                <a:latin typeface="Microsoft YaHei"/>
+                <a:ea typeface="Microsoft YaHei"/>
+              </a:rPr>
+              <a:t>持续交付</a:t>
+            </a:r>
+            <a:endParaRPr/>
+          </a:p>
+        </p:txBody>
+      </p:sp>
+      <p:sp>
+        <p:nvSpPr>
+          <p:cNvPr id="213" name="" descr="{&quot;isTemplate&quot;:true,&quot;type&quot;:&quot;text&quot;}"/>
+          <p:cNvSpPr txBox="1"/>
+          <p:nvPr/>
+        </p:nvSpPr>
+        <p:spPr>
+          <a:xfrm rot="0" flipH="0" flipV="0">
+            <a:off x="9153525" y="3276600"/>
+            <a:ext cx="2371725" cy="200025"/>
+          </a:xfrm>
+          <a:prstGeom prst="rect"/>
+        </p:spPr>
+        <p:txBody>
+          <a:bodyPr wrap="none" lIns="0" tIns="0" rIns="0" bIns="0"/>
+          <a:p>
+            <a:pPr>
+              <a:lnSpc>
+                <a:spcPct val="145000"/>
+              </a:lnSpc>
+            </a:pPr>
+            <a:r>
+              <a:rPr lang="zh-CN" sz="863">
+                <a:solidFill>
+                  <a:srgbClr val="FBFCFA">
+                    <a:alpha val="80000"/>
+                  </a:srgbClr>
+                </a:solidFill>
+                <a:latin typeface="Microsoft YaHei"/>
+                <a:ea typeface="Microsoft YaHei"/>
+              </a:rPr>
+              <a:t>　</a:t>
+            </a:r>
+            <a:r>
+              <a:rPr lang="en-US" sz="863">
+                <a:solidFill>
+                  <a:srgbClr val="FBFCFA">
+                    <a:alpha val="80000"/>
+                  </a:srgbClr>
+                </a:solidFill>
+                <a:latin typeface="Microsoft YaHei"/>
+                <a:ea typeface="Microsoft YaHei"/>
+              </a:rPr>
+              <a:t>GitHub Actions </a:t>
+            </a:r>
+            <a:r>
+              <a:rPr lang="zh-CN" sz="863">
+                <a:solidFill>
+                  <a:srgbClr val="FBFCFA">
+                    <a:alpha val="80000"/>
+                  </a:srgbClr>
+                </a:solidFill>
+                <a:latin typeface="Microsoft YaHei"/>
+                <a:ea typeface="Microsoft YaHei"/>
+              </a:rPr>
+              <a:t>自动测试</a:t>
+            </a:r>
+            <a:r>
+              <a:rPr lang="en-US" sz="863">
+                <a:solidFill>
+                  <a:srgbClr val="FBFCFA">
+                    <a:alpha val="80000"/>
+                  </a:srgbClr>
+                </a:solidFill>
+                <a:latin typeface="Microsoft YaHei"/>
+                <a:ea typeface="Microsoft YaHei"/>
+              </a:rPr>
+              <a:t>+</a:t>
+            </a:r>
+            <a:r>
+              <a:rPr lang="zh-CN" sz="863">
+                <a:solidFill>
+                  <a:srgbClr val="FBFCFA">
+                    <a:alpha val="80000"/>
+                  </a:srgbClr>
+                </a:solidFill>
+                <a:latin typeface="Microsoft YaHei"/>
+                <a:ea typeface="Microsoft YaHei"/>
+              </a:rPr>
+              <a:t>发布</a:t>
+            </a:r>
+            <a:endParaRPr/>
+          </a:p>
+        </p:txBody>
+      </p:sp>
+      <p:sp>
+        <p:nvSpPr>
+          <p:cNvPr id="214" name=""/>
           <p:cNvSpPr/>
           <p:nvPr/>
         </p:nvSpPr>
         <p:spPr>
           <a:xfrm rot="0" flipH="0" flipV="0">
-            <a:off x="8496300" y="2209800"/>
-            <a:ext cx="2914650" cy="581025"/>
+            <a:off x="9153525" y="3562350"/>
+            <a:ext cx="2371725" cy="276225"/>
           </a:xfrm>
           <a:custGeom>
             <a:pathLst>
-              <a:path w="306" h="61">
+              <a:path w="249" h="29">
                 <a:moveTo>
                   <a:pt x="0" y="0"/>
                 </a:moveTo>
                 <a:lnTo>
-                  <a:pt x="306" y="0"/>
+                  <a:pt x="249" y="0"/>
                 </a:lnTo>
                 <a:lnTo>
-                  <a:pt x="306" y="1"/>
+                  <a:pt x="249" y="1"/>
                 </a:lnTo>
                 <a:lnTo>
                   <a:pt x="0" y="1"/>
@@ -9403,29 +10665,27 @@
       </p:sp>
       <p:sp>
         <p:nvSpPr>
-          <p:cNvPr id="190" name="" descr="{&quot;isTemplate&quot;:true,&quot;type&quot;:&quot;text&quot;}"/>
-          <p:cNvSpPr txBox="1"/>
-          <p:nvPr/>
-        </p:nvSpPr>
-        <p:spPr>
-          <a:xfrm rot="0" flipH="0" flipV="0">
-            <a:off x="8496300" y="2333625"/>
-            <a:ext cx="2914650" cy="447675"/>
-          </a:xfrm>
-          <a:prstGeom prst="rect"/>
-        </p:spPr>
-        <p:txBody>
-          <a:bodyPr wrap="square" lIns="0" tIns="0" rIns="0" bIns="0">
-            <a:normAutofit/>
-          </a:bodyPr>
-          <a:p>
-            <a:pPr>
-              <a:lnSpc>
-                <a:spcPct val="170000"/>
-              </a:lnSpc>
-            </a:pPr>
-            <a:r>
-              <a:rPr lang="en-US" sz="863">
+          <p:cNvPr id="215" name="" descr="{&quot;isTemplate&quot;:true,&quot;type&quot;:&quot;text&quot;}"/>
+          <p:cNvSpPr txBox="1"/>
+          <p:nvPr/>
+        </p:nvSpPr>
+        <p:spPr>
+          <a:xfrm rot="0" flipH="0" flipV="0">
+            <a:off x="9153525" y="3638550"/>
+            <a:ext cx="2371725" cy="190500"/>
+          </a:xfrm>
+          <a:prstGeom prst="rect"/>
+        </p:spPr>
+        <p:txBody>
+          <a:bodyPr wrap="none" lIns="0" tIns="0" rIns="0" bIns="0"/>
+          <a:p>
+            <a:pPr>
+              <a:lnSpc>
+                <a:spcPct val="150000"/>
+              </a:lnSpc>
+            </a:pPr>
+            <a:r>
+              <a:rPr lang="zh-CN" sz="825">
                 <a:solidFill>
                   <a:srgbClr val="FBFCFA">
                     <a:alpha val="60000"/>
@@ -9434,50 +10694,26 @@
                 <a:latin typeface="Microsoft YaHei"/>
                 <a:ea typeface="Microsoft YaHei"/>
               </a:rPr>
-              <a:t>GitHub</a:t>
-            </a:r>
-            <a:r>
-              <a:rPr lang="zh-CN" sz="863">
-                <a:solidFill>
-                  <a:srgbClr val="FBFCFA">
-                    <a:alpha val="60000"/>
-                  </a:srgbClr>
-                </a:solidFill>
-                <a:latin typeface="Microsoft YaHei"/>
-                <a:ea typeface="Microsoft YaHei"/>
-              </a:rPr>
-              <a:t>：</a:t>
-            </a:r>
-            <a:r>
-              <a:rPr lang="en-US" sz="863">
-                <a:solidFill>
-                  <a:srgbClr val="FBFCFA">
-                    <a:alpha val="60000"/>
-                  </a:srgbClr>
-                </a:solidFill>
-                <a:latin typeface="Microsoft YaHei"/>
-                <a:ea typeface="Microsoft YaHei"/>
-              </a:rPr>
-              <a:t>Xuuuukkk/ai-property-community-agent · MIT</a:t>
-            </a:r>
-            <a:endParaRPr/>
-          </a:p>
-        </p:txBody>
-      </p:sp>
-      <p:sp>
-        <p:nvSpPr>
-          <p:cNvPr id="191" name=""/>
+              <a:t>无需人工值守，越用越准、越用越稳</a:t>
+            </a:r>
+            <a:endParaRPr/>
+          </a:p>
+        </p:txBody>
+      </p:sp>
+      <p:sp>
+        <p:nvSpPr>
+          <p:cNvPr id="216" name=""/>
           <p:cNvSpPr/>
           <p:nvPr/>
         </p:nvSpPr>
         <p:spPr>
           <a:xfrm rot="0" flipH="0" flipV="0">
-            <a:off x="8286750" y="3105150"/>
-            <a:ext cx="3333750" cy="1190625"/>
+            <a:off x="8982075" y="4076700"/>
+            <a:ext cx="2714625" cy="1362075"/>
           </a:xfrm>
           <a:prstGeom prst="roundRect">
             <a:avLst>
-              <a:gd name="adj" fmla="val 9600"/>
+              <a:gd name="adj" fmla="val 8392"/>
             </a:avLst>
           </a:prstGeom>
           <a:solidFill>
@@ -9499,14 +10735,14 @@
       </p:sp>
       <p:sp>
         <p:nvSpPr>
-          <p:cNvPr id="192" name="" descr="{&quot;isTemplate&quot;:true,&quot;type&quot;:&quot;text&quot;}"/>
-          <p:cNvSpPr txBox="1"/>
-          <p:nvPr/>
-        </p:nvSpPr>
-        <p:spPr>
-          <a:xfrm rot="0" flipH="0" flipV="0">
-            <a:off x="8477250" y="3276600"/>
-            <a:ext cx="2952750" cy="152400"/>
+          <p:cNvPr id="217" name="" descr="{&quot;isTemplate&quot;:true,&quot;type&quot;:&quot;text&quot;}"/>
+          <p:cNvSpPr txBox="1"/>
+          <p:nvPr/>
+        </p:nvSpPr>
+        <p:spPr>
+          <a:xfrm rot="0" flipH="0" flipV="0">
+            <a:off x="9134475" y="4210050"/>
+            <a:ext cx="2409825" cy="133350"/>
           </a:xfrm>
           <a:prstGeom prst="rect"/>
         </p:spPr>
@@ -9519,38 +10755,153 @@
               </a:lnSpc>
             </a:pPr>
             <a:r>
-              <a:rPr lang="zh-CN" sz="975" spc="-9223372036854775808">
+              <a:rPr lang="en-US" sz="863" spc="-9223372036854775808">
                 <a:solidFill>
                   <a:srgbClr val="BD9B56"/>
                 </a:solidFill>
                 <a:latin typeface="Microsoft YaHei"/>
                 <a:ea typeface="Microsoft YaHei"/>
               </a:rPr>
-              <a:t>项目成果</a:t>
-            </a:r>
-            <a:endParaRPr/>
-          </a:p>
-        </p:txBody>
-      </p:sp>
-      <p:sp>
-        <p:nvSpPr>
-          <p:cNvPr id="193" name=""/>
+              <a:t>ONLINE DEMO</a:t>
+            </a:r>
+            <a:endParaRPr/>
+          </a:p>
+        </p:txBody>
+      </p:sp>
+      <p:sp>
+        <p:nvSpPr>
+          <p:cNvPr id="218" name="" descr="{&quot;isTemplate&quot;:true,&quot;type&quot;:&quot;text&quot;}"/>
+          <p:cNvSpPr txBox="1"/>
+          <p:nvPr/>
+        </p:nvSpPr>
+        <p:spPr>
+          <a:xfrm rot="0" flipH="0" flipV="0">
+            <a:off x="9134475" y="4419600"/>
+            <a:ext cx="2409825" cy="247650"/>
+          </a:xfrm>
+          <a:prstGeom prst="rect"/>
+        </p:spPr>
+        <p:txBody>
+          <a:bodyPr wrap="none" lIns="0" tIns="0" rIns="0" bIns="0"/>
+          <a:p>
+            <a:pPr>
+              <a:lnSpc>
+                <a:spcPct val="140000"/>
+              </a:lnSpc>
+            </a:pPr>
+            <a:r>
+              <a:rPr lang="en-US" sz="1125">
+                <a:solidFill>
+                  <a:srgbClr val="172133"/>
+                </a:solidFill>
+                <a:latin typeface="Inter"/>
+                <a:ea typeface="Inter"/>
+              </a:rPr>
+              <a:t>http://119.91.236.85</a:t>
+            </a:r>
+            <a:endParaRPr/>
+          </a:p>
+        </p:txBody>
+      </p:sp>
+      <p:sp>
+        <p:nvSpPr>
+          <p:cNvPr id="219" name="" descr="{&quot;isTemplate&quot;:true,&quot;type&quot;:&quot;text&quot;}"/>
+          <p:cNvSpPr txBox="1"/>
+          <p:nvPr/>
+        </p:nvSpPr>
+        <p:spPr>
+          <a:xfrm rot="0" flipH="0" flipV="0">
+            <a:off x="9134475" y="4724400"/>
+            <a:ext cx="2409825" cy="0"/>
+          </a:xfrm>
+          <a:prstGeom prst="rect"/>
+        </p:spPr>
+        <p:txBody>
+          <a:bodyPr wrap="none" lIns="0" tIns="0" rIns="0" bIns="0"/>
+          <a:p>
+            <a:pPr/>
+            <a:endParaRPr/>
+          </a:p>
+        </p:txBody>
+      </p:sp>
+      <p:sp>
+        <p:nvSpPr>
+          <p:cNvPr id="220" name="" descr="{&quot;isTemplate&quot;:true,&quot;type&quot;:&quot;text&quot;}"/>
+          <p:cNvSpPr txBox="1"/>
+          <p:nvPr/>
+        </p:nvSpPr>
+        <p:spPr>
+          <a:xfrm rot="0" flipH="0" flipV="0">
+            <a:off x="9134475" y="4724400"/>
+            <a:ext cx="2409825" cy="209550"/>
+          </a:xfrm>
+          <a:prstGeom prst="rect"/>
+        </p:spPr>
+        <p:txBody>
+          <a:bodyPr wrap="none" lIns="0" tIns="0" rIns="0" bIns="0"/>
+          <a:p>
+            <a:pPr>
+              <a:lnSpc>
+                <a:spcPct val="160000"/>
+              </a:lnSpc>
+            </a:pPr>
+            <a:r>
+              <a:rPr lang="zh-CN" sz="825">
+                <a:solidFill>
+                  <a:srgbClr val="BD9B56"/>
+                </a:solidFill>
+                <a:latin typeface="Microsoft YaHei"/>
+                <a:ea typeface="Microsoft YaHei"/>
+              </a:rPr>
+              <a:t>密码</a:t>
+            </a:r>
+            <a:r>
+              <a:rPr lang="en-US" sz="825">
+                <a:solidFill>
+                  <a:srgbClr val="BD9B56"/>
+                </a:solidFill>
+                <a:latin typeface="Microsoft YaHei"/>
+                <a:ea typeface="Microsoft YaHei"/>
+              </a:rPr>
+              <a:t> 123456</a:t>
+            </a:r>
+            <a:endParaRPr/>
+          </a:p>
+        </p:txBody>
+      </p:sp>
+      <p:sp>
+        <p:nvSpPr>
+          <p:cNvPr id="221" name=""/>
           <p:cNvSpPr/>
           <p:nvPr/>
         </p:nvSpPr>
         <p:spPr>
           <a:xfrm rot="0" flipH="0" flipV="0">
-            <a:off x="8477250" y="3543300"/>
-            <a:ext cx="923925" cy="581025"/>
-          </a:xfrm>
-          <a:prstGeom prst="roundRect">
-            <a:avLst>
-              <a:gd name="adj" fmla="val 13115"/>
-            </a:avLst>
-          </a:prstGeom>
+            <a:off x="9134475" y="4991100"/>
+            <a:ext cx="2409825" cy="323850"/>
+          </a:xfrm>
+          <a:custGeom>
+            <a:pathLst>
+              <a:path w="253" h="34">
+                <a:moveTo>
+                  <a:pt x="0" y="0"/>
+                </a:moveTo>
+                <a:lnTo>
+                  <a:pt x="253" y="0"/>
+                </a:lnTo>
+                <a:lnTo>
+                  <a:pt x="253" y="1"/>
+                </a:lnTo>
+                <a:lnTo>
+                  <a:pt x="0" y="1"/>
+                </a:lnTo>
+                <a:close/>
+              </a:path>
+            </a:pathLst>
+          </a:custGeom>
           <a:solidFill>
-            <a:srgbClr val="BD9B56">
-              <a:alpha val="8000"/>
+            <a:srgbClr val="22395E">
+              <a:alpha val="10000"/>
             </a:srgbClr>
           </a:solidFill>
           <a:ln/>
@@ -9562,336 +10913,107 @@
       </p:sp>
       <p:sp>
         <p:nvSpPr>
-          <p:cNvPr id="194" name="" descr="{&quot;isTemplate&quot;:true,&quot;type&quot;:&quot;text&quot;}"/>
-          <p:cNvSpPr txBox="1"/>
-          <p:nvPr/>
-        </p:nvSpPr>
-        <p:spPr>
-          <a:xfrm rot="0" flipH="0" flipV="0">
-            <a:off x="8553450" y="3638550"/>
-            <a:ext cx="771525" cy="228600"/>
-          </a:xfrm>
-          <a:prstGeom prst="rect"/>
-        </p:spPr>
-        <p:txBody>
-          <a:bodyPr wrap="none" lIns="0" tIns="0" rIns="0" bIns="0"/>
-          <a:p>
-            <a:pPr algn="ctr">
+          <p:cNvPr id="222" name="" descr="{&quot;isTemplate&quot;:true,&quot;type&quot;:&quot;text&quot;}"/>
+          <p:cNvSpPr txBox="1"/>
+          <p:nvPr/>
+        </p:nvSpPr>
+        <p:spPr>
+          <a:xfrm rot="0" flipH="0" flipV="0">
+            <a:off x="9134475" y="5057775"/>
+            <a:ext cx="2409825" cy="247650"/>
+          </a:xfrm>
+          <a:prstGeom prst="rect"/>
+        </p:spPr>
+        <p:txBody>
+          <a:bodyPr wrap="square" lIns="0" tIns="0" rIns="0" bIns="0">
+            <a:normAutofit/>
+          </a:bodyPr>
+          <a:p>
+            <a:pPr>
               <a:lnSpc>
                 <a:spcPct val="100000"/>
               </a:lnSpc>
             </a:pPr>
             <a:r>
-              <a:rPr lang="en-US" sz="1500">
+              <a:rPr lang="en-US" sz="788">
+                <a:solidFill>
+                  <a:srgbClr val="A09B8C"/>
+                </a:solidFill>
+                <a:latin typeface="Microsoft YaHei"/>
+                <a:ea typeface="Microsoft YaHei"/>
+              </a:rPr>
+              <a:t>GitHub</a:t>
+            </a:r>
+            <a:r>
+              <a:rPr lang="zh-CN" sz="788">
+                <a:solidFill>
+                  <a:srgbClr val="A09B8C"/>
+                </a:solidFill>
+                <a:latin typeface="Microsoft YaHei"/>
+                <a:ea typeface="Microsoft YaHei"/>
+              </a:rPr>
+              <a:t>：</a:t>
+            </a:r>
+            <a:r>
+              <a:rPr lang="en-US" sz="788">
+                <a:solidFill>
+                  <a:srgbClr val="A09B8C"/>
+                </a:solidFill>
+                <a:latin typeface="Microsoft YaHei"/>
+                <a:ea typeface="Microsoft YaHei"/>
+              </a:rPr>
+              <a:t>Xuuuukkk/ai-property-community-agent · MIT</a:t>
+            </a:r>
+            <a:endParaRPr/>
+          </a:p>
+        </p:txBody>
+      </p:sp>
+      <p:sp>
+        <p:nvSpPr>
+          <p:cNvPr id="223" name="" descr="{&quot;isTemplate&quot;:true,&quot;type&quot;:&quot;text&quot;}"/>
+          <p:cNvSpPr txBox="1"/>
+          <p:nvPr/>
+        </p:nvSpPr>
+        <p:spPr>
+          <a:xfrm rot="0" flipH="0" flipV="0">
+            <a:off x="495300" y="6467475"/>
+            <a:ext cx="1009650" cy="142875"/>
+          </a:xfrm>
+          <a:prstGeom prst="rect"/>
+        </p:spPr>
+        <p:txBody>
+          <a:bodyPr wrap="none" lIns="0" tIns="0" rIns="0" bIns="0"/>
+          <a:p>
+            <a:pPr>
+              <a:lnSpc>
+                <a:spcPct val="100000"/>
+              </a:lnSpc>
+            </a:pPr>
+            <a:r>
+              <a:rPr lang="zh-CN" sz="900">
                 <a:solidFill>
                   <a:srgbClr val="BD9B56"/>
                 </a:solidFill>
-                <a:latin typeface="Inter"/>
-                <a:ea typeface="Inter"/>
-              </a:rPr>
-              <a:t>100%</a:t>
-            </a:r>
-            <a:endParaRPr/>
-          </a:p>
-        </p:txBody>
-      </p:sp>
-      <p:sp>
-        <p:nvSpPr>
-          <p:cNvPr id="195" name="" descr="{&quot;isTemplate&quot;:true,&quot;type&quot;:&quot;text&quot;}"/>
-          <p:cNvSpPr txBox="1"/>
-          <p:nvPr/>
-        </p:nvSpPr>
-        <p:spPr>
-          <a:xfrm rot="0" flipH="0" flipV="0">
-            <a:off x="8553450" y="3895725"/>
-            <a:ext cx="771525" cy="133350"/>
-          </a:xfrm>
-          <a:prstGeom prst="rect"/>
-        </p:spPr>
-        <p:txBody>
-          <a:bodyPr wrap="none" lIns="0" tIns="0" rIns="0" bIns="0"/>
-          <a:p>
-            <a:pPr algn="ctr">
-              <a:lnSpc>
-                <a:spcPct val="100000"/>
-              </a:lnSpc>
-            </a:pPr>
-            <a:r>
-              <a:rPr lang="zh-CN" sz="825">
-                <a:solidFill>
-                  <a:srgbClr val="5F5E5A"/>
-                </a:solidFill>
-                <a:latin typeface="Microsoft YaHei"/>
-                <a:ea typeface="Microsoft YaHei"/>
-              </a:rPr>
-              <a:t>核心链路指标</a:t>
-            </a:r>
-            <a:endParaRPr/>
-          </a:p>
-        </p:txBody>
-      </p:sp>
-      <p:sp>
-        <p:nvSpPr>
-          <p:cNvPr id="196" name=""/>
-          <p:cNvSpPr/>
-          <p:nvPr/>
-        </p:nvSpPr>
-        <p:spPr>
-          <a:xfrm rot="0" flipH="0" flipV="0">
-            <a:off x="9496425" y="3543300"/>
-            <a:ext cx="914400" cy="581025"/>
-          </a:xfrm>
-          <a:prstGeom prst="roundRect">
-            <a:avLst>
-              <a:gd name="adj" fmla="val 13115"/>
-            </a:avLst>
-          </a:prstGeom>
-          <a:solidFill>
-            <a:srgbClr val="BD9B56">
-              <a:alpha val="8000"/>
-            </a:srgbClr>
-          </a:solidFill>
-          <a:ln/>
-        </p:spPr>
-        <p:txBody>
-          <a:bodyPr/>
-          <a:p/>
-        </p:txBody>
-      </p:sp>
-      <p:sp>
-        <p:nvSpPr>
-          <p:cNvPr id="197" name="" descr="{&quot;isTemplate&quot;:true,&quot;type&quot;:&quot;text&quot;}"/>
-          <p:cNvSpPr txBox="1"/>
-          <p:nvPr/>
-        </p:nvSpPr>
-        <p:spPr>
-          <a:xfrm rot="0" flipH="0" flipV="0">
-            <a:off x="9572625" y="3638550"/>
-            <a:ext cx="762000" cy="228600"/>
-          </a:xfrm>
-          <a:prstGeom prst="rect"/>
-        </p:spPr>
-        <p:txBody>
-          <a:bodyPr wrap="none" lIns="0" tIns="0" rIns="0" bIns="0"/>
-          <a:p>
-            <a:pPr algn="ctr">
-              <a:lnSpc>
-                <a:spcPct val="100000"/>
-              </a:lnSpc>
-            </a:pPr>
-            <a:r>
-              <a:rPr lang="en-US" sz="1500">
+                <a:latin typeface="Microsoft YaHei"/>
+                <a:ea typeface="Microsoft YaHei"/>
+              </a:rPr>
+              <a:t>云溪花园</a:t>
+            </a:r>
+            <a:r>
+              <a:rPr lang="en-US" sz="900">
                 <a:solidFill>
                   <a:srgbClr val="BD9B56"/>
                 </a:solidFill>
-                <a:latin typeface="Inter"/>
-                <a:ea typeface="Inter"/>
-              </a:rPr>
-              <a:t>113+30</a:t>
-            </a:r>
-            <a:endParaRPr/>
-          </a:p>
-        </p:txBody>
-      </p:sp>
-      <p:sp>
-        <p:nvSpPr>
-          <p:cNvPr id="198" name="" descr="{&quot;isTemplate&quot;:true,&quot;type&quot;:&quot;text&quot;}"/>
-          <p:cNvSpPr txBox="1"/>
-          <p:nvPr/>
-        </p:nvSpPr>
-        <p:spPr>
-          <a:xfrm rot="0" flipH="0" flipV="0">
-            <a:off x="9572625" y="3895725"/>
-            <a:ext cx="762000" cy="133350"/>
-          </a:xfrm>
-          <a:prstGeom prst="rect"/>
-        </p:spPr>
-        <p:txBody>
-          <a:bodyPr wrap="none" lIns="0" tIns="0" rIns="0" bIns="0"/>
-          <a:p>
-            <a:pPr algn="ctr">
-              <a:lnSpc>
-                <a:spcPct val="100000"/>
-              </a:lnSpc>
-            </a:pPr>
-            <a:r>
-              <a:rPr lang="zh-CN" sz="825">
-                <a:solidFill>
-                  <a:srgbClr val="5F5E5A"/>
-                </a:solidFill>
-                <a:latin typeface="Microsoft YaHei"/>
-                <a:ea typeface="Microsoft YaHei"/>
-              </a:rPr>
-              <a:t>测试全绿</a:t>
-            </a:r>
-            <a:endParaRPr/>
-          </a:p>
-        </p:txBody>
-      </p:sp>
-      <p:sp>
-        <p:nvSpPr>
-          <p:cNvPr id="199" name=""/>
-          <p:cNvSpPr/>
-          <p:nvPr/>
-        </p:nvSpPr>
-        <p:spPr>
-          <a:xfrm rot="0" flipH="0" flipV="0">
-            <a:off x="10506075" y="3543300"/>
-            <a:ext cx="923925" cy="581025"/>
-          </a:xfrm>
-          <a:prstGeom prst="roundRect">
-            <a:avLst>
-              <a:gd name="adj" fmla="val 13115"/>
-            </a:avLst>
-          </a:prstGeom>
-          <a:solidFill>
-            <a:srgbClr val="BD9B56">
-              <a:alpha val="8000"/>
-            </a:srgbClr>
-          </a:solidFill>
-          <a:ln/>
-        </p:spPr>
-        <p:txBody>
-          <a:bodyPr/>
-          <a:p/>
-        </p:txBody>
-      </p:sp>
-      <p:sp>
-        <p:nvSpPr>
-          <p:cNvPr id="200" name="" descr="{&quot;isTemplate&quot;:true,&quot;type&quot;:&quot;text&quot;}"/>
-          <p:cNvSpPr txBox="1"/>
-          <p:nvPr/>
-        </p:nvSpPr>
-        <p:spPr>
-          <a:xfrm rot="0" flipH="0" flipV="0">
-            <a:off x="10582275" y="3638550"/>
-            <a:ext cx="771525" cy="228600"/>
-          </a:xfrm>
-          <a:prstGeom prst="rect"/>
-        </p:spPr>
-        <p:txBody>
-          <a:bodyPr wrap="none" lIns="0" tIns="0" rIns="0" bIns="0"/>
-          <a:p>
-            <a:pPr algn="ctr">
-              <a:lnSpc>
-                <a:spcPct val="100000"/>
-              </a:lnSpc>
-            </a:pPr>
-            <a:r>
-              <a:rPr lang="en-US" sz="1500">
+                <a:latin typeface="Microsoft YaHei"/>
+                <a:ea typeface="Microsoft YaHei"/>
+              </a:rPr>
+              <a:t> · </a:t>
+            </a:r>
+            <a:r>
+              <a:rPr lang="zh-CN" sz="900">
                 <a:solidFill>
                   <a:srgbClr val="BD9B56"/>
                 </a:solidFill>
-                <a:latin typeface="Inter"/>
-                <a:ea typeface="Inter"/>
-              </a:rPr>
-              <a:t>7 </a:t>
-            </a:r>
-            <a:r>
-              <a:rPr lang="zh-CN" sz="1500">
-                <a:solidFill>
-                  <a:srgbClr val="BD9B56"/>
-                </a:solidFill>
-                <a:latin typeface="Inter"/>
-                <a:ea typeface="Inter"/>
-              </a:rPr>
-              <a:t>阶段</a:t>
-            </a:r>
-            <a:endParaRPr/>
-          </a:p>
-        </p:txBody>
-      </p:sp>
-      <p:sp>
-        <p:nvSpPr>
-          <p:cNvPr id="201" name="" descr="{&quot;isTemplate&quot;:true,&quot;type&quot;:&quot;text&quot;}"/>
-          <p:cNvSpPr txBox="1"/>
-          <p:nvPr/>
-        </p:nvSpPr>
-        <p:spPr>
-          <a:xfrm rot="0" flipH="0" flipV="0">
-            <a:off x="10582275" y="3895725"/>
-            <a:ext cx="771525" cy="133350"/>
-          </a:xfrm>
-          <a:prstGeom prst="rect"/>
-        </p:spPr>
-        <p:txBody>
-          <a:bodyPr wrap="none" lIns="0" tIns="0" rIns="0" bIns="0"/>
-          <a:p>
-            <a:pPr algn="ctr">
-              <a:lnSpc>
-                <a:spcPct val="100000"/>
-              </a:lnSpc>
-            </a:pPr>
-            <a:r>
-              <a:rPr lang="en-US" sz="825">
-                <a:solidFill>
-                  <a:srgbClr val="5F5E5A"/>
-                </a:solidFill>
-                <a:latin typeface="Microsoft YaHei"/>
-                <a:ea typeface="Microsoft YaHei"/>
-              </a:rPr>
-              <a:t>Phase 0-7 </a:t>
-            </a:r>
-            <a:r>
-              <a:rPr lang="zh-CN" sz="825">
-                <a:solidFill>
-                  <a:srgbClr val="5F5E5A"/>
-                </a:solidFill>
-                <a:latin typeface="Microsoft YaHei"/>
-                <a:ea typeface="Microsoft YaHei"/>
-              </a:rPr>
-              <a:t>完成</a:t>
-            </a:r>
-            <a:endParaRPr/>
-          </a:p>
-        </p:txBody>
-      </p:sp>
-      <p:sp>
-        <p:nvSpPr>
-          <p:cNvPr id="202" name="" descr="{&quot;isTemplate&quot;:true,&quot;type&quot;:&quot;text&quot;}"/>
-          <p:cNvSpPr txBox="1"/>
-          <p:nvPr/>
-        </p:nvSpPr>
-        <p:spPr>
-          <a:xfrm rot="0" flipH="0" flipV="0">
-            <a:off x="571500" y="6410325"/>
-            <a:ext cx="1009650" cy="142875"/>
-          </a:xfrm>
-          <a:prstGeom prst="rect"/>
-        </p:spPr>
-        <p:txBody>
-          <a:bodyPr wrap="none" lIns="0" tIns="0" rIns="0" bIns="0"/>
-          <a:p>
-            <a:pPr>
-              <a:lnSpc>
-                <a:spcPct val="100000"/>
-              </a:lnSpc>
-            </a:pPr>
-            <a:r>
-              <a:rPr lang="zh-CN" sz="900">
-                <a:solidFill>
-                  <a:srgbClr val="BD9B56"/>
-                </a:solidFill>
-                <a:latin typeface="Microsoft YaHei"/>
-                <a:ea typeface="Microsoft YaHei"/>
-              </a:rPr>
-              <a:t>云溪花园</a:t>
-            </a:r>
-            <a:r>
-              <a:rPr lang="en-US" sz="900">
-                <a:solidFill>
-                  <a:srgbClr val="BD9B56"/>
-                </a:solidFill>
-                <a:latin typeface="Microsoft YaHei"/>
-                <a:ea typeface="Microsoft YaHei"/>
-              </a:rPr>
-              <a:t> · </a:t>
-            </a:r>
-            <a:r>
-              <a:rPr lang="zh-CN" sz="900">
-                <a:solidFill>
-                  <a:srgbClr val="BD9B56"/>
-                </a:solidFill>
                 <a:latin typeface="Microsoft YaHei"/>
                 <a:ea typeface="Microsoft YaHei"/>
               </a:rPr>
@@ -9903,13 +11025,13 @@
       </p:sp>
       <p:sp>
         <p:nvSpPr>
-          <p:cNvPr id="203" name="" descr="{&quot;isTemplate&quot;:true,&quot;type&quot;:&quot;text&quot;}"/>
-          <p:cNvSpPr txBox="1"/>
-          <p:nvPr/>
-        </p:nvSpPr>
-        <p:spPr>
-          <a:xfrm rot="0" flipH="0" flipV="0">
-            <a:off x="11229975" y="6410325"/>
+          <p:cNvPr id="224" name="" descr="{&quot;isTemplate&quot;:true,&quot;type&quot;:&quot;text&quot;}"/>
+          <p:cNvSpPr txBox="1"/>
+          <p:nvPr/>
+        </p:nvSpPr>
+        <p:spPr>
+          <a:xfrm rot="0" flipH="0" flipV="0">
+            <a:off x="11306175" y="6467475"/>
             <a:ext cx="390525" cy="142875"/>
           </a:xfrm>
           <a:prstGeom prst="rect"/>
@@ -9946,7 +11068,7 @@
   <p:cSld>
     <p:spTree>
       <p:nvGrpSpPr>
-        <p:cNvPr id="204" name="" descr="&lt;Slide style={{ width: '1280px', height: '720px', background: 'linear-gradient(135deg, #172133 0%, #22395E 100%)', position: 'relative' }}&gt;&#10;  &lt;div style={{ position: 'absolute', inset: 0, display: 'flex', flexDirection: 'column', alignItems: 'center', justifyContent: 'center', color: '#FBFCFA' }}&gt;&#10;    &lt;div style={{ color: '#BD9B56', fontSize: 26, marginBottom: 22, letterSpacing: '0.4em' }}&gt;◆&lt;/div&gt;&#10;    &lt;h1 style={{ fontSize: 56, fontWeight: 'bold', margin: 0, color: '#FBFCFA', letterSpacing: '0.12em' }}&gt;感谢聆听&lt;/h1&gt;&#10;    &lt;div style={{ width: 80, height: 3, background: '#BD9B56', marginTop: 26, marginBottom: 26 }} /&gt;&#10;    &lt;p style={{ fontSize: 20, color: 'rgba(189,155,86,0.9)', margin: 0, letterSpacing: '0.15em' }}&gt;让 AI 真正走进社区&lt;/p&gt;&#10;    &lt;div style={{ marginTop: 56, padding: '20px 40px', background: 'rgba(189,155,86,0.08)', border: '1px solid rgba(189,155,86,0.3)', borderRadius: 8, textAlign: 'center' }}&gt;&#10;      &lt;div style={{ fontSize: 12, color: '#BD9B56', letterSpacing: '0.25em', marginBottom: 10 }}&gt;ONLINE DEMO&lt;/div&gt;&#10;      &lt;div style={{ fontSize: 17, color: '#FBFCFA', fontFamily: 'Inter, sans-serif', marginBottom: 4 }}&gt;http://119.91.236.85&lt;/div&gt;&#10;      &lt;div style={{ fontSize: 12, color: 'rgba(251,252,250,0.7)' }}&gt;业主 guoyi378 · 物业 mayun420 · 维修 yangfei423（密码 123456）&lt;/div&gt;&#10;    &lt;/div&gt;&#10;  &lt;/div&gt;&#10;  &lt;div style={{ position: 'absolute', left: 64, bottom: 28, color: '#BD9B56', fontSize: 13, letterSpacing: '0.12em' }}&gt;云溪花园 · 智慧社区&lt;/div&gt;&#10;  &lt;div style={{ position: 'absolute', right: 28, bottom: 28, color: 'rgba(189,155,86,0.75)', fontSize: 13 }}&gt;15 / 15&lt;/div&gt;&#10;&lt;/Slide&gt;"/>
+        <p:cNvPr id="225" name="" descr="&lt;Slide style={{ width: '1280px', height: '720px', background: 'linear-gradient(135deg, #172133 0%, #22395E 100%)', position: 'relative' }}&gt;&#10;  &lt;div style={{ position: 'absolute', inset: 0, display: 'flex', flexDirection: 'column', alignItems: 'center', justifyContent: 'center', color: '#FBFCFA' }}&gt;&#10;    &lt;div style={{ color: '#BD9B56', fontSize: 26, marginBottom: 22, letterSpacing: '0.4em' }}&gt;◆&lt;/div&gt;&#10;    &lt;h1 style={{ fontSize: 56, fontWeight: 'bold', margin: 0, color: '#FBFCFA', letterSpacing: '0.12em' }}&gt;感谢聆听&lt;/h1&gt;&#10;    &lt;div style={{ width: 80, height: 3, background: '#BD9B56', marginTop: 26, marginBottom: 26 }} /&gt;&#10;    &lt;p style={{ fontSize: 20, color: 'rgba(189,155,86,0.9)', margin: 0, letterSpacing: '0.15em' }}&gt;让 AI 真正走进社区&lt;/p&gt;&#10;    &lt;div style={{ marginTop: 56, padding: '20px 40px', background: 'rgba(189,155,86,0.08)', border: '1px solid rgba(189,155,86,0.3)', borderRadius: 8, textAlign: 'center' }}&gt;&#10;      &lt;div style={{ fontSize: 12, color: '#BD9B56', letterSpacing: '0.25em', marginBottom: 10 }}&gt;ONLINE DEMO&lt;/div&gt;&#10;      &lt;div style={{ fontSize: 17, color: '#FBFCFA', fontFamily: 'Inter, sans-serif', marginBottom: 4 }}&gt;http://119.91.236.85&lt;/div&gt;&#10;      &lt;div style={{ fontSize: 12, color: 'rgba(251,252,250,0.7)' }}&gt;业主 guoyi378 · 物业 mayun420 · 维修 yangfei423（密码 123456）&lt;/div&gt;&#10;    &lt;/div&gt;&#10;  &lt;/div&gt;&#10;  &lt;div style={{ position: 'absolute', left: 64, bottom: 28, color: '#BD9B56', fontSize: 13, letterSpacing: '0.12em' }}&gt;云溪花园 · 智慧社区&lt;/div&gt;&#10;  &lt;div style={{ position: 'absolute', right: 28, bottom: 28, color: 'rgba(189,155,86,0.75)', fontSize: 13 }}&gt;15 / 15&lt;/div&gt;&#10;&lt;/Slide&gt;"/>
         <p:cNvGrpSpPr/>
         <p:nvPr/>
       </p:nvGrpSpPr>
@@ -9960,7 +11082,7 @@
       </p:grpSpPr>
       <p:sp>
         <p:nvSpPr>
-          <p:cNvPr id="205" name=""/>
+          <p:cNvPr id="226" name=""/>
           <p:cNvSpPr/>
           <p:nvPr/>
         </p:nvSpPr>
@@ -9992,7 +11114,7 @@
       </p:sp>
       <p:sp>
         <p:nvSpPr>
-          <p:cNvPr id="206" name="" descr="{&quot;isTemplate&quot;:true,&quot;type&quot;:&quot;text&quot;}"/>
+          <p:cNvPr id="227" name="" descr="{&quot;isTemplate&quot;:true,&quot;type&quot;:&quot;text&quot;}"/>
           <p:cNvSpPr txBox="1"/>
           <p:nvPr/>
         </p:nvSpPr>
@@ -10027,7 +11149,7 @@
       </p:sp>
       <p:sp>
         <p:nvSpPr>
-          <p:cNvPr id="207" name="" descr="{&quot;isTemplate&quot;:true,&quot;type&quot;:&quot;text&quot;}"/>
+          <p:cNvPr id="228" name="" descr="{&quot;isTemplate&quot;:true,&quot;type&quot;:&quot;text&quot;}"/>
           <p:cNvSpPr txBox="1"/>
           <p:nvPr/>
         </p:nvSpPr>
@@ -10062,7 +11184,7 @@
       </p:sp>
       <p:sp>
         <p:nvSpPr>
-          <p:cNvPr id="208" name=""/>
+          <p:cNvPr id="229" name=""/>
           <p:cNvSpPr/>
           <p:nvPr/>
         </p:nvSpPr>
@@ -10086,7 +11208,7 @@
       </p:sp>
       <p:sp>
         <p:nvSpPr>
-          <p:cNvPr id="209" name="" descr="{&quot;isTemplate&quot;:true,&quot;type&quot;:&quot;text&quot;}"/>
+          <p:cNvPr id="230" name="" descr="{&quot;isTemplate&quot;:true,&quot;type&quot;:&quot;text&quot;}"/>
           <p:cNvSpPr txBox="1"/>
           <p:nvPr/>
         </p:nvSpPr>
@@ -10147,7 +11269,7 @@
       </p:sp>
       <p:sp>
         <p:nvSpPr>
-          <p:cNvPr id="210" name=""/>
+          <p:cNvPr id="231" name=""/>
           <p:cNvSpPr/>
           <p:nvPr/>
         </p:nvSpPr>
@@ -10182,7 +11304,7 @@
       </p:sp>
       <p:sp>
         <p:nvSpPr>
-          <p:cNvPr id="211" name="" descr="{&quot;isTemplate&quot;:true,&quot;type&quot;:&quot;text&quot;}"/>
+          <p:cNvPr id="232" name="" descr="{&quot;isTemplate&quot;:true,&quot;type&quot;:&quot;text&quot;}"/>
           <p:cNvSpPr txBox="1"/>
           <p:nvPr/>
         </p:nvSpPr>
@@ -10217,7 +11339,7 @@
       </p:sp>
       <p:sp>
         <p:nvSpPr>
-          <p:cNvPr id="212" name="" descr="{&quot;isTemplate&quot;:true,&quot;type&quot;:&quot;text&quot;}"/>
+          <p:cNvPr id="233" name="" descr="{&quot;isTemplate&quot;:true,&quot;type&quot;:&quot;text&quot;}"/>
           <p:cNvSpPr txBox="1"/>
           <p:nvPr/>
         </p:nvSpPr>
@@ -10252,7 +11374,7 @@
       </p:sp>
       <p:sp>
         <p:nvSpPr>
-          <p:cNvPr id="213" name="" descr="{&quot;isTemplate&quot;:true,&quot;type&quot;:&quot;text&quot;}"/>
+          <p:cNvPr id="234" name="" descr="{&quot;isTemplate&quot;:true,&quot;type&quot;:&quot;text&quot;}"/>
           <p:cNvSpPr txBox="1"/>
           <p:nvPr/>
         </p:nvSpPr>
@@ -10385,7 +11507,7 @@
       </p:sp>
       <p:sp>
         <p:nvSpPr>
-          <p:cNvPr id="214" name="" descr="{&quot;isTemplate&quot;:true,&quot;type&quot;:&quot;text&quot;}"/>
+          <p:cNvPr id="235" name="" descr="{&quot;isTemplate&quot;:true,&quot;type&quot;:&quot;text&quot;}"/>
           <p:cNvSpPr txBox="1"/>
           <p:nvPr/>
         </p:nvSpPr>
@@ -10440,7 +11562,7 @@
       </p:sp>
       <p:sp>
         <p:nvSpPr>
-          <p:cNvPr id="215" name="" descr="{&quot;isTemplate&quot;:true,&quot;type&quot;:&quot;text&quot;}"/>
+          <p:cNvPr id="236" name="" descr="{&quot;isTemplate&quot;:true,&quot;type&quot;:&quot;text&quot;}"/>
           <p:cNvSpPr txBox="1"/>
           <p:nvPr/>
         </p:nvSpPr>
@@ -10485,7 +11607,7 @@
   <p:cSld>
     <p:spTree>
       <p:nvGrpSpPr>
-        <p:cNvPr id="216" name="" descr="&lt;Slide style={{ width: '1280px', height: '720px', background: '#FBFCFA', position: 'relative', padding: '40px 64px', boxSizing: 'border-box', display: 'flex', flexDirection: 'column' }}&gt;&#10;  &lt;div style={{ flexShrink: 0 }}&gt;&#10;    &lt;div style={{ color: '#BD9B56', fontSize: 14, letterSpacing: '0.3em', marginBottom: 10 }}&gt;CONTENTS&lt;/div&gt;&#10;    &lt;h2 style={{ fontSize: 34, fontWeight: 'bold', color: '#172133', margin: 0 }}&gt;目录&lt;/h2&gt;&#10;    &lt;div style={{ width: 64, height: 3, background: '#BD9B56', marginTop: 16 }} /&gt;&#10;  &lt;/div&gt;&#10;  &lt;div style={{ flex: 1, display: 'flex', alignItems: 'center' }}&gt;&#10;    &lt;div style={{ width: '100%', display: 'flex', flexDirection: 'column', gap: 20 }}&gt;&#10;      &lt;div style={{ display: 'flex', alignItems: 'center', gap: 28, paddingBottom: 18, borderBottom: '1px solid rgba(34,57,94,0.12)' }}&gt;&#10;        &lt;span style={{ color: '#BD9B56', fontSize: 40, fontWeight: 'bold', lineHeight: 1, minWidth: 72, fontFamily: 'Inter, sans-serif' }}&gt;01&lt;/span&gt;&#10;        &lt;div style={{ flex: 1 }}&gt;&#10;          &lt;div style={{ fontSize: 22, fontWeight: 'bold', color: '#172133' }}&gt;项目背景与规模&lt;/div&gt;&#10;          &lt;div style={{ fontSize: 14, color: '#6b7075', marginTop: 6 }}&gt;传统物业痛点 · 虚拟社区「云溪花园」数据资产&lt;/div&gt;&#10;        &lt;/div&gt;&#10;      &lt;/div&gt;&#10;      &lt;div style={{ display: 'flex', alignItems: 'center', gap: 28, paddingBottom: 18, borderBottom: '1px solid rgba(34,57,94,0.12)' }}&gt;&#10;        &lt;span style={{ color: '#BD9B56', fontSize: 40, fontWeight: 'bold', lineHeight: 1, minWidth: 72, fontFamily: 'Inter, sans-serif' }}&gt;02&lt;/span&gt;&#10;        &lt;div style={{ flex: 1 }}&gt;&#10;          &lt;div style={{ fontSize: 22, fontWeight: 'bold', color: '#172133' }}&gt;技术构建过程&lt;/div&gt;&#10;          &lt;div style={{ fontSize: 14, color: '#6b7075', marginTop: 6 }}&gt;数据库设计 → 后端 → 前端 → AI Agent → RAG 知识库&lt;/div&gt;&#10;        &lt;/div&gt;&#10;      &lt;/div&gt;&#10;      &lt;div style={{ display: 'flex', alignItems: 'center', gap: 28, paddingBottom: 18, borderBottom: '1px solid rgba(34,57,94,0.12)' }}&gt;&#10;        &lt;span style={{ color: '#BD9B56', fontSize: 40, fontWeight: 'bold', lineHeight: 1, minWidth: 72, fontFamily: 'Inter, sans-serif' }}&gt;03&lt;/span&gt;&#10;        &lt;div style={{ flex: 1 }}&gt;&#10;          &lt;div style={{ fontSize: 22, fontWeight: 'bold', color: '#172133' }}&gt;成果与验证&lt;/div&gt;&#10;          &lt;div style={{ fontSize: 14, color: '#6b7075', marginTop: 6 }}&gt;三条功能闭环 · 量化评估指标&lt;/div&gt;&#10;        &lt;/div&gt;&#10;      &lt;/div&gt;&#10;      &lt;div style={{ display: 'flex', alignItems: 'center', gap: 28 }}&gt;&#10;        &lt;span style={{ color: '#BD9B56', fontSize: 40, fontWeight: 'bold', lineHeight: 1, minWidth: 72, fontFamily: 'Inter, sans-serif' }}&gt;04&lt;/span&gt;&#10;        &lt;div style={{ flex: 1 }}&gt;&#10;          &lt;div style={{ fontSize: 22, fontWeight: 'bold', color: '#172133' }}&gt;总结与展望&lt;/div&gt;&#10;          &lt;div style={{ fontSize: 14, color: '#6b7075', marginTop: 6 }}&gt;项目价值 · 在线演示入口&lt;/div&gt;&#10;        &lt;/div&gt;&#10;      &lt;/div&gt;&#10;    &lt;/div&gt;&#10;  &lt;/div&gt;&#10;  &lt;div style={{ flexShrink: 0, height: 44, display: 'flex', alignItems: 'flex-end', justifyContent: 'space-between' }}&gt;&#10;    &lt;span style={{ color: '#BD9B56', fontSize: 12, letterSpacing: '0.1em' }}&gt;云溪花园 · 智慧社区&lt;/span&gt;&#10;    &lt;span style={{ color: '#a09b8c', fontSize: 12 }}&gt;02 / 15&lt;/span&gt;&#10;  &lt;/div&gt;&#10;&lt;/Slide&gt;"/>
+        <p:cNvPr id="237" name="" descr="&lt;Slide style={{ width: '1280px', height: '720px', background: '#FBFCFA', position: 'relative', padding: '40px 64px', boxSizing: 'border-box', display: 'flex', flexDirection: 'column' }}&gt;&#10;  &lt;div style={{ flexShrink: 0 }}&gt;&#10;    &lt;div style={{ color: '#BD9B56', fontSize: 14, letterSpacing: '0.3em', marginBottom: 10 }}&gt;CONTENTS&lt;/div&gt;&#10;    &lt;h2 style={{ fontSize: 34, fontWeight: 'bold', color: '#172133', margin: 0 }}&gt;目录&lt;/h2&gt;&#10;    &lt;div style={{ width: 64, height: 3, background: '#BD9B56', marginTop: 16 }} /&gt;&#10;  &lt;/div&gt;&#10;  &lt;div style={{ flex: 1, display: 'flex', alignItems: 'center' }}&gt;&#10;    &lt;div style={{ width: '100%', display: 'flex', flexDirection: 'column', gap: 20 }}&gt;&#10;      &lt;div style={{ display: 'flex', alignItems: 'center', gap: 28, paddingBottom: 18, borderBottom: '1px solid rgba(34,57,94,0.12)' }}&gt;&#10;        &lt;span style={{ color: '#BD9B56', fontSize: 40, fontWeight: 'bold', lineHeight: 1, minWidth: 72, fontFamily: 'Inter, sans-serif' }}&gt;01&lt;/span&gt;&#10;        &lt;div style={{ flex: 1 }}&gt;&#10;          &lt;div style={{ fontSize: 22, fontWeight: 'bold', color: '#172133' }}&gt;项目背景与规模&lt;/div&gt;&#10;          &lt;div style={{ fontSize: 14, color: '#6b7075', marginTop: 6 }}&gt;传统物业痛点 · 虚拟社区「云溪花园」数据资产&lt;/div&gt;&#10;        &lt;/div&gt;&#10;      &lt;/div&gt;&#10;      &lt;div style={{ display: 'flex', alignItems: 'center', gap: 28, paddingBottom: 18, borderBottom: '1px solid rgba(34,57,94,0.12)' }}&gt;&#10;        &lt;span style={{ color: '#BD9B56', fontSize: 40, fontWeight: 'bold', lineHeight: 1, minWidth: 72, fontFamily: 'Inter, sans-serif' }}&gt;02&lt;/span&gt;&#10;        &lt;div style={{ flex: 1 }}&gt;&#10;          &lt;div style={{ fontSize: 22, fontWeight: 'bold', color: '#172133' }}&gt;技术构建过程&lt;/div&gt;&#10;          &lt;div style={{ fontSize: 14, color: '#6b7075', marginTop: 6 }}&gt;数据库设计 → 后端 → 前端 → AI Agent → RAG 知识库&lt;/div&gt;&#10;        &lt;/div&gt;&#10;      &lt;/div&gt;&#10;      &lt;div style={{ display: 'flex', alignItems: 'center', gap: 28, paddingBottom: 18, borderBottom: '1px solid rgba(34,57,94,0.12)' }}&gt;&#10;        &lt;span style={{ color: '#BD9B56', fontSize: 40, fontWeight: 'bold', lineHeight: 1, minWidth: 72, fontFamily: 'Inter, sans-serif' }}&gt;03&lt;/span&gt;&#10;        &lt;div style={{ flex: 1 }}&gt;&#10;          &lt;div style={{ fontSize: 22, fontWeight: 'bold', color: '#172133' }}&gt;成果与验证&lt;/div&gt;&#10;          &lt;div style={{ fontSize: 14, color: '#6b7075', marginTop: 6 }}&gt;三条功能闭环 · 量化评估指标&lt;/div&gt;&#10;        &lt;/div&gt;&#10;      &lt;/div&gt;&#10;      &lt;div style={{ display: 'flex', alignItems: 'center', gap: 28 }}&gt;&#10;        &lt;span style={{ color: '#BD9B56', fontSize: 40, fontWeight: 'bold', lineHeight: 1, minWidth: 72, fontFamily: 'Inter, sans-serif' }}&gt;04&lt;/span&gt;&#10;        &lt;div style={{ flex: 1 }}&gt;&#10;          &lt;div style={{ fontSize: 22, fontWeight: 'bold', color: '#172133' }}&gt;总结与展望&lt;/div&gt;&#10;          &lt;div style={{ fontSize: 14, color: '#6b7075', marginTop: 6 }}&gt;项目价值 · 在线演示入口&lt;/div&gt;&#10;        &lt;/div&gt;&#10;      &lt;/div&gt;&#10;    &lt;/div&gt;&#10;  &lt;/div&gt;&#10;  &lt;div style={{ flexShrink: 0, height: 44, display: 'flex', alignItems: 'flex-end', justifyContent: 'space-between' }}&gt;&#10;    &lt;span style={{ color: '#BD9B56', fontSize: 12, letterSpacing: '0.1em' }}&gt;云溪花园 · 智慧社区&lt;/span&gt;&#10;    &lt;span style={{ color: '#a09b8c', fontSize: 12 }}&gt;02 / 15&lt;/span&gt;&#10;  &lt;/div&gt;&#10;&lt;/Slide&gt;"/>
         <p:cNvGrpSpPr/>
         <p:nvPr/>
       </p:nvGrpSpPr>
@@ -10499,7 +11621,7 @@
       </p:grpSpPr>
       <p:sp>
         <p:nvSpPr>
-          <p:cNvPr id="217" name=""/>
+          <p:cNvPr id="238" name=""/>
           <p:cNvSpPr/>
           <p:nvPr/>
         </p:nvSpPr>
@@ -10523,7 +11645,7 @@
       </p:sp>
       <p:sp>
         <p:nvSpPr>
-          <p:cNvPr id="218" name="" descr="{&quot;isTemplate&quot;:true,&quot;type&quot;:&quot;text&quot;}"/>
+          <p:cNvPr id="239" name="" descr="{&quot;isTemplate&quot;:true,&quot;type&quot;:&quot;text&quot;}"/>
           <p:cNvSpPr txBox="1"/>
           <p:nvPr/>
         </p:nvSpPr>
@@ -10558,7 +11680,7 @@
       </p:sp>
       <p:sp>
         <p:nvSpPr>
-          <p:cNvPr id="219" name="" descr="{&quot;isTemplate&quot;:true,&quot;type&quot;:&quot;text&quot;}"/>
+          <p:cNvPr id="240" name="" descr="{&quot;isTemplate&quot;:true,&quot;type&quot;:&quot;text&quot;}"/>
           <p:cNvSpPr txBox="1"/>
           <p:nvPr/>
         </p:nvSpPr>
@@ -10593,7 +11715,7 @@
       </p:sp>
       <p:sp>
         <p:nvSpPr>
-          <p:cNvPr id="220" name=""/>
+          <p:cNvPr id="241" name=""/>
           <p:cNvSpPr/>
           <p:nvPr/>
         </p:nvSpPr>
@@ -10617,7 +11739,7 @@
       </p:sp>
       <p:sp>
         <p:nvSpPr>
-          <p:cNvPr id="221" name=""/>
+          <p:cNvPr id="242" name=""/>
           <p:cNvSpPr/>
           <p:nvPr/>
         </p:nvSpPr>
@@ -10659,7 +11781,7 @@
       </p:sp>
       <p:sp>
         <p:nvSpPr>
-          <p:cNvPr id="222" name="" descr="{&quot;isTemplate&quot;:true,&quot;type&quot;:&quot;text&quot;}"/>
+          <p:cNvPr id="243" name="" descr="{&quot;isTemplate&quot;:true,&quot;type&quot;:&quot;text&quot;}"/>
           <p:cNvSpPr txBox="1"/>
           <p:nvPr/>
         </p:nvSpPr>
@@ -10694,7 +11816,7 @@
       </p:sp>
       <p:sp>
         <p:nvSpPr>
-          <p:cNvPr id="223" name="" descr="{&quot;isTemplate&quot;:true,&quot;type&quot;:&quot;text&quot;}"/>
+          <p:cNvPr id="244" name="" descr="{&quot;isTemplate&quot;:true,&quot;type&quot;:&quot;text&quot;}"/>
           <p:cNvSpPr txBox="1"/>
           <p:nvPr/>
         </p:nvSpPr>
@@ -10729,7 +11851,7 @@
       </p:sp>
       <p:sp>
         <p:nvSpPr>
-          <p:cNvPr id="224" name="" descr="{&quot;isTemplate&quot;:true,&quot;type&quot;:&quot;text&quot;}"/>
+          <p:cNvPr id="245" name="" descr="{&quot;isTemplate&quot;:true,&quot;type&quot;:&quot;text&quot;}"/>
           <p:cNvSpPr txBox="1"/>
           <p:nvPr/>
         </p:nvSpPr>
@@ -10784,7 +11906,7 @@
       </p:sp>
       <p:sp>
         <p:nvSpPr>
-          <p:cNvPr id="225" name=""/>
+          <p:cNvPr id="246" name=""/>
           <p:cNvSpPr/>
           <p:nvPr/>
         </p:nvSpPr>
@@ -10826,7 +11948,7 @@
       </p:sp>
       <p:sp>
         <p:nvSpPr>
-          <p:cNvPr id="226" name="" descr="{&quot;isTemplate&quot;:true,&quot;type&quot;:&quot;text&quot;}"/>
+          <p:cNvPr id="247" name="" descr="{&quot;isTemplate&quot;:true,&quot;type&quot;:&quot;text&quot;}"/>
           <p:cNvSpPr txBox="1"/>
           <p:nvPr/>
         </p:nvSpPr>
@@ -10861,7 +11983,7 @@
       </p:sp>
       <p:sp>
         <p:nvSpPr>
-          <p:cNvPr id="227" name="" descr="{&quot;isTemplate&quot;:true,&quot;type&quot;:&quot;text&quot;}"/>
+          <p:cNvPr id="248" name="" descr="{&quot;isTemplate&quot;:true,&quot;type&quot;:&quot;text&quot;}"/>
           <p:cNvSpPr txBox="1"/>
           <p:nvPr/>
         </p:nvSpPr>
@@ -10896,7 +12018,7 @@
       </p:sp>
       <p:sp>
         <p:nvSpPr>
-          <p:cNvPr id="228" name="" descr="{&quot;isTemplate&quot;:true,&quot;type&quot;:&quot;text&quot;}"/>
+          <p:cNvPr id="249" name="" descr="{&quot;isTemplate&quot;:true,&quot;type&quot;:&quot;text&quot;}"/>
           <p:cNvSpPr txBox="1"/>
           <p:nvPr/>
         </p:nvSpPr>
@@ -10991,7 +12113,7 @@
       </p:sp>
       <p:sp>
         <p:nvSpPr>
-          <p:cNvPr id="229" name=""/>
+          <p:cNvPr id="250" name=""/>
           <p:cNvSpPr/>
           <p:nvPr/>
         </p:nvSpPr>
@@ -11033,7 +12155,7 @@
       </p:sp>
       <p:sp>
         <p:nvSpPr>
-          <p:cNvPr id="230" name="" descr="{&quot;isTemplate&quot;:true,&quot;type&quot;:&quot;text&quot;}"/>
+          <p:cNvPr id="251" name="" descr="{&quot;isTemplate&quot;:true,&quot;type&quot;:&quot;text&quot;}"/>
           <p:cNvSpPr txBox="1"/>
           <p:nvPr/>
         </p:nvSpPr>
@@ -11068,7 +12190,7 @@
       </p:sp>
       <p:sp>
         <p:nvSpPr>
-          <p:cNvPr id="231" name="" descr="{&quot;isTemplate&quot;:true,&quot;type&quot;:&quot;text&quot;}"/>
+          <p:cNvPr id="252" name="" descr="{&quot;isTemplate&quot;:true,&quot;type&quot;:&quot;text&quot;}"/>
           <p:cNvSpPr txBox="1"/>
           <p:nvPr/>
         </p:nvSpPr>
@@ -11103,7 +12225,7 @@
       </p:sp>
       <p:sp>
         <p:nvSpPr>
-          <p:cNvPr id="232" name="" descr="{&quot;isTemplate&quot;:true,&quot;type&quot;:&quot;text&quot;}"/>
+          <p:cNvPr id="253" name="" descr="{&quot;isTemplate&quot;:true,&quot;type&quot;:&quot;text&quot;}"/>
           <p:cNvSpPr txBox="1"/>
           <p:nvPr/>
         </p:nvSpPr>
@@ -11158,7 +12280,7 @@
       </p:sp>
       <p:sp>
         <p:nvSpPr>
-          <p:cNvPr id="233" name="" descr="{&quot;isTemplate&quot;:true,&quot;type&quot;:&quot;text&quot;}"/>
+          <p:cNvPr id="254" name="" descr="{&quot;isTemplate&quot;:true,&quot;type&quot;:&quot;text&quot;}"/>
           <p:cNvSpPr txBox="1"/>
           <p:nvPr/>
         </p:nvSpPr>
@@ -11193,7 +12315,7 @@
       </p:sp>
       <p:sp>
         <p:nvSpPr>
-          <p:cNvPr id="234" name="" descr="{&quot;isTemplate&quot;:true,&quot;type&quot;:&quot;text&quot;}"/>
+          <p:cNvPr id="255" name="" descr="{&quot;isTemplate&quot;:true,&quot;type&quot;:&quot;text&quot;}"/>
           <p:cNvSpPr txBox="1"/>
           <p:nvPr/>
         </p:nvSpPr>
@@ -11228,7 +12350,7 @@
       </p:sp>
       <p:sp>
         <p:nvSpPr>
-          <p:cNvPr id="235" name="" descr="{&quot;isTemplate&quot;:true,&quot;type&quot;:&quot;text&quot;}"/>
+          <p:cNvPr id="256" name="" descr="{&quot;isTemplate&quot;:true,&quot;type&quot;:&quot;text&quot;}"/>
           <p:cNvSpPr txBox="1"/>
           <p:nvPr/>
         </p:nvSpPr>
@@ -11283,7 +12405,7 @@
       </p:sp>
       <p:sp>
         <p:nvSpPr>
-          <p:cNvPr id="236" name="" descr="{&quot;isTemplate&quot;:true,&quot;type&quot;:&quot;text&quot;}"/>
+          <p:cNvPr id="257" name="" descr="{&quot;isTemplate&quot;:true,&quot;type&quot;:&quot;text&quot;}"/>
           <p:cNvSpPr txBox="1"/>
           <p:nvPr/>
         </p:nvSpPr>
@@ -11338,7 +12460,7 @@
       </p:sp>
       <p:sp>
         <p:nvSpPr>
-          <p:cNvPr id="237" name="" descr="{&quot;isTemplate&quot;:true,&quot;type&quot;:&quot;text&quot;}"/>
+          <p:cNvPr id="258" name="" descr="{&quot;isTemplate&quot;:true,&quot;type&quot;:&quot;text&quot;}"/>
           <p:cNvSpPr txBox="1"/>
           <p:nvPr/>
         </p:nvSpPr>
@@ -11381,7 +12503,7 @@
   <p:cSld>
     <p:spTree>
       <p:nvGrpSpPr>
-        <p:cNvPr id="238" name="" descr="&lt;Slide style={{ width: '1280px', height: '720px', background: '#FBFCFA', position: 'relative', padding: '40px 64px', boxSizing: 'border-box', display: 'flex', flexDirection: 'column' }}&gt;&#10;  &lt;div style={{ flexShrink: 0 }}&gt;&#10;    &lt;div style={{ color: '#BD9B56', fontSize: 13, letterSpacing: '0.25em', marginBottom: 8 }}&gt;01 · 项目背景&lt;/div&gt;&#10;    &lt;h2 style={{ fontSize: 30, fontWeight: 'bold', color: '#172133', margin: 0, lineHeight: 1.3 }}&gt;传统物业的三重困境&lt;/h2&gt;&#10;    &lt;div style={{ fontSize: 14, color: '#6b7075', marginTop: 8 }}&gt;业务、数据、知识「三张皮」，需要用 AI 重新缝合&lt;/div&gt;&#10;  &lt;/div&gt;&#10;  &lt;div style={{ flex: 1, display: 'flex', alignItems: 'center' }}&gt;&#10;    &lt;div style={{ width: '100%', display: 'flex', flexDirection: 'column', gap: 18 }}&gt;&#10;      &lt;div style={{ display: 'flex', gap: 20, background: '#fff', borderRadius: 10, padding: '20px 24px', boxShadow: '0 4px 16px rgba(23,33,51,0.06)', borderLeft: '4px solid #BD9B56' }}&gt;&#10;        &lt;span style={{ color: '#BD9B56', fontSize: 22, lineHeight: 1.2, flexShrink: 0 }}&gt;!&lt;/span&gt;&#10;        &lt;div&gt;&#10;          &lt;div style={{ fontSize: 17, fontWeight: 'bold', color: '#172133', marginBottom: 6 }}&gt;信息孤岛&lt;/div&gt;&#10;          &lt;p style={{ fontSize: 14, color: '#5F5E5A', margin: 0, lineHeight: 1.6 }}&gt;业主报修、费用缴纳、巡检记录分散在多个系统，彼此不打通，物业无法掌握完整的社区运行状态，业主也看不到工单的处理进度。&lt;/p&gt;&#10;        &lt;/div&gt;&#10;      &lt;/div&gt;&#10;      &lt;div style={{ display: 'flex', gap: 20, background: '#fff', borderRadius: 10, padding: '20px 24px', boxShadow: '0 4px 16px rgba(23,33,51,0.06)', borderLeft: '4px solid #BD9B56' }}&gt;&#10;        &lt;span style={{ color: '#BD9B56', fontSize: 22, lineHeight: 1.2, flexShrink: 0 }}&gt;!&lt;/span&gt;&#10;        &lt;div&gt;&#10;          &lt;div style={{ fontSize: 17, fontWeight: 'bold', color: '#172133', marginBottom: 6 }}&gt;响应迟缓&lt;/div&gt;&#10;          &lt;p style={{ fontSize: 14, color: '#5F5E5A', margin: 0, lineHeight: 1.6 }}&gt;传统报修依赖电话和微信群，客服人工登记后再手动派单，从「业主报修」到「师傅上门」平均要数小时甚至隔天，响应效率低。&lt;/p&gt;&#10;        &lt;/div&gt;&#10;      &lt;/div&gt;&#10;      &lt;div style={{ display: 'flex', gap: 20, background: '#fff', borderRadius: 10, padding: '20px 24px', boxShadow: '0 4px 16px rgba(23,33,51,0.06)', borderLeft: '4px solid #BD9B56' }}&gt;&#10;        &lt;span style={{ color: '#BD9B56', fontSize: 22, lineHeight: 1.2, flexShrink: 0 }}&gt;!&lt;/span&gt;&#10;        &lt;div&gt;&#10;          &lt;div style={{ fontSize: 17, fontWeight: 'bold', color: '#172133', marginBottom: 6 }}&gt;隐性知识散落&lt;/div&gt;&#10;          &lt;p style={{ fontSize: 14, color: '#5F5E5A', margin: 0, lineHeight: 1.6 }}&gt;装修施工时间、停车规则、宠物管理等规定，往往只存在于物业员工的个人经验里，新人上岗难以快速掌握，业主咨询也得不到统一准确的答案。&lt;/p&gt;&#10;        &lt;/div&gt;&#10;      &lt;/div&gt;&#10;    &lt;/div&gt;&#10;  &lt;/div&gt;&#10;  &lt;div style={{ flexShrink: 0, height: 44, display: 'flex', alignItems: 'flex-end', justifyContent: 'space-between' }}&gt;&#10;    &lt;span style={{ color: '#BD9B56', fontSize: 12, letterSpacing: '0.1em' }}&gt;云溪花园 · 智慧社区&lt;/span&gt;&#10;    &lt;span style={{ color: '#a09b8c', fontSize: 12 }}&gt;03 / 15&lt;/span&gt;&#10;  &lt;/div&gt;&#10;&lt;/Slide&gt;"/>
+        <p:cNvPr id="259" name="" descr="&lt;Slide style={{ width: '1280px', height: '720px', background: '#FBFCFA', position: 'relative', padding: '40px 64px', boxSizing: 'border-box', display: 'flex', flexDirection: 'column' }}&gt;&#10;  &lt;div style={{ flexShrink: 0 }}&gt;&#10;    &lt;div style={{ color: '#BD9B56', fontSize: 13, letterSpacing: '0.25em', marginBottom: 8 }}&gt;01 · 项目背景&lt;/div&gt;&#10;    &lt;h2 style={{ fontSize: 30, fontWeight: 'bold', color: '#172133', margin: 0, lineHeight: 1.3 }}&gt;传统物业的三重困境&lt;/h2&gt;&#10;    &lt;div style={{ fontSize: 14, color: '#6b7075', marginTop: 8 }}&gt;业务、数据、知识「三张皮」，需要用 AI 重新缝合&lt;/div&gt;&#10;  &lt;/div&gt;&#10;  &lt;div style={{ flex: 1, display: 'flex', alignItems: 'center' }}&gt;&#10;    &lt;div style={{ width: '100%', display: 'flex', flexDirection: 'column', gap: 18 }}&gt;&#10;      &lt;div style={{ display: 'flex', gap: 20, background: '#fff', borderRadius: 10, padding: '20px 24px', boxShadow: '0 4px 16px rgba(23,33,51,0.06)', borderLeft: '4px solid #BD9B56' }}&gt;&#10;        &lt;span style={{ color: '#BD9B56', fontSize: 22, lineHeight: 1.2, flexShrink: 0 }}&gt;!&lt;/span&gt;&#10;        &lt;div&gt;&#10;          &lt;div style={{ fontSize: 17, fontWeight: 'bold', color: '#172133', marginBottom: 6 }}&gt;信息孤岛&lt;/div&gt;&#10;          &lt;p style={{ fontSize: 14, color: '#5F5E5A', margin: 0, lineHeight: 1.6 }}&gt;业主报修、费用缴纳、巡检记录分散在多个系统，彼此不打通，物业无法掌握完整的社区运行状态，业主也看不到工单的处理进度。&lt;/p&gt;&#10;        &lt;/div&gt;&#10;      &lt;/div&gt;&#10;      &lt;div style={{ display: 'flex', gap: 20, background: '#fff', borderRadius: 10, padding: '20px 24px', boxShadow: '0 4px 16px rgba(23,33,51,0.06)', borderLeft: '4px solid #BD9B56' }}&gt;&#10;        &lt;span style={{ color: '#BD9B56', fontSize: 22, lineHeight: 1.2, flexShrink: 0 }}&gt;!&lt;/span&gt;&#10;        &lt;div&gt;&#10;          &lt;div style={{ fontSize: 17, fontWeight: 'bold', color: '#172133', marginBottom: 6 }}&gt;响应迟缓&lt;/div&gt;&#10;          &lt;p style={{ fontSize: 14, color: '#5F5E5A', margin: 0, lineHeight: 1.6 }}&gt;传统报修依赖电话和微信群，客服人工登记后再手动派单，从「业主报修」到「师傅上门」平均要数小时甚至隔天，响应效率低。&lt;/p&gt;&#10;        &lt;/div&gt;&#10;      &lt;/div&gt;&#10;      &lt;div style={{ display: 'flex', gap: 20, background: '#fff', borderRadius: 10, padding: '20px 24px', boxShadow: '0 4px 16px rgba(23,33,51,0.06)', borderLeft: '4px solid #BD9B56' }}&gt;&#10;        &lt;span style={{ color: '#BD9B56', fontSize: 22, lineHeight: 1.2, flexShrink: 0 }}&gt;!&lt;/span&gt;&#10;        &lt;div&gt;&#10;          &lt;div style={{ fontSize: 17, fontWeight: 'bold', color: '#172133', marginBottom: 6 }}&gt;隐性知识散落&lt;/div&gt;&#10;          &lt;p style={{ fontSize: 14, color: '#5F5E5A', margin: 0, lineHeight: 1.6 }}&gt;装修施工时间、停车规则、宠物管理等规定，往往只存在于物业员工的个人经验里，新人上岗难以快速掌握，业主咨询也得不到统一准确的答案。&lt;/p&gt;&#10;        &lt;/div&gt;&#10;      &lt;/div&gt;&#10;    &lt;/div&gt;&#10;  &lt;/div&gt;&#10;  &lt;div style={{ flexShrink: 0, height: 44, display: 'flex', alignItems: 'flex-end', justifyContent: 'space-between' }}&gt;&#10;    &lt;span style={{ color: '#BD9B56', fontSize: 12, letterSpacing: '0.1em' }}&gt;云溪花园 · 智慧社区&lt;/span&gt;&#10;    &lt;span style={{ color: '#a09b8c', fontSize: 12 }}&gt;03 / 15&lt;/span&gt;&#10;  &lt;/div&gt;&#10;&lt;/Slide&gt;"/>
         <p:cNvGrpSpPr/>
         <p:nvPr/>
       </p:nvGrpSpPr>
@@ -11395,7 +12517,7 @@
       </p:grpSpPr>
       <p:sp>
         <p:nvSpPr>
-          <p:cNvPr id="239" name=""/>
+          <p:cNvPr id="260" name=""/>
           <p:cNvSpPr/>
           <p:nvPr/>
         </p:nvSpPr>
@@ -11419,7 +12541,7 @@
       </p:sp>
       <p:sp>
         <p:nvSpPr>
-          <p:cNvPr id="240" name="" descr="{&quot;isTemplate&quot;:true,&quot;type&quot;:&quot;text&quot;}"/>
+          <p:cNvPr id="261" name="" descr="{&quot;isTemplate&quot;:true,&quot;type&quot;:&quot;text&quot;}"/>
           <p:cNvSpPr txBox="1"/>
           <p:nvPr/>
         </p:nvSpPr>
@@ -11464,7 +12586,7 @@
       </p:sp>
       <p:sp>
         <p:nvSpPr>
-          <p:cNvPr id="241" name="" descr="{&quot;isTemplate&quot;:true,&quot;type&quot;:&quot;text&quot;}"/>
+          <p:cNvPr id="262" name="" descr="{&quot;isTemplate&quot;:true,&quot;type&quot;:&quot;text&quot;}"/>
           <p:cNvSpPr txBox="1"/>
           <p:nvPr/>
         </p:nvSpPr>
@@ -11499,7 +12621,7 @@
       </p:sp>
       <p:sp>
         <p:nvSpPr>
-          <p:cNvPr id="242" name="" descr="{&quot;isTemplate&quot;:true,&quot;type&quot;:&quot;text&quot;}"/>
+          <p:cNvPr id="263" name="" descr="{&quot;isTemplate&quot;:true,&quot;type&quot;:&quot;text&quot;}"/>
           <p:cNvSpPr txBox="1"/>
           <p:nvPr/>
         </p:nvSpPr>
@@ -11554,7 +12676,7 @@
       </p:sp>
       <p:sp>
         <p:nvSpPr>
-          <p:cNvPr id="243" name=""/>
+          <p:cNvPr id="264" name=""/>
           <p:cNvSpPr/>
           <p:nvPr/>
         </p:nvSpPr>
@@ -11587,7 +12709,7 @@
       </p:sp>
       <p:sp>
         <p:nvSpPr>
-          <p:cNvPr id="244" name=""/>
+          <p:cNvPr id="265" name=""/>
           <p:cNvSpPr/>
           <p:nvPr/>
         </p:nvSpPr>
@@ -11644,7 +12766,7 @@
       </p:sp>
       <p:sp>
         <p:nvSpPr>
-          <p:cNvPr id="245" name="" descr="{&quot;isTemplate&quot;:true,&quot;type&quot;:&quot;text&quot;}"/>
+          <p:cNvPr id="266" name="" descr="{&quot;isTemplate&quot;:true,&quot;type&quot;:&quot;text&quot;}"/>
           <p:cNvSpPr txBox="1"/>
           <p:nvPr/>
         </p:nvSpPr>
@@ -11679,7 +12801,7 @@
       </p:sp>
       <p:sp>
         <p:nvSpPr>
-          <p:cNvPr id="246" name="" descr="{&quot;isTemplate&quot;:true,&quot;type&quot;:&quot;text&quot;}"/>
+          <p:cNvPr id="267" name="" descr="{&quot;isTemplate&quot;:true,&quot;type&quot;:&quot;text&quot;}"/>
           <p:cNvSpPr txBox="1"/>
           <p:nvPr/>
         </p:nvSpPr>
@@ -11714,7 +12836,7 @@
       </p:sp>
       <p:sp>
         <p:nvSpPr>
-          <p:cNvPr id="247" name="" descr="{&quot;isTemplate&quot;:true,&quot;type&quot;:&quot;text&quot;}"/>
+          <p:cNvPr id="268" name="" descr="{&quot;isTemplate&quot;:true,&quot;type&quot;:&quot;text&quot;}"/>
           <p:cNvSpPr txBox="1"/>
           <p:nvPr/>
         </p:nvSpPr>
@@ -11749,7 +12871,7 @@
       </p:sp>
       <p:sp>
         <p:nvSpPr>
-          <p:cNvPr id="248" name=""/>
+          <p:cNvPr id="269" name=""/>
           <p:cNvSpPr/>
           <p:nvPr/>
         </p:nvSpPr>
@@ -11782,7 +12904,7 @@
       </p:sp>
       <p:sp>
         <p:nvSpPr>
-          <p:cNvPr id="249" name=""/>
+          <p:cNvPr id="270" name=""/>
           <p:cNvSpPr/>
           <p:nvPr/>
         </p:nvSpPr>
@@ -11839,7 +12961,7 @@
       </p:sp>
       <p:sp>
         <p:nvSpPr>
-          <p:cNvPr id="250" name="" descr="{&quot;isTemplate&quot;:true,&quot;type&quot;:&quot;text&quot;}"/>
+          <p:cNvPr id="271" name="" descr="{&quot;isTemplate&quot;:true,&quot;type&quot;:&quot;text&quot;}"/>
           <p:cNvSpPr txBox="1"/>
           <p:nvPr/>
         </p:nvSpPr>
@@ -11874,7 +12996,7 @@
       </p:sp>
       <p:sp>
         <p:nvSpPr>
-          <p:cNvPr id="251" name="" descr="{&quot;isTemplate&quot;:true,&quot;type&quot;:&quot;text&quot;}"/>
+          <p:cNvPr id="272" name="" descr="{&quot;isTemplate&quot;:true,&quot;type&quot;:&quot;text&quot;}"/>
           <p:cNvSpPr txBox="1"/>
           <p:nvPr/>
         </p:nvSpPr>
@@ -11909,7 +13031,7 @@
       </p:sp>
       <p:sp>
         <p:nvSpPr>
-          <p:cNvPr id="252" name="" descr="{&quot;isTemplate&quot;:true,&quot;type&quot;:&quot;text&quot;}"/>
+          <p:cNvPr id="273" name="" descr="{&quot;isTemplate&quot;:true,&quot;type&quot;:&quot;text&quot;}"/>
           <p:cNvSpPr txBox="1"/>
           <p:nvPr/>
         </p:nvSpPr>
@@ -11944,7 +13066,7 @@
       </p:sp>
       <p:sp>
         <p:nvSpPr>
-          <p:cNvPr id="253" name=""/>
+          <p:cNvPr id="274" name=""/>
           <p:cNvSpPr/>
           <p:nvPr/>
         </p:nvSpPr>
@@ -11977,7 +13099,7 @@
       </p:sp>
       <p:sp>
         <p:nvSpPr>
-          <p:cNvPr id="254" name=""/>
+          <p:cNvPr id="275" name=""/>
           <p:cNvSpPr/>
           <p:nvPr/>
         </p:nvSpPr>
@@ -12034,7 +13156,7 @@
       </p:sp>
       <p:sp>
         <p:nvSpPr>
-          <p:cNvPr id="255" name="" descr="{&quot;isTemplate&quot;:true,&quot;type&quot;:&quot;text&quot;}"/>
+          <p:cNvPr id="276" name="" descr="{&quot;isTemplate&quot;:true,&quot;type&quot;:&quot;text&quot;}"/>
           <p:cNvSpPr txBox="1"/>
           <p:nvPr/>
         </p:nvSpPr>
@@ -12069,7 +13191,7 @@
       </p:sp>
       <p:sp>
         <p:nvSpPr>
-          <p:cNvPr id="256" name="" descr="{&quot;isTemplate&quot;:true,&quot;type&quot;:&quot;text&quot;}"/>
+          <p:cNvPr id="277" name="" descr="{&quot;isTemplate&quot;:true,&quot;type&quot;:&quot;text&quot;}"/>
           <p:cNvSpPr txBox="1"/>
           <p:nvPr/>
         </p:nvSpPr>
@@ -12104,7 +13226,7 @@
       </p:sp>
       <p:sp>
         <p:nvSpPr>
-          <p:cNvPr id="257" name="" descr="{&quot;isTemplate&quot;:true,&quot;type&quot;:&quot;text&quot;}"/>
+          <p:cNvPr id="278" name="" descr="{&quot;isTemplate&quot;:true,&quot;type&quot;:&quot;text&quot;}"/>
           <p:cNvSpPr txBox="1"/>
           <p:nvPr/>
         </p:nvSpPr>
@@ -12139,7 +13261,7 @@
       </p:sp>
       <p:sp>
         <p:nvSpPr>
-          <p:cNvPr id="258" name="" descr="{&quot;isTemplate&quot;:true,&quot;type&quot;:&quot;text&quot;}"/>
+          <p:cNvPr id="279" name="" descr="{&quot;isTemplate&quot;:true,&quot;type&quot;:&quot;text&quot;}"/>
           <p:cNvSpPr txBox="1"/>
           <p:nvPr/>
         </p:nvSpPr>
@@ -12194,7 +13316,7 @@
       </p:sp>
       <p:sp>
         <p:nvSpPr>
-          <p:cNvPr id="259" name="" descr="{&quot;isTemplate&quot;:true,&quot;type&quot;:&quot;text&quot;}"/>
+          <p:cNvPr id="280" name="" descr="{&quot;isTemplate&quot;:true,&quot;type&quot;:&quot;text&quot;}"/>
           <p:cNvSpPr txBox="1"/>
           <p:nvPr/>
         </p:nvSpPr>
@@ -12237,7 +13359,7 @@
   <p:cSld>
     <p:spTree>
       <p:nvGrpSpPr>
-        <p:cNvPr id="260" name="" descr="&lt;Slide style={{ width: '1280px', height: '720px', background: '#FBFCFA', position: 'relative', padding: '32px 64px', boxSizing: 'border-box', display: 'flex', flexDirection: 'column' }}&gt;&#10;  &lt;div style={{ flexShrink: 0 }}&gt;&#10;    &lt;div style={{ color: '#BD9B56', fontSize: 13, letterSpacing: '0.25em', marginBottom: 6 }}&gt;01 · 项目目标&lt;/div&gt;&#10;    &lt;h2 style={{ fontSize: 30, fontWeight: 'bold', color: '#172133', margin: 0, lineHeight: 1.3 }}&gt;本项目要验证的四件事&lt;/h2&gt;&#10;  &lt;/div&gt;&#10;  &lt;div style={{ flex: 1, display: 'flex', alignItems: 'center', minHeight: 0 }}&gt;&#10;    &lt;div style={{ width: '100%', display: 'grid', gridTemplateColumns: '1fr 1fr', gap: 16 }}&gt;&#10;      &lt;div style={{ background: '#fff', borderRadius: 10, padding: '18px 22px', boxShadow: '0 4px 16px rgba(23,33,51,0.06)', borderTop: '3px solid #BD9B56' }}&gt;&#10;        &lt;div style={{ fontSize: 17, fontWeight: 'bold', color: '#172133', marginBottom: 6 }}&gt;1.  AI 能否理解业务意图&lt;/div&gt;&#10;        &lt;p style={{ fontSize: 14, color: '#5F5E5A', margin: 0, lineHeight: 1.55 }}&gt;用户说一句「厨房漏水了」，系统能否准确识别为报修需求，而非闲聊或误判。&lt;/p&gt;&#10;      &lt;/div&gt;&#10;      &lt;div style={{ background: '#fff', borderRadius: 10, padding: '18px 22px', boxShadow: '0 4px 16px rgba(23,33,51,0.06)', borderTop: '3px solid #BD9B56' }}&gt;&#10;        &lt;div style={{ fontSize: 17, fontWeight: 'bold', color: '#172133', marginBottom: 6 }}&gt;2.  Agent 能否调用业务工具&lt;/div&gt;&#10;        &lt;p style={{ fontSize: 14, color: '#5F5E5A', margin: 0, lineHeight: 1.55 }}&gt;识别意图后，能否自动创建工单、查询费用、检索知识，而不是停留在「回答」层面。&lt;/p&gt;&#10;      &lt;/div&gt;&#10;      &lt;div style={{ background: '#fff', borderRadius: 10, padding: '18px 22px', boxShadow: '0 4px 16px rgba(23,33,51,0.06)', borderTop: '3px solid #BD9B56' }}&gt;&#10;        &lt;div style={{ fontSize: 17, fontWeight: 'bold', color: '#172133', marginBottom: 6 }}&gt;3.  能否跑通业务闭环&lt;/div&gt;&#10;        &lt;p style={{ fontSize: 14, color: '#5F5E5A', margin: 0, lineHeight: 1.55 }}&gt;从报修到派单到完成，AI 是否真正参与了业务流程，而非只在前端加了一个聊天窗口。&lt;/p&gt;&#10;      &lt;/div&gt;&#10;      &lt;div style={{ background: '#fff', borderRadius: 10, padding: '18px 22px', boxShadow: '0 4px 16px rgba(23,33,51,0.06)', borderTop: '3px solid #BD9B56' }}&gt;&#10;        &lt;div style={{ fontSize: 17, fontWeight: 'bold', color: '#172133', marginBottom: 6 }}&gt;4.  RAG 能否准确回答&lt;/div&gt;&#10;        &lt;p style={{ fontSize: 14, color: '#5F5E5A', margin: 0, lineHeight: 1.55 }}&gt;对「装修几点施工」这类制度问题，能否检索到正确依据并给出准确、有出处的答案。&lt;/p&gt;&#10;      &lt;/div&gt;&#10;    &lt;/div&gt;&#10;  &lt;/div&gt;&#10;  &lt;div style={{ flexShrink: 0, height: 40, display: 'flex', alignItems: 'flex-end', justifyContent: 'space-between' }}&gt;&#10;    &lt;span style={{ color: '#BD9B56', fontSize: 12, letterSpacing: '0.1em' }}&gt;云溪花园 · 智慧社区&lt;/span&gt;&#10;    &lt;span style={{ color: '#a09b8c', fontSize: 12 }}&gt;04 / 15&lt;/span&gt;&#10;  &lt;/div&gt;&#10;&lt;/Slide&gt;"/>
+        <p:cNvPr id="281" name="" descr="&lt;Slide style={{ width: '1280px', height: '720px', background: '#FBFCFA', position: 'relative', padding: '32px 64px', boxSizing: 'border-box', display: 'flex', flexDirection: 'column' }}&gt;&#10;  &lt;div style={{ flexShrink: 0 }}&gt;&#10;    &lt;div style={{ color: '#BD9B56', fontSize: 13, letterSpacing: '0.25em', marginBottom: 6 }}&gt;01 · 项目目标&lt;/div&gt;&#10;    &lt;h2 style={{ fontSize: 30, fontWeight: 'bold', color: '#172133', margin: 0, lineHeight: 1.3 }}&gt;本项目要验证的四件事&lt;/h2&gt;&#10;  &lt;/div&gt;&#10;  &lt;div style={{ flex: 1, display: 'flex', alignItems: 'center', minHeight: 0 }}&gt;&#10;    &lt;div style={{ width: '100%', display: 'grid', gridTemplateColumns: '1fr 1fr', gap: 16 }}&gt;&#10;      &lt;div style={{ background: '#fff', borderRadius: 10, padding: '18px 22px', boxShadow: '0 4px 16px rgba(23,33,51,0.06)', borderTop: '3px solid #BD9B56' }}&gt;&#10;        &lt;div style={{ fontSize: 17, fontWeight: 'bold', color: '#172133', marginBottom: 6 }}&gt;1.  AI 能否理解业务意图&lt;/div&gt;&#10;        &lt;p style={{ fontSize: 14, color: '#5F5E5A', margin: 0, lineHeight: 1.55 }}&gt;用户说一句「厨房漏水了」，系统能否准确识别为报修需求，而非闲聊或误判。&lt;/p&gt;&#10;      &lt;/div&gt;&#10;      &lt;div style={{ background: '#fff', borderRadius: 10, padding: '18px 22px', boxShadow: '0 4px 16px rgba(23,33,51,0.06)', borderTop: '3px solid #BD9B56' }}&gt;&#10;        &lt;div style={{ fontSize: 17, fontWeight: 'bold', color: '#172133', marginBottom: 6 }}&gt;2.  Agent 能否调用业务工具&lt;/div&gt;&#10;        &lt;p style={{ fontSize: 14, color: '#5F5E5A', margin: 0, lineHeight: 1.55 }}&gt;识别意图后，能否自动创建工单、查询费用、检索知识，而不是停留在「回答」层面。&lt;/p&gt;&#10;      &lt;/div&gt;&#10;      &lt;div style={{ background: '#fff', borderRadius: 10, padding: '18px 22px', boxShadow: '0 4px 16px rgba(23,33,51,0.06)', borderTop: '3px solid #BD9B56' }}&gt;&#10;        &lt;div style={{ fontSize: 17, fontWeight: 'bold', color: '#172133', marginBottom: 6 }}&gt;3.  能否跑通业务闭环&lt;/div&gt;&#10;        &lt;p style={{ fontSize: 14, color: '#5F5E5A', margin: 0, lineHeight: 1.55 }}&gt;从报修到派单到完成，AI 是否真正参与了业务流程，而非只在前端加了一个聊天窗口。&lt;/p&gt;&#10;      &lt;/div&gt;&#10;      &lt;div style={{ background: '#fff', borderRadius: 10, padding: '18px 22px', boxShadow: '0 4px 16px rgba(23,33,51,0.06)', borderTop: '3px solid #BD9B56' }}&gt;&#10;        &lt;div style={{ fontSize: 17, fontWeight: 'bold', color: '#172133', marginBottom: 6 }}&gt;4.  RAG 能否准确回答&lt;/div&gt;&#10;        &lt;p style={{ fontSize: 14, color: '#5F5E5A', margin: 0, lineHeight: 1.55 }}&gt;对「装修几点施工」这类制度问题，能否检索到正确依据并给出准确、有出处的答案。&lt;/p&gt;&#10;      &lt;/div&gt;&#10;    &lt;/div&gt;&#10;  &lt;/div&gt;&#10;  &lt;div style={{ flexShrink: 0, height: 40, display: 'flex', alignItems: 'flex-end', justifyContent: 'space-between' }}&gt;&#10;    &lt;span style={{ color: '#BD9B56', fontSize: 12, letterSpacing: '0.1em' }}&gt;云溪花园 · 智慧社区&lt;/span&gt;&#10;    &lt;span style={{ color: '#a09b8c', fontSize: 12 }}&gt;04 / 15&lt;/span&gt;&#10;  &lt;/div&gt;&#10;&lt;/Slide&gt;"/>
         <p:cNvGrpSpPr/>
         <p:nvPr/>
       </p:nvGrpSpPr>
@@ -12251,7 +13373,7 @@
       </p:grpSpPr>
       <p:sp>
         <p:nvSpPr>
-          <p:cNvPr id="261" name=""/>
+          <p:cNvPr id="282" name=""/>
           <p:cNvSpPr/>
           <p:nvPr/>
         </p:nvSpPr>
@@ -12275,7 +13397,7 @@
       </p:sp>
       <p:sp>
         <p:nvSpPr>
-          <p:cNvPr id="262" name="" descr="{&quot;isTemplate&quot;:true,&quot;type&quot;:&quot;text&quot;}"/>
+          <p:cNvPr id="283" name="" descr="{&quot;isTemplate&quot;:true,&quot;type&quot;:&quot;text&quot;}"/>
           <p:cNvSpPr txBox="1"/>
           <p:nvPr/>
         </p:nvSpPr>
@@ -12320,7 +13442,7 @@
       </p:sp>
       <p:sp>
         <p:nvSpPr>
-          <p:cNvPr id="263" name="" descr="{&quot;isTemplate&quot;:true,&quot;type&quot;:&quot;text&quot;}"/>
+          <p:cNvPr id="284" name="" descr="{&quot;isTemplate&quot;:true,&quot;type&quot;:&quot;text&quot;}"/>
           <p:cNvSpPr txBox="1"/>
           <p:nvPr/>
         </p:nvSpPr>
@@ -12355,7 +13477,7 @@
       </p:sp>
       <p:sp>
         <p:nvSpPr>
-          <p:cNvPr id="264" name=""/>
+          <p:cNvPr id="285" name=""/>
           <p:cNvSpPr/>
           <p:nvPr/>
         </p:nvSpPr>
@@ -12388,7 +13510,7 @@
       </p:sp>
       <p:sp>
         <p:nvSpPr>
-          <p:cNvPr id="265" name=""/>
+          <p:cNvPr id="286" name=""/>
           <p:cNvSpPr/>
           <p:nvPr/>
         </p:nvSpPr>
@@ -12445,7 +13567,7 @@
       </p:sp>
       <p:sp>
         <p:nvSpPr>
-          <p:cNvPr id="266" name="" descr="{&quot;isTemplate&quot;:true,&quot;type&quot;:&quot;text&quot;}"/>
+          <p:cNvPr id="287" name="" descr="{&quot;isTemplate&quot;:true,&quot;type&quot;:&quot;text&quot;}"/>
           <p:cNvSpPr txBox="1"/>
           <p:nvPr/>
         </p:nvSpPr>
@@ -12490,7 +13612,7 @@
       </p:sp>
       <p:sp>
         <p:nvSpPr>
-          <p:cNvPr id="267" name="" descr="{&quot;isTemplate&quot;:true,&quot;type&quot;:&quot;text&quot;}"/>
+          <p:cNvPr id="288" name="" descr="{&quot;isTemplate&quot;:true,&quot;type&quot;:&quot;text&quot;}"/>
           <p:cNvSpPr txBox="1"/>
           <p:nvPr/>
         </p:nvSpPr>
@@ -12525,7 +13647,7 @@
       </p:sp>
       <p:sp>
         <p:nvSpPr>
-          <p:cNvPr id="268" name=""/>
+          <p:cNvPr id="289" name=""/>
           <p:cNvSpPr/>
           <p:nvPr/>
         </p:nvSpPr>
@@ -12558,7 +13680,7 @@
       </p:sp>
       <p:sp>
         <p:nvSpPr>
-          <p:cNvPr id="269" name=""/>
+          <p:cNvPr id="290" name=""/>
           <p:cNvSpPr/>
           <p:nvPr/>
         </p:nvSpPr>
@@ -12615,7 +13737,7 @@
       </p:sp>
       <p:sp>
         <p:nvSpPr>
-          <p:cNvPr id="270" name="" descr="{&quot;isTemplate&quot;:true,&quot;type&quot;:&quot;text&quot;}"/>
+          <p:cNvPr id="291" name="" descr="{&quot;isTemplate&quot;:true,&quot;type&quot;:&quot;text&quot;}"/>
           <p:cNvSpPr txBox="1"/>
           <p:nvPr/>
         </p:nvSpPr>
@@ -12660,7 +13782,7 @@
       </p:sp>
       <p:sp>
         <p:nvSpPr>
-          <p:cNvPr id="271" name="" descr="{&quot;isTemplate&quot;:true,&quot;type&quot;:&quot;text&quot;}"/>
+          <p:cNvPr id="292" name="" descr="{&quot;isTemplate&quot;:true,&quot;type&quot;:&quot;text&quot;}"/>
           <p:cNvSpPr txBox="1"/>
           <p:nvPr/>
         </p:nvSpPr>
@@ -12695,7 +13817,7 @@
       </p:sp>
       <p:sp>
         <p:nvSpPr>
-          <p:cNvPr id="272" name=""/>
+          <p:cNvPr id="293" name=""/>
           <p:cNvSpPr/>
           <p:nvPr/>
         </p:nvSpPr>
@@ -12728,7 +13850,7 @@
       </p:sp>
       <p:sp>
         <p:nvSpPr>
-          <p:cNvPr id="273" name=""/>
+          <p:cNvPr id="294" name=""/>
           <p:cNvSpPr/>
           <p:nvPr/>
         </p:nvSpPr>
@@ -12785,7 +13907,7 @@
       </p:sp>
       <p:sp>
         <p:nvSpPr>
-          <p:cNvPr id="274" name="" descr="{&quot;isTemplate&quot;:true,&quot;type&quot;:&quot;text&quot;}"/>
+          <p:cNvPr id="295" name="" descr="{&quot;isTemplate&quot;:true,&quot;type&quot;:&quot;text&quot;}"/>
           <p:cNvSpPr txBox="1"/>
           <p:nvPr/>
         </p:nvSpPr>
@@ -12830,7 +13952,7 @@
       </p:sp>
       <p:sp>
         <p:nvSpPr>
-          <p:cNvPr id="275" name="" descr="{&quot;isTemplate&quot;:true,&quot;type&quot;:&quot;text&quot;}"/>
+          <p:cNvPr id="296" name="" descr="{&quot;isTemplate&quot;:true,&quot;type&quot;:&quot;text&quot;}"/>
           <p:cNvSpPr txBox="1"/>
           <p:nvPr/>
         </p:nvSpPr>
@@ -12885,7 +14007,7 @@
       </p:sp>
       <p:sp>
         <p:nvSpPr>
-          <p:cNvPr id="276" name=""/>
+          <p:cNvPr id="297" name=""/>
           <p:cNvSpPr/>
           <p:nvPr/>
         </p:nvSpPr>
@@ -12918,7 +14040,7 @@
       </p:sp>
       <p:sp>
         <p:nvSpPr>
-          <p:cNvPr id="277" name=""/>
+          <p:cNvPr id="298" name=""/>
           <p:cNvSpPr/>
           <p:nvPr/>
         </p:nvSpPr>
@@ -12975,7 +14097,7 @@
       </p:sp>
       <p:sp>
         <p:nvSpPr>
-          <p:cNvPr id="278" name="" descr="{&quot;isTemplate&quot;:true,&quot;type&quot;:&quot;text&quot;}"/>
+          <p:cNvPr id="299" name="" descr="{&quot;isTemplate&quot;:true,&quot;type&quot;:&quot;text&quot;}"/>
           <p:cNvSpPr txBox="1"/>
           <p:nvPr/>
         </p:nvSpPr>
@@ -13020,7 +14142,7 @@
       </p:sp>
       <p:sp>
         <p:nvSpPr>
-          <p:cNvPr id="279" name="" descr="{&quot;isTemplate&quot;:true,&quot;type&quot;:&quot;text&quot;}"/>
+          <p:cNvPr id="300" name="" descr="{&quot;isTemplate&quot;:true,&quot;type&quot;:&quot;text&quot;}"/>
           <p:cNvSpPr txBox="1"/>
           <p:nvPr/>
         </p:nvSpPr>
@@ -13055,7 +14177,7 @@
       </p:sp>
       <p:sp>
         <p:nvSpPr>
-          <p:cNvPr id="280" name="" descr="{&quot;isTemplate&quot;:true,&quot;type&quot;:&quot;text&quot;}"/>
+          <p:cNvPr id="301" name="" descr="{&quot;isTemplate&quot;:true,&quot;type&quot;:&quot;text&quot;}"/>
           <p:cNvSpPr txBox="1"/>
           <p:nvPr/>
         </p:nvSpPr>
@@ -13110,7 +14232,7 @@
       </p:sp>
       <p:sp>
         <p:nvSpPr>
-          <p:cNvPr id="281" name="" descr="{&quot;isTemplate&quot;:true,&quot;type&quot;:&quot;text&quot;}"/>
+          <p:cNvPr id="302" name="" descr="{&quot;isTemplate&quot;:true,&quot;type&quot;:&quot;text&quot;}"/>
           <p:cNvSpPr txBox="1"/>
           <p:nvPr/>
         </p:nvSpPr>
@@ -13153,7 +14275,7 @@
   <p:cSld>
     <p:spTree>
       <p:nvGrpSpPr>
-        <p:cNvPr id="282" name="" descr="&lt;Slide style={{ width: '1280px', height: '720px', background: '#FBFCFA', position: 'relative', padding: '32px 64px', boxSizing: 'border-box', display: 'flex', flexDirection: 'column' }}&gt;&#10;  &lt;div style={{ flexShrink: 0 }}&gt;&#10;    &lt;div style={{ color: '#BD9B56', fontSize: 13, letterSpacing: '0.25em', marginBottom: 6 }}&gt;01 · 项目规模&lt;/div&gt;&#10;    &lt;h2 style={{ fontSize: 30, fontWeight: 'bold', color: '#172133', margin: 0, lineHeight: 1.3 }}&gt;虚拟社区数据资产：云溪花园&lt;/h2&gt;&#10;    &lt;div style={{ fontSize: 14, color: '#6b7075', marginTop: 6 }}&gt;以一个社区为根，向下延伸出空间、人员、业务、知识四类数据资产&lt;/div&gt;&#10;  &lt;/div&gt;&#10;  &lt;div style={{ flex: 1, display: 'flex', alignItems: 'center', justifyContent: 'center' }}&gt;&#10;    &lt;svg width=&quot;1150&quot; height=&quot;470&quot; viewBox=&quot;0 0 1150 470&quot;&gt;&#10;      &lt;g fontFamily=&quot;Inter, sans-serif&quot;&gt;&#10;        {/* 根节点 community */}&#10;        &lt;rect x=&quot;450&quot; y=&quot;14&quot; width=&quot;250&quot; height=&quot;58&quot; rx=&quot;10&quot; fill=&quot;#172133&quot; /&gt;&#10;        &lt;text x=&quot;575&quot; y=&quot;38&quot; textAnchor=&quot;middle&quot; fontSize=&quot;15&quot; fontWeight=&quot;bold&quot; fill=&quot;#FBFCFA&quot;&gt;community 云溪花园&lt;/text&gt;&#10;        &lt;text x=&quot;575&quot; y=&quot;58&quot; textAnchor=&quot;middle&quot; fontSize=&quot;11&quot; fill=&quot;#BD9B56&quot;&gt;1 个小区 · 上海浦东张江路1268号&lt;/text&gt;&#10;        {/* 根节点连接线 */}&#10;        &lt;line x1=&quot;575&quot; y1=&quot;72&quot; x2=&quot;575&quot; y2=&quot;92&quot; stroke=&quot;#BD9B56&quot; strokeWidth=&quot;1.5&quot; /&gt;&#10;        &lt;line x1=&quot;150&quot; y1=&quot;92&quot; x2=&quot;1015&quot; y2=&quot;92&quot; stroke=&quot;#BD9B56&quot; strokeWidth=&quot;1.5&quot; /&gt;&#10;        &lt;line x1=&quot;150&quot; y1=&quot;92&quot; x2=&quot;150&quot; y2=&quot;108&quot; stroke=&quot;#BD9B56&quot; strokeWidth=&quot;1.5&quot; /&gt;&#10;        &lt;line x1=&quot;438&quot; y1=&quot;92&quot; x2=&quot;438&quot; y2=&quot;108&quot; stroke=&quot;#BD9B56&quot; strokeWidth=&quot;1.5&quot; /&gt;&#10;        &lt;line x1=&quot;726&quot; y1=&quot;92&quot; x2=&quot;726&quot; y2=&quot;108&quot; stroke=&quot;#BD9B56&quot; strokeWidth=&quot;1.5&quot; /&gt;&#10;        &lt;line x1=&quot;1015&quot; y1=&quot;92&quot; x2=&quot;1015&quot; y2=&quot;108&quot; stroke=&quot;#BD9B56&quot; strokeWidth=&quot;1.5&quot; /&gt;&#10;&#10;        {/* 分组1：空间资产 */}&#10;        &lt;text x=&quot;150&quot; y=&quot;128&quot; textAnchor=&quot;middle&quot; fontSize=&quot;12&quot; fontWeight=&quot;bold&quot; fill=&quot;#BD9B56&quot;&gt;空间资产&lt;/text&gt;&#10;        &lt;rect x=&quot;20&quot; y=&quot;138&quot; width=&quot;260&quot; height=&quot;56&quot; rx=&quot;8&quot; fill=&quot;rgba(34,57,94,0.06)&quot; stroke=&quot;#22395E&quot; strokeWidth=&quot;1.5&quot; /&gt;&#10;        &lt;text x=&quot;150&quot; y=&quot;162&quot; textAnchor=&quot;middle&quot; fontSize=&quot;14&quot; fontWeight=&quot;bold&quot; fill=&quot;#172133&quot;&gt;building 楼栋 ×8&lt;/text&gt;&#10;        &lt;text x=&quot;150&quot; y=&quot;182&quot; textAnchor=&quot;middle&quot; fontSize=&quot;11&quot; fill=&quot;#5F5E5A&quot;&gt;每栋 26 层 · 2 单元 · 4 户/层&lt;/text&gt;&#10;        &lt;line x1=&quot;150&quot; y1=&quot;194&quot; x2=&quot;150&quot; y2=&quot;206&quot; stroke=&quot;#BD9B56&quot; strokeWidth=&quot;1.2&quot; /&gt;&#10;        &lt;rect x=&quot;20&quot; y=&quot;210&quot; width=&quot;260&quot; height=&quot;56&quot; rx=&quot;8&quot; fill=&quot;rgba(34,57,94,0.06)&quot; stroke=&quot;#22395E&quot; strokeWidth=&quot;1.5&quot; /&gt;&#10;        &lt;text x=&quot;150&quot; y=&quot;234&quot; textAnchor=&quot;middle&quot; fontSize=&quot;14&quot; fontWeight=&quot;bold&quot; fill=&quot;#172133&quot;&gt;house 房屋 ×1664&lt;/text&gt;&#10;        &lt;text x=&quot;150&quot; y=&quot;254&quot; textAnchor=&quot;middle&quot; fontSize=&quot;11&quot; fill=&quot;#5F5E5A&quot;&gt;入住约 1200 户 · 800 车位&lt;/text&gt;&#10;&#10;        {/* 分组2：人员资产 */}&#10;        &lt;text x=&quot;438&quot; y=&quot;128&quot; textAnchor=&quot;middle&quot; fontSize=&quot;12&quot; fontWeight=&quot;bold&quot; fill=&quot;#BD9B56&quot;&gt;人员资产&lt;/text&gt;&#10;        &lt;rect x=&quot;308&quot; y=&quot;138&quot; width=&quot;260&quot; height=&quot;56&quot; rx=&quot;8&quot; fill=&quot;rgba(189,155,86,0.10)&quot; stroke=&quot;#BD9B56&quot; strokeWidth=&quot;1.5&quot; /&gt;&#10;        &lt;text x=&quot;438&quot; y=&quot;162&quot; textAnchor=&quot;middle&quot; fontSize=&quot;14&quot; fontWeight=&quot;bold&quot; fill=&quot;#172133&quot;&gt;user 业主 ×200&lt;/text&gt;&#10;        &lt;text x=&quot;438&quot; y=&quot;182&quot; textAnchor=&quot;middle&quot; fontSize=&quot;11&quot; fill=&quot;#5F5E5A&quot;&gt;house_binding 绑定 200 套&lt;/text&gt;&#10;        &lt;line x1=&quot;438&quot; y1=&quot;194&quot; x2=&quot;438&quot; y2=&quot;206&quot; stroke=&quot;#BD9B56&quot; strokeWidth=&quot;1.2&quot; /&gt;&#10;        &lt;rect x=&quot;308&quot; y=&quot;210&quot; width=&quot;260&quot; height=&quot;56&quot; rx=&quot;8&quot; fill=&quot;rgba(189,155,86,0.10)&quot; stroke=&quot;#BD9B56&quot; strokeWidth=&quot;1.5&quot; /&gt;&#10;        &lt;text x=&quot;438&quot; y=&quot;234&quot; textAnchor=&quot;middle&quot; fontSize=&quot;14&quot; fontWeight=&quot;bold&quot; fill=&quot;#172133&quot;&gt;worker 物业 ×75&lt;/text&gt;&#10;        &lt;text x=&quot;438&quot; y=&quot;254&quot; textAnchor=&quot;middle&quot; fontSize=&quot;11&quot; fill=&quot;#5F5E5A&quot;&gt;10 管理 / 15 维修 / 50 一线&lt;/text&gt;&#10;&#10;        {/* 分组3：业务数据 */}&#10;        &lt;text x=&quot;726&quot; y=&quot;128&quot; textAnchor=&quot;middle&quot; fontSize=&quot;12&quot; fontWeight=&quot;bold&quot; fill=&quot;#BD9B56&quot;&gt;业务数据&lt;/text&gt;&#10;        &lt;rect x=&quot;596&quot; y=&quot;138&quot; width=&quot;260&quot; height=&quot;40&quot; rx=&quot;8&quot; fill=&quot;rgba(34,57,94,0.06)&quot; stroke=&quot;#22395E&quot; strokeWidth=&quot;1.5&quot; /&gt;&#10;        &lt;text x=&quot;726&quot; y=&quot;163&quot; textAnchor=&quot;middle&quot; fontSize=&quot;13&quot; fontWeight=&quot;bold&quot; fill=&quot;#172133&quot;&gt;repair_order 工单 ×50&lt;/text&gt;&#10;        &lt;rect x=&quot;596&quot; y=&quot;186&quot; width=&quot;260&quot; height=&quot;40&quot; rx=&quot;8&quot; fill=&quot;rgba(34,57,94,0.06)&quot; stroke=&quot;#22395E&quot; strokeWidth=&quot;1.5&quot; /&gt;&#10;        &lt;text x=&quot;726&quot; y=&quot;211&quot; textAnchor=&quot;middle&quot; fontSize=&quot;13&quot; fontWeight=&quot;bold&quot; fill=&quot;#172133&quot;&gt;fee_bill 账单 ×746&lt;/text&gt;&#10;        &lt;rect x=&quot;596&quot; y=&quot;234&quot; width=&quot;260&quot; height=&quot;40&quot; rx=&quot;8&quot; fill=&quot;rgba(34,57,94,0.06)&quot; stroke=&quot;#22395E&quot; strokeWidth=&quot;1.5&quot; /&gt;&#10;        &lt;text x=&quot;726&quot; y=&quot;259&quot; textAnchor=&quot;middle&quot; fontSize=&quot;13&quot; fontWeight=&quot;bold&quot; fill=&quot;#172133&quot;&gt;notice 公告 ×24&lt;/text&gt;&#10;&#10;        {/* 分组4：知识资产 */}&#10;        &lt;text x=&quot;1015&quot; y=&quot;128&quot; textAnchor=&quot;middle&quot; fontSize=&quot;12&quot; fontWeight=&quot;bold&quot; fill=&quot;#BD9B56&quot;&gt;知识资产&lt;/text&gt;&#10;        &lt;rect x=&quot;885&quot; y=&quot;138&quot; width=&quot;260&quot; height=&quot;56&quot; rx=&quot;8&quot; fill=&quot;#22395E&quot; /&gt;&#10;        &lt;text x=&quot;1015&quot; y=&quot;162&quot; textAnchor=&quot;middle&quot; fontSize=&quot;14&quot; fontWeight=&quot;bold&quot; fill=&quot;#FBFCFA&quot;&gt;knowledge 文档 ×22&lt;/text&gt;&#10;        &lt;text x=&quot;1015&quot; y=&quot;182&quot; textAnchor=&quot;middle&quot; fontSize=&quot;11&quot; fill=&quot;#BD9B56&quot;&gt;7 个分类（规约/装修/停车…）&lt;/text&gt;&#10;        &lt;line x1=&quot;1015&quot; y1=&quot;194&quot; x2=&quot;1015&quot; y2=&quot;206&quot; stroke=&quot;#BD9B56&quot; strokeWidth=&quot;1.2&quot; /&gt;&#10;        &lt;rect x=&quot;885&quot; y=&quot;210&quot; width=&quot;260&quot; height=&quot;56&quot; rx=&quot;8&quot; fill=&quot;rgba(34,57,94,0.06)&quot; stroke=&quot;#BD9B56&quot; strokeWidth=&quot;1.5&quot; /&gt;&#10;        &lt;text x=&quot;1015&quot; y=&quot;234&quot; textAnchor=&quot;middle&quot; fontSize=&quot;14&quot; fontWeight=&quot;bold&quot; fill=&quot;#172133&quot;&gt;chunk 切片 ×99&lt;/text&gt;&#10;        &lt;text x=&quot;1015&quot; y=&quot;254&quot; textAnchor=&quot;middle&quot; fontSize=&quot;11&quot; fill=&quot;#5F5E5A&quot;&gt;pgvector 1024 维向量&lt;/text&gt;&#10;&#10;        {/* 底部关系说明 */}&#10;        &lt;rect x=&quot;300&quot; y=&quot;290&quot; width=&quot;550&quot; height=&quot;48&quot; rx=&quot;8&quot; fill=&quot;rgba(189,155,86,0.10)&quot; /&gt;&#10;        &lt;text x=&quot;575&quot; y=&quot;318&quot; textAnchor=&quot;middle&quot; fontSize=&quot;12&quot; fill=&quot;#172133&quot;&gt;repair_order → user + house + worker · fee_bill → house + user · 外键关联&lt;/text&gt;&#10;        &lt;text x=&quot;575&quot; y=&quot;334&quot; textAnchor=&quot;middle&quot; fontSize=&quot;11&quot; fill=&quot;#5F5E5A&quot;&gt;8 个 SQL 种子文件 · 一键导入可复现&lt;/text&gt;&#10;      &lt;/g&gt;&#10;    &lt;/svg&gt;&#10;  &lt;/div&gt;&#10;  &lt;div style={{ flexShrink: 0, height: 40, display: 'flex', alignItems: 'flex-end', justifyContent: 'space-between' }}&gt;&#10;    &lt;span style={{ color: '#BD9B56', fontSize: 12, letterSpacing: '0.1em' }}&gt;云溪花园 · 智慧社区&lt;/span&gt;&#10;    &lt;span style={{ color: '#a09b8c', fontSize: 12 }}&gt;05 / 15&lt;/span&gt;&#10;  &lt;/div&gt;&#10;&lt;/Slide&gt;"/>
+        <p:cNvPr id="303" name="" descr="&lt;Slide style={{ width: '1280px', height: '720px', background: '#FBFCFA', position: 'relative', padding: '32px 64px', boxSizing: 'border-box', display: 'flex', flexDirection: 'column' }}&gt;&#10;  &lt;div style={{ flexShrink: 0 }}&gt;&#10;    &lt;div style={{ color: '#BD9B56', fontSize: 13, letterSpacing: '0.25em', marginBottom: 6 }}&gt;01 · 项目规模&lt;/div&gt;&#10;    &lt;h2 style={{ fontSize: 30, fontWeight: 'bold', color: '#172133', margin: 0, lineHeight: 1.3 }}&gt;虚拟社区数据资产：云溪花园&lt;/h2&gt;&#10;    &lt;div style={{ fontSize: 14, color: '#6b7075', marginTop: 6 }}&gt;以一个社区为根，向下延伸出空间、人员、业务、知识四类数据资产&lt;/div&gt;&#10;  &lt;/div&gt;&#10;  &lt;div style={{ flex: 1, display: 'flex', alignItems: 'center', justifyContent: 'center' }}&gt;&#10;    &lt;svg width=&quot;1150&quot; height=&quot;470&quot; viewBox=&quot;0 0 1150 470&quot;&gt;&#10;      &lt;g fontFamily=&quot;Inter, sans-serif&quot;&gt;&#10;        {/* 根节点 community */}&#10;        &lt;rect x=&quot;450&quot; y=&quot;14&quot; width=&quot;250&quot; height=&quot;58&quot; rx=&quot;10&quot; fill=&quot;#172133&quot; /&gt;&#10;        &lt;text x=&quot;575&quot; y=&quot;38&quot; textAnchor=&quot;middle&quot; fontSize=&quot;15&quot; fontWeight=&quot;bold&quot; fill=&quot;#FBFCFA&quot;&gt;community 云溪花园&lt;/text&gt;&#10;        &lt;text x=&quot;575&quot; y=&quot;58&quot; textAnchor=&quot;middle&quot; fontSize=&quot;11&quot; fill=&quot;#BD9B56&quot;&gt;1 个小区 · 上海浦东张江路1268号&lt;/text&gt;&#10;        {/* 根节点连接线 */}&#10;        &lt;line x1=&quot;575&quot; y1=&quot;72&quot; x2=&quot;575&quot; y2=&quot;92&quot; stroke=&quot;#BD9B56&quot; strokeWidth=&quot;1.5&quot; /&gt;&#10;        &lt;line x1=&quot;150&quot; y1=&quot;92&quot; x2=&quot;1015&quot; y2=&quot;92&quot; stroke=&quot;#BD9B56&quot; strokeWidth=&quot;1.5&quot; /&gt;&#10;        &lt;line x1=&quot;150&quot; y1=&quot;92&quot; x2=&quot;150&quot; y2=&quot;108&quot; stroke=&quot;#BD9B56&quot; strokeWidth=&quot;1.5&quot; /&gt;&#10;        &lt;line x1=&quot;438&quot; y1=&quot;92&quot; x2=&quot;438&quot; y2=&quot;108&quot; stroke=&quot;#BD9B56&quot; strokeWidth=&quot;1.5&quot; /&gt;&#10;        &lt;line x1=&quot;726&quot; y1=&quot;92&quot; x2=&quot;726&quot; y2=&quot;108&quot; stroke=&quot;#BD9B56&quot; strokeWidth=&quot;1.5&quot; /&gt;&#10;        &lt;line x1=&quot;1015&quot; y1=&quot;92&quot; x2=&quot;1015&quot; y2=&quot;108&quot; stroke=&quot;#BD9B56&quot; strokeWidth=&quot;1.5&quot; /&gt;&#10;&#10;        {/* 分组1：空间资产 */}&#10;        &lt;text x=&quot;150&quot; y=&quot;128&quot; textAnchor=&quot;middle&quot; fontSize=&quot;12&quot; fontWeight=&quot;bold&quot; fill=&quot;#BD9B56&quot;&gt;空间资产&lt;/text&gt;&#10;        &lt;rect x=&quot;20&quot; y=&quot;138&quot; width=&quot;260&quot; height=&quot;56&quot; rx=&quot;8&quot; fill=&quot;rgba(34,57,94,0.06)&quot; stroke=&quot;#22395E&quot; strokeWidth=&quot;1.5&quot; /&gt;&#10;        &lt;text x=&quot;150&quot; y=&quot;162&quot; textAnchor=&quot;middle&quot; fontSize=&quot;14&quot; fontWeight=&quot;bold&quot; fill=&quot;#172133&quot;&gt;building 楼栋 ×8&lt;/text&gt;&#10;        &lt;text x=&quot;150&quot; y=&quot;182&quot; textAnchor=&quot;middle&quot; fontSize=&quot;11&quot; fill=&quot;#5F5E5A&quot;&gt;每栋 26 层 · 2 单元 · 4 户/层&lt;/text&gt;&#10;        &lt;line x1=&quot;150&quot; y1=&quot;194&quot; x2=&quot;150&quot; y2=&quot;206&quot; stroke=&quot;#BD9B56&quot; strokeWidth=&quot;1.2&quot; /&gt;&#10;        &lt;rect x=&quot;20&quot; y=&quot;210&quot; width=&quot;260&quot; height=&quot;56&quot; rx=&quot;8&quot; fill=&quot;rgba(34,57,94,0.06)&quot; stroke=&quot;#22395E&quot; strokeWidth=&quot;1.5&quot; /&gt;&#10;        &lt;text x=&quot;150&quot; y=&quot;234&quot; textAnchor=&quot;middle&quot; fontSize=&quot;14&quot; fontWeight=&quot;bold&quot; fill=&quot;#172133&quot;&gt;house 房屋 ×1664&lt;/text&gt;&#10;        &lt;text x=&quot;150&quot; y=&quot;254&quot; textAnchor=&quot;middle&quot; fontSize=&quot;11&quot; fill=&quot;#5F5E5A&quot;&gt;入住约 1200 户 · 800 车位&lt;/text&gt;&#10;&#10;        {/* 分组2：人员资产 */}&#10;        &lt;text x=&quot;438&quot; y=&quot;128&quot; textAnchor=&quot;middle&quot; fontSize=&quot;12&quot; fontWeight=&quot;bold&quot; fill=&quot;#BD9B56&quot;&gt;人员资产&lt;/text&gt;&#10;        &lt;rect x=&quot;308&quot; y=&quot;138&quot; width=&quot;260&quot; height=&quot;56&quot; rx=&quot;8&quot; fill=&quot;rgba(189,155,86,0.10)&quot; stroke=&quot;#BD9B56&quot; strokeWidth=&quot;1.5&quot; /&gt;&#10;        &lt;text x=&quot;438&quot; y=&quot;162&quot; textAnchor=&quot;middle&quot; fontSize=&quot;14&quot; fontWeight=&quot;bold&quot; fill=&quot;#172133&quot;&gt;user 业主 ×200&lt;/text&gt;&#10;        &lt;text x=&quot;438&quot; y=&quot;182&quot; textAnchor=&quot;middle&quot; fontSize=&quot;11&quot; fill=&quot;#5F5E5A&quot;&gt;house_binding 绑定 200 套&lt;/text&gt;&#10;        &lt;line x1=&quot;438&quot; y1=&quot;194&quot; x2=&quot;438&quot; y2=&quot;206&quot; stroke=&quot;#BD9B56&quot; strokeWidth=&quot;1.2&quot; /&gt;&#10;        &lt;rect x=&quot;308&quot; y=&quot;210&quot; width=&quot;260&quot; height=&quot;56&quot; rx=&quot;8&quot; fill=&quot;rgba(189,155,86,0.10)&quot; stroke=&quot;#BD9B56&quot; strokeWidth=&quot;1.5&quot; /&gt;&#10;        &lt;text x=&quot;438&quot; y=&quot;234&quot; textAnchor=&quot;middle&quot; fontSize=&quot;14&quot; fontWeight=&quot;bold&quot; fill=&quot;#172133&quot;&gt;worker 物业 ×75&lt;/text&gt;&#10;        &lt;text x=&quot;438&quot; y=&quot;254&quot; textAnchor=&quot;middle&quot; fontSize=&quot;11&quot; fill=&quot;#5F5E5A&quot;&gt;10 管理 / 15 维修 / 50 一线&lt;/text&gt;&#10;&#10;        {/* 分组3：业务数据 */}&#10;        &lt;text x=&quot;726&quot; y=&quot;128&quot; textAnchor=&quot;middle&quot; fontSize=&quot;12&quot; fontWeight=&quot;bold&quot; fill=&quot;#BD9B56&quot;&gt;业务数据&lt;/text&gt;&#10;        &lt;rect x=&quot;596&quot; y=&quot;138&quot; width=&quot;260&quot; height=&quot;40&quot; rx=&quot;8&quot; fill=&quot;rgba(34,57,94,0.06)&quot; stroke=&quot;#22395E&quot; strokeWidth=&quot;1.5&quot; /&gt;&#10;        &lt;text x=&quot;726&quot; y=&quot;163&quot; textAnchor=&quot;middle&quot; fontSize=&quot;13&quot; fontWeight=&quot;bold&quot; fill=&quot;#172133&quot;&gt;repair_order 工单 ×50&lt;/text&gt;&#10;        &lt;rect x=&quot;596&quot; y=&quot;186&quot; width=&quot;260&quot; height=&quot;40&quot; rx=&quot;8&quot; fill=&quot;rgba(34,57,94,0.06)&quot; stroke=&quot;#22395E&quot; strokeWidth=&quot;1.5&quot; /&gt;&#10;        &lt;text x=&quot;726&quot; y=&quot;211&quot; textAnchor=&quot;middle&quot; fontSize=&quot;13&quot; fontWeight=&quot;bold&quot; fill=&quot;#172133&quot;&gt;fee_bill 账单 ×746&lt;/text&gt;&#10;        &lt;rect x=&quot;596&quot; y=&quot;234&quot; width=&quot;260&quot; height=&quot;40&quot; rx=&quot;8&quot; fill=&quot;rgba(34,57,94,0.06)&quot; stroke=&quot;#22395E&quot; strokeWidth=&quot;1.5&quot; /&gt;&#10;        &lt;text x=&quot;726&quot; y=&quot;259&quot; textAnchor=&quot;middle&quot; fontSize=&quot;13&quot; fontWeight=&quot;bold&quot; fill=&quot;#172133&quot;&gt;notice 公告 ×24&lt;/text&gt;&#10;&#10;        {/* 分组4：知识资产 */}&#10;        &lt;text x=&quot;1015&quot; y=&quot;128&quot; textAnchor=&quot;middle&quot; fontSize=&quot;12&quot; fontWeight=&quot;bold&quot; fill=&quot;#BD9B56&quot;&gt;知识资产&lt;/text&gt;&#10;        &lt;rect x=&quot;885&quot; y=&quot;138&quot; width=&quot;260&quot; height=&quot;56&quot; rx=&quot;8&quot; fill=&quot;#22395E&quot; /&gt;&#10;        &lt;text x=&quot;1015&quot; y=&quot;162&quot; textAnchor=&quot;middle&quot; fontSize=&quot;14&quot; fontWeight=&quot;bold&quot; fill=&quot;#FBFCFA&quot;&gt;knowledge 文档 ×22&lt;/text&gt;&#10;        &lt;text x=&quot;1015&quot; y=&quot;182&quot; textAnchor=&quot;middle&quot; fontSize=&quot;11&quot; fill=&quot;#BD9B56&quot;&gt;7 个分类（规约/装修/停车…）&lt;/text&gt;&#10;        &lt;line x1=&quot;1015&quot; y1=&quot;194&quot; x2=&quot;1015&quot; y2=&quot;206&quot; stroke=&quot;#BD9B56&quot; strokeWidth=&quot;1.2&quot; /&gt;&#10;        &lt;rect x=&quot;885&quot; y=&quot;210&quot; width=&quot;260&quot; height=&quot;56&quot; rx=&quot;8&quot; fill=&quot;rgba(34,57,94,0.06)&quot; stroke=&quot;#BD9B56&quot; strokeWidth=&quot;1.5&quot; /&gt;&#10;        &lt;text x=&quot;1015&quot; y=&quot;234&quot; textAnchor=&quot;middle&quot; fontSize=&quot;14&quot; fontWeight=&quot;bold&quot; fill=&quot;#172133&quot;&gt;chunk 切片 ×99&lt;/text&gt;&#10;        &lt;text x=&quot;1015&quot; y=&quot;254&quot; textAnchor=&quot;middle&quot; fontSize=&quot;11&quot; fill=&quot;#5F5E5A&quot;&gt;pgvector 1024 维向量&lt;/text&gt;&#10;&#10;        {/* 底部关系说明 */}&#10;        &lt;rect x=&quot;300&quot; y=&quot;290&quot; width=&quot;550&quot; height=&quot;48&quot; rx=&quot;8&quot; fill=&quot;rgba(189,155,86,0.10)&quot; /&gt;&#10;        &lt;text x=&quot;575&quot; y=&quot;318&quot; textAnchor=&quot;middle&quot; fontSize=&quot;12&quot; fill=&quot;#172133&quot;&gt;repair_order → user + house + worker · fee_bill → house + user · 外键关联&lt;/text&gt;&#10;        &lt;text x=&quot;575&quot; y=&quot;334&quot; textAnchor=&quot;middle&quot; fontSize=&quot;11&quot; fill=&quot;#5F5E5A&quot;&gt;8 个 SQL 种子文件 · 一键导入可复现&lt;/text&gt;&#10;      &lt;/g&gt;&#10;    &lt;/svg&gt;&#10;  &lt;/div&gt;&#10;  &lt;div style={{ flexShrink: 0, height: 40, display: 'flex', alignItems: 'flex-end', justifyContent: 'space-between' }}&gt;&#10;    &lt;span style={{ color: '#BD9B56', fontSize: 12, letterSpacing: '0.1em' }}&gt;云溪花园 · 智慧社区&lt;/span&gt;&#10;    &lt;span style={{ color: '#a09b8c', fontSize: 12 }}&gt;05 / 15&lt;/span&gt;&#10;  &lt;/div&gt;&#10;&lt;/Slide&gt;"/>
         <p:cNvGrpSpPr/>
         <p:nvPr/>
       </p:nvGrpSpPr>
@@ -13167,7 +14289,7 @@
       </p:grpSpPr>
       <p:sp>
         <p:nvSpPr>
-          <p:cNvPr id="283" name=""/>
+          <p:cNvPr id="304" name=""/>
           <p:cNvSpPr/>
           <p:nvPr/>
         </p:nvSpPr>
@@ -13191,7 +14313,7 @@
       </p:sp>
       <p:sp>
         <p:nvSpPr>
-          <p:cNvPr id="284" name="" descr="{&quot;isTemplate&quot;:true,&quot;type&quot;:&quot;text&quot;}"/>
+          <p:cNvPr id="305" name="" descr="{&quot;isTemplate&quot;:true,&quot;type&quot;:&quot;text&quot;}"/>
           <p:cNvSpPr txBox="1"/>
           <p:nvPr/>
         </p:nvSpPr>
@@ -13236,7 +14358,7 @@
       </p:sp>
       <p:sp>
         <p:nvSpPr>
-          <p:cNvPr id="285" name="" descr="{&quot;isTemplate&quot;:true,&quot;type&quot;:&quot;text&quot;}"/>
+          <p:cNvPr id="306" name="" descr="{&quot;isTemplate&quot;:true,&quot;type&quot;:&quot;text&quot;}"/>
           <p:cNvSpPr txBox="1"/>
           <p:nvPr/>
         </p:nvSpPr>
@@ -13271,7 +14393,7 @@
       </p:sp>
       <p:sp>
         <p:nvSpPr>
-          <p:cNvPr id="286" name="" descr="{&quot;isTemplate&quot;:true,&quot;type&quot;:&quot;text&quot;}"/>
+          <p:cNvPr id="307" name="" descr="{&quot;isTemplate&quot;:true,&quot;type&quot;:&quot;text&quot;}"/>
           <p:cNvSpPr txBox="1"/>
           <p:nvPr/>
         </p:nvSpPr>
@@ -13306,7 +14428,7 @@
       </p:sp>
       <p:pic>
         <p:nvPicPr>
-          <p:cNvPr id="287" name=""/>
+          <p:cNvPr id="308" name=""/>
           <p:cNvPicPr>
             <a:picLocks noChangeAspect="1"/>
           </p:cNvPicPr>
@@ -13337,7 +14459,7 @@
       </p:pic>
       <p:sp>
         <p:nvSpPr>
-          <p:cNvPr id="288" name="" descr="{&quot;isTemplate&quot;:true,&quot;type&quot;:&quot;text&quot;}"/>
+          <p:cNvPr id="309" name="" descr="{&quot;isTemplate&quot;:true,&quot;type&quot;:&quot;text&quot;}"/>
           <p:cNvSpPr txBox="1"/>
           <p:nvPr/>
         </p:nvSpPr>
@@ -13392,7 +14514,7 @@
       </p:sp>
       <p:sp>
         <p:nvSpPr>
-          <p:cNvPr id="289" name="" descr="{&quot;isTemplate&quot;:true,&quot;type&quot;:&quot;text&quot;}"/>
+          <p:cNvPr id="310" name="" descr="{&quot;isTemplate&quot;:true,&quot;type&quot;:&quot;text&quot;}"/>
           <p:cNvSpPr txBox="1"/>
           <p:nvPr/>
         </p:nvSpPr>
@@ -13435,7 +14557,7 @@
   <p:cSld>
     <p:spTree>
       <p:nvGrpSpPr>
-        <p:cNvPr id="290" name="" descr="&lt;Slide style={{ width: '1280px', height: '720px', background: '#FBFCFA', position: 'relative', padding: '40px 64px', boxSizing: 'border-box', display: 'flex', flexDirection: 'column' }}&gt;&#10;  &lt;div style={{ flexShrink: 0 }}&gt;&#10;    &lt;div style={{ color: '#BD9B56', fontSize: 13, letterSpacing: '0.25em', marginBottom: 8 }}&gt;02 · 技术构建过程&lt;/div&gt;&#10;    &lt;h2 style={{ fontSize: 30, fontWeight: 'bold', color: '#172133', margin: 0, lineHeight: 1.3 }}&gt;技术架构：六层分离的 AI Native 系统&lt;/h2&gt;&#10;  &lt;/div&gt;&#10;  &lt;div style={{ flex: 1, display: 'flex', alignItems: 'center', gap: 32 }}&gt;&#10;    &lt;div style={{ flex: '0 0 620px', background: '#fff', borderRadius: 12, padding: '22px 24px', boxShadow: '0 6px 24px rgba(23,33,51,0.08)' }}&gt;&#10;      &lt;svg width=&quot;572&quot; height=&quot;470&quot; viewBox=&quot;0 0 572 470&quot;&gt;&#10;        &lt;defs&gt;&#10;          &lt;marker id=&quot;ar6&quot; viewBox=&quot;0 0 10 10&quot; refX=&quot;9&quot; refY=&quot;5&quot; markerWidth=&quot;6&quot; markerHeight=&quot;6&quot; orient=&quot;auto&quot;&gt;&#10;            &lt;path d=&quot;M0 0L10 5L0 10z&quot; fill=&quot;#22395E&quot; /&gt;&#10;          &lt;/marker&gt;&#10;        &lt;/defs&gt;&#10;        &lt;g fontFamily=&quot;Inter, sans-serif&quot;&gt;&#10;          &lt;rect x=&quot;36&quot; y=&quot;18&quot; width=&quot;500&quot; height=&quot;52&quot; rx=&quot;6&quot; fill=&quot;#F5F8F8&quot; stroke=&quot;#22395E&quot; strokeWidth=&quot;1.5&quot; /&gt;&#10;          &lt;text x=&quot;286&quot; y=&quot;49&quot; textAnchor=&quot;middle&quot; fontSize=&quot;14&quot; fontWeight=&quot;bold&quot; fill=&quot;#172133&quot;&gt;客户端 · 业主 / 物业 / 维修 三端&lt;/text&gt;&#10;          &lt;line x1=&quot;286&quot; y1=&quot;70&quot; x2=&quot;286&quot; y2=&quot;92&quot; stroke=&quot;#22395E&quot; strokeWidth=&quot;1.2&quot; markerEnd=&quot;url(#ar6)&quot; /&gt;&#10;          &lt;rect x=&quot;36&quot; y=&quot;96&quot; width=&quot;500&quot; height=&quot;48&quot; rx=&quot;6&quot; fill=&quot;#F5F8F8&quot; stroke=&quot;#22395E&quot; strokeWidth=&quot;1.5&quot; /&gt;&#10;          &lt;text x=&quot;286&quot; y=&quot;125&quot; textAnchor=&quot;middle&quot; fontSize=&quot;14&quot; fontWeight=&quot;bold&quot; fill=&quot;#172133&quot;&gt;API 网关 · FastAPI&lt;/text&gt;&#10;          &lt;line x1=&quot;286&quot; y1=&quot;144&quot; x2=&quot;286&quot; y2=&quot;166&quot; stroke=&quot;#22395E&quot; strokeWidth=&quot;1.2&quot; markerEnd=&quot;url(#ar6)&quot; /&gt;&#10;          &lt;rect x=&quot;36&quot; y=&quot;170&quot; width=&quot;500&quot; height=&quot;70&quot; rx=&quot;6&quot; fill=&quot;rgba(34,57,94,0.08)&quot; stroke=&quot;#22395E&quot; strokeWidth=&quot;2&quot; /&gt;&#10;          &lt;text x=&quot;64&quot; y=&quot;196&quot; fontSize=&quot;13&quot; fontWeight=&quot;bold&quot; fill=&quot;#BD9B56&quot;&gt;AI Agent 层&lt;/text&gt;&#10;          &lt;text x=&quot;286&quot; y=&quot;218&quot; textAnchor=&quot;middle&quot; fontSize=&quot;14&quot; fontWeight=&quot;bold&quot; fill=&quot;#172133&quot;&gt;Router Agent + 领域 Agent + 工具调用&lt;/text&gt;&#10;          &lt;line x1=&quot;286&quot; y1=&quot;240&quot; x2=&quot;286&quot; y2=&quot;262&quot; stroke=&quot;#22395E&quot; strokeWidth=&quot;1.2&quot; markerEnd=&quot;url(#ar6)&quot; /&gt;&#10;          &lt;rect x=&quot;36&quot; y=&quot;266&quot; width=&quot;500&quot; height=&quot;56&quot; rx=&quot;6&quot; fill=&quot;rgba(189,155,86,0.08)&quot; stroke=&quot;#BD9B56&quot; strokeWidth=&quot;1.5&quot; /&gt;&#10;          &lt;text x=&quot;64&quot; y=&quot;290&quot; fontSize=&quot;13&quot; fontWeight=&quot;bold&quot; fill=&quot;#BD9B56&quot;&gt;业务服务层&lt;/text&gt;&#10;          &lt;text x=&quot;286&quot; y=&quot;312&quot; textAnchor=&quot;middle&quot; fontSize=&quot;14&quot; fontWeight=&quot;bold&quot; fill=&quot;#172133&quot;&gt;工单 · 费用 · 巡检 · 通知 · 反馈 · 知识库&lt;/text&gt;&#10;          &lt;line x1=&quot;286&quot; y1=&quot;322&quot; x2=&quot;286&quot; y2=&quot;344&quot; stroke=&quot;#22395E&quot; strokeWidth=&quot;1.2&quot; markerEnd=&quot;url(#ar6)&quot; /&gt;&#10;          &lt;rect x=&quot;36&quot; y=&quot;348&quot; width=&quot;240&quot; height=&quot;60&quot; rx=&quot;6&quot; fill=&quot;#F5F8F8&quot; stroke=&quot;#22395E&quot; strokeWidth=&quot;1.5&quot; /&gt;&#10;          &lt;text x=&quot;156&quot; y=&quot;374&quot; textAnchor=&quot;middle&quot; fontSize=&quot;13&quot; fontWeight=&quot;bold&quot; fill=&quot;#BD9B56&quot;&gt;PostgreSQL + pgvector&lt;/text&gt;&#10;          &lt;text x=&quot;156&quot; y=&quot;394&quot; textAnchor=&quot;middle&quot; fontSize=&quot;11&quot; fill=&quot;#5F5E5A&quot;&gt;事务数据 + 向量检索&lt;/text&gt;&#10;          &lt;rect x=&quot;296&quot; y=&quot;348&quot; width=&quot;240&quot; height=&quot;60&quot; rx=&quot;6&quot; fill=&quot;#F5F8F8&quot; stroke=&quot;#22395E&quot; strokeWidth=&quot;1.5&quot; /&gt;&#10;          &lt;text x=&quot;416&quot; y=&quot;374&quot; textAnchor=&quot;middle&quot; fontSize=&quot;13&quot; fontWeight=&quot;bold&quot; fill=&quot;#BD9B56&quot;&gt;Redis + 智谱 GLM&lt;/text&gt;&#10;          &lt;text x=&quot;416&quot; y=&quot;394&quot; textAnchor=&quot;middle&quot; fontSize=&quot;11&quot; fill=&quot;#5F5E5A&quot;&gt;缓存 · LLM · embedding&lt;/text&gt;&#10;        &lt;/g&gt;&#10;      &lt;/svg&gt;&#10;    &lt;/div&gt;&#10;    &lt;div style={{ flex: 1, display: 'flex', flexDirection: 'column', gap: 18 }}&gt;&#10;      &lt;div&gt;&#10;        &lt;div style={{ fontSize: 14, color: '#BD9B56', fontWeight: 'bold', letterSpacing: '0.1em', marginBottom: 6 }}&gt;1.  Agent 与业务解耦&lt;/div&gt;&#10;        &lt;p style={{ fontSize: 14, color: '#5F5E5A', margin: 0, lineHeight: 1.65 }}&gt;AI Agent 只负责理解意图、编排工具，不直接操作数据库，严守 Agent → Tool → Service → Repository → Database 分层，杜绝 LLM 直连 SQL 的风险。&lt;/p&gt;&#10;      &lt;/div&gt;&#10;      &lt;div&gt;&#10;        &lt;div style={{ fontSize: 14, color: '#BD9B56', fontWeight: 'bold', letterSpacing: '0.1em', marginBottom: 6 }}&gt;2.  pgvector 一库双角色&lt;/div&gt;&#10;        &lt;p style={{ fontSize: 14, color: '#5F5E5A', margin: 0, lineHeight: 1.65 }}&gt;PostgreSQL 同时承载业务数据（工单、费用）和向量数据（知识切片），无需额外向量数据库，降低部署与运维复杂度。&lt;/p&gt;&#10;      &lt;/div&gt;&#10;      &lt;div&gt;&#10;        &lt;div style={{ fontSize: 14, color: '#BD9B56', fontWeight: 'bold', letterSpacing: '0.1em', marginBottom: 6 }}&gt;3.  可观测可评估&lt;/div&gt;&#10;        &lt;p style={{ fontSize: 14, color: '#5F5E5A', margin: 0, lineHeight: 1.65 }}&gt;每次 AI 对话的意图、工具调用、结果全程记录，可回放、可追踪，支撑后续的量化评估与持续迭代。&lt;/p&gt;&#10;      &lt;/div&gt;&#10;    &lt;/div&gt;&#10;  &lt;/div&gt;&#10;  &lt;div style={{ flexShrink: 0, height: 40, display: 'flex', alignItems: 'flex-end', justifyContent: 'space-between' }}&gt;&#10;    &lt;span style={{ color: '#BD9B56', fontSize: 12, letterSpacing: '0.1em' }}&gt;云溪花园 · 智慧社区&lt;/span&gt;&#10;    &lt;span style={{ color: '#a09b8c', fontSize: 12 }}&gt;06 / 15&lt;/span&gt;&#10;  &lt;/div&gt;&#10;&lt;/Slide&gt;"/>
+        <p:cNvPr id="311" name="" descr="&lt;Slide style={{ width: '1280px', height: '720px', background: '#FBFCFA', position: 'relative', padding: '40px 64px', boxSizing: 'border-box', display: 'flex', flexDirection: 'column' }}&gt;&#10;  &lt;div style={{ flexShrink: 0 }}&gt;&#10;    &lt;div style={{ color: '#BD9B56', fontSize: 13, letterSpacing: '0.25em', marginBottom: 8 }}&gt;02 · 技术构建过程&lt;/div&gt;&#10;    &lt;h2 style={{ fontSize: 30, fontWeight: 'bold', color: '#172133', margin: 0, lineHeight: 1.3 }}&gt;技术架构：六层分离的 AI Native 系统&lt;/h2&gt;&#10;  &lt;/div&gt;&#10;  &lt;div style={{ flex: 1, display: 'flex', alignItems: 'center', gap: 32 }}&gt;&#10;    &lt;div style={{ flex: '0 0 620px', background: '#fff', borderRadius: 12, padding: '22px 24px', boxShadow: '0 6px 24px rgba(23,33,51,0.08)' }}&gt;&#10;      &lt;svg width=&quot;572&quot; height=&quot;470&quot; viewBox=&quot;0 0 572 470&quot;&gt;&#10;        &lt;defs&gt;&#10;          &lt;marker id=&quot;ar6&quot; viewBox=&quot;0 0 10 10&quot; refX=&quot;9&quot; refY=&quot;5&quot; markerWidth=&quot;6&quot; markerHeight=&quot;6&quot; orient=&quot;auto&quot;&gt;&#10;            &lt;path d=&quot;M0 0L10 5L0 10z&quot; fill=&quot;#22395E&quot; /&gt;&#10;          &lt;/marker&gt;&#10;        &lt;/defs&gt;&#10;        &lt;g fontFamily=&quot;Inter, sans-serif&quot;&gt;&#10;          &lt;rect x=&quot;36&quot; y=&quot;18&quot; width=&quot;500&quot; height=&quot;52&quot; rx=&quot;6&quot; fill=&quot;#F5F8F8&quot; stroke=&quot;#22395E&quot; strokeWidth=&quot;1.5&quot; /&gt;&#10;          &lt;text x=&quot;286&quot; y=&quot;49&quot; textAnchor=&quot;middle&quot; fontSize=&quot;14&quot; fontWeight=&quot;bold&quot; fill=&quot;#172133&quot;&gt;客户端 · 业主 / 物业 / 维修 三端&lt;/text&gt;&#10;          &lt;line x1=&quot;286&quot; y1=&quot;70&quot; x2=&quot;286&quot; y2=&quot;92&quot; stroke=&quot;#22395E&quot; strokeWidth=&quot;1.2&quot; markerEnd=&quot;url(#ar6)&quot; /&gt;&#10;          &lt;rect x=&quot;36&quot; y=&quot;96&quot; width=&quot;500&quot; height=&quot;48&quot; rx=&quot;6&quot; fill=&quot;#F5F8F8&quot; stroke=&quot;#22395E&quot; strokeWidth=&quot;1.5&quot; /&gt;&#10;          &lt;text x=&quot;286&quot; y=&quot;125&quot; textAnchor=&quot;middle&quot; fontSize=&quot;14&quot; fontWeight=&quot;bold&quot; fill=&quot;#172133&quot;&gt;API 网关 · FastAPI&lt;/text&gt;&#10;          &lt;line x1=&quot;286&quot; y1=&quot;144&quot; x2=&quot;286&quot; y2=&quot;166&quot; stroke=&quot;#22395E&quot; strokeWidth=&quot;1.2&quot; markerEnd=&quot;url(#ar6)&quot; /&gt;&#10;          &lt;rect x=&quot;36&quot; y=&quot;170&quot; width=&quot;500&quot; height=&quot;70&quot; rx=&quot;6&quot; fill=&quot;rgba(34,57,94,0.08)&quot; stroke=&quot;#22395E&quot; strokeWidth=&quot;2&quot; /&gt;&#10;          &lt;text x=&quot;64&quot; y=&quot;196&quot; fontSize=&quot;13&quot; fontWeight=&quot;bold&quot; fill=&quot;#BD9B56&quot;&gt;AI Agent 层&lt;/text&gt;&#10;          &lt;text x=&quot;286&quot; y=&quot;218&quot; textAnchor=&quot;middle&quot; fontSize=&quot;14&quot; fontWeight=&quot;bold&quot; fill=&quot;#172133&quot;&gt;Router Agent + 领域 Agent + 工具调用&lt;/text&gt;&#10;          &lt;line x1=&quot;286&quot; y1=&quot;240&quot; x2=&quot;286&quot; y2=&quot;262&quot; stroke=&quot;#22395E&quot; strokeWidth=&quot;1.2&quot; markerEnd=&quot;url(#ar6)&quot; /&gt;&#10;          &lt;rect x=&quot;36&quot; y=&quot;266&quot; width=&quot;500&quot; height=&quot;56&quot; rx=&quot;6&quot; fill=&quot;rgba(189,155,86,0.08)&quot; stroke=&quot;#BD9B56&quot; strokeWidth=&quot;1.5&quot; /&gt;&#10;          &lt;text x=&quot;64&quot; y=&quot;290&quot; fontSize=&quot;13&quot; fontWeight=&quot;bold&quot; fill=&quot;#BD9B56&quot;&gt;业务服务层&lt;/text&gt;&#10;          &lt;text x=&quot;286&quot; y=&quot;312&quot; textAnchor=&quot;middle&quot; fontSize=&quot;14&quot; fontWeight=&quot;bold&quot; fill=&quot;#172133&quot;&gt;工单 · 费用 · 巡检 · 通知 · 反馈 · 知识库&lt;/text&gt;&#10;          &lt;line x1=&quot;286&quot; y1=&quot;322&quot; x2=&quot;286&quot; y2=&quot;344&quot; stroke=&quot;#22395E&quot; strokeWidth=&quot;1.2&quot; markerEnd=&quot;url(#ar6)&quot; /&gt;&#10;          &lt;rect x=&quot;36&quot; y=&quot;348&quot; width=&quot;240&quot; height=&quot;60&quot; rx=&quot;6&quot; fill=&quot;#F5F8F8&quot; stroke=&quot;#22395E&quot; strokeWidth=&quot;1.5&quot; /&gt;&#10;          &lt;text x=&quot;156&quot; y=&quot;374&quot; textAnchor=&quot;middle&quot; fontSize=&quot;13&quot; fontWeight=&quot;bold&quot; fill=&quot;#BD9B56&quot;&gt;PostgreSQL + pgvector&lt;/text&gt;&#10;          &lt;text x=&quot;156&quot; y=&quot;394&quot; textAnchor=&quot;middle&quot; fontSize=&quot;11&quot; fill=&quot;#5F5E5A&quot;&gt;事务数据 + 向量检索&lt;/text&gt;&#10;          &lt;rect x=&quot;296&quot; y=&quot;348&quot; width=&quot;240&quot; height=&quot;60&quot; rx=&quot;6&quot; fill=&quot;#F5F8F8&quot; stroke=&quot;#22395E&quot; strokeWidth=&quot;1.5&quot; /&gt;&#10;          &lt;text x=&quot;416&quot; y=&quot;374&quot; textAnchor=&quot;middle&quot; fontSize=&quot;13&quot; fontWeight=&quot;bold&quot; fill=&quot;#BD9B56&quot;&gt;Redis + 智谱 GLM&lt;/text&gt;&#10;          &lt;text x=&quot;416&quot; y=&quot;394&quot; textAnchor=&quot;middle&quot; fontSize=&quot;11&quot; fill=&quot;#5F5E5A&quot;&gt;缓存 · LLM · embedding&lt;/text&gt;&#10;        &lt;/g&gt;&#10;      &lt;/svg&gt;&#10;    &lt;/div&gt;&#10;    &lt;div style={{ flex: 1, display: 'flex', flexDirection: 'column', gap: 18 }}&gt;&#10;      &lt;div&gt;&#10;        &lt;div style={{ fontSize: 14, color: '#BD9B56', fontWeight: 'bold', letterSpacing: '0.1em', marginBottom: 6 }}&gt;1.  Agent 与业务解耦&lt;/div&gt;&#10;        &lt;p style={{ fontSize: 14, color: '#5F5E5A', margin: 0, lineHeight: 1.65 }}&gt;AI Agent 只负责理解意图、编排工具，不直接操作数据库，严守 Agent → Tool → Service → Repository → Database 分层，杜绝 LLM 直连 SQL 的风险。&lt;/p&gt;&#10;      &lt;/div&gt;&#10;      &lt;div&gt;&#10;        &lt;div style={{ fontSize: 14, color: '#BD9B56', fontWeight: 'bold', letterSpacing: '0.1em', marginBottom: 6 }}&gt;2.  pgvector 一库双角色&lt;/div&gt;&#10;        &lt;p style={{ fontSize: 14, color: '#5F5E5A', margin: 0, lineHeight: 1.65 }}&gt;PostgreSQL 同时承载业务数据（工单、费用）和向量数据（知识切片），无需额外向量数据库，降低部署与运维复杂度。&lt;/p&gt;&#10;      &lt;/div&gt;&#10;      &lt;div&gt;&#10;        &lt;div style={{ fontSize: 14, color: '#BD9B56', fontWeight: 'bold', letterSpacing: '0.1em', marginBottom: 6 }}&gt;3.  可观测可评估&lt;/div&gt;&#10;        &lt;p style={{ fontSize: 14, color: '#5F5E5A', margin: 0, lineHeight: 1.65 }}&gt;每次 AI 对话的意图、工具调用、结果全程记录，可回放、可追踪，支撑后续的量化评估与持续迭代。&lt;/p&gt;&#10;      &lt;/div&gt;&#10;    &lt;/div&gt;&#10;  &lt;/div&gt;&#10;  &lt;div style={{ flexShrink: 0, height: 40, display: 'flex', alignItems: 'flex-end', justifyContent: 'space-between' }}&gt;&#10;    &lt;span style={{ color: '#BD9B56', fontSize: 12, letterSpacing: '0.1em' }}&gt;云溪花园 · 智慧社区&lt;/span&gt;&#10;    &lt;span style={{ color: '#a09b8c', fontSize: 12 }}&gt;06 / 15&lt;/span&gt;&#10;  &lt;/div&gt;&#10;&lt;/Slide&gt;"/>
         <p:cNvGrpSpPr/>
         <p:nvPr/>
       </p:nvGrpSpPr>
@@ -13449,7 +14571,7 @@
       </p:grpSpPr>
       <p:sp>
         <p:nvSpPr>
-          <p:cNvPr id="291" name=""/>
+          <p:cNvPr id="312" name=""/>
           <p:cNvSpPr/>
           <p:nvPr/>
         </p:nvSpPr>
@@ -13473,7 +14595,7 @@
       </p:sp>
       <p:sp>
         <p:nvSpPr>
-          <p:cNvPr id="292" name="" descr="{&quot;isTemplate&quot;:true,&quot;type&quot;:&quot;text&quot;}"/>
+          <p:cNvPr id="313" name="" descr="{&quot;isTemplate&quot;:true,&quot;type&quot;:&quot;text&quot;}"/>
           <p:cNvSpPr txBox="1"/>
           <p:nvPr/>
         </p:nvSpPr>
@@ -13518,7 +14640,7 @@
       </p:sp>
       <p:sp>
         <p:nvSpPr>
-          <p:cNvPr id="293" name="" descr="{&quot;isTemplate&quot;:true,&quot;type&quot;:&quot;text&quot;}"/>
+          <p:cNvPr id="314" name="" descr="{&quot;isTemplate&quot;:true,&quot;type&quot;:&quot;text&quot;}"/>
           <p:cNvSpPr txBox="1"/>
           <p:nvPr/>
         </p:nvSpPr>
@@ -13573,7 +14695,7 @@
       </p:sp>
       <p:sp>
         <p:nvSpPr>
-          <p:cNvPr id="294" name=""/>
+          <p:cNvPr id="315" name=""/>
           <p:cNvSpPr/>
           <p:nvPr/>
         </p:nvSpPr>
@@ -13606,7 +14728,7 @@
       </p:sp>
       <p:pic>
         <p:nvPicPr>
-          <p:cNvPr id="295" name=""/>
+          <p:cNvPr id="316" name=""/>
           <p:cNvPicPr>
             <a:picLocks noChangeAspect="1"/>
           </p:cNvPicPr>
@@ -13637,7 +14759,7 @@
       </p:pic>
       <p:sp>
         <p:nvSpPr>
-          <p:cNvPr id="296" name="" descr="{&quot;isTemplate&quot;:true,&quot;type&quot;:&quot;text&quot;}"/>
+          <p:cNvPr id="317" name="" descr="{&quot;isTemplate&quot;:true,&quot;type&quot;:&quot;text&quot;}"/>
           <p:cNvSpPr txBox="1"/>
           <p:nvPr/>
         </p:nvSpPr>
@@ -13682,7 +14804,7 @@
       </p:sp>
       <p:sp>
         <p:nvSpPr>
-          <p:cNvPr id="297" name="" descr="{&quot;isTemplate&quot;:true,&quot;type&quot;:&quot;text&quot;}"/>
+          <p:cNvPr id="318" name="" descr="{&quot;isTemplate&quot;:true,&quot;type&quot;:&quot;text&quot;}"/>
           <p:cNvSpPr txBox="1"/>
           <p:nvPr/>
         </p:nvSpPr>
@@ -13789,7 +14911,7 @@
       </p:sp>
       <p:sp>
         <p:nvSpPr>
-          <p:cNvPr id="298" name="" descr="{&quot;isTemplate&quot;:true,&quot;type&quot;:&quot;text&quot;}"/>
+          <p:cNvPr id="319" name="" descr="{&quot;isTemplate&quot;:true,&quot;type&quot;:&quot;text&quot;}"/>
           <p:cNvSpPr txBox="1"/>
           <p:nvPr/>
         </p:nvSpPr>
@@ -13834,7 +14956,7 @@
       </p:sp>
       <p:sp>
         <p:nvSpPr>
-          <p:cNvPr id="299" name="" descr="{&quot;isTemplate&quot;:true,&quot;type&quot;:&quot;text&quot;}"/>
+          <p:cNvPr id="320" name="" descr="{&quot;isTemplate&quot;:true,&quot;type&quot;:&quot;text&quot;}"/>
           <p:cNvSpPr txBox="1"/>
           <p:nvPr/>
         </p:nvSpPr>
@@ -13881,7 +15003,7 @@
       </p:sp>
       <p:sp>
         <p:nvSpPr>
-          <p:cNvPr id="300" name="" descr="{&quot;isTemplate&quot;:true,&quot;type&quot;:&quot;text&quot;}"/>
+          <p:cNvPr id="321" name="" descr="{&quot;isTemplate&quot;:true,&quot;type&quot;:&quot;text&quot;}"/>
           <p:cNvSpPr txBox="1"/>
           <p:nvPr/>
         </p:nvSpPr>
@@ -13926,7 +15048,7 @@
       </p:sp>
       <p:sp>
         <p:nvSpPr>
-          <p:cNvPr id="301" name="" descr="{&quot;isTemplate&quot;:true,&quot;type&quot;:&quot;text&quot;}"/>
+          <p:cNvPr id="322" name="" descr="{&quot;isTemplate&quot;:true,&quot;type&quot;:&quot;text&quot;}"/>
           <p:cNvSpPr txBox="1"/>
           <p:nvPr/>
         </p:nvSpPr>
@@ -13983,7 +15105,7 @@
       </p:sp>
       <p:sp>
         <p:nvSpPr>
-          <p:cNvPr id="302" name="" descr="{&quot;isTemplate&quot;:true,&quot;type&quot;:&quot;text&quot;}"/>
+          <p:cNvPr id="323" name="" descr="{&quot;isTemplate&quot;:true,&quot;type&quot;:&quot;text&quot;}"/>
           <p:cNvSpPr txBox="1"/>
           <p:nvPr/>
         </p:nvSpPr>
@@ -14038,7 +15160,7 @@
       </p:sp>
       <p:sp>
         <p:nvSpPr>
-          <p:cNvPr id="303" name="" descr="{&quot;isTemplate&quot;:true,&quot;type&quot;:&quot;text&quot;}"/>
+          <p:cNvPr id="324" name="" descr="{&quot;isTemplate&quot;:true,&quot;type&quot;:&quot;text&quot;}"/>
           <p:cNvSpPr txBox="1"/>
           <p:nvPr/>
         </p:nvSpPr>
@@ -14081,7 +15203,7 @@
   <p:cSld>
     <p:spTree>
       <p:nvGrpSpPr>
-        <p:cNvPr id="304" name="" descr="&lt;Slide style={{ width: '1280px', height: '720px', background: '#FBFCFA', position: 'relative', padding: '32px 64px', boxSizing: 'border-box', display: 'flex', flexDirection: 'column' }}&gt;&#10;  &lt;div style={{ flexShrink: 0 }}&gt;&#10;    &lt;div style={{ color: '#BD9B56', fontSize: 13, letterSpacing: '0.25em', marginBottom: 6 }}&gt;02 · 技术构建过程&lt;/div&gt;&#10;    &lt;h2 style={{ fontSize: 30, fontWeight: 'bold', color: '#172133', margin: 0, lineHeight: 1.3 }}&gt;数据库设计：15+ 张表承载整个社区&lt;/h2&gt;&#10;    &lt;div style={{ fontSize: 14, color: '#6b7075', marginTop: 6 }}&gt;数据库是系统地基，通过外键建立完整 ER 关系，覆盖社区到知识库的全部实体&lt;/div&gt;&#10;  &lt;/div&gt;&#10;  &lt;div style={{ flex: 1, display: 'flex', alignItems: 'center', minHeight: 0, gap: 28 }}&gt;&#10;    &lt;div style={{ flex: '0 0 320px', background: 'linear-gradient(135deg, #172133 0%, #22395E 100%)', borderRadius: 12, padding: '24px 24px', color: '#FBFCFA' }}&gt;&#10;      &lt;div style={{ color: '#BD9B56', fontSize: 12, letterSpacing: '0.25em', marginBottom: 12 }}&gt;CORE ENTITIES&lt;/div&gt;&#10;      &lt;div style={{ fontSize: 14, color: 'rgba(251,252,250,0.9)', lineHeight: 1.9 }}&gt;&#10;        community 社区&lt;br/&gt;&#10;        building 楼栋（8）&lt;br/&gt;&#10;        house 房屋（1664）&lt;br/&gt;&#10;        user 用户（275）&lt;br/&gt;&#10;        house_binding 房屋绑定&lt;br/&gt;&#10;        worker 物业人员（75）&lt;br/&gt;&#10;        repair_order 工单&lt;br/&gt;&#10;        fee_bill 账单（746）&lt;br/&gt;&#10;        notice 公告（24）&lt;br/&gt;&#10;        conversation / message&lt;br/&gt;&#10;        agent_trace 追踪&lt;br/&gt;&#10;        &lt;span style={{ color: '#BD9B56' }}&gt;knowledge_document / chunk&lt;/span&gt;&#10;      &lt;/div&gt;&#10;    &lt;/div&gt;&#10;    &lt;div style={{ flex: 1, background: '#fff', borderRadius: 12, padding: '20px 22px', boxShadow: '0 6px 24px rgba(23,33,51,0.08)' }}&gt;&#10;      &lt;svg width=&quot;560&quot; height=&quot;470&quot; viewBox=&quot;0 0 560 470&quot;&gt;&#10;        &lt;g fontFamily=&quot;Inter, sans-serif&quot;&gt;&#10;          &lt;rect x=&quot;14&quot; y=&quot;14&quot; width=&quot;150&quot; height=&quot;50&quot; rx=&quot;6&quot; fill=&quot;rgba(34,57,94,0.08)&quot; stroke=&quot;#22395E&quot; strokeWidth=&quot;1.5&quot; /&gt;&#10;          &lt;text x=&quot;89&quot; y=&quot;44&quot; textAnchor=&quot;middle&quot; fontSize=&quot;14&quot; fontWeight=&quot;bold&quot; fill=&quot;#172133&quot;&gt;community&lt;/text&gt;&#10;          &lt;line x1=&quot;164&quot; y1=&quot;39&quot; x2=&quot;206&quot; y2=&quot;39&quot; stroke=&quot;#BD9B56&quot; strokeWidth=&quot;1.5&quot; /&gt;&#10;          &lt;rect x=&quot;210&quot; y=&quot;14&quot; width=&quot;150&quot; height=&quot;50&quot; rx=&quot;6&quot; fill=&quot;rgba(34,57,94,0.08)&quot; stroke=&quot;#22395E&quot; strokeWidth=&quot;1.5&quot; /&gt;&#10;          &lt;text x=&quot;285&quot; y=&quot;44&quot; textAnchor=&quot;middle&quot; fontSize=&quot;14&quot; fontWeight=&quot;bold&quot; fill=&quot;#172133&quot;&gt;building ×8&lt;/text&gt;&#10;          &lt;line x1=&quot;360&quot; y1=&quot;39&quot; x2=&quot;402&quot; y2=&quot;39&quot; stroke=&quot;#BD9B56&quot; strokeWidth=&quot;1.5&quot; /&gt;&#10;          &lt;rect x=&quot;406&quot; y=&quot;14&quot; width=&quot;150&quot; height=&quot;50&quot; rx=&quot;6&quot; fill=&quot;rgba(34,57,94,0.08)&quot; stroke=&quot;#22395E&quot; strokeWidth=&quot;1.5&quot; /&gt;&#10;          &lt;text x=&quot;481&quot; y=&quot;44&quot; textAnchor=&quot;middle&quot; fontSize=&quot;14&quot; fontWeight=&quot;bold&quot; fill=&quot;#172133&quot;&gt;house ×1664&lt;/text&gt;&#10;          &lt;line x1=&quot;285&quot; y1=&quot;64&quot; x2=&quot;285&quot; y2=&quot;104&quot; stroke=&quot;#BD9B56&quot; strokeWidth=&quot;1.5&quot; /&gt;&#10;          &lt;rect x=&quot;210&quot; y=&quot;108&quot; width=&quot;150&quot; height=&quot;50&quot; rx=&quot;6&quot; fill=&quot;rgba(189,155,86,0.10)&quot; stroke=&quot;#BD9B56&quot; strokeWidth=&quot;1.5&quot; /&gt;&#10;          &lt;text x=&quot;285&quot; y=&quot;138&quot; textAnchor=&quot;middle&quot; fontSize=&quot;14&quot; fontWeight=&quot;bold&quot; fill=&quot;#172133&quot;&gt;user ×275&lt;/text&gt;&#10;          &lt;line x1=&quot;210&quot; y1=&quot;133&quot; x2=&quot;164&quot; y2=&quot;133&quot; stroke=&quot;#BD9B56&quot; strokeWidth=&quot;1.5&quot; /&gt;&#10;          &lt;rect x=&quot;14&quot; y=&quot;108&quot; width=&quot;150&quot; height=&quot;50&quot; rx=&quot;6&quot; fill=&quot;rgba(189,155,86,0.10)&quot; stroke=&quot;#BD9B56&quot; strokeWidth=&quot;1.5&quot; /&gt;&#10;          &lt;text x=&quot;89&quot; y=&quot;138&quot; textAnchor=&quot;middle&quot; fontSize=&quot;14&quot; fontWeight=&quot;bold&quot; fill=&quot;#172133&quot;&gt;house_binding&lt;/text&gt;&#10;          &lt;line x1=&quot;285&quot; y1=&quot;158&quot; x2=&quot;285&quot; y2=&quot;198&quot; stroke=&quot;#BD9B56&quot; strokeWidth=&quot;1.5&quot; /&gt;&#10;          &lt;rect x=&quot;210&quot; y=&quot;202&quot; width=&quot;150&quot; height=&quot;50&quot; rx=&quot;6&quot; fill=&quot;rgba(34,57,94,0.08)&quot; stroke=&quot;#22395E&quot; strokeWidth=&quot;1.5&quot; /&gt;&#10;          &lt;text x=&quot;285&quot; y=&quot;232&quot; textAnchor=&quot;middle&quot; fontSize=&quot;14&quot; fontWeight=&quot;bold&quot; fill=&quot;#172133&quot;&gt;worker ×75&lt;/text&gt;&#10;          &lt;line x1=&quot;285&quot; y1=&quot;252&quot; x2=&quot;285&quot; y2=&quot;292&quot; stroke=&quot;#BD9B56&quot; strokeWidth=&quot;1.5&quot; /&gt;&#10;          &lt;rect x=&quot;160&quot; y=&quot;296&quot; width=&quot;130&quot; height=&quot;50&quot; rx=&quot;6&quot; fill=&quot;rgba(34,57,94,0.08)&quot; stroke=&quot;#22395E&quot; strokeWidth=&quot;1.5&quot; /&gt;&#10;          &lt;text x=&quot;225&quot; y=&quot;326&quot; textAnchor=&quot;middle&quot; fontSize=&quot;13&quot; fontWeight=&quot;bold&quot; fill=&quot;#172133&quot;&gt;repair_order&lt;/text&gt;&#10;          &lt;rect x=&quot;306&quot; y=&quot;296&quot; width=&quot;130&quot; height=&quot;50&quot; rx=&quot;6&quot; fill=&quot;rgba(34,57,94,0.08)&quot; stroke=&quot;#22395E&quot; strokeWidth=&quot;1.5&quot; /&gt;&#10;          &lt;text x=&quot;371&quot; y=&quot;326&quot; textAnchor=&quot;middle&quot; fontSize=&quot;13&quot; fontWeight=&quot;bold&quot; fill=&quot;#172133&quot;&gt;fee_bill ×746&lt;/text&gt;&#10;          &lt;line x1=&quot;225&quot; y1=&quot;346&quot; x2=&quot;225&quot; y2=&quot;386&quot; stroke=&quot;#BD9B56&quot; strokeWidth=&quot;1.5&quot; /&gt;&#10;          &lt;rect x=&quot;160&quot; y=&quot;390&quot; width=&quot;130&quot; height=&quot;50&quot; rx=&quot;6&quot; fill=&quot;rgba(34,57,94,0.08)&quot; stroke=&quot;#22395E&quot; strokeWidth=&quot;1.5&quot; /&gt;&#10;          &lt;text x=&quot;225&quot; y=&quot;420&quot; textAnchor=&quot;middle&quot; fontSize=&quot;13&quot; fontWeight=&quot;bold&quot; fill=&quot;#172133&quot;&gt;notice ×24&lt;/text&gt;&#10;          &lt;rect x=&quot;306&quot; y=&quot;390&quot; width=&quot;130&quot; height=&quot;50&quot; rx=&quot;6&quot; fill=&quot;#172133&quot; stroke=&quot;#BD9B56&quot; strokeWidth=&quot;1.5&quot; /&gt;&#10;          &lt;text x=&quot;371&quot; y=&quot;416&quot; textAnchor=&quot;middle&quot; fontSize=&quot;12&quot; fontWeight=&quot;bold&quot; fill=&quot;#BD9B56&quot;&gt;knowledge&lt;/text&gt;&#10;          &lt;text x=&quot;371&quot; y=&quot;434&quot; textAnchor=&quot;middle&quot; fontSize=&quot;10&quot; fill=&quot;#FBFCFA&quot;&gt;document + chunk&lt;/text&gt;&#10;        &lt;/g&gt;&#10;      &lt;/svg&gt;&#10;    &lt;/div&gt;&#10;  &lt;/div&gt;&#10;  &lt;div style={{ flexShrink: 0, height: 40, display: 'flex', alignItems: 'flex-end', justifyContent: 'space-between' }}&gt;&#10;    &lt;span style={{ color: '#BD9B56', fontSize: 12, letterSpacing: '0.1em' }}&gt;云溪花园 · 智慧社区&lt;/span&gt;&#10;    &lt;span style={{ color: '#a09b8c', fontSize: 12 }}&gt;07 / 15&lt;/span&gt;&#10;  &lt;/div&gt;&#10;&lt;/Slide&gt;"/>
+        <p:cNvPr id="325" name="" descr="&lt;Slide style={{ width: '1280px', height: '720px', background: '#FBFCFA', position: 'relative', padding: '32px 64px', boxSizing: 'border-box', display: 'flex', flexDirection: 'column' }}&gt;&#10;  &lt;div style={{ flexShrink: 0 }}&gt;&#10;    &lt;div style={{ color: '#BD9B56', fontSize: 13, letterSpacing: '0.25em', marginBottom: 6 }}&gt;02 · 技术构建过程&lt;/div&gt;&#10;    &lt;h2 style={{ fontSize: 30, fontWeight: 'bold', color: '#172133', margin: 0, lineHeight: 1.3 }}&gt;数据库设计：15+ 张表承载整个社区&lt;/h2&gt;&#10;    &lt;div style={{ fontSize: 14, color: '#6b7075', marginTop: 6 }}&gt;数据库是系统地基，通过外键建立完整 ER 关系，覆盖社区到知识库的全部实体&lt;/div&gt;&#10;  &lt;/div&gt;&#10;  &lt;div style={{ flex: 1, display: 'flex', alignItems: 'center', minHeight: 0, gap: 28 }}&gt;&#10;    &lt;div style={{ flex: '0 0 320px', background: 'linear-gradient(135deg, #172133 0%, #22395E 100%)', borderRadius: 12, padding: '24px 24px', color: '#FBFCFA' }}&gt;&#10;      &lt;div style={{ color: '#BD9B56', fontSize: 12, letterSpacing: '0.25em', marginBottom: 12 }}&gt;CORE ENTITIES&lt;/div&gt;&#10;      &lt;div style={{ fontSize: 14, color: 'rgba(251,252,250,0.9)', lineHeight: 1.9 }}&gt;&#10;        community 社区&lt;br/&gt;&#10;        building 楼栋（8）&lt;br/&gt;&#10;        house 房屋（1664）&lt;br/&gt;&#10;        user 用户（275）&lt;br/&gt;&#10;        house_binding 房屋绑定&lt;br/&gt;&#10;        worker 物业人员（75）&lt;br/&gt;&#10;        repair_order 工单&lt;br/&gt;&#10;        fee_bill 账单（746）&lt;br/&gt;&#10;        notice 公告（24）&lt;br/&gt;&#10;        conversation / message&lt;br/&gt;&#10;        agent_trace 追踪&lt;br/&gt;&#10;        &lt;span style={{ color: '#BD9B56' }}&gt;knowledge_document / chunk&lt;/span&gt;&#10;      &lt;/div&gt;&#10;    &lt;/div&gt;&#10;    &lt;div style={{ flex: 1, background: '#fff', borderRadius: 12, padding: '20px 22px', boxShadow: '0 6px 24px rgba(23,33,51,0.08)' }}&gt;&#10;      &lt;svg width=&quot;560&quot; height=&quot;470&quot; viewBox=&quot;0 0 560 470&quot;&gt;&#10;        &lt;g fontFamily=&quot;Inter, sans-serif&quot;&gt;&#10;          &lt;rect x=&quot;14&quot; y=&quot;14&quot; width=&quot;150&quot; height=&quot;50&quot; rx=&quot;6&quot; fill=&quot;rgba(34,57,94,0.08)&quot; stroke=&quot;#22395E&quot; strokeWidth=&quot;1.5&quot; /&gt;&#10;          &lt;text x=&quot;89&quot; y=&quot;44&quot; textAnchor=&quot;middle&quot; fontSize=&quot;14&quot; fontWeight=&quot;bold&quot; fill=&quot;#172133&quot;&gt;community&lt;/text&gt;&#10;          &lt;line x1=&quot;164&quot; y1=&quot;39&quot; x2=&quot;206&quot; y2=&quot;39&quot; stroke=&quot;#BD9B56&quot; strokeWidth=&quot;1.5&quot; /&gt;&#10;          &lt;rect x=&quot;210&quot; y=&quot;14&quot; width=&quot;150&quot; height=&quot;50&quot; rx=&quot;6&quot; fill=&quot;rgba(34,57,94,0.08)&quot; stroke=&quot;#22395E&quot; strokeWidth=&quot;1.5&quot; /&gt;&#10;          &lt;text x=&quot;285&quot; y=&quot;44&quot; textAnchor=&quot;middle&quot; fontSize=&quot;14&quot; fontWeight=&quot;bold&quot; fill=&quot;#172133&quot;&gt;building ×8&lt;/text&gt;&#10;          &lt;line x1=&quot;360&quot; y1=&quot;39&quot; x2=&quot;402&quot; y2=&quot;39&quot; stroke=&quot;#BD9B56&quot; strokeWidth=&quot;1.5&quot; /&gt;&#10;          &lt;rect x=&quot;406&quot; y=&quot;14&quot; width=&quot;150&quot; height=&quot;50&quot; rx=&quot;6&quot; fill=&quot;rgba(34,57,94,0.08)&quot; stroke=&quot;#22395E&quot; strokeWidth=&quot;1.5&quot; /&gt;&#10;          &lt;text x=&quot;481&quot; y=&quot;44&quot; textAnchor=&quot;middle&quot; fontSize=&quot;14&quot; fontWeight=&quot;bold&quot; fill=&quot;#172133&quot;&gt;house ×1664&lt;/text&gt;&#10;          &lt;line x1=&quot;285&quot; y1=&quot;64&quot; x2=&quot;285&quot; y2=&quot;104&quot; stroke=&quot;#BD9B56&quot; strokeWidth=&quot;1.5&quot; /&gt;&#10;          &lt;rect x=&quot;210&quot; y=&quot;108&quot; width=&quot;150&quot; height=&quot;50&quot; rx=&quot;6&quot; fill=&quot;rgba(189,155,86,0.10)&quot; stroke=&quot;#BD9B56&quot; strokeWidth=&quot;1.5&quot; /&gt;&#10;          &lt;text x=&quot;285&quot; y=&quot;138&quot; textAnchor=&quot;middle&quot; fontSize=&quot;14&quot; fontWeight=&quot;bold&quot; fill=&quot;#172133&quot;&gt;user ×275&lt;/text&gt;&#10;          &lt;line x1=&quot;210&quot; y1=&quot;133&quot; x2=&quot;164&quot; y2=&quot;133&quot; stroke=&quot;#BD9B56&quot; strokeWidth=&quot;1.5&quot; /&gt;&#10;          &lt;rect x=&quot;14&quot; y=&quot;108&quot; width=&quot;150&quot; height=&quot;50&quot; rx=&quot;6&quot; fill=&quot;rgba(189,155,86,0.10)&quot; stroke=&quot;#BD9B56&quot; strokeWidth=&quot;1.5&quot; /&gt;&#10;          &lt;text x=&quot;89&quot; y=&quot;138&quot; textAnchor=&quot;middle&quot; fontSize=&quot;14&quot; fontWeight=&quot;bold&quot; fill=&quot;#172133&quot;&gt;house_binding&lt;/text&gt;&#10;          &lt;line x1=&quot;285&quot; y1=&quot;158&quot; x2=&quot;285&quot; y2=&quot;198&quot; stroke=&quot;#BD9B56&quot; strokeWidth=&quot;1.5&quot; /&gt;&#10;          &lt;rect x=&quot;210&quot; y=&quot;202&quot; width=&quot;150&quot; height=&quot;50&quot; rx=&quot;6&quot; fill=&quot;rgba(34,57,94,0.08)&quot; stroke=&quot;#22395E&quot; strokeWidth=&quot;1.5&quot; /&gt;&#10;          &lt;text x=&quot;285&quot; y=&quot;232&quot; textAnchor=&quot;middle&quot; fontSize=&quot;14&quot; fontWeight=&quot;bold&quot; fill=&quot;#172133&quot;&gt;worker ×75&lt;/text&gt;&#10;          &lt;line x1=&quot;285&quot; y1=&quot;252&quot; x2=&quot;285&quot; y2=&quot;292&quot; stroke=&quot;#BD9B56&quot; strokeWidth=&quot;1.5&quot; /&gt;&#10;          &lt;rect x=&quot;160&quot; y=&quot;296&quot; width=&quot;130&quot; height=&quot;50&quot; rx=&quot;6&quot; fill=&quot;rgba(34,57,94,0.08)&quot; stroke=&quot;#22395E&quot; strokeWidth=&quot;1.5&quot; /&gt;&#10;          &lt;text x=&quot;225&quot; y=&quot;326&quot; textAnchor=&quot;middle&quot; fontSize=&quot;13&quot; fontWeight=&quot;bold&quot; fill=&quot;#172133&quot;&gt;repair_order&lt;/text&gt;&#10;          &lt;rect x=&quot;306&quot; y=&quot;296&quot; width=&quot;130&quot; height=&quot;50&quot; rx=&quot;6&quot; fill=&quot;rgba(34,57,94,0.08)&quot; stroke=&quot;#22395E&quot; strokeWidth=&quot;1.5&quot; /&gt;&#10;          &lt;text x=&quot;371&quot; y=&quot;326&quot; textAnchor=&quot;middle&quot; fontSize=&quot;13&quot; fontWeight=&quot;bold&quot; fill=&quot;#172133&quot;&gt;fee_bill ×746&lt;/text&gt;&#10;          &lt;line x1=&quot;225&quot; y1=&quot;346&quot; x2=&quot;225&quot; y2=&quot;386&quot; stroke=&quot;#BD9B56&quot; strokeWidth=&quot;1.5&quot; /&gt;&#10;          &lt;rect x=&quot;160&quot; y=&quot;390&quot; width=&quot;130&quot; height=&quot;50&quot; rx=&quot;6&quot; fill=&quot;rgba(34,57,94,0.08)&quot; stroke=&quot;#22395E&quot; strokeWidth=&quot;1.5&quot; /&gt;&#10;          &lt;text x=&quot;225&quot; y=&quot;420&quot; textAnchor=&quot;middle&quot; fontSize=&quot;13&quot; fontWeight=&quot;bold&quot; fill=&quot;#172133&quot;&gt;notice ×24&lt;/text&gt;&#10;          &lt;rect x=&quot;306&quot; y=&quot;390&quot; width=&quot;130&quot; height=&quot;50&quot; rx=&quot;6&quot; fill=&quot;#172133&quot; stroke=&quot;#BD9B56&quot; strokeWidth=&quot;1.5&quot; /&gt;&#10;          &lt;text x=&quot;371&quot; y=&quot;416&quot; textAnchor=&quot;middle&quot; fontSize=&quot;12&quot; fontWeight=&quot;bold&quot; fill=&quot;#BD9B56&quot;&gt;knowledge&lt;/text&gt;&#10;          &lt;text x=&quot;371&quot; y=&quot;434&quot; textAnchor=&quot;middle&quot; fontSize=&quot;10&quot; fill=&quot;#FBFCFA&quot;&gt;document + chunk&lt;/text&gt;&#10;        &lt;/g&gt;&#10;      &lt;/svg&gt;&#10;    &lt;/div&gt;&#10;  &lt;/div&gt;&#10;  &lt;div style={{ flexShrink: 0, height: 40, display: 'flex', alignItems: 'flex-end', justifyContent: 'space-between' }}&gt;&#10;    &lt;span style={{ color: '#BD9B56', fontSize: 12, letterSpacing: '0.1em' }}&gt;云溪花园 · 智慧社区&lt;/span&gt;&#10;    &lt;span style={{ color: '#a09b8c', fontSize: 12 }}&gt;07 / 15&lt;/span&gt;&#10;  &lt;/div&gt;&#10;&lt;/Slide&gt;"/>
         <p:cNvGrpSpPr/>
         <p:nvPr/>
       </p:nvGrpSpPr>
@@ -14095,7 +15217,7 @@
       </p:grpSpPr>
       <p:sp>
         <p:nvSpPr>
-          <p:cNvPr id="305" name=""/>
+          <p:cNvPr id="326" name=""/>
           <p:cNvSpPr/>
           <p:nvPr/>
         </p:nvSpPr>
@@ -14119,7 +15241,7 @@
       </p:sp>
       <p:sp>
         <p:nvSpPr>
-          <p:cNvPr id="306" name="" descr="{&quot;isTemplate&quot;:true,&quot;type&quot;:&quot;text&quot;}"/>
+          <p:cNvPr id="327" name="" descr="{&quot;isTemplate&quot;:true,&quot;type&quot;:&quot;text&quot;}"/>
           <p:cNvSpPr txBox="1"/>
           <p:nvPr/>
         </p:nvSpPr>
@@ -14164,7 +15286,7 @@
       </p:sp>
       <p:sp>
         <p:nvSpPr>
-          <p:cNvPr id="307" name="" descr="{&quot;isTemplate&quot;:true,&quot;type&quot;:&quot;text&quot;}"/>
+          <p:cNvPr id="328" name="" descr="{&quot;isTemplate&quot;:true,&quot;type&quot;:&quot;text&quot;}"/>
           <p:cNvSpPr txBox="1"/>
           <p:nvPr/>
         </p:nvSpPr>
@@ -14219,7 +15341,7 @@
       </p:sp>
       <p:sp>
         <p:nvSpPr>
-          <p:cNvPr id="308" name="" descr="{&quot;isTemplate&quot;:true,&quot;type&quot;:&quot;text&quot;}"/>
+          <p:cNvPr id="329" name="" descr="{&quot;isTemplate&quot;:true,&quot;type&quot;:&quot;text&quot;}"/>
           <p:cNvSpPr txBox="1"/>
           <p:nvPr/>
         </p:nvSpPr>
@@ -14274,7 +15396,7 @@
       </p:sp>
       <p:sp>
         <p:nvSpPr>
-          <p:cNvPr id="309" name=""/>
+          <p:cNvPr id="330" name=""/>
           <p:cNvSpPr/>
           <p:nvPr/>
         </p:nvSpPr>
@@ -14308,7 +15430,7 @@
       </p:sp>
       <p:sp>
         <p:nvSpPr>
-          <p:cNvPr id="310" name="" descr="{&quot;isTemplate&quot;:true,&quot;type&quot;:&quot;text&quot;}"/>
+          <p:cNvPr id="331" name="" descr="{&quot;isTemplate&quot;:true,&quot;type&quot;:&quot;text&quot;}"/>
           <p:cNvSpPr txBox="1"/>
           <p:nvPr/>
         </p:nvSpPr>
@@ -14343,7 +15465,7 @@
       </p:sp>
       <p:sp>
         <p:nvSpPr>
-          <p:cNvPr id="311" name="" descr="{&quot;isTemplate&quot;:true,&quot;type&quot;:&quot;text&quot;}"/>
+          <p:cNvPr id="332" name="" descr="{&quot;isTemplate&quot;:true,&quot;type&quot;:&quot;text&quot;}"/>
           <p:cNvSpPr txBox="1"/>
           <p:nvPr/>
         </p:nvSpPr>
@@ -14364,7 +15486,7 @@
       </p:sp>
       <p:sp>
         <p:nvSpPr>
-          <p:cNvPr id="312" name="" descr="{&quot;isTemplate&quot;:true,&quot;type&quot;:&quot;text&quot;}"/>
+          <p:cNvPr id="333" name="" descr="{&quot;isTemplate&quot;:true,&quot;type&quot;:&quot;text&quot;}"/>
           <p:cNvSpPr txBox="1"/>
           <p:nvPr/>
         </p:nvSpPr>
@@ -14385,7 +15507,7 @@
       </p:sp>
       <p:sp>
         <p:nvSpPr>
-          <p:cNvPr id="313" name="" descr="{&quot;isTemplate&quot;:true,&quot;type&quot;:&quot;text&quot;}"/>
+          <p:cNvPr id="334" name="" descr="{&quot;isTemplate&quot;:true,&quot;type&quot;:&quot;text&quot;}"/>
           <p:cNvSpPr txBox="1"/>
           <p:nvPr/>
         </p:nvSpPr>
@@ -14406,7 +15528,7 @@
       </p:sp>
       <p:sp>
         <p:nvSpPr>
-          <p:cNvPr id="314" name="" descr="{&quot;isTemplate&quot;:true,&quot;type&quot;:&quot;text&quot;}"/>
+          <p:cNvPr id="335" name="" descr="{&quot;isTemplate&quot;:true,&quot;type&quot;:&quot;text&quot;}"/>
           <p:cNvSpPr txBox="1"/>
           <p:nvPr/>
         </p:nvSpPr>
@@ -14427,7 +15549,7 @@
       </p:sp>
       <p:sp>
         <p:nvSpPr>
-          <p:cNvPr id="315" name="" descr="{&quot;isTemplate&quot;:true,&quot;type&quot;:&quot;text&quot;}"/>
+          <p:cNvPr id="336" name="" descr="{&quot;isTemplate&quot;:true,&quot;type&quot;:&quot;text&quot;}"/>
           <p:cNvSpPr txBox="1"/>
           <p:nvPr/>
         </p:nvSpPr>
@@ -14448,7 +15570,7 @@
       </p:sp>
       <p:sp>
         <p:nvSpPr>
-          <p:cNvPr id="316" name="" descr="{&quot;isTemplate&quot;:true,&quot;type&quot;:&quot;text&quot;}"/>
+          <p:cNvPr id="337" name="" descr="{&quot;isTemplate&quot;:true,&quot;type&quot;:&quot;text&quot;}"/>
           <p:cNvSpPr txBox="1"/>
           <p:nvPr/>
         </p:nvSpPr>
@@ -14469,7 +15591,7 @@
       </p:sp>
       <p:sp>
         <p:nvSpPr>
-          <p:cNvPr id="317" name="" descr="{&quot;isTemplate&quot;:true,&quot;type&quot;:&quot;text&quot;}"/>
+          <p:cNvPr id="338" name="" descr="{&quot;isTemplate&quot;:true,&quot;type&quot;:&quot;text&quot;}"/>
           <p:cNvSpPr txBox="1"/>
           <p:nvPr/>
         </p:nvSpPr>
@@ -14490,7 +15612,7 @@
       </p:sp>
       <p:sp>
         <p:nvSpPr>
-          <p:cNvPr id="318" name="" descr="{&quot;isTemplate&quot;:true,&quot;type&quot;:&quot;text&quot;}"/>
+          <p:cNvPr id="339" name="" descr="{&quot;isTemplate&quot;:true,&quot;type&quot;:&quot;text&quot;}"/>
           <p:cNvSpPr txBox="1"/>
           <p:nvPr/>
         </p:nvSpPr>
@@ -14511,7 +15633,7 @@
       </p:sp>
       <p:sp>
         <p:nvSpPr>
-          <p:cNvPr id="319" name="" descr="{&quot;isTemplate&quot;:true,&quot;type&quot;:&quot;text&quot;}"/>
+          <p:cNvPr id="340" name="" descr="{&quot;isTemplate&quot;:true,&quot;type&quot;:&quot;text&quot;}"/>
           <p:cNvSpPr txBox="1"/>
           <p:nvPr/>
         </p:nvSpPr>
@@ -14532,7 +15654,7 @@
       </p:sp>
       <p:sp>
         <p:nvSpPr>
-          <p:cNvPr id="320" name="" descr="{&quot;isTemplate&quot;:true,&quot;type&quot;:&quot;text&quot;}"/>
+          <p:cNvPr id="341" name="" descr="{&quot;isTemplate&quot;:true,&quot;type&quot;:&quot;text&quot;}"/>
           <p:cNvSpPr txBox="1"/>
           <p:nvPr/>
         </p:nvSpPr>
@@ -14553,7 +15675,7 @@
       </p:sp>
       <p:sp>
         <p:nvSpPr>
-          <p:cNvPr id="321" name="" descr="{&quot;isTemplate&quot;:true,&quot;type&quot;:&quot;text&quot;}"/>
+          <p:cNvPr id="342" name="" descr="{&quot;isTemplate&quot;:true,&quot;type&quot;:&quot;text&quot;}"/>
           <p:cNvSpPr txBox="1"/>
           <p:nvPr/>
         </p:nvSpPr>
@@ -14574,7 +15696,7 @@
       </p:sp>
       <p:sp>
         <p:nvSpPr>
-          <p:cNvPr id="322" name="" descr="{&quot;isTemplate&quot;:true,&quot;type&quot;:&quot;text&quot;}"/>
+          <p:cNvPr id="343" name="" descr="{&quot;isTemplate&quot;:true,&quot;type&quot;:&quot;text&quot;}"/>
           <p:cNvSpPr txBox="1"/>
           <p:nvPr/>
         </p:nvSpPr>
@@ -14609,7 +15731,7 @@
       </p:sp>
       <p:sp>
         <p:nvSpPr>
-          <p:cNvPr id="323" name=""/>
+          <p:cNvPr id="344" name=""/>
           <p:cNvSpPr/>
           <p:nvPr/>
         </p:nvSpPr>
@@ -14642,7 +15764,7 @@
       </p:sp>
       <p:pic>
         <p:nvPicPr>
-          <p:cNvPr id="324" name=""/>
+          <p:cNvPr id="345" name=""/>
           <p:cNvPicPr>
             <a:picLocks noChangeAspect="1"/>
           </p:cNvPicPr>
@@ -14673,7 +15795,7 @@
       </p:pic>
       <p:sp>
         <p:nvSpPr>
-          <p:cNvPr id="325" name="" descr="{&quot;isTemplate&quot;:true,&quot;type&quot;:&quot;text&quot;}"/>
+          <p:cNvPr id="346" name="" descr="{&quot;isTemplate&quot;:true,&quot;type&quot;:&quot;text&quot;}"/>
           <p:cNvSpPr txBox="1"/>
           <p:nvPr/>
         </p:nvSpPr>
@@ -14728,7 +15850,7 @@
       </p:sp>
       <p:sp>
         <p:nvSpPr>
-          <p:cNvPr id="326" name="" descr="{&quot;isTemplate&quot;:true,&quot;type&quot;:&quot;text&quot;}"/>
+          <p:cNvPr id="347" name="" descr="{&quot;isTemplate&quot;:true,&quot;type&quot;:&quot;text&quot;}"/>
           <p:cNvSpPr txBox="1"/>
           <p:nvPr/>
         </p:nvSpPr>
@@ -14771,7 +15893,7 @@
   <p:cSld>
     <p:spTree>
       <p:nvGrpSpPr>
-        <p:cNvPr id="327" name="" descr="&lt;Slide style={{ width: '1280px', height: '720px', background: '#FBFCFA', position: 'relative', padding: '40px 64px', boxSizing: 'border-box', display: 'flex', flexDirection: 'column' }}&gt;&#10;  &lt;div style={{ flexShrink: 0 }}&gt;&#10;    &lt;div style={{ color: '#BD9B56', fontSize: 13, letterSpacing: '0.25em', marginBottom: 8 }}&gt;02 · 技术构建过程&lt;/div&gt;&#10;    &lt;h2 style={{ fontSize: 30, fontWeight: 'bold', color: '#172133', margin: 0, lineHeight: 1.3 }}&gt;后端分层 + 前端三端一体&lt;/h2&gt;&#10;  &lt;/div&gt;&#10;  &lt;div style={{ flex: 1, display: 'flex', alignItems: 'center', gap: 32 }}&gt;&#10;    &lt;div style={{ flex: 1, display: 'flex', flexDirection: 'column', gap: 16 }}&gt;&#10;      &lt;div style={{ background: '#fff', borderRadius: 10, padding: '18px 22px', boxShadow: '0 4px 16px rgba(23,33,51,0.06)' }}&gt;&#10;        &lt;div style={{ fontSize: 17, fontWeight: 'bold', color: '#172133', marginBottom: 6 }}&gt;后端：FastAPI 三层架构&lt;/div&gt;&#10;        &lt;p style={{ fontSize: 14, color: '#5F5E5A', margin: 0, lineHeight: 1.6 }}&gt;API 路由层 → Service 业务层 → Repository 数据层。业务与数据解耦，AI 逻辑不混入业务代码。&lt;/p&gt;&#10;      &lt;/div&gt;&#10;      &lt;div style={{ background: '#fff', borderRadius: 10, padding: '18px 22px', boxShadow: '0 4px 16px rgba(23,33,51,0.06)' }}&gt;&#10;        &lt;div style={{ fontSize: 17, fontWeight: 'bold', color: '#172133', marginBottom: 6 }}&gt;派单算法&lt;/div&gt;&#10;        &lt;p style={{ fontSize: 14, color: '#5F5E5A', margin: 0, lineHeight: 1.6 }}&gt;按「技能匹配 + 在岗状态 + 工号升序」自动选择维修师傅，无需人工指派，报修提交即自动派单。&lt;/p&gt;&#10;      &lt;/div&gt;&#10;      &lt;div style={{ background: '#fff', borderRadius: 10, padding: '18px 22px', boxShadow: '0 4px 16px rgba(23,33,51,0.06)' }}&gt;&#10;        &lt;div style={{ fontSize: 17, fontWeight: 'bold', color: '#172133', marginBottom: 6 }}&gt;消息通知&lt;/div&gt;&#10;        &lt;p style={{ fontSize: 14, color: '#5F5E5A', margin: 0, lineHeight: 1.6 }}&gt;派单、完成、答复、巡检异常等事件全链路实时通知相关角色，保证业务协同不遗漏。&lt;/p&gt;&#10;      &lt;/div&gt;&#10;    &lt;/div&gt;&#10;    &lt;div style={{ flex: 1, background: 'linear-gradient(135deg, #172133 0%, #22395E 100%)', borderRadius: 12, padding: '26px 26px', color: '#FBFCFA' }}&gt;&#10;      &lt;div style={{ color: '#BD9B56', fontSize: 13, letterSpacing: '0.25em', marginBottom: 18 }}&gt;FRONTEND · 三端&lt;/div&gt;&#10;      &lt;div style={{ display: 'flex', flexDirection: 'column', gap: 14 }}&gt;&#10;        &lt;div style={{ display: 'flex', alignItems: 'center', gap: 12, padding: '12px 16px', background: 'rgba(189,155,86,0.10)', borderRadius: 8 }}&gt;&#10;          &lt;span style={{ color: '#BD9B56', fontSize: 17, fontWeight: 'bold', minWidth: 64 }}&gt;业主端&lt;/span&gt;&#10;          &lt;span style={{ fontSize: 13, color: 'rgba(251,252,250,0.85)' }}&gt;AI 助手 · 报修 · 缴费 · 公告 · 问题上报&lt;/span&gt;&#10;        &lt;/div&gt;&#10;        &lt;div style={{ display: 'flex', alignItems: 'center', gap: 12, padding: '12px 16px', background: 'rgba(189,155,86,0.10)', borderRadius: 8 }}&gt;&#10;          &lt;span style={{ color: '#BD9B56', fontSize: 17, fontWeight: 'bold', minWidth: 64 }}&gt;物业端&lt;/span&gt;&#10;          &lt;span style={{ fontSize: 13, color: 'rgba(251,252,250,0.85)' }}&gt;工单管理 · 巡检 · 数据看板 · 知识审核&lt;/span&gt;&#10;        &lt;/div&gt;&#10;        &lt;div style={{ display: 'flex', alignItems: 'center', gap: 12, padding: '12px 16px', background: 'rgba(189,155,86,0.10)', borderRadius: 8 }}&gt;&#10;          &lt;span style={{ color: '#BD9B56', fontSize: 17, fontWeight: 'bold', minWidth: 64 }}&gt;维修端&lt;/span&gt;&#10;          &lt;span style={{ fontSize: 13, color: 'rgba(251,252,250,0.85)' }}&gt;接单 · 处理 · 消息 · 巡检任务&lt;/span&gt;&#10;        &lt;/div&gt;&#10;      &lt;/div&gt;&#10;      &lt;div style={{ marginTop: 20, paddingTop: 18, borderTop: '1px solid rgba(189,155,86,0.3)' }}&gt;&#10;        &lt;div style={{ fontSize: 13, color: 'rgba(251,252,250,0.8)', lineHeight: 1.7 }}&gt;&#10;          React + TypeScript + Tailwind&lt;br/&gt;JWT 鉴权 · 角色路由 · 支持 PWA 安装&lt;br/&gt;后端 113 测试 + 前端 30 测试全绿&#10;        &lt;/div&gt;&#10;      &lt;/div&gt;&#10;    &lt;/div&gt;&#10;  &lt;/div&gt;&#10;  &lt;div style={{ flexShrink: 0, height: 40, display: 'flex', alignItems: 'flex-end', justifyContent: 'space-between' }}&gt;&#10;    &lt;span style={{ color: '#BD9B56', fontSize: 12, letterSpacing: '0.1em' }}&gt;云溪花园 · 智慧社区&lt;/span&gt;&#10;    &lt;span style={{ color: '#a09b8c', fontSize: 12 }}&gt;08 / 15&lt;/span&gt;&#10;  &lt;/div&gt;&#10;&lt;/Slide&gt;"/>
+        <p:cNvPr id="348" name="" descr="&lt;Slide style={{ width: '1280px', height: '720px', background: '#FBFCFA', position: 'relative', padding: '40px 64px', boxSizing: 'border-box', display: 'flex', flexDirection: 'column' }}&gt;&#10;  &lt;div style={{ flexShrink: 0 }}&gt;&#10;    &lt;div style={{ color: '#BD9B56', fontSize: 13, letterSpacing: '0.25em', marginBottom: 8 }}&gt;02 · 技术构建过程&lt;/div&gt;&#10;    &lt;h2 style={{ fontSize: 30, fontWeight: 'bold', color: '#172133', margin: 0, lineHeight: 1.3 }}&gt;后端分层 + 前端三端一体&lt;/h2&gt;&#10;  &lt;/div&gt;&#10;  &lt;div style={{ flex: 1, display: 'flex', alignItems: 'center', gap: 32 }}&gt;&#10;    &lt;div style={{ flex: 1, display: 'flex', flexDirection: 'column', gap: 16 }}&gt;&#10;      &lt;div style={{ background: '#fff', borderRadius: 10, padding: '18px 22px', boxShadow: '0 4px 16px rgba(23,33,51,0.06)' }}&gt;&#10;        &lt;div style={{ fontSize: 17, fontWeight: 'bold', color: '#172133', marginBottom: 6 }}&gt;后端：FastAPI 三层架构&lt;/div&gt;&#10;        &lt;p style={{ fontSize: 14, color: '#5F5E5A', margin: 0, lineHeight: 1.6 }}&gt;API 路由层 → Service 业务层 → Repository 数据层。业务与数据解耦，AI 逻辑不混入业务代码。&lt;/p&gt;&#10;      &lt;/div&gt;&#10;      &lt;div style={{ background: '#fff', borderRadius: 10, padding: '18px 22px', boxShadow: '0 4px 16px rgba(23,33,51,0.06)' }}&gt;&#10;        &lt;div style={{ fontSize: 17, fontWeight: 'bold', color: '#172133', marginBottom: 6 }}&gt;派单算法&lt;/div&gt;&#10;        &lt;p style={{ fontSize: 14, color: '#5F5E5A', margin: 0, lineHeight: 1.6 }}&gt;按「技能匹配 + 在岗状态 + 工号升序」自动选择维修师傅，无需人工指派，报修提交即自动派单。&lt;/p&gt;&#10;      &lt;/div&gt;&#10;      &lt;div style={{ background: '#fff', borderRadius: 10, padding: '18px 22px', boxShadow: '0 4px 16px rgba(23,33,51,0.06)' }}&gt;&#10;        &lt;div style={{ fontSize: 17, fontWeight: 'bold', color: '#172133', marginBottom: 6 }}&gt;消息通知&lt;/div&gt;&#10;        &lt;p style={{ fontSize: 14, color: '#5F5E5A', margin: 0, lineHeight: 1.6 }}&gt;派单、完成、答复、巡检异常等事件全链路实时通知相关角色，保证业务协同不遗漏。&lt;/p&gt;&#10;      &lt;/div&gt;&#10;    &lt;/div&gt;&#10;    &lt;div style={{ flex: 1, background: 'linear-gradient(135deg, #172133 0%, #22395E 100%)', borderRadius: 12, padding: '26px 26px', color: '#FBFCFA' }}&gt;&#10;      &lt;div style={{ color: '#BD9B56', fontSize: 13, letterSpacing: '0.25em', marginBottom: 18 }}&gt;FRONTEND · 三端&lt;/div&gt;&#10;      &lt;div style={{ display: 'flex', flexDirection: 'column', gap: 14 }}&gt;&#10;        &lt;div style={{ display: 'flex', alignItems: 'center', gap: 12, padding: '12px 16px', background: 'rgba(189,155,86,0.10)', borderRadius: 8 }}&gt;&#10;          &lt;span style={{ color: '#BD9B56', fontSize: 17, fontWeight: 'bold', minWidth: 64 }}&gt;业主端&lt;/span&gt;&#10;          &lt;span style={{ fontSize: 13, color: 'rgba(251,252,250,0.85)' }}&gt;AI 助手 · 报修 · 缴费 · 公告 · 问题上报&lt;/span&gt;&#10;        &lt;/div&gt;&#10;        &lt;div style={{ display: 'flex', alignItems: 'center', gap: 12, padding: '12px 16px', background: 'rgba(189,155,86,0.10)', borderRadius: 8 }}&gt;&#10;          &lt;span style={{ color: '#BD9B56', fontSize: 17, fontWeight: 'bold', minWidth: 64 }}&gt;物业端&lt;/span&gt;&#10;          &lt;span style={{ fontSize: 13, color: 'rgba(251,252,250,0.85)' }}&gt;工单管理 · 巡检 · 数据看板 · 知识审核&lt;/span&gt;&#10;        &lt;/div&gt;&#10;        &lt;div style={{ display: 'flex', alignItems: 'center', gap: 12, padding: '12px 16px', background: 'rgba(189,155,86,0.10)', borderRadius: 8 }}&gt;&#10;          &lt;span style={{ color: '#BD9B56', fontSize: 17, fontWeight: 'bold', minWidth: 64 }}&gt;维修端&lt;/span&gt;&#10;          &lt;span style={{ fontSize: 13, color: 'rgba(251,252,250,0.85)' }}&gt;接单 · 处理 · 消息 · 巡检任务&lt;/span&gt;&#10;        &lt;/div&gt;&#10;      &lt;/div&gt;&#10;      &lt;div style={{ marginTop: 20, paddingTop: 18, borderTop: '1px solid rgba(189,155,86,0.3)' }}&gt;&#10;        &lt;div style={{ fontSize: 13, color: 'rgba(251,252,250,0.8)', lineHeight: 1.7 }}&gt;&#10;          React + TypeScript + Tailwind&lt;br/&gt;JWT 鉴权 · 角色路由 · 支持 PWA 安装&lt;br/&gt;后端 113 测试 + 前端 30 测试全绿&#10;        &lt;/div&gt;&#10;      &lt;/div&gt;&#10;    &lt;/div&gt;&#10;  &lt;/div&gt;&#10;  &lt;div style={{ flexShrink: 0, height: 40, display: 'flex', alignItems: 'flex-end', justifyContent: 'space-between' }}&gt;&#10;    &lt;span style={{ color: '#BD9B56', fontSize: 12, letterSpacing: '0.1em' }}&gt;云溪花园 · 智慧社区&lt;/span&gt;&#10;    &lt;span style={{ color: '#a09b8c', fontSize: 12 }}&gt;08 / 15&lt;/span&gt;&#10;  &lt;/div&gt;&#10;&lt;/Slide&gt;"/>
         <p:cNvGrpSpPr/>
         <p:nvPr/>
       </p:nvGrpSpPr>
@@ -14785,7 +15907,7 @@
       </p:grpSpPr>
       <p:sp>
         <p:nvSpPr>
-          <p:cNvPr id="328" name=""/>
+          <p:cNvPr id="349" name=""/>
           <p:cNvSpPr/>
           <p:nvPr/>
         </p:nvSpPr>
@@ -14809,7 +15931,7 @@
       </p:sp>
       <p:sp>
         <p:nvSpPr>
-          <p:cNvPr id="329" name="" descr="{&quot;isTemplate&quot;:true,&quot;type&quot;:&quot;text&quot;}"/>
+          <p:cNvPr id="350" name="" descr="{&quot;isTemplate&quot;:true,&quot;type&quot;:&quot;text&quot;}"/>
           <p:cNvSpPr txBox="1"/>
           <p:nvPr/>
         </p:nvSpPr>
@@ -14854,7 +15976,7 @@
       </p:sp>
       <p:sp>
         <p:nvSpPr>
-          <p:cNvPr id="330" name="" descr="{&quot;isTemplate&quot;:true,&quot;type&quot;:&quot;text&quot;}"/>
+          <p:cNvPr id="351" name="" descr="{&quot;isTemplate&quot;:true,&quot;type&quot;:&quot;text&quot;}"/>
           <p:cNvSpPr txBox="1"/>
           <p:nvPr/>
         </p:nvSpPr>
@@ -14909,7 +16031,7 @@
       </p:sp>
       <p:sp>
         <p:nvSpPr>
-          <p:cNvPr id="331" name=""/>
+          <p:cNvPr id="352" name=""/>
           <p:cNvSpPr/>
           <p:nvPr/>
         </p:nvSpPr>
@@ -14942,7 +16064,7 @@
       </p:sp>
       <p:sp>
         <p:nvSpPr>
-          <p:cNvPr id="332" name="" descr="{&quot;isTemplate&quot;:true,&quot;type&quot;:&quot;text&quot;}"/>
+          <p:cNvPr id="353" name="" descr="{&quot;isTemplate&quot;:true,&quot;type&quot;:&quot;text&quot;}"/>
           <p:cNvSpPr txBox="1"/>
           <p:nvPr/>
         </p:nvSpPr>
@@ -14997,7 +16119,7 @@
       </p:sp>
       <p:sp>
         <p:nvSpPr>
-          <p:cNvPr id="333" name="" descr="{&quot;isTemplate&quot;:true,&quot;type&quot;:&quot;text&quot;}"/>
+          <p:cNvPr id="354" name="" descr="{&quot;isTemplate&quot;:true,&quot;type&quot;:&quot;text&quot;}"/>
           <p:cNvSpPr txBox="1"/>
           <p:nvPr/>
         </p:nvSpPr>
@@ -15104,7 +16226,7 @@
       </p:sp>
       <p:sp>
         <p:nvSpPr>
-          <p:cNvPr id="334" name=""/>
+          <p:cNvPr id="355" name=""/>
           <p:cNvSpPr/>
           <p:nvPr/>
         </p:nvSpPr>
@@ -15137,7 +16259,7 @@
       </p:sp>
       <p:sp>
         <p:nvSpPr>
-          <p:cNvPr id="335" name="" descr="{&quot;isTemplate&quot;:true,&quot;type&quot;:&quot;text&quot;}"/>
+          <p:cNvPr id="356" name="" descr="{&quot;isTemplate&quot;:true,&quot;type&quot;:&quot;text&quot;}"/>
           <p:cNvSpPr txBox="1"/>
           <p:nvPr/>
         </p:nvSpPr>
@@ -15172,7 +16294,7 @@
       </p:sp>
       <p:sp>
         <p:nvSpPr>
-          <p:cNvPr id="336" name="" descr="{&quot;isTemplate&quot;:true,&quot;type&quot;:&quot;text&quot;}"/>
+          <p:cNvPr id="357" name="" descr="{&quot;isTemplate&quot;:true,&quot;type&quot;:&quot;text&quot;}"/>
           <p:cNvSpPr txBox="1"/>
           <p:nvPr/>
         </p:nvSpPr>
@@ -15249,7 +16371,7 @@
       </p:sp>
       <p:sp>
         <p:nvSpPr>
-          <p:cNvPr id="337" name=""/>
+          <p:cNvPr id="358" name=""/>
           <p:cNvSpPr/>
           <p:nvPr/>
         </p:nvSpPr>
@@ -15282,7 +16404,7 @@
       </p:sp>
       <p:sp>
         <p:nvSpPr>
-          <p:cNvPr id="338" name="" descr="{&quot;isTemplate&quot;:true,&quot;type&quot;:&quot;text&quot;}"/>
+          <p:cNvPr id="359" name="" descr="{&quot;isTemplate&quot;:true,&quot;type&quot;:&quot;text&quot;}"/>
           <p:cNvSpPr txBox="1"/>
           <p:nvPr/>
         </p:nvSpPr>
@@ -15317,7 +16439,7 @@
       </p:sp>
       <p:sp>
         <p:nvSpPr>
-          <p:cNvPr id="339" name="" descr="{&quot;isTemplate&quot;:true,&quot;type&quot;:&quot;text&quot;}"/>
+          <p:cNvPr id="360" name="" descr="{&quot;isTemplate&quot;:true,&quot;type&quot;:&quot;text&quot;}"/>
           <p:cNvSpPr txBox="1"/>
           <p:nvPr/>
         </p:nvSpPr>
@@ -15354,7 +16476,7 @@
       </p:sp>
       <p:sp>
         <p:nvSpPr>
-          <p:cNvPr id="340" name=""/>
+          <p:cNvPr id="361" name=""/>
           <p:cNvSpPr/>
           <p:nvPr/>
         </p:nvSpPr>
@@ -15388,7 +16510,7 @@
       </p:sp>
       <p:sp>
         <p:nvSpPr>
-          <p:cNvPr id="341" name="" descr="{&quot;isTemplate&quot;:true,&quot;type&quot;:&quot;text&quot;}"/>
+          <p:cNvPr id="362" name="" descr="{&quot;isTemplate&quot;:true,&quot;type&quot;:&quot;text&quot;}"/>
           <p:cNvSpPr txBox="1"/>
           <p:nvPr/>
         </p:nvSpPr>
@@ -15433,7 +16555,7 @@
       </p:sp>
       <p:sp>
         <p:nvSpPr>
-          <p:cNvPr id="342" name=""/>
+          <p:cNvPr id="363" name=""/>
           <p:cNvSpPr/>
           <p:nvPr/>
         </p:nvSpPr>
@@ -15461,7 +16583,7 @@
       </p:sp>
       <p:sp>
         <p:nvSpPr>
-          <p:cNvPr id="343" name="" descr="{&quot;isTemplate&quot;:true,&quot;type&quot;:&quot;text&quot;}"/>
+          <p:cNvPr id="364" name="" descr="{&quot;isTemplate&quot;:true,&quot;type&quot;:&quot;text&quot;}"/>
           <p:cNvSpPr txBox="1"/>
           <p:nvPr/>
         </p:nvSpPr>
@@ -15496,7 +16618,7 @@
       </p:sp>
       <p:sp>
         <p:nvSpPr>
-          <p:cNvPr id="344" name="" descr="{&quot;isTemplate&quot;:true,&quot;type&quot;:&quot;text&quot;}"/>
+          <p:cNvPr id="365" name="" descr="{&quot;isTemplate&quot;:true,&quot;type&quot;:&quot;text&quot;}"/>
           <p:cNvSpPr txBox="1"/>
           <p:nvPr/>
         </p:nvSpPr>
@@ -15641,7 +16763,7 @@
       </p:sp>
       <p:sp>
         <p:nvSpPr>
-          <p:cNvPr id="345" name=""/>
+          <p:cNvPr id="366" name=""/>
           <p:cNvSpPr/>
           <p:nvPr/>
         </p:nvSpPr>
@@ -15669,7 +16791,7 @@
       </p:sp>
       <p:sp>
         <p:nvSpPr>
-          <p:cNvPr id="346" name="" descr="{&quot;isTemplate&quot;:true,&quot;type&quot;:&quot;text&quot;}"/>
+          <p:cNvPr id="367" name="" descr="{&quot;isTemplate&quot;:true,&quot;type&quot;:&quot;text&quot;}"/>
           <p:cNvSpPr txBox="1"/>
           <p:nvPr/>
         </p:nvSpPr>
@@ -15704,7 +16826,7 @@
       </p:sp>
       <p:sp>
         <p:nvSpPr>
-          <p:cNvPr id="347" name="" descr="{&quot;isTemplate&quot;:true,&quot;type&quot;:&quot;text&quot;}"/>
+          <p:cNvPr id="368" name="" descr="{&quot;isTemplate&quot;:true,&quot;type&quot;:&quot;text&quot;}"/>
           <p:cNvSpPr txBox="1"/>
           <p:nvPr/>
         </p:nvSpPr>
@@ -15813,7 +16935,7 @@
       </p:sp>
       <p:sp>
         <p:nvSpPr>
-          <p:cNvPr id="348" name=""/>
+          <p:cNvPr id="369" name=""/>
           <p:cNvSpPr/>
           <p:nvPr/>
         </p:nvSpPr>
@@ -15841,7 +16963,7 @@
       </p:sp>
       <p:sp>
         <p:nvSpPr>
-          <p:cNvPr id="349" name="" descr="{&quot;isTemplate&quot;:true,&quot;type&quot;:&quot;text&quot;}"/>
+          <p:cNvPr id="370" name="" descr="{&quot;isTemplate&quot;:true,&quot;type&quot;:&quot;text&quot;}"/>
           <p:cNvSpPr txBox="1"/>
           <p:nvPr/>
         </p:nvSpPr>
@@ -15876,7 +16998,7 @@
       </p:sp>
       <p:sp>
         <p:nvSpPr>
-          <p:cNvPr id="350" name="" descr="{&quot;isTemplate&quot;:true,&quot;type&quot;:&quot;text&quot;}"/>
+          <p:cNvPr id="371" name="" descr="{&quot;isTemplate&quot;:true,&quot;type&quot;:&quot;text&quot;}"/>
           <p:cNvSpPr txBox="1"/>
           <p:nvPr/>
         </p:nvSpPr>
@@ -15985,7 +17107,7 @@
       </p:sp>
       <p:sp>
         <p:nvSpPr>
-          <p:cNvPr id="351" name=""/>
+          <p:cNvPr id="372" name=""/>
           <p:cNvSpPr/>
           <p:nvPr/>
         </p:nvSpPr>
@@ -16027,7 +17149,7 @@
       </p:sp>
       <p:sp>
         <p:nvSpPr>
-          <p:cNvPr id="352" name="" descr="{&quot;isTemplate&quot;:true,&quot;type&quot;:&quot;text&quot;}"/>
+          <p:cNvPr id="373" name="" descr="{&quot;isTemplate&quot;:true,&quot;type&quot;:&quot;text&quot;}"/>
           <p:cNvSpPr txBox="1"/>
           <p:nvPr/>
         </p:nvSpPr>
@@ -16048,7 +17170,7 @@
       </p:sp>
       <p:sp>
         <p:nvSpPr>
-          <p:cNvPr id="353" name="" descr="{&quot;isTemplate&quot;:true,&quot;type&quot;:&quot;text&quot;}"/>
+          <p:cNvPr id="374" name="" descr="{&quot;isTemplate&quot;:true,&quot;type&quot;:&quot;text&quot;}"/>
           <p:cNvSpPr txBox="1"/>
           <p:nvPr/>
         </p:nvSpPr>
@@ -16069,7 +17191,7 @@
       </p:sp>
       <p:sp>
         <p:nvSpPr>
-          <p:cNvPr id="354" name="" descr="{&quot;isTemplate&quot;:true,&quot;type&quot;:&quot;text&quot;}"/>
+          <p:cNvPr id="375" name="" descr="{&quot;isTemplate&quot;:true,&quot;type&quot;:&quot;text&quot;}"/>
           <p:cNvSpPr txBox="1"/>
           <p:nvPr/>
         </p:nvSpPr>
@@ -16124,7 +17246,7 @@
       </p:sp>
       <p:sp>
         <p:nvSpPr>
-          <p:cNvPr id="355" name="" descr="{&quot;isTemplate&quot;:true,&quot;type&quot;:&quot;text&quot;}"/>
+          <p:cNvPr id="376" name="" descr="{&quot;isTemplate&quot;:true,&quot;type&quot;:&quot;text&quot;}"/>
           <p:cNvSpPr txBox="1"/>
           <p:nvPr/>
         </p:nvSpPr>
@@ -16167,7 +17289,7 @@
   <p:cSld>
     <p:spTree>
       <p:nvGrpSpPr>
-        <p:cNvPr id="356" name="" descr="&lt;Slide style={{ width: '1280px', height: '720px', background: '#FBFCFA', position: 'relative', padding: '40px 64px', boxSizing: 'border-box', display: 'flex', flexDirection: 'column' }}&gt;&#10;  &lt;div style={{ flexShrink: 0 }}&gt;&#10;    &lt;div style={{ color: '#BD9B56', fontSize: 13, letterSpacing: '0.25em', marginBottom: 8 }}&gt;02 · 技术构建过程&lt;/div&gt;&#10;    &lt;h2 style={{ fontSize: 30, fontWeight: 'bold', color: '#172133', margin: 0, lineHeight: 1.3 }}&gt;AI Agent 架构：LangGraph 多智能体协作&lt;/h2&gt;&#10;  &lt;/div&gt;&#10;  &lt;div style={{ flex: 1, display: 'flex', alignItems: 'center', gap: 32 }}&gt;&#10;    &lt;div style={{ flex: '0 0 560px', background: '#fff', borderRadius: 12, padding: '22px 24px', boxShadow: '0 6px 24px rgba(23,33,51,0.08)' }}&gt;&#10;      &lt;svg width=&quot;512&quot; height=&quot;470&quot; viewBox=&quot;0 0 512 470&quot;&gt;&#10;        &lt;defs&gt;&#10;          &lt;marker id=&quot;ar9&quot; viewBox=&quot;0 0 10 10&quot; refX=&quot;9&quot; refY=&quot;5&quot; markerWidth=&quot;6&quot; markerHeight=&quot;6&quot; orient=&quot;auto&quot;&gt;&#10;            &lt;path d=&quot;M0 0L10 5L0 10z&quot; fill=&quot;#BD9B56&quot; /&gt;&#10;          &lt;/marker&gt;&#10;        &lt;/defs&gt;&#10;        &lt;g fontFamily=&quot;Inter, sans-serif&quot;&gt;&#10;          &lt;rect x=&quot;156&quot; y=&quot;14&quot; width=&quot;200&quot; height=&quot;50&quot; rx=&quot;8&quot; fill=&quot;rgba(34,57,94,0.08)&quot; stroke=&quot;#22395E&quot; strokeWidth=&quot;1.5&quot; /&gt;&#10;          &lt;text x=&quot;256&quot; y=&quot;36&quot; textAnchor=&quot;middle&quot; fontSize=&quot;13&quot; fontWeight=&quot;bold&quot; fill=&quot;#172133&quot;&gt;用户自然语言输入&lt;/text&gt;&#10;          &lt;text x=&quot;256&quot; y=&quot;54&quot; textAnchor=&quot;middle&quot; fontSize=&quot;11&quot; fill=&quot;#5F5E5A&quot;&gt;「我家厨房漏水了」&lt;/text&gt;&#10;          &lt;line x1=&quot;256&quot; y1=&quot;64&quot; x2=&quot;256&quot; y2=&quot;84&quot; stroke=&quot;#BD9B56&quot; strokeWidth=&quot;1.5&quot; markerEnd=&quot;url(#ar9)&quot; /&gt;&#10;          &lt;rect x=&quot;96&quot; y=&quot;88&quot; width=&quot;320&quot; height=&quot;64&quot; rx=&quot;8&quot; fill=&quot;rgba(34,57,94,0.12)&quot; stroke=&quot;#22395E&quot; strokeWidth=&quot;2&quot; /&gt;&#10;          &lt;text x=&quot;256&quot; y=&quot;114&quot; textAnchor=&quot;middle&quot; fontSize=&quot;13&quot; fontWeight=&quot;bold&quot; fill=&quot;#BD9B56&quot;&gt;Router Agent · 意图分类&lt;/text&gt;&#10;          &lt;text x=&quot;256&quot; y=&quot;136&quot; textAnchor=&quot;middle&quot; fontSize=&quot;11&quot; fill=&quot;#172133&quot;&gt;报修 / 费用 / 公告 / 知识 / 上报&lt;/text&gt;&#10;          &lt;line x1=&quot;256&quot; y1=&quot;152&quot; x2=&quot;256&quot; y2=&quot;172&quot; stroke=&quot;#BD9B56&quot; strokeWidth=&quot;1.5&quot; markerEnd=&quot;url(#ar9)&quot; /&gt;&#10;          &lt;rect x=&quot;96&quot; y=&quot;176&quot; width=&quot;320&quot; height=&quot;64&quot; rx=&quot;8&quot; fill=&quot;rgba(189,155,86,0.10)&quot; stroke=&quot;#BD9B56&quot; strokeWidth=&quot;1.5&quot; /&gt;&#10;          &lt;text x=&quot;256&quot; y=&quot;202&quot; textAnchor=&quot;middle&quot; fontSize=&quot;13&quot; fontWeight=&quot;bold&quot; fill=&quot;#172133&quot;&gt;领域 Agent + 多轮状态机&lt;/text&gt;&#10;          &lt;text x=&quot;256&quot; y=&quot;224&quot; textAnchor=&quot;middle&quot; fontSize=&quot;11&quot; fill=&quot;#5F5E5A&quot;&gt;报修缺「位置/类型」→ 主动反问补全&lt;/text&gt;&#10;          &lt;line x1=&quot;256&quot; y1=&quot;240&quot; x2=&quot;256&quot; y2=&quot;260&quot; stroke=&quot;#BD9B56&quot; strokeWidth=&quot;1.5&quot; markerEnd=&quot;url(#ar9)&quot; /&gt;&#10;          &lt;rect x=&quot;16&quot; y=&quot;264&quot; width=&quot;140&quot; height=&quot;48&quot; rx=&quot;6&quot; fill=&quot;rgba(34,57,94,0.06)&quot; stroke=&quot;#22395E&quot; strokeWidth=&quot;1.5&quot; /&gt;&#10;          &lt;text x=&quot;86&quot; y=&quot;284&quot; textAnchor=&quot;middle&quot; fontSize=&quot;12&quot; fontWeight=&quot;bold&quot; fill=&quot;#172133&quot;&gt;create_repair&lt;/text&gt;&#10;          &lt;text x=&quot;86&quot; y=&quot;302&quot; textAnchor=&quot;middle&quot; fontSize=&quot;10&quot; fill=&quot;#5F5E5A&quot;&gt;创建工单&lt;/text&gt;&#10;          &lt;rect x=&quot;176&quot; y=&quot;264&quot; width=&quot;140&quot; height=&quot;48&quot; rx=&quot;6&quot; fill=&quot;rgba(34,57,94,0.06)&quot; stroke=&quot;#22395E&quot; strokeWidth=&quot;1.5&quot; /&gt;&#10;          &lt;text x=&quot;246&quot; y=&quot;284&quot; textAnchor=&quot;middle&quot; fontSize=&quot;12&quot; fontWeight=&quot;bold&quot; fill=&quot;#172133&quot;&gt;query_fee&lt;/text&gt;&#10;          &lt;text x=&quot;246&quot; y=&quot;302&quot; textAnchor=&quot;middle&quot; fontSize=&quot;10&quot; fill=&quot;#5F5E5A&quot;&gt;查询费用&lt;/text&gt;&#10;          &lt;rect x=&quot;336&quot; y=&quot;264&quot; width=&quot;160&quot; height=&quot;48&quot; rx=&quot;6&quot; fill=&quot;rgba(34,57,94,0.06)&quot; stroke=&quot;#22395E&quot; strokeWidth=&quot;1.5&quot; /&gt;&#10;          &lt;text x=&quot;416&quot; y=&quot;284&quot; textAnchor=&quot;middle&quot; fontSize=&quot;12&quot; fontWeight=&quot;bold&quot; fill=&quot;#172133&quot;&gt;search_knowledge&lt;/text&gt;&#10;          &lt;text x=&quot;416&quot; y=&quot;302&quot; textAnchor=&quot;middle&quot; fontSize=&quot;10&quot; fill=&quot;#5F5E5A&quot;&gt;检索知识&lt;/text&gt;&#10;          &lt;line x1=&quot;256&quot; y1=&quot;260&quot; x2=&quot;256&quot; y2=&quot;288&quot; stroke=&quot;#22395E&quot; strokeWidth=&quot;1.2&quot; /&gt;&#10;          &lt;line x1=&quot;256&quot; y1=&quot;288&quot; x2=&quot;86&quot; y2=&quot;288&quot; stroke=&quot;#22395E&quot; strokeWidth=&quot;1.2&quot; /&gt;&#10;          &lt;line x1=&quot;256&quot; y1=&quot;288&quot; x2=&quot;246&quot; y2=&quot;288&quot; stroke=&quot;#22395E&quot; strokeWidth=&quot;1.2&quot; /&gt;&#10;          &lt;line x1=&quot;256&quot; y1=&quot;288&quot; x2=&quot;416&quot; y2=&quot;288&quot; stroke=&quot;#22395E&quot; strokeWidth=&quot;1.2&quot; /&gt;&#10;          &lt;line x1=&quot;86&quot; y1=&quot;312&quot; x2=&quot;86&quot; y2=&quot;332&quot; stroke=&quot;#22395E&quot; strokeWidth=&quot;1.2&quot; /&gt;&#10;          &lt;line x1=&quot;246&quot; y1=&quot;312&quot; x2=&quot;246&quot; y2=&quot;332&quot; stroke=&quot;#22395E&quot; strokeWidth=&quot;1.2&quot; /&gt;&#10;          &lt;line x1=&quot;416&quot; y1=&quot;312&quot; x2=&quot;416&quot; y2=&quot;332&quot; stroke=&quot;#22395E&quot; strokeWidth=&quot;1.2&quot; /&gt;&#10;          &lt;rect x=&quot;16&quot; y=&quot;336&quot; width=&quot;480&quot; height=&quot;42&quot; rx=&quot;6&quot; fill=&quot;#172133&quot; /&gt;&#10;          &lt;text x=&quot;256&quot; y=&quot;362&quot; textAnchor=&quot;middle&quot; fontSize=&quot;12&quot; fontWeight=&quot;bold&quot; fill=&quot;#BD9B56&quot;&gt;业务 API 层 · 工具执行 · Trace 全程记录可评估&lt;/text&gt;&#10;          &lt;text x=&quot;256&quot; y=&quot;410&quot; textAnchor=&quot;middle&quot; fontSize=&quot;12&quot; fill=&quot;#5F5E5A&quot;&gt;驱动模型：智谱 GLM-4-Flash · 编排框架：LangGraph&lt;/text&gt;&#10;        &lt;/g&gt;&#10;      &lt;/svg&gt;&#10;    &lt;/div&gt;&#10;    &lt;div style={{ flex: 1, display: 'flex', flexDirection: 'column', gap: 18 }}&gt;&#10;      &lt;div&gt;&#10;        &lt;div style={{ fontSize: 14, color: '#BD9B56', fontWeight: 'bold', letterSpacing: '0.1em', marginBottom: 6 }}&gt;1.  多轮状态机&lt;/div&gt;&#10;        &lt;p style={{ fontSize: 14, color: '#5F5E5A', margin: 0, lineHeight: 1.65 }}&gt;报修不是单轮问答——业主只说「厨房漏水」时，Agent 会主动追问房屋位置、故障类型，把信息补全后才创建工单，避免生成残缺工单。&lt;/p&gt;&#10;      &lt;/div&gt;&#10;      &lt;div&gt;&#10;        &lt;div style={{ fontSize: 14, color: '#BD9B56', fontWeight: 'bold', letterSpacing: '0.1em', marginBottom: 6 }}&gt;2.  五类意图&lt;/div&gt;&#10;        &lt;p style={{ fontSize: 14, color: '#5F5E5A', margin: 0, lineHeight: 1.65 }}&gt;报修、费用、公告、知识咨询、问题上报，自然语言直达对应业务工具，实测意图识别准确率 100%。&lt;/p&gt;&#10;      &lt;/div&gt;&#10;      &lt;div&gt;&#10;        &lt;div style={{ fontSize: 14, color: '#BD9B56', fontWeight: 'bold', letterSpacing: '0.1em', marginBottom: 6 }}&gt;3.  可观测可评估&lt;/div&gt;&#10;        &lt;p style={{ fontSize: 14, color: '#5F5E5A', margin: 0, lineHeight: 1.65 }}&gt;每次对话的意图、工具、结果全程记录 Trace，可回放、可评估，是量化评估体系的数据基础。&lt;/p&gt;&#10;      &lt;/div&gt;&#10;    &lt;/div&gt;&#10;  &lt;/div&gt;&#10;  &lt;div style={{ flexShrink: 0, height: 40, display: 'flex', alignItems: 'flex-end', justifyContent: 'space-between' }}&gt;&#10;    &lt;span style={{ color: '#BD9B56', fontSize: 12, letterSpacing: '0.1em' }}&gt;云溪花园 · 智慧社区&lt;/span&gt;&#10;    &lt;span style={{ color: '#a09b8c', fontSize: 12 }}&gt;09 / 15&lt;/span&gt;&#10;  &lt;/div&gt;&#10;&lt;/Slide&gt;"/>
+        <p:cNvPr id="377" name="" descr="&lt;Slide style={{ width: '1280px', height: '720px', background: '#FBFCFA', position: 'relative', padding: '40px 64px', boxSizing: 'border-box', display: 'flex', flexDirection: 'column' }}&gt;&#10;  &lt;div style={{ flexShrink: 0 }}&gt;&#10;    &lt;div style={{ color: '#BD9B56', fontSize: 13, letterSpacing: '0.25em', marginBottom: 8 }}&gt;02 · 技术构建过程&lt;/div&gt;&#10;    &lt;h2 style={{ fontSize: 30, fontWeight: 'bold', color: '#172133', margin: 0, lineHeight: 1.3 }}&gt;AI Agent 架构：LangGraph 多智能体协作&lt;/h2&gt;&#10;  &lt;/div&gt;&#10;  &lt;div style={{ flex: 1, display: 'flex', alignItems: 'center', gap: 32 }}&gt;&#10;    &lt;div style={{ flex: '0 0 560px', background: '#fff', borderRadius: 12, padding: '22px 24px', boxShadow: '0 6px 24px rgba(23,33,51,0.08)' }}&gt;&#10;      &lt;svg width=&quot;512&quot; height=&quot;470&quot; viewBox=&quot;0 0 512 470&quot;&gt;&#10;        &lt;defs&gt;&#10;          &lt;marker id=&quot;ar9&quot; viewBox=&quot;0 0 10 10&quot; refX=&quot;9&quot; refY=&quot;5&quot; markerWidth=&quot;6&quot; markerHeight=&quot;6&quot; orient=&quot;auto&quot;&gt;&#10;            &lt;path d=&quot;M0 0L10 5L0 10z&quot; fill=&quot;#BD9B56&quot; /&gt;&#10;          &lt;/marker&gt;&#10;        &lt;/defs&gt;&#10;        &lt;g fontFamily=&quot;Inter, sans-serif&quot;&gt;&#10;          &lt;rect x=&quot;156&quot; y=&quot;14&quot; width=&quot;200&quot; height=&quot;50&quot; rx=&quot;8&quot; fill=&quot;rgba(34,57,94,0.08)&quot; stroke=&quot;#22395E&quot; strokeWidth=&quot;1.5&quot; /&gt;&#10;          &lt;text x=&quot;256&quot; y=&quot;36&quot; textAnchor=&quot;middle&quot; fontSize=&quot;13&quot; fontWeight=&quot;bold&quot; fill=&quot;#172133&quot;&gt;用户自然语言输入&lt;/text&gt;&#10;          &lt;text x=&quot;256&quot; y=&quot;54&quot; textAnchor=&quot;middle&quot; fontSize=&quot;11&quot; fill=&quot;#5F5E5A&quot;&gt;「我家厨房漏水了」&lt;/text&gt;&#10;          &lt;line x1=&quot;256&quot; y1=&quot;64&quot; x2=&quot;256&quot; y2=&quot;84&quot; stroke=&quot;#BD9B56&quot; strokeWidth=&quot;1.5&quot; markerEnd=&quot;url(#ar9)&quot; /&gt;&#10;          &lt;rect x=&quot;96&quot; y=&quot;88&quot; width=&quot;320&quot; height=&quot;64&quot; rx=&quot;8&quot; fill=&quot;rgba(34,57,94,0.12)&quot; stroke=&quot;#22395E&quot; strokeWidth=&quot;2&quot; /&gt;&#10;          &lt;text x=&quot;256&quot; y=&quot;114&quot; textAnchor=&quot;middle&quot; fontSize=&quot;13&quot; fontWeight=&quot;bold&quot; fill=&quot;#BD9B56&quot;&gt;Router Agent · 意图分类&lt;/text&gt;&#10;          &lt;text x=&quot;256&quot; y=&quot;136&quot; textAnchor=&quot;middle&quot; fontSize=&quot;11&quot; fill=&quot;#172133&quot;&gt;报修 / 费用 / 公告 / 知识 / 上报&lt;/text&gt;&#10;          &lt;line x1=&quot;256&quot; y1=&quot;152&quot; x2=&quot;256&quot; y2=&quot;172&quot; stroke=&quot;#BD9B56&quot; strokeWidth=&quot;1.5&quot; markerEnd=&quot;url(#ar9)&quot; /&gt;&#10;          &lt;rect x=&quot;96&quot; y=&quot;176&quot; width=&quot;320&quot; height=&quot;64&quot; rx=&quot;8&quot; fill=&quot;rgba(189,155,86,0.10)&quot; stroke=&quot;#BD9B56&quot; strokeWidth=&quot;1.5&quot; /&gt;&#10;          &lt;text x=&quot;256&quot; y=&quot;202&quot; textAnchor=&quot;middle&quot; fontSize=&quot;13&quot; fontWeight=&quot;bold&quot; fill=&quot;#172133&quot;&gt;领域 Agent + 多轮状态机&lt;/text&gt;&#10;          &lt;text x=&quot;256&quot; y=&quot;224&quot; textAnchor=&quot;middle&quot; fontSize=&quot;11&quot; fill=&quot;#5F5E5A&quot;&gt;报修缺「位置/类型」→ 主动反问补全&lt;/text&gt;&#10;          &lt;line x1=&quot;256&quot; y1=&quot;240&quot; x2=&quot;256&quot; y2=&quot;260&quot; stroke=&quot;#BD9B56&quot; strokeWidth=&quot;1.5&quot; markerEnd=&quot;url(#ar9)&quot; /&gt;&#10;          &lt;rect x=&quot;16&quot; y=&quot;264&quot; width=&quot;140&quot; height=&quot;48&quot; rx=&quot;6&quot; fill=&quot;rgba(34,57,94,0.06)&quot; stroke=&quot;#22395E&quot; strokeWidth=&quot;1.5&quot; /&gt;&#10;          &lt;text x=&quot;86&quot; y=&quot;284&quot; textAnchor=&quot;middle&quot; fontSize=&quot;12&quot; fontWeight=&quot;bold&quot; fill=&quot;#172133&quot;&gt;create_repair&lt;/text&gt;&#10;          &lt;text x=&quot;86&quot; y=&quot;302&quot; textAnchor=&quot;middle&quot; fontSize=&quot;10&quot; fill=&quot;#5F5E5A&quot;&gt;创建工单&lt;/text&gt;&#10;          &lt;rect x=&quot;176&quot; y=&quot;264&quot; width=&quot;140&quot; height=&quot;48&quot; rx=&quot;6&quot; fill=&quot;rgba(34,57,94,0.06)&quot; stroke=&quot;#22395E&quot; strokeWidth=&quot;1.5&quot; /&gt;&#10;          &lt;text x=&quot;246&quot; y=&quot;284&quot; textAnchor=&quot;middle&quot; fontSize=&quot;12&quot; fontWeight=&quot;bold&quot; fill=&quot;#172133&quot;&gt;query_fee&lt;/text&gt;&#10;          &lt;text x=&quot;246&quot; y=&quot;302&quot; textAnchor=&quot;middle&quot; fontSize=&quot;10&quot; fill=&quot;#5F5E5A&quot;&gt;查询费用&lt;/text&gt;&#10;          &lt;rect x=&quot;336&quot; y=&quot;264&quot; width=&quot;160&quot; height=&quot;48&quot; rx=&quot;6&quot; fill=&quot;rgba(34,57,94,0.06)&quot; stroke=&quot;#22395E&quot; strokeWidth=&quot;1.5&quot; /&gt;&#10;          &lt;text x=&quot;416&quot; y=&quot;284&quot; textAnchor=&quot;middle&quot; fontSize=&quot;12&quot; fontWeight=&quot;bold&quot; fill=&quot;#172133&quot;&gt;search_knowledge&lt;/text&gt;&#10;          &lt;text x=&quot;416&quot; y=&quot;302&quot; textAnchor=&quot;middle&quot; fontSize=&quot;10&quot; fill=&quot;#5F5E5A&quot;&gt;检索知识&lt;/text&gt;&#10;          &lt;line x1=&quot;256&quot; y1=&quot;260&quot; x2=&quot;256&quot; y2=&quot;288&quot; stroke=&quot;#22395E&quot; strokeWidth=&quot;1.2&quot; /&gt;&#10;          &lt;line x1=&quot;256&quot; y1=&quot;288&quot; x2=&quot;86&quot; y2=&quot;288&quot; stroke=&quot;#22395E&quot; strokeWidth=&quot;1.2&quot; /&gt;&#10;          &lt;line x1=&quot;256&quot; y1=&quot;288&quot; x2=&quot;246&quot; y2=&quot;288&quot; stroke=&quot;#22395E&quot; strokeWidth=&quot;1.2&quot; /&gt;&#10;          &lt;line x1=&quot;256&quot; y1=&quot;288&quot; x2=&quot;416&quot; y2=&quot;288&quot; stroke=&quot;#22395E&quot; strokeWidth=&quot;1.2&quot; /&gt;&#10;          &lt;line x1=&quot;86&quot; y1=&quot;312&quot; x2=&quot;86&quot; y2=&quot;332&quot; stroke=&quot;#22395E&quot; strokeWidth=&quot;1.2&quot; /&gt;&#10;          &lt;line x1=&quot;246&quot; y1=&quot;312&quot; x2=&quot;246&quot; y2=&quot;332&quot; stroke=&quot;#22395E&quot; strokeWidth=&quot;1.2&quot; /&gt;&#10;          &lt;line x1=&quot;416&quot; y1=&quot;312&quot; x2=&quot;416&quot; y2=&quot;332&quot; stroke=&quot;#22395E&quot; strokeWidth=&quot;1.2&quot; /&gt;&#10;          &lt;rect x=&quot;16&quot; y=&quot;336&quot; width=&quot;480&quot; height=&quot;42&quot; rx=&quot;6&quot; fill=&quot;#172133&quot; /&gt;&#10;          &lt;text x=&quot;256&quot; y=&quot;362&quot; textAnchor=&quot;middle&quot; fontSize=&quot;12&quot; fontWeight=&quot;bold&quot; fill=&quot;#BD9B56&quot;&gt;业务 API 层 · 工具执行 · Trace 全程记录可评估&lt;/text&gt;&#10;          &lt;text x=&quot;256&quot; y=&quot;410&quot; textAnchor=&quot;middle&quot; fontSize=&quot;12&quot; fill=&quot;#5F5E5A&quot;&gt;驱动模型：智谱 GLM-4-Flash · 编排框架：LangGraph&lt;/text&gt;&#10;        &lt;/g&gt;&#10;      &lt;/svg&gt;&#10;    &lt;/div&gt;&#10;    &lt;div style={{ flex: 1, display: 'flex', flexDirection: 'column', gap: 18 }}&gt;&#10;      &lt;div&gt;&#10;        &lt;div style={{ fontSize: 14, color: '#BD9B56', fontWeight: 'bold', letterSpacing: '0.1em', marginBottom: 6 }}&gt;1.  多轮状态机&lt;/div&gt;&#10;        &lt;p style={{ fontSize: 14, color: '#5F5E5A', margin: 0, lineHeight: 1.65 }}&gt;报修不是单轮问答——业主只说「厨房漏水」时，Agent 会主动追问房屋位置、故障类型，把信息补全后才创建工单，避免生成残缺工单。&lt;/p&gt;&#10;      &lt;/div&gt;&#10;      &lt;div&gt;&#10;        &lt;div style={{ fontSize: 14, color: '#BD9B56', fontWeight: 'bold', letterSpacing: '0.1em', marginBottom: 6 }}&gt;2.  五类意图&lt;/div&gt;&#10;        &lt;p style={{ fontSize: 14, color: '#5F5E5A', margin: 0, lineHeight: 1.65 }}&gt;报修、费用、公告、知识咨询、问题上报，自然语言直达对应业务工具，实测意图识别准确率 100%。&lt;/p&gt;&#10;      &lt;/div&gt;&#10;      &lt;div&gt;&#10;        &lt;div style={{ fontSize: 14, color: '#BD9B56', fontWeight: 'bold', letterSpacing: '0.1em', marginBottom: 6 }}&gt;3.  可观测可评估&lt;/div&gt;&#10;        &lt;p style={{ fontSize: 14, color: '#5F5E5A', margin: 0, lineHeight: 1.65 }}&gt;每次对话的意图、工具、结果全程记录 Trace，可回放、可评估，是量化评估体系的数据基础。&lt;/p&gt;&#10;      &lt;/div&gt;&#10;    &lt;/div&gt;&#10;  &lt;/div&gt;&#10;  &lt;div style={{ flexShrink: 0, height: 40, display: 'flex', alignItems: 'flex-end', justifyContent: 'space-between' }}&gt;&#10;    &lt;span style={{ color: '#BD9B56', fontSize: 12, letterSpacing: '0.1em' }}&gt;云溪花园 · 智慧社区&lt;/span&gt;&#10;    &lt;span style={{ color: '#a09b8c', fontSize: 12 }}&gt;09 / 15&lt;/span&gt;&#10;  &lt;/div&gt;&#10;&lt;/Slide&gt;"/>
         <p:cNvGrpSpPr/>
         <p:nvPr/>
       </p:nvGrpSpPr>
@@ -16181,7 +17303,7 @@
       </p:grpSpPr>
       <p:sp>
         <p:nvSpPr>
-          <p:cNvPr id="357" name=""/>
+          <p:cNvPr id="378" name=""/>
           <p:cNvSpPr/>
           <p:nvPr/>
         </p:nvSpPr>
@@ -16205,7 +17327,7 @@
       </p:sp>
       <p:sp>
         <p:nvSpPr>
-          <p:cNvPr id="358" name="" descr="{&quot;isTemplate&quot;:true,&quot;type&quot;:&quot;text&quot;}"/>
+          <p:cNvPr id="379" name="" descr="{&quot;isTemplate&quot;:true,&quot;type&quot;:&quot;text&quot;}"/>
           <p:cNvSpPr txBox="1"/>
           <p:nvPr/>
         </p:nvSpPr>
@@ -16250,7 +17372,7 @@
       </p:sp>
       <p:sp>
         <p:nvSpPr>
-          <p:cNvPr id="359" name="" descr="{&quot;isTemplate&quot;:true,&quot;type&quot;:&quot;text&quot;}"/>
+          <p:cNvPr id="380" name="" descr="{&quot;isTemplate&quot;:true,&quot;type&quot;:&quot;text&quot;}"/>
           <p:cNvSpPr txBox="1"/>
           <p:nvPr/>
         </p:nvSpPr>
@@ -16315,7 +17437,7 @@
       </p:sp>
       <p:sp>
         <p:nvSpPr>
-          <p:cNvPr id="360" name=""/>
+          <p:cNvPr id="381" name=""/>
           <p:cNvSpPr/>
           <p:nvPr/>
         </p:nvSpPr>
@@ -16348,7 +17470,7 @@
       </p:sp>
       <p:pic>
         <p:nvPicPr>
-          <p:cNvPr id="361" name=""/>
+          <p:cNvPr id="382" name=""/>
           <p:cNvPicPr>
             <a:picLocks noChangeAspect="1"/>
           </p:cNvPicPr>
@@ -16379,7 +17501,7 @@
       </p:pic>
       <p:sp>
         <p:nvSpPr>
-          <p:cNvPr id="362" name="" descr="{&quot;isTemplate&quot;:true,&quot;type&quot;:&quot;text&quot;}"/>
+          <p:cNvPr id="383" name="" descr="{&quot;isTemplate&quot;:true,&quot;type&quot;:&quot;text&quot;}"/>
           <p:cNvSpPr txBox="1"/>
           <p:nvPr/>
         </p:nvSpPr>
@@ -16424,7 +17546,7 @@
       </p:sp>
       <p:sp>
         <p:nvSpPr>
-          <p:cNvPr id="363" name="" descr="{&quot;isTemplate&quot;:true,&quot;type&quot;:&quot;text&quot;}"/>
+          <p:cNvPr id="384" name="" descr="{&quot;isTemplate&quot;:true,&quot;type&quot;:&quot;text&quot;}"/>
           <p:cNvSpPr txBox="1"/>
           <p:nvPr/>
         </p:nvSpPr>
@@ -16481,7 +17603,7 @@
       </p:sp>
       <p:sp>
         <p:nvSpPr>
-          <p:cNvPr id="364" name="" descr="{&quot;isTemplate&quot;:true,&quot;type&quot;:&quot;text&quot;}"/>
+          <p:cNvPr id="385" name="" descr="{&quot;isTemplate&quot;:true,&quot;type&quot;:&quot;text&quot;}"/>
           <p:cNvSpPr txBox="1"/>
           <p:nvPr/>
         </p:nvSpPr>
@@ -16526,7 +17648,7 @@
       </p:sp>
       <p:sp>
         <p:nvSpPr>
-          <p:cNvPr id="365" name="" descr="{&quot;isTemplate&quot;:true,&quot;type&quot;:&quot;text&quot;}"/>
+          <p:cNvPr id="386" name="" descr="{&quot;isTemplate&quot;:true,&quot;type&quot;:&quot;text&quot;}"/>
           <p:cNvSpPr txBox="1"/>
           <p:nvPr/>
         </p:nvSpPr>
@@ -16583,7 +17705,7 @@
       </p:sp>
       <p:sp>
         <p:nvSpPr>
-          <p:cNvPr id="366" name="" descr="{&quot;isTemplate&quot;:true,&quot;type&quot;:&quot;text&quot;}"/>
+          <p:cNvPr id="387" name="" descr="{&quot;isTemplate&quot;:true,&quot;type&quot;:&quot;text&quot;}"/>
           <p:cNvSpPr txBox="1"/>
           <p:nvPr/>
         </p:nvSpPr>
@@ -16628,7 +17750,7 @@
       </p:sp>
       <p:sp>
         <p:nvSpPr>
-          <p:cNvPr id="367" name="" descr="{&quot;isTemplate&quot;:true,&quot;type&quot;:&quot;text&quot;}"/>
+          <p:cNvPr id="388" name="" descr="{&quot;isTemplate&quot;:true,&quot;type&quot;:&quot;text&quot;}"/>
           <p:cNvSpPr txBox="1"/>
           <p:nvPr/>
         </p:nvSpPr>
@@ -16685,7 +17807,7 @@
       </p:sp>
       <p:sp>
         <p:nvSpPr>
-          <p:cNvPr id="368" name="" descr="{&quot;isTemplate&quot;:true,&quot;type&quot;:&quot;text&quot;}"/>
+          <p:cNvPr id="389" name="" descr="{&quot;isTemplate&quot;:true,&quot;type&quot;:&quot;text&quot;}"/>
           <p:cNvSpPr txBox="1"/>
           <p:nvPr/>
         </p:nvSpPr>
@@ -16740,7 +17862,7 @@
       </p:sp>
       <p:sp>
         <p:nvSpPr>
-          <p:cNvPr id="369" name="" descr="{&quot;isTemplate&quot;:true,&quot;type&quot;:&quot;text&quot;}"/>
+          <p:cNvPr id="390" name="" descr="{&quot;isTemplate&quot;:true,&quot;type&quot;:&quot;text&quot;}"/>
           <p:cNvSpPr txBox="1"/>
           <p:nvPr/>
         </p:nvSpPr>

--- a/ppt/AI物业社区智能体方案/AI物业社区智能体-方案.pptx
+++ b/ppt/AI物业社区智能体方案/AI物业社区智能体-方案.pptx
@@ -6623,7 +6623,7 @@
   <p:cSld>
     <p:spTree>
       <p:nvGrpSpPr>
-        <p:cNvPr id="133" name="" descr="&lt;Slide style={{ width: '1280px', height: '720px', background: '#FBFCFA', position: 'relative', padding: '34px 64px', boxSizing: 'border-box', display: 'flex', flexDirection: 'column' }}&gt;&#10;  &lt;div style={{ flexShrink: 0 }}&gt;&#10;    &lt;div style={{ color: '#BD9B56', fontSize: 13, letterSpacing: '0.25em', marginBottom: 6 }}&gt;04 · 总结与展望&lt;/div&gt;&#10;    &lt;h2 style={{ fontSize: 30, fontWeight: 'bold', color: '#172133', margin: 0, lineHeight: 1.3 }}&gt;技术路线回顾：七个阶段 · 从 0 到上线&lt;/h2&gt;&#10;    &lt;div style={{ fontSize: 14, color: '#6b7075', marginTop: 6 }}&gt;每个阶段都有代码、测试、可运行交付，循序渐进验证&lt;/div&gt;&#10;  &lt;/div&gt;&#10;  &lt;div style={{ flex: 1, display: 'flex', alignItems: 'center', justifyContent: 'center' }}&gt;&#10;    &lt;div style={{ width: '100%', background: '#fff', borderRadius: 12, padding: '28px 30px', boxShadow: '0 6px 24px rgba(23,33,51,0.08)' }}&gt;&#10;      &lt;svg width=&quot;1090&quot; height=&quot;330&quot; viewBox=&quot;0 0 1090 330&quot;&gt;&#10;        &lt;g fontFamily=&quot;Inter, sans-serif&quot;&gt;&#10;          &lt;line x1=&quot;55&quot; y1=&quot;50&quot; x2=&quot;1045&quot; y2=&quot;50&quot; stroke=&quot;#22395E&quot; strokeWidth=&quot;2.5&quot; /&gt;&#10;          {[&#10;            ['P0', '项目初始化', '仓库 · Docker · CI'],&#10;            ['P1', '数据库', '15+ 表 + 仿真数据'],&#10;            ['P2', '后端', 'FastAPI 分层'],&#10;            ['P3', '前端', '三端 + PWA'],&#10;            ['P4', 'AI Agent', '多意图 + 状态机'],&#10;            ['P5', 'RAG', '向量化检索'],&#10;            ['P6', '评估', 'Intent/Tool/RAG'],&#10;            ['P7', '部署', '已上线'],&#10;          ].map(([p, t, d], i) =&gt; (&#10;            &lt;g key={p}&gt;&#10;              &lt;circle cx={55 + i * 140} cy={50} r=&quot;10&quot; fill=&quot;#BD9B56&quot; /&gt;&#10;              &lt;text x={55 + i * 140} y={22} textAnchor=&quot;middle&quot; fontSize=&quot;13&quot; fontWeight=&quot;bold&quot; fill=&quot;#BD9B56&quot;&gt;{p}&lt;/text&gt;&#10;              &lt;rect x={55 + i * 140 - 58} y={80} width=&quot;116&quot; height=&quot;56&quot; rx=&quot;8&quot; fill=&quot;rgba(34,57,94,0.06)&quot; stroke=&quot;#22395E&quot; strokeWidth=&quot;1.5&quot; /&gt;&#10;              &lt;text x={55 + i * 140} y={112} textAnchor=&quot;middle&quot; fontSize=&quot;14&quot; fontWeight=&quot;bold&quot; fill=&quot;#172133&quot;&gt;{t}&lt;/text&gt;&#10;              &lt;text x={55 + i * 140} y={150} textAnchor=&quot;middle&quot; fontSize=&quot;11&quot; fill=&quot;#5F5E5A&quot;&gt;{d}&lt;/text&gt;&#10;            &lt;/g&gt;&#10;          ))}&#10;          &lt;text x=&quot;55&quot; y=&quot;220&quot; fontSize=&quot;12&quot; fill=&quot;#5F5E5A&quot;&gt;交付：可运行骨架&lt;/text&gt;&#10;          &lt;text x=&quot;195&quot; y=&quot;220&quot; fontSize=&quot;12&quot; fill=&quot;#5F5E5A&quot;&gt;交付：数据就绪&lt;/text&gt;&#10;          &lt;text x=&quot;335&quot; y=&quot;220&quot; fontSize=&quot;12&quot; fill=&quot;#5F5E5A&quot;&gt;交付：API 可调用&lt;/text&gt;&#10;          &lt;text x=&quot;475&quot; y=&quot;220&quot; fontSize=&quot;12&quot; fill=&quot;#5F5E5A&quot;&gt;交付：三端成型&lt;/text&gt;&#10;          &lt;text x=&quot;615&quot; y=&quot;220&quot; fontSize=&quot;12&quot; fill=&quot;#5F5E5A&quot;&gt;交付：自然语言办事&lt;/text&gt;&#10;          &lt;text x=&quot;755&quot; y=&quot;220&quot; fontSize=&quot;12&quot; fill=&quot;#5F5E5A&quot;&gt;交付：知识问答&lt;/text&gt;&#10;          &lt;text x=&quot;895&quot; y=&quot;220&quot; fontSize=&quot;12&quot; fill=&quot;#5F5E5A&quot;&gt;交付：评估报告&lt;/text&gt;&#10;          &lt;text x=&quot;1035&quot; y=&quot;220&quot; fontSize=&quot;12&quot; fill=&quot;#5F5E5A&quot;&gt;交付：线上运行&lt;/text&gt;&#10;        &lt;/g&gt;&#10;      &lt;/svg&gt;&#10;      &lt;div style={{ marginTop: 14, display: 'flex', gap: 14 }}&gt;&#10;        &lt;div style={{ flex: 1, background: 'rgba(189,155,86,0.08)', borderRadius: 8, padding: '12px 14px' }}&gt;&#10;          &lt;div style={{ fontSize: 13, color: '#BD9B56', fontWeight: 'bold', marginBottom: 5 }}&gt;P1 数据一致性&lt;/div&gt;&#10;          &lt;p style={{ fontSize: 12, color: '#5F5E5A', margin: 0, lineHeight: 1.5 }}&gt;1664 套房源 + 746 账单，外键关联保证数据一致，8 个 SQL 可复现&lt;/p&gt;&#10;        &lt;/div&gt;&#10;        &lt;div style={{ flex: 1, background: 'rgba(189,155,86,0.08)', borderRadius: 8, padding: '12px 14px' }}&gt;&#10;          &lt;div style={{ fontSize: 13, color: '#BD9B56', fontWeight: 'bold', marginBottom: 5 }}&gt;P4 多轮状态机&lt;/div&gt;&#10;          &lt;p style={{ fontSize: 12, color: '#5F5E5A', margin: 0, lineHeight: 1.5 }}&gt;报修主动追问缺省字段，避免生成残缺工单&lt;/p&gt;&#10;        &lt;/div&gt;&#10;        &lt;div style={{ flex: 1, background: 'rgba(189,155,86,0.08)', borderRadius: 8, padding: '12px 14px' }}&gt;&#10;          &lt;div style={{ fontSize: 13, color: '#BD9B56', fontWeight: 'bold', marginBottom: 5 }}&gt;P6 评估找 bug&lt;/div&gt;&#10;          &lt;p style={{ fontSize: 12, color: '#5F5E5A', margin: 0, lineHeight: 1.5 }}&gt;意图 83%→100%、答案 50%→100%，数据驱动优化&lt;/p&gt;&#10;        &lt;/div&gt;&#10;        &lt;div style={{ flex: 1, background: 'rgba(189,155,86,0.08)', borderRadius: 8, padding: '12px 14px' }}&gt;&#10;          &lt;div style={{ fontSize: 13, color: '#BD9B56', fontWeight: 'bold', marginBottom: 5 }}&gt;P7 部署踩坑&lt;/div&gt;&#10;          &lt;p style={{ fontSize: 12, color: '#5F5E5A', margin: 0, lineHeight: 1.5 }}&gt;国内镜像源、SECRET_KEY、端口映射逐一踩平&lt;/p&gt;&#10;        &lt;/div&gt;&#10;      &lt;/div&gt;&#10;    &lt;/div&gt;&#10;  &lt;/div&gt;&#10;  &lt;div style={{ flexShrink: 0, height: 40, display: 'flex', alignItems: 'flex-end', justifyContent: 'space-between' }}&gt;&#10;    &lt;span style={{ color: '#BD9B56', fontSize: 12, letterSpacing: '0.1em' }}&gt;云溪花园 · 智慧社区&lt;/span&gt;&#10;    &lt;span style={{ color: '#a09b8c', fontSize: 12 }}&gt;13 / 15&lt;/span&gt;&#10;  &lt;/div&gt;&#10;&lt;/Slide&gt;"/>
+        <p:cNvPr id="133" name="" descr="&lt;Slide style={{ width: '1280px', height: '720px', background: '#FBFCFA', position: 'relative', padding: '36px 64px', boxSizing: 'border-box', display: 'flex', flexDirection: 'column' }}&gt;&#10;  &lt;div style={{ flexShrink: 0 }}&gt;&#10;    &lt;div style={{ color: '#BD9B56', fontSize: 13, letterSpacing: '0.25em', marginBottom: 6 }}&gt;04 · 总结与展望&lt;/div&gt;&#10;    &lt;h2 style={{ fontSize: 30, fontWeight: 'bold', color: '#172133', margin: 0, lineHeight: 1.3 }}&gt;技术路线回顾：八个阶段 · 从 0 到上线&lt;/h2&gt;&#10;    &lt;div style={{ fontSize: 14, color: '#6b7075', marginTop: 6 }}&gt;每个阶段都有代码、测试、可运行交付，循序渐进验证&lt;/div&gt;&#10;  &lt;/div&gt;&#10;  &lt;div style={{ flex: 1, display: 'flex', alignItems: 'center', justifyContent: 'center' }}&gt;&#10;    &lt;div style={{ width: '100%', background: '#fff', borderRadius: 12, padding: '30px 26px', boxShadow: '0 6px 24px rgba(23,33,51,0.08)' }}&gt;&#10;      &lt;svg width=&quot;1100&quot; height=&quot;300&quot; viewBox=&quot;0 0 1100 300&quot;&gt;&#10;        &lt;g fontFamily=&quot;Inter, sans-serif&quot;&gt;&#10;          {/* 主时间轴 */}&#10;          &lt;line x1=&quot;60&quot; y1=&quot;70&quot; x2=&quot;1060&quot; y2=&quot;70&quot; stroke=&quot;#22395E&quot; strokeWidth=&quot;2.5&quot; /&gt;&#10;          {[&#10;            ['P0', '项目初始化', '仓库 · Docker · CI'],&#10;            ['P1', '数据库', '21 表 + 仿真数据'],&#10;            ['P2', '后端', 'FastAPI 三层'],&#10;            ['P3', '前端', '三端 + PWA'],&#10;            ['P4', 'AI Agent', '多意图 + 状态机'],&#10;            ['P5', 'RAG', '向量化检索'],&#10;            ['P6', '评估', 'Intent/Tool/RAG'],&#10;            ['P7', '部署', '已上线'],&#10;          ].map(([p, t, d], i) =&gt; {&#10;            const cx = 60 + i * 143&#10;            return (&#10;              &lt;g key={p}&gt;&#10;                {/* 节点圆 */}&#10;                &lt;circle cx={cx} cy={70} r=&quot;9&quot; fill=&quot;#BD9B56&quot; /&gt;&#10;                &lt;circle cx={cx} cy={70} r=&quot;14&quot; fill=&quot;none&quot; stroke=&quot;#BD9B56&quot; strokeWidth=&quot;1.5&quot; strokeOpacity=&quot;0.35&quot; /&gt;&#10;                {/* 阶段标签 */}&#10;                &lt;text x={cx} y={46} textAnchor=&quot;middle&quot; fontSize=&quot;13&quot; fontWeight=&quot;bold&quot; fill=&quot;#BD9B56&quot;&gt;{p}&lt;/text&gt;&#10;                {/* 阶段名 */}&#10;                &lt;text x={cx} y={112} textAnchor=&quot;middle&quot; fontSize=&quot;15&quot; fontWeight=&quot;bold&quot; fill=&quot;#172133&quot;&gt;{t}&lt;/text&gt;&#10;                {/* 描述 */}&#10;                &lt;text x={cx} y={134} textAnchor=&quot;middle&quot; fontSize=&quot;11.5&quot; fill=&quot;#5F5E5A&quot;&gt;{d}&lt;/text&gt;&#10;                {/* 下方小圆点连接 */}&#10;                &lt;line x1={cx} y1={79} x2={cx} y2={100} stroke=&quot;#BD9B56&quot; strokeWidth=&quot;1.5&quot; strokeOpacity=&quot;0.5&quot; /&gt;&#10;              &lt;/g&gt;&#10;            )&#10;          })}&#10;        &lt;/g&gt;&#10;      &lt;/svg&gt;&#10;      &lt;div style={{ marginTop: 16, display: 'flex', gap: 14 }}&gt;&#10;        &lt;div style={{ flex: 1, background: 'rgba(189,155,86,0.08)', borderRadius: 8, padding: '12px 14px', borderLeft: '3px solid #BD9B56' }}&gt;&#10;          &lt;div style={{ fontSize: 13, color: '#BD9B56', fontWeight: 'bold', marginBottom: 5 }}&gt;P1 · 数据一致性&lt;/div&gt;&#10;          &lt;p style={{ fontSize: 12, color: '#5F5E5A', margin: 0, lineHeight: 1.5 }}&gt;8 栋 / 1664 套 / 746 账单，外键关联保证一致，8 个 SQL 可复现&lt;/p&gt;&#10;        &lt;/div&gt;&#10;        &lt;div style={{ flex: 1, background: 'rgba(189,155,86,0.08)', borderRadius: 8, padding: '12px 14px', borderLeft: '3px solid #BD9B56' }}&gt;&#10;          &lt;div style={{ fontSize: 13, color: '#BD9B56', fontWeight: 'bold', marginBottom: 5 }}&gt;P4 · 多轮状态机&lt;/div&gt;&#10;          &lt;p style={{ fontSize: 12, color: '#5F5E5A', margin: 0, lineHeight: 1.5 }}&gt;报修主动追问缺省字段，避免生成残缺工单&lt;/p&gt;&#10;        &lt;/div&gt;&#10;        &lt;div style={{ flex: 1, background: 'rgba(189,155,86,0.08)', borderRadius: 8, padding: '12px 14px', borderLeft: '3px solid #BD9B56' }}&gt;&#10;          &lt;div style={{ fontSize: 13, color: '#BD9B56', fontWeight: 'bold', marginBottom: 5 }}&gt;P6 · 评估找 bug&lt;/div&gt;&#10;          &lt;p style={{ fontSize: 12, color: '#5F5E5A', margin: 0, lineHeight: 1.5 }}&gt;意图 83.33%→100%、答案 50%→100%，数据驱动优化&lt;/p&gt;&#10;        &lt;/div&gt;&#10;        &lt;div style={{ flex: 1, background: 'rgba(189,155,86,0.08)', borderRadius: 8, padding: '12px 14px', borderLeft: '3px solid #BD9B56' }}&gt;&#10;          &lt;div style={{ fontSize: 13, color: '#BD9B56', fontWeight: 'bold', marginBottom: 5 }}&gt;P7 · 部署踩坑&lt;/div&gt;&#10;          &lt;p style={{ fontSize: 12, color: '#5F5E5A', margin: 0, lineHeight: 1.5 }}&gt;国内镜像源、SECRET_KEY、端口映射逐一踩平&lt;/p&gt;&#10;        &lt;/div&gt;&#10;      &lt;/div&gt;&#10;    &lt;/div&gt;&#10;  &lt;/div&gt;&#10;  &lt;div style={{ flexShrink: 0, height: 40, display: 'flex', alignItems: 'flex-end', justifyContent: 'space-between' }}&gt;&#10;    &lt;span style={{ color: '#BD9B56', fontSize: 12, letterSpacing: '0.1em' }}&gt;云溪花园 · 智慧社区&lt;/span&gt;&#10;    &lt;span style={{ color: '#a09b8c', fontSize: 12 }}&gt;13 / 15&lt;/span&gt;&#10;  &lt;/div&gt;&#10;&lt;/Slide&gt;"/>
         <p:cNvGrpSpPr/>
         <p:nvPr/>
       </p:nvGrpSpPr>
@@ -6667,7 +6667,7 @@
         </p:nvSpPr>
         <p:spPr>
           <a:xfrm rot="0" flipH="0" flipV="0">
-            <a:off x="609600" y="323850"/>
+            <a:off x="609600" y="342900"/>
             <a:ext cx="10972800" cy="152400"/>
           </a:xfrm>
           <a:prstGeom prst="rect"/>
@@ -6712,7 +6712,7 @@
         </p:nvSpPr>
         <p:spPr>
           <a:xfrm rot="0" flipH="0" flipV="0">
-            <a:off x="609600" y="533400"/>
+            <a:off x="609600" y="552450"/>
             <a:ext cx="10972800" cy="447675"/>
           </a:xfrm>
           <a:prstGeom prst="rect"/>
@@ -6733,7 +6733,7 @@
                 <a:latin typeface="Microsoft YaHei"/>
                 <a:ea typeface="Microsoft YaHei"/>
               </a:rPr>
-              <a:t>技术路线回顾：七个阶段</a:t>
+              <a:t>技术路线回顾：八个阶段</a:t>
             </a:r>
             <a:r>
               <a:rPr lang="en-US" sz="2250" b="1">
@@ -6787,7 +6787,7 @@
         </p:nvSpPr>
         <p:spPr>
           <a:xfrm rot="0" flipH="0" flipV="0">
-            <a:off x="609600" y="1038225"/>
+            <a:off x="609600" y="1057275"/>
             <a:ext cx="10972800" cy="161925"/>
           </a:xfrm>
           <a:prstGeom prst="rect"/>
@@ -6822,12 +6822,12 @@
         </p:nvSpPr>
         <p:spPr>
           <a:xfrm rot="0" flipH="0" flipV="0">
-            <a:off x="609600" y="1352550"/>
-            <a:ext cx="10972800" cy="4657725"/>
+            <a:off x="609600" y="1466850"/>
+            <a:ext cx="10972800" cy="4429125"/>
           </a:xfrm>
           <a:prstGeom prst="roundRect">
             <a:avLst>
-              <a:gd name="adj" fmla="val 2454"/>
+              <a:gd name="adj" fmla="val 2581"/>
             </a:avLst>
           </a:prstGeom>
           <a:solidFill>
@@ -6869,8 +6869,8 @@
         </p:blipFill>
         <p:spPr>
           <a:xfrm rot="0" flipH="0" flipV="0">
-            <a:off x="895350" y="1619250"/>
-            <a:ext cx="10382250" cy="3143250"/>
+            <a:off x="857250" y="1752600"/>
+            <a:ext cx="10477500" cy="2857500"/>
           </a:xfrm>
           <a:prstGeom prst="rect">
             <a:avLst/>
@@ -6886,8 +6886,8 @@
         </p:nvSpPr>
         <p:spPr>
           <a:xfrm rot="0" flipH="0" flipV="0">
-            <a:off x="895350" y="4895850"/>
-            <a:ext cx="2505075" cy="847725"/>
+            <a:off x="885825" y="4762500"/>
+            <a:ext cx="2524125" cy="847725"/>
           </a:xfrm>
           <a:prstGeom prst="roundRect">
             <a:avLst>
@@ -6908,14 +6908,71 @@
       </p:sp>
       <p:sp>
         <p:nvSpPr>
-          <p:cNvPr id="141" name="" descr="{&quot;isTemplate&quot;:true,&quot;type&quot;:&quot;text&quot;}"/>
-          <p:cNvSpPr txBox="1"/>
-          <p:nvPr/>
-        </p:nvSpPr>
-        <p:spPr>
-          <a:xfrm rot="0" flipH="0" flipV="0">
-            <a:off x="1028700" y="5010150"/>
-            <a:ext cx="2238375" cy="152400"/>
+          <p:cNvPr id="141" name=""/>
+          <p:cNvSpPr/>
+          <p:nvPr/>
+        </p:nvSpPr>
+        <p:spPr>
+          <a:xfrm rot="0" flipH="0" flipV="0">
+            <a:off x="885825" y="4762500"/>
+            <a:ext cx="2524125" cy="847725"/>
+          </a:xfrm>
+          <a:custGeom>
+            <a:pathLst>
+              <a:path w="265" h="89">
+                <a:moveTo>
+                  <a:pt x="8" y="0"/>
+                </a:moveTo>
+                <a:cubicBezTo>
+                  <a:pt x="5" y="0"/>
+                  <a:pt x="3" y="2"/>
+                  <a:pt x="3" y="5"/>
+                </a:cubicBezTo>
+                <a:lnTo>
+                  <a:pt x="3" y="84"/>
+                </a:lnTo>
+                <a:cubicBezTo>
+                  <a:pt x="3" y="86"/>
+                  <a:pt x="5" y="88"/>
+                  <a:pt x="7" y="89"/>
+                </a:cubicBezTo>
+                <a:cubicBezTo>
+                  <a:pt x="3" y="88"/>
+                  <a:pt x="0" y="85"/>
+                  <a:pt x="0" y="81"/>
+                </a:cubicBezTo>
+                <a:lnTo>
+                  <a:pt x="0" y="8"/>
+                </a:lnTo>
+                <a:cubicBezTo>
+                  <a:pt x="0" y="4"/>
+                  <a:pt x="3" y="0"/>
+                  <a:pt x="8" y="0"/>
+                </a:cubicBezTo>
+                <a:close/>
+              </a:path>
+            </a:pathLst>
+          </a:custGeom>
+          <a:solidFill>
+            <a:srgbClr val="BD9B56"/>
+          </a:solidFill>
+          <a:ln/>
+        </p:spPr>
+        <p:txBody>
+          <a:bodyPr/>
+          <a:p/>
+        </p:txBody>
+      </p:sp>
+      <p:sp>
+        <p:nvSpPr>
+          <p:cNvPr id="142" name="" descr="{&quot;isTemplate&quot;:true,&quot;type&quot;:&quot;text&quot;}"/>
+          <p:cNvSpPr txBox="1"/>
+          <p:nvPr/>
+        </p:nvSpPr>
+        <p:spPr>
+          <a:xfrm rot="0" flipH="0" flipV="0">
+            <a:off x="1019175" y="4876800"/>
+            <a:ext cx="2228850" cy="152400"/>
           </a:xfrm>
           <a:prstGeom prst="rect"/>
         </p:spPr>
@@ -6935,7 +6992,7 @@
                 <a:latin typeface="Microsoft YaHei"/>
                 <a:ea typeface="Microsoft YaHei"/>
               </a:rPr>
-              <a:t>P1 </a:t>
+              <a:t>P1 · </a:t>
             </a:r>
             <a:r>
               <a:rPr lang="zh-CN" sz="975">
@@ -6953,14 +7010,14 @@
       </p:sp>
       <p:sp>
         <p:nvSpPr>
-          <p:cNvPr id="142" name="" descr="{&quot;isTemplate&quot;:true,&quot;type&quot;:&quot;text&quot;}"/>
-          <p:cNvSpPr txBox="1"/>
-          <p:nvPr/>
-        </p:nvSpPr>
-        <p:spPr>
-          <a:xfrm rot="0" flipH="0" flipV="0">
-            <a:off x="1028700" y="5210175"/>
-            <a:ext cx="2238375" cy="419100"/>
+          <p:cNvPr id="143" name="" descr="{&quot;isTemplate&quot;:true,&quot;type&quot;:&quot;text&quot;}"/>
+          <p:cNvSpPr txBox="1"/>
+          <p:nvPr/>
+        </p:nvSpPr>
+        <p:spPr>
+          <a:xfrm rot="0" flipH="0" flipV="0">
+            <a:off x="1019175" y="5076825"/>
+            <a:ext cx="2228850" cy="419100"/>
           </a:xfrm>
           <a:prstGeom prst="rect"/>
         </p:spPr>
@@ -6982,7 +7039,7 @@
                 <a:latin typeface="Microsoft YaHei"/>
                 <a:ea typeface="Microsoft YaHei"/>
               </a:rPr>
-              <a:t>1664 </a:t>
+              <a:t>8 </a:t>
             </a:r>
             <a:r>
               <a:rPr lang="zh-CN" sz="900">
@@ -6992,7 +7049,7 @@
                 <a:latin typeface="Microsoft YaHei"/>
                 <a:ea typeface="Microsoft YaHei"/>
               </a:rPr>
-              <a:t>套房源</a:t>
+              <a:t>栋</a:t>
             </a:r>
             <a:r>
               <a:rPr lang="en-US" sz="900">
@@ -7002,7 +7059,7 @@
                 <a:latin typeface="Microsoft YaHei"/>
                 <a:ea typeface="Microsoft YaHei"/>
               </a:rPr>
-              <a:t> + 746 </a:t>
+              <a:t> / 1664 </a:t>
             </a:r>
             <a:r>
               <a:rPr lang="zh-CN" sz="900">
@@ -7012,7 +7069,7 @@
                 <a:latin typeface="Microsoft YaHei"/>
                 <a:ea typeface="Microsoft YaHei"/>
               </a:rPr>
-              <a:t>账单，外键关联保证数据一致，</a:t>
+              <a:t>套</a:t>
             </a:r>
             <a:r>
               <a:rPr lang="en-US" sz="900">
@@ -7022,6 +7079,26 @@
                 <a:latin typeface="Microsoft YaHei"/>
                 <a:ea typeface="Microsoft YaHei"/>
               </a:rPr>
+              <a:t> / 746 </a:t>
+            </a:r>
+            <a:r>
+              <a:rPr lang="zh-CN" sz="900">
+                <a:solidFill>
+                  <a:srgbClr val="5F5E5A"/>
+                </a:solidFill>
+                <a:latin typeface="Microsoft YaHei"/>
+                <a:ea typeface="Microsoft YaHei"/>
+              </a:rPr>
+              <a:t>账单，外键关联保证一致，</a:t>
+            </a:r>
+            <a:r>
+              <a:rPr lang="en-US" sz="900">
+                <a:solidFill>
+                  <a:srgbClr val="5F5E5A"/>
+                </a:solidFill>
+                <a:latin typeface="Microsoft YaHei"/>
+                <a:ea typeface="Microsoft YaHei"/>
+              </a:rPr>
               <a:t>8 </a:t>
             </a:r>
             <a:r>
@@ -7060,14 +7137,14 @@
       </p:sp>
       <p:sp>
         <p:nvSpPr>
-          <p:cNvPr id="143" name=""/>
+          <p:cNvPr id="144" name=""/>
           <p:cNvSpPr/>
           <p:nvPr/>
         </p:nvSpPr>
         <p:spPr>
           <a:xfrm rot="0" flipH="0" flipV="0">
-            <a:off x="3533775" y="4895850"/>
-            <a:ext cx="2495550" cy="847725"/>
+            <a:off x="3543300" y="4762500"/>
+            <a:ext cx="2514600" cy="847725"/>
           </a:xfrm>
           <a:prstGeom prst="roundRect">
             <a:avLst>
@@ -7088,14 +7165,71 @@
       </p:sp>
       <p:sp>
         <p:nvSpPr>
-          <p:cNvPr id="144" name="" descr="{&quot;isTemplate&quot;:true,&quot;type&quot;:&quot;text&quot;}"/>
-          <p:cNvSpPr txBox="1"/>
-          <p:nvPr/>
-        </p:nvSpPr>
-        <p:spPr>
-          <a:xfrm rot="0" flipH="0" flipV="0">
-            <a:off x="3667125" y="5010150"/>
-            <a:ext cx="2228850" cy="152400"/>
+          <p:cNvPr id="145" name=""/>
+          <p:cNvSpPr/>
+          <p:nvPr/>
+        </p:nvSpPr>
+        <p:spPr>
+          <a:xfrm rot="0" flipH="0" flipV="0">
+            <a:off x="3543300" y="4762500"/>
+            <a:ext cx="2514600" cy="847725"/>
+          </a:xfrm>
+          <a:custGeom>
+            <a:pathLst>
+              <a:path w="264" h="89">
+                <a:moveTo>
+                  <a:pt x="8" y="0"/>
+                </a:moveTo>
+                <a:cubicBezTo>
+                  <a:pt x="5" y="0"/>
+                  <a:pt x="3" y="2"/>
+                  <a:pt x="3" y="5"/>
+                </a:cubicBezTo>
+                <a:lnTo>
+                  <a:pt x="3" y="84"/>
+                </a:lnTo>
+                <a:cubicBezTo>
+                  <a:pt x="3" y="86"/>
+                  <a:pt x="5" y="88"/>
+                  <a:pt x="7" y="89"/>
+                </a:cubicBezTo>
+                <a:cubicBezTo>
+                  <a:pt x="3" y="88"/>
+                  <a:pt x="0" y="85"/>
+                  <a:pt x="0" y="81"/>
+                </a:cubicBezTo>
+                <a:lnTo>
+                  <a:pt x="0" y="8"/>
+                </a:lnTo>
+                <a:cubicBezTo>
+                  <a:pt x="0" y="4"/>
+                  <a:pt x="3" y="0"/>
+                  <a:pt x="8" y="0"/>
+                </a:cubicBezTo>
+                <a:close/>
+              </a:path>
+            </a:pathLst>
+          </a:custGeom>
+          <a:solidFill>
+            <a:srgbClr val="BD9B56"/>
+          </a:solidFill>
+          <a:ln/>
+        </p:spPr>
+        <p:txBody>
+          <a:bodyPr/>
+          <a:p/>
+        </p:txBody>
+      </p:sp>
+      <p:sp>
+        <p:nvSpPr>
+          <p:cNvPr id="146" name="" descr="{&quot;isTemplate&quot;:true,&quot;type&quot;:&quot;text&quot;}"/>
+          <p:cNvSpPr txBox="1"/>
+          <p:nvPr/>
+        </p:nvSpPr>
+        <p:spPr>
+          <a:xfrm rot="0" flipH="0" flipV="0">
+            <a:off x="3676650" y="4876800"/>
+            <a:ext cx="2219325" cy="152400"/>
           </a:xfrm>
           <a:prstGeom prst="rect"/>
         </p:spPr>
@@ -7115,7 +7249,7 @@
                 <a:latin typeface="Microsoft YaHei"/>
                 <a:ea typeface="Microsoft YaHei"/>
               </a:rPr>
-              <a:t>P4 </a:t>
+              <a:t>P4 · </a:t>
             </a:r>
             <a:r>
               <a:rPr lang="zh-CN" sz="975">
@@ -7133,14 +7267,14 @@
       </p:sp>
       <p:sp>
         <p:nvSpPr>
-          <p:cNvPr id="145" name="" descr="{&quot;isTemplate&quot;:true,&quot;type&quot;:&quot;text&quot;}"/>
-          <p:cNvSpPr txBox="1"/>
-          <p:nvPr/>
-        </p:nvSpPr>
-        <p:spPr>
-          <a:xfrm rot="0" flipH="0" flipV="0">
-            <a:off x="3667125" y="5210175"/>
-            <a:ext cx="2228850" cy="209550"/>
+          <p:cNvPr id="147" name="" descr="{&quot;isTemplate&quot;:true,&quot;type&quot;:&quot;text&quot;}"/>
+          <p:cNvSpPr txBox="1"/>
+          <p:nvPr/>
+        </p:nvSpPr>
+        <p:spPr>
+          <a:xfrm rot="0" flipH="0" flipV="0">
+            <a:off x="3676650" y="5076825"/>
+            <a:ext cx="2219325" cy="209550"/>
           </a:xfrm>
           <a:prstGeom prst="rect"/>
         </p:spPr>
@@ -7168,14 +7302,14 @@
       </p:sp>
       <p:sp>
         <p:nvSpPr>
-          <p:cNvPr id="146" name=""/>
+          <p:cNvPr id="148" name=""/>
           <p:cNvSpPr/>
           <p:nvPr/>
         </p:nvSpPr>
         <p:spPr>
           <a:xfrm rot="0" flipH="0" flipV="0">
-            <a:off x="6162675" y="4895850"/>
-            <a:ext cx="2505075" cy="847725"/>
+            <a:off x="6191250" y="4762500"/>
+            <a:ext cx="2524125" cy="847725"/>
           </a:xfrm>
           <a:prstGeom prst="roundRect">
             <a:avLst>
@@ -7196,14 +7330,71 @@
       </p:sp>
       <p:sp>
         <p:nvSpPr>
-          <p:cNvPr id="147" name="" descr="{&quot;isTemplate&quot;:true,&quot;type&quot;:&quot;text&quot;}"/>
-          <p:cNvSpPr txBox="1"/>
-          <p:nvPr/>
-        </p:nvSpPr>
-        <p:spPr>
-          <a:xfrm rot="0" flipH="0" flipV="0">
-            <a:off x="6296025" y="5010150"/>
-            <a:ext cx="2238375" cy="152400"/>
+          <p:cNvPr id="149" name=""/>
+          <p:cNvSpPr/>
+          <p:nvPr/>
+        </p:nvSpPr>
+        <p:spPr>
+          <a:xfrm rot="0" flipH="0" flipV="0">
+            <a:off x="6191250" y="4762500"/>
+            <a:ext cx="2524125" cy="847725"/>
+          </a:xfrm>
+          <a:custGeom>
+            <a:pathLst>
+              <a:path w="265" h="89">
+                <a:moveTo>
+                  <a:pt x="8" y="0"/>
+                </a:moveTo>
+                <a:cubicBezTo>
+                  <a:pt x="5" y="0"/>
+                  <a:pt x="3" y="2"/>
+                  <a:pt x="3" y="5"/>
+                </a:cubicBezTo>
+                <a:lnTo>
+                  <a:pt x="3" y="84"/>
+                </a:lnTo>
+                <a:cubicBezTo>
+                  <a:pt x="3" y="86"/>
+                  <a:pt x="5" y="88"/>
+                  <a:pt x="7" y="89"/>
+                </a:cubicBezTo>
+                <a:cubicBezTo>
+                  <a:pt x="3" y="88"/>
+                  <a:pt x="0" y="85"/>
+                  <a:pt x="0" y="81"/>
+                </a:cubicBezTo>
+                <a:lnTo>
+                  <a:pt x="0" y="8"/>
+                </a:lnTo>
+                <a:cubicBezTo>
+                  <a:pt x="0" y="4"/>
+                  <a:pt x="3" y="0"/>
+                  <a:pt x="8" y="0"/>
+                </a:cubicBezTo>
+                <a:close/>
+              </a:path>
+            </a:pathLst>
+          </a:custGeom>
+          <a:solidFill>
+            <a:srgbClr val="BD9B56"/>
+          </a:solidFill>
+          <a:ln/>
+        </p:spPr>
+        <p:txBody>
+          <a:bodyPr/>
+          <a:p/>
+        </p:txBody>
+      </p:sp>
+      <p:sp>
+        <p:nvSpPr>
+          <p:cNvPr id="150" name="" descr="{&quot;isTemplate&quot;:true,&quot;type&quot;:&quot;text&quot;}"/>
+          <p:cNvSpPr txBox="1"/>
+          <p:nvPr/>
+        </p:nvSpPr>
+        <p:spPr>
+          <a:xfrm rot="0" flipH="0" flipV="0">
+            <a:off x="6324600" y="4876800"/>
+            <a:ext cx="2228850" cy="152400"/>
           </a:xfrm>
           <a:prstGeom prst="rect"/>
         </p:spPr>
@@ -7223,7 +7414,7 @@
                 <a:latin typeface="Microsoft YaHei"/>
                 <a:ea typeface="Microsoft YaHei"/>
               </a:rPr>
-              <a:t>P6 </a:t>
+              <a:t>P6 · </a:t>
             </a:r>
             <a:r>
               <a:rPr lang="zh-CN" sz="975">
@@ -7251,14 +7442,14 @@
       </p:sp>
       <p:sp>
         <p:nvSpPr>
-          <p:cNvPr id="148" name="" descr="{&quot;isTemplate&quot;:true,&quot;type&quot;:&quot;text&quot;}"/>
-          <p:cNvSpPr txBox="1"/>
-          <p:nvPr/>
-        </p:nvSpPr>
-        <p:spPr>
-          <a:xfrm rot="0" flipH="0" flipV="0">
-            <a:off x="6296025" y="5210175"/>
-            <a:ext cx="2238375" cy="419100"/>
+          <p:cNvPr id="151" name="" descr="{&quot;isTemplate&quot;:true,&quot;type&quot;:&quot;text&quot;}"/>
+          <p:cNvSpPr txBox="1"/>
+          <p:nvPr/>
+        </p:nvSpPr>
+        <p:spPr>
+          <a:xfrm rot="0" flipH="0" flipV="0">
+            <a:off x="6324600" y="5076825"/>
+            <a:ext cx="2228850" cy="419100"/>
           </a:xfrm>
           <a:prstGeom prst="rect"/>
         </p:spPr>
@@ -7290,7 +7481,7 @@
                 <a:latin typeface="Microsoft YaHei"/>
                 <a:ea typeface="Microsoft YaHei"/>
               </a:rPr>
-              <a:t> 83%→100%</a:t>
+              <a:t> 83.33%→100%</a:t>
             </a:r>
             <a:r>
               <a:rPr lang="zh-CN" sz="900">
@@ -7328,14 +7519,14 @@
       </p:sp>
       <p:sp>
         <p:nvSpPr>
-          <p:cNvPr id="149" name=""/>
+          <p:cNvPr id="152" name=""/>
           <p:cNvSpPr/>
           <p:nvPr/>
         </p:nvSpPr>
         <p:spPr>
           <a:xfrm rot="0" flipH="0" flipV="0">
-            <a:off x="8801100" y="4895850"/>
-            <a:ext cx="2495550" cy="847725"/>
+            <a:off x="8848725" y="4762500"/>
+            <a:ext cx="2514600" cy="847725"/>
           </a:xfrm>
           <a:prstGeom prst="roundRect">
             <a:avLst>
@@ -7356,14 +7547,71 @@
       </p:sp>
       <p:sp>
         <p:nvSpPr>
-          <p:cNvPr id="150" name="" descr="{&quot;isTemplate&quot;:true,&quot;type&quot;:&quot;text&quot;}"/>
-          <p:cNvSpPr txBox="1"/>
-          <p:nvPr/>
-        </p:nvSpPr>
-        <p:spPr>
-          <a:xfrm rot="0" flipH="0" flipV="0">
-            <a:off x="8934450" y="5010150"/>
-            <a:ext cx="2228850" cy="152400"/>
+          <p:cNvPr id="153" name=""/>
+          <p:cNvSpPr/>
+          <p:nvPr/>
+        </p:nvSpPr>
+        <p:spPr>
+          <a:xfrm rot="0" flipH="0" flipV="0">
+            <a:off x="8848725" y="4762500"/>
+            <a:ext cx="2514600" cy="847725"/>
+          </a:xfrm>
+          <a:custGeom>
+            <a:pathLst>
+              <a:path w="264" h="89">
+                <a:moveTo>
+                  <a:pt x="8" y="0"/>
+                </a:moveTo>
+                <a:cubicBezTo>
+                  <a:pt x="5" y="0"/>
+                  <a:pt x="3" y="2"/>
+                  <a:pt x="3" y="5"/>
+                </a:cubicBezTo>
+                <a:lnTo>
+                  <a:pt x="3" y="84"/>
+                </a:lnTo>
+                <a:cubicBezTo>
+                  <a:pt x="3" y="86"/>
+                  <a:pt x="5" y="88"/>
+                  <a:pt x="7" y="89"/>
+                </a:cubicBezTo>
+                <a:cubicBezTo>
+                  <a:pt x="3" y="88"/>
+                  <a:pt x="0" y="85"/>
+                  <a:pt x="0" y="81"/>
+                </a:cubicBezTo>
+                <a:lnTo>
+                  <a:pt x="0" y="8"/>
+                </a:lnTo>
+                <a:cubicBezTo>
+                  <a:pt x="0" y="4"/>
+                  <a:pt x="3" y="0"/>
+                  <a:pt x="8" y="0"/>
+                </a:cubicBezTo>
+                <a:close/>
+              </a:path>
+            </a:pathLst>
+          </a:custGeom>
+          <a:solidFill>
+            <a:srgbClr val="BD9B56"/>
+          </a:solidFill>
+          <a:ln/>
+        </p:spPr>
+        <p:txBody>
+          <a:bodyPr/>
+          <a:p/>
+        </p:txBody>
+      </p:sp>
+      <p:sp>
+        <p:nvSpPr>
+          <p:cNvPr id="154" name="" descr="{&quot;isTemplate&quot;:true,&quot;type&quot;:&quot;text&quot;}"/>
+          <p:cNvSpPr txBox="1"/>
+          <p:nvPr/>
+        </p:nvSpPr>
+        <p:spPr>
+          <a:xfrm rot="0" flipH="0" flipV="0">
+            <a:off x="8982075" y="4876800"/>
+            <a:ext cx="2219325" cy="152400"/>
           </a:xfrm>
           <a:prstGeom prst="rect"/>
         </p:spPr>
@@ -7383,7 +7631,7 @@
                 <a:latin typeface="Microsoft YaHei"/>
                 <a:ea typeface="Microsoft YaHei"/>
               </a:rPr>
-              <a:t>P7 </a:t>
+              <a:t>P7 · </a:t>
             </a:r>
             <a:r>
               <a:rPr lang="zh-CN" sz="975">
@@ -7401,14 +7649,14 @@
       </p:sp>
       <p:sp>
         <p:nvSpPr>
-          <p:cNvPr id="151" name="" descr="{&quot;isTemplate&quot;:true,&quot;type&quot;:&quot;text&quot;}"/>
-          <p:cNvSpPr txBox="1"/>
-          <p:nvPr/>
-        </p:nvSpPr>
-        <p:spPr>
-          <a:xfrm rot="0" flipH="0" flipV="0">
-            <a:off x="8934450" y="5210175"/>
-            <a:ext cx="2228850" cy="419100"/>
+          <p:cNvPr id="155" name="" descr="{&quot;isTemplate&quot;:true,&quot;type&quot;:&quot;text&quot;}"/>
+          <p:cNvSpPr txBox="1"/>
+          <p:nvPr/>
+        </p:nvSpPr>
+        <p:spPr>
+          <a:xfrm rot="0" flipH="0" flipV="0">
+            <a:off x="8982075" y="5076825"/>
+            <a:ext cx="2219325" cy="419100"/>
           </a:xfrm>
           <a:prstGeom prst="rect"/>
         </p:spPr>
@@ -7458,13 +7706,13 @@
       </p:sp>
       <p:sp>
         <p:nvSpPr>
-          <p:cNvPr id="152" name="" descr="{&quot;isTemplate&quot;:true,&quot;type&quot;:&quot;text&quot;}"/>
-          <p:cNvSpPr txBox="1"/>
-          <p:nvPr/>
-        </p:nvSpPr>
-        <p:spPr>
-          <a:xfrm rot="0" flipH="0" flipV="0">
-            <a:off x="609600" y="6391275"/>
+          <p:cNvPr id="156" name="" descr="{&quot;isTemplate&quot;:true,&quot;type&quot;:&quot;text&quot;}"/>
+          <p:cNvSpPr txBox="1"/>
+          <p:nvPr/>
+        </p:nvSpPr>
+        <p:spPr>
+          <a:xfrm rot="0" flipH="0" flipV="0">
+            <a:off x="609600" y="6372225"/>
             <a:ext cx="1009650" cy="142875"/>
           </a:xfrm>
           <a:prstGeom prst="rect"/>
@@ -7513,13 +7761,13 @@
       </p:sp>
       <p:sp>
         <p:nvSpPr>
-          <p:cNvPr id="153" name="" descr="{&quot;isTemplate&quot;:true,&quot;type&quot;:&quot;text&quot;}"/>
-          <p:cNvSpPr txBox="1"/>
-          <p:nvPr/>
-        </p:nvSpPr>
-        <p:spPr>
-          <a:xfrm rot="0" flipH="0" flipV="0">
-            <a:off x="11191875" y="6391275"/>
+          <p:cNvPr id="157" name="" descr="{&quot;isTemplate&quot;:true,&quot;type&quot;:&quot;text&quot;}"/>
+          <p:cNvSpPr txBox="1"/>
+          <p:nvPr/>
+        </p:nvSpPr>
+        <p:spPr>
+          <a:xfrm rot="0" flipH="0" flipV="0">
+            <a:off x="11191875" y="6372225"/>
             <a:ext cx="390525" cy="142875"/>
           </a:xfrm>
           <a:prstGeom prst="rect"/>
@@ -7556,7 +7804,7 @@
   <p:cSld>
     <p:spTree>
       <p:nvGrpSpPr>
-        <p:cNvPr id="154" name="" descr="&lt;Slide style={{ width: '1280px', height: '720px', background: '#FBFCFA', position: 'relative', padding: '26px 52px', boxSizing: 'border-box', display: 'flex', flexDirection: 'column' }}&gt;&#10;  &lt;div style={{ flexShrink: 0 }}&gt;&#10;    &lt;div style={{ color: '#BD9B56', fontSize: 12, letterSpacing: '0.25em', marginBottom: 4 }}&gt;04 · 总结与展望&lt;/div&gt;&#10;    &lt;h2 style={{ fontSize: 25, fontWeight: 'bold', color: '#172133', margin: 0, lineHeight: 1.2 }}&gt;三端功能 × 实现技术：每个功能怎么做出来的&lt;/h2&gt;&#10;  &lt;/div&gt;&#10;  &lt;div style={{ flex: 1, display: 'flex', alignItems: 'stretch', gap: 18, marginTop: 10 }}&gt;&#10;    {/* 左栏：三端功能实现 */}&#10;    &lt;div style={{ flex: 1, display: 'flex', flexDirection: 'column', gap: 8 }}&gt;&#10;      {/* 业主端 */}&#10;      &lt;div style={{ background: '#fff', borderRadius: 10, padding: '10px 14px', boxShadow: '0 4px 16px rgba(23,33,51,0.06)' }}&gt;&#10;        &lt;div style={{ display: 'flex', alignItems: 'center', gap: 8, marginBottom: 6 }}&gt;&#10;          &lt;span style={{ fontSize: 14, fontWeight: 'bold', color: '#172133' }}&gt;业主端&lt;/span&gt;&#10;          &lt;span style={{ fontSize: 10.5, color: '#BD9B56', background: 'rgba(189,155,86,0.12)', padding: '2px 7px', borderRadius: 4 }}&gt;ToC · Owner&lt;/span&gt;&#10;        &lt;/div&gt;&#10;        &lt;div style={{ display: 'flex', flexDirection: 'column', gap: 3.5 }}&gt;&#10;          &lt;div style={{ display: 'flex', gap: 8, alignItems: 'baseline', fontSize: 11.5, lineHeight: 1.4 }}&gt;&lt;span style={{ color: '#172133', fontWeight: 'bold', minWidth: 56 }}&gt;AI 助手&lt;/span&gt;&lt;span style={{ color: '#6b7075' }}&gt;LangGraph 多 Agent：Personal 对话 → Router 意图识别 → Domain 工具调用&lt;/span&gt;&lt;/div&gt;&#10;          &lt;div style={{ display: 'flex', gap: 8, alignItems: 'baseline', fontSize: 11.5, lineHeight: 1.4 }}&gt;&lt;span style={{ color: '#172133', fontWeight: 'bold', minWidth: 56 }}&gt;对话报修&lt;/span&gt;&lt;span style={{ color: '#6b7075' }}&gt;Repair Agent · 多轮状态机补全房屋/类型 · 自动派单（技能+在岗+工号）&lt;/span&gt;&lt;/div&gt;&#10;          &lt;div style={{ display: 'flex', gap: 8, alignItems: 'baseline', fontSize: 11.5, lineHeight: 1.4 }}&gt;&lt;span style={{ color: '#172133', fontWeight: 'bold', minWidth: 56 }}&gt;缴费查询&lt;/span&gt;&lt;span style={{ color: '#6b7075' }}&gt;Fee Agent 查 fee_bills 账单表 · 返回金额/状态/截止日&lt;/span&gt;&lt;/div&gt;&#10;          &lt;div style={{ display: 'flex', gap: 8, alignItems: 'baseline', fontSize: 11.5, lineHeight: 1.4 }}&gt;&lt;span style={{ color: '#172133', fontWeight: 'bold', minWidth: 56 }}&gt;公告&lt;/span&gt;&lt;span style={{ color: '#6b7075' }}&gt;公告列表 + AI 摘要（LLM 提炼要点）&lt;/span&gt;&lt;/div&gt;&#10;          &lt;div style={{ display: 'flex', gap: 8, alignItems: 'baseline', fontSize: 11.5, lineHeight: 1.4 }}&gt;&lt;span style={{ color: '#172133', fontWeight: 'bold', minWidth: 56 }}&gt;我的工单&lt;/span&gt;&lt;span style={{ color: '#6b7075' }}&gt;repair_order 状态追踪（创建→派单→接单→完成→关闭）&lt;/span&gt;&lt;/div&gt;&#10;          &lt;div style={{ display: 'flex', gap: 8, alignItems: 'baseline', fontSize: 11.5, lineHeight: 1.4 }}&gt;&lt;span style={{ color: '#172133', fontWeight: 'bold', minWidth: 56 }}&gt;问题上报&lt;/span&gt;&lt;span style={{ color: '#6b7075' }}&gt;IssueReport 上报 · 附图片 · 物业答复&lt;/span&gt;&lt;/div&gt;&#10;        &lt;/div&gt;&#10;      &lt;/div&gt;&#10;      {/* 物业端 */}&#10;      &lt;div style={{ background: '#fff', borderRadius: 10, padding: '10px 14px', boxShadow: '0 4px 16px rgba(23,33,51,0.06)' }}&gt;&#10;        &lt;div style={{ display: 'flex', alignItems: 'center', gap: 8, marginBottom: 6 }}&gt;&#10;          &lt;span style={{ fontSize: 14, fontWeight: 'bold', color: '#172133' }}&gt;物业端&lt;/span&gt;&#10;          &lt;span style={{ fontSize: 10.5, color: '#BD9B56', background: 'rgba(189,155,86,0.12)', padding: '2px 7px', borderRadius: 4 }}&gt;ToB · Admin/Staff&lt;/span&gt;&#10;        &lt;/div&gt;&#10;        &lt;div style={{ display: 'flex', flexDirection: 'column', gap: 3.5 }}&gt;&#10;          &lt;div style={{ display: 'flex', gap: 8, alignItems: 'baseline', fontSize: 11.5, lineHeight: 1.4 }}&gt;&lt;span style={{ color: '#172133', fontWeight: 'bold', minWidth: 56 }}&gt;数据看板&lt;/span&gt;&lt;span style={{ color: '#6b7075' }}&gt;统计聚合 API · 今日报修/处理中/已完成实时汇总&lt;/span&gt;&lt;/div&gt;&#10;          &lt;div style={{ display: 'flex', gap: 8, alignItems: 'baseline', fontSize: 11.5, lineHeight: 1.4 }}&gt;&lt;span style={{ color: '#172133', fontWeight: 'bold', minWidth: 56 }}&gt;工单管理&lt;/span&gt;&lt;span style={{ color: '#6b7075' }}&gt;repair_order CRUD · 状态流转 · 人工派单/改派&lt;/span&gt;&lt;/div&gt;&#10;          &lt;div style={{ display: 'flex', gap: 8, alignItems: 'baseline', fontSize: 11.5, lineHeight: 1.4 }}&gt;&lt;span style={{ color: '#172133', fontWeight: 'bold', minWidth: 56 }}&gt;用户/房屋&lt;/span&gt;&lt;span style={{ color: '#6b7075' }}&gt;user / house / house_binding 绑定关系管理&lt;/span&gt;&lt;/div&gt;&#10;          &lt;div style={{ display: 'flex', gap: 8, alignItems: 'baseline', fontSize: 11.5, lineHeight: 1.4 }}&gt;&lt;span style={{ color: '#172133', fontWeight: 'bold', minWidth: 56 }}&gt;公告 AI 生成&lt;/span&gt;&lt;span style={{ color: '#6b7075' }}&gt;Notice Agent + LLM 生成标题/正文/影响范围 · 人工审核发布&lt;/span&gt;&lt;/div&gt;&#10;          &lt;div style={{ display: 'flex', gap: 8, alignItems: 'baseline', fontSize: 11.5, lineHeight: 1.4 }}&gt;&lt;span style={{ color: '#172133', fontWeight: 'bold', minWidth: 56 }}&gt;巡检管理&lt;/span&gt;&lt;span style={{ color: '#6b7075' }}&gt;摄像头抓拍 → 视觉模型识别异常 → 巡检记录 + 告警&lt;/span&gt;&lt;/div&gt;&#10;          &lt;div style={{ display: 'flex', gap: 8, alignItems: 'baseline', fontSize: 11.5, lineHeight: 1.4 }}&gt;&lt;span style={{ color: '#172133', fontWeight: 'bold', minWidth: 56 }}&gt;知识缺口审核&lt;/span&gt;&lt;span style={{ color: '#6b7075' }}&gt;knowledge_gap 审核 → 通过自动写入 pgvector 知识库&lt;/span&gt;&lt;/div&gt;&#10;        &lt;/div&gt;&#10;      &lt;/div&gt;&#10;      {/* 维修端 */}&#10;      &lt;div style={{ background: '#fff', borderRadius: 10, padding: '10px 14px', boxShadow: '0 4px 16px rgba(23,33,51,0.06)' }}&gt;&#10;        &lt;div style={{ display: 'flex', alignItems: 'center', gap: 8, marginBottom: 6 }}&gt;&#10;          &lt;span style={{ fontSize: 14, fontWeight: 'bold', color: '#172133' }}&gt;维修端&lt;/span&gt;&#10;          &lt;span style={{ fontSize: 10.5, color: '#BD9B56', background: 'rgba(189,155,86,0.12)', padding: '2px 7px', borderRadius: 4 }}&gt;ToC · Worker&lt;/span&gt;&#10;        &lt;/div&gt;&#10;        &lt;div style={{ display: 'flex', flexDirection: 'column', gap: 3.5 }}&gt;&#10;          &lt;div style={{ display: 'flex', gap: 8, alignItems: 'baseline', fontSize: 11.5, lineHeight: 1.4 }}&gt;&lt;span style={{ color: '#172133', fontWeight: 'bold', minWidth: 56 }}&gt;任务列表&lt;/span&gt;&lt;span style={{ color: '#6b7075' }}&gt;自动派单后查询「我的待处理」工单&lt;/span&gt;&lt;/div&gt;&#10;          &lt;div style={{ display: 'flex', gap: 8, alignItems: 'baseline', fontSize: 11.5, lineHeight: 1.4 }}&gt;&lt;span style={{ color: '#172133', fontWeight: 'bold', minWidth: 56 }}&gt;接单/处理/完成&lt;/span&gt;&lt;span style={{ color: '#6b7075' }}&gt;状态机流转 · 每步触发实时通知&lt;/span&gt;&lt;/div&gt;&#10;          &lt;div style={{ display: 'flex', gap: 8, alignItems: 'baseline', fontSize: 11.5, lineHeight: 1.4 }}&gt;&lt;span style={{ color: '#172133', fontWeight: 'bold', minWidth: 56 }}&gt;消息&lt;/span&gt;&lt;span style={{ color: '#6b7075' }}&gt;事件驱动通知（派单/答复/完成）&lt;/span&gt;&lt;/div&gt;&#10;          &lt;div style={{ display: 'flex', gap: 8, alignItems: 'baseline', fontSize: 11.5, lineHeight: 1.4 }}&gt;&lt;span style={{ color: '#172133', fontWeight: 'bold', minWidth: 56 }}&gt;巡检任务&lt;/span&gt;&lt;span style={{ color: '#6b7075' }}&gt;巡检记录查看 · 异常处理&lt;/span&gt;&lt;/div&gt;&#10;        &lt;/div&gt;&#10;      &lt;/div&gt;&#10;    &lt;/div&gt;&#10;    {/* 右栏：自维护 + Demo */}&#10;    &lt;div style={{ flex: '0 0 285px', display: 'flex', flexDirection: 'column', gap: 10 }}&gt;&#10;      &lt;div style={{ background: 'linear-gradient(135deg, #172133 0%, #22395E 100%)', borderRadius: 12, padding: '16px 18px', color: '#FBFCFA', display: 'flex', flexDirection: 'column', gap: 9 }}&gt;&#10;        &lt;div style={{ color: '#BD9B56', fontSize: 12, letterSpacing: '0.2em' }}&gt;系统自维护自更新&lt;/div&gt;&#10;        &lt;div style={{ display: 'flex', flexDirection: 'column', gap: 6, fontSize: 11.5, lineHeight: 1.45 }}&gt;&#10;          &lt;div&gt;&lt;span style={{ color: '#BD9B56', fontWeight: 'bold' }}&gt;定时清理&lt;/span&gt;&lt;span style={{ color: 'rgba(251,252,250,0.8)' }}&gt;　APScheduler 每日清过期数据/孤儿文件&lt;/span&gt;&lt;/div&gt;&#10;          &lt;div&gt;&lt;span style={{ color: '#BD9B56', fontWeight: 'bold' }}&gt;巡检自动化&lt;/span&gt;&lt;span style={{ color: 'rgba(251,252,250,0.8)' }}&gt;　定时抓拍 + 视觉识别异常&lt;/span&gt;&lt;/div&gt;&#10;          &lt;div&gt;&lt;span style={{ color: '#BD9B56', fontWeight: 'bold' }}&gt;知识自进化&lt;/span&gt;&lt;span style={{ color: 'rgba(251,252,250,0.8)' }}&gt;　反馈→知识缺口→审核→入库&lt;/span&gt;&lt;/div&gt;&#10;          &lt;div&gt;&lt;span style={{ color: '#BD9B56', fontWeight: 'bold' }}&gt;监控告警&lt;/span&gt;&lt;span style={{ color: 'rgba(251,252,250,0.8)' }}&gt;　Prometheus + Grafana&lt;/span&gt;&lt;/div&gt;&#10;          &lt;div&gt;&lt;span style={{ color: '#BD9B56', fontWeight: 'bold' }}&gt;持续交付&lt;/span&gt;&lt;span style={{ color: 'rgba(251,252,250,0.8)' }}&gt;　GitHub Actions 自动测试+发布&lt;/span&gt;&lt;/div&gt;&#10;        &lt;/div&gt;&#10;        &lt;div style={{ fontSize: 11, color: 'rgba(251,252,250,0.6)', lineHeight: 1.5, paddingTop: 7, borderTop: '1px solid rgba(189,155,86,0.3)' }}&gt;无需人工值守，越用越准、越用越稳&lt;/div&gt;&#10;      &lt;/div&gt;&#10;      &lt;div style={{ background: '#fff', borderRadius: 12, padding: '14px 16px', boxShadow: '0 4px 16px rgba(23,33,51,0.06)' }}&gt;&#10;        &lt;div style={{ color: '#BD9B56', fontSize: 11.5, letterSpacing: '0.2em', marginBottom: 8 }}&gt;ONLINE DEMO&lt;/div&gt;&#10;        &lt;div style={{ fontSize: 15, fontFamily: 'Inter, sans-serif', color: '#172133', lineHeight: 1.4 }}&gt;http://119.91.236.85&lt;/div&gt;&#10;        &lt;div style={{ fontSize: 11, color: '#6b7075', lineHeight: 1.6, marginTop: 6 }}&gt;&#10;          业主 guoyi378 · 物业 mayun420&lt;br/&gt;维修 yangfei423　&lt;span style={{ color: '#BD9B56' }}&gt;密码 123456&lt;/span&gt;&#10;        &lt;/div&gt;&#10;        &lt;div style={{ fontSize: 10.5, color: '#a09b8c', marginTop: 6, paddingTop: 6, borderTop: '1px solid rgba(34,57,94,0.1)' }}&gt;GitHub：Xuuuukkk/ai-property-community-agent · MIT&lt;/div&gt;&#10;      &lt;/div&gt;&#10;    &lt;/div&gt;&#10;  &lt;/div&gt;&#10;  &lt;div style={{ flexShrink: 0, height: 30, display: 'flex', alignItems: 'flex-end', justifyContent: 'space-between' }}&gt;&#10;    &lt;span style={{ color: '#BD9B56', fontSize: 12, letterSpacing: '0.1em' }}&gt;云溪花园 · 智慧社区&lt;/span&gt;&#10;    &lt;span style={{ color: '#a09b8c', fontSize: 12 }}&gt;14 / 15&lt;/span&gt;&#10;  &lt;/div&gt;&#10;&lt;/Slide&gt;"/>
+        <p:cNvPr id="158" name="" descr="&lt;Slide style={{ width: '1280px', height: '720px', background: '#FBFCFA', position: 'relative', padding: '26px 52px', boxSizing: 'border-box', display: 'flex', flexDirection: 'column' }}&gt;&#10;  &lt;div style={{ flexShrink: 0 }}&gt;&#10;    &lt;div style={{ color: '#BD9B56', fontSize: 12, letterSpacing: '0.25em', marginBottom: 4 }}&gt;04 · 总结与展望&lt;/div&gt;&#10;    &lt;h2 style={{ fontSize: 25, fontWeight: 'bold', color: '#172133', margin: 0, lineHeight: 1.2 }}&gt;三端功能 × 实现技术：每个功能怎么做出来的&lt;/h2&gt;&#10;  &lt;/div&gt;&#10;  &lt;div style={{ flex: 1, display: 'flex', alignItems: 'stretch', gap: 18, marginTop: 10 }}&gt;&#10;    {/* 左栏：三端功能实现 */}&#10;    &lt;div style={{ flex: 1, display: 'flex', flexDirection: 'column', gap: 8 }}&gt;&#10;      {/* 业主端 */}&#10;      &lt;div style={{ background: '#fff', borderRadius: 10, padding: '10px 14px', boxShadow: '0 4px 16px rgba(23,33,51,0.06)' }}&gt;&#10;        &lt;div style={{ display: 'flex', alignItems: 'center', gap: 8, marginBottom: 6 }}&gt;&#10;          &lt;span style={{ fontSize: 14, fontWeight: 'bold', color: '#172133' }}&gt;业主端&lt;/span&gt;&#10;          &lt;span style={{ fontSize: 10.5, color: '#BD9B56', background: 'rgba(189,155,86,0.12)', padding: '2px 7px', borderRadius: 4 }}&gt;ToC · Owner&lt;/span&gt;&#10;        &lt;/div&gt;&#10;        &lt;div style={{ display: 'flex', flexDirection: 'column', gap: 3.5 }}&gt;&#10;          &lt;div style={{ display: 'flex', gap: 8, alignItems: 'baseline', fontSize: 11.5, lineHeight: 1.4 }}&gt;&lt;span style={{ color: '#172133', fontWeight: 'bold', minWidth: 56 }}&gt;AI 助手&lt;/span&gt;&lt;span style={{ color: '#6b7075' }}&gt;LangGraph 多 Agent：Personal 对话 → Router 意图识别 → Domain 工具调用&lt;/span&gt;&lt;/div&gt;&#10;          &lt;div style={{ display: 'flex', gap: 8, alignItems: 'baseline', fontSize: 11.5, lineHeight: 1.4 }}&gt;&lt;span style={{ color: '#172133', fontWeight: 'bold', minWidth: 56 }}&gt;对话报修&lt;/span&gt;&lt;span style={{ color: '#6b7075' }}&gt;Repair Agent · 多轮状态机补全房屋/类型 · 自动派单（技能+在岗+工号）&lt;/span&gt;&lt;/div&gt;&#10;          &lt;div style={{ display: 'flex', gap: 8, alignItems: 'baseline', fontSize: 11.5, lineHeight: 1.4 }}&gt;&lt;span style={{ color: '#172133', fontWeight: 'bold', minWidth: 56 }}&gt;缴费查询&lt;/span&gt;&lt;span style={{ color: '#6b7075' }}&gt;Fee Agent 查 fee_bills 账单表 · 返回金额/状态/截止日&lt;/span&gt;&lt;/div&gt;&#10;          &lt;div style={{ display: 'flex', gap: 8, alignItems: 'baseline', fontSize: 11.5, lineHeight: 1.4 }}&gt;&lt;span style={{ color: '#172133', fontWeight: 'bold', minWidth: 56 }}&gt;公告&lt;/span&gt;&lt;span style={{ color: '#6b7075' }}&gt;公告列表 + AI 摘要（LLM 提炼要点）&lt;/span&gt;&lt;/div&gt;&#10;          &lt;div style={{ display: 'flex', gap: 8, alignItems: 'baseline', fontSize: 11.5, lineHeight: 1.4 }}&gt;&lt;span style={{ color: '#172133', fontWeight: 'bold', minWidth: 56 }}&gt;我的工单&lt;/span&gt;&lt;span style={{ color: '#6b7075' }}&gt;repair_order 状态追踪（创建→派单→接单→完成→关闭）&lt;/span&gt;&lt;/div&gt;&#10;          &lt;div style={{ display: 'flex', gap: 8, alignItems: 'baseline', fontSize: 11.5, lineHeight: 1.4 }}&gt;&lt;span style={{ color: '#172133', fontWeight: 'bold', minWidth: 56 }}&gt;问题上报&lt;/span&gt;&lt;span style={{ color: '#6b7075' }}&gt;IssueReport 上报 · 附图片 · 物业答复&lt;/span&gt;&lt;/div&gt;&#10;        &lt;/div&gt;&#10;      &lt;/div&gt;&#10;      {/* 物业端 */}&#10;      &lt;div style={{ background: '#fff', borderRadius: 10, padding: '10px 14px', boxShadow: '0 4px 16px rgba(23,33,51,0.06)' }}&gt;&#10;        &lt;div style={{ display: 'flex', alignItems: 'center', gap: 8, marginBottom: 6 }}&gt;&#10;          &lt;span style={{ fontSize: 14, fontWeight: 'bold', color: '#172133' }}&gt;物业端&lt;/span&gt;&#10;          &lt;span style={{ fontSize: 10.5, color: '#BD9B56', background: 'rgba(189,155,86,0.12)', padding: '2px 7px', borderRadius: 4 }}&gt;ToB · Admin/Staff&lt;/span&gt;&#10;        &lt;/div&gt;&#10;        &lt;div style={{ display: 'flex', flexDirection: 'column', gap: 3.5 }}&gt;&#10;          &lt;div style={{ display: 'flex', gap: 8, alignItems: 'baseline', fontSize: 11.5, lineHeight: 1.4 }}&gt;&lt;span style={{ color: '#172133', fontWeight: 'bold', minWidth: 56 }}&gt;数据看板&lt;/span&gt;&lt;span style={{ color: '#6b7075' }}&gt;统计聚合 API · 今日报修/处理中/已完成实时汇总&lt;/span&gt;&lt;/div&gt;&#10;          &lt;div style={{ display: 'flex', gap: 8, alignItems: 'baseline', fontSize: 11.5, lineHeight: 1.4 }}&gt;&lt;span style={{ color: '#172133', fontWeight: 'bold', minWidth: 56 }}&gt;工单管理&lt;/span&gt;&lt;span style={{ color: '#6b7075' }}&gt;repair_order CRUD · 状态流转 · 人工派单/改派&lt;/span&gt;&lt;/div&gt;&#10;          &lt;div style={{ display: 'flex', gap: 8, alignItems: 'baseline', fontSize: 11.5, lineHeight: 1.4 }}&gt;&lt;span style={{ color: '#172133', fontWeight: 'bold', minWidth: 56 }}&gt;用户/房屋&lt;/span&gt;&lt;span style={{ color: '#6b7075' }}&gt;user / house / house_binding 绑定关系管理&lt;/span&gt;&lt;/div&gt;&#10;          &lt;div style={{ display: 'flex', gap: 8, alignItems: 'baseline', fontSize: 11.5, lineHeight: 1.4 }}&gt;&lt;span style={{ color: '#172133', fontWeight: 'bold', minWidth: 56 }}&gt;公告 AI 生成&lt;/span&gt;&lt;span style={{ color: '#6b7075' }}&gt;Notice Agent + LLM 生成标题/正文/影响范围 · 人工审核发布&lt;/span&gt;&lt;/div&gt;&#10;          &lt;div style={{ display: 'flex', gap: 8, alignItems: 'baseline', fontSize: 11.5, lineHeight: 1.4 }}&gt;&lt;span style={{ color: '#172133', fontWeight: 'bold', minWidth: 56 }}&gt;巡检管理&lt;/span&gt;&lt;span style={{ color: '#6b7075' }}&gt;摄像头抓拍 → 视觉模型识别异常 → 巡检记录 + 告警&lt;/span&gt;&lt;/div&gt;&#10;          &lt;div style={{ display: 'flex', gap: 8, alignItems: 'baseline', fontSize: 11.5, lineHeight: 1.4 }}&gt;&lt;span style={{ color: '#172133', fontWeight: 'bold', minWidth: 56 }}&gt;知识缺口审核&lt;/span&gt;&lt;span style={{ color: '#6b7075' }}&gt;knowledge_gap 审核 → 通过自动写入 pgvector 知识库&lt;/span&gt;&lt;/div&gt;&#10;        &lt;/div&gt;&#10;      &lt;/div&gt;&#10;      {/* 维修端 */}&#10;      &lt;div style={{ background: '#fff', borderRadius: 10, padding: '10px 14px', boxShadow: '0 4px 16px rgba(23,33,51,0.06)' }}&gt;&#10;        &lt;div style={{ display: 'flex', alignItems: 'center', gap: 8, marginBottom: 6 }}&gt;&#10;          &lt;span style={{ fontSize: 14, fontWeight: 'bold', color: '#172133' }}&gt;维修端&lt;/span&gt;&#10;          &lt;span style={{ fontSize: 10.5, color: '#BD9B56', background: 'rgba(189,155,86,0.12)', padding: '2px 7px', borderRadius: 4 }}&gt;ToC · Worker&lt;/span&gt;&#10;        &lt;/div&gt;&#10;        &lt;div style={{ display: 'flex', flexDirection: 'column', gap: 3.5 }}&gt;&#10;          &lt;div style={{ display: 'flex', gap: 8, alignItems: 'baseline', fontSize: 11.5, lineHeight: 1.4 }}&gt;&lt;span style={{ color: '#172133', fontWeight: 'bold', minWidth: 56 }}&gt;任务列表&lt;/span&gt;&lt;span style={{ color: '#6b7075' }}&gt;自动派单后查询「我的待处理」工单&lt;/span&gt;&lt;/div&gt;&#10;          &lt;div style={{ display: 'flex', gap: 8, alignItems: 'baseline', fontSize: 11.5, lineHeight: 1.4 }}&gt;&lt;span style={{ color: '#172133', fontWeight: 'bold', minWidth: 56 }}&gt;接单/处理/完成&lt;/span&gt;&lt;span style={{ color: '#6b7075' }}&gt;状态机流转 · 每步触发实时通知&lt;/span&gt;&lt;/div&gt;&#10;          &lt;div style={{ display: 'flex', gap: 8, alignItems: 'baseline', fontSize: 11.5, lineHeight: 1.4 }}&gt;&lt;span style={{ color: '#172133', fontWeight: 'bold', minWidth: 56 }}&gt;消息&lt;/span&gt;&lt;span style={{ color: '#6b7075' }}&gt;事件驱动通知（派单/答复/完成）&lt;/span&gt;&lt;/div&gt;&#10;          &lt;div style={{ display: 'flex', gap: 8, alignItems: 'baseline', fontSize: 11.5, lineHeight: 1.4 }}&gt;&lt;span style={{ color: '#172133', fontWeight: 'bold', minWidth: 56 }}&gt;巡检任务&lt;/span&gt;&lt;span style={{ color: '#6b7075' }}&gt;巡检记录查看 · 异常处理&lt;/span&gt;&lt;/div&gt;&#10;        &lt;/div&gt;&#10;      &lt;/div&gt;&#10;    &lt;/div&gt;&#10;    {/* 右栏：自维护 + Demo */}&#10;    &lt;div style={{ flex: '0 0 285px', display: 'flex', flexDirection: 'column', gap: 10 }}&gt;&#10;      &lt;div style={{ background: 'linear-gradient(135deg, #172133 0%, #22395E 100%)', borderRadius: 12, padding: '16px 18px', color: '#FBFCFA', display: 'flex', flexDirection: 'column', gap: 9 }}&gt;&#10;        &lt;div style={{ color: '#BD9B56', fontSize: 12, letterSpacing: '0.2em' }}&gt;系统自维护自更新&lt;/div&gt;&#10;        &lt;div style={{ display: 'flex', flexDirection: 'column', gap: 6, fontSize: 11.5, lineHeight: 1.45 }}&gt;&#10;          &lt;div&gt;&lt;span style={{ color: '#BD9B56', fontWeight: 'bold' }}&gt;定时清理&lt;/span&gt;&lt;span style={{ color: 'rgba(251,252,250,0.8)' }}&gt;　APScheduler 每日清过期数据/孤儿文件&lt;/span&gt;&lt;/div&gt;&#10;          &lt;div&gt;&lt;span style={{ color: '#BD9B56', fontWeight: 'bold' }}&gt;巡检自动化&lt;/span&gt;&lt;span style={{ color: 'rgba(251,252,250,0.8)' }}&gt;　定时抓拍 + 视觉识别异常&lt;/span&gt;&lt;/div&gt;&#10;          &lt;div&gt;&lt;span style={{ color: '#BD9B56', fontWeight: 'bold' }}&gt;知识自进化&lt;/span&gt;&lt;span style={{ color: 'rgba(251,252,250,0.8)' }}&gt;　反馈→知识缺口→审核→入库&lt;/span&gt;&lt;/div&gt;&#10;          &lt;div&gt;&lt;span style={{ color: '#BD9B56', fontWeight: 'bold' }}&gt;监控告警&lt;/span&gt;&lt;span style={{ color: 'rgba(251,252,250,0.8)' }}&gt;　Prometheus + Grafana&lt;/span&gt;&lt;/div&gt;&#10;          &lt;div&gt;&lt;span style={{ color: '#BD9B56', fontWeight: 'bold' }}&gt;持续交付&lt;/span&gt;&lt;span style={{ color: 'rgba(251,252,250,0.8)' }}&gt;　GitHub Actions 自动测试+发布&lt;/span&gt;&lt;/div&gt;&#10;        &lt;/div&gt;&#10;        &lt;div style={{ fontSize: 11, color: 'rgba(251,252,250,0.6)', lineHeight: 1.5, paddingTop: 7, borderTop: '1px solid rgba(189,155,86,0.3)' }}&gt;无需人工值守，越用越准、越用越稳&lt;/div&gt;&#10;      &lt;/div&gt;&#10;      &lt;div style={{ background: '#fff', borderRadius: 12, padding: '14px 16px', boxShadow: '0 4px 16px rgba(23,33,51,0.06)' }}&gt;&#10;        &lt;div style={{ color: '#BD9B56', fontSize: 11.5, letterSpacing: '0.2em', marginBottom: 8 }}&gt;ONLINE DEMO&lt;/div&gt;&#10;        &lt;div style={{ fontSize: 15, fontFamily: 'Inter, sans-serif', color: '#172133', lineHeight: 1.4 }}&gt;http://119.91.236.85&lt;/div&gt;&#10;        &lt;div style={{ fontSize: 11, color: '#6b7075', lineHeight: 1.6, marginTop: 6 }}&gt;&#10;          业主 guoyi378 · 物业 mayun420&lt;br/&gt;维修 yangfei423　&lt;span style={{ color: '#BD9B56' }}&gt;密码 123456&lt;/span&gt;&#10;        &lt;/div&gt;&#10;        &lt;div style={{ fontSize: 10.5, color: '#a09b8c', marginTop: 6, paddingTop: 6, borderTop: '1px solid rgba(34,57,94,0.1)' }}&gt;GitHub：Xuuuukkk/ai-property-community-agent · MIT&lt;/div&gt;&#10;      &lt;/div&gt;&#10;    &lt;/div&gt;&#10;  &lt;/div&gt;&#10;  &lt;div style={{ flexShrink: 0, height: 30, display: 'flex', alignItems: 'flex-end', justifyContent: 'space-between' }}&gt;&#10;    &lt;span style={{ color: '#BD9B56', fontSize: 12, letterSpacing: '0.1em' }}&gt;云溪花园 · 智慧社区&lt;/span&gt;&#10;    &lt;span style={{ color: '#a09b8c', fontSize: 12 }}&gt;14 / 15&lt;/span&gt;&#10;  &lt;/div&gt;&#10;&lt;/Slide&gt;"/>
         <p:cNvGrpSpPr/>
         <p:nvPr/>
       </p:nvGrpSpPr>
@@ -7570,7 +7818,7 @@
       </p:grpSpPr>
       <p:sp>
         <p:nvSpPr>
-          <p:cNvPr id="155" name=""/>
+          <p:cNvPr id="159" name=""/>
           <p:cNvSpPr/>
           <p:nvPr/>
         </p:nvSpPr>
@@ -7594,7 +7842,7 @@
       </p:sp>
       <p:sp>
         <p:nvSpPr>
-          <p:cNvPr id="156" name="" descr="{&quot;isTemplate&quot;:true,&quot;type&quot;:&quot;text&quot;}"/>
+          <p:cNvPr id="160" name="" descr="{&quot;isTemplate&quot;:true,&quot;type&quot;:&quot;text&quot;}"/>
           <p:cNvSpPr txBox="1"/>
           <p:nvPr/>
         </p:nvSpPr>
@@ -7639,7 +7887,7 @@
       </p:sp>
       <p:sp>
         <p:nvSpPr>
-          <p:cNvPr id="157" name="" descr="{&quot;isTemplate&quot;:true,&quot;type&quot;:&quot;text&quot;}"/>
+          <p:cNvPr id="161" name="" descr="{&quot;isTemplate&quot;:true,&quot;type&quot;:&quot;text&quot;}"/>
           <p:cNvSpPr txBox="1"/>
           <p:nvPr/>
         </p:nvSpPr>
@@ -7694,7 +7942,7 @@
       </p:sp>
       <p:sp>
         <p:nvSpPr>
-          <p:cNvPr id="158" name=""/>
+          <p:cNvPr id="162" name=""/>
           <p:cNvSpPr/>
           <p:nvPr/>
         </p:nvSpPr>
@@ -7727,7 +7975,7 @@
       </p:sp>
       <p:sp>
         <p:nvSpPr>
-          <p:cNvPr id="159" name="" descr="{&quot;isTemplate&quot;:true,&quot;type&quot;:&quot;text&quot;}"/>
+          <p:cNvPr id="163" name="" descr="{&quot;isTemplate&quot;:true,&quot;type&quot;:&quot;text&quot;}"/>
           <p:cNvSpPr txBox="1"/>
           <p:nvPr/>
         </p:nvSpPr>
@@ -7762,7 +8010,7 @@
       </p:sp>
       <p:sp>
         <p:nvSpPr>
-          <p:cNvPr id="160" name=""/>
+          <p:cNvPr id="164" name=""/>
           <p:cNvSpPr/>
           <p:nvPr/>
         </p:nvSpPr>
@@ -7790,7 +8038,7 @@
       </p:sp>
       <p:sp>
         <p:nvSpPr>
-          <p:cNvPr id="161" name="" descr="{&quot;isTemplate&quot;:true,&quot;type&quot;:&quot;text&quot;}"/>
+          <p:cNvPr id="165" name="" descr="{&quot;isTemplate&quot;:true,&quot;type&quot;:&quot;text&quot;}"/>
           <p:cNvSpPr txBox="1"/>
           <p:nvPr/>
         </p:nvSpPr>
@@ -7830,7 +8078,7 @@
       </p:sp>
       <p:sp>
         <p:nvSpPr>
-          <p:cNvPr id="162" name="" descr="{&quot;isTemplate&quot;:true,&quot;type&quot;:&quot;text&quot;}"/>
+          <p:cNvPr id="166" name="" descr="{&quot;isTemplate&quot;:true,&quot;type&quot;:&quot;text&quot;}"/>
           <p:cNvSpPr txBox="1"/>
           <p:nvPr/>
         </p:nvSpPr>
@@ -7875,7 +8123,7 @@
       </p:sp>
       <p:sp>
         <p:nvSpPr>
-          <p:cNvPr id="163" name="" descr="{&quot;isTemplate&quot;:true,&quot;type&quot;:&quot;text&quot;}"/>
+          <p:cNvPr id="167" name="" descr="{&quot;isTemplate&quot;:true,&quot;type&quot;:&quot;text&quot;}"/>
           <p:cNvSpPr txBox="1"/>
           <p:nvPr/>
         </p:nvSpPr>
@@ -8000,7 +8248,7 @@
       </p:sp>
       <p:sp>
         <p:nvSpPr>
-          <p:cNvPr id="164" name="" descr="{&quot;isTemplate&quot;:true,&quot;type&quot;:&quot;text&quot;}"/>
+          <p:cNvPr id="168" name="" descr="{&quot;isTemplate&quot;:true,&quot;type&quot;:&quot;text&quot;}"/>
           <p:cNvSpPr txBox="1"/>
           <p:nvPr/>
         </p:nvSpPr>
@@ -8035,7 +8283,7 @@
       </p:sp>
       <p:sp>
         <p:nvSpPr>
-          <p:cNvPr id="165" name="" descr="{&quot;isTemplate&quot;:true,&quot;type&quot;:&quot;text&quot;}"/>
+          <p:cNvPr id="169" name="" descr="{&quot;isTemplate&quot;:true,&quot;type&quot;:&quot;text&quot;}"/>
           <p:cNvSpPr txBox="1"/>
           <p:nvPr/>
         </p:nvSpPr>
@@ -8160,7 +8408,7 @@
       </p:sp>
       <p:sp>
         <p:nvSpPr>
-          <p:cNvPr id="166" name="" descr="{&quot;isTemplate&quot;:true,&quot;type&quot;:&quot;text&quot;}"/>
+          <p:cNvPr id="170" name="" descr="{&quot;isTemplate&quot;:true,&quot;type&quot;:&quot;text&quot;}"/>
           <p:cNvSpPr txBox="1"/>
           <p:nvPr/>
         </p:nvSpPr>
@@ -8195,7 +8443,7 @@
       </p:sp>
       <p:sp>
         <p:nvSpPr>
-          <p:cNvPr id="167" name="" descr="{&quot;isTemplate&quot;:true,&quot;type&quot;:&quot;text&quot;}"/>
+          <p:cNvPr id="171" name="" descr="{&quot;isTemplate&quot;:true,&quot;type&quot;:&quot;text&quot;}"/>
           <p:cNvSpPr txBox="1"/>
           <p:nvPr/>
         </p:nvSpPr>
@@ -8320,7 +8568,7 @@
       </p:sp>
       <p:sp>
         <p:nvSpPr>
-          <p:cNvPr id="168" name="" descr="{&quot;isTemplate&quot;:true,&quot;type&quot;:&quot;text&quot;}"/>
+          <p:cNvPr id="172" name="" descr="{&quot;isTemplate&quot;:true,&quot;type&quot;:&quot;text&quot;}"/>
           <p:cNvSpPr txBox="1"/>
           <p:nvPr/>
         </p:nvSpPr>
@@ -8355,7 +8603,7 @@
       </p:sp>
       <p:sp>
         <p:nvSpPr>
-          <p:cNvPr id="169" name="" descr="{&quot;isTemplate&quot;:true,&quot;type&quot;:&quot;text&quot;}"/>
+          <p:cNvPr id="173" name="" descr="{&quot;isTemplate&quot;:true,&quot;type&quot;:&quot;text&quot;}"/>
           <p:cNvSpPr txBox="1"/>
           <p:nvPr/>
         </p:nvSpPr>
@@ -8430,7 +8678,7 @@
       </p:sp>
       <p:sp>
         <p:nvSpPr>
-          <p:cNvPr id="170" name="" descr="{&quot;isTemplate&quot;:true,&quot;type&quot;:&quot;text&quot;}"/>
+          <p:cNvPr id="174" name="" descr="{&quot;isTemplate&quot;:true,&quot;type&quot;:&quot;text&quot;}"/>
           <p:cNvSpPr txBox="1"/>
           <p:nvPr/>
         </p:nvSpPr>
@@ -8465,7 +8713,7 @@
       </p:sp>
       <p:sp>
         <p:nvSpPr>
-          <p:cNvPr id="171" name="" descr="{&quot;isTemplate&quot;:true,&quot;type&quot;:&quot;text&quot;}"/>
+          <p:cNvPr id="175" name="" descr="{&quot;isTemplate&quot;:true,&quot;type&quot;:&quot;text&quot;}"/>
           <p:cNvSpPr txBox="1"/>
           <p:nvPr/>
         </p:nvSpPr>
@@ -8510,7 +8758,7 @@
       </p:sp>
       <p:sp>
         <p:nvSpPr>
-          <p:cNvPr id="172" name="" descr="{&quot;isTemplate&quot;:true,&quot;type&quot;:&quot;text&quot;}"/>
+          <p:cNvPr id="176" name="" descr="{&quot;isTemplate&quot;:true,&quot;type&quot;:&quot;text&quot;}"/>
           <p:cNvSpPr txBox="1"/>
           <p:nvPr/>
         </p:nvSpPr>
@@ -8545,7 +8793,7 @@
       </p:sp>
       <p:sp>
         <p:nvSpPr>
-          <p:cNvPr id="173" name="" descr="{&quot;isTemplate&quot;:true,&quot;type&quot;:&quot;text&quot;}"/>
+          <p:cNvPr id="177" name="" descr="{&quot;isTemplate&quot;:true,&quot;type&quot;:&quot;text&quot;}"/>
           <p:cNvSpPr txBox="1"/>
           <p:nvPr/>
         </p:nvSpPr>
@@ -8630,7 +8878,7 @@
       </p:sp>
       <p:sp>
         <p:nvSpPr>
-          <p:cNvPr id="174" name=""/>
+          <p:cNvPr id="178" name=""/>
           <p:cNvSpPr/>
           <p:nvPr/>
         </p:nvSpPr>
@@ -8663,7 +8911,7 @@
       </p:sp>
       <p:sp>
         <p:nvSpPr>
-          <p:cNvPr id="175" name="" descr="{&quot;isTemplate&quot;:true,&quot;type&quot;:&quot;text&quot;}"/>
+          <p:cNvPr id="179" name="" descr="{&quot;isTemplate&quot;:true,&quot;type&quot;:&quot;text&quot;}"/>
           <p:cNvSpPr txBox="1"/>
           <p:nvPr/>
         </p:nvSpPr>
@@ -8698,7 +8946,7 @@
       </p:sp>
       <p:sp>
         <p:nvSpPr>
-          <p:cNvPr id="176" name=""/>
+          <p:cNvPr id="180" name=""/>
           <p:cNvSpPr/>
           <p:nvPr/>
         </p:nvSpPr>
@@ -8726,7 +8974,7 @@
       </p:sp>
       <p:sp>
         <p:nvSpPr>
-          <p:cNvPr id="177" name="" descr="{&quot;isTemplate&quot;:true,&quot;type&quot;:&quot;text&quot;}"/>
+          <p:cNvPr id="181" name="" descr="{&quot;isTemplate&quot;:true,&quot;type&quot;:&quot;text&quot;}"/>
           <p:cNvSpPr txBox="1"/>
           <p:nvPr/>
         </p:nvSpPr>
@@ -8766,7 +9014,7 @@
       </p:sp>
       <p:sp>
         <p:nvSpPr>
-          <p:cNvPr id="178" name="" descr="{&quot;isTemplate&quot;:true,&quot;type&quot;:&quot;text&quot;}"/>
+          <p:cNvPr id="182" name="" descr="{&quot;isTemplate&quot;:true,&quot;type&quot;:&quot;text&quot;}"/>
           <p:cNvSpPr txBox="1"/>
           <p:nvPr/>
         </p:nvSpPr>
@@ -8801,7 +9049,7 @@
       </p:sp>
       <p:sp>
         <p:nvSpPr>
-          <p:cNvPr id="179" name="" descr="{&quot;isTemplate&quot;:true,&quot;type&quot;:&quot;text&quot;}"/>
+          <p:cNvPr id="183" name="" descr="{&quot;isTemplate&quot;:true,&quot;type&quot;:&quot;text&quot;}"/>
           <p:cNvSpPr txBox="1"/>
           <p:nvPr/>
         </p:nvSpPr>
@@ -8896,7 +9144,7 @@
       </p:sp>
       <p:sp>
         <p:nvSpPr>
-          <p:cNvPr id="180" name="" descr="{&quot;isTemplate&quot;:true,&quot;type&quot;:&quot;text&quot;}"/>
+          <p:cNvPr id="184" name="" descr="{&quot;isTemplate&quot;:true,&quot;type&quot;:&quot;text&quot;}"/>
           <p:cNvSpPr txBox="1"/>
           <p:nvPr/>
         </p:nvSpPr>
@@ -8931,7 +9179,7 @@
       </p:sp>
       <p:sp>
         <p:nvSpPr>
-          <p:cNvPr id="181" name="" descr="{&quot;isTemplate&quot;:true,&quot;type&quot;:&quot;text&quot;}"/>
+          <p:cNvPr id="185" name="" descr="{&quot;isTemplate&quot;:true,&quot;type&quot;:&quot;text&quot;}"/>
           <p:cNvSpPr txBox="1"/>
           <p:nvPr/>
         </p:nvSpPr>
@@ -9016,7 +9264,7 @@
       </p:sp>
       <p:sp>
         <p:nvSpPr>
-          <p:cNvPr id="182" name="" descr="{&quot;isTemplate&quot;:true,&quot;type&quot;:&quot;text&quot;}"/>
+          <p:cNvPr id="186" name="" descr="{&quot;isTemplate&quot;:true,&quot;type&quot;:&quot;text&quot;}"/>
           <p:cNvSpPr txBox="1"/>
           <p:nvPr/>
         </p:nvSpPr>
@@ -9071,7 +9319,7 @@
       </p:sp>
       <p:sp>
         <p:nvSpPr>
-          <p:cNvPr id="183" name="" descr="{&quot;isTemplate&quot;:true,&quot;type&quot;:&quot;text&quot;}"/>
+          <p:cNvPr id="187" name="" descr="{&quot;isTemplate&quot;:true,&quot;type&quot;:&quot;text&quot;}"/>
           <p:cNvSpPr txBox="1"/>
           <p:nvPr/>
         </p:nvSpPr>
@@ -9116,7 +9364,7 @@
       </p:sp>
       <p:sp>
         <p:nvSpPr>
-          <p:cNvPr id="184" name="" descr="{&quot;isTemplate&quot;:true,&quot;type&quot;:&quot;text&quot;}"/>
+          <p:cNvPr id="188" name="" descr="{&quot;isTemplate&quot;:true,&quot;type&quot;:&quot;text&quot;}"/>
           <p:cNvSpPr txBox="1"/>
           <p:nvPr/>
         </p:nvSpPr>
@@ -9171,7 +9419,7 @@
       </p:sp>
       <p:sp>
         <p:nvSpPr>
-          <p:cNvPr id="185" name="" descr="{&quot;isTemplate&quot;:true,&quot;type&quot;:&quot;text&quot;}"/>
+          <p:cNvPr id="189" name="" descr="{&quot;isTemplate&quot;:true,&quot;type&quot;:&quot;text&quot;}"/>
           <p:cNvSpPr txBox="1"/>
           <p:nvPr/>
         </p:nvSpPr>
@@ -9276,7 +9524,7 @@
       </p:sp>
       <p:sp>
         <p:nvSpPr>
-          <p:cNvPr id="186" name="" descr="{&quot;isTemplate&quot;:true,&quot;type&quot;:&quot;text&quot;}"/>
+          <p:cNvPr id="190" name="" descr="{&quot;isTemplate&quot;:true,&quot;type&quot;:&quot;text&quot;}"/>
           <p:cNvSpPr txBox="1"/>
           <p:nvPr/>
         </p:nvSpPr>
@@ -9311,7 +9559,7 @@
       </p:sp>
       <p:sp>
         <p:nvSpPr>
-          <p:cNvPr id="187" name="" descr="{&quot;isTemplate&quot;:true,&quot;type&quot;:&quot;text&quot;}"/>
+          <p:cNvPr id="191" name="" descr="{&quot;isTemplate&quot;:true,&quot;type&quot;:&quot;text&quot;}"/>
           <p:cNvSpPr txBox="1"/>
           <p:nvPr/>
         </p:nvSpPr>
@@ -9406,7 +9654,7 @@
       </p:sp>
       <p:sp>
         <p:nvSpPr>
-          <p:cNvPr id="188" name="" descr="{&quot;isTemplate&quot;:true,&quot;type&quot;:&quot;text&quot;}"/>
+          <p:cNvPr id="192" name="" descr="{&quot;isTemplate&quot;:true,&quot;type&quot;:&quot;text&quot;}"/>
           <p:cNvSpPr txBox="1"/>
           <p:nvPr/>
         </p:nvSpPr>
@@ -9441,7 +9689,7 @@
       </p:sp>
       <p:sp>
         <p:nvSpPr>
-          <p:cNvPr id="189" name="" descr="{&quot;isTemplate&quot;:true,&quot;type&quot;:&quot;text&quot;}"/>
+          <p:cNvPr id="193" name="" descr="{&quot;isTemplate&quot;:true,&quot;type&quot;:&quot;text&quot;}"/>
           <p:cNvSpPr txBox="1"/>
           <p:nvPr/>
         </p:nvSpPr>
@@ -9526,7 +9774,7 @@
       </p:sp>
       <p:sp>
         <p:nvSpPr>
-          <p:cNvPr id="190" name=""/>
+          <p:cNvPr id="194" name=""/>
           <p:cNvSpPr/>
           <p:nvPr/>
         </p:nvSpPr>
@@ -9559,7 +9807,7 @@
       </p:sp>
       <p:sp>
         <p:nvSpPr>
-          <p:cNvPr id="191" name="" descr="{&quot;isTemplate&quot;:true,&quot;type&quot;:&quot;text&quot;}"/>
+          <p:cNvPr id="195" name="" descr="{&quot;isTemplate&quot;:true,&quot;type&quot;:&quot;text&quot;}"/>
           <p:cNvSpPr txBox="1"/>
           <p:nvPr/>
         </p:nvSpPr>
@@ -9594,7 +9842,7 @@
       </p:sp>
       <p:sp>
         <p:nvSpPr>
-          <p:cNvPr id="192" name=""/>
+          <p:cNvPr id="196" name=""/>
           <p:cNvSpPr/>
           <p:nvPr/>
         </p:nvSpPr>
@@ -9622,7 +9870,7 @@
       </p:sp>
       <p:sp>
         <p:nvSpPr>
-          <p:cNvPr id="193" name="" descr="{&quot;isTemplate&quot;:true,&quot;type&quot;:&quot;text&quot;}"/>
+          <p:cNvPr id="197" name="" descr="{&quot;isTemplate&quot;:true,&quot;type&quot;:&quot;text&quot;}"/>
           <p:cNvSpPr txBox="1"/>
           <p:nvPr/>
         </p:nvSpPr>
@@ -9662,7 +9910,7 @@
       </p:sp>
       <p:sp>
         <p:nvSpPr>
-          <p:cNvPr id="194" name="" descr="{&quot;isTemplate&quot;:true,&quot;type&quot;:&quot;text&quot;}"/>
+          <p:cNvPr id="198" name="" descr="{&quot;isTemplate&quot;:true,&quot;type&quot;:&quot;text&quot;}"/>
           <p:cNvSpPr txBox="1"/>
           <p:nvPr/>
         </p:nvSpPr>
@@ -9697,7 +9945,7 @@
       </p:sp>
       <p:sp>
         <p:nvSpPr>
-          <p:cNvPr id="195" name="" descr="{&quot;isTemplate&quot;:true,&quot;type&quot;:&quot;text&quot;}"/>
+          <p:cNvPr id="199" name="" descr="{&quot;isTemplate&quot;:true,&quot;type&quot;:&quot;text&quot;}"/>
           <p:cNvSpPr txBox="1"/>
           <p:nvPr/>
         </p:nvSpPr>
@@ -9732,7 +9980,7 @@
       </p:sp>
       <p:sp>
         <p:nvSpPr>
-          <p:cNvPr id="196" name="" descr="{&quot;isTemplate&quot;:true,&quot;type&quot;:&quot;text&quot;}"/>
+          <p:cNvPr id="200" name="" descr="{&quot;isTemplate&quot;:true,&quot;type&quot;:&quot;text&quot;}"/>
           <p:cNvSpPr txBox="1"/>
           <p:nvPr/>
         </p:nvSpPr>
@@ -9807,7 +10055,7 @@
       </p:sp>
       <p:sp>
         <p:nvSpPr>
-          <p:cNvPr id="197" name="" descr="{&quot;isTemplate&quot;:true,&quot;type&quot;:&quot;text&quot;}"/>
+          <p:cNvPr id="201" name="" descr="{&quot;isTemplate&quot;:true,&quot;type&quot;:&quot;text&quot;}"/>
           <p:cNvSpPr txBox="1"/>
           <p:nvPr/>
         </p:nvSpPr>
@@ -9862,7 +10110,7 @@
       </p:sp>
       <p:sp>
         <p:nvSpPr>
-          <p:cNvPr id="198" name="" descr="{&quot;isTemplate&quot;:true,&quot;type&quot;:&quot;text&quot;}"/>
+          <p:cNvPr id="202" name="" descr="{&quot;isTemplate&quot;:true,&quot;type&quot;:&quot;text&quot;}"/>
           <p:cNvSpPr txBox="1"/>
           <p:nvPr/>
         </p:nvSpPr>
@@ -9897,7 +10145,7 @@
       </p:sp>
       <p:sp>
         <p:nvSpPr>
-          <p:cNvPr id="199" name="" descr="{&quot;isTemplate&quot;:true,&quot;type&quot;:&quot;text&quot;}"/>
+          <p:cNvPr id="203" name="" descr="{&quot;isTemplate&quot;:true,&quot;type&quot;:&quot;text&quot;}"/>
           <p:cNvSpPr txBox="1"/>
           <p:nvPr/>
         </p:nvSpPr>
@@ -9972,7 +10220,7 @@
       </p:sp>
       <p:sp>
         <p:nvSpPr>
-          <p:cNvPr id="200" name="" descr="{&quot;isTemplate&quot;:true,&quot;type&quot;:&quot;text&quot;}"/>
+          <p:cNvPr id="204" name="" descr="{&quot;isTemplate&quot;:true,&quot;type&quot;:&quot;text&quot;}"/>
           <p:cNvSpPr txBox="1"/>
           <p:nvPr/>
         </p:nvSpPr>
@@ -10007,7 +10255,7 @@
       </p:sp>
       <p:sp>
         <p:nvSpPr>
-          <p:cNvPr id="201" name="" descr="{&quot;isTemplate&quot;:true,&quot;type&quot;:&quot;text&quot;}"/>
+          <p:cNvPr id="205" name="" descr="{&quot;isTemplate&quot;:true,&quot;type&quot;:&quot;text&quot;}"/>
           <p:cNvSpPr txBox="1"/>
           <p:nvPr/>
         </p:nvSpPr>
@@ -10062,7 +10310,7 @@
       </p:sp>
       <p:sp>
         <p:nvSpPr>
-          <p:cNvPr id="202" name=""/>
+          <p:cNvPr id="206" name=""/>
           <p:cNvSpPr/>
           <p:nvPr/>
         </p:nvSpPr>
@@ -10096,7 +10344,7 @@
       </p:sp>
       <p:sp>
         <p:nvSpPr>
-          <p:cNvPr id="203" name="" descr="{&quot;isTemplate&quot;:true,&quot;type&quot;:&quot;text&quot;}"/>
+          <p:cNvPr id="207" name="" descr="{&quot;isTemplate&quot;:true,&quot;type&quot;:&quot;text&quot;}"/>
           <p:cNvSpPr txBox="1"/>
           <p:nvPr/>
         </p:nvSpPr>
@@ -10131,7 +10379,7 @@
       </p:sp>
       <p:sp>
         <p:nvSpPr>
-          <p:cNvPr id="204" name="" descr="{&quot;isTemplate&quot;:true,&quot;type&quot;:&quot;text&quot;}"/>
+          <p:cNvPr id="208" name="" descr="{&quot;isTemplate&quot;:true,&quot;type&quot;:&quot;text&quot;}"/>
           <p:cNvSpPr txBox="1"/>
           <p:nvPr/>
         </p:nvSpPr>
@@ -10166,7 +10414,7 @@
       </p:sp>
       <p:sp>
         <p:nvSpPr>
-          <p:cNvPr id="205" name="" descr="{&quot;isTemplate&quot;:true,&quot;type&quot;:&quot;text&quot;}"/>
+          <p:cNvPr id="209" name="" descr="{&quot;isTemplate&quot;:true,&quot;type&quot;:&quot;text&quot;}"/>
           <p:cNvSpPr txBox="1"/>
           <p:nvPr/>
         </p:nvSpPr>
@@ -10251,7 +10499,7 @@
       </p:sp>
       <p:sp>
         <p:nvSpPr>
-          <p:cNvPr id="206" name="" descr="{&quot;isTemplate&quot;:true,&quot;type&quot;:&quot;text&quot;}"/>
+          <p:cNvPr id="210" name="" descr="{&quot;isTemplate&quot;:true,&quot;type&quot;:&quot;text&quot;}"/>
           <p:cNvSpPr txBox="1"/>
           <p:nvPr/>
         </p:nvSpPr>
@@ -10286,7 +10534,7 @@
       </p:sp>
       <p:sp>
         <p:nvSpPr>
-          <p:cNvPr id="207" name="" descr="{&quot;isTemplate&quot;:true,&quot;type&quot;:&quot;text&quot;}"/>
+          <p:cNvPr id="211" name="" descr="{&quot;isTemplate&quot;:true,&quot;type&quot;:&quot;text&quot;}"/>
           <p:cNvSpPr txBox="1"/>
           <p:nvPr/>
         </p:nvSpPr>
@@ -10347,7 +10595,7 @@
       </p:sp>
       <p:sp>
         <p:nvSpPr>
-          <p:cNvPr id="208" name="" descr="{&quot;isTemplate&quot;:true,&quot;type&quot;:&quot;text&quot;}"/>
+          <p:cNvPr id="212" name="" descr="{&quot;isTemplate&quot;:true,&quot;type&quot;:&quot;text&quot;}"/>
           <p:cNvSpPr txBox="1"/>
           <p:nvPr/>
         </p:nvSpPr>
@@ -10382,7 +10630,7 @@
       </p:sp>
       <p:sp>
         <p:nvSpPr>
-          <p:cNvPr id="209" name="" descr="{&quot;isTemplate&quot;:true,&quot;type&quot;:&quot;text&quot;}"/>
+          <p:cNvPr id="213" name="" descr="{&quot;isTemplate&quot;:true,&quot;type&quot;:&quot;text&quot;}"/>
           <p:cNvSpPr txBox="1"/>
           <p:nvPr/>
         </p:nvSpPr>
@@ -10419,7 +10667,7 @@
       </p:sp>
       <p:sp>
         <p:nvSpPr>
-          <p:cNvPr id="210" name="" descr="{&quot;isTemplate&quot;:true,&quot;type&quot;:&quot;text&quot;}"/>
+          <p:cNvPr id="214" name="" descr="{&quot;isTemplate&quot;:true,&quot;type&quot;:&quot;text&quot;}"/>
           <p:cNvSpPr txBox="1"/>
           <p:nvPr/>
         </p:nvSpPr>
@@ -10454,7 +10702,7 @@
       </p:sp>
       <p:sp>
         <p:nvSpPr>
-          <p:cNvPr id="211" name="" descr="{&quot;isTemplate&quot;:true,&quot;type&quot;:&quot;text&quot;}"/>
+          <p:cNvPr id="215" name="" descr="{&quot;isTemplate&quot;:true,&quot;type&quot;:&quot;text&quot;}"/>
           <p:cNvSpPr txBox="1"/>
           <p:nvPr/>
         </p:nvSpPr>
@@ -10503,7 +10751,7 @@
       </p:sp>
       <p:sp>
         <p:nvSpPr>
-          <p:cNvPr id="212" name="" descr="{&quot;isTemplate&quot;:true,&quot;type&quot;:&quot;text&quot;}"/>
+          <p:cNvPr id="216" name="" descr="{&quot;isTemplate&quot;:true,&quot;type&quot;:&quot;text&quot;}"/>
           <p:cNvSpPr txBox="1"/>
           <p:nvPr/>
         </p:nvSpPr>
@@ -10538,7 +10786,7 @@
       </p:sp>
       <p:sp>
         <p:nvSpPr>
-          <p:cNvPr id="213" name="" descr="{&quot;isTemplate&quot;:true,&quot;type&quot;:&quot;text&quot;}"/>
+          <p:cNvPr id="217" name="" descr="{&quot;isTemplate&quot;:true,&quot;type&quot;:&quot;text&quot;}"/>
           <p:cNvSpPr txBox="1"/>
           <p:nvPr/>
         </p:nvSpPr>
@@ -10623,7 +10871,7 @@
       </p:sp>
       <p:sp>
         <p:nvSpPr>
-          <p:cNvPr id="214" name=""/>
+          <p:cNvPr id="218" name=""/>
           <p:cNvSpPr/>
           <p:nvPr/>
         </p:nvSpPr>
@@ -10665,7 +10913,7 @@
       </p:sp>
       <p:sp>
         <p:nvSpPr>
-          <p:cNvPr id="215" name="" descr="{&quot;isTemplate&quot;:true,&quot;type&quot;:&quot;text&quot;}"/>
+          <p:cNvPr id="219" name="" descr="{&quot;isTemplate&quot;:true,&quot;type&quot;:&quot;text&quot;}"/>
           <p:cNvSpPr txBox="1"/>
           <p:nvPr/>
         </p:nvSpPr>
@@ -10702,7 +10950,7 @@
       </p:sp>
       <p:sp>
         <p:nvSpPr>
-          <p:cNvPr id="216" name=""/>
+          <p:cNvPr id="220" name=""/>
           <p:cNvSpPr/>
           <p:nvPr/>
         </p:nvSpPr>
@@ -10735,7 +10983,7 @@
       </p:sp>
       <p:sp>
         <p:nvSpPr>
-          <p:cNvPr id="217" name="" descr="{&quot;isTemplate&quot;:true,&quot;type&quot;:&quot;text&quot;}"/>
+          <p:cNvPr id="221" name="" descr="{&quot;isTemplate&quot;:true,&quot;type&quot;:&quot;text&quot;}"/>
           <p:cNvSpPr txBox="1"/>
           <p:nvPr/>
         </p:nvSpPr>
@@ -10770,7 +11018,7 @@
       </p:sp>
       <p:sp>
         <p:nvSpPr>
-          <p:cNvPr id="218" name="" descr="{&quot;isTemplate&quot;:true,&quot;type&quot;:&quot;text&quot;}"/>
+          <p:cNvPr id="222" name="" descr="{&quot;isTemplate&quot;:true,&quot;type&quot;:&quot;text&quot;}"/>
           <p:cNvSpPr txBox="1"/>
           <p:nvPr/>
         </p:nvSpPr>
@@ -10805,7 +11053,7 @@
       </p:sp>
       <p:sp>
         <p:nvSpPr>
-          <p:cNvPr id="219" name="" descr="{&quot;isTemplate&quot;:true,&quot;type&quot;:&quot;text&quot;}"/>
+          <p:cNvPr id="223" name="" descr="{&quot;isTemplate&quot;:true,&quot;type&quot;:&quot;text&quot;}"/>
           <p:cNvSpPr txBox="1"/>
           <p:nvPr/>
         </p:nvSpPr>
@@ -10826,7 +11074,7 @@
       </p:sp>
       <p:sp>
         <p:nvSpPr>
-          <p:cNvPr id="220" name="" descr="{&quot;isTemplate&quot;:true,&quot;type&quot;:&quot;text&quot;}"/>
+          <p:cNvPr id="224" name="" descr="{&quot;isTemplate&quot;:true,&quot;type&quot;:&quot;text&quot;}"/>
           <p:cNvSpPr txBox="1"/>
           <p:nvPr/>
         </p:nvSpPr>
@@ -10871,7 +11119,7 @@
       </p:sp>
       <p:sp>
         <p:nvSpPr>
-          <p:cNvPr id="221" name=""/>
+          <p:cNvPr id="225" name=""/>
           <p:cNvSpPr/>
           <p:nvPr/>
         </p:nvSpPr>
@@ -10913,7 +11161,7 @@
       </p:sp>
       <p:sp>
         <p:nvSpPr>
-          <p:cNvPr id="222" name="" descr="{&quot;isTemplate&quot;:true,&quot;type&quot;:&quot;text&quot;}"/>
+          <p:cNvPr id="226" name="" descr="{&quot;isTemplate&quot;:true,&quot;type&quot;:&quot;text&quot;}"/>
           <p:cNvSpPr txBox="1"/>
           <p:nvPr/>
         </p:nvSpPr>
@@ -10970,7 +11218,7 @@
       </p:sp>
       <p:sp>
         <p:nvSpPr>
-          <p:cNvPr id="223" name="" descr="{&quot;isTemplate&quot;:true,&quot;type&quot;:&quot;text&quot;}"/>
+          <p:cNvPr id="227" name="" descr="{&quot;isTemplate&quot;:true,&quot;type&quot;:&quot;text&quot;}"/>
           <p:cNvSpPr txBox="1"/>
           <p:nvPr/>
         </p:nvSpPr>
@@ -11025,7 +11273,7 @@
       </p:sp>
       <p:sp>
         <p:nvSpPr>
-          <p:cNvPr id="224" name="" descr="{&quot;isTemplate&quot;:true,&quot;type&quot;:&quot;text&quot;}"/>
+          <p:cNvPr id="228" name="" descr="{&quot;isTemplate&quot;:true,&quot;type&quot;:&quot;text&quot;}"/>
           <p:cNvSpPr txBox="1"/>
           <p:nvPr/>
         </p:nvSpPr>
@@ -11068,7 +11316,7 @@
   <p:cSld>
     <p:spTree>
       <p:nvGrpSpPr>
-        <p:cNvPr id="225" name="" descr="&lt;Slide style={{ width: '1280px', height: '720px', background: 'linear-gradient(135deg, #172133 0%, #22395E 100%)', position: 'relative' }}&gt;&#10;  &lt;div style={{ position: 'absolute', inset: 0, display: 'flex', flexDirection: 'column', alignItems: 'center', justifyContent: 'center', color: '#FBFCFA' }}&gt;&#10;    &lt;div style={{ color: '#BD9B56', fontSize: 26, marginBottom: 22, letterSpacing: '0.4em' }}&gt;◆&lt;/div&gt;&#10;    &lt;h1 style={{ fontSize: 56, fontWeight: 'bold', margin: 0, color: '#FBFCFA', letterSpacing: '0.12em' }}&gt;感谢聆听&lt;/h1&gt;&#10;    &lt;div style={{ width: 80, height: 3, background: '#BD9B56', marginTop: 26, marginBottom: 26 }} /&gt;&#10;    &lt;p style={{ fontSize: 20, color: 'rgba(189,155,86,0.9)', margin: 0, letterSpacing: '0.15em' }}&gt;让 AI 真正走进社区&lt;/p&gt;&#10;    &lt;div style={{ marginTop: 56, padding: '20px 40px', background: 'rgba(189,155,86,0.08)', border: '1px solid rgba(189,155,86,0.3)', borderRadius: 8, textAlign: 'center' }}&gt;&#10;      &lt;div style={{ fontSize: 12, color: '#BD9B56', letterSpacing: '0.25em', marginBottom: 10 }}&gt;ONLINE DEMO&lt;/div&gt;&#10;      &lt;div style={{ fontSize: 17, color: '#FBFCFA', fontFamily: 'Inter, sans-serif', marginBottom: 4 }}&gt;http://119.91.236.85&lt;/div&gt;&#10;      &lt;div style={{ fontSize: 12, color: 'rgba(251,252,250,0.7)' }}&gt;业主 guoyi378 · 物业 mayun420 · 维修 yangfei423（密码 123456）&lt;/div&gt;&#10;    &lt;/div&gt;&#10;  &lt;/div&gt;&#10;  &lt;div style={{ position: 'absolute', left: 64, bottom: 28, color: '#BD9B56', fontSize: 13, letterSpacing: '0.12em' }}&gt;云溪花园 · 智慧社区&lt;/div&gt;&#10;  &lt;div style={{ position: 'absolute', right: 28, bottom: 28, color: 'rgba(189,155,86,0.75)', fontSize: 13 }}&gt;15 / 15&lt;/div&gt;&#10;&lt;/Slide&gt;"/>
+        <p:cNvPr id="229" name="" descr="&lt;Slide style={{ width: '1280px', height: '720px', background: 'linear-gradient(135deg, #172133 0%, #22395E 100%)', position: 'relative' }}&gt;&#10;  &lt;div style={{ position: 'absolute', inset: 0, display: 'flex', flexDirection: 'column', alignItems: 'center', justifyContent: 'center', color: '#FBFCFA' }}&gt;&#10;    &lt;div style={{ color: '#BD9B56', fontSize: 26, marginBottom: 22, letterSpacing: '0.4em' }}&gt;◆&lt;/div&gt;&#10;    &lt;h1 style={{ fontSize: 56, fontWeight: 'bold', margin: 0, color: '#FBFCFA', letterSpacing: '0.12em' }}&gt;感谢聆听&lt;/h1&gt;&#10;    &lt;div style={{ width: 80, height: 3, background: '#BD9B56', marginTop: 26, marginBottom: 26 }} /&gt;&#10;    &lt;p style={{ fontSize: 20, color: 'rgba(189,155,86,0.9)', margin: 0, letterSpacing: '0.15em' }}&gt;让 AI 真正走进社区&lt;/p&gt;&#10;    &lt;div style={{ marginTop: 56, padding: '20px 40px', background: 'rgba(189,155,86,0.08)', border: '1px solid rgba(189,155,86,0.3)', borderRadius: 8, textAlign: 'center' }}&gt;&#10;      &lt;div style={{ fontSize: 12, color: '#BD9B56', letterSpacing: '0.25em', marginBottom: 10 }}&gt;ONLINE DEMO&lt;/div&gt;&#10;      &lt;div style={{ fontSize: 17, color: '#FBFCFA', fontFamily: 'Inter, sans-serif', marginBottom: 4 }}&gt;http://119.91.236.85&lt;/div&gt;&#10;      &lt;div style={{ fontSize: 12, color: 'rgba(251,252,250,0.7)' }}&gt;业主 guoyi378 · 物业 mayun420 · 维修 yangfei423（密码 123456）&lt;/div&gt;&#10;    &lt;/div&gt;&#10;  &lt;/div&gt;&#10;  &lt;div style={{ position: 'absolute', left: 64, bottom: 28, color: '#BD9B56', fontSize: 13, letterSpacing: '0.12em' }}&gt;云溪花园 · 智慧社区&lt;/div&gt;&#10;  &lt;div style={{ position: 'absolute', right: 28, bottom: 28, color: 'rgba(189,155,86,0.75)', fontSize: 13 }}&gt;15 / 15&lt;/div&gt;&#10;&lt;/Slide&gt;"/>
         <p:cNvGrpSpPr/>
         <p:nvPr/>
       </p:nvGrpSpPr>
@@ -11082,7 +11330,7 @@
       </p:grpSpPr>
       <p:sp>
         <p:nvSpPr>
-          <p:cNvPr id="226" name=""/>
+          <p:cNvPr id="230" name=""/>
           <p:cNvSpPr/>
           <p:nvPr/>
         </p:nvSpPr>
@@ -11114,7 +11362,7 @@
       </p:sp>
       <p:sp>
         <p:nvSpPr>
-          <p:cNvPr id="227" name="" descr="{&quot;isTemplate&quot;:true,&quot;type&quot;:&quot;text&quot;}"/>
+          <p:cNvPr id="231" name="" descr="{&quot;isTemplate&quot;:true,&quot;type&quot;:&quot;text&quot;}"/>
           <p:cNvSpPr txBox="1"/>
           <p:nvPr/>
         </p:nvSpPr>
@@ -11149,7 +11397,7 @@
       </p:sp>
       <p:sp>
         <p:nvSpPr>
-          <p:cNvPr id="228" name="" descr="{&quot;isTemplate&quot;:true,&quot;type&quot;:&quot;text&quot;}"/>
+          <p:cNvPr id="232" name="" descr="{&quot;isTemplate&quot;:true,&quot;type&quot;:&quot;text&quot;}"/>
           <p:cNvSpPr txBox="1"/>
           <p:nvPr/>
         </p:nvSpPr>
@@ -11184,7 +11432,7 @@
       </p:sp>
       <p:sp>
         <p:nvSpPr>
-          <p:cNvPr id="229" name=""/>
+          <p:cNvPr id="233" name=""/>
           <p:cNvSpPr/>
           <p:nvPr/>
         </p:nvSpPr>
@@ -11208,7 +11456,7 @@
       </p:sp>
       <p:sp>
         <p:nvSpPr>
-          <p:cNvPr id="230" name="" descr="{&quot;isTemplate&quot;:true,&quot;type&quot;:&quot;text&quot;}"/>
+          <p:cNvPr id="234" name="" descr="{&quot;isTemplate&quot;:true,&quot;type&quot;:&quot;text&quot;}"/>
           <p:cNvSpPr txBox="1"/>
           <p:nvPr/>
         </p:nvSpPr>
@@ -11269,7 +11517,7 @@
       </p:sp>
       <p:sp>
         <p:nvSpPr>
-          <p:cNvPr id="231" name=""/>
+          <p:cNvPr id="235" name=""/>
           <p:cNvSpPr/>
           <p:nvPr/>
         </p:nvSpPr>
@@ -11304,7 +11552,7 @@
       </p:sp>
       <p:sp>
         <p:nvSpPr>
-          <p:cNvPr id="232" name="" descr="{&quot;isTemplate&quot;:true,&quot;type&quot;:&quot;text&quot;}"/>
+          <p:cNvPr id="236" name="" descr="{&quot;isTemplate&quot;:true,&quot;type&quot;:&quot;text&quot;}"/>
           <p:cNvSpPr txBox="1"/>
           <p:nvPr/>
         </p:nvSpPr>
@@ -11339,7 +11587,7 @@
       </p:sp>
       <p:sp>
         <p:nvSpPr>
-          <p:cNvPr id="233" name="" descr="{&quot;isTemplate&quot;:true,&quot;type&quot;:&quot;text&quot;}"/>
+          <p:cNvPr id="237" name="" descr="{&quot;isTemplate&quot;:true,&quot;type&quot;:&quot;text&quot;}"/>
           <p:cNvSpPr txBox="1"/>
           <p:nvPr/>
         </p:nvSpPr>
@@ -11374,7 +11622,7 @@
       </p:sp>
       <p:sp>
         <p:nvSpPr>
-          <p:cNvPr id="234" name="" descr="{&quot;isTemplate&quot;:true,&quot;type&quot;:&quot;text&quot;}"/>
+          <p:cNvPr id="238" name="" descr="{&quot;isTemplate&quot;:true,&quot;type&quot;:&quot;text&quot;}"/>
           <p:cNvSpPr txBox="1"/>
           <p:nvPr/>
         </p:nvSpPr>
@@ -11507,7 +11755,7 @@
       </p:sp>
       <p:sp>
         <p:nvSpPr>
-          <p:cNvPr id="235" name="" descr="{&quot;isTemplate&quot;:true,&quot;type&quot;:&quot;text&quot;}"/>
+          <p:cNvPr id="239" name="" descr="{&quot;isTemplate&quot;:true,&quot;type&quot;:&quot;text&quot;}"/>
           <p:cNvSpPr txBox="1"/>
           <p:nvPr/>
         </p:nvSpPr>
@@ -11562,7 +11810,7 @@
       </p:sp>
       <p:sp>
         <p:nvSpPr>
-          <p:cNvPr id="236" name="" descr="{&quot;isTemplate&quot;:true,&quot;type&quot;:&quot;text&quot;}"/>
+          <p:cNvPr id="240" name="" descr="{&quot;isTemplate&quot;:true,&quot;type&quot;:&quot;text&quot;}"/>
           <p:cNvSpPr txBox="1"/>
           <p:nvPr/>
         </p:nvSpPr>
@@ -11607,7 +11855,7 @@
   <p:cSld>
     <p:spTree>
       <p:nvGrpSpPr>
-        <p:cNvPr id="237" name="" descr="&lt;Slide style={{ width: '1280px', height: '720px', background: '#FBFCFA', position: 'relative', padding: '40px 64px', boxSizing: 'border-box', display: 'flex', flexDirection: 'column' }}&gt;&#10;  &lt;div style={{ flexShrink: 0 }}&gt;&#10;    &lt;div style={{ color: '#BD9B56', fontSize: 14, letterSpacing: '0.3em', marginBottom: 10 }}&gt;CONTENTS&lt;/div&gt;&#10;    &lt;h2 style={{ fontSize: 34, fontWeight: 'bold', color: '#172133', margin: 0 }}&gt;目录&lt;/h2&gt;&#10;    &lt;div style={{ width: 64, height: 3, background: '#BD9B56', marginTop: 16 }} /&gt;&#10;  &lt;/div&gt;&#10;  &lt;div style={{ flex: 1, display: 'flex', alignItems: 'center' }}&gt;&#10;    &lt;div style={{ width: '100%', display: 'flex', flexDirection: 'column', gap: 20 }}&gt;&#10;      &lt;div style={{ display: 'flex', alignItems: 'center', gap: 28, paddingBottom: 18, borderBottom: '1px solid rgba(34,57,94,0.12)' }}&gt;&#10;        &lt;span style={{ color: '#BD9B56', fontSize: 40, fontWeight: 'bold', lineHeight: 1, minWidth: 72, fontFamily: 'Inter, sans-serif' }}&gt;01&lt;/span&gt;&#10;        &lt;div style={{ flex: 1 }}&gt;&#10;          &lt;div style={{ fontSize: 22, fontWeight: 'bold', color: '#172133' }}&gt;项目背景与规模&lt;/div&gt;&#10;          &lt;div style={{ fontSize: 14, color: '#6b7075', marginTop: 6 }}&gt;传统物业痛点 · 虚拟社区「云溪花园」数据资产&lt;/div&gt;&#10;        &lt;/div&gt;&#10;      &lt;/div&gt;&#10;      &lt;div style={{ display: 'flex', alignItems: 'center', gap: 28, paddingBottom: 18, borderBottom: '1px solid rgba(34,57,94,0.12)' }}&gt;&#10;        &lt;span style={{ color: '#BD9B56', fontSize: 40, fontWeight: 'bold', lineHeight: 1, minWidth: 72, fontFamily: 'Inter, sans-serif' }}&gt;02&lt;/span&gt;&#10;        &lt;div style={{ flex: 1 }}&gt;&#10;          &lt;div style={{ fontSize: 22, fontWeight: 'bold', color: '#172133' }}&gt;技术构建过程&lt;/div&gt;&#10;          &lt;div style={{ fontSize: 14, color: '#6b7075', marginTop: 6 }}&gt;数据库设计 → 后端 → 前端 → AI Agent → RAG 知识库&lt;/div&gt;&#10;        &lt;/div&gt;&#10;      &lt;/div&gt;&#10;      &lt;div style={{ display: 'flex', alignItems: 'center', gap: 28, paddingBottom: 18, borderBottom: '1px solid rgba(34,57,94,0.12)' }}&gt;&#10;        &lt;span style={{ color: '#BD9B56', fontSize: 40, fontWeight: 'bold', lineHeight: 1, minWidth: 72, fontFamily: 'Inter, sans-serif' }}&gt;03&lt;/span&gt;&#10;        &lt;div style={{ flex: 1 }}&gt;&#10;          &lt;div style={{ fontSize: 22, fontWeight: 'bold', color: '#172133' }}&gt;成果与验证&lt;/div&gt;&#10;          &lt;div style={{ fontSize: 14, color: '#6b7075', marginTop: 6 }}&gt;三条功能闭环 · 量化评估指标&lt;/div&gt;&#10;        &lt;/div&gt;&#10;      &lt;/div&gt;&#10;      &lt;div style={{ display: 'flex', alignItems: 'center', gap: 28 }}&gt;&#10;        &lt;span style={{ color: '#BD9B56', fontSize: 40, fontWeight: 'bold', lineHeight: 1, minWidth: 72, fontFamily: 'Inter, sans-serif' }}&gt;04&lt;/span&gt;&#10;        &lt;div style={{ flex: 1 }}&gt;&#10;          &lt;div style={{ fontSize: 22, fontWeight: 'bold', color: '#172133' }}&gt;总结与展望&lt;/div&gt;&#10;          &lt;div style={{ fontSize: 14, color: '#6b7075', marginTop: 6 }}&gt;项目价值 · 在线演示入口&lt;/div&gt;&#10;        &lt;/div&gt;&#10;      &lt;/div&gt;&#10;    &lt;/div&gt;&#10;  &lt;/div&gt;&#10;  &lt;div style={{ flexShrink: 0, height: 44, display: 'flex', alignItems: 'flex-end', justifyContent: 'space-between' }}&gt;&#10;    &lt;span style={{ color: '#BD9B56', fontSize: 12, letterSpacing: '0.1em' }}&gt;云溪花园 · 智慧社区&lt;/span&gt;&#10;    &lt;span style={{ color: '#a09b8c', fontSize: 12 }}&gt;02 / 15&lt;/span&gt;&#10;  &lt;/div&gt;&#10;&lt;/Slide&gt;"/>
+        <p:cNvPr id="241" name="" descr="&lt;Slide style={{ width: '1280px', height: '720px', background: '#FBFCFA', position: 'relative', padding: '40px 64px', boxSizing: 'border-box', display: 'flex', flexDirection: 'column' }}&gt;&#10;  &lt;div style={{ flexShrink: 0 }}&gt;&#10;    &lt;div style={{ color: '#BD9B56', fontSize: 14, letterSpacing: '0.3em', marginBottom: 10 }}&gt;CONTENTS&lt;/div&gt;&#10;    &lt;h2 style={{ fontSize: 34, fontWeight: 'bold', color: '#172133', margin: 0 }}&gt;目录&lt;/h2&gt;&#10;    &lt;div style={{ width: 64, height: 3, background: '#BD9B56', marginTop: 16 }} /&gt;&#10;  &lt;/div&gt;&#10;  &lt;div style={{ flex: 1, display: 'flex', alignItems: 'center' }}&gt;&#10;    &lt;div style={{ width: '100%', display: 'flex', flexDirection: 'column', gap: 20 }}&gt;&#10;      &lt;div style={{ display: 'flex', alignItems: 'center', gap: 28, paddingBottom: 18, borderBottom: '1px solid rgba(34,57,94,0.12)' }}&gt;&#10;        &lt;span style={{ color: '#BD9B56', fontSize: 40, fontWeight: 'bold', lineHeight: 1, minWidth: 72, fontFamily: 'Inter, sans-serif' }}&gt;01&lt;/span&gt;&#10;        &lt;div style={{ flex: 1 }}&gt;&#10;          &lt;div style={{ fontSize: 22, fontWeight: 'bold', color: '#172133' }}&gt;项目背景与规模&lt;/div&gt;&#10;          &lt;div style={{ fontSize: 14, color: '#6b7075', marginTop: 6 }}&gt;传统物业痛点 · 虚拟社区「云溪花园」数据资产&lt;/div&gt;&#10;        &lt;/div&gt;&#10;      &lt;/div&gt;&#10;      &lt;div style={{ display: 'flex', alignItems: 'center', gap: 28, paddingBottom: 18, borderBottom: '1px solid rgba(34,57,94,0.12)' }}&gt;&#10;        &lt;span style={{ color: '#BD9B56', fontSize: 40, fontWeight: 'bold', lineHeight: 1, minWidth: 72, fontFamily: 'Inter, sans-serif' }}&gt;02&lt;/span&gt;&#10;        &lt;div style={{ flex: 1 }}&gt;&#10;          &lt;div style={{ fontSize: 22, fontWeight: 'bold', color: '#172133' }}&gt;技术构建过程&lt;/div&gt;&#10;          &lt;div style={{ fontSize: 14, color: '#6b7075', marginTop: 6 }}&gt;数据库设计 → 后端 → 前端 → AI Agent → RAG 知识库&lt;/div&gt;&#10;        &lt;/div&gt;&#10;      &lt;/div&gt;&#10;      &lt;div style={{ display: 'flex', alignItems: 'center', gap: 28, paddingBottom: 18, borderBottom: '1px solid rgba(34,57,94,0.12)' }}&gt;&#10;        &lt;span style={{ color: '#BD9B56', fontSize: 40, fontWeight: 'bold', lineHeight: 1, minWidth: 72, fontFamily: 'Inter, sans-serif' }}&gt;03&lt;/span&gt;&#10;        &lt;div style={{ flex: 1 }}&gt;&#10;          &lt;div style={{ fontSize: 22, fontWeight: 'bold', color: '#172133' }}&gt;成果与验证&lt;/div&gt;&#10;          &lt;div style={{ fontSize: 14, color: '#6b7075', marginTop: 6 }}&gt;三条功能闭环 · 量化评估指标&lt;/div&gt;&#10;        &lt;/div&gt;&#10;      &lt;/div&gt;&#10;      &lt;div style={{ display: 'flex', alignItems: 'center', gap: 28 }}&gt;&#10;        &lt;span style={{ color: '#BD9B56', fontSize: 40, fontWeight: 'bold', lineHeight: 1, minWidth: 72, fontFamily: 'Inter, sans-serif' }}&gt;04&lt;/span&gt;&#10;        &lt;div style={{ flex: 1 }}&gt;&#10;          &lt;div style={{ fontSize: 22, fontWeight: 'bold', color: '#172133' }}&gt;总结与展望&lt;/div&gt;&#10;          &lt;div style={{ fontSize: 14, color: '#6b7075', marginTop: 6 }}&gt;项目价值 · 在线演示入口&lt;/div&gt;&#10;        &lt;/div&gt;&#10;      &lt;/div&gt;&#10;    &lt;/div&gt;&#10;  &lt;/div&gt;&#10;  &lt;div style={{ flexShrink: 0, height: 44, display: 'flex', alignItems: 'flex-end', justifyContent: 'space-between' }}&gt;&#10;    &lt;span style={{ color: '#BD9B56', fontSize: 12, letterSpacing: '0.1em' }}&gt;云溪花园 · 智慧社区&lt;/span&gt;&#10;    &lt;span style={{ color: '#a09b8c', fontSize: 12 }}&gt;02 / 15&lt;/span&gt;&#10;  &lt;/div&gt;&#10;&lt;/Slide&gt;"/>
         <p:cNvGrpSpPr/>
         <p:nvPr/>
       </p:nvGrpSpPr>
@@ -11621,7 +11869,7 @@
       </p:grpSpPr>
       <p:sp>
         <p:nvSpPr>
-          <p:cNvPr id="238" name=""/>
+          <p:cNvPr id="242" name=""/>
           <p:cNvSpPr/>
           <p:nvPr/>
         </p:nvSpPr>
@@ -11645,7 +11893,7 @@
       </p:sp>
       <p:sp>
         <p:nvSpPr>
-          <p:cNvPr id="239" name="" descr="{&quot;isTemplate&quot;:true,&quot;type&quot;:&quot;text&quot;}"/>
+          <p:cNvPr id="243" name="" descr="{&quot;isTemplate&quot;:true,&quot;type&quot;:&quot;text&quot;}"/>
           <p:cNvSpPr txBox="1"/>
           <p:nvPr/>
         </p:nvSpPr>
@@ -11680,7 +11928,7 @@
       </p:sp>
       <p:sp>
         <p:nvSpPr>
-          <p:cNvPr id="240" name="" descr="{&quot;isTemplate&quot;:true,&quot;type&quot;:&quot;text&quot;}"/>
+          <p:cNvPr id="244" name="" descr="{&quot;isTemplate&quot;:true,&quot;type&quot;:&quot;text&quot;}"/>
           <p:cNvSpPr txBox="1"/>
           <p:nvPr/>
         </p:nvSpPr>
@@ -11715,7 +11963,7 @@
       </p:sp>
       <p:sp>
         <p:nvSpPr>
-          <p:cNvPr id="241" name=""/>
+          <p:cNvPr id="245" name=""/>
           <p:cNvSpPr/>
           <p:nvPr/>
         </p:nvSpPr>
@@ -11739,7 +11987,7 @@
       </p:sp>
       <p:sp>
         <p:nvSpPr>
-          <p:cNvPr id="242" name=""/>
+          <p:cNvPr id="246" name=""/>
           <p:cNvSpPr/>
           <p:nvPr/>
         </p:nvSpPr>
@@ -11781,7 +12029,7 @@
       </p:sp>
       <p:sp>
         <p:nvSpPr>
-          <p:cNvPr id="243" name="" descr="{&quot;isTemplate&quot;:true,&quot;type&quot;:&quot;text&quot;}"/>
+          <p:cNvPr id="247" name="" descr="{&quot;isTemplate&quot;:true,&quot;type&quot;:&quot;text&quot;}"/>
           <p:cNvSpPr txBox="1"/>
           <p:nvPr/>
         </p:nvSpPr>
@@ -11816,7 +12064,7 @@
       </p:sp>
       <p:sp>
         <p:nvSpPr>
-          <p:cNvPr id="244" name="" descr="{&quot;isTemplate&quot;:true,&quot;type&quot;:&quot;text&quot;}"/>
+          <p:cNvPr id="248" name="" descr="{&quot;isTemplate&quot;:true,&quot;type&quot;:&quot;text&quot;}"/>
           <p:cNvSpPr txBox="1"/>
           <p:nvPr/>
         </p:nvSpPr>
@@ -11851,7 +12099,7 @@
       </p:sp>
       <p:sp>
         <p:nvSpPr>
-          <p:cNvPr id="245" name="" descr="{&quot;isTemplate&quot;:true,&quot;type&quot;:&quot;text&quot;}"/>
+          <p:cNvPr id="249" name="" descr="{&quot;isTemplate&quot;:true,&quot;type&quot;:&quot;text&quot;}"/>
           <p:cNvSpPr txBox="1"/>
           <p:nvPr/>
         </p:nvSpPr>
@@ -11906,7 +12154,7 @@
       </p:sp>
       <p:sp>
         <p:nvSpPr>
-          <p:cNvPr id="246" name=""/>
+          <p:cNvPr id="250" name=""/>
           <p:cNvSpPr/>
           <p:nvPr/>
         </p:nvSpPr>
@@ -11948,7 +12196,7 @@
       </p:sp>
       <p:sp>
         <p:nvSpPr>
-          <p:cNvPr id="247" name="" descr="{&quot;isTemplate&quot;:true,&quot;type&quot;:&quot;text&quot;}"/>
+          <p:cNvPr id="251" name="" descr="{&quot;isTemplate&quot;:true,&quot;type&quot;:&quot;text&quot;}"/>
           <p:cNvSpPr txBox="1"/>
           <p:nvPr/>
         </p:nvSpPr>
@@ -11983,7 +12231,7 @@
       </p:sp>
       <p:sp>
         <p:nvSpPr>
-          <p:cNvPr id="248" name="" descr="{&quot;isTemplate&quot;:true,&quot;type&quot;:&quot;text&quot;}"/>
+          <p:cNvPr id="252" name="" descr="{&quot;isTemplate&quot;:true,&quot;type&quot;:&quot;text&quot;}"/>
           <p:cNvSpPr txBox="1"/>
           <p:nvPr/>
         </p:nvSpPr>
@@ -12018,7 +12266,7 @@
       </p:sp>
       <p:sp>
         <p:nvSpPr>
-          <p:cNvPr id="249" name="" descr="{&quot;isTemplate&quot;:true,&quot;type&quot;:&quot;text&quot;}"/>
+          <p:cNvPr id="253" name="" descr="{&quot;isTemplate&quot;:true,&quot;type&quot;:&quot;text&quot;}"/>
           <p:cNvSpPr txBox="1"/>
           <p:nvPr/>
         </p:nvSpPr>
@@ -12113,7 +12361,7 @@
       </p:sp>
       <p:sp>
         <p:nvSpPr>
-          <p:cNvPr id="250" name=""/>
+          <p:cNvPr id="254" name=""/>
           <p:cNvSpPr/>
           <p:nvPr/>
         </p:nvSpPr>
@@ -12155,7 +12403,7 @@
       </p:sp>
       <p:sp>
         <p:nvSpPr>
-          <p:cNvPr id="251" name="" descr="{&quot;isTemplate&quot;:true,&quot;type&quot;:&quot;text&quot;}"/>
+          <p:cNvPr id="255" name="" descr="{&quot;isTemplate&quot;:true,&quot;type&quot;:&quot;text&quot;}"/>
           <p:cNvSpPr txBox="1"/>
           <p:nvPr/>
         </p:nvSpPr>
@@ -12190,7 +12438,7 @@
       </p:sp>
       <p:sp>
         <p:nvSpPr>
-          <p:cNvPr id="252" name="" descr="{&quot;isTemplate&quot;:true,&quot;type&quot;:&quot;text&quot;}"/>
+          <p:cNvPr id="256" name="" descr="{&quot;isTemplate&quot;:true,&quot;type&quot;:&quot;text&quot;}"/>
           <p:cNvSpPr txBox="1"/>
           <p:nvPr/>
         </p:nvSpPr>
@@ -12225,7 +12473,7 @@
       </p:sp>
       <p:sp>
         <p:nvSpPr>
-          <p:cNvPr id="253" name="" descr="{&quot;isTemplate&quot;:true,&quot;type&quot;:&quot;text&quot;}"/>
+          <p:cNvPr id="257" name="" descr="{&quot;isTemplate&quot;:true,&quot;type&quot;:&quot;text&quot;}"/>
           <p:cNvSpPr txBox="1"/>
           <p:nvPr/>
         </p:nvSpPr>
@@ -12280,7 +12528,7 @@
       </p:sp>
       <p:sp>
         <p:nvSpPr>
-          <p:cNvPr id="254" name="" descr="{&quot;isTemplate&quot;:true,&quot;type&quot;:&quot;text&quot;}"/>
+          <p:cNvPr id="258" name="" descr="{&quot;isTemplate&quot;:true,&quot;type&quot;:&quot;text&quot;}"/>
           <p:cNvSpPr txBox="1"/>
           <p:nvPr/>
         </p:nvSpPr>
@@ -12315,7 +12563,7 @@
       </p:sp>
       <p:sp>
         <p:nvSpPr>
-          <p:cNvPr id="255" name="" descr="{&quot;isTemplate&quot;:true,&quot;type&quot;:&quot;text&quot;}"/>
+          <p:cNvPr id="259" name="" descr="{&quot;isTemplate&quot;:true,&quot;type&quot;:&quot;text&quot;}"/>
           <p:cNvSpPr txBox="1"/>
           <p:nvPr/>
         </p:nvSpPr>
@@ -12350,7 +12598,7 @@
       </p:sp>
       <p:sp>
         <p:nvSpPr>
-          <p:cNvPr id="256" name="" descr="{&quot;isTemplate&quot;:true,&quot;type&quot;:&quot;text&quot;}"/>
+          <p:cNvPr id="260" name="" descr="{&quot;isTemplate&quot;:true,&quot;type&quot;:&quot;text&quot;}"/>
           <p:cNvSpPr txBox="1"/>
           <p:nvPr/>
         </p:nvSpPr>
@@ -12405,7 +12653,7 @@
       </p:sp>
       <p:sp>
         <p:nvSpPr>
-          <p:cNvPr id="257" name="" descr="{&quot;isTemplate&quot;:true,&quot;type&quot;:&quot;text&quot;}"/>
+          <p:cNvPr id="261" name="" descr="{&quot;isTemplate&quot;:true,&quot;type&quot;:&quot;text&quot;}"/>
           <p:cNvSpPr txBox="1"/>
           <p:nvPr/>
         </p:nvSpPr>
@@ -12460,7 +12708,7 @@
       </p:sp>
       <p:sp>
         <p:nvSpPr>
-          <p:cNvPr id="258" name="" descr="{&quot;isTemplate&quot;:true,&quot;type&quot;:&quot;text&quot;}"/>
+          <p:cNvPr id="262" name="" descr="{&quot;isTemplate&quot;:true,&quot;type&quot;:&quot;text&quot;}"/>
           <p:cNvSpPr txBox="1"/>
           <p:nvPr/>
         </p:nvSpPr>
@@ -12503,7 +12751,7 @@
   <p:cSld>
     <p:spTree>
       <p:nvGrpSpPr>
-        <p:cNvPr id="259" name="" descr="&lt;Slide style={{ width: '1280px', height: '720px', background: '#FBFCFA', position: 'relative', padding: '40px 64px', boxSizing: 'border-box', display: 'flex', flexDirection: 'column' }}&gt;&#10;  &lt;div style={{ flexShrink: 0 }}&gt;&#10;    &lt;div style={{ color: '#BD9B56', fontSize: 13, letterSpacing: '0.25em', marginBottom: 8 }}&gt;01 · 项目背景&lt;/div&gt;&#10;    &lt;h2 style={{ fontSize: 30, fontWeight: 'bold', color: '#172133', margin: 0, lineHeight: 1.3 }}&gt;传统物业的三重困境&lt;/h2&gt;&#10;    &lt;div style={{ fontSize: 14, color: '#6b7075', marginTop: 8 }}&gt;业务、数据、知识「三张皮」，需要用 AI 重新缝合&lt;/div&gt;&#10;  &lt;/div&gt;&#10;  &lt;div style={{ flex: 1, display: 'flex', alignItems: 'center' }}&gt;&#10;    &lt;div style={{ width: '100%', display: 'flex', flexDirection: 'column', gap: 18 }}&gt;&#10;      &lt;div style={{ display: 'flex', gap: 20, background: '#fff', borderRadius: 10, padding: '20px 24px', boxShadow: '0 4px 16px rgba(23,33,51,0.06)', borderLeft: '4px solid #BD9B56' }}&gt;&#10;        &lt;span style={{ color: '#BD9B56', fontSize: 22, lineHeight: 1.2, flexShrink: 0 }}&gt;!&lt;/span&gt;&#10;        &lt;div&gt;&#10;          &lt;div style={{ fontSize: 17, fontWeight: 'bold', color: '#172133', marginBottom: 6 }}&gt;信息孤岛&lt;/div&gt;&#10;          &lt;p style={{ fontSize: 14, color: '#5F5E5A', margin: 0, lineHeight: 1.6 }}&gt;业主报修、费用缴纳、巡检记录分散在多个系统，彼此不打通，物业无法掌握完整的社区运行状态，业主也看不到工单的处理进度。&lt;/p&gt;&#10;        &lt;/div&gt;&#10;      &lt;/div&gt;&#10;      &lt;div style={{ display: 'flex', gap: 20, background: '#fff', borderRadius: 10, padding: '20px 24px', boxShadow: '0 4px 16px rgba(23,33,51,0.06)', borderLeft: '4px solid #BD9B56' }}&gt;&#10;        &lt;span style={{ color: '#BD9B56', fontSize: 22, lineHeight: 1.2, flexShrink: 0 }}&gt;!&lt;/span&gt;&#10;        &lt;div&gt;&#10;          &lt;div style={{ fontSize: 17, fontWeight: 'bold', color: '#172133', marginBottom: 6 }}&gt;响应迟缓&lt;/div&gt;&#10;          &lt;p style={{ fontSize: 14, color: '#5F5E5A', margin: 0, lineHeight: 1.6 }}&gt;传统报修依赖电话和微信群，客服人工登记后再手动派单，从「业主报修」到「师傅上门」平均要数小时甚至隔天，响应效率低。&lt;/p&gt;&#10;        &lt;/div&gt;&#10;      &lt;/div&gt;&#10;      &lt;div style={{ display: 'flex', gap: 20, background: '#fff', borderRadius: 10, padding: '20px 24px', boxShadow: '0 4px 16px rgba(23,33,51,0.06)', borderLeft: '4px solid #BD9B56' }}&gt;&#10;        &lt;span style={{ color: '#BD9B56', fontSize: 22, lineHeight: 1.2, flexShrink: 0 }}&gt;!&lt;/span&gt;&#10;        &lt;div&gt;&#10;          &lt;div style={{ fontSize: 17, fontWeight: 'bold', color: '#172133', marginBottom: 6 }}&gt;隐性知识散落&lt;/div&gt;&#10;          &lt;p style={{ fontSize: 14, color: '#5F5E5A', margin: 0, lineHeight: 1.6 }}&gt;装修施工时间、停车规则、宠物管理等规定，往往只存在于物业员工的个人经验里，新人上岗难以快速掌握，业主咨询也得不到统一准确的答案。&lt;/p&gt;&#10;        &lt;/div&gt;&#10;      &lt;/div&gt;&#10;    &lt;/div&gt;&#10;  &lt;/div&gt;&#10;  &lt;div style={{ flexShrink: 0, height: 44, display: 'flex', alignItems: 'flex-end', justifyContent: 'space-between' }}&gt;&#10;    &lt;span style={{ color: '#BD9B56', fontSize: 12, letterSpacing: '0.1em' }}&gt;云溪花园 · 智慧社区&lt;/span&gt;&#10;    &lt;span style={{ color: '#a09b8c', fontSize: 12 }}&gt;03 / 15&lt;/span&gt;&#10;  &lt;/div&gt;&#10;&lt;/Slide&gt;"/>
+        <p:cNvPr id="263" name="" descr="&lt;Slide style={{ width: '1280px', height: '720px', background: '#FBFCFA', position: 'relative', padding: '40px 64px', boxSizing: 'border-box', display: 'flex', flexDirection: 'column' }}&gt;&#10;  &lt;div style={{ flexShrink: 0 }}&gt;&#10;    &lt;div style={{ color: '#BD9B56', fontSize: 13, letterSpacing: '0.25em', marginBottom: 8 }}&gt;01 · 项目背景&lt;/div&gt;&#10;    &lt;h2 style={{ fontSize: 30, fontWeight: 'bold', color: '#172133', margin: 0, lineHeight: 1.3 }}&gt;传统物业的三重困境&lt;/h2&gt;&#10;    &lt;div style={{ fontSize: 14, color: '#6b7075', marginTop: 8 }}&gt;业务、数据、知识「三张皮」，需要用 AI 重新缝合&lt;/div&gt;&#10;  &lt;/div&gt;&#10;  &lt;div style={{ flex: 1, display: 'flex', alignItems: 'center' }}&gt;&#10;    &lt;div style={{ width: '100%', display: 'flex', flexDirection: 'column', gap: 18 }}&gt;&#10;      &lt;div style={{ display: 'flex', gap: 20, background: '#fff', borderRadius: 10, padding: '20px 24px', boxShadow: '0 4px 16px rgba(23,33,51,0.06)', borderLeft: '4px solid #BD9B56' }}&gt;&#10;        &lt;span style={{ color: '#BD9B56', fontSize: 22, lineHeight: 1.2, flexShrink: 0 }}&gt;!&lt;/span&gt;&#10;        &lt;div&gt;&#10;          &lt;div style={{ fontSize: 17, fontWeight: 'bold', color: '#172133', marginBottom: 6 }}&gt;信息孤岛&lt;/div&gt;&#10;          &lt;p style={{ fontSize: 14, color: '#5F5E5A', margin: 0, lineHeight: 1.6 }}&gt;业主报修、费用缴纳、巡检记录分散在多个系统，彼此不打通，物业无法掌握完整的社区运行状态，业主也看不到工单的处理进度。&lt;/p&gt;&#10;        &lt;/div&gt;&#10;      &lt;/div&gt;&#10;      &lt;div style={{ display: 'flex', gap: 20, background: '#fff', borderRadius: 10, padding: '20px 24px', boxShadow: '0 4px 16px rgba(23,33,51,0.06)', borderLeft: '4px solid #BD9B56' }}&gt;&#10;        &lt;span style={{ color: '#BD9B56', fontSize: 22, lineHeight: 1.2, flexShrink: 0 }}&gt;!&lt;/span&gt;&#10;        &lt;div&gt;&#10;          &lt;div style={{ fontSize: 17, fontWeight: 'bold', color: '#172133', marginBottom: 6 }}&gt;响应迟缓&lt;/div&gt;&#10;          &lt;p style={{ fontSize: 14, color: '#5F5E5A', margin: 0, lineHeight: 1.6 }}&gt;传统报修依赖电话和微信群，客服人工登记后再手动派单，从「业主报修」到「师傅上门」平均要数小时甚至隔天，响应效率低。&lt;/p&gt;&#10;        &lt;/div&gt;&#10;      &lt;/div&gt;&#10;      &lt;div style={{ display: 'flex', gap: 20, background: '#fff', borderRadius: 10, padding: '20px 24px', boxShadow: '0 4px 16px rgba(23,33,51,0.06)', borderLeft: '4px solid #BD9B56' }}&gt;&#10;        &lt;span style={{ color: '#BD9B56', fontSize: 22, lineHeight: 1.2, flexShrink: 0 }}&gt;!&lt;/span&gt;&#10;        &lt;div&gt;&#10;          &lt;div style={{ fontSize: 17, fontWeight: 'bold', color: '#172133', marginBottom: 6 }}&gt;隐性知识散落&lt;/div&gt;&#10;          &lt;p style={{ fontSize: 14, color: '#5F5E5A', margin: 0, lineHeight: 1.6 }}&gt;装修施工时间、停车规则、宠物管理等规定，往往只存在于物业员工的个人经验里，新人上岗难以快速掌握，业主咨询也得不到统一准确的答案。&lt;/p&gt;&#10;        &lt;/div&gt;&#10;      &lt;/div&gt;&#10;    &lt;/div&gt;&#10;  &lt;/div&gt;&#10;  &lt;div style={{ flexShrink: 0, height: 44, display: 'flex', alignItems: 'flex-end', justifyContent: 'space-between' }}&gt;&#10;    &lt;span style={{ color: '#BD9B56', fontSize: 12, letterSpacing: '0.1em' }}&gt;云溪花园 · 智慧社区&lt;/span&gt;&#10;    &lt;span style={{ color: '#a09b8c', fontSize: 12 }}&gt;03 / 15&lt;/span&gt;&#10;  &lt;/div&gt;&#10;&lt;/Slide&gt;"/>
         <p:cNvGrpSpPr/>
         <p:nvPr/>
       </p:nvGrpSpPr>
@@ -12517,7 +12765,7 @@
       </p:grpSpPr>
       <p:sp>
         <p:nvSpPr>
-          <p:cNvPr id="260" name=""/>
+          <p:cNvPr id="264" name=""/>
           <p:cNvSpPr/>
           <p:nvPr/>
         </p:nvSpPr>
@@ -12541,7 +12789,7 @@
       </p:sp>
       <p:sp>
         <p:nvSpPr>
-          <p:cNvPr id="261" name="" descr="{&quot;isTemplate&quot;:true,&quot;type&quot;:&quot;text&quot;}"/>
+          <p:cNvPr id="265" name="" descr="{&quot;isTemplate&quot;:true,&quot;type&quot;:&quot;text&quot;}"/>
           <p:cNvSpPr txBox="1"/>
           <p:nvPr/>
         </p:nvSpPr>
@@ -12586,7 +12834,7 @@
       </p:sp>
       <p:sp>
         <p:nvSpPr>
-          <p:cNvPr id="262" name="" descr="{&quot;isTemplate&quot;:true,&quot;type&quot;:&quot;text&quot;}"/>
+          <p:cNvPr id="266" name="" descr="{&quot;isTemplate&quot;:true,&quot;type&quot;:&quot;text&quot;}"/>
           <p:cNvSpPr txBox="1"/>
           <p:nvPr/>
         </p:nvSpPr>
@@ -12621,7 +12869,7 @@
       </p:sp>
       <p:sp>
         <p:nvSpPr>
-          <p:cNvPr id="263" name="" descr="{&quot;isTemplate&quot;:true,&quot;type&quot;:&quot;text&quot;}"/>
+          <p:cNvPr id="267" name="" descr="{&quot;isTemplate&quot;:true,&quot;type&quot;:&quot;text&quot;}"/>
           <p:cNvSpPr txBox="1"/>
           <p:nvPr/>
         </p:nvSpPr>
@@ -12676,7 +12924,7 @@
       </p:sp>
       <p:sp>
         <p:nvSpPr>
-          <p:cNvPr id="264" name=""/>
+          <p:cNvPr id="268" name=""/>
           <p:cNvSpPr/>
           <p:nvPr/>
         </p:nvSpPr>
@@ -12709,7 +12957,7 @@
       </p:sp>
       <p:sp>
         <p:nvSpPr>
-          <p:cNvPr id="265" name=""/>
+          <p:cNvPr id="269" name=""/>
           <p:cNvSpPr/>
           <p:nvPr/>
         </p:nvSpPr>
@@ -12766,7 +13014,7 @@
       </p:sp>
       <p:sp>
         <p:nvSpPr>
-          <p:cNvPr id="266" name="" descr="{&quot;isTemplate&quot;:true,&quot;type&quot;:&quot;text&quot;}"/>
+          <p:cNvPr id="270" name="" descr="{&quot;isTemplate&quot;:true,&quot;type&quot;:&quot;text&quot;}"/>
           <p:cNvSpPr txBox="1"/>
           <p:nvPr/>
         </p:nvSpPr>
@@ -12801,7 +13049,7 @@
       </p:sp>
       <p:sp>
         <p:nvSpPr>
-          <p:cNvPr id="267" name="" descr="{&quot;isTemplate&quot;:true,&quot;type&quot;:&quot;text&quot;}"/>
+          <p:cNvPr id="271" name="" descr="{&quot;isTemplate&quot;:true,&quot;type&quot;:&quot;text&quot;}"/>
           <p:cNvSpPr txBox="1"/>
           <p:nvPr/>
         </p:nvSpPr>
@@ -12836,7 +13084,7 @@
       </p:sp>
       <p:sp>
         <p:nvSpPr>
-          <p:cNvPr id="268" name="" descr="{&quot;isTemplate&quot;:true,&quot;type&quot;:&quot;text&quot;}"/>
+          <p:cNvPr id="272" name="" descr="{&quot;isTemplate&quot;:true,&quot;type&quot;:&quot;text&quot;}"/>
           <p:cNvSpPr txBox="1"/>
           <p:nvPr/>
         </p:nvSpPr>
@@ -12871,7 +13119,7 @@
       </p:sp>
       <p:sp>
         <p:nvSpPr>
-          <p:cNvPr id="269" name=""/>
+          <p:cNvPr id="273" name=""/>
           <p:cNvSpPr/>
           <p:nvPr/>
         </p:nvSpPr>
@@ -12904,7 +13152,7 @@
       </p:sp>
       <p:sp>
         <p:nvSpPr>
-          <p:cNvPr id="270" name=""/>
+          <p:cNvPr id="274" name=""/>
           <p:cNvSpPr/>
           <p:nvPr/>
         </p:nvSpPr>
@@ -12961,7 +13209,7 @@
       </p:sp>
       <p:sp>
         <p:nvSpPr>
-          <p:cNvPr id="271" name="" descr="{&quot;isTemplate&quot;:true,&quot;type&quot;:&quot;text&quot;}"/>
+          <p:cNvPr id="275" name="" descr="{&quot;isTemplate&quot;:true,&quot;type&quot;:&quot;text&quot;}"/>
           <p:cNvSpPr txBox="1"/>
           <p:nvPr/>
         </p:nvSpPr>
@@ -12996,7 +13244,7 @@
       </p:sp>
       <p:sp>
         <p:nvSpPr>
-          <p:cNvPr id="272" name="" descr="{&quot;isTemplate&quot;:true,&quot;type&quot;:&quot;text&quot;}"/>
+          <p:cNvPr id="276" name="" descr="{&quot;isTemplate&quot;:true,&quot;type&quot;:&quot;text&quot;}"/>
           <p:cNvSpPr txBox="1"/>
           <p:nvPr/>
         </p:nvSpPr>
@@ -13031,7 +13279,7 @@
       </p:sp>
       <p:sp>
         <p:nvSpPr>
-          <p:cNvPr id="273" name="" descr="{&quot;isTemplate&quot;:true,&quot;type&quot;:&quot;text&quot;}"/>
+          <p:cNvPr id="277" name="" descr="{&quot;isTemplate&quot;:true,&quot;type&quot;:&quot;text&quot;}"/>
           <p:cNvSpPr txBox="1"/>
           <p:nvPr/>
         </p:nvSpPr>
@@ -13066,7 +13314,7 @@
       </p:sp>
       <p:sp>
         <p:nvSpPr>
-          <p:cNvPr id="274" name=""/>
+          <p:cNvPr id="278" name=""/>
           <p:cNvSpPr/>
           <p:nvPr/>
         </p:nvSpPr>
@@ -13099,7 +13347,7 @@
       </p:sp>
       <p:sp>
         <p:nvSpPr>
-          <p:cNvPr id="275" name=""/>
+          <p:cNvPr id="279" name=""/>
           <p:cNvSpPr/>
           <p:nvPr/>
         </p:nvSpPr>
@@ -13156,7 +13404,7 @@
       </p:sp>
       <p:sp>
         <p:nvSpPr>
-          <p:cNvPr id="276" name="" descr="{&quot;isTemplate&quot;:true,&quot;type&quot;:&quot;text&quot;}"/>
+          <p:cNvPr id="280" name="" descr="{&quot;isTemplate&quot;:true,&quot;type&quot;:&quot;text&quot;}"/>
           <p:cNvSpPr txBox="1"/>
           <p:nvPr/>
         </p:nvSpPr>
@@ -13191,7 +13439,7 @@
       </p:sp>
       <p:sp>
         <p:nvSpPr>
-          <p:cNvPr id="277" name="" descr="{&quot;isTemplate&quot;:true,&quot;type&quot;:&quot;text&quot;}"/>
+          <p:cNvPr id="281" name="" descr="{&quot;isTemplate&quot;:true,&quot;type&quot;:&quot;text&quot;}"/>
           <p:cNvSpPr txBox="1"/>
           <p:nvPr/>
         </p:nvSpPr>
@@ -13226,7 +13474,7 @@
       </p:sp>
       <p:sp>
         <p:nvSpPr>
-          <p:cNvPr id="278" name="" descr="{&quot;isTemplate&quot;:true,&quot;type&quot;:&quot;text&quot;}"/>
+          <p:cNvPr id="282" name="" descr="{&quot;isTemplate&quot;:true,&quot;type&quot;:&quot;text&quot;}"/>
           <p:cNvSpPr txBox="1"/>
           <p:nvPr/>
         </p:nvSpPr>
@@ -13261,7 +13509,7 @@
       </p:sp>
       <p:sp>
         <p:nvSpPr>
-          <p:cNvPr id="279" name="" descr="{&quot;isTemplate&quot;:true,&quot;type&quot;:&quot;text&quot;}"/>
+          <p:cNvPr id="283" name="" descr="{&quot;isTemplate&quot;:true,&quot;type&quot;:&quot;text&quot;}"/>
           <p:cNvSpPr txBox="1"/>
           <p:nvPr/>
         </p:nvSpPr>
@@ -13316,7 +13564,7 @@
       </p:sp>
       <p:sp>
         <p:nvSpPr>
-          <p:cNvPr id="280" name="" descr="{&quot;isTemplate&quot;:true,&quot;type&quot;:&quot;text&quot;}"/>
+          <p:cNvPr id="284" name="" descr="{&quot;isTemplate&quot;:true,&quot;type&quot;:&quot;text&quot;}"/>
           <p:cNvSpPr txBox="1"/>
           <p:nvPr/>
         </p:nvSpPr>
@@ -13359,7 +13607,7 @@
   <p:cSld>
     <p:spTree>
       <p:nvGrpSpPr>
-        <p:cNvPr id="281" name="" descr="&lt;Slide style={{ width: '1280px', height: '720px', background: '#FBFCFA', position: 'relative', padding: '32px 64px', boxSizing: 'border-box', display: 'flex', flexDirection: 'column' }}&gt;&#10;  &lt;div style={{ flexShrink: 0 }}&gt;&#10;    &lt;div style={{ color: '#BD9B56', fontSize: 13, letterSpacing: '0.25em', marginBottom: 6 }}&gt;01 · 项目目标&lt;/div&gt;&#10;    &lt;h2 style={{ fontSize: 30, fontWeight: 'bold', color: '#172133', margin: 0, lineHeight: 1.3 }}&gt;本项目要验证的四件事&lt;/h2&gt;&#10;  &lt;/div&gt;&#10;  &lt;div style={{ flex: 1, display: 'flex', alignItems: 'center', minHeight: 0 }}&gt;&#10;    &lt;div style={{ width: '100%', display: 'grid', gridTemplateColumns: '1fr 1fr', gap: 16 }}&gt;&#10;      &lt;div style={{ background: '#fff', borderRadius: 10, padding: '18px 22px', boxShadow: '0 4px 16px rgba(23,33,51,0.06)', borderTop: '3px solid #BD9B56' }}&gt;&#10;        &lt;div style={{ fontSize: 17, fontWeight: 'bold', color: '#172133', marginBottom: 6 }}&gt;1.  AI 能否理解业务意图&lt;/div&gt;&#10;        &lt;p style={{ fontSize: 14, color: '#5F5E5A', margin: 0, lineHeight: 1.55 }}&gt;用户说一句「厨房漏水了」，系统能否准确识别为报修需求，而非闲聊或误判。&lt;/p&gt;&#10;      &lt;/div&gt;&#10;      &lt;div style={{ background: '#fff', borderRadius: 10, padding: '18px 22px', boxShadow: '0 4px 16px rgba(23,33,51,0.06)', borderTop: '3px solid #BD9B56' }}&gt;&#10;        &lt;div style={{ fontSize: 17, fontWeight: 'bold', color: '#172133', marginBottom: 6 }}&gt;2.  Agent 能否调用业务工具&lt;/div&gt;&#10;        &lt;p style={{ fontSize: 14, color: '#5F5E5A', margin: 0, lineHeight: 1.55 }}&gt;识别意图后，能否自动创建工单、查询费用、检索知识，而不是停留在「回答」层面。&lt;/p&gt;&#10;      &lt;/div&gt;&#10;      &lt;div style={{ background: '#fff', borderRadius: 10, padding: '18px 22px', boxShadow: '0 4px 16px rgba(23,33,51,0.06)', borderTop: '3px solid #BD9B56' }}&gt;&#10;        &lt;div style={{ fontSize: 17, fontWeight: 'bold', color: '#172133', marginBottom: 6 }}&gt;3.  能否跑通业务闭环&lt;/div&gt;&#10;        &lt;p style={{ fontSize: 14, color: '#5F5E5A', margin: 0, lineHeight: 1.55 }}&gt;从报修到派单到完成，AI 是否真正参与了业务流程，而非只在前端加了一个聊天窗口。&lt;/p&gt;&#10;      &lt;/div&gt;&#10;      &lt;div style={{ background: '#fff', borderRadius: 10, padding: '18px 22px', boxShadow: '0 4px 16px rgba(23,33,51,0.06)', borderTop: '3px solid #BD9B56' }}&gt;&#10;        &lt;div style={{ fontSize: 17, fontWeight: 'bold', color: '#172133', marginBottom: 6 }}&gt;4.  RAG 能否准确回答&lt;/div&gt;&#10;        &lt;p style={{ fontSize: 14, color: '#5F5E5A', margin: 0, lineHeight: 1.55 }}&gt;对「装修几点施工」这类制度问题，能否检索到正确依据并给出准确、有出处的答案。&lt;/p&gt;&#10;      &lt;/div&gt;&#10;    &lt;/div&gt;&#10;  &lt;/div&gt;&#10;  &lt;div style={{ flexShrink: 0, height: 40, display: 'flex', alignItems: 'flex-end', justifyContent: 'space-between' }}&gt;&#10;    &lt;span style={{ color: '#BD9B56', fontSize: 12, letterSpacing: '0.1em' }}&gt;云溪花园 · 智慧社区&lt;/span&gt;&#10;    &lt;span style={{ color: '#a09b8c', fontSize: 12 }}&gt;04 / 15&lt;/span&gt;&#10;  &lt;/div&gt;&#10;&lt;/Slide&gt;"/>
+        <p:cNvPr id="285" name="" descr="&lt;Slide style={{ width: '1280px', height: '720px', background: '#FBFCFA', position: 'relative', padding: '32px 64px', boxSizing: 'border-box', display: 'flex', flexDirection: 'column' }}&gt;&#10;  &lt;div style={{ flexShrink: 0 }}&gt;&#10;    &lt;div style={{ color: '#BD9B56', fontSize: 13, letterSpacing: '0.25em', marginBottom: 6 }}&gt;01 · 项目目标&lt;/div&gt;&#10;    &lt;h2 style={{ fontSize: 30, fontWeight: 'bold', color: '#172133', margin: 0, lineHeight: 1.3 }}&gt;本项目要验证的四件事&lt;/h2&gt;&#10;  &lt;/div&gt;&#10;  &lt;div style={{ flex: 1, display: 'flex', alignItems: 'center', minHeight: 0 }}&gt;&#10;    &lt;div style={{ width: '100%', display: 'grid', gridTemplateColumns: '1fr 1fr', gap: 16 }}&gt;&#10;      &lt;div style={{ background: '#fff', borderRadius: 10, padding: '18px 22px', boxShadow: '0 4px 16px rgba(23,33,51,0.06)', borderTop: '3px solid #BD9B56' }}&gt;&#10;        &lt;div style={{ fontSize: 17, fontWeight: 'bold', color: '#172133', marginBottom: 6 }}&gt;1.  AI 能否理解业务意图&lt;/div&gt;&#10;        &lt;p style={{ fontSize: 14, color: '#5F5E5A', margin: 0, lineHeight: 1.55 }}&gt;用户说一句「厨房漏水了」，系统能否准确识别为报修需求，而非闲聊或误判。&lt;/p&gt;&#10;      &lt;/div&gt;&#10;      &lt;div style={{ background: '#fff', borderRadius: 10, padding: '18px 22px', boxShadow: '0 4px 16px rgba(23,33,51,0.06)', borderTop: '3px solid #BD9B56' }}&gt;&#10;        &lt;div style={{ fontSize: 17, fontWeight: 'bold', color: '#172133', marginBottom: 6 }}&gt;2.  Agent 能否调用业务工具&lt;/div&gt;&#10;        &lt;p style={{ fontSize: 14, color: '#5F5E5A', margin: 0, lineHeight: 1.55 }}&gt;识别意图后，能否自动创建工单、查询费用、检索知识，而不是停留在「回答」层面。&lt;/p&gt;&#10;      &lt;/div&gt;&#10;      &lt;div style={{ background: '#fff', borderRadius: 10, padding: '18px 22px', boxShadow: '0 4px 16px rgba(23,33,51,0.06)', borderTop: '3px solid #BD9B56' }}&gt;&#10;        &lt;div style={{ fontSize: 17, fontWeight: 'bold', color: '#172133', marginBottom: 6 }}&gt;3.  能否跑通业务闭环&lt;/div&gt;&#10;        &lt;p style={{ fontSize: 14, color: '#5F5E5A', margin: 0, lineHeight: 1.55 }}&gt;从报修到派单到完成，AI 是否真正参与了业务流程，而非只在前端加了一个聊天窗口。&lt;/p&gt;&#10;      &lt;/div&gt;&#10;      &lt;div style={{ background: '#fff', borderRadius: 10, padding: '18px 22px', boxShadow: '0 4px 16px rgba(23,33,51,0.06)', borderTop: '3px solid #BD9B56' }}&gt;&#10;        &lt;div style={{ fontSize: 17, fontWeight: 'bold', color: '#172133', marginBottom: 6 }}&gt;4.  RAG 能否准确回答&lt;/div&gt;&#10;        &lt;p style={{ fontSize: 14, color: '#5F5E5A', margin: 0, lineHeight: 1.55 }}&gt;对「装修几点施工」这类制度问题，能否检索到正确依据并给出准确、有出处的答案。&lt;/p&gt;&#10;      &lt;/div&gt;&#10;    &lt;/div&gt;&#10;  &lt;/div&gt;&#10;  &lt;div style={{ flexShrink: 0, height: 40, display: 'flex', alignItems: 'flex-end', justifyContent: 'space-between' }}&gt;&#10;    &lt;span style={{ color: '#BD9B56', fontSize: 12, letterSpacing: '0.1em' }}&gt;云溪花园 · 智慧社区&lt;/span&gt;&#10;    &lt;span style={{ color: '#a09b8c', fontSize: 12 }}&gt;04 / 15&lt;/span&gt;&#10;  &lt;/div&gt;&#10;&lt;/Slide&gt;"/>
         <p:cNvGrpSpPr/>
         <p:nvPr/>
       </p:nvGrpSpPr>
@@ -13373,7 +13621,7 @@
       </p:grpSpPr>
       <p:sp>
         <p:nvSpPr>
-          <p:cNvPr id="282" name=""/>
+          <p:cNvPr id="286" name=""/>
           <p:cNvSpPr/>
           <p:nvPr/>
         </p:nvSpPr>
@@ -13397,7 +13645,7 @@
       </p:sp>
       <p:sp>
         <p:nvSpPr>
-          <p:cNvPr id="283" name="" descr="{&quot;isTemplate&quot;:true,&quot;type&quot;:&quot;text&quot;}"/>
+          <p:cNvPr id="287" name="" descr="{&quot;isTemplate&quot;:true,&quot;type&quot;:&quot;text&quot;}"/>
           <p:cNvSpPr txBox="1"/>
           <p:nvPr/>
         </p:nvSpPr>
@@ -13442,7 +13690,7 @@
       </p:sp>
       <p:sp>
         <p:nvSpPr>
-          <p:cNvPr id="284" name="" descr="{&quot;isTemplate&quot;:true,&quot;type&quot;:&quot;text&quot;}"/>
+          <p:cNvPr id="288" name="" descr="{&quot;isTemplate&quot;:true,&quot;type&quot;:&quot;text&quot;}"/>
           <p:cNvSpPr txBox="1"/>
           <p:nvPr/>
         </p:nvSpPr>
@@ -13477,7 +13725,7 @@
       </p:sp>
       <p:sp>
         <p:nvSpPr>
-          <p:cNvPr id="285" name=""/>
+          <p:cNvPr id="289" name=""/>
           <p:cNvSpPr/>
           <p:nvPr/>
         </p:nvSpPr>
@@ -13510,7 +13758,7 @@
       </p:sp>
       <p:sp>
         <p:nvSpPr>
-          <p:cNvPr id="286" name=""/>
+          <p:cNvPr id="290" name=""/>
           <p:cNvSpPr/>
           <p:nvPr/>
         </p:nvSpPr>
@@ -13567,7 +13815,7 @@
       </p:sp>
       <p:sp>
         <p:nvSpPr>
-          <p:cNvPr id="287" name="" descr="{&quot;isTemplate&quot;:true,&quot;type&quot;:&quot;text&quot;}"/>
+          <p:cNvPr id="291" name="" descr="{&quot;isTemplate&quot;:true,&quot;type&quot;:&quot;text&quot;}"/>
           <p:cNvSpPr txBox="1"/>
           <p:nvPr/>
         </p:nvSpPr>
@@ -13612,7 +13860,7 @@
       </p:sp>
       <p:sp>
         <p:nvSpPr>
-          <p:cNvPr id="288" name="" descr="{&quot;isTemplate&quot;:true,&quot;type&quot;:&quot;text&quot;}"/>
+          <p:cNvPr id="292" name="" descr="{&quot;isTemplate&quot;:true,&quot;type&quot;:&quot;text&quot;}"/>
           <p:cNvSpPr txBox="1"/>
           <p:nvPr/>
         </p:nvSpPr>
@@ -13647,7 +13895,7 @@
       </p:sp>
       <p:sp>
         <p:nvSpPr>
-          <p:cNvPr id="289" name=""/>
+          <p:cNvPr id="293" name=""/>
           <p:cNvSpPr/>
           <p:nvPr/>
         </p:nvSpPr>
@@ -13680,7 +13928,7 @@
       </p:sp>
       <p:sp>
         <p:nvSpPr>
-          <p:cNvPr id="290" name=""/>
+          <p:cNvPr id="294" name=""/>
           <p:cNvSpPr/>
           <p:nvPr/>
         </p:nvSpPr>
@@ -13737,7 +13985,7 @@
       </p:sp>
       <p:sp>
         <p:nvSpPr>
-          <p:cNvPr id="291" name="" descr="{&quot;isTemplate&quot;:true,&quot;type&quot;:&quot;text&quot;}"/>
+          <p:cNvPr id="295" name="" descr="{&quot;isTemplate&quot;:true,&quot;type&quot;:&quot;text&quot;}"/>
           <p:cNvSpPr txBox="1"/>
           <p:nvPr/>
         </p:nvSpPr>
@@ -13782,7 +14030,7 @@
       </p:sp>
       <p:sp>
         <p:nvSpPr>
-          <p:cNvPr id="292" name="" descr="{&quot;isTemplate&quot;:true,&quot;type&quot;:&quot;text&quot;}"/>
+          <p:cNvPr id="296" name="" descr="{&quot;isTemplate&quot;:true,&quot;type&quot;:&quot;text&quot;}"/>
           <p:cNvSpPr txBox="1"/>
           <p:nvPr/>
         </p:nvSpPr>
@@ -13817,7 +14065,7 @@
       </p:sp>
       <p:sp>
         <p:nvSpPr>
-          <p:cNvPr id="293" name=""/>
+          <p:cNvPr id="297" name=""/>
           <p:cNvSpPr/>
           <p:nvPr/>
         </p:nvSpPr>
@@ -13850,7 +14098,7 @@
       </p:sp>
       <p:sp>
         <p:nvSpPr>
-          <p:cNvPr id="294" name=""/>
+          <p:cNvPr id="298" name=""/>
           <p:cNvSpPr/>
           <p:nvPr/>
         </p:nvSpPr>
@@ -13907,7 +14155,7 @@
       </p:sp>
       <p:sp>
         <p:nvSpPr>
-          <p:cNvPr id="295" name="" descr="{&quot;isTemplate&quot;:true,&quot;type&quot;:&quot;text&quot;}"/>
+          <p:cNvPr id="299" name="" descr="{&quot;isTemplate&quot;:true,&quot;type&quot;:&quot;text&quot;}"/>
           <p:cNvSpPr txBox="1"/>
           <p:nvPr/>
         </p:nvSpPr>
@@ -13952,7 +14200,7 @@
       </p:sp>
       <p:sp>
         <p:nvSpPr>
-          <p:cNvPr id="296" name="" descr="{&quot;isTemplate&quot;:true,&quot;type&quot;:&quot;text&quot;}"/>
+          <p:cNvPr id="300" name="" descr="{&quot;isTemplate&quot;:true,&quot;type&quot;:&quot;text&quot;}"/>
           <p:cNvSpPr txBox="1"/>
           <p:nvPr/>
         </p:nvSpPr>
@@ -14007,7 +14255,7 @@
       </p:sp>
       <p:sp>
         <p:nvSpPr>
-          <p:cNvPr id="297" name=""/>
+          <p:cNvPr id="301" name=""/>
           <p:cNvSpPr/>
           <p:nvPr/>
         </p:nvSpPr>
@@ -14040,7 +14288,7 @@
       </p:sp>
       <p:sp>
         <p:nvSpPr>
-          <p:cNvPr id="298" name=""/>
+          <p:cNvPr id="302" name=""/>
           <p:cNvSpPr/>
           <p:nvPr/>
         </p:nvSpPr>
@@ -14097,7 +14345,7 @@
       </p:sp>
       <p:sp>
         <p:nvSpPr>
-          <p:cNvPr id="299" name="" descr="{&quot;isTemplate&quot;:true,&quot;type&quot;:&quot;text&quot;}"/>
+          <p:cNvPr id="303" name="" descr="{&quot;isTemplate&quot;:true,&quot;type&quot;:&quot;text&quot;}"/>
           <p:cNvSpPr txBox="1"/>
           <p:nvPr/>
         </p:nvSpPr>
@@ -14142,7 +14390,7 @@
       </p:sp>
       <p:sp>
         <p:nvSpPr>
-          <p:cNvPr id="300" name="" descr="{&quot;isTemplate&quot;:true,&quot;type&quot;:&quot;text&quot;}"/>
+          <p:cNvPr id="304" name="" descr="{&quot;isTemplate&quot;:true,&quot;type&quot;:&quot;text&quot;}"/>
           <p:cNvSpPr txBox="1"/>
           <p:nvPr/>
         </p:nvSpPr>
@@ -14177,7 +14425,7 @@
       </p:sp>
       <p:sp>
         <p:nvSpPr>
-          <p:cNvPr id="301" name="" descr="{&quot;isTemplate&quot;:true,&quot;type&quot;:&quot;text&quot;}"/>
+          <p:cNvPr id="305" name="" descr="{&quot;isTemplate&quot;:true,&quot;type&quot;:&quot;text&quot;}"/>
           <p:cNvSpPr txBox="1"/>
           <p:nvPr/>
         </p:nvSpPr>
@@ -14232,7 +14480,7 @@
       </p:sp>
       <p:sp>
         <p:nvSpPr>
-          <p:cNvPr id="302" name="" descr="{&quot;isTemplate&quot;:true,&quot;type&quot;:&quot;text&quot;}"/>
+          <p:cNvPr id="306" name="" descr="{&quot;isTemplate&quot;:true,&quot;type&quot;:&quot;text&quot;}"/>
           <p:cNvSpPr txBox="1"/>
           <p:nvPr/>
         </p:nvSpPr>
@@ -14275,7 +14523,7 @@
   <p:cSld>
     <p:spTree>
       <p:nvGrpSpPr>
-        <p:cNvPr id="303" name="" descr="&lt;Slide style={{ width: '1280px', height: '720px', background: '#FBFCFA', position: 'relative', padding: '32px 64px', boxSizing: 'border-box', display: 'flex', flexDirection: 'column' }}&gt;&#10;  &lt;div style={{ flexShrink: 0 }}&gt;&#10;    &lt;div style={{ color: '#BD9B56', fontSize: 13, letterSpacing: '0.25em', marginBottom: 6 }}&gt;01 · 项目规模&lt;/div&gt;&#10;    &lt;h2 style={{ fontSize: 30, fontWeight: 'bold', color: '#172133', margin: 0, lineHeight: 1.3 }}&gt;虚拟社区数据资产：云溪花园&lt;/h2&gt;&#10;    &lt;div style={{ fontSize: 14, color: '#6b7075', marginTop: 6 }}&gt;以一个社区为根，向下延伸出空间、人员、业务、知识四类数据资产&lt;/div&gt;&#10;  &lt;/div&gt;&#10;  &lt;div style={{ flex: 1, display: 'flex', alignItems: 'center', justifyContent: 'center' }}&gt;&#10;    &lt;svg width=&quot;1150&quot; height=&quot;470&quot; viewBox=&quot;0 0 1150 470&quot;&gt;&#10;      &lt;g fontFamily=&quot;Inter, sans-serif&quot;&gt;&#10;        {/* 根节点 community */}&#10;        &lt;rect x=&quot;450&quot; y=&quot;14&quot; width=&quot;250&quot; height=&quot;58&quot; rx=&quot;10&quot; fill=&quot;#172133&quot; /&gt;&#10;        &lt;text x=&quot;575&quot; y=&quot;38&quot; textAnchor=&quot;middle&quot; fontSize=&quot;15&quot; fontWeight=&quot;bold&quot; fill=&quot;#FBFCFA&quot;&gt;community 云溪花园&lt;/text&gt;&#10;        &lt;text x=&quot;575&quot; y=&quot;58&quot; textAnchor=&quot;middle&quot; fontSize=&quot;11&quot; fill=&quot;#BD9B56&quot;&gt;1 个小区 · 上海浦东张江路1268号&lt;/text&gt;&#10;        {/* 根节点连接线 */}&#10;        &lt;line x1=&quot;575&quot; y1=&quot;72&quot; x2=&quot;575&quot; y2=&quot;92&quot; stroke=&quot;#BD9B56&quot; strokeWidth=&quot;1.5&quot; /&gt;&#10;        &lt;line x1=&quot;150&quot; y1=&quot;92&quot; x2=&quot;1015&quot; y2=&quot;92&quot; stroke=&quot;#BD9B56&quot; strokeWidth=&quot;1.5&quot; /&gt;&#10;        &lt;line x1=&quot;150&quot; y1=&quot;92&quot; x2=&quot;150&quot; y2=&quot;108&quot; stroke=&quot;#BD9B56&quot; strokeWidth=&quot;1.5&quot; /&gt;&#10;        &lt;line x1=&quot;438&quot; y1=&quot;92&quot; x2=&quot;438&quot; y2=&quot;108&quot; stroke=&quot;#BD9B56&quot; strokeWidth=&quot;1.5&quot; /&gt;&#10;        &lt;line x1=&quot;726&quot; y1=&quot;92&quot; x2=&quot;726&quot; y2=&quot;108&quot; stroke=&quot;#BD9B56&quot; strokeWidth=&quot;1.5&quot; /&gt;&#10;        &lt;line x1=&quot;1015&quot; y1=&quot;92&quot; x2=&quot;1015&quot; y2=&quot;108&quot; stroke=&quot;#BD9B56&quot; strokeWidth=&quot;1.5&quot; /&gt;&#10;&#10;        {/* 分组1：空间资产 */}&#10;        &lt;text x=&quot;150&quot; y=&quot;128&quot; textAnchor=&quot;middle&quot; fontSize=&quot;12&quot; fontWeight=&quot;bold&quot; fill=&quot;#BD9B56&quot;&gt;空间资产&lt;/text&gt;&#10;        &lt;rect x=&quot;20&quot; y=&quot;138&quot; width=&quot;260&quot; height=&quot;56&quot; rx=&quot;8&quot; fill=&quot;rgba(34,57,94,0.06)&quot; stroke=&quot;#22395E&quot; strokeWidth=&quot;1.5&quot; /&gt;&#10;        &lt;text x=&quot;150&quot; y=&quot;162&quot; textAnchor=&quot;middle&quot; fontSize=&quot;14&quot; fontWeight=&quot;bold&quot; fill=&quot;#172133&quot;&gt;building 楼栋 ×8&lt;/text&gt;&#10;        &lt;text x=&quot;150&quot; y=&quot;182&quot; textAnchor=&quot;middle&quot; fontSize=&quot;11&quot; fill=&quot;#5F5E5A&quot;&gt;每栋 26 层 · 2 单元 · 4 户/层&lt;/text&gt;&#10;        &lt;line x1=&quot;150&quot; y1=&quot;194&quot; x2=&quot;150&quot; y2=&quot;206&quot; stroke=&quot;#BD9B56&quot; strokeWidth=&quot;1.2&quot; /&gt;&#10;        &lt;rect x=&quot;20&quot; y=&quot;210&quot; width=&quot;260&quot; height=&quot;56&quot; rx=&quot;8&quot; fill=&quot;rgba(34,57,94,0.06)&quot; stroke=&quot;#22395E&quot; strokeWidth=&quot;1.5&quot; /&gt;&#10;        &lt;text x=&quot;150&quot; y=&quot;234&quot; textAnchor=&quot;middle&quot; fontSize=&quot;14&quot; fontWeight=&quot;bold&quot; fill=&quot;#172133&quot;&gt;house 房屋 ×1664&lt;/text&gt;&#10;        &lt;text x=&quot;150&quot; y=&quot;254&quot; textAnchor=&quot;middle&quot; fontSize=&quot;11&quot; fill=&quot;#5F5E5A&quot;&gt;入住约 1200 户 · 800 车位&lt;/text&gt;&#10;&#10;        {/* 分组2：人员资产 */}&#10;        &lt;text x=&quot;438&quot; y=&quot;128&quot; textAnchor=&quot;middle&quot; fontSize=&quot;12&quot; fontWeight=&quot;bold&quot; fill=&quot;#BD9B56&quot;&gt;人员资产&lt;/text&gt;&#10;        &lt;rect x=&quot;308&quot; y=&quot;138&quot; width=&quot;260&quot; height=&quot;56&quot; rx=&quot;8&quot; fill=&quot;rgba(189,155,86,0.10)&quot; stroke=&quot;#BD9B56&quot; strokeWidth=&quot;1.5&quot; /&gt;&#10;        &lt;text x=&quot;438&quot; y=&quot;162&quot; textAnchor=&quot;middle&quot; fontSize=&quot;14&quot; fontWeight=&quot;bold&quot; fill=&quot;#172133&quot;&gt;user 业主 ×200&lt;/text&gt;&#10;        &lt;text x=&quot;438&quot; y=&quot;182&quot; textAnchor=&quot;middle&quot; fontSize=&quot;11&quot; fill=&quot;#5F5E5A&quot;&gt;house_binding 绑定 200 套&lt;/text&gt;&#10;        &lt;line x1=&quot;438&quot; y1=&quot;194&quot; x2=&quot;438&quot; y2=&quot;206&quot; stroke=&quot;#BD9B56&quot; strokeWidth=&quot;1.2&quot; /&gt;&#10;        &lt;rect x=&quot;308&quot; y=&quot;210&quot; width=&quot;260&quot; height=&quot;56&quot; rx=&quot;8&quot; fill=&quot;rgba(189,155,86,0.10)&quot; stroke=&quot;#BD9B56&quot; strokeWidth=&quot;1.5&quot; /&gt;&#10;        &lt;text x=&quot;438&quot; y=&quot;234&quot; textAnchor=&quot;middle&quot; fontSize=&quot;14&quot; fontWeight=&quot;bold&quot; fill=&quot;#172133&quot;&gt;worker 物业 ×75&lt;/text&gt;&#10;        &lt;text x=&quot;438&quot; y=&quot;254&quot; textAnchor=&quot;middle&quot; fontSize=&quot;11&quot; fill=&quot;#5F5E5A&quot;&gt;10 管理 / 15 维修 / 50 一线&lt;/text&gt;&#10;&#10;        {/* 分组3：业务数据 */}&#10;        &lt;text x=&quot;726&quot; y=&quot;128&quot; textAnchor=&quot;middle&quot; fontSize=&quot;12&quot; fontWeight=&quot;bold&quot; fill=&quot;#BD9B56&quot;&gt;业务数据&lt;/text&gt;&#10;        &lt;rect x=&quot;596&quot; y=&quot;138&quot; width=&quot;260&quot; height=&quot;40&quot; rx=&quot;8&quot; fill=&quot;rgba(34,57,94,0.06)&quot; stroke=&quot;#22395E&quot; strokeWidth=&quot;1.5&quot; /&gt;&#10;        &lt;text x=&quot;726&quot; y=&quot;163&quot; textAnchor=&quot;middle&quot; fontSize=&quot;13&quot; fontWeight=&quot;bold&quot; fill=&quot;#172133&quot;&gt;repair_order 工单 ×50&lt;/text&gt;&#10;        &lt;rect x=&quot;596&quot; y=&quot;186&quot; width=&quot;260&quot; height=&quot;40&quot; rx=&quot;8&quot; fill=&quot;rgba(34,57,94,0.06)&quot; stroke=&quot;#22395E&quot; strokeWidth=&quot;1.5&quot; /&gt;&#10;        &lt;text x=&quot;726&quot; y=&quot;211&quot; textAnchor=&quot;middle&quot; fontSize=&quot;13&quot; fontWeight=&quot;bold&quot; fill=&quot;#172133&quot;&gt;fee_bill 账单 ×746&lt;/text&gt;&#10;        &lt;rect x=&quot;596&quot; y=&quot;234&quot; width=&quot;260&quot; height=&quot;40&quot; rx=&quot;8&quot; fill=&quot;rgba(34,57,94,0.06)&quot; stroke=&quot;#22395E&quot; strokeWidth=&quot;1.5&quot; /&gt;&#10;        &lt;text x=&quot;726&quot; y=&quot;259&quot; textAnchor=&quot;middle&quot; fontSize=&quot;13&quot; fontWeight=&quot;bold&quot; fill=&quot;#172133&quot;&gt;notice 公告 ×24&lt;/text&gt;&#10;&#10;        {/* 分组4：知识资产 */}&#10;        &lt;text x=&quot;1015&quot; y=&quot;128&quot; textAnchor=&quot;middle&quot; fontSize=&quot;12&quot; fontWeight=&quot;bold&quot; fill=&quot;#BD9B56&quot;&gt;知识资产&lt;/text&gt;&#10;        &lt;rect x=&quot;885&quot; y=&quot;138&quot; width=&quot;260&quot; height=&quot;56&quot; rx=&quot;8&quot; fill=&quot;#22395E&quot; /&gt;&#10;        &lt;text x=&quot;1015&quot; y=&quot;162&quot; textAnchor=&quot;middle&quot; fontSize=&quot;14&quot; fontWeight=&quot;bold&quot; fill=&quot;#FBFCFA&quot;&gt;knowledge 文档 ×22&lt;/text&gt;&#10;        &lt;text x=&quot;1015&quot; y=&quot;182&quot; textAnchor=&quot;middle&quot; fontSize=&quot;11&quot; fill=&quot;#BD9B56&quot;&gt;7 个分类（规约/装修/停车…）&lt;/text&gt;&#10;        &lt;line x1=&quot;1015&quot; y1=&quot;194&quot; x2=&quot;1015&quot; y2=&quot;206&quot; stroke=&quot;#BD9B56&quot; strokeWidth=&quot;1.2&quot; /&gt;&#10;        &lt;rect x=&quot;885&quot; y=&quot;210&quot; width=&quot;260&quot; height=&quot;56&quot; rx=&quot;8&quot; fill=&quot;rgba(34,57,94,0.06)&quot; stroke=&quot;#BD9B56&quot; strokeWidth=&quot;1.5&quot; /&gt;&#10;        &lt;text x=&quot;1015&quot; y=&quot;234&quot; textAnchor=&quot;middle&quot; fontSize=&quot;14&quot; fontWeight=&quot;bold&quot; fill=&quot;#172133&quot;&gt;chunk 切片 ×99&lt;/text&gt;&#10;        &lt;text x=&quot;1015&quot; y=&quot;254&quot; textAnchor=&quot;middle&quot; fontSize=&quot;11&quot; fill=&quot;#5F5E5A&quot;&gt;pgvector 1024 维向量&lt;/text&gt;&#10;&#10;        {/* 底部关系说明 */}&#10;        &lt;rect x=&quot;300&quot; y=&quot;290&quot; width=&quot;550&quot; height=&quot;48&quot; rx=&quot;8&quot; fill=&quot;rgba(189,155,86,0.10)&quot; /&gt;&#10;        &lt;text x=&quot;575&quot; y=&quot;318&quot; textAnchor=&quot;middle&quot; fontSize=&quot;12&quot; fill=&quot;#172133&quot;&gt;repair_order → user + house + worker · fee_bill → house + user · 外键关联&lt;/text&gt;&#10;        &lt;text x=&quot;575&quot; y=&quot;334&quot; textAnchor=&quot;middle&quot; fontSize=&quot;11&quot; fill=&quot;#5F5E5A&quot;&gt;8 个 SQL 种子文件 · 一键导入可复现&lt;/text&gt;&#10;      &lt;/g&gt;&#10;    &lt;/svg&gt;&#10;  &lt;/div&gt;&#10;  &lt;div style={{ flexShrink: 0, height: 40, display: 'flex', alignItems: 'flex-end', justifyContent: 'space-between' }}&gt;&#10;    &lt;span style={{ color: '#BD9B56', fontSize: 12, letterSpacing: '0.1em' }}&gt;云溪花园 · 智慧社区&lt;/span&gt;&#10;    &lt;span style={{ color: '#a09b8c', fontSize: 12 }}&gt;05 / 15&lt;/span&gt;&#10;  &lt;/div&gt;&#10;&lt;/Slide&gt;"/>
+        <p:cNvPr id="307" name="" descr="&lt;Slide style={{ width: '1280px', height: '720px', background: '#FBFCFA', position: 'relative', padding: '32px 64px', boxSizing: 'border-box', display: 'flex', flexDirection: 'column' }}&gt;&#10;  &lt;div style={{ flexShrink: 0 }}&gt;&#10;    &lt;div style={{ color: '#BD9B56', fontSize: 13, letterSpacing: '0.25em', marginBottom: 6 }}&gt;01 · 项目规模&lt;/div&gt;&#10;    &lt;h2 style={{ fontSize: 30, fontWeight: 'bold', color: '#172133', margin: 0, lineHeight: 1.3 }}&gt;虚拟社区数据资产：云溪花园&lt;/h2&gt;&#10;    &lt;div style={{ fontSize: 14, color: '#6b7075', marginTop: 6 }}&gt;以一个社区为根，向下延伸出空间、人员、业务、知识四类数据资产&lt;/div&gt;&#10;  &lt;/div&gt;&#10;  &lt;div style={{ flex: 1, display: 'flex', alignItems: 'center', justifyContent: 'center' }}&gt;&#10;    &lt;svg width=&quot;1150&quot; height=&quot;470&quot; viewBox=&quot;0 0 1150 470&quot;&gt;&#10;      &lt;g fontFamily=&quot;Inter, sans-serif&quot;&gt;&#10;        {/* 根节点 community */}&#10;        &lt;rect x=&quot;450&quot; y=&quot;14&quot; width=&quot;250&quot; height=&quot;58&quot; rx=&quot;10&quot; fill=&quot;#172133&quot; /&gt;&#10;        &lt;text x=&quot;575&quot; y=&quot;38&quot; textAnchor=&quot;middle&quot; fontSize=&quot;15&quot; fontWeight=&quot;bold&quot; fill=&quot;#FBFCFA&quot;&gt;community 云溪花园&lt;/text&gt;&#10;        &lt;text x=&quot;575&quot; y=&quot;58&quot; textAnchor=&quot;middle&quot; fontSize=&quot;11&quot; fill=&quot;#BD9B56&quot;&gt;1 个小区 · 上海浦东张江路1268号&lt;/text&gt;&#10;        {/* 根节点连接线 */}&#10;        &lt;line x1=&quot;575&quot; y1=&quot;72&quot; x2=&quot;575&quot; y2=&quot;92&quot; stroke=&quot;#BD9B56&quot; strokeWidth=&quot;1.5&quot; /&gt;&#10;        &lt;line x1=&quot;150&quot; y1=&quot;92&quot; x2=&quot;1015&quot; y2=&quot;92&quot; stroke=&quot;#BD9B56&quot; strokeWidth=&quot;1.5&quot; /&gt;&#10;        &lt;line x1=&quot;150&quot; y1=&quot;92&quot; x2=&quot;150&quot; y2=&quot;108&quot; stroke=&quot;#BD9B56&quot; strokeWidth=&quot;1.5&quot; /&gt;&#10;        &lt;line x1=&quot;438&quot; y1=&quot;92&quot; x2=&quot;438&quot; y2=&quot;108&quot; stroke=&quot;#BD9B56&quot; strokeWidth=&quot;1.5&quot; /&gt;&#10;        &lt;line x1=&quot;726&quot; y1=&quot;92&quot; x2=&quot;726&quot; y2=&quot;108&quot; stroke=&quot;#BD9B56&quot; strokeWidth=&quot;1.5&quot; /&gt;&#10;        &lt;line x1=&quot;1015&quot; y1=&quot;92&quot; x2=&quot;1015&quot; y2=&quot;108&quot; stroke=&quot;#BD9B56&quot; strokeWidth=&quot;1.5&quot; /&gt;&#10;&#10;        {/* 分组1：空间资产 */}&#10;        &lt;text x=&quot;150&quot; y=&quot;128&quot; textAnchor=&quot;middle&quot; fontSize=&quot;12&quot; fontWeight=&quot;bold&quot; fill=&quot;#BD9B56&quot;&gt;空间资产&lt;/text&gt;&#10;        &lt;rect x=&quot;20&quot; y=&quot;138&quot; width=&quot;260&quot; height=&quot;56&quot; rx=&quot;8&quot; fill=&quot;rgba(34,57,94,0.06)&quot; stroke=&quot;#22395E&quot; strokeWidth=&quot;1.5&quot; /&gt;&#10;        &lt;text x=&quot;150&quot; y=&quot;162&quot; textAnchor=&quot;middle&quot; fontSize=&quot;14&quot; fontWeight=&quot;bold&quot; fill=&quot;#172133&quot;&gt;building 楼栋 ×8&lt;/text&gt;&#10;        &lt;text x=&quot;150&quot; y=&quot;182&quot; textAnchor=&quot;middle&quot; fontSize=&quot;11&quot; fill=&quot;#5F5E5A&quot;&gt;每栋 26 层 · 2 单元 · 4 户/层&lt;/text&gt;&#10;        &lt;line x1=&quot;150&quot; y1=&quot;194&quot; x2=&quot;150&quot; y2=&quot;206&quot; stroke=&quot;#BD9B56&quot; strokeWidth=&quot;1.2&quot; /&gt;&#10;        &lt;rect x=&quot;20&quot; y=&quot;210&quot; width=&quot;260&quot; height=&quot;56&quot; rx=&quot;8&quot; fill=&quot;rgba(34,57,94,0.06)&quot; stroke=&quot;#22395E&quot; strokeWidth=&quot;1.5&quot; /&gt;&#10;        &lt;text x=&quot;150&quot; y=&quot;234&quot; textAnchor=&quot;middle&quot; fontSize=&quot;14&quot; fontWeight=&quot;bold&quot; fill=&quot;#172133&quot;&gt;house 房屋 ×1664&lt;/text&gt;&#10;        &lt;text x=&quot;150&quot; y=&quot;254&quot; textAnchor=&quot;middle&quot; fontSize=&quot;11&quot; fill=&quot;#5F5E5A&quot;&gt;入住约 1200 户 · 800 车位&lt;/text&gt;&#10;&#10;        {/* 分组2：人员资产 */}&#10;        &lt;text x=&quot;438&quot; y=&quot;128&quot; textAnchor=&quot;middle&quot; fontSize=&quot;12&quot; fontWeight=&quot;bold&quot; fill=&quot;#BD9B56&quot;&gt;人员资产&lt;/text&gt;&#10;        &lt;rect x=&quot;308&quot; y=&quot;138&quot; width=&quot;260&quot; height=&quot;56&quot; rx=&quot;8&quot; fill=&quot;rgba(189,155,86,0.10)&quot; stroke=&quot;#BD9B56&quot; strokeWidth=&quot;1.5&quot; /&gt;&#10;        &lt;text x=&quot;438&quot; y=&quot;162&quot; textAnchor=&quot;middle&quot; fontSize=&quot;14&quot; fontWeight=&quot;bold&quot; fill=&quot;#172133&quot;&gt;user 业主 ×200&lt;/text&gt;&#10;        &lt;text x=&quot;438&quot; y=&quot;182&quot; textAnchor=&quot;middle&quot; fontSize=&quot;11&quot; fill=&quot;#5F5E5A&quot;&gt;house_binding 绑定 200 套&lt;/text&gt;&#10;        &lt;line x1=&quot;438&quot; y1=&quot;194&quot; x2=&quot;438&quot; y2=&quot;206&quot; stroke=&quot;#BD9B56&quot; strokeWidth=&quot;1.2&quot; /&gt;&#10;        &lt;rect x=&quot;308&quot; y=&quot;210&quot; width=&quot;260&quot; height=&quot;56&quot; rx=&quot;8&quot; fill=&quot;rgba(189,155,86,0.10)&quot; stroke=&quot;#BD9B56&quot; strokeWidth=&quot;1.5&quot; /&gt;&#10;        &lt;text x=&quot;438&quot; y=&quot;234&quot; textAnchor=&quot;middle&quot; fontSize=&quot;14&quot; fontWeight=&quot;bold&quot; fill=&quot;#172133&quot;&gt;worker 物业 ×75&lt;/text&gt;&#10;        &lt;text x=&quot;438&quot; y=&quot;254&quot; textAnchor=&quot;middle&quot; fontSize=&quot;11&quot; fill=&quot;#5F5E5A&quot;&gt;10 管理 / 15 维修 / 50 一线&lt;/text&gt;&#10;&#10;        {/* 分组3：业务数据 */}&#10;        &lt;text x=&quot;726&quot; y=&quot;128&quot; textAnchor=&quot;middle&quot; fontSize=&quot;12&quot; fontWeight=&quot;bold&quot; fill=&quot;#BD9B56&quot;&gt;业务数据&lt;/text&gt;&#10;        &lt;rect x=&quot;596&quot; y=&quot;138&quot; width=&quot;260&quot; height=&quot;40&quot; rx=&quot;8&quot; fill=&quot;rgba(34,57,94,0.06)&quot; stroke=&quot;#22395E&quot; strokeWidth=&quot;1.5&quot; /&gt;&#10;        &lt;text x=&quot;726&quot; y=&quot;163&quot; textAnchor=&quot;middle&quot; fontSize=&quot;13&quot; fontWeight=&quot;bold&quot; fill=&quot;#172133&quot;&gt;repair_order 工单 ×50&lt;/text&gt;&#10;        &lt;rect x=&quot;596&quot; y=&quot;186&quot; width=&quot;260&quot; height=&quot;40&quot; rx=&quot;8&quot; fill=&quot;rgba(34,57,94,0.06)&quot; stroke=&quot;#22395E&quot; strokeWidth=&quot;1.5&quot; /&gt;&#10;        &lt;text x=&quot;726&quot; y=&quot;211&quot; textAnchor=&quot;middle&quot; fontSize=&quot;13&quot; fontWeight=&quot;bold&quot; fill=&quot;#172133&quot;&gt;fee_bill 账单 ×746&lt;/text&gt;&#10;        &lt;rect x=&quot;596&quot; y=&quot;234&quot; width=&quot;260&quot; height=&quot;40&quot; rx=&quot;8&quot; fill=&quot;rgba(34,57,94,0.06)&quot; stroke=&quot;#22395E&quot; strokeWidth=&quot;1.5&quot; /&gt;&#10;        &lt;text x=&quot;726&quot; y=&quot;259&quot; textAnchor=&quot;middle&quot; fontSize=&quot;13&quot; fontWeight=&quot;bold&quot; fill=&quot;#172133&quot;&gt;notice 公告 ×24&lt;/text&gt;&#10;&#10;        {/* 分组4：知识资产 */}&#10;        &lt;text x=&quot;1015&quot; y=&quot;128&quot; textAnchor=&quot;middle&quot; fontSize=&quot;12&quot; fontWeight=&quot;bold&quot; fill=&quot;#BD9B56&quot;&gt;知识资产&lt;/text&gt;&#10;        &lt;rect x=&quot;885&quot; y=&quot;138&quot; width=&quot;260&quot; height=&quot;56&quot; rx=&quot;8&quot; fill=&quot;#22395E&quot; /&gt;&#10;        &lt;text x=&quot;1015&quot; y=&quot;162&quot; textAnchor=&quot;middle&quot; fontSize=&quot;14&quot; fontWeight=&quot;bold&quot; fill=&quot;#FBFCFA&quot;&gt;knowledge 文档 ×22&lt;/text&gt;&#10;        &lt;text x=&quot;1015&quot; y=&quot;182&quot; textAnchor=&quot;middle&quot; fontSize=&quot;11&quot; fill=&quot;#BD9B56&quot;&gt;7 个分类（规约/装修/停车…）&lt;/text&gt;&#10;        &lt;line x1=&quot;1015&quot; y1=&quot;194&quot; x2=&quot;1015&quot; y2=&quot;206&quot; stroke=&quot;#BD9B56&quot; strokeWidth=&quot;1.2&quot; /&gt;&#10;        &lt;rect x=&quot;885&quot; y=&quot;210&quot; width=&quot;260&quot; height=&quot;56&quot; rx=&quot;8&quot; fill=&quot;rgba(34,57,94,0.06)&quot; stroke=&quot;#BD9B56&quot; strokeWidth=&quot;1.5&quot; /&gt;&#10;        &lt;text x=&quot;1015&quot; y=&quot;234&quot; textAnchor=&quot;middle&quot; fontSize=&quot;14&quot; fontWeight=&quot;bold&quot; fill=&quot;#172133&quot;&gt;chunk 切片 ×99&lt;/text&gt;&#10;        &lt;text x=&quot;1015&quot; y=&quot;254&quot; textAnchor=&quot;middle&quot; fontSize=&quot;11&quot; fill=&quot;#5F5E5A&quot;&gt;pgvector 1024 维向量&lt;/text&gt;&#10;&#10;        {/* 底部关系说明 */}&#10;        &lt;rect x=&quot;300&quot; y=&quot;290&quot; width=&quot;550&quot; height=&quot;48&quot; rx=&quot;8&quot; fill=&quot;rgba(189,155,86,0.10)&quot; /&gt;&#10;        &lt;text x=&quot;575&quot; y=&quot;318&quot; textAnchor=&quot;middle&quot; fontSize=&quot;12&quot; fill=&quot;#172133&quot;&gt;repair_order → user + house + worker · fee_bill → house + user · 外键关联&lt;/text&gt;&#10;        &lt;text x=&quot;575&quot; y=&quot;334&quot; textAnchor=&quot;middle&quot; fontSize=&quot;11&quot; fill=&quot;#5F5E5A&quot;&gt;8 个 SQL 种子文件 · 一键导入可复现&lt;/text&gt;&#10;      &lt;/g&gt;&#10;    &lt;/svg&gt;&#10;  &lt;/div&gt;&#10;  &lt;div style={{ flexShrink: 0, height: 40, display: 'flex', alignItems: 'flex-end', justifyContent: 'space-between' }}&gt;&#10;    &lt;span style={{ color: '#BD9B56', fontSize: 12, letterSpacing: '0.1em' }}&gt;云溪花园 · 智慧社区&lt;/span&gt;&#10;    &lt;span style={{ color: '#a09b8c', fontSize: 12 }}&gt;05 / 15&lt;/span&gt;&#10;  &lt;/div&gt;&#10;&lt;/Slide&gt;"/>
         <p:cNvGrpSpPr/>
         <p:nvPr/>
       </p:nvGrpSpPr>
@@ -14289,7 +14537,7 @@
       </p:grpSpPr>
       <p:sp>
         <p:nvSpPr>
-          <p:cNvPr id="304" name=""/>
+          <p:cNvPr id="308" name=""/>
           <p:cNvSpPr/>
           <p:nvPr/>
         </p:nvSpPr>
@@ -14313,7 +14561,7 @@
       </p:sp>
       <p:sp>
         <p:nvSpPr>
-          <p:cNvPr id="305" name="" descr="{&quot;isTemplate&quot;:true,&quot;type&quot;:&quot;text&quot;}"/>
+          <p:cNvPr id="309" name="" descr="{&quot;isTemplate&quot;:true,&quot;type&quot;:&quot;text&quot;}"/>
           <p:cNvSpPr txBox="1"/>
           <p:nvPr/>
         </p:nvSpPr>
@@ -14358,7 +14606,7 @@
       </p:sp>
       <p:sp>
         <p:nvSpPr>
-          <p:cNvPr id="306" name="" descr="{&quot;isTemplate&quot;:true,&quot;type&quot;:&quot;text&quot;}"/>
+          <p:cNvPr id="310" name="" descr="{&quot;isTemplate&quot;:true,&quot;type&quot;:&quot;text&quot;}"/>
           <p:cNvSpPr txBox="1"/>
           <p:nvPr/>
         </p:nvSpPr>
@@ -14393,7 +14641,7 @@
       </p:sp>
       <p:sp>
         <p:nvSpPr>
-          <p:cNvPr id="307" name="" descr="{&quot;isTemplate&quot;:true,&quot;type&quot;:&quot;text&quot;}"/>
+          <p:cNvPr id="311" name="" descr="{&quot;isTemplate&quot;:true,&quot;type&quot;:&quot;text&quot;}"/>
           <p:cNvSpPr txBox="1"/>
           <p:nvPr/>
         </p:nvSpPr>
@@ -14428,7 +14676,7 @@
       </p:sp>
       <p:pic>
         <p:nvPicPr>
-          <p:cNvPr id="308" name=""/>
+          <p:cNvPr id="312" name=""/>
           <p:cNvPicPr>
             <a:picLocks noChangeAspect="1"/>
           </p:cNvPicPr>
@@ -14459,7 +14707,7 @@
       </p:pic>
       <p:sp>
         <p:nvSpPr>
-          <p:cNvPr id="309" name="" descr="{&quot;isTemplate&quot;:true,&quot;type&quot;:&quot;text&quot;}"/>
+          <p:cNvPr id="313" name="" descr="{&quot;isTemplate&quot;:true,&quot;type&quot;:&quot;text&quot;}"/>
           <p:cNvSpPr txBox="1"/>
           <p:nvPr/>
         </p:nvSpPr>
@@ -14514,7 +14762,7 @@
       </p:sp>
       <p:sp>
         <p:nvSpPr>
-          <p:cNvPr id="310" name="" descr="{&quot;isTemplate&quot;:true,&quot;type&quot;:&quot;text&quot;}"/>
+          <p:cNvPr id="314" name="" descr="{&quot;isTemplate&quot;:true,&quot;type&quot;:&quot;text&quot;}"/>
           <p:cNvSpPr txBox="1"/>
           <p:nvPr/>
         </p:nvSpPr>
@@ -14557,7 +14805,7 @@
   <p:cSld>
     <p:spTree>
       <p:nvGrpSpPr>
-        <p:cNvPr id="311" name="" descr="&lt;Slide style={{ width: '1280px', height: '720px', background: '#FBFCFA', position: 'relative', padding: '40px 64px', boxSizing: 'border-box', display: 'flex', flexDirection: 'column' }}&gt;&#10;  &lt;div style={{ flexShrink: 0 }}&gt;&#10;    &lt;div style={{ color: '#BD9B56', fontSize: 13, letterSpacing: '0.25em', marginBottom: 8 }}&gt;02 · 技术构建过程&lt;/div&gt;&#10;    &lt;h2 style={{ fontSize: 30, fontWeight: 'bold', color: '#172133', margin: 0, lineHeight: 1.3 }}&gt;技术架构：六层分离的 AI Native 系统&lt;/h2&gt;&#10;  &lt;/div&gt;&#10;  &lt;div style={{ flex: 1, display: 'flex', alignItems: 'center', gap: 32 }}&gt;&#10;    &lt;div style={{ flex: '0 0 620px', background: '#fff', borderRadius: 12, padding: '22px 24px', boxShadow: '0 6px 24px rgba(23,33,51,0.08)' }}&gt;&#10;      &lt;svg width=&quot;572&quot; height=&quot;470&quot; viewBox=&quot;0 0 572 470&quot;&gt;&#10;        &lt;defs&gt;&#10;          &lt;marker id=&quot;ar6&quot; viewBox=&quot;0 0 10 10&quot; refX=&quot;9&quot; refY=&quot;5&quot; markerWidth=&quot;6&quot; markerHeight=&quot;6&quot; orient=&quot;auto&quot;&gt;&#10;            &lt;path d=&quot;M0 0L10 5L0 10z&quot; fill=&quot;#22395E&quot; /&gt;&#10;          &lt;/marker&gt;&#10;        &lt;/defs&gt;&#10;        &lt;g fontFamily=&quot;Inter, sans-serif&quot;&gt;&#10;          &lt;rect x=&quot;36&quot; y=&quot;18&quot; width=&quot;500&quot; height=&quot;52&quot; rx=&quot;6&quot; fill=&quot;#F5F8F8&quot; stroke=&quot;#22395E&quot; strokeWidth=&quot;1.5&quot; /&gt;&#10;          &lt;text x=&quot;286&quot; y=&quot;49&quot; textAnchor=&quot;middle&quot; fontSize=&quot;14&quot; fontWeight=&quot;bold&quot; fill=&quot;#172133&quot;&gt;客户端 · 业主 / 物业 / 维修 三端&lt;/text&gt;&#10;          &lt;line x1=&quot;286&quot; y1=&quot;70&quot; x2=&quot;286&quot; y2=&quot;92&quot; stroke=&quot;#22395E&quot; strokeWidth=&quot;1.2&quot; markerEnd=&quot;url(#ar6)&quot; /&gt;&#10;          &lt;rect x=&quot;36&quot; y=&quot;96&quot; width=&quot;500&quot; height=&quot;48&quot; rx=&quot;6&quot; fill=&quot;#F5F8F8&quot; stroke=&quot;#22395E&quot; strokeWidth=&quot;1.5&quot; /&gt;&#10;          &lt;text x=&quot;286&quot; y=&quot;125&quot; textAnchor=&quot;middle&quot; fontSize=&quot;14&quot; fontWeight=&quot;bold&quot; fill=&quot;#172133&quot;&gt;API 网关 · FastAPI&lt;/text&gt;&#10;          &lt;line x1=&quot;286&quot; y1=&quot;144&quot; x2=&quot;286&quot; y2=&quot;166&quot; stroke=&quot;#22395E&quot; strokeWidth=&quot;1.2&quot; markerEnd=&quot;url(#ar6)&quot; /&gt;&#10;          &lt;rect x=&quot;36&quot; y=&quot;170&quot; width=&quot;500&quot; height=&quot;70&quot; rx=&quot;6&quot; fill=&quot;rgba(34,57,94,0.08)&quot; stroke=&quot;#22395E&quot; strokeWidth=&quot;2&quot; /&gt;&#10;          &lt;text x=&quot;64&quot; y=&quot;196&quot; fontSize=&quot;13&quot; fontWeight=&quot;bold&quot; fill=&quot;#BD9B56&quot;&gt;AI Agent 层&lt;/text&gt;&#10;          &lt;text x=&quot;286&quot; y=&quot;218&quot; textAnchor=&quot;middle&quot; fontSize=&quot;14&quot; fontWeight=&quot;bold&quot; fill=&quot;#172133&quot;&gt;Router Agent + 领域 Agent + 工具调用&lt;/text&gt;&#10;          &lt;line x1=&quot;286&quot; y1=&quot;240&quot; x2=&quot;286&quot; y2=&quot;262&quot; stroke=&quot;#22395E&quot; strokeWidth=&quot;1.2&quot; markerEnd=&quot;url(#ar6)&quot; /&gt;&#10;          &lt;rect x=&quot;36&quot; y=&quot;266&quot; width=&quot;500&quot; height=&quot;56&quot; rx=&quot;6&quot; fill=&quot;rgba(189,155,86,0.08)&quot; stroke=&quot;#BD9B56&quot; strokeWidth=&quot;1.5&quot; /&gt;&#10;          &lt;text x=&quot;64&quot; y=&quot;290&quot; fontSize=&quot;13&quot; fontWeight=&quot;bold&quot; fill=&quot;#BD9B56&quot;&gt;业务服务层&lt;/text&gt;&#10;          &lt;text x=&quot;286&quot; y=&quot;312&quot; textAnchor=&quot;middle&quot; fontSize=&quot;14&quot; fontWeight=&quot;bold&quot; fill=&quot;#172133&quot;&gt;工单 · 费用 · 巡检 · 通知 · 反馈 · 知识库&lt;/text&gt;&#10;          &lt;line x1=&quot;286&quot; y1=&quot;322&quot; x2=&quot;286&quot; y2=&quot;344&quot; stroke=&quot;#22395E&quot; strokeWidth=&quot;1.2&quot; markerEnd=&quot;url(#ar6)&quot; /&gt;&#10;          &lt;rect x=&quot;36&quot; y=&quot;348&quot; width=&quot;240&quot; height=&quot;60&quot; rx=&quot;6&quot; fill=&quot;#F5F8F8&quot; stroke=&quot;#22395E&quot; strokeWidth=&quot;1.5&quot; /&gt;&#10;          &lt;text x=&quot;156&quot; y=&quot;374&quot; textAnchor=&quot;middle&quot; fontSize=&quot;13&quot; fontWeight=&quot;bold&quot; fill=&quot;#BD9B56&quot;&gt;PostgreSQL + pgvector&lt;/text&gt;&#10;          &lt;text x=&quot;156&quot; y=&quot;394&quot; textAnchor=&quot;middle&quot; fontSize=&quot;11&quot; fill=&quot;#5F5E5A&quot;&gt;事务数据 + 向量检索&lt;/text&gt;&#10;          &lt;rect x=&quot;296&quot; y=&quot;348&quot; width=&quot;240&quot; height=&quot;60&quot; rx=&quot;6&quot; fill=&quot;#F5F8F8&quot; stroke=&quot;#22395E&quot; strokeWidth=&quot;1.5&quot; /&gt;&#10;          &lt;text x=&quot;416&quot; y=&quot;374&quot; textAnchor=&quot;middle&quot; fontSize=&quot;13&quot; fontWeight=&quot;bold&quot; fill=&quot;#BD9B56&quot;&gt;Redis + 智谱 GLM&lt;/text&gt;&#10;          &lt;text x=&quot;416&quot; y=&quot;394&quot; textAnchor=&quot;middle&quot; fontSize=&quot;11&quot; fill=&quot;#5F5E5A&quot;&gt;缓存 · LLM · embedding&lt;/text&gt;&#10;        &lt;/g&gt;&#10;      &lt;/svg&gt;&#10;    &lt;/div&gt;&#10;    &lt;div style={{ flex: 1, display: 'flex', flexDirection: 'column', gap: 18 }}&gt;&#10;      &lt;div&gt;&#10;        &lt;div style={{ fontSize: 14, color: '#BD9B56', fontWeight: 'bold', letterSpacing: '0.1em', marginBottom: 6 }}&gt;1.  Agent 与业务解耦&lt;/div&gt;&#10;        &lt;p style={{ fontSize: 14, color: '#5F5E5A', margin: 0, lineHeight: 1.65 }}&gt;AI Agent 只负责理解意图、编排工具，不直接操作数据库，严守 Agent → Tool → Service → Repository → Database 分层，杜绝 LLM 直连 SQL 的风险。&lt;/p&gt;&#10;      &lt;/div&gt;&#10;      &lt;div&gt;&#10;        &lt;div style={{ fontSize: 14, color: '#BD9B56', fontWeight: 'bold', letterSpacing: '0.1em', marginBottom: 6 }}&gt;2.  pgvector 一库双角色&lt;/div&gt;&#10;        &lt;p style={{ fontSize: 14, color: '#5F5E5A', margin: 0, lineHeight: 1.65 }}&gt;PostgreSQL 同时承载业务数据（工单、费用）和向量数据（知识切片），无需额外向量数据库，降低部署与运维复杂度。&lt;/p&gt;&#10;      &lt;/div&gt;&#10;      &lt;div&gt;&#10;        &lt;div style={{ fontSize: 14, color: '#BD9B56', fontWeight: 'bold', letterSpacing: '0.1em', marginBottom: 6 }}&gt;3.  可观测可评估&lt;/div&gt;&#10;        &lt;p style={{ fontSize: 14, color: '#5F5E5A', margin: 0, lineHeight: 1.65 }}&gt;每次 AI 对话的意图、工具调用、结果全程记录，可回放、可追踪，支撑后续的量化评估与持续迭代。&lt;/p&gt;&#10;      &lt;/div&gt;&#10;    &lt;/div&gt;&#10;  &lt;/div&gt;&#10;  &lt;div style={{ flexShrink: 0, height: 40, display: 'flex', alignItems: 'flex-end', justifyContent: 'space-between' }}&gt;&#10;    &lt;span style={{ color: '#BD9B56', fontSize: 12, letterSpacing: '0.1em' }}&gt;云溪花园 · 智慧社区&lt;/span&gt;&#10;    &lt;span style={{ color: '#a09b8c', fontSize: 12 }}&gt;06 / 15&lt;/span&gt;&#10;  &lt;/div&gt;&#10;&lt;/Slide&gt;"/>
+        <p:cNvPr id="315" name="" descr="&lt;Slide style={{ width: '1280px', height: '720px', background: '#FBFCFA', position: 'relative', padding: '40px 64px', boxSizing: 'border-box', display: 'flex', flexDirection: 'column' }}&gt;&#10;  &lt;div style={{ flexShrink: 0 }}&gt;&#10;    &lt;div style={{ color: '#BD9B56', fontSize: 13, letterSpacing: '0.25em', marginBottom: 8 }}&gt;02 · 技术构建过程&lt;/div&gt;&#10;    &lt;h2 style={{ fontSize: 30, fontWeight: 'bold', color: '#172133', margin: 0, lineHeight: 1.3 }}&gt;技术架构：六层分离的 AI Native 系统&lt;/h2&gt;&#10;  &lt;/div&gt;&#10;  &lt;div style={{ flex: 1, display: 'flex', alignItems: 'center', gap: 32 }}&gt;&#10;    &lt;div style={{ flex: '0 0 620px', background: '#fff', borderRadius: 12, padding: '22px 24px', boxShadow: '0 6px 24px rgba(23,33,51,0.08)' }}&gt;&#10;      &lt;svg width=&quot;572&quot; height=&quot;470&quot; viewBox=&quot;0 0 572 470&quot;&gt;&#10;        &lt;defs&gt;&#10;          &lt;marker id=&quot;ar6&quot; viewBox=&quot;0 0 10 10&quot; refX=&quot;9&quot; refY=&quot;5&quot; markerWidth=&quot;6&quot; markerHeight=&quot;6&quot; orient=&quot;auto&quot;&gt;&#10;            &lt;path d=&quot;M0 0L10 5L0 10z&quot; fill=&quot;#22395E&quot; /&gt;&#10;          &lt;/marker&gt;&#10;        &lt;/defs&gt;&#10;        &lt;g fontFamily=&quot;Inter, sans-serif&quot;&gt;&#10;          &lt;rect x=&quot;36&quot; y=&quot;18&quot; width=&quot;500&quot; height=&quot;52&quot; rx=&quot;6&quot; fill=&quot;#F5F8F8&quot; stroke=&quot;#22395E&quot; strokeWidth=&quot;1.5&quot; /&gt;&#10;          &lt;text x=&quot;286&quot; y=&quot;49&quot; textAnchor=&quot;middle&quot; fontSize=&quot;14&quot; fontWeight=&quot;bold&quot; fill=&quot;#172133&quot;&gt;客户端 · 业主 / 物业 / 维修 三端&lt;/text&gt;&#10;          &lt;line x1=&quot;286&quot; y1=&quot;70&quot; x2=&quot;286&quot; y2=&quot;92&quot; stroke=&quot;#22395E&quot; strokeWidth=&quot;1.2&quot; markerEnd=&quot;url(#ar6)&quot; /&gt;&#10;          &lt;rect x=&quot;36&quot; y=&quot;96&quot; width=&quot;500&quot; height=&quot;48&quot; rx=&quot;6&quot; fill=&quot;#F5F8F8&quot; stroke=&quot;#22395E&quot; strokeWidth=&quot;1.5&quot; /&gt;&#10;          &lt;text x=&quot;286&quot; y=&quot;125&quot; textAnchor=&quot;middle&quot; fontSize=&quot;14&quot; fontWeight=&quot;bold&quot; fill=&quot;#172133&quot;&gt;API 网关 · FastAPI&lt;/text&gt;&#10;          &lt;line x1=&quot;286&quot; y1=&quot;144&quot; x2=&quot;286&quot; y2=&quot;166&quot; stroke=&quot;#22395E&quot; strokeWidth=&quot;1.2&quot; markerEnd=&quot;url(#ar6)&quot; /&gt;&#10;          &lt;rect x=&quot;36&quot; y=&quot;170&quot; width=&quot;500&quot; height=&quot;70&quot; rx=&quot;6&quot; fill=&quot;rgba(34,57,94,0.08)&quot; stroke=&quot;#22395E&quot; strokeWidth=&quot;2&quot; /&gt;&#10;          &lt;text x=&quot;64&quot; y=&quot;196&quot; fontSize=&quot;13&quot; fontWeight=&quot;bold&quot; fill=&quot;#BD9B56&quot;&gt;AI Agent 层&lt;/text&gt;&#10;          &lt;text x=&quot;286&quot; y=&quot;218&quot; textAnchor=&quot;middle&quot; fontSize=&quot;14&quot; fontWeight=&quot;bold&quot; fill=&quot;#172133&quot;&gt;Router Agent + 领域 Agent + 工具调用&lt;/text&gt;&#10;          &lt;line x1=&quot;286&quot; y1=&quot;240&quot; x2=&quot;286&quot; y2=&quot;262&quot; stroke=&quot;#22395E&quot; strokeWidth=&quot;1.2&quot; markerEnd=&quot;url(#ar6)&quot; /&gt;&#10;          &lt;rect x=&quot;36&quot; y=&quot;266&quot; width=&quot;500&quot; height=&quot;56&quot; rx=&quot;6&quot; fill=&quot;rgba(189,155,86,0.08)&quot; stroke=&quot;#BD9B56&quot; strokeWidth=&quot;1.5&quot; /&gt;&#10;          &lt;text x=&quot;64&quot; y=&quot;290&quot; fontSize=&quot;13&quot; fontWeight=&quot;bold&quot; fill=&quot;#BD9B56&quot;&gt;业务服务层&lt;/text&gt;&#10;          &lt;text x=&quot;286&quot; y=&quot;312&quot; textAnchor=&quot;middle&quot; fontSize=&quot;14&quot; fontWeight=&quot;bold&quot; fill=&quot;#172133&quot;&gt;工单 · 费用 · 巡检 · 通知 · 反馈 · 知识库&lt;/text&gt;&#10;          &lt;line x1=&quot;286&quot; y1=&quot;322&quot; x2=&quot;286&quot; y2=&quot;344&quot; stroke=&quot;#22395E&quot; strokeWidth=&quot;1.2&quot; markerEnd=&quot;url(#ar6)&quot; /&gt;&#10;          &lt;rect x=&quot;36&quot; y=&quot;348&quot; width=&quot;240&quot; height=&quot;60&quot; rx=&quot;6&quot; fill=&quot;#F5F8F8&quot; stroke=&quot;#22395E&quot; strokeWidth=&quot;1.5&quot; /&gt;&#10;          &lt;text x=&quot;156&quot; y=&quot;374&quot; textAnchor=&quot;middle&quot; fontSize=&quot;13&quot; fontWeight=&quot;bold&quot; fill=&quot;#BD9B56&quot;&gt;PostgreSQL + pgvector&lt;/text&gt;&#10;          &lt;text x=&quot;156&quot; y=&quot;394&quot; textAnchor=&quot;middle&quot; fontSize=&quot;11&quot; fill=&quot;#5F5E5A&quot;&gt;事务数据 + 向量检索&lt;/text&gt;&#10;          &lt;rect x=&quot;296&quot; y=&quot;348&quot; width=&quot;240&quot; height=&quot;60&quot; rx=&quot;6&quot; fill=&quot;#F5F8F8&quot; stroke=&quot;#22395E&quot; strokeWidth=&quot;1.5&quot; /&gt;&#10;          &lt;text x=&quot;416&quot; y=&quot;374&quot; textAnchor=&quot;middle&quot; fontSize=&quot;13&quot; fontWeight=&quot;bold&quot; fill=&quot;#BD9B56&quot;&gt;Redis + 智谱 GLM&lt;/text&gt;&#10;          &lt;text x=&quot;416&quot; y=&quot;394&quot; textAnchor=&quot;middle&quot; fontSize=&quot;11&quot; fill=&quot;#5F5E5A&quot;&gt;缓存 · LLM · embedding&lt;/text&gt;&#10;        &lt;/g&gt;&#10;      &lt;/svg&gt;&#10;    &lt;/div&gt;&#10;    &lt;div style={{ flex: 1, display: 'flex', flexDirection: 'column', gap: 18 }}&gt;&#10;      &lt;div&gt;&#10;        &lt;div style={{ fontSize: 14, color: '#BD9B56', fontWeight: 'bold', letterSpacing: '0.1em', marginBottom: 6 }}&gt;1.  Agent 与业务解耦&lt;/div&gt;&#10;        &lt;p style={{ fontSize: 14, color: '#5F5E5A', margin: 0, lineHeight: 1.65 }}&gt;AI Agent 只负责理解意图、编排工具，不直接操作数据库，严守 Agent → Tool → Service → Repository → Database 分层，杜绝 LLM 直连 SQL 的风险。&lt;/p&gt;&#10;      &lt;/div&gt;&#10;      &lt;div&gt;&#10;        &lt;div style={{ fontSize: 14, color: '#BD9B56', fontWeight: 'bold', letterSpacing: '0.1em', marginBottom: 6 }}&gt;2.  pgvector 一库双角色&lt;/div&gt;&#10;        &lt;p style={{ fontSize: 14, color: '#5F5E5A', margin: 0, lineHeight: 1.65 }}&gt;PostgreSQL 同时承载业务数据（工单、费用）和向量数据（知识切片），无需额外向量数据库，降低部署与运维复杂度。&lt;/p&gt;&#10;      &lt;/div&gt;&#10;      &lt;div&gt;&#10;        &lt;div style={{ fontSize: 14, color: '#BD9B56', fontWeight: 'bold', letterSpacing: '0.1em', marginBottom: 6 }}&gt;3.  可观测可评估&lt;/div&gt;&#10;        &lt;p style={{ fontSize: 14, color: '#5F5E5A', margin: 0, lineHeight: 1.65 }}&gt;每次 AI 对话的意图、工具调用、结果全程记录，可回放、可追踪，支撑后续的量化评估与持续迭代。&lt;/p&gt;&#10;      &lt;/div&gt;&#10;    &lt;/div&gt;&#10;  &lt;/div&gt;&#10;  &lt;div style={{ flexShrink: 0, height: 40, display: 'flex', alignItems: 'flex-end', justifyContent: 'space-between' }}&gt;&#10;    &lt;span style={{ color: '#BD9B56', fontSize: 12, letterSpacing: '0.1em' }}&gt;云溪花园 · 智慧社区&lt;/span&gt;&#10;    &lt;span style={{ color: '#a09b8c', fontSize: 12 }}&gt;06 / 15&lt;/span&gt;&#10;  &lt;/div&gt;&#10;&lt;/Slide&gt;"/>
         <p:cNvGrpSpPr/>
         <p:nvPr/>
       </p:nvGrpSpPr>
@@ -14571,7 +14819,7 @@
       </p:grpSpPr>
       <p:sp>
         <p:nvSpPr>
-          <p:cNvPr id="312" name=""/>
+          <p:cNvPr id="316" name=""/>
           <p:cNvSpPr/>
           <p:nvPr/>
         </p:nvSpPr>
@@ -14595,7 +14843,7 @@
       </p:sp>
       <p:sp>
         <p:nvSpPr>
-          <p:cNvPr id="313" name="" descr="{&quot;isTemplate&quot;:true,&quot;type&quot;:&quot;text&quot;}"/>
+          <p:cNvPr id="317" name="" descr="{&quot;isTemplate&quot;:true,&quot;type&quot;:&quot;text&quot;}"/>
           <p:cNvSpPr txBox="1"/>
           <p:nvPr/>
         </p:nvSpPr>
@@ -14640,7 +14888,7 @@
       </p:sp>
       <p:sp>
         <p:nvSpPr>
-          <p:cNvPr id="314" name="" descr="{&quot;isTemplate&quot;:true,&quot;type&quot;:&quot;text&quot;}"/>
+          <p:cNvPr id="318" name="" descr="{&quot;isTemplate&quot;:true,&quot;type&quot;:&quot;text&quot;}"/>
           <p:cNvSpPr txBox="1"/>
           <p:nvPr/>
         </p:nvSpPr>
@@ -14695,7 +14943,7 @@
       </p:sp>
       <p:sp>
         <p:nvSpPr>
-          <p:cNvPr id="315" name=""/>
+          <p:cNvPr id="319" name=""/>
           <p:cNvSpPr/>
           <p:nvPr/>
         </p:nvSpPr>
@@ -14728,7 +14976,7 @@
       </p:sp>
       <p:pic>
         <p:nvPicPr>
-          <p:cNvPr id="316" name=""/>
+          <p:cNvPr id="320" name=""/>
           <p:cNvPicPr>
             <a:picLocks noChangeAspect="1"/>
           </p:cNvPicPr>
@@ -14759,7 +15007,7 @@
       </p:pic>
       <p:sp>
         <p:nvSpPr>
-          <p:cNvPr id="317" name="" descr="{&quot;isTemplate&quot;:true,&quot;type&quot;:&quot;text&quot;}"/>
+          <p:cNvPr id="321" name="" descr="{&quot;isTemplate&quot;:true,&quot;type&quot;:&quot;text&quot;}"/>
           <p:cNvSpPr txBox="1"/>
           <p:nvPr/>
         </p:nvSpPr>
@@ -14804,7 +15052,7 @@
       </p:sp>
       <p:sp>
         <p:nvSpPr>
-          <p:cNvPr id="318" name="" descr="{&quot;isTemplate&quot;:true,&quot;type&quot;:&quot;text&quot;}"/>
+          <p:cNvPr id="322" name="" descr="{&quot;isTemplate&quot;:true,&quot;type&quot;:&quot;text&quot;}"/>
           <p:cNvSpPr txBox="1"/>
           <p:nvPr/>
         </p:nvSpPr>
@@ -14911,7 +15159,7 @@
       </p:sp>
       <p:sp>
         <p:nvSpPr>
-          <p:cNvPr id="319" name="" descr="{&quot;isTemplate&quot;:true,&quot;type&quot;:&quot;text&quot;}"/>
+          <p:cNvPr id="323" name="" descr="{&quot;isTemplate&quot;:true,&quot;type&quot;:&quot;text&quot;}"/>
           <p:cNvSpPr txBox="1"/>
           <p:nvPr/>
         </p:nvSpPr>
@@ -14956,7 +15204,7 @@
       </p:sp>
       <p:sp>
         <p:nvSpPr>
-          <p:cNvPr id="320" name="" descr="{&quot;isTemplate&quot;:true,&quot;type&quot;:&quot;text&quot;}"/>
+          <p:cNvPr id="324" name="" descr="{&quot;isTemplate&quot;:true,&quot;type&quot;:&quot;text&quot;}"/>
           <p:cNvSpPr txBox="1"/>
           <p:nvPr/>
         </p:nvSpPr>
@@ -15003,7 +15251,7 @@
       </p:sp>
       <p:sp>
         <p:nvSpPr>
-          <p:cNvPr id="321" name="" descr="{&quot;isTemplate&quot;:true,&quot;type&quot;:&quot;text&quot;}"/>
+          <p:cNvPr id="325" name="" descr="{&quot;isTemplate&quot;:true,&quot;type&quot;:&quot;text&quot;}"/>
           <p:cNvSpPr txBox="1"/>
           <p:nvPr/>
         </p:nvSpPr>
@@ -15048,7 +15296,7 @@
       </p:sp>
       <p:sp>
         <p:nvSpPr>
-          <p:cNvPr id="322" name="" descr="{&quot;isTemplate&quot;:true,&quot;type&quot;:&quot;text&quot;}"/>
+          <p:cNvPr id="326" name="" descr="{&quot;isTemplate&quot;:true,&quot;type&quot;:&quot;text&quot;}"/>
           <p:cNvSpPr txBox="1"/>
           <p:nvPr/>
         </p:nvSpPr>
@@ -15105,7 +15353,7 @@
       </p:sp>
       <p:sp>
         <p:nvSpPr>
-          <p:cNvPr id="323" name="" descr="{&quot;isTemplate&quot;:true,&quot;type&quot;:&quot;text&quot;}"/>
+          <p:cNvPr id="327" name="" descr="{&quot;isTemplate&quot;:true,&quot;type&quot;:&quot;text&quot;}"/>
           <p:cNvSpPr txBox="1"/>
           <p:nvPr/>
         </p:nvSpPr>
@@ -15160,7 +15408,7 @@
       </p:sp>
       <p:sp>
         <p:nvSpPr>
-          <p:cNvPr id="324" name="" descr="{&quot;isTemplate&quot;:true,&quot;type&quot;:&quot;text&quot;}"/>
+          <p:cNvPr id="328" name="" descr="{&quot;isTemplate&quot;:true,&quot;type&quot;:&quot;text&quot;}"/>
           <p:cNvSpPr txBox="1"/>
           <p:nvPr/>
         </p:nvSpPr>
@@ -15203,7 +15451,7 @@
   <p:cSld>
     <p:spTree>
       <p:nvGrpSpPr>
-        <p:cNvPr id="325" name="" descr="&lt;Slide style={{ width: '1280px', height: '720px', background: '#FBFCFA', position: 'relative', padding: '32px 64px', boxSizing: 'border-box', display: 'flex', flexDirection: 'column' }}&gt;&#10;  &lt;div style={{ flexShrink: 0 }}&gt;&#10;    &lt;div style={{ color: '#BD9B56', fontSize: 13, letterSpacing: '0.25em', marginBottom: 6 }}&gt;02 · 技术构建过程&lt;/div&gt;&#10;    &lt;h2 style={{ fontSize: 30, fontWeight: 'bold', color: '#172133', margin: 0, lineHeight: 1.3 }}&gt;数据库设计：15+ 张表承载整个社区&lt;/h2&gt;&#10;    &lt;div style={{ fontSize: 14, color: '#6b7075', marginTop: 6 }}&gt;数据库是系统地基，通过外键建立完整 ER 关系，覆盖社区到知识库的全部实体&lt;/div&gt;&#10;  &lt;/div&gt;&#10;  &lt;div style={{ flex: 1, display: 'flex', alignItems: 'center', minHeight: 0, gap: 28 }}&gt;&#10;    &lt;div style={{ flex: '0 0 320px', background: 'linear-gradient(135deg, #172133 0%, #22395E 100%)', borderRadius: 12, padding: '24px 24px', color: '#FBFCFA' }}&gt;&#10;      &lt;div style={{ color: '#BD9B56', fontSize: 12, letterSpacing: '0.25em', marginBottom: 12 }}&gt;CORE ENTITIES&lt;/div&gt;&#10;      &lt;div style={{ fontSize: 14, color: 'rgba(251,252,250,0.9)', lineHeight: 1.9 }}&gt;&#10;        community 社区&lt;br/&gt;&#10;        building 楼栋（8）&lt;br/&gt;&#10;        house 房屋（1664）&lt;br/&gt;&#10;        user 用户（275）&lt;br/&gt;&#10;        house_binding 房屋绑定&lt;br/&gt;&#10;        worker 物业人员（75）&lt;br/&gt;&#10;        repair_order 工单&lt;br/&gt;&#10;        fee_bill 账单（746）&lt;br/&gt;&#10;        notice 公告（24）&lt;br/&gt;&#10;        conversation / message&lt;br/&gt;&#10;        agent_trace 追踪&lt;br/&gt;&#10;        &lt;span style={{ color: '#BD9B56' }}&gt;knowledge_document / chunk&lt;/span&gt;&#10;      &lt;/div&gt;&#10;    &lt;/div&gt;&#10;    &lt;div style={{ flex: 1, background: '#fff', borderRadius: 12, padding: '20px 22px', boxShadow: '0 6px 24px rgba(23,33,51,0.08)' }}&gt;&#10;      &lt;svg width=&quot;560&quot; height=&quot;470&quot; viewBox=&quot;0 0 560 470&quot;&gt;&#10;        &lt;g fontFamily=&quot;Inter, sans-serif&quot;&gt;&#10;          &lt;rect x=&quot;14&quot; y=&quot;14&quot; width=&quot;150&quot; height=&quot;50&quot; rx=&quot;6&quot; fill=&quot;rgba(34,57,94,0.08)&quot; stroke=&quot;#22395E&quot; strokeWidth=&quot;1.5&quot; /&gt;&#10;          &lt;text x=&quot;89&quot; y=&quot;44&quot; textAnchor=&quot;middle&quot; fontSize=&quot;14&quot; fontWeight=&quot;bold&quot; fill=&quot;#172133&quot;&gt;community&lt;/text&gt;&#10;          &lt;line x1=&quot;164&quot; y1=&quot;39&quot; x2=&quot;206&quot; y2=&quot;39&quot; stroke=&quot;#BD9B56&quot; strokeWidth=&quot;1.5&quot; /&gt;&#10;          &lt;rect x=&quot;210&quot; y=&quot;14&quot; width=&quot;150&quot; height=&quot;50&quot; rx=&quot;6&quot; fill=&quot;rgba(34,57,94,0.08)&quot; stroke=&quot;#22395E&quot; strokeWidth=&quot;1.5&quot; /&gt;&#10;          &lt;text x=&quot;285&quot; y=&quot;44&quot; textAnchor=&quot;middle&quot; fontSize=&quot;14&quot; fontWeight=&quot;bold&quot; fill=&quot;#172133&quot;&gt;building ×8&lt;/text&gt;&#10;          &lt;line x1=&quot;360&quot; y1=&quot;39&quot; x2=&quot;402&quot; y2=&quot;39&quot; stroke=&quot;#BD9B56&quot; strokeWidth=&quot;1.5&quot; /&gt;&#10;          &lt;rect x=&quot;406&quot; y=&quot;14&quot; width=&quot;150&quot; height=&quot;50&quot; rx=&quot;6&quot; fill=&quot;rgba(34,57,94,0.08)&quot; stroke=&quot;#22395E&quot; strokeWidth=&quot;1.5&quot; /&gt;&#10;          &lt;text x=&quot;481&quot; y=&quot;44&quot; textAnchor=&quot;middle&quot; fontSize=&quot;14&quot; fontWeight=&quot;bold&quot; fill=&quot;#172133&quot;&gt;house ×1664&lt;/text&gt;&#10;          &lt;line x1=&quot;285&quot; y1=&quot;64&quot; x2=&quot;285&quot; y2=&quot;104&quot; stroke=&quot;#BD9B56&quot; strokeWidth=&quot;1.5&quot; /&gt;&#10;          &lt;rect x=&quot;210&quot; y=&quot;108&quot; width=&quot;150&quot; height=&quot;50&quot; rx=&quot;6&quot; fill=&quot;rgba(189,155,86,0.10)&quot; stroke=&quot;#BD9B56&quot; strokeWidth=&quot;1.5&quot; /&gt;&#10;          &lt;text x=&quot;285&quot; y=&quot;138&quot; textAnchor=&quot;middle&quot; fontSize=&quot;14&quot; fontWeight=&quot;bold&quot; fill=&quot;#172133&quot;&gt;user ×275&lt;/text&gt;&#10;          &lt;line x1=&quot;210&quot; y1=&quot;133&quot; x2=&quot;164&quot; y2=&quot;133&quot; stroke=&quot;#BD9B56&quot; strokeWidth=&quot;1.5&quot; /&gt;&#10;          &lt;rect x=&quot;14&quot; y=&quot;108&quot; width=&quot;150&quot; height=&quot;50&quot; rx=&quot;6&quot; fill=&quot;rgba(189,155,86,0.10)&quot; stroke=&quot;#BD9B56&quot; strokeWidth=&quot;1.5&quot; /&gt;&#10;          &lt;text x=&quot;89&quot; y=&quot;138&quot; textAnchor=&quot;middle&quot; fontSize=&quot;14&quot; fontWeight=&quot;bold&quot; fill=&quot;#172133&quot;&gt;house_binding&lt;/text&gt;&#10;          &lt;line x1=&quot;285&quot; y1=&quot;158&quot; x2=&quot;285&quot; y2=&quot;198&quot; stroke=&quot;#BD9B56&quot; strokeWidth=&quot;1.5&quot; /&gt;&#10;          &lt;rect x=&quot;210&quot; y=&quot;202&quot; width=&quot;150&quot; height=&quot;50&quot; rx=&quot;6&quot; fill=&quot;rgba(34,57,94,0.08)&quot; stroke=&quot;#22395E&quot; strokeWidth=&quot;1.5&quot; /&gt;&#10;          &lt;text x=&quot;285&quot; y=&quot;232&quot; textAnchor=&quot;middle&quot; fontSize=&quot;14&quot; fontWeight=&quot;bold&quot; fill=&quot;#172133&quot;&gt;worker ×75&lt;/text&gt;&#10;          &lt;line x1=&quot;285&quot; y1=&quot;252&quot; x2=&quot;285&quot; y2=&quot;292&quot; stroke=&quot;#BD9B56&quot; strokeWidth=&quot;1.5&quot; /&gt;&#10;          &lt;rect x=&quot;160&quot; y=&quot;296&quot; width=&quot;130&quot; height=&quot;50&quot; rx=&quot;6&quot; fill=&quot;rgba(34,57,94,0.08)&quot; stroke=&quot;#22395E&quot; strokeWidth=&quot;1.5&quot; /&gt;&#10;          &lt;text x=&quot;225&quot; y=&quot;326&quot; textAnchor=&quot;middle&quot; fontSize=&quot;13&quot; fontWeight=&quot;bold&quot; fill=&quot;#172133&quot;&gt;repair_order&lt;/text&gt;&#10;          &lt;rect x=&quot;306&quot; y=&quot;296&quot; width=&quot;130&quot; height=&quot;50&quot; rx=&quot;6&quot; fill=&quot;rgba(34,57,94,0.08)&quot; stroke=&quot;#22395E&quot; strokeWidth=&quot;1.5&quot; /&gt;&#10;          &lt;text x=&quot;371&quot; y=&quot;326&quot; textAnchor=&quot;middle&quot; fontSize=&quot;13&quot; fontWeight=&quot;bold&quot; fill=&quot;#172133&quot;&gt;fee_bill ×746&lt;/text&gt;&#10;          &lt;line x1=&quot;225&quot; y1=&quot;346&quot; x2=&quot;225&quot; y2=&quot;386&quot; stroke=&quot;#BD9B56&quot; strokeWidth=&quot;1.5&quot; /&gt;&#10;          &lt;rect x=&quot;160&quot; y=&quot;390&quot; width=&quot;130&quot; height=&quot;50&quot; rx=&quot;6&quot; fill=&quot;rgba(34,57,94,0.08)&quot; stroke=&quot;#22395E&quot; strokeWidth=&quot;1.5&quot; /&gt;&#10;          &lt;text x=&quot;225&quot; y=&quot;420&quot; textAnchor=&quot;middle&quot; fontSize=&quot;13&quot; fontWeight=&quot;bold&quot; fill=&quot;#172133&quot;&gt;notice ×24&lt;/text&gt;&#10;          &lt;rect x=&quot;306&quot; y=&quot;390&quot; width=&quot;130&quot; height=&quot;50&quot; rx=&quot;6&quot; fill=&quot;#172133&quot; stroke=&quot;#BD9B56&quot; strokeWidth=&quot;1.5&quot; /&gt;&#10;          &lt;text x=&quot;371&quot; y=&quot;416&quot; textAnchor=&quot;middle&quot; fontSize=&quot;12&quot; fontWeight=&quot;bold&quot; fill=&quot;#BD9B56&quot;&gt;knowledge&lt;/text&gt;&#10;          &lt;text x=&quot;371&quot; y=&quot;434&quot; textAnchor=&quot;middle&quot; fontSize=&quot;10&quot; fill=&quot;#FBFCFA&quot;&gt;document + chunk&lt;/text&gt;&#10;        &lt;/g&gt;&#10;      &lt;/svg&gt;&#10;    &lt;/div&gt;&#10;  &lt;/div&gt;&#10;  &lt;div style={{ flexShrink: 0, height: 40, display: 'flex', alignItems: 'flex-end', justifyContent: 'space-between' }}&gt;&#10;    &lt;span style={{ color: '#BD9B56', fontSize: 12, letterSpacing: '0.1em' }}&gt;云溪花园 · 智慧社区&lt;/span&gt;&#10;    &lt;span style={{ color: '#a09b8c', fontSize: 12 }}&gt;07 / 15&lt;/span&gt;&#10;  &lt;/div&gt;&#10;&lt;/Slide&gt;"/>
+        <p:cNvPr id="329" name="" descr="&lt;Slide style={{ width: '1280px', height: '720px', background: '#FBFCFA', position: 'relative', padding: '32px 64px', boxSizing: 'border-box', display: 'flex', flexDirection: 'column' }}&gt;&#10;  &lt;div style={{ flexShrink: 0 }}&gt;&#10;    &lt;div style={{ color: '#BD9B56', fontSize: 13, letterSpacing: '0.25em', marginBottom: 6 }}&gt;02 · 技术构建过程&lt;/div&gt;&#10;    &lt;h2 style={{ fontSize: 30, fontWeight: 'bold', color: '#172133', margin: 0, lineHeight: 1.3 }}&gt;数据库设计：15+ 张表承载整个社区&lt;/h2&gt;&#10;    &lt;div style={{ fontSize: 14, color: '#6b7075', marginTop: 6 }}&gt;数据库是系统地基，通过外键建立完整 ER 关系，覆盖社区到知识库的全部实体&lt;/div&gt;&#10;  &lt;/div&gt;&#10;  &lt;div style={{ flex: 1, display: 'flex', alignItems: 'center', minHeight: 0, gap: 28 }}&gt;&#10;    &lt;div style={{ flex: '0 0 320px', background: 'linear-gradient(135deg, #172133 0%, #22395E 100%)', borderRadius: 12, padding: '24px 24px', color: '#FBFCFA' }}&gt;&#10;      &lt;div style={{ color: '#BD9B56', fontSize: 12, letterSpacing: '0.25em', marginBottom: 12 }}&gt;CORE ENTITIES&lt;/div&gt;&#10;      &lt;div style={{ fontSize: 14, color: 'rgba(251,252,250,0.9)', lineHeight: 1.9 }}&gt;&#10;        community 社区&lt;br/&gt;&#10;        building 楼栋（8）&lt;br/&gt;&#10;        house 房屋（1664）&lt;br/&gt;&#10;        user 用户（275）&lt;br/&gt;&#10;        house_binding 房屋绑定&lt;br/&gt;&#10;        worker 物业人员（75）&lt;br/&gt;&#10;        repair_order 工单&lt;br/&gt;&#10;        fee_bill 账单（746）&lt;br/&gt;&#10;        notice 公告（24）&lt;br/&gt;&#10;        conversation / message&lt;br/&gt;&#10;        agent_trace 追踪&lt;br/&gt;&#10;        &lt;span style={{ color: '#BD9B56' }}&gt;knowledge_document / chunk&lt;/span&gt;&#10;      &lt;/div&gt;&#10;    &lt;/div&gt;&#10;    &lt;div style={{ flex: 1, background: '#fff', borderRadius: 12, padding: '20px 22px', boxShadow: '0 6px 24px rgba(23,33,51,0.08)' }}&gt;&#10;      &lt;svg width=&quot;560&quot; height=&quot;470&quot; viewBox=&quot;0 0 560 470&quot;&gt;&#10;        &lt;g fontFamily=&quot;Inter, sans-serif&quot;&gt;&#10;          &lt;rect x=&quot;14&quot; y=&quot;14&quot; width=&quot;150&quot; height=&quot;50&quot; rx=&quot;6&quot; fill=&quot;rgba(34,57,94,0.08)&quot; stroke=&quot;#22395E&quot; strokeWidth=&quot;1.5&quot; /&gt;&#10;          &lt;text x=&quot;89&quot; y=&quot;44&quot; textAnchor=&quot;middle&quot; fontSize=&quot;14&quot; fontWeight=&quot;bold&quot; fill=&quot;#172133&quot;&gt;community&lt;/text&gt;&#10;          &lt;line x1=&quot;164&quot; y1=&quot;39&quot; x2=&quot;206&quot; y2=&quot;39&quot; stroke=&quot;#BD9B56&quot; strokeWidth=&quot;1.5&quot; /&gt;&#10;          &lt;rect x=&quot;210&quot; y=&quot;14&quot; width=&quot;150&quot; height=&quot;50&quot; rx=&quot;6&quot; fill=&quot;rgba(34,57,94,0.08)&quot; stroke=&quot;#22395E&quot; strokeWidth=&quot;1.5&quot; /&gt;&#10;          &lt;text x=&quot;285&quot; y=&quot;44&quot; textAnchor=&quot;middle&quot; fontSize=&quot;14&quot; fontWeight=&quot;bold&quot; fill=&quot;#172133&quot;&gt;building ×8&lt;/text&gt;&#10;          &lt;line x1=&quot;360&quot; y1=&quot;39&quot; x2=&quot;402&quot; y2=&quot;39&quot; stroke=&quot;#BD9B56&quot; strokeWidth=&quot;1.5&quot; /&gt;&#10;          &lt;rect x=&quot;406&quot; y=&quot;14&quot; width=&quot;150&quot; height=&quot;50&quot; rx=&quot;6&quot; fill=&quot;rgba(34,57,94,0.08)&quot; stroke=&quot;#22395E&quot; strokeWidth=&quot;1.5&quot; /&gt;&#10;          &lt;text x=&quot;481&quot; y=&quot;44&quot; textAnchor=&quot;middle&quot; fontSize=&quot;14&quot; fontWeight=&quot;bold&quot; fill=&quot;#172133&quot;&gt;house ×1664&lt;/text&gt;&#10;          &lt;line x1=&quot;285&quot; y1=&quot;64&quot; x2=&quot;285&quot; y2=&quot;104&quot; stroke=&quot;#BD9B56&quot; strokeWidth=&quot;1.5&quot; /&gt;&#10;          &lt;rect x=&quot;210&quot; y=&quot;108&quot; width=&quot;150&quot; height=&quot;50&quot; rx=&quot;6&quot; fill=&quot;rgba(189,155,86,0.10)&quot; stroke=&quot;#BD9B56&quot; strokeWidth=&quot;1.5&quot; /&gt;&#10;          &lt;text x=&quot;285&quot; y=&quot;138&quot; textAnchor=&quot;middle&quot; fontSize=&quot;14&quot; fontWeight=&quot;bold&quot; fill=&quot;#172133&quot;&gt;user ×275&lt;/text&gt;&#10;          &lt;line x1=&quot;210&quot; y1=&quot;133&quot; x2=&quot;164&quot; y2=&quot;133&quot; stroke=&quot;#BD9B56&quot; strokeWidth=&quot;1.5&quot; /&gt;&#10;          &lt;rect x=&quot;14&quot; y=&quot;108&quot; width=&quot;150&quot; height=&quot;50&quot; rx=&quot;6&quot; fill=&quot;rgba(189,155,86,0.10)&quot; stroke=&quot;#BD9B56&quot; strokeWidth=&quot;1.5&quot; /&gt;&#10;          &lt;text x=&quot;89&quot; y=&quot;138&quot; textAnchor=&quot;middle&quot; fontSize=&quot;14&quot; fontWeight=&quot;bold&quot; fill=&quot;#172133&quot;&gt;house_binding&lt;/text&gt;&#10;          &lt;line x1=&quot;285&quot; y1=&quot;158&quot; x2=&quot;285&quot; y2=&quot;198&quot; stroke=&quot;#BD9B56&quot; strokeWidth=&quot;1.5&quot; /&gt;&#10;          &lt;rect x=&quot;210&quot; y=&quot;202&quot; width=&quot;150&quot; height=&quot;50&quot; rx=&quot;6&quot; fill=&quot;rgba(34,57,94,0.08)&quot; stroke=&quot;#22395E&quot; strokeWidth=&quot;1.5&quot; /&gt;&#10;          &lt;text x=&quot;285&quot; y=&quot;232&quot; textAnchor=&quot;middle&quot; fontSize=&quot;14&quot; fontWeight=&quot;bold&quot; fill=&quot;#172133&quot;&gt;worker ×75&lt;/text&gt;&#10;          &lt;line x1=&quot;285&quot; y1=&quot;252&quot; x2=&quot;285&quot; y2=&quot;292&quot; stroke=&quot;#BD9B56&quot; strokeWidth=&quot;1.5&quot; /&gt;&#10;          &lt;rect x=&quot;160&quot; y=&quot;296&quot; width=&quot;130&quot; height=&quot;50&quot; rx=&quot;6&quot; fill=&quot;rgba(34,57,94,0.08)&quot; stroke=&quot;#22395E&quot; strokeWidth=&quot;1.5&quot; /&gt;&#10;          &lt;text x=&quot;225&quot; y=&quot;326&quot; textAnchor=&quot;middle&quot; fontSize=&quot;13&quot; fontWeight=&quot;bold&quot; fill=&quot;#172133&quot;&gt;repair_order&lt;/text&gt;&#10;          &lt;rect x=&quot;306&quot; y=&quot;296&quot; width=&quot;130&quot; height=&quot;50&quot; rx=&quot;6&quot; fill=&quot;rgba(34,57,94,0.08)&quot; stroke=&quot;#22395E&quot; strokeWidth=&quot;1.5&quot; /&gt;&#10;          &lt;text x=&quot;371&quot; y=&quot;326&quot; textAnchor=&quot;middle&quot; fontSize=&quot;13&quot; fontWeight=&quot;bold&quot; fill=&quot;#172133&quot;&gt;fee_bill ×746&lt;/text&gt;&#10;          &lt;line x1=&quot;225&quot; y1=&quot;346&quot; x2=&quot;225&quot; y2=&quot;386&quot; stroke=&quot;#BD9B56&quot; strokeWidth=&quot;1.5&quot; /&gt;&#10;          &lt;rect x=&quot;160&quot; y=&quot;390&quot; width=&quot;130&quot; height=&quot;50&quot; rx=&quot;6&quot; fill=&quot;rgba(34,57,94,0.08)&quot; stroke=&quot;#22395E&quot; strokeWidth=&quot;1.5&quot; /&gt;&#10;          &lt;text x=&quot;225&quot; y=&quot;420&quot; textAnchor=&quot;middle&quot; fontSize=&quot;13&quot; fontWeight=&quot;bold&quot; fill=&quot;#172133&quot;&gt;notice ×24&lt;/text&gt;&#10;          &lt;rect x=&quot;306&quot; y=&quot;390&quot; width=&quot;130&quot; height=&quot;50&quot; rx=&quot;6&quot; fill=&quot;#172133&quot; stroke=&quot;#BD9B56&quot; strokeWidth=&quot;1.5&quot; /&gt;&#10;          &lt;text x=&quot;371&quot; y=&quot;416&quot; textAnchor=&quot;middle&quot; fontSize=&quot;12&quot; fontWeight=&quot;bold&quot; fill=&quot;#BD9B56&quot;&gt;knowledge&lt;/text&gt;&#10;          &lt;text x=&quot;371&quot; y=&quot;434&quot; textAnchor=&quot;middle&quot; fontSize=&quot;10&quot; fill=&quot;#FBFCFA&quot;&gt;document + chunk&lt;/text&gt;&#10;        &lt;/g&gt;&#10;      &lt;/svg&gt;&#10;    &lt;/div&gt;&#10;  &lt;/div&gt;&#10;  &lt;div style={{ flexShrink: 0, height: 40, display: 'flex', alignItems: 'flex-end', justifyContent: 'space-between' }}&gt;&#10;    &lt;span style={{ color: '#BD9B56', fontSize: 12, letterSpacing: '0.1em' }}&gt;云溪花园 · 智慧社区&lt;/span&gt;&#10;    &lt;span style={{ color: '#a09b8c', fontSize: 12 }}&gt;07 / 15&lt;/span&gt;&#10;  &lt;/div&gt;&#10;&lt;/Slide&gt;"/>
         <p:cNvGrpSpPr/>
         <p:nvPr/>
       </p:nvGrpSpPr>
@@ -15217,7 +15465,7 @@
       </p:grpSpPr>
       <p:sp>
         <p:nvSpPr>
-          <p:cNvPr id="326" name=""/>
+          <p:cNvPr id="330" name=""/>
           <p:cNvSpPr/>
           <p:nvPr/>
         </p:nvSpPr>
@@ -15241,7 +15489,7 @@
       </p:sp>
       <p:sp>
         <p:nvSpPr>
-          <p:cNvPr id="327" name="" descr="{&quot;isTemplate&quot;:true,&quot;type&quot;:&quot;text&quot;}"/>
+          <p:cNvPr id="331" name="" descr="{&quot;isTemplate&quot;:true,&quot;type&quot;:&quot;text&quot;}"/>
           <p:cNvSpPr txBox="1"/>
           <p:nvPr/>
         </p:nvSpPr>
@@ -15286,7 +15534,7 @@
       </p:sp>
       <p:sp>
         <p:nvSpPr>
-          <p:cNvPr id="328" name="" descr="{&quot;isTemplate&quot;:true,&quot;type&quot;:&quot;text&quot;}"/>
+          <p:cNvPr id="332" name="" descr="{&quot;isTemplate&quot;:true,&quot;type&quot;:&quot;text&quot;}"/>
           <p:cNvSpPr txBox="1"/>
           <p:nvPr/>
         </p:nvSpPr>
@@ -15341,7 +15589,7 @@
       </p:sp>
       <p:sp>
         <p:nvSpPr>
-          <p:cNvPr id="329" name="" descr="{&quot;isTemplate&quot;:true,&quot;type&quot;:&quot;text&quot;}"/>
+          <p:cNvPr id="333" name="" descr="{&quot;isTemplate&quot;:true,&quot;type&quot;:&quot;text&quot;}"/>
           <p:cNvSpPr txBox="1"/>
           <p:nvPr/>
         </p:nvSpPr>
@@ -15396,7 +15644,7 @@
       </p:sp>
       <p:sp>
         <p:nvSpPr>
-          <p:cNvPr id="330" name=""/>
+          <p:cNvPr id="334" name=""/>
           <p:cNvSpPr/>
           <p:nvPr/>
         </p:nvSpPr>
@@ -15430,7 +15678,7 @@
       </p:sp>
       <p:sp>
         <p:nvSpPr>
-          <p:cNvPr id="331" name="" descr="{&quot;isTemplate&quot;:true,&quot;type&quot;:&quot;text&quot;}"/>
+          <p:cNvPr id="335" name="" descr="{&quot;isTemplate&quot;:true,&quot;type&quot;:&quot;text&quot;}"/>
           <p:cNvSpPr txBox="1"/>
           <p:nvPr/>
         </p:nvSpPr>
@@ -15465,7 +15713,7 @@
       </p:sp>
       <p:sp>
         <p:nvSpPr>
-          <p:cNvPr id="332" name="" descr="{&quot;isTemplate&quot;:true,&quot;type&quot;:&quot;text&quot;}"/>
+          <p:cNvPr id="336" name="" descr="{&quot;isTemplate&quot;:true,&quot;type&quot;:&quot;text&quot;}"/>
           <p:cNvSpPr txBox="1"/>
           <p:nvPr/>
         </p:nvSpPr>
@@ -15486,7 +15734,7 @@
       </p:sp>
       <p:sp>
         <p:nvSpPr>
-          <p:cNvPr id="333" name="" descr="{&quot;isTemplate&quot;:true,&quot;type&quot;:&quot;text&quot;}"/>
+          <p:cNvPr id="337" name="" descr="{&quot;isTemplate&quot;:true,&quot;type&quot;:&quot;text&quot;}"/>
           <p:cNvSpPr txBox="1"/>
           <p:nvPr/>
         </p:nvSpPr>
@@ -15507,7 +15755,7 @@
       </p:sp>
       <p:sp>
         <p:nvSpPr>
-          <p:cNvPr id="334" name="" descr="{&quot;isTemplate&quot;:true,&quot;type&quot;:&quot;text&quot;}"/>
+          <p:cNvPr id="338" name="" descr="{&quot;isTemplate&quot;:true,&quot;type&quot;:&quot;text&quot;}"/>
           <p:cNvSpPr txBox="1"/>
           <p:nvPr/>
         </p:nvSpPr>
@@ -15528,7 +15776,7 @@
       </p:sp>
       <p:sp>
         <p:nvSpPr>
-          <p:cNvPr id="335" name="" descr="{&quot;isTemplate&quot;:true,&quot;type&quot;:&quot;text&quot;}"/>
+          <p:cNvPr id="339" name="" descr="{&quot;isTemplate&quot;:true,&quot;type&quot;:&quot;text&quot;}"/>
           <p:cNvSpPr txBox="1"/>
           <p:nvPr/>
         </p:nvSpPr>
@@ -15549,7 +15797,7 @@
       </p:sp>
       <p:sp>
         <p:nvSpPr>
-          <p:cNvPr id="336" name="" descr="{&quot;isTemplate&quot;:true,&quot;type&quot;:&quot;text&quot;}"/>
+          <p:cNvPr id="340" name="" descr="{&quot;isTemplate&quot;:true,&quot;type&quot;:&quot;text&quot;}"/>
           <p:cNvSpPr txBox="1"/>
           <p:nvPr/>
         </p:nvSpPr>
@@ -15570,7 +15818,7 @@
       </p:sp>
       <p:sp>
         <p:nvSpPr>
-          <p:cNvPr id="337" name="" descr="{&quot;isTemplate&quot;:true,&quot;type&quot;:&quot;text&quot;}"/>
+          <p:cNvPr id="341" name="" descr="{&quot;isTemplate&quot;:true,&quot;type&quot;:&quot;text&quot;}"/>
           <p:cNvSpPr txBox="1"/>
           <p:nvPr/>
         </p:nvSpPr>
@@ -15591,7 +15839,7 @@
       </p:sp>
       <p:sp>
         <p:nvSpPr>
-          <p:cNvPr id="338" name="" descr="{&quot;isTemplate&quot;:true,&quot;type&quot;:&quot;text&quot;}"/>
+          <p:cNvPr id="342" name="" descr="{&quot;isTemplate&quot;:true,&quot;type&quot;:&quot;text&quot;}"/>
           <p:cNvSpPr txBox="1"/>
           <p:nvPr/>
         </p:nvSpPr>
@@ -15612,7 +15860,7 @@
       </p:sp>
       <p:sp>
         <p:nvSpPr>
-          <p:cNvPr id="339" name="" descr="{&quot;isTemplate&quot;:true,&quot;type&quot;:&quot;text&quot;}"/>
+          <p:cNvPr id="343" name="" descr="{&quot;isTemplate&quot;:true,&quot;type&quot;:&quot;text&quot;}"/>
           <p:cNvSpPr txBox="1"/>
           <p:nvPr/>
         </p:nvSpPr>
@@ -15633,7 +15881,7 @@
       </p:sp>
       <p:sp>
         <p:nvSpPr>
-          <p:cNvPr id="340" name="" descr="{&quot;isTemplate&quot;:true,&quot;type&quot;:&quot;text&quot;}"/>
+          <p:cNvPr id="344" name="" descr="{&quot;isTemplate&quot;:true,&quot;type&quot;:&quot;text&quot;}"/>
           <p:cNvSpPr txBox="1"/>
           <p:nvPr/>
         </p:nvSpPr>
@@ -15654,7 +15902,7 @@
       </p:sp>
       <p:sp>
         <p:nvSpPr>
-          <p:cNvPr id="341" name="" descr="{&quot;isTemplate&quot;:true,&quot;type&quot;:&quot;text&quot;}"/>
+          <p:cNvPr id="345" name="" descr="{&quot;isTemplate&quot;:true,&quot;type&quot;:&quot;text&quot;}"/>
           <p:cNvSpPr txBox="1"/>
           <p:nvPr/>
         </p:nvSpPr>
@@ -15675,7 +15923,7 @@
       </p:sp>
       <p:sp>
         <p:nvSpPr>
-          <p:cNvPr id="342" name="" descr="{&quot;isTemplate&quot;:true,&quot;type&quot;:&quot;text&quot;}"/>
+          <p:cNvPr id="346" name="" descr="{&quot;isTemplate&quot;:true,&quot;type&quot;:&quot;text&quot;}"/>
           <p:cNvSpPr txBox="1"/>
           <p:nvPr/>
         </p:nvSpPr>
@@ -15696,7 +15944,7 @@
       </p:sp>
       <p:sp>
         <p:nvSpPr>
-          <p:cNvPr id="343" name="" descr="{&quot;isTemplate&quot;:true,&quot;type&quot;:&quot;text&quot;}"/>
+          <p:cNvPr id="347" name="" descr="{&quot;isTemplate&quot;:true,&quot;type&quot;:&quot;text&quot;}"/>
           <p:cNvSpPr txBox="1"/>
           <p:nvPr/>
         </p:nvSpPr>
@@ -15731,7 +15979,7 @@
       </p:sp>
       <p:sp>
         <p:nvSpPr>
-          <p:cNvPr id="344" name=""/>
+          <p:cNvPr id="348" name=""/>
           <p:cNvSpPr/>
           <p:nvPr/>
         </p:nvSpPr>
@@ -15764,7 +16012,7 @@
       </p:sp>
       <p:pic>
         <p:nvPicPr>
-          <p:cNvPr id="345" name=""/>
+          <p:cNvPr id="349" name=""/>
           <p:cNvPicPr>
             <a:picLocks noChangeAspect="1"/>
           </p:cNvPicPr>
@@ -15795,7 +16043,7 @@
       </p:pic>
       <p:sp>
         <p:nvSpPr>
-          <p:cNvPr id="346" name="" descr="{&quot;isTemplate&quot;:true,&quot;type&quot;:&quot;text&quot;}"/>
+          <p:cNvPr id="350" name="" descr="{&quot;isTemplate&quot;:true,&quot;type&quot;:&quot;text&quot;}"/>
           <p:cNvSpPr txBox="1"/>
           <p:nvPr/>
         </p:nvSpPr>
@@ -15850,7 +16098,7 @@
       </p:sp>
       <p:sp>
         <p:nvSpPr>
-          <p:cNvPr id="347" name="" descr="{&quot;isTemplate&quot;:true,&quot;type&quot;:&quot;text&quot;}"/>
+          <p:cNvPr id="351" name="" descr="{&quot;isTemplate&quot;:true,&quot;type&quot;:&quot;text&quot;}"/>
           <p:cNvSpPr txBox="1"/>
           <p:nvPr/>
         </p:nvSpPr>
@@ -15893,7 +16141,7 @@
   <p:cSld>
     <p:spTree>
       <p:nvGrpSpPr>
-        <p:cNvPr id="348" name="" descr="&lt;Slide style={{ width: '1280px', height: '720px', background: '#FBFCFA', position: 'relative', padding: '40px 64px', boxSizing: 'border-box', display: 'flex', flexDirection: 'column' }}&gt;&#10;  &lt;div style={{ flexShrink: 0 }}&gt;&#10;    &lt;div style={{ color: '#BD9B56', fontSize: 13, letterSpacing: '0.25em', marginBottom: 8 }}&gt;02 · 技术构建过程&lt;/div&gt;&#10;    &lt;h2 style={{ fontSize: 30, fontWeight: 'bold', color: '#172133', margin: 0, lineHeight: 1.3 }}&gt;后端分层 + 前端三端一体&lt;/h2&gt;&#10;  &lt;/div&gt;&#10;  &lt;div style={{ flex: 1, display: 'flex', alignItems: 'center', gap: 32 }}&gt;&#10;    &lt;div style={{ flex: 1, display: 'flex', flexDirection: 'column', gap: 16 }}&gt;&#10;      &lt;div style={{ background: '#fff', borderRadius: 10, padding: '18px 22px', boxShadow: '0 4px 16px rgba(23,33,51,0.06)' }}&gt;&#10;        &lt;div style={{ fontSize: 17, fontWeight: 'bold', color: '#172133', marginBottom: 6 }}&gt;后端：FastAPI 三层架构&lt;/div&gt;&#10;        &lt;p style={{ fontSize: 14, color: '#5F5E5A', margin: 0, lineHeight: 1.6 }}&gt;API 路由层 → Service 业务层 → Repository 数据层。业务与数据解耦，AI 逻辑不混入业务代码。&lt;/p&gt;&#10;      &lt;/div&gt;&#10;      &lt;div style={{ background: '#fff', borderRadius: 10, padding: '18px 22px', boxShadow: '0 4px 16px rgba(23,33,51,0.06)' }}&gt;&#10;        &lt;div style={{ fontSize: 17, fontWeight: 'bold', color: '#172133', marginBottom: 6 }}&gt;派单算法&lt;/div&gt;&#10;        &lt;p style={{ fontSize: 14, color: '#5F5E5A', margin: 0, lineHeight: 1.6 }}&gt;按「技能匹配 + 在岗状态 + 工号升序」自动选择维修师傅，无需人工指派，报修提交即自动派单。&lt;/p&gt;&#10;      &lt;/div&gt;&#10;      &lt;div style={{ background: '#fff', borderRadius: 10, padding: '18px 22px', boxShadow: '0 4px 16px rgba(23,33,51,0.06)' }}&gt;&#10;        &lt;div style={{ fontSize: 17, fontWeight: 'bold', color: '#172133', marginBottom: 6 }}&gt;消息通知&lt;/div&gt;&#10;        &lt;p style={{ fontSize: 14, color: '#5F5E5A', margin: 0, lineHeight: 1.6 }}&gt;派单、完成、答复、巡检异常等事件全链路实时通知相关角色，保证业务协同不遗漏。&lt;/p&gt;&#10;      &lt;/div&gt;&#10;    &lt;/div&gt;&#10;    &lt;div style={{ flex: 1, background: 'linear-gradient(135deg, #172133 0%, #22395E 100%)', borderRadius: 12, padding: '26px 26px', color: '#FBFCFA' }}&gt;&#10;      &lt;div style={{ color: '#BD9B56', fontSize: 13, letterSpacing: '0.25em', marginBottom: 18 }}&gt;FRONTEND · 三端&lt;/div&gt;&#10;      &lt;div style={{ display: 'flex', flexDirection: 'column', gap: 14 }}&gt;&#10;        &lt;div style={{ display: 'flex', alignItems: 'center', gap: 12, padding: '12px 16px', background: 'rgba(189,155,86,0.10)', borderRadius: 8 }}&gt;&#10;          &lt;span style={{ color: '#BD9B56', fontSize: 17, fontWeight: 'bold', minWidth: 64 }}&gt;业主端&lt;/span&gt;&#10;          &lt;span style={{ fontSize: 13, color: 'rgba(251,252,250,0.85)' }}&gt;AI 助手 · 报修 · 缴费 · 公告 · 问题上报&lt;/span&gt;&#10;        &lt;/div&gt;&#10;        &lt;div style={{ display: 'flex', alignItems: 'center', gap: 12, padding: '12px 16px', background: 'rgba(189,155,86,0.10)', borderRadius: 8 }}&gt;&#10;          &lt;span style={{ color: '#BD9B56', fontSize: 17, fontWeight: 'bold', minWidth: 64 }}&gt;物业端&lt;/span&gt;&#10;          &lt;span style={{ fontSize: 13, color: 'rgba(251,252,250,0.85)' }}&gt;工单管理 · 巡检 · 数据看板 · 知识审核&lt;/span&gt;&#10;        &lt;/div&gt;&#10;        &lt;div style={{ display: 'flex', alignItems: 'center', gap: 12, padding: '12px 16px', background: 'rgba(189,155,86,0.10)', borderRadius: 8 }}&gt;&#10;          &lt;span style={{ color: '#BD9B56', fontSize: 17, fontWeight: 'bold', minWidth: 64 }}&gt;维修端&lt;/span&gt;&#10;          &lt;span style={{ fontSize: 13, color: 'rgba(251,252,250,0.85)' }}&gt;接单 · 处理 · 消息 · 巡检任务&lt;/span&gt;&#10;        &lt;/div&gt;&#10;      &lt;/div&gt;&#10;      &lt;div style={{ marginTop: 20, paddingTop: 18, borderTop: '1px solid rgba(189,155,86,0.3)' }}&gt;&#10;        &lt;div style={{ fontSize: 13, color: 'rgba(251,252,250,0.8)', lineHeight: 1.7 }}&gt;&#10;          React + TypeScript + Tailwind&lt;br/&gt;JWT 鉴权 · 角色路由 · 支持 PWA 安装&lt;br/&gt;后端 113 测试 + 前端 30 测试全绿&#10;        &lt;/div&gt;&#10;      &lt;/div&gt;&#10;    &lt;/div&gt;&#10;  &lt;/div&gt;&#10;  &lt;div style={{ flexShrink: 0, height: 40, display: 'flex', alignItems: 'flex-end', justifyContent: 'space-between' }}&gt;&#10;    &lt;span style={{ color: '#BD9B56', fontSize: 12, letterSpacing: '0.1em' }}&gt;云溪花园 · 智慧社区&lt;/span&gt;&#10;    &lt;span style={{ color: '#a09b8c', fontSize: 12 }}&gt;08 / 15&lt;/span&gt;&#10;  &lt;/div&gt;&#10;&lt;/Slide&gt;"/>
+        <p:cNvPr id="352" name="" descr="&lt;Slide style={{ width: '1280px', height: '720px', background: '#FBFCFA', position: 'relative', padding: '40px 64px', boxSizing: 'border-box', display: 'flex', flexDirection: 'column' }}&gt;&#10;  &lt;div style={{ flexShrink: 0 }}&gt;&#10;    &lt;div style={{ color: '#BD9B56', fontSize: 13, letterSpacing: '0.25em', marginBottom: 8 }}&gt;02 · 技术构建过程&lt;/div&gt;&#10;    &lt;h2 style={{ fontSize: 30, fontWeight: 'bold', color: '#172133', margin: 0, lineHeight: 1.3 }}&gt;后端分层 + 前端三端一体&lt;/h2&gt;&#10;  &lt;/div&gt;&#10;  &lt;div style={{ flex: 1, display: 'flex', alignItems: 'center', gap: 32 }}&gt;&#10;    &lt;div style={{ flex: 1, display: 'flex', flexDirection: 'column', gap: 16 }}&gt;&#10;      &lt;div style={{ background: '#fff', borderRadius: 10, padding: '18px 22px', boxShadow: '0 4px 16px rgba(23,33,51,0.06)' }}&gt;&#10;        &lt;div style={{ fontSize: 17, fontWeight: 'bold', color: '#172133', marginBottom: 6 }}&gt;后端：FastAPI 三层架构&lt;/div&gt;&#10;        &lt;p style={{ fontSize: 14, color: '#5F5E5A', margin: 0, lineHeight: 1.6 }}&gt;API 路由层 → Service 业务层 → Repository 数据层。业务与数据解耦，AI 逻辑不混入业务代码。&lt;/p&gt;&#10;      &lt;/div&gt;&#10;      &lt;div style={{ background: '#fff', borderRadius: 10, padding: '18px 22px', boxShadow: '0 4px 16px rgba(23,33,51,0.06)' }}&gt;&#10;        &lt;div style={{ fontSize: 17, fontWeight: 'bold', color: '#172133', marginBottom: 6 }}&gt;派单算法&lt;/div&gt;&#10;        &lt;p style={{ fontSize: 14, color: '#5F5E5A', margin: 0, lineHeight: 1.6 }}&gt;按「技能匹配 + 在岗状态 + 工号升序」自动选择维修师傅，无需人工指派，报修提交即自动派单。&lt;/p&gt;&#10;      &lt;/div&gt;&#10;      &lt;div style={{ background: '#fff', borderRadius: 10, padding: '18px 22px', boxShadow: '0 4px 16px rgba(23,33,51,0.06)' }}&gt;&#10;        &lt;div style={{ fontSize: 17, fontWeight: 'bold', color: '#172133', marginBottom: 6 }}&gt;消息通知&lt;/div&gt;&#10;        &lt;p style={{ fontSize: 14, color: '#5F5E5A', margin: 0, lineHeight: 1.6 }}&gt;派单、完成、答复、巡检异常等事件全链路实时通知相关角色，保证业务协同不遗漏。&lt;/p&gt;&#10;      &lt;/div&gt;&#10;    &lt;/div&gt;&#10;    &lt;div style={{ flex: 1, background: 'linear-gradient(135deg, #172133 0%, #22395E 100%)', borderRadius: 12, padding: '26px 26px', color: '#FBFCFA' }}&gt;&#10;      &lt;div style={{ color: '#BD9B56', fontSize: 13, letterSpacing: '0.25em', marginBottom: 18 }}&gt;FRONTEND · 三端&lt;/div&gt;&#10;      &lt;div style={{ display: 'flex', flexDirection: 'column', gap: 14 }}&gt;&#10;        &lt;div style={{ display: 'flex', alignItems: 'center', gap: 12, padding: '12px 16px', background: 'rgba(189,155,86,0.10)', borderRadius: 8 }}&gt;&#10;          &lt;span style={{ color: '#BD9B56', fontSize: 17, fontWeight: 'bold', minWidth: 64 }}&gt;业主端&lt;/span&gt;&#10;          &lt;span style={{ fontSize: 13, color: 'rgba(251,252,250,0.85)' }}&gt;AI 助手 · 报修 · 缴费 · 公告 · 问题上报&lt;/span&gt;&#10;        &lt;/div&gt;&#10;        &lt;div style={{ display: 'flex', alignItems: 'center', gap: 12, padding: '12px 16px', background: 'rgba(189,155,86,0.10)', borderRadius: 8 }}&gt;&#10;          &lt;span style={{ color: '#BD9B56', fontSize: 17, fontWeight: 'bold', minWidth: 64 }}&gt;物业端&lt;/span&gt;&#10;          &lt;span style={{ fontSize: 13, color: 'rgba(251,252,250,0.85)' }}&gt;工单管理 · 巡检 · 数据看板 · 知识审核&lt;/span&gt;&#10;        &lt;/div&gt;&#10;        &lt;div style={{ display: 'flex', alignItems: 'center', gap: 12, padding: '12px 16px', background: 'rgba(189,155,86,0.10)', borderRadius: 8 }}&gt;&#10;          &lt;span style={{ color: '#BD9B56', fontSize: 17, fontWeight: 'bold', minWidth: 64 }}&gt;维修端&lt;/span&gt;&#10;          &lt;span style={{ fontSize: 13, color: 'rgba(251,252,250,0.85)' }}&gt;接单 · 处理 · 消息 · 巡检任务&lt;/span&gt;&#10;        &lt;/div&gt;&#10;      &lt;/div&gt;&#10;      &lt;div style={{ marginTop: 20, paddingTop: 18, borderTop: '1px solid rgba(189,155,86,0.3)' }}&gt;&#10;        &lt;div style={{ fontSize: 13, color: 'rgba(251,252,250,0.8)', lineHeight: 1.7 }}&gt;&#10;          React + TypeScript + Tailwind&lt;br/&gt;JWT 鉴权 · 角色路由 · 支持 PWA 安装&lt;br/&gt;后端 113 测试 + 前端 30 测试全绿&#10;        &lt;/div&gt;&#10;      &lt;/div&gt;&#10;    &lt;/div&gt;&#10;  &lt;/div&gt;&#10;  &lt;div style={{ flexShrink: 0, height: 40, display: 'flex', alignItems: 'flex-end', justifyContent: 'space-between' }}&gt;&#10;    &lt;span style={{ color: '#BD9B56', fontSize: 12, letterSpacing: '0.1em' }}&gt;云溪花园 · 智慧社区&lt;/span&gt;&#10;    &lt;span style={{ color: '#a09b8c', fontSize: 12 }}&gt;08 / 15&lt;/span&gt;&#10;  &lt;/div&gt;&#10;&lt;/Slide&gt;"/>
         <p:cNvGrpSpPr/>
         <p:nvPr/>
       </p:nvGrpSpPr>
@@ -15907,7 +16155,7 @@
       </p:grpSpPr>
       <p:sp>
         <p:nvSpPr>
-          <p:cNvPr id="349" name=""/>
+          <p:cNvPr id="353" name=""/>
           <p:cNvSpPr/>
           <p:nvPr/>
         </p:nvSpPr>
@@ -15931,7 +16179,7 @@
       </p:sp>
       <p:sp>
         <p:nvSpPr>
-          <p:cNvPr id="350" name="" descr="{&quot;isTemplate&quot;:true,&quot;type&quot;:&quot;text&quot;}"/>
+          <p:cNvPr id="354" name="" descr="{&quot;isTemplate&quot;:true,&quot;type&quot;:&quot;text&quot;}"/>
           <p:cNvSpPr txBox="1"/>
           <p:nvPr/>
         </p:nvSpPr>
@@ -15976,7 +16224,7 @@
       </p:sp>
       <p:sp>
         <p:nvSpPr>
-          <p:cNvPr id="351" name="" descr="{&quot;isTemplate&quot;:true,&quot;type&quot;:&quot;text&quot;}"/>
+          <p:cNvPr id="355" name="" descr="{&quot;isTemplate&quot;:true,&quot;type&quot;:&quot;text&quot;}"/>
           <p:cNvSpPr txBox="1"/>
           <p:nvPr/>
         </p:nvSpPr>
@@ -16031,7 +16279,7 @@
       </p:sp>
       <p:sp>
         <p:nvSpPr>
-          <p:cNvPr id="352" name=""/>
+          <p:cNvPr id="356" name=""/>
           <p:cNvSpPr/>
           <p:nvPr/>
         </p:nvSpPr>
@@ -16064,7 +16312,7 @@
       </p:sp>
       <p:sp>
         <p:nvSpPr>
-          <p:cNvPr id="353" name="" descr="{&quot;isTemplate&quot;:true,&quot;type&quot;:&quot;text&quot;}"/>
+          <p:cNvPr id="357" name="" descr="{&quot;isTemplate&quot;:true,&quot;type&quot;:&quot;text&quot;}"/>
           <p:cNvSpPr txBox="1"/>
           <p:nvPr/>
         </p:nvSpPr>
@@ -16119,7 +16367,7 @@
       </p:sp>
       <p:sp>
         <p:nvSpPr>
-          <p:cNvPr id="354" name="" descr="{&quot;isTemplate&quot;:true,&quot;type&quot;:&quot;text&quot;}"/>
+          <p:cNvPr id="358" name="" descr="{&quot;isTemplate&quot;:true,&quot;type&quot;:&quot;text&quot;}"/>
           <p:cNvSpPr txBox="1"/>
           <p:nvPr/>
         </p:nvSpPr>
@@ -16226,7 +16474,7 @@
       </p:sp>
       <p:sp>
         <p:nvSpPr>
-          <p:cNvPr id="355" name=""/>
+          <p:cNvPr id="359" name=""/>
           <p:cNvSpPr/>
           <p:nvPr/>
         </p:nvSpPr>
@@ -16259,7 +16507,7 @@
       </p:sp>
       <p:sp>
         <p:nvSpPr>
-          <p:cNvPr id="356" name="" descr="{&quot;isTemplate&quot;:true,&quot;type&quot;:&quot;text&quot;}"/>
+          <p:cNvPr id="360" name="" descr="{&quot;isTemplate&quot;:true,&quot;type&quot;:&quot;text&quot;}"/>
           <p:cNvSpPr txBox="1"/>
           <p:nvPr/>
         </p:nvSpPr>
@@ -16294,7 +16542,7 @@
       </p:sp>
       <p:sp>
         <p:nvSpPr>
-          <p:cNvPr id="357" name="" descr="{&quot;isTemplate&quot;:true,&quot;type&quot;:&quot;text&quot;}"/>
+          <p:cNvPr id="361" name="" descr="{&quot;isTemplate&quot;:true,&quot;type&quot;:&quot;text&quot;}"/>
           <p:cNvSpPr txBox="1"/>
           <p:nvPr/>
         </p:nvSpPr>
@@ -16371,7 +16619,7 @@
       </p:sp>
       <p:sp>
         <p:nvSpPr>
-          <p:cNvPr id="358" name=""/>
+          <p:cNvPr id="362" name=""/>
           <p:cNvSpPr/>
           <p:nvPr/>
         </p:nvSpPr>
@@ -16404,7 +16652,7 @@
       </p:sp>
       <p:sp>
         <p:nvSpPr>
-          <p:cNvPr id="359" name="" descr="{&quot;isTemplate&quot;:true,&quot;type&quot;:&quot;text&quot;}"/>
+          <p:cNvPr id="363" name="" descr="{&quot;isTemplate&quot;:true,&quot;type&quot;:&quot;text&quot;}"/>
           <p:cNvSpPr txBox="1"/>
           <p:nvPr/>
         </p:nvSpPr>
@@ -16439,7 +16687,7 @@
       </p:sp>
       <p:sp>
         <p:nvSpPr>
-          <p:cNvPr id="360" name="" descr="{&quot;isTemplate&quot;:true,&quot;type&quot;:&quot;text&quot;}"/>
+          <p:cNvPr id="364" name="" descr="{&quot;isTemplate&quot;:true,&quot;type&quot;:&quot;text&quot;}"/>
           <p:cNvSpPr txBox="1"/>
           <p:nvPr/>
         </p:nvSpPr>
@@ -16476,7 +16724,7 @@
       </p:sp>
       <p:sp>
         <p:nvSpPr>
-          <p:cNvPr id="361" name=""/>
+          <p:cNvPr id="365" name=""/>
           <p:cNvSpPr/>
           <p:nvPr/>
         </p:nvSpPr>
@@ -16510,7 +16758,7 @@
       </p:sp>
       <p:sp>
         <p:nvSpPr>
-          <p:cNvPr id="362" name="" descr="{&quot;isTemplate&quot;:true,&quot;type&quot;:&quot;text&quot;}"/>
+          <p:cNvPr id="366" name="" descr="{&quot;isTemplate&quot;:true,&quot;type&quot;:&quot;text&quot;}"/>
           <p:cNvSpPr txBox="1"/>
           <p:nvPr/>
         </p:nvSpPr>
@@ -16555,7 +16803,7 @@
       </p:sp>
       <p:sp>
         <p:nvSpPr>
-          <p:cNvPr id="363" name=""/>
+          <p:cNvPr id="367" name=""/>
           <p:cNvSpPr/>
           <p:nvPr/>
         </p:nvSpPr>
@@ -16583,7 +16831,7 @@
       </p:sp>
       <p:sp>
         <p:nvSpPr>
-          <p:cNvPr id="364" name="" descr="{&quot;isTemplate&quot;:true,&quot;type&quot;:&quot;text&quot;}"/>
+          <p:cNvPr id="368" name="" descr="{&quot;isTemplate&quot;:true,&quot;type&quot;:&quot;text&quot;}"/>
           <p:cNvSpPr txBox="1"/>
           <p:nvPr/>
         </p:nvSpPr>
@@ -16618,7 +16866,7 @@
       </p:sp>
       <p:sp>
         <p:nvSpPr>
-          <p:cNvPr id="365" name="" descr="{&quot;isTemplate&quot;:true,&quot;type&quot;:&quot;text&quot;}"/>
+          <p:cNvPr id="369" name="" descr="{&quot;isTemplate&quot;:true,&quot;type&quot;:&quot;text&quot;}"/>
           <p:cNvSpPr txBox="1"/>
           <p:nvPr/>
         </p:nvSpPr>
@@ -16763,7 +17011,7 @@
       </p:sp>
       <p:sp>
         <p:nvSpPr>
-          <p:cNvPr id="366" name=""/>
+          <p:cNvPr id="370" name=""/>
           <p:cNvSpPr/>
           <p:nvPr/>
         </p:nvSpPr>
@@ -16791,7 +17039,7 @@
       </p:sp>
       <p:sp>
         <p:nvSpPr>
-          <p:cNvPr id="367" name="" descr="{&quot;isTemplate&quot;:true,&quot;type&quot;:&quot;text&quot;}"/>
+          <p:cNvPr id="371" name="" descr="{&quot;isTemplate&quot;:true,&quot;type&quot;:&quot;text&quot;}"/>
           <p:cNvSpPr txBox="1"/>
           <p:nvPr/>
         </p:nvSpPr>
@@ -16826,7 +17074,7 @@
       </p:sp>
       <p:sp>
         <p:nvSpPr>
-          <p:cNvPr id="368" name="" descr="{&quot;isTemplate&quot;:true,&quot;type&quot;:&quot;text&quot;}"/>
+          <p:cNvPr id="372" name="" descr="{&quot;isTemplate&quot;:true,&quot;type&quot;:&quot;text&quot;}"/>
           <p:cNvSpPr txBox="1"/>
           <p:nvPr/>
         </p:nvSpPr>
@@ -16935,7 +17183,7 @@
       </p:sp>
       <p:sp>
         <p:nvSpPr>
-          <p:cNvPr id="369" name=""/>
+          <p:cNvPr id="373" name=""/>
           <p:cNvSpPr/>
           <p:nvPr/>
         </p:nvSpPr>
@@ -16963,7 +17211,7 @@
       </p:sp>
       <p:sp>
         <p:nvSpPr>
-          <p:cNvPr id="370" name="" descr="{&quot;isTemplate&quot;:true,&quot;type&quot;:&quot;text&quot;}"/>
+          <p:cNvPr id="374" name="" descr="{&quot;isTemplate&quot;:true,&quot;type&quot;:&quot;text&quot;}"/>
           <p:cNvSpPr txBox="1"/>
           <p:nvPr/>
         </p:nvSpPr>
@@ -16998,7 +17246,7 @@
       </p:sp>
       <p:sp>
         <p:nvSpPr>
-          <p:cNvPr id="371" name="" descr="{&quot;isTemplate&quot;:true,&quot;type&quot;:&quot;text&quot;}"/>
+          <p:cNvPr id="375" name="" descr="{&quot;isTemplate&quot;:true,&quot;type&quot;:&quot;text&quot;}"/>
           <p:cNvSpPr txBox="1"/>
           <p:nvPr/>
         </p:nvSpPr>
@@ -17107,7 +17355,7 @@
       </p:sp>
       <p:sp>
         <p:nvSpPr>
-          <p:cNvPr id="372" name=""/>
+          <p:cNvPr id="376" name=""/>
           <p:cNvSpPr/>
           <p:nvPr/>
         </p:nvSpPr>
@@ -17149,7 +17397,7 @@
       </p:sp>
       <p:sp>
         <p:nvSpPr>
-          <p:cNvPr id="373" name="" descr="{&quot;isTemplate&quot;:true,&quot;type&quot;:&quot;text&quot;}"/>
+          <p:cNvPr id="377" name="" descr="{&quot;isTemplate&quot;:true,&quot;type&quot;:&quot;text&quot;}"/>
           <p:cNvSpPr txBox="1"/>
           <p:nvPr/>
         </p:nvSpPr>
@@ -17170,7 +17418,7 @@
       </p:sp>
       <p:sp>
         <p:nvSpPr>
-          <p:cNvPr id="374" name="" descr="{&quot;isTemplate&quot;:true,&quot;type&quot;:&quot;text&quot;}"/>
+          <p:cNvPr id="378" name="" descr="{&quot;isTemplate&quot;:true,&quot;type&quot;:&quot;text&quot;}"/>
           <p:cNvSpPr txBox="1"/>
           <p:nvPr/>
         </p:nvSpPr>
@@ -17191,7 +17439,7 @@
       </p:sp>
       <p:sp>
         <p:nvSpPr>
-          <p:cNvPr id="375" name="" descr="{&quot;isTemplate&quot;:true,&quot;type&quot;:&quot;text&quot;}"/>
+          <p:cNvPr id="379" name="" descr="{&quot;isTemplate&quot;:true,&quot;type&quot;:&quot;text&quot;}"/>
           <p:cNvSpPr txBox="1"/>
           <p:nvPr/>
         </p:nvSpPr>
@@ -17246,7 +17494,7 @@
       </p:sp>
       <p:sp>
         <p:nvSpPr>
-          <p:cNvPr id="376" name="" descr="{&quot;isTemplate&quot;:true,&quot;type&quot;:&quot;text&quot;}"/>
+          <p:cNvPr id="380" name="" descr="{&quot;isTemplate&quot;:true,&quot;type&quot;:&quot;text&quot;}"/>
           <p:cNvSpPr txBox="1"/>
           <p:nvPr/>
         </p:nvSpPr>
@@ -17289,7 +17537,7 @@
   <p:cSld>
     <p:spTree>
       <p:nvGrpSpPr>
-        <p:cNvPr id="377" name="" descr="&lt;Slide style={{ width: '1280px', height: '720px', background: '#FBFCFA', position: 'relative', padding: '40px 64px', boxSizing: 'border-box', display: 'flex', flexDirection: 'column' }}&gt;&#10;  &lt;div style={{ flexShrink: 0 }}&gt;&#10;    &lt;div style={{ color: '#BD9B56', fontSize: 13, letterSpacing: '0.25em', marginBottom: 8 }}&gt;02 · 技术构建过程&lt;/div&gt;&#10;    &lt;h2 style={{ fontSize: 30, fontWeight: 'bold', color: '#172133', margin: 0, lineHeight: 1.3 }}&gt;AI Agent 架构：LangGraph 多智能体协作&lt;/h2&gt;&#10;  &lt;/div&gt;&#10;  &lt;div style={{ flex: 1, display: 'flex', alignItems: 'center', gap: 32 }}&gt;&#10;    &lt;div style={{ flex: '0 0 560px', background: '#fff', borderRadius: 12, padding: '22px 24px', boxShadow: '0 6px 24px rgba(23,33,51,0.08)' }}&gt;&#10;      &lt;svg width=&quot;512&quot; height=&quot;470&quot; viewBox=&quot;0 0 512 470&quot;&gt;&#10;        &lt;defs&gt;&#10;          &lt;marker id=&quot;ar9&quot; viewBox=&quot;0 0 10 10&quot; refX=&quot;9&quot; refY=&quot;5&quot; markerWidth=&quot;6&quot; markerHeight=&quot;6&quot; orient=&quot;auto&quot;&gt;&#10;            &lt;path d=&quot;M0 0L10 5L0 10z&quot; fill=&quot;#BD9B56&quot; /&gt;&#10;          &lt;/marker&gt;&#10;        &lt;/defs&gt;&#10;        &lt;g fontFamily=&quot;Inter, sans-serif&quot;&gt;&#10;          &lt;rect x=&quot;156&quot; y=&quot;14&quot; width=&quot;200&quot; height=&quot;50&quot; rx=&quot;8&quot; fill=&quot;rgba(34,57,94,0.08)&quot; stroke=&quot;#22395E&quot; strokeWidth=&quot;1.5&quot; /&gt;&#10;          &lt;text x=&quot;256&quot; y=&quot;36&quot; textAnchor=&quot;middle&quot; fontSize=&quot;13&quot; fontWeight=&quot;bold&quot; fill=&quot;#172133&quot;&gt;用户自然语言输入&lt;/text&gt;&#10;          &lt;text x=&quot;256&quot; y=&quot;54&quot; textAnchor=&quot;middle&quot; fontSize=&quot;11&quot; fill=&quot;#5F5E5A&quot;&gt;「我家厨房漏水了」&lt;/text&gt;&#10;          &lt;line x1=&quot;256&quot; y1=&quot;64&quot; x2=&quot;256&quot; y2=&quot;84&quot; stroke=&quot;#BD9B56&quot; strokeWidth=&quot;1.5&quot; markerEnd=&quot;url(#ar9)&quot; /&gt;&#10;          &lt;rect x=&quot;96&quot; y=&quot;88&quot; width=&quot;320&quot; height=&quot;64&quot; rx=&quot;8&quot; fill=&quot;rgba(34,57,94,0.12)&quot; stroke=&quot;#22395E&quot; strokeWidth=&quot;2&quot; /&gt;&#10;          &lt;text x=&quot;256&quot; y=&quot;114&quot; textAnchor=&quot;middle&quot; fontSize=&quot;13&quot; fontWeight=&quot;bold&quot; fill=&quot;#BD9B56&quot;&gt;Router Agent · 意图分类&lt;/text&gt;&#10;          &lt;text x=&quot;256&quot; y=&quot;136&quot; textAnchor=&quot;middle&quot; fontSize=&quot;11&quot; fill=&quot;#172133&quot;&gt;报修 / 费用 / 公告 / 知识 / 上报&lt;/text&gt;&#10;          &lt;line x1=&quot;256&quot; y1=&quot;152&quot; x2=&quot;256&quot; y2=&quot;172&quot; stroke=&quot;#BD9B56&quot; strokeWidth=&quot;1.5&quot; markerEnd=&quot;url(#ar9)&quot; /&gt;&#10;          &lt;rect x=&quot;96&quot; y=&quot;176&quot; width=&quot;320&quot; height=&quot;64&quot; rx=&quot;8&quot; fill=&quot;rgba(189,155,86,0.10)&quot; stroke=&quot;#BD9B56&quot; strokeWidth=&quot;1.5&quot; /&gt;&#10;          &lt;text x=&quot;256&quot; y=&quot;202&quot; textAnchor=&quot;middle&quot; fontSize=&quot;13&quot; fontWeight=&quot;bold&quot; fill=&quot;#172133&quot;&gt;领域 Agent + 多轮状态机&lt;/text&gt;&#10;          &lt;text x=&quot;256&quot; y=&quot;224&quot; textAnchor=&quot;middle&quot; fontSize=&quot;11&quot; fill=&quot;#5F5E5A&quot;&gt;报修缺「位置/类型」→ 主动反问补全&lt;/text&gt;&#10;          &lt;line x1=&quot;256&quot; y1=&quot;240&quot; x2=&quot;256&quot; y2=&quot;260&quot; stroke=&quot;#BD9B56&quot; strokeWidth=&quot;1.5&quot; markerEnd=&quot;url(#ar9)&quot; /&gt;&#10;          &lt;rect x=&quot;16&quot; y=&quot;264&quot; width=&quot;140&quot; height=&quot;48&quot; rx=&quot;6&quot; fill=&quot;rgba(34,57,94,0.06)&quot; stroke=&quot;#22395E&quot; strokeWidth=&quot;1.5&quot; /&gt;&#10;          &lt;text x=&quot;86&quot; y=&quot;284&quot; textAnchor=&quot;middle&quot; fontSize=&quot;12&quot; fontWeight=&quot;bold&quot; fill=&quot;#172133&quot;&gt;create_repair&lt;/text&gt;&#10;          &lt;text x=&quot;86&quot; y=&quot;302&quot; textAnchor=&quot;middle&quot; fontSize=&quot;10&quot; fill=&quot;#5F5E5A&quot;&gt;创建工单&lt;/text&gt;&#10;          &lt;rect x=&quot;176&quot; y=&quot;264&quot; width=&quot;140&quot; height=&quot;48&quot; rx=&quot;6&quot; fill=&quot;rgba(34,57,94,0.06)&quot; stroke=&quot;#22395E&quot; strokeWidth=&quot;1.5&quot; /&gt;&#10;          &lt;text x=&quot;246&quot; y=&quot;284&quot; textAnchor=&quot;middle&quot; fontSize=&quot;12&quot; fontWeight=&quot;bold&quot; fill=&quot;#172133&quot;&gt;query_fee&lt;/text&gt;&#10;          &lt;text x=&quot;246&quot; y=&quot;302&quot; textAnchor=&quot;middle&quot; fontSize=&quot;10&quot; fill=&quot;#5F5E5A&quot;&gt;查询费用&lt;/text&gt;&#10;          &lt;rect x=&quot;336&quot; y=&quot;264&quot; width=&quot;160&quot; height=&quot;48&quot; rx=&quot;6&quot; fill=&quot;rgba(34,57,94,0.06)&quot; stroke=&quot;#22395E&quot; strokeWidth=&quot;1.5&quot; /&gt;&#10;          &lt;text x=&quot;416&quot; y=&quot;284&quot; textAnchor=&quot;middle&quot; fontSize=&quot;12&quot; fontWeight=&quot;bold&quot; fill=&quot;#172133&quot;&gt;search_knowledge&lt;/text&gt;&#10;          &lt;text x=&quot;416&quot; y=&quot;302&quot; textAnchor=&quot;middle&quot; fontSize=&quot;10&quot; fill=&quot;#5F5E5A&quot;&gt;检索知识&lt;/text&gt;&#10;          &lt;line x1=&quot;256&quot; y1=&quot;260&quot; x2=&quot;256&quot; y2=&quot;288&quot; stroke=&quot;#22395E&quot; strokeWidth=&quot;1.2&quot; /&gt;&#10;          &lt;line x1=&quot;256&quot; y1=&quot;288&quot; x2=&quot;86&quot; y2=&quot;288&quot; stroke=&quot;#22395E&quot; strokeWidth=&quot;1.2&quot; /&gt;&#10;          &lt;line x1=&quot;256&quot; y1=&quot;288&quot; x2=&quot;246&quot; y2=&quot;288&quot; stroke=&quot;#22395E&quot; strokeWidth=&quot;1.2&quot; /&gt;&#10;          &lt;line x1=&quot;256&quot; y1=&quot;288&quot; x2=&quot;416&quot; y2=&quot;288&quot; stroke=&quot;#22395E&quot; strokeWidth=&quot;1.2&quot; /&gt;&#10;          &lt;line x1=&quot;86&quot; y1=&quot;312&quot; x2=&quot;86&quot; y2=&quot;332&quot; stroke=&quot;#22395E&quot; strokeWidth=&quot;1.2&quot; /&gt;&#10;          &lt;line x1=&quot;246&quot; y1=&quot;312&quot; x2=&quot;246&quot; y2=&quot;332&quot; stroke=&quot;#22395E&quot; strokeWidth=&quot;1.2&quot; /&gt;&#10;          &lt;line x1=&quot;416&quot; y1=&quot;312&quot; x2=&quot;416&quot; y2=&quot;332&quot; stroke=&quot;#22395E&quot; strokeWidth=&quot;1.2&quot; /&gt;&#10;          &lt;rect x=&quot;16&quot; y=&quot;336&quot; width=&quot;480&quot; height=&quot;42&quot; rx=&quot;6&quot; fill=&quot;#172133&quot; /&gt;&#10;          &lt;text x=&quot;256&quot; y=&quot;362&quot; textAnchor=&quot;middle&quot; fontSize=&quot;12&quot; fontWeight=&quot;bold&quot; fill=&quot;#BD9B56&quot;&gt;业务 API 层 · 工具执行 · Trace 全程记录可评估&lt;/text&gt;&#10;          &lt;text x=&quot;256&quot; y=&quot;410&quot; textAnchor=&quot;middle&quot; fontSize=&quot;12&quot; fill=&quot;#5F5E5A&quot;&gt;驱动模型：智谱 GLM-4-Flash · 编排框架：LangGraph&lt;/text&gt;&#10;        &lt;/g&gt;&#10;      &lt;/svg&gt;&#10;    &lt;/div&gt;&#10;    &lt;div style={{ flex: 1, display: 'flex', flexDirection: 'column', gap: 18 }}&gt;&#10;      &lt;div&gt;&#10;        &lt;div style={{ fontSize: 14, color: '#BD9B56', fontWeight: 'bold', letterSpacing: '0.1em', marginBottom: 6 }}&gt;1.  多轮状态机&lt;/div&gt;&#10;        &lt;p style={{ fontSize: 14, color: '#5F5E5A', margin: 0, lineHeight: 1.65 }}&gt;报修不是单轮问答——业主只说「厨房漏水」时，Agent 会主动追问房屋位置、故障类型，把信息补全后才创建工单，避免生成残缺工单。&lt;/p&gt;&#10;      &lt;/div&gt;&#10;      &lt;div&gt;&#10;        &lt;div style={{ fontSize: 14, color: '#BD9B56', fontWeight: 'bold', letterSpacing: '0.1em', marginBottom: 6 }}&gt;2.  五类意图&lt;/div&gt;&#10;        &lt;p style={{ fontSize: 14, color: '#5F5E5A', margin: 0, lineHeight: 1.65 }}&gt;报修、费用、公告、知识咨询、问题上报，自然语言直达对应业务工具，实测意图识别准确率 100%。&lt;/p&gt;&#10;      &lt;/div&gt;&#10;      &lt;div&gt;&#10;        &lt;div style={{ fontSize: 14, color: '#BD9B56', fontWeight: 'bold', letterSpacing: '0.1em', marginBottom: 6 }}&gt;3.  可观测可评估&lt;/div&gt;&#10;        &lt;p style={{ fontSize: 14, color: '#5F5E5A', margin: 0, lineHeight: 1.65 }}&gt;每次对话的意图、工具、结果全程记录 Trace，可回放、可评估，是量化评估体系的数据基础。&lt;/p&gt;&#10;      &lt;/div&gt;&#10;    &lt;/div&gt;&#10;  &lt;/div&gt;&#10;  &lt;div style={{ flexShrink: 0, height: 40, display: 'flex', alignItems: 'flex-end', justifyContent: 'space-between' }}&gt;&#10;    &lt;span style={{ color: '#BD9B56', fontSize: 12, letterSpacing: '0.1em' }}&gt;云溪花园 · 智慧社区&lt;/span&gt;&#10;    &lt;span style={{ color: '#a09b8c', fontSize: 12 }}&gt;09 / 15&lt;/span&gt;&#10;  &lt;/div&gt;&#10;&lt;/Slide&gt;"/>
+        <p:cNvPr id="381" name="" descr="&lt;Slide style={{ width: '1280px', height: '720px', background: '#FBFCFA', position: 'relative', padding: '40px 64px', boxSizing: 'border-box', display: 'flex', flexDirection: 'column' }}&gt;&#10;  &lt;div style={{ flexShrink: 0 }}&gt;&#10;    &lt;div style={{ color: '#BD9B56', fontSize: 13, letterSpacing: '0.25em', marginBottom: 8 }}&gt;02 · 技术构建过程&lt;/div&gt;&#10;    &lt;h2 style={{ fontSize: 30, fontWeight: 'bold', color: '#172133', margin: 0, lineHeight: 1.3 }}&gt;AI Agent 架构：LangGraph 多智能体协作&lt;/h2&gt;&#10;  &lt;/div&gt;&#10;  &lt;div style={{ flex: 1, display: 'flex', alignItems: 'center', gap: 32 }}&gt;&#10;    &lt;div style={{ flex: '0 0 560px', background: '#fff', borderRadius: 12, padding: '22px 24px', boxShadow: '0 6px 24px rgba(23,33,51,0.08)' }}&gt;&#10;      &lt;svg width=&quot;512&quot; height=&quot;470&quot; viewBox=&quot;0 0 512 470&quot;&gt;&#10;        &lt;defs&gt;&#10;          &lt;marker id=&quot;ar9&quot; viewBox=&quot;0 0 10 10&quot; refX=&quot;9&quot; refY=&quot;5&quot; markerWidth=&quot;6&quot; markerHeight=&quot;6&quot; orient=&quot;auto&quot;&gt;&#10;            &lt;path d=&quot;M0 0L10 5L0 10z&quot; fill=&quot;#BD9B56&quot; /&gt;&#10;          &lt;/marker&gt;&#10;        &lt;/defs&gt;&#10;        &lt;g fontFamily=&quot;Inter, sans-serif&quot;&gt;&#10;          &lt;rect x=&quot;156&quot; y=&quot;14&quot; width=&quot;200&quot; height=&quot;50&quot; rx=&quot;8&quot; fill=&quot;rgba(34,57,94,0.08)&quot; stroke=&quot;#22395E&quot; strokeWidth=&quot;1.5&quot; /&gt;&#10;          &lt;text x=&quot;256&quot; y=&quot;36&quot; textAnchor=&quot;middle&quot; fontSize=&quot;13&quot; fontWeight=&quot;bold&quot; fill=&quot;#172133&quot;&gt;用户自然语言输入&lt;/text&gt;&#10;          &lt;text x=&quot;256&quot; y=&quot;54&quot; textAnchor=&quot;middle&quot; fontSize=&quot;11&quot; fill=&quot;#5F5E5A&quot;&gt;「我家厨房漏水了」&lt;/text&gt;&#10;          &lt;line x1=&quot;256&quot; y1=&quot;64&quot; x2=&quot;256&quot; y2=&quot;84&quot; stroke=&quot;#BD9B56&quot; strokeWidth=&quot;1.5&quot; markerEnd=&quot;url(#ar9)&quot; /&gt;&#10;          &lt;rect x=&quot;96&quot; y=&quot;88&quot; width=&quot;320&quot; height=&quot;64&quot; rx=&quot;8&quot; fill=&quot;rgba(34,57,94,0.12)&quot; stroke=&quot;#22395E&quot; strokeWidth=&quot;2&quot; /&gt;&#10;          &lt;text x=&quot;256&quot; y=&quot;114&quot; textAnchor=&quot;middle&quot; fontSize=&quot;13&quot; fontWeight=&quot;bold&quot; fill=&quot;#BD9B56&quot;&gt;Router Agent · 意图分类&lt;/text&gt;&#10;          &lt;text x=&quot;256&quot; y=&quot;136&quot; textAnchor=&quot;middle&quot; fontSize=&quot;11&quot; fill=&quot;#172133&quot;&gt;报修 / 费用 / 公告 / 知识 / 上报&lt;/text&gt;&#10;          &lt;line x1=&quot;256&quot; y1=&quot;152&quot; x2=&quot;256&quot; y2=&quot;172&quot; stroke=&quot;#BD9B56&quot; strokeWidth=&quot;1.5&quot; markerEnd=&quot;url(#ar9)&quot; /&gt;&#10;          &lt;rect x=&quot;96&quot; y=&quot;176&quot; width=&quot;320&quot; height=&quot;64&quot; rx=&quot;8&quot; fill=&quot;rgba(189,155,86,0.10)&quot; stroke=&quot;#BD9B56&quot; strokeWidth=&quot;1.5&quot; /&gt;&#10;          &lt;text x=&quot;256&quot; y=&quot;202&quot; textAnchor=&quot;middle&quot; fontSize=&quot;13&quot; fontWeight=&quot;bold&quot; fill=&quot;#172133&quot;&gt;领域 Agent + 多轮状态机&lt;/text&gt;&#10;          &lt;text x=&quot;256&quot; y=&quot;224&quot; textAnchor=&quot;middle&quot; fontSize=&quot;11&quot; fill=&quot;#5F5E5A&quot;&gt;报修缺「位置/类型」→ 主动反问补全&lt;/text&gt;&#10;          &lt;line x1=&quot;256&quot; y1=&quot;240&quot; x2=&quot;256&quot; y2=&quot;260&quot; stroke=&quot;#BD9B56&quot; strokeWidth=&quot;1.5&quot; markerEnd=&quot;url(#ar9)&quot; /&gt;&#10;          &lt;rect x=&quot;16&quot; y=&quot;264&quot; width=&quot;140&quot; height=&quot;48&quot; rx=&quot;6&quot; fill=&quot;rgba(34,57,94,0.06)&quot; stroke=&quot;#22395E&quot; strokeWidth=&quot;1.5&quot; /&gt;&#10;          &lt;text x=&quot;86&quot; y=&quot;284&quot; textAnchor=&quot;middle&quot; fontSize=&quot;12&quot; fontWeight=&quot;bold&quot; fill=&quot;#172133&quot;&gt;create_repair&lt;/text&gt;&#10;          &lt;text x=&quot;86&quot; y=&quot;302&quot; textAnchor=&quot;middle&quot; fontSize=&quot;10&quot; fill=&quot;#5F5E5A&quot;&gt;创建工单&lt;/text&gt;&#10;          &lt;rect x=&quot;176&quot; y=&quot;264&quot; width=&quot;140&quot; height=&quot;48&quot; rx=&quot;6&quot; fill=&quot;rgba(34,57,94,0.06)&quot; stroke=&quot;#22395E&quot; strokeWidth=&quot;1.5&quot; /&gt;&#10;          &lt;text x=&quot;246&quot; y=&quot;284&quot; textAnchor=&quot;middle&quot; fontSize=&quot;12&quot; fontWeight=&quot;bold&quot; fill=&quot;#172133&quot;&gt;query_fee&lt;/text&gt;&#10;          &lt;text x=&quot;246&quot; y=&quot;302&quot; textAnchor=&quot;middle&quot; fontSize=&quot;10&quot; fill=&quot;#5F5E5A&quot;&gt;查询费用&lt;/text&gt;&#10;          &lt;rect x=&quot;336&quot; y=&quot;264&quot; width=&quot;160&quot; height=&quot;48&quot; rx=&quot;6&quot; fill=&quot;rgba(34,57,94,0.06)&quot; stroke=&quot;#22395E&quot; strokeWidth=&quot;1.5&quot; /&gt;&#10;          &lt;text x=&quot;416&quot; y=&quot;284&quot; textAnchor=&quot;middle&quot; fontSize=&quot;12&quot; fontWeight=&quot;bold&quot; fill=&quot;#172133&quot;&gt;search_knowledge&lt;/text&gt;&#10;          &lt;text x=&quot;416&quot; y=&quot;302&quot; textAnchor=&quot;middle&quot; fontSize=&quot;10&quot; fill=&quot;#5F5E5A&quot;&gt;检索知识&lt;/text&gt;&#10;          &lt;line x1=&quot;256&quot; y1=&quot;260&quot; x2=&quot;256&quot; y2=&quot;288&quot; stroke=&quot;#22395E&quot; strokeWidth=&quot;1.2&quot; /&gt;&#10;          &lt;line x1=&quot;256&quot; y1=&quot;288&quot; x2=&quot;86&quot; y2=&quot;288&quot; stroke=&quot;#22395E&quot; strokeWidth=&quot;1.2&quot; /&gt;&#10;          &lt;line x1=&quot;256&quot; y1=&quot;288&quot; x2=&quot;246&quot; y2=&quot;288&quot; stroke=&quot;#22395E&quot; strokeWidth=&quot;1.2&quot; /&gt;&#10;          &lt;line x1=&quot;256&quot; y1=&quot;288&quot; x2=&quot;416&quot; y2=&quot;288&quot; stroke=&quot;#22395E&quot; strokeWidth=&quot;1.2&quot; /&gt;&#10;          &lt;line x1=&quot;86&quot; y1=&quot;312&quot; x2=&quot;86&quot; y2=&quot;332&quot; stroke=&quot;#22395E&quot; strokeWidth=&quot;1.2&quot; /&gt;&#10;          &lt;line x1=&quot;246&quot; y1=&quot;312&quot; x2=&quot;246&quot; y2=&quot;332&quot; stroke=&quot;#22395E&quot; strokeWidth=&quot;1.2&quot; /&gt;&#10;          &lt;line x1=&quot;416&quot; y1=&quot;312&quot; x2=&quot;416&quot; y2=&quot;332&quot; stroke=&quot;#22395E&quot; strokeWidth=&quot;1.2&quot; /&gt;&#10;          &lt;rect x=&quot;16&quot; y=&quot;336&quot; width=&quot;480&quot; height=&quot;42&quot; rx=&quot;6&quot; fill=&quot;#172133&quot; /&gt;&#10;          &lt;text x=&quot;256&quot; y=&quot;362&quot; textAnchor=&quot;middle&quot; fontSize=&quot;12&quot; fontWeight=&quot;bold&quot; fill=&quot;#BD9B56&quot;&gt;业务 API 层 · 工具执行 · Trace 全程记录可评估&lt;/text&gt;&#10;          &lt;text x=&quot;256&quot; y=&quot;410&quot; textAnchor=&quot;middle&quot; fontSize=&quot;12&quot; fill=&quot;#5F5E5A&quot;&gt;驱动模型：智谱 GLM-4-Flash · 编排框架：LangGraph&lt;/text&gt;&#10;        &lt;/g&gt;&#10;      &lt;/svg&gt;&#10;    &lt;/div&gt;&#10;    &lt;div style={{ flex: 1, display: 'flex', flexDirection: 'column', gap: 18 }}&gt;&#10;      &lt;div&gt;&#10;        &lt;div style={{ fontSize: 14, color: '#BD9B56', fontWeight: 'bold', letterSpacing: '0.1em', marginBottom: 6 }}&gt;1.  多轮状态机&lt;/div&gt;&#10;        &lt;p style={{ fontSize: 14, color: '#5F5E5A', margin: 0, lineHeight: 1.65 }}&gt;报修不是单轮问答——业主只说「厨房漏水」时，Agent 会主动追问房屋位置、故障类型，把信息补全后才创建工单，避免生成残缺工单。&lt;/p&gt;&#10;      &lt;/div&gt;&#10;      &lt;div&gt;&#10;        &lt;div style={{ fontSize: 14, color: '#BD9B56', fontWeight: 'bold', letterSpacing: '0.1em', marginBottom: 6 }}&gt;2.  五类意图&lt;/div&gt;&#10;        &lt;p style={{ fontSize: 14, color: '#5F5E5A', margin: 0, lineHeight: 1.65 }}&gt;报修、费用、公告、知识咨询、问题上报，自然语言直达对应业务工具，实测意图识别准确率 100%。&lt;/p&gt;&#10;      &lt;/div&gt;&#10;      &lt;div&gt;&#10;        &lt;div style={{ fontSize: 14, color: '#BD9B56', fontWeight: 'bold', letterSpacing: '0.1em', marginBottom: 6 }}&gt;3.  可观测可评估&lt;/div&gt;&#10;        &lt;p style={{ fontSize: 14, color: '#5F5E5A', margin: 0, lineHeight: 1.65 }}&gt;每次对话的意图、工具、结果全程记录 Trace，可回放、可评估，是量化评估体系的数据基础。&lt;/p&gt;&#10;      &lt;/div&gt;&#10;    &lt;/div&gt;&#10;  &lt;/div&gt;&#10;  &lt;div style={{ flexShrink: 0, height: 40, display: 'flex', alignItems: 'flex-end', justifyContent: 'space-between' }}&gt;&#10;    &lt;span style={{ color: '#BD9B56', fontSize: 12, letterSpacing: '0.1em' }}&gt;云溪花园 · 智慧社区&lt;/span&gt;&#10;    &lt;span style={{ color: '#a09b8c', fontSize: 12 }}&gt;09 / 15&lt;/span&gt;&#10;  &lt;/div&gt;&#10;&lt;/Slide&gt;"/>
         <p:cNvGrpSpPr/>
         <p:nvPr/>
       </p:nvGrpSpPr>
@@ -17303,7 +17551,7 @@
       </p:grpSpPr>
       <p:sp>
         <p:nvSpPr>
-          <p:cNvPr id="378" name=""/>
+          <p:cNvPr id="382" name=""/>
           <p:cNvSpPr/>
           <p:nvPr/>
         </p:nvSpPr>
@@ -17327,7 +17575,7 @@
       </p:sp>
       <p:sp>
         <p:nvSpPr>
-          <p:cNvPr id="379" name="" descr="{&quot;isTemplate&quot;:true,&quot;type&quot;:&quot;text&quot;}"/>
+          <p:cNvPr id="383" name="" descr="{&quot;isTemplate&quot;:true,&quot;type&quot;:&quot;text&quot;}"/>
           <p:cNvSpPr txBox="1"/>
           <p:nvPr/>
         </p:nvSpPr>
@@ -17372,7 +17620,7 @@
       </p:sp>
       <p:sp>
         <p:nvSpPr>
-          <p:cNvPr id="380" name="" descr="{&quot;isTemplate&quot;:true,&quot;type&quot;:&quot;text&quot;}"/>
+          <p:cNvPr id="384" name="" descr="{&quot;isTemplate&quot;:true,&quot;type&quot;:&quot;text&quot;}"/>
           <p:cNvSpPr txBox="1"/>
           <p:nvPr/>
         </p:nvSpPr>
@@ -17437,7 +17685,7 @@
       </p:sp>
       <p:sp>
         <p:nvSpPr>
-          <p:cNvPr id="381" name=""/>
+          <p:cNvPr id="385" name=""/>
           <p:cNvSpPr/>
           <p:nvPr/>
         </p:nvSpPr>
@@ -17470,7 +17718,7 @@
       </p:sp>
       <p:pic>
         <p:nvPicPr>
-          <p:cNvPr id="382" name=""/>
+          <p:cNvPr id="386" name=""/>
           <p:cNvPicPr>
             <a:picLocks noChangeAspect="1"/>
           </p:cNvPicPr>
@@ -17501,7 +17749,7 @@
       </p:pic>
       <p:sp>
         <p:nvSpPr>
-          <p:cNvPr id="383" name="" descr="{&quot;isTemplate&quot;:true,&quot;type&quot;:&quot;text&quot;}"/>
+          <p:cNvPr id="387" name="" descr="{&quot;isTemplate&quot;:true,&quot;type&quot;:&quot;text&quot;}"/>
           <p:cNvSpPr txBox="1"/>
           <p:nvPr/>
         </p:nvSpPr>
@@ -17546,7 +17794,7 @@
       </p:sp>
       <p:sp>
         <p:nvSpPr>
-          <p:cNvPr id="384" name="" descr="{&quot;isTemplate&quot;:true,&quot;type&quot;:&quot;text&quot;}"/>
+          <p:cNvPr id="388" name="" descr="{&quot;isTemplate&quot;:true,&quot;type&quot;:&quot;text&quot;}"/>
           <p:cNvSpPr txBox="1"/>
           <p:nvPr/>
         </p:nvSpPr>
@@ -17603,7 +17851,7 @@
       </p:sp>
       <p:sp>
         <p:nvSpPr>
-          <p:cNvPr id="385" name="" descr="{&quot;isTemplate&quot;:true,&quot;type&quot;:&quot;text&quot;}"/>
+          <p:cNvPr id="389" name="" descr="{&quot;isTemplate&quot;:true,&quot;type&quot;:&quot;text&quot;}"/>
           <p:cNvSpPr txBox="1"/>
           <p:nvPr/>
         </p:nvSpPr>
@@ -17648,7 +17896,7 @@
       </p:sp>
       <p:sp>
         <p:nvSpPr>
-          <p:cNvPr id="386" name="" descr="{&quot;isTemplate&quot;:true,&quot;type&quot;:&quot;text&quot;}"/>
+          <p:cNvPr id="390" name="" descr="{&quot;isTemplate&quot;:true,&quot;type&quot;:&quot;text&quot;}"/>
           <p:cNvSpPr txBox="1"/>
           <p:nvPr/>
         </p:nvSpPr>
@@ -17705,7 +17953,7 @@
       </p:sp>
       <p:sp>
         <p:nvSpPr>
-          <p:cNvPr id="387" name="" descr="{&quot;isTemplate&quot;:true,&quot;type&quot;:&quot;text&quot;}"/>
+          <p:cNvPr id="391" name="" descr="{&quot;isTemplate&quot;:true,&quot;type&quot;:&quot;text&quot;}"/>
           <p:cNvSpPr txBox="1"/>
           <p:nvPr/>
         </p:nvSpPr>
@@ -17750,7 +17998,7 @@
       </p:sp>
       <p:sp>
         <p:nvSpPr>
-          <p:cNvPr id="388" name="" descr="{&quot;isTemplate&quot;:true,&quot;type&quot;:&quot;text&quot;}"/>
+          <p:cNvPr id="392" name="" descr="{&quot;isTemplate&quot;:true,&quot;type&quot;:&quot;text&quot;}"/>
           <p:cNvSpPr txBox="1"/>
           <p:nvPr/>
         </p:nvSpPr>
@@ -17807,7 +18055,7 @@
       </p:sp>
       <p:sp>
         <p:nvSpPr>
-          <p:cNvPr id="389" name="" descr="{&quot;isTemplate&quot;:true,&quot;type&quot;:&quot;text&quot;}"/>
+          <p:cNvPr id="393" name="" descr="{&quot;isTemplate&quot;:true,&quot;type&quot;:&quot;text&quot;}"/>
           <p:cNvSpPr txBox="1"/>
           <p:nvPr/>
         </p:nvSpPr>
@@ -17862,7 +18110,7 @@
       </p:sp>
       <p:sp>
         <p:nvSpPr>
-          <p:cNvPr id="390" name="" descr="{&quot;isTemplate&quot;:true,&quot;type&quot;:&quot;text&quot;}"/>
+          <p:cNvPr id="394" name="" descr="{&quot;isTemplate&quot;:true,&quot;type&quot;:&quot;text&quot;}"/>
           <p:cNvSpPr txBox="1"/>
           <p:nvPr/>
         </p:nvSpPr>

--- a/ppt/AI物业社区智能体方案/AI物业社区智能体-方案.pptx
+++ b/ppt/AI物业社区智能体方案/AI物业社区智能体-方案.pptx
@@ -4842,7 +4842,7 @@
   <p:cSld>
     <p:spTree>
       <p:nvGrpSpPr>
-        <p:cNvPr id="95" name="" descr="&lt;Slide style={{ width: '1280px', height: '720px', background: '#FBFCFA', position: 'relative', padding: '40px 64px', boxSizing: 'border-box', display: 'flex', flexDirection: 'column' }}&gt;&#10;  &lt;div style={{ flexShrink: 0 }}&gt;&#10;    &lt;div style={{ color: '#BD9B56', fontSize: 13, letterSpacing: '0.25em', marginBottom: 8 }}&gt;03 · 成果与验证&lt;/div&gt;&#10;    &lt;h2 style={{ fontSize: 30, fontWeight: 'bold', color: '#172133', margin: 0, lineHeight: 1.3 }}&gt;量化评估：核心链路指标 100%&lt;/h2&gt;&#10;    &lt;div style={{ fontSize: 14, color: '#6b7075', marginTop: 8 }}&gt;建立可量化的评估体系，用数据找到 bug、用数据证明修复&lt;/div&gt;&#10;  &lt;/div&gt;&#10;  &lt;div style={{ flex: 1, display: 'flex', alignItems: 'center' }}&gt;&#10;    &lt;div style={{ width: '100%', display: 'flex', gap: 18 }}&gt;&#10;      &lt;div style={{ flex: 1, background: '#fff', borderRadius: 12, padding: '24px 16px', textAlign: 'center', boxShadow: '0 6px 24px rgba(23,33,51,0.08)', borderTop: '4px solid #BD9B56' }}&gt;&#10;        &lt;div style={{ fontSize: 13, color: '#BD9B56', letterSpacing: '0.2em', marginBottom: 12 }}&gt;INTENT&lt;/div&gt;&#10;        &lt;div style={{ fontSize: 60, fontWeight: 'bold', color: '#172133', lineHeight: 1, fontFamily: 'Inter, sans-serif' }}&gt;100%&lt;/div&gt;&#10;        &lt;div style={{ fontSize: 14, color: '#5F5E5A', marginTop: 12, lineHeight: 1.5 }}&gt;意图识别准确率&lt;/div&gt;&#10;        &lt;div style={{ marginTop: 12, padding: '8px 0', borderTop: '1px solid rgba(34,57,94,0.1)' }}&gt;&#10;          &lt;span style={{ fontSize: 12, color: '#888780' }}&gt;83.33% → 100% · 修复 3 处规则盲区&lt;/span&gt;&#10;        &lt;/div&gt;&#10;      &lt;/div&gt;&#10;      &lt;div style={{ flex: 1, background: '#fff', borderRadius: 12, padding: '24px 16px', textAlign: 'center', boxShadow: '0 6px 24px rgba(23,33,51,0.08)', borderTop: '4px solid #BD9B56' }}&gt;&#10;        &lt;div style={{ fontSize: 13, color: '#BD9B56', letterSpacing: '0.2em', marginBottom: 12 }}&gt;RAG RECALL&lt;/div&gt;&#10;        &lt;div style={{ fontSize: 60, fontWeight: 'bold', color: '#172133', lineHeight: 1, fontFamily: 'Inter, sans-serif' }}&gt;100%&lt;/div&gt;&#10;        &lt;div style={{ fontSize: 14, color: '#5F5E5A', marginTop: 12, lineHeight: 1.5 }}&gt;检索召回率 Recall@5&lt;/div&gt;&#10;        &lt;div style={{ marginTop: 12, padding: '8px 0', borderTop: '1px solid rgba(34,57,94,0.1)' }}&gt;&#10;          &lt;span style={{ fontSize: 12, color: '#888780' }}&gt;知识切片检索质量稳定达标&lt;/span&gt;&#10;        &lt;/div&gt;&#10;      &lt;/div&gt;&#10;      &lt;div style={{ flex: 1, background: '#fff', borderRadius: 12, padding: '24px 16px', textAlign: 'center', boxShadow: '0 6px 24px rgba(23,33,51,0.08)', borderTop: '4px solid #BD9B56' }}&gt;&#10;        &lt;div style={{ fontSize: 13, color: '#BD9B56', letterSpacing: '0.2em', marginBottom: 12 }}&gt;RAG ANSWER&lt;/div&gt;&#10;        &lt;div style={{ fontSize: 60, fontWeight: 'bold', color: '#172133', lineHeight: 1, fontFamily: 'Inter, sans-serif' }}&gt;100%&lt;/div&gt;&#10;        &lt;div style={{ fontSize: 14, color: '#5F5E5A', marginTop: 12, lineHeight: 1.5 }}&gt;答案准确率&lt;/div&gt;&#10;        &lt;div style={{ marginTop: 12, padding: '8px 0', borderTop: '1px solid rgba(34,57,94,0.1)' }}&gt;&#10;          &lt;span style={{ fontSize: 12, color: '#888780' }}&gt;50% → 100% · 答案生成优化&lt;/span&gt;&#10;        &lt;/div&gt;&#10;      &lt;/div&gt;&#10;      &lt;div style={{ flex: 1, background: 'linear-gradient(135deg, #172133 0%, #22395E 100%)', borderRadius: 12, padding: '24px 16px', textAlign: 'center', boxShadow: '0 6px 24px rgba(23,33,51,0.18)', borderTop: '4px solid #BD9B56' }}&gt;&#10;        &lt;div style={{ fontSize: 13, color: '#BD9B56', letterSpacing: '0.2em', marginBottom: 12 }}&gt;TESTS · CI GREEN&lt;/div&gt;&#10;        &lt;div style={{ fontSize: 44, fontWeight: 'bold', color: '#FBFCFA', lineHeight: 1, fontFamily: 'Inter, sans-serif' }}&gt;113 + 30&lt;/div&gt;&#10;        &lt;div style={{ fontSize: 14, color: 'rgba(251,252,250,0.85)', marginTop: 12, lineHeight: 1.5 }}&gt;后端 + 前端测试全绿&lt;/div&gt;&#10;        &lt;div style={{ marginTop: 12, padding: '8px 0', borderTop: '1px solid rgba(189,155,86,0.3)' }}&gt;&#10;          &lt;span style={{ fontSize: 12, color: '#BD9B56' }}&gt;GitHub Actions 每次 push 自动跑&lt;/span&gt;&#10;        &lt;/div&gt;&#10;      &lt;/div&gt;&#10;    &lt;/div&gt;&#10;  &lt;/div&gt;&#10;  &lt;div style={{ flexShrink: 0, background: 'rgba(189,155,86,0.10)', borderLeft: '4px solid #BD9B56', borderRadius: '0 8px 8px 0', padding: '14px 22px' }}&gt;&#10;    &lt;p style={{ fontSize: 14, color: '#172133', margin: 0, lineHeight: 1.6 }}&gt;&lt;span style={{ color: '#BD9B56', fontWeight: 'bold' }}&gt;评估驱动优化：&lt;/span&gt;RAG 答案从 50% → 100%，源于发现「评估指标用脆弱子串匹配」并改为「关键词覆盖度」、同时优化答案生成 prompt——用数据找到 bug，用数据证明修复。工具选择 / 参数提取 / 工作流三项指标受「报修多轮交互」设计影响（用例按单轮设计，实际走 pending_repair 多轮），已定位为评估框架升级项，而非 Agent 缺陷。&lt;/p&gt;&#10;  &lt;/div&gt;&#10;  &lt;div style={{ flexShrink: 0, height: 40, display: 'flex', alignItems: 'flex-end', justifyContent: 'space-between' }}&gt;&#10;    &lt;span style={{ color: '#BD9B56', fontSize: 12, letterSpacing: '0.1em' }}&gt;云溪花园 · 智慧社区&lt;/span&gt;&#10;    &lt;span style={{ color: '#a09b8c', fontSize: 12 }}&gt;12 / 15&lt;/span&gt;&#10;  &lt;/div&gt;&#10;&lt;/Slide&gt;"/>
+        <p:cNvPr id="95" name="" descr="&lt;Slide style={{ width: '1280px', height: '720px', background: '#FBFCFA', position: 'relative', padding: '30px 56px', boxSizing: 'border-box', display: 'flex', flexDirection: 'column' }}&gt;&#10;  &lt;div style={{ flexShrink: 0 }}&gt;&#10;    &lt;div style={{ color: '#BD9B56', fontSize: 12, letterSpacing: '0.25em', marginBottom: 5 }}&gt;03 · 成果与验证&lt;/div&gt;&#10;    &lt;h2 style={{ fontSize: 27, fontWeight: 'bold', color: '#172133', margin: 0, lineHeight: 1.25 }}&gt;量化评估：方法 · 流程 · 指标判定&lt;/h2&gt;&#10;  &lt;/div&gt;&#10;  &lt;div style={{ flex: 1, display: 'flex', alignItems: 'stretch', gap: 18, marginTop: 12 }}&gt;&#10;    {/* 左栏：方法 + 流程 */}&#10;    &lt;div style={{ flex: 1, display: 'flex', flexDirection: 'column', gap: 10 }}&gt;&#10;      {/* 评估方法（前情） */}&#10;      &lt;div style={{ background: '#fff', borderRadius: 10, padding: '14px 18px', boxShadow: '0 4px 16px rgba(23,33,51,0.06)' }}&gt;&#10;        &lt;div style={{ fontSize: 13, color: '#BD9B56', fontWeight: 'bold', letterSpacing: '0.1em', marginBottom: 8 }}&gt;为什么要额外评估 AI&lt;/div&gt;&#10;        &lt;div style={{ fontSize: 12, color: '#5F5E5A', lineHeight: 1.65, marginBottom: 8 }}&gt;传统软件只验证「输入 → 输出」；AI Agent 还必须验证中间链路，否则「答得对」不等于「办得成」：&lt;/div&gt;&#10;        &lt;div style={{ display: 'flex', alignItems: 'center', gap: 6, flexWrap: 'wrap', fontSize: 11.5 }}&gt;&#10;          &lt;span style={{ color: '#172133', fontWeight: 'bold' }}&gt;输入&lt;/span&gt;&lt;span style={{ color: '#a09b8c' }}&gt;→&lt;/span&gt;&#10;          &lt;span style={{ color: '#172133', fontWeight: 'bold' }}&gt;理解&lt;/span&gt;&lt;span style={{ color: '#a09b8c' }}&gt;→&lt;/span&gt;&#10;          &lt;span style={{ color: '#172133', fontWeight: 'bold' }}&gt;决策&lt;/span&gt;&lt;span style={{ color: '#a09b8c' }}&gt;→&lt;/span&gt;&#10;          &lt;span style={{ color: '#172133', fontWeight: 'bold' }}&gt;工具选择&lt;/span&gt;&lt;span style={{ color: '#a09b8c' }}&gt;→&lt;/span&gt;&#10;          &lt;span style={{ color: '#172133', fontWeight: 'bold' }}&gt;知识检索&lt;/span&gt;&lt;span style={{ color: '#a09b8c' }}&gt;→&lt;/span&gt;&#10;          &lt;span style={{ color: '#172133', fontWeight: 'bold' }}&gt;最终答案&lt;/span&gt;&#10;        &lt;/div&gt;&#10;        &lt;div style={{ fontSize: 12, color: '#6b7075', lineHeight: 1.6, marginTop: 8, paddingTop: 8, borderTop: '1px solid rgba(34,57,94,0.08)' }}&gt;对应建立三层评估：&lt;span style={{ color: '#172133', fontWeight: 'bold' }}&gt;Agent 评估&lt;/span&gt;（意图 / 工具 / 工作流）＋ &lt;span style={{ color: '#172133', fontWeight: 'bold' }}&gt;RAG 评估&lt;/span&gt;（检索 / 答案）＋ &lt;span style={{ color: '#172133', fontWeight: 'bold' }}&gt;端到端评估&lt;/span&gt;（完整业务闭环）。&lt;/div&gt;&#10;      &lt;/div&gt;&#10;      {/* 测试流程 */}&#10;      &lt;div style={{ background: '#fff', borderRadius: 10, padding: '14px 18px', boxShadow: '0 4px 16px rgba(23,33,51,0.06)' }}&gt;&#10;        &lt;div style={{ fontSize: 13, color: '#BD9B56', fontWeight: 'bold', letterSpacing: '0.1em', marginBottom: 8 }}&gt;测试怎么进行&lt;/div&gt;&#10;        &lt;div style={{ display: 'flex', gap: 8 }}&gt;&#10;          {[&#10;            ['① 构建数据集', '意图 / 工具 / 工作流 / 知识问答 4 类用例'],&#10;            ['② 运行 Agent', 'python 跑评估，收集 trace'],&#10;            ['③ 比对期望', '预测值 vs 标注期望值'],&#10;            ['④ 生成报告', '指标 + 失败用例定位'],&#10;          ].map(([t, d]) =&gt; (&#10;            &lt;div key={t} style={{ flex: 1, background: 'rgba(189,155,86,0.07)', borderRadius: 8, padding: '8px 10px' }}&gt;&#10;              &lt;div style={{ fontSize: 11.5, color: '#172133', fontWeight: 'bold', marginBottom: 3 }}&gt;{t}&lt;/div&gt;&#10;              &lt;div style={{ fontSize: 10.5, color: '#6b7075', lineHeight: 1.4 }}&gt;{d}&lt;/div&gt;&#10;            &lt;/div&gt;&#10;          ))}&#10;        &lt;/div&gt;&#10;      &lt;/div&gt;&#10;    &lt;/div&gt;&#10;    {/* 右栏：指标判定 + 结果 */}&#10;    &lt;div style={{ flex: '0 0 440px', display: 'flex', flexDirection: 'column', gap: 8 }}&gt;&#10;      {[&#10;        ['意图识别', '100%', '预测意图 = 期望意图，正确数 / 总用例', '83.33% → 100%'],&#10;        ['RAG 召回 Recall@5', '100%', 'top-5 检索结果是否包含正确文档', '检索质量稳定达标'],&#10;        ['RAG 答案准确率', '100%', '期望关键词全部覆盖（关键词覆盖度）', '50% → 100%'],&#10;      ].map(([name, val, judge, note]) =&gt; (&#10;        &lt;div key={name} style={{ background: '#fff', borderRadius: 10, padding: '10px 16px', boxShadow: '0 4px 16px rgba(23,33,51,0.06)', display: 'flex', alignItems: 'center', gap: 14 }}&gt;&#10;          &lt;div style={{ flex: 1 }}&gt;&#10;            &lt;div style={{ fontSize: 13.5, color: '#172133', fontWeight: 'bold' }}&gt;{name}&lt;/div&gt;&#10;            &lt;div style={{ fontSize: 11, color: '#6b7075', marginTop: 3, lineHeight: 1.5 }}&gt;判定：{judge}&lt;/div&gt;&#10;            &lt;div style={{ fontSize: 10.5, color: '#a09b8c', marginTop: 2 }}&gt;{note}&lt;/div&gt;&#10;          &lt;/div&gt;&#10;          &lt;div style={{ fontSize: 30, fontWeight: 'bold', color: '#BD9B56', fontFamily: 'Inter, sans-serif', minWidth: 78, textAlign: 'right' }}&gt;{val}&lt;/div&gt;&#10;        &lt;/div&gt;&#10;      ))}&#10;      &lt;div style={{ background: 'linear-gradient(135deg, #172133 0%, #22395E 100%)', borderRadius: 10, padding: '10px 16px', display: 'flex', alignItems: 'center', gap: 14 }}&gt;&#10;        &lt;div style={{ flex: 1 }}&gt;&#10;          &lt;div style={{ fontSize: 13.5, color: '#FBFCFA', fontWeight: 'bold' }}&gt;单元测试 · CI 全绿&lt;/div&gt;&#10;          &lt;div style={{ fontSize: 11, color: 'rgba(251,252,250,0.75)', marginTop: 3, lineHeight: 1.5 }}&gt;判定：pytest 单测 + GitHub Actions 每次 push 自动跑&lt;/div&gt;&#10;        &lt;/div&gt;&#10;        &lt;div style={{ fontSize: 28, fontWeight: 'bold', color: '#BD9B56', fontFamily: 'Inter, sans-serif', minWidth: 78, textAlign: 'right' }}&gt;113+30&lt;/div&gt;&#10;      &lt;/div&gt;&#10;    &lt;/div&gt;&#10;  &lt;/div&gt;&#10;  &lt;div style={{ flexShrink: 0, background: 'rgba(189,155,86,0.10)', borderLeft: '4px solid #BD9B56', borderRadius: '0 8px 8px 0', padding: '10px 18px', marginTop: 10 }}&gt;&#10;    &lt;p style={{ fontSize: 12.5, color: '#172133', margin: 0, lineHeight: 1.55 }}&gt;&lt;span style={{ color: '#BD9B56', fontWeight: 'bold' }}&gt;评估驱动优化：&lt;/span&gt;RAG 答案 50% → 100% 源于发现「评估指标用脆弱子串匹配」并改为「关键词覆盖度」、同时优化答案生成 prompt。工具选择 / 参数提取 / 工作流三项受「报修多轮交互」设计影响（用例按单轮设计、实际走 pending_repair 多轮），已定位为评估框架升级项，而非 Agent 缺陷。&lt;/p&gt;&#10;  &lt;/div&gt;&#10;  &lt;div style={{ flexShrink: 0, height: 32, display: 'flex', alignItems: 'flex-end', justifyContent: 'space-between' }}&gt;&#10;    &lt;span style={{ color: '#BD9B56', fontSize: 12, letterSpacing: '0.1em' }}&gt;云溪花园 · 智慧社区&lt;/span&gt;&#10;    &lt;span style={{ color: '#a09b8c', fontSize: 12 }}&gt;12 / 15&lt;/span&gt;&#10;  &lt;/div&gt;&#10;&lt;/Slide&gt;"/>
         <p:cNvGrpSpPr/>
         <p:nvPr/>
       </p:nvGrpSpPr>
@@ -4886,8 +4886,8 @@
         </p:nvSpPr>
         <p:spPr>
           <a:xfrm rot="0" flipH="0" flipV="0">
-            <a:off x="609600" y="381000"/>
-            <a:ext cx="10972800" cy="152400"/>
+            <a:off x="533400" y="285750"/>
+            <a:ext cx="11125200" cy="142875"/>
           </a:xfrm>
           <a:prstGeom prst="rect"/>
         </p:spPr>
@@ -4900,7 +4900,7 @@
               </a:lnSpc>
             </a:pPr>
             <a:r>
-              <a:rPr lang="en-US" sz="975" spc="-9223372036854775808">
+              <a:rPr lang="en-US" sz="900" spc="-9223372036854775808">
                 <a:solidFill>
                   <a:srgbClr val="BD9B56"/>
                 </a:solidFill>
@@ -4910,7 +4910,7 @@
               <a:t>03 · </a:t>
             </a:r>
             <a:r>
-              <a:rPr lang="zh-CN" sz="975" spc="-9223372036854775808">
+              <a:rPr lang="zh-CN" sz="900" spc="-9223372036854775808">
                 <a:solidFill>
                   <a:srgbClr val="BD9B56"/>
                 </a:solidFill>
@@ -4931,112 +4931,87 @@
         </p:nvSpPr>
         <p:spPr>
           <a:xfrm rot="0" flipH="0" flipV="0">
-            <a:off x="609600" y="609600"/>
-            <a:ext cx="10972800" cy="447675"/>
-          </a:xfrm>
-          <a:prstGeom prst="rect"/>
-        </p:spPr>
-        <p:txBody>
-          <a:bodyPr wrap="none" lIns="0" tIns="0" rIns="0" bIns="0"/>
-          <a:p>
-            <a:pPr>
-              <a:lnSpc>
-                <a:spcPct val="130000"/>
-              </a:lnSpc>
-            </a:pPr>
-            <a:r>
-              <a:rPr lang="zh-CN" sz="2250" b="1">
+            <a:off x="533400" y="476250"/>
+            <a:ext cx="11125200" cy="390525"/>
+          </a:xfrm>
+          <a:prstGeom prst="rect"/>
+        </p:spPr>
+        <p:txBody>
+          <a:bodyPr wrap="none" lIns="0" tIns="0" rIns="0" bIns="0"/>
+          <a:p>
+            <a:pPr>
+              <a:lnSpc>
+                <a:spcPct val="125000"/>
+              </a:lnSpc>
+            </a:pPr>
+            <a:r>
+              <a:rPr lang="zh-CN" sz="2025" b="1">
                 <a:solidFill>
                   <a:srgbClr val="172133"/>
                 </a:solidFill>
                 <a:latin typeface="Microsoft YaHei"/>
                 <a:ea typeface="Microsoft YaHei"/>
               </a:rPr>
-              <a:t>量化评估：核心链路指标</a:t>
-            </a:r>
-            <a:r>
-              <a:rPr lang="en-US" sz="2250" b="1">
+              <a:t>量化评估：方法</a:t>
+            </a:r>
+            <a:r>
+              <a:rPr lang="en-US" sz="2025" b="1">
                 <a:solidFill>
                   <a:srgbClr val="172133"/>
                 </a:solidFill>
                 <a:latin typeface="Microsoft YaHei"/>
                 <a:ea typeface="Microsoft YaHei"/>
               </a:rPr>
-              <a:t> 100%</a:t>
-            </a:r>
-            <a:endParaRPr/>
-          </a:p>
-        </p:txBody>
-      </p:sp>
-      <p:sp>
-        <p:nvSpPr>
-          <p:cNvPr id="99" name="" descr="{&quot;isTemplate&quot;:true,&quot;type&quot;:&quot;text&quot;}"/>
-          <p:cNvSpPr txBox="1"/>
-          <p:nvPr/>
-        </p:nvSpPr>
-        <p:spPr>
-          <a:xfrm rot="0" flipH="0" flipV="0">
-            <a:off x="609600" y="1133475"/>
-            <a:ext cx="10972800" cy="161925"/>
-          </a:xfrm>
-          <a:prstGeom prst="rect"/>
-        </p:spPr>
-        <p:txBody>
-          <a:bodyPr wrap="none" lIns="0" tIns="0" rIns="0" bIns="0"/>
-          <a:p>
-            <a:pPr>
-              <a:lnSpc>
-                <a:spcPct val="100000"/>
-              </a:lnSpc>
-            </a:pPr>
-            <a:r>
-              <a:rPr lang="zh-CN" sz="1050">
-                <a:solidFill>
-                  <a:srgbClr val="6B7075"/>
-                </a:solidFill>
-                <a:latin typeface="Microsoft YaHei"/>
-                <a:ea typeface="Microsoft YaHei"/>
-              </a:rPr>
-              <a:t>建立可量化的评估体系，用数据找到</a:t>
-            </a:r>
-            <a:r>
-              <a:rPr lang="en-US" sz="1050">
-                <a:solidFill>
-                  <a:srgbClr val="6B7075"/>
-                </a:solidFill>
-                <a:latin typeface="Microsoft YaHei"/>
-                <a:ea typeface="Microsoft YaHei"/>
-              </a:rPr>
-              <a:t> bug</a:t>
-            </a:r>
-            <a:r>
-              <a:rPr lang="zh-CN" sz="1050">
-                <a:solidFill>
-                  <a:srgbClr val="6B7075"/>
-                </a:solidFill>
-                <a:latin typeface="Microsoft YaHei"/>
-                <a:ea typeface="Microsoft YaHei"/>
-              </a:rPr>
-              <a:t>、用数据证明修复</a:t>
-            </a:r>
-            <a:endParaRPr/>
-          </a:p>
-        </p:txBody>
-      </p:sp>
-      <p:sp>
-        <p:nvSpPr>
-          <p:cNvPr id="100" name=""/>
+              <a:t> · </a:t>
+            </a:r>
+            <a:r>
+              <a:rPr lang="zh-CN" sz="2025" b="1">
+                <a:solidFill>
+                  <a:srgbClr val="172133"/>
+                </a:solidFill>
+                <a:latin typeface="Microsoft YaHei"/>
+                <a:ea typeface="Microsoft YaHei"/>
+              </a:rPr>
+              <a:t>流程</a:t>
+            </a:r>
+            <a:r>
+              <a:rPr lang="en-US" sz="2025" b="1">
+                <a:solidFill>
+                  <a:srgbClr val="172133"/>
+                </a:solidFill>
+                <a:latin typeface="Microsoft YaHei"/>
+                <a:ea typeface="Microsoft YaHei"/>
+              </a:rPr>
+              <a:t> · </a:t>
+            </a:r>
+            <a:r>
+              <a:rPr lang="zh-CN" sz="2025" b="1">
+                <a:solidFill>
+                  <a:srgbClr val="172133"/>
+                </a:solidFill>
+                <a:latin typeface="Microsoft YaHei"/>
+                <a:ea typeface="Microsoft YaHei"/>
+              </a:rPr>
+              <a:t>指标判定</a:t>
+            </a:r>
+            <a:endParaRPr/>
+          </a:p>
+        </p:txBody>
+      </p:sp>
+      <p:sp>
+        <p:nvSpPr>
+          <p:cNvPr id="99" name=""/>
           <p:cNvSpPr/>
           <p:nvPr/>
         </p:nvSpPr>
         <p:spPr>
           <a:xfrm rot="0" flipH="0" flipV="0">
-            <a:off x="609600" y="2228850"/>
-            <a:ext cx="2619375" cy="2228850"/>
+            <a:off x="533400" y="981075"/>
+            <a:ext cx="6762750" cy="1781175"/>
           </a:xfrm>
           <a:prstGeom prst="roundRect">
             <a:avLst>
-              <a:gd name="adj" fmla="val 5128"/>
+              <a:gd name="adj" fmla="val 5348"/>
             </a:avLst>
           </a:prstGeom>
           <a:solidFill>
@@ -5044,9 +5019,9 @@
           </a:solidFill>
           <a:ln/>
           <a:effectLst>
-            <a:outerShdw blurRad="228600" dist="57150" dir="5400000">
+            <a:outerShdw blurRad="152400" dist="38100" dir="5400000">
               <a:srgbClr val="172133">
-                <a:alpha val="8000"/>
+                <a:alpha val="6000"/>
               </a:srgbClr>
             </a:outerShdw>
           </a:effectLst>
@@ -5058,188 +5033,531 @@
       </p:sp>
       <p:sp>
         <p:nvSpPr>
-          <p:cNvPr id="101" name=""/>
+          <p:cNvPr id="100" name="" descr="{&quot;isTemplate&quot;:true,&quot;type&quot;:&quot;text&quot;}"/>
+          <p:cNvSpPr txBox="1"/>
+          <p:nvPr/>
+        </p:nvSpPr>
+        <p:spPr>
+          <a:xfrm rot="0" flipH="0" flipV="0">
+            <a:off x="704850" y="1114425"/>
+            <a:ext cx="6419850" cy="152400"/>
+          </a:xfrm>
+          <a:prstGeom prst="rect"/>
+        </p:spPr>
+        <p:txBody>
+          <a:bodyPr wrap="none" lIns="0" tIns="0" rIns="0" bIns="0"/>
+          <a:p>
+            <a:pPr>
+              <a:lnSpc>
+                <a:spcPct val="100000"/>
+              </a:lnSpc>
+            </a:pPr>
+            <a:r>
+              <a:rPr lang="zh-CN" sz="975" spc="-9223372036854775808">
+                <a:solidFill>
+                  <a:srgbClr val="BD9B56"/>
+                </a:solidFill>
+                <a:latin typeface="Microsoft YaHei"/>
+                <a:ea typeface="Microsoft YaHei"/>
+              </a:rPr>
+              <a:t>为什么要额外评估</a:t>
+            </a:r>
+            <a:r>
+              <a:rPr lang="en-US" sz="975" spc="-9223372036854775808">
+                <a:solidFill>
+                  <a:srgbClr val="BD9B56"/>
+                </a:solidFill>
+                <a:latin typeface="Microsoft YaHei"/>
+                <a:ea typeface="Microsoft YaHei"/>
+              </a:rPr>
+              <a:t> AI</a:t>
+            </a:r>
+            <a:endParaRPr/>
+          </a:p>
+        </p:txBody>
+      </p:sp>
+      <p:sp>
+        <p:nvSpPr>
+          <p:cNvPr id="101" name="" descr="{&quot;isTemplate&quot;:true,&quot;type&quot;:&quot;text&quot;}"/>
+          <p:cNvSpPr txBox="1"/>
+          <p:nvPr/>
+        </p:nvSpPr>
+        <p:spPr>
+          <a:xfrm rot="0" flipH="0" flipV="0">
+            <a:off x="704850" y="1343025"/>
+            <a:ext cx="6419850" cy="228600"/>
+          </a:xfrm>
+          <a:prstGeom prst="rect"/>
+        </p:spPr>
+        <p:txBody>
+          <a:bodyPr wrap="none" lIns="0" tIns="0" rIns="0" bIns="0"/>
+          <a:p>
+            <a:pPr>
+              <a:lnSpc>
+                <a:spcPct val="165000"/>
+              </a:lnSpc>
+            </a:pPr>
+            <a:r>
+              <a:rPr lang="zh-CN" sz="900">
+                <a:solidFill>
+                  <a:srgbClr val="5F5E5A"/>
+                </a:solidFill>
+                <a:latin typeface="Microsoft YaHei"/>
+                <a:ea typeface="Microsoft YaHei"/>
+              </a:rPr>
+              <a:t>传统软件只验证「输入</a:t>
+            </a:r>
+            <a:r>
+              <a:rPr lang="en-US" sz="900">
+                <a:solidFill>
+                  <a:srgbClr val="5F5E5A"/>
+                </a:solidFill>
+                <a:latin typeface="Microsoft YaHei"/>
+                <a:ea typeface="Microsoft YaHei"/>
+              </a:rPr>
+              <a:t> → </a:t>
+            </a:r>
+            <a:r>
+              <a:rPr lang="zh-CN" sz="900">
+                <a:solidFill>
+                  <a:srgbClr val="5F5E5A"/>
+                </a:solidFill>
+                <a:latin typeface="Microsoft YaHei"/>
+                <a:ea typeface="Microsoft YaHei"/>
+              </a:rPr>
+              <a:t>输出」；</a:t>
+            </a:r>
+            <a:r>
+              <a:rPr lang="en-US" sz="900">
+                <a:solidFill>
+                  <a:srgbClr val="5F5E5A"/>
+                </a:solidFill>
+                <a:latin typeface="Microsoft YaHei"/>
+                <a:ea typeface="Microsoft YaHei"/>
+              </a:rPr>
+              <a:t>AI Agent </a:t>
+            </a:r>
+            <a:r>
+              <a:rPr lang="zh-CN" sz="900">
+                <a:solidFill>
+                  <a:srgbClr val="5F5E5A"/>
+                </a:solidFill>
+                <a:latin typeface="Microsoft YaHei"/>
+                <a:ea typeface="Microsoft YaHei"/>
+              </a:rPr>
+              <a:t>还必须验证中间链路，否则「答得对」不等于「办得成」：</a:t>
+            </a:r>
+            <a:endParaRPr/>
+          </a:p>
+        </p:txBody>
+      </p:sp>
+      <p:sp>
+        <p:nvSpPr>
+          <p:cNvPr id="102" name="" descr="{&quot;isTemplate&quot;:true,&quot;type&quot;:&quot;text&quot;}"/>
+          <p:cNvSpPr txBox="1"/>
+          <p:nvPr/>
+        </p:nvSpPr>
+        <p:spPr>
+          <a:xfrm rot="0" flipH="0" flipV="0">
+            <a:off x="704850" y="1647825"/>
+            <a:ext cx="219075" cy="133350"/>
+          </a:xfrm>
+          <a:prstGeom prst="rect"/>
+        </p:spPr>
+        <p:txBody>
+          <a:bodyPr wrap="none" lIns="0" tIns="0" rIns="0" bIns="0"/>
+          <a:p>
+            <a:pPr>
+              <a:lnSpc>
+                <a:spcPct val="100000"/>
+              </a:lnSpc>
+            </a:pPr>
+            <a:r>
+              <a:rPr lang="zh-CN" sz="863" b="1">
+                <a:solidFill>
+                  <a:srgbClr val="172133"/>
+                </a:solidFill>
+                <a:latin typeface="Microsoft YaHei"/>
+                <a:ea typeface="Microsoft YaHei"/>
+              </a:rPr>
+              <a:t>输入</a:t>
+            </a:r>
+            <a:endParaRPr/>
+          </a:p>
+        </p:txBody>
+      </p:sp>
+      <p:sp>
+        <p:nvSpPr>
+          <p:cNvPr id="103" name="" descr="{&quot;isTemplate&quot;:true,&quot;type&quot;:&quot;text&quot;}"/>
+          <p:cNvSpPr txBox="1"/>
+          <p:nvPr/>
+        </p:nvSpPr>
+        <p:spPr>
+          <a:xfrm rot="0" flipH="0" flipV="0">
+            <a:off x="981075" y="1647825"/>
+            <a:ext cx="114300" cy="133350"/>
+          </a:xfrm>
+          <a:prstGeom prst="rect"/>
+        </p:spPr>
+        <p:txBody>
+          <a:bodyPr wrap="none" lIns="0" tIns="0" rIns="0" bIns="0"/>
+          <a:p>
+            <a:pPr>
+              <a:lnSpc>
+                <a:spcPct val="100000"/>
+              </a:lnSpc>
+            </a:pPr>
+            <a:r>
+              <a:rPr sz="863">
+                <a:solidFill>
+                  <a:srgbClr val="A09B8C"/>
+                </a:solidFill>
+                <a:latin typeface="Microsoft YaHei"/>
+                <a:ea typeface="Microsoft YaHei"/>
+              </a:rPr>
+              <a:t>→</a:t>
+            </a:r>
+            <a:endParaRPr/>
+          </a:p>
+        </p:txBody>
+      </p:sp>
+      <p:sp>
+        <p:nvSpPr>
+          <p:cNvPr id="104" name="" descr="{&quot;isTemplate&quot;:true,&quot;type&quot;:&quot;text&quot;}"/>
+          <p:cNvSpPr txBox="1"/>
+          <p:nvPr/>
+        </p:nvSpPr>
+        <p:spPr>
+          <a:xfrm rot="0" flipH="0" flipV="0">
+            <a:off x="1152525" y="1647825"/>
+            <a:ext cx="219075" cy="133350"/>
+          </a:xfrm>
+          <a:prstGeom prst="rect"/>
+        </p:spPr>
+        <p:txBody>
+          <a:bodyPr wrap="none" lIns="0" tIns="0" rIns="0" bIns="0"/>
+          <a:p>
+            <a:pPr>
+              <a:lnSpc>
+                <a:spcPct val="100000"/>
+              </a:lnSpc>
+            </a:pPr>
+            <a:r>
+              <a:rPr lang="zh-CN" sz="863" b="1">
+                <a:solidFill>
+                  <a:srgbClr val="172133"/>
+                </a:solidFill>
+                <a:latin typeface="Microsoft YaHei"/>
+                <a:ea typeface="Microsoft YaHei"/>
+              </a:rPr>
+              <a:t>理解</a:t>
+            </a:r>
+            <a:endParaRPr/>
+          </a:p>
+        </p:txBody>
+      </p:sp>
+      <p:sp>
+        <p:nvSpPr>
+          <p:cNvPr id="105" name="" descr="{&quot;isTemplate&quot;:true,&quot;type&quot;:&quot;text&quot;}"/>
+          <p:cNvSpPr txBox="1"/>
+          <p:nvPr/>
+        </p:nvSpPr>
+        <p:spPr>
+          <a:xfrm rot="0" flipH="0" flipV="0">
+            <a:off x="1428750" y="1647825"/>
+            <a:ext cx="114300" cy="133350"/>
+          </a:xfrm>
+          <a:prstGeom prst="rect"/>
+        </p:spPr>
+        <p:txBody>
+          <a:bodyPr wrap="none" lIns="0" tIns="0" rIns="0" bIns="0"/>
+          <a:p>
+            <a:pPr>
+              <a:lnSpc>
+                <a:spcPct val="100000"/>
+              </a:lnSpc>
+            </a:pPr>
+            <a:r>
+              <a:rPr sz="863">
+                <a:solidFill>
+                  <a:srgbClr val="A09B8C"/>
+                </a:solidFill>
+                <a:latin typeface="Microsoft YaHei"/>
+                <a:ea typeface="Microsoft YaHei"/>
+              </a:rPr>
+              <a:t>→</a:t>
+            </a:r>
+            <a:endParaRPr/>
+          </a:p>
+        </p:txBody>
+      </p:sp>
+      <p:sp>
+        <p:nvSpPr>
+          <p:cNvPr id="106" name="" descr="{&quot;isTemplate&quot;:true,&quot;type&quot;:&quot;text&quot;}"/>
+          <p:cNvSpPr txBox="1"/>
+          <p:nvPr/>
+        </p:nvSpPr>
+        <p:spPr>
+          <a:xfrm rot="0" flipH="0" flipV="0">
+            <a:off x="1600200" y="1647825"/>
+            <a:ext cx="219075" cy="133350"/>
+          </a:xfrm>
+          <a:prstGeom prst="rect"/>
+        </p:spPr>
+        <p:txBody>
+          <a:bodyPr wrap="none" lIns="0" tIns="0" rIns="0" bIns="0"/>
+          <a:p>
+            <a:pPr>
+              <a:lnSpc>
+                <a:spcPct val="100000"/>
+              </a:lnSpc>
+            </a:pPr>
+            <a:r>
+              <a:rPr lang="zh-CN" sz="863" b="1">
+                <a:solidFill>
+                  <a:srgbClr val="172133"/>
+                </a:solidFill>
+                <a:latin typeface="Microsoft YaHei"/>
+                <a:ea typeface="Microsoft YaHei"/>
+              </a:rPr>
+              <a:t>决策</a:t>
+            </a:r>
+            <a:endParaRPr/>
+          </a:p>
+        </p:txBody>
+      </p:sp>
+      <p:sp>
+        <p:nvSpPr>
+          <p:cNvPr id="107" name="" descr="{&quot;isTemplate&quot;:true,&quot;type&quot;:&quot;text&quot;}"/>
+          <p:cNvSpPr txBox="1"/>
+          <p:nvPr/>
+        </p:nvSpPr>
+        <p:spPr>
+          <a:xfrm rot="0" flipH="0" flipV="0">
+            <a:off x="1876425" y="1647825"/>
+            <a:ext cx="114300" cy="133350"/>
+          </a:xfrm>
+          <a:prstGeom prst="rect"/>
+        </p:spPr>
+        <p:txBody>
+          <a:bodyPr wrap="none" lIns="0" tIns="0" rIns="0" bIns="0"/>
+          <a:p>
+            <a:pPr>
+              <a:lnSpc>
+                <a:spcPct val="100000"/>
+              </a:lnSpc>
+            </a:pPr>
+            <a:r>
+              <a:rPr sz="863">
+                <a:solidFill>
+                  <a:srgbClr val="A09B8C"/>
+                </a:solidFill>
+                <a:latin typeface="Microsoft YaHei"/>
+                <a:ea typeface="Microsoft YaHei"/>
+              </a:rPr>
+              <a:t>→</a:t>
+            </a:r>
+            <a:endParaRPr/>
+          </a:p>
+        </p:txBody>
+      </p:sp>
+      <p:sp>
+        <p:nvSpPr>
+          <p:cNvPr id="108" name="" descr="{&quot;isTemplate&quot;:true,&quot;type&quot;:&quot;text&quot;}"/>
+          <p:cNvSpPr txBox="1"/>
+          <p:nvPr/>
+        </p:nvSpPr>
+        <p:spPr>
+          <a:xfrm rot="0" flipH="0" flipV="0">
+            <a:off x="2047875" y="1647825"/>
+            <a:ext cx="438150" cy="133350"/>
+          </a:xfrm>
+          <a:prstGeom prst="rect"/>
+        </p:spPr>
+        <p:txBody>
+          <a:bodyPr wrap="none" lIns="0" tIns="0" rIns="0" bIns="0"/>
+          <a:p>
+            <a:pPr>
+              <a:lnSpc>
+                <a:spcPct val="100000"/>
+              </a:lnSpc>
+            </a:pPr>
+            <a:r>
+              <a:rPr lang="zh-CN" sz="863" b="1">
+                <a:solidFill>
+                  <a:srgbClr val="172133"/>
+                </a:solidFill>
+                <a:latin typeface="Microsoft YaHei"/>
+                <a:ea typeface="Microsoft YaHei"/>
+              </a:rPr>
+              <a:t>工具选择</a:t>
+            </a:r>
+            <a:endParaRPr/>
+          </a:p>
+        </p:txBody>
+      </p:sp>
+      <p:sp>
+        <p:nvSpPr>
+          <p:cNvPr id="109" name="" descr="{&quot;isTemplate&quot;:true,&quot;type&quot;:&quot;text&quot;}"/>
+          <p:cNvSpPr txBox="1"/>
+          <p:nvPr/>
+        </p:nvSpPr>
+        <p:spPr>
+          <a:xfrm rot="0" flipH="0" flipV="0">
+            <a:off x="2543175" y="1647825"/>
+            <a:ext cx="114300" cy="133350"/>
+          </a:xfrm>
+          <a:prstGeom prst="rect"/>
+        </p:spPr>
+        <p:txBody>
+          <a:bodyPr wrap="none" lIns="0" tIns="0" rIns="0" bIns="0"/>
+          <a:p>
+            <a:pPr>
+              <a:lnSpc>
+                <a:spcPct val="100000"/>
+              </a:lnSpc>
+            </a:pPr>
+            <a:r>
+              <a:rPr sz="863">
+                <a:solidFill>
+                  <a:srgbClr val="A09B8C"/>
+                </a:solidFill>
+                <a:latin typeface="Microsoft YaHei"/>
+                <a:ea typeface="Microsoft YaHei"/>
+              </a:rPr>
+              <a:t>→</a:t>
+            </a:r>
+            <a:endParaRPr/>
+          </a:p>
+        </p:txBody>
+      </p:sp>
+      <p:sp>
+        <p:nvSpPr>
+          <p:cNvPr id="110" name="" descr="{&quot;isTemplate&quot;:true,&quot;type&quot;:&quot;text&quot;}"/>
+          <p:cNvSpPr txBox="1"/>
+          <p:nvPr/>
+        </p:nvSpPr>
+        <p:spPr>
+          <a:xfrm rot="0" flipH="0" flipV="0">
+            <a:off x="2714625" y="1647825"/>
+            <a:ext cx="438150" cy="133350"/>
+          </a:xfrm>
+          <a:prstGeom prst="rect"/>
+        </p:spPr>
+        <p:txBody>
+          <a:bodyPr wrap="none" lIns="0" tIns="0" rIns="0" bIns="0"/>
+          <a:p>
+            <a:pPr>
+              <a:lnSpc>
+                <a:spcPct val="100000"/>
+              </a:lnSpc>
+            </a:pPr>
+            <a:r>
+              <a:rPr lang="zh-CN" sz="863" b="1">
+                <a:solidFill>
+                  <a:srgbClr val="172133"/>
+                </a:solidFill>
+                <a:latin typeface="Microsoft YaHei"/>
+                <a:ea typeface="Microsoft YaHei"/>
+              </a:rPr>
+              <a:t>知识检索</a:t>
+            </a:r>
+            <a:endParaRPr/>
+          </a:p>
+        </p:txBody>
+      </p:sp>
+      <p:sp>
+        <p:nvSpPr>
+          <p:cNvPr id="111" name="" descr="{&quot;isTemplate&quot;:true,&quot;type&quot;:&quot;text&quot;}"/>
+          <p:cNvSpPr txBox="1"/>
+          <p:nvPr/>
+        </p:nvSpPr>
+        <p:spPr>
+          <a:xfrm rot="0" flipH="0" flipV="0">
+            <a:off x="3209925" y="1647825"/>
+            <a:ext cx="114300" cy="133350"/>
+          </a:xfrm>
+          <a:prstGeom prst="rect"/>
+        </p:spPr>
+        <p:txBody>
+          <a:bodyPr wrap="none" lIns="0" tIns="0" rIns="0" bIns="0"/>
+          <a:p>
+            <a:pPr>
+              <a:lnSpc>
+                <a:spcPct val="100000"/>
+              </a:lnSpc>
+            </a:pPr>
+            <a:r>
+              <a:rPr sz="863">
+                <a:solidFill>
+                  <a:srgbClr val="A09B8C"/>
+                </a:solidFill>
+                <a:latin typeface="Microsoft YaHei"/>
+                <a:ea typeface="Microsoft YaHei"/>
+              </a:rPr>
+              <a:t>→</a:t>
+            </a:r>
+            <a:endParaRPr/>
+          </a:p>
+        </p:txBody>
+      </p:sp>
+      <p:sp>
+        <p:nvSpPr>
+          <p:cNvPr id="112" name="" descr="{&quot;isTemplate&quot;:true,&quot;type&quot;:&quot;text&quot;}"/>
+          <p:cNvSpPr txBox="1"/>
+          <p:nvPr/>
+        </p:nvSpPr>
+        <p:spPr>
+          <a:xfrm rot="0" flipH="0" flipV="0">
+            <a:off x="3381375" y="1647825"/>
+            <a:ext cx="438150" cy="133350"/>
+          </a:xfrm>
+          <a:prstGeom prst="rect"/>
+        </p:spPr>
+        <p:txBody>
+          <a:bodyPr wrap="none" lIns="0" tIns="0" rIns="0" bIns="0"/>
+          <a:p>
+            <a:pPr>
+              <a:lnSpc>
+                <a:spcPct val="100000"/>
+              </a:lnSpc>
+            </a:pPr>
+            <a:r>
+              <a:rPr lang="zh-CN" sz="863" b="1">
+                <a:solidFill>
+                  <a:srgbClr val="172133"/>
+                </a:solidFill>
+                <a:latin typeface="Microsoft YaHei"/>
+                <a:ea typeface="Microsoft YaHei"/>
+              </a:rPr>
+              <a:t>最终答案</a:t>
+            </a:r>
+            <a:endParaRPr/>
+          </a:p>
+        </p:txBody>
+      </p:sp>
+      <p:sp>
+        <p:nvSpPr>
+          <p:cNvPr id="113" name=""/>
           <p:cNvSpPr/>
           <p:nvPr/>
         </p:nvSpPr>
         <p:spPr>
           <a:xfrm rot="0" flipH="0" flipV="0">
-            <a:off x="609600" y="2228850"/>
-            <a:ext cx="2619375" cy="2228850"/>
+            <a:off x="704850" y="1857375"/>
+            <a:ext cx="6419850" cy="781050"/>
           </a:xfrm>
           <a:custGeom>
             <a:pathLst>
-              <a:path w="275" h="234">
-                <a:moveTo>
-                  <a:pt x="264" y="0"/>
-                </a:moveTo>
-                <a:cubicBezTo>
-                  <a:pt x="269" y="0"/>
-                  <a:pt x="274" y="4"/>
-                  <a:pt x="275" y="10"/>
-                </a:cubicBezTo>
-                <a:cubicBezTo>
-                  <a:pt x="274" y="6"/>
-                  <a:pt x="271" y="4"/>
-                  <a:pt x="267" y="4"/>
-                </a:cubicBezTo>
-                <a:lnTo>
-                  <a:pt x="8" y="4"/>
-                </a:lnTo>
-                <a:cubicBezTo>
-                  <a:pt x="4" y="4"/>
-                  <a:pt x="1" y="7"/>
-                  <a:pt x="0" y="10"/>
-                </a:cubicBezTo>
-                <a:cubicBezTo>
-                  <a:pt x="1" y="4"/>
-                  <a:pt x="6" y="0"/>
-                  <a:pt x="12" y="0"/>
-                </a:cubicBezTo>
-                <a:lnTo>
-                  <a:pt x="263" y="0"/>
-                </a:lnTo>
-                <a:close/>
-              </a:path>
-            </a:pathLst>
-          </a:custGeom>
-          <a:solidFill>
-            <a:srgbClr val="BD9B56"/>
-          </a:solidFill>
-          <a:ln/>
-        </p:spPr>
-        <p:txBody>
-          <a:bodyPr/>
-          <a:p/>
-        </p:txBody>
-      </p:sp>
-      <p:sp>
-        <p:nvSpPr>
-          <p:cNvPr id="102" name="" descr="{&quot;isTemplate&quot;:true,&quot;type&quot;:&quot;text&quot;}"/>
-          <p:cNvSpPr txBox="1"/>
-          <p:nvPr/>
-        </p:nvSpPr>
-        <p:spPr>
-          <a:xfrm rot="0" flipH="0" flipV="0">
-            <a:off x="762000" y="2457450"/>
-            <a:ext cx="2314575" cy="152400"/>
-          </a:xfrm>
-          <a:prstGeom prst="rect"/>
-        </p:spPr>
-        <p:txBody>
-          <a:bodyPr wrap="none" lIns="0" tIns="0" rIns="0" bIns="0"/>
-          <a:p>
-            <a:pPr algn="ctr">
-              <a:lnSpc>
-                <a:spcPct val="100000"/>
-              </a:lnSpc>
-            </a:pPr>
-            <a:r>
-              <a:rPr lang="en-US" sz="975" spc="-9223372036854775808">
-                <a:solidFill>
-                  <a:srgbClr val="BD9B56"/>
-                </a:solidFill>
-                <a:latin typeface="Microsoft YaHei"/>
-                <a:ea typeface="Microsoft YaHei"/>
-              </a:rPr>
-              <a:t>INTENT</a:t>
-            </a:r>
-            <a:endParaRPr/>
-          </a:p>
-        </p:txBody>
-      </p:sp>
-      <p:sp>
-        <p:nvSpPr>
-          <p:cNvPr id="103" name="" descr="{&quot;isTemplate&quot;:true,&quot;type&quot;:&quot;text&quot;}"/>
-          <p:cNvSpPr txBox="1"/>
-          <p:nvPr/>
-        </p:nvSpPr>
-        <p:spPr>
-          <a:xfrm rot="0" flipH="0" flipV="0">
-            <a:off x="762000" y="2724150"/>
-            <a:ext cx="2314575" cy="685800"/>
-          </a:xfrm>
-          <a:prstGeom prst="rect"/>
-        </p:spPr>
-        <p:txBody>
-          <a:bodyPr wrap="none" lIns="0" tIns="0" rIns="0" bIns="0"/>
-          <a:p>
-            <a:pPr algn="ctr">
-              <a:lnSpc>
-                <a:spcPct val="100000"/>
-              </a:lnSpc>
-            </a:pPr>
-            <a:r>
-              <a:rPr lang="en-US" sz="4500">
-                <a:solidFill>
-                  <a:srgbClr val="172133"/>
-                </a:solidFill>
-                <a:latin typeface="Inter"/>
-                <a:ea typeface="Inter"/>
-              </a:rPr>
-              <a:t>100%</a:t>
-            </a:r>
-            <a:endParaRPr/>
-          </a:p>
-        </p:txBody>
-      </p:sp>
-      <p:sp>
-        <p:nvSpPr>
-          <p:cNvPr id="104" name="" descr="{&quot;isTemplate&quot;:true,&quot;type&quot;:&quot;text&quot;}"/>
-          <p:cNvSpPr txBox="1"/>
-          <p:nvPr/>
-        </p:nvSpPr>
-        <p:spPr>
-          <a:xfrm rot="0" flipH="0" flipV="0">
-            <a:off x="762000" y="3524250"/>
-            <a:ext cx="2314575" cy="247650"/>
-          </a:xfrm>
-          <a:prstGeom prst="rect"/>
-        </p:spPr>
-        <p:txBody>
-          <a:bodyPr wrap="none" lIns="0" tIns="0" rIns="0" bIns="0"/>
-          <a:p>
-            <a:pPr algn="ctr">
-              <a:lnSpc>
-                <a:spcPct val="150000"/>
-              </a:lnSpc>
-            </a:pPr>
-            <a:r>
-              <a:rPr lang="zh-CN" sz="1050">
-                <a:solidFill>
-                  <a:srgbClr val="5F5E5A"/>
-                </a:solidFill>
-                <a:latin typeface="Microsoft YaHei"/>
-                <a:ea typeface="Microsoft YaHei"/>
-              </a:rPr>
-              <a:t>意图识别准确率</a:t>
-            </a:r>
-            <a:endParaRPr/>
-          </a:p>
-        </p:txBody>
-      </p:sp>
-      <p:sp>
-        <p:nvSpPr>
-          <p:cNvPr id="105" name=""/>
-          <p:cNvSpPr/>
-          <p:nvPr/>
-        </p:nvSpPr>
-        <p:spPr>
-          <a:xfrm rot="0" flipH="0" flipV="0">
-            <a:off x="762000" y="3886200"/>
-            <a:ext cx="2314575" cy="314325"/>
-          </a:xfrm>
-          <a:custGeom>
-            <a:pathLst>
-              <a:path w="243" h="33">
+              <a:path w="674" h="82">
                 <a:moveTo>
                   <a:pt x="0" y="0"/>
                 </a:moveTo>
                 <a:lnTo>
-                  <a:pt x="243" y="0"/>
+                  <a:pt x="674" y="0"/>
                 </a:lnTo>
                 <a:lnTo>
-                  <a:pt x="243" y="1"/>
+                  <a:pt x="674" y="1"/>
                 </a:lnTo>
                 <a:lnTo>
                   <a:pt x="0" y="1"/>
@@ -5250,7 +5568,7 @@
           </a:custGeom>
           <a:solidFill>
             <a:srgbClr val="22395E">
-              <a:alpha val="10000"/>
+              <a:alpha val="8000"/>
             </a:srgbClr>
           </a:solidFill>
           <a:ln/>
@@ -5262,83 +5580,143 @@
       </p:sp>
       <p:sp>
         <p:nvSpPr>
-          <p:cNvPr id="106" name="" descr="{&quot;isTemplate&quot;:true,&quot;type&quot;:&quot;text&quot;}"/>
-          <p:cNvSpPr txBox="1"/>
-          <p:nvPr/>
-        </p:nvSpPr>
-        <p:spPr>
-          <a:xfrm rot="0" flipH="0" flipV="0">
-            <a:off x="762000" y="3971925"/>
-            <a:ext cx="2314575" cy="142875"/>
-          </a:xfrm>
-          <a:prstGeom prst="rect"/>
-        </p:spPr>
-        <p:txBody>
-          <a:bodyPr wrap="none" lIns="0" tIns="0" rIns="0" bIns="0"/>
-          <a:p>
-            <a:pPr algn="ctr">
-              <a:lnSpc>
-                <a:spcPct val="100000"/>
-              </a:lnSpc>
-            </a:pPr>
-            <a:r>
-              <a:rPr lang="en-US" sz="900">
-                <a:solidFill>
-                  <a:srgbClr val="888780"/>
-                </a:solidFill>
-                <a:latin typeface="Microsoft YaHei"/>
-                <a:ea typeface="Microsoft YaHei"/>
-              </a:rPr>
-              <a:t>83.33% → 100% · </a:t>
-            </a:r>
-            <a:r>
-              <a:rPr lang="zh-CN" sz="900">
-                <a:solidFill>
-                  <a:srgbClr val="888780"/>
-                </a:solidFill>
-                <a:latin typeface="Microsoft YaHei"/>
-                <a:ea typeface="Microsoft YaHei"/>
-              </a:rPr>
-              <a:t>修复</a:t>
-            </a:r>
-            <a:r>
-              <a:rPr lang="en-US" sz="900">
-                <a:solidFill>
-                  <a:srgbClr val="888780"/>
-                </a:solidFill>
-                <a:latin typeface="Microsoft YaHei"/>
-                <a:ea typeface="Microsoft YaHei"/>
-              </a:rPr>
-              <a:t> 3 </a:t>
-            </a:r>
-            <a:r>
-              <a:rPr lang="zh-CN" sz="900">
-                <a:solidFill>
-                  <a:srgbClr val="888780"/>
-                </a:solidFill>
-                <a:latin typeface="Microsoft YaHei"/>
-                <a:ea typeface="Microsoft YaHei"/>
-              </a:rPr>
-              <a:t>处规则盲区</a:t>
-            </a:r>
-            <a:endParaRPr/>
-          </a:p>
-        </p:txBody>
-      </p:sp>
-      <p:sp>
-        <p:nvSpPr>
-          <p:cNvPr id="107" name=""/>
+          <p:cNvPr id="114" name="" descr="{&quot;isTemplate&quot;:true,&quot;type&quot;:&quot;text&quot;}"/>
+          <p:cNvSpPr txBox="1"/>
+          <p:nvPr/>
+        </p:nvSpPr>
+        <p:spPr>
+          <a:xfrm rot="0" flipH="0" flipV="0">
+            <a:off x="704850" y="1943100"/>
+            <a:ext cx="6419850" cy="228600"/>
+          </a:xfrm>
+          <a:prstGeom prst="rect"/>
+        </p:spPr>
+        <p:txBody>
+          <a:bodyPr wrap="none" lIns="0" tIns="0" rIns="0" bIns="0"/>
+          <a:p>
+            <a:pPr>
+              <a:lnSpc>
+                <a:spcPct val="160000"/>
+              </a:lnSpc>
+            </a:pPr>
+            <a:r>
+              <a:rPr lang="en-US" sz="900" b="1">
+                <a:solidFill>
+                  <a:srgbClr val="172133"/>
+                </a:solidFill>
+                <a:latin typeface="Microsoft YaHei"/>
+                <a:ea typeface="Microsoft YaHei"/>
+              </a:rPr>
+              <a:t>Agent </a:t>
+            </a:r>
+            <a:r>
+              <a:rPr lang="zh-CN" sz="900" b="1">
+                <a:solidFill>
+                  <a:srgbClr val="172133"/>
+                </a:solidFill>
+                <a:latin typeface="Microsoft YaHei"/>
+                <a:ea typeface="Microsoft YaHei"/>
+              </a:rPr>
+              <a:t>评估</a:t>
+            </a:r>
+            <a:endParaRPr/>
+          </a:p>
+        </p:txBody>
+      </p:sp>
+      <p:sp>
+        <p:nvSpPr>
+          <p:cNvPr id="115" name="" descr="{&quot;isTemplate&quot;:true,&quot;type&quot;:&quot;text&quot;}"/>
+          <p:cNvSpPr txBox="1"/>
+          <p:nvPr/>
+        </p:nvSpPr>
+        <p:spPr>
+          <a:xfrm rot="0" flipH="0" flipV="0">
+            <a:off x="704850" y="2171700"/>
+            <a:ext cx="6419850" cy="228600"/>
+          </a:xfrm>
+          <a:prstGeom prst="rect"/>
+        </p:spPr>
+        <p:txBody>
+          <a:bodyPr wrap="none" lIns="0" tIns="0" rIns="0" bIns="0"/>
+          <a:p>
+            <a:pPr>
+              <a:lnSpc>
+                <a:spcPct val="160000"/>
+              </a:lnSpc>
+            </a:pPr>
+            <a:r>
+              <a:rPr lang="en-US" sz="900" b="1">
+                <a:solidFill>
+                  <a:srgbClr val="172133"/>
+                </a:solidFill>
+                <a:latin typeface="Microsoft YaHei"/>
+                <a:ea typeface="Microsoft YaHei"/>
+              </a:rPr>
+              <a:t>RAG </a:t>
+            </a:r>
+            <a:r>
+              <a:rPr lang="zh-CN" sz="900" b="1">
+                <a:solidFill>
+                  <a:srgbClr val="172133"/>
+                </a:solidFill>
+                <a:latin typeface="Microsoft YaHei"/>
+                <a:ea typeface="Microsoft YaHei"/>
+              </a:rPr>
+              <a:t>评估</a:t>
+            </a:r>
+            <a:endParaRPr/>
+          </a:p>
+        </p:txBody>
+      </p:sp>
+      <p:sp>
+        <p:nvSpPr>
+          <p:cNvPr id="116" name="" descr="{&quot;isTemplate&quot;:true,&quot;type&quot;:&quot;text&quot;}"/>
+          <p:cNvSpPr txBox="1"/>
+          <p:nvPr/>
+        </p:nvSpPr>
+        <p:spPr>
+          <a:xfrm rot="0" flipH="0" flipV="0">
+            <a:off x="704850" y="2400300"/>
+            <a:ext cx="6419850" cy="228600"/>
+          </a:xfrm>
+          <a:prstGeom prst="rect"/>
+        </p:spPr>
+        <p:txBody>
+          <a:bodyPr wrap="none" lIns="0" tIns="0" rIns="0" bIns="0"/>
+          <a:p>
+            <a:pPr>
+              <a:lnSpc>
+                <a:spcPct val="160000"/>
+              </a:lnSpc>
+            </a:pPr>
+            <a:r>
+              <a:rPr lang="zh-CN" sz="900" b="1">
+                <a:solidFill>
+                  <a:srgbClr val="172133"/>
+                </a:solidFill>
+                <a:latin typeface="Microsoft YaHei"/>
+                <a:ea typeface="Microsoft YaHei"/>
+              </a:rPr>
+              <a:t>端到端评估</a:t>
+            </a:r>
+            <a:endParaRPr/>
+          </a:p>
+        </p:txBody>
+      </p:sp>
+      <p:sp>
+        <p:nvSpPr>
+          <p:cNvPr id="117" name=""/>
           <p:cNvSpPr/>
           <p:nvPr/>
         </p:nvSpPr>
         <p:spPr>
           <a:xfrm rot="0" flipH="0" flipV="0">
-            <a:off x="3400425" y="2228850"/>
-            <a:ext cx="2609850" cy="2228850"/>
+            <a:off x="533400" y="2857500"/>
+            <a:ext cx="6762750" cy="1152525"/>
           </a:xfrm>
           <a:prstGeom prst="roundRect">
             <a:avLst>
-              <a:gd name="adj" fmla="val 5128"/>
+              <a:gd name="adj" fmla="val 8264"/>
             </a:avLst>
           </a:prstGeom>
           <a:solidFill>
@@ -5346,9 +5724,9 @@
           </a:solidFill>
           <a:ln/>
           <a:effectLst>
-            <a:outerShdw blurRad="228600" dist="57150" dir="5400000">
+            <a:outerShdw blurRad="152400" dist="38100" dir="5400000">
               <a:srgbClr val="172133">
-                <a:alpha val="8000"/>
+                <a:alpha val="6000"/>
               </a:srgbClr>
             </a:outerShdw>
           </a:effectLst>
@@ -5360,209 +5738,58 @@
       </p:sp>
       <p:sp>
         <p:nvSpPr>
-          <p:cNvPr id="108" name=""/>
+          <p:cNvPr id="118" name="" descr="{&quot;isTemplate&quot;:true,&quot;type&quot;:&quot;text&quot;}"/>
+          <p:cNvSpPr txBox="1"/>
+          <p:nvPr/>
+        </p:nvSpPr>
+        <p:spPr>
+          <a:xfrm rot="0" flipH="0" flipV="0">
+            <a:off x="704850" y="2990850"/>
+            <a:ext cx="6419850" cy="152400"/>
+          </a:xfrm>
+          <a:prstGeom prst="rect"/>
+        </p:spPr>
+        <p:txBody>
+          <a:bodyPr wrap="none" lIns="0" tIns="0" rIns="0" bIns="0"/>
+          <a:p>
+            <a:pPr>
+              <a:lnSpc>
+                <a:spcPct val="100000"/>
+              </a:lnSpc>
+            </a:pPr>
+            <a:r>
+              <a:rPr lang="zh-CN" sz="975" spc="-9223372036854775808">
+                <a:solidFill>
+                  <a:srgbClr val="BD9B56"/>
+                </a:solidFill>
+                <a:latin typeface="Microsoft YaHei"/>
+                <a:ea typeface="Microsoft YaHei"/>
+              </a:rPr>
+              <a:t>测试怎么进行</a:t>
+            </a:r>
+            <a:endParaRPr/>
+          </a:p>
+        </p:txBody>
+      </p:sp>
+      <p:sp>
+        <p:nvSpPr>
+          <p:cNvPr id="119" name=""/>
           <p:cNvSpPr/>
           <p:nvPr/>
         </p:nvSpPr>
         <p:spPr>
           <a:xfrm rot="0" flipH="0" flipV="0">
-            <a:off x="3400425" y="2228850"/>
-            <a:ext cx="2609850" cy="2228850"/>
-          </a:xfrm>
-          <a:custGeom>
-            <a:pathLst>
-              <a:path w="274" h="234">
-                <a:moveTo>
-                  <a:pt x="263" y="0"/>
-                </a:moveTo>
-                <a:cubicBezTo>
-                  <a:pt x="268" y="0"/>
-                  <a:pt x="273" y="4"/>
-                  <a:pt x="274" y="10"/>
-                </a:cubicBezTo>
-                <a:cubicBezTo>
-                  <a:pt x="273" y="6"/>
-                  <a:pt x="270" y="4"/>
-                  <a:pt x="266" y="4"/>
-                </a:cubicBezTo>
-                <a:lnTo>
-                  <a:pt x="8" y="4"/>
-                </a:lnTo>
-                <a:cubicBezTo>
-                  <a:pt x="4" y="4"/>
-                  <a:pt x="1" y="7"/>
-                  <a:pt x="0" y="10"/>
-                </a:cubicBezTo>
-                <a:cubicBezTo>
-                  <a:pt x="1" y="4"/>
-                  <a:pt x="6" y="0"/>
-                  <a:pt x="12" y="0"/>
-                </a:cubicBezTo>
-                <a:lnTo>
-                  <a:pt x="262" y="0"/>
-                </a:lnTo>
-                <a:close/>
-              </a:path>
-            </a:pathLst>
-          </a:custGeom>
+            <a:off x="704850" y="3219450"/>
+            <a:ext cx="1552575" cy="657225"/>
+          </a:xfrm>
+          <a:prstGeom prst="roundRect">
+            <a:avLst>
+              <a:gd name="adj" fmla="val 11594"/>
+            </a:avLst>
+          </a:prstGeom>
           <a:solidFill>
-            <a:srgbClr val="BD9B56"/>
-          </a:solidFill>
-          <a:ln/>
-        </p:spPr>
-        <p:txBody>
-          <a:bodyPr/>
-          <a:p/>
-        </p:txBody>
-      </p:sp>
-      <p:sp>
-        <p:nvSpPr>
-          <p:cNvPr id="109" name="" descr="{&quot;isTemplate&quot;:true,&quot;type&quot;:&quot;text&quot;}"/>
-          <p:cNvSpPr txBox="1"/>
-          <p:nvPr/>
-        </p:nvSpPr>
-        <p:spPr>
-          <a:xfrm rot="0" flipH="0" flipV="0">
-            <a:off x="3552825" y="2457450"/>
-            <a:ext cx="2305050" cy="152400"/>
-          </a:xfrm>
-          <a:prstGeom prst="rect"/>
-        </p:spPr>
-        <p:txBody>
-          <a:bodyPr wrap="none" lIns="0" tIns="0" rIns="0" bIns="0"/>
-          <a:p>
-            <a:pPr algn="ctr">
-              <a:lnSpc>
-                <a:spcPct val="100000"/>
-              </a:lnSpc>
-            </a:pPr>
-            <a:r>
-              <a:rPr lang="en-US" sz="975" spc="-9223372036854775808">
-                <a:solidFill>
-                  <a:srgbClr val="BD9B56"/>
-                </a:solidFill>
-                <a:latin typeface="Microsoft YaHei"/>
-                <a:ea typeface="Microsoft YaHei"/>
-              </a:rPr>
-              <a:t>RAG RECALL</a:t>
-            </a:r>
-            <a:endParaRPr/>
-          </a:p>
-        </p:txBody>
-      </p:sp>
-      <p:sp>
-        <p:nvSpPr>
-          <p:cNvPr id="110" name="" descr="{&quot;isTemplate&quot;:true,&quot;type&quot;:&quot;text&quot;}"/>
-          <p:cNvSpPr txBox="1"/>
-          <p:nvPr/>
-        </p:nvSpPr>
-        <p:spPr>
-          <a:xfrm rot="0" flipH="0" flipV="0">
-            <a:off x="3552825" y="2724150"/>
-            <a:ext cx="2305050" cy="685800"/>
-          </a:xfrm>
-          <a:prstGeom prst="rect"/>
-        </p:spPr>
-        <p:txBody>
-          <a:bodyPr wrap="none" lIns="0" tIns="0" rIns="0" bIns="0"/>
-          <a:p>
-            <a:pPr algn="ctr">
-              <a:lnSpc>
-                <a:spcPct val="100000"/>
-              </a:lnSpc>
-            </a:pPr>
-            <a:r>
-              <a:rPr lang="en-US" sz="4500">
-                <a:solidFill>
-                  <a:srgbClr val="172133"/>
-                </a:solidFill>
-                <a:latin typeface="Inter"/>
-                <a:ea typeface="Inter"/>
-              </a:rPr>
-              <a:t>100%</a:t>
-            </a:r>
-            <a:endParaRPr/>
-          </a:p>
-        </p:txBody>
-      </p:sp>
-      <p:sp>
-        <p:nvSpPr>
-          <p:cNvPr id="111" name="" descr="{&quot;isTemplate&quot;:true,&quot;type&quot;:&quot;text&quot;}"/>
-          <p:cNvSpPr txBox="1"/>
-          <p:nvPr/>
-        </p:nvSpPr>
-        <p:spPr>
-          <a:xfrm rot="0" flipH="0" flipV="0">
-            <a:off x="3552825" y="3524250"/>
-            <a:ext cx="2305050" cy="247650"/>
-          </a:xfrm>
-          <a:prstGeom prst="rect"/>
-        </p:spPr>
-        <p:txBody>
-          <a:bodyPr wrap="none" lIns="0" tIns="0" rIns="0" bIns="0"/>
-          <a:p>
-            <a:pPr algn="ctr">
-              <a:lnSpc>
-                <a:spcPct val="150000"/>
-              </a:lnSpc>
-            </a:pPr>
-            <a:r>
-              <a:rPr lang="zh-CN" sz="1050">
-                <a:solidFill>
-                  <a:srgbClr val="5F5E5A"/>
-                </a:solidFill>
-                <a:latin typeface="Microsoft YaHei"/>
-                <a:ea typeface="Microsoft YaHei"/>
-              </a:rPr>
-              <a:t>检索召回率</a:t>
-            </a:r>
-            <a:r>
-              <a:rPr lang="en-US" sz="1050">
-                <a:solidFill>
-                  <a:srgbClr val="5F5E5A"/>
-                </a:solidFill>
-                <a:latin typeface="Microsoft YaHei"/>
-                <a:ea typeface="Microsoft YaHei"/>
-              </a:rPr>
-              <a:t> Recall@5</a:t>
-            </a:r>
-            <a:endParaRPr/>
-          </a:p>
-        </p:txBody>
-      </p:sp>
-      <p:sp>
-        <p:nvSpPr>
-          <p:cNvPr id="112" name=""/>
-          <p:cNvSpPr/>
-          <p:nvPr/>
-        </p:nvSpPr>
-        <p:spPr>
-          <a:xfrm rot="0" flipH="0" flipV="0">
-            <a:off x="3552825" y="3886200"/>
-            <a:ext cx="2305050" cy="314325"/>
-          </a:xfrm>
-          <a:custGeom>
-            <a:pathLst>
-              <a:path w="242" h="33">
-                <a:moveTo>
-                  <a:pt x="0" y="0"/>
-                </a:moveTo>
-                <a:lnTo>
-                  <a:pt x="242" y="0"/>
-                </a:lnTo>
-                <a:lnTo>
-                  <a:pt x="242" y="1"/>
-                </a:lnTo>
-                <a:lnTo>
-                  <a:pt x="0" y="1"/>
-                </a:lnTo>
-                <a:close/>
-              </a:path>
-            </a:pathLst>
-          </a:custGeom>
-          <a:solidFill>
-            <a:srgbClr val="22395E">
-              <a:alpha val="10000"/>
+            <a:srgbClr val="BD9B56">
+              <a:alpha val="7000"/>
             </a:srgbClr>
           </a:solidFill>
           <a:ln/>
@@ -5574,53 +5801,574 @@
       </p:sp>
       <p:sp>
         <p:nvSpPr>
-          <p:cNvPr id="113" name="" descr="{&quot;isTemplate&quot;:true,&quot;type&quot;:&quot;text&quot;}"/>
-          <p:cNvSpPr txBox="1"/>
-          <p:nvPr/>
-        </p:nvSpPr>
-        <p:spPr>
-          <a:xfrm rot="0" flipH="0" flipV="0">
-            <a:off x="3552825" y="3971925"/>
-            <a:ext cx="2305050" cy="142875"/>
-          </a:xfrm>
-          <a:prstGeom prst="rect"/>
-        </p:spPr>
-        <p:txBody>
-          <a:bodyPr wrap="none" lIns="0" tIns="0" rIns="0" bIns="0"/>
-          <a:p>
-            <a:pPr algn="ctr">
+          <p:cNvPr id="120" name="" descr="{&quot;isTemplate&quot;:true,&quot;type&quot;:&quot;text&quot;}"/>
+          <p:cNvSpPr txBox="1"/>
+          <p:nvPr/>
+        </p:nvSpPr>
+        <p:spPr>
+          <a:xfrm rot="0" flipH="0" flipV="0">
+            <a:off x="800100" y="3295650"/>
+            <a:ext cx="1362075" cy="133350"/>
+          </a:xfrm>
+          <a:prstGeom prst="rect"/>
+        </p:spPr>
+        <p:txBody>
+          <a:bodyPr wrap="none" lIns="0" tIns="0" rIns="0" bIns="0"/>
+          <a:p>
+            <a:pPr>
               <a:lnSpc>
                 <a:spcPct val="100000"/>
               </a:lnSpc>
             </a:pPr>
             <a:r>
-              <a:rPr lang="zh-CN" sz="900">
-                <a:solidFill>
-                  <a:srgbClr val="888780"/>
-                </a:solidFill>
-                <a:latin typeface="Microsoft YaHei"/>
-                <a:ea typeface="Microsoft YaHei"/>
-              </a:rPr>
-              <a:t>知识切片检索质量稳定达标</a:t>
-            </a:r>
-            <a:endParaRPr/>
-          </a:p>
-        </p:txBody>
-      </p:sp>
-      <p:sp>
-        <p:nvSpPr>
-          <p:cNvPr id="114" name=""/>
+              <a:rPr lang="en-US" sz="863">
+                <a:solidFill>
+                  <a:srgbClr val="172133"/>
+                </a:solidFill>
+                <a:latin typeface="Microsoft YaHei"/>
+                <a:ea typeface="Microsoft YaHei"/>
+              </a:rPr>
+              <a:t>① </a:t>
+            </a:r>
+            <a:r>
+              <a:rPr lang="zh-CN" sz="863">
+                <a:solidFill>
+                  <a:srgbClr val="172133"/>
+                </a:solidFill>
+                <a:latin typeface="Microsoft YaHei"/>
+                <a:ea typeface="Microsoft YaHei"/>
+              </a:rPr>
+              <a:t>构建数据集</a:t>
+            </a:r>
+            <a:endParaRPr/>
+          </a:p>
+        </p:txBody>
+      </p:sp>
+      <p:sp>
+        <p:nvSpPr>
+          <p:cNvPr id="121" name="" descr="{&quot;isTemplate&quot;:true,&quot;type&quot;:&quot;text&quot;}"/>
+          <p:cNvSpPr txBox="1"/>
+          <p:nvPr/>
+        </p:nvSpPr>
+        <p:spPr>
+          <a:xfrm rot="0" flipH="0" flipV="0">
+            <a:off x="800100" y="3457575"/>
+            <a:ext cx="1362075" cy="342900"/>
+          </a:xfrm>
+          <a:prstGeom prst="rect"/>
+        </p:spPr>
+        <p:txBody>
+          <a:bodyPr wrap="square" lIns="0" tIns="0" rIns="0" bIns="0">
+            <a:normAutofit/>
+          </a:bodyPr>
+          <a:p>
+            <a:pPr>
+              <a:lnSpc>
+                <a:spcPct val="140000"/>
+              </a:lnSpc>
+            </a:pPr>
+            <a:r>
+              <a:rPr lang="zh-CN" sz="788">
+                <a:solidFill>
+                  <a:srgbClr val="6B7075"/>
+                </a:solidFill>
+                <a:latin typeface="Microsoft YaHei"/>
+                <a:ea typeface="Microsoft YaHei"/>
+              </a:rPr>
+              <a:t>意图</a:t>
+            </a:r>
+            <a:r>
+              <a:rPr lang="en-US" sz="788">
+                <a:solidFill>
+                  <a:srgbClr val="6B7075"/>
+                </a:solidFill>
+                <a:latin typeface="Microsoft YaHei"/>
+                <a:ea typeface="Microsoft YaHei"/>
+              </a:rPr>
+              <a:t> / </a:t>
+            </a:r>
+            <a:r>
+              <a:rPr lang="zh-CN" sz="788">
+                <a:solidFill>
+                  <a:srgbClr val="6B7075"/>
+                </a:solidFill>
+                <a:latin typeface="Microsoft YaHei"/>
+                <a:ea typeface="Microsoft YaHei"/>
+              </a:rPr>
+              <a:t>工具</a:t>
+            </a:r>
+            <a:r>
+              <a:rPr lang="en-US" sz="788">
+                <a:solidFill>
+                  <a:srgbClr val="6B7075"/>
+                </a:solidFill>
+                <a:latin typeface="Microsoft YaHei"/>
+                <a:ea typeface="Microsoft YaHei"/>
+              </a:rPr>
+              <a:t> / </a:t>
+            </a:r>
+            <a:r>
+              <a:rPr lang="zh-CN" sz="788">
+                <a:solidFill>
+                  <a:srgbClr val="6B7075"/>
+                </a:solidFill>
+                <a:latin typeface="Microsoft YaHei"/>
+                <a:ea typeface="Microsoft YaHei"/>
+              </a:rPr>
+              <a:t>工作流</a:t>
+            </a:r>
+            <a:r>
+              <a:rPr lang="en-US" sz="788">
+                <a:solidFill>
+                  <a:srgbClr val="6B7075"/>
+                </a:solidFill>
+                <a:latin typeface="Microsoft YaHei"/>
+                <a:ea typeface="Microsoft YaHei"/>
+              </a:rPr>
+              <a:t> / </a:t>
+            </a:r>
+            <a:r>
+              <a:rPr lang="zh-CN" sz="788">
+                <a:solidFill>
+                  <a:srgbClr val="6B7075"/>
+                </a:solidFill>
+                <a:latin typeface="Microsoft YaHei"/>
+                <a:ea typeface="Microsoft YaHei"/>
+              </a:rPr>
+              <a:t>知识问答</a:t>
+            </a:r>
+            <a:r>
+              <a:rPr lang="en-US" sz="788">
+                <a:solidFill>
+                  <a:srgbClr val="6B7075"/>
+                </a:solidFill>
+                <a:latin typeface="Microsoft YaHei"/>
+                <a:ea typeface="Microsoft YaHei"/>
+              </a:rPr>
+              <a:t> 4 </a:t>
+            </a:r>
+            <a:r>
+              <a:rPr lang="zh-CN" sz="788">
+                <a:solidFill>
+                  <a:srgbClr val="6B7075"/>
+                </a:solidFill>
+                <a:latin typeface="Microsoft YaHei"/>
+                <a:ea typeface="Microsoft YaHei"/>
+              </a:rPr>
+              <a:t>类用例</a:t>
+            </a:r>
+            <a:endParaRPr/>
+          </a:p>
+        </p:txBody>
+      </p:sp>
+      <p:sp>
+        <p:nvSpPr>
+          <p:cNvPr id="122" name=""/>
           <p:cNvSpPr/>
           <p:nvPr/>
         </p:nvSpPr>
         <p:spPr>
           <a:xfrm rot="0" flipH="0" flipV="0">
-            <a:off x="6181725" y="2228850"/>
-            <a:ext cx="2619375" cy="2228850"/>
+            <a:off x="2333625" y="3219450"/>
+            <a:ext cx="1543050" cy="657225"/>
           </a:xfrm>
           <a:prstGeom prst="roundRect">
             <a:avLst>
-              <a:gd name="adj" fmla="val 5128"/>
+              <a:gd name="adj" fmla="val 11594"/>
+            </a:avLst>
+          </a:prstGeom>
+          <a:solidFill>
+            <a:srgbClr val="BD9B56">
+              <a:alpha val="7000"/>
+            </a:srgbClr>
+          </a:solidFill>
+          <a:ln/>
+        </p:spPr>
+        <p:txBody>
+          <a:bodyPr/>
+          <a:p/>
+        </p:txBody>
+      </p:sp>
+      <p:sp>
+        <p:nvSpPr>
+          <p:cNvPr id="123" name="" descr="{&quot;isTemplate&quot;:true,&quot;type&quot;:&quot;text&quot;}"/>
+          <p:cNvSpPr txBox="1"/>
+          <p:nvPr/>
+        </p:nvSpPr>
+        <p:spPr>
+          <a:xfrm rot="0" flipH="0" flipV="0">
+            <a:off x="2428875" y="3295650"/>
+            <a:ext cx="1352550" cy="133350"/>
+          </a:xfrm>
+          <a:prstGeom prst="rect"/>
+        </p:spPr>
+        <p:txBody>
+          <a:bodyPr wrap="none" lIns="0" tIns="0" rIns="0" bIns="0"/>
+          <a:p>
+            <a:pPr>
+              <a:lnSpc>
+                <a:spcPct val="100000"/>
+              </a:lnSpc>
+            </a:pPr>
+            <a:r>
+              <a:rPr lang="en-US" sz="863">
+                <a:solidFill>
+                  <a:srgbClr val="172133"/>
+                </a:solidFill>
+                <a:latin typeface="Microsoft YaHei"/>
+                <a:ea typeface="Microsoft YaHei"/>
+              </a:rPr>
+              <a:t>② </a:t>
+            </a:r>
+            <a:r>
+              <a:rPr lang="zh-CN" sz="863">
+                <a:solidFill>
+                  <a:srgbClr val="172133"/>
+                </a:solidFill>
+                <a:latin typeface="Microsoft YaHei"/>
+                <a:ea typeface="Microsoft YaHei"/>
+              </a:rPr>
+              <a:t>运行</a:t>
+            </a:r>
+            <a:r>
+              <a:rPr lang="en-US" sz="863">
+                <a:solidFill>
+                  <a:srgbClr val="172133"/>
+                </a:solidFill>
+                <a:latin typeface="Microsoft YaHei"/>
+                <a:ea typeface="Microsoft YaHei"/>
+              </a:rPr>
+              <a:t> Agent</a:t>
+            </a:r>
+            <a:endParaRPr/>
+          </a:p>
+        </p:txBody>
+      </p:sp>
+      <p:sp>
+        <p:nvSpPr>
+          <p:cNvPr id="124" name="" descr="{&quot;isTemplate&quot;:true,&quot;type&quot;:&quot;text&quot;}"/>
+          <p:cNvSpPr txBox="1"/>
+          <p:nvPr/>
+        </p:nvSpPr>
+        <p:spPr>
+          <a:xfrm rot="0" flipH="0" flipV="0">
+            <a:off x="2428875" y="3457575"/>
+            <a:ext cx="1352550" cy="171450"/>
+          </a:xfrm>
+          <a:prstGeom prst="rect"/>
+        </p:spPr>
+        <p:txBody>
+          <a:bodyPr wrap="none" lIns="0" tIns="0" rIns="0" bIns="0"/>
+          <a:p>
+            <a:pPr>
+              <a:lnSpc>
+                <a:spcPct val="140000"/>
+              </a:lnSpc>
+            </a:pPr>
+            <a:r>
+              <a:rPr lang="en-US" sz="788">
+                <a:solidFill>
+                  <a:srgbClr val="6B7075"/>
+                </a:solidFill>
+                <a:latin typeface="Microsoft YaHei"/>
+                <a:ea typeface="Microsoft YaHei"/>
+              </a:rPr>
+              <a:t>python </a:t>
+            </a:r>
+            <a:r>
+              <a:rPr lang="zh-CN" sz="788">
+                <a:solidFill>
+                  <a:srgbClr val="6B7075"/>
+                </a:solidFill>
+                <a:latin typeface="Microsoft YaHei"/>
+                <a:ea typeface="Microsoft YaHei"/>
+              </a:rPr>
+              <a:t>跑评估，收集</a:t>
+            </a:r>
+            <a:r>
+              <a:rPr lang="en-US" sz="788">
+                <a:solidFill>
+                  <a:srgbClr val="6B7075"/>
+                </a:solidFill>
+                <a:latin typeface="Microsoft YaHei"/>
+                <a:ea typeface="Microsoft YaHei"/>
+              </a:rPr>
+              <a:t> trace</a:t>
+            </a:r>
+            <a:endParaRPr/>
+          </a:p>
+        </p:txBody>
+      </p:sp>
+      <p:sp>
+        <p:nvSpPr>
+          <p:cNvPr id="125" name=""/>
+          <p:cNvSpPr/>
+          <p:nvPr/>
+        </p:nvSpPr>
+        <p:spPr>
+          <a:xfrm rot="0" flipH="0" flipV="0">
+            <a:off x="3952875" y="3219450"/>
+            <a:ext cx="1552575" cy="657225"/>
+          </a:xfrm>
+          <a:prstGeom prst="roundRect">
+            <a:avLst>
+              <a:gd name="adj" fmla="val 11594"/>
+            </a:avLst>
+          </a:prstGeom>
+          <a:solidFill>
+            <a:srgbClr val="BD9B56">
+              <a:alpha val="7000"/>
+            </a:srgbClr>
+          </a:solidFill>
+          <a:ln/>
+        </p:spPr>
+        <p:txBody>
+          <a:bodyPr/>
+          <a:p/>
+        </p:txBody>
+      </p:sp>
+      <p:sp>
+        <p:nvSpPr>
+          <p:cNvPr id="126" name="" descr="{&quot;isTemplate&quot;:true,&quot;type&quot;:&quot;text&quot;}"/>
+          <p:cNvSpPr txBox="1"/>
+          <p:nvPr/>
+        </p:nvSpPr>
+        <p:spPr>
+          <a:xfrm rot="0" flipH="0" flipV="0">
+            <a:off x="4048125" y="3295650"/>
+            <a:ext cx="1362075" cy="133350"/>
+          </a:xfrm>
+          <a:prstGeom prst="rect"/>
+        </p:spPr>
+        <p:txBody>
+          <a:bodyPr wrap="none" lIns="0" tIns="0" rIns="0" bIns="0"/>
+          <a:p>
+            <a:pPr>
+              <a:lnSpc>
+                <a:spcPct val="100000"/>
+              </a:lnSpc>
+            </a:pPr>
+            <a:r>
+              <a:rPr lang="en-US" sz="863">
+                <a:solidFill>
+                  <a:srgbClr val="172133"/>
+                </a:solidFill>
+                <a:latin typeface="Microsoft YaHei"/>
+                <a:ea typeface="Microsoft YaHei"/>
+              </a:rPr>
+              <a:t>③ </a:t>
+            </a:r>
+            <a:r>
+              <a:rPr lang="zh-CN" sz="863">
+                <a:solidFill>
+                  <a:srgbClr val="172133"/>
+                </a:solidFill>
+                <a:latin typeface="Microsoft YaHei"/>
+                <a:ea typeface="Microsoft YaHei"/>
+              </a:rPr>
+              <a:t>比对期望</a:t>
+            </a:r>
+            <a:endParaRPr/>
+          </a:p>
+        </p:txBody>
+      </p:sp>
+      <p:sp>
+        <p:nvSpPr>
+          <p:cNvPr id="127" name="" descr="{&quot;isTemplate&quot;:true,&quot;type&quot;:&quot;text&quot;}"/>
+          <p:cNvSpPr txBox="1"/>
+          <p:nvPr/>
+        </p:nvSpPr>
+        <p:spPr>
+          <a:xfrm rot="0" flipH="0" flipV="0">
+            <a:off x="4048125" y="3457575"/>
+            <a:ext cx="1362075" cy="171450"/>
+          </a:xfrm>
+          <a:prstGeom prst="rect"/>
+        </p:spPr>
+        <p:txBody>
+          <a:bodyPr wrap="none" lIns="0" tIns="0" rIns="0" bIns="0"/>
+          <a:p>
+            <a:pPr>
+              <a:lnSpc>
+                <a:spcPct val="140000"/>
+              </a:lnSpc>
+            </a:pPr>
+            <a:r>
+              <a:rPr lang="zh-CN" sz="788">
+                <a:solidFill>
+                  <a:srgbClr val="6B7075"/>
+                </a:solidFill>
+                <a:latin typeface="Microsoft YaHei"/>
+                <a:ea typeface="Microsoft YaHei"/>
+              </a:rPr>
+              <a:t>预测值</a:t>
+            </a:r>
+            <a:r>
+              <a:rPr lang="en-US" sz="788">
+                <a:solidFill>
+                  <a:srgbClr val="6B7075"/>
+                </a:solidFill>
+                <a:latin typeface="Microsoft YaHei"/>
+                <a:ea typeface="Microsoft YaHei"/>
+              </a:rPr>
+              <a:t> vs </a:t>
+            </a:r>
+            <a:r>
+              <a:rPr lang="zh-CN" sz="788">
+                <a:solidFill>
+                  <a:srgbClr val="6B7075"/>
+                </a:solidFill>
+                <a:latin typeface="Microsoft YaHei"/>
+                <a:ea typeface="Microsoft YaHei"/>
+              </a:rPr>
+              <a:t>标注期望值</a:t>
+            </a:r>
+            <a:endParaRPr/>
+          </a:p>
+        </p:txBody>
+      </p:sp>
+      <p:sp>
+        <p:nvSpPr>
+          <p:cNvPr id="128" name=""/>
+          <p:cNvSpPr/>
+          <p:nvPr/>
+        </p:nvSpPr>
+        <p:spPr>
+          <a:xfrm rot="0" flipH="0" flipV="0">
+            <a:off x="5581650" y="3219450"/>
+            <a:ext cx="1543050" cy="657225"/>
+          </a:xfrm>
+          <a:prstGeom prst="roundRect">
+            <a:avLst>
+              <a:gd name="adj" fmla="val 11594"/>
+            </a:avLst>
+          </a:prstGeom>
+          <a:solidFill>
+            <a:srgbClr val="BD9B56">
+              <a:alpha val="7000"/>
+            </a:srgbClr>
+          </a:solidFill>
+          <a:ln/>
+        </p:spPr>
+        <p:txBody>
+          <a:bodyPr/>
+          <a:p/>
+        </p:txBody>
+      </p:sp>
+      <p:sp>
+        <p:nvSpPr>
+          <p:cNvPr id="129" name="" descr="{&quot;isTemplate&quot;:true,&quot;type&quot;:&quot;text&quot;}"/>
+          <p:cNvSpPr txBox="1"/>
+          <p:nvPr/>
+        </p:nvSpPr>
+        <p:spPr>
+          <a:xfrm rot="0" flipH="0" flipV="0">
+            <a:off x="5676900" y="3295650"/>
+            <a:ext cx="1352550" cy="133350"/>
+          </a:xfrm>
+          <a:prstGeom prst="rect"/>
+        </p:spPr>
+        <p:txBody>
+          <a:bodyPr wrap="none" lIns="0" tIns="0" rIns="0" bIns="0"/>
+          <a:p>
+            <a:pPr>
+              <a:lnSpc>
+                <a:spcPct val="100000"/>
+              </a:lnSpc>
+            </a:pPr>
+            <a:r>
+              <a:rPr lang="en-US" sz="863">
+                <a:solidFill>
+                  <a:srgbClr val="172133"/>
+                </a:solidFill>
+                <a:latin typeface="Microsoft YaHei"/>
+                <a:ea typeface="Microsoft YaHei"/>
+              </a:rPr>
+              <a:t>④ </a:t>
+            </a:r>
+            <a:r>
+              <a:rPr lang="zh-CN" sz="863">
+                <a:solidFill>
+                  <a:srgbClr val="172133"/>
+                </a:solidFill>
+                <a:latin typeface="Microsoft YaHei"/>
+                <a:ea typeface="Microsoft YaHei"/>
+              </a:rPr>
+              <a:t>生成报告</a:t>
+            </a:r>
+            <a:endParaRPr/>
+          </a:p>
+        </p:txBody>
+      </p:sp>
+      <p:sp>
+        <p:nvSpPr>
+          <p:cNvPr id="130" name="" descr="{&quot;isTemplate&quot;:true,&quot;type&quot;:&quot;text&quot;}"/>
+          <p:cNvSpPr txBox="1"/>
+          <p:nvPr/>
+        </p:nvSpPr>
+        <p:spPr>
+          <a:xfrm rot="0" flipH="0" flipV="0">
+            <a:off x="5676900" y="3457575"/>
+            <a:ext cx="1352550" cy="171450"/>
+          </a:xfrm>
+          <a:prstGeom prst="rect"/>
+        </p:spPr>
+        <p:txBody>
+          <a:bodyPr wrap="none" lIns="0" tIns="0" rIns="0" bIns="0"/>
+          <a:p>
+            <a:pPr>
+              <a:lnSpc>
+                <a:spcPct val="140000"/>
+              </a:lnSpc>
+            </a:pPr>
+            <a:r>
+              <a:rPr lang="zh-CN" sz="788">
+                <a:solidFill>
+                  <a:srgbClr val="6B7075"/>
+                </a:solidFill>
+                <a:latin typeface="Microsoft YaHei"/>
+                <a:ea typeface="Microsoft YaHei"/>
+              </a:rPr>
+              <a:t>指标</a:t>
+            </a:r>
+            <a:r>
+              <a:rPr lang="en-US" sz="788">
+                <a:solidFill>
+                  <a:srgbClr val="6B7075"/>
+                </a:solidFill>
+                <a:latin typeface="Microsoft YaHei"/>
+                <a:ea typeface="Microsoft YaHei"/>
+              </a:rPr>
+              <a:t> + </a:t>
+            </a:r>
+            <a:r>
+              <a:rPr lang="zh-CN" sz="788">
+                <a:solidFill>
+                  <a:srgbClr val="6B7075"/>
+                </a:solidFill>
+                <a:latin typeface="Microsoft YaHei"/>
+                <a:ea typeface="Microsoft YaHei"/>
+              </a:rPr>
+              <a:t>失败用例定位</a:t>
+            </a:r>
+            <a:endParaRPr/>
+          </a:p>
+        </p:txBody>
+      </p:sp>
+      <p:sp>
+        <p:nvSpPr>
+          <p:cNvPr id="131" name=""/>
+          <p:cNvSpPr/>
+          <p:nvPr/>
+        </p:nvSpPr>
+        <p:spPr>
+          <a:xfrm rot="0" flipH="0" flipV="0">
+            <a:off x="7467600" y="981075"/>
+            <a:ext cx="4191000" cy="533400"/>
+          </a:xfrm>
+          <a:prstGeom prst="roundRect">
+            <a:avLst>
+              <a:gd name="adj" fmla="val 17857"/>
             </a:avLst>
           </a:prstGeom>
           <a:solidFill>
@@ -5628,9 +6376,9 @@
           </a:solidFill>
           <a:ln/>
           <a:effectLst>
-            <a:outerShdw blurRad="228600" dist="57150" dir="5400000">
+            <a:outerShdw blurRad="152400" dist="38100" dir="5400000">
               <a:srgbClr val="172133">
-                <a:alpha val="8000"/>
+                <a:alpha val="6000"/>
               </a:srgbClr>
             </a:outerShdw>
           </a:effectLst>
@@ -5642,55 +6390,136 @@
       </p:sp>
       <p:sp>
         <p:nvSpPr>
-          <p:cNvPr id="115" name=""/>
+          <p:cNvPr id="132" name="" descr="{&quot;isTemplate&quot;:true,&quot;type&quot;:&quot;text&quot;}"/>
+          <p:cNvSpPr txBox="1"/>
+          <p:nvPr/>
+        </p:nvSpPr>
+        <p:spPr>
+          <a:xfrm rot="0" flipH="0" flipV="0">
+            <a:off x="7620000" y="1085850"/>
+            <a:ext cx="3000375" cy="161925"/>
+          </a:xfrm>
+          <a:prstGeom prst="rect"/>
+        </p:spPr>
+        <p:txBody>
+          <a:bodyPr wrap="none" lIns="0" tIns="0" rIns="0" bIns="0"/>
+          <a:p>
+            <a:pPr>
+              <a:lnSpc>
+                <a:spcPct val="100000"/>
+              </a:lnSpc>
+            </a:pPr>
+            <a:r>
+              <a:rPr lang="zh-CN" sz="1013">
+                <a:solidFill>
+                  <a:srgbClr val="172133"/>
+                </a:solidFill>
+                <a:latin typeface="Microsoft YaHei"/>
+                <a:ea typeface="Microsoft YaHei"/>
+              </a:rPr>
+              <a:t>意图识别</a:t>
+            </a:r>
+            <a:endParaRPr/>
+          </a:p>
+        </p:txBody>
+      </p:sp>
+      <p:sp>
+        <p:nvSpPr>
+          <p:cNvPr id="133" name="" descr="{&quot;isTemplate&quot;:true,&quot;type&quot;:&quot;text&quot;}"/>
+          <p:cNvSpPr txBox="1"/>
+          <p:nvPr/>
+        </p:nvSpPr>
+        <p:spPr>
+          <a:xfrm rot="0" flipH="0" flipV="0">
+            <a:off x="7620000" y="1295400"/>
+            <a:ext cx="3000375" cy="123825"/>
+          </a:xfrm>
+          <a:prstGeom prst="rect"/>
+        </p:spPr>
+        <p:txBody>
+          <a:bodyPr wrap="none" lIns="0" tIns="0" rIns="0" bIns="0"/>
+          <a:p>
+            <a:pPr>
+              <a:lnSpc>
+                <a:spcPct val="100000"/>
+              </a:lnSpc>
+            </a:pPr>
+            <a:r>
+              <a:rPr lang="en-US" sz="788">
+                <a:solidFill>
+                  <a:srgbClr val="A09B8C"/>
+                </a:solidFill>
+                <a:latin typeface="Microsoft YaHei"/>
+                <a:ea typeface="Microsoft YaHei"/>
+              </a:rPr>
+              <a:t>83.33% → 100%</a:t>
+            </a:r>
+            <a:endParaRPr/>
+          </a:p>
+        </p:txBody>
+      </p:sp>
+      <p:sp>
+        <p:nvSpPr>
+          <p:cNvPr id="134" name="" descr="{&quot;isTemplate&quot;:true,&quot;type&quot;:&quot;text&quot;}"/>
+          <p:cNvSpPr txBox="1"/>
+          <p:nvPr/>
+        </p:nvSpPr>
+        <p:spPr>
+          <a:xfrm rot="0" flipH="0" flipV="0">
+            <a:off x="10753725" y="1076325"/>
+            <a:ext cx="752475" cy="342900"/>
+          </a:xfrm>
+          <a:prstGeom prst="rect"/>
+        </p:spPr>
+        <p:txBody>
+          <a:bodyPr wrap="none" lIns="0" tIns="0" rIns="0" bIns="0"/>
+          <a:p>
+            <a:pPr algn="r">
+              <a:lnSpc>
+                <a:spcPct val="100000"/>
+              </a:lnSpc>
+            </a:pPr>
+            <a:r>
+              <a:rPr lang="en-US" sz="2250">
+                <a:solidFill>
+                  <a:srgbClr val="BD9B56"/>
+                </a:solidFill>
+                <a:latin typeface="Inter"/>
+                <a:ea typeface="Inter"/>
+              </a:rPr>
+              <a:t>100%</a:t>
+            </a:r>
+            <a:endParaRPr/>
+          </a:p>
+        </p:txBody>
+      </p:sp>
+      <p:sp>
+        <p:nvSpPr>
+          <p:cNvPr id="135" name=""/>
           <p:cNvSpPr/>
           <p:nvPr/>
         </p:nvSpPr>
         <p:spPr>
           <a:xfrm rot="0" flipH="0" flipV="0">
-            <a:off x="6181725" y="2228850"/>
-            <a:ext cx="2619375" cy="2228850"/>
-          </a:xfrm>
-          <a:custGeom>
-            <a:pathLst>
-              <a:path w="275" h="234">
-                <a:moveTo>
-                  <a:pt x="264" y="0"/>
-                </a:moveTo>
-                <a:cubicBezTo>
-                  <a:pt x="269" y="0"/>
-                  <a:pt x="274" y="4"/>
-                  <a:pt x="275" y="10"/>
-                </a:cubicBezTo>
-                <a:cubicBezTo>
-                  <a:pt x="274" y="6"/>
-                  <a:pt x="271" y="4"/>
-                  <a:pt x="267" y="4"/>
-                </a:cubicBezTo>
-                <a:lnTo>
-                  <a:pt x="8" y="4"/>
-                </a:lnTo>
-                <a:cubicBezTo>
-                  <a:pt x="4" y="4"/>
-                  <a:pt x="1" y="7"/>
-                  <a:pt x="0" y="10"/>
-                </a:cubicBezTo>
-                <a:cubicBezTo>
-                  <a:pt x="1" y="4"/>
-                  <a:pt x="6" y="0"/>
-                  <a:pt x="12" y="0"/>
-                </a:cubicBezTo>
-                <a:lnTo>
-                  <a:pt x="263" y="0"/>
-                </a:lnTo>
-                <a:close/>
-              </a:path>
-            </a:pathLst>
-          </a:custGeom>
+            <a:off x="7467600" y="1590675"/>
+            <a:ext cx="4191000" cy="533400"/>
+          </a:xfrm>
+          <a:prstGeom prst="roundRect">
+            <a:avLst>
+              <a:gd name="adj" fmla="val 17857"/>
+            </a:avLst>
+          </a:prstGeom>
           <a:solidFill>
-            <a:srgbClr val="BD9B56"/>
+            <a:srgbClr val="FFFFFF"/>
           </a:solidFill>
           <a:ln/>
+          <a:effectLst>
+            <a:outerShdw blurRad="152400" dist="38100" dir="5400000">
+              <a:srgbClr val="172133">
+                <a:alpha val="6000"/>
+              </a:srgbClr>
+            </a:outerShdw>
+          </a:effectLst>
         </p:spPr>
         <p:txBody>
           <a:bodyPr/>
@@ -5699,64 +6528,119 @@
       </p:sp>
       <p:sp>
         <p:nvSpPr>
-          <p:cNvPr id="116" name="" descr="{&quot;isTemplate&quot;:true,&quot;type&quot;:&quot;text&quot;}"/>
-          <p:cNvSpPr txBox="1"/>
-          <p:nvPr/>
-        </p:nvSpPr>
-        <p:spPr>
-          <a:xfrm rot="0" flipH="0" flipV="0">
-            <a:off x="6334125" y="2457450"/>
-            <a:ext cx="2314575" cy="152400"/>
-          </a:xfrm>
-          <a:prstGeom prst="rect"/>
-        </p:spPr>
-        <p:txBody>
-          <a:bodyPr wrap="none" lIns="0" tIns="0" rIns="0" bIns="0"/>
-          <a:p>
-            <a:pPr algn="ctr">
+          <p:cNvPr id="136" name="" descr="{&quot;isTemplate&quot;:true,&quot;type&quot;:&quot;text&quot;}"/>
+          <p:cNvSpPr txBox="1"/>
+          <p:nvPr/>
+        </p:nvSpPr>
+        <p:spPr>
+          <a:xfrm rot="0" flipH="0" flipV="0">
+            <a:off x="7620000" y="1695450"/>
+            <a:ext cx="3000375" cy="161925"/>
+          </a:xfrm>
+          <a:prstGeom prst="rect"/>
+        </p:spPr>
+        <p:txBody>
+          <a:bodyPr wrap="none" lIns="0" tIns="0" rIns="0" bIns="0"/>
+          <a:p>
+            <a:pPr>
               <a:lnSpc>
                 <a:spcPct val="100000"/>
               </a:lnSpc>
             </a:pPr>
             <a:r>
-              <a:rPr lang="en-US" sz="975" spc="-9223372036854775808">
+              <a:rPr lang="en-US" sz="1013">
+                <a:solidFill>
+                  <a:srgbClr val="172133"/>
+                </a:solidFill>
+                <a:latin typeface="Microsoft YaHei"/>
+                <a:ea typeface="Microsoft YaHei"/>
+              </a:rPr>
+              <a:t>RAG </a:t>
+            </a:r>
+            <a:r>
+              <a:rPr lang="zh-CN" sz="1013">
+                <a:solidFill>
+                  <a:srgbClr val="172133"/>
+                </a:solidFill>
+                <a:latin typeface="Microsoft YaHei"/>
+                <a:ea typeface="Microsoft YaHei"/>
+              </a:rPr>
+              <a:t>召回</a:t>
+            </a:r>
+            <a:r>
+              <a:rPr lang="en-US" sz="1013">
+                <a:solidFill>
+                  <a:srgbClr val="172133"/>
+                </a:solidFill>
+                <a:latin typeface="Microsoft YaHei"/>
+                <a:ea typeface="Microsoft YaHei"/>
+              </a:rPr>
+              <a:t> Recall@5</a:t>
+            </a:r>
+            <a:endParaRPr/>
+          </a:p>
+        </p:txBody>
+      </p:sp>
+      <p:sp>
+        <p:nvSpPr>
+          <p:cNvPr id="137" name="" descr="{&quot;isTemplate&quot;:true,&quot;type&quot;:&quot;text&quot;}"/>
+          <p:cNvSpPr txBox="1"/>
+          <p:nvPr/>
+        </p:nvSpPr>
+        <p:spPr>
+          <a:xfrm rot="0" flipH="0" flipV="0">
+            <a:off x="7620000" y="1905000"/>
+            <a:ext cx="3000375" cy="123825"/>
+          </a:xfrm>
+          <a:prstGeom prst="rect"/>
+        </p:spPr>
+        <p:txBody>
+          <a:bodyPr wrap="none" lIns="0" tIns="0" rIns="0" bIns="0"/>
+          <a:p>
+            <a:pPr>
+              <a:lnSpc>
+                <a:spcPct val="100000"/>
+              </a:lnSpc>
+            </a:pPr>
+            <a:r>
+              <a:rPr lang="zh-CN" sz="788">
+                <a:solidFill>
+                  <a:srgbClr val="A09B8C"/>
+                </a:solidFill>
+                <a:latin typeface="Microsoft YaHei"/>
+                <a:ea typeface="Microsoft YaHei"/>
+              </a:rPr>
+              <a:t>检索质量稳定达标</a:t>
+            </a:r>
+            <a:endParaRPr/>
+          </a:p>
+        </p:txBody>
+      </p:sp>
+      <p:sp>
+        <p:nvSpPr>
+          <p:cNvPr id="138" name="" descr="{&quot;isTemplate&quot;:true,&quot;type&quot;:&quot;text&quot;}"/>
+          <p:cNvSpPr txBox="1"/>
+          <p:nvPr/>
+        </p:nvSpPr>
+        <p:spPr>
+          <a:xfrm rot="0" flipH="0" flipV="0">
+            <a:off x="10753725" y="1685925"/>
+            <a:ext cx="752475" cy="342900"/>
+          </a:xfrm>
+          <a:prstGeom prst="rect"/>
+        </p:spPr>
+        <p:txBody>
+          <a:bodyPr wrap="none" lIns="0" tIns="0" rIns="0" bIns="0"/>
+          <a:p>
+            <a:pPr algn="r">
+              <a:lnSpc>
+                <a:spcPct val="100000"/>
+              </a:lnSpc>
+            </a:pPr>
+            <a:r>
+              <a:rPr lang="en-US" sz="2250">
                 <a:solidFill>
                   <a:srgbClr val="BD9B56"/>
-                </a:solidFill>
-                <a:latin typeface="Microsoft YaHei"/>
-                <a:ea typeface="Microsoft YaHei"/>
-              </a:rPr>
-              <a:t>RAG ANSWER</a:t>
-            </a:r>
-            <a:endParaRPr/>
-          </a:p>
-        </p:txBody>
-      </p:sp>
-      <p:sp>
-        <p:nvSpPr>
-          <p:cNvPr id="117" name="" descr="{&quot;isTemplate&quot;:true,&quot;type&quot;:&quot;text&quot;}"/>
-          <p:cNvSpPr txBox="1"/>
-          <p:nvPr/>
-        </p:nvSpPr>
-        <p:spPr>
-          <a:xfrm rot="0" flipH="0" flipV="0">
-            <a:off x="6334125" y="2724150"/>
-            <a:ext cx="2314575" cy="685800"/>
-          </a:xfrm>
-          <a:prstGeom prst="rect"/>
-        </p:spPr>
-        <p:txBody>
-          <a:bodyPr wrap="none" lIns="0" tIns="0" rIns="0" bIns="0"/>
-          <a:p>
-            <a:pPr algn="ctr">
-              <a:lnSpc>
-                <a:spcPct val="100000"/>
-              </a:lnSpc>
-            </a:pPr>
-            <a:r>
-              <a:rPr lang="en-US" sz="4500">
-                <a:solidFill>
-                  <a:srgbClr val="172133"/>
                 </a:solidFill>
                 <a:latin typeface="Inter"/>
                 <a:ea typeface="Inter"/>
@@ -5769,75 +6653,31 @@
       </p:sp>
       <p:sp>
         <p:nvSpPr>
-          <p:cNvPr id="118" name="" descr="{&quot;isTemplate&quot;:true,&quot;type&quot;:&quot;text&quot;}"/>
-          <p:cNvSpPr txBox="1"/>
-          <p:nvPr/>
-        </p:nvSpPr>
-        <p:spPr>
-          <a:xfrm rot="0" flipH="0" flipV="0">
-            <a:off x="6334125" y="3524250"/>
-            <a:ext cx="2314575" cy="247650"/>
-          </a:xfrm>
-          <a:prstGeom prst="rect"/>
-        </p:spPr>
-        <p:txBody>
-          <a:bodyPr wrap="none" lIns="0" tIns="0" rIns="0" bIns="0"/>
-          <a:p>
-            <a:pPr algn="ctr">
-              <a:lnSpc>
-                <a:spcPct val="150000"/>
-              </a:lnSpc>
-            </a:pPr>
-            <a:r>
-              <a:rPr lang="zh-CN" sz="1050">
-                <a:solidFill>
-                  <a:srgbClr val="5F5E5A"/>
-                </a:solidFill>
-                <a:latin typeface="Microsoft YaHei"/>
-                <a:ea typeface="Microsoft YaHei"/>
-              </a:rPr>
-              <a:t>答案准确率</a:t>
-            </a:r>
-            <a:endParaRPr/>
-          </a:p>
-        </p:txBody>
-      </p:sp>
-      <p:sp>
-        <p:nvSpPr>
-          <p:cNvPr id="119" name=""/>
+          <p:cNvPr id="139" name=""/>
           <p:cNvSpPr/>
           <p:nvPr/>
         </p:nvSpPr>
         <p:spPr>
           <a:xfrm rot="0" flipH="0" flipV="0">
-            <a:off x="6334125" y="3886200"/>
-            <a:ext cx="2314575" cy="314325"/>
-          </a:xfrm>
-          <a:custGeom>
-            <a:pathLst>
-              <a:path w="243" h="33">
-                <a:moveTo>
-                  <a:pt x="0" y="0"/>
-                </a:moveTo>
-                <a:lnTo>
-                  <a:pt x="243" y="0"/>
-                </a:lnTo>
-                <a:lnTo>
-                  <a:pt x="243" y="1"/>
-                </a:lnTo>
-                <a:lnTo>
-                  <a:pt x="0" y="1"/>
-                </a:lnTo>
-                <a:close/>
-              </a:path>
-            </a:pathLst>
-          </a:custGeom>
+            <a:off x="7467600" y="2200275"/>
+            <a:ext cx="4191000" cy="533400"/>
+          </a:xfrm>
+          <a:prstGeom prst="roundRect">
+            <a:avLst>
+              <a:gd name="adj" fmla="val 17857"/>
+            </a:avLst>
+          </a:prstGeom>
           <a:solidFill>
-            <a:srgbClr val="22395E">
-              <a:alpha val="10000"/>
-            </a:srgbClr>
+            <a:srgbClr val="FFFFFF"/>
           </a:solidFill>
           <a:ln/>
+          <a:effectLst>
+            <a:outerShdw blurRad="152400" dist="38100" dir="5400000">
+              <a:srgbClr val="172133">
+                <a:alpha val="6000"/>
+              </a:srgbClr>
+            </a:outerShdw>
+          </a:effectLst>
         </p:spPr>
         <p:txBody>
           <a:bodyPr/>
@@ -5846,63 +6686,133 @@
       </p:sp>
       <p:sp>
         <p:nvSpPr>
-          <p:cNvPr id="120" name="" descr="{&quot;isTemplate&quot;:true,&quot;type&quot;:&quot;text&quot;}"/>
-          <p:cNvSpPr txBox="1"/>
-          <p:nvPr/>
-        </p:nvSpPr>
-        <p:spPr>
-          <a:xfrm rot="0" flipH="0" flipV="0">
-            <a:off x="6334125" y="3971925"/>
-            <a:ext cx="2314575" cy="142875"/>
-          </a:xfrm>
-          <a:prstGeom prst="rect"/>
-        </p:spPr>
-        <p:txBody>
-          <a:bodyPr wrap="none" lIns="0" tIns="0" rIns="0" bIns="0"/>
-          <a:p>
-            <a:pPr algn="ctr">
+          <p:cNvPr id="140" name="" descr="{&quot;isTemplate&quot;:true,&quot;type&quot;:&quot;text&quot;}"/>
+          <p:cNvSpPr txBox="1"/>
+          <p:nvPr/>
+        </p:nvSpPr>
+        <p:spPr>
+          <a:xfrm rot="0" flipH="0" flipV="0">
+            <a:off x="7620000" y="2305050"/>
+            <a:ext cx="3000375" cy="161925"/>
+          </a:xfrm>
+          <a:prstGeom prst="rect"/>
+        </p:spPr>
+        <p:txBody>
+          <a:bodyPr wrap="none" lIns="0" tIns="0" rIns="0" bIns="0"/>
+          <a:p>
+            <a:pPr>
               <a:lnSpc>
                 <a:spcPct val="100000"/>
               </a:lnSpc>
             </a:pPr>
             <a:r>
-              <a:rPr lang="en-US" sz="900">
-                <a:solidFill>
-                  <a:srgbClr val="888780"/>
-                </a:solidFill>
-                <a:latin typeface="Microsoft YaHei"/>
-                <a:ea typeface="Microsoft YaHei"/>
-              </a:rPr>
-              <a:t>50% → 100% · </a:t>
-            </a:r>
-            <a:r>
-              <a:rPr lang="zh-CN" sz="900">
-                <a:solidFill>
-                  <a:srgbClr val="888780"/>
-                </a:solidFill>
-                <a:latin typeface="Microsoft YaHei"/>
-                <a:ea typeface="Microsoft YaHei"/>
-              </a:rPr>
-              <a:t>答案生成优化</a:t>
-            </a:r>
-            <a:endParaRPr/>
-          </a:p>
-        </p:txBody>
-      </p:sp>
-      <p:sp>
-        <p:nvSpPr>
-          <p:cNvPr id="121" name=""/>
+              <a:rPr lang="en-US" sz="1013">
+                <a:solidFill>
+                  <a:srgbClr val="172133"/>
+                </a:solidFill>
+                <a:latin typeface="Microsoft YaHei"/>
+                <a:ea typeface="Microsoft YaHei"/>
+              </a:rPr>
+              <a:t>RAG </a:t>
+            </a:r>
+            <a:r>
+              <a:rPr lang="zh-CN" sz="1013">
+                <a:solidFill>
+                  <a:srgbClr val="172133"/>
+                </a:solidFill>
+                <a:latin typeface="Microsoft YaHei"/>
+                <a:ea typeface="Microsoft YaHei"/>
+              </a:rPr>
+              <a:t>答案准确率</a:t>
+            </a:r>
+            <a:endParaRPr/>
+          </a:p>
+        </p:txBody>
+      </p:sp>
+      <p:sp>
+        <p:nvSpPr>
+          <p:cNvPr id="141" name="" descr="{&quot;isTemplate&quot;:true,&quot;type&quot;:&quot;text&quot;}"/>
+          <p:cNvSpPr txBox="1"/>
+          <p:nvPr/>
+        </p:nvSpPr>
+        <p:spPr>
+          <a:xfrm rot="0" flipH="0" flipV="0">
+            <a:off x="7620000" y="2514600"/>
+            <a:ext cx="3000375" cy="123825"/>
+          </a:xfrm>
+          <a:prstGeom prst="rect"/>
+        </p:spPr>
+        <p:txBody>
+          <a:bodyPr wrap="none" lIns="0" tIns="0" rIns="0" bIns="0"/>
+          <a:p>
+            <a:pPr>
+              <a:lnSpc>
+                <a:spcPct val="100000"/>
+              </a:lnSpc>
+            </a:pPr>
+            <a:r>
+              <a:rPr lang="en-US" sz="788">
+                <a:solidFill>
+                  <a:srgbClr val="A09B8C"/>
+                </a:solidFill>
+                <a:latin typeface="Microsoft YaHei"/>
+                <a:ea typeface="Microsoft YaHei"/>
+              </a:rPr>
+              <a:t>50% → 100%</a:t>
+            </a:r>
+            <a:endParaRPr/>
+          </a:p>
+        </p:txBody>
+      </p:sp>
+      <p:sp>
+        <p:nvSpPr>
+          <p:cNvPr id="142" name="" descr="{&quot;isTemplate&quot;:true,&quot;type&quot;:&quot;text&quot;}"/>
+          <p:cNvSpPr txBox="1"/>
+          <p:nvPr/>
+        </p:nvSpPr>
+        <p:spPr>
+          <a:xfrm rot="0" flipH="0" flipV="0">
+            <a:off x="10753725" y="2295525"/>
+            <a:ext cx="752475" cy="342900"/>
+          </a:xfrm>
+          <a:prstGeom prst="rect"/>
+        </p:spPr>
+        <p:txBody>
+          <a:bodyPr wrap="none" lIns="0" tIns="0" rIns="0" bIns="0"/>
+          <a:p>
+            <a:pPr algn="r">
+              <a:lnSpc>
+                <a:spcPct val="100000"/>
+              </a:lnSpc>
+            </a:pPr>
+            <a:r>
+              <a:rPr lang="en-US" sz="2250">
+                <a:solidFill>
+                  <a:srgbClr val="BD9B56"/>
+                </a:solidFill>
+                <a:latin typeface="Inter"/>
+                <a:ea typeface="Inter"/>
+              </a:rPr>
+              <a:t>100%</a:t>
+            </a:r>
+            <a:endParaRPr/>
+          </a:p>
+        </p:txBody>
+      </p:sp>
+      <p:sp>
+        <p:nvSpPr>
+          <p:cNvPr id="143" name=""/>
           <p:cNvSpPr/>
           <p:nvPr/>
         </p:nvSpPr>
         <p:spPr>
           <a:xfrm rot="0" flipH="0" flipV="0">
-            <a:off x="8972550" y="2228850"/>
-            <a:ext cx="2609850" cy="2228850"/>
+            <a:off x="7467600" y="2809875"/>
+            <a:ext cx="4191000" cy="571500"/>
           </a:xfrm>
           <a:prstGeom prst="roundRect">
             <a:avLst>
-              <a:gd name="adj" fmla="val 5128"/>
+              <a:gd name="adj" fmla="val 16667"/>
             </a:avLst>
           </a:prstGeom>
           <a:gradFill>
@@ -5917,13 +6827,6 @@
             <a:lin ang="2700000" scaled="1"/>
           </a:gradFill>
           <a:ln/>
-          <a:effectLst>
-            <a:outerShdw blurRad="228600" dist="57150" dir="5400000">
-              <a:srgbClr val="172133">
-                <a:alpha val="18000"/>
-              </a:srgbClr>
-            </a:outerShdw>
-          </a:effectLst>
         </p:spPr>
         <p:txBody>
           <a:bodyPr/>
@@ -5932,337 +6835,241 @@
       </p:sp>
       <p:sp>
         <p:nvSpPr>
-          <p:cNvPr id="122" name=""/>
+          <p:cNvPr id="144" name="" descr="{&quot;isTemplate&quot;:true,&quot;type&quot;:&quot;text&quot;}"/>
+          <p:cNvSpPr txBox="1"/>
+          <p:nvPr/>
+        </p:nvSpPr>
+        <p:spPr>
+          <a:xfrm rot="0" flipH="0" flipV="0">
+            <a:off x="7620000" y="2905125"/>
+            <a:ext cx="2828925" cy="161925"/>
+          </a:xfrm>
+          <a:prstGeom prst="rect"/>
+        </p:spPr>
+        <p:txBody>
+          <a:bodyPr wrap="none" lIns="0" tIns="0" rIns="0" bIns="0"/>
+          <a:p>
+            <a:pPr>
+              <a:lnSpc>
+                <a:spcPct val="100000"/>
+              </a:lnSpc>
+            </a:pPr>
+            <a:r>
+              <a:rPr lang="zh-CN" sz="1013">
+                <a:solidFill>
+                  <a:srgbClr val="FBFCFA"/>
+                </a:solidFill>
+                <a:latin typeface="Microsoft YaHei"/>
+                <a:ea typeface="Microsoft YaHei"/>
+              </a:rPr>
+              <a:t>单元测试</a:t>
+            </a:r>
+            <a:r>
+              <a:rPr lang="en-US" sz="1013">
+                <a:solidFill>
+                  <a:srgbClr val="FBFCFA"/>
+                </a:solidFill>
+                <a:latin typeface="Microsoft YaHei"/>
+                <a:ea typeface="Microsoft YaHei"/>
+              </a:rPr>
+              <a:t> · CI </a:t>
+            </a:r>
+            <a:r>
+              <a:rPr lang="zh-CN" sz="1013">
+                <a:solidFill>
+                  <a:srgbClr val="FBFCFA"/>
+                </a:solidFill>
+                <a:latin typeface="Microsoft YaHei"/>
+                <a:ea typeface="Microsoft YaHei"/>
+              </a:rPr>
+              <a:t>全绿</a:t>
+            </a:r>
+            <a:endParaRPr/>
+          </a:p>
+        </p:txBody>
+      </p:sp>
+      <p:sp>
+        <p:nvSpPr>
+          <p:cNvPr id="145" name="" descr="{&quot;isTemplate&quot;:true,&quot;type&quot;:&quot;text&quot;}"/>
+          <p:cNvSpPr txBox="1"/>
+          <p:nvPr/>
+        </p:nvSpPr>
+        <p:spPr>
+          <a:xfrm rot="0" flipH="0" flipV="0">
+            <a:off x="7620000" y="3095625"/>
+            <a:ext cx="2828925" cy="190500"/>
+          </a:xfrm>
+          <a:prstGeom prst="rect"/>
+        </p:spPr>
+        <p:txBody>
+          <a:bodyPr wrap="none" lIns="0" tIns="0" rIns="0" bIns="0"/>
+          <a:p>
+            <a:pPr>
+              <a:lnSpc>
+                <a:spcPct val="150000"/>
+              </a:lnSpc>
+            </a:pPr>
+            <a:r>
+              <a:rPr lang="zh-CN" sz="825">
+                <a:solidFill>
+                  <a:srgbClr val="FBFCFA">
+                    <a:alpha val="75000"/>
+                  </a:srgbClr>
+                </a:solidFill>
+                <a:latin typeface="Microsoft YaHei"/>
+                <a:ea typeface="Microsoft YaHei"/>
+              </a:rPr>
+              <a:t>判定：</a:t>
+            </a:r>
+            <a:r>
+              <a:rPr lang="en-US" sz="825">
+                <a:solidFill>
+                  <a:srgbClr val="FBFCFA">
+                    <a:alpha val="75000"/>
+                  </a:srgbClr>
+                </a:solidFill>
+                <a:latin typeface="Microsoft YaHei"/>
+                <a:ea typeface="Microsoft YaHei"/>
+              </a:rPr>
+              <a:t>pytest </a:t>
+            </a:r>
+            <a:r>
+              <a:rPr lang="zh-CN" sz="825">
+                <a:solidFill>
+                  <a:srgbClr val="FBFCFA">
+                    <a:alpha val="75000"/>
+                  </a:srgbClr>
+                </a:solidFill>
+                <a:latin typeface="Microsoft YaHei"/>
+                <a:ea typeface="Microsoft YaHei"/>
+              </a:rPr>
+              <a:t>单测</a:t>
+            </a:r>
+            <a:r>
+              <a:rPr lang="en-US" sz="825">
+                <a:solidFill>
+                  <a:srgbClr val="FBFCFA">
+                    <a:alpha val="75000"/>
+                  </a:srgbClr>
+                </a:solidFill>
+                <a:latin typeface="Microsoft YaHei"/>
+                <a:ea typeface="Microsoft YaHei"/>
+              </a:rPr>
+              <a:t> + GitHub Actions </a:t>
+            </a:r>
+            <a:r>
+              <a:rPr lang="zh-CN" sz="825">
+                <a:solidFill>
+                  <a:srgbClr val="FBFCFA">
+                    <a:alpha val="75000"/>
+                  </a:srgbClr>
+                </a:solidFill>
+                <a:latin typeface="Microsoft YaHei"/>
+                <a:ea typeface="Microsoft YaHei"/>
+              </a:rPr>
+              <a:t>每次</a:t>
+            </a:r>
+            <a:r>
+              <a:rPr lang="en-US" sz="825">
+                <a:solidFill>
+                  <a:srgbClr val="FBFCFA">
+                    <a:alpha val="75000"/>
+                  </a:srgbClr>
+                </a:solidFill>
+                <a:latin typeface="Microsoft YaHei"/>
+                <a:ea typeface="Microsoft YaHei"/>
+              </a:rPr>
+              <a:t> push </a:t>
+            </a:r>
+            <a:r>
+              <a:rPr lang="zh-CN" sz="825">
+                <a:solidFill>
+                  <a:srgbClr val="FBFCFA">
+                    <a:alpha val="75000"/>
+                  </a:srgbClr>
+                </a:solidFill>
+                <a:latin typeface="Microsoft YaHei"/>
+                <a:ea typeface="Microsoft YaHei"/>
+              </a:rPr>
+              <a:t>自动跑</a:t>
+            </a:r>
+            <a:endParaRPr/>
+          </a:p>
+        </p:txBody>
+      </p:sp>
+      <p:sp>
+        <p:nvSpPr>
+          <p:cNvPr id="146" name="" descr="{&quot;isTemplate&quot;:true,&quot;type&quot;:&quot;text&quot;}"/>
+          <p:cNvSpPr txBox="1"/>
+          <p:nvPr/>
+        </p:nvSpPr>
+        <p:spPr>
+          <a:xfrm rot="0" flipH="0" flipV="0">
+            <a:off x="10582275" y="2933700"/>
+            <a:ext cx="923925" cy="323850"/>
+          </a:xfrm>
+          <a:prstGeom prst="rect"/>
+        </p:spPr>
+        <p:txBody>
+          <a:bodyPr wrap="none" lIns="0" tIns="0" rIns="0" bIns="0"/>
+          <a:p>
+            <a:pPr algn="r">
+              <a:lnSpc>
+                <a:spcPct val="100000"/>
+              </a:lnSpc>
+            </a:pPr>
+            <a:r>
+              <a:rPr lang="en-US" sz="2100">
+                <a:solidFill>
+                  <a:srgbClr val="BD9B56"/>
+                </a:solidFill>
+                <a:latin typeface="Inter"/>
+                <a:ea typeface="Inter"/>
+              </a:rPr>
+              <a:t>113+30</a:t>
+            </a:r>
+            <a:endParaRPr/>
+          </a:p>
+        </p:txBody>
+      </p:sp>
+      <p:sp>
+        <p:nvSpPr>
+          <p:cNvPr id="147" name=""/>
           <p:cNvSpPr/>
           <p:nvPr/>
         </p:nvSpPr>
         <p:spPr>
           <a:xfrm rot="0" flipH="0" flipV="0">
-            <a:off x="8972550" y="2228850"/>
-            <a:ext cx="2609850" cy="2228850"/>
+            <a:off x="571500" y="5629275"/>
+            <a:ext cx="11125200" cy="638175"/>
           </a:xfrm>
           <a:custGeom>
             <a:pathLst>
-              <a:path w="274" h="234">
-                <a:moveTo>
-                  <a:pt x="263" y="0"/>
-                </a:moveTo>
-                <a:cubicBezTo>
-                  <a:pt x="268" y="0"/>
-                  <a:pt x="273" y="4"/>
-                  <a:pt x="274" y="10"/>
-                </a:cubicBezTo>
-                <a:cubicBezTo>
-                  <a:pt x="273" y="6"/>
-                  <a:pt x="270" y="4"/>
-                  <a:pt x="266" y="4"/>
-                </a:cubicBezTo>
-                <a:lnTo>
-                  <a:pt x="8" y="4"/>
-                </a:lnTo>
-                <a:cubicBezTo>
-                  <a:pt x="4" y="4"/>
-                  <a:pt x="1" y="7"/>
-                  <a:pt x="0" y="10"/>
-                </a:cubicBezTo>
-                <a:cubicBezTo>
-                  <a:pt x="1" y="4"/>
-                  <a:pt x="6" y="0"/>
-                  <a:pt x="12" y="0"/>
-                </a:cubicBezTo>
-                <a:lnTo>
-                  <a:pt x="262" y="0"/>
-                </a:lnTo>
-                <a:close/>
-              </a:path>
-            </a:pathLst>
-          </a:custGeom>
-          <a:solidFill>
-            <a:srgbClr val="BD9B56"/>
-          </a:solidFill>
-          <a:ln/>
-        </p:spPr>
-        <p:txBody>
-          <a:bodyPr/>
-          <a:p/>
-        </p:txBody>
-      </p:sp>
-      <p:sp>
-        <p:nvSpPr>
-          <p:cNvPr id="123" name="" descr="{&quot;isTemplate&quot;:true,&quot;type&quot;:&quot;text&quot;}"/>
-          <p:cNvSpPr txBox="1"/>
-          <p:nvPr/>
-        </p:nvSpPr>
-        <p:spPr>
-          <a:xfrm rot="0" flipH="0" flipV="0">
-            <a:off x="9124950" y="2457450"/>
-            <a:ext cx="2305050" cy="152400"/>
-          </a:xfrm>
-          <a:prstGeom prst="rect"/>
-        </p:spPr>
-        <p:txBody>
-          <a:bodyPr wrap="none" lIns="0" tIns="0" rIns="0" bIns="0"/>
-          <a:p>
-            <a:pPr algn="ctr">
-              <a:lnSpc>
-                <a:spcPct val="100000"/>
-              </a:lnSpc>
-            </a:pPr>
-            <a:r>
-              <a:rPr lang="en-US" sz="975" spc="-9223372036854775808">
-                <a:solidFill>
-                  <a:srgbClr val="BD9B56"/>
-                </a:solidFill>
-                <a:latin typeface="Microsoft YaHei"/>
-                <a:ea typeface="Microsoft YaHei"/>
-              </a:rPr>
-              <a:t>TESTS · CI GREEN</a:t>
-            </a:r>
-            <a:endParaRPr/>
-          </a:p>
-        </p:txBody>
-      </p:sp>
-      <p:sp>
-        <p:nvSpPr>
-          <p:cNvPr id="124" name="" descr="{&quot;isTemplate&quot;:true,&quot;type&quot;:&quot;text&quot;}"/>
-          <p:cNvSpPr txBox="1"/>
-          <p:nvPr/>
-        </p:nvSpPr>
-        <p:spPr>
-          <a:xfrm rot="0" flipH="0" flipV="0">
-            <a:off x="9124950" y="2724150"/>
-            <a:ext cx="2305050" cy="504825"/>
-          </a:xfrm>
-          <a:prstGeom prst="rect"/>
-        </p:spPr>
-        <p:txBody>
-          <a:bodyPr wrap="none" lIns="0" tIns="0" rIns="0" bIns="0"/>
-          <a:p>
-            <a:pPr algn="ctr">
-              <a:lnSpc>
-                <a:spcPct val="100000"/>
-              </a:lnSpc>
-            </a:pPr>
-            <a:r>
-              <a:rPr lang="en-US" sz="3300">
-                <a:solidFill>
-                  <a:srgbClr val="FBFCFA"/>
-                </a:solidFill>
-                <a:latin typeface="Inter"/>
-                <a:ea typeface="Inter"/>
-              </a:rPr>
-              <a:t>113 + 30</a:t>
-            </a:r>
-            <a:endParaRPr/>
-          </a:p>
-        </p:txBody>
-      </p:sp>
-      <p:sp>
-        <p:nvSpPr>
-          <p:cNvPr id="125" name="" descr="{&quot;isTemplate&quot;:true,&quot;type&quot;:&quot;text&quot;}"/>
-          <p:cNvSpPr txBox="1"/>
-          <p:nvPr/>
-        </p:nvSpPr>
-        <p:spPr>
-          <a:xfrm rot="0" flipH="0" flipV="0">
-            <a:off x="9124950" y="3343275"/>
-            <a:ext cx="2305050" cy="247650"/>
-          </a:xfrm>
-          <a:prstGeom prst="rect"/>
-        </p:spPr>
-        <p:txBody>
-          <a:bodyPr wrap="none" lIns="0" tIns="0" rIns="0" bIns="0"/>
-          <a:p>
-            <a:pPr algn="ctr">
-              <a:lnSpc>
-                <a:spcPct val="150000"/>
-              </a:lnSpc>
-            </a:pPr>
-            <a:r>
-              <a:rPr lang="zh-CN" sz="1050">
-                <a:solidFill>
-                  <a:srgbClr val="FBFCFA">
-                    <a:alpha val="85000"/>
-                  </a:srgbClr>
-                </a:solidFill>
-                <a:latin typeface="Microsoft YaHei"/>
-                <a:ea typeface="Microsoft YaHei"/>
-              </a:rPr>
-              <a:t>后端</a:t>
-            </a:r>
-            <a:r>
-              <a:rPr lang="en-US" sz="1050">
-                <a:solidFill>
-                  <a:srgbClr val="FBFCFA">
-                    <a:alpha val="85000"/>
-                  </a:srgbClr>
-                </a:solidFill>
-                <a:latin typeface="Microsoft YaHei"/>
-                <a:ea typeface="Microsoft YaHei"/>
-              </a:rPr>
-              <a:t> + </a:t>
-            </a:r>
-            <a:r>
-              <a:rPr lang="zh-CN" sz="1050">
-                <a:solidFill>
-                  <a:srgbClr val="FBFCFA">
-                    <a:alpha val="85000"/>
-                  </a:srgbClr>
-                </a:solidFill>
-                <a:latin typeface="Microsoft YaHei"/>
-                <a:ea typeface="Microsoft YaHei"/>
-              </a:rPr>
-              <a:t>前端测试全绿</a:t>
-            </a:r>
-            <a:endParaRPr/>
-          </a:p>
-        </p:txBody>
-      </p:sp>
-      <p:sp>
-        <p:nvSpPr>
-          <p:cNvPr id="126" name=""/>
-          <p:cNvSpPr/>
-          <p:nvPr/>
-        </p:nvSpPr>
-        <p:spPr>
-          <a:xfrm rot="0" flipH="0" flipV="0">
-            <a:off x="9124950" y="3705225"/>
-            <a:ext cx="2305050" cy="314325"/>
-          </a:xfrm>
-          <a:custGeom>
-            <a:pathLst>
-              <a:path w="242" h="33">
+              <a:path w="1168" h="67">
                 <a:moveTo>
                   <a:pt x="0" y="0"/>
                 </a:moveTo>
                 <a:lnTo>
-                  <a:pt x="242" y="0"/>
+                  <a:pt x="1160" y="0"/>
+                </a:lnTo>
+                <a:cubicBezTo>
+                  <a:pt x="1164" y="0"/>
+                  <a:pt x="1168" y="4"/>
+                  <a:pt x="1168" y="8"/>
+                </a:cubicBezTo>
+                <a:lnTo>
+                  <a:pt x="1168" y="59"/>
+                </a:lnTo>
+                <a:cubicBezTo>
+                  <a:pt x="1168" y="63"/>
+                  <a:pt x="1164" y="67"/>
+                  <a:pt x="1160" y="67"/>
+                </a:cubicBezTo>
+                <a:lnTo>
+                  <a:pt x="0" y="67"/>
                 </a:lnTo>
                 <a:lnTo>
-                  <a:pt x="242" y="1"/>
-                </a:lnTo>
-                <a:lnTo>
-                  <a:pt x="0" y="1"/>
-                </a:lnTo>
-                <a:close/>
-              </a:path>
-            </a:pathLst>
-          </a:custGeom>
-          <a:solidFill>
-            <a:srgbClr val="BD9B56">
-              <a:alpha val="30000"/>
-            </a:srgbClr>
-          </a:solidFill>
-          <a:ln/>
-        </p:spPr>
-        <p:txBody>
-          <a:bodyPr/>
-          <a:p/>
-        </p:txBody>
-      </p:sp>
-      <p:sp>
-        <p:nvSpPr>
-          <p:cNvPr id="127" name="" descr="{&quot;isTemplate&quot;:true,&quot;type&quot;:&quot;text&quot;}"/>
-          <p:cNvSpPr txBox="1"/>
-          <p:nvPr/>
-        </p:nvSpPr>
-        <p:spPr>
-          <a:xfrm rot="0" flipH="0" flipV="0">
-            <a:off x="9124950" y="3790950"/>
-            <a:ext cx="2305050" cy="142875"/>
-          </a:xfrm>
-          <a:prstGeom prst="rect"/>
-        </p:spPr>
-        <p:txBody>
-          <a:bodyPr wrap="none" lIns="0" tIns="0" rIns="0" bIns="0"/>
-          <a:p>
-            <a:pPr algn="ctr">
-              <a:lnSpc>
-                <a:spcPct val="100000"/>
-              </a:lnSpc>
-            </a:pPr>
-            <a:r>
-              <a:rPr lang="en-US" sz="900">
-                <a:solidFill>
-                  <a:srgbClr val="BD9B56"/>
-                </a:solidFill>
-                <a:latin typeface="Microsoft YaHei"/>
-                <a:ea typeface="Microsoft YaHei"/>
-              </a:rPr>
-              <a:t>GitHub Actions </a:t>
-            </a:r>
-            <a:r>
-              <a:rPr lang="zh-CN" sz="900">
-                <a:solidFill>
-                  <a:srgbClr val="BD9B56"/>
-                </a:solidFill>
-                <a:latin typeface="Microsoft YaHei"/>
-                <a:ea typeface="Microsoft YaHei"/>
-              </a:rPr>
-              <a:t>每次</a:t>
-            </a:r>
-            <a:r>
-              <a:rPr lang="en-US" sz="900">
-                <a:solidFill>
-                  <a:srgbClr val="BD9B56"/>
-                </a:solidFill>
-                <a:latin typeface="Microsoft YaHei"/>
-                <a:ea typeface="Microsoft YaHei"/>
-              </a:rPr>
-              <a:t> push </a:t>
-            </a:r>
-            <a:r>
-              <a:rPr lang="zh-CN" sz="900">
-                <a:solidFill>
-                  <a:srgbClr val="BD9B56"/>
-                </a:solidFill>
-                <a:latin typeface="Microsoft YaHei"/>
-                <a:ea typeface="Microsoft YaHei"/>
-              </a:rPr>
-              <a:t>自动跑</a:t>
-            </a:r>
-            <a:endParaRPr/>
-          </a:p>
-        </p:txBody>
-      </p:sp>
-      <p:sp>
-        <p:nvSpPr>
-          <p:cNvPr id="128" name=""/>
-          <p:cNvSpPr/>
-          <p:nvPr/>
-        </p:nvSpPr>
-        <p:spPr>
-          <a:xfrm rot="0" flipH="0" flipV="0">
-            <a:off x="647700" y="5314950"/>
-            <a:ext cx="10972800" cy="781050"/>
-          </a:xfrm>
-          <a:custGeom>
-            <a:pathLst>
-              <a:path w="1152" h="82">
-                <a:moveTo>
-                  <a:pt x="0" y="0"/>
-                </a:moveTo>
-                <a:lnTo>
-                  <a:pt x="1144" y="0"/>
-                </a:lnTo>
-                <a:cubicBezTo>
-                  <a:pt x="1148" y="0"/>
-                  <a:pt x="1152" y="4"/>
-                  <a:pt x="1152" y="8"/>
-                </a:cubicBezTo>
-                <a:lnTo>
-                  <a:pt x="1152" y="74"/>
-                </a:lnTo>
-                <a:cubicBezTo>
-                  <a:pt x="1152" y="78"/>
-                  <a:pt x="1148" y="82"/>
-                  <a:pt x="1144" y="82"/>
-                </a:cubicBezTo>
-                <a:lnTo>
-                  <a:pt x="0" y="82"/>
-                </a:lnTo>
-                <a:lnTo>
-                  <a:pt x="0" y="82"/>
+                  <a:pt x="0" y="67"/>
                 </a:lnTo>
                 <a:lnTo>
                   <a:pt x="0" y="0"/>
@@ -6288,23 +7095,23 @@
       </p:sp>
       <p:sp>
         <p:nvSpPr>
-          <p:cNvPr id="129" name=""/>
+          <p:cNvPr id="148" name=""/>
           <p:cNvSpPr/>
           <p:nvPr/>
         </p:nvSpPr>
         <p:spPr>
           <a:xfrm rot="0" flipH="0" flipV="0">
-            <a:off x="647700" y="5314950"/>
-            <a:ext cx="10972800" cy="781050"/>
+            <a:off x="571500" y="5629275"/>
+            <a:ext cx="11125200" cy="638175"/>
           </a:xfrm>
           <a:custGeom>
             <a:pathLst>
-              <a:path w="1152" h="82">
+              <a:path w="1168" h="67">
                 <a:moveTo>
-                  <a:pt x="4" y="82"/>
+                  <a:pt x="4" y="67"/>
                 </a:moveTo>
                 <a:lnTo>
-                  <a:pt x="0" y="82"/>
+                  <a:pt x="0" y="67"/>
                 </a:lnTo>
                 <a:lnTo>
                   <a:pt x="0" y="0"/>
@@ -6328,14 +7135,14 @@
       </p:sp>
       <p:sp>
         <p:nvSpPr>
-          <p:cNvPr id="130" name="" descr="{&quot;isTemplate&quot;:true,&quot;type&quot;:&quot;text&quot;}"/>
-          <p:cNvSpPr txBox="1"/>
-          <p:nvPr/>
-        </p:nvSpPr>
-        <p:spPr>
-          <a:xfrm rot="0" flipH="0" flipV="0">
-            <a:off x="857250" y="5448300"/>
-            <a:ext cx="10515600" cy="514350"/>
+          <p:cNvPr id="149" name="" descr="{&quot;isTemplate&quot;:true,&quot;type&quot;:&quot;text&quot;}"/>
+          <p:cNvSpPr txBox="1"/>
+          <p:nvPr/>
+        </p:nvSpPr>
+        <p:spPr>
+          <a:xfrm rot="0" flipH="0" flipV="0">
+            <a:off x="742950" y="5724525"/>
+            <a:ext cx="10744200" cy="447675"/>
           </a:xfrm>
           <a:prstGeom prst="rect"/>
         </p:spPr>
@@ -6346,11 +7153,11 @@
           <a:p>
             <a:pPr>
               <a:lnSpc>
-                <a:spcPct val="160000"/>
-              </a:lnSpc>
-            </a:pPr>
-            <a:r>
-              <a:rPr lang="zh-CN" sz="1050" b="1">
+                <a:spcPct val="155000"/>
+              </a:lnSpc>
+            </a:pPr>
+            <a:r>
+              <a:rPr lang="zh-CN" sz="938" b="1">
                 <a:solidFill>
                   <a:srgbClr val="BD9B56"/>
                 </a:solidFill>
@@ -6360,7 +7167,7 @@
               <a:t>评估驱动优化：</a:t>
             </a:r>
             <a:r>
-              <a:rPr lang="en-US" sz="1050">
+              <a:rPr lang="en-US" sz="938">
                 <a:solidFill>
                   <a:srgbClr val="172133"/>
                 </a:solidFill>
@@ -6370,77 +7177,77 @@
               <a:t>RAG </a:t>
             </a:r>
             <a:r>
-              <a:rPr lang="zh-CN" sz="1050">
+              <a:rPr lang="zh-CN" sz="938">
                 <a:solidFill>
                   <a:srgbClr val="172133"/>
                 </a:solidFill>
                 <a:latin typeface="Microsoft YaHei"/>
                 <a:ea typeface="Microsoft YaHei"/>
               </a:rPr>
-              <a:t>答案从</a:t>
-            </a:r>
-            <a:r>
-              <a:rPr lang="en-US" sz="1050">
+              <a:t>答案</a:t>
+            </a:r>
+            <a:r>
+              <a:rPr lang="en-US" sz="938">
                 <a:solidFill>
                   <a:srgbClr val="172133"/>
                 </a:solidFill>
                 <a:latin typeface="Microsoft YaHei"/>
                 <a:ea typeface="Microsoft YaHei"/>
               </a:rPr>
-              <a:t> 50% → 100%</a:t>
-            </a:r>
-            <a:r>
-              <a:rPr lang="zh-CN" sz="1050">
+              <a:t> 50% → 100% </a:t>
+            </a:r>
+            <a:r>
+              <a:rPr lang="zh-CN" sz="938">
                 <a:solidFill>
                   <a:srgbClr val="172133"/>
                 </a:solidFill>
                 <a:latin typeface="Microsoft YaHei"/>
                 <a:ea typeface="Microsoft YaHei"/>
               </a:rPr>
-              <a:t>，源于发现「评估指标用脆弱子串匹配」并改为「关键词覆盖度」、同时优化答案生成</a:t>
-            </a:r>
-            <a:r>
-              <a:rPr lang="en-US" sz="1050">
+              <a:t>源于发现「评估指标用脆弱子串匹配」并改为「关键词覆盖度」、同时优化答案生成</a:t>
+            </a:r>
+            <a:r>
+              <a:rPr lang="en-US" sz="938">
                 <a:solidFill>
                   <a:srgbClr val="172133"/>
                 </a:solidFill>
                 <a:latin typeface="Microsoft YaHei"/>
                 <a:ea typeface="Microsoft YaHei"/>
               </a:rPr>
-              <a:t> prompt——</a:t>
-            </a:r>
-            <a:r>
-              <a:rPr lang="zh-CN" sz="1050">
+              <a:t> prompt</a:t>
+            </a:r>
+            <a:r>
+              <a:rPr lang="zh-CN" sz="938">
                 <a:solidFill>
                   <a:srgbClr val="172133"/>
                 </a:solidFill>
                 <a:latin typeface="Microsoft YaHei"/>
                 <a:ea typeface="Microsoft YaHei"/>
               </a:rPr>
-              <a:t>用数据找到</a:t>
-            </a:r>
-            <a:r>
-              <a:rPr lang="en-US" sz="1050">
+              <a:t>。工具选择</a:t>
+            </a:r>
+            <a:r>
+              <a:rPr lang="en-US" sz="938">
                 <a:solidFill>
                   <a:srgbClr val="172133"/>
                 </a:solidFill>
                 <a:latin typeface="Microsoft YaHei"/>
                 <a:ea typeface="Microsoft YaHei"/>
               </a:rPr>
-              <a:t> bug</a:t>
-            </a:r>
-            <a:r>
-              <a:rPr lang="zh-CN" sz="1050">
+              <a:t> / </a:t>
+            </a:r>
+            <a:r>
+              <a:rPr lang="zh-CN" sz="938">
                 <a:solidFill>
                   <a:srgbClr val="172133"/>
                 </a:solidFill>
                 <a:latin typeface="Microsoft YaHei"/>
                 <a:ea typeface="Microsoft YaHei"/>
               </a:rPr>
-              <a:t>，用数据证明修复。工具选择</a:t>
-            </a:r>
-            <a:r>
-              <a:rPr lang="en-US" sz="1050">
+              <a:t>参数提取</a:t>
+            </a:r>
+            <a:r>
+              <a:rPr lang="en-US" sz="938">
                 <a:solidFill>
                   <a:srgbClr val="172133"/>
                 </a:solidFill>
@@ -6450,73 +7257,53 @@
               <a:t> / </a:t>
             </a:r>
             <a:r>
-              <a:rPr lang="zh-CN" sz="1050">
+              <a:rPr lang="zh-CN" sz="938">
                 <a:solidFill>
                   <a:srgbClr val="172133"/>
                 </a:solidFill>
                 <a:latin typeface="Microsoft YaHei"/>
                 <a:ea typeface="Microsoft YaHei"/>
               </a:rPr>
-              <a:t>参数提取</a:t>
-            </a:r>
-            <a:r>
-              <a:rPr lang="en-US" sz="1050">
+              <a:t>工作流三项受「报修多轮交互」设计影响（用例按单轮设计、实际走</a:t>
+            </a:r>
+            <a:r>
+              <a:rPr lang="en-US" sz="938">
                 <a:solidFill>
                   <a:srgbClr val="172133"/>
                 </a:solidFill>
                 <a:latin typeface="Microsoft YaHei"/>
                 <a:ea typeface="Microsoft YaHei"/>
               </a:rPr>
-              <a:t> / </a:t>
-            </a:r>
-            <a:r>
-              <a:rPr lang="zh-CN" sz="1050">
+              <a:t> pending_repair </a:t>
+            </a:r>
+            <a:r>
+              <a:rPr lang="zh-CN" sz="938">
                 <a:solidFill>
                   <a:srgbClr val="172133"/>
                 </a:solidFill>
                 <a:latin typeface="Microsoft YaHei"/>
                 <a:ea typeface="Microsoft YaHei"/>
               </a:rPr>
-              <a:t>工作流三项指标受「报修多轮交互」设计影响（用例按单轮设计，实际走</a:t>
-            </a:r>
-            <a:r>
-              <a:rPr lang="en-US" sz="1050">
+              <a:t>多轮），已定位为评估框架升级项，而非</a:t>
+            </a:r>
+            <a:r>
+              <a:rPr lang="en-US" sz="938">
                 <a:solidFill>
                   <a:srgbClr val="172133"/>
                 </a:solidFill>
                 <a:latin typeface="Microsoft YaHei"/>
                 <a:ea typeface="Microsoft YaHei"/>
               </a:rPr>
-              <a:t> pending_repair </a:t>
-            </a:r>
-            <a:r>
-              <a:rPr lang="zh-CN" sz="1050">
+              <a:t> Agent </a:t>
+            </a:r>
+            <a:r>
+              <a:rPr lang="zh-CN" sz="938">
                 <a:solidFill>
                   <a:srgbClr val="172133"/>
                 </a:solidFill>
                 <a:latin typeface="Microsoft YaHei"/>
                 <a:ea typeface="Microsoft YaHei"/>
               </a:rPr>
-              <a:t>多轮），已定位为评估框架升级项，而非</a:t>
-            </a:r>
-            <a:r>
-              <a:rPr lang="en-US" sz="1050">
-                <a:solidFill>
-                  <a:srgbClr val="172133"/>
-                </a:solidFill>
-                <a:latin typeface="Microsoft YaHei"/>
-                <a:ea typeface="Microsoft YaHei"/>
-              </a:rPr>
-              <a:t> Agent </a:t>
-            </a:r>
-            <a:r>
-              <a:rPr lang="zh-CN" sz="1050">
-                <a:solidFill>
-                  <a:srgbClr val="172133"/>
-                </a:solidFill>
-                <a:latin typeface="Microsoft YaHei"/>
-                <a:ea typeface="Microsoft YaHei"/>
-              </a:rPr>
               <a:t>缺陷。</a:t>
             </a:r>
             <a:endParaRPr/>
@@ -6525,13 +7312,13 @@
       </p:sp>
       <p:sp>
         <p:nvSpPr>
-          <p:cNvPr id="131" name="" descr="{&quot;isTemplate&quot;:true,&quot;type&quot;:&quot;text&quot;}"/>
-          <p:cNvSpPr txBox="1"/>
-          <p:nvPr/>
-        </p:nvSpPr>
-        <p:spPr>
-          <a:xfrm rot="0" flipH="0" flipV="0">
-            <a:off x="609600" y="6334125"/>
+          <p:cNvPr id="150" name="" descr="{&quot;isTemplate&quot;:true,&quot;type&quot;:&quot;text&quot;}"/>
+          <p:cNvSpPr txBox="1"/>
+          <p:nvPr/>
+        </p:nvSpPr>
+        <p:spPr>
+          <a:xfrm rot="0" flipH="0" flipV="0">
+            <a:off x="533400" y="6429375"/>
             <a:ext cx="1009650" cy="142875"/>
           </a:xfrm>
           <a:prstGeom prst="rect"/>
@@ -6580,13 +7367,13 @@
       </p:sp>
       <p:sp>
         <p:nvSpPr>
-          <p:cNvPr id="132" name="" descr="{&quot;isTemplate&quot;:true,&quot;type&quot;:&quot;text&quot;}"/>
-          <p:cNvSpPr txBox="1"/>
-          <p:nvPr/>
-        </p:nvSpPr>
-        <p:spPr>
-          <a:xfrm rot="0" flipH="0" flipV="0">
-            <a:off x="11191875" y="6334125"/>
+          <p:cNvPr id="151" name="" descr="{&quot;isTemplate&quot;:true,&quot;type&quot;:&quot;text&quot;}"/>
+          <p:cNvSpPr txBox="1"/>
+          <p:nvPr/>
+        </p:nvSpPr>
+        <p:spPr>
+          <a:xfrm rot="0" flipH="0" flipV="0">
+            <a:off x="11268075" y="6429375"/>
             <a:ext cx="390525" cy="142875"/>
           </a:xfrm>
           <a:prstGeom prst="rect"/>
@@ -6623,7 +7410,7 @@
   <p:cSld>
     <p:spTree>
       <p:nvGrpSpPr>
-        <p:cNvPr id="133" name="" descr="&lt;Slide style={{ width: '1280px', height: '720px', background: '#FBFCFA', position: 'relative', padding: '36px 64px', boxSizing: 'border-box', display: 'flex', flexDirection: 'column' }}&gt;&#10;  &lt;div style={{ flexShrink: 0 }}&gt;&#10;    &lt;div style={{ color: '#BD9B56', fontSize: 13, letterSpacing: '0.25em', marginBottom: 6 }}&gt;04 · 总结与展望&lt;/div&gt;&#10;    &lt;h2 style={{ fontSize: 30, fontWeight: 'bold', color: '#172133', margin: 0, lineHeight: 1.3 }}&gt;技术路线回顾：八个阶段 · 从 0 到上线&lt;/h2&gt;&#10;    &lt;div style={{ fontSize: 14, color: '#6b7075', marginTop: 6 }}&gt;每个阶段都有代码、测试、可运行交付，循序渐进验证&lt;/div&gt;&#10;  &lt;/div&gt;&#10;  &lt;div style={{ flex: 1, display: 'flex', alignItems: 'center', justifyContent: 'center' }}&gt;&#10;    &lt;div style={{ width: '100%', background: '#fff', borderRadius: 12, padding: '30px 26px', boxShadow: '0 6px 24px rgba(23,33,51,0.08)' }}&gt;&#10;      &lt;svg width=&quot;1100&quot; height=&quot;300&quot; viewBox=&quot;0 0 1100 300&quot;&gt;&#10;        &lt;g fontFamily=&quot;Inter, sans-serif&quot;&gt;&#10;          {/* 主时间轴 */}&#10;          &lt;line x1=&quot;60&quot; y1=&quot;70&quot; x2=&quot;1060&quot; y2=&quot;70&quot; stroke=&quot;#22395E&quot; strokeWidth=&quot;2.5&quot; /&gt;&#10;          {[&#10;            ['P0', '项目初始化', '仓库 · Docker · CI'],&#10;            ['P1', '数据库', '21 表 + 仿真数据'],&#10;            ['P2', '后端', 'FastAPI 三层'],&#10;            ['P3', '前端', '三端 + PWA'],&#10;            ['P4', 'AI Agent', '多意图 + 状态机'],&#10;            ['P5', 'RAG', '向量化检索'],&#10;            ['P6', '评估', 'Intent/Tool/RAG'],&#10;            ['P7', '部署', '已上线'],&#10;          ].map(([p, t, d], i) =&gt; {&#10;            const cx = 60 + i * 143&#10;            return (&#10;              &lt;g key={p}&gt;&#10;                {/* 节点圆 */}&#10;                &lt;circle cx={cx} cy={70} r=&quot;9&quot; fill=&quot;#BD9B56&quot; /&gt;&#10;                &lt;circle cx={cx} cy={70} r=&quot;14&quot; fill=&quot;none&quot; stroke=&quot;#BD9B56&quot; strokeWidth=&quot;1.5&quot; strokeOpacity=&quot;0.35&quot; /&gt;&#10;                {/* 阶段标签 */}&#10;                &lt;text x={cx} y={46} textAnchor=&quot;middle&quot; fontSize=&quot;13&quot; fontWeight=&quot;bold&quot; fill=&quot;#BD9B56&quot;&gt;{p}&lt;/text&gt;&#10;                {/* 阶段名 */}&#10;                &lt;text x={cx} y={112} textAnchor=&quot;middle&quot; fontSize=&quot;15&quot; fontWeight=&quot;bold&quot; fill=&quot;#172133&quot;&gt;{t}&lt;/text&gt;&#10;                {/* 描述 */}&#10;                &lt;text x={cx} y={134} textAnchor=&quot;middle&quot; fontSize=&quot;11.5&quot; fill=&quot;#5F5E5A&quot;&gt;{d}&lt;/text&gt;&#10;                {/* 下方小圆点连接 */}&#10;                &lt;line x1={cx} y1={79} x2={cx} y2={100} stroke=&quot;#BD9B56&quot; strokeWidth=&quot;1.5&quot; strokeOpacity=&quot;0.5&quot; /&gt;&#10;              &lt;/g&gt;&#10;            )&#10;          })}&#10;        &lt;/g&gt;&#10;      &lt;/svg&gt;&#10;      &lt;div style={{ marginTop: 16, display: 'flex', gap: 14 }}&gt;&#10;        &lt;div style={{ flex: 1, background: 'rgba(189,155,86,0.08)', borderRadius: 8, padding: '12px 14px', borderLeft: '3px solid #BD9B56' }}&gt;&#10;          &lt;div style={{ fontSize: 13, color: '#BD9B56', fontWeight: 'bold', marginBottom: 5 }}&gt;P1 · 数据一致性&lt;/div&gt;&#10;          &lt;p style={{ fontSize: 12, color: '#5F5E5A', margin: 0, lineHeight: 1.5 }}&gt;8 栋 / 1664 套 / 746 账单，外键关联保证一致，8 个 SQL 可复现&lt;/p&gt;&#10;        &lt;/div&gt;&#10;        &lt;div style={{ flex: 1, background: 'rgba(189,155,86,0.08)', borderRadius: 8, padding: '12px 14px', borderLeft: '3px solid #BD9B56' }}&gt;&#10;          &lt;div style={{ fontSize: 13, color: '#BD9B56', fontWeight: 'bold', marginBottom: 5 }}&gt;P4 · 多轮状态机&lt;/div&gt;&#10;          &lt;p style={{ fontSize: 12, color: '#5F5E5A', margin: 0, lineHeight: 1.5 }}&gt;报修主动追问缺省字段，避免生成残缺工单&lt;/p&gt;&#10;        &lt;/div&gt;&#10;        &lt;div style={{ flex: 1, background: 'rgba(189,155,86,0.08)', borderRadius: 8, padding: '12px 14px', borderLeft: '3px solid #BD9B56' }}&gt;&#10;          &lt;div style={{ fontSize: 13, color: '#BD9B56', fontWeight: 'bold', marginBottom: 5 }}&gt;P6 · 评估找 bug&lt;/div&gt;&#10;          &lt;p style={{ fontSize: 12, color: '#5F5E5A', margin: 0, lineHeight: 1.5 }}&gt;意图 83.33%→100%、答案 50%→100%，数据驱动优化&lt;/p&gt;&#10;        &lt;/div&gt;&#10;        &lt;div style={{ flex: 1, background: 'rgba(189,155,86,0.08)', borderRadius: 8, padding: '12px 14px', borderLeft: '3px solid #BD9B56' }}&gt;&#10;          &lt;div style={{ fontSize: 13, color: '#BD9B56', fontWeight: 'bold', marginBottom: 5 }}&gt;P7 · 部署踩坑&lt;/div&gt;&#10;          &lt;p style={{ fontSize: 12, color: '#5F5E5A', margin: 0, lineHeight: 1.5 }}&gt;国内镜像源、SECRET_KEY、端口映射逐一踩平&lt;/p&gt;&#10;        &lt;/div&gt;&#10;      &lt;/div&gt;&#10;    &lt;/div&gt;&#10;  &lt;/div&gt;&#10;  &lt;div style={{ flexShrink: 0, height: 40, display: 'flex', alignItems: 'flex-end', justifyContent: 'space-between' }}&gt;&#10;    &lt;span style={{ color: '#BD9B56', fontSize: 12, letterSpacing: '0.1em' }}&gt;云溪花园 · 智慧社区&lt;/span&gt;&#10;    &lt;span style={{ color: '#a09b8c', fontSize: 12 }}&gt;13 / 15&lt;/span&gt;&#10;  &lt;/div&gt;&#10;&lt;/Slide&gt;"/>
+        <p:cNvPr id="152" name="" descr="&lt;Slide style={{ width: '1280px', height: '720px', background: '#FBFCFA', position: 'relative', padding: '36px 64px', boxSizing: 'border-box', display: 'flex', flexDirection: 'column' }}&gt;&#10;  &lt;div style={{ flexShrink: 0 }}&gt;&#10;    &lt;div style={{ color: '#BD9B56', fontSize: 13, letterSpacing: '0.25em', marginBottom: 6 }}&gt;04 · 总结与展望&lt;/div&gt;&#10;    &lt;h2 style={{ fontSize: 30, fontWeight: 'bold', color: '#172133', margin: 0, lineHeight: 1.3 }}&gt;技术路线回顾：八个阶段 · 从 0 到上线&lt;/h2&gt;&#10;    &lt;div style={{ fontSize: 14, color: '#6b7075', marginTop: 6 }}&gt;每个阶段都有代码、测试、可运行交付，循序渐进验证&lt;/div&gt;&#10;  &lt;/div&gt;&#10;  &lt;div style={{ flex: 1, display: 'flex', alignItems: 'center', justifyContent: 'center' }}&gt;&#10;    &lt;div style={{ width: '100%', background: '#fff', borderRadius: 12, padding: '30px 26px', boxShadow: '0 6px 24px rgba(23,33,51,0.08)' }}&gt;&#10;      &lt;svg width=&quot;1100&quot; height=&quot;300&quot; viewBox=&quot;0 0 1100 300&quot;&gt;&#10;        &lt;g fontFamily=&quot;Inter, sans-serif&quot;&gt;&#10;          {/* 主时间轴 */}&#10;          &lt;line x1=&quot;60&quot; y1=&quot;70&quot; x2=&quot;1060&quot; y2=&quot;70&quot; stroke=&quot;#22395E&quot; strokeWidth=&quot;2.5&quot; /&gt;&#10;          {[&#10;            ['P0', '项目初始化', '仓库 · Docker · CI'],&#10;            ['P1', '数据库', '21 表 + 仿真数据'],&#10;            ['P2', '后端', 'FastAPI 三层'],&#10;            ['P3', '前端', '三端 + PWA'],&#10;            ['P4', 'AI Agent', '多意图 + 状态机'],&#10;            ['P5', 'RAG', '向量化检索'],&#10;            ['P6', '评估', 'Intent/Tool/RAG'],&#10;            ['P7', '部署', '已上线'],&#10;          ].map(([p, t, d], i) =&gt; {&#10;            const cx = 60 + i * 143&#10;            return (&#10;              &lt;g key={p}&gt;&#10;                {/* 节点圆 */}&#10;                &lt;circle cx={cx} cy={70} r=&quot;9&quot; fill=&quot;#BD9B56&quot; /&gt;&#10;                &lt;circle cx={cx} cy={70} r=&quot;14&quot; fill=&quot;none&quot; stroke=&quot;#BD9B56&quot; strokeWidth=&quot;1.5&quot; strokeOpacity=&quot;0.35&quot; /&gt;&#10;                {/* 阶段标签 */}&#10;                &lt;text x={cx} y={46} textAnchor=&quot;middle&quot; fontSize=&quot;13&quot; fontWeight=&quot;bold&quot; fill=&quot;#BD9B56&quot;&gt;{p}&lt;/text&gt;&#10;                {/* 阶段名 */}&#10;                &lt;text x={cx} y={112} textAnchor=&quot;middle&quot; fontSize=&quot;15&quot; fontWeight=&quot;bold&quot; fill=&quot;#172133&quot;&gt;{t}&lt;/text&gt;&#10;                {/* 描述 */}&#10;                &lt;text x={cx} y={134} textAnchor=&quot;middle&quot; fontSize=&quot;11.5&quot; fill=&quot;#5F5E5A&quot;&gt;{d}&lt;/text&gt;&#10;                {/* 下方小圆点连接 */}&#10;                &lt;line x1={cx} y1={79} x2={cx} y2={100} stroke=&quot;#BD9B56&quot; strokeWidth=&quot;1.5&quot; strokeOpacity=&quot;0.5&quot; /&gt;&#10;              &lt;/g&gt;&#10;            )&#10;          })}&#10;        &lt;/g&gt;&#10;      &lt;/svg&gt;&#10;      &lt;div style={{ marginTop: 16, display: 'flex', gap: 14 }}&gt;&#10;        &lt;div style={{ flex: 1, background: 'rgba(189,155,86,0.08)', borderRadius: 8, padding: '12px 14px', borderLeft: '3px solid #BD9B56' }}&gt;&#10;          &lt;div style={{ fontSize: 13, color: '#BD9B56', fontWeight: 'bold', marginBottom: 5 }}&gt;P1 · 数据一致性&lt;/div&gt;&#10;          &lt;p style={{ fontSize: 12, color: '#5F5E5A', margin: 0, lineHeight: 1.5 }}&gt;8 栋 / 1664 套 / 746 账单，外键关联保证一致，8 个 SQL 可复现&lt;/p&gt;&#10;        &lt;/div&gt;&#10;        &lt;div style={{ flex: 1, background: 'rgba(189,155,86,0.08)', borderRadius: 8, padding: '12px 14px', borderLeft: '3px solid #BD9B56' }}&gt;&#10;          &lt;div style={{ fontSize: 13, color: '#BD9B56', fontWeight: 'bold', marginBottom: 5 }}&gt;P4 · 多轮状态机&lt;/div&gt;&#10;          &lt;p style={{ fontSize: 12, color: '#5F5E5A', margin: 0, lineHeight: 1.5 }}&gt;报修主动追问缺省字段，避免生成残缺工单&lt;/p&gt;&#10;        &lt;/div&gt;&#10;        &lt;div style={{ flex: 1, background: 'rgba(189,155,86,0.08)', borderRadius: 8, padding: '12px 14px', borderLeft: '3px solid #BD9B56' }}&gt;&#10;          &lt;div style={{ fontSize: 13, color: '#BD9B56', fontWeight: 'bold', marginBottom: 5 }}&gt;P6 · 评估找 bug&lt;/div&gt;&#10;          &lt;p style={{ fontSize: 12, color: '#5F5E5A', margin: 0, lineHeight: 1.5 }}&gt;意图 83.33%→100%、答案 50%→100%，数据驱动优化&lt;/p&gt;&#10;        &lt;/div&gt;&#10;        &lt;div style={{ flex: 1, background: 'rgba(189,155,86,0.08)', borderRadius: 8, padding: '12px 14px', borderLeft: '3px solid #BD9B56' }}&gt;&#10;          &lt;div style={{ fontSize: 13, color: '#BD9B56', fontWeight: 'bold', marginBottom: 5 }}&gt;P7 · 部署踩坑&lt;/div&gt;&#10;          &lt;p style={{ fontSize: 12, color: '#5F5E5A', margin: 0, lineHeight: 1.5 }}&gt;国内镜像源、SECRET_KEY、端口映射逐一踩平&lt;/p&gt;&#10;        &lt;/div&gt;&#10;      &lt;/div&gt;&#10;    &lt;/div&gt;&#10;  &lt;/div&gt;&#10;  &lt;div style={{ flexShrink: 0, height: 40, display: 'flex', alignItems: 'flex-end', justifyContent: 'space-between' }}&gt;&#10;    &lt;span style={{ color: '#BD9B56', fontSize: 12, letterSpacing: '0.1em' }}&gt;云溪花园 · 智慧社区&lt;/span&gt;&#10;    &lt;span style={{ color: '#a09b8c', fontSize: 12 }}&gt;13 / 15&lt;/span&gt;&#10;  &lt;/div&gt;&#10;&lt;/Slide&gt;"/>
         <p:cNvGrpSpPr/>
         <p:nvPr/>
       </p:nvGrpSpPr>
@@ -6637,7 +7424,7 @@
       </p:grpSpPr>
       <p:sp>
         <p:nvSpPr>
-          <p:cNvPr id="134" name=""/>
+          <p:cNvPr id="153" name=""/>
           <p:cNvSpPr/>
           <p:nvPr/>
         </p:nvSpPr>
@@ -6661,7 +7448,7 @@
       </p:sp>
       <p:sp>
         <p:nvSpPr>
-          <p:cNvPr id="135" name="" descr="{&quot;isTemplate&quot;:true,&quot;type&quot;:&quot;text&quot;}"/>
+          <p:cNvPr id="154" name="" descr="{&quot;isTemplate&quot;:true,&quot;type&quot;:&quot;text&quot;}"/>
           <p:cNvSpPr txBox="1"/>
           <p:nvPr/>
         </p:nvSpPr>
@@ -6706,7 +7493,7 @@
       </p:sp>
       <p:sp>
         <p:nvSpPr>
-          <p:cNvPr id="136" name="" descr="{&quot;isTemplate&quot;:true,&quot;type&quot;:&quot;text&quot;}"/>
+          <p:cNvPr id="155" name="" descr="{&quot;isTemplate&quot;:true,&quot;type&quot;:&quot;text&quot;}"/>
           <p:cNvSpPr txBox="1"/>
           <p:nvPr/>
         </p:nvSpPr>
@@ -6781,7 +7568,7 @@
       </p:sp>
       <p:sp>
         <p:nvSpPr>
-          <p:cNvPr id="137" name="" descr="{&quot;isTemplate&quot;:true,&quot;type&quot;:&quot;text&quot;}"/>
+          <p:cNvPr id="156" name="" descr="{&quot;isTemplate&quot;:true,&quot;type&quot;:&quot;text&quot;}"/>
           <p:cNvSpPr txBox="1"/>
           <p:nvPr/>
         </p:nvSpPr>
@@ -6816,7 +7603,7 @@
       </p:sp>
       <p:sp>
         <p:nvSpPr>
-          <p:cNvPr id="138" name=""/>
+          <p:cNvPr id="157" name=""/>
           <p:cNvSpPr/>
           <p:nvPr/>
         </p:nvSpPr>
@@ -6849,7 +7636,7 @@
       </p:sp>
       <p:pic>
         <p:nvPicPr>
-          <p:cNvPr id="139" name=""/>
+          <p:cNvPr id="158" name=""/>
           <p:cNvPicPr>
             <a:picLocks noChangeAspect="1"/>
           </p:cNvPicPr>
@@ -6880,7 +7667,7 @@
       </p:pic>
       <p:sp>
         <p:nvSpPr>
-          <p:cNvPr id="140" name=""/>
+          <p:cNvPr id="159" name=""/>
           <p:cNvSpPr/>
           <p:nvPr/>
         </p:nvSpPr>
@@ -6908,7 +7695,7 @@
       </p:sp>
       <p:sp>
         <p:nvSpPr>
-          <p:cNvPr id="141" name=""/>
+          <p:cNvPr id="160" name=""/>
           <p:cNvSpPr/>
           <p:nvPr/>
         </p:nvSpPr>
@@ -6965,7 +7752,7 @@
       </p:sp>
       <p:sp>
         <p:nvSpPr>
-          <p:cNvPr id="142" name="" descr="{&quot;isTemplate&quot;:true,&quot;type&quot;:&quot;text&quot;}"/>
+          <p:cNvPr id="161" name="" descr="{&quot;isTemplate&quot;:true,&quot;type&quot;:&quot;text&quot;}"/>
           <p:cNvSpPr txBox="1"/>
           <p:nvPr/>
         </p:nvSpPr>
@@ -7010,7 +7797,7 @@
       </p:sp>
       <p:sp>
         <p:nvSpPr>
-          <p:cNvPr id="143" name="" descr="{&quot;isTemplate&quot;:true,&quot;type&quot;:&quot;text&quot;}"/>
+          <p:cNvPr id="162" name="" descr="{&quot;isTemplate&quot;:true,&quot;type&quot;:&quot;text&quot;}"/>
           <p:cNvSpPr txBox="1"/>
           <p:nvPr/>
         </p:nvSpPr>
@@ -7137,7 +7924,7 @@
       </p:sp>
       <p:sp>
         <p:nvSpPr>
-          <p:cNvPr id="144" name=""/>
+          <p:cNvPr id="163" name=""/>
           <p:cNvSpPr/>
           <p:nvPr/>
         </p:nvSpPr>
@@ -7165,7 +7952,7 @@
       </p:sp>
       <p:sp>
         <p:nvSpPr>
-          <p:cNvPr id="145" name=""/>
+          <p:cNvPr id="164" name=""/>
           <p:cNvSpPr/>
           <p:nvPr/>
         </p:nvSpPr>
@@ -7222,7 +8009,7 @@
       </p:sp>
       <p:sp>
         <p:nvSpPr>
-          <p:cNvPr id="146" name="" descr="{&quot;isTemplate&quot;:true,&quot;type&quot;:&quot;text&quot;}"/>
+          <p:cNvPr id="165" name="" descr="{&quot;isTemplate&quot;:true,&quot;type&quot;:&quot;text&quot;}"/>
           <p:cNvSpPr txBox="1"/>
           <p:nvPr/>
         </p:nvSpPr>
@@ -7267,7 +8054,7 @@
       </p:sp>
       <p:sp>
         <p:nvSpPr>
-          <p:cNvPr id="147" name="" descr="{&quot;isTemplate&quot;:true,&quot;type&quot;:&quot;text&quot;}"/>
+          <p:cNvPr id="166" name="" descr="{&quot;isTemplate&quot;:true,&quot;type&quot;:&quot;text&quot;}"/>
           <p:cNvSpPr txBox="1"/>
           <p:nvPr/>
         </p:nvSpPr>
@@ -7302,7 +8089,7 @@
       </p:sp>
       <p:sp>
         <p:nvSpPr>
-          <p:cNvPr id="148" name=""/>
+          <p:cNvPr id="167" name=""/>
           <p:cNvSpPr/>
           <p:nvPr/>
         </p:nvSpPr>
@@ -7330,7 +8117,7 @@
       </p:sp>
       <p:sp>
         <p:nvSpPr>
-          <p:cNvPr id="149" name=""/>
+          <p:cNvPr id="168" name=""/>
           <p:cNvSpPr/>
           <p:nvPr/>
         </p:nvSpPr>
@@ -7387,7 +8174,7 @@
       </p:sp>
       <p:sp>
         <p:nvSpPr>
-          <p:cNvPr id="150" name="" descr="{&quot;isTemplate&quot;:true,&quot;type&quot;:&quot;text&quot;}"/>
+          <p:cNvPr id="169" name="" descr="{&quot;isTemplate&quot;:true,&quot;type&quot;:&quot;text&quot;}"/>
           <p:cNvSpPr txBox="1"/>
           <p:nvPr/>
         </p:nvSpPr>
@@ -7442,7 +8229,7 @@
       </p:sp>
       <p:sp>
         <p:nvSpPr>
-          <p:cNvPr id="151" name="" descr="{&quot;isTemplate&quot;:true,&quot;type&quot;:&quot;text&quot;}"/>
+          <p:cNvPr id="170" name="" descr="{&quot;isTemplate&quot;:true,&quot;type&quot;:&quot;text&quot;}"/>
           <p:cNvSpPr txBox="1"/>
           <p:nvPr/>
         </p:nvSpPr>
@@ -7519,7 +8306,7 @@
       </p:sp>
       <p:sp>
         <p:nvSpPr>
-          <p:cNvPr id="152" name=""/>
+          <p:cNvPr id="171" name=""/>
           <p:cNvSpPr/>
           <p:nvPr/>
         </p:nvSpPr>
@@ -7547,7 +8334,7 @@
       </p:sp>
       <p:sp>
         <p:nvSpPr>
-          <p:cNvPr id="153" name=""/>
+          <p:cNvPr id="172" name=""/>
           <p:cNvSpPr/>
           <p:nvPr/>
         </p:nvSpPr>
@@ -7604,7 +8391,7 @@
       </p:sp>
       <p:sp>
         <p:nvSpPr>
-          <p:cNvPr id="154" name="" descr="{&quot;isTemplate&quot;:true,&quot;type&quot;:&quot;text&quot;}"/>
+          <p:cNvPr id="173" name="" descr="{&quot;isTemplate&quot;:true,&quot;type&quot;:&quot;text&quot;}"/>
           <p:cNvSpPr txBox="1"/>
           <p:nvPr/>
         </p:nvSpPr>
@@ -7649,7 +8436,7 @@
       </p:sp>
       <p:sp>
         <p:nvSpPr>
-          <p:cNvPr id="155" name="" descr="{&quot;isTemplate&quot;:true,&quot;type&quot;:&quot;text&quot;}"/>
+          <p:cNvPr id="174" name="" descr="{&quot;isTemplate&quot;:true,&quot;type&quot;:&quot;text&quot;}"/>
           <p:cNvSpPr txBox="1"/>
           <p:nvPr/>
         </p:nvSpPr>
@@ -7706,7 +8493,7 @@
       </p:sp>
       <p:sp>
         <p:nvSpPr>
-          <p:cNvPr id="156" name="" descr="{&quot;isTemplate&quot;:true,&quot;type&quot;:&quot;text&quot;}"/>
+          <p:cNvPr id="175" name="" descr="{&quot;isTemplate&quot;:true,&quot;type&quot;:&quot;text&quot;}"/>
           <p:cNvSpPr txBox="1"/>
           <p:nvPr/>
         </p:nvSpPr>
@@ -7761,7 +8548,7 @@
       </p:sp>
       <p:sp>
         <p:nvSpPr>
-          <p:cNvPr id="157" name="" descr="{&quot;isTemplate&quot;:true,&quot;type&quot;:&quot;text&quot;}"/>
+          <p:cNvPr id="176" name="" descr="{&quot;isTemplate&quot;:true,&quot;type&quot;:&quot;text&quot;}"/>
           <p:cNvSpPr txBox="1"/>
           <p:nvPr/>
         </p:nvSpPr>
@@ -7804,7 +8591,7 @@
   <p:cSld>
     <p:spTree>
       <p:nvGrpSpPr>
-        <p:cNvPr id="158" name="" descr="&lt;Slide style={{ width: '1280px', height: '720px', background: '#FBFCFA', position: 'relative', padding: '26px 52px', boxSizing: 'border-box', display: 'flex', flexDirection: 'column' }}&gt;&#10;  &lt;div style={{ flexShrink: 0 }}&gt;&#10;    &lt;div style={{ color: '#BD9B56', fontSize: 12, letterSpacing: '0.25em', marginBottom: 4 }}&gt;04 · 总结与展望&lt;/div&gt;&#10;    &lt;h2 style={{ fontSize: 25, fontWeight: 'bold', color: '#172133', margin: 0, lineHeight: 1.2 }}&gt;三端功能 × 实现技术：每个功能怎么做出来的&lt;/h2&gt;&#10;  &lt;/div&gt;&#10;  &lt;div style={{ flex: 1, display: 'flex', alignItems: 'stretch', gap: 18, marginTop: 10 }}&gt;&#10;    {/* 左栏：三端功能实现 */}&#10;    &lt;div style={{ flex: 1, display: 'flex', flexDirection: 'column', gap: 8 }}&gt;&#10;      {/* 业主端 */}&#10;      &lt;div style={{ background: '#fff', borderRadius: 10, padding: '10px 14px', boxShadow: '0 4px 16px rgba(23,33,51,0.06)' }}&gt;&#10;        &lt;div style={{ display: 'flex', alignItems: 'center', gap: 8, marginBottom: 6 }}&gt;&#10;          &lt;span style={{ fontSize: 14, fontWeight: 'bold', color: '#172133' }}&gt;业主端&lt;/span&gt;&#10;          &lt;span style={{ fontSize: 10.5, color: '#BD9B56', background: 'rgba(189,155,86,0.12)', padding: '2px 7px', borderRadius: 4 }}&gt;ToC · Owner&lt;/span&gt;&#10;        &lt;/div&gt;&#10;        &lt;div style={{ display: 'flex', flexDirection: 'column', gap: 3.5 }}&gt;&#10;          &lt;div style={{ display: 'flex', gap: 8, alignItems: 'baseline', fontSize: 11.5, lineHeight: 1.4 }}&gt;&lt;span style={{ color: '#172133', fontWeight: 'bold', minWidth: 56 }}&gt;AI 助手&lt;/span&gt;&lt;span style={{ color: '#6b7075' }}&gt;LangGraph 多 Agent：Personal 对话 → Router 意图识别 → Domain 工具调用&lt;/span&gt;&lt;/div&gt;&#10;          &lt;div style={{ display: 'flex', gap: 8, alignItems: 'baseline', fontSize: 11.5, lineHeight: 1.4 }}&gt;&lt;span style={{ color: '#172133', fontWeight: 'bold', minWidth: 56 }}&gt;对话报修&lt;/span&gt;&lt;span style={{ color: '#6b7075' }}&gt;Repair Agent · 多轮状态机补全房屋/类型 · 自动派单（技能+在岗+工号）&lt;/span&gt;&lt;/div&gt;&#10;          &lt;div style={{ display: 'flex', gap: 8, alignItems: 'baseline', fontSize: 11.5, lineHeight: 1.4 }}&gt;&lt;span style={{ color: '#172133', fontWeight: 'bold', minWidth: 56 }}&gt;缴费查询&lt;/span&gt;&lt;span style={{ color: '#6b7075' }}&gt;Fee Agent 查 fee_bills 账单表 · 返回金额/状态/截止日&lt;/span&gt;&lt;/div&gt;&#10;          &lt;div style={{ display: 'flex', gap: 8, alignItems: 'baseline', fontSize: 11.5, lineHeight: 1.4 }}&gt;&lt;span style={{ color: '#172133', fontWeight: 'bold', minWidth: 56 }}&gt;公告&lt;/span&gt;&lt;span style={{ color: '#6b7075' }}&gt;公告列表 + AI 摘要（LLM 提炼要点）&lt;/span&gt;&lt;/div&gt;&#10;          &lt;div style={{ display: 'flex', gap: 8, alignItems: 'baseline', fontSize: 11.5, lineHeight: 1.4 }}&gt;&lt;span style={{ color: '#172133', fontWeight: 'bold', minWidth: 56 }}&gt;我的工单&lt;/span&gt;&lt;span style={{ color: '#6b7075' }}&gt;repair_order 状态追踪（创建→派单→接单→完成→关闭）&lt;/span&gt;&lt;/div&gt;&#10;          &lt;div style={{ display: 'flex', gap: 8, alignItems: 'baseline', fontSize: 11.5, lineHeight: 1.4 }}&gt;&lt;span style={{ color: '#172133', fontWeight: 'bold', minWidth: 56 }}&gt;问题上报&lt;/span&gt;&lt;span style={{ color: '#6b7075' }}&gt;IssueReport 上报 · 附图片 · 物业答复&lt;/span&gt;&lt;/div&gt;&#10;        &lt;/div&gt;&#10;      &lt;/div&gt;&#10;      {/* 物业端 */}&#10;      &lt;div style={{ background: '#fff', borderRadius: 10, padding: '10px 14px', boxShadow: '0 4px 16px rgba(23,33,51,0.06)' }}&gt;&#10;        &lt;div style={{ display: 'flex', alignItems: 'center', gap: 8, marginBottom: 6 }}&gt;&#10;          &lt;span style={{ fontSize: 14, fontWeight: 'bold', color: '#172133' }}&gt;物业端&lt;/span&gt;&#10;          &lt;span style={{ fontSize: 10.5, color: '#BD9B56', background: 'rgba(189,155,86,0.12)', padding: '2px 7px', borderRadius: 4 }}&gt;ToB · Admin/Staff&lt;/span&gt;&#10;        &lt;/div&gt;&#10;        &lt;div style={{ display: 'flex', flexDirection: 'column', gap: 3.5 }}&gt;&#10;          &lt;div style={{ display: 'flex', gap: 8, alignItems: 'baseline', fontSize: 11.5, lineHeight: 1.4 }}&gt;&lt;span style={{ color: '#172133', fontWeight: 'bold', minWidth: 56 }}&gt;数据看板&lt;/span&gt;&lt;span style={{ color: '#6b7075' }}&gt;统计聚合 API · 今日报修/处理中/已完成实时汇总&lt;/span&gt;&lt;/div&gt;&#10;          &lt;div style={{ display: 'flex', gap: 8, alignItems: 'baseline', fontSize: 11.5, lineHeight: 1.4 }}&gt;&lt;span style={{ color: '#172133', fontWeight: 'bold', minWidth: 56 }}&gt;工单管理&lt;/span&gt;&lt;span style={{ color: '#6b7075' }}&gt;repair_order CRUD · 状态流转 · 人工派单/改派&lt;/span&gt;&lt;/div&gt;&#10;          &lt;div style={{ display: 'flex', gap: 8, alignItems: 'baseline', fontSize: 11.5, lineHeight: 1.4 }}&gt;&lt;span style={{ color: '#172133', fontWeight: 'bold', minWidth: 56 }}&gt;用户/房屋&lt;/span&gt;&lt;span style={{ color: '#6b7075' }}&gt;user / house / house_binding 绑定关系管理&lt;/span&gt;&lt;/div&gt;&#10;          &lt;div style={{ display: 'flex', gap: 8, alignItems: 'baseline', fontSize: 11.5, lineHeight: 1.4 }}&gt;&lt;span style={{ color: '#172133', fontWeight: 'bold', minWidth: 56 }}&gt;公告 AI 生成&lt;/span&gt;&lt;span style={{ color: '#6b7075' }}&gt;Notice Agent + LLM 生成标题/正文/影响范围 · 人工审核发布&lt;/span&gt;&lt;/div&gt;&#10;          &lt;div style={{ display: 'flex', gap: 8, alignItems: 'baseline', fontSize: 11.5, lineHeight: 1.4 }}&gt;&lt;span style={{ color: '#172133', fontWeight: 'bold', minWidth: 56 }}&gt;巡检管理&lt;/span&gt;&lt;span style={{ color: '#6b7075' }}&gt;摄像头抓拍 → 视觉模型识别异常 → 巡检记录 + 告警&lt;/span&gt;&lt;/div&gt;&#10;          &lt;div style={{ display: 'flex', gap: 8, alignItems: 'baseline', fontSize: 11.5, lineHeight: 1.4 }}&gt;&lt;span style={{ color: '#172133', fontWeight: 'bold', minWidth: 56 }}&gt;知识缺口审核&lt;/span&gt;&lt;span style={{ color: '#6b7075' }}&gt;knowledge_gap 审核 → 通过自动写入 pgvector 知识库&lt;/span&gt;&lt;/div&gt;&#10;        &lt;/div&gt;&#10;      &lt;/div&gt;&#10;      {/* 维修端 */}&#10;      &lt;div style={{ background: '#fff', borderRadius: 10, padding: '10px 14px', boxShadow: '0 4px 16px rgba(23,33,51,0.06)' }}&gt;&#10;        &lt;div style={{ display: 'flex', alignItems: 'center', gap: 8, marginBottom: 6 }}&gt;&#10;          &lt;span style={{ fontSize: 14, fontWeight: 'bold', color: '#172133' }}&gt;维修端&lt;/span&gt;&#10;          &lt;span style={{ fontSize: 10.5, color: '#BD9B56', background: 'rgba(189,155,86,0.12)', padding: '2px 7px', borderRadius: 4 }}&gt;ToC · Worker&lt;/span&gt;&#10;        &lt;/div&gt;&#10;        &lt;div style={{ display: 'flex', flexDirection: 'column', gap: 3.5 }}&gt;&#10;          &lt;div style={{ display: 'flex', gap: 8, alignItems: 'baseline', fontSize: 11.5, lineHeight: 1.4 }}&gt;&lt;span style={{ color: '#172133', fontWeight: 'bold', minWidth: 56 }}&gt;任务列表&lt;/span&gt;&lt;span style={{ color: '#6b7075' }}&gt;自动派单后查询「我的待处理」工单&lt;/span&gt;&lt;/div&gt;&#10;          &lt;div style={{ display: 'flex', gap: 8, alignItems: 'baseline', fontSize: 11.5, lineHeight: 1.4 }}&gt;&lt;span style={{ color: '#172133', fontWeight: 'bold', minWidth: 56 }}&gt;接单/处理/完成&lt;/span&gt;&lt;span style={{ color: '#6b7075' }}&gt;状态机流转 · 每步触发实时通知&lt;/span&gt;&lt;/div&gt;&#10;          &lt;div style={{ display: 'flex', gap: 8, alignItems: 'baseline', fontSize: 11.5, lineHeight: 1.4 }}&gt;&lt;span style={{ color: '#172133', fontWeight: 'bold', minWidth: 56 }}&gt;消息&lt;/span&gt;&lt;span style={{ color: '#6b7075' }}&gt;事件驱动通知（派单/答复/完成）&lt;/span&gt;&lt;/div&gt;&#10;          &lt;div style={{ display: 'flex', gap: 8, alignItems: 'baseline', fontSize: 11.5, lineHeight: 1.4 }}&gt;&lt;span style={{ color: '#172133', fontWeight: 'bold', minWidth: 56 }}&gt;巡检任务&lt;/span&gt;&lt;span style={{ color: '#6b7075' }}&gt;巡检记录查看 · 异常处理&lt;/span&gt;&lt;/div&gt;&#10;        &lt;/div&gt;&#10;      &lt;/div&gt;&#10;    &lt;/div&gt;&#10;    {/* 右栏：自维护 + Demo */}&#10;    &lt;div style={{ flex: '0 0 285px', display: 'flex', flexDirection: 'column', gap: 10 }}&gt;&#10;      &lt;div style={{ background: 'linear-gradient(135deg, #172133 0%, #22395E 100%)', borderRadius: 12, padding: '16px 18px', color: '#FBFCFA', display: 'flex', flexDirection: 'column', gap: 9 }}&gt;&#10;        &lt;div style={{ color: '#BD9B56', fontSize: 12, letterSpacing: '0.2em' }}&gt;系统自维护自更新&lt;/div&gt;&#10;        &lt;div style={{ display: 'flex', flexDirection: 'column', gap: 6, fontSize: 11.5, lineHeight: 1.45 }}&gt;&#10;          &lt;div&gt;&lt;span style={{ color: '#BD9B56', fontWeight: 'bold' }}&gt;定时清理&lt;/span&gt;&lt;span style={{ color: 'rgba(251,252,250,0.8)' }}&gt;　APScheduler 每日清过期数据/孤儿文件&lt;/span&gt;&lt;/div&gt;&#10;          &lt;div&gt;&lt;span style={{ color: '#BD9B56', fontWeight: 'bold' }}&gt;巡检自动化&lt;/span&gt;&lt;span style={{ color: 'rgba(251,252,250,0.8)' }}&gt;　定时抓拍 + 视觉识别异常&lt;/span&gt;&lt;/div&gt;&#10;          &lt;div&gt;&lt;span style={{ color: '#BD9B56', fontWeight: 'bold' }}&gt;知识自进化&lt;/span&gt;&lt;span style={{ color: 'rgba(251,252,250,0.8)' }}&gt;　反馈→知识缺口→审核→入库&lt;/span&gt;&lt;/div&gt;&#10;          &lt;div&gt;&lt;span style={{ color: '#BD9B56', fontWeight: 'bold' }}&gt;监控告警&lt;/span&gt;&lt;span style={{ color: 'rgba(251,252,250,0.8)' }}&gt;　Prometheus + Grafana&lt;/span&gt;&lt;/div&gt;&#10;          &lt;div&gt;&lt;span style={{ color: '#BD9B56', fontWeight: 'bold' }}&gt;持续交付&lt;/span&gt;&lt;span style={{ color: 'rgba(251,252,250,0.8)' }}&gt;　GitHub Actions 自动测试+发布&lt;/span&gt;&lt;/div&gt;&#10;        &lt;/div&gt;&#10;        &lt;div style={{ fontSize: 11, color: 'rgba(251,252,250,0.6)', lineHeight: 1.5, paddingTop: 7, borderTop: '1px solid rgba(189,155,86,0.3)' }}&gt;无需人工值守，越用越准、越用越稳&lt;/div&gt;&#10;      &lt;/div&gt;&#10;      &lt;div style={{ background: '#fff', borderRadius: 12, padding: '14px 16px', boxShadow: '0 4px 16px rgba(23,33,51,0.06)' }}&gt;&#10;        &lt;div style={{ color: '#BD9B56', fontSize: 11.5, letterSpacing: '0.2em', marginBottom: 8 }}&gt;ONLINE DEMO&lt;/div&gt;&#10;        &lt;div style={{ fontSize: 15, fontFamily: 'Inter, sans-serif', color: '#172133', lineHeight: 1.4 }}&gt;http://119.91.236.85&lt;/div&gt;&#10;        &lt;div style={{ fontSize: 11, color: '#6b7075', lineHeight: 1.6, marginTop: 6 }}&gt;&#10;          业主 guoyi378 · 物业 mayun420&lt;br/&gt;维修 yangfei423　&lt;span style={{ color: '#BD9B56' }}&gt;密码 123456&lt;/span&gt;&#10;        &lt;/div&gt;&#10;        &lt;div style={{ fontSize: 10.5, color: '#a09b8c', marginTop: 6, paddingTop: 6, borderTop: '1px solid rgba(34,57,94,0.1)' }}&gt;GitHub：Xuuuukkk/ai-property-community-agent · MIT&lt;/div&gt;&#10;      &lt;/div&gt;&#10;    &lt;/div&gt;&#10;  &lt;/div&gt;&#10;  &lt;div style={{ flexShrink: 0, height: 30, display: 'flex', alignItems: 'flex-end', justifyContent: 'space-between' }}&gt;&#10;    &lt;span style={{ color: '#BD9B56', fontSize: 12, letterSpacing: '0.1em' }}&gt;云溪花园 · 智慧社区&lt;/span&gt;&#10;    &lt;span style={{ color: '#a09b8c', fontSize: 12 }}&gt;14 / 15&lt;/span&gt;&#10;  &lt;/div&gt;&#10;&lt;/Slide&gt;"/>
+        <p:cNvPr id="177" name="" descr="&lt;Slide style={{ width: '1280px', height: '720px', background: '#FBFCFA', position: 'relative', padding: '26px 52px', boxSizing: 'border-box', display: 'flex', flexDirection: 'column' }}&gt;&#10;  &lt;div style={{ flexShrink: 0 }}&gt;&#10;    &lt;div style={{ color: '#BD9B56', fontSize: 12, letterSpacing: '0.25em', marginBottom: 4 }}&gt;04 · 总结与展望&lt;/div&gt;&#10;    &lt;h2 style={{ fontSize: 25, fontWeight: 'bold', color: '#172133', margin: 0, lineHeight: 1.2 }}&gt;三端功能 × 实现技术：每个功能怎么做出来的&lt;/h2&gt;&#10;  &lt;/div&gt;&#10;  &lt;div style={{ flex: 1, display: 'flex', alignItems: 'stretch', gap: 18, marginTop: 10 }}&gt;&#10;    {/* 左栏：三端功能实现 */}&#10;    &lt;div style={{ flex: 1, display: 'flex', flexDirection: 'column', gap: 8 }}&gt;&#10;      {/* 业主端 */}&#10;      &lt;div style={{ background: '#fff', borderRadius: 10, padding: '10px 14px', boxShadow: '0 4px 16px rgba(23,33,51,0.06)' }}&gt;&#10;        &lt;div style={{ display: 'flex', alignItems: 'center', gap: 8, marginBottom: 6 }}&gt;&#10;          &lt;span style={{ fontSize: 14, fontWeight: 'bold', color: '#172133' }}&gt;业主端&lt;/span&gt;&#10;          &lt;span style={{ fontSize: 10.5, color: '#BD9B56', background: 'rgba(189,155,86,0.12)', padding: '2px 7px', borderRadius: 4 }}&gt;ToC · Owner&lt;/span&gt;&#10;        &lt;/div&gt;&#10;        &lt;div style={{ display: 'flex', flexDirection: 'column', gap: 3.5 }}&gt;&#10;          &lt;div style={{ display: 'flex', gap: 8, alignItems: 'baseline', fontSize: 11.5, lineHeight: 1.4 }}&gt;&lt;span style={{ color: '#172133', fontWeight: 'bold', minWidth: 56 }}&gt;AI 助手&lt;/span&gt;&lt;span style={{ color: '#6b7075' }}&gt;LangGraph 多 Agent：Personal 对话 → Router 意图识别 → Domain 工具调用&lt;/span&gt;&lt;/div&gt;&#10;          &lt;div style={{ display: 'flex', gap: 8, alignItems: 'baseline', fontSize: 11.5, lineHeight: 1.4 }}&gt;&lt;span style={{ color: '#172133', fontWeight: 'bold', minWidth: 56 }}&gt;对话报修&lt;/span&gt;&lt;span style={{ color: '#6b7075' }}&gt;Repair Agent · 多轮状态机补全房屋/类型 · 自动派单（技能+在岗+工号）&lt;/span&gt;&lt;/div&gt;&#10;          &lt;div style={{ display: 'flex', gap: 8, alignItems: 'baseline', fontSize: 11.5, lineHeight: 1.4 }}&gt;&lt;span style={{ color: '#172133', fontWeight: 'bold', minWidth: 56 }}&gt;缴费查询&lt;/span&gt;&lt;span style={{ color: '#6b7075' }}&gt;Fee Agent 查 fee_bills 账单表 · 返回金额/状态/截止日&lt;/span&gt;&lt;/div&gt;&#10;          &lt;div style={{ display: 'flex', gap: 8, alignItems: 'baseline', fontSize: 11.5, lineHeight: 1.4 }}&gt;&lt;span style={{ color: '#172133', fontWeight: 'bold', minWidth: 56 }}&gt;公告&lt;/span&gt;&lt;span style={{ color: '#6b7075' }}&gt;公告列表 + AI 摘要（LLM 提炼要点）&lt;/span&gt;&lt;/div&gt;&#10;          &lt;div style={{ display: 'flex', gap: 8, alignItems: 'baseline', fontSize: 11.5, lineHeight: 1.4 }}&gt;&lt;span style={{ color: '#172133', fontWeight: 'bold', minWidth: 56 }}&gt;我的工单&lt;/span&gt;&lt;span style={{ color: '#6b7075' }}&gt;repair_order 状态追踪（创建→派单→接单→完成→关闭）&lt;/span&gt;&lt;/div&gt;&#10;          &lt;div style={{ display: 'flex', gap: 8, alignItems: 'baseline', fontSize: 11.5, lineHeight: 1.4 }}&gt;&lt;span style={{ color: '#172133', fontWeight: 'bold', minWidth: 56 }}&gt;问题上报&lt;/span&gt;&lt;span style={{ color: '#6b7075' }}&gt;IssueReport 上报 · 附图片 · 物业答复&lt;/span&gt;&lt;/div&gt;&#10;        &lt;/div&gt;&#10;      &lt;/div&gt;&#10;      {/* 物业端 */}&#10;      &lt;div style={{ background: '#fff', borderRadius: 10, padding: '10px 14px', boxShadow: '0 4px 16px rgba(23,33,51,0.06)' }}&gt;&#10;        &lt;div style={{ display: 'flex', alignItems: 'center', gap: 8, marginBottom: 6 }}&gt;&#10;          &lt;span style={{ fontSize: 14, fontWeight: 'bold', color: '#172133' }}&gt;物业端&lt;/span&gt;&#10;          &lt;span style={{ fontSize: 10.5, color: '#BD9B56', background: 'rgba(189,155,86,0.12)', padding: '2px 7px', borderRadius: 4 }}&gt;ToB · Admin/Staff&lt;/span&gt;&#10;        &lt;/div&gt;&#10;        &lt;div style={{ display: 'flex', flexDirection: 'column', gap: 3.5 }}&gt;&#10;          &lt;div style={{ display: 'flex', gap: 8, alignItems: 'baseline', fontSize: 11.5, lineHeight: 1.4 }}&gt;&lt;span style={{ color: '#172133', fontWeight: 'bold', minWidth: 56 }}&gt;数据看板&lt;/span&gt;&lt;span style={{ color: '#6b7075' }}&gt;统计聚合 API · 今日报修/处理中/已完成实时汇总&lt;/span&gt;&lt;/div&gt;&#10;          &lt;div style={{ display: 'flex', gap: 8, alignItems: 'baseline', fontSize: 11.5, lineHeight: 1.4 }}&gt;&lt;span style={{ color: '#172133', fontWeight: 'bold', minWidth: 56 }}&gt;工单管理&lt;/span&gt;&lt;span style={{ color: '#6b7075' }}&gt;repair_order CRUD · 状态流转 · 人工派单/改派&lt;/span&gt;&lt;/div&gt;&#10;          &lt;div style={{ display: 'flex', gap: 8, alignItems: 'baseline', fontSize: 11.5, lineHeight: 1.4 }}&gt;&lt;span style={{ color: '#172133', fontWeight: 'bold', minWidth: 56 }}&gt;用户/房屋&lt;/span&gt;&lt;span style={{ color: '#6b7075' }}&gt;user / house / house_binding 绑定关系管理&lt;/span&gt;&lt;/div&gt;&#10;          &lt;div style={{ display: 'flex', gap: 8, alignItems: 'baseline', fontSize: 11.5, lineHeight: 1.4 }}&gt;&lt;span style={{ color: '#172133', fontWeight: 'bold', minWidth: 56 }}&gt;公告 AI 生成&lt;/span&gt;&lt;span style={{ color: '#6b7075' }}&gt;Notice Agent + LLM 生成标题/正文/影响范围 · 人工审核发布&lt;/span&gt;&lt;/div&gt;&#10;          &lt;div style={{ display: 'flex', gap: 8, alignItems: 'baseline', fontSize: 11.5, lineHeight: 1.4 }}&gt;&lt;span style={{ color: '#172133', fontWeight: 'bold', minWidth: 56 }}&gt;巡检管理&lt;/span&gt;&lt;span style={{ color: '#6b7075' }}&gt;摄像头抓拍 → 视觉模型识别异常 → 巡检记录 + 告警&lt;/span&gt;&lt;/div&gt;&#10;          &lt;div style={{ display: 'flex', gap: 8, alignItems: 'baseline', fontSize: 11.5, lineHeight: 1.4 }}&gt;&lt;span style={{ color: '#172133', fontWeight: 'bold', minWidth: 56 }}&gt;知识缺口审核&lt;/span&gt;&lt;span style={{ color: '#6b7075' }}&gt;knowledge_gap 审核 → 通过自动写入 pgvector 知识库&lt;/span&gt;&lt;/div&gt;&#10;        &lt;/div&gt;&#10;      &lt;/div&gt;&#10;      {/* 维修端 */}&#10;      &lt;div style={{ background: '#fff', borderRadius: 10, padding: '10px 14px', boxShadow: '0 4px 16px rgba(23,33,51,0.06)' }}&gt;&#10;        &lt;div style={{ display: 'flex', alignItems: 'center', gap: 8, marginBottom: 6 }}&gt;&#10;          &lt;span style={{ fontSize: 14, fontWeight: 'bold', color: '#172133' }}&gt;维修端&lt;/span&gt;&#10;          &lt;span style={{ fontSize: 10.5, color: '#BD9B56', background: 'rgba(189,155,86,0.12)', padding: '2px 7px', borderRadius: 4 }}&gt;ToC · Worker&lt;/span&gt;&#10;        &lt;/div&gt;&#10;        &lt;div style={{ display: 'flex', flexDirection: 'column', gap: 3.5 }}&gt;&#10;          &lt;div style={{ display: 'flex', gap: 8, alignItems: 'baseline', fontSize: 11.5, lineHeight: 1.4 }}&gt;&lt;span style={{ color: '#172133', fontWeight: 'bold', minWidth: 56 }}&gt;任务列表&lt;/span&gt;&lt;span style={{ color: '#6b7075' }}&gt;自动派单后查询「我的待处理」工单&lt;/span&gt;&lt;/div&gt;&#10;          &lt;div style={{ display: 'flex', gap: 8, alignItems: 'baseline', fontSize: 11.5, lineHeight: 1.4 }}&gt;&lt;span style={{ color: '#172133', fontWeight: 'bold', minWidth: 56 }}&gt;接单/处理/完成&lt;/span&gt;&lt;span style={{ color: '#6b7075' }}&gt;状态机流转 · 每步触发实时通知&lt;/span&gt;&lt;/div&gt;&#10;          &lt;div style={{ display: 'flex', gap: 8, alignItems: 'baseline', fontSize: 11.5, lineHeight: 1.4 }}&gt;&lt;span style={{ color: '#172133', fontWeight: 'bold', minWidth: 56 }}&gt;消息&lt;/span&gt;&lt;span style={{ color: '#6b7075' }}&gt;事件驱动通知（派单/答复/完成）&lt;/span&gt;&lt;/div&gt;&#10;          &lt;div style={{ display: 'flex', gap: 8, alignItems: 'baseline', fontSize: 11.5, lineHeight: 1.4 }}&gt;&lt;span style={{ color: '#172133', fontWeight: 'bold', minWidth: 56 }}&gt;巡检任务&lt;/span&gt;&lt;span style={{ color: '#6b7075' }}&gt;巡检记录查看 · 异常处理&lt;/span&gt;&lt;/div&gt;&#10;        &lt;/div&gt;&#10;      &lt;/div&gt;&#10;    &lt;/div&gt;&#10;    {/* 右栏：自维护 + Demo */}&#10;    &lt;div style={{ flex: '0 0 285px', display: 'flex', flexDirection: 'column', gap: 10 }}&gt;&#10;      &lt;div style={{ background: 'linear-gradient(135deg, #172133 0%, #22395E 100%)', borderRadius: 12, padding: '16px 18px', color: '#FBFCFA', display: 'flex', flexDirection: 'column', gap: 9 }}&gt;&#10;        &lt;div style={{ color: '#BD9B56', fontSize: 12, letterSpacing: '0.2em' }}&gt;系统自维护自更新&lt;/div&gt;&#10;        &lt;div style={{ display: 'flex', flexDirection: 'column', gap: 6, fontSize: 11.5, lineHeight: 1.45 }}&gt;&#10;          &lt;div&gt;&lt;span style={{ color: '#BD9B56', fontWeight: 'bold' }}&gt;定时清理&lt;/span&gt;&lt;span style={{ color: 'rgba(251,252,250,0.8)' }}&gt;　APScheduler 每日清过期数据/孤儿文件&lt;/span&gt;&lt;/div&gt;&#10;          &lt;div&gt;&lt;span style={{ color: '#BD9B56', fontWeight: 'bold' }}&gt;巡检自动化&lt;/span&gt;&lt;span style={{ color: 'rgba(251,252,250,0.8)' }}&gt;　定时抓拍 + 视觉识别异常&lt;/span&gt;&lt;/div&gt;&#10;          &lt;div&gt;&lt;span style={{ color: '#BD9B56', fontWeight: 'bold' }}&gt;知识自进化&lt;/span&gt;&lt;span style={{ color: 'rgba(251,252,250,0.8)' }}&gt;　反馈→知识缺口→审核→入库&lt;/span&gt;&lt;/div&gt;&#10;          &lt;div&gt;&lt;span style={{ color: '#BD9B56', fontWeight: 'bold' }}&gt;监控告警&lt;/span&gt;&lt;span style={{ color: 'rgba(251,252,250,0.8)' }}&gt;　Prometheus + Grafana&lt;/span&gt;&lt;/div&gt;&#10;          &lt;div&gt;&lt;span style={{ color: '#BD9B56', fontWeight: 'bold' }}&gt;持续交付&lt;/span&gt;&lt;span style={{ color: 'rgba(251,252,250,0.8)' }}&gt;　GitHub Actions 自动测试+发布&lt;/span&gt;&lt;/div&gt;&#10;        &lt;/div&gt;&#10;        &lt;div style={{ fontSize: 11, color: 'rgba(251,252,250,0.6)', lineHeight: 1.5, paddingTop: 7, borderTop: '1px solid rgba(189,155,86,0.3)' }}&gt;无需人工值守，越用越准、越用越稳&lt;/div&gt;&#10;      &lt;/div&gt;&#10;      &lt;div style={{ background: '#fff', borderRadius: 12, padding: '14px 16px', boxShadow: '0 4px 16px rgba(23,33,51,0.06)' }}&gt;&#10;        &lt;div style={{ color: '#BD9B56', fontSize: 11.5, letterSpacing: '0.2em', marginBottom: 8 }}&gt;ONLINE DEMO&lt;/div&gt;&#10;        &lt;div style={{ fontSize: 15, fontFamily: 'Inter, sans-serif', color: '#172133', lineHeight: 1.4 }}&gt;http://119.91.236.85&lt;/div&gt;&#10;        &lt;div style={{ fontSize: 11, color: '#6b7075', lineHeight: 1.6, marginTop: 6 }}&gt;&#10;          业主 guoyi378 · 物业 mayun420&lt;br/&gt;维修 yangfei423　&lt;span style={{ color: '#BD9B56' }}&gt;密码 123456&lt;/span&gt;&#10;        &lt;/div&gt;&#10;        &lt;div style={{ fontSize: 10.5, color: '#a09b8c', marginTop: 6, paddingTop: 6, borderTop: '1px solid rgba(34,57,94,0.1)' }}&gt;GitHub：Xuuuukkk/ai-property-community-agent · MIT&lt;/div&gt;&#10;      &lt;/div&gt;&#10;    &lt;/div&gt;&#10;  &lt;/div&gt;&#10;  &lt;div style={{ flexShrink: 0, height: 30, display: 'flex', alignItems: 'flex-end', justifyContent: 'space-between' }}&gt;&#10;    &lt;span style={{ color: '#BD9B56', fontSize: 12, letterSpacing: '0.1em' }}&gt;云溪花园 · 智慧社区&lt;/span&gt;&#10;    &lt;span style={{ color: '#a09b8c', fontSize: 12 }}&gt;14 / 15&lt;/span&gt;&#10;  &lt;/div&gt;&#10;&lt;/Slide&gt;"/>
         <p:cNvGrpSpPr/>
         <p:nvPr/>
       </p:nvGrpSpPr>
@@ -7818,7 +8605,7 @@
       </p:grpSpPr>
       <p:sp>
         <p:nvSpPr>
-          <p:cNvPr id="159" name=""/>
+          <p:cNvPr id="178" name=""/>
           <p:cNvSpPr/>
           <p:nvPr/>
         </p:nvSpPr>
@@ -7842,7 +8629,7 @@
       </p:sp>
       <p:sp>
         <p:nvSpPr>
-          <p:cNvPr id="160" name="" descr="{&quot;isTemplate&quot;:true,&quot;type&quot;:&quot;text&quot;}"/>
+          <p:cNvPr id="179" name="" descr="{&quot;isTemplate&quot;:true,&quot;type&quot;:&quot;text&quot;}"/>
           <p:cNvSpPr txBox="1"/>
           <p:nvPr/>
         </p:nvSpPr>
@@ -7887,7 +8674,7 @@
       </p:sp>
       <p:sp>
         <p:nvSpPr>
-          <p:cNvPr id="161" name="" descr="{&quot;isTemplate&quot;:true,&quot;type&quot;:&quot;text&quot;}"/>
+          <p:cNvPr id="180" name="" descr="{&quot;isTemplate&quot;:true,&quot;type&quot;:&quot;text&quot;}"/>
           <p:cNvSpPr txBox="1"/>
           <p:nvPr/>
         </p:nvSpPr>
@@ -7942,7 +8729,7 @@
       </p:sp>
       <p:sp>
         <p:nvSpPr>
-          <p:cNvPr id="162" name=""/>
+          <p:cNvPr id="181" name=""/>
           <p:cNvSpPr/>
           <p:nvPr/>
         </p:nvSpPr>
@@ -7975,7 +8762,7 @@
       </p:sp>
       <p:sp>
         <p:nvSpPr>
-          <p:cNvPr id="163" name="" descr="{&quot;isTemplate&quot;:true,&quot;type&quot;:&quot;text&quot;}"/>
+          <p:cNvPr id="182" name="" descr="{&quot;isTemplate&quot;:true,&quot;type&quot;:&quot;text&quot;}"/>
           <p:cNvSpPr txBox="1"/>
           <p:nvPr/>
         </p:nvSpPr>
@@ -8010,7 +8797,7 @@
       </p:sp>
       <p:sp>
         <p:nvSpPr>
-          <p:cNvPr id="164" name=""/>
+          <p:cNvPr id="183" name=""/>
           <p:cNvSpPr/>
           <p:nvPr/>
         </p:nvSpPr>
@@ -8038,7 +8825,7 @@
       </p:sp>
       <p:sp>
         <p:nvSpPr>
-          <p:cNvPr id="165" name="" descr="{&quot;isTemplate&quot;:true,&quot;type&quot;:&quot;text&quot;}"/>
+          <p:cNvPr id="184" name="" descr="{&quot;isTemplate&quot;:true,&quot;type&quot;:&quot;text&quot;}"/>
           <p:cNvSpPr txBox="1"/>
           <p:nvPr/>
         </p:nvSpPr>
@@ -8078,7 +8865,7 @@
       </p:sp>
       <p:sp>
         <p:nvSpPr>
-          <p:cNvPr id="166" name="" descr="{&quot;isTemplate&quot;:true,&quot;type&quot;:&quot;text&quot;}"/>
+          <p:cNvPr id="185" name="" descr="{&quot;isTemplate&quot;:true,&quot;type&quot;:&quot;text&quot;}"/>
           <p:cNvSpPr txBox="1"/>
           <p:nvPr/>
         </p:nvSpPr>
@@ -8123,7 +8910,7 @@
       </p:sp>
       <p:sp>
         <p:nvSpPr>
-          <p:cNvPr id="167" name="" descr="{&quot;isTemplate&quot;:true,&quot;type&quot;:&quot;text&quot;}"/>
+          <p:cNvPr id="186" name="" descr="{&quot;isTemplate&quot;:true,&quot;type&quot;:&quot;text&quot;}"/>
           <p:cNvSpPr txBox="1"/>
           <p:nvPr/>
         </p:nvSpPr>
@@ -8248,7 +9035,7 @@
       </p:sp>
       <p:sp>
         <p:nvSpPr>
-          <p:cNvPr id="168" name="" descr="{&quot;isTemplate&quot;:true,&quot;type&quot;:&quot;text&quot;}"/>
+          <p:cNvPr id="187" name="" descr="{&quot;isTemplate&quot;:true,&quot;type&quot;:&quot;text&quot;}"/>
           <p:cNvSpPr txBox="1"/>
           <p:nvPr/>
         </p:nvSpPr>
@@ -8283,7 +9070,7 @@
       </p:sp>
       <p:sp>
         <p:nvSpPr>
-          <p:cNvPr id="169" name="" descr="{&quot;isTemplate&quot;:true,&quot;type&quot;:&quot;text&quot;}"/>
+          <p:cNvPr id="188" name="" descr="{&quot;isTemplate&quot;:true,&quot;type&quot;:&quot;text&quot;}"/>
           <p:cNvSpPr txBox="1"/>
           <p:nvPr/>
         </p:nvSpPr>
@@ -8408,7 +9195,7 @@
       </p:sp>
       <p:sp>
         <p:nvSpPr>
-          <p:cNvPr id="170" name="" descr="{&quot;isTemplate&quot;:true,&quot;type&quot;:&quot;text&quot;}"/>
+          <p:cNvPr id="189" name="" descr="{&quot;isTemplate&quot;:true,&quot;type&quot;:&quot;text&quot;}"/>
           <p:cNvSpPr txBox="1"/>
           <p:nvPr/>
         </p:nvSpPr>
@@ -8443,7 +9230,7 @@
       </p:sp>
       <p:sp>
         <p:nvSpPr>
-          <p:cNvPr id="171" name="" descr="{&quot;isTemplate&quot;:true,&quot;type&quot;:&quot;text&quot;}"/>
+          <p:cNvPr id="190" name="" descr="{&quot;isTemplate&quot;:true,&quot;type&quot;:&quot;text&quot;}"/>
           <p:cNvSpPr txBox="1"/>
           <p:nvPr/>
         </p:nvSpPr>
@@ -8568,7 +9355,7 @@
       </p:sp>
       <p:sp>
         <p:nvSpPr>
-          <p:cNvPr id="172" name="" descr="{&quot;isTemplate&quot;:true,&quot;type&quot;:&quot;text&quot;}"/>
+          <p:cNvPr id="191" name="" descr="{&quot;isTemplate&quot;:true,&quot;type&quot;:&quot;text&quot;}"/>
           <p:cNvSpPr txBox="1"/>
           <p:nvPr/>
         </p:nvSpPr>
@@ -8603,7 +9390,7 @@
       </p:sp>
       <p:sp>
         <p:nvSpPr>
-          <p:cNvPr id="173" name="" descr="{&quot;isTemplate&quot;:true,&quot;type&quot;:&quot;text&quot;}"/>
+          <p:cNvPr id="192" name="" descr="{&quot;isTemplate&quot;:true,&quot;type&quot;:&quot;text&quot;}"/>
           <p:cNvSpPr txBox="1"/>
           <p:nvPr/>
         </p:nvSpPr>
@@ -8678,7 +9465,7 @@
       </p:sp>
       <p:sp>
         <p:nvSpPr>
-          <p:cNvPr id="174" name="" descr="{&quot;isTemplate&quot;:true,&quot;type&quot;:&quot;text&quot;}"/>
+          <p:cNvPr id="193" name="" descr="{&quot;isTemplate&quot;:true,&quot;type&quot;:&quot;text&quot;}"/>
           <p:cNvSpPr txBox="1"/>
           <p:nvPr/>
         </p:nvSpPr>
@@ -8713,7 +9500,7 @@
       </p:sp>
       <p:sp>
         <p:nvSpPr>
-          <p:cNvPr id="175" name="" descr="{&quot;isTemplate&quot;:true,&quot;type&quot;:&quot;text&quot;}"/>
+          <p:cNvPr id="194" name="" descr="{&quot;isTemplate&quot;:true,&quot;type&quot;:&quot;text&quot;}"/>
           <p:cNvSpPr txBox="1"/>
           <p:nvPr/>
         </p:nvSpPr>
@@ -8758,7 +9545,7 @@
       </p:sp>
       <p:sp>
         <p:nvSpPr>
-          <p:cNvPr id="176" name="" descr="{&quot;isTemplate&quot;:true,&quot;type&quot;:&quot;text&quot;}"/>
+          <p:cNvPr id="195" name="" descr="{&quot;isTemplate&quot;:true,&quot;type&quot;:&quot;text&quot;}"/>
           <p:cNvSpPr txBox="1"/>
           <p:nvPr/>
         </p:nvSpPr>
@@ -8793,7 +9580,7 @@
       </p:sp>
       <p:sp>
         <p:nvSpPr>
-          <p:cNvPr id="177" name="" descr="{&quot;isTemplate&quot;:true,&quot;type&quot;:&quot;text&quot;}"/>
+          <p:cNvPr id="196" name="" descr="{&quot;isTemplate&quot;:true,&quot;type&quot;:&quot;text&quot;}"/>
           <p:cNvSpPr txBox="1"/>
           <p:nvPr/>
         </p:nvSpPr>
@@ -8878,7 +9665,7 @@
       </p:sp>
       <p:sp>
         <p:nvSpPr>
-          <p:cNvPr id="178" name=""/>
+          <p:cNvPr id="197" name=""/>
           <p:cNvSpPr/>
           <p:nvPr/>
         </p:nvSpPr>
@@ -8911,7 +9698,7 @@
       </p:sp>
       <p:sp>
         <p:nvSpPr>
-          <p:cNvPr id="179" name="" descr="{&quot;isTemplate&quot;:true,&quot;type&quot;:&quot;text&quot;}"/>
+          <p:cNvPr id="198" name="" descr="{&quot;isTemplate&quot;:true,&quot;type&quot;:&quot;text&quot;}"/>
           <p:cNvSpPr txBox="1"/>
           <p:nvPr/>
         </p:nvSpPr>
@@ -8946,7 +9733,7 @@
       </p:sp>
       <p:sp>
         <p:nvSpPr>
-          <p:cNvPr id="180" name=""/>
+          <p:cNvPr id="199" name=""/>
           <p:cNvSpPr/>
           <p:nvPr/>
         </p:nvSpPr>
@@ -8974,7 +9761,7 @@
       </p:sp>
       <p:sp>
         <p:nvSpPr>
-          <p:cNvPr id="181" name="" descr="{&quot;isTemplate&quot;:true,&quot;type&quot;:&quot;text&quot;}"/>
+          <p:cNvPr id="200" name="" descr="{&quot;isTemplate&quot;:true,&quot;type&quot;:&quot;text&quot;}"/>
           <p:cNvSpPr txBox="1"/>
           <p:nvPr/>
         </p:nvSpPr>
@@ -9014,7 +9801,7 @@
       </p:sp>
       <p:sp>
         <p:nvSpPr>
-          <p:cNvPr id="182" name="" descr="{&quot;isTemplate&quot;:true,&quot;type&quot;:&quot;text&quot;}"/>
+          <p:cNvPr id="201" name="" descr="{&quot;isTemplate&quot;:true,&quot;type&quot;:&quot;text&quot;}"/>
           <p:cNvSpPr txBox="1"/>
           <p:nvPr/>
         </p:nvSpPr>
@@ -9049,7 +9836,7 @@
       </p:sp>
       <p:sp>
         <p:nvSpPr>
-          <p:cNvPr id="183" name="" descr="{&quot;isTemplate&quot;:true,&quot;type&quot;:&quot;text&quot;}"/>
+          <p:cNvPr id="202" name="" descr="{&quot;isTemplate&quot;:true,&quot;type&quot;:&quot;text&quot;}"/>
           <p:cNvSpPr txBox="1"/>
           <p:nvPr/>
         </p:nvSpPr>
@@ -9144,7 +9931,7 @@
       </p:sp>
       <p:sp>
         <p:nvSpPr>
-          <p:cNvPr id="184" name="" descr="{&quot;isTemplate&quot;:true,&quot;type&quot;:&quot;text&quot;}"/>
+          <p:cNvPr id="203" name="" descr="{&quot;isTemplate&quot;:true,&quot;type&quot;:&quot;text&quot;}"/>
           <p:cNvSpPr txBox="1"/>
           <p:nvPr/>
         </p:nvSpPr>
@@ -9179,7 +9966,7 @@
       </p:sp>
       <p:sp>
         <p:nvSpPr>
-          <p:cNvPr id="185" name="" descr="{&quot;isTemplate&quot;:true,&quot;type&quot;:&quot;text&quot;}"/>
+          <p:cNvPr id="204" name="" descr="{&quot;isTemplate&quot;:true,&quot;type&quot;:&quot;text&quot;}"/>
           <p:cNvSpPr txBox="1"/>
           <p:nvPr/>
         </p:nvSpPr>
@@ -9264,7 +10051,7 @@
       </p:sp>
       <p:sp>
         <p:nvSpPr>
-          <p:cNvPr id="186" name="" descr="{&quot;isTemplate&quot;:true,&quot;type&quot;:&quot;text&quot;}"/>
+          <p:cNvPr id="205" name="" descr="{&quot;isTemplate&quot;:true,&quot;type&quot;:&quot;text&quot;}"/>
           <p:cNvSpPr txBox="1"/>
           <p:nvPr/>
         </p:nvSpPr>
@@ -9319,7 +10106,7 @@
       </p:sp>
       <p:sp>
         <p:nvSpPr>
-          <p:cNvPr id="187" name="" descr="{&quot;isTemplate&quot;:true,&quot;type&quot;:&quot;text&quot;}"/>
+          <p:cNvPr id="206" name="" descr="{&quot;isTemplate&quot;:true,&quot;type&quot;:&quot;text&quot;}"/>
           <p:cNvSpPr txBox="1"/>
           <p:nvPr/>
         </p:nvSpPr>
@@ -9364,7 +10151,7 @@
       </p:sp>
       <p:sp>
         <p:nvSpPr>
-          <p:cNvPr id="188" name="" descr="{&quot;isTemplate&quot;:true,&quot;type&quot;:&quot;text&quot;}"/>
+          <p:cNvPr id="207" name="" descr="{&quot;isTemplate&quot;:true,&quot;type&quot;:&quot;text&quot;}"/>
           <p:cNvSpPr txBox="1"/>
           <p:nvPr/>
         </p:nvSpPr>
@@ -9419,7 +10206,7 @@
       </p:sp>
       <p:sp>
         <p:nvSpPr>
-          <p:cNvPr id="189" name="" descr="{&quot;isTemplate&quot;:true,&quot;type&quot;:&quot;text&quot;}"/>
+          <p:cNvPr id="208" name="" descr="{&quot;isTemplate&quot;:true,&quot;type&quot;:&quot;text&quot;}"/>
           <p:cNvSpPr txBox="1"/>
           <p:nvPr/>
         </p:nvSpPr>
@@ -9524,7 +10311,7 @@
       </p:sp>
       <p:sp>
         <p:nvSpPr>
-          <p:cNvPr id="190" name="" descr="{&quot;isTemplate&quot;:true,&quot;type&quot;:&quot;text&quot;}"/>
+          <p:cNvPr id="209" name="" descr="{&quot;isTemplate&quot;:true,&quot;type&quot;:&quot;text&quot;}"/>
           <p:cNvSpPr txBox="1"/>
           <p:nvPr/>
         </p:nvSpPr>
@@ -9559,7 +10346,7 @@
       </p:sp>
       <p:sp>
         <p:nvSpPr>
-          <p:cNvPr id="191" name="" descr="{&quot;isTemplate&quot;:true,&quot;type&quot;:&quot;text&quot;}"/>
+          <p:cNvPr id="210" name="" descr="{&quot;isTemplate&quot;:true,&quot;type&quot;:&quot;text&quot;}"/>
           <p:cNvSpPr txBox="1"/>
           <p:nvPr/>
         </p:nvSpPr>
@@ -9654,7 +10441,7 @@
       </p:sp>
       <p:sp>
         <p:nvSpPr>
-          <p:cNvPr id="192" name="" descr="{&quot;isTemplate&quot;:true,&quot;type&quot;:&quot;text&quot;}"/>
+          <p:cNvPr id="211" name="" descr="{&quot;isTemplate&quot;:true,&quot;type&quot;:&quot;text&quot;}"/>
           <p:cNvSpPr txBox="1"/>
           <p:nvPr/>
         </p:nvSpPr>
@@ -9689,7 +10476,7 @@
       </p:sp>
       <p:sp>
         <p:nvSpPr>
-          <p:cNvPr id="193" name="" descr="{&quot;isTemplate&quot;:true,&quot;type&quot;:&quot;text&quot;}"/>
+          <p:cNvPr id="212" name="" descr="{&quot;isTemplate&quot;:true,&quot;type&quot;:&quot;text&quot;}"/>
           <p:cNvSpPr txBox="1"/>
           <p:nvPr/>
         </p:nvSpPr>
@@ -9774,7 +10561,7 @@
       </p:sp>
       <p:sp>
         <p:nvSpPr>
-          <p:cNvPr id="194" name=""/>
+          <p:cNvPr id="213" name=""/>
           <p:cNvSpPr/>
           <p:nvPr/>
         </p:nvSpPr>
@@ -9807,7 +10594,7 @@
       </p:sp>
       <p:sp>
         <p:nvSpPr>
-          <p:cNvPr id="195" name="" descr="{&quot;isTemplate&quot;:true,&quot;type&quot;:&quot;text&quot;}"/>
+          <p:cNvPr id="214" name="" descr="{&quot;isTemplate&quot;:true,&quot;type&quot;:&quot;text&quot;}"/>
           <p:cNvSpPr txBox="1"/>
           <p:nvPr/>
         </p:nvSpPr>
@@ -9842,7 +10629,7 @@
       </p:sp>
       <p:sp>
         <p:nvSpPr>
-          <p:cNvPr id="196" name=""/>
+          <p:cNvPr id="215" name=""/>
           <p:cNvSpPr/>
           <p:nvPr/>
         </p:nvSpPr>
@@ -9870,7 +10657,7 @@
       </p:sp>
       <p:sp>
         <p:nvSpPr>
-          <p:cNvPr id="197" name="" descr="{&quot;isTemplate&quot;:true,&quot;type&quot;:&quot;text&quot;}"/>
+          <p:cNvPr id="216" name="" descr="{&quot;isTemplate&quot;:true,&quot;type&quot;:&quot;text&quot;}"/>
           <p:cNvSpPr txBox="1"/>
           <p:nvPr/>
         </p:nvSpPr>
@@ -9910,7 +10697,7 @@
       </p:sp>
       <p:sp>
         <p:nvSpPr>
-          <p:cNvPr id="198" name="" descr="{&quot;isTemplate&quot;:true,&quot;type&quot;:&quot;text&quot;}"/>
+          <p:cNvPr id="217" name="" descr="{&quot;isTemplate&quot;:true,&quot;type&quot;:&quot;text&quot;}"/>
           <p:cNvSpPr txBox="1"/>
           <p:nvPr/>
         </p:nvSpPr>
@@ -9945,7 +10732,7 @@
       </p:sp>
       <p:sp>
         <p:nvSpPr>
-          <p:cNvPr id="199" name="" descr="{&quot;isTemplate&quot;:true,&quot;type&quot;:&quot;text&quot;}"/>
+          <p:cNvPr id="218" name="" descr="{&quot;isTemplate&quot;:true,&quot;type&quot;:&quot;text&quot;}"/>
           <p:cNvSpPr txBox="1"/>
           <p:nvPr/>
         </p:nvSpPr>
@@ -9980,7 +10767,7 @@
       </p:sp>
       <p:sp>
         <p:nvSpPr>
-          <p:cNvPr id="200" name="" descr="{&quot;isTemplate&quot;:true,&quot;type&quot;:&quot;text&quot;}"/>
+          <p:cNvPr id="219" name="" descr="{&quot;isTemplate&quot;:true,&quot;type&quot;:&quot;text&quot;}"/>
           <p:cNvSpPr txBox="1"/>
           <p:nvPr/>
         </p:nvSpPr>
@@ -10055,7 +10842,7 @@
       </p:sp>
       <p:sp>
         <p:nvSpPr>
-          <p:cNvPr id="201" name="" descr="{&quot;isTemplate&quot;:true,&quot;type&quot;:&quot;text&quot;}"/>
+          <p:cNvPr id="220" name="" descr="{&quot;isTemplate&quot;:true,&quot;type&quot;:&quot;text&quot;}"/>
           <p:cNvSpPr txBox="1"/>
           <p:nvPr/>
         </p:nvSpPr>
@@ -10110,7 +10897,7 @@
       </p:sp>
       <p:sp>
         <p:nvSpPr>
-          <p:cNvPr id="202" name="" descr="{&quot;isTemplate&quot;:true,&quot;type&quot;:&quot;text&quot;}"/>
+          <p:cNvPr id="221" name="" descr="{&quot;isTemplate&quot;:true,&quot;type&quot;:&quot;text&quot;}"/>
           <p:cNvSpPr txBox="1"/>
           <p:nvPr/>
         </p:nvSpPr>
@@ -10145,7 +10932,7 @@
       </p:sp>
       <p:sp>
         <p:nvSpPr>
-          <p:cNvPr id="203" name="" descr="{&quot;isTemplate&quot;:true,&quot;type&quot;:&quot;text&quot;}"/>
+          <p:cNvPr id="222" name="" descr="{&quot;isTemplate&quot;:true,&quot;type&quot;:&quot;text&quot;}"/>
           <p:cNvSpPr txBox="1"/>
           <p:nvPr/>
         </p:nvSpPr>
@@ -10220,7 +11007,7 @@
       </p:sp>
       <p:sp>
         <p:nvSpPr>
-          <p:cNvPr id="204" name="" descr="{&quot;isTemplate&quot;:true,&quot;type&quot;:&quot;text&quot;}"/>
+          <p:cNvPr id="223" name="" descr="{&quot;isTemplate&quot;:true,&quot;type&quot;:&quot;text&quot;}"/>
           <p:cNvSpPr txBox="1"/>
           <p:nvPr/>
         </p:nvSpPr>
@@ -10255,7 +11042,7 @@
       </p:sp>
       <p:sp>
         <p:nvSpPr>
-          <p:cNvPr id="205" name="" descr="{&quot;isTemplate&quot;:true,&quot;type&quot;:&quot;text&quot;}"/>
+          <p:cNvPr id="224" name="" descr="{&quot;isTemplate&quot;:true,&quot;type&quot;:&quot;text&quot;}"/>
           <p:cNvSpPr txBox="1"/>
           <p:nvPr/>
         </p:nvSpPr>
@@ -10310,7 +11097,7 @@
       </p:sp>
       <p:sp>
         <p:nvSpPr>
-          <p:cNvPr id="206" name=""/>
+          <p:cNvPr id="225" name=""/>
           <p:cNvSpPr/>
           <p:nvPr/>
         </p:nvSpPr>
@@ -10344,7 +11131,7 @@
       </p:sp>
       <p:sp>
         <p:nvSpPr>
-          <p:cNvPr id="207" name="" descr="{&quot;isTemplate&quot;:true,&quot;type&quot;:&quot;text&quot;}"/>
+          <p:cNvPr id="226" name="" descr="{&quot;isTemplate&quot;:true,&quot;type&quot;:&quot;text&quot;}"/>
           <p:cNvSpPr txBox="1"/>
           <p:nvPr/>
         </p:nvSpPr>
@@ -10379,7 +11166,7 @@
       </p:sp>
       <p:sp>
         <p:nvSpPr>
-          <p:cNvPr id="208" name="" descr="{&quot;isTemplate&quot;:true,&quot;type&quot;:&quot;text&quot;}"/>
+          <p:cNvPr id="227" name="" descr="{&quot;isTemplate&quot;:true,&quot;type&quot;:&quot;text&quot;}"/>
           <p:cNvSpPr txBox="1"/>
           <p:nvPr/>
         </p:nvSpPr>
@@ -10414,7 +11201,7 @@
       </p:sp>
       <p:sp>
         <p:nvSpPr>
-          <p:cNvPr id="209" name="" descr="{&quot;isTemplate&quot;:true,&quot;type&quot;:&quot;text&quot;}"/>
+          <p:cNvPr id="228" name="" descr="{&quot;isTemplate&quot;:true,&quot;type&quot;:&quot;text&quot;}"/>
           <p:cNvSpPr txBox="1"/>
           <p:nvPr/>
         </p:nvSpPr>
@@ -10499,7 +11286,7 @@
       </p:sp>
       <p:sp>
         <p:nvSpPr>
-          <p:cNvPr id="210" name="" descr="{&quot;isTemplate&quot;:true,&quot;type&quot;:&quot;text&quot;}"/>
+          <p:cNvPr id="229" name="" descr="{&quot;isTemplate&quot;:true,&quot;type&quot;:&quot;text&quot;}"/>
           <p:cNvSpPr txBox="1"/>
           <p:nvPr/>
         </p:nvSpPr>
@@ -10534,7 +11321,7 @@
       </p:sp>
       <p:sp>
         <p:nvSpPr>
-          <p:cNvPr id="211" name="" descr="{&quot;isTemplate&quot;:true,&quot;type&quot;:&quot;text&quot;}"/>
+          <p:cNvPr id="230" name="" descr="{&quot;isTemplate&quot;:true,&quot;type&quot;:&quot;text&quot;}"/>
           <p:cNvSpPr txBox="1"/>
           <p:nvPr/>
         </p:nvSpPr>
@@ -10595,7 +11382,7 @@
       </p:sp>
       <p:sp>
         <p:nvSpPr>
-          <p:cNvPr id="212" name="" descr="{&quot;isTemplate&quot;:true,&quot;type&quot;:&quot;text&quot;}"/>
+          <p:cNvPr id="231" name="" descr="{&quot;isTemplate&quot;:true,&quot;type&quot;:&quot;text&quot;}"/>
           <p:cNvSpPr txBox="1"/>
           <p:nvPr/>
         </p:nvSpPr>
@@ -10630,7 +11417,7 @@
       </p:sp>
       <p:sp>
         <p:nvSpPr>
-          <p:cNvPr id="213" name="" descr="{&quot;isTemplate&quot;:true,&quot;type&quot;:&quot;text&quot;}"/>
+          <p:cNvPr id="232" name="" descr="{&quot;isTemplate&quot;:true,&quot;type&quot;:&quot;text&quot;}"/>
           <p:cNvSpPr txBox="1"/>
           <p:nvPr/>
         </p:nvSpPr>
@@ -10667,7 +11454,7 @@
       </p:sp>
       <p:sp>
         <p:nvSpPr>
-          <p:cNvPr id="214" name="" descr="{&quot;isTemplate&quot;:true,&quot;type&quot;:&quot;text&quot;}"/>
+          <p:cNvPr id="233" name="" descr="{&quot;isTemplate&quot;:true,&quot;type&quot;:&quot;text&quot;}"/>
           <p:cNvSpPr txBox="1"/>
           <p:nvPr/>
         </p:nvSpPr>
@@ -10702,7 +11489,7 @@
       </p:sp>
       <p:sp>
         <p:nvSpPr>
-          <p:cNvPr id="215" name="" descr="{&quot;isTemplate&quot;:true,&quot;type&quot;:&quot;text&quot;}"/>
+          <p:cNvPr id="234" name="" descr="{&quot;isTemplate&quot;:true,&quot;type&quot;:&quot;text&quot;}"/>
           <p:cNvSpPr txBox="1"/>
           <p:nvPr/>
         </p:nvSpPr>
@@ -10751,7 +11538,7 @@
       </p:sp>
       <p:sp>
         <p:nvSpPr>
-          <p:cNvPr id="216" name="" descr="{&quot;isTemplate&quot;:true,&quot;type&quot;:&quot;text&quot;}"/>
+          <p:cNvPr id="235" name="" descr="{&quot;isTemplate&quot;:true,&quot;type&quot;:&quot;text&quot;}"/>
           <p:cNvSpPr txBox="1"/>
           <p:nvPr/>
         </p:nvSpPr>
@@ -10786,7 +11573,7 @@
       </p:sp>
       <p:sp>
         <p:nvSpPr>
-          <p:cNvPr id="217" name="" descr="{&quot;isTemplate&quot;:true,&quot;type&quot;:&quot;text&quot;}"/>
+          <p:cNvPr id="236" name="" descr="{&quot;isTemplate&quot;:true,&quot;type&quot;:&quot;text&quot;}"/>
           <p:cNvSpPr txBox="1"/>
           <p:nvPr/>
         </p:nvSpPr>
@@ -10871,7 +11658,7 @@
       </p:sp>
       <p:sp>
         <p:nvSpPr>
-          <p:cNvPr id="218" name=""/>
+          <p:cNvPr id="237" name=""/>
           <p:cNvSpPr/>
           <p:nvPr/>
         </p:nvSpPr>
@@ -10913,7 +11700,7 @@
       </p:sp>
       <p:sp>
         <p:nvSpPr>
-          <p:cNvPr id="219" name="" descr="{&quot;isTemplate&quot;:true,&quot;type&quot;:&quot;text&quot;}"/>
+          <p:cNvPr id="238" name="" descr="{&quot;isTemplate&quot;:true,&quot;type&quot;:&quot;text&quot;}"/>
           <p:cNvSpPr txBox="1"/>
           <p:nvPr/>
         </p:nvSpPr>
@@ -10950,7 +11737,7 @@
       </p:sp>
       <p:sp>
         <p:nvSpPr>
-          <p:cNvPr id="220" name=""/>
+          <p:cNvPr id="239" name=""/>
           <p:cNvSpPr/>
           <p:nvPr/>
         </p:nvSpPr>
@@ -10983,7 +11770,7 @@
       </p:sp>
       <p:sp>
         <p:nvSpPr>
-          <p:cNvPr id="221" name="" descr="{&quot;isTemplate&quot;:true,&quot;type&quot;:&quot;text&quot;}"/>
+          <p:cNvPr id="240" name="" descr="{&quot;isTemplate&quot;:true,&quot;type&quot;:&quot;text&quot;}"/>
           <p:cNvSpPr txBox="1"/>
           <p:nvPr/>
         </p:nvSpPr>
@@ -11018,7 +11805,7 @@
       </p:sp>
       <p:sp>
         <p:nvSpPr>
-          <p:cNvPr id="222" name="" descr="{&quot;isTemplate&quot;:true,&quot;type&quot;:&quot;text&quot;}"/>
+          <p:cNvPr id="241" name="" descr="{&quot;isTemplate&quot;:true,&quot;type&quot;:&quot;text&quot;}"/>
           <p:cNvSpPr txBox="1"/>
           <p:nvPr/>
         </p:nvSpPr>
@@ -11053,7 +11840,7 @@
       </p:sp>
       <p:sp>
         <p:nvSpPr>
-          <p:cNvPr id="223" name="" descr="{&quot;isTemplate&quot;:true,&quot;type&quot;:&quot;text&quot;}"/>
+          <p:cNvPr id="242" name="" descr="{&quot;isTemplate&quot;:true,&quot;type&quot;:&quot;text&quot;}"/>
           <p:cNvSpPr txBox="1"/>
           <p:nvPr/>
         </p:nvSpPr>
@@ -11074,7 +11861,7 @@
       </p:sp>
       <p:sp>
         <p:nvSpPr>
-          <p:cNvPr id="224" name="" descr="{&quot;isTemplate&quot;:true,&quot;type&quot;:&quot;text&quot;}"/>
+          <p:cNvPr id="243" name="" descr="{&quot;isTemplate&quot;:true,&quot;type&quot;:&quot;text&quot;}"/>
           <p:cNvSpPr txBox="1"/>
           <p:nvPr/>
         </p:nvSpPr>
@@ -11119,7 +11906,7 @@
       </p:sp>
       <p:sp>
         <p:nvSpPr>
-          <p:cNvPr id="225" name=""/>
+          <p:cNvPr id="244" name=""/>
           <p:cNvSpPr/>
           <p:nvPr/>
         </p:nvSpPr>
@@ -11161,7 +11948,7 @@
       </p:sp>
       <p:sp>
         <p:nvSpPr>
-          <p:cNvPr id="226" name="" descr="{&quot;isTemplate&quot;:true,&quot;type&quot;:&quot;text&quot;}"/>
+          <p:cNvPr id="245" name="" descr="{&quot;isTemplate&quot;:true,&quot;type&quot;:&quot;text&quot;}"/>
           <p:cNvSpPr txBox="1"/>
           <p:nvPr/>
         </p:nvSpPr>
@@ -11218,7 +12005,7 @@
       </p:sp>
       <p:sp>
         <p:nvSpPr>
-          <p:cNvPr id="227" name="" descr="{&quot;isTemplate&quot;:true,&quot;type&quot;:&quot;text&quot;}"/>
+          <p:cNvPr id="246" name="" descr="{&quot;isTemplate&quot;:true,&quot;type&quot;:&quot;text&quot;}"/>
           <p:cNvSpPr txBox="1"/>
           <p:nvPr/>
         </p:nvSpPr>
@@ -11273,7 +12060,7 @@
       </p:sp>
       <p:sp>
         <p:nvSpPr>
-          <p:cNvPr id="228" name="" descr="{&quot;isTemplate&quot;:true,&quot;type&quot;:&quot;text&quot;}"/>
+          <p:cNvPr id="247" name="" descr="{&quot;isTemplate&quot;:true,&quot;type&quot;:&quot;text&quot;}"/>
           <p:cNvSpPr txBox="1"/>
           <p:nvPr/>
         </p:nvSpPr>
@@ -11316,7 +12103,7 @@
   <p:cSld>
     <p:spTree>
       <p:nvGrpSpPr>
-        <p:cNvPr id="229" name="" descr="&lt;Slide style={{ width: '1280px', height: '720px', background: 'linear-gradient(135deg, #172133 0%, #22395E 100%)', position: 'relative' }}&gt;&#10;  &lt;div style={{ position: 'absolute', inset: 0, display: 'flex', flexDirection: 'column', alignItems: 'center', justifyContent: 'center', color: '#FBFCFA' }}&gt;&#10;    &lt;div style={{ color: '#BD9B56', fontSize: 26, marginBottom: 22, letterSpacing: '0.4em' }}&gt;◆&lt;/div&gt;&#10;    &lt;h1 style={{ fontSize: 56, fontWeight: 'bold', margin: 0, color: '#FBFCFA', letterSpacing: '0.12em' }}&gt;感谢聆听&lt;/h1&gt;&#10;    &lt;div style={{ width: 80, height: 3, background: '#BD9B56', marginTop: 26, marginBottom: 26 }} /&gt;&#10;    &lt;p style={{ fontSize: 20, color: 'rgba(189,155,86,0.9)', margin: 0, letterSpacing: '0.15em' }}&gt;让 AI 真正走进社区&lt;/p&gt;&#10;    &lt;div style={{ marginTop: 56, padding: '20px 40px', background: 'rgba(189,155,86,0.08)', border: '1px solid rgba(189,155,86,0.3)', borderRadius: 8, textAlign: 'center' }}&gt;&#10;      &lt;div style={{ fontSize: 12, color: '#BD9B56', letterSpacing: '0.25em', marginBottom: 10 }}&gt;ONLINE DEMO&lt;/div&gt;&#10;      &lt;div style={{ fontSize: 17, color: '#FBFCFA', fontFamily: 'Inter, sans-serif', marginBottom: 4 }}&gt;http://119.91.236.85&lt;/div&gt;&#10;      &lt;div style={{ fontSize: 12, color: 'rgba(251,252,250,0.7)' }}&gt;业主 guoyi378 · 物业 mayun420 · 维修 yangfei423（密码 123456）&lt;/div&gt;&#10;    &lt;/div&gt;&#10;  &lt;/div&gt;&#10;  &lt;div style={{ position: 'absolute', left: 64, bottom: 28, color: '#BD9B56', fontSize: 13, letterSpacing: '0.12em' }}&gt;云溪花园 · 智慧社区&lt;/div&gt;&#10;  &lt;div style={{ position: 'absolute', right: 28, bottom: 28, color: 'rgba(189,155,86,0.75)', fontSize: 13 }}&gt;15 / 15&lt;/div&gt;&#10;&lt;/Slide&gt;"/>
+        <p:cNvPr id="248" name="" descr="&lt;Slide style={{ width: '1280px', height: '720px', background: 'linear-gradient(135deg, #172133 0%, #22395E 100%)', position: 'relative' }}&gt;&#10;  &lt;div style={{ position: 'absolute', inset: 0, display: 'flex', flexDirection: 'column', alignItems: 'center', justifyContent: 'center', color: '#FBFCFA' }}&gt;&#10;    &lt;div style={{ color: '#BD9B56', fontSize: 26, marginBottom: 22, letterSpacing: '0.4em' }}&gt;◆&lt;/div&gt;&#10;    &lt;h1 style={{ fontSize: 56, fontWeight: 'bold', margin: 0, color: '#FBFCFA', letterSpacing: '0.12em' }}&gt;感谢聆听&lt;/h1&gt;&#10;    &lt;div style={{ width: 80, height: 3, background: '#BD9B56', marginTop: 26, marginBottom: 26 }} /&gt;&#10;    &lt;p style={{ fontSize: 20, color: 'rgba(189,155,86,0.9)', margin: 0, letterSpacing: '0.15em' }}&gt;让 AI 真正走进社区&lt;/p&gt;&#10;    &lt;div style={{ marginTop: 56, padding: '20px 40px', background: 'rgba(189,155,86,0.08)', border: '1px solid rgba(189,155,86,0.3)', borderRadius: 8, textAlign: 'center' }}&gt;&#10;      &lt;div style={{ fontSize: 12, color: '#BD9B56', letterSpacing: '0.25em', marginBottom: 10 }}&gt;ONLINE DEMO&lt;/div&gt;&#10;      &lt;div style={{ fontSize: 17, color: '#FBFCFA', fontFamily: 'Inter, sans-serif', marginBottom: 4 }}&gt;http://119.91.236.85&lt;/div&gt;&#10;      &lt;div style={{ fontSize: 12, color: 'rgba(251,252,250,0.7)' }}&gt;业主 guoyi378 · 物业 mayun420 · 维修 yangfei423（密码 123456）&lt;/div&gt;&#10;    &lt;/div&gt;&#10;  &lt;/div&gt;&#10;  &lt;div style={{ position: 'absolute', left: 64, bottom: 28, color: '#BD9B56', fontSize: 13, letterSpacing: '0.12em' }}&gt;云溪花园 · 智慧社区&lt;/div&gt;&#10;  &lt;div style={{ position: 'absolute', right: 28, bottom: 28, color: 'rgba(189,155,86,0.75)', fontSize: 13 }}&gt;15 / 15&lt;/div&gt;&#10;&lt;/Slide&gt;"/>
         <p:cNvGrpSpPr/>
         <p:nvPr/>
       </p:nvGrpSpPr>
@@ -11330,7 +12117,7 @@
       </p:grpSpPr>
       <p:sp>
         <p:nvSpPr>
-          <p:cNvPr id="230" name=""/>
+          <p:cNvPr id="249" name=""/>
           <p:cNvSpPr/>
           <p:nvPr/>
         </p:nvSpPr>
@@ -11362,7 +12149,7 @@
       </p:sp>
       <p:sp>
         <p:nvSpPr>
-          <p:cNvPr id="231" name="" descr="{&quot;isTemplate&quot;:true,&quot;type&quot;:&quot;text&quot;}"/>
+          <p:cNvPr id="250" name="" descr="{&quot;isTemplate&quot;:true,&quot;type&quot;:&quot;text&quot;}"/>
           <p:cNvSpPr txBox="1"/>
           <p:nvPr/>
         </p:nvSpPr>
@@ -11397,7 +12184,7 @@
       </p:sp>
       <p:sp>
         <p:nvSpPr>
-          <p:cNvPr id="232" name="" descr="{&quot;isTemplate&quot;:true,&quot;type&quot;:&quot;text&quot;}"/>
+          <p:cNvPr id="251" name="" descr="{&quot;isTemplate&quot;:true,&quot;type&quot;:&quot;text&quot;}"/>
           <p:cNvSpPr txBox="1"/>
           <p:nvPr/>
         </p:nvSpPr>
@@ -11432,7 +12219,7 @@
       </p:sp>
       <p:sp>
         <p:nvSpPr>
-          <p:cNvPr id="233" name=""/>
+          <p:cNvPr id="252" name=""/>
           <p:cNvSpPr/>
           <p:nvPr/>
         </p:nvSpPr>
@@ -11456,7 +12243,7 @@
       </p:sp>
       <p:sp>
         <p:nvSpPr>
-          <p:cNvPr id="234" name="" descr="{&quot;isTemplate&quot;:true,&quot;type&quot;:&quot;text&quot;}"/>
+          <p:cNvPr id="253" name="" descr="{&quot;isTemplate&quot;:true,&quot;type&quot;:&quot;text&quot;}"/>
           <p:cNvSpPr txBox="1"/>
           <p:nvPr/>
         </p:nvSpPr>
@@ -11517,7 +12304,7 @@
       </p:sp>
       <p:sp>
         <p:nvSpPr>
-          <p:cNvPr id="235" name=""/>
+          <p:cNvPr id="254" name=""/>
           <p:cNvSpPr/>
           <p:nvPr/>
         </p:nvSpPr>
@@ -11552,7 +12339,7 @@
       </p:sp>
       <p:sp>
         <p:nvSpPr>
-          <p:cNvPr id="236" name="" descr="{&quot;isTemplate&quot;:true,&quot;type&quot;:&quot;text&quot;}"/>
+          <p:cNvPr id="255" name="" descr="{&quot;isTemplate&quot;:true,&quot;type&quot;:&quot;text&quot;}"/>
           <p:cNvSpPr txBox="1"/>
           <p:nvPr/>
         </p:nvSpPr>
@@ -11587,7 +12374,7 @@
       </p:sp>
       <p:sp>
         <p:nvSpPr>
-          <p:cNvPr id="237" name="" descr="{&quot;isTemplate&quot;:true,&quot;type&quot;:&quot;text&quot;}"/>
+          <p:cNvPr id="256" name="" descr="{&quot;isTemplate&quot;:true,&quot;type&quot;:&quot;text&quot;}"/>
           <p:cNvSpPr txBox="1"/>
           <p:nvPr/>
         </p:nvSpPr>
@@ -11622,7 +12409,7 @@
       </p:sp>
       <p:sp>
         <p:nvSpPr>
-          <p:cNvPr id="238" name="" descr="{&quot;isTemplate&quot;:true,&quot;type&quot;:&quot;text&quot;}"/>
+          <p:cNvPr id="257" name="" descr="{&quot;isTemplate&quot;:true,&quot;type&quot;:&quot;text&quot;}"/>
           <p:cNvSpPr txBox="1"/>
           <p:nvPr/>
         </p:nvSpPr>
@@ -11755,7 +12542,7 @@
       </p:sp>
       <p:sp>
         <p:nvSpPr>
-          <p:cNvPr id="239" name="" descr="{&quot;isTemplate&quot;:true,&quot;type&quot;:&quot;text&quot;}"/>
+          <p:cNvPr id="258" name="" descr="{&quot;isTemplate&quot;:true,&quot;type&quot;:&quot;text&quot;}"/>
           <p:cNvSpPr txBox="1"/>
           <p:nvPr/>
         </p:nvSpPr>
@@ -11810,7 +12597,7 @@
       </p:sp>
       <p:sp>
         <p:nvSpPr>
-          <p:cNvPr id="240" name="" descr="{&quot;isTemplate&quot;:true,&quot;type&quot;:&quot;text&quot;}"/>
+          <p:cNvPr id="259" name="" descr="{&quot;isTemplate&quot;:true,&quot;type&quot;:&quot;text&quot;}"/>
           <p:cNvSpPr txBox="1"/>
           <p:nvPr/>
         </p:nvSpPr>
@@ -11855,7 +12642,7 @@
   <p:cSld>
     <p:spTree>
       <p:nvGrpSpPr>
-        <p:cNvPr id="241" name="" descr="&lt;Slide style={{ width: '1280px', height: '720px', background: '#FBFCFA', position: 'relative', padding: '40px 64px', boxSizing: 'border-box', display: 'flex', flexDirection: 'column' }}&gt;&#10;  &lt;div style={{ flexShrink: 0 }}&gt;&#10;    &lt;div style={{ color: '#BD9B56', fontSize: 14, letterSpacing: '0.3em', marginBottom: 10 }}&gt;CONTENTS&lt;/div&gt;&#10;    &lt;h2 style={{ fontSize: 34, fontWeight: 'bold', color: '#172133', margin: 0 }}&gt;目录&lt;/h2&gt;&#10;    &lt;div style={{ width: 64, height: 3, background: '#BD9B56', marginTop: 16 }} /&gt;&#10;  &lt;/div&gt;&#10;  &lt;div style={{ flex: 1, display: 'flex', alignItems: 'center' }}&gt;&#10;    &lt;div style={{ width: '100%', display: 'flex', flexDirection: 'column', gap: 20 }}&gt;&#10;      &lt;div style={{ display: 'flex', alignItems: 'center', gap: 28, paddingBottom: 18, borderBottom: '1px solid rgba(34,57,94,0.12)' }}&gt;&#10;        &lt;span style={{ color: '#BD9B56', fontSize: 40, fontWeight: 'bold', lineHeight: 1, minWidth: 72, fontFamily: 'Inter, sans-serif' }}&gt;01&lt;/span&gt;&#10;        &lt;div style={{ flex: 1 }}&gt;&#10;          &lt;div style={{ fontSize: 22, fontWeight: 'bold', color: '#172133' }}&gt;项目背景与规模&lt;/div&gt;&#10;          &lt;div style={{ fontSize: 14, color: '#6b7075', marginTop: 6 }}&gt;传统物业痛点 · 虚拟社区「云溪花园」数据资产&lt;/div&gt;&#10;        &lt;/div&gt;&#10;      &lt;/div&gt;&#10;      &lt;div style={{ display: 'flex', alignItems: 'center', gap: 28, paddingBottom: 18, borderBottom: '1px solid rgba(34,57,94,0.12)' }}&gt;&#10;        &lt;span style={{ color: '#BD9B56', fontSize: 40, fontWeight: 'bold', lineHeight: 1, minWidth: 72, fontFamily: 'Inter, sans-serif' }}&gt;02&lt;/span&gt;&#10;        &lt;div style={{ flex: 1 }}&gt;&#10;          &lt;div style={{ fontSize: 22, fontWeight: 'bold', color: '#172133' }}&gt;技术构建过程&lt;/div&gt;&#10;          &lt;div style={{ fontSize: 14, color: '#6b7075', marginTop: 6 }}&gt;数据库设计 → 后端 → 前端 → AI Agent → RAG 知识库&lt;/div&gt;&#10;        &lt;/div&gt;&#10;      &lt;/div&gt;&#10;      &lt;div style={{ display: 'flex', alignItems: 'center', gap: 28, paddingBottom: 18, borderBottom: '1px solid rgba(34,57,94,0.12)' }}&gt;&#10;        &lt;span style={{ color: '#BD9B56', fontSize: 40, fontWeight: 'bold', lineHeight: 1, minWidth: 72, fontFamily: 'Inter, sans-serif' }}&gt;03&lt;/span&gt;&#10;        &lt;div style={{ flex: 1 }}&gt;&#10;          &lt;div style={{ fontSize: 22, fontWeight: 'bold', color: '#172133' }}&gt;成果与验证&lt;/div&gt;&#10;          &lt;div style={{ fontSize: 14, color: '#6b7075', marginTop: 6 }}&gt;三条功能闭环 · 量化评估指标&lt;/div&gt;&#10;        &lt;/div&gt;&#10;      &lt;/div&gt;&#10;      &lt;div style={{ display: 'flex', alignItems: 'center', gap: 28 }}&gt;&#10;        &lt;span style={{ color: '#BD9B56', fontSize: 40, fontWeight: 'bold', lineHeight: 1, minWidth: 72, fontFamily: 'Inter, sans-serif' }}&gt;04&lt;/span&gt;&#10;        &lt;div style={{ flex: 1 }}&gt;&#10;          &lt;div style={{ fontSize: 22, fontWeight: 'bold', color: '#172133' }}&gt;总结与展望&lt;/div&gt;&#10;          &lt;div style={{ fontSize: 14, color: '#6b7075', marginTop: 6 }}&gt;项目价值 · 在线演示入口&lt;/div&gt;&#10;        &lt;/div&gt;&#10;      &lt;/div&gt;&#10;    &lt;/div&gt;&#10;  &lt;/div&gt;&#10;  &lt;div style={{ flexShrink: 0, height: 44, display: 'flex', alignItems: 'flex-end', justifyContent: 'space-between' }}&gt;&#10;    &lt;span style={{ color: '#BD9B56', fontSize: 12, letterSpacing: '0.1em' }}&gt;云溪花园 · 智慧社区&lt;/span&gt;&#10;    &lt;span style={{ color: '#a09b8c', fontSize: 12 }}&gt;02 / 15&lt;/span&gt;&#10;  &lt;/div&gt;&#10;&lt;/Slide&gt;"/>
+        <p:cNvPr id="260" name="" descr="&lt;Slide style={{ width: '1280px', height: '720px', background: '#FBFCFA', position: 'relative', padding: '40px 64px', boxSizing: 'border-box', display: 'flex', flexDirection: 'column' }}&gt;&#10;  &lt;div style={{ flexShrink: 0 }}&gt;&#10;    &lt;div style={{ color: '#BD9B56', fontSize: 14, letterSpacing: '0.3em', marginBottom: 10 }}&gt;CONTENTS&lt;/div&gt;&#10;    &lt;h2 style={{ fontSize: 34, fontWeight: 'bold', color: '#172133', margin: 0 }}&gt;目录&lt;/h2&gt;&#10;    &lt;div style={{ width: 64, height: 3, background: '#BD9B56', marginTop: 16 }} /&gt;&#10;  &lt;/div&gt;&#10;  &lt;div style={{ flex: 1, display: 'flex', alignItems: 'center' }}&gt;&#10;    &lt;div style={{ width: '100%', display: 'flex', flexDirection: 'column', gap: 20 }}&gt;&#10;      &lt;div style={{ display: 'flex', alignItems: 'center', gap: 28, paddingBottom: 18, borderBottom: '1px solid rgba(34,57,94,0.12)' }}&gt;&#10;        &lt;span style={{ color: '#BD9B56', fontSize: 40, fontWeight: 'bold', lineHeight: 1, minWidth: 72, fontFamily: 'Inter, sans-serif' }}&gt;01&lt;/span&gt;&#10;        &lt;div style={{ flex: 1 }}&gt;&#10;          &lt;div style={{ fontSize: 22, fontWeight: 'bold', color: '#172133' }}&gt;项目背景与规模&lt;/div&gt;&#10;          &lt;div style={{ fontSize: 14, color: '#6b7075', marginTop: 6 }}&gt;传统物业痛点 · 虚拟社区「云溪花园」数据资产&lt;/div&gt;&#10;        &lt;/div&gt;&#10;      &lt;/div&gt;&#10;      &lt;div style={{ display: 'flex', alignItems: 'center', gap: 28, paddingBottom: 18, borderBottom: '1px solid rgba(34,57,94,0.12)' }}&gt;&#10;        &lt;span style={{ color: '#BD9B56', fontSize: 40, fontWeight: 'bold', lineHeight: 1, minWidth: 72, fontFamily: 'Inter, sans-serif' }}&gt;02&lt;/span&gt;&#10;        &lt;div style={{ flex: 1 }}&gt;&#10;          &lt;div style={{ fontSize: 22, fontWeight: 'bold', color: '#172133' }}&gt;技术构建过程&lt;/div&gt;&#10;          &lt;div style={{ fontSize: 14, color: '#6b7075', marginTop: 6 }}&gt;数据库设计 → 后端 → 前端 → AI Agent → RAG 知识库&lt;/div&gt;&#10;        &lt;/div&gt;&#10;      &lt;/div&gt;&#10;      &lt;div style={{ display: 'flex', alignItems: 'center', gap: 28, paddingBottom: 18, borderBottom: '1px solid rgba(34,57,94,0.12)' }}&gt;&#10;        &lt;span style={{ color: '#BD9B56', fontSize: 40, fontWeight: 'bold', lineHeight: 1, minWidth: 72, fontFamily: 'Inter, sans-serif' }}&gt;03&lt;/span&gt;&#10;        &lt;div style={{ flex: 1 }}&gt;&#10;          &lt;div style={{ fontSize: 22, fontWeight: 'bold', color: '#172133' }}&gt;成果与验证&lt;/div&gt;&#10;          &lt;div style={{ fontSize: 14, color: '#6b7075', marginTop: 6 }}&gt;三条功能闭环 · 量化评估指标&lt;/div&gt;&#10;        &lt;/div&gt;&#10;      &lt;/div&gt;&#10;      &lt;div style={{ display: 'flex', alignItems: 'center', gap: 28 }}&gt;&#10;        &lt;span style={{ color: '#BD9B56', fontSize: 40, fontWeight: 'bold', lineHeight: 1, minWidth: 72, fontFamily: 'Inter, sans-serif' }}&gt;04&lt;/span&gt;&#10;        &lt;div style={{ flex: 1 }}&gt;&#10;          &lt;div style={{ fontSize: 22, fontWeight: 'bold', color: '#172133' }}&gt;总结与展望&lt;/div&gt;&#10;          &lt;div style={{ fontSize: 14, color: '#6b7075', marginTop: 6 }}&gt;项目价值 · 在线演示入口&lt;/div&gt;&#10;        &lt;/div&gt;&#10;      &lt;/div&gt;&#10;    &lt;/div&gt;&#10;  &lt;/div&gt;&#10;  &lt;div style={{ flexShrink: 0, height: 44, display: 'flex', alignItems: 'flex-end', justifyContent: 'space-between' }}&gt;&#10;    &lt;span style={{ color: '#BD9B56', fontSize: 12, letterSpacing: '0.1em' }}&gt;云溪花园 · 智慧社区&lt;/span&gt;&#10;    &lt;span style={{ color: '#a09b8c', fontSize: 12 }}&gt;02 / 15&lt;/span&gt;&#10;  &lt;/div&gt;&#10;&lt;/Slide&gt;"/>
         <p:cNvGrpSpPr/>
         <p:nvPr/>
       </p:nvGrpSpPr>
@@ -11869,7 +12656,7 @@
       </p:grpSpPr>
       <p:sp>
         <p:nvSpPr>
-          <p:cNvPr id="242" name=""/>
+          <p:cNvPr id="261" name=""/>
           <p:cNvSpPr/>
           <p:nvPr/>
         </p:nvSpPr>
@@ -11893,7 +12680,7 @@
       </p:sp>
       <p:sp>
         <p:nvSpPr>
-          <p:cNvPr id="243" name="" descr="{&quot;isTemplate&quot;:true,&quot;type&quot;:&quot;text&quot;}"/>
+          <p:cNvPr id="262" name="" descr="{&quot;isTemplate&quot;:true,&quot;type&quot;:&quot;text&quot;}"/>
           <p:cNvSpPr txBox="1"/>
           <p:nvPr/>
         </p:nvSpPr>
@@ -11928,7 +12715,7 @@
       </p:sp>
       <p:sp>
         <p:nvSpPr>
-          <p:cNvPr id="244" name="" descr="{&quot;isTemplate&quot;:true,&quot;type&quot;:&quot;text&quot;}"/>
+          <p:cNvPr id="263" name="" descr="{&quot;isTemplate&quot;:true,&quot;type&quot;:&quot;text&quot;}"/>
           <p:cNvSpPr txBox="1"/>
           <p:nvPr/>
         </p:nvSpPr>
@@ -11963,7 +12750,7 @@
       </p:sp>
       <p:sp>
         <p:nvSpPr>
-          <p:cNvPr id="245" name=""/>
+          <p:cNvPr id="264" name=""/>
           <p:cNvSpPr/>
           <p:nvPr/>
         </p:nvSpPr>
@@ -11987,7 +12774,7 @@
       </p:sp>
       <p:sp>
         <p:nvSpPr>
-          <p:cNvPr id="246" name=""/>
+          <p:cNvPr id="265" name=""/>
           <p:cNvSpPr/>
           <p:nvPr/>
         </p:nvSpPr>
@@ -12029,7 +12816,7 @@
       </p:sp>
       <p:sp>
         <p:nvSpPr>
-          <p:cNvPr id="247" name="" descr="{&quot;isTemplate&quot;:true,&quot;type&quot;:&quot;text&quot;}"/>
+          <p:cNvPr id="266" name="" descr="{&quot;isTemplate&quot;:true,&quot;type&quot;:&quot;text&quot;}"/>
           <p:cNvSpPr txBox="1"/>
           <p:nvPr/>
         </p:nvSpPr>
@@ -12064,7 +12851,7 @@
       </p:sp>
       <p:sp>
         <p:nvSpPr>
-          <p:cNvPr id="248" name="" descr="{&quot;isTemplate&quot;:true,&quot;type&quot;:&quot;text&quot;}"/>
+          <p:cNvPr id="267" name="" descr="{&quot;isTemplate&quot;:true,&quot;type&quot;:&quot;text&quot;}"/>
           <p:cNvSpPr txBox="1"/>
           <p:nvPr/>
         </p:nvSpPr>
@@ -12099,7 +12886,7 @@
       </p:sp>
       <p:sp>
         <p:nvSpPr>
-          <p:cNvPr id="249" name="" descr="{&quot;isTemplate&quot;:true,&quot;type&quot;:&quot;text&quot;}"/>
+          <p:cNvPr id="268" name="" descr="{&quot;isTemplate&quot;:true,&quot;type&quot;:&quot;text&quot;}"/>
           <p:cNvSpPr txBox="1"/>
           <p:nvPr/>
         </p:nvSpPr>
@@ -12154,7 +12941,7 @@
       </p:sp>
       <p:sp>
         <p:nvSpPr>
-          <p:cNvPr id="250" name=""/>
+          <p:cNvPr id="269" name=""/>
           <p:cNvSpPr/>
           <p:nvPr/>
         </p:nvSpPr>
@@ -12196,7 +12983,7 @@
       </p:sp>
       <p:sp>
         <p:nvSpPr>
-          <p:cNvPr id="251" name="" descr="{&quot;isTemplate&quot;:true,&quot;type&quot;:&quot;text&quot;}"/>
+          <p:cNvPr id="270" name="" descr="{&quot;isTemplate&quot;:true,&quot;type&quot;:&quot;text&quot;}"/>
           <p:cNvSpPr txBox="1"/>
           <p:nvPr/>
         </p:nvSpPr>
@@ -12231,7 +13018,7 @@
       </p:sp>
       <p:sp>
         <p:nvSpPr>
-          <p:cNvPr id="252" name="" descr="{&quot;isTemplate&quot;:true,&quot;type&quot;:&quot;text&quot;}"/>
+          <p:cNvPr id="271" name="" descr="{&quot;isTemplate&quot;:true,&quot;type&quot;:&quot;text&quot;}"/>
           <p:cNvSpPr txBox="1"/>
           <p:nvPr/>
         </p:nvSpPr>
@@ -12266,7 +13053,7 @@
       </p:sp>
       <p:sp>
         <p:nvSpPr>
-          <p:cNvPr id="253" name="" descr="{&quot;isTemplate&quot;:true,&quot;type&quot;:&quot;text&quot;}"/>
+          <p:cNvPr id="272" name="" descr="{&quot;isTemplate&quot;:true,&quot;type&quot;:&quot;text&quot;}"/>
           <p:cNvSpPr txBox="1"/>
           <p:nvPr/>
         </p:nvSpPr>
@@ -12361,7 +13148,7 @@
       </p:sp>
       <p:sp>
         <p:nvSpPr>
-          <p:cNvPr id="254" name=""/>
+          <p:cNvPr id="273" name=""/>
           <p:cNvSpPr/>
           <p:nvPr/>
         </p:nvSpPr>
@@ -12403,7 +13190,7 @@
       </p:sp>
       <p:sp>
         <p:nvSpPr>
-          <p:cNvPr id="255" name="" descr="{&quot;isTemplate&quot;:true,&quot;type&quot;:&quot;text&quot;}"/>
+          <p:cNvPr id="274" name="" descr="{&quot;isTemplate&quot;:true,&quot;type&quot;:&quot;text&quot;}"/>
           <p:cNvSpPr txBox="1"/>
           <p:nvPr/>
         </p:nvSpPr>
@@ -12438,7 +13225,7 @@
       </p:sp>
       <p:sp>
         <p:nvSpPr>
-          <p:cNvPr id="256" name="" descr="{&quot;isTemplate&quot;:true,&quot;type&quot;:&quot;text&quot;}"/>
+          <p:cNvPr id="275" name="" descr="{&quot;isTemplate&quot;:true,&quot;type&quot;:&quot;text&quot;}"/>
           <p:cNvSpPr txBox="1"/>
           <p:nvPr/>
         </p:nvSpPr>
@@ -12473,7 +13260,7 @@
       </p:sp>
       <p:sp>
         <p:nvSpPr>
-          <p:cNvPr id="257" name="" descr="{&quot;isTemplate&quot;:true,&quot;type&quot;:&quot;text&quot;}"/>
+          <p:cNvPr id="276" name="" descr="{&quot;isTemplate&quot;:true,&quot;type&quot;:&quot;text&quot;}"/>
           <p:cNvSpPr txBox="1"/>
           <p:nvPr/>
         </p:nvSpPr>
@@ -12528,7 +13315,7 @@
       </p:sp>
       <p:sp>
         <p:nvSpPr>
-          <p:cNvPr id="258" name="" descr="{&quot;isTemplate&quot;:true,&quot;type&quot;:&quot;text&quot;}"/>
+          <p:cNvPr id="277" name="" descr="{&quot;isTemplate&quot;:true,&quot;type&quot;:&quot;text&quot;}"/>
           <p:cNvSpPr txBox="1"/>
           <p:nvPr/>
         </p:nvSpPr>
@@ -12563,7 +13350,7 @@
       </p:sp>
       <p:sp>
         <p:nvSpPr>
-          <p:cNvPr id="259" name="" descr="{&quot;isTemplate&quot;:true,&quot;type&quot;:&quot;text&quot;}"/>
+          <p:cNvPr id="278" name="" descr="{&quot;isTemplate&quot;:true,&quot;type&quot;:&quot;text&quot;}"/>
           <p:cNvSpPr txBox="1"/>
           <p:nvPr/>
         </p:nvSpPr>
@@ -12598,7 +13385,7 @@
       </p:sp>
       <p:sp>
         <p:nvSpPr>
-          <p:cNvPr id="260" name="" descr="{&quot;isTemplate&quot;:true,&quot;type&quot;:&quot;text&quot;}"/>
+          <p:cNvPr id="279" name="" descr="{&quot;isTemplate&quot;:true,&quot;type&quot;:&quot;text&quot;}"/>
           <p:cNvSpPr txBox="1"/>
           <p:nvPr/>
         </p:nvSpPr>
@@ -12653,7 +13440,7 @@
       </p:sp>
       <p:sp>
         <p:nvSpPr>
-          <p:cNvPr id="261" name="" descr="{&quot;isTemplate&quot;:true,&quot;type&quot;:&quot;text&quot;}"/>
+          <p:cNvPr id="280" name="" descr="{&quot;isTemplate&quot;:true,&quot;type&quot;:&quot;text&quot;}"/>
           <p:cNvSpPr txBox="1"/>
           <p:nvPr/>
         </p:nvSpPr>
@@ -12708,7 +13495,7 @@
       </p:sp>
       <p:sp>
         <p:nvSpPr>
-          <p:cNvPr id="262" name="" descr="{&quot;isTemplate&quot;:true,&quot;type&quot;:&quot;text&quot;}"/>
+          <p:cNvPr id="281" name="" descr="{&quot;isTemplate&quot;:true,&quot;type&quot;:&quot;text&quot;}"/>
           <p:cNvSpPr txBox="1"/>
           <p:nvPr/>
         </p:nvSpPr>
@@ -12751,7 +13538,7 @@
   <p:cSld>
     <p:spTree>
       <p:nvGrpSpPr>
-        <p:cNvPr id="263" name="" descr="&lt;Slide style={{ width: '1280px', height: '720px', background: '#FBFCFA', position: 'relative', padding: '40px 64px', boxSizing: 'border-box', display: 'flex', flexDirection: 'column' }}&gt;&#10;  &lt;div style={{ flexShrink: 0 }}&gt;&#10;    &lt;div style={{ color: '#BD9B56', fontSize: 13, letterSpacing: '0.25em', marginBottom: 8 }}&gt;01 · 项目背景&lt;/div&gt;&#10;    &lt;h2 style={{ fontSize: 30, fontWeight: 'bold', color: '#172133', margin: 0, lineHeight: 1.3 }}&gt;传统物业的三重困境&lt;/h2&gt;&#10;    &lt;div style={{ fontSize: 14, color: '#6b7075', marginTop: 8 }}&gt;业务、数据、知识「三张皮」，需要用 AI 重新缝合&lt;/div&gt;&#10;  &lt;/div&gt;&#10;  &lt;div style={{ flex: 1, display: 'flex', alignItems: 'center' }}&gt;&#10;    &lt;div style={{ width: '100%', display: 'flex', flexDirection: 'column', gap: 18 }}&gt;&#10;      &lt;div style={{ display: 'flex', gap: 20, background: '#fff', borderRadius: 10, padding: '20px 24px', boxShadow: '0 4px 16px rgba(23,33,51,0.06)', borderLeft: '4px solid #BD9B56' }}&gt;&#10;        &lt;span style={{ color: '#BD9B56', fontSize: 22, lineHeight: 1.2, flexShrink: 0 }}&gt;!&lt;/span&gt;&#10;        &lt;div&gt;&#10;          &lt;div style={{ fontSize: 17, fontWeight: 'bold', color: '#172133', marginBottom: 6 }}&gt;信息孤岛&lt;/div&gt;&#10;          &lt;p style={{ fontSize: 14, color: '#5F5E5A', margin: 0, lineHeight: 1.6 }}&gt;业主报修、费用缴纳、巡检记录分散在多个系统，彼此不打通，物业无法掌握完整的社区运行状态，业主也看不到工单的处理进度。&lt;/p&gt;&#10;        &lt;/div&gt;&#10;      &lt;/div&gt;&#10;      &lt;div style={{ display: 'flex', gap: 20, background: '#fff', borderRadius: 10, padding: '20px 24px', boxShadow: '0 4px 16px rgba(23,33,51,0.06)', borderLeft: '4px solid #BD9B56' }}&gt;&#10;        &lt;span style={{ color: '#BD9B56', fontSize: 22, lineHeight: 1.2, flexShrink: 0 }}&gt;!&lt;/span&gt;&#10;        &lt;div&gt;&#10;          &lt;div style={{ fontSize: 17, fontWeight: 'bold', color: '#172133', marginBottom: 6 }}&gt;响应迟缓&lt;/div&gt;&#10;          &lt;p style={{ fontSize: 14, color: '#5F5E5A', margin: 0, lineHeight: 1.6 }}&gt;传统报修依赖电话和微信群，客服人工登记后再手动派单，从「业主报修」到「师傅上门」平均要数小时甚至隔天，响应效率低。&lt;/p&gt;&#10;        &lt;/div&gt;&#10;      &lt;/div&gt;&#10;      &lt;div style={{ display: 'flex', gap: 20, background: '#fff', borderRadius: 10, padding: '20px 24px', boxShadow: '0 4px 16px rgba(23,33,51,0.06)', borderLeft: '4px solid #BD9B56' }}&gt;&#10;        &lt;span style={{ color: '#BD9B56', fontSize: 22, lineHeight: 1.2, flexShrink: 0 }}&gt;!&lt;/span&gt;&#10;        &lt;div&gt;&#10;          &lt;div style={{ fontSize: 17, fontWeight: 'bold', color: '#172133', marginBottom: 6 }}&gt;隐性知识散落&lt;/div&gt;&#10;          &lt;p style={{ fontSize: 14, color: '#5F5E5A', margin: 0, lineHeight: 1.6 }}&gt;装修施工时间、停车规则、宠物管理等规定，往往只存在于物业员工的个人经验里，新人上岗难以快速掌握，业主咨询也得不到统一准确的答案。&lt;/p&gt;&#10;        &lt;/div&gt;&#10;      &lt;/div&gt;&#10;    &lt;/div&gt;&#10;  &lt;/div&gt;&#10;  &lt;div style={{ flexShrink: 0, height: 44, display: 'flex', alignItems: 'flex-end', justifyContent: 'space-between' }}&gt;&#10;    &lt;span style={{ color: '#BD9B56', fontSize: 12, letterSpacing: '0.1em' }}&gt;云溪花园 · 智慧社区&lt;/span&gt;&#10;    &lt;span style={{ color: '#a09b8c', fontSize: 12 }}&gt;03 / 15&lt;/span&gt;&#10;  &lt;/div&gt;&#10;&lt;/Slide&gt;"/>
+        <p:cNvPr id="282" name="" descr="&lt;Slide style={{ width: '1280px', height: '720px', background: '#FBFCFA', position: 'relative', padding: '40px 64px', boxSizing: 'border-box', display: 'flex', flexDirection: 'column' }}&gt;&#10;  &lt;div style={{ flexShrink: 0 }}&gt;&#10;    &lt;div style={{ color: '#BD9B56', fontSize: 13, letterSpacing: '0.25em', marginBottom: 8 }}&gt;01 · 项目背景&lt;/div&gt;&#10;    &lt;h2 style={{ fontSize: 30, fontWeight: 'bold', color: '#172133', margin: 0, lineHeight: 1.3 }}&gt;传统物业的三重困境&lt;/h2&gt;&#10;    &lt;div style={{ fontSize: 14, color: '#6b7075', marginTop: 8 }}&gt;业务、数据、知识「三张皮」，需要用 AI 重新缝合&lt;/div&gt;&#10;  &lt;/div&gt;&#10;  &lt;div style={{ flex: 1, display: 'flex', alignItems: 'center' }}&gt;&#10;    &lt;div style={{ width: '100%', display: 'flex', flexDirection: 'column', gap: 18 }}&gt;&#10;      &lt;div style={{ display: 'flex', gap: 20, background: '#fff', borderRadius: 10, padding: '20px 24px', boxShadow: '0 4px 16px rgba(23,33,51,0.06)', borderLeft: '4px solid #BD9B56' }}&gt;&#10;        &lt;span style={{ color: '#BD9B56', fontSize: 22, lineHeight: 1.2, flexShrink: 0 }}&gt;!&lt;/span&gt;&#10;        &lt;div&gt;&#10;          &lt;div style={{ fontSize: 17, fontWeight: 'bold', color: '#172133', marginBottom: 6 }}&gt;信息孤岛&lt;/div&gt;&#10;          &lt;p style={{ fontSize: 14, color: '#5F5E5A', margin: 0, lineHeight: 1.6 }}&gt;业主报修、费用缴纳、巡检记录分散在多个系统，彼此不打通，物业无法掌握完整的社区运行状态，业主也看不到工单的处理进度。&lt;/p&gt;&#10;        &lt;/div&gt;&#10;      &lt;/div&gt;&#10;      &lt;div style={{ display: 'flex', gap: 20, background: '#fff', borderRadius: 10, padding: '20px 24px', boxShadow: '0 4px 16px rgba(23,33,51,0.06)', borderLeft: '4px solid #BD9B56' }}&gt;&#10;        &lt;span style={{ color: '#BD9B56', fontSize: 22, lineHeight: 1.2, flexShrink: 0 }}&gt;!&lt;/span&gt;&#10;        &lt;div&gt;&#10;          &lt;div style={{ fontSize: 17, fontWeight: 'bold', color: '#172133', marginBottom: 6 }}&gt;响应迟缓&lt;/div&gt;&#10;          &lt;p style={{ fontSize: 14, color: '#5F5E5A', margin: 0, lineHeight: 1.6 }}&gt;传统报修依赖电话和微信群，客服人工登记后再手动派单，从「业主报修」到「师傅上门」平均要数小时甚至隔天，响应效率低。&lt;/p&gt;&#10;        &lt;/div&gt;&#10;      &lt;/div&gt;&#10;      &lt;div style={{ display: 'flex', gap: 20, background: '#fff', borderRadius: 10, padding: '20px 24px', boxShadow: '0 4px 16px rgba(23,33,51,0.06)', borderLeft: '4px solid #BD9B56' }}&gt;&#10;        &lt;span style={{ color: '#BD9B56', fontSize: 22, lineHeight: 1.2, flexShrink: 0 }}&gt;!&lt;/span&gt;&#10;        &lt;div&gt;&#10;          &lt;div style={{ fontSize: 17, fontWeight: 'bold', color: '#172133', marginBottom: 6 }}&gt;隐性知识散落&lt;/div&gt;&#10;          &lt;p style={{ fontSize: 14, color: '#5F5E5A', margin: 0, lineHeight: 1.6 }}&gt;装修施工时间、停车规则、宠物管理等规定，往往只存在于物业员工的个人经验里，新人上岗难以快速掌握，业主咨询也得不到统一准确的答案。&lt;/p&gt;&#10;        &lt;/div&gt;&#10;      &lt;/div&gt;&#10;    &lt;/div&gt;&#10;  &lt;/div&gt;&#10;  &lt;div style={{ flexShrink: 0, height: 44, display: 'flex', alignItems: 'flex-end', justifyContent: 'space-between' }}&gt;&#10;    &lt;span style={{ color: '#BD9B56', fontSize: 12, letterSpacing: '0.1em' }}&gt;云溪花园 · 智慧社区&lt;/span&gt;&#10;    &lt;span style={{ color: '#a09b8c', fontSize: 12 }}&gt;03 / 15&lt;/span&gt;&#10;  &lt;/div&gt;&#10;&lt;/Slide&gt;"/>
         <p:cNvGrpSpPr/>
         <p:nvPr/>
       </p:nvGrpSpPr>
@@ -12765,7 +13552,7 @@
       </p:grpSpPr>
       <p:sp>
         <p:nvSpPr>
-          <p:cNvPr id="264" name=""/>
+          <p:cNvPr id="283" name=""/>
           <p:cNvSpPr/>
           <p:nvPr/>
         </p:nvSpPr>
@@ -12789,7 +13576,7 @@
       </p:sp>
       <p:sp>
         <p:nvSpPr>
-          <p:cNvPr id="265" name="" descr="{&quot;isTemplate&quot;:true,&quot;type&quot;:&quot;text&quot;}"/>
+          <p:cNvPr id="284" name="" descr="{&quot;isTemplate&quot;:true,&quot;type&quot;:&quot;text&quot;}"/>
           <p:cNvSpPr txBox="1"/>
           <p:nvPr/>
         </p:nvSpPr>
@@ -12834,7 +13621,7 @@
       </p:sp>
       <p:sp>
         <p:nvSpPr>
-          <p:cNvPr id="266" name="" descr="{&quot;isTemplate&quot;:true,&quot;type&quot;:&quot;text&quot;}"/>
+          <p:cNvPr id="285" name="" descr="{&quot;isTemplate&quot;:true,&quot;type&quot;:&quot;text&quot;}"/>
           <p:cNvSpPr txBox="1"/>
           <p:nvPr/>
         </p:nvSpPr>
@@ -12869,7 +13656,7 @@
       </p:sp>
       <p:sp>
         <p:nvSpPr>
-          <p:cNvPr id="267" name="" descr="{&quot;isTemplate&quot;:true,&quot;type&quot;:&quot;text&quot;}"/>
+          <p:cNvPr id="286" name="" descr="{&quot;isTemplate&quot;:true,&quot;type&quot;:&quot;text&quot;}"/>
           <p:cNvSpPr txBox="1"/>
           <p:nvPr/>
         </p:nvSpPr>
@@ -12924,7 +13711,7 @@
       </p:sp>
       <p:sp>
         <p:nvSpPr>
-          <p:cNvPr id="268" name=""/>
+          <p:cNvPr id="287" name=""/>
           <p:cNvSpPr/>
           <p:nvPr/>
         </p:nvSpPr>
@@ -12957,7 +13744,7 @@
       </p:sp>
       <p:sp>
         <p:nvSpPr>
-          <p:cNvPr id="269" name=""/>
+          <p:cNvPr id="288" name=""/>
           <p:cNvSpPr/>
           <p:nvPr/>
         </p:nvSpPr>
@@ -13014,7 +13801,7 @@
       </p:sp>
       <p:sp>
         <p:nvSpPr>
-          <p:cNvPr id="270" name="" descr="{&quot;isTemplate&quot;:true,&quot;type&quot;:&quot;text&quot;}"/>
+          <p:cNvPr id="289" name="" descr="{&quot;isTemplate&quot;:true,&quot;type&quot;:&quot;text&quot;}"/>
           <p:cNvSpPr txBox="1"/>
           <p:nvPr/>
         </p:nvSpPr>
@@ -13049,7 +13836,7 @@
       </p:sp>
       <p:sp>
         <p:nvSpPr>
-          <p:cNvPr id="271" name="" descr="{&quot;isTemplate&quot;:true,&quot;type&quot;:&quot;text&quot;}"/>
+          <p:cNvPr id="290" name="" descr="{&quot;isTemplate&quot;:true,&quot;type&quot;:&quot;text&quot;}"/>
           <p:cNvSpPr txBox="1"/>
           <p:nvPr/>
         </p:nvSpPr>
@@ -13084,7 +13871,7 @@
       </p:sp>
       <p:sp>
         <p:nvSpPr>
-          <p:cNvPr id="272" name="" descr="{&quot;isTemplate&quot;:true,&quot;type&quot;:&quot;text&quot;}"/>
+          <p:cNvPr id="291" name="" descr="{&quot;isTemplate&quot;:true,&quot;type&quot;:&quot;text&quot;}"/>
           <p:cNvSpPr txBox="1"/>
           <p:nvPr/>
         </p:nvSpPr>
@@ -13119,7 +13906,7 @@
       </p:sp>
       <p:sp>
         <p:nvSpPr>
-          <p:cNvPr id="273" name=""/>
+          <p:cNvPr id="292" name=""/>
           <p:cNvSpPr/>
           <p:nvPr/>
         </p:nvSpPr>
@@ -13152,7 +13939,7 @@
       </p:sp>
       <p:sp>
         <p:nvSpPr>
-          <p:cNvPr id="274" name=""/>
+          <p:cNvPr id="293" name=""/>
           <p:cNvSpPr/>
           <p:nvPr/>
         </p:nvSpPr>
@@ -13209,7 +13996,7 @@
       </p:sp>
       <p:sp>
         <p:nvSpPr>
-          <p:cNvPr id="275" name="" descr="{&quot;isTemplate&quot;:true,&quot;type&quot;:&quot;text&quot;}"/>
+          <p:cNvPr id="294" name="" descr="{&quot;isTemplate&quot;:true,&quot;type&quot;:&quot;text&quot;}"/>
           <p:cNvSpPr txBox="1"/>
           <p:nvPr/>
         </p:nvSpPr>
@@ -13244,7 +14031,7 @@
       </p:sp>
       <p:sp>
         <p:nvSpPr>
-          <p:cNvPr id="276" name="" descr="{&quot;isTemplate&quot;:true,&quot;type&quot;:&quot;text&quot;}"/>
+          <p:cNvPr id="295" name="" descr="{&quot;isTemplate&quot;:true,&quot;type&quot;:&quot;text&quot;}"/>
           <p:cNvSpPr txBox="1"/>
           <p:nvPr/>
         </p:nvSpPr>
@@ -13279,7 +14066,7 @@
       </p:sp>
       <p:sp>
         <p:nvSpPr>
-          <p:cNvPr id="277" name="" descr="{&quot;isTemplate&quot;:true,&quot;type&quot;:&quot;text&quot;}"/>
+          <p:cNvPr id="296" name="" descr="{&quot;isTemplate&quot;:true,&quot;type&quot;:&quot;text&quot;}"/>
           <p:cNvSpPr txBox="1"/>
           <p:nvPr/>
         </p:nvSpPr>
@@ -13314,7 +14101,7 @@
       </p:sp>
       <p:sp>
         <p:nvSpPr>
-          <p:cNvPr id="278" name=""/>
+          <p:cNvPr id="297" name=""/>
           <p:cNvSpPr/>
           <p:nvPr/>
         </p:nvSpPr>
@@ -13347,7 +14134,7 @@
       </p:sp>
       <p:sp>
         <p:nvSpPr>
-          <p:cNvPr id="279" name=""/>
+          <p:cNvPr id="298" name=""/>
           <p:cNvSpPr/>
           <p:nvPr/>
         </p:nvSpPr>
@@ -13404,7 +14191,7 @@
       </p:sp>
       <p:sp>
         <p:nvSpPr>
-          <p:cNvPr id="280" name="" descr="{&quot;isTemplate&quot;:true,&quot;type&quot;:&quot;text&quot;}"/>
+          <p:cNvPr id="299" name="" descr="{&quot;isTemplate&quot;:true,&quot;type&quot;:&quot;text&quot;}"/>
           <p:cNvSpPr txBox="1"/>
           <p:nvPr/>
         </p:nvSpPr>
@@ -13439,7 +14226,7 @@
       </p:sp>
       <p:sp>
         <p:nvSpPr>
-          <p:cNvPr id="281" name="" descr="{&quot;isTemplate&quot;:true,&quot;type&quot;:&quot;text&quot;}"/>
+          <p:cNvPr id="300" name="" descr="{&quot;isTemplate&quot;:true,&quot;type&quot;:&quot;text&quot;}"/>
           <p:cNvSpPr txBox="1"/>
           <p:nvPr/>
         </p:nvSpPr>
@@ -13474,7 +14261,7 @@
       </p:sp>
       <p:sp>
         <p:nvSpPr>
-          <p:cNvPr id="282" name="" descr="{&quot;isTemplate&quot;:true,&quot;type&quot;:&quot;text&quot;}"/>
+          <p:cNvPr id="301" name="" descr="{&quot;isTemplate&quot;:true,&quot;type&quot;:&quot;text&quot;}"/>
           <p:cNvSpPr txBox="1"/>
           <p:nvPr/>
         </p:nvSpPr>
@@ -13509,7 +14296,7 @@
       </p:sp>
       <p:sp>
         <p:nvSpPr>
-          <p:cNvPr id="283" name="" descr="{&quot;isTemplate&quot;:true,&quot;type&quot;:&quot;text&quot;}"/>
+          <p:cNvPr id="302" name="" descr="{&quot;isTemplate&quot;:true,&quot;type&quot;:&quot;text&quot;}"/>
           <p:cNvSpPr txBox="1"/>
           <p:nvPr/>
         </p:nvSpPr>
@@ -13564,7 +14351,7 @@
       </p:sp>
       <p:sp>
         <p:nvSpPr>
-          <p:cNvPr id="284" name="" descr="{&quot;isTemplate&quot;:true,&quot;type&quot;:&quot;text&quot;}"/>
+          <p:cNvPr id="303" name="" descr="{&quot;isTemplate&quot;:true,&quot;type&quot;:&quot;text&quot;}"/>
           <p:cNvSpPr txBox="1"/>
           <p:nvPr/>
         </p:nvSpPr>
@@ -13607,7 +14394,7 @@
   <p:cSld>
     <p:spTree>
       <p:nvGrpSpPr>
-        <p:cNvPr id="285" name="" descr="&lt;Slide style={{ width: '1280px', height: '720px', background: '#FBFCFA', position: 'relative', padding: '32px 64px', boxSizing: 'border-box', display: 'flex', flexDirection: 'column' }}&gt;&#10;  &lt;div style={{ flexShrink: 0 }}&gt;&#10;    &lt;div style={{ color: '#BD9B56', fontSize: 13, letterSpacing: '0.25em', marginBottom: 6 }}&gt;01 · 项目目标&lt;/div&gt;&#10;    &lt;h2 style={{ fontSize: 30, fontWeight: 'bold', color: '#172133', margin: 0, lineHeight: 1.3 }}&gt;本项目要验证的四件事&lt;/h2&gt;&#10;  &lt;/div&gt;&#10;  &lt;div style={{ flex: 1, display: 'flex', alignItems: 'center', minHeight: 0 }}&gt;&#10;    &lt;div style={{ width: '100%', display: 'grid', gridTemplateColumns: '1fr 1fr', gap: 16 }}&gt;&#10;      &lt;div style={{ background: '#fff', borderRadius: 10, padding: '18px 22px', boxShadow: '0 4px 16px rgba(23,33,51,0.06)', borderTop: '3px solid #BD9B56' }}&gt;&#10;        &lt;div style={{ fontSize: 17, fontWeight: 'bold', color: '#172133', marginBottom: 6 }}&gt;1.  AI 能否理解业务意图&lt;/div&gt;&#10;        &lt;p style={{ fontSize: 14, color: '#5F5E5A', margin: 0, lineHeight: 1.55 }}&gt;用户说一句「厨房漏水了」，系统能否准确识别为报修需求，而非闲聊或误判。&lt;/p&gt;&#10;      &lt;/div&gt;&#10;      &lt;div style={{ background: '#fff', borderRadius: 10, padding: '18px 22px', boxShadow: '0 4px 16px rgba(23,33,51,0.06)', borderTop: '3px solid #BD9B56' }}&gt;&#10;        &lt;div style={{ fontSize: 17, fontWeight: 'bold', color: '#172133', marginBottom: 6 }}&gt;2.  Agent 能否调用业务工具&lt;/div&gt;&#10;        &lt;p style={{ fontSize: 14, color: '#5F5E5A', margin: 0, lineHeight: 1.55 }}&gt;识别意图后，能否自动创建工单、查询费用、检索知识，而不是停留在「回答」层面。&lt;/p&gt;&#10;      &lt;/div&gt;&#10;      &lt;div style={{ background: '#fff', borderRadius: 10, padding: '18px 22px', boxShadow: '0 4px 16px rgba(23,33,51,0.06)', borderTop: '3px solid #BD9B56' }}&gt;&#10;        &lt;div style={{ fontSize: 17, fontWeight: 'bold', color: '#172133', marginBottom: 6 }}&gt;3.  能否跑通业务闭环&lt;/div&gt;&#10;        &lt;p style={{ fontSize: 14, color: '#5F5E5A', margin: 0, lineHeight: 1.55 }}&gt;从报修到派单到完成，AI 是否真正参与了业务流程，而非只在前端加了一个聊天窗口。&lt;/p&gt;&#10;      &lt;/div&gt;&#10;      &lt;div style={{ background: '#fff', borderRadius: 10, padding: '18px 22px', boxShadow: '0 4px 16px rgba(23,33,51,0.06)', borderTop: '3px solid #BD9B56' }}&gt;&#10;        &lt;div style={{ fontSize: 17, fontWeight: 'bold', color: '#172133', marginBottom: 6 }}&gt;4.  RAG 能否准确回答&lt;/div&gt;&#10;        &lt;p style={{ fontSize: 14, color: '#5F5E5A', margin: 0, lineHeight: 1.55 }}&gt;对「装修几点施工」这类制度问题，能否检索到正确依据并给出准确、有出处的答案。&lt;/p&gt;&#10;      &lt;/div&gt;&#10;    &lt;/div&gt;&#10;  &lt;/div&gt;&#10;  &lt;div style={{ flexShrink: 0, height: 40, display: 'flex', alignItems: 'flex-end', justifyContent: 'space-between' }}&gt;&#10;    &lt;span style={{ color: '#BD9B56', fontSize: 12, letterSpacing: '0.1em' }}&gt;云溪花园 · 智慧社区&lt;/span&gt;&#10;    &lt;span style={{ color: '#a09b8c', fontSize: 12 }}&gt;04 / 15&lt;/span&gt;&#10;  &lt;/div&gt;&#10;&lt;/Slide&gt;"/>
+        <p:cNvPr id="304" name="" descr="&lt;Slide style={{ width: '1280px', height: '720px', background: '#FBFCFA', position: 'relative', padding: '32px 64px', boxSizing: 'border-box', display: 'flex', flexDirection: 'column' }}&gt;&#10;  &lt;div style={{ flexShrink: 0 }}&gt;&#10;    &lt;div style={{ color: '#BD9B56', fontSize: 13, letterSpacing: '0.25em', marginBottom: 6 }}&gt;01 · 项目目标&lt;/div&gt;&#10;    &lt;h2 style={{ fontSize: 30, fontWeight: 'bold', color: '#172133', margin: 0, lineHeight: 1.3 }}&gt;本项目要验证的四件事&lt;/h2&gt;&#10;  &lt;/div&gt;&#10;  &lt;div style={{ flex: 1, display: 'flex', alignItems: 'center', minHeight: 0 }}&gt;&#10;    &lt;div style={{ width: '100%', display: 'grid', gridTemplateColumns: '1fr 1fr', gap: 16 }}&gt;&#10;      &lt;div style={{ background: '#fff', borderRadius: 10, padding: '18px 22px', boxShadow: '0 4px 16px rgba(23,33,51,0.06)', borderTop: '3px solid #BD9B56' }}&gt;&#10;        &lt;div style={{ fontSize: 17, fontWeight: 'bold', color: '#172133', marginBottom: 6 }}&gt;1.  AI 能否理解业务意图&lt;/div&gt;&#10;        &lt;p style={{ fontSize: 14, color: '#5F5E5A', margin: 0, lineHeight: 1.55 }}&gt;用户说一句「厨房漏水了」，系统能否准确识别为报修需求，而非闲聊或误判。&lt;/p&gt;&#10;      &lt;/div&gt;&#10;      &lt;div style={{ background: '#fff', borderRadius: 10, padding: '18px 22px', boxShadow: '0 4px 16px rgba(23,33,51,0.06)', borderTop: '3px solid #BD9B56' }}&gt;&#10;        &lt;div style={{ fontSize: 17, fontWeight: 'bold', color: '#172133', marginBottom: 6 }}&gt;2.  Agent 能否调用业务工具&lt;/div&gt;&#10;        &lt;p style={{ fontSize: 14, color: '#5F5E5A', margin: 0, lineHeight: 1.55 }}&gt;识别意图后，能否自动创建工单、查询费用、检索知识，而不是停留在「回答」层面。&lt;/p&gt;&#10;      &lt;/div&gt;&#10;      &lt;div style={{ background: '#fff', borderRadius: 10, padding: '18px 22px', boxShadow: '0 4px 16px rgba(23,33,51,0.06)', borderTop: '3px solid #BD9B56' }}&gt;&#10;        &lt;div style={{ fontSize: 17, fontWeight: 'bold', color: '#172133', marginBottom: 6 }}&gt;3.  能否跑通业务闭环&lt;/div&gt;&#10;        &lt;p style={{ fontSize: 14, color: '#5F5E5A', margin: 0, lineHeight: 1.55 }}&gt;从报修到派单到完成，AI 是否真正参与了业务流程，而非只在前端加了一个聊天窗口。&lt;/p&gt;&#10;      &lt;/div&gt;&#10;      &lt;div style={{ background: '#fff', borderRadius: 10, padding: '18px 22px', boxShadow: '0 4px 16px rgba(23,33,51,0.06)', borderTop: '3px solid #BD9B56' }}&gt;&#10;        &lt;div style={{ fontSize: 17, fontWeight: 'bold', color: '#172133', marginBottom: 6 }}&gt;4.  RAG 能否准确回答&lt;/div&gt;&#10;        &lt;p style={{ fontSize: 14, color: '#5F5E5A', margin: 0, lineHeight: 1.55 }}&gt;对「装修几点施工」这类制度问题，能否检索到正确依据并给出准确、有出处的答案。&lt;/p&gt;&#10;      &lt;/div&gt;&#10;    &lt;/div&gt;&#10;  &lt;/div&gt;&#10;  &lt;div style={{ flexShrink: 0, height: 40, display: 'flex', alignItems: 'flex-end', justifyContent: 'space-between' }}&gt;&#10;    &lt;span style={{ color: '#BD9B56', fontSize: 12, letterSpacing: '0.1em' }}&gt;云溪花园 · 智慧社区&lt;/span&gt;&#10;    &lt;span style={{ color: '#a09b8c', fontSize: 12 }}&gt;04 / 15&lt;/span&gt;&#10;  &lt;/div&gt;&#10;&lt;/Slide&gt;"/>
         <p:cNvGrpSpPr/>
         <p:nvPr/>
       </p:nvGrpSpPr>
@@ -13621,7 +14408,7 @@
       </p:grpSpPr>
       <p:sp>
         <p:nvSpPr>
-          <p:cNvPr id="286" name=""/>
+          <p:cNvPr id="305" name=""/>
           <p:cNvSpPr/>
           <p:nvPr/>
         </p:nvSpPr>
@@ -13645,7 +14432,7 @@
       </p:sp>
       <p:sp>
         <p:nvSpPr>
-          <p:cNvPr id="287" name="" descr="{&quot;isTemplate&quot;:true,&quot;type&quot;:&quot;text&quot;}"/>
+          <p:cNvPr id="306" name="" descr="{&quot;isTemplate&quot;:true,&quot;type&quot;:&quot;text&quot;}"/>
           <p:cNvSpPr txBox="1"/>
           <p:nvPr/>
         </p:nvSpPr>
@@ -13690,7 +14477,7 @@
       </p:sp>
       <p:sp>
         <p:nvSpPr>
-          <p:cNvPr id="288" name="" descr="{&quot;isTemplate&quot;:true,&quot;type&quot;:&quot;text&quot;}"/>
+          <p:cNvPr id="307" name="" descr="{&quot;isTemplate&quot;:true,&quot;type&quot;:&quot;text&quot;}"/>
           <p:cNvSpPr txBox="1"/>
           <p:nvPr/>
         </p:nvSpPr>
@@ -13725,7 +14512,7 @@
       </p:sp>
       <p:sp>
         <p:nvSpPr>
-          <p:cNvPr id="289" name=""/>
+          <p:cNvPr id="308" name=""/>
           <p:cNvSpPr/>
           <p:nvPr/>
         </p:nvSpPr>
@@ -13758,7 +14545,7 @@
       </p:sp>
       <p:sp>
         <p:nvSpPr>
-          <p:cNvPr id="290" name=""/>
+          <p:cNvPr id="309" name=""/>
           <p:cNvSpPr/>
           <p:nvPr/>
         </p:nvSpPr>
@@ -13815,7 +14602,7 @@
       </p:sp>
       <p:sp>
         <p:nvSpPr>
-          <p:cNvPr id="291" name="" descr="{&quot;isTemplate&quot;:true,&quot;type&quot;:&quot;text&quot;}"/>
+          <p:cNvPr id="310" name="" descr="{&quot;isTemplate&quot;:true,&quot;type&quot;:&quot;text&quot;}"/>
           <p:cNvSpPr txBox="1"/>
           <p:nvPr/>
         </p:nvSpPr>
@@ -13860,7 +14647,7 @@
       </p:sp>
       <p:sp>
         <p:nvSpPr>
-          <p:cNvPr id="292" name="" descr="{&quot;isTemplate&quot;:true,&quot;type&quot;:&quot;text&quot;}"/>
+          <p:cNvPr id="311" name="" descr="{&quot;isTemplate&quot;:true,&quot;type&quot;:&quot;text&quot;}"/>
           <p:cNvSpPr txBox="1"/>
           <p:nvPr/>
         </p:nvSpPr>
@@ -13895,7 +14682,7 @@
       </p:sp>
       <p:sp>
         <p:nvSpPr>
-          <p:cNvPr id="293" name=""/>
+          <p:cNvPr id="312" name=""/>
           <p:cNvSpPr/>
           <p:nvPr/>
         </p:nvSpPr>
@@ -13928,7 +14715,7 @@
       </p:sp>
       <p:sp>
         <p:nvSpPr>
-          <p:cNvPr id="294" name=""/>
+          <p:cNvPr id="313" name=""/>
           <p:cNvSpPr/>
           <p:nvPr/>
         </p:nvSpPr>
@@ -13985,7 +14772,7 @@
       </p:sp>
       <p:sp>
         <p:nvSpPr>
-          <p:cNvPr id="295" name="" descr="{&quot;isTemplate&quot;:true,&quot;type&quot;:&quot;text&quot;}"/>
+          <p:cNvPr id="314" name="" descr="{&quot;isTemplate&quot;:true,&quot;type&quot;:&quot;text&quot;}"/>
           <p:cNvSpPr txBox="1"/>
           <p:nvPr/>
         </p:nvSpPr>
@@ -14030,7 +14817,7 @@
       </p:sp>
       <p:sp>
         <p:nvSpPr>
-          <p:cNvPr id="296" name="" descr="{&quot;isTemplate&quot;:true,&quot;type&quot;:&quot;text&quot;}"/>
+          <p:cNvPr id="315" name="" descr="{&quot;isTemplate&quot;:true,&quot;type&quot;:&quot;text&quot;}"/>
           <p:cNvSpPr txBox="1"/>
           <p:nvPr/>
         </p:nvSpPr>
@@ -14065,7 +14852,7 @@
       </p:sp>
       <p:sp>
         <p:nvSpPr>
-          <p:cNvPr id="297" name=""/>
+          <p:cNvPr id="316" name=""/>
           <p:cNvSpPr/>
           <p:nvPr/>
         </p:nvSpPr>
@@ -14098,7 +14885,7 @@
       </p:sp>
       <p:sp>
         <p:nvSpPr>
-          <p:cNvPr id="298" name=""/>
+          <p:cNvPr id="317" name=""/>
           <p:cNvSpPr/>
           <p:nvPr/>
         </p:nvSpPr>
@@ -14155,7 +14942,7 @@
       </p:sp>
       <p:sp>
         <p:nvSpPr>
-          <p:cNvPr id="299" name="" descr="{&quot;isTemplate&quot;:true,&quot;type&quot;:&quot;text&quot;}"/>
+          <p:cNvPr id="318" name="" descr="{&quot;isTemplate&quot;:true,&quot;type&quot;:&quot;text&quot;}"/>
           <p:cNvSpPr txBox="1"/>
           <p:nvPr/>
         </p:nvSpPr>
@@ -14200,7 +14987,7 @@
       </p:sp>
       <p:sp>
         <p:nvSpPr>
-          <p:cNvPr id="300" name="" descr="{&quot;isTemplate&quot;:true,&quot;type&quot;:&quot;text&quot;}"/>
+          <p:cNvPr id="319" name="" descr="{&quot;isTemplate&quot;:true,&quot;type&quot;:&quot;text&quot;}"/>
           <p:cNvSpPr txBox="1"/>
           <p:nvPr/>
         </p:nvSpPr>
@@ -14255,7 +15042,7 @@
       </p:sp>
       <p:sp>
         <p:nvSpPr>
-          <p:cNvPr id="301" name=""/>
+          <p:cNvPr id="320" name=""/>
           <p:cNvSpPr/>
           <p:nvPr/>
         </p:nvSpPr>
@@ -14288,7 +15075,7 @@
       </p:sp>
       <p:sp>
         <p:nvSpPr>
-          <p:cNvPr id="302" name=""/>
+          <p:cNvPr id="321" name=""/>
           <p:cNvSpPr/>
           <p:nvPr/>
         </p:nvSpPr>
@@ -14345,7 +15132,7 @@
       </p:sp>
       <p:sp>
         <p:nvSpPr>
-          <p:cNvPr id="303" name="" descr="{&quot;isTemplate&quot;:true,&quot;type&quot;:&quot;text&quot;}"/>
+          <p:cNvPr id="322" name="" descr="{&quot;isTemplate&quot;:true,&quot;type&quot;:&quot;text&quot;}"/>
           <p:cNvSpPr txBox="1"/>
           <p:nvPr/>
         </p:nvSpPr>
@@ -14390,7 +15177,7 @@
       </p:sp>
       <p:sp>
         <p:nvSpPr>
-          <p:cNvPr id="304" name="" descr="{&quot;isTemplate&quot;:true,&quot;type&quot;:&quot;text&quot;}"/>
+          <p:cNvPr id="323" name="" descr="{&quot;isTemplate&quot;:true,&quot;type&quot;:&quot;text&quot;}"/>
           <p:cNvSpPr txBox="1"/>
           <p:nvPr/>
         </p:nvSpPr>
@@ -14425,7 +15212,7 @@
       </p:sp>
       <p:sp>
         <p:nvSpPr>
-          <p:cNvPr id="305" name="" descr="{&quot;isTemplate&quot;:true,&quot;type&quot;:&quot;text&quot;}"/>
+          <p:cNvPr id="324" name="" descr="{&quot;isTemplate&quot;:true,&quot;type&quot;:&quot;text&quot;}"/>
           <p:cNvSpPr txBox="1"/>
           <p:nvPr/>
         </p:nvSpPr>
@@ -14480,7 +15267,7 @@
       </p:sp>
       <p:sp>
         <p:nvSpPr>
-          <p:cNvPr id="306" name="" descr="{&quot;isTemplate&quot;:true,&quot;type&quot;:&quot;text&quot;}"/>
+          <p:cNvPr id="325" name="" descr="{&quot;isTemplate&quot;:true,&quot;type&quot;:&quot;text&quot;}"/>
           <p:cNvSpPr txBox="1"/>
           <p:nvPr/>
         </p:nvSpPr>
@@ -14523,7 +15310,7 @@
   <p:cSld>
     <p:spTree>
       <p:nvGrpSpPr>
-        <p:cNvPr id="307" name="" descr="&lt;Slide style={{ width: '1280px', height: '720px', background: '#FBFCFA', position: 'relative', padding: '32px 64px', boxSizing: 'border-box', display: 'flex', flexDirection: 'column' }}&gt;&#10;  &lt;div style={{ flexShrink: 0 }}&gt;&#10;    &lt;div style={{ color: '#BD9B56', fontSize: 13, letterSpacing: '0.25em', marginBottom: 6 }}&gt;01 · 项目规模&lt;/div&gt;&#10;    &lt;h2 style={{ fontSize: 30, fontWeight: 'bold', color: '#172133', margin: 0, lineHeight: 1.3 }}&gt;虚拟社区数据资产：云溪花园&lt;/h2&gt;&#10;    &lt;div style={{ fontSize: 14, color: '#6b7075', marginTop: 6 }}&gt;以一个社区为根，向下延伸出空间、人员、业务、知识四类数据资产&lt;/div&gt;&#10;  &lt;/div&gt;&#10;  &lt;div style={{ flex: 1, display: 'flex', alignItems: 'center', justifyContent: 'center' }}&gt;&#10;    &lt;svg width=&quot;1150&quot; height=&quot;470&quot; viewBox=&quot;0 0 1150 470&quot;&gt;&#10;      &lt;g fontFamily=&quot;Inter, sans-serif&quot;&gt;&#10;        {/* 根节点 community */}&#10;        &lt;rect x=&quot;450&quot; y=&quot;14&quot; width=&quot;250&quot; height=&quot;58&quot; rx=&quot;10&quot; fill=&quot;#172133&quot; /&gt;&#10;        &lt;text x=&quot;575&quot; y=&quot;38&quot; textAnchor=&quot;middle&quot; fontSize=&quot;15&quot; fontWeight=&quot;bold&quot; fill=&quot;#FBFCFA&quot;&gt;community 云溪花园&lt;/text&gt;&#10;        &lt;text x=&quot;575&quot; y=&quot;58&quot; textAnchor=&quot;middle&quot; fontSize=&quot;11&quot; fill=&quot;#BD9B56&quot;&gt;1 个小区 · 上海浦东张江路1268号&lt;/text&gt;&#10;        {/* 根节点连接线 */}&#10;        &lt;line x1=&quot;575&quot; y1=&quot;72&quot; x2=&quot;575&quot; y2=&quot;92&quot; stroke=&quot;#BD9B56&quot; strokeWidth=&quot;1.5&quot; /&gt;&#10;        &lt;line x1=&quot;150&quot; y1=&quot;92&quot; x2=&quot;1015&quot; y2=&quot;92&quot; stroke=&quot;#BD9B56&quot; strokeWidth=&quot;1.5&quot; /&gt;&#10;        &lt;line x1=&quot;150&quot; y1=&quot;92&quot; x2=&quot;150&quot; y2=&quot;108&quot; stroke=&quot;#BD9B56&quot; strokeWidth=&quot;1.5&quot; /&gt;&#10;        &lt;line x1=&quot;438&quot; y1=&quot;92&quot; x2=&quot;438&quot; y2=&quot;108&quot; stroke=&quot;#BD9B56&quot; strokeWidth=&quot;1.5&quot; /&gt;&#10;        &lt;line x1=&quot;726&quot; y1=&quot;92&quot; x2=&quot;726&quot; y2=&quot;108&quot; stroke=&quot;#BD9B56&quot; strokeWidth=&quot;1.5&quot; /&gt;&#10;        &lt;line x1=&quot;1015&quot; y1=&quot;92&quot; x2=&quot;1015&quot; y2=&quot;108&quot; stroke=&quot;#BD9B56&quot; strokeWidth=&quot;1.5&quot; /&gt;&#10;&#10;        {/* 分组1：空间资产 */}&#10;        &lt;text x=&quot;150&quot; y=&quot;128&quot; textAnchor=&quot;middle&quot; fontSize=&quot;12&quot; fontWeight=&quot;bold&quot; fill=&quot;#BD9B56&quot;&gt;空间资产&lt;/text&gt;&#10;        &lt;rect x=&quot;20&quot; y=&quot;138&quot; width=&quot;260&quot; height=&quot;56&quot; rx=&quot;8&quot; fill=&quot;rgba(34,57,94,0.06)&quot; stroke=&quot;#22395E&quot; strokeWidth=&quot;1.5&quot; /&gt;&#10;        &lt;text x=&quot;150&quot; y=&quot;162&quot; textAnchor=&quot;middle&quot; fontSize=&quot;14&quot; fontWeight=&quot;bold&quot; fill=&quot;#172133&quot;&gt;building 楼栋 ×8&lt;/text&gt;&#10;        &lt;text x=&quot;150&quot; y=&quot;182&quot; textAnchor=&quot;middle&quot; fontSize=&quot;11&quot; fill=&quot;#5F5E5A&quot;&gt;每栋 26 层 · 2 单元 · 4 户/层&lt;/text&gt;&#10;        &lt;line x1=&quot;150&quot; y1=&quot;194&quot; x2=&quot;150&quot; y2=&quot;206&quot; stroke=&quot;#BD9B56&quot; strokeWidth=&quot;1.2&quot; /&gt;&#10;        &lt;rect x=&quot;20&quot; y=&quot;210&quot; width=&quot;260&quot; height=&quot;56&quot; rx=&quot;8&quot; fill=&quot;rgba(34,57,94,0.06)&quot; stroke=&quot;#22395E&quot; strokeWidth=&quot;1.5&quot; /&gt;&#10;        &lt;text x=&quot;150&quot; y=&quot;234&quot; textAnchor=&quot;middle&quot; fontSize=&quot;14&quot; fontWeight=&quot;bold&quot; fill=&quot;#172133&quot;&gt;house 房屋 ×1664&lt;/text&gt;&#10;        &lt;text x=&quot;150&quot; y=&quot;254&quot; textAnchor=&quot;middle&quot; fontSize=&quot;11&quot; fill=&quot;#5F5E5A&quot;&gt;入住约 1200 户 · 800 车位&lt;/text&gt;&#10;&#10;        {/* 分组2：人员资产 */}&#10;        &lt;text x=&quot;438&quot; y=&quot;128&quot; textAnchor=&quot;middle&quot; fontSize=&quot;12&quot; fontWeight=&quot;bold&quot; fill=&quot;#BD9B56&quot;&gt;人员资产&lt;/text&gt;&#10;        &lt;rect x=&quot;308&quot; y=&quot;138&quot; width=&quot;260&quot; height=&quot;56&quot; rx=&quot;8&quot; fill=&quot;rgba(189,155,86,0.10)&quot; stroke=&quot;#BD9B56&quot; strokeWidth=&quot;1.5&quot; /&gt;&#10;        &lt;text x=&quot;438&quot; y=&quot;162&quot; textAnchor=&quot;middle&quot; fontSize=&quot;14&quot; fontWeight=&quot;bold&quot; fill=&quot;#172133&quot;&gt;user 业主 ×200&lt;/text&gt;&#10;        &lt;text x=&quot;438&quot; y=&quot;182&quot; textAnchor=&quot;middle&quot; fontSize=&quot;11&quot; fill=&quot;#5F5E5A&quot;&gt;house_binding 绑定 200 套&lt;/text&gt;&#10;        &lt;line x1=&quot;438&quot; y1=&quot;194&quot; x2=&quot;438&quot; y2=&quot;206&quot; stroke=&quot;#BD9B56&quot; strokeWidth=&quot;1.2&quot; /&gt;&#10;        &lt;rect x=&quot;308&quot; y=&quot;210&quot; width=&quot;260&quot; height=&quot;56&quot; rx=&quot;8&quot; fill=&quot;rgba(189,155,86,0.10)&quot; stroke=&quot;#BD9B56&quot; strokeWidth=&quot;1.5&quot; /&gt;&#10;        &lt;text x=&quot;438&quot; y=&quot;234&quot; textAnchor=&quot;middle&quot; fontSize=&quot;14&quot; fontWeight=&quot;bold&quot; fill=&quot;#172133&quot;&gt;worker 物业 ×75&lt;/text&gt;&#10;        &lt;text x=&quot;438&quot; y=&quot;254&quot; textAnchor=&quot;middle&quot; fontSize=&quot;11&quot; fill=&quot;#5F5E5A&quot;&gt;10 管理 / 15 维修 / 50 一线&lt;/text&gt;&#10;&#10;        {/* 分组3：业务数据 */}&#10;        &lt;text x=&quot;726&quot; y=&quot;128&quot; textAnchor=&quot;middle&quot; fontSize=&quot;12&quot; fontWeight=&quot;bold&quot; fill=&quot;#BD9B56&quot;&gt;业务数据&lt;/text&gt;&#10;        &lt;rect x=&quot;596&quot; y=&quot;138&quot; width=&quot;260&quot; height=&quot;40&quot; rx=&quot;8&quot; fill=&quot;rgba(34,57,94,0.06)&quot; stroke=&quot;#22395E&quot; strokeWidth=&quot;1.5&quot; /&gt;&#10;        &lt;text x=&quot;726&quot; y=&quot;163&quot; textAnchor=&quot;middle&quot; fontSize=&quot;13&quot; fontWeight=&quot;bold&quot; fill=&quot;#172133&quot;&gt;repair_order 工单 ×50&lt;/text&gt;&#10;        &lt;rect x=&quot;596&quot; y=&quot;186&quot; width=&quot;260&quot; height=&quot;40&quot; rx=&quot;8&quot; fill=&quot;rgba(34,57,94,0.06)&quot; stroke=&quot;#22395E&quot; strokeWidth=&quot;1.5&quot; /&gt;&#10;        &lt;text x=&quot;726&quot; y=&quot;211&quot; textAnchor=&quot;middle&quot; fontSize=&quot;13&quot; fontWeight=&quot;bold&quot; fill=&quot;#172133&quot;&gt;fee_bill 账单 ×746&lt;/text&gt;&#10;        &lt;rect x=&quot;596&quot; y=&quot;234&quot; width=&quot;260&quot; height=&quot;40&quot; rx=&quot;8&quot; fill=&quot;rgba(34,57,94,0.06)&quot; stroke=&quot;#22395E&quot; strokeWidth=&quot;1.5&quot; /&gt;&#10;        &lt;text x=&quot;726&quot; y=&quot;259&quot; textAnchor=&quot;middle&quot; fontSize=&quot;13&quot; fontWeight=&quot;bold&quot; fill=&quot;#172133&quot;&gt;notice 公告 ×24&lt;/text&gt;&#10;&#10;        {/* 分组4：知识资产 */}&#10;        &lt;text x=&quot;1015&quot; y=&quot;128&quot; textAnchor=&quot;middle&quot; fontSize=&quot;12&quot; fontWeight=&quot;bold&quot; fill=&quot;#BD9B56&quot;&gt;知识资产&lt;/text&gt;&#10;        &lt;rect x=&quot;885&quot; y=&quot;138&quot; width=&quot;260&quot; height=&quot;56&quot; rx=&quot;8&quot; fill=&quot;#22395E&quot; /&gt;&#10;        &lt;text x=&quot;1015&quot; y=&quot;162&quot; textAnchor=&quot;middle&quot; fontSize=&quot;14&quot; fontWeight=&quot;bold&quot; fill=&quot;#FBFCFA&quot;&gt;knowledge 文档 ×22&lt;/text&gt;&#10;        &lt;text x=&quot;1015&quot; y=&quot;182&quot; textAnchor=&quot;middle&quot; fontSize=&quot;11&quot; fill=&quot;#BD9B56&quot;&gt;7 个分类（规约/装修/停车…）&lt;/text&gt;&#10;        &lt;line x1=&quot;1015&quot; y1=&quot;194&quot; x2=&quot;1015&quot; y2=&quot;206&quot; stroke=&quot;#BD9B56&quot; strokeWidth=&quot;1.2&quot; /&gt;&#10;        &lt;rect x=&quot;885&quot; y=&quot;210&quot; width=&quot;260&quot; height=&quot;56&quot; rx=&quot;8&quot; fill=&quot;rgba(34,57,94,0.06)&quot; stroke=&quot;#BD9B56&quot; strokeWidth=&quot;1.5&quot; /&gt;&#10;        &lt;text x=&quot;1015&quot; y=&quot;234&quot; textAnchor=&quot;middle&quot; fontSize=&quot;14&quot; fontWeight=&quot;bold&quot; fill=&quot;#172133&quot;&gt;chunk 切片 ×99&lt;/text&gt;&#10;        &lt;text x=&quot;1015&quot; y=&quot;254&quot; textAnchor=&quot;middle&quot; fontSize=&quot;11&quot; fill=&quot;#5F5E5A&quot;&gt;pgvector 1024 维向量&lt;/text&gt;&#10;&#10;        {/* 底部关系说明 */}&#10;        &lt;rect x=&quot;300&quot; y=&quot;290&quot; width=&quot;550&quot; height=&quot;48&quot; rx=&quot;8&quot; fill=&quot;rgba(189,155,86,0.10)&quot; /&gt;&#10;        &lt;text x=&quot;575&quot; y=&quot;318&quot; textAnchor=&quot;middle&quot; fontSize=&quot;12&quot; fill=&quot;#172133&quot;&gt;repair_order → user + house + worker · fee_bill → house + user · 外键关联&lt;/text&gt;&#10;        &lt;text x=&quot;575&quot; y=&quot;334&quot; textAnchor=&quot;middle&quot; fontSize=&quot;11&quot; fill=&quot;#5F5E5A&quot;&gt;8 个 SQL 种子文件 · 一键导入可复现&lt;/text&gt;&#10;      &lt;/g&gt;&#10;    &lt;/svg&gt;&#10;  &lt;/div&gt;&#10;  &lt;div style={{ flexShrink: 0, height: 40, display: 'flex', alignItems: 'flex-end', justifyContent: 'space-between' }}&gt;&#10;    &lt;span style={{ color: '#BD9B56', fontSize: 12, letterSpacing: '0.1em' }}&gt;云溪花园 · 智慧社区&lt;/span&gt;&#10;    &lt;span style={{ color: '#a09b8c', fontSize: 12 }}&gt;05 / 15&lt;/span&gt;&#10;  &lt;/div&gt;&#10;&lt;/Slide&gt;"/>
+        <p:cNvPr id="326" name="" descr="&lt;Slide style={{ width: '1280px', height: '720px', background: '#FBFCFA', position: 'relative', padding: '32px 64px', boxSizing: 'border-box', display: 'flex', flexDirection: 'column' }}&gt;&#10;  &lt;div style={{ flexShrink: 0 }}&gt;&#10;    &lt;div style={{ color: '#BD9B56', fontSize: 13, letterSpacing: '0.25em', marginBottom: 6 }}&gt;01 · 项目规模&lt;/div&gt;&#10;    &lt;h2 style={{ fontSize: 30, fontWeight: 'bold', color: '#172133', margin: 0, lineHeight: 1.3 }}&gt;虚拟社区数据资产：云溪花园&lt;/h2&gt;&#10;    &lt;div style={{ fontSize: 14, color: '#6b7075', marginTop: 6 }}&gt;以一个社区为根，向下延伸出空间、人员、业务、知识四类数据资产&lt;/div&gt;&#10;  &lt;/div&gt;&#10;  &lt;div style={{ flex: 1, display: 'flex', alignItems: 'center', justifyContent: 'center' }}&gt;&#10;    &lt;svg width=&quot;1150&quot; height=&quot;470&quot; viewBox=&quot;0 0 1150 470&quot;&gt;&#10;      &lt;g fontFamily=&quot;Inter, sans-serif&quot;&gt;&#10;        {/* 根节点 community */}&#10;        &lt;rect x=&quot;450&quot; y=&quot;14&quot; width=&quot;250&quot; height=&quot;58&quot; rx=&quot;10&quot; fill=&quot;#172133&quot; /&gt;&#10;        &lt;text x=&quot;575&quot; y=&quot;38&quot; textAnchor=&quot;middle&quot; fontSize=&quot;15&quot; fontWeight=&quot;bold&quot; fill=&quot;#FBFCFA&quot;&gt;community 云溪花园&lt;/text&gt;&#10;        &lt;text x=&quot;575&quot; y=&quot;58&quot; textAnchor=&quot;middle&quot; fontSize=&quot;11&quot; fill=&quot;#BD9B56&quot;&gt;1 个小区 · 上海浦东张江路1268号&lt;/text&gt;&#10;        {/* 根节点连接线 */}&#10;        &lt;line x1=&quot;575&quot; y1=&quot;72&quot; x2=&quot;575&quot; y2=&quot;92&quot; stroke=&quot;#BD9B56&quot; strokeWidth=&quot;1.5&quot; /&gt;&#10;        &lt;line x1=&quot;150&quot; y1=&quot;92&quot; x2=&quot;1015&quot; y2=&quot;92&quot; stroke=&quot;#BD9B56&quot; strokeWidth=&quot;1.5&quot; /&gt;&#10;        &lt;line x1=&quot;150&quot; y1=&quot;92&quot; x2=&quot;150&quot; y2=&quot;108&quot; stroke=&quot;#BD9B56&quot; strokeWidth=&quot;1.5&quot; /&gt;&#10;        &lt;line x1=&quot;438&quot; y1=&quot;92&quot; x2=&quot;438&quot; y2=&quot;108&quot; stroke=&quot;#BD9B56&quot; strokeWidth=&quot;1.5&quot; /&gt;&#10;        &lt;line x1=&quot;726&quot; y1=&quot;92&quot; x2=&quot;726&quot; y2=&quot;108&quot; stroke=&quot;#BD9B56&quot; strokeWidth=&quot;1.5&quot; /&gt;&#10;        &lt;line x1=&quot;1015&quot; y1=&quot;92&quot; x2=&quot;1015&quot; y2=&quot;108&quot; stroke=&quot;#BD9B56&quot; strokeWidth=&quot;1.5&quot; /&gt;&#10;&#10;        {/* 分组1：空间资产 */}&#10;        &lt;text x=&quot;150&quot; y=&quot;128&quot; textAnchor=&quot;middle&quot; fontSize=&quot;12&quot; fontWeight=&quot;bold&quot; fill=&quot;#BD9B56&quot;&gt;空间资产&lt;/text&gt;&#10;        &lt;rect x=&quot;20&quot; y=&quot;138&quot; width=&quot;260&quot; height=&quot;56&quot; rx=&quot;8&quot; fill=&quot;rgba(34,57,94,0.06)&quot; stroke=&quot;#22395E&quot; strokeWidth=&quot;1.5&quot; /&gt;&#10;        &lt;text x=&quot;150&quot; y=&quot;162&quot; textAnchor=&quot;middle&quot; fontSize=&quot;14&quot; fontWeight=&quot;bold&quot; fill=&quot;#172133&quot;&gt;building 楼栋 ×8&lt;/text&gt;&#10;        &lt;text x=&quot;150&quot; y=&quot;182&quot; textAnchor=&quot;middle&quot; fontSize=&quot;11&quot; fill=&quot;#5F5E5A&quot;&gt;每栋 26 层 · 2 单元 · 4 户/层&lt;/text&gt;&#10;        &lt;line x1=&quot;150&quot; y1=&quot;194&quot; x2=&quot;150&quot; y2=&quot;206&quot; stroke=&quot;#BD9B56&quot; strokeWidth=&quot;1.2&quot; /&gt;&#10;        &lt;rect x=&quot;20&quot; y=&quot;210&quot; width=&quot;260&quot; height=&quot;56&quot; rx=&quot;8&quot; fill=&quot;rgba(34,57,94,0.06)&quot; stroke=&quot;#22395E&quot; strokeWidth=&quot;1.5&quot; /&gt;&#10;        &lt;text x=&quot;150&quot; y=&quot;234&quot; textAnchor=&quot;middle&quot; fontSize=&quot;14&quot; fontWeight=&quot;bold&quot; fill=&quot;#172133&quot;&gt;house 房屋 ×1664&lt;/text&gt;&#10;        &lt;text x=&quot;150&quot; y=&quot;254&quot; textAnchor=&quot;middle&quot; fontSize=&quot;11&quot; fill=&quot;#5F5E5A&quot;&gt;入住约 1200 户 · 800 车位&lt;/text&gt;&#10;&#10;        {/* 分组2：人员资产 */}&#10;        &lt;text x=&quot;438&quot; y=&quot;128&quot; textAnchor=&quot;middle&quot; fontSize=&quot;12&quot; fontWeight=&quot;bold&quot; fill=&quot;#BD9B56&quot;&gt;人员资产&lt;/text&gt;&#10;        &lt;rect x=&quot;308&quot; y=&quot;138&quot; width=&quot;260&quot; height=&quot;56&quot; rx=&quot;8&quot; fill=&quot;rgba(189,155,86,0.10)&quot; stroke=&quot;#BD9B56&quot; strokeWidth=&quot;1.5&quot; /&gt;&#10;        &lt;text x=&quot;438&quot; y=&quot;162&quot; textAnchor=&quot;middle&quot; fontSize=&quot;14&quot; fontWeight=&quot;bold&quot; fill=&quot;#172133&quot;&gt;user 业主 ×200&lt;/text&gt;&#10;        &lt;text x=&quot;438&quot; y=&quot;182&quot; textAnchor=&quot;middle&quot; fontSize=&quot;11&quot; fill=&quot;#5F5E5A&quot;&gt;house_binding 绑定 200 套&lt;/text&gt;&#10;        &lt;line x1=&quot;438&quot; y1=&quot;194&quot; x2=&quot;438&quot; y2=&quot;206&quot; stroke=&quot;#BD9B56&quot; strokeWidth=&quot;1.2&quot; /&gt;&#10;        &lt;rect x=&quot;308&quot; y=&quot;210&quot; width=&quot;260&quot; height=&quot;56&quot; rx=&quot;8&quot; fill=&quot;rgba(189,155,86,0.10)&quot; stroke=&quot;#BD9B56&quot; strokeWidth=&quot;1.5&quot; /&gt;&#10;        &lt;text x=&quot;438&quot; y=&quot;234&quot; textAnchor=&quot;middle&quot; fontSize=&quot;14&quot; fontWeight=&quot;bold&quot; fill=&quot;#172133&quot;&gt;worker 物业 ×75&lt;/text&gt;&#10;        &lt;text x=&quot;438&quot; y=&quot;254&quot; textAnchor=&quot;middle&quot; fontSize=&quot;11&quot; fill=&quot;#5F5E5A&quot;&gt;10 管理 / 15 维修 / 50 一线&lt;/text&gt;&#10;&#10;        {/* 分组3：业务数据 */}&#10;        &lt;text x=&quot;726&quot; y=&quot;128&quot; textAnchor=&quot;middle&quot; fontSize=&quot;12&quot; fontWeight=&quot;bold&quot; fill=&quot;#BD9B56&quot;&gt;业务数据&lt;/text&gt;&#10;        &lt;rect x=&quot;596&quot; y=&quot;138&quot; width=&quot;260&quot; height=&quot;40&quot; rx=&quot;8&quot; fill=&quot;rgba(34,57,94,0.06)&quot; stroke=&quot;#22395E&quot; strokeWidth=&quot;1.5&quot; /&gt;&#10;        &lt;text x=&quot;726&quot; y=&quot;163&quot; textAnchor=&quot;middle&quot; fontSize=&quot;13&quot; fontWeight=&quot;bold&quot; fill=&quot;#172133&quot;&gt;repair_order 工单 ×50&lt;/text&gt;&#10;        &lt;rect x=&quot;596&quot; y=&quot;186&quot; width=&quot;260&quot; height=&quot;40&quot; rx=&quot;8&quot; fill=&quot;rgba(34,57,94,0.06)&quot; stroke=&quot;#22395E&quot; strokeWidth=&quot;1.5&quot; /&gt;&#10;        &lt;text x=&quot;726&quot; y=&quot;211&quot; textAnchor=&quot;middle&quot; fontSize=&quot;13&quot; fontWeight=&quot;bold&quot; fill=&quot;#172133&quot;&gt;fee_bill 账单 ×746&lt;/text&gt;&#10;        &lt;rect x=&quot;596&quot; y=&quot;234&quot; width=&quot;260&quot; height=&quot;40&quot; rx=&quot;8&quot; fill=&quot;rgba(34,57,94,0.06)&quot; stroke=&quot;#22395E&quot; strokeWidth=&quot;1.5&quot; /&gt;&#10;        &lt;text x=&quot;726&quot; y=&quot;259&quot; textAnchor=&quot;middle&quot; fontSize=&quot;13&quot; fontWeight=&quot;bold&quot; fill=&quot;#172133&quot;&gt;notice 公告 ×24&lt;/text&gt;&#10;&#10;        {/* 分组4：知识资产 */}&#10;        &lt;text x=&quot;1015&quot; y=&quot;128&quot; textAnchor=&quot;middle&quot; fontSize=&quot;12&quot; fontWeight=&quot;bold&quot; fill=&quot;#BD9B56&quot;&gt;知识资产&lt;/text&gt;&#10;        &lt;rect x=&quot;885&quot; y=&quot;138&quot; width=&quot;260&quot; height=&quot;56&quot; rx=&quot;8&quot; fill=&quot;#22395E&quot; /&gt;&#10;        &lt;text x=&quot;1015&quot; y=&quot;162&quot; textAnchor=&quot;middle&quot; fontSize=&quot;14&quot; fontWeight=&quot;bold&quot; fill=&quot;#FBFCFA&quot;&gt;knowledge 文档 ×22&lt;/text&gt;&#10;        &lt;text x=&quot;1015&quot; y=&quot;182&quot; textAnchor=&quot;middle&quot; fontSize=&quot;11&quot; fill=&quot;#BD9B56&quot;&gt;7 个分类（规约/装修/停车…）&lt;/text&gt;&#10;        &lt;line x1=&quot;1015&quot; y1=&quot;194&quot; x2=&quot;1015&quot; y2=&quot;206&quot; stroke=&quot;#BD9B56&quot; strokeWidth=&quot;1.2&quot; /&gt;&#10;        &lt;rect x=&quot;885&quot; y=&quot;210&quot; width=&quot;260&quot; height=&quot;56&quot; rx=&quot;8&quot; fill=&quot;rgba(34,57,94,0.06)&quot; stroke=&quot;#BD9B56&quot; strokeWidth=&quot;1.5&quot; /&gt;&#10;        &lt;text x=&quot;1015&quot; y=&quot;234&quot; textAnchor=&quot;middle&quot; fontSize=&quot;14&quot; fontWeight=&quot;bold&quot; fill=&quot;#172133&quot;&gt;chunk 切片 ×99&lt;/text&gt;&#10;        &lt;text x=&quot;1015&quot; y=&quot;254&quot; textAnchor=&quot;middle&quot; fontSize=&quot;11&quot; fill=&quot;#5F5E5A&quot;&gt;pgvector 1024 维向量&lt;/text&gt;&#10;&#10;        {/* 底部关系说明 */}&#10;        &lt;rect x=&quot;300&quot; y=&quot;290&quot; width=&quot;550&quot; height=&quot;48&quot; rx=&quot;8&quot; fill=&quot;rgba(189,155,86,0.10)&quot; /&gt;&#10;        &lt;text x=&quot;575&quot; y=&quot;318&quot; textAnchor=&quot;middle&quot; fontSize=&quot;12&quot; fill=&quot;#172133&quot;&gt;repair_order → user + house + worker · fee_bill → house + user · 外键关联&lt;/text&gt;&#10;        &lt;text x=&quot;575&quot; y=&quot;334&quot; textAnchor=&quot;middle&quot; fontSize=&quot;11&quot; fill=&quot;#5F5E5A&quot;&gt;8 个 SQL 种子文件 · 一键导入可复现&lt;/text&gt;&#10;      &lt;/g&gt;&#10;    &lt;/svg&gt;&#10;  &lt;/div&gt;&#10;  &lt;div style={{ flexShrink: 0, height: 40, display: 'flex', alignItems: 'flex-end', justifyContent: 'space-between' }}&gt;&#10;    &lt;span style={{ color: '#BD9B56', fontSize: 12, letterSpacing: '0.1em' }}&gt;云溪花园 · 智慧社区&lt;/span&gt;&#10;    &lt;span style={{ color: '#a09b8c', fontSize: 12 }}&gt;05 / 15&lt;/span&gt;&#10;  &lt;/div&gt;&#10;&lt;/Slide&gt;"/>
         <p:cNvGrpSpPr/>
         <p:nvPr/>
       </p:nvGrpSpPr>
@@ -14537,7 +15324,7 @@
       </p:grpSpPr>
       <p:sp>
         <p:nvSpPr>
-          <p:cNvPr id="308" name=""/>
+          <p:cNvPr id="327" name=""/>
           <p:cNvSpPr/>
           <p:nvPr/>
         </p:nvSpPr>
@@ -14561,7 +15348,7 @@
       </p:sp>
       <p:sp>
         <p:nvSpPr>
-          <p:cNvPr id="309" name="" descr="{&quot;isTemplate&quot;:true,&quot;type&quot;:&quot;text&quot;}"/>
+          <p:cNvPr id="328" name="" descr="{&quot;isTemplate&quot;:true,&quot;type&quot;:&quot;text&quot;}"/>
           <p:cNvSpPr txBox="1"/>
           <p:nvPr/>
         </p:nvSpPr>
@@ -14606,7 +15393,7 @@
       </p:sp>
       <p:sp>
         <p:nvSpPr>
-          <p:cNvPr id="310" name="" descr="{&quot;isTemplate&quot;:true,&quot;type&quot;:&quot;text&quot;}"/>
+          <p:cNvPr id="329" name="" descr="{&quot;isTemplate&quot;:true,&quot;type&quot;:&quot;text&quot;}"/>
           <p:cNvSpPr txBox="1"/>
           <p:nvPr/>
         </p:nvSpPr>
@@ -14641,7 +15428,7 @@
       </p:sp>
       <p:sp>
         <p:nvSpPr>
-          <p:cNvPr id="311" name="" descr="{&quot;isTemplate&quot;:true,&quot;type&quot;:&quot;text&quot;}"/>
+          <p:cNvPr id="330" name="" descr="{&quot;isTemplate&quot;:true,&quot;type&quot;:&quot;text&quot;}"/>
           <p:cNvSpPr txBox="1"/>
           <p:nvPr/>
         </p:nvSpPr>
@@ -14676,7 +15463,7 @@
       </p:sp>
       <p:pic>
         <p:nvPicPr>
-          <p:cNvPr id="312" name=""/>
+          <p:cNvPr id="331" name=""/>
           <p:cNvPicPr>
             <a:picLocks noChangeAspect="1"/>
           </p:cNvPicPr>
@@ -14707,7 +15494,7 @@
       </p:pic>
       <p:sp>
         <p:nvSpPr>
-          <p:cNvPr id="313" name="" descr="{&quot;isTemplate&quot;:true,&quot;type&quot;:&quot;text&quot;}"/>
+          <p:cNvPr id="332" name="" descr="{&quot;isTemplate&quot;:true,&quot;type&quot;:&quot;text&quot;}"/>
           <p:cNvSpPr txBox="1"/>
           <p:nvPr/>
         </p:nvSpPr>
@@ -14762,7 +15549,7 @@
       </p:sp>
       <p:sp>
         <p:nvSpPr>
-          <p:cNvPr id="314" name="" descr="{&quot;isTemplate&quot;:true,&quot;type&quot;:&quot;text&quot;}"/>
+          <p:cNvPr id="333" name="" descr="{&quot;isTemplate&quot;:true,&quot;type&quot;:&quot;text&quot;}"/>
           <p:cNvSpPr txBox="1"/>
           <p:nvPr/>
         </p:nvSpPr>
@@ -14805,7 +15592,7 @@
   <p:cSld>
     <p:spTree>
       <p:nvGrpSpPr>
-        <p:cNvPr id="315" name="" descr="&lt;Slide style={{ width: '1280px', height: '720px', background: '#FBFCFA', position: 'relative', padding: '40px 64px', boxSizing: 'border-box', display: 'flex', flexDirection: 'column' }}&gt;&#10;  &lt;div style={{ flexShrink: 0 }}&gt;&#10;    &lt;div style={{ color: '#BD9B56', fontSize: 13, letterSpacing: '0.25em', marginBottom: 8 }}&gt;02 · 技术构建过程&lt;/div&gt;&#10;    &lt;h2 style={{ fontSize: 30, fontWeight: 'bold', color: '#172133', margin: 0, lineHeight: 1.3 }}&gt;技术架构：六层分离的 AI Native 系统&lt;/h2&gt;&#10;  &lt;/div&gt;&#10;  &lt;div style={{ flex: 1, display: 'flex', alignItems: 'center', gap: 32 }}&gt;&#10;    &lt;div style={{ flex: '0 0 620px', background: '#fff', borderRadius: 12, padding: '22px 24px', boxShadow: '0 6px 24px rgba(23,33,51,0.08)' }}&gt;&#10;      &lt;svg width=&quot;572&quot; height=&quot;470&quot; viewBox=&quot;0 0 572 470&quot;&gt;&#10;        &lt;defs&gt;&#10;          &lt;marker id=&quot;ar6&quot; viewBox=&quot;0 0 10 10&quot; refX=&quot;9&quot; refY=&quot;5&quot; markerWidth=&quot;6&quot; markerHeight=&quot;6&quot; orient=&quot;auto&quot;&gt;&#10;            &lt;path d=&quot;M0 0L10 5L0 10z&quot; fill=&quot;#22395E&quot; /&gt;&#10;          &lt;/marker&gt;&#10;        &lt;/defs&gt;&#10;        &lt;g fontFamily=&quot;Inter, sans-serif&quot;&gt;&#10;          &lt;rect x=&quot;36&quot; y=&quot;18&quot; width=&quot;500&quot; height=&quot;52&quot; rx=&quot;6&quot; fill=&quot;#F5F8F8&quot; stroke=&quot;#22395E&quot; strokeWidth=&quot;1.5&quot; /&gt;&#10;          &lt;text x=&quot;286&quot; y=&quot;49&quot; textAnchor=&quot;middle&quot; fontSize=&quot;14&quot; fontWeight=&quot;bold&quot; fill=&quot;#172133&quot;&gt;客户端 · 业主 / 物业 / 维修 三端&lt;/text&gt;&#10;          &lt;line x1=&quot;286&quot; y1=&quot;70&quot; x2=&quot;286&quot; y2=&quot;92&quot; stroke=&quot;#22395E&quot; strokeWidth=&quot;1.2&quot; markerEnd=&quot;url(#ar6)&quot; /&gt;&#10;          &lt;rect x=&quot;36&quot; y=&quot;96&quot; width=&quot;500&quot; height=&quot;48&quot; rx=&quot;6&quot; fill=&quot;#F5F8F8&quot; stroke=&quot;#22395E&quot; strokeWidth=&quot;1.5&quot; /&gt;&#10;          &lt;text x=&quot;286&quot; y=&quot;125&quot; textAnchor=&quot;middle&quot; fontSize=&quot;14&quot; fontWeight=&quot;bold&quot; fill=&quot;#172133&quot;&gt;API 网关 · FastAPI&lt;/text&gt;&#10;          &lt;line x1=&quot;286&quot; y1=&quot;144&quot; x2=&quot;286&quot; y2=&quot;166&quot; stroke=&quot;#22395E&quot; strokeWidth=&quot;1.2&quot; markerEnd=&quot;url(#ar6)&quot; /&gt;&#10;          &lt;rect x=&quot;36&quot; y=&quot;170&quot; width=&quot;500&quot; height=&quot;70&quot; rx=&quot;6&quot; fill=&quot;rgba(34,57,94,0.08)&quot; stroke=&quot;#22395E&quot; strokeWidth=&quot;2&quot; /&gt;&#10;          &lt;text x=&quot;64&quot; y=&quot;196&quot; fontSize=&quot;13&quot; fontWeight=&quot;bold&quot; fill=&quot;#BD9B56&quot;&gt;AI Agent 层&lt;/text&gt;&#10;          &lt;text x=&quot;286&quot; y=&quot;218&quot; textAnchor=&quot;middle&quot; fontSize=&quot;14&quot; fontWeight=&quot;bold&quot; fill=&quot;#172133&quot;&gt;Router Agent + 领域 Agent + 工具调用&lt;/text&gt;&#10;          &lt;line x1=&quot;286&quot; y1=&quot;240&quot; x2=&quot;286&quot; y2=&quot;262&quot; stroke=&quot;#22395E&quot; strokeWidth=&quot;1.2&quot; markerEnd=&quot;url(#ar6)&quot; /&gt;&#10;          &lt;rect x=&quot;36&quot; y=&quot;266&quot; width=&quot;500&quot; height=&quot;56&quot; rx=&quot;6&quot; fill=&quot;rgba(189,155,86,0.08)&quot; stroke=&quot;#BD9B56&quot; strokeWidth=&quot;1.5&quot; /&gt;&#10;          &lt;text x=&quot;64&quot; y=&quot;290&quot; fontSize=&quot;13&quot; fontWeight=&quot;bold&quot; fill=&quot;#BD9B56&quot;&gt;业务服务层&lt;/text&gt;&#10;          &lt;text x=&quot;286&quot; y=&quot;312&quot; textAnchor=&quot;middle&quot; fontSize=&quot;14&quot; fontWeight=&quot;bold&quot; fill=&quot;#172133&quot;&gt;工单 · 费用 · 巡检 · 通知 · 反馈 · 知识库&lt;/text&gt;&#10;          &lt;line x1=&quot;286&quot; y1=&quot;322&quot; x2=&quot;286&quot; y2=&quot;344&quot; stroke=&quot;#22395E&quot; strokeWidth=&quot;1.2&quot; markerEnd=&quot;url(#ar6)&quot; /&gt;&#10;          &lt;rect x=&quot;36&quot; y=&quot;348&quot; width=&quot;240&quot; height=&quot;60&quot; rx=&quot;6&quot; fill=&quot;#F5F8F8&quot; stroke=&quot;#22395E&quot; strokeWidth=&quot;1.5&quot; /&gt;&#10;          &lt;text x=&quot;156&quot; y=&quot;374&quot; textAnchor=&quot;middle&quot; fontSize=&quot;13&quot; fontWeight=&quot;bold&quot; fill=&quot;#BD9B56&quot;&gt;PostgreSQL + pgvector&lt;/text&gt;&#10;          &lt;text x=&quot;156&quot; y=&quot;394&quot; textAnchor=&quot;middle&quot; fontSize=&quot;11&quot; fill=&quot;#5F5E5A&quot;&gt;事务数据 + 向量检索&lt;/text&gt;&#10;          &lt;rect x=&quot;296&quot; y=&quot;348&quot; width=&quot;240&quot; height=&quot;60&quot; rx=&quot;6&quot; fill=&quot;#F5F8F8&quot; stroke=&quot;#22395E&quot; strokeWidth=&quot;1.5&quot; /&gt;&#10;          &lt;text x=&quot;416&quot; y=&quot;374&quot; textAnchor=&quot;middle&quot; fontSize=&quot;13&quot; fontWeight=&quot;bold&quot; fill=&quot;#BD9B56&quot;&gt;Redis + 智谱 GLM&lt;/text&gt;&#10;          &lt;text x=&quot;416&quot; y=&quot;394&quot; textAnchor=&quot;middle&quot; fontSize=&quot;11&quot; fill=&quot;#5F5E5A&quot;&gt;缓存 · LLM · embedding&lt;/text&gt;&#10;        &lt;/g&gt;&#10;      &lt;/svg&gt;&#10;    &lt;/div&gt;&#10;    &lt;div style={{ flex: 1, display: 'flex', flexDirection: 'column', gap: 18 }}&gt;&#10;      &lt;div&gt;&#10;        &lt;div style={{ fontSize: 14, color: '#BD9B56', fontWeight: 'bold', letterSpacing: '0.1em', marginBottom: 6 }}&gt;1.  Agent 与业务解耦&lt;/div&gt;&#10;        &lt;p style={{ fontSize: 14, color: '#5F5E5A', margin: 0, lineHeight: 1.65 }}&gt;AI Agent 只负责理解意图、编排工具，不直接操作数据库，严守 Agent → Tool → Service → Repository → Database 分层，杜绝 LLM 直连 SQL 的风险。&lt;/p&gt;&#10;      &lt;/div&gt;&#10;      &lt;div&gt;&#10;        &lt;div style={{ fontSize: 14, color: '#BD9B56', fontWeight: 'bold', letterSpacing: '0.1em', marginBottom: 6 }}&gt;2.  pgvector 一库双角色&lt;/div&gt;&#10;        &lt;p style={{ fontSize: 14, color: '#5F5E5A', margin: 0, lineHeight: 1.65 }}&gt;PostgreSQL 同时承载业务数据（工单、费用）和向量数据（知识切片），无需额外向量数据库，降低部署与运维复杂度。&lt;/p&gt;&#10;      &lt;/div&gt;&#10;      &lt;div&gt;&#10;        &lt;div style={{ fontSize: 14, color: '#BD9B56', fontWeight: 'bold', letterSpacing: '0.1em', marginBottom: 6 }}&gt;3.  可观测可评估&lt;/div&gt;&#10;        &lt;p style={{ fontSize: 14, color: '#5F5E5A', margin: 0, lineHeight: 1.65 }}&gt;每次 AI 对话的意图、工具调用、结果全程记录，可回放、可追踪，支撑后续的量化评估与持续迭代。&lt;/p&gt;&#10;      &lt;/div&gt;&#10;    &lt;/div&gt;&#10;  &lt;/div&gt;&#10;  &lt;div style={{ flexShrink: 0, height: 40, display: 'flex', alignItems: 'flex-end', justifyContent: 'space-between' }}&gt;&#10;    &lt;span style={{ color: '#BD9B56', fontSize: 12, letterSpacing: '0.1em' }}&gt;云溪花园 · 智慧社区&lt;/span&gt;&#10;    &lt;span style={{ color: '#a09b8c', fontSize: 12 }}&gt;06 / 15&lt;/span&gt;&#10;  &lt;/div&gt;&#10;&lt;/Slide&gt;"/>
+        <p:cNvPr id="334" name="" descr="&lt;Slide style={{ width: '1280px', height: '720px', background: '#FBFCFA', position: 'relative', padding: '40px 64px', boxSizing: 'border-box', display: 'flex', flexDirection: 'column' }}&gt;&#10;  &lt;div style={{ flexShrink: 0 }}&gt;&#10;    &lt;div style={{ color: '#BD9B56', fontSize: 13, letterSpacing: '0.25em', marginBottom: 8 }}&gt;02 · 技术构建过程&lt;/div&gt;&#10;    &lt;h2 style={{ fontSize: 30, fontWeight: 'bold', color: '#172133', margin: 0, lineHeight: 1.3 }}&gt;技术架构：六层分离的 AI Native 系统&lt;/h2&gt;&#10;  &lt;/div&gt;&#10;  &lt;div style={{ flex: 1, display: 'flex', alignItems: 'center', gap: 32 }}&gt;&#10;    &lt;div style={{ flex: '0 0 620px', background: '#fff', borderRadius: 12, padding: '22px 24px', boxShadow: '0 6px 24px rgba(23,33,51,0.08)' }}&gt;&#10;      &lt;svg width=&quot;572&quot; height=&quot;470&quot; viewBox=&quot;0 0 572 470&quot;&gt;&#10;        &lt;defs&gt;&#10;          &lt;marker id=&quot;ar6&quot; viewBox=&quot;0 0 10 10&quot; refX=&quot;9&quot; refY=&quot;5&quot; markerWidth=&quot;6&quot; markerHeight=&quot;6&quot; orient=&quot;auto&quot;&gt;&#10;            &lt;path d=&quot;M0 0L10 5L0 10z&quot; fill=&quot;#22395E&quot; /&gt;&#10;          &lt;/marker&gt;&#10;        &lt;/defs&gt;&#10;        &lt;g fontFamily=&quot;Inter, sans-serif&quot;&gt;&#10;          &lt;rect x=&quot;36&quot; y=&quot;18&quot; width=&quot;500&quot; height=&quot;52&quot; rx=&quot;6&quot; fill=&quot;#F5F8F8&quot; stroke=&quot;#22395E&quot; strokeWidth=&quot;1.5&quot; /&gt;&#10;          &lt;text x=&quot;286&quot; y=&quot;49&quot; textAnchor=&quot;middle&quot; fontSize=&quot;14&quot; fontWeight=&quot;bold&quot; fill=&quot;#172133&quot;&gt;客户端 · 业主 / 物业 / 维修 三端&lt;/text&gt;&#10;          &lt;line x1=&quot;286&quot; y1=&quot;70&quot; x2=&quot;286&quot; y2=&quot;92&quot; stroke=&quot;#22395E&quot; strokeWidth=&quot;1.2&quot; markerEnd=&quot;url(#ar6)&quot; /&gt;&#10;          &lt;rect x=&quot;36&quot; y=&quot;96&quot; width=&quot;500&quot; height=&quot;48&quot; rx=&quot;6&quot; fill=&quot;#F5F8F8&quot; stroke=&quot;#22395E&quot; strokeWidth=&quot;1.5&quot; /&gt;&#10;          &lt;text x=&quot;286&quot; y=&quot;125&quot; textAnchor=&quot;middle&quot; fontSize=&quot;14&quot; fontWeight=&quot;bold&quot; fill=&quot;#172133&quot;&gt;API 网关 · FastAPI&lt;/text&gt;&#10;          &lt;line x1=&quot;286&quot; y1=&quot;144&quot; x2=&quot;286&quot; y2=&quot;166&quot; stroke=&quot;#22395E&quot; strokeWidth=&quot;1.2&quot; markerEnd=&quot;url(#ar6)&quot; /&gt;&#10;          &lt;rect x=&quot;36&quot; y=&quot;170&quot; width=&quot;500&quot; height=&quot;70&quot; rx=&quot;6&quot; fill=&quot;rgba(34,57,94,0.08)&quot; stroke=&quot;#22395E&quot; strokeWidth=&quot;2&quot; /&gt;&#10;          &lt;text x=&quot;64&quot; y=&quot;196&quot; fontSize=&quot;13&quot; fontWeight=&quot;bold&quot; fill=&quot;#BD9B56&quot;&gt;AI Agent 层&lt;/text&gt;&#10;          &lt;text x=&quot;286&quot; y=&quot;218&quot; textAnchor=&quot;middle&quot; fontSize=&quot;14&quot; fontWeight=&quot;bold&quot; fill=&quot;#172133&quot;&gt;Router Agent + 领域 Agent + 工具调用&lt;/text&gt;&#10;          &lt;line x1=&quot;286&quot; y1=&quot;240&quot; x2=&quot;286&quot; y2=&quot;262&quot; stroke=&quot;#22395E&quot; strokeWidth=&quot;1.2&quot; markerEnd=&quot;url(#ar6)&quot; /&gt;&#10;          &lt;rect x=&quot;36&quot; y=&quot;266&quot; width=&quot;500&quot; height=&quot;56&quot; rx=&quot;6&quot; fill=&quot;rgba(189,155,86,0.08)&quot; stroke=&quot;#BD9B56&quot; strokeWidth=&quot;1.5&quot; /&gt;&#10;          &lt;text x=&quot;64&quot; y=&quot;290&quot; fontSize=&quot;13&quot; fontWeight=&quot;bold&quot; fill=&quot;#BD9B56&quot;&gt;业务服务层&lt;/text&gt;&#10;          &lt;text x=&quot;286&quot; y=&quot;312&quot; textAnchor=&quot;middle&quot; fontSize=&quot;14&quot; fontWeight=&quot;bold&quot; fill=&quot;#172133&quot;&gt;工单 · 费用 · 巡检 · 通知 · 反馈 · 知识库&lt;/text&gt;&#10;          &lt;line x1=&quot;286&quot; y1=&quot;322&quot; x2=&quot;286&quot; y2=&quot;344&quot; stroke=&quot;#22395E&quot; strokeWidth=&quot;1.2&quot; markerEnd=&quot;url(#ar6)&quot; /&gt;&#10;          &lt;rect x=&quot;36&quot; y=&quot;348&quot; width=&quot;240&quot; height=&quot;60&quot; rx=&quot;6&quot; fill=&quot;#F5F8F8&quot; stroke=&quot;#22395E&quot; strokeWidth=&quot;1.5&quot; /&gt;&#10;          &lt;text x=&quot;156&quot; y=&quot;374&quot; textAnchor=&quot;middle&quot; fontSize=&quot;13&quot; fontWeight=&quot;bold&quot; fill=&quot;#BD9B56&quot;&gt;PostgreSQL + pgvector&lt;/text&gt;&#10;          &lt;text x=&quot;156&quot; y=&quot;394&quot; textAnchor=&quot;middle&quot; fontSize=&quot;11&quot; fill=&quot;#5F5E5A&quot;&gt;事务数据 + 向量检索&lt;/text&gt;&#10;          &lt;rect x=&quot;296&quot; y=&quot;348&quot; width=&quot;240&quot; height=&quot;60&quot; rx=&quot;6&quot; fill=&quot;#F5F8F8&quot; stroke=&quot;#22395E&quot; strokeWidth=&quot;1.5&quot; /&gt;&#10;          &lt;text x=&quot;416&quot; y=&quot;374&quot; textAnchor=&quot;middle&quot; fontSize=&quot;13&quot; fontWeight=&quot;bold&quot; fill=&quot;#BD9B56&quot;&gt;Redis + 智谱 GLM&lt;/text&gt;&#10;          &lt;text x=&quot;416&quot; y=&quot;394&quot; textAnchor=&quot;middle&quot; fontSize=&quot;11&quot; fill=&quot;#5F5E5A&quot;&gt;缓存 · LLM · embedding&lt;/text&gt;&#10;        &lt;/g&gt;&#10;      &lt;/svg&gt;&#10;    &lt;/div&gt;&#10;    &lt;div style={{ flex: 1, display: 'flex', flexDirection: 'column', gap: 18 }}&gt;&#10;      &lt;div&gt;&#10;        &lt;div style={{ fontSize: 14, color: '#BD9B56', fontWeight: 'bold', letterSpacing: '0.1em', marginBottom: 6 }}&gt;1.  Agent 与业务解耦&lt;/div&gt;&#10;        &lt;p style={{ fontSize: 14, color: '#5F5E5A', margin: 0, lineHeight: 1.65 }}&gt;AI Agent 只负责理解意图、编排工具，不直接操作数据库，严守 Agent → Tool → Service → Repository → Database 分层，杜绝 LLM 直连 SQL 的风险。&lt;/p&gt;&#10;      &lt;/div&gt;&#10;      &lt;div&gt;&#10;        &lt;div style={{ fontSize: 14, color: '#BD9B56', fontWeight: 'bold', letterSpacing: '0.1em', marginBottom: 6 }}&gt;2.  pgvector 一库双角色&lt;/div&gt;&#10;        &lt;p style={{ fontSize: 14, color: '#5F5E5A', margin: 0, lineHeight: 1.65 }}&gt;PostgreSQL 同时承载业务数据（工单、费用）和向量数据（知识切片），无需额外向量数据库，降低部署与运维复杂度。&lt;/p&gt;&#10;      &lt;/div&gt;&#10;      &lt;div&gt;&#10;        &lt;div style={{ fontSize: 14, color: '#BD9B56', fontWeight: 'bold', letterSpacing: '0.1em', marginBottom: 6 }}&gt;3.  可观测可评估&lt;/div&gt;&#10;        &lt;p style={{ fontSize: 14, color: '#5F5E5A', margin: 0, lineHeight: 1.65 }}&gt;每次 AI 对话的意图、工具调用、结果全程记录，可回放、可追踪，支撑后续的量化评估与持续迭代。&lt;/p&gt;&#10;      &lt;/div&gt;&#10;    &lt;/div&gt;&#10;  &lt;/div&gt;&#10;  &lt;div style={{ flexShrink: 0, height: 40, display: 'flex', alignItems: 'flex-end', justifyContent: 'space-between' }}&gt;&#10;    &lt;span style={{ color: '#BD9B56', fontSize: 12, letterSpacing: '0.1em' }}&gt;云溪花园 · 智慧社区&lt;/span&gt;&#10;    &lt;span style={{ color: '#a09b8c', fontSize: 12 }}&gt;06 / 15&lt;/span&gt;&#10;  &lt;/div&gt;&#10;&lt;/Slide&gt;"/>
         <p:cNvGrpSpPr/>
         <p:nvPr/>
       </p:nvGrpSpPr>
@@ -14819,7 +15606,7 @@
       </p:grpSpPr>
       <p:sp>
         <p:nvSpPr>
-          <p:cNvPr id="316" name=""/>
+          <p:cNvPr id="335" name=""/>
           <p:cNvSpPr/>
           <p:nvPr/>
         </p:nvSpPr>
@@ -14843,7 +15630,7 @@
       </p:sp>
       <p:sp>
         <p:nvSpPr>
-          <p:cNvPr id="317" name="" descr="{&quot;isTemplate&quot;:true,&quot;type&quot;:&quot;text&quot;}"/>
+          <p:cNvPr id="336" name="" descr="{&quot;isTemplate&quot;:true,&quot;type&quot;:&quot;text&quot;}"/>
           <p:cNvSpPr txBox="1"/>
           <p:nvPr/>
         </p:nvSpPr>
@@ -14888,7 +15675,7 @@
       </p:sp>
       <p:sp>
         <p:nvSpPr>
-          <p:cNvPr id="318" name="" descr="{&quot;isTemplate&quot;:true,&quot;type&quot;:&quot;text&quot;}"/>
+          <p:cNvPr id="337" name="" descr="{&quot;isTemplate&quot;:true,&quot;type&quot;:&quot;text&quot;}"/>
           <p:cNvSpPr txBox="1"/>
           <p:nvPr/>
         </p:nvSpPr>
@@ -14943,7 +15730,7 @@
       </p:sp>
       <p:sp>
         <p:nvSpPr>
-          <p:cNvPr id="319" name=""/>
+          <p:cNvPr id="338" name=""/>
           <p:cNvSpPr/>
           <p:nvPr/>
         </p:nvSpPr>
@@ -14976,7 +15763,7 @@
       </p:sp>
       <p:pic>
         <p:nvPicPr>
-          <p:cNvPr id="320" name=""/>
+          <p:cNvPr id="339" name=""/>
           <p:cNvPicPr>
             <a:picLocks noChangeAspect="1"/>
           </p:cNvPicPr>
@@ -15007,7 +15794,7 @@
       </p:pic>
       <p:sp>
         <p:nvSpPr>
-          <p:cNvPr id="321" name="" descr="{&quot;isTemplate&quot;:true,&quot;type&quot;:&quot;text&quot;}"/>
+          <p:cNvPr id="340" name="" descr="{&quot;isTemplate&quot;:true,&quot;type&quot;:&quot;text&quot;}"/>
           <p:cNvSpPr txBox="1"/>
           <p:nvPr/>
         </p:nvSpPr>
@@ -15052,7 +15839,7 @@
       </p:sp>
       <p:sp>
         <p:nvSpPr>
-          <p:cNvPr id="322" name="" descr="{&quot;isTemplate&quot;:true,&quot;type&quot;:&quot;text&quot;}"/>
+          <p:cNvPr id="341" name="" descr="{&quot;isTemplate&quot;:true,&quot;type&quot;:&quot;text&quot;}"/>
           <p:cNvSpPr txBox="1"/>
           <p:nvPr/>
         </p:nvSpPr>
@@ -15159,7 +15946,7 @@
       </p:sp>
       <p:sp>
         <p:nvSpPr>
-          <p:cNvPr id="323" name="" descr="{&quot;isTemplate&quot;:true,&quot;type&quot;:&quot;text&quot;}"/>
+          <p:cNvPr id="342" name="" descr="{&quot;isTemplate&quot;:true,&quot;type&quot;:&quot;text&quot;}"/>
           <p:cNvSpPr txBox="1"/>
           <p:nvPr/>
         </p:nvSpPr>
@@ -15204,7 +15991,7 @@
       </p:sp>
       <p:sp>
         <p:nvSpPr>
-          <p:cNvPr id="324" name="" descr="{&quot;isTemplate&quot;:true,&quot;type&quot;:&quot;text&quot;}"/>
+          <p:cNvPr id="343" name="" descr="{&quot;isTemplate&quot;:true,&quot;type&quot;:&quot;text&quot;}"/>
           <p:cNvSpPr txBox="1"/>
           <p:nvPr/>
         </p:nvSpPr>
@@ -15251,7 +16038,7 @@
       </p:sp>
       <p:sp>
         <p:nvSpPr>
-          <p:cNvPr id="325" name="" descr="{&quot;isTemplate&quot;:true,&quot;type&quot;:&quot;text&quot;}"/>
+          <p:cNvPr id="344" name="" descr="{&quot;isTemplate&quot;:true,&quot;type&quot;:&quot;text&quot;}"/>
           <p:cNvSpPr txBox="1"/>
           <p:nvPr/>
         </p:nvSpPr>
@@ -15296,7 +16083,7 @@
       </p:sp>
       <p:sp>
         <p:nvSpPr>
-          <p:cNvPr id="326" name="" descr="{&quot;isTemplate&quot;:true,&quot;type&quot;:&quot;text&quot;}"/>
+          <p:cNvPr id="345" name="" descr="{&quot;isTemplate&quot;:true,&quot;type&quot;:&quot;text&quot;}"/>
           <p:cNvSpPr txBox="1"/>
           <p:nvPr/>
         </p:nvSpPr>
@@ -15353,7 +16140,7 @@
       </p:sp>
       <p:sp>
         <p:nvSpPr>
-          <p:cNvPr id="327" name="" descr="{&quot;isTemplate&quot;:true,&quot;type&quot;:&quot;text&quot;}"/>
+          <p:cNvPr id="346" name="" descr="{&quot;isTemplate&quot;:true,&quot;type&quot;:&quot;text&quot;}"/>
           <p:cNvSpPr txBox="1"/>
           <p:nvPr/>
         </p:nvSpPr>
@@ -15408,7 +16195,7 @@
       </p:sp>
       <p:sp>
         <p:nvSpPr>
-          <p:cNvPr id="328" name="" descr="{&quot;isTemplate&quot;:true,&quot;type&quot;:&quot;text&quot;}"/>
+          <p:cNvPr id="347" name="" descr="{&quot;isTemplate&quot;:true,&quot;type&quot;:&quot;text&quot;}"/>
           <p:cNvSpPr txBox="1"/>
           <p:nvPr/>
         </p:nvSpPr>
@@ -15451,7 +16238,7 @@
   <p:cSld>
     <p:spTree>
       <p:nvGrpSpPr>
-        <p:cNvPr id="329" name="" descr="&lt;Slide style={{ width: '1280px', height: '720px', background: '#FBFCFA', position: 'relative', padding: '32px 64px', boxSizing: 'border-box', display: 'flex', flexDirection: 'column' }}&gt;&#10;  &lt;div style={{ flexShrink: 0 }}&gt;&#10;    &lt;div style={{ color: '#BD9B56', fontSize: 13, letterSpacing: '0.25em', marginBottom: 6 }}&gt;02 · 技术构建过程&lt;/div&gt;&#10;    &lt;h2 style={{ fontSize: 30, fontWeight: 'bold', color: '#172133', margin: 0, lineHeight: 1.3 }}&gt;数据库设计：15+ 张表承载整个社区&lt;/h2&gt;&#10;    &lt;div style={{ fontSize: 14, color: '#6b7075', marginTop: 6 }}&gt;数据库是系统地基，通过外键建立完整 ER 关系，覆盖社区到知识库的全部实体&lt;/div&gt;&#10;  &lt;/div&gt;&#10;  &lt;div style={{ flex: 1, display: 'flex', alignItems: 'center', minHeight: 0, gap: 28 }}&gt;&#10;    &lt;div style={{ flex: '0 0 320px', background: 'linear-gradient(135deg, #172133 0%, #22395E 100%)', borderRadius: 12, padding: '24px 24px', color: '#FBFCFA' }}&gt;&#10;      &lt;div style={{ color: '#BD9B56', fontSize: 12, letterSpacing: '0.25em', marginBottom: 12 }}&gt;CORE ENTITIES&lt;/div&gt;&#10;      &lt;div style={{ fontSize: 14, color: 'rgba(251,252,250,0.9)', lineHeight: 1.9 }}&gt;&#10;        community 社区&lt;br/&gt;&#10;        building 楼栋（8）&lt;br/&gt;&#10;        house 房屋（1664）&lt;br/&gt;&#10;        user 用户（275）&lt;br/&gt;&#10;        house_binding 房屋绑定&lt;br/&gt;&#10;        worker 物业人员（75）&lt;br/&gt;&#10;        repair_order 工单&lt;br/&gt;&#10;        fee_bill 账单（746）&lt;br/&gt;&#10;        notice 公告（24）&lt;br/&gt;&#10;        conversation / message&lt;br/&gt;&#10;        agent_trace 追踪&lt;br/&gt;&#10;        &lt;span style={{ color: '#BD9B56' }}&gt;knowledge_document / chunk&lt;/span&gt;&#10;      &lt;/div&gt;&#10;    &lt;/div&gt;&#10;    &lt;div style={{ flex: 1, background: '#fff', borderRadius: 12, padding: '20px 22px', boxShadow: '0 6px 24px rgba(23,33,51,0.08)' }}&gt;&#10;      &lt;svg width=&quot;560&quot; height=&quot;470&quot; viewBox=&quot;0 0 560 470&quot;&gt;&#10;        &lt;g fontFamily=&quot;Inter, sans-serif&quot;&gt;&#10;          &lt;rect x=&quot;14&quot; y=&quot;14&quot; width=&quot;150&quot; height=&quot;50&quot; rx=&quot;6&quot; fill=&quot;rgba(34,57,94,0.08)&quot; stroke=&quot;#22395E&quot; strokeWidth=&quot;1.5&quot; /&gt;&#10;          &lt;text x=&quot;89&quot; y=&quot;44&quot; textAnchor=&quot;middle&quot; fontSize=&quot;14&quot; fontWeight=&quot;bold&quot; fill=&quot;#172133&quot;&gt;community&lt;/text&gt;&#10;          &lt;line x1=&quot;164&quot; y1=&quot;39&quot; x2=&quot;206&quot; y2=&quot;39&quot; stroke=&quot;#BD9B56&quot; strokeWidth=&quot;1.5&quot; /&gt;&#10;          &lt;rect x=&quot;210&quot; y=&quot;14&quot; width=&quot;150&quot; height=&quot;50&quot; rx=&quot;6&quot; fill=&quot;rgba(34,57,94,0.08)&quot; stroke=&quot;#22395E&quot; strokeWidth=&quot;1.5&quot; /&gt;&#10;          &lt;text x=&quot;285&quot; y=&quot;44&quot; textAnchor=&quot;middle&quot; fontSize=&quot;14&quot; fontWeight=&quot;bold&quot; fill=&quot;#172133&quot;&gt;building ×8&lt;/text&gt;&#10;          &lt;line x1=&quot;360&quot; y1=&quot;39&quot; x2=&quot;402&quot; y2=&quot;39&quot; stroke=&quot;#BD9B56&quot; strokeWidth=&quot;1.5&quot; /&gt;&#10;          &lt;rect x=&quot;406&quot; y=&quot;14&quot; width=&quot;150&quot; height=&quot;50&quot; rx=&quot;6&quot; fill=&quot;rgba(34,57,94,0.08)&quot; stroke=&quot;#22395E&quot; strokeWidth=&quot;1.5&quot; /&gt;&#10;          &lt;text x=&quot;481&quot; y=&quot;44&quot; textAnchor=&quot;middle&quot; fontSize=&quot;14&quot; fontWeight=&quot;bold&quot; fill=&quot;#172133&quot;&gt;house ×1664&lt;/text&gt;&#10;          &lt;line x1=&quot;285&quot; y1=&quot;64&quot; x2=&quot;285&quot; y2=&quot;104&quot; stroke=&quot;#BD9B56&quot; strokeWidth=&quot;1.5&quot; /&gt;&#10;          &lt;rect x=&quot;210&quot; y=&quot;108&quot; width=&quot;150&quot; height=&quot;50&quot; rx=&quot;6&quot; fill=&quot;rgba(189,155,86,0.10)&quot; stroke=&quot;#BD9B56&quot; strokeWidth=&quot;1.5&quot; /&gt;&#10;          &lt;text x=&quot;285&quot; y=&quot;138&quot; textAnchor=&quot;middle&quot; fontSize=&quot;14&quot; fontWeight=&quot;bold&quot; fill=&quot;#172133&quot;&gt;user ×275&lt;/text&gt;&#10;          &lt;line x1=&quot;210&quot; y1=&quot;133&quot; x2=&quot;164&quot; y2=&quot;133&quot; stroke=&quot;#BD9B56&quot; strokeWidth=&quot;1.5&quot; /&gt;&#10;          &lt;rect x=&quot;14&quot; y=&quot;108&quot; width=&quot;150&quot; height=&quot;50&quot; rx=&quot;6&quot; fill=&quot;rgba(189,155,86,0.10)&quot; stroke=&quot;#BD9B56&quot; strokeWidth=&quot;1.5&quot; /&gt;&#10;          &lt;text x=&quot;89&quot; y=&quot;138&quot; textAnchor=&quot;middle&quot; fontSize=&quot;14&quot; fontWeight=&quot;bold&quot; fill=&quot;#172133&quot;&gt;house_binding&lt;/text&gt;&#10;          &lt;line x1=&quot;285&quot; y1=&quot;158&quot; x2=&quot;285&quot; y2=&quot;198&quot; stroke=&quot;#BD9B56&quot; strokeWidth=&quot;1.5&quot; /&gt;&#10;          &lt;rect x=&quot;210&quot; y=&quot;202&quot; width=&quot;150&quot; height=&quot;50&quot; rx=&quot;6&quot; fill=&quot;rgba(34,57,94,0.08)&quot; stroke=&quot;#22395E&quot; strokeWidth=&quot;1.5&quot; /&gt;&#10;          &lt;text x=&quot;285&quot; y=&quot;232&quot; textAnchor=&quot;middle&quot; fontSize=&quot;14&quot; fontWeight=&quot;bold&quot; fill=&quot;#172133&quot;&gt;worker ×75&lt;/text&gt;&#10;          &lt;line x1=&quot;285&quot; y1=&quot;252&quot; x2=&quot;285&quot; y2=&quot;292&quot; stroke=&quot;#BD9B56&quot; strokeWidth=&quot;1.5&quot; /&gt;&#10;          &lt;rect x=&quot;160&quot; y=&quot;296&quot; width=&quot;130&quot; height=&quot;50&quot; rx=&quot;6&quot; fill=&quot;rgba(34,57,94,0.08)&quot; stroke=&quot;#22395E&quot; strokeWidth=&quot;1.5&quot; /&gt;&#10;          &lt;text x=&quot;225&quot; y=&quot;326&quot; textAnchor=&quot;middle&quot; fontSize=&quot;13&quot; fontWeight=&quot;bold&quot; fill=&quot;#172133&quot;&gt;repair_order&lt;/text&gt;&#10;          &lt;rect x=&quot;306&quot; y=&quot;296&quot; width=&quot;130&quot; height=&quot;50&quot; rx=&quot;6&quot; fill=&quot;rgba(34,57,94,0.08)&quot; stroke=&quot;#22395E&quot; strokeWidth=&quot;1.5&quot; /&gt;&#10;          &lt;text x=&quot;371&quot; y=&quot;326&quot; textAnchor=&quot;middle&quot; fontSize=&quot;13&quot; fontWeight=&quot;bold&quot; fill=&quot;#172133&quot;&gt;fee_bill ×746&lt;/text&gt;&#10;          &lt;line x1=&quot;225&quot; y1=&quot;346&quot; x2=&quot;225&quot; y2=&quot;386&quot; stroke=&quot;#BD9B56&quot; strokeWidth=&quot;1.5&quot; /&gt;&#10;          &lt;rect x=&quot;160&quot; y=&quot;390&quot; width=&quot;130&quot; height=&quot;50&quot; rx=&quot;6&quot; fill=&quot;rgba(34,57,94,0.08)&quot; stroke=&quot;#22395E&quot; strokeWidth=&quot;1.5&quot; /&gt;&#10;          &lt;text x=&quot;225&quot; y=&quot;420&quot; textAnchor=&quot;middle&quot; fontSize=&quot;13&quot; fontWeight=&quot;bold&quot; fill=&quot;#172133&quot;&gt;notice ×24&lt;/text&gt;&#10;          &lt;rect x=&quot;306&quot; y=&quot;390&quot; width=&quot;130&quot; height=&quot;50&quot; rx=&quot;6&quot; fill=&quot;#172133&quot; stroke=&quot;#BD9B56&quot; strokeWidth=&quot;1.5&quot; /&gt;&#10;          &lt;text x=&quot;371&quot; y=&quot;416&quot; textAnchor=&quot;middle&quot; fontSize=&quot;12&quot; fontWeight=&quot;bold&quot; fill=&quot;#BD9B56&quot;&gt;knowledge&lt;/text&gt;&#10;          &lt;text x=&quot;371&quot; y=&quot;434&quot; textAnchor=&quot;middle&quot; fontSize=&quot;10&quot; fill=&quot;#FBFCFA&quot;&gt;document + chunk&lt;/text&gt;&#10;        &lt;/g&gt;&#10;      &lt;/svg&gt;&#10;    &lt;/div&gt;&#10;  &lt;/div&gt;&#10;  &lt;div style={{ flexShrink: 0, height: 40, display: 'flex', alignItems: 'flex-end', justifyContent: 'space-between' }}&gt;&#10;    &lt;span style={{ color: '#BD9B56', fontSize: 12, letterSpacing: '0.1em' }}&gt;云溪花园 · 智慧社区&lt;/span&gt;&#10;    &lt;span style={{ color: '#a09b8c', fontSize: 12 }}&gt;07 / 15&lt;/span&gt;&#10;  &lt;/div&gt;&#10;&lt;/Slide&gt;"/>
+        <p:cNvPr id="348" name="" descr="&lt;Slide style={{ width: '1280px', height: '720px', background: '#FBFCFA', position: 'relative', padding: '32px 64px', boxSizing: 'border-box', display: 'flex', flexDirection: 'column' }}&gt;&#10;  &lt;div style={{ flexShrink: 0 }}&gt;&#10;    &lt;div style={{ color: '#BD9B56', fontSize: 13, letterSpacing: '0.25em', marginBottom: 6 }}&gt;02 · 技术构建过程&lt;/div&gt;&#10;    &lt;h2 style={{ fontSize: 30, fontWeight: 'bold', color: '#172133', margin: 0, lineHeight: 1.3 }}&gt;数据库设计：15+ 张表承载整个社区&lt;/h2&gt;&#10;    &lt;div style={{ fontSize: 14, color: '#6b7075', marginTop: 6 }}&gt;数据库是系统地基，通过外键建立完整 ER 关系，覆盖社区到知识库的全部实体&lt;/div&gt;&#10;  &lt;/div&gt;&#10;  &lt;div style={{ flex: 1, display: 'flex', alignItems: 'center', minHeight: 0, gap: 28 }}&gt;&#10;    &lt;div style={{ flex: '0 0 320px', background: 'linear-gradient(135deg, #172133 0%, #22395E 100%)', borderRadius: 12, padding: '24px 24px', color: '#FBFCFA' }}&gt;&#10;      &lt;div style={{ color: '#BD9B56', fontSize: 12, letterSpacing: '0.25em', marginBottom: 12 }}&gt;CORE ENTITIES&lt;/div&gt;&#10;      &lt;div style={{ fontSize: 14, color: 'rgba(251,252,250,0.9)', lineHeight: 1.9 }}&gt;&#10;        community 社区&lt;br/&gt;&#10;        building 楼栋（8）&lt;br/&gt;&#10;        house 房屋（1664）&lt;br/&gt;&#10;        user 用户（275）&lt;br/&gt;&#10;        house_binding 房屋绑定&lt;br/&gt;&#10;        worker 物业人员（75）&lt;br/&gt;&#10;        repair_order 工单&lt;br/&gt;&#10;        fee_bill 账单（746）&lt;br/&gt;&#10;        notice 公告（24）&lt;br/&gt;&#10;        conversation / message&lt;br/&gt;&#10;        agent_trace 追踪&lt;br/&gt;&#10;        &lt;span style={{ color: '#BD9B56' }}&gt;knowledge_document / chunk&lt;/span&gt;&#10;      &lt;/div&gt;&#10;    &lt;/div&gt;&#10;    &lt;div style={{ flex: 1, background: '#fff', borderRadius: 12, padding: '20px 22px', boxShadow: '0 6px 24px rgba(23,33,51,0.08)' }}&gt;&#10;      &lt;svg width=&quot;560&quot; height=&quot;470&quot; viewBox=&quot;0 0 560 470&quot;&gt;&#10;        &lt;g fontFamily=&quot;Inter, sans-serif&quot;&gt;&#10;          &lt;rect x=&quot;14&quot; y=&quot;14&quot; width=&quot;150&quot; height=&quot;50&quot; rx=&quot;6&quot; fill=&quot;rgba(34,57,94,0.08)&quot; stroke=&quot;#22395E&quot; strokeWidth=&quot;1.5&quot; /&gt;&#10;          &lt;text x=&quot;89&quot; y=&quot;44&quot; textAnchor=&quot;middle&quot; fontSize=&quot;14&quot; fontWeight=&quot;bold&quot; fill=&quot;#172133&quot;&gt;community&lt;/text&gt;&#10;          &lt;line x1=&quot;164&quot; y1=&quot;39&quot; x2=&quot;206&quot; y2=&quot;39&quot; stroke=&quot;#BD9B56&quot; strokeWidth=&quot;1.5&quot; /&gt;&#10;          &lt;rect x=&quot;210&quot; y=&quot;14&quot; width=&quot;150&quot; height=&quot;50&quot; rx=&quot;6&quot; fill=&quot;rgba(34,57,94,0.08)&quot; stroke=&quot;#22395E&quot; strokeWidth=&quot;1.5&quot; /&gt;&#10;          &lt;text x=&quot;285&quot; y=&quot;44&quot; textAnchor=&quot;middle&quot; fontSize=&quot;14&quot; fontWeight=&quot;bold&quot; fill=&quot;#172133&quot;&gt;building ×8&lt;/text&gt;&#10;          &lt;line x1=&quot;360&quot; y1=&quot;39&quot; x2=&quot;402&quot; y2=&quot;39&quot; stroke=&quot;#BD9B56&quot; strokeWidth=&quot;1.5&quot; /&gt;&#10;          &lt;rect x=&quot;406&quot; y=&quot;14&quot; width=&quot;150&quot; height=&quot;50&quot; rx=&quot;6&quot; fill=&quot;rgba(34,57,94,0.08)&quot; stroke=&quot;#22395E&quot; strokeWidth=&quot;1.5&quot; /&gt;&#10;          &lt;text x=&quot;481&quot; y=&quot;44&quot; textAnchor=&quot;middle&quot; fontSize=&quot;14&quot; fontWeight=&quot;bold&quot; fill=&quot;#172133&quot;&gt;house ×1664&lt;/text&gt;&#10;          &lt;line x1=&quot;285&quot; y1=&quot;64&quot; x2=&quot;285&quot; y2=&quot;104&quot; stroke=&quot;#BD9B56&quot; strokeWidth=&quot;1.5&quot; /&gt;&#10;          &lt;rect x=&quot;210&quot; y=&quot;108&quot; width=&quot;150&quot; height=&quot;50&quot; rx=&quot;6&quot; fill=&quot;rgba(189,155,86,0.10)&quot; stroke=&quot;#BD9B56&quot; strokeWidth=&quot;1.5&quot; /&gt;&#10;          &lt;text x=&quot;285&quot; y=&quot;138&quot; textAnchor=&quot;middle&quot; fontSize=&quot;14&quot; fontWeight=&quot;bold&quot; fill=&quot;#172133&quot;&gt;user ×275&lt;/text&gt;&#10;          &lt;line x1=&quot;210&quot; y1=&quot;133&quot; x2=&quot;164&quot; y2=&quot;133&quot; stroke=&quot;#BD9B56&quot; strokeWidth=&quot;1.5&quot; /&gt;&#10;          &lt;rect x=&quot;14&quot; y=&quot;108&quot; width=&quot;150&quot; height=&quot;50&quot; rx=&quot;6&quot; fill=&quot;rgba(189,155,86,0.10)&quot; stroke=&quot;#BD9B56&quot; strokeWidth=&quot;1.5&quot; /&gt;&#10;          &lt;text x=&quot;89&quot; y=&quot;138&quot; textAnchor=&quot;middle&quot; fontSize=&quot;14&quot; fontWeight=&quot;bold&quot; fill=&quot;#172133&quot;&gt;house_binding&lt;/text&gt;&#10;          &lt;line x1=&quot;285&quot; y1=&quot;158&quot; x2=&quot;285&quot; y2=&quot;198&quot; stroke=&quot;#BD9B56&quot; strokeWidth=&quot;1.5&quot; /&gt;&#10;          &lt;rect x=&quot;210&quot; y=&quot;202&quot; width=&quot;150&quot; height=&quot;50&quot; rx=&quot;6&quot; fill=&quot;rgba(34,57,94,0.08)&quot; stroke=&quot;#22395E&quot; strokeWidth=&quot;1.5&quot; /&gt;&#10;          &lt;text x=&quot;285&quot; y=&quot;232&quot; textAnchor=&quot;middle&quot; fontSize=&quot;14&quot; fontWeight=&quot;bold&quot; fill=&quot;#172133&quot;&gt;worker ×75&lt;/text&gt;&#10;          &lt;line x1=&quot;285&quot; y1=&quot;252&quot; x2=&quot;285&quot; y2=&quot;292&quot; stroke=&quot;#BD9B56&quot; strokeWidth=&quot;1.5&quot; /&gt;&#10;          &lt;rect x=&quot;160&quot; y=&quot;296&quot; width=&quot;130&quot; height=&quot;50&quot; rx=&quot;6&quot; fill=&quot;rgba(34,57,94,0.08)&quot; stroke=&quot;#22395E&quot; strokeWidth=&quot;1.5&quot; /&gt;&#10;          &lt;text x=&quot;225&quot; y=&quot;326&quot; textAnchor=&quot;middle&quot; fontSize=&quot;13&quot; fontWeight=&quot;bold&quot; fill=&quot;#172133&quot;&gt;repair_order&lt;/text&gt;&#10;          &lt;rect x=&quot;306&quot; y=&quot;296&quot; width=&quot;130&quot; height=&quot;50&quot; rx=&quot;6&quot; fill=&quot;rgba(34,57,94,0.08)&quot; stroke=&quot;#22395E&quot; strokeWidth=&quot;1.5&quot; /&gt;&#10;          &lt;text x=&quot;371&quot; y=&quot;326&quot; textAnchor=&quot;middle&quot; fontSize=&quot;13&quot; fontWeight=&quot;bold&quot; fill=&quot;#172133&quot;&gt;fee_bill ×746&lt;/text&gt;&#10;          &lt;line x1=&quot;225&quot; y1=&quot;346&quot; x2=&quot;225&quot; y2=&quot;386&quot; stroke=&quot;#BD9B56&quot; strokeWidth=&quot;1.5&quot; /&gt;&#10;          &lt;rect x=&quot;160&quot; y=&quot;390&quot; width=&quot;130&quot; height=&quot;50&quot; rx=&quot;6&quot; fill=&quot;rgba(34,57,94,0.08)&quot; stroke=&quot;#22395E&quot; strokeWidth=&quot;1.5&quot; /&gt;&#10;          &lt;text x=&quot;225&quot; y=&quot;420&quot; textAnchor=&quot;middle&quot; fontSize=&quot;13&quot; fontWeight=&quot;bold&quot; fill=&quot;#172133&quot;&gt;notice ×24&lt;/text&gt;&#10;          &lt;rect x=&quot;306&quot; y=&quot;390&quot; width=&quot;130&quot; height=&quot;50&quot; rx=&quot;6&quot; fill=&quot;#172133&quot; stroke=&quot;#BD9B56&quot; strokeWidth=&quot;1.5&quot; /&gt;&#10;          &lt;text x=&quot;371&quot; y=&quot;416&quot; textAnchor=&quot;middle&quot; fontSize=&quot;12&quot; fontWeight=&quot;bold&quot; fill=&quot;#BD9B56&quot;&gt;knowledge&lt;/text&gt;&#10;          &lt;text x=&quot;371&quot; y=&quot;434&quot; textAnchor=&quot;middle&quot; fontSize=&quot;10&quot; fill=&quot;#FBFCFA&quot;&gt;document + chunk&lt;/text&gt;&#10;        &lt;/g&gt;&#10;      &lt;/svg&gt;&#10;    &lt;/div&gt;&#10;  &lt;/div&gt;&#10;  &lt;div style={{ flexShrink: 0, height: 40, display: 'flex', alignItems: 'flex-end', justifyContent: 'space-between' }}&gt;&#10;    &lt;span style={{ color: '#BD9B56', fontSize: 12, letterSpacing: '0.1em' }}&gt;云溪花园 · 智慧社区&lt;/span&gt;&#10;    &lt;span style={{ color: '#a09b8c', fontSize: 12 }}&gt;07 / 15&lt;/span&gt;&#10;  &lt;/div&gt;&#10;&lt;/Slide&gt;"/>
         <p:cNvGrpSpPr/>
         <p:nvPr/>
       </p:nvGrpSpPr>
@@ -15465,7 +16252,7 @@
       </p:grpSpPr>
       <p:sp>
         <p:nvSpPr>
-          <p:cNvPr id="330" name=""/>
+          <p:cNvPr id="349" name=""/>
           <p:cNvSpPr/>
           <p:nvPr/>
         </p:nvSpPr>
@@ -15489,7 +16276,7 @@
       </p:sp>
       <p:sp>
         <p:nvSpPr>
-          <p:cNvPr id="331" name="" descr="{&quot;isTemplate&quot;:true,&quot;type&quot;:&quot;text&quot;}"/>
+          <p:cNvPr id="350" name="" descr="{&quot;isTemplate&quot;:true,&quot;type&quot;:&quot;text&quot;}"/>
           <p:cNvSpPr txBox="1"/>
           <p:nvPr/>
         </p:nvSpPr>
@@ -15534,7 +16321,7 @@
       </p:sp>
       <p:sp>
         <p:nvSpPr>
-          <p:cNvPr id="332" name="" descr="{&quot;isTemplate&quot;:true,&quot;type&quot;:&quot;text&quot;}"/>
+          <p:cNvPr id="351" name="" descr="{&quot;isTemplate&quot;:true,&quot;type&quot;:&quot;text&quot;}"/>
           <p:cNvSpPr txBox="1"/>
           <p:nvPr/>
         </p:nvSpPr>
@@ -15589,7 +16376,7 @@
       </p:sp>
       <p:sp>
         <p:nvSpPr>
-          <p:cNvPr id="333" name="" descr="{&quot;isTemplate&quot;:true,&quot;type&quot;:&quot;text&quot;}"/>
+          <p:cNvPr id="352" name="" descr="{&quot;isTemplate&quot;:true,&quot;type&quot;:&quot;text&quot;}"/>
           <p:cNvSpPr txBox="1"/>
           <p:nvPr/>
         </p:nvSpPr>
@@ -15644,7 +16431,7 @@
       </p:sp>
       <p:sp>
         <p:nvSpPr>
-          <p:cNvPr id="334" name=""/>
+          <p:cNvPr id="353" name=""/>
           <p:cNvSpPr/>
           <p:nvPr/>
         </p:nvSpPr>
@@ -15678,7 +16465,7 @@
       </p:sp>
       <p:sp>
         <p:nvSpPr>
-          <p:cNvPr id="335" name="" descr="{&quot;isTemplate&quot;:true,&quot;type&quot;:&quot;text&quot;}"/>
+          <p:cNvPr id="354" name="" descr="{&quot;isTemplate&quot;:true,&quot;type&quot;:&quot;text&quot;}"/>
           <p:cNvSpPr txBox="1"/>
           <p:nvPr/>
         </p:nvSpPr>
@@ -15713,7 +16500,7 @@
       </p:sp>
       <p:sp>
         <p:nvSpPr>
-          <p:cNvPr id="336" name="" descr="{&quot;isTemplate&quot;:true,&quot;type&quot;:&quot;text&quot;}"/>
+          <p:cNvPr id="355" name="" descr="{&quot;isTemplate&quot;:true,&quot;type&quot;:&quot;text&quot;}"/>
           <p:cNvSpPr txBox="1"/>
           <p:nvPr/>
         </p:nvSpPr>
@@ -15734,7 +16521,7 @@
       </p:sp>
       <p:sp>
         <p:nvSpPr>
-          <p:cNvPr id="337" name="" descr="{&quot;isTemplate&quot;:true,&quot;type&quot;:&quot;text&quot;}"/>
+          <p:cNvPr id="356" name="" descr="{&quot;isTemplate&quot;:true,&quot;type&quot;:&quot;text&quot;}"/>
           <p:cNvSpPr txBox="1"/>
           <p:nvPr/>
         </p:nvSpPr>
@@ -15755,7 +16542,7 @@
       </p:sp>
       <p:sp>
         <p:nvSpPr>
-          <p:cNvPr id="338" name="" descr="{&quot;isTemplate&quot;:true,&quot;type&quot;:&quot;text&quot;}"/>
+          <p:cNvPr id="357" name="" descr="{&quot;isTemplate&quot;:true,&quot;type&quot;:&quot;text&quot;}"/>
           <p:cNvSpPr txBox="1"/>
           <p:nvPr/>
         </p:nvSpPr>
@@ -15776,7 +16563,7 @@
       </p:sp>
       <p:sp>
         <p:nvSpPr>
-          <p:cNvPr id="339" name="" descr="{&quot;isTemplate&quot;:true,&quot;type&quot;:&quot;text&quot;}"/>
+          <p:cNvPr id="358" name="" descr="{&quot;isTemplate&quot;:true,&quot;type&quot;:&quot;text&quot;}"/>
           <p:cNvSpPr txBox="1"/>
           <p:nvPr/>
         </p:nvSpPr>
@@ -15797,7 +16584,7 @@
       </p:sp>
       <p:sp>
         <p:nvSpPr>
-          <p:cNvPr id="340" name="" descr="{&quot;isTemplate&quot;:true,&quot;type&quot;:&quot;text&quot;}"/>
+          <p:cNvPr id="359" name="" descr="{&quot;isTemplate&quot;:true,&quot;type&quot;:&quot;text&quot;}"/>
           <p:cNvSpPr txBox="1"/>
           <p:nvPr/>
         </p:nvSpPr>
@@ -15818,7 +16605,7 @@
       </p:sp>
       <p:sp>
         <p:nvSpPr>
-          <p:cNvPr id="341" name="" descr="{&quot;isTemplate&quot;:true,&quot;type&quot;:&quot;text&quot;}"/>
+          <p:cNvPr id="360" name="" descr="{&quot;isTemplate&quot;:true,&quot;type&quot;:&quot;text&quot;}"/>
           <p:cNvSpPr txBox="1"/>
           <p:nvPr/>
         </p:nvSpPr>
@@ -15839,7 +16626,7 @@
       </p:sp>
       <p:sp>
         <p:nvSpPr>
-          <p:cNvPr id="342" name="" descr="{&quot;isTemplate&quot;:true,&quot;type&quot;:&quot;text&quot;}"/>
+          <p:cNvPr id="361" name="" descr="{&quot;isTemplate&quot;:true,&quot;type&quot;:&quot;text&quot;}"/>
           <p:cNvSpPr txBox="1"/>
           <p:nvPr/>
         </p:nvSpPr>
@@ -15860,7 +16647,7 @@
       </p:sp>
       <p:sp>
         <p:nvSpPr>
-          <p:cNvPr id="343" name="" descr="{&quot;isTemplate&quot;:true,&quot;type&quot;:&quot;text&quot;}"/>
+          <p:cNvPr id="362" name="" descr="{&quot;isTemplate&quot;:true,&quot;type&quot;:&quot;text&quot;}"/>
           <p:cNvSpPr txBox="1"/>
           <p:nvPr/>
         </p:nvSpPr>
@@ -15881,7 +16668,7 @@
       </p:sp>
       <p:sp>
         <p:nvSpPr>
-          <p:cNvPr id="344" name="" descr="{&quot;isTemplate&quot;:true,&quot;type&quot;:&quot;text&quot;}"/>
+          <p:cNvPr id="363" name="" descr="{&quot;isTemplate&quot;:true,&quot;type&quot;:&quot;text&quot;}"/>
           <p:cNvSpPr txBox="1"/>
           <p:nvPr/>
         </p:nvSpPr>
@@ -15902,7 +16689,7 @@
       </p:sp>
       <p:sp>
         <p:nvSpPr>
-          <p:cNvPr id="345" name="" descr="{&quot;isTemplate&quot;:true,&quot;type&quot;:&quot;text&quot;}"/>
+          <p:cNvPr id="364" name="" descr="{&quot;isTemplate&quot;:true,&quot;type&quot;:&quot;text&quot;}"/>
           <p:cNvSpPr txBox="1"/>
           <p:nvPr/>
         </p:nvSpPr>
@@ -15923,7 +16710,7 @@
       </p:sp>
       <p:sp>
         <p:nvSpPr>
-          <p:cNvPr id="346" name="" descr="{&quot;isTemplate&quot;:true,&quot;type&quot;:&quot;text&quot;}"/>
+          <p:cNvPr id="365" name="" descr="{&quot;isTemplate&quot;:true,&quot;type&quot;:&quot;text&quot;}"/>
           <p:cNvSpPr txBox="1"/>
           <p:nvPr/>
         </p:nvSpPr>
@@ -15944,7 +16731,7 @@
       </p:sp>
       <p:sp>
         <p:nvSpPr>
-          <p:cNvPr id="347" name="" descr="{&quot;isTemplate&quot;:true,&quot;type&quot;:&quot;text&quot;}"/>
+          <p:cNvPr id="366" name="" descr="{&quot;isTemplate&quot;:true,&quot;type&quot;:&quot;text&quot;}"/>
           <p:cNvSpPr txBox="1"/>
           <p:nvPr/>
         </p:nvSpPr>
@@ -15979,7 +16766,7 @@
       </p:sp>
       <p:sp>
         <p:nvSpPr>
-          <p:cNvPr id="348" name=""/>
+          <p:cNvPr id="367" name=""/>
           <p:cNvSpPr/>
           <p:nvPr/>
         </p:nvSpPr>
@@ -16012,7 +16799,7 @@
       </p:sp>
       <p:pic>
         <p:nvPicPr>
-          <p:cNvPr id="349" name=""/>
+          <p:cNvPr id="368" name=""/>
           <p:cNvPicPr>
             <a:picLocks noChangeAspect="1"/>
           </p:cNvPicPr>
@@ -16043,7 +16830,7 @@
       </p:pic>
       <p:sp>
         <p:nvSpPr>
-          <p:cNvPr id="350" name="" descr="{&quot;isTemplate&quot;:true,&quot;type&quot;:&quot;text&quot;}"/>
+          <p:cNvPr id="369" name="" descr="{&quot;isTemplate&quot;:true,&quot;type&quot;:&quot;text&quot;}"/>
           <p:cNvSpPr txBox="1"/>
           <p:nvPr/>
         </p:nvSpPr>
@@ -16098,7 +16885,7 @@
       </p:sp>
       <p:sp>
         <p:nvSpPr>
-          <p:cNvPr id="351" name="" descr="{&quot;isTemplate&quot;:true,&quot;type&quot;:&quot;text&quot;}"/>
+          <p:cNvPr id="370" name="" descr="{&quot;isTemplate&quot;:true,&quot;type&quot;:&quot;text&quot;}"/>
           <p:cNvSpPr txBox="1"/>
           <p:nvPr/>
         </p:nvSpPr>
@@ -16141,7 +16928,7 @@
   <p:cSld>
     <p:spTree>
       <p:nvGrpSpPr>
-        <p:cNvPr id="352" name="" descr="&lt;Slide style={{ width: '1280px', height: '720px', background: '#FBFCFA', position: 'relative', padding: '40px 64px', boxSizing: 'border-box', display: 'flex', flexDirection: 'column' }}&gt;&#10;  &lt;div style={{ flexShrink: 0 }}&gt;&#10;    &lt;div style={{ color: '#BD9B56', fontSize: 13, letterSpacing: '0.25em', marginBottom: 8 }}&gt;02 · 技术构建过程&lt;/div&gt;&#10;    &lt;h2 style={{ fontSize: 30, fontWeight: 'bold', color: '#172133', margin: 0, lineHeight: 1.3 }}&gt;后端分层 + 前端三端一体&lt;/h2&gt;&#10;  &lt;/div&gt;&#10;  &lt;div style={{ flex: 1, display: 'flex', alignItems: 'center', gap: 32 }}&gt;&#10;    &lt;div style={{ flex: 1, display: 'flex', flexDirection: 'column', gap: 16 }}&gt;&#10;      &lt;div style={{ background: '#fff', borderRadius: 10, padding: '18px 22px', boxShadow: '0 4px 16px rgba(23,33,51,0.06)' }}&gt;&#10;        &lt;div style={{ fontSize: 17, fontWeight: 'bold', color: '#172133', marginBottom: 6 }}&gt;后端：FastAPI 三层架构&lt;/div&gt;&#10;        &lt;p style={{ fontSize: 14, color: '#5F5E5A', margin: 0, lineHeight: 1.6 }}&gt;API 路由层 → Service 业务层 → Repository 数据层。业务与数据解耦，AI 逻辑不混入业务代码。&lt;/p&gt;&#10;      &lt;/div&gt;&#10;      &lt;div style={{ background: '#fff', borderRadius: 10, padding: '18px 22px', boxShadow: '0 4px 16px rgba(23,33,51,0.06)' }}&gt;&#10;        &lt;div style={{ fontSize: 17, fontWeight: 'bold', color: '#172133', marginBottom: 6 }}&gt;派单算法&lt;/div&gt;&#10;        &lt;p style={{ fontSize: 14, color: '#5F5E5A', margin: 0, lineHeight: 1.6 }}&gt;按「技能匹配 + 在岗状态 + 工号升序」自动选择维修师傅，无需人工指派，报修提交即自动派单。&lt;/p&gt;&#10;      &lt;/div&gt;&#10;      &lt;div style={{ background: '#fff', borderRadius: 10, padding: '18px 22px', boxShadow: '0 4px 16px rgba(23,33,51,0.06)' }}&gt;&#10;        &lt;div style={{ fontSize: 17, fontWeight: 'bold', color: '#172133', marginBottom: 6 }}&gt;消息通知&lt;/div&gt;&#10;        &lt;p style={{ fontSize: 14, color: '#5F5E5A', margin: 0, lineHeight: 1.6 }}&gt;派单、完成、答复、巡检异常等事件全链路实时通知相关角色，保证业务协同不遗漏。&lt;/p&gt;&#10;      &lt;/div&gt;&#10;    &lt;/div&gt;&#10;    &lt;div style={{ flex: 1, background: 'linear-gradient(135deg, #172133 0%, #22395E 100%)', borderRadius: 12, padding: '26px 26px', color: '#FBFCFA' }}&gt;&#10;      &lt;div style={{ color: '#BD9B56', fontSize: 13, letterSpacing: '0.25em', marginBottom: 18 }}&gt;FRONTEND · 三端&lt;/div&gt;&#10;      &lt;div style={{ display: 'flex', flexDirection: 'column', gap: 14 }}&gt;&#10;        &lt;div style={{ display: 'flex', alignItems: 'center', gap: 12, padding: '12px 16px', background: 'rgba(189,155,86,0.10)', borderRadius: 8 }}&gt;&#10;          &lt;span style={{ color: '#BD9B56', fontSize: 17, fontWeight: 'bold', minWidth: 64 }}&gt;业主端&lt;/span&gt;&#10;          &lt;span style={{ fontSize: 13, color: 'rgba(251,252,250,0.85)' }}&gt;AI 助手 · 报修 · 缴费 · 公告 · 问题上报&lt;/span&gt;&#10;        &lt;/div&gt;&#10;        &lt;div style={{ display: 'flex', alignItems: 'center', gap: 12, padding: '12px 16px', background: 'rgba(189,155,86,0.10)', borderRadius: 8 }}&gt;&#10;          &lt;span style={{ color: '#BD9B56', fontSize: 17, fontWeight: 'bold', minWidth: 64 }}&gt;物业端&lt;/span&gt;&#10;          &lt;span style={{ fontSize: 13, color: 'rgba(251,252,250,0.85)' }}&gt;工单管理 · 巡检 · 数据看板 · 知识审核&lt;/span&gt;&#10;        &lt;/div&gt;&#10;        &lt;div style={{ display: 'flex', alignItems: 'center', gap: 12, padding: '12px 16px', background: 'rgba(189,155,86,0.10)', borderRadius: 8 }}&gt;&#10;          &lt;span style={{ color: '#BD9B56', fontSize: 17, fontWeight: 'bold', minWidth: 64 }}&gt;维修端&lt;/span&gt;&#10;          &lt;span style={{ fontSize: 13, color: 'rgba(251,252,250,0.85)' }}&gt;接单 · 处理 · 消息 · 巡检任务&lt;/span&gt;&#10;        &lt;/div&gt;&#10;      &lt;/div&gt;&#10;      &lt;div style={{ marginTop: 20, paddingTop: 18, borderTop: '1px solid rgba(189,155,86,0.3)' }}&gt;&#10;        &lt;div style={{ fontSize: 13, color: 'rgba(251,252,250,0.8)', lineHeight: 1.7 }}&gt;&#10;          React + TypeScript + Tailwind&lt;br/&gt;JWT 鉴权 · 角色路由 · 支持 PWA 安装&lt;br/&gt;后端 113 测试 + 前端 30 测试全绿&#10;        &lt;/div&gt;&#10;      &lt;/div&gt;&#10;    &lt;/div&gt;&#10;  &lt;/div&gt;&#10;  &lt;div style={{ flexShrink: 0, height: 40, display: 'flex', alignItems: 'flex-end', justifyContent: 'space-between' }}&gt;&#10;    &lt;span style={{ color: '#BD9B56', fontSize: 12, letterSpacing: '0.1em' }}&gt;云溪花园 · 智慧社区&lt;/span&gt;&#10;    &lt;span style={{ color: '#a09b8c', fontSize: 12 }}&gt;08 / 15&lt;/span&gt;&#10;  &lt;/div&gt;&#10;&lt;/Slide&gt;"/>
+        <p:cNvPr id="371" name="" descr="&lt;Slide style={{ width: '1280px', height: '720px', background: '#FBFCFA', position: 'relative', padding: '40px 64px', boxSizing: 'border-box', display: 'flex', flexDirection: 'column' }}&gt;&#10;  &lt;div style={{ flexShrink: 0 }}&gt;&#10;    &lt;div style={{ color: '#BD9B56', fontSize: 13, letterSpacing: '0.25em', marginBottom: 8 }}&gt;02 · 技术构建过程&lt;/div&gt;&#10;    &lt;h2 style={{ fontSize: 30, fontWeight: 'bold', color: '#172133', margin: 0, lineHeight: 1.3 }}&gt;后端分层 + 前端三端一体&lt;/h2&gt;&#10;  &lt;/div&gt;&#10;  &lt;div style={{ flex: 1, display: 'flex', alignItems: 'center', gap: 32 }}&gt;&#10;    &lt;div style={{ flex: 1, display: 'flex', flexDirection: 'column', gap: 16 }}&gt;&#10;      &lt;div style={{ background: '#fff', borderRadius: 10, padding: '18px 22px', boxShadow: '0 4px 16px rgba(23,33,51,0.06)' }}&gt;&#10;        &lt;div style={{ fontSize: 17, fontWeight: 'bold', color: '#172133', marginBottom: 6 }}&gt;后端：FastAPI 三层架构&lt;/div&gt;&#10;        &lt;p style={{ fontSize: 14, color: '#5F5E5A', margin: 0, lineHeight: 1.6 }}&gt;API 路由层 → Service 业务层 → Repository 数据层。业务与数据解耦，AI 逻辑不混入业务代码。&lt;/p&gt;&#10;      &lt;/div&gt;&#10;      &lt;div style={{ background: '#fff', borderRadius: 10, padding: '18px 22px', boxShadow: '0 4px 16px rgba(23,33,51,0.06)' }}&gt;&#10;        &lt;div style={{ fontSize: 17, fontWeight: 'bold', color: '#172133', marginBottom: 6 }}&gt;派单算法&lt;/div&gt;&#10;        &lt;p style={{ fontSize: 14, color: '#5F5E5A', margin: 0, lineHeight: 1.6 }}&gt;按「技能匹配 + 在岗状态 + 工号升序」自动选择维修师傅，无需人工指派，报修提交即自动派单。&lt;/p&gt;&#10;      &lt;/div&gt;&#10;      &lt;div style={{ background: '#fff', borderRadius: 10, padding: '18px 22px', boxShadow: '0 4px 16px rgba(23,33,51,0.06)' }}&gt;&#10;        &lt;div style={{ fontSize: 17, fontWeight: 'bold', color: '#172133', marginBottom: 6 }}&gt;消息通知&lt;/div&gt;&#10;        &lt;p style={{ fontSize: 14, color: '#5F5E5A', margin: 0, lineHeight: 1.6 }}&gt;派单、完成、答复、巡检异常等事件全链路实时通知相关角色，保证业务协同不遗漏。&lt;/p&gt;&#10;      &lt;/div&gt;&#10;    &lt;/div&gt;&#10;    &lt;div style={{ flex: 1, background: 'linear-gradient(135deg, #172133 0%, #22395E 100%)', borderRadius: 12, padding: '26px 26px', color: '#FBFCFA' }}&gt;&#10;      &lt;div style={{ color: '#BD9B56', fontSize: 13, letterSpacing: '0.25em', marginBottom: 18 }}&gt;FRONTEND · 三端&lt;/div&gt;&#10;      &lt;div style={{ display: 'flex', flexDirection: 'column', gap: 14 }}&gt;&#10;        &lt;div style={{ display: 'flex', alignItems: 'center', gap: 12, padding: '12px 16px', background: 'rgba(189,155,86,0.10)', borderRadius: 8 }}&gt;&#10;          &lt;span style={{ color: '#BD9B56', fontSize: 17, fontWeight: 'bold', minWidth: 64 }}&gt;业主端&lt;/span&gt;&#10;          &lt;span style={{ fontSize: 13, color: 'rgba(251,252,250,0.85)' }}&gt;AI 助手 · 报修 · 缴费 · 公告 · 问题上报&lt;/span&gt;&#10;        &lt;/div&gt;&#10;        &lt;div style={{ display: 'flex', alignItems: 'center', gap: 12, padding: '12px 16px', background: 'rgba(189,155,86,0.10)', borderRadius: 8 }}&gt;&#10;          &lt;span style={{ color: '#BD9B56', fontSize: 17, fontWeight: 'bold', minWidth: 64 }}&gt;物业端&lt;/span&gt;&#10;          &lt;span style={{ fontSize: 13, color: 'rgba(251,252,250,0.85)' }}&gt;工单管理 · 巡检 · 数据看板 · 知识审核&lt;/span&gt;&#10;        &lt;/div&gt;&#10;        &lt;div style={{ display: 'flex', alignItems: 'center', gap: 12, padding: '12px 16px', background: 'rgba(189,155,86,0.10)', borderRadius: 8 }}&gt;&#10;          &lt;span style={{ color: '#BD9B56', fontSize: 17, fontWeight: 'bold', minWidth: 64 }}&gt;维修端&lt;/span&gt;&#10;          &lt;span style={{ fontSize: 13, color: 'rgba(251,252,250,0.85)' }}&gt;接单 · 处理 · 消息 · 巡检任务&lt;/span&gt;&#10;        &lt;/div&gt;&#10;      &lt;/div&gt;&#10;      &lt;div style={{ marginTop: 20, paddingTop: 18, borderTop: '1px solid rgba(189,155,86,0.3)' }}&gt;&#10;        &lt;div style={{ fontSize: 13, color: 'rgba(251,252,250,0.8)', lineHeight: 1.7 }}&gt;&#10;          React + TypeScript + Tailwind&lt;br/&gt;JWT 鉴权 · 角色路由 · 支持 PWA 安装&lt;br/&gt;后端 113 测试 + 前端 30 测试全绿&#10;        &lt;/div&gt;&#10;      &lt;/div&gt;&#10;    &lt;/div&gt;&#10;  &lt;/div&gt;&#10;  &lt;div style={{ flexShrink: 0, height: 40, display: 'flex', alignItems: 'flex-end', justifyContent: 'space-between' }}&gt;&#10;    &lt;span style={{ color: '#BD9B56', fontSize: 12, letterSpacing: '0.1em' }}&gt;云溪花园 · 智慧社区&lt;/span&gt;&#10;    &lt;span style={{ color: '#a09b8c', fontSize: 12 }}&gt;08 / 15&lt;/span&gt;&#10;  &lt;/div&gt;&#10;&lt;/Slide&gt;"/>
         <p:cNvGrpSpPr/>
         <p:nvPr/>
       </p:nvGrpSpPr>
@@ -16155,7 +16942,7 @@
       </p:grpSpPr>
       <p:sp>
         <p:nvSpPr>
-          <p:cNvPr id="353" name=""/>
+          <p:cNvPr id="372" name=""/>
           <p:cNvSpPr/>
           <p:nvPr/>
         </p:nvSpPr>
@@ -16179,7 +16966,7 @@
       </p:sp>
       <p:sp>
         <p:nvSpPr>
-          <p:cNvPr id="354" name="" descr="{&quot;isTemplate&quot;:true,&quot;type&quot;:&quot;text&quot;}"/>
+          <p:cNvPr id="373" name="" descr="{&quot;isTemplate&quot;:true,&quot;type&quot;:&quot;text&quot;}"/>
           <p:cNvSpPr txBox="1"/>
           <p:nvPr/>
         </p:nvSpPr>
@@ -16224,7 +17011,7 @@
       </p:sp>
       <p:sp>
         <p:nvSpPr>
-          <p:cNvPr id="355" name="" descr="{&quot;isTemplate&quot;:true,&quot;type&quot;:&quot;text&quot;}"/>
+          <p:cNvPr id="374" name="" descr="{&quot;isTemplate&quot;:true,&quot;type&quot;:&quot;text&quot;}"/>
           <p:cNvSpPr txBox="1"/>
           <p:nvPr/>
         </p:nvSpPr>
@@ -16279,7 +17066,7 @@
       </p:sp>
       <p:sp>
         <p:nvSpPr>
-          <p:cNvPr id="356" name=""/>
+          <p:cNvPr id="375" name=""/>
           <p:cNvSpPr/>
           <p:nvPr/>
         </p:nvSpPr>
@@ -16312,7 +17099,7 @@
       </p:sp>
       <p:sp>
         <p:nvSpPr>
-          <p:cNvPr id="357" name="" descr="{&quot;isTemplate&quot;:true,&quot;type&quot;:&quot;text&quot;}"/>
+          <p:cNvPr id="376" name="" descr="{&quot;isTemplate&quot;:true,&quot;type&quot;:&quot;text&quot;}"/>
           <p:cNvSpPr txBox="1"/>
           <p:nvPr/>
         </p:nvSpPr>
@@ -16367,7 +17154,7 @@
       </p:sp>
       <p:sp>
         <p:nvSpPr>
-          <p:cNvPr id="358" name="" descr="{&quot;isTemplate&quot;:true,&quot;type&quot;:&quot;text&quot;}"/>
+          <p:cNvPr id="377" name="" descr="{&quot;isTemplate&quot;:true,&quot;type&quot;:&quot;text&quot;}"/>
           <p:cNvSpPr txBox="1"/>
           <p:nvPr/>
         </p:nvSpPr>
@@ -16474,7 +17261,7 @@
       </p:sp>
       <p:sp>
         <p:nvSpPr>
-          <p:cNvPr id="359" name=""/>
+          <p:cNvPr id="378" name=""/>
           <p:cNvSpPr/>
           <p:nvPr/>
         </p:nvSpPr>
@@ -16507,7 +17294,7 @@
       </p:sp>
       <p:sp>
         <p:nvSpPr>
-          <p:cNvPr id="360" name="" descr="{&quot;isTemplate&quot;:true,&quot;type&quot;:&quot;text&quot;}"/>
+          <p:cNvPr id="379" name="" descr="{&quot;isTemplate&quot;:true,&quot;type&quot;:&quot;text&quot;}"/>
           <p:cNvSpPr txBox="1"/>
           <p:nvPr/>
         </p:nvSpPr>
@@ -16542,7 +17329,7 @@
       </p:sp>
       <p:sp>
         <p:nvSpPr>
-          <p:cNvPr id="361" name="" descr="{&quot;isTemplate&quot;:true,&quot;type&quot;:&quot;text&quot;}"/>
+          <p:cNvPr id="380" name="" descr="{&quot;isTemplate&quot;:true,&quot;type&quot;:&quot;text&quot;}"/>
           <p:cNvSpPr txBox="1"/>
           <p:nvPr/>
         </p:nvSpPr>
@@ -16619,7 +17406,7 @@
       </p:sp>
       <p:sp>
         <p:nvSpPr>
-          <p:cNvPr id="362" name=""/>
+          <p:cNvPr id="381" name=""/>
           <p:cNvSpPr/>
           <p:nvPr/>
         </p:nvSpPr>
@@ -16652,7 +17439,7 @@
       </p:sp>
       <p:sp>
         <p:nvSpPr>
-          <p:cNvPr id="363" name="" descr="{&quot;isTemplate&quot;:true,&quot;type&quot;:&quot;text&quot;}"/>
+          <p:cNvPr id="382" name="" descr="{&quot;isTemplate&quot;:true,&quot;type&quot;:&quot;text&quot;}"/>
           <p:cNvSpPr txBox="1"/>
           <p:nvPr/>
         </p:nvSpPr>
@@ -16687,7 +17474,7 @@
       </p:sp>
       <p:sp>
         <p:nvSpPr>
-          <p:cNvPr id="364" name="" descr="{&quot;isTemplate&quot;:true,&quot;type&quot;:&quot;text&quot;}"/>
+          <p:cNvPr id="383" name="" descr="{&quot;isTemplate&quot;:true,&quot;type&quot;:&quot;text&quot;}"/>
           <p:cNvSpPr txBox="1"/>
           <p:nvPr/>
         </p:nvSpPr>
@@ -16724,7 +17511,7 @@
       </p:sp>
       <p:sp>
         <p:nvSpPr>
-          <p:cNvPr id="365" name=""/>
+          <p:cNvPr id="384" name=""/>
           <p:cNvSpPr/>
           <p:nvPr/>
         </p:nvSpPr>
@@ -16758,7 +17545,7 @@
       </p:sp>
       <p:sp>
         <p:nvSpPr>
-          <p:cNvPr id="366" name="" descr="{&quot;isTemplate&quot;:true,&quot;type&quot;:&quot;text&quot;}"/>
+          <p:cNvPr id="385" name="" descr="{&quot;isTemplate&quot;:true,&quot;type&quot;:&quot;text&quot;}"/>
           <p:cNvSpPr txBox="1"/>
           <p:nvPr/>
         </p:nvSpPr>
@@ -16803,7 +17590,7 @@
       </p:sp>
       <p:sp>
         <p:nvSpPr>
-          <p:cNvPr id="367" name=""/>
+          <p:cNvPr id="386" name=""/>
           <p:cNvSpPr/>
           <p:nvPr/>
         </p:nvSpPr>
@@ -16831,7 +17618,7 @@
       </p:sp>
       <p:sp>
         <p:nvSpPr>
-          <p:cNvPr id="368" name="" descr="{&quot;isTemplate&quot;:true,&quot;type&quot;:&quot;text&quot;}"/>
+          <p:cNvPr id="387" name="" descr="{&quot;isTemplate&quot;:true,&quot;type&quot;:&quot;text&quot;}"/>
           <p:cNvSpPr txBox="1"/>
           <p:nvPr/>
         </p:nvSpPr>
@@ -16866,7 +17653,7 @@
       </p:sp>
       <p:sp>
         <p:nvSpPr>
-          <p:cNvPr id="369" name="" descr="{&quot;isTemplate&quot;:true,&quot;type&quot;:&quot;text&quot;}"/>
+          <p:cNvPr id="388" name="" descr="{&quot;isTemplate&quot;:true,&quot;type&quot;:&quot;text&quot;}"/>
           <p:cNvSpPr txBox="1"/>
           <p:nvPr/>
         </p:nvSpPr>
@@ -17011,7 +17798,7 @@
       </p:sp>
       <p:sp>
         <p:nvSpPr>
-          <p:cNvPr id="370" name=""/>
+          <p:cNvPr id="389" name=""/>
           <p:cNvSpPr/>
           <p:nvPr/>
         </p:nvSpPr>
@@ -17039,7 +17826,7 @@
       </p:sp>
       <p:sp>
         <p:nvSpPr>
-          <p:cNvPr id="371" name="" descr="{&quot;isTemplate&quot;:true,&quot;type&quot;:&quot;text&quot;}"/>
+          <p:cNvPr id="390" name="" descr="{&quot;isTemplate&quot;:true,&quot;type&quot;:&quot;text&quot;}"/>
           <p:cNvSpPr txBox="1"/>
           <p:nvPr/>
         </p:nvSpPr>
@@ -17074,7 +17861,7 @@
       </p:sp>
       <p:sp>
         <p:nvSpPr>
-          <p:cNvPr id="372" name="" descr="{&quot;isTemplate&quot;:true,&quot;type&quot;:&quot;text&quot;}"/>
+          <p:cNvPr id="391" name="" descr="{&quot;isTemplate&quot;:true,&quot;type&quot;:&quot;text&quot;}"/>
           <p:cNvSpPr txBox="1"/>
           <p:nvPr/>
         </p:nvSpPr>
@@ -17183,7 +17970,7 @@
       </p:sp>
       <p:sp>
         <p:nvSpPr>
-          <p:cNvPr id="373" name=""/>
+          <p:cNvPr id="392" name=""/>
           <p:cNvSpPr/>
           <p:nvPr/>
         </p:nvSpPr>
@@ -17211,7 +17998,7 @@
       </p:sp>
       <p:sp>
         <p:nvSpPr>
-          <p:cNvPr id="374" name="" descr="{&quot;isTemplate&quot;:true,&quot;type&quot;:&quot;text&quot;}"/>
+          <p:cNvPr id="393" name="" descr="{&quot;isTemplate&quot;:true,&quot;type&quot;:&quot;text&quot;}"/>
           <p:cNvSpPr txBox="1"/>
           <p:nvPr/>
         </p:nvSpPr>
@@ -17246,7 +18033,7 @@
       </p:sp>
       <p:sp>
         <p:nvSpPr>
-          <p:cNvPr id="375" name="" descr="{&quot;isTemplate&quot;:true,&quot;type&quot;:&quot;text&quot;}"/>
+          <p:cNvPr id="394" name="" descr="{&quot;isTemplate&quot;:true,&quot;type&quot;:&quot;text&quot;}"/>
           <p:cNvSpPr txBox="1"/>
           <p:nvPr/>
         </p:nvSpPr>
@@ -17355,7 +18142,7 @@
       </p:sp>
       <p:sp>
         <p:nvSpPr>
-          <p:cNvPr id="376" name=""/>
+          <p:cNvPr id="395" name=""/>
           <p:cNvSpPr/>
           <p:nvPr/>
         </p:nvSpPr>
@@ -17397,7 +18184,7 @@
       </p:sp>
       <p:sp>
         <p:nvSpPr>
-          <p:cNvPr id="377" name="" descr="{&quot;isTemplate&quot;:true,&quot;type&quot;:&quot;text&quot;}"/>
+          <p:cNvPr id="396" name="" descr="{&quot;isTemplate&quot;:true,&quot;type&quot;:&quot;text&quot;}"/>
           <p:cNvSpPr txBox="1"/>
           <p:nvPr/>
         </p:nvSpPr>
@@ -17418,7 +18205,7 @@
       </p:sp>
       <p:sp>
         <p:nvSpPr>
-          <p:cNvPr id="378" name="" descr="{&quot;isTemplate&quot;:true,&quot;type&quot;:&quot;text&quot;}"/>
+          <p:cNvPr id="397" name="" descr="{&quot;isTemplate&quot;:true,&quot;type&quot;:&quot;text&quot;}"/>
           <p:cNvSpPr txBox="1"/>
           <p:nvPr/>
         </p:nvSpPr>
@@ -17439,7 +18226,7 @@
       </p:sp>
       <p:sp>
         <p:nvSpPr>
-          <p:cNvPr id="379" name="" descr="{&quot;isTemplate&quot;:true,&quot;type&quot;:&quot;text&quot;}"/>
+          <p:cNvPr id="398" name="" descr="{&quot;isTemplate&quot;:true,&quot;type&quot;:&quot;text&quot;}"/>
           <p:cNvSpPr txBox="1"/>
           <p:nvPr/>
         </p:nvSpPr>
@@ -17494,7 +18281,7 @@
       </p:sp>
       <p:sp>
         <p:nvSpPr>
-          <p:cNvPr id="380" name="" descr="{&quot;isTemplate&quot;:true,&quot;type&quot;:&quot;text&quot;}"/>
+          <p:cNvPr id="399" name="" descr="{&quot;isTemplate&quot;:true,&quot;type&quot;:&quot;text&quot;}"/>
           <p:cNvSpPr txBox="1"/>
           <p:nvPr/>
         </p:nvSpPr>
@@ -17537,7 +18324,7 @@
   <p:cSld>
     <p:spTree>
       <p:nvGrpSpPr>
-        <p:cNvPr id="381" name="" descr="&lt;Slide style={{ width: '1280px', height: '720px', background: '#FBFCFA', position: 'relative', padding: '40px 64px', boxSizing: 'border-box', display: 'flex', flexDirection: 'column' }}&gt;&#10;  &lt;div style={{ flexShrink: 0 }}&gt;&#10;    &lt;div style={{ color: '#BD9B56', fontSize: 13, letterSpacing: '0.25em', marginBottom: 8 }}&gt;02 · 技术构建过程&lt;/div&gt;&#10;    &lt;h2 style={{ fontSize: 30, fontWeight: 'bold', color: '#172133', margin: 0, lineHeight: 1.3 }}&gt;AI Agent 架构：LangGraph 多智能体协作&lt;/h2&gt;&#10;  &lt;/div&gt;&#10;  &lt;div style={{ flex: 1, display: 'flex', alignItems: 'center', gap: 32 }}&gt;&#10;    &lt;div style={{ flex: '0 0 560px', background: '#fff', borderRadius: 12, padding: '22px 24px', boxShadow: '0 6px 24px rgba(23,33,51,0.08)' }}&gt;&#10;      &lt;svg width=&quot;512&quot; height=&quot;470&quot; viewBox=&quot;0 0 512 470&quot;&gt;&#10;        &lt;defs&gt;&#10;          &lt;marker id=&quot;ar9&quot; viewBox=&quot;0 0 10 10&quot; refX=&quot;9&quot; refY=&quot;5&quot; markerWidth=&quot;6&quot; markerHeight=&quot;6&quot; orient=&quot;auto&quot;&gt;&#10;            &lt;path d=&quot;M0 0L10 5L0 10z&quot; fill=&quot;#BD9B56&quot; /&gt;&#10;          &lt;/marker&gt;&#10;        &lt;/defs&gt;&#10;        &lt;g fontFamily=&quot;Inter, sans-serif&quot;&gt;&#10;          &lt;rect x=&quot;156&quot; y=&quot;14&quot; width=&quot;200&quot; height=&quot;50&quot; rx=&quot;8&quot; fill=&quot;rgba(34,57,94,0.08)&quot; stroke=&quot;#22395E&quot; strokeWidth=&quot;1.5&quot; /&gt;&#10;          &lt;text x=&quot;256&quot; y=&quot;36&quot; textAnchor=&quot;middle&quot; fontSize=&quot;13&quot; fontWeight=&quot;bold&quot; fill=&quot;#172133&quot;&gt;用户自然语言输入&lt;/text&gt;&#10;          &lt;text x=&quot;256&quot; y=&quot;54&quot; textAnchor=&quot;middle&quot; fontSize=&quot;11&quot; fill=&quot;#5F5E5A&quot;&gt;「我家厨房漏水了」&lt;/text&gt;&#10;          &lt;line x1=&quot;256&quot; y1=&quot;64&quot; x2=&quot;256&quot; y2=&quot;84&quot; stroke=&quot;#BD9B56&quot; strokeWidth=&quot;1.5&quot; markerEnd=&quot;url(#ar9)&quot; /&gt;&#10;          &lt;rect x=&quot;96&quot; y=&quot;88&quot; width=&quot;320&quot; height=&quot;64&quot; rx=&quot;8&quot; fill=&quot;rgba(34,57,94,0.12)&quot; stroke=&quot;#22395E&quot; strokeWidth=&quot;2&quot; /&gt;&#10;          &lt;text x=&quot;256&quot; y=&quot;114&quot; textAnchor=&quot;middle&quot; fontSize=&quot;13&quot; fontWeight=&quot;bold&quot; fill=&quot;#BD9B56&quot;&gt;Router Agent · 意图分类&lt;/text&gt;&#10;          &lt;text x=&quot;256&quot; y=&quot;136&quot; textAnchor=&quot;middle&quot; fontSize=&quot;11&quot; fill=&quot;#172133&quot;&gt;报修 / 费用 / 公告 / 知识 / 上报&lt;/text&gt;&#10;          &lt;line x1=&quot;256&quot; y1=&quot;152&quot; x2=&quot;256&quot; y2=&quot;172&quot; stroke=&quot;#BD9B56&quot; strokeWidth=&quot;1.5&quot; markerEnd=&quot;url(#ar9)&quot; /&gt;&#10;          &lt;rect x=&quot;96&quot; y=&quot;176&quot; width=&quot;320&quot; height=&quot;64&quot; rx=&quot;8&quot; fill=&quot;rgba(189,155,86,0.10)&quot; stroke=&quot;#BD9B56&quot; strokeWidth=&quot;1.5&quot; /&gt;&#10;          &lt;text x=&quot;256&quot; y=&quot;202&quot; textAnchor=&quot;middle&quot; fontSize=&quot;13&quot; fontWeight=&quot;bold&quot; fill=&quot;#172133&quot;&gt;领域 Agent + 多轮状态机&lt;/text&gt;&#10;          &lt;text x=&quot;256&quot; y=&quot;224&quot; textAnchor=&quot;middle&quot; fontSize=&quot;11&quot; fill=&quot;#5F5E5A&quot;&gt;报修缺「位置/类型」→ 主动反问补全&lt;/text&gt;&#10;          &lt;line x1=&quot;256&quot; y1=&quot;240&quot; x2=&quot;256&quot; y2=&quot;260&quot; stroke=&quot;#BD9B56&quot; strokeWidth=&quot;1.5&quot; markerEnd=&quot;url(#ar9)&quot; /&gt;&#10;          &lt;rect x=&quot;16&quot; y=&quot;264&quot; width=&quot;140&quot; height=&quot;48&quot; rx=&quot;6&quot; fill=&quot;rgba(34,57,94,0.06)&quot; stroke=&quot;#22395E&quot; strokeWidth=&quot;1.5&quot; /&gt;&#10;          &lt;text x=&quot;86&quot; y=&quot;284&quot; textAnchor=&quot;middle&quot; fontSize=&quot;12&quot; fontWeight=&quot;bold&quot; fill=&quot;#172133&quot;&gt;create_repair&lt;/text&gt;&#10;          &lt;text x=&quot;86&quot; y=&quot;302&quot; textAnchor=&quot;middle&quot; fontSize=&quot;10&quot; fill=&quot;#5F5E5A&quot;&gt;创建工单&lt;/text&gt;&#10;          &lt;rect x=&quot;176&quot; y=&quot;264&quot; width=&quot;140&quot; height=&quot;48&quot; rx=&quot;6&quot; fill=&quot;rgba(34,57,94,0.06)&quot; stroke=&quot;#22395E&quot; strokeWidth=&quot;1.5&quot; /&gt;&#10;          &lt;text x=&quot;246&quot; y=&quot;284&quot; textAnchor=&quot;middle&quot; fontSize=&quot;12&quot; fontWeight=&quot;bold&quot; fill=&quot;#172133&quot;&gt;query_fee&lt;/text&gt;&#10;          &lt;text x=&quot;246&quot; y=&quot;302&quot; textAnchor=&quot;middle&quot; fontSize=&quot;10&quot; fill=&quot;#5F5E5A&quot;&gt;查询费用&lt;/text&gt;&#10;          &lt;rect x=&quot;336&quot; y=&quot;264&quot; width=&quot;160&quot; height=&quot;48&quot; rx=&quot;6&quot; fill=&quot;rgba(34,57,94,0.06)&quot; stroke=&quot;#22395E&quot; strokeWidth=&quot;1.5&quot; /&gt;&#10;          &lt;text x=&quot;416&quot; y=&quot;284&quot; textAnchor=&quot;middle&quot; fontSize=&quot;12&quot; fontWeight=&quot;bold&quot; fill=&quot;#172133&quot;&gt;search_knowledge&lt;/text&gt;&#10;          &lt;text x=&quot;416&quot; y=&quot;302&quot; textAnchor=&quot;middle&quot; fontSize=&quot;10&quot; fill=&quot;#5F5E5A&quot;&gt;检索知识&lt;/text&gt;&#10;          &lt;line x1=&quot;256&quot; y1=&quot;260&quot; x2=&quot;256&quot; y2=&quot;288&quot; stroke=&quot;#22395E&quot; strokeWidth=&quot;1.2&quot; /&gt;&#10;          &lt;line x1=&quot;256&quot; y1=&quot;288&quot; x2=&quot;86&quot; y2=&quot;288&quot; stroke=&quot;#22395E&quot; strokeWidth=&quot;1.2&quot; /&gt;&#10;          &lt;line x1=&quot;256&quot; y1=&quot;288&quot; x2=&quot;246&quot; y2=&quot;288&quot; stroke=&quot;#22395E&quot; strokeWidth=&quot;1.2&quot; /&gt;&#10;          &lt;line x1=&quot;256&quot; y1=&quot;288&quot; x2=&quot;416&quot; y2=&quot;288&quot; stroke=&quot;#22395E&quot; strokeWidth=&quot;1.2&quot; /&gt;&#10;          &lt;line x1=&quot;86&quot; y1=&quot;312&quot; x2=&quot;86&quot; y2=&quot;332&quot; stroke=&quot;#22395E&quot; strokeWidth=&quot;1.2&quot; /&gt;&#10;          &lt;line x1=&quot;246&quot; y1=&quot;312&quot; x2=&quot;246&quot; y2=&quot;332&quot; stroke=&quot;#22395E&quot; strokeWidth=&quot;1.2&quot; /&gt;&#10;          &lt;line x1=&quot;416&quot; y1=&quot;312&quot; x2=&quot;416&quot; y2=&quot;332&quot; stroke=&quot;#22395E&quot; strokeWidth=&quot;1.2&quot; /&gt;&#10;          &lt;rect x=&quot;16&quot; y=&quot;336&quot; width=&quot;480&quot; height=&quot;42&quot; rx=&quot;6&quot; fill=&quot;#172133&quot; /&gt;&#10;          &lt;text x=&quot;256&quot; y=&quot;362&quot; textAnchor=&quot;middle&quot; fontSize=&quot;12&quot; fontWeight=&quot;bold&quot; fill=&quot;#BD9B56&quot;&gt;业务 API 层 · 工具执行 · Trace 全程记录可评估&lt;/text&gt;&#10;          &lt;text x=&quot;256&quot; y=&quot;410&quot; textAnchor=&quot;middle&quot; fontSize=&quot;12&quot; fill=&quot;#5F5E5A&quot;&gt;驱动模型：智谱 GLM-4-Flash · 编排框架：LangGraph&lt;/text&gt;&#10;        &lt;/g&gt;&#10;      &lt;/svg&gt;&#10;    &lt;/div&gt;&#10;    &lt;div style={{ flex: 1, display: 'flex', flexDirection: 'column', gap: 18 }}&gt;&#10;      &lt;div&gt;&#10;        &lt;div style={{ fontSize: 14, color: '#BD9B56', fontWeight: 'bold', letterSpacing: '0.1em', marginBottom: 6 }}&gt;1.  多轮状态机&lt;/div&gt;&#10;        &lt;p style={{ fontSize: 14, color: '#5F5E5A', margin: 0, lineHeight: 1.65 }}&gt;报修不是单轮问答——业主只说「厨房漏水」时，Agent 会主动追问房屋位置、故障类型，把信息补全后才创建工单，避免生成残缺工单。&lt;/p&gt;&#10;      &lt;/div&gt;&#10;      &lt;div&gt;&#10;        &lt;div style={{ fontSize: 14, color: '#BD9B56', fontWeight: 'bold', letterSpacing: '0.1em', marginBottom: 6 }}&gt;2.  五类意图&lt;/div&gt;&#10;        &lt;p style={{ fontSize: 14, color: '#5F5E5A', margin: 0, lineHeight: 1.65 }}&gt;报修、费用、公告、知识咨询、问题上报，自然语言直达对应业务工具，实测意图识别准确率 100%。&lt;/p&gt;&#10;      &lt;/div&gt;&#10;      &lt;div&gt;&#10;        &lt;div style={{ fontSize: 14, color: '#BD9B56', fontWeight: 'bold', letterSpacing: '0.1em', marginBottom: 6 }}&gt;3.  可观测可评估&lt;/div&gt;&#10;        &lt;p style={{ fontSize: 14, color: '#5F5E5A', margin: 0, lineHeight: 1.65 }}&gt;每次对话的意图、工具、结果全程记录 Trace，可回放、可评估，是量化评估体系的数据基础。&lt;/p&gt;&#10;      &lt;/div&gt;&#10;    &lt;/div&gt;&#10;  &lt;/div&gt;&#10;  &lt;div style={{ flexShrink: 0, height: 40, display: 'flex', alignItems: 'flex-end', justifyContent: 'space-between' }}&gt;&#10;    &lt;span style={{ color: '#BD9B56', fontSize: 12, letterSpacing: '0.1em' }}&gt;云溪花园 · 智慧社区&lt;/span&gt;&#10;    &lt;span style={{ color: '#a09b8c', fontSize: 12 }}&gt;09 / 15&lt;/span&gt;&#10;  &lt;/div&gt;&#10;&lt;/Slide&gt;"/>
+        <p:cNvPr id="400" name="" descr="&lt;Slide style={{ width: '1280px', height: '720px', background: '#FBFCFA', position: 'relative', padding: '40px 64px', boxSizing: 'border-box', display: 'flex', flexDirection: 'column' }}&gt;&#10;  &lt;div style={{ flexShrink: 0 }}&gt;&#10;    &lt;div style={{ color: '#BD9B56', fontSize: 13, letterSpacing: '0.25em', marginBottom: 8 }}&gt;02 · 技术构建过程&lt;/div&gt;&#10;    &lt;h2 style={{ fontSize: 30, fontWeight: 'bold', color: '#172133', margin: 0, lineHeight: 1.3 }}&gt;AI Agent 架构：LangGraph 多智能体协作&lt;/h2&gt;&#10;  &lt;/div&gt;&#10;  &lt;div style={{ flex: 1, display: 'flex', alignItems: 'center', gap: 32 }}&gt;&#10;    &lt;div style={{ flex: '0 0 560px', background: '#fff', borderRadius: 12, padding: '22px 24px', boxShadow: '0 6px 24px rgba(23,33,51,0.08)' }}&gt;&#10;      &lt;svg width=&quot;512&quot; height=&quot;470&quot; viewBox=&quot;0 0 512 470&quot;&gt;&#10;        &lt;defs&gt;&#10;          &lt;marker id=&quot;ar9&quot; viewBox=&quot;0 0 10 10&quot; refX=&quot;9&quot; refY=&quot;5&quot; markerWidth=&quot;6&quot; markerHeight=&quot;6&quot; orient=&quot;auto&quot;&gt;&#10;            &lt;path d=&quot;M0 0L10 5L0 10z&quot; fill=&quot;#BD9B56&quot; /&gt;&#10;          &lt;/marker&gt;&#10;        &lt;/defs&gt;&#10;        &lt;g fontFamily=&quot;Inter, sans-serif&quot;&gt;&#10;          &lt;rect x=&quot;156&quot; y=&quot;14&quot; width=&quot;200&quot; height=&quot;50&quot; rx=&quot;8&quot; fill=&quot;rgba(34,57,94,0.08)&quot; stroke=&quot;#22395E&quot; strokeWidth=&quot;1.5&quot; /&gt;&#10;          &lt;text x=&quot;256&quot; y=&quot;36&quot; textAnchor=&quot;middle&quot; fontSize=&quot;13&quot; fontWeight=&quot;bold&quot; fill=&quot;#172133&quot;&gt;用户自然语言输入&lt;/text&gt;&#10;          &lt;text x=&quot;256&quot; y=&quot;54&quot; textAnchor=&quot;middle&quot; fontSize=&quot;11&quot; fill=&quot;#5F5E5A&quot;&gt;「我家厨房漏水了」&lt;/text&gt;&#10;          &lt;line x1=&quot;256&quot; y1=&quot;64&quot; x2=&quot;256&quot; y2=&quot;84&quot; stroke=&quot;#BD9B56&quot; strokeWidth=&quot;1.5&quot; markerEnd=&quot;url(#ar9)&quot; /&gt;&#10;          &lt;rect x=&quot;96&quot; y=&quot;88&quot; width=&quot;320&quot; height=&quot;64&quot; rx=&quot;8&quot; fill=&quot;rgba(34,57,94,0.12)&quot; stroke=&quot;#22395E&quot; strokeWidth=&quot;2&quot; /&gt;&#10;          &lt;text x=&quot;256&quot; y=&quot;114&quot; textAnchor=&quot;middle&quot; fontSize=&quot;13&quot; fontWeight=&quot;bold&quot; fill=&quot;#BD9B56&quot;&gt;Router Agent · 意图分类&lt;/text&gt;&#10;          &lt;text x=&quot;256&quot; y=&quot;136&quot; textAnchor=&quot;middle&quot; fontSize=&quot;11&quot; fill=&quot;#172133&quot;&gt;报修 / 费用 / 公告 / 知识 / 上报&lt;/text&gt;&#10;          &lt;line x1=&quot;256&quot; y1=&quot;152&quot; x2=&quot;256&quot; y2=&quot;172&quot; stroke=&quot;#BD9B56&quot; strokeWidth=&quot;1.5&quot; markerEnd=&quot;url(#ar9)&quot; /&gt;&#10;          &lt;rect x=&quot;96&quot; y=&quot;176&quot; width=&quot;320&quot; height=&quot;64&quot; rx=&quot;8&quot; fill=&quot;rgba(189,155,86,0.10)&quot; stroke=&quot;#BD9B56&quot; strokeWidth=&quot;1.5&quot; /&gt;&#10;          &lt;text x=&quot;256&quot; y=&quot;202&quot; textAnchor=&quot;middle&quot; fontSize=&quot;13&quot; fontWeight=&quot;bold&quot; fill=&quot;#172133&quot;&gt;领域 Agent + 多轮状态机&lt;/text&gt;&#10;          &lt;text x=&quot;256&quot; y=&quot;224&quot; textAnchor=&quot;middle&quot; fontSize=&quot;11&quot; fill=&quot;#5F5E5A&quot;&gt;报修缺「位置/类型」→ 主动反问补全&lt;/text&gt;&#10;          &lt;line x1=&quot;256&quot; y1=&quot;240&quot; x2=&quot;256&quot; y2=&quot;260&quot; stroke=&quot;#BD9B56&quot; strokeWidth=&quot;1.5&quot; markerEnd=&quot;url(#ar9)&quot; /&gt;&#10;          &lt;rect x=&quot;16&quot; y=&quot;264&quot; width=&quot;140&quot; height=&quot;48&quot; rx=&quot;6&quot; fill=&quot;rgba(34,57,94,0.06)&quot; stroke=&quot;#22395E&quot; strokeWidth=&quot;1.5&quot; /&gt;&#10;          &lt;text x=&quot;86&quot; y=&quot;284&quot; textAnchor=&quot;middle&quot; fontSize=&quot;12&quot; fontWeight=&quot;bold&quot; fill=&quot;#172133&quot;&gt;create_repair&lt;/text&gt;&#10;          &lt;text x=&quot;86&quot; y=&quot;302&quot; textAnchor=&quot;middle&quot; fontSize=&quot;10&quot; fill=&quot;#5F5E5A&quot;&gt;创建工单&lt;/text&gt;&#10;          &lt;rect x=&quot;176&quot; y=&quot;264&quot; width=&quot;140&quot; height=&quot;48&quot; rx=&quot;6&quot; fill=&quot;rgba(34,57,94,0.06)&quot; stroke=&quot;#22395E&quot; strokeWidth=&quot;1.5&quot; /&gt;&#10;          &lt;text x=&quot;246&quot; y=&quot;284&quot; textAnchor=&quot;middle&quot; fontSize=&quot;12&quot; fontWeight=&quot;bold&quot; fill=&quot;#172133&quot;&gt;query_fee&lt;/text&gt;&#10;          &lt;text x=&quot;246&quot; y=&quot;302&quot; textAnchor=&quot;middle&quot; fontSize=&quot;10&quot; fill=&quot;#5F5E5A&quot;&gt;查询费用&lt;/text&gt;&#10;          &lt;rect x=&quot;336&quot; y=&quot;264&quot; width=&quot;160&quot; height=&quot;48&quot; rx=&quot;6&quot; fill=&quot;rgba(34,57,94,0.06)&quot; stroke=&quot;#22395E&quot; strokeWidth=&quot;1.5&quot; /&gt;&#10;          &lt;text x=&quot;416&quot; y=&quot;284&quot; textAnchor=&quot;middle&quot; fontSize=&quot;12&quot; fontWeight=&quot;bold&quot; fill=&quot;#172133&quot;&gt;search_knowledge&lt;/text&gt;&#10;          &lt;text x=&quot;416&quot; y=&quot;302&quot; textAnchor=&quot;middle&quot; fontSize=&quot;10&quot; fill=&quot;#5F5E5A&quot;&gt;检索知识&lt;/text&gt;&#10;          &lt;line x1=&quot;256&quot; y1=&quot;260&quot; x2=&quot;256&quot; y2=&quot;288&quot; stroke=&quot;#22395E&quot; strokeWidth=&quot;1.2&quot; /&gt;&#10;          &lt;line x1=&quot;256&quot; y1=&quot;288&quot; x2=&quot;86&quot; y2=&quot;288&quot; stroke=&quot;#22395E&quot; strokeWidth=&quot;1.2&quot; /&gt;&#10;          &lt;line x1=&quot;256&quot; y1=&quot;288&quot; x2=&quot;246&quot; y2=&quot;288&quot; stroke=&quot;#22395E&quot; strokeWidth=&quot;1.2&quot; /&gt;&#10;          &lt;line x1=&quot;256&quot; y1=&quot;288&quot; x2=&quot;416&quot; y2=&quot;288&quot; stroke=&quot;#22395E&quot; strokeWidth=&quot;1.2&quot; /&gt;&#10;          &lt;line x1=&quot;86&quot; y1=&quot;312&quot; x2=&quot;86&quot; y2=&quot;332&quot; stroke=&quot;#22395E&quot; strokeWidth=&quot;1.2&quot; /&gt;&#10;          &lt;line x1=&quot;246&quot; y1=&quot;312&quot; x2=&quot;246&quot; y2=&quot;332&quot; stroke=&quot;#22395E&quot; strokeWidth=&quot;1.2&quot; /&gt;&#10;          &lt;line x1=&quot;416&quot; y1=&quot;312&quot; x2=&quot;416&quot; y2=&quot;332&quot; stroke=&quot;#22395E&quot; strokeWidth=&quot;1.2&quot; /&gt;&#10;          &lt;rect x=&quot;16&quot; y=&quot;336&quot; width=&quot;480&quot; height=&quot;42&quot; rx=&quot;6&quot; fill=&quot;#172133&quot; /&gt;&#10;          &lt;text x=&quot;256&quot; y=&quot;362&quot; textAnchor=&quot;middle&quot; fontSize=&quot;12&quot; fontWeight=&quot;bold&quot; fill=&quot;#BD9B56&quot;&gt;业务 API 层 · 工具执行 · Trace 全程记录可评估&lt;/text&gt;&#10;          &lt;text x=&quot;256&quot; y=&quot;410&quot; textAnchor=&quot;middle&quot; fontSize=&quot;12&quot; fill=&quot;#5F5E5A&quot;&gt;驱动模型：智谱 GLM-4-Flash · 编排框架：LangGraph&lt;/text&gt;&#10;        &lt;/g&gt;&#10;      &lt;/svg&gt;&#10;    &lt;/div&gt;&#10;    &lt;div style={{ flex: 1, display: 'flex', flexDirection: 'column', gap: 18 }}&gt;&#10;      &lt;div&gt;&#10;        &lt;div style={{ fontSize: 14, color: '#BD9B56', fontWeight: 'bold', letterSpacing: '0.1em', marginBottom: 6 }}&gt;1.  多轮状态机&lt;/div&gt;&#10;        &lt;p style={{ fontSize: 14, color: '#5F5E5A', margin: 0, lineHeight: 1.65 }}&gt;报修不是单轮问答——业主只说「厨房漏水」时，Agent 会主动追问房屋位置、故障类型，把信息补全后才创建工单，避免生成残缺工单。&lt;/p&gt;&#10;      &lt;/div&gt;&#10;      &lt;div&gt;&#10;        &lt;div style={{ fontSize: 14, color: '#BD9B56', fontWeight: 'bold', letterSpacing: '0.1em', marginBottom: 6 }}&gt;2.  五类意图&lt;/div&gt;&#10;        &lt;p style={{ fontSize: 14, color: '#5F5E5A', margin: 0, lineHeight: 1.65 }}&gt;报修、费用、公告、知识咨询、问题上报，自然语言直达对应业务工具，实测意图识别准确率 100%。&lt;/p&gt;&#10;      &lt;/div&gt;&#10;      &lt;div&gt;&#10;        &lt;div style={{ fontSize: 14, color: '#BD9B56', fontWeight: 'bold', letterSpacing: '0.1em', marginBottom: 6 }}&gt;3.  可观测可评估&lt;/div&gt;&#10;        &lt;p style={{ fontSize: 14, color: '#5F5E5A', margin: 0, lineHeight: 1.65 }}&gt;每次对话的意图、工具、结果全程记录 Trace，可回放、可评估，是量化评估体系的数据基础。&lt;/p&gt;&#10;      &lt;/div&gt;&#10;    &lt;/div&gt;&#10;  &lt;/div&gt;&#10;  &lt;div style={{ flexShrink: 0, height: 40, display: 'flex', alignItems: 'flex-end', justifyContent: 'space-between' }}&gt;&#10;    &lt;span style={{ color: '#BD9B56', fontSize: 12, letterSpacing: '0.1em' }}&gt;云溪花园 · 智慧社区&lt;/span&gt;&#10;    &lt;span style={{ color: '#a09b8c', fontSize: 12 }}&gt;09 / 15&lt;/span&gt;&#10;  &lt;/div&gt;&#10;&lt;/Slide&gt;"/>
         <p:cNvGrpSpPr/>
         <p:nvPr/>
       </p:nvGrpSpPr>
@@ -17551,7 +18338,7 @@
       </p:grpSpPr>
       <p:sp>
         <p:nvSpPr>
-          <p:cNvPr id="382" name=""/>
+          <p:cNvPr id="401" name=""/>
           <p:cNvSpPr/>
           <p:nvPr/>
         </p:nvSpPr>
@@ -17575,7 +18362,7 @@
       </p:sp>
       <p:sp>
         <p:nvSpPr>
-          <p:cNvPr id="383" name="" descr="{&quot;isTemplate&quot;:true,&quot;type&quot;:&quot;text&quot;}"/>
+          <p:cNvPr id="402" name="" descr="{&quot;isTemplate&quot;:true,&quot;type&quot;:&quot;text&quot;}"/>
           <p:cNvSpPr txBox="1"/>
           <p:nvPr/>
         </p:nvSpPr>
@@ -17620,7 +18407,7 @@
       </p:sp>
       <p:sp>
         <p:nvSpPr>
-          <p:cNvPr id="384" name="" descr="{&quot;isTemplate&quot;:true,&quot;type&quot;:&quot;text&quot;}"/>
+          <p:cNvPr id="403" name="" descr="{&quot;isTemplate&quot;:true,&quot;type&quot;:&quot;text&quot;}"/>
           <p:cNvSpPr txBox="1"/>
           <p:nvPr/>
         </p:nvSpPr>
@@ -17685,7 +18472,7 @@
       </p:sp>
       <p:sp>
         <p:nvSpPr>
-          <p:cNvPr id="385" name=""/>
+          <p:cNvPr id="404" name=""/>
           <p:cNvSpPr/>
           <p:nvPr/>
         </p:nvSpPr>
@@ -17718,7 +18505,7 @@
       </p:sp>
       <p:pic>
         <p:nvPicPr>
-          <p:cNvPr id="386" name=""/>
+          <p:cNvPr id="405" name=""/>
           <p:cNvPicPr>
             <a:picLocks noChangeAspect="1"/>
           </p:cNvPicPr>
@@ -17749,7 +18536,7 @@
       </p:pic>
       <p:sp>
         <p:nvSpPr>
-          <p:cNvPr id="387" name="" descr="{&quot;isTemplate&quot;:true,&quot;type&quot;:&quot;text&quot;}"/>
+          <p:cNvPr id="406" name="" descr="{&quot;isTemplate&quot;:true,&quot;type&quot;:&quot;text&quot;}"/>
           <p:cNvSpPr txBox="1"/>
           <p:nvPr/>
         </p:nvSpPr>
@@ -17794,7 +18581,7 @@
       </p:sp>
       <p:sp>
         <p:nvSpPr>
-          <p:cNvPr id="388" name="" descr="{&quot;isTemplate&quot;:true,&quot;type&quot;:&quot;text&quot;}"/>
+          <p:cNvPr id="407" name="" descr="{&quot;isTemplate&quot;:true,&quot;type&quot;:&quot;text&quot;}"/>
           <p:cNvSpPr txBox="1"/>
           <p:nvPr/>
         </p:nvSpPr>
@@ -17851,7 +18638,7 @@
       </p:sp>
       <p:sp>
         <p:nvSpPr>
-          <p:cNvPr id="389" name="" descr="{&quot;isTemplate&quot;:true,&quot;type&quot;:&quot;text&quot;}"/>
+          <p:cNvPr id="408" name="" descr="{&quot;isTemplate&quot;:true,&quot;type&quot;:&quot;text&quot;}"/>
           <p:cNvSpPr txBox="1"/>
           <p:nvPr/>
         </p:nvSpPr>
@@ -17896,7 +18683,7 @@
       </p:sp>
       <p:sp>
         <p:nvSpPr>
-          <p:cNvPr id="390" name="" descr="{&quot;isTemplate&quot;:true,&quot;type&quot;:&quot;text&quot;}"/>
+          <p:cNvPr id="409" name="" descr="{&quot;isTemplate&quot;:true,&quot;type&quot;:&quot;text&quot;}"/>
           <p:cNvSpPr txBox="1"/>
           <p:nvPr/>
         </p:nvSpPr>
@@ -17953,7 +18740,7 @@
       </p:sp>
       <p:sp>
         <p:nvSpPr>
-          <p:cNvPr id="391" name="" descr="{&quot;isTemplate&quot;:true,&quot;type&quot;:&quot;text&quot;}"/>
+          <p:cNvPr id="410" name="" descr="{&quot;isTemplate&quot;:true,&quot;type&quot;:&quot;text&quot;}"/>
           <p:cNvSpPr txBox="1"/>
           <p:nvPr/>
         </p:nvSpPr>
@@ -17998,7 +18785,7 @@
       </p:sp>
       <p:sp>
         <p:nvSpPr>
-          <p:cNvPr id="392" name="" descr="{&quot;isTemplate&quot;:true,&quot;type&quot;:&quot;text&quot;}"/>
+          <p:cNvPr id="411" name="" descr="{&quot;isTemplate&quot;:true,&quot;type&quot;:&quot;text&quot;}"/>
           <p:cNvSpPr txBox="1"/>
           <p:nvPr/>
         </p:nvSpPr>
@@ -18055,7 +18842,7 @@
       </p:sp>
       <p:sp>
         <p:nvSpPr>
-          <p:cNvPr id="393" name="" descr="{&quot;isTemplate&quot;:true,&quot;type&quot;:&quot;text&quot;}"/>
+          <p:cNvPr id="412" name="" descr="{&quot;isTemplate&quot;:true,&quot;type&quot;:&quot;text&quot;}"/>
           <p:cNvSpPr txBox="1"/>
           <p:nvPr/>
         </p:nvSpPr>
@@ -18110,7 +18897,7 @@
       </p:sp>
       <p:sp>
         <p:nvSpPr>
-          <p:cNvPr id="394" name="" descr="{&quot;isTemplate&quot;:true,&quot;type&quot;:&quot;text&quot;}"/>
+          <p:cNvPr id="413" name="" descr="{&quot;isTemplate&quot;:true,&quot;type&quot;:&quot;text&quot;}"/>
           <p:cNvSpPr txBox="1"/>
           <p:nvPr/>
         </p:nvSpPr>

--- a/ppt/AI物业社区智能体方案/AI物业社区智能体-方案.pptx
+++ b/ppt/AI物业社区智能体方案/AI物业社区智能体-方案.pptx
@@ -5,7 +5,7 @@
     <p:sldMasterId id="2147483648" r:id="rId0"/>
   </p:sldMasterIdLst>
   <p:notesMasterIdLst>
-    <p:notesMasterId r:id="rId16"/>
+    <p:notesMasterId r:id="rId20"/>
   </p:notesMasterIdLst>
   <p:sldIdLst>
     <p:sldId id="256" r:id="rId1"/>
@@ -23,6 +23,10 @@
     <p:sldId id="268" r:id="rId13"/>
     <p:sldId id="269" r:id="rId14"/>
     <p:sldId id="270" r:id="rId15"/>
+    <p:sldId id="271" r:id="rId16"/>
+    <p:sldId id="272" r:id="rId17"/>
+    <p:sldId id="273" r:id="rId18"/>
+    <p:sldId id="274" r:id="rId19"/>
   </p:sldIdLst>
   <p:sldSz cx="12192000" cy="6858000"/>
   <p:notesSz cx="6858000" cy="12192000"/>
@@ -558,7 +562,7 @@
   <p:cSld>
     <p:spTree>
       <p:nvGrpSpPr>
-        <p:cNvPr id="1" name="" descr="&lt;Slide style={{ width: '1280px', height: '720px', position: 'relative', overflow: 'hidden', background: '#172133' }}&gt;&#10;  &lt;img src=&quot;assets/hero_community.png&quot; style={{ position: 'absolute', inset: 0, width: '100%', height: '100%', objectFit: 'cover' }} /&gt;&#10;  &lt;div style={{ position: 'absolute', inset: 0, background: 'linear-gradient(90deg, rgba(23,33,51,0.9) 0%, rgba(23,33,51,0.55) 45%, rgba(23,33,51,0.05) 100%)' }} /&gt;&#10;  &lt;div style={{ position: 'absolute', left: 64, top: 0, height: '100%', display: 'flex', flexDirection: 'column', justifyContent: 'center', width: 820, color: '#FBFCFA' }}&gt;&#10;    &lt;div style={{ display: 'flex', alignItems: 'center', gap: 16, marginBottom: 28 }}&gt;&#10;      &lt;span style={{ color: '#BD9B56', fontSize: 36, lineHeight: 1 }}&gt;◆&lt;/span&gt;&#10;      &lt;span style={{ fontSize: 17, letterSpacing: '0.3em', color: '#BD9B56' }}&gt;YUNXI GARDEN&lt;/span&gt;&#10;    &lt;/div&gt;&#10;    &lt;h1 style={{ fontSize: 60, fontWeight: 'bold', margin: 0, lineHeight: 1.2, color: '#FBFCFA' }}&gt;AI 物业社区智能体&lt;/h1&gt;&#10;    &lt;p style={{ fontSize: 24, marginTop: 26, color: '#FBFCFA', opacity: 0.88, lineHeight: 1.5 }}&gt;基于 LLM + Agent + RAG 的 AI Native 物业社区管理平台&lt;/p&gt;&#10;    &lt;div style={{ width: 88, height: 3, background: '#BD9B56', marginTop: 40 }} /&gt;&#10;    &lt;p style={{ fontSize: 14, marginTop: 24, color: '#BD9B56', letterSpacing: '0.18em' }}&gt;SCHOOL PROJECT · 2026&lt;/p&gt;&#10;  &lt;/div&gt;&#10;  &lt;div style={{ position: 'absolute', left: 64, bottom: 28, color: '#BD9B56', fontSize: 13, letterSpacing: '0.12em' }}&gt;云溪花园 · 智慧社区&lt;/div&gt;&#10;  &lt;div style={{ position: 'absolute', right: 28, bottom: 28, color: 'rgba(189,155,86,0.75)', fontSize: 13 }}&gt;01 / 15&lt;/div&gt;&#10;&lt;/Slide&gt;"/>
+        <p:cNvPr id="1" name="" descr="&lt;Slide style={{ width: '1280px', height: '720px', position: 'relative', overflow: 'hidden', background: '#172133' }}&gt;&#13;&#10;  &lt;img src=&quot;assets/hero_community.png&quot; style={{ position: 'absolute', inset: 0, width: '100%', height: '100%', objectFit: 'cover' }} /&gt;&#13;&#10;  &lt;div style={{ position: 'absolute', inset: 0, background: 'linear-gradient(90deg, rgba(23,33,51,0.9) 0%, rgba(23,33,51,0.55) 45%, rgba(23,33,51,0.05) 100%)' }} /&gt;&#13;&#10;  &lt;div style={{ position: 'absolute', left: 64, top: 0, height: '100%', display: 'flex', flexDirection: 'column', justifyContent: 'center', width: 820, color: '#FBFCFA' }}&gt;&#13;&#10;    &lt;div style={{ display: 'flex', alignItems: 'center', gap: 16, marginBottom: 28 }}&gt;&#13;&#10;      &lt;span style={{ color: '#BD9B56', fontSize: 36, lineHeight: 1 }}&gt;◆&lt;/span&gt;&#13;&#10;      &lt;span style={{ fontSize: 17, letterSpacing: '0.3em', color: '#BD9B56' }}&gt;YUNXI GARDEN&lt;/span&gt;&#13;&#10;    &lt;/div&gt;&#13;&#10;    &lt;h1 style={{ fontSize: 60, fontWeight: 'bold', margin: 0, lineHeight: 1.2, color: '#FBFCFA' }}&gt;AI 物业社区智能体&lt;/h1&gt;&#13;&#10;    &lt;p style={{ fontSize: 24, marginTop: 26, color: '#FBFCFA', opacity: 0.88, lineHeight: 1.5 }}&gt;基于 LLM + Agent + RAG 的 AI Native 物业社区管理平台&lt;/p&gt;&#13;&#10;    &lt;div style={{ width: 88, height: 3, background: '#BD9B56', marginTop: 40 }} /&gt;&#13;&#10;    &lt;p style={{ fontSize: 14, marginTop: 24, color: '#BD9B56', letterSpacing: '0.18em' }}&gt;SCHOOL PROJECT · 2026&lt;/p&gt;&#13;&#10;  &lt;/div&gt;&#13;&#10;  &lt;div style={{ position: 'absolute', left: 64, bottom: 28, color: '#BD9B56', fontSize: 13, letterSpacing: '0.12em' }}&gt;云溪花园 · 智慧社区&lt;/div&gt;&#13;&#10;  &lt;div style={{ position: 'absolute', right: 28, bottom: 28, color: 'rgba(189,155,86,0.75)', fontSize: 13 }}&gt;01 / 19&lt;/div&gt;&#13;&#10;&lt;/Slide&gt;"/>
         <p:cNvGrpSpPr/>
         <p:nvPr/>
       </p:nvGrpSpPr>
@@ -1005,7 +1009,7 @@
                 <a:latin typeface="Microsoft YaHei"/>
                 <a:ea typeface="Microsoft YaHei"/>
               </a:rPr>
-              <a:t>01 / 15</a:t>
+              <a:t>01 / 19</a:t>
             </a:r>
             <a:endParaRPr/>
           </a:p>
@@ -1021,7 +1025,7 @@
   <p:cSld>
     <p:spTree>
       <p:nvGrpSpPr>
-        <p:cNvPr id="13" name="" descr="&lt;Slide style={{ width: '1280px', height: '720px', background: '#FBFCFA', position: 'relative', padding: '40px 64px', boxSizing: 'border-box', display: 'flex', flexDirection: 'column' }}&gt;&#10;  &lt;div style={{ flexShrink: 0 }}&gt;&#10;    &lt;div style={{ color: '#BD9B56', fontSize: 13, letterSpacing: '0.25em', marginBottom: 8 }}&gt;02 · 技术构建过程&lt;/div&gt;&#10;    &lt;h2 style={{ fontSize: 30, fontWeight: 'bold', color: '#172133', margin: 0, lineHeight: 1.3 }}&gt;RAG 知识库：检索物业「隐性知识」&lt;/h2&gt;&#10;    &lt;div style={{ fontSize: 14, color: '#6b7075', marginTop: 8 }}&gt;22 篇文档不是凭空编造，而是参照官方示范文本与法律规范拟定，每篇标注制定依据&lt;/div&gt;&#10;  &lt;/div&gt;&#10;  &lt;div style={{ flex: 1, display: 'flex', alignItems: 'center', gap: 28 }}&gt;&#10;    &lt;div style={{ flex: '0 0 430px', background: '#fff', borderRadius: 12, padding: '20px 22px', boxShadow: '0 6px 24px rgba(23,33,51,0.08)' }}&gt;&#10;      &lt;div style={{ fontSize: 14, color: '#BD9B56', fontWeight: 'bold', letterSpacing: '0.1em', marginBottom: 12 }}&gt;知识库目录（7 分类 22 篇）&lt;/div&gt;&#10;      &lt;div style={{ display: 'flex', flexDirection: 'column', gap: 8 }}&gt;&#10;        &lt;div style={{ display: 'flex', justifyContent: 'space-between', fontSize: 13, color: '#172133', padding: '4px 0', borderBottom: '1px solid rgba(34,57,94,0.06)' }}&gt;&lt;span&gt;community-rules 社区规约&lt;/span&gt;&lt;span style={{ color: '#5F5E5A' }}&gt;3 篇&lt;/span&gt;&lt;/div&gt;&#10;        &lt;div style={{ display: 'flex', justifyContent: 'space-between', fontSize: 13, color: '#172133', padding: '4px 0', borderBottom: '1px solid rgba(34,57,94,0.06)' }}&gt;&lt;span&gt;decoration 装修管理&lt;/span&gt;&lt;span style={{ color: '#5F5E5A' }}&gt;3 篇&lt;/span&gt;&lt;/div&gt;&#10;        &lt;div style={{ display: 'flex', justifyContent: 'space-between', fontSize: 13, color: '#172133', padding: '4px 0', borderBottom: '1px solid rgba(34,57,94,0.06)' }}&gt;&lt;span&gt;parking 停车管理&lt;/span&gt;&lt;span style={{ color: '#5F5E5A' }}&gt;3 篇&lt;/span&gt;&lt;/div&gt;&#10;        &lt;div style={{ display: 'flex', justifyContent: 'space-between', fontSize: 13, color: '#172133', padding: '4px 0', borderBottom: '1px solid rgba(34,57,94,0.06)' }}&gt;&lt;span&gt;property-service 物业服务&lt;/span&gt;&lt;span style={{ color: '#5F5E5A' }}&gt;3 篇&lt;/span&gt;&lt;/div&gt;&#10;        &lt;div style={{ display: 'flex', justifyContent: 'space-between', fontSize: 13, color: '#172133', padding: '4px 0', borderBottom: '1px solid rgba(34,57,94,0.06)' }}&gt;&lt;span&gt;emergency 应急管理&lt;/span&gt;&lt;span style={{ color: '#5F5E5A' }}&gt;3 篇&lt;/span&gt;&lt;/div&gt;&#10;        &lt;div style={{ display: 'flex', justifyContent: 'space-between', fontSize: 13, color: '#172133', padding: '4px 0', borderBottom: '1px solid rgba(34,57,94,0.06)' }}&gt;&lt;span&gt;security 安保管理&lt;/span&gt;&lt;span style={{ color: '#5F5E5A' }}&gt;3 篇&lt;/span&gt;&lt;/div&gt;&#10;        &lt;div style={{ display: 'flex', justifyContent: 'space-between', fontSize: 13, color: '#172133', padding: '4px 0' }}&gt;&lt;span&gt;faq 常见问题&lt;/span&gt;&lt;span style={{ color: '#5F5E5A' }}&gt;4 篇&lt;/span&gt;&lt;/div&gt;&#10;      &lt;/div&gt;&#10;      &lt;div style={{ marginTop: 14, padding: '12px 14px', background: 'rgba(189,155,86,0.10)', borderRadius: 8 }}&gt;&#10;        &lt;div style={{ fontSize: 12, color: '#BD9B56', fontWeight: 'bold', marginBottom: 6 }}&gt;制定依据（原文可查）&lt;/div&gt;&#10;        &lt;div style={{ fontSize: 12, color: '#5F5E5A', lineHeight: 1.7 }}&gt;&#10;          依据《民法典》《物业管理条例》《上海市住宅物业管理规定》，参照上海市住建委 2021 版住宅小区管理规约示范文本&#10;        &lt;/div&gt;&#10;      &lt;/div&gt;&#10;    &lt;/div&gt;&#10;    &lt;div style={{ flex: 1, display: 'flex', flexDirection: 'column', gap: 14 }}&gt;&#10;      &lt;div style={{ background: '#fff', borderRadius: 12, padding: '16px 20px', boxShadow: '0 4px 16px rgba(23,33,51,0.06)' }}&gt;&#10;        &lt;div style={{ fontSize: 14, color: '#BD9B56', fontWeight: 'bold', letterSpacing: '0.1em', marginBottom: 10 }}&gt;检索链路&lt;/div&gt;&#10;        &lt;div style={{ display: 'flex', alignItems: 'center', gap: 8, flexWrap: 'wrap' }}&gt;&#10;          &lt;span style={{ fontSize: 13, color: '#172133', background: 'rgba(34,57,94,0.06)', padding: '6px 12px', borderRadius: 6 }}&gt;22 文档&lt;/span&gt;&#10;          &lt;span style={{ color: '#BD9B56' }}&gt;→&lt;/span&gt;&#10;          &lt;span style={{ fontSize: 13, color: '#172133', background: 'rgba(34,57,94,0.06)', padding: '6px 12px', borderRadius: 6 }}&gt;99 切片&lt;/span&gt;&#10;          &lt;span style={{ color: '#BD9B56' }}&gt;→&lt;/span&gt;&#10;          &lt;span style={{ fontSize: 13, color: '#172133', background: 'rgba(34,57,94,0.06)', padding: '6px 12px', borderRadius: 6 }}&gt;embedding-3（1024 维）&lt;/span&gt;&#10;          &lt;span style={{ color: '#BD9B56' }}&gt;→&lt;/span&gt;&#10;          &lt;span style={{ fontSize: 13, color: '#172133', background: 'rgba(34,57,94,0.06)', padding: '6px 12px', borderRadius: 6 }}&gt;pgvector 检索 top-5&lt;/span&gt;&#10;          &lt;span style={{ color: '#BD9B56' }}&gt;→&lt;/span&gt;&#10;          &lt;span style={{ fontSize: 13, color: '#172133', background: 'rgba(34,57,94,0.06)', padding: '6px 12px', borderRadius: 6 }}&gt;GLM-4-Flash 生成答案&lt;/span&gt;&#10;        &lt;/div&gt;&#10;      &lt;/div&gt;&#10;      &lt;div style={{ background: '#fff', borderRadius: 12, padding: '16px 20px', boxShadow: '0 4px 16px rgba(23,33,51,0.06)' }}&gt;&#10;        &lt;div style={{ fontSize: 14, color: '#BD9B56', fontWeight: 'bold', letterSpacing: '0.1em', marginBottom: 8 }}&gt;实测指标&lt;/div&gt;&#10;        &lt;p style={{ fontSize: 14, color: '#5F5E5A', margin: 0, lineHeight: 1.7 }}&gt;召回 Recall@5 = &lt;span style={{ color: '#BD9B56', fontWeight: 'bold' }}&gt;100%&lt;/span&gt;（检索到的片段必含答案）· 答案准确率 &lt;span style={{ color: '#BD9B56', fontWeight: 'bold' }}&gt;100%&lt;/span&gt;&lt;/p&gt;&#10;      &lt;/div&gt;&#10;      &lt;div style={{ background: '#fff', borderRadius: 12, padding: '16px 20px', boxShadow: '0 4px 16px rgba(23,33,51,0.06)' }}&gt;&#10;        &lt;div style={{ fontSize: 14, color: '#BD9B56', fontWeight: 'bold', letterSpacing: '0.1em', marginBottom: 8 }}&gt;反馈自进化闭环&lt;/div&gt;&#10;        &lt;p style={{ fontSize: 14, color: '#5F5E5A', margin: 0, lineHeight: 1.7 }}&gt;业主对答案点赞/纠错 → 系统沉淀「知识缺口」→ 物业人工审核 → 审核通过自动写入知识库，让知识越用越准。&lt;/p&gt;&#10;      &lt;/div&gt;&#10;    &lt;/div&gt;&#10;  &lt;/div&gt;&#10;  &lt;div style={{ flexShrink: 0, height: 40, display: 'flex', alignItems: 'flex-end', justifyContent: 'space-between' }}&gt;&#10;    &lt;span style={{ color: '#BD9B56', fontSize: 12, letterSpacing: '0.1em' }}&gt;云溪花园 · 智慧社区&lt;/span&gt;&#10;    &lt;span style={{ color: '#a09b8c', fontSize: 12 }}&gt;10 / 15&lt;/span&gt;&#10;  &lt;/div&gt;&#10;&lt;/Slide&gt;"/>
+        <p:cNvPr id="13" name="" descr="&lt;Slide style={{ width: '1280px', height: '720px', background: '#FBFCFA', position: 'relative', padding: '40px 64px', boxSizing: 'border-box', display: 'flex', flexDirection: 'column' }}&gt;&#13;&#10;  &lt;div style={{ flexShrink: 0 }}&gt;&#13;&#10;    &lt;div style={{ color: '#BD9B56', fontSize: 13, letterSpacing: '0.25em', marginBottom: 8 }}&gt;02 · 技术构建过程&lt;/div&gt;&#13;&#10;    &lt;h2 style={{ fontSize: 30, fontWeight: 'bold', color: '#172133', margin: 0, lineHeight: 1.3 }}&gt;后端分层 + 前端三端一体&lt;/h2&gt;&#13;&#10;  &lt;/div&gt;&#13;&#10;  &lt;div style={{ flex: 1, display: 'flex', alignItems: 'center', gap: 32 }}&gt;&#13;&#10;    &lt;div style={{ flex: 1, display: 'flex', flexDirection: 'column', gap: 16 }}&gt;&#13;&#10;      &lt;div style={{ background: '#fff', borderRadius: 10, padding: '18px 22px', boxShadow: '0 4px 16px rgba(23,33,51,0.06)' }}&gt;&#13;&#10;        &lt;div style={{ fontSize: 17, fontWeight: 'bold', color: '#172133', marginBottom: 6 }}&gt;后端：FastAPI 三层架构&lt;/div&gt;&#13;&#10;        &lt;p style={{ fontSize: 14, color: '#5F5E5A', margin: 0, lineHeight: 1.6 }}&gt;API 路由层 → Service 业务层 → Repository 数据层。业务与数据解耦，AI 逻辑不混入业务代码。&lt;/p&gt;&#13;&#10;      &lt;/div&gt;&#13;&#10;      &lt;div style={{ background: '#fff', borderRadius: 10, padding: '18px 22px', boxShadow: '0 4px 16px rgba(23,33,51,0.06)' }}&gt;&#13;&#10;        &lt;div style={{ fontSize: 17, fontWeight: 'bold', color: '#172133', marginBottom: 6 }}&gt;派单算法&lt;/div&gt;&#13;&#10;        &lt;p style={{ fontSize: 14, color: '#5F5E5A', margin: 0, lineHeight: 1.6 }}&gt;按「技能匹配 + 在岗状态 + 工号升序」自动选择维修师傅，无需人工指派，报修提交即自动派单。&lt;/p&gt;&#13;&#10;      &lt;/div&gt;&#13;&#10;      &lt;div style={{ background: '#fff', borderRadius: 10, padding: '18px 22px', boxShadow: '0 4px 16px rgba(23,33,51,0.06)' }}&gt;&#13;&#10;        &lt;div style={{ fontSize: 17, fontWeight: 'bold', color: '#172133', marginBottom: 6 }}&gt;消息通知&lt;/div&gt;&#13;&#10;        &lt;p style={{ fontSize: 14, color: '#5F5E5A', margin: 0, lineHeight: 1.6 }}&gt;派单、完成、答复、巡检异常等事件全链路实时通知相关角色，保证业务协同不遗漏。&lt;/p&gt;&#13;&#10;      &lt;/div&gt;&#13;&#10;    &lt;/div&gt;&#13;&#10;    &lt;div style={{ flex: 1, background: 'linear-gradient(135deg, #172133 0%, #22395E 100%)', borderRadius: 12, padding: '26px 26px', color: '#FBFCFA' }}&gt;&#13;&#10;      &lt;div style={{ color: '#BD9B56', fontSize: 13, letterSpacing: '0.25em', marginBottom: 18 }}&gt;FRONTEND · 三端&lt;/div&gt;&#13;&#10;      &lt;div style={{ display: 'flex', flexDirection: 'column', gap: 14 }}&gt;&#13;&#10;        &lt;div style={{ display: 'flex', alignItems: 'center', gap: 12, padding: '12px 16px', background: 'rgba(189,155,86,0.10)', borderRadius: 8 }}&gt;&#13;&#10;          &lt;span style={{ color: '#BD9B56', fontSize: 17, fontWeight: 'bold', minWidth: 64 }}&gt;业主端&lt;/span&gt;&#13;&#10;          &lt;span style={{ fontSize: 13, color: 'rgba(251,252,250,0.85)' }}&gt;AI 助手 · 报修 · 缴费 · 公告 · 问题上报&lt;/span&gt;&#13;&#10;        &lt;/div&gt;&#13;&#10;        &lt;div style={{ display: 'flex', alignItems: 'center', gap: 12, padding: '12px 16px', background: 'rgba(189,155,86,0.10)', borderRadius: 8 }}&gt;&#13;&#10;          &lt;span style={{ color: '#BD9B56', fontSize: 17, fontWeight: 'bold', minWidth: 64 }}&gt;物业端&lt;/span&gt;&#13;&#10;          &lt;span style={{ fontSize: 13, color: 'rgba(251,252,250,0.85)' }}&gt;工单管理 · 巡检 · 数据看板 · 知识审核&lt;/span&gt;&#13;&#10;        &lt;/div&gt;&#13;&#10;        &lt;div style={{ display: 'flex', alignItems: 'center', gap: 12, padding: '12px 16px', background: 'rgba(189,155,86,0.10)', borderRadius: 8 }}&gt;&#13;&#10;          &lt;span style={{ color: '#BD9B56', fontSize: 17, fontWeight: 'bold', minWidth: 64 }}&gt;维修端&lt;/span&gt;&#13;&#10;          &lt;span style={{ fontSize: 13, color: 'rgba(251,252,250,0.85)' }}&gt;接单 · 处理 · 消息 · 巡检任务&lt;/span&gt;&#13;&#10;        &lt;/div&gt;&#13;&#10;      &lt;/div&gt;&#13;&#10;      &lt;div style={{ marginTop: 20, paddingTop: 18, borderTop: '1px solid rgba(189,155,86,0.3)' }}&gt;&#13;&#10;        &lt;div style={{ fontSize: 13, color: 'rgba(251,252,250,0.8)', lineHeight: 1.7 }}&gt;&#13;&#10;          React + TypeScript + Tailwind&lt;br/&gt;JWT 鉴权 · 角色路由 · 支持 PWA 安装&lt;br/&gt;后端 113 测试 + 前端 30 测试全绿&#13;&#10;        &lt;/div&gt;&#13;&#10;      &lt;/div&gt;&#13;&#10;    &lt;/div&gt;&#13;&#10;  &lt;/div&gt;&#13;&#10;  &lt;div style={{ flexShrink: 0, height: 40, display: 'flex', alignItems: 'flex-end', justifyContent: 'space-between' }}&gt;&#13;&#10;    &lt;span style={{ color: '#BD9B56', fontSize: 12, letterSpacing: '0.1em' }}&gt;云溪花园 · 智慧社区&lt;/span&gt;&#13;&#10;    &lt;span style={{ color: '#a09b8c', fontSize: 12 }}&gt;10 / 19&lt;/span&gt;&#13;&#10;  &lt;/div&gt;&#13;&#10;&lt;/Slide&gt;"/>
         <p:cNvGrpSpPr/>
         <p:nvPr/>
       </p:nvGrpSpPr>
@@ -1124,6 +1128,16 @@
               </a:lnSpc>
             </a:pPr>
             <a:r>
+              <a:rPr lang="zh-CN" sz="2250" b="1">
+                <a:solidFill>
+                  <a:srgbClr val="172133"/>
+                </a:solidFill>
+                <a:latin typeface="Microsoft YaHei"/>
+                <a:ea typeface="Microsoft YaHei"/>
+              </a:rPr>
+              <a:t>后端分层</a:t>
+            </a:r>
+            <a:r>
               <a:rPr lang="en-US" sz="2250" b="1">
                 <a:solidFill>
                   <a:srgbClr val="172133"/>
@@ -1131,6 +1145,2008 @@
                 <a:latin typeface="Microsoft YaHei"/>
                 <a:ea typeface="Microsoft YaHei"/>
               </a:rPr>
+              <a:t> + </a:t>
+            </a:r>
+            <a:r>
+              <a:rPr lang="zh-CN" sz="2250" b="1">
+                <a:solidFill>
+                  <a:srgbClr val="172133"/>
+                </a:solidFill>
+                <a:latin typeface="Microsoft YaHei"/>
+                <a:ea typeface="Microsoft YaHei"/>
+              </a:rPr>
+              <a:t>前端三端一体</a:t>
+            </a:r>
+            <a:endParaRPr/>
+          </a:p>
+        </p:txBody>
+      </p:sp>
+      <p:sp>
+        <p:nvSpPr>
+          <p:cNvPr id="17" name=""/>
+          <p:cNvSpPr/>
+          <p:nvPr/>
+        </p:nvSpPr>
+        <p:spPr>
+          <a:xfrm rot="0" flipH="0" flipV="0">
+            <a:off x="609600" y="1752600"/>
+            <a:ext cx="5334000" cy="1114425"/>
+          </a:xfrm>
+          <a:prstGeom prst="roundRect">
+            <a:avLst>
+              <a:gd name="adj" fmla="val 8547"/>
+            </a:avLst>
+          </a:prstGeom>
+          <a:solidFill>
+            <a:srgbClr val="FFFFFF"/>
+          </a:solidFill>
+          <a:ln/>
+          <a:effectLst>
+            <a:outerShdw blurRad="152400" dist="38100" dir="5400000">
+              <a:srgbClr val="172133">
+                <a:alpha val="6000"/>
+              </a:srgbClr>
+            </a:outerShdw>
+          </a:effectLst>
+        </p:spPr>
+        <p:txBody>
+          <a:bodyPr/>
+          <a:p/>
+        </p:txBody>
+      </p:sp>
+      <p:sp>
+        <p:nvSpPr>
+          <p:cNvPr id="18" name="" descr="{&quot;isTemplate&quot;:true,&quot;type&quot;:&quot;text&quot;}"/>
+          <p:cNvSpPr txBox="1"/>
+          <p:nvPr/>
+        </p:nvSpPr>
+        <p:spPr>
+          <a:xfrm rot="0" flipH="0" flipV="0">
+            <a:off x="819150" y="1924050"/>
+            <a:ext cx="4914900" cy="200025"/>
+          </a:xfrm>
+          <a:prstGeom prst="rect"/>
+        </p:spPr>
+        <p:txBody>
+          <a:bodyPr wrap="none" lIns="0" tIns="0" rIns="0" bIns="0"/>
+          <a:p>
+            <a:pPr>
+              <a:lnSpc>
+                <a:spcPct val="100000"/>
+              </a:lnSpc>
+            </a:pPr>
+            <a:r>
+              <a:rPr lang="zh-CN" sz="1275">
+                <a:solidFill>
+                  <a:srgbClr val="172133"/>
+                </a:solidFill>
+                <a:latin typeface="Microsoft YaHei"/>
+                <a:ea typeface="Microsoft YaHei"/>
+              </a:rPr>
+              <a:t>后端：</a:t>
+            </a:r>
+            <a:r>
+              <a:rPr lang="en-US" sz="1275">
+                <a:solidFill>
+                  <a:srgbClr val="172133"/>
+                </a:solidFill>
+                <a:latin typeface="Microsoft YaHei"/>
+                <a:ea typeface="Microsoft YaHei"/>
+              </a:rPr>
+              <a:t>FastAPI </a:t>
+            </a:r>
+            <a:r>
+              <a:rPr lang="zh-CN" sz="1275">
+                <a:solidFill>
+                  <a:srgbClr val="172133"/>
+                </a:solidFill>
+                <a:latin typeface="Microsoft YaHei"/>
+                <a:ea typeface="Microsoft YaHei"/>
+              </a:rPr>
+              <a:t>三层架构</a:t>
+            </a:r>
+            <a:endParaRPr/>
+          </a:p>
+        </p:txBody>
+      </p:sp>
+      <p:sp>
+        <p:nvSpPr>
+          <p:cNvPr id="19" name="" descr="{&quot;isTemplate&quot;:true,&quot;type&quot;:&quot;text&quot;}"/>
+          <p:cNvSpPr txBox="1"/>
+          <p:nvPr/>
+        </p:nvSpPr>
+        <p:spPr>
+          <a:xfrm rot="0" flipH="0" flipV="0">
+            <a:off x="819150" y="2181225"/>
+            <a:ext cx="4914900" cy="514350"/>
+          </a:xfrm>
+          <a:prstGeom prst="rect"/>
+        </p:spPr>
+        <p:txBody>
+          <a:bodyPr wrap="square" lIns="0" tIns="0" rIns="0" bIns="0">
+            <a:normAutofit/>
+          </a:bodyPr>
+          <a:p>
+            <a:pPr>
+              <a:lnSpc>
+                <a:spcPct val="160000"/>
+              </a:lnSpc>
+            </a:pPr>
+            <a:r>
+              <a:rPr lang="en-US" sz="1050">
+                <a:solidFill>
+                  <a:srgbClr val="5F5E5A"/>
+                </a:solidFill>
+                <a:latin typeface="Microsoft YaHei"/>
+                <a:ea typeface="Microsoft YaHei"/>
+              </a:rPr>
+              <a:t>API </a:t>
+            </a:r>
+            <a:r>
+              <a:rPr lang="zh-CN" sz="1050">
+                <a:solidFill>
+                  <a:srgbClr val="5F5E5A"/>
+                </a:solidFill>
+                <a:latin typeface="Microsoft YaHei"/>
+                <a:ea typeface="Microsoft YaHei"/>
+              </a:rPr>
+              <a:t>路由层</a:t>
+            </a:r>
+            <a:r>
+              <a:rPr lang="en-US" sz="1050">
+                <a:solidFill>
+                  <a:srgbClr val="5F5E5A"/>
+                </a:solidFill>
+                <a:latin typeface="Microsoft YaHei"/>
+                <a:ea typeface="Microsoft YaHei"/>
+              </a:rPr>
+              <a:t> → Service </a:t>
+            </a:r>
+            <a:r>
+              <a:rPr lang="zh-CN" sz="1050">
+                <a:solidFill>
+                  <a:srgbClr val="5F5E5A"/>
+                </a:solidFill>
+                <a:latin typeface="Microsoft YaHei"/>
+                <a:ea typeface="Microsoft YaHei"/>
+              </a:rPr>
+              <a:t>业务层</a:t>
+            </a:r>
+            <a:r>
+              <a:rPr lang="en-US" sz="1050">
+                <a:solidFill>
+                  <a:srgbClr val="5F5E5A"/>
+                </a:solidFill>
+                <a:latin typeface="Microsoft YaHei"/>
+                <a:ea typeface="Microsoft YaHei"/>
+              </a:rPr>
+              <a:t> → Repository </a:t>
+            </a:r>
+            <a:r>
+              <a:rPr lang="zh-CN" sz="1050">
+                <a:solidFill>
+                  <a:srgbClr val="5F5E5A"/>
+                </a:solidFill>
+                <a:latin typeface="Microsoft YaHei"/>
+                <a:ea typeface="Microsoft YaHei"/>
+              </a:rPr>
+              <a:t>数据层。业务与数据解耦，</a:t>
+            </a:r>
+            <a:r>
+              <a:rPr lang="en-US" sz="1050">
+                <a:solidFill>
+                  <a:srgbClr val="5F5E5A"/>
+                </a:solidFill>
+                <a:latin typeface="Microsoft YaHei"/>
+                <a:ea typeface="Microsoft YaHei"/>
+              </a:rPr>
+              <a:t>AI </a:t>
+            </a:r>
+            <a:r>
+              <a:rPr lang="zh-CN" sz="1050">
+                <a:solidFill>
+                  <a:srgbClr val="5F5E5A"/>
+                </a:solidFill>
+                <a:latin typeface="Microsoft YaHei"/>
+                <a:ea typeface="Microsoft YaHei"/>
+              </a:rPr>
+              <a:t>逻辑不混入业务代码。</a:t>
+            </a:r>
+            <a:endParaRPr/>
+          </a:p>
+        </p:txBody>
+      </p:sp>
+      <p:sp>
+        <p:nvSpPr>
+          <p:cNvPr id="20" name=""/>
+          <p:cNvSpPr/>
+          <p:nvPr/>
+        </p:nvSpPr>
+        <p:spPr>
+          <a:xfrm rot="0" flipH="0" flipV="0">
+            <a:off x="609600" y="3019425"/>
+            <a:ext cx="5334000" cy="1114425"/>
+          </a:xfrm>
+          <a:prstGeom prst="roundRect">
+            <a:avLst>
+              <a:gd name="adj" fmla="val 8547"/>
+            </a:avLst>
+          </a:prstGeom>
+          <a:solidFill>
+            <a:srgbClr val="FFFFFF"/>
+          </a:solidFill>
+          <a:ln/>
+          <a:effectLst>
+            <a:outerShdw blurRad="152400" dist="38100" dir="5400000">
+              <a:srgbClr val="172133">
+                <a:alpha val="6000"/>
+              </a:srgbClr>
+            </a:outerShdw>
+          </a:effectLst>
+        </p:spPr>
+        <p:txBody>
+          <a:bodyPr/>
+          <a:p/>
+        </p:txBody>
+      </p:sp>
+      <p:sp>
+        <p:nvSpPr>
+          <p:cNvPr id="21" name="" descr="{&quot;isTemplate&quot;:true,&quot;type&quot;:&quot;text&quot;}"/>
+          <p:cNvSpPr txBox="1"/>
+          <p:nvPr/>
+        </p:nvSpPr>
+        <p:spPr>
+          <a:xfrm rot="0" flipH="0" flipV="0">
+            <a:off x="819150" y="3190875"/>
+            <a:ext cx="4914900" cy="200025"/>
+          </a:xfrm>
+          <a:prstGeom prst="rect"/>
+        </p:spPr>
+        <p:txBody>
+          <a:bodyPr wrap="none" lIns="0" tIns="0" rIns="0" bIns="0"/>
+          <a:p>
+            <a:pPr>
+              <a:lnSpc>
+                <a:spcPct val="100000"/>
+              </a:lnSpc>
+            </a:pPr>
+            <a:r>
+              <a:rPr lang="zh-CN" sz="1275">
+                <a:solidFill>
+                  <a:srgbClr val="172133"/>
+                </a:solidFill>
+                <a:latin typeface="Microsoft YaHei"/>
+                <a:ea typeface="Microsoft YaHei"/>
+              </a:rPr>
+              <a:t>派单算法</a:t>
+            </a:r>
+            <a:endParaRPr/>
+          </a:p>
+        </p:txBody>
+      </p:sp>
+      <p:sp>
+        <p:nvSpPr>
+          <p:cNvPr id="22" name="" descr="{&quot;isTemplate&quot;:true,&quot;type&quot;:&quot;text&quot;}"/>
+          <p:cNvSpPr txBox="1"/>
+          <p:nvPr/>
+        </p:nvSpPr>
+        <p:spPr>
+          <a:xfrm rot="0" flipH="0" flipV="0">
+            <a:off x="819150" y="3448050"/>
+            <a:ext cx="4914900" cy="514350"/>
+          </a:xfrm>
+          <a:prstGeom prst="rect"/>
+        </p:spPr>
+        <p:txBody>
+          <a:bodyPr wrap="square" lIns="0" tIns="0" rIns="0" bIns="0">
+            <a:normAutofit/>
+          </a:bodyPr>
+          <a:p>
+            <a:pPr>
+              <a:lnSpc>
+                <a:spcPct val="160000"/>
+              </a:lnSpc>
+            </a:pPr>
+            <a:r>
+              <a:rPr lang="zh-CN" sz="1050">
+                <a:solidFill>
+                  <a:srgbClr val="5F5E5A"/>
+                </a:solidFill>
+                <a:latin typeface="Microsoft YaHei"/>
+                <a:ea typeface="Microsoft YaHei"/>
+              </a:rPr>
+              <a:t>按「技能匹配</a:t>
+            </a:r>
+            <a:r>
+              <a:rPr lang="en-US" sz="1050">
+                <a:solidFill>
+                  <a:srgbClr val="5F5E5A"/>
+                </a:solidFill>
+                <a:latin typeface="Microsoft YaHei"/>
+                <a:ea typeface="Microsoft YaHei"/>
+              </a:rPr>
+              <a:t> + </a:t>
+            </a:r>
+            <a:r>
+              <a:rPr lang="zh-CN" sz="1050">
+                <a:solidFill>
+                  <a:srgbClr val="5F5E5A"/>
+                </a:solidFill>
+                <a:latin typeface="Microsoft YaHei"/>
+                <a:ea typeface="Microsoft YaHei"/>
+              </a:rPr>
+              <a:t>在岗状态</a:t>
+            </a:r>
+            <a:r>
+              <a:rPr lang="en-US" sz="1050">
+                <a:solidFill>
+                  <a:srgbClr val="5F5E5A"/>
+                </a:solidFill>
+                <a:latin typeface="Microsoft YaHei"/>
+                <a:ea typeface="Microsoft YaHei"/>
+              </a:rPr>
+              <a:t> + </a:t>
+            </a:r>
+            <a:r>
+              <a:rPr lang="zh-CN" sz="1050">
+                <a:solidFill>
+                  <a:srgbClr val="5F5E5A"/>
+                </a:solidFill>
+                <a:latin typeface="Microsoft YaHei"/>
+                <a:ea typeface="Microsoft YaHei"/>
+              </a:rPr>
+              <a:t>工号升序」自动选择维修师傅，无需人工指派，报修提交即自动派单。</a:t>
+            </a:r>
+            <a:endParaRPr/>
+          </a:p>
+        </p:txBody>
+      </p:sp>
+      <p:sp>
+        <p:nvSpPr>
+          <p:cNvPr id="23" name=""/>
+          <p:cNvSpPr/>
+          <p:nvPr/>
+        </p:nvSpPr>
+        <p:spPr>
+          <a:xfrm rot="0" flipH="0" flipV="0">
+            <a:off x="609600" y="4286250"/>
+            <a:ext cx="5334000" cy="1114425"/>
+          </a:xfrm>
+          <a:prstGeom prst="roundRect">
+            <a:avLst>
+              <a:gd name="adj" fmla="val 8547"/>
+            </a:avLst>
+          </a:prstGeom>
+          <a:solidFill>
+            <a:srgbClr val="FFFFFF"/>
+          </a:solidFill>
+          <a:ln/>
+          <a:effectLst>
+            <a:outerShdw blurRad="152400" dist="38100" dir="5400000">
+              <a:srgbClr val="172133">
+                <a:alpha val="6000"/>
+              </a:srgbClr>
+            </a:outerShdw>
+          </a:effectLst>
+        </p:spPr>
+        <p:txBody>
+          <a:bodyPr/>
+          <a:p/>
+        </p:txBody>
+      </p:sp>
+      <p:sp>
+        <p:nvSpPr>
+          <p:cNvPr id="24" name="" descr="{&quot;isTemplate&quot;:true,&quot;type&quot;:&quot;text&quot;}"/>
+          <p:cNvSpPr txBox="1"/>
+          <p:nvPr/>
+        </p:nvSpPr>
+        <p:spPr>
+          <a:xfrm rot="0" flipH="0" flipV="0">
+            <a:off x="819150" y="4457700"/>
+            <a:ext cx="4914900" cy="200025"/>
+          </a:xfrm>
+          <a:prstGeom prst="rect"/>
+        </p:spPr>
+        <p:txBody>
+          <a:bodyPr wrap="none" lIns="0" tIns="0" rIns="0" bIns="0"/>
+          <a:p>
+            <a:pPr>
+              <a:lnSpc>
+                <a:spcPct val="100000"/>
+              </a:lnSpc>
+            </a:pPr>
+            <a:r>
+              <a:rPr lang="zh-CN" sz="1275">
+                <a:solidFill>
+                  <a:srgbClr val="172133"/>
+                </a:solidFill>
+                <a:latin typeface="Microsoft YaHei"/>
+                <a:ea typeface="Microsoft YaHei"/>
+              </a:rPr>
+              <a:t>消息通知</a:t>
+            </a:r>
+            <a:endParaRPr/>
+          </a:p>
+        </p:txBody>
+      </p:sp>
+      <p:sp>
+        <p:nvSpPr>
+          <p:cNvPr id="25" name="" descr="{&quot;isTemplate&quot;:true,&quot;type&quot;:&quot;text&quot;}"/>
+          <p:cNvSpPr txBox="1"/>
+          <p:nvPr/>
+        </p:nvSpPr>
+        <p:spPr>
+          <a:xfrm rot="0" flipH="0" flipV="0">
+            <a:off x="819150" y="4714875"/>
+            <a:ext cx="4914900" cy="514350"/>
+          </a:xfrm>
+          <a:prstGeom prst="rect"/>
+        </p:spPr>
+        <p:txBody>
+          <a:bodyPr wrap="square" lIns="0" tIns="0" rIns="0" bIns="0">
+            <a:normAutofit/>
+          </a:bodyPr>
+          <a:p>
+            <a:pPr>
+              <a:lnSpc>
+                <a:spcPct val="160000"/>
+              </a:lnSpc>
+            </a:pPr>
+            <a:r>
+              <a:rPr lang="zh-CN" sz="1050">
+                <a:solidFill>
+                  <a:srgbClr val="5F5E5A"/>
+                </a:solidFill>
+                <a:latin typeface="Microsoft YaHei"/>
+                <a:ea typeface="Microsoft YaHei"/>
+              </a:rPr>
+              <a:t>派单、完成、答复、巡检异常等事件全链路实时通知相关角色，保证业务协同不遗漏。</a:t>
+            </a:r>
+            <a:endParaRPr/>
+          </a:p>
+        </p:txBody>
+      </p:sp>
+      <p:sp>
+        <p:nvSpPr>
+          <p:cNvPr id="26" name=""/>
+          <p:cNvSpPr/>
+          <p:nvPr/>
+        </p:nvSpPr>
+        <p:spPr>
+          <a:xfrm rot="0" flipH="0" flipV="0">
+            <a:off x="6248400" y="2209800"/>
+            <a:ext cx="5334000" cy="2743200"/>
+          </a:xfrm>
+          <a:prstGeom prst="roundRect">
+            <a:avLst>
+              <a:gd name="adj" fmla="val 4167"/>
+            </a:avLst>
+          </a:prstGeom>
+          <a:gradFill>
+            <a:gsLst>
+              <a:gs pos="0">
+                <a:srgbClr val="172133"/>
+              </a:gs>
+              <a:gs pos="100000">
+                <a:srgbClr val="22395E"/>
+              </a:gs>
+            </a:gsLst>
+            <a:lin ang="2700000" scaled="1"/>
+          </a:gradFill>
+          <a:ln/>
+        </p:spPr>
+        <p:txBody>
+          <a:bodyPr/>
+          <a:p/>
+        </p:txBody>
+      </p:sp>
+      <p:sp>
+        <p:nvSpPr>
+          <p:cNvPr id="27" name="" descr="{&quot;isTemplate&quot;:true,&quot;type&quot;:&quot;text&quot;}"/>
+          <p:cNvSpPr txBox="1"/>
+          <p:nvPr/>
+        </p:nvSpPr>
+        <p:spPr>
+          <a:xfrm rot="0" flipH="0" flipV="0">
+            <a:off x="6496050" y="2457450"/>
+            <a:ext cx="4838700" cy="152400"/>
+          </a:xfrm>
+          <a:prstGeom prst="rect"/>
+        </p:spPr>
+        <p:txBody>
+          <a:bodyPr wrap="none" lIns="0" tIns="0" rIns="0" bIns="0"/>
+          <a:p>
+            <a:pPr>
+              <a:lnSpc>
+                <a:spcPct val="100000"/>
+              </a:lnSpc>
+            </a:pPr>
+            <a:r>
+              <a:rPr lang="en-US" sz="975" spc="-9223372036854775808">
+                <a:solidFill>
+                  <a:srgbClr val="BD9B56"/>
+                </a:solidFill>
+                <a:latin typeface="Microsoft YaHei"/>
+                <a:ea typeface="Microsoft YaHei"/>
+              </a:rPr>
+              <a:t>FRONTEND · </a:t>
+            </a:r>
+            <a:r>
+              <a:rPr lang="zh-CN" sz="975" spc="-9223372036854775808">
+                <a:solidFill>
+                  <a:srgbClr val="BD9B56"/>
+                </a:solidFill>
+                <a:latin typeface="Microsoft YaHei"/>
+                <a:ea typeface="Microsoft YaHei"/>
+              </a:rPr>
+              <a:t>三端</a:t>
+            </a:r>
+            <a:endParaRPr/>
+          </a:p>
+        </p:txBody>
+      </p:sp>
+      <p:sp>
+        <p:nvSpPr>
+          <p:cNvPr id="28" name=""/>
+          <p:cNvSpPr/>
+          <p:nvPr/>
+        </p:nvSpPr>
+        <p:spPr>
+          <a:xfrm rot="0" flipH="0" flipV="0">
+            <a:off x="6496050" y="2781300"/>
+            <a:ext cx="4838700" cy="428625"/>
+          </a:xfrm>
+          <a:prstGeom prst="roundRect">
+            <a:avLst>
+              <a:gd name="adj" fmla="val 17778"/>
+            </a:avLst>
+          </a:prstGeom>
+          <a:solidFill>
+            <a:srgbClr val="BD9B56">
+              <a:alpha val="10000"/>
+            </a:srgbClr>
+          </a:solidFill>
+          <a:ln/>
+        </p:spPr>
+        <p:txBody>
+          <a:bodyPr/>
+          <a:p/>
+        </p:txBody>
+      </p:sp>
+      <p:sp>
+        <p:nvSpPr>
+          <p:cNvPr id="29" name="" descr="{&quot;isTemplate&quot;:true,&quot;type&quot;:&quot;text&quot;}"/>
+          <p:cNvSpPr txBox="1"/>
+          <p:nvPr/>
+        </p:nvSpPr>
+        <p:spPr>
+          <a:xfrm rot="0" flipH="0" flipV="0">
+            <a:off x="6648450" y="2895600"/>
+            <a:ext cx="609600" cy="200025"/>
+          </a:xfrm>
+          <a:prstGeom prst="rect"/>
+        </p:spPr>
+        <p:txBody>
+          <a:bodyPr wrap="none" lIns="0" tIns="0" rIns="0" bIns="0"/>
+          <a:p>
+            <a:pPr>
+              <a:lnSpc>
+                <a:spcPct val="100000"/>
+              </a:lnSpc>
+            </a:pPr>
+            <a:r>
+              <a:rPr lang="zh-CN" sz="1275" b="1">
+                <a:solidFill>
+                  <a:srgbClr val="BD9B56"/>
+                </a:solidFill>
+                <a:latin typeface="Microsoft YaHei"/>
+                <a:ea typeface="Microsoft YaHei"/>
+              </a:rPr>
+              <a:t>业主端</a:t>
+            </a:r>
+            <a:endParaRPr/>
+          </a:p>
+        </p:txBody>
+      </p:sp>
+      <p:sp>
+        <p:nvSpPr>
+          <p:cNvPr id="30" name="" descr="{&quot;isTemplate&quot;:true,&quot;type&quot;:&quot;text&quot;}"/>
+          <p:cNvSpPr txBox="1"/>
+          <p:nvPr/>
+        </p:nvSpPr>
+        <p:spPr>
+          <a:xfrm rot="0" flipH="0" flipV="0">
+            <a:off x="7372350" y="2924175"/>
+            <a:ext cx="2066925" cy="152400"/>
+          </a:xfrm>
+          <a:prstGeom prst="rect"/>
+        </p:spPr>
+        <p:txBody>
+          <a:bodyPr wrap="none" lIns="0" tIns="0" rIns="0" bIns="0"/>
+          <a:p>
+            <a:pPr>
+              <a:lnSpc>
+                <a:spcPct val="100000"/>
+              </a:lnSpc>
+            </a:pPr>
+            <a:r>
+              <a:rPr lang="en-US" sz="975">
+                <a:solidFill>
+                  <a:srgbClr val="FBFCFA">
+                    <a:alpha val="85000"/>
+                  </a:srgbClr>
+                </a:solidFill>
+                <a:latin typeface="Microsoft YaHei"/>
+                <a:ea typeface="Microsoft YaHei"/>
+              </a:rPr>
+              <a:t>AI </a:t>
+            </a:r>
+            <a:r>
+              <a:rPr lang="zh-CN" sz="975">
+                <a:solidFill>
+                  <a:srgbClr val="FBFCFA">
+                    <a:alpha val="85000"/>
+                  </a:srgbClr>
+                </a:solidFill>
+                <a:latin typeface="Microsoft YaHei"/>
+                <a:ea typeface="Microsoft YaHei"/>
+              </a:rPr>
+              <a:t>助手</a:t>
+            </a:r>
+            <a:r>
+              <a:rPr lang="en-US" sz="975">
+                <a:solidFill>
+                  <a:srgbClr val="FBFCFA">
+                    <a:alpha val="85000"/>
+                  </a:srgbClr>
+                </a:solidFill>
+                <a:latin typeface="Microsoft YaHei"/>
+                <a:ea typeface="Microsoft YaHei"/>
+              </a:rPr>
+              <a:t> · </a:t>
+            </a:r>
+            <a:r>
+              <a:rPr lang="zh-CN" sz="975">
+                <a:solidFill>
+                  <a:srgbClr val="FBFCFA">
+                    <a:alpha val="85000"/>
+                  </a:srgbClr>
+                </a:solidFill>
+                <a:latin typeface="Microsoft YaHei"/>
+                <a:ea typeface="Microsoft YaHei"/>
+              </a:rPr>
+              <a:t>报修</a:t>
+            </a:r>
+            <a:r>
+              <a:rPr lang="en-US" sz="975">
+                <a:solidFill>
+                  <a:srgbClr val="FBFCFA">
+                    <a:alpha val="85000"/>
+                  </a:srgbClr>
+                </a:solidFill>
+                <a:latin typeface="Microsoft YaHei"/>
+                <a:ea typeface="Microsoft YaHei"/>
+              </a:rPr>
+              <a:t> · </a:t>
+            </a:r>
+            <a:r>
+              <a:rPr lang="zh-CN" sz="975">
+                <a:solidFill>
+                  <a:srgbClr val="FBFCFA">
+                    <a:alpha val="85000"/>
+                  </a:srgbClr>
+                </a:solidFill>
+                <a:latin typeface="Microsoft YaHei"/>
+                <a:ea typeface="Microsoft YaHei"/>
+              </a:rPr>
+              <a:t>缴费</a:t>
+            </a:r>
+            <a:r>
+              <a:rPr lang="en-US" sz="975">
+                <a:solidFill>
+                  <a:srgbClr val="FBFCFA">
+                    <a:alpha val="85000"/>
+                  </a:srgbClr>
+                </a:solidFill>
+                <a:latin typeface="Microsoft YaHei"/>
+                <a:ea typeface="Microsoft YaHei"/>
+              </a:rPr>
+              <a:t> · </a:t>
+            </a:r>
+            <a:r>
+              <a:rPr lang="zh-CN" sz="975">
+                <a:solidFill>
+                  <a:srgbClr val="FBFCFA">
+                    <a:alpha val="85000"/>
+                  </a:srgbClr>
+                </a:solidFill>
+                <a:latin typeface="Microsoft YaHei"/>
+                <a:ea typeface="Microsoft YaHei"/>
+              </a:rPr>
+              <a:t>公告</a:t>
+            </a:r>
+            <a:r>
+              <a:rPr lang="en-US" sz="975">
+                <a:solidFill>
+                  <a:srgbClr val="FBFCFA">
+                    <a:alpha val="85000"/>
+                  </a:srgbClr>
+                </a:solidFill>
+                <a:latin typeface="Microsoft YaHei"/>
+                <a:ea typeface="Microsoft YaHei"/>
+              </a:rPr>
+              <a:t> · </a:t>
+            </a:r>
+            <a:r>
+              <a:rPr lang="zh-CN" sz="975">
+                <a:solidFill>
+                  <a:srgbClr val="FBFCFA">
+                    <a:alpha val="85000"/>
+                  </a:srgbClr>
+                </a:solidFill>
+                <a:latin typeface="Microsoft YaHei"/>
+                <a:ea typeface="Microsoft YaHei"/>
+              </a:rPr>
+              <a:t>问题上报</a:t>
+            </a:r>
+            <a:endParaRPr/>
+          </a:p>
+        </p:txBody>
+      </p:sp>
+      <p:sp>
+        <p:nvSpPr>
+          <p:cNvPr id="31" name=""/>
+          <p:cNvSpPr/>
+          <p:nvPr/>
+        </p:nvSpPr>
+        <p:spPr>
+          <a:xfrm rot="0" flipH="0" flipV="0">
+            <a:off x="6496050" y="3343275"/>
+            <a:ext cx="4838700" cy="428625"/>
+          </a:xfrm>
+          <a:prstGeom prst="roundRect">
+            <a:avLst>
+              <a:gd name="adj" fmla="val 17778"/>
+            </a:avLst>
+          </a:prstGeom>
+          <a:solidFill>
+            <a:srgbClr val="BD9B56">
+              <a:alpha val="10000"/>
+            </a:srgbClr>
+          </a:solidFill>
+          <a:ln/>
+        </p:spPr>
+        <p:txBody>
+          <a:bodyPr/>
+          <a:p/>
+        </p:txBody>
+      </p:sp>
+      <p:sp>
+        <p:nvSpPr>
+          <p:cNvPr id="32" name="" descr="{&quot;isTemplate&quot;:true,&quot;type&quot;:&quot;text&quot;}"/>
+          <p:cNvSpPr txBox="1"/>
+          <p:nvPr/>
+        </p:nvSpPr>
+        <p:spPr>
+          <a:xfrm rot="0" flipH="0" flipV="0">
+            <a:off x="6648450" y="3457575"/>
+            <a:ext cx="609600" cy="200025"/>
+          </a:xfrm>
+          <a:prstGeom prst="rect"/>
+        </p:spPr>
+        <p:txBody>
+          <a:bodyPr wrap="none" lIns="0" tIns="0" rIns="0" bIns="0"/>
+          <a:p>
+            <a:pPr>
+              <a:lnSpc>
+                <a:spcPct val="100000"/>
+              </a:lnSpc>
+            </a:pPr>
+            <a:r>
+              <a:rPr lang="zh-CN" sz="1275" b="1">
+                <a:solidFill>
+                  <a:srgbClr val="BD9B56"/>
+                </a:solidFill>
+                <a:latin typeface="Microsoft YaHei"/>
+                <a:ea typeface="Microsoft YaHei"/>
+              </a:rPr>
+              <a:t>物业端</a:t>
+            </a:r>
+            <a:endParaRPr/>
+          </a:p>
+        </p:txBody>
+      </p:sp>
+      <p:sp>
+        <p:nvSpPr>
+          <p:cNvPr id="33" name="" descr="{&quot;isTemplate&quot;:true,&quot;type&quot;:&quot;text&quot;}"/>
+          <p:cNvSpPr txBox="1"/>
+          <p:nvPr/>
+        </p:nvSpPr>
+        <p:spPr>
+          <a:xfrm rot="0" flipH="0" flipV="0">
+            <a:off x="7372350" y="3486150"/>
+            <a:ext cx="2047875" cy="152400"/>
+          </a:xfrm>
+          <a:prstGeom prst="rect"/>
+        </p:spPr>
+        <p:txBody>
+          <a:bodyPr wrap="none" lIns="0" tIns="0" rIns="0" bIns="0"/>
+          <a:p>
+            <a:pPr>
+              <a:lnSpc>
+                <a:spcPct val="100000"/>
+              </a:lnSpc>
+            </a:pPr>
+            <a:r>
+              <a:rPr lang="zh-CN" sz="975">
+                <a:solidFill>
+                  <a:srgbClr val="FBFCFA">
+                    <a:alpha val="85000"/>
+                  </a:srgbClr>
+                </a:solidFill>
+                <a:latin typeface="Microsoft YaHei"/>
+                <a:ea typeface="Microsoft YaHei"/>
+              </a:rPr>
+              <a:t>工单管理</a:t>
+            </a:r>
+            <a:r>
+              <a:rPr lang="en-US" sz="975">
+                <a:solidFill>
+                  <a:srgbClr val="FBFCFA">
+                    <a:alpha val="85000"/>
+                  </a:srgbClr>
+                </a:solidFill>
+                <a:latin typeface="Microsoft YaHei"/>
+                <a:ea typeface="Microsoft YaHei"/>
+              </a:rPr>
+              <a:t> · </a:t>
+            </a:r>
+            <a:r>
+              <a:rPr lang="zh-CN" sz="975">
+                <a:solidFill>
+                  <a:srgbClr val="FBFCFA">
+                    <a:alpha val="85000"/>
+                  </a:srgbClr>
+                </a:solidFill>
+                <a:latin typeface="Microsoft YaHei"/>
+                <a:ea typeface="Microsoft YaHei"/>
+              </a:rPr>
+              <a:t>巡检</a:t>
+            </a:r>
+            <a:r>
+              <a:rPr lang="en-US" sz="975">
+                <a:solidFill>
+                  <a:srgbClr val="FBFCFA">
+                    <a:alpha val="85000"/>
+                  </a:srgbClr>
+                </a:solidFill>
+                <a:latin typeface="Microsoft YaHei"/>
+                <a:ea typeface="Microsoft YaHei"/>
+              </a:rPr>
+              <a:t> · </a:t>
+            </a:r>
+            <a:r>
+              <a:rPr lang="zh-CN" sz="975">
+                <a:solidFill>
+                  <a:srgbClr val="FBFCFA">
+                    <a:alpha val="85000"/>
+                  </a:srgbClr>
+                </a:solidFill>
+                <a:latin typeface="Microsoft YaHei"/>
+                <a:ea typeface="Microsoft YaHei"/>
+              </a:rPr>
+              <a:t>数据看板</a:t>
+            </a:r>
+            <a:r>
+              <a:rPr lang="en-US" sz="975">
+                <a:solidFill>
+                  <a:srgbClr val="FBFCFA">
+                    <a:alpha val="85000"/>
+                  </a:srgbClr>
+                </a:solidFill>
+                <a:latin typeface="Microsoft YaHei"/>
+                <a:ea typeface="Microsoft YaHei"/>
+              </a:rPr>
+              <a:t> · </a:t>
+            </a:r>
+            <a:r>
+              <a:rPr lang="zh-CN" sz="975">
+                <a:solidFill>
+                  <a:srgbClr val="FBFCFA">
+                    <a:alpha val="85000"/>
+                  </a:srgbClr>
+                </a:solidFill>
+                <a:latin typeface="Microsoft YaHei"/>
+                <a:ea typeface="Microsoft YaHei"/>
+              </a:rPr>
+              <a:t>知识审核</a:t>
+            </a:r>
+            <a:endParaRPr/>
+          </a:p>
+        </p:txBody>
+      </p:sp>
+      <p:sp>
+        <p:nvSpPr>
+          <p:cNvPr id="34" name=""/>
+          <p:cNvSpPr/>
+          <p:nvPr/>
+        </p:nvSpPr>
+        <p:spPr>
+          <a:xfrm rot="0" flipH="0" flipV="0">
+            <a:off x="6496050" y="3905250"/>
+            <a:ext cx="4838700" cy="428625"/>
+          </a:xfrm>
+          <a:prstGeom prst="roundRect">
+            <a:avLst>
+              <a:gd name="adj" fmla="val 17778"/>
+            </a:avLst>
+          </a:prstGeom>
+          <a:solidFill>
+            <a:srgbClr val="BD9B56">
+              <a:alpha val="10000"/>
+            </a:srgbClr>
+          </a:solidFill>
+          <a:ln/>
+        </p:spPr>
+        <p:txBody>
+          <a:bodyPr/>
+          <a:p/>
+        </p:txBody>
+      </p:sp>
+      <p:sp>
+        <p:nvSpPr>
+          <p:cNvPr id="35" name="" descr="{&quot;isTemplate&quot;:true,&quot;type&quot;:&quot;text&quot;}"/>
+          <p:cNvSpPr txBox="1"/>
+          <p:nvPr/>
+        </p:nvSpPr>
+        <p:spPr>
+          <a:xfrm rot="0" flipH="0" flipV="0">
+            <a:off x="6648450" y="4019550"/>
+            <a:ext cx="609600" cy="200025"/>
+          </a:xfrm>
+          <a:prstGeom prst="rect"/>
+        </p:spPr>
+        <p:txBody>
+          <a:bodyPr wrap="none" lIns="0" tIns="0" rIns="0" bIns="0"/>
+          <a:p>
+            <a:pPr>
+              <a:lnSpc>
+                <a:spcPct val="100000"/>
+              </a:lnSpc>
+            </a:pPr>
+            <a:r>
+              <a:rPr lang="zh-CN" sz="1275" b="1">
+                <a:solidFill>
+                  <a:srgbClr val="BD9B56"/>
+                </a:solidFill>
+                <a:latin typeface="Microsoft YaHei"/>
+                <a:ea typeface="Microsoft YaHei"/>
+              </a:rPr>
+              <a:t>维修端</a:t>
+            </a:r>
+            <a:endParaRPr/>
+          </a:p>
+        </p:txBody>
+      </p:sp>
+      <p:sp>
+        <p:nvSpPr>
+          <p:cNvPr id="36" name="" descr="{&quot;isTemplate&quot;:true,&quot;type&quot;:&quot;text&quot;}"/>
+          <p:cNvSpPr txBox="1"/>
+          <p:nvPr/>
+        </p:nvSpPr>
+        <p:spPr>
+          <a:xfrm rot="0" flipH="0" flipV="0">
+            <a:off x="7372350" y="4048125"/>
+            <a:ext cx="1552575" cy="152400"/>
+          </a:xfrm>
+          <a:prstGeom prst="rect"/>
+        </p:spPr>
+        <p:txBody>
+          <a:bodyPr wrap="none" lIns="0" tIns="0" rIns="0" bIns="0"/>
+          <a:p>
+            <a:pPr>
+              <a:lnSpc>
+                <a:spcPct val="100000"/>
+              </a:lnSpc>
+            </a:pPr>
+            <a:r>
+              <a:rPr lang="zh-CN" sz="975">
+                <a:solidFill>
+                  <a:srgbClr val="FBFCFA">
+                    <a:alpha val="85000"/>
+                  </a:srgbClr>
+                </a:solidFill>
+                <a:latin typeface="Microsoft YaHei"/>
+                <a:ea typeface="Microsoft YaHei"/>
+              </a:rPr>
+              <a:t>接单</a:t>
+            </a:r>
+            <a:r>
+              <a:rPr lang="en-US" sz="975">
+                <a:solidFill>
+                  <a:srgbClr val="FBFCFA">
+                    <a:alpha val="85000"/>
+                  </a:srgbClr>
+                </a:solidFill>
+                <a:latin typeface="Microsoft YaHei"/>
+                <a:ea typeface="Microsoft YaHei"/>
+              </a:rPr>
+              <a:t> · </a:t>
+            </a:r>
+            <a:r>
+              <a:rPr lang="zh-CN" sz="975">
+                <a:solidFill>
+                  <a:srgbClr val="FBFCFA">
+                    <a:alpha val="85000"/>
+                  </a:srgbClr>
+                </a:solidFill>
+                <a:latin typeface="Microsoft YaHei"/>
+                <a:ea typeface="Microsoft YaHei"/>
+              </a:rPr>
+              <a:t>处理</a:t>
+            </a:r>
+            <a:r>
+              <a:rPr lang="en-US" sz="975">
+                <a:solidFill>
+                  <a:srgbClr val="FBFCFA">
+                    <a:alpha val="85000"/>
+                  </a:srgbClr>
+                </a:solidFill>
+                <a:latin typeface="Microsoft YaHei"/>
+                <a:ea typeface="Microsoft YaHei"/>
+              </a:rPr>
+              <a:t> · </a:t>
+            </a:r>
+            <a:r>
+              <a:rPr lang="zh-CN" sz="975">
+                <a:solidFill>
+                  <a:srgbClr val="FBFCFA">
+                    <a:alpha val="85000"/>
+                  </a:srgbClr>
+                </a:solidFill>
+                <a:latin typeface="Microsoft YaHei"/>
+                <a:ea typeface="Microsoft YaHei"/>
+              </a:rPr>
+              <a:t>消息</a:t>
+            </a:r>
+            <a:r>
+              <a:rPr lang="en-US" sz="975">
+                <a:solidFill>
+                  <a:srgbClr val="FBFCFA">
+                    <a:alpha val="85000"/>
+                  </a:srgbClr>
+                </a:solidFill>
+                <a:latin typeface="Microsoft YaHei"/>
+                <a:ea typeface="Microsoft YaHei"/>
+              </a:rPr>
+              <a:t> · </a:t>
+            </a:r>
+            <a:r>
+              <a:rPr lang="zh-CN" sz="975">
+                <a:solidFill>
+                  <a:srgbClr val="FBFCFA">
+                    <a:alpha val="85000"/>
+                  </a:srgbClr>
+                </a:solidFill>
+                <a:latin typeface="Microsoft YaHei"/>
+                <a:ea typeface="Microsoft YaHei"/>
+              </a:rPr>
+              <a:t>巡检任务</a:t>
+            </a:r>
+            <a:endParaRPr/>
+          </a:p>
+        </p:txBody>
+      </p:sp>
+      <p:sp>
+        <p:nvSpPr>
+          <p:cNvPr id="37" name=""/>
+          <p:cNvSpPr/>
+          <p:nvPr/>
+        </p:nvSpPr>
+        <p:spPr>
+          <a:xfrm rot="0" flipH="0" flipV="0">
+            <a:off x="6496050" y="4524375"/>
+            <a:ext cx="4838700" cy="190500"/>
+          </a:xfrm>
+          <a:custGeom>
+            <a:pathLst>
+              <a:path w="508" h="20">
+                <a:moveTo>
+                  <a:pt x="0" y="0"/>
+                </a:moveTo>
+                <a:lnTo>
+                  <a:pt x="508" y="0"/>
+                </a:lnTo>
+                <a:lnTo>
+                  <a:pt x="508" y="1"/>
+                </a:lnTo>
+                <a:lnTo>
+                  <a:pt x="0" y="1"/>
+                </a:lnTo>
+                <a:close/>
+              </a:path>
+            </a:pathLst>
+          </a:custGeom>
+          <a:solidFill>
+            <a:srgbClr val="BD9B56">
+              <a:alpha val="30000"/>
+            </a:srgbClr>
+          </a:solidFill>
+          <a:ln/>
+        </p:spPr>
+        <p:txBody>
+          <a:bodyPr/>
+          <a:p/>
+        </p:txBody>
+      </p:sp>
+      <p:sp>
+        <p:nvSpPr>
+          <p:cNvPr id="38" name="" descr="{&quot;isTemplate&quot;:true,&quot;type&quot;:&quot;text&quot;}"/>
+          <p:cNvSpPr txBox="1"/>
+          <p:nvPr/>
+        </p:nvSpPr>
+        <p:spPr>
+          <a:xfrm rot="0" flipH="0" flipV="0">
+            <a:off x="6496050" y="4705350"/>
+            <a:ext cx="4838700" cy="0"/>
+          </a:xfrm>
+          <a:prstGeom prst="rect"/>
+        </p:spPr>
+        <p:txBody>
+          <a:bodyPr wrap="none" lIns="0" tIns="0" rIns="0" bIns="0"/>
+          <a:p>
+            <a:pPr/>
+            <a:endParaRPr/>
+          </a:p>
+        </p:txBody>
+      </p:sp>
+      <p:sp>
+        <p:nvSpPr>
+          <p:cNvPr id="39" name="" descr="{&quot;isTemplate&quot;:true,&quot;type&quot;:&quot;text&quot;}"/>
+          <p:cNvSpPr txBox="1"/>
+          <p:nvPr/>
+        </p:nvSpPr>
+        <p:spPr>
+          <a:xfrm rot="0" flipH="0" flipV="0">
+            <a:off x="6496050" y="4705350"/>
+            <a:ext cx="4838700" cy="0"/>
+          </a:xfrm>
+          <a:prstGeom prst="rect"/>
+        </p:spPr>
+        <p:txBody>
+          <a:bodyPr wrap="none" lIns="0" tIns="0" rIns="0" bIns="0"/>
+          <a:p>
+            <a:pPr/>
+            <a:endParaRPr/>
+          </a:p>
+        </p:txBody>
+      </p:sp>
+      <p:sp>
+        <p:nvSpPr>
+          <p:cNvPr id="40" name="" descr="{&quot;isTemplate&quot;:true,&quot;type&quot;:&quot;text&quot;}"/>
+          <p:cNvSpPr txBox="1"/>
+          <p:nvPr/>
+        </p:nvSpPr>
+        <p:spPr>
+          <a:xfrm rot="0" flipH="0" flipV="0">
+            <a:off x="609600" y="6334125"/>
+            <a:ext cx="1009650" cy="142875"/>
+          </a:xfrm>
+          <a:prstGeom prst="rect"/>
+        </p:spPr>
+        <p:txBody>
+          <a:bodyPr wrap="none" lIns="0" tIns="0" rIns="0" bIns="0"/>
+          <a:p>
+            <a:pPr>
+              <a:lnSpc>
+                <a:spcPct val="100000"/>
+              </a:lnSpc>
+            </a:pPr>
+            <a:r>
+              <a:rPr lang="zh-CN" sz="900">
+                <a:solidFill>
+                  <a:srgbClr val="BD9B56"/>
+                </a:solidFill>
+                <a:latin typeface="Microsoft YaHei"/>
+                <a:ea typeface="Microsoft YaHei"/>
+              </a:rPr>
+              <a:t>云溪花园</a:t>
+            </a:r>
+            <a:r>
+              <a:rPr lang="en-US" sz="900">
+                <a:solidFill>
+                  <a:srgbClr val="BD9B56"/>
+                </a:solidFill>
+                <a:latin typeface="Microsoft YaHei"/>
+                <a:ea typeface="Microsoft YaHei"/>
+              </a:rPr>
+              <a:t> · </a:t>
+            </a:r>
+            <a:r>
+              <a:rPr lang="zh-CN" sz="900">
+                <a:solidFill>
+                  <a:srgbClr val="BD9B56"/>
+                </a:solidFill>
+                <a:latin typeface="Microsoft YaHei"/>
+                <a:ea typeface="Microsoft YaHei"/>
+              </a:rPr>
+              <a:t>智慧社区</a:t>
+            </a:r>
+            <a:endParaRPr/>
+          </a:p>
+        </p:txBody>
+      </p:sp>
+      <p:sp>
+        <p:nvSpPr>
+          <p:cNvPr id="41" name="" descr="{&quot;isTemplate&quot;:true,&quot;type&quot;:&quot;text&quot;}"/>
+          <p:cNvSpPr txBox="1"/>
+          <p:nvPr/>
+        </p:nvSpPr>
+        <p:spPr>
+          <a:xfrm rot="0" flipH="0" flipV="0">
+            <a:off x="11191875" y="6334125"/>
+            <a:ext cx="390525" cy="142875"/>
+          </a:xfrm>
+          <a:prstGeom prst="rect"/>
+        </p:spPr>
+        <p:txBody>
+          <a:bodyPr wrap="none" lIns="0" tIns="0" rIns="0" bIns="0"/>
+          <a:p>
+            <a:pPr>
+              <a:lnSpc>
+                <a:spcPct val="100000"/>
+              </a:lnSpc>
+            </a:pPr>
+            <a:r>
+              <a:rPr lang="en-US" sz="900">
+                <a:solidFill>
+                  <a:srgbClr val="A09B8C"/>
+                </a:solidFill>
+                <a:latin typeface="Microsoft YaHei"/>
+                <a:ea typeface="Microsoft YaHei"/>
+              </a:rPr>
+              <a:t>10 / 19</a:t>
+            </a:r>
+            <a:endParaRPr/>
+          </a:p>
+        </p:txBody>
+      </p:sp>
+    </p:spTree>
+  </p:cSld>
+</p:sld>
+</file>
+
+<file path=ppt/slides/slide11.xml><?xml version="1.0" encoding="utf-8"?>
+<p:sld xmlns:p="http://schemas.openxmlformats.org/presentationml/2006/main" xmlns:r="http://schemas.openxmlformats.org/officeDocument/2006/relationships" xmlns:a="http://schemas.openxmlformats.org/drawingml/2006/main" xmlns:asvg="http://schemas.microsoft.com/office/drawing/2016/SVG/main" xmlns:mc="http://schemas.openxmlformats.org/markup-compatibility/2006" mc:Ignorable="asvg">
+  <p:cSld>
+    <p:spTree>
+      <p:nvGrpSpPr>
+        <p:cNvPr id="42" name="" descr="&lt;Slide style={{ width: '1280px', height: '720px', background: '#FBFCFA', position: 'relative', padding: '40px 64px', boxSizing: 'border-box', display: 'flex', flexDirection: 'column' }}&gt;&#13;&#10;  &lt;div style={{ flexShrink: 0 }}&gt;&#13;&#10;    &lt;div style={{ color: '#BD9B56', fontSize: 13, letterSpacing: '0.25em', marginBottom: 8 }}&gt;02 · 技术构建过程&lt;/div&gt;&#13;&#10;    &lt;h2 style={{ fontSize: 30, fontWeight: 'bold', color: '#172133', margin: 0, lineHeight: 1.3 }}&gt;AI Agent 架构：LangGraph 多智能体协作&lt;/h2&gt;&#13;&#10;  &lt;/div&gt;&#13;&#10;  &lt;div style={{ flex: 1, display: 'flex', alignItems: 'center', gap: 32 }}&gt;&#13;&#10;    &lt;div style={{ flex: '0 0 560px', background: '#fff', borderRadius: 12, padding: '22px 24px', boxShadow: '0 6px 24px rgba(23,33,51,0.08)' }}&gt;&#13;&#10;      &lt;svg width=&quot;512&quot; height=&quot;470&quot; viewBox=&quot;0 0 512 470&quot;&gt;&#13;&#10;        &lt;defs&gt;&#13;&#10;          &lt;marker id=&quot;ar9&quot; viewBox=&quot;0 0 10 10&quot; refX=&quot;9&quot; refY=&quot;5&quot; markerWidth=&quot;6&quot; markerHeight=&quot;6&quot; orient=&quot;auto&quot;&gt;&#13;&#10;            &lt;path d=&quot;M0 0L10 5L0 10z&quot; fill=&quot;#BD9B56&quot; /&gt;&#13;&#10;          &lt;/marker&gt;&#13;&#10;        &lt;/defs&gt;&#13;&#10;        &lt;g fontFamily=&quot;Inter, sans-serif&quot;&gt;&#13;&#10;          &lt;rect x=&quot;156&quot; y=&quot;14&quot; width=&quot;200&quot; height=&quot;50&quot; rx=&quot;8&quot; fill=&quot;rgba(34,57,94,0.08)&quot; stroke=&quot;#22395E&quot; strokeWidth=&quot;1.5&quot; /&gt;&#13;&#10;          &lt;text x=&quot;256&quot; y=&quot;36&quot; textAnchor=&quot;middle&quot; fontSize=&quot;13&quot; fontWeight=&quot;bold&quot; fill=&quot;#172133&quot;&gt;用户自然语言输入&lt;/text&gt;&#13;&#10;          &lt;text x=&quot;256&quot; y=&quot;54&quot; textAnchor=&quot;middle&quot; fontSize=&quot;11&quot; fill=&quot;#5F5E5A&quot;&gt;「我家厨房漏水了」&lt;/text&gt;&#13;&#10;          &lt;line x1=&quot;256&quot; y1=&quot;64&quot; x2=&quot;256&quot; y2=&quot;84&quot; stroke=&quot;#BD9B56&quot; strokeWidth=&quot;1.5&quot; markerEnd=&quot;url(#ar9)&quot; /&gt;&#13;&#10;          &lt;rect x=&quot;96&quot; y=&quot;88&quot; width=&quot;320&quot; height=&quot;64&quot; rx=&quot;8&quot; fill=&quot;rgba(34,57,94,0.12)&quot; stroke=&quot;#22395E&quot; strokeWidth=&quot;2&quot; /&gt;&#13;&#10;          &lt;text x=&quot;256&quot; y=&quot;114&quot; textAnchor=&quot;middle&quot; fontSize=&quot;13&quot; fontWeight=&quot;bold&quot; fill=&quot;#BD9B56&quot;&gt;Router Agent · 意图分类&lt;/text&gt;&#13;&#10;          &lt;text x=&quot;256&quot; y=&quot;136&quot; textAnchor=&quot;middle&quot; fontSize=&quot;11&quot; fill=&quot;#172133&quot;&gt;报修 / 费用 / 公告 / 知识 / 上报&lt;/text&gt;&#13;&#10;          &lt;line x1=&quot;256&quot; y1=&quot;152&quot; x2=&quot;256&quot; y2=&quot;172&quot; stroke=&quot;#BD9B56&quot; strokeWidth=&quot;1.5&quot; markerEnd=&quot;url(#ar9)&quot; /&gt;&#13;&#10;          &lt;rect x=&quot;96&quot; y=&quot;176&quot; width=&quot;320&quot; height=&quot;64&quot; rx=&quot;8&quot; fill=&quot;rgba(189,155,86,0.10)&quot; stroke=&quot;#BD9B56&quot; strokeWidth=&quot;1.5&quot; /&gt;&#13;&#10;          &lt;text x=&quot;256&quot; y=&quot;202&quot; textAnchor=&quot;middle&quot; fontSize=&quot;13&quot; fontWeight=&quot;bold&quot; fill=&quot;#172133&quot;&gt;领域 Agent + 多轮状态机&lt;/text&gt;&#13;&#10;          &lt;text x=&quot;256&quot; y=&quot;224&quot; textAnchor=&quot;middle&quot; fontSize=&quot;11&quot; fill=&quot;#5F5E5A&quot;&gt;报修缺「位置/类型」→ 主动反问补全&lt;/text&gt;&#13;&#10;          &lt;line x1=&quot;256&quot; y1=&quot;240&quot; x2=&quot;256&quot; y2=&quot;260&quot; stroke=&quot;#BD9B56&quot; strokeWidth=&quot;1.5&quot; markerEnd=&quot;url(#ar9)&quot; /&gt;&#13;&#10;          &lt;rect x=&quot;16&quot; y=&quot;264&quot; width=&quot;140&quot; height=&quot;48&quot; rx=&quot;6&quot; fill=&quot;rgba(34,57,94,0.06)&quot; stroke=&quot;#22395E&quot; strokeWidth=&quot;1.5&quot; /&gt;&#13;&#10;          &lt;text x=&quot;86&quot; y=&quot;284&quot; textAnchor=&quot;middle&quot; fontSize=&quot;12&quot; fontWeight=&quot;bold&quot; fill=&quot;#172133&quot;&gt;create_repair&lt;/text&gt;&#13;&#10;          &lt;text x=&quot;86&quot; y=&quot;302&quot; textAnchor=&quot;middle&quot; fontSize=&quot;10&quot; fill=&quot;#5F5E5A&quot;&gt;创建工单&lt;/text&gt;&#13;&#10;          &lt;rect x=&quot;176&quot; y=&quot;264&quot; width=&quot;140&quot; height=&quot;48&quot; rx=&quot;6&quot; fill=&quot;rgba(34,57,94,0.06)&quot; stroke=&quot;#22395E&quot; strokeWidth=&quot;1.5&quot; /&gt;&#13;&#10;          &lt;text x=&quot;246&quot; y=&quot;284&quot; textAnchor=&quot;middle&quot; fontSize=&quot;12&quot; fontWeight=&quot;bold&quot; fill=&quot;#172133&quot;&gt;query_fee&lt;/text&gt;&#13;&#10;          &lt;text x=&quot;246&quot; y=&quot;302&quot; textAnchor=&quot;middle&quot; fontSize=&quot;10&quot; fill=&quot;#5F5E5A&quot;&gt;查询费用&lt;/text&gt;&#13;&#10;          &lt;rect x=&quot;336&quot; y=&quot;264&quot; width=&quot;160&quot; height=&quot;48&quot; rx=&quot;6&quot; fill=&quot;rgba(34,57,94,0.06)&quot; stroke=&quot;#22395E&quot; strokeWidth=&quot;1.5&quot; /&gt;&#13;&#10;          &lt;text x=&quot;416&quot; y=&quot;284&quot; textAnchor=&quot;middle&quot; fontSize=&quot;12&quot; fontWeight=&quot;bold&quot; fill=&quot;#172133&quot;&gt;search_knowledge&lt;/text&gt;&#13;&#10;          &lt;text x=&quot;416&quot; y=&quot;302&quot; textAnchor=&quot;middle&quot; fontSize=&quot;10&quot; fill=&quot;#5F5E5A&quot;&gt;检索知识&lt;/text&gt;&#13;&#10;          &lt;line x1=&quot;256&quot; y1=&quot;260&quot; x2=&quot;256&quot; y2=&quot;288&quot; stroke=&quot;#22395E&quot; strokeWidth=&quot;1.2&quot; /&gt;&#13;&#10;          &lt;line x1=&quot;256&quot; y1=&quot;288&quot; x2=&quot;86&quot; y2=&quot;288&quot; stroke=&quot;#22395E&quot; strokeWidth=&quot;1.2&quot; /&gt;&#13;&#10;          &lt;line x1=&quot;256&quot; y1=&quot;288&quot; x2=&quot;246&quot; y2=&quot;288&quot; stroke=&quot;#22395E&quot; strokeWidth=&quot;1.2&quot; /&gt;&#13;&#10;          &lt;line x1=&quot;256&quot; y1=&quot;288&quot; x2=&quot;416&quot; y2=&quot;288&quot; stroke=&quot;#22395E&quot; strokeWidth=&quot;1.2&quot; /&gt;&#13;&#10;          &lt;line x1=&quot;86&quot; y1=&quot;312&quot; x2=&quot;86&quot; y2=&quot;332&quot; stroke=&quot;#22395E&quot; strokeWidth=&quot;1.2&quot; /&gt;&#13;&#10;          &lt;line x1=&quot;246&quot; y1=&quot;312&quot; x2=&quot;246&quot; y2=&quot;332&quot; stroke=&quot;#22395E&quot; strokeWidth=&quot;1.2&quot; /&gt;&#13;&#10;          &lt;line x1=&quot;416&quot; y1=&quot;312&quot; x2=&quot;416&quot; y2=&quot;332&quot; stroke=&quot;#22395E&quot; strokeWidth=&quot;1.2&quot; /&gt;&#13;&#10;          &lt;rect x=&quot;16&quot; y=&quot;336&quot; width=&quot;480&quot; height=&quot;42&quot; rx=&quot;6&quot; fill=&quot;#172133&quot; /&gt;&#13;&#10;          &lt;text x=&quot;256&quot; y=&quot;362&quot; textAnchor=&quot;middle&quot; fontSize=&quot;12&quot; fontWeight=&quot;bold&quot; fill=&quot;#BD9B56&quot;&gt;业务 API 层 · 工具执行 · Trace 全程记录可评估&lt;/text&gt;&#13;&#10;          &lt;text x=&quot;256&quot; y=&quot;410&quot; textAnchor=&quot;middle&quot; fontSize=&quot;12&quot; fill=&quot;#5F5E5A&quot;&gt;驱动模型：智谱 GLM-4-Flash · 编排框架：LangGraph&lt;/text&gt;&#13;&#10;        &lt;/g&gt;&#13;&#10;      &lt;/svg&gt;&#13;&#10;    &lt;/div&gt;&#13;&#10;    &lt;div style={{ flex: 1, display: 'flex', flexDirection: 'column', gap: 18 }}&gt;&#13;&#10;      &lt;div&gt;&#13;&#10;        &lt;div style={{ fontSize: 14, color: '#BD9B56', fontWeight: 'bold', letterSpacing: '0.1em', marginBottom: 6 }}&gt;1.  多轮状态机&lt;/div&gt;&#13;&#10;        &lt;p style={{ fontSize: 14, color: '#5F5E5A', margin: 0, lineHeight: 1.65 }}&gt;报修不是单轮问答——业主只说「厨房漏水」时，Agent 会主动追问房屋位置、故障类型，把信息补全后才创建工单，避免生成残缺工单。&lt;/p&gt;&#13;&#10;      &lt;/div&gt;&#13;&#10;      &lt;div&gt;&#13;&#10;        &lt;div style={{ fontSize: 14, color: '#BD9B56', fontWeight: 'bold', letterSpacing: '0.1em', marginBottom: 6 }}&gt;2.  五类意图&lt;/div&gt;&#13;&#10;        &lt;p style={{ fontSize: 14, color: '#5F5E5A', margin: 0, lineHeight: 1.65 }}&gt;报修、费用、公告、知识咨询、问题上报，自然语言直达对应业务工具，实测意图识别准确率 100%。&lt;/p&gt;&#13;&#10;      &lt;/div&gt;&#13;&#10;      &lt;div&gt;&#13;&#10;        &lt;div style={{ fontSize: 14, color: '#BD9B56', fontWeight: 'bold', letterSpacing: '0.1em', marginBottom: 6 }}&gt;3.  可观测可评估&lt;/div&gt;&#13;&#10;        &lt;p style={{ fontSize: 14, color: '#5F5E5A', margin: 0, lineHeight: 1.65 }}&gt;每次对话的意图、工具、结果全程记录 Trace，可回放、可评估，是量化评估体系的数据基础。&lt;/p&gt;&#13;&#10;      &lt;/div&gt;&#13;&#10;    &lt;/div&gt;&#13;&#10;  &lt;/div&gt;&#13;&#10;  &lt;div style={{ flexShrink: 0, height: 40, display: 'flex', alignItems: 'flex-end', justifyContent: 'space-between' }}&gt;&#13;&#10;    &lt;span style={{ color: '#BD9B56', fontSize: 12, letterSpacing: '0.1em' }}&gt;云溪花园 · 智慧社区&lt;/span&gt;&#13;&#10;    &lt;span style={{ color: '#a09b8c', fontSize: 12 }}&gt;11 / 19&lt;/span&gt;&#13;&#10;  &lt;/div&gt;&#13;&#10;&lt;/Slide&gt;"/>
+        <p:cNvGrpSpPr/>
+        <p:nvPr/>
+      </p:nvGrpSpPr>
+      <p:grpSpPr>
+        <a:xfrm>
+          <a:off x="0" y="0"/>
+          <a:ext cx="0" cy="0"/>
+          <a:chOff x="0" y="0"/>
+          <a:chExt cx="0" cy="0"/>
+        </a:xfrm>
+      </p:grpSpPr>
+      <p:sp>
+        <p:nvSpPr>
+          <p:cNvPr id="43" name=""/>
+          <p:cNvSpPr/>
+          <p:nvPr/>
+        </p:nvSpPr>
+        <p:spPr>
+          <a:xfrm rot="0" flipH="0" flipV="0">
+            <a:off x="0" y="0"/>
+            <a:ext cx="12192000" cy="6858000"/>
+          </a:xfrm>
+          <a:prstGeom prst="rect">
+            <a:avLst/>
+          </a:prstGeom>
+          <a:solidFill>
+            <a:srgbClr val="FBFCFA"/>
+          </a:solidFill>
+          <a:ln/>
+        </p:spPr>
+        <p:txBody>
+          <a:bodyPr/>
+          <a:p/>
+        </p:txBody>
+      </p:sp>
+      <p:sp>
+        <p:nvSpPr>
+          <p:cNvPr id="44" name="" descr="{&quot;isTemplate&quot;:true,&quot;type&quot;:&quot;text&quot;}"/>
+          <p:cNvSpPr txBox="1"/>
+          <p:nvPr/>
+        </p:nvSpPr>
+        <p:spPr>
+          <a:xfrm rot="0" flipH="0" flipV="0">
+            <a:off x="609600" y="381000"/>
+            <a:ext cx="10972800" cy="152400"/>
+          </a:xfrm>
+          <a:prstGeom prst="rect"/>
+        </p:spPr>
+        <p:txBody>
+          <a:bodyPr wrap="none" lIns="0" tIns="0" rIns="0" bIns="0"/>
+          <a:p>
+            <a:pPr>
+              <a:lnSpc>
+                <a:spcPct val="100000"/>
+              </a:lnSpc>
+            </a:pPr>
+            <a:r>
+              <a:rPr lang="en-US" sz="975" spc="-9223372036854775808">
+                <a:solidFill>
+                  <a:srgbClr val="BD9B56"/>
+                </a:solidFill>
+                <a:latin typeface="Microsoft YaHei"/>
+                <a:ea typeface="Microsoft YaHei"/>
+              </a:rPr>
+              <a:t>02 · </a:t>
+            </a:r>
+            <a:r>
+              <a:rPr lang="zh-CN" sz="975" spc="-9223372036854775808">
+                <a:solidFill>
+                  <a:srgbClr val="BD9B56"/>
+                </a:solidFill>
+                <a:latin typeface="Microsoft YaHei"/>
+                <a:ea typeface="Microsoft YaHei"/>
+              </a:rPr>
+              <a:t>技术构建过程</a:t>
+            </a:r>
+            <a:endParaRPr/>
+          </a:p>
+        </p:txBody>
+      </p:sp>
+      <p:sp>
+        <p:nvSpPr>
+          <p:cNvPr id="45" name="" descr="{&quot;isTemplate&quot;:true,&quot;type&quot;:&quot;text&quot;}"/>
+          <p:cNvSpPr txBox="1"/>
+          <p:nvPr/>
+        </p:nvSpPr>
+        <p:spPr>
+          <a:xfrm rot="0" flipH="0" flipV="0">
+            <a:off x="609600" y="609600"/>
+            <a:ext cx="10972800" cy="447675"/>
+          </a:xfrm>
+          <a:prstGeom prst="rect"/>
+        </p:spPr>
+        <p:txBody>
+          <a:bodyPr wrap="none" lIns="0" tIns="0" rIns="0" bIns="0"/>
+          <a:p>
+            <a:pPr>
+              <a:lnSpc>
+                <a:spcPct val="130000"/>
+              </a:lnSpc>
+            </a:pPr>
+            <a:r>
+              <a:rPr lang="en-US" sz="2250" b="1">
+                <a:solidFill>
+                  <a:srgbClr val="172133"/>
+                </a:solidFill>
+                <a:latin typeface="Microsoft YaHei"/>
+                <a:ea typeface="Microsoft YaHei"/>
+              </a:rPr>
+              <a:t>AI Agent </a:t>
+            </a:r>
+            <a:r>
+              <a:rPr lang="zh-CN" sz="2250" b="1">
+                <a:solidFill>
+                  <a:srgbClr val="172133"/>
+                </a:solidFill>
+                <a:latin typeface="Microsoft YaHei"/>
+                <a:ea typeface="Microsoft YaHei"/>
+              </a:rPr>
+              <a:t>架构：</a:t>
+            </a:r>
+            <a:r>
+              <a:rPr lang="en-US" sz="2250" b="1">
+                <a:solidFill>
+                  <a:srgbClr val="172133"/>
+                </a:solidFill>
+                <a:latin typeface="Microsoft YaHei"/>
+                <a:ea typeface="Microsoft YaHei"/>
+              </a:rPr>
+              <a:t>LangGraph </a:t>
+            </a:r>
+            <a:r>
+              <a:rPr lang="zh-CN" sz="2250" b="1">
+                <a:solidFill>
+                  <a:srgbClr val="172133"/>
+                </a:solidFill>
+                <a:latin typeface="Microsoft YaHei"/>
+                <a:ea typeface="Microsoft YaHei"/>
+              </a:rPr>
+              <a:t>多智能体协作</a:t>
+            </a:r>
+            <a:endParaRPr/>
+          </a:p>
+        </p:txBody>
+      </p:sp>
+      <p:sp>
+        <p:nvSpPr>
+          <p:cNvPr id="46" name=""/>
+          <p:cNvSpPr/>
+          <p:nvPr/>
+        </p:nvSpPr>
+        <p:spPr>
+          <a:xfrm rot="0" flipH="0" flipV="0">
+            <a:off x="609600" y="1133475"/>
+            <a:ext cx="5334000" cy="4895850"/>
+          </a:xfrm>
+          <a:prstGeom prst="roundRect">
+            <a:avLst>
+              <a:gd name="adj" fmla="val 2335"/>
+            </a:avLst>
+          </a:prstGeom>
+          <a:solidFill>
+            <a:srgbClr val="FFFFFF"/>
+          </a:solidFill>
+          <a:ln/>
+          <a:effectLst>
+            <a:outerShdw blurRad="228600" dist="57150" dir="5400000">
+              <a:srgbClr val="172133">
+                <a:alpha val="8000"/>
+              </a:srgbClr>
+            </a:outerShdw>
+          </a:effectLst>
+        </p:spPr>
+        <p:txBody>
+          <a:bodyPr/>
+          <a:p/>
+        </p:txBody>
+      </p:sp>
+      <p:pic>
+        <p:nvPicPr>
+          <p:cNvPr id="47" name=""/>
+          <p:cNvPicPr>
+            <a:picLocks noChangeAspect="1"/>
+          </p:cNvPicPr>
+          <p:nvPr/>
+        </p:nvPicPr>
+        <p:blipFill>
+          <a:blip>
+            <a:extLst>
+              <a:ext uri="{96DAC541-7B7A-43D3-8B79-37D633B846F1}">
+                <asvg:svgBlip r:embed="rId1"/>
+              </a:ext>
+            </a:extLst>
+          </a:blip>
+          <a:stretch>
+            <a:fillRect/>
+          </a:stretch>
+        </p:blipFill>
+        <p:spPr>
+          <a:xfrm rot="0" flipH="0" flipV="0">
+            <a:off x="838200" y="1343025"/>
+            <a:ext cx="4876800" cy="4476750"/>
+          </a:xfrm>
+          <a:prstGeom prst="rect">
+            <a:avLst/>
+          </a:prstGeom>
+          <a:ln/>
+        </p:spPr>
+      </p:pic>
+      <p:sp>
+        <p:nvSpPr>
+          <p:cNvPr id="48" name="" descr="{&quot;isTemplate&quot;:true,&quot;type&quot;:&quot;text&quot;}"/>
+          <p:cNvSpPr txBox="1"/>
+          <p:nvPr/>
+        </p:nvSpPr>
+        <p:spPr>
+          <a:xfrm rot="0" flipH="0" flipV="0">
+            <a:off x="6248400" y="2276475"/>
+            <a:ext cx="5334000" cy="161925"/>
+          </a:xfrm>
+          <a:prstGeom prst="rect"/>
+        </p:spPr>
+        <p:txBody>
+          <a:bodyPr wrap="none" lIns="0" tIns="0" rIns="0" bIns="0"/>
+          <a:p>
+            <a:pPr>
+              <a:lnSpc>
+                <a:spcPct val="100000"/>
+              </a:lnSpc>
+            </a:pPr>
+            <a:r>
+              <a:rPr lang="en-US" sz="1050" spc="-9223372036854775808">
+                <a:solidFill>
+                  <a:srgbClr val="BD9B56"/>
+                </a:solidFill>
+                <a:latin typeface="Microsoft YaHei"/>
+                <a:ea typeface="Microsoft YaHei"/>
+              </a:rPr>
+              <a:t>1.  </a:t>
+            </a:r>
+            <a:r>
+              <a:rPr lang="zh-CN" sz="1050" spc="-9223372036854775808">
+                <a:solidFill>
+                  <a:srgbClr val="BD9B56"/>
+                </a:solidFill>
+                <a:latin typeface="Microsoft YaHei"/>
+                <a:ea typeface="Microsoft YaHei"/>
+              </a:rPr>
+              <a:t>多轮状态机</a:t>
+            </a:r>
+            <a:endParaRPr/>
+          </a:p>
+        </p:txBody>
+      </p:sp>
+      <p:sp>
+        <p:nvSpPr>
+          <p:cNvPr id="49" name="" descr="{&quot;isTemplate&quot;:true,&quot;type&quot;:&quot;text&quot;}"/>
+          <p:cNvSpPr txBox="1"/>
+          <p:nvPr/>
+        </p:nvSpPr>
+        <p:spPr>
+          <a:xfrm rot="0" flipH="0" flipV="0">
+            <a:off x="6248400" y="2495550"/>
+            <a:ext cx="5334000" cy="533400"/>
+          </a:xfrm>
+          <a:prstGeom prst="rect"/>
+        </p:spPr>
+        <p:txBody>
+          <a:bodyPr wrap="square" lIns="0" tIns="0" rIns="0" bIns="0">
+            <a:normAutofit/>
+          </a:bodyPr>
+          <a:p>
+            <a:pPr>
+              <a:lnSpc>
+                <a:spcPct val="165000"/>
+              </a:lnSpc>
+            </a:pPr>
+            <a:r>
+              <a:rPr lang="zh-CN" sz="1050">
+                <a:solidFill>
+                  <a:srgbClr val="5F5E5A"/>
+                </a:solidFill>
+                <a:latin typeface="Microsoft YaHei"/>
+                <a:ea typeface="Microsoft YaHei"/>
+              </a:rPr>
+              <a:t>报修不是单轮问答——业主只说「厨房漏水」时，</a:t>
+            </a:r>
+            <a:r>
+              <a:rPr lang="en-US" sz="1050">
+                <a:solidFill>
+                  <a:srgbClr val="5F5E5A"/>
+                </a:solidFill>
+                <a:latin typeface="Microsoft YaHei"/>
+                <a:ea typeface="Microsoft YaHei"/>
+              </a:rPr>
+              <a:t>Agent </a:t>
+            </a:r>
+            <a:r>
+              <a:rPr lang="zh-CN" sz="1050">
+                <a:solidFill>
+                  <a:srgbClr val="5F5E5A"/>
+                </a:solidFill>
+                <a:latin typeface="Microsoft YaHei"/>
+                <a:ea typeface="Microsoft YaHei"/>
+              </a:rPr>
+              <a:t>会主动追问房屋位置、故障类型，把信息补全后才创建工单，避免生成残缺工单。</a:t>
+            </a:r>
+            <a:endParaRPr/>
+          </a:p>
+        </p:txBody>
+      </p:sp>
+      <p:sp>
+        <p:nvSpPr>
+          <p:cNvPr id="50" name="" descr="{&quot;isTemplate&quot;:true,&quot;type&quot;:&quot;text&quot;}"/>
+          <p:cNvSpPr txBox="1"/>
+          <p:nvPr/>
+        </p:nvSpPr>
+        <p:spPr>
+          <a:xfrm rot="0" flipH="0" flipV="0">
+            <a:off x="6248400" y="3200400"/>
+            <a:ext cx="5334000" cy="161925"/>
+          </a:xfrm>
+          <a:prstGeom prst="rect"/>
+        </p:spPr>
+        <p:txBody>
+          <a:bodyPr wrap="none" lIns="0" tIns="0" rIns="0" bIns="0"/>
+          <a:p>
+            <a:pPr>
+              <a:lnSpc>
+                <a:spcPct val="100000"/>
+              </a:lnSpc>
+            </a:pPr>
+            <a:r>
+              <a:rPr lang="en-US" sz="1050" spc="-9223372036854775808">
+                <a:solidFill>
+                  <a:srgbClr val="BD9B56"/>
+                </a:solidFill>
+                <a:latin typeface="Microsoft YaHei"/>
+                <a:ea typeface="Microsoft YaHei"/>
+              </a:rPr>
+              <a:t>2.  </a:t>
+            </a:r>
+            <a:r>
+              <a:rPr lang="zh-CN" sz="1050" spc="-9223372036854775808">
+                <a:solidFill>
+                  <a:srgbClr val="BD9B56"/>
+                </a:solidFill>
+                <a:latin typeface="Microsoft YaHei"/>
+                <a:ea typeface="Microsoft YaHei"/>
+              </a:rPr>
+              <a:t>五类意图</a:t>
+            </a:r>
+            <a:endParaRPr/>
+          </a:p>
+        </p:txBody>
+      </p:sp>
+      <p:sp>
+        <p:nvSpPr>
+          <p:cNvPr id="51" name="" descr="{&quot;isTemplate&quot;:true,&quot;type&quot;:&quot;text&quot;}"/>
+          <p:cNvSpPr txBox="1"/>
+          <p:nvPr/>
+        </p:nvSpPr>
+        <p:spPr>
+          <a:xfrm rot="0" flipH="0" flipV="0">
+            <a:off x="6248400" y="3419475"/>
+            <a:ext cx="5334000" cy="533400"/>
+          </a:xfrm>
+          <a:prstGeom prst="rect"/>
+        </p:spPr>
+        <p:txBody>
+          <a:bodyPr wrap="square" lIns="0" tIns="0" rIns="0" bIns="0">
+            <a:normAutofit/>
+          </a:bodyPr>
+          <a:p>
+            <a:pPr>
+              <a:lnSpc>
+                <a:spcPct val="165000"/>
+              </a:lnSpc>
+            </a:pPr>
+            <a:r>
+              <a:rPr lang="zh-CN" sz="1050">
+                <a:solidFill>
+                  <a:srgbClr val="5F5E5A"/>
+                </a:solidFill>
+                <a:latin typeface="Microsoft YaHei"/>
+                <a:ea typeface="Microsoft YaHei"/>
+              </a:rPr>
+              <a:t>报修、费用、公告、知识咨询、问题上报，自然语言直达对应业务工具，实测意图识别准确率</a:t>
+            </a:r>
+            <a:r>
+              <a:rPr lang="en-US" sz="1050">
+                <a:solidFill>
+                  <a:srgbClr val="5F5E5A"/>
+                </a:solidFill>
+                <a:latin typeface="Microsoft YaHei"/>
+                <a:ea typeface="Microsoft YaHei"/>
+              </a:rPr>
+              <a:t> 100%</a:t>
+            </a:r>
+            <a:r>
+              <a:rPr lang="zh-CN" sz="1050">
+                <a:solidFill>
+                  <a:srgbClr val="5F5E5A"/>
+                </a:solidFill>
+                <a:latin typeface="Microsoft YaHei"/>
+                <a:ea typeface="Microsoft YaHei"/>
+              </a:rPr>
+              <a:t>。</a:t>
+            </a:r>
+            <a:endParaRPr/>
+          </a:p>
+        </p:txBody>
+      </p:sp>
+      <p:sp>
+        <p:nvSpPr>
+          <p:cNvPr id="52" name="" descr="{&quot;isTemplate&quot;:true,&quot;type&quot;:&quot;text&quot;}"/>
+          <p:cNvSpPr txBox="1"/>
+          <p:nvPr/>
+        </p:nvSpPr>
+        <p:spPr>
+          <a:xfrm rot="0" flipH="0" flipV="0">
+            <a:off x="6248400" y="4124325"/>
+            <a:ext cx="5334000" cy="161925"/>
+          </a:xfrm>
+          <a:prstGeom prst="rect"/>
+        </p:spPr>
+        <p:txBody>
+          <a:bodyPr wrap="none" lIns="0" tIns="0" rIns="0" bIns="0"/>
+          <a:p>
+            <a:pPr>
+              <a:lnSpc>
+                <a:spcPct val="100000"/>
+              </a:lnSpc>
+            </a:pPr>
+            <a:r>
+              <a:rPr lang="en-US" sz="1050" spc="-9223372036854775808">
+                <a:solidFill>
+                  <a:srgbClr val="BD9B56"/>
+                </a:solidFill>
+                <a:latin typeface="Microsoft YaHei"/>
+                <a:ea typeface="Microsoft YaHei"/>
+              </a:rPr>
+              <a:t>3.  </a:t>
+            </a:r>
+            <a:r>
+              <a:rPr lang="zh-CN" sz="1050" spc="-9223372036854775808">
+                <a:solidFill>
+                  <a:srgbClr val="BD9B56"/>
+                </a:solidFill>
+                <a:latin typeface="Microsoft YaHei"/>
+                <a:ea typeface="Microsoft YaHei"/>
+              </a:rPr>
+              <a:t>可观测可评估</a:t>
+            </a:r>
+            <a:endParaRPr/>
+          </a:p>
+        </p:txBody>
+      </p:sp>
+      <p:sp>
+        <p:nvSpPr>
+          <p:cNvPr id="53" name="" descr="{&quot;isTemplate&quot;:true,&quot;type&quot;:&quot;text&quot;}"/>
+          <p:cNvSpPr txBox="1"/>
+          <p:nvPr/>
+        </p:nvSpPr>
+        <p:spPr>
+          <a:xfrm rot="0" flipH="0" flipV="0">
+            <a:off x="6248400" y="4343400"/>
+            <a:ext cx="5334000" cy="533400"/>
+          </a:xfrm>
+          <a:prstGeom prst="rect"/>
+        </p:spPr>
+        <p:txBody>
+          <a:bodyPr wrap="square" lIns="0" tIns="0" rIns="0" bIns="0">
+            <a:normAutofit/>
+          </a:bodyPr>
+          <a:p>
+            <a:pPr>
+              <a:lnSpc>
+                <a:spcPct val="165000"/>
+              </a:lnSpc>
+            </a:pPr>
+            <a:r>
+              <a:rPr lang="zh-CN" sz="1050">
+                <a:solidFill>
+                  <a:srgbClr val="5F5E5A"/>
+                </a:solidFill>
+                <a:latin typeface="Microsoft YaHei"/>
+                <a:ea typeface="Microsoft YaHei"/>
+              </a:rPr>
+              <a:t>每次对话的意图、工具、结果全程记录</a:t>
+            </a:r>
+            <a:r>
+              <a:rPr lang="en-US" sz="1050">
+                <a:solidFill>
+                  <a:srgbClr val="5F5E5A"/>
+                </a:solidFill>
+                <a:latin typeface="Microsoft YaHei"/>
+                <a:ea typeface="Microsoft YaHei"/>
+              </a:rPr>
+              <a:t> Trace</a:t>
+            </a:r>
+            <a:r>
+              <a:rPr lang="zh-CN" sz="1050">
+                <a:solidFill>
+                  <a:srgbClr val="5F5E5A"/>
+                </a:solidFill>
+                <a:latin typeface="Microsoft YaHei"/>
+                <a:ea typeface="Microsoft YaHei"/>
+              </a:rPr>
+              <a:t>，可回放、可评估，是量化评估体系的数据基础。</a:t>
+            </a:r>
+            <a:endParaRPr/>
+          </a:p>
+        </p:txBody>
+      </p:sp>
+      <p:sp>
+        <p:nvSpPr>
+          <p:cNvPr id="54" name="" descr="{&quot;isTemplate&quot;:true,&quot;type&quot;:&quot;text&quot;}"/>
+          <p:cNvSpPr txBox="1"/>
+          <p:nvPr/>
+        </p:nvSpPr>
+        <p:spPr>
+          <a:xfrm rot="0" flipH="0" flipV="0">
+            <a:off x="609600" y="6334125"/>
+            <a:ext cx="1009650" cy="142875"/>
+          </a:xfrm>
+          <a:prstGeom prst="rect"/>
+        </p:spPr>
+        <p:txBody>
+          <a:bodyPr wrap="none" lIns="0" tIns="0" rIns="0" bIns="0"/>
+          <a:p>
+            <a:pPr>
+              <a:lnSpc>
+                <a:spcPct val="100000"/>
+              </a:lnSpc>
+            </a:pPr>
+            <a:r>
+              <a:rPr lang="zh-CN" sz="900">
+                <a:solidFill>
+                  <a:srgbClr val="BD9B56"/>
+                </a:solidFill>
+                <a:latin typeface="Microsoft YaHei"/>
+                <a:ea typeface="Microsoft YaHei"/>
+              </a:rPr>
+              <a:t>云溪花园</a:t>
+            </a:r>
+            <a:r>
+              <a:rPr lang="en-US" sz="900">
+                <a:solidFill>
+                  <a:srgbClr val="BD9B56"/>
+                </a:solidFill>
+                <a:latin typeface="Microsoft YaHei"/>
+                <a:ea typeface="Microsoft YaHei"/>
+              </a:rPr>
+              <a:t> · </a:t>
+            </a:r>
+            <a:r>
+              <a:rPr lang="zh-CN" sz="900">
+                <a:solidFill>
+                  <a:srgbClr val="BD9B56"/>
+                </a:solidFill>
+                <a:latin typeface="Microsoft YaHei"/>
+                <a:ea typeface="Microsoft YaHei"/>
+              </a:rPr>
+              <a:t>智慧社区</a:t>
+            </a:r>
+            <a:endParaRPr/>
+          </a:p>
+        </p:txBody>
+      </p:sp>
+      <p:sp>
+        <p:nvSpPr>
+          <p:cNvPr id="55" name="" descr="{&quot;isTemplate&quot;:true,&quot;type&quot;:&quot;text&quot;}"/>
+          <p:cNvSpPr txBox="1"/>
+          <p:nvPr/>
+        </p:nvSpPr>
+        <p:spPr>
+          <a:xfrm rot="0" flipH="0" flipV="0">
+            <a:off x="11191875" y="6334125"/>
+            <a:ext cx="390525" cy="142875"/>
+          </a:xfrm>
+          <a:prstGeom prst="rect"/>
+        </p:spPr>
+        <p:txBody>
+          <a:bodyPr wrap="none" lIns="0" tIns="0" rIns="0" bIns="0"/>
+          <a:p>
+            <a:pPr>
+              <a:lnSpc>
+                <a:spcPct val="100000"/>
+              </a:lnSpc>
+            </a:pPr>
+            <a:r>
+              <a:rPr lang="en-US" sz="900">
+                <a:solidFill>
+                  <a:srgbClr val="A09B8C"/>
+                </a:solidFill>
+                <a:latin typeface="Microsoft YaHei"/>
+                <a:ea typeface="Microsoft YaHei"/>
+              </a:rPr>
+              <a:t>11 / 19</a:t>
+            </a:r>
+            <a:endParaRPr/>
+          </a:p>
+        </p:txBody>
+      </p:sp>
+    </p:spTree>
+  </p:cSld>
+</p:sld>
+</file>
+
+<file path=ppt/slides/slide12.xml><?xml version="1.0" encoding="utf-8"?>
+<p:sld xmlns:p="http://schemas.openxmlformats.org/presentationml/2006/main" xmlns:a="http://schemas.openxmlformats.org/drawingml/2006/main">
+  <p:cSld>
+    <p:spTree>
+      <p:nvGrpSpPr>
+        <p:cNvPr id="56" name="" descr="&lt;Slide style={{ width: '1280px', height: '720px', background: '#FBFCFA', position: 'relative', padding: '40px 64px', boxSizing: 'border-box', display: 'flex', flexDirection: 'column' }}&gt;&#13;&#10;  &lt;div style={{ flexShrink: 0 }}&gt;&#13;&#10;    &lt;div style={{ color: '#BD9B56', fontSize: 13, letterSpacing: '0.25em', marginBottom: 8 }}&gt;02 · 技术构建过程&lt;/div&gt;&#13;&#10;    &lt;h2 style={{ fontSize: 30, fontWeight: 'bold', color: '#172133', margin: 0, lineHeight: 1.3 }}&gt;RAG 知识库：检索物业「隐性知识」&lt;/h2&gt;&#13;&#10;    &lt;div style={{ fontSize: 14, color: '#6b7075', marginTop: 8 }}&gt;22 篇文档不是凭空编造，而是参照官方示范文本与法律规范拟定，每篇标注制定依据&lt;/div&gt;&#13;&#10;  &lt;/div&gt;&#13;&#10;  &lt;div style={{ flex: 1, display: 'flex', alignItems: 'center', gap: 28 }}&gt;&#13;&#10;    &lt;div style={{ flex: '0 0 430px', background: '#fff', borderRadius: 12, padding: '20px 22px', boxShadow: '0 6px 24px rgba(23,33,51,0.08)' }}&gt;&#13;&#10;      &lt;div style={{ fontSize: 14, color: '#BD9B56', fontWeight: 'bold', letterSpacing: '0.1em', marginBottom: 12 }}&gt;知识库目录（7 分类 22 篇）&lt;/div&gt;&#13;&#10;      &lt;div style={{ display: 'flex', flexDirection: 'column', gap: 8 }}&gt;&#13;&#10;        &lt;div style={{ display: 'flex', justifyContent: 'space-between', fontSize: 13, color: '#172133', padding: '4px 0', borderBottom: '1px solid rgba(34,57,94,0.06)' }}&gt;&lt;span&gt;community-rules 社区规约&lt;/span&gt;&lt;span style={{ color: '#5F5E5A' }}&gt;3 篇&lt;/span&gt;&lt;/div&gt;&#13;&#10;        &lt;div style={{ display: 'flex', justifyContent: 'space-between', fontSize: 13, color: '#172133', padding: '4px 0', borderBottom: '1px solid rgba(34,57,94,0.06)' }}&gt;&lt;span&gt;decoration 装修管理&lt;/span&gt;&lt;span style={{ color: '#5F5E5A' }}&gt;3 篇&lt;/span&gt;&lt;/div&gt;&#13;&#10;        &lt;div style={{ display: 'flex', justifyContent: 'space-between', fontSize: 13, color: '#172133', padding: '4px 0', borderBottom: '1px solid rgba(34,57,94,0.06)' }}&gt;&lt;span&gt;parking 停车管理&lt;/span&gt;&lt;span style={{ color: '#5F5E5A' }}&gt;3 篇&lt;/span&gt;&lt;/div&gt;&#13;&#10;        &lt;div style={{ display: 'flex', justifyContent: 'space-between', fontSize: 13, color: '#172133', padding: '4px 0', borderBottom: '1px solid rgba(34,57,94,0.06)' }}&gt;&lt;span&gt;property-service 物业服务&lt;/span&gt;&lt;span style={{ color: '#5F5E5A' }}&gt;3 篇&lt;/span&gt;&lt;/div&gt;&#13;&#10;        &lt;div style={{ display: 'flex', justifyContent: 'space-between', fontSize: 13, color: '#172133', padding: '4px 0', borderBottom: '1px solid rgba(34,57,94,0.06)' }}&gt;&lt;span&gt;emergency 应急管理&lt;/span&gt;&lt;span style={{ color: '#5F5E5A' }}&gt;3 篇&lt;/span&gt;&lt;/div&gt;&#13;&#10;        &lt;div style={{ display: 'flex', justifyContent: 'space-between', fontSize: 13, color: '#172133', padding: '4px 0', borderBottom: '1px solid rgba(34,57,94,0.06)' }}&gt;&lt;span&gt;security 安保管理&lt;/span&gt;&lt;span style={{ color: '#5F5E5A' }}&gt;3 篇&lt;/span&gt;&lt;/div&gt;&#13;&#10;        &lt;div style={{ display: 'flex', justifyContent: 'space-between', fontSize: 13, color: '#172133', padding: '4px 0' }}&gt;&lt;span&gt;faq 常见问题&lt;/span&gt;&lt;span style={{ color: '#5F5E5A' }}&gt;4 篇&lt;/span&gt;&lt;/div&gt;&#13;&#10;      &lt;/div&gt;&#13;&#10;      &lt;div style={{ marginTop: 14, padding: '12px 14px', background: 'rgba(189,155,86,0.10)', borderRadius: 8 }}&gt;&#13;&#10;        &lt;div style={{ fontSize: 12, color: '#BD9B56', fontWeight: 'bold', marginBottom: 6 }}&gt;制定依据（原文可查）&lt;/div&gt;&#13;&#10;        &lt;div style={{ fontSize: 12, color: '#5F5E5A', lineHeight: 1.7 }}&gt;&#13;&#10;          依据《民法典》《物业管理条例》《上海市住宅物业管理规定》，参照上海市住建委 2021 版住宅小区管理规约示范文本&#13;&#10;        &lt;/div&gt;&#13;&#10;      &lt;/div&gt;&#13;&#10;    &lt;/div&gt;&#13;&#10;    &lt;div style={{ flex: 1, display: 'flex', flexDirection: 'column', gap: 14 }}&gt;&#13;&#10;      &lt;div style={{ background: '#fff', borderRadius: 12, padding: '16px 20px', boxShadow: '0 4px 16px rgba(23,33,51,0.06)' }}&gt;&#13;&#10;        &lt;div style={{ fontSize: 14, color: '#BD9B56', fontWeight: 'bold', letterSpacing: '0.1em', marginBottom: 10 }}&gt;检索链路&lt;/div&gt;&#13;&#10;        &lt;div style={{ display: 'flex', alignItems: 'center', gap: 8, flexWrap: 'wrap' }}&gt;&#13;&#10;          &lt;span style={{ fontSize: 13, color: '#172133', background: 'rgba(34,57,94,0.06)', padding: '6px 12px', borderRadius: 6 }}&gt;22 文档&lt;/span&gt;&#13;&#10;          &lt;span style={{ color: '#BD9B56' }}&gt;→&lt;/span&gt;&#13;&#10;          &lt;span style={{ fontSize: 13, color: '#172133', background: 'rgba(34,57,94,0.06)', padding: '6px 12px', borderRadius: 6 }}&gt;99 切片&lt;/span&gt;&#13;&#10;          &lt;span style={{ color: '#BD9B56' }}&gt;→&lt;/span&gt;&#13;&#10;          &lt;span style={{ fontSize: 13, color: '#172133', background: 'rgba(34,57,94,0.06)', padding: '6px 12px', borderRadius: 6 }}&gt;embedding-3（1024 维）&lt;/span&gt;&#13;&#10;          &lt;span style={{ color: '#BD9B56' }}&gt;→&lt;/span&gt;&#13;&#10;          &lt;span style={{ fontSize: 13, color: '#172133', background: 'rgba(34,57,94,0.06)', padding: '6px 12px', borderRadius: 6 }}&gt;pgvector 检索 top-5&lt;/span&gt;&#13;&#10;          &lt;span style={{ color: '#BD9B56' }}&gt;→&lt;/span&gt;&#13;&#10;          &lt;span style={{ fontSize: 13, color: '#172133', background: 'rgba(34,57,94,0.06)', padding: '6px 12px', borderRadius: 6 }}&gt;GLM-4-Flash 生成答案&lt;/span&gt;&#13;&#10;        &lt;/div&gt;&#13;&#10;      &lt;/div&gt;&#13;&#10;      &lt;div style={{ background: '#fff', borderRadius: 12, padding: '16px 20px', boxShadow: '0 4px 16px rgba(23,33,51,0.06)' }}&gt;&#13;&#10;        &lt;div style={{ fontSize: 14, color: '#BD9B56', fontWeight: 'bold', letterSpacing: '0.1em', marginBottom: 8 }}&gt;实测指标&lt;/div&gt;&#13;&#10;        &lt;p style={{ fontSize: 14, color: '#5F5E5A', margin: 0, lineHeight: 1.7 }}&gt;召回 Recall@5 = &lt;span style={{ color: '#BD9B56', fontWeight: 'bold' }}&gt;100%&lt;/span&gt;（检索到的片段必含答案）· 答案准确率 &lt;span style={{ color: '#BD9B56', fontWeight: 'bold' }}&gt;100%&lt;/span&gt;&lt;/p&gt;&#13;&#10;      &lt;/div&gt;&#13;&#10;      &lt;div style={{ background: '#fff', borderRadius: 12, padding: '16px 20px', boxShadow: '0 4px 16px rgba(23,33,51,0.06)' }}&gt;&#13;&#10;        &lt;div style={{ fontSize: 14, color: '#BD9B56', fontWeight: 'bold', letterSpacing: '0.1em', marginBottom: 8 }}&gt;反馈自进化闭环&lt;/div&gt;&#13;&#10;        &lt;p style={{ fontSize: 14, color: '#5F5E5A', margin: 0, lineHeight: 1.7 }}&gt;业主对答案点赞/纠错 → 系统沉淀「知识缺口」→ 物业人工审核 → 审核通过自动写入知识库，让知识越用越准。&lt;/p&gt;&#13;&#10;      &lt;/div&gt;&#13;&#10;    &lt;/div&gt;&#13;&#10;  &lt;/div&gt;&#13;&#10;  &lt;div style={{ flexShrink: 0, height: 40, display: 'flex', alignItems: 'flex-end', justifyContent: 'space-between' }}&gt;&#13;&#10;    &lt;span style={{ color: '#BD9B56', fontSize: 12, letterSpacing: '0.1em' }}&gt;云溪花园 · 智慧社区&lt;/span&gt;&#13;&#10;    &lt;span style={{ color: '#a09b8c', fontSize: 12 }}&gt;12 / 19&lt;/span&gt;&#13;&#10;  &lt;/div&gt;&#13;&#10;&lt;/Slide&gt;"/>
+        <p:cNvGrpSpPr/>
+        <p:nvPr/>
+      </p:nvGrpSpPr>
+      <p:grpSpPr>
+        <a:xfrm>
+          <a:off x="0" y="0"/>
+          <a:ext cx="0" cy="0"/>
+          <a:chOff x="0" y="0"/>
+          <a:chExt cx="0" cy="0"/>
+        </a:xfrm>
+      </p:grpSpPr>
+      <p:sp>
+        <p:nvSpPr>
+          <p:cNvPr id="57" name=""/>
+          <p:cNvSpPr/>
+          <p:nvPr/>
+        </p:nvSpPr>
+        <p:spPr>
+          <a:xfrm rot="0" flipH="0" flipV="0">
+            <a:off x="0" y="0"/>
+            <a:ext cx="12192000" cy="6858000"/>
+          </a:xfrm>
+          <a:prstGeom prst="rect">
+            <a:avLst/>
+          </a:prstGeom>
+          <a:solidFill>
+            <a:srgbClr val="FBFCFA"/>
+          </a:solidFill>
+          <a:ln/>
+        </p:spPr>
+        <p:txBody>
+          <a:bodyPr/>
+          <a:p/>
+        </p:txBody>
+      </p:sp>
+      <p:sp>
+        <p:nvSpPr>
+          <p:cNvPr id="58" name="" descr="{&quot;isTemplate&quot;:true,&quot;type&quot;:&quot;text&quot;}"/>
+          <p:cNvSpPr txBox="1"/>
+          <p:nvPr/>
+        </p:nvSpPr>
+        <p:spPr>
+          <a:xfrm rot="0" flipH="0" flipV="0">
+            <a:off x="609600" y="381000"/>
+            <a:ext cx="10972800" cy="152400"/>
+          </a:xfrm>
+          <a:prstGeom prst="rect"/>
+        </p:spPr>
+        <p:txBody>
+          <a:bodyPr wrap="none" lIns="0" tIns="0" rIns="0" bIns="0"/>
+          <a:p>
+            <a:pPr>
+              <a:lnSpc>
+                <a:spcPct val="100000"/>
+              </a:lnSpc>
+            </a:pPr>
+            <a:r>
+              <a:rPr lang="en-US" sz="975" spc="-9223372036854775808">
+                <a:solidFill>
+                  <a:srgbClr val="BD9B56"/>
+                </a:solidFill>
+                <a:latin typeface="Microsoft YaHei"/>
+                <a:ea typeface="Microsoft YaHei"/>
+              </a:rPr>
+              <a:t>02 · </a:t>
+            </a:r>
+            <a:r>
+              <a:rPr lang="zh-CN" sz="975" spc="-9223372036854775808">
+                <a:solidFill>
+                  <a:srgbClr val="BD9B56"/>
+                </a:solidFill>
+                <a:latin typeface="Microsoft YaHei"/>
+                <a:ea typeface="Microsoft YaHei"/>
+              </a:rPr>
+              <a:t>技术构建过程</a:t>
+            </a:r>
+            <a:endParaRPr/>
+          </a:p>
+        </p:txBody>
+      </p:sp>
+      <p:sp>
+        <p:nvSpPr>
+          <p:cNvPr id="59" name="" descr="{&quot;isTemplate&quot;:true,&quot;type&quot;:&quot;text&quot;}"/>
+          <p:cNvSpPr txBox="1"/>
+          <p:nvPr/>
+        </p:nvSpPr>
+        <p:spPr>
+          <a:xfrm rot="0" flipH="0" flipV="0">
+            <a:off x="609600" y="609600"/>
+            <a:ext cx="10972800" cy="447675"/>
+          </a:xfrm>
+          <a:prstGeom prst="rect"/>
+        </p:spPr>
+        <p:txBody>
+          <a:bodyPr wrap="none" lIns="0" tIns="0" rIns="0" bIns="0"/>
+          <a:p>
+            <a:pPr>
+              <a:lnSpc>
+                <a:spcPct val="130000"/>
+              </a:lnSpc>
+            </a:pPr>
+            <a:r>
+              <a:rPr lang="en-US" sz="2250" b="1">
+                <a:solidFill>
+                  <a:srgbClr val="172133"/>
+                </a:solidFill>
+                <a:latin typeface="Microsoft YaHei"/>
+                <a:ea typeface="Microsoft YaHei"/>
+              </a:rPr>
               <a:t>RAG </a:t>
             </a:r>
             <a:r>
@@ -1149,7 +3165,7 @@
       </p:sp>
       <p:sp>
         <p:nvSpPr>
-          <p:cNvPr id="17" name="" descr="{&quot;isTemplate&quot;:true,&quot;type&quot;:&quot;text&quot;}"/>
+          <p:cNvPr id="60" name="" descr="{&quot;isTemplate&quot;:true,&quot;type&quot;:&quot;text&quot;}"/>
           <p:cNvSpPr txBox="1"/>
           <p:nvPr/>
         </p:nvSpPr>
@@ -1194,7 +3210,7 @@
       </p:sp>
       <p:sp>
         <p:nvSpPr>
-          <p:cNvPr id="18" name=""/>
+          <p:cNvPr id="61" name=""/>
           <p:cNvSpPr/>
           <p:nvPr/>
         </p:nvSpPr>
@@ -1227,7 +3243,7 @@
       </p:sp>
       <p:sp>
         <p:nvSpPr>
-          <p:cNvPr id="19" name="" descr="{&quot;isTemplate&quot;:true,&quot;type&quot;:&quot;text&quot;}"/>
+          <p:cNvPr id="62" name="" descr="{&quot;isTemplate&quot;:true,&quot;type&quot;:&quot;text&quot;}"/>
           <p:cNvSpPr txBox="1"/>
           <p:nvPr/>
         </p:nvSpPr>
@@ -1302,7 +3318,7 @@
       </p:sp>
       <p:sp>
         <p:nvSpPr>
-          <p:cNvPr id="20" name=""/>
+          <p:cNvPr id="63" name=""/>
           <p:cNvSpPr/>
           <p:nvPr/>
         </p:nvSpPr>
@@ -1344,7 +3360,7 @@
       </p:sp>
       <p:sp>
         <p:nvSpPr>
-          <p:cNvPr id="21" name="" descr="{&quot;isTemplate&quot;:true,&quot;type&quot;:&quot;text&quot;}"/>
+          <p:cNvPr id="64" name="" descr="{&quot;isTemplate&quot;:true,&quot;type&quot;:&quot;text&quot;}"/>
           <p:cNvSpPr txBox="1"/>
           <p:nvPr/>
         </p:nvSpPr>
@@ -1389,7 +3405,7 @@
       </p:sp>
       <p:sp>
         <p:nvSpPr>
-          <p:cNvPr id="22" name="" descr="{&quot;isTemplate&quot;:true,&quot;type&quot;:&quot;text&quot;}"/>
+          <p:cNvPr id="65" name="" descr="{&quot;isTemplate&quot;:true,&quot;type&quot;:&quot;text&quot;}"/>
           <p:cNvSpPr txBox="1"/>
           <p:nvPr/>
         </p:nvSpPr>
@@ -1434,7 +3450,7 @@
       </p:sp>
       <p:sp>
         <p:nvSpPr>
-          <p:cNvPr id="23" name=""/>
+          <p:cNvPr id="66" name=""/>
           <p:cNvSpPr/>
           <p:nvPr/>
         </p:nvSpPr>
@@ -1476,7 +3492,7 @@
       </p:sp>
       <p:sp>
         <p:nvSpPr>
-          <p:cNvPr id="24" name="" descr="{&quot;isTemplate&quot;:true,&quot;type&quot;:&quot;text&quot;}"/>
+          <p:cNvPr id="67" name="" descr="{&quot;isTemplate&quot;:true,&quot;type&quot;:&quot;text&quot;}"/>
           <p:cNvSpPr txBox="1"/>
           <p:nvPr/>
         </p:nvSpPr>
@@ -1521,7 +3537,7 @@
       </p:sp>
       <p:sp>
         <p:nvSpPr>
-          <p:cNvPr id="25" name="" descr="{&quot;isTemplate&quot;:true,&quot;type&quot;:&quot;text&quot;}"/>
+          <p:cNvPr id="68" name="" descr="{&quot;isTemplate&quot;:true,&quot;type&quot;:&quot;text&quot;}"/>
           <p:cNvSpPr txBox="1"/>
           <p:nvPr/>
         </p:nvSpPr>
@@ -1566,7 +3582,7 @@
       </p:sp>
       <p:sp>
         <p:nvSpPr>
-          <p:cNvPr id="26" name=""/>
+          <p:cNvPr id="69" name=""/>
           <p:cNvSpPr/>
           <p:nvPr/>
         </p:nvSpPr>
@@ -1608,7 +3624,7 @@
       </p:sp>
       <p:sp>
         <p:nvSpPr>
-          <p:cNvPr id="27" name="" descr="{&quot;isTemplate&quot;:true,&quot;type&quot;:&quot;text&quot;}"/>
+          <p:cNvPr id="70" name="" descr="{&quot;isTemplate&quot;:true,&quot;type&quot;:&quot;text&quot;}"/>
           <p:cNvSpPr txBox="1"/>
           <p:nvPr/>
         </p:nvSpPr>
@@ -1653,7 +3669,7 @@
       </p:sp>
       <p:sp>
         <p:nvSpPr>
-          <p:cNvPr id="28" name="" descr="{&quot;isTemplate&quot;:true,&quot;type&quot;:&quot;text&quot;}"/>
+          <p:cNvPr id="71" name="" descr="{&quot;isTemplate&quot;:true,&quot;type&quot;:&quot;text&quot;}"/>
           <p:cNvSpPr txBox="1"/>
           <p:nvPr/>
         </p:nvSpPr>
@@ -1698,7 +3714,7 @@
       </p:sp>
       <p:sp>
         <p:nvSpPr>
-          <p:cNvPr id="29" name=""/>
+          <p:cNvPr id="72" name=""/>
           <p:cNvSpPr/>
           <p:nvPr/>
         </p:nvSpPr>
@@ -1740,7 +3756,7 @@
       </p:sp>
       <p:sp>
         <p:nvSpPr>
-          <p:cNvPr id="30" name="" descr="{&quot;isTemplate&quot;:true,&quot;type&quot;:&quot;text&quot;}"/>
+          <p:cNvPr id="73" name="" descr="{&quot;isTemplate&quot;:true,&quot;type&quot;:&quot;text&quot;}"/>
           <p:cNvSpPr txBox="1"/>
           <p:nvPr/>
         </p:nvSpPr>
@@ -1785,7 +3801,7 @@
       </p:sp>
       <p:sp>
         <p:nvSpPr>
-          <p:cNvPr id="31" name="" descr="{&quot;isTemplate&quot;:true,&quot;type&quot;:&quot;text&quot;}"/>
+          <p:cNvPr id="74" name="" descr="{&quot;isTemplate&quot;:true,&quot;type&quot;:&quot;text&quot;}"/>
           <p:cNvSpPr txBox="1"/>
           <p:nvPr/>
         </p:nvSpPr>
@@ -1830,7 +3846,7 @@
       </p:sp>
       <p:sp>
         <p:nvSpPr>
-          <p:cNvPr id="32" name=""/>
+          <p:cNvPr id="75" name=""/>
           <p:cNvSpPr/>
           <p:nvPr/>
         </p:nvSpPr>
@@ -1872,7 +3888,7 @@
       </p:sp>
       <p:sp>
         <p:nvSpPr>
-          <p:cNvPr id="33" name="" descr="{&quot;isTemplate&quot;:true,&quot;type&quot;:&quot;text&quot;}"/>
+          <p:cNvPr id="76" name="" descr="{&quot;isTemplate&quot;:true,&quot;type&quot;:&quot;text&quot;}"/>
           <p:cNvSpPr txBox="1"/>
           <p:nvPr/>
         </p:nvSpPr>
@@ -1917,7 +3933,7 @@
       </p:sp>
       <p:sp>
         <p:nvSpPr>
-          <p:cNvPr id="34" name="" descr="{&quot;isTemplate&quot;:true,&quot;type&quot;:&quot;text&quot;}"/>
+          <p:cNvPr id="77" name="" descr="{&quot;isTemplate&quot;:true,&quot;type&quot;:&quot;text&quot;}"/>
           <p:cNvSpPr txBox="1"/>
           <p:nvPr/>
         </p:nvSpPr>
@@ -1962,7 +3978,7 @@
       </p:sp>
       <p:sp>
         <p:nvSpPr>
-          <p:cNvPr id="35" name=""/>
+          <p:cNvPr id="78" name=""/>
           <p:cNvSpPr/>
           <p:nvPr/>
         </p:nvSpPr>
@@ -2004,7 +4020,7 @@
       </p:sp>
       <p:sp>
         <p:nvSpPr>
-          <p:cNvPr id="36" name="" descr="{&quot;isTemplate&quot;:true,&quot;type&quot;:&quot;text&quot;}"/>
+          <p:cNvPr id="79" name="" descr="{&quot;isTemplate&quot;:true,&quot;type&quot;:&quot;text&quot;}"/>
           <p:cNvSpPr txBox="1"/>
           <p:nvPr/>
         </p:nvSpPr>
@@ -2049,7 +4065,7 @@
       </p:sp>
       <p:sp>
         <p:nvSpPr>
-          <p:cNvPr id="37" name="" descr="{&quot;isTemplate&quot;:true,&quot;type&quot;:&quot;text&quot;}"/>
+          <p:cNvPr id="80" name="" descr="{&quot;isTemplate&quot;:true,&quot;type&quot;:&quot;text&quot;}"/>
           <p:cNvSpPr txBox="1"/>
           <p:nvPr/>
         </p:nvSpPr>
@@ -2094,7 +4110,7 @@
       </p:sp>
       <p:sp>
         <p:nvSpPr>
-          <p:cNvPr id="38" name="" descr="{&quot;isTemplate&quot;:true,&quot;type&quot;:&quot;text&quot;}"/>
+          <p:cNvPr id="81" name="" descr="{&quot;isTemplate&quot;:true,&quot;type&quot;:&quot;text&quot;}"/>
           <p:cNvSpPr txBox="1"/>
           <p:nvPr/>
         </p:nvSpPr>
@@ -2139,7 +4155,7 @@
       </p:sp>
       <p:sp>
         <p:nvSpPr>
-          <p:cNvPr id="39" name="" descr="{&quot;isTemplate&quot;:true,&quot;type&quot;:&quot;text&quot;}"/>
+          <p:cNvPr id="82" name="" descr="{&quot;isTemplate&quot;:true,&quot;type&quot;:&quot;text&quot;}"/>
           <p:cNvSpPr txBox="1"/>
           <p:nvPr/>
         </p:nvSpPr>
@@ -2184,7 +4200,7 @@
       </p:sp>
       <p:sp>
         <p:nvSpPr>
-          <p:cNvPr id="40" name=""/>
+          <p:cNvPr id="83" name=""/>
           <p:cNvSpPr/>
           <p:nvPr/>
         </p:nvSpPr>
@@ -2212,7 +4228,7 @@
       </p:sp>
       <p:sp>
         <p:nvSpPr>
-          <p:cNvPr id="41" name="" descr="{&quot;isTemplate&quot;:true,&quot;type&quot;:&quot;text&quot;}"/>
+          <p:cNvPr id="84" name="" descr="{&quot;isTemplate&quot;:true,&quot;type&quot;:&quot;text&quot;}"/>
           <p:cNvSpPr txBox="1"/>
           <p:nvPr/>
         </p:nvSpPr>
@@ -2247,7 +4263,7 @@
       </p:sp>
       <p:sp>
         <p:nvSpPr>
-          <p:cNvPr id="42" name="" descr="{&quot;isTemplate&quot;:true,&quot;type&quot;:&quot;text&quot;}"/>
+          <p:cNvPr id="85" name="" descr="{&quot;isTemplate&quot;:true,&quot;type&quot;:&quot;text&quot;}"/>
           <p:cNvSpPr txBox="1"/>
           <p:nvPr/>
         </p:nvSpPr>
@@ -2304,7 +4320,7 @@
       </p:sp>
       <p:sp>
         <p:nvSpPr>
-          <p:cNvPr id="43" name=""/>
+          <p:cNvPr id="86" name=""/>
           <p:cNvSpPr/>
           <p:nvPr/>
         </p:nvSpPr>
@@ -2337,7 +4353,7 @@
       </p:sp>
       <p:sp>
         <p:nvSpPr>
-          <p:cNvPr id="44" name="" descr="{&quot;isTemplate&quot;:true,&quot;type&quot;:&quot;text&quot;}"/>
+          <p:cNvPr id="87" name="" descr="{&quot;isTemplate&quot;:true,&quot;type&quot;:&quot;text&quot;}"/>
           <p:cNvSpPr txBox="1"/>
           <p:nvPr/>
         </p:nvSpPr>
@@ -2372,7 +4388,7 @@
       </p:sp>
       <p:sp>
         <p:nvSpPr>
-          <p:cNvPr id="45" name=""/>
+          <p:cNvPr id="88" name=""/>
           <p:cNvSpPr/>
           <p:nvPr/>
         </p:nvSpPr>
@@ -2400,7 +4416,7 @@
       </p:sp>
       <p:sp>
         <p:nvSpPr>
-          <p:cNvPr id="46" name="" descr="{&quot;isTemplate&quot;:true,&quot;type&quot;:&quot;text&quot;}"/>
+          <p:cNvPr id="89" name="" descr="{&quot;isTemplate&quot;:true,&quot;type&quot;:&quot;text&quot;}"/>
           <p:cNvSpPr txBox="1"/>
           <p:nvPr/>
         </p:nvSpPr>
@@ -2455,7 +4471,7 @@
       </p:sp>
       <p:sp>
         <p:nvSpPr>
-          <p:cNvPr id="47" name="" descr="{&quot;isTemplate&quot;:true,&quot;type&quot;:&quot;text&quot;}"/>
+          <p:cNvPr id="90" name="" descr="{&quot;isTemplate&quot;:true,&quot;type&quot;:&quot;text&quot;}"/>
           <p:cNvSpPr txBox="1"/>
           <p:nvPr/>
         </p:nvSpPr>
@@ -2490,7 +4506,7 @@
       </p:sp>
       <p:sp>
         <p:nvSpPr>
-          <p:cNvPr id="48" name=""/>
+          <p:cNvPr id="91" name=""/>
           <p:cNvSpPr/>
           <p:nvPr/>
         </p:nvSpPr>
@@ -2518,7 +4534,7 @@
       </p:sp>
       <p:sp>
         <p:nvSpPr>
-          <p:cNvPr id="49" name="" descr="{&quot;isTemplate&quot;:true,&quot;type&quot;:&quot;text&quot;}"/>
+          <p:cNvPr id="92" name="" descr="{&quot;isTemplate&quot;:true,&quot;type&quot;:&quot;text&quot;}"/>
           <p:cNvSpPr txBox="1"/>
           <p:nvPr/>
         </p:nvSpPr>
@@ -2573,7 +4589,7 @@
       </p:sp>
       <p:sp>
         <p:nvSpPr>
-          <p:cNvPr id="50" name="" descr="{&quot;isTemplate&quot;:true,&quot;type&quot;:&quot;text&quot;}"/>
+          <p:cNvPr id="93" name="" descr="{&quot;isTemplate&quot;:true,&quot;type&quot;:&quot;text&quot;}"/>
           <p:cNvSpPr txBox="1"/>
           <p:nvPr/>
         </p:nvSpPr>
@@ -2608,7 +4624,7 @@
       </p:sp>
       <p:sp>
         <p:nvSpPr>
-          <p:cNvPr id="51" name=""/>
+          <p:cNvPr id="94" name=""/>
           <p:cNvSpPr/>
           <p:nvPr/>
         </p:nvSpPr>
@@ -2636,7 +4652,7 @@
       </p:sp>
       <p:sp>
         <p:nvSpPr>
-          <p:cNvPr id="52" name="" descr="{&quot;isTemplate&quot;:true,&quot;type&quot;:&quot;text&quot;}"/>
+          <p:cNvPr id="95" name="" descr="{&quot;isTemplate&quot;:true,&quot;type&quot;:&quot;text&quot;}"/>
           <p:cNvSpPr txBox="1"/>
           <p:nvPr/>
         </p:nvSpPr>
@@ -2721,7 +4737,7 @@
       </p:sp>
       <p:sp>
         <p:nvSpPr>
-          <p:cNvPr id="53" name="" descr="{&quot;isTemplate&quot;:true,&quot;type&quot;:&quot;text&quot;}"/>
+          <p:cNvPr id="96" name="" descr="{&quot;isTemplate&quot;:true,&quot;type&quot;:&quot;text&quot;}"/>
           <p:cNvSpPr txBox="1"/>
           <p:nvPr/>
         </p:nvSpPr>
@@ -2756,7 +4772,7 @@
       </p:sp>
       <p:sp>
         <p:nvSpPr>
-          <p:cNvPr id="54" name=""/>
+          <p:cNvPr id="97" name=""/>
           <p:cNvSpPr/>
           <p:nvPr/>
         </p:nvSpPr>
@@ -2784,7 +4800,7 @@
       </p:sp>
       <p:sp>
         <p:nvSpPr>
-          <p:cNvPr id="55" name="" descr="{&quot;isTemplate&quot;:true,&quot;type&quot;:&quot;text&quot;}"/>
+          <p:cNvPr id="98" name="" descr="{&quot;isTemplate&quot;:true,&quot;type&quot;:&quot;text&quot;}"/>
           <p:cNvSpPr txBox="1"/>
           <p:nvPr/>
         </p:nvSpPr>
@@ -2854,7 +4870,7 @@
       </p:sp>
       <p:sp>
         <p:nvSpPr>
-          <p:cNvPr id="56" name="" descr="{&quot;isTemplate&quot;:true,&quot;type&quot;:&quot;text&quot;}"/>
+          <p:cNvPr id="99" name="" descr="{&quot;isTemplate&quot;:true,&quot;type&quot;:&quot;text&quot;}"/>
           <p:cNvSpPr txBox="1"/>
           <p:nvPr/>
         </p:nvSpPr>
@@ -2889,7 +4905,7 @@
       </p:sp>
       <p:sp>
         <p:nvSpPr>
-          <p:cNvPr id="57" name=""/>
+          <p:cNvPr id="100" name=""/>
           <p:cNvSpPr/>
           <p:nvPr/>
         </p:nvSpPr>
@@ -2917,7 +4933,7 @@
       </p:sp>
       <p:sp>
         <p:nvSpPr>
-          <p:cNvPr id="58" name="" descr="{&quot;isTemplate&quot;:true,&quot;type&quot;:&quot;text&quot;}"/>
+          <p:cNvPr id="101" name="" descr="{&quot;isTemplate&quot;:true,&quot;type&quot;:&quot;text&quot;}"/>
           <p:cNvSpPr txBox="1"/>
           <p:nvPr/>
         </p:nvSpPr>
@@ -2972,7 +4988,7 @@
       </p:sp>
       <p:sp>
         <p:nvSpPr>
-          <p:cNvPr id="59" name=""/>
+          <p:cNvPr id="102" name=""/>
           <p:cNvSpPr/>
           <p:nvPr/>
         </p:nvSpPr>
@@ -3005,7 +5021,7 @@
       </p:sp>
       <p:sp>
         <p:nvSpPr>
-          <p:cNvPr id="60" name="" descr="{&quot;isTemplate&quot;:true,&quot;type&quot;:&quot;text&quot;}"/>
+          <p:cNvPr id="103" name="" descr="{&quot;isTemplate&quot;:true,&quot;type&quot;:&quot;text&quot;}"/>
           <p:cNvSpPr txBox="1"/>
           <p:nvPr/>
         </p:nvSpPr>
@@ -3040,7 +5056,7 @@
       </p:sp>
       <p:sp>
         <p:nvSpPr>
-          <p:cNvPr id="61" name="" descr="{&quot;isTemplate&quot;:true,&quot;type&quot;:&quot;text&quot;}"/>
+          <p:cNvPr id="104" name="" descr="{&quot;isTemplate&quot;:true,&quot;type&quot;:&quot;text&quot;}"/>
           <p:cNvSpPr txBox="1"/>
           <p:nvPr/>
         </p:nvSpPr>
@@ -3145,7 +5161,7 @@
       </p:sp>
       <p:sp>
         <p:nvSpPr>
-          <p:cNvPr id="62" name=""/>
+          <p:cNvPr id="105" name=""/>
           <p:cNvSpPr/>
           <p:nvPr/>
         </p:nvSpPr>
@@ -3178,7 +5194,7 @@
       </p:sp>
       <p:sp>
         <p:nvSpPr>
-          <p:cNvPr id="63" name="" descr="{&quot;isTemplate&quot;:true,&quot;type&quot;:&quot;text&quot;}"/>
+          <p:cNvPr id="106" name="" descr="{&quot;isTemplate&quot;:true,&quot;type&quot;:&quot;text&quot;}"/>
           <p:cNvSpPr txBox="1"/>
           <p:nvPr/>
         </p:nvSpPr>
@@ -3213,7 +5229,7 @@
       </p:sp>
       <p:sp>
         <p:nvSpPr>
-          <p:cNvPr id="64" name="" descr="{&quot;isTemplate&quot;:true,&quot;type&quot;:&quot;text&quot;}"/>
+          <p:cNvPr id="107" name="" descr="{&quot;isTemplate&quot;:true,&quot;type&quot;:&quot;text&quot;}"/>
           <p:cNvSpPr txBox="1"/>
           <p:nvPr/>
         </p:nvSpPr>
@@ -3330,7 +5346,7 @@
       </p:sp>
       <p:sp>
         <p:nvSpPr>
-          <p:cNvPr id="65" name="" descr="{&quot;isTemplate&quot;:true,&quot;type&quot;:&quot;text&quot;}"/>
+          <p:cNvPr id="108" name="" descr="{&quot;isTemplate&quot;:true,&quot;type&quot;:&quot;text&quot;}"/>
           <p:cNvSpPr txBox="1"/>
           <p:nvPr/>
         </p:nvSpPr>
@@ -3385,7 +5401,7 @@
       </p:sp>
       <p:sp>
         <p:nvSpPr>
-          <p:cNvPr id="66" name="" descr="{&quot;isTemplate&quot;:true,&quot;type&quot;:&quot;text&quot;}"/>
+          <p:cNvPr id="109" name="" descr="{&quot;isTemplate&quot;:true,&quot;type&quot;:&quot;text&quot;}"/>
           <p:cNvSpPr txBox="1"/>
           <p:nvPr/>
         </p:nvSpPr>
@@ -3412,7 +5428,7 @@
                 <a:latin typeface="Microsoft YaHei"/>
                 <a:ea typeface="Microsoft YaHei"/>
               </a:rPr>
-              <a:t>10 / 15</a:t>
+              <a:t>12 / 19</a:t>
             </a:r>
             <a:endParaRPr/>
           </a:p>
@@ -3423,12 +5439,12 @@
 </p:sld>
 </file>
 
-<file path=ppt/slides/slide11.xml><?xml version="1.0" encoding="utf-8"?>
+<file path=ppt/slides/slide13.xml><?xml version="1.0" encoding="utf-8"?>
 <p:sld xmlns:p="http://schemas.openxmlformats.org/presentationml/2006/main" xmlns:a="http://schemas.openxmlformats.org/drawingml/2006/main">
   <p:cSld>
     <p:spTree>
       <p:nvGrpSpPr>
-        <p:cNvPr id="67" name="" descr="&lt;Slide style={{ width: '1280px', height: '720px', background: '#FBFCFA', position: 'relative', padding: '40px 64px', boxSizing: 'border-box', display: 'flex', flexDirection: 'column' }}&gt;&#10;  &lt;div style={{ flexShrink: 0 }}&gt;&#10;    &lt;div style={{ color: '#BD9B56', fontSize: 13, letterSpacing: '0.25em', marginBottom: 8 }}&gt;03 · 成果与验证&lt;/div&gt;&#10;    &lt;h2 style={{ fontSize: 30, fontWeight: 'bold', color: '#172133', margin: 0, lineHeight: 1.3 }}&gt;功能闭环：AI 走完完整业务流程&lt;/h2&gt;&#10;    &lt;div style={{ fontSize: 14, color: '#6b7075', marginTop: 8 }}&gt;三条闭环验证「AI 不是聊天框，而是真正参与业务」——每条都真实写入数据库、流转状态、发出通知&lt;/div&gt;&#10;  &lt;/div&gt;&#10;  &lt;div style={{ flex: 1, display: 'flex', alignItems: 'center' }}&gt;&#10;    &lt;div style={{ width: '100%', display: 'flex', gap: 18 }}&gt;&#10;      &lt;div style={{ flex: 1, background: '#fff', borderRadius: 10, padding: '18px 18px', boxShadow: '0 4px 16px rgba(23,33,51,0.06)', display: 'flex', flexDirection: 'column' }}&gt;&#10;        &lt;div style={{ display: 'flex', alignItems: 'center', gap: 8, marginBottom: 10 }}&gt;&#10;          &lt;span style={{ fontSize: 17, fontWeight: 'bold', color: '#172133' }}&gt;1.  报修闭环&lt;/span&gt;&#10;          &lt;span style={{ fontSize: 12, color: '#BD9B56', background: 'rgba(189,155,86,0.12)', padding: '2px 8px', borderRadius: 4 }}&gt;业主 → 师傅&lt;/span&gt;&#10;        &lt;/div&gt;&#10;        &lt;p style={{ fontSize: 13, color: '#5F5E5A', margin: 0, lineHeight: 1.6, marginBottom: 12 }}&gt;对话报修 → 多轮补全位置/类型 → 技能+在岗自动派单 → 师傅接单处理 → 业主确认完成，全流程真实建单、流转状态、发通知。&lt;/p&gt;&#10;        &lt;div style={{ marginTop: 'auto', height: 130, border: '2px dashed #BD9B56', borderRadius: 8, background: 'rgba(189,155,86,0.05)', display: 'flex', alignItems: 'center', justifyContent: 'center', color: '#BD9B56', fontSize: 12 }}&gt;此处放「AI 报修对话」截图&lt;/div&gt;&#10;      &lt;/div&gt;&#10;      &lt;div style={{ flex: 1, background: '#fff', borderRadius: 10, padding: '18px 18px', boxShadow: '0 4px 16px rgba(23,33,51,0.06)', display: 'flex', flexDirection: 'column' }}&gt;&#10;        &lt;div style={{ display: 'flex', alignItems: 'center', gap: 8, marginBottom: 10 }}&gt;&#10;          &lt;span style={{ fontSize: 17, fontWeight: 'bold', color: '#172133' }}&gt;2.  巡检告警&lt;/span&gt;&#10;          &lt;span style={{ fontSize: 12, color: '#BD9B56', background: 'rgba(189,155,86,0.12)', padding: '2px 8px', borderRadius: 4 }}&gt;摄像头 → 物业&lt;/span&gt;&#10;        &lt;/div&gt;&#10;        &lt;p style={{ fontSize: 13, color: '#5F5E5A', margin: 0, lineHeight: 1.6, marginBottom: 12 }}&gt;摄像头抓拍社区画面 → 视觉模型识别异常（垃圾堆积、车辆违停、消防堵塞）→ 生成巡检记录并实时通知物业负责人。&lt;/p&gt;&#10;        &lt;div style={{ marginTop: 'auto', height: 130, border: '2px dashed #BD9B56', borderRadius: 8, background: 'rgba(189,155,86,0.05)', display: 'flex', alignItems: 'center', justifyContent: 'center', color: '#BD9B56', fontSize: 12 }}&gt;此处放「巡检异常识别」截图&lt;/div&gt;&#10;      &lt;/div&gt;&#10;      &lt;div style={{ flex: 1, background: '#fff', borderRadius: 10, padding: '18px 18px', boxShadow: '0 4px 16px rgba(23,33,51,0.06)', display: 'flex', flexDirection: 'column' }}&gt;&#10;        &lt;div style={{ display: 'flex', alignItems: 'center', gap: 8, marginBottom: 10 }}&gt;&#10;          &lt;span style={{ fontSize: 17, fontWeight: 'bold', color: '#172133' }}&gt;3.  反馈自进化&lt;/span&gt;&#10;          &lt;span style={{ fontSize: 12, color: '#BD9B56', background: 'rgba(189,155,86,0.12)', padding: '2px 8px', borderRadius: 4 }}&gt;对话 → 知识库&lt;/span&gt;&#10;        &lt;/div&gt;&#10;        &lt;p style={{ fontSize: 13, color: '#5F5E5A', margin: 0, lineHeight: 1.6, marginBottom: 12 }}&gt;业主对 AI 答案点赞/纠错 → 沉淀「知识缺口」→ 物业人员人工审核 → 审核通过自动写入知识库，越用越准。&lt;/p&gt;&#10;        &lt;div style={{ marginTop: 'auto', height: 130, border: '2px dashed #BD9B56', borderRadius: 8, background: 'rgba(189,155,86,0.05)', display: 'flex', alignItems: 'center', justifyContent: 'center', color: '#BD9B56', fontSize: 12 }}&gt;此处放「知识缺口审核」截图&lt;/div&gt;&#10;      &lt;/div&gt;&#10;    &lt;/div&gt;&#10;  &lt;/div&gt;&#10;  &lt;div style={{ flexShrink: 0, height: 40, display: 'flex', alignItems: 'flex-end', justifyContent: 'space-between' }}&gt;&#10;    &lt;span style={{ color: '#BD9B56', fontSize: 12, letterSpacing: '0.1em' }}&gt;云溪花园 · 智慧社区&lt;/span&gt;&#10;    &lt;span style={{ color: '#a09b8c', fontSize: 12 }}&gt;11 / 15&lt;/span&gt;&#10;  &lt;/div&gt;&#10;&lt;/Slide&gt;"/>
+        <p:cNvPr id="110" name="" descr="&lt;Slide style={{ width: '1280px', height: '720px', background: 'linear-gradient(135deg, #172133 0%, #22395E 100%)', position: 'relative', display: 'flex', flexDirection: 'column', justifyContent: 'center', padding: '0 96px' }}&gt;&#10;  &lt;div style={{ color: '#BD9B56', fontSize: 15, letterSpacing: '0.35em', marginBottom: 24 }}&gt;SECTION 03&lt;/div&gt;&#10;  &lt;div style={{ display: 'flex', alignItems: 'baseline', gap: 28 }}&gt;&#10;    &lt;span style={{ fontSize: 110, fontWeight: 'bold', color: 'rgba(189,155,86,0.28)', fontFamily: 'Inter, sans-serif', lineHeight: 1 }}&gt;03&lt;/span&gt;&#10;    &lt;span style={{ fontSize: 46, fontWeight: 'bold', color: '#FBFCFA', letterSpacing: '0.02em' }}&gt;成果与验证&lt;/span&gt;&#10;  &lt;/div&gt;&#10;  &lt;div style={{ width: 72, height: 3, background: '#BD9B56', margin: '28px 0 20px' }} /&gt;&#10;  &lt;div style={{ fontSize: 16, color: 'rgba(251,252,250,0.72)', letterSpacing: '0.04em' }}&gt;三条功能闭环 · 量化评估指标&lt;/div&gt;&#10;  &lt;div style={{ position: 'absolute', bottom: 42, right: 96, color: 'rgba(251,252,250,0.4)', fontSize: 13, fontFamily: 'Inter, sans-serif' }}&gt;13 / 19&lt;/div&gt;&#10;&lt;/Slide&gt;"/>
         <p:cNvGrpSpPr/>
         <p:nvPr/>
       </p:nvGrpSpPr>
@@ -3442,7 +5458,290 @@
       </p:grpSpPr>
       <p:sp>
         <p:nvSpPr>
-          <p:cNvPr id="68" name=""/>
+          <p:cNvPr id="111" name=""/>
+          <p:cNvSpPr/>
+          <p:nvPr/>
+        </p:nvSpPr>
+        <p:spPr>
+          <a:xfrm rot="0" flipH="0" flipV="0">
+            <a:off x="0" y="0"/>
+            <a:ext cx="12192000" cy="6858000"/>
+          </a:xfrm>
+          <a:prstGeom prst="rect">
+            <a:avLst/>
+          </a:prstGeom>
+          <a:gradFill>
+            <a:gsLst>
+              <a:gs pos="0">
+                <a:srgbClr val="172133"/>
+              </a:gs>
+              <a:gs pos="100000">
+                <a:srgbClr val="22395E"/>
+              </a:gs>
+            </a:gsLst>
+            <a:lin ang="2700000" scaled="1"/>
+          </a:gradFill>
+          <a:ln/>
+        </p:spPr>
+        <p:txBody>
+          <a:bodyPr/>
+          <a:p/>
+        </p:txBody>
+      </p:sp>
+      <p:sp>
+        <p:nvSpPr>
+          <p:cNvPr id="112" name="" descr="{&quot;isTemplate&quot;:true,&quot;type&quot;:&quot;text&quot;}"/>
+          <p:cNvSpPr txBox="1"/>
+          <p:nvPr/>
+        </p:nvSpPr>
+        <p:spPr>
+          <a:xfrm rot="0" flipH="0" flipV="0">
+            <a:off x="914400" y="2266950"/>
+            <a:ext cx="10363200" cy="171450"/>
+          </a:xfrm>
+          <a:prstGeom prst="rect"/>
+        </p:spPr>
+        <p:txBody>
+          <a:bodyPr wrap="none" lIns="0" tIns="0" rIns="0" bIns="0"/>
+          <a:p>
+            <a:pPr>
+              <a:lnSpc>
+                <a:spcPct val="100000"/>
+              </a:lnSpc>
+            </a:pPr>
+            <a:r>
+              <a:rPr lang="en-US" sz="1125" spc="-9223372036854775808">
+                <a:solidFill>
+                  <a:srgbClr val="BD9B56"/>
+                </a:solidFill>
+                <a:latin typeface="Microsoft YaHei"/>
+                <a:ea typeface="Microsoft YaHei"/>
+              </a:rPr>
+              <a:t>SECTION 03</a:t>
+            </a:r>
+            <a:endParaRPr/>
+          </a:p>
+        </p:txBody>
+      </p:sp>
+      <p:sp>
+        <p:nvSpPr>
+          <p:cNvPr id="113" name="" descr="{&quot;isTemplate&quot;:true,&quot;type&quot;:&quot;text&quot;}"/>
+          <p:cNvSpPr txBox="1"/>
+          <p:nvPr/>
+        </p:nvSpPr>
+        <p:spPr>
+          <a:xfrm rot="0" flipH="0" flipV="0">
+            <a:off x="914400" y="2667000"/>
+            <a:ext cx="1343025" cy="1257300"/>
+          </a:xfrm>
+          <a:prstGeom prst="rect"/>
+        </p:spPr>
+        <p:txBody>
+          <a:bodyPr wrap="none" lIns="0" tIns="0" rIns="0" bIns="0"/>
+          <a:p>
+            <a:pPr>
+              <a:lnSpc>
+                <a:spcPct val="100000"/>
+              </a:lnSpc>
+            </a:pPr>
+            <a:r>
+              <a:rPr lang="en-US" sz="8250" b="1">
+                <a:solidFill>
+                  <a:srgbClr val="BD9B56">
+                    <a:alpha val="28000"/>
+                  </a:srgbClr>
+                </a:solidFill>
+                <a:latin typeface="Inter"/>
+                <a:ea typeface="Inter"/>
+              </a:rPr>
+              <a:t>03</a:t>
+            </a:r>
+            <a:endParaRPr/>
+          </a:p>
+        </p:txBody>
+      </p:sp>
+      <p:sp>
+        <p:nvSpPr>
+          <p:cNvPr id="114" name="" descr="{&quot;isTemplate&quot;:true,&quot;type&quot;:&quot;text&quot;}"/>
+          <p:cNvSpPr txBox="1"/>
+          <p:nvPr/>
+        </p:nvSpPr>
+        <p:spPr>
+          <a:xfrm rot="0" flipH="0" flipV="0">
+            <a:off x="2524125" y="2667000"/>
+            <a:ext cx="2190750" cy="1257300"/>
+          </a:xfrm>
+          <a:prstGeom prst="rect"/>
+        </p:spPr>
+        <p:txBody>
+          <a:bodyPr wrap="none" lIns="0" tIns="0" rIns="0" bIns="0"/>
+          <a:p>
+            <a:pPr>
+              <a:lnSpc>
+                <a:spcPct val="100000"/>
+              </a:lnSpc>
+            </a:pPr>
+            <a:r>
+              <a:rPr lang="zh-CN" sz="3450" b="1">
+                <a:solidFill>
+                  <a:srgbClr val="FBFCFA"/>
+                </a:solidFill>
+                <a:latin typeface="Microsoft YaHei"/>
+                <a:ea typeface="Microsoft YaHei"/>
+              </a:rPr>
+              <a:t>成果与验证</a:t>
+            </a:r>
+            <a:endParaRPr/>
+          </a:p>
+        </p:txBody>
+      </p:sp>
+      <p:sp>
+        <p:nvSpPr>
+          <p:cNvPr id="115" name=""/>
+          <p:cNvSpPr/>
+          <p:nvPr/>
+        </p:nvSpPr>
+        <p:spPr>
+          <a:xfrm rot="0" flipH="0" flipV="0">
+            <a:off x="914400" y="4191000"/>
+            <a:ext cx="685800" cy="28575"/>
+          </a:xfrm>
+          <a:prstGeom prst="rect">
+            <a:avLst/>
+          </a:prstGeom>
+          <a:solidFill>
+            <a:srgbClr val="BD9B56"/>
+          </a:solidFill>
+          <a:ln/>
+        </p:spPr>
+        <p:txBody>
+          <a:bodyPr/>
+          <a:p/>
+        </p:txBody>
+      </p:sp>
+      <p:sp>
+        <p:nvSpPr>
+          <p:cNvPr id="116" name="" descr="{&quot;isTemplate&quot;:true,&quot;type&quot;:&quot;text&quot;}"/>
+          <p:cNvSpPr txBox="1"/>
+          <p:nvPr/>
+        </p:nvSpPr>
+        <p:spPr>
+          <a:xfrm rot="0" flipH="0" flipV="0">
+            <a:off x="914400" y="4410075"/>
+            <a:ext cx="10363200" cy="190500"/>
+          </a:xfrm>
+          <a:prstGeom prst="rect"/>
+        </p:spPr>
+        <p:txBody>
+          <a:bodyPr wrap="none" lIns="0" tIns="0" rIns="0" bIns="0"/>
+          <a:p>
+            <a:pPr>
+              <a:lnSpc>
+                <a:spcPct val="100000"/>
+              </a:lnSpc>
+            </a:pPr>
+            <a:r>
+              <a:rPr lang="zh-CN" sz="1200" spc="-9223372036854775808">
+                <a:solidFill>
+                  <a:srgbClr val="FBFCFA">
+                    <a:alpha val="72000"/>
+                  </a:srgbClr>
+                </a:solidFill>
+                <a:latin typeface="Microsoft YaHei"/>
+                <a:ea typeface="Microsoft YaHei"/>
+              </a:rPr>
+              <a:t>三条功能闭环</a:t>
+            </a:r>
+            <a:r>
+              <a:rPr lang="en-US" sz="1200" spc="-9223372036854775808">
+                <a:solidFill>
+                  <a:srgbClr val="FBFCFA">
+                    <a:alpha val="72000"/>
+                  </a:srgbClr>
+                </a:solidFill>
+                <a:latin typeface="Microsoft YaHei"/>
+                <a:ea typeface="Microsoft YaHei"/>
+              </a:rPr>
+              <a:t> · </a:t>
+            </a:r>
+            <a:r>
+              <a:rPr lang="zh-CN" sz="1200" spc="-9223372036854775808">
+                <a:solidFill>
+                  <a:srgbClr val="FBFCFA">
+                    <a:alpha val="72000"/>
+                  </a:srgbClr>
+                </a:solidFill>
+                <a:latin typeface="Microsoft YaHei"/>
+                <a:ea typeface="Microsoft YaHei"/>
+              </a:rPr>
+              <a:t>量化评估指标</a:t>
+            </a:r>
+            <a:endParaRPr/>
+          </a:p>
+        </p:txBody>
+      </p:sp>
+      <p:sp>
+        <p:nvSpPr>
+          <p:cNvPr id="117" name="" descr="{&quot;isTemplate&quot;:true,&quot;type&quot;:&quot;text&quot;}"/>
+          <p:cNvSpPr txBox="1"/>
+          <p:nvPr/>
+        </p:nvSpPr>
+        <p:spPr>
+          <a:xfrm rot="0" flipH="0" flipV="0">
+            <a:off x="10877550" y="6305550"/>
+            <a:ext cx="400050" cy="152400"/>
+          </a:xfrm>
+          <a:prstGeom prst="rect"/>
+        </p:spPr>
+        <p:txBody>
+          <a:bodyPr wrap="none" lIns="0" tIns="0" rIns="0" bIns="0"/>
+          <a:p>
+            <a:pPr>
+              <a:lnSpc>
+                <a:spcPct val="100000"/>
+              </a:lnSpc>
+            </a:pPr>
+            <a:r>
+              <a:rPr lang="en-US" sz="975">
+                <a:solidFill>
+                  <a:srgbClr val="FBFCFA">
+                    <a:alpha val="40000"/>
+                  </a:srgbClr>
+                </a:solidFill>
+                <a:latin typeface="Inter"/>
+                <a:ea typeface="Inter"/>
+              </a:rPr>
+              <a:t>13 / 19</a:t>
+            </a:r>
+            <a:endParaRPr/>
+          </a:p>
+        </p:txBody>
+      </p:sp>
+    </p:spTree>
+  </p:cSld>
+</p:sld>
+</file>
+
+<file path=ppt/slides/slide14.xml><?xml version="1.0" encoding="utf-8"?>
+<p:sld xmlns:p="http://schemas.openxmlformats.org/presentationml/2006/main" xmlns:a="http://schemas.openxmlformats.org/drawingml/2006/main">
+  <p:cSld>
+    <p:spTree>
+      <p:nvGrpSpPr>
+        <p:cNvPr id="118" name="" descr="&lt;Slide style={{ width: '1280px', height: '720px', background: '#FBFCFA', position: 'relative', padding: '40px 64px', boxSizing: 'border-box', display: 'flex', flexDirection: 'column' }}&gt;&#13;&#10;  &lt;div style={{ flexShrink: 0 }}&gt;&#13;&#10;    &lt;div style={{ color: '#BD9B56', fontSize: 13, letterSpacing: '0.25em', marginBottom: 8 }}&gt;03 · 成果与验证&lt;/div&gt;&#13;&#10;    &lt;h2 style={{ fontSize: 30, fontWeight: 'bold', color: '#172133', margin: 0, lineHeight: 1.3 }}&gt;功能闭环：AI 走完完整业务流程&lt;/h2&gt;&#13;&#10;    &lt;div style={{ fontSize: 14, color: '#6b7075', marginTop: 8 }}&gt;三条闭环验证「AI 不是聊天框，而是真正参与业务」——每条都真实写入数据库、流转状态、发出通知&lt;/div&gt;&#13;&#10;  &lt;/div&gt;&#13;&#10;  &lt;div style={{ flex: 1, display: 'flex', alignItems: 'center' }}&gt;&#13;&#10;    &lt;div style={{ width: '100%', display: 'flex', gap: 18 }}&gt;&#13;&#10;      &lt;div style={{ flex: 1, background: '#fff', borderRadius: 10, padding: '18px 18px', boxShadow: '0 4px 16px rgba(23,33,51,0.06)', display: 'flex', flexDirection: 'column' }}&gt;&#13;&#10;        &lt;div style={{ display: 'flex', alignItems: 'center', gap: 8, marginBottom: 10 }}&gt;&#13;&#10;          &lt;span style={{ fontSize: 17, fontWeight: 'bold', color: '#172133' }}&gt;1.  报修闭环&lt;/span&gt;&#13;&#10;          &lt;span style={{ fontSize: 12, color: '#BD9B56', background: 'rgba(189,155,86,0.12)', padding: '2px 8px', borderRadius: 4 }}&gt;业主 → 师傅&lt;/span&gt;&#13;&#10;        &lt;/div&gt;&#13;&#10;        &lt;p style={{ fontSize: 13, color: '#5F5E5A', margin: 0, lineHeight: 1.6, marginBottom: 12 }}&gt;对话报修 → 多轮补全位置/类型 → 技能+在岗自动派单 → 师傅接单处理 → 业主确认完成，全流程真实建单、流转状态、发通知。&lt;/p&gt;&#13;&#10;        &lt;div style={{ marginTop: 'auto', height: 130, border: '2px dashed #BD9B56', borderRadius: 8, background: 'rgba(189,155,86,0.05)', display: 'flex', alignItems: 'center', justifyContent: 'center', color: '#BD9B56', fontSize: 12 }}&gt;此处放「AI 报修对话」截图&lt;/div&gt;&#13;&#10;      &lt;/div&gt;&#13;&#10;      &lt;div style={{ flex: 1, background: '#fff', borderRadius: 10, padding: '18px 18px', boxShadow: '0 4px 16px rgba(23,33,51,0.06)', display: 'flex', flexDirection: 'column' }}&gt;&#13;&#10;        &lt;div style={{ display: 'flex', alignItems: 'center', gap: 8, marginBottom: 10 }}&gt;&#13;&#10;          &lt;span style={{ fontSize: 17, fontWeight: 'bold', color: '#172133' }}&gt;2.  巡检告警&lt;/span&gt;&#13;&#10;          &lt;span style={{ fontSize: 12, color: '#BD9B56', background: 'rgba(189,155,86,0.12)', padding: '2px 8px', borderRadius: 4 }}&gt;摄像头 → 物业&lt;/span&gt;&#13;&#10;        &lt;/div&gt;&#13;&#10;        &lt;p style={{ fontSize: 13, color: '#5F5E5A', margin: 0, lineHeight: 1.6, marginBottom: 12 }}&gt;摄像头抓拍社区画面 → 视觉模型识别异常（垃圾堆积、车辆违停、消防堵塞）→ 生成巡检记录并实时通知物业负责人。&lt;/p&gt;&#13;&#10;        &lt;div style={{ marginTop: 'auto', height: 130, border: '2px dashed #BD9B56', borderRadius: 8, background: 'rgba(189,155,86,0.05)', display: 'flex', alignItems: 'center', justifyContent: 'center', color: '#BD9B56', fontSize: 12 }}&gt;此处放「巡检异常识别」截图&lt;/div&gt;&#13;&#10;      &lt;/div&gt;&#13;&#10;      &lt;div style={{ flex: 1, background: '#fff', borderRadius: 10, padding: '18px 18px', boxShadow: '0 4px 16px rgba(23,33,51,0.06)', display: 'flex', flexDirection: 'column' }}&gt;&#13;&#10;        &lt;div style={{ display: 'flex', alignItems: 'center', gap: 8, marginBottom: 10 }}&gt;&#13;&#10;          &lt;span style={{ fontSize: 17, fontWeight: 'bold', color: '#172133' }}&gt;3.  反馈自进化&lt;/span&gt;&#13;&#10;          &lt;span style={{ fontSize: 12, color: '#BD9B56', background: 'rgba(189,155,86,0.12)', padding: '2px 8px', borderRadius: 4 }}&gt;对话 → 知识库&lt;/span&gt;&#13;&#10;        &lt;/div&gt;&#13;&#10;        &lt;p style={{ fontSize: 13, color: '#5F5E5A', margin: 0, lineHeight: 1.6, marginBottom: 12 }}&gt;业主对 AI 答案点赞/纠错 → 沉淀「知识缺口」→ 物业人员人工审核 → 审核通过自动写入知识库，越用越准。&lt;/p&gt;&#13;&#10;        &lt;div style={{ marginTop: 'auto', height: 130, border: '2px dashed #BD9B56', borderRadius: 8, background: 'rgba(189,155,86,0.05)', display: 'flex', alignItems: 'center', justifyContent: 'center', color: '#BD9B56', fontSize: 12 }}&gt;此处放「知识缺口审核」截图&lt;/div&gt;&#13;&#10;      &lt;/div&gt;&#13;&#10;    &lt;/div&gt;&#13;&#10;  &lt;/div&gt;&#13;&#10;  &lt;div style={{ flexShrink: 0, height: 40, display: 'flex', alignItems: 'flex-end', justifyContent: 'space-between' }}&gt;&#13;&#10;    &lt;span style={{ color: '#BD9B56', fontSize: 12, letterSpacing: '0.1em' }}&gt;云溪花园 · 智慧社区&lt;/span&gt;&#13;&#10;    &lt;span style={{ color: '#a09b8c', fontSize: 12 }}&gt;14 / 19&lt;/span&gt;&#13;&#10;  &lt;/div&gt;&#13;&#10;&lt;/Slide&gt;"/>
+        <p:cNvGrpSpPr/>
+        <p:nvPr/>
+      </p:nvGrpSpPr>
+      <p:grpSpPr>
+        <a:xfrm>
+          <a:off x="0" y="0"/>
+          <a:ext cx="0" cy="0"/>
+          <a:chOff x="0" y="0"/>
+          <a:chExt cx="0" cy="0"/>
+        </a:xfrm>
+      </p:grpSpPr>
+      <p:sp>
+        <p:nvSpPr>
+          <p:cNvPr id="119" name=""/>
           <p:cNvSpPr/>
           <p:nvPr/>
         </p:nvSpPr>
@@ -3466,7 +5765,7 @@
       </p:sp>
       <p:sp>
         <p:nvSpPr>
-          <p:cNvPr id="69" name="" descr="{&quot;isTemplate&quot;:true,&quot;type&quot;:&quot;text&quot;}"/>
+          <p:cNvPr id="120" name="" descr="{&quot;isTemplate&quot;:true,&quot;type&quot;:&quot;text&quot;}"/>
           <p:cNvSpPr txBox="1"/>
           <p:nvPr/>
         </p:nvSpPr>
@@ -3511,7 +5810,7 @@
       </p:sp>
       <p:sp>
         <p:nvSpPr>
-          <p:cNvPr id="70" name="" descr="{&quot;isTemplate&quot;:true,&quot;type&quot;:&quot;text&quot;}"/>
+          <p:cNvPr id="121" name="" descr="{&quot;isTemplate&quot;:true,&quot;type&quot;:&quot;text&quot;}"/>
           <p:cNvSpPr txBox="1"/>
           <p:nvPr/>
         </p:nvSpPr>
@@ -3566,7 +5865,7 @@
       </p:sp>
       <p:sp>
         <p:nvSpPr>
-          <p:cNvPr id="71" name="" descr="{&quot;isTemplate&quot;:true,&quot;type&quot;:&quot;text&quot;}"/>
+          <p:cNvPr id="122" name="" descr="{&quot;isTemplate&quot;:true,&quot;type&quot;:&quot;text&quot;}"/>
           <p:cNvSpPr txBox="1"/>
           <p:nvPr/>
         </p:nvSpPr>
@@ -3621,7 +5920,7 @@
       </p:sp>
       <p:sp>
         <p:nvSpPr>
-          <p:cNvPr id="72" name=""/>
+          <p:cNvPr id="123" name=""/>
           <p:cNvSpPr/>
           <p:nvPr/>
         </p:nvSpPr>
@@ -3654,7 +5953,7 @@
       </p:sp>
       <p:sp>
         <p:nvSpPr>
-          <p:cNvPr id="73" name="" descr="{&quot;isTemplate&quot;:true,&quot;type&quot;:&quot;text&quot;}"/>
+          <p:cNvPr id="124" name="" descr="{&quot;isTemplate&quot;:true,&quot;type&quot;:&quot;text&quot;}"/>
           <p:cNvSpPr txBox="1"/>
           <p:nvPr/>
         </p:nvSpPr>
@@ -3699,7 +5998,7 @@
       </p:sp>
       <p:sp>
         <p:nvSpPr>
-          <p:cNvPr id="74" name=""/>
+          <p:cNvPr id="125" name=""/>
           <p:cNvSpPr/>
           <p:nvPr/>
         </p:nvSpPr>
@@ -3727,7 +6026,7 @@
       </p:sp>
       <p:sp>
         <p:nvSpPr>
-          <p:cNvPr id="75" name="" descr="{&quot;isTemplate&quot;:true,&quot;type&quot;:&quot;text&quot;}"/>
+          <p:cNvPr id="126" name="" descr="{&quot;isTemplate&quot;:true,&quot;type&quot;:&quot;text&quot;}"/>
           <p:cNvSpPr txBox="1"/>
           <p:nvPr/>
         </p:nvSpPr>
@@ -3797,7 +6096,7 @@
       </p:sp>
       <p:sp>
         <p:nvSpPr>
-          <p:cNvPr id="76" name="" descr="{&quot;isTemplate&quot;:true,&quot;type&quot;:&quot;text&quot;}"/>
+          <p:cNvPr id="127" name="" descr="{&quot;isTemplate&quot;:true,&quot;type&quot;:&quot;text&quot;}"/>
           <p:cNvSpPr txBox="1"/>
           <p:nvPr/>
         </p:nvSpPr>
@@ -3954,7 +6253,7 @@
       </p:sp>
       <p:sp>
         <p:nvSpPr>
-          <p:cNvPr id="77" name=""/>
+          <p:cNvPr id="128" name=""/>
           <p:cNvSpPr/>
           <p:nvPr/>
         </p:nvSpPr>
@@ -3987,7 +6286,7 @@
       </p:sp>
       <p:sp>
         <p:nvSpPr>
-          <p:cNvPr id="78" name="" descr="{&quot;isTemplate&quot;:true,&quot;type&quot;:&quot;text&quot;}"/>
+          <p:cNvPr id="129" name="" descr="{&quot;isTemplate&quot;:true,&quot;type&quot;:&quot;text&quot;}"/>
           <p:cNvSpPr txBox="1"/>
           <p:nvPr/>
         </p:nvSpPr>
@@ -4042,7 +6341,7 @@
       </p:sp>
       <p:sp>
         <p:nvSpPr>
-          <p:cNvPr id="79" name=""/>
+          <p:cNvPr id="130" name=""/>
           <p:cNvSpPr/>
           <p:nvPr/>
         </p:nvSpPr>
@@ -4075,7 +6374,7 @@
       </p:sp>
       <p:sp>
         <p:nvSpPr>
-          <p:cNvPr id="80" name="" descr="{&quot;isTemplate&quot;:true,&quot;type&quot;:&quot;text&quot;}"/>
+          <p:cNvPr id="131" name="" descr="{&quot;isTemplate&quot;:true,&quot;type&quot;:&quot;text&quot;}"/>
           <p:cNvSpPr txBox="1"/>
           <p:nvPr/>
         </p:nvSpPr>
@@ -4120,7 +6419,7 @@
       </p:sp>
       <p:sp>
         <p:nvSpPr>
-          <p:cNvPr id="81" name=""/>
+          <p:cNvPr id="132" name=""/>
           <p:cNvSpPr/>
           <p:nvPr/>
         </p:nvSpPr>
@@ -4148,7 +6447,7 @@
       </p:sp>
       <p:sp>
         <p:nvSpPr>
-          <p:cNvPr id="82" name="" descr="{&quot;isTemplate&quot;:true,&quot;type&quot;:&quot;text&quot;}"/>
+          <p:cNvPr id="133" name="" descr="{&quot;isTemplate&quot;:true,&quot;type&quot;:&quot;text&quot;}"/>
           <p:cNvSpPr txBox="1"/>
           <p:nvPr/>
         </p:nvSpPr>
@@ -4218,7 +6517,7 @@
       </p:sp>
       <p:sp>
         <p:nvSpPr>
-          <p:cNvPr id="83" name="" descr="{&quot;isTemplate&quot;:true,&quot;type&quot;:&quot;text&quot;}"/>
+          <p:cNvPr id="134" name="" descr="{&quot;isTemplate&quot;:true,&quot;type&quot;:&quot;text&quot;}"/>
           <p:cNvSpPr txBox="1"/>
           <p:nvPr/>
         </p:nvSpPr>
@@ -4295,7 +6594,7 @@
       </p:sp>
       <p:sp>
         <p:nvSpPr>
-          <p:cNvPr id="84" name=""/>
+          <p:cNvPr id="135" name=""/>
           <p:cNvSpPr/>
           <p:nvPr/>
         </p:nvSpPr>
@@ -4328,7 +6627,7 @@
       </p:sp>
       <p:sp>
         <p:nvSpPr>
-          <p:cNvPr id="85" name="" descr="{&quot;isTemplate&quot;:true,&quot;type&quot;:&quot;text&quot;}"/>
+          <p:cNvPr id="136" name="" descr="{&quot;isTemplate&quot;:true,&quot;type&quot;:&quot;text&quot;}"/>
           <p:cNvSpPr txBox="1"/>
           <p:nvPr/>
         </p:nvSpPr>
@@ -4363,7 +6662,7 @@
       </p:sp>
       <p:sp>
         <p:nvSpPr>
-          <p:cNvPr id="86" name=""/>
+          <p:cNvPr id="137" name=""/>
           <p:cNvSpPr/>
           <p:nvPr/>
         </p:nvSpPr>
@@ -4396,7 +6695,7 @@
       </p:sp>
       <p:sp>
         <p:nvSpPr>
-          <p:cNvPr id="87" name="" descr="{&quot;isTemplate&quot;:true,&quot;type&quot;:&quot;text&quot;}"/>
+          <p:cNvPr id="138" name="" descr="{&quot;isTemplate&quot;:true,&quot;type&quot;:&quot;text&quot;}"/>
           <p:cNvSpPr txBox="1"/>
           <p:nvPr/>
         </p:nvSpPr>
@@ -4441,7 +6740,7 @@
       </p:sp>
       <p:sp>
         <p:nvSpPr>
-          <p:cNvPr id="88" name=""/>
+          <p:cNvPr id="139" name=""/>
           <p:cNvSpPr/>
           <p:nvPr/>
         </p:nvSpPr>
@@ -4469,7 +6768,7 @@
       </p:sp>
       <p:sp>
         <p:nvSpPr>
-          <p:cNvPr id="89" name="" descr="{&quot;isTemplate&quot;:true,&quot;type&quot;:&quot;text&quot;}"/>
+          <p:cNvPr id="140" name="" descr="{&quot;isTemplate&quot;:true,&quot;type&quot;:&quot;text&quot;}"/>
           <p:cNvSpPr txBox="1"/>
           <p:nvPr/>
         </p:nvSpPr>
@@ -4539,7 +6838,7 @@
       </p:sp>
       <p:sp>
         <p:nvSpPr>
-          <p:cNvPr id="90" name="" descr="{&quot;isTemplate&quot;:true,&quot;type&quot;:&quot;text&quot;}"/>
+          <p:cNvPr id="141" name="" descr="{&quot;isTemplate&quot;:true,&quot;type&quot;:&quot;text&quot;}"/>
           <p:cNvSpPr txBox="1"/>
           <p:nvPr/>
         </p:nvSpPr>
@@ -4676,7 +6975,7 @@
       </p:sp>
       <p:sp>
         <p:nvSpPr>
-          <p:cNvPr id="91" name=""/>
+          <p:cNvPr id="142" name=""/>
           <p:cNvSpPr/>
           <p:nvPr/>
         </p:nvSpPr>
@@ -4709,7 +7008,7 @@
       </p:sp>
       <p:sp>
         <p:nvSpPr>
-          <p:cNvPr id="92" name="" descr="{&quot;isTemplate&quot;:true,&quot;type&quot;:&quot;text&quot;}"/>
+          <p:cNvPr id="143" name="" descr="{&quot;isTemplate&quot;:true,&quot;type&quot;:&quot;text&quot;}"/>
           <p:cNvSpPr txBox="1"/>
           <p:nvPr/>
         </p:nvSpPr>
@@ -4744,7 +7043,7 @@
       </p:sp>
       <p:sp>
         <p:nvSpPr>
-          <p:cNvPr id="93" name="" descr="{&quot;isTemplate&quot;:true,&quot;type&quot;:&quot;text&quot;}"/>
+          <p:cNvPr id="144" name="" descr="{&quot;isTemplate&quot;:true,&quot;type&quot;:&quot;text&quot;}"/>
           <p:cNvSpPr txBox="1"/>
           <p:nvPr/>
         </p:nvSpPr>
@@ -4799,7 +7098,7 @@
       </p:sp>
       <p:sp>
         <p:nvSpPr>
-          <p:cNvPr id="94" name="" descr="{&quot;isTemplate&quot;:true,&quot;type&quot;:&quot;text&quot;}"/>
+          <p:cNvPr id="145" name="" descr="{&quot;isTemplate&quot;:true,&quot;type&quot;:&quot;text&quot;}"/>
           <p:cNvSpPr txBox="1"/>
           <p:nvPr/>
         </p:nvSpPr>
@@ -4826,7 +7125,7 @@
                 <a:latin typeface="Microsoft YaHei"/>
                 <a:ea typeface="Microsoft YaHei"/>
               </a:rPr>
-              <a:t>11 / 15</a:t>
+              <a:t>14 / 19</a:t>
             </a:r>
             <a:endParaRPr/>
           </a:p>
@@ -4837,12 +7136,12 @@
 </p:sld>
 </file>
 
-<file path=ppt/slides/slide12.xml><?xml version="1.0" encoding="utf-8"?>
+<file path=ppt/slides/slide15.xml><?xml version="1.0" encoding="utf-8"?>
 <p:sld xmlns:p="http://schemas.openxmlformats.org/presentationml/2006/main" xmlns:a="http://schemas.openxmlformats.org/drawingml/2006/main">
   <p:cSld>
     <p:spTree>
       <p:nvGrpSpPr>
-        <p:cNvPr id="95" name="" descr="&lt;Slide style={{ width: '1280px', height: '720px', background: '#FBFCFA', position: 'relative', padding: '30px 56px', boxSizing: 'border-box', display: 'flex', flexDirection: 'column' }}&gt;&#10;  &lt;div style={{ flexShrink: 0 }}&gt;&#10;    &lt;div style={{ color: '#BD9B56', fontSize: 12, letterSpacing: '0.25em', marginBottom: 5 }}&gt;03 · 成果与验证&lt;/div&gt;&#10;    &lt;h2 style={{ fontSize: 27, fontWeight: 'bold', color: '#172133', margin: 0, lineHeight: 1.25 }}&gt;量化评估：方法 · 流程 · 指标判定&lt;/h2&gt;&#10;  &lt;/div&gt;&#10;  &lt;div style={{ flex: 1, display: 'flex', alignItems: 'stretch', gap: 18, marginTop: 12 }}&gt;&#10;    {/* 左栏：方法 + 流程 */}&#10;    &lt;div style={{ flex: 1, display: 'flex', flexDirection: 'column', gap: 10 }}&gt;&#10;      {/* 评估方法（前情） */}&#10;      &lt;div style={{ background: '#fff', borderRadius: 10, padding: '14px 18px', boxShadow: '0 4px 16px rgba(23,33,51,0.06)' }}&gt;&#10;        &lt;div style={{ fontSize: 13, color: '#BD9B56', fontWeight: 'bold', letterSpacing: '0.1em', marginBottom: 8 }}&gt;为什么要额外评估 AI&lt;/div&gt;&#10;        &lt;div style={{ fontSize: 12, color: '#5F5E5A', lineHeight: 1.65, marginBottom: 8 }}&gt;传统软件只验证「输入 → 输出」；AI Agent 还必须验证中间链路，否则「答得对」不等于「办得成」：&lt;/div&gt;&#10;        &lt;div style={{ display: 'flex', alignItems: 'center', gap: 6, flexWrap: 'wrap', fontSize: 11.5 }}&gt;&#10;          &lt;span style={{ color: '#172133', fontWeight: 'bold' }}&gt;输入&lt;/span&gt;&lt;span style={{ color: '#a09b8c' }}&gt;→&lt;/span&gt;&#10;          &lt;span style={{ color: '#172133', fontWeight: 'bold' }}&gt;理解&lt;/span&gt;&lt;span style={{ color: '#a09b8c' }}&gt;→&lt;/span&gt;&#10;          &lt;span style={{ color: '#172133', fontWeight: 'bold' }}&gt;决策&lt;/span&gt;&lt;span style={{ color: '#a09b8c' }}&gt;→&lt;/span&gt;&#10;          &lt;span style={{ color: '#172133', fontWeight: 'bold' }}&gt;工具选择&lt;/span&gt;&lt;span style={{ color: '#a09b8c' }}&gt;→&lt;/span&gt;&#10;          &lt;span style={{ color: '#172133', fontWeight: 'bold' }}&gt;知识检索&lt;/span&gt;&lt;span style={{ color: '#a09b8c' }}&gt;→&lt;/span&gt;&#10;          &lt;span style={{ color: '#172133', fontWeight: 'bold' }}&gt;最终答案&lt;/span&gt;&#10;        &lt;/div&gt;&#10;        &lt;div style={{ fontSize: 12, color: '#6b7075', lineHeight: 1.6, marginTop: 8, paddingTop: 8, borderTop: '1px solid rgba(34,57,94,0.08)' }}&gt;对应建立三层评估：&lt;span style={{ color: '#172133', fontWeight: 'bold' }}&gt;Agent 评估&lt;/span&gt;（意图 / 工具 / 工作流）＋ &lt;span style={{ color: '#172133', fontWeight: 'bold' }}&gt;RAG 评估&lt;/span&gt;（检索 / 答案）＋ &lt;span style={{ color: '#172133', fontWeight: 'bold' }}&gt;端到端评估&lt;/span&gt;（完整业务闭环）。&lt;/div&gt;&#10;      &lt;/div&gt;&#10;      {/* 测试流程 */}&#10;      &lt;div style={{ background: '#fff', borderRadius: 10, padding: '14px 18px', boxShadow: '0 4px 16px rgba(23,33,51,0.06)' }}&gt;&#10;        &lt;div style={{ fontSize: 13, color: '#BD9B56', fontWeight: 'bold', letterSpacing: '0.1em', marginBottom: 8 }}&gt;测试怎么进行&lt;/div&gt;&#10;        &lt;div style={{ display: 'flex', gap: 8 }}&gt;&#10;          {[&#10;            ['① 构建数据集', '意图 / 工具 / 工作流 / 知识问答 4 类用例'],&#10;            ['② 运行 Agent', 'python 跑评估，收集 trace'],&#10;            ['③ 比对期望', '预测值 vs 标注期望值'],&#10;            ['④ 生成报告', '指标 + 失败用例定位'],&#10;          ].map(([t, d]) =&gt; (&#10;            &lt;div key={t} style={{ flex: 1, background: 'rgba(189,155,86,0.07)', borderRadius: 8, padding: '8px 10px' }}&gt;&#10;              &lt;div style={{ fontSize: 11.5, color: '#172133', fontWeight: 'bold', marginBottom: 3 }}&gt;{t}&lt;/div&gt;&#10;              &lt;div style={{ fontSize: 10.5, color: '#6b7075', lineHeight: 1.4 }}&gt;{d}&lt;/div&gt;&#10;            &lt;/div&gt;&#10;          ))}&#10;        &lt;/div&gt;&#10;      &lt;/div&gt;&#10;    &lt;/div&gt;&#10;    {/* 右栏：指标判定 + 结果 */}&#10;    &lt;div style={{ flex: '0 0 440px', display: 'flex', flexDirection: 'column', gap: 8 }}&gt;&#10;      {[&#10;        ['意图识别', '100%', '预测意图 = 期望意图，正确数 / 总用例', '83.33% → 100%'],&#10;        ['RAG 召回 Recall@5', '100%', 'top-5 检索结果是否包含正确文档', '检索质量稳定达标'],&#10;        ['RAG 答案准确率', '100%', '期望关键词全部覆盖（关键词覆盖度）', '50% → 100%'],&#10;      ].map(([name, val, judge, note]) =&gt; (&#10;        &lt;div key={name} style={{ background: '#fff', borderRadius: 10, padding: '10px 16px', boxShadow: '0 4px 16px rgba(23,33,51,0.06)', display: 'flex', alignItems: 'center', gap: 14 }}&gt;&#10;          &lt;div style={{ flex: 1 }}&gt;&#10;            &lt;div style={{ fontSize: 13.5, color: '#172133', fontWeight: 'bold' }}&gt;{name}&lt;/div&gt;&#10;            &lt;div style={{ fontSize: 11, color: '#6b7075', marginTop: 3, lineHeight: 1.5 }}&gt;判定：{judge}&lt;/div&gt;&#10;            &lt;div style={{ fontSize: 10.5, color: '#a09b8c', marginTop: 2 }}&gt;{note}&lt;/div&gt;&#10;          &lt;/div&gt;&#10;          &lt;div style={{ fontSize: 30, fontWeight: 'bold', color: '#BD9B56', fontFamily: 'Inter, sans-serif', minWidth: 78, textAlign: 'right' }}&gt;{val}&lt;/div&gt;&#10;        &lt;/div&gt;&#10;      ))}&#10;      &lt;div style={{ background: 'linear-gradient(135deg, #172133 0%, #22395E 100%)', borderRadius: 10, padding: '10px 16px', display: 'flex', alignItems: 'center', gap: 14 }}&gt;&#10;        &lt;div style={{ flex: 1 }}&gt;&#10;          &lt;div style={{ fontSize: 13.5, color: '#FBFCFA', fontWeight: 'bold' }}&gt;单元测试 · CI 全绿&lt;/div&gt;&#10;          &lt;div style={{ fontSize: 11, color: 'rgba(251,252,250,0.75)', marginTop: 3, lineHeight: 1.5 }}&gt;判定：pytest 单测 + GitHub Actions 每次 push 自动跑&lt;/div&gt;&#10;        &lt;/div&gt;&#10;        &lt;div style={{ fontSize: 28, fontWeight: 'bold', color: '#BD9B56', fontFamily: 'Inter, sans-serif', minWidth: 78, textAlign: 'right' }}&gt;113+30&lt;/div&gt;&#10;      &lt;/div&gt;&#10;    &lt;/div&gt;&#10;  &lt;/div&gt;&#10;  &lt;div style={{ flexShrink: 0, background: 'rgba(189,155,86,0.10)', borderLeft: '4px solid #BD9B56', borderRadius: '0 8px 8px 0', padding: '10px 18px', marginTop: 10 }}&gt;&#10;    &lt;p style={{ fontSize: 12.5, color: '#172133', margin: 0, lineHeight: 1.55 }}&gt;&lt;span style={{ color: '#BD9B56', fontWeight: 'bold' }}&gt;评估驱动优化：&lt;/span&gt;RAG 答案 50% → 100% 源于发现「评估指标用脆弱子串匹配」并改为「关键词覆盖度」、同时优化答案生成 prompt。工具选择 / 参数提取 / 工作流三项受「报修多轮交互」设计影响（用例按单轮设计、实际走 pending_repair 多轮），已定位为评估框架升级项，而非 Agent 缺陷。&lt;/p&gt;&#10;  &lt;/div&gt;&#10;  &lt;div style={{ flexShrink: 0, height: 32, display: 'flex', alignItems: 'flex-end', justifyContent: 'space-between' }}&gt;&#10;    &lt;span style={{ color: '#BD9B56', fontSize: 12, letterSpacing: '0.1em' }}&gt;云溪花园 · 智慧社区&lt;/span&gt;&#10;    &lt;span style={{ color: '#a09b8c', fontSize: 12 }}&gt;12 / 15&lt;/span&gt;&#10;  &lt;/div&gt;&#10;&lt;/Slide&gt;"/>
+        <p:cNvPr id="146" name="" descr="&lt;Slide style={{ width: '1280px', height: '720px', background: '#FBFCFA', position: 'relative', padding: '30px 56px', boxSizing: 'border-box', display: 'flex', flexDirection: 'column' }}&gt;&#13;&#10;  &lt;div style={{ flexShrink: 0 }}&gt;&#13;&#10;    &lt;div style={{ color: '#BD9B56', fontSize: 12, letterSpacing: '0.25em', marginBottom: 5 }}&gt;03 · 成果与验证&lt;/div&gt;&#13;&#10;    &lt;h2 style={{ fontSize: 27, fontWeight: 'bold', color: '#172133', margin: 0, lineHeight: 1.25 }}&gt;量化评估：方法 · 流程 · 指标判定&lt;/h2&gt;&#13;&#10;  &lt;/div&gt;&#13;&#10;  &lt;div style={{ flex: 1, display: 'flex', alignItems: 'stretch', gap: 18, marginTop: 12 }}&gt;&#13;&#10;    {/* 左栏：方法 + 流程 */}&#13;&#10;    &lt;div style={{ flex: 1, display: 'flex', flexDirection: 'column', gap: 10 }}&gt;&#13;&#10;      {/* 评估方法（前情） */}&#13;&#10;      &lt;div style={{ background: '#fff', borderRadius: 10, padding: '14px 18px', boxShadow: '0 4px 16px rgba(23,33,51,0.06)' }}&gt;&#13;&#10;        &lt;div style={{ fontSize: 13, color: '#BD9B56', fontWeight: 'bold', letterSpacing: '0.1em', marginBottom: 8 }}&gt;为什么要额外评估 AI&lt;/div&gt;&#13;&#10;        &lt;div style={{ fontSize: 12, color: '#5F5E5A', lineHeight: 1.65, marginBottom: 8 }}&gt;传统软件只验证「输入 → 输出」；AI Agent 还必须验证中间链路，否则「答得对」不等于「办得成」：&lt;/div&gt;&#13;&#10;        &lt;div style={{ display: 'flex', alignItems: 'center', gap: 6, flexWrap: 'wrap', fontSize: 11.5 }}&gt;&#13;&#10;          &lt;span style={{ color: '#172133', fontWeight: 'bold' }}&gt;输入&lt;/span&gt;&lt;span style={{ color: '#a09b8c' }}&gt;→&lt;/span&gt;&#13;&#10;          &lt;span style={{ color: '#172133', fontWeight: 'bold' }}&gt;理解&lt;/span&gt;&lt;span style={{ color: '#a09b8c' }}&gt;→&lt;/span&gt;&#13;&#10;          &lt;span style={{ color: '#172133', fontWeight: 'bold' }}&gt;决策&lt;/span&gt;&lt;span style={{ color: '#a09b8c' }}&gt;→&lt;/span&gt;&#13;&#10;          &lt;span style={{ color: '#172133', fontWeight: 'bold' }}&gt;工具选择&lt;/span&gt;&lt;span style={{ color: '#a09b8c' }}&gt;→&lt;/span&gt;&#13;&#10;          &lt;span style={{ color: '#172133', fontWeight: 'bold' }}&gt;知识检索&lt;/span&gt;&lt;span style={{ color: '#a09b8c' }}&gt;→&lt;/span&gt;&#13;&#10;          &lt;span style={{ color: '#172133', fontWeight: 'bold' }}&gt;最终答案&lt;/span&gt;&#13;&#10;        &lt;/div&gt;&#13;&#10;        &lt;div style={{ fontSize: 12, color: '#6b7075', lineHeight: 1.6, marginTop: 8, paddingTop: 8, borderTop: '1px solid rgba(34,57,94,0.08)' }}&gt;对应建立三层评估：&lt;span style={{ color: '#172133', fontWeight: 'bold' }}&gt;Agent 评估&lt;/span&gt;（意图 / 工具 / 工作流）＋ &lt;span style={{ color: '#172133', fontWeight: 'bold' }}&gt;RAG 评估&lt;/span&gt;（检索 / 答案）＋ &lt;span style={{ color: '#172133', fontWeight: 'bold' }}&gt;端到端评估&lt;/span&gt;（完整业务闭环）。&lt;/div&gt;&#13;&#10;      &lt;/div&gt;&#13;&#10;      {/* 测试流程 */}&#13;&#10;      &lt;div style={{ background: '#fff', borderRadius: 10, padding: '14px 18px', boxShadow: '0 4px 16px rgba(23,33,51,0.06)' }}&gt;&#13;&#10;        &lt;div style={{ fontSize: 13, color: '#BD9B56', fontWeight: 'bold', letterSpacing: '0.1em', marginBottom: 8 }}&gt;测试怎么进行&lt;/div&gt;&#13;&#10;        &lt;div style={{ display: 'flex', gap: 8 }}&gt;&#13;&#10;          {[&#13;&#10;            ['① 构建数据集', '意图 / 工具 / 工作流 / 知识问答 4 类用例'],&#13;&#10;            ['② 运行 Agent', 'python 跑评估，收集 trace'],&#13;&#10;            ['③ 比对期望', '预测值 vs 标注期望值'],&#13;&#10;            ['④ 生成报告', '指标 + 失败用例定位'],&#13;&#10;          ].map(([t, d]) =&gt; (&#13;&#10;            &lt;div key={t} style={{ flex: 1, background: 'rgba(189,155,86,0.07)', borderRadius: 8, padding: '8px 10px' }}&gt;&#13;&#10;              &lt;div style={{ fontSize: 11.5, color: '#172133', fontWeight: 'bold', marginBottom: 3 }}&gt;{t}&lt;/div&gt;&#13;&#10;              &lt;div style={{ fontSize: 10.5, color: '#6b7075', lineHeight: 1.4 }}&gt;{d}&lt;/div&gt;&#13;&#10;            &lt;/div&gt;&#13;&#10;          ))}&#13;&#10;        &lt;/div&gt;&#13;&#10;      &lt;/div&gt;&#13;&#10;    &lt;/div&gt;&#13;&#10;    {/* 右栏：指标判定 + 结果 */}&#13;&#10;    &lt;div style={{ flex: '0 0 440px', display: 'flex', flexDirection: 'column', gap: 8 }}&gt;&#13;&#10;      {[&#13;&#10;        ['意图识别', '100%', '预测意图 = 期望意图，正确数 / 总用例', '83.33% → 100%'],&#13;&#10;        ['RAG 召回 Recall@5', '100%', 'top-5 检索结果是否包含正确文档', '检索质量稳定达标'],&#13;&#10;        ['RAG 答案准确率', '100%', '期望关键词全部覆盖（关键词覆盖度）', '50% → 100%'],&#13;&#10;      ].map(([name, val, judge, note]) =&gt; (&#13;&#10;        &lt;div key={name} style={{ background: '#fff', borderRadius: 10, padding: '10px 16px', boxShadow: '0 4px 16px rgba(23,33,51,0.06)', display: 'flex', alignItems: 'center', gap: 14 }}&gt;&#13;&#10;          &lt;div style={{ flex: 1 }}&gt;&#13;&#10;            &lt;div style={{ fontSize: 13.5, color: '#172133', fontWeight: 'bold' }}&gt;{name}&lt;/div&gt;&#13;&#10;            &lt;div style={{ fontSize: 11, color: '#6b7075', marginTop: 3, lineHeight: 1.5 }}&gt;判定：{judge}&lt;/div&gt;&#13;&#10;            &lt;div style={{ fontSize: 10.5, color: '#a09b8c', marginTop: 2 }}&gt;{note}&lt;/div&gt;&#13;&#10;          &lt;/div&gt;&#13;&#10;          &lt;div style={{ fontSize: 30, fontWeight: 'bold', color: '#BD9B56', fontFamily: 'Inter, sans-serif', minWidth: 78, textAlign: 'right' }}&gt;{val}&lt;/div&gt;&#13;&#10;        &lt;/div&gt;&#13;&#10;      ))}&#13;&#10;      &lt;div style={{ background: 'linear-gradient(135deg, #172133 0%, #22395E 100%)', borderRadius: 10, padding: '10px 16px', display: 'flex', alignItems: 'center', gap: 14 }}&gt;&#13;&#10;        &lt;div style={{ flex: 1 }}&gt;&#13;&#10;          &lt;div style={{ fontSize: 13.5, color: '#FBFCFA', fontWeight: 'bold' }}&gt;单元测试 · CI 全绿&lt;/div&gt;&#13;&#10;          &lt;div style={{ fontSize: 11, color: 'rgba(251,252,250,0.75)', marginTop: 3, lineHeight: 1.5 }}&gt;判定：pytest 单测 + GitHub Actions 每次 push 自动跑&lt;/div&gt;&#13;&#10;        &lt;/div&gt;&#13;&#10;        &lt;div style={{ fontSize: 28, fontWeight: 'bold', color: '#BD9B56', fontFamily: 'Inter, sans-serif', minWidth: 78, textAlign: 'right' }}&gt;113+30&lt;/div&gt;&#13;&#10;      &lt;/div&gt;&#13;&#10;    &lt;/div&gt;&#13;&#10;  &lt;/div&gt;&#13;&#10;  &lt;div style={{ flexShrink: 0, background: 'rgba(189,155,86,0.10)', borderLeft: '4px solid #BD9B56', borderRadius: '0 8px 8px 0', padding: '10px 18px', marginTop: 10 }}&gt;&#13;&#10;    &lt;p style={{ fontSize: 12.5, color: '#172133', margin: 0, lineHeight: 1.55 }}&gt;&lt;span style={{ color: '#BD9B56', fontWeight: 'bold' }}&gt;评估驱动优化：&lt;/span&gt;RAG 答案 50% → 100% 源于发现「评估指标用脆弱子串匹配」并改为「关键词覆盖度」、同时优化答案生成 prompt。工具选择 / 参数提取 / 工作流三项受「报修多轮交互」设计影响（用例按单轮设计、实际走 pending_repair 多轮），已定位为评估框架升级项，而非 Agent 缺陷。&lt;/p&gt;&#13;&#10;  &lt;/div&gt;&#13;&#10;  &lt;div style={{ flexShrink: 0, height: 32, display: 'flex', alignItems: 'flex-end', justifyContent: 'space-between' }}&gt;&#13;&#10;    &lt;span style={{ color: '#BD9B56', fontSize: 12, letterSpacing: '0.1em' }}&gt;云溪花园 · 智慧社区&lt;/span&gt;&#13;&#10;    &lt;span style={{ color: '#a09b8c', fontSize: 12 }}&gt;15 / 19&lt;/span&gt;&#13;&#10;  &lt;/div&gt;&#13;&#10;&lt;/Slide&gt;"/>
         <p:cNvGrpSpPr/>
         <p:nvPr/>
       </p:nvGrpSpPr>
@@ -4856,7 +7155,7 @@
       </p:grpSpPr>
       <p:sp>
         <p:nvSpPr>
-          <p:cNvPr id="96" name=""/>
+          <p:cNvPr id="147" name=""/>
           <p:cNvSpPr/>
           <p:nvPr/>
         </p:nvSpPr>
@@ -4880,7 +7179,7 @@
       </p:sp>
       <p:sp>
         <p:nvSpPr>
-          <p:cNvPr id="97" name="" descr="{&quot;isTemplate&quot;:true,&quot;type&quot;:&quot;text&quot;}"/>
+          <p:cNvPr id="148" name="" descr="{&quot;isTemplate&quot;:true,&quot;type&quot;:&quot;text&quot;}"/>
           <p:cNvSpPr txBox="1"/>
           <p:nvPr/>
         </p:nvSpPr>
@@ -4925,7 +7224,7 @@
       </p:sp>
       <p:sp>
         <p:nvSpPr>
-          <p:cNvPr id="98" name="" descr="{&quot;isTemplate&quot;:true,&quot;type&quot;:&quot;text&quot;}"/>
+          <p:cNvPr id="149" name="" descr="{&quot;isTemplate&quot;:true,&quot;type&quot;:&quot;text&quot;}"/>
           <p:cNvSpPr txBox="1"/>
           <p:nvPr/>
         </p:nvSpPr>
@@ -5000,7 +7299,7 @@
       </p:sp>
       <p:sp>
         <p:nvSpPr>
-          <p:cNvPr id="99" name=""/>
+          <p:cNvPr id="150" name=""/>
           <p:cNvSpPr/>
           <p:nvPr/>
         </p:nvSpPr>
@@ -5033,7 +7332,7 @@
       </p:sp>
       <p:sp>
         <p:nvSpPr>
-          <p:cNvPr id="100" name="" descr="{&quot;isTemplate&quot;:true,&quot;type&quot;:&quot;text&quot;}"/>
+          <p:cNvPr id="151" name="" descr="{&quot;isTemplate&quot;:true,&quot;type&quot;:&quot;text&quot;}"/>
           <p:cNvSpPr txBox="1"/>
           <p:nvPr/>
         </p:nvSpPr>
@@ -5078,7 +7377,7 @@
       </p:sp>
       <p:sp>
         <p:nvSpPr>
-          <p:cNvPr id="101" name="" descr="{&quot;isTemplate&quot;:true,&quot;type&quot;:&quot;text&quot;}"/>
+          <p:cNvPr id="152" name="" descr="{&quot;isTemplate&quot;:true,&quot;type&quot;:&quot;text&quot;}"/>
           <p:cNvSpPr txBox="1"/>
           <p:nvPr/>
         </p:nvSpPr>
@@ -5153,7 +7452,7 @@
       </p:sp>
       <p:sp>
         <p:nvSpPr>
-          <p:cNvPr id="102" name="" descr="{&quot;isTemplate&quot;:true,&quot;type&quot;:&quot;text&quot;}"/>
+          <p:cNvPr id="153" name="" descr="{&quot;isTemplate&quot;:true,&quot;type&quot;:&quot;text&quot;}"/>
           <p:cNvSpPr txBox="1"/>
           <p:nvPr/>
         </p:nvSpPr>
@@ -5188,7 +7487,7 @@
       </p:sp>
       <p:sp>
         <p:nvSpPr>
-          <p:cNvPr id="103" name="" descr="{&quot;isTemplate&quot;:true,&quot;type&quot;:&quot;text&quot;}"/>
+          <p:cNvPr id="154" name="" descr="{&quot;isTemplate&quot;:true,&quot;type&quot;:&quot;text&quot;}"/>
           <p:cNvSpPr txBox="1"/>
           <p:nvPr/>
         </p:nvSpPr>
@@ -5223,7 +7522,7 @@
       </p:sp>
       <p:sp>
         <p:nvSpPr>
-          <p:cNvPr id="104" name="" descr="{&quot;isTemplate&quot;:true,&quot;type&quot;:&quot;text&quot;}"/>
+          <p:cNvPr id="155" name="" descr="{&quot;isTemplate&quot;:true,&quot;type&quot;:&quot;text&quot;}"/>
           <p:cNvSpPr txBox="1"/>
           <p:nvPr/>
         </p:nvSpPr>
@@ -5258,7 +7557,7 @@
       </p:sp>
       <p:sp>
         <p:nvSpPr>
-          <p:cNvPr id="105" name="" descr="{&quot;isTemplate&quot;:true,&quot;type&quot;:&quot;text&quot;}"/>
+          <p:cNvPr id="156" name="" descr="{&quot;isTemplate&quot;:true,&quot;type&quot;:&quot;text&quot;}"/>
           <p:cNvSpPr txBox="1"/>
           <p:nvPr/>
         </p:nvSpPr>
@@ -5293,7 +7592,7 @@
       </p:sp>
       <p:sp>
         <p:nvSpPr>
-          <p:cNvPr id="106" name="" descr="{&quot;isTemplate&quot;:true,&quot;type&quot;:&quot;text&quot;}"/>
+          <p:cNvPr id="157" name="" descr="{&quot;isTemplate&quot;:true,&quot;type&quot;:&quot;text&quot;}"/>
           <p:cNvSpPr txBox="1"/>
           <p:nvPr/>
         </p:nvSpPr>
@@ -5328,7 +7627,7 @@
       </p:sp>
       <p:sp>
         <p:nvSpPr>
-          <p:cNvPr id="107" name="" descr="{&quot;isTemplate&quot;:true,&quot;type&quot;:&quot;text&quot;}"/>
+          <p:cNvPr id="158" name="" descr="{&quot;isTemplate&quot;:true,&quot;type&quot;:&quot;text&quot;}"/>
           <p:cNvSpPr txBox="1"/>
           <p:nvPr/>
         </p:nvSpPr>
@@ -5363,7 +7662,7 @@
       </p:sp>
       <p:sp>
         <p:nvSpPr>
-          <p:cNvPr id="108" name="" descr="{&quot;isTemplate&quot;:true,&quot;type&quot;:&quot;text&quot;}"/>
+          <p:cNvPr id="159" name="" descr="{&quot;isTemplate&quot;:true,&quot;type&quot;:&quot;text&quot;}"/>
           <p:cNvSpPr txBox="1"/>
           <p:nvPr/>
         </p:nvSpPr>
@@ -5398,7 +7697,7 @@
       </p:sp>
       <p:sp>
         <p:nvSpPr>
-          <p:cNvPr id="109" name="" descr="{&quot;isTemplate&quot;:true,&quot;type&quot;:&quot;text&quot;}"/>
+          <p:cNvPr id="160" name="" descr="{&quot;isTemplate&quot;:true,&quot;type&quot;:&quot;text&quot;}"/>
           <p:cNvSpPr txBox="1"/>
           <p:nvPr/>
         </p:nvSpPr>
@@ -5433,7 +7732,7 @@
       </p:sp>
       <p:sp>
         <p:nvSpPr>
-          <p:cNvPr id="110" name="" descr="{&quot;isTemplate&quot;:true,&quot;type&quot;:&quot;text&quot;}"/>
+          <p:cNvPr id="161" name="" descr="{&quot;isTemplate&quot;:true,&quot;type&quot;:&quot;text&quot;}"/>
           <p:cNvSpPr txBox="1"/>
           <p:nvPr/>
         </p:nvSpPr>
@@ -5468,7 +7767,7 @@
       </p:sp>
       <p:sp>
         <p:nvSpPr>
-          <p:cNvPr id="111" name="" descr="{&quot;isTemplate&quot;:true,&quot;type&quot;:&quot;text&quot;}"/>
+          <p:cNvPr id="162" name="" descr="{&quot;isTemplate&quot;:true,&quot;type&quot;:&quot;text&quot;}"/>
           <p:cNvSpPr txBox="1"/>
           <p:nvPr/>
         </p:nvSpPr>
@@ -5503,7 +7802,7 @@
       </p:sp>
       <p:sp>
         <p:nvSpPr>
-          <p:cNvPr id="112" name="" descr="{&quot;isTemplate&quot;:true,&quot;type&quot;:&quot;text&quot;}"/>
+          <p:cNvPr id="163" name="" descr="{&quot;isTemplate&quot;:true,&quot;type&quot;:&quot;text&quot;}"/>
           <p:cNvSpPr txBox="1"/>
           <p:nvPr/>
         </p:nvSpPr>
@@ -5538,7 +7837,7 @@
       </p:sp>
       <p:sp>
         <p:nvSpPr>
-          <p:cNvPr id="113" name=""/>
+          <p:cNvPr id="164" name=""/>
           <p:cNvSpPr/>
           <p:nvPr/>
         </p:nvSpPr>
@@ -5580,7 +7879,7 @@
       </p:sp>
       <p:sp>
         <p:nvSpPr>
-          <p:cNvPr id="114" name="" descr="{&quot;isTemplate&quot;:true,&quot;type&quot;:&quot;text&quot;}"/>
+          <p:cNvPr id="165" name="" descr="{&quot;isTemplate&quot;:true,&quot;type&quot;:&quot;text&quot;}"/>
           <p:cNvSpPr txBox="1"/>
           <p:nvPr/>
         </p:nvSpPr>
@@ -5625,7 +7924,7 @@
       </p:sp>
       <p:sp>
         <p:nvSpPr>
-          <p:cNvPr id="115" name="" descr="{&quot;isTemplate&quot;:true,&quot;type&quot;:&quot;text&quot;}"/>
+          <p:cNvPr id="166" name="" descr="{&quot;isTemplate&quot;:true,&quot;type&quot;:&quot;text&quot;}"/>
           <p:cNvSpPr txBox="1"/>
           <p:nvPr/>
         </p:nvSpPr>
@@ -5670,7 +7969,7 @@
       </p:sp>
       <p:sp>
         <p:nvSpPr>
-          <p:cNvPr id="116" name="" descr="{&quot;isTemplate&quot;:true,&quot;type&quot;:&quot;text&quot;}"/>
+          <p:cNvPr id="167" name="" descr="{&quot;isTemplate&quot;:true,&quot;type&quot;:&quot;text&quot;}"/>
           <p:cNvSpPr txBox="1"/>
           <p:nvPr/>
         </p:nvSpPr>
@@ -5705,7 +8004,7 @@
       </p:sp>
       <p:sp>
         <p:nvSpPr>
-          <p:cNvPr id="117" name=""/>
+          <p:cNvPr id="168" name=""/>
           <p:cNvSpPr/>
           <p:nvPr/>
         </p:nvSpPr>
@@ -5738,7 +8037,7 @@
       </p:sp>
       <p:sp>
         <p:nvSpPr>
-          <p:cNvPr id="118" name="" descr="{&quot;isTemplate&quot;:true,&quot;type&quot;:&quot;text&quot;}"/>
+          <p:cNvPr id="169" name="" descr="{&quot;isTemplate&quot;:true,&quot;type&quot;:&quot;text&quot;}"/>
           <p:cNvSpPr txBox="1"/>
           <p:nvPr/>
         </p:nvSpPr>
@@ -5773,7 +8072,7 @@
       </p:sp>
       <p:sp>
         <p:nvSpPr>
-          <p:cNvPr id="119" name=""/>
+          <p:cNvPr id="170" name=""/>
           <p:cNvSpPr/>
           <p:nvPr/>
         </p:nvSpPr>
@@ -5801,7 +8100,7 @@
       </p:sp>
       <p:sp>
         <p:nvSpPr>
-          <p:cNvPr id="120" name="" descr="{&quot;isTemplate&quot;:true,&quot;type&quot;:&quot;text&quot;}"/>
+          <p:cNvPr id="171" name="" descr="{&quot;isTemplate&quot;:true,&quot;type&quot;:&quot;text&quot;}"/>
           <p:cNvSpPr txBox="1"/>
           <p:nvPr/>
         </p:nvSpPr>
@@ -5846,7 +8145,7 @@
       </p:sp>
       <p:sp>
         <p:nvSpPr>
-          <p:cNvPr id="121" name="" descr="{&quot;isTemplate&quot;:true,&quot;type&quot;:&quot;text&quot;}"/>
+          <p:cNvPr id="172" name="" descr="{&quot;isTemplate&quot;:true,&quot;type&quot;:&quot;text&quot;}"/>
           <p:cNvSpPr txBox="1"/>
           <p:nvPr/>
         </p:nvSpPr>
@@ -5963,7 +8262,7 @@
       </p:sp>
       <p:sp>
         <p:nvSpPr>
-          <p:cNvPr id="122" name=""/>
+          <p:cNvPr id="173" name=""/>
           <p:cNvSpPr/>
           <p:nvPr/>
         </p:nvSpPr>
@@ -5991,7 +8290,7 @@
       </p:sp>
       <p:sp>
         <p:nvSpPr>
-          <p:cNvPr id="123" name="" descr="{&quot;isTemplate&quot;:true,&quot;type&quot;:&quot;text&quot;}"/>
+          <p:cNvPr id="174" name="" descr="{&quot;isTemplate&quot;:true,&quot;type&quot;:&quot;text&quot;}"/>
           <p:cNvSpPr txBox="1"/>
           <p:nvPr/>
         </p:nvSpPr>
@@ -6046,7 +8345,7 @@
       </p:sp>
       <p:sp>
         <p:nvSpPr>
-          <p:cNvPr id="124" name="" descr="{&quot;isTemplate&quot;:true,&quot;type&quot;:&quot;text&quot;}"/>
+          <p:cNvPr id="175" name="" descr="{&quot;isTemplate&quot;:true,&quot;type&quot;:&quot;text&quot;}"/>
           <p:cNvSpPr txBox="1"/>
           <p:nvPr/>
         </p:nvSpPr>
@@ -6101,7 +8400,7 @@
       </p:sp>
       <p:sp>
         <p:nvSpPr>
-          <p:cNvPr id="125" name=""/>
+          <p:cNvPr id="176" name=""/>
           <p:cNvSpPr/>
           <p:nvPr/>
         </p:nvSpPr>
@@ -6129,7 +8428,7 @@
       </p:sp>
       <p:sp>
         <p:nvSpPr>
-          <p:cNvPr id="126" name="" descr="{&quot;isTemplate&quot;:true,&quot;type&quot;:&quot;text&quot;}"/>
+          <p:cNvPr id="177" name="" descr="{&quot;isTemplate&quot;:true,&quot;type&quot;:&quot;text&quot;}"/>
           <p:cNvSpPr txBox="1"/>
           <p:nvPr/>
         </p:nvSpPr>
@@ -6174,7 +8473,7 @@
       </p:sp>
       <p:sp>
         <p:nvSpPr>
-          <p:cNvPr id="127" name="" descr="{&quot;isTemplate&quot;:true,&quot;type&quot;:&quot;text&quot;}"/>
+          <p:cNvPr id="178" name="" descr="{&quot;isTemplate&quot;:true,&quot;type&quot;:&quot;text&quot;}"/>
           <p:cNvSpPr txBox="1"/>
           <p:nvPr/>
         </p:nvSpPr>
@@ -6229,7 +8528,7 @@
       </p:sp>
       <p:sp>
         <p:nvSpPr>
-          <p:cNvPr id="128" name=""/>
+          <p:cNvPr id="179" name=""/>
           <p:cNvSpPr/>
           <p:nvPr/>
         </p:nvSpPr>
@@ -6257,7 +8556,7 @@
       </p:sp>
       <p:sp>
         <p:nvSpPr>
-          <p:cNvPr id="129" name="" descr="{&quot;isTemplate&quot;:true,&quot;type&quot;:&quot;text&quot;}"/>
+          <p:cNvPr id="180" name="" descr="{&quot;isTemplate&quot;:true,&quot;type&quot;:&quot;text&quot;}"/>
           <p:cNvSpPr txBox="1"/>
           <p:nvPr/>
         </p:nvSpPr>
@@ -6302,7 +8601,7 @@
       </p:sp>
       <p:sp>
         <p:nvSpPr>
-          <p:cNvPr id="130" name="" descr="{&quot;isTemplate&quot;:true,&quot;type&quot;:&quot;text&quot;}"/>
+          <p:cNvPr id="181" name="" descr="{&quot;isTemplate&quot;:true,&quot;type&quot;:&quot;text&quot;}"/>
           <p:cNvSpPr txBox="1"/>
           <p:nvPr/>
         </p:nvSpPr>
@@ -6357,7 +8656,7 @@
       </p:sp>
       <p:sp>
         <p:nvSpPr>
-          <p:cNvPr id="131" name=""/>
+          <p:cNvPr id="182" name=""/>
           <p:cNvSpPr/>
           <p:nvPr/>
         </p:nvSpPr>
@@ -6390,7 +8689,7 @@
       </p:sp>
       <p:sp>
         <p:nvSpPr>
-          <p:cNvPr id="132" name="" descr="{&quot;isTemplate&quot;:true,&quot;type&quot;:&quot;text&quot;}"/>
+          <p:cNvPr id="183" name="" descr="{&quot;isTemplate&quot;:true,&quot;type&quot;:&quot;text&quot;}"/>
           <p:cNvSpPr txBox="1"/>
           <p:nvPr/>
         </p:nvSpPr>
@@ -6425,7 +8724,7 @@
       </p:sp>
       <p:sp>
         <p:nvSpPr>
-          <p:cNvPr id="133" name="" descr="{&quot;isTemplate&quot;:true,&quot;type&quot;:&quot;text&quot;}"/>
+          <p:cNvPr id="184" name="" descr="{&quot;isTemplate&quot;:true,&quot;type&quot;:&quot;text&quot;}"/>
           <p:cNvSpPr txBox="1"/>
           <p:nvPr/>
         </p:nvSpPr>
@@ -6460,7 +8759,7 @@
       </p:sp>
       <p:sp>
         <p:nvSpPr>
-          <p:cNvPr id="134" name="" descr="{&quot;isTemplate&quot;:true,&quot;type&quot;:&quot;text&quot;}"/>
+          <p:cNvPr id="185" name="" descr="{&quot;isTemplate&quot;:true,&quot;type&quot;:&quot;text&quot;}"/>
           <p:cNvSpPr txBox="1"/>
           <p:nvPr/>
         </p:nvSpPr>
@@ -6495,7 +8794,7 @@
       </p:sp>
       <p:sp>
         <p:nvSpPr>
-          <p:cNvPr id="135" name=""/>
+          <p:cNvPr id="186" name=""/>
           <p:cNvSpPr/>
           <p:nvPr/>
         </p:nvSpPr>
@@ -6528,7 +8827,7 @@
       </p:sp>
       <p:sp>
         <p:nvSpPr>
-          <p:cNvPr id="136" name="" descr="{&quot;isTemplate&quot;:true,&quot;type&quot;:&quot;text&quot;}"/>
+          <p:cNvPr id="187" name="" descr="{&quot;isTemplate&quot;:true,&quot;type&quot;:&quot;text&quot;}"/>
           <p:cNvSpPr txBox="1"/>
           <p:nvPr/>
         </p:nvSpPr>
@@ -6583,7 +8882,7 @@
       </p:sp>
       <p:sp>
         <p:nvSpPr>
-          <p:cNvPr id="137" name="" descr="{&quot;isTemplate&quot;:true,&quot;type&quot;:&quot;text&quot;}"/>
+          <p:cNvPr id="188" name="" descr="{&quot;isTemplate&quot;:true,&quot;type&quot;:&quot;text&quot;}"/>
           <p:cNvSpPr txBox="1"/>
           <p:nvPr/>
         </p:nvSpPr>
@@ -6618,7 +8917,7 @@
       </p:sp>
       <p:sp>
         <p:nvSpPr>
-          <p:cNvPr id="138" name="" descr="{&quot;isTemplate&quot;:true,&quot;type&quot;:&quot;text&quot;}"/>
+          <p:cNvPr id="189" name="" descr="{&quot;isTemplate&quot;:true,&quot;type&quot;:&quot;text&quot;}"/>
           <p:cNvSpPr txBox="1"/>
           <p:nvPr/>
         </p:nvSpPr>
@@ -6653,7 +8952,7 @@
       </p:sp>
       <p:sp>
         <p:nvSpPr>
-          <p:cNvPr id="139" name=""/>
+          <p:cNvPr id="190" name=""/>
           <p:cNvSpPr/>
           <p:nvPr/>
         </p:nvSpPr>
@@ -6686,7 +8985,7 @@
       </p:sp>
       <p:sp>
         <p:nvSpPr>
-          <p:cNvPr id="140" name="" descr="{&quot;isTemplate&quot;:true,&quot;type&quot;:&quot;text&quot;}"/>
+          <p:cNvPr id="191" name="" descr="{&quot;isTemplate&quot;:true,&quot;type&quot;:&quot;text&quot;}"/>
           <p:cNvSpPr txBox="1"/>
           <p:nvPr/>
         </p:nvSpPr>
@@ -6731,7 +9030,7 @@
       </p:sp>
       <p:sp>
         <p:nvSpPr>
-          <p:cNvPr id="141" name="" descr="{&quot;isTemplate&quot;:true,&quot;type&quot;:&quot;text&quot;}"/>
+          <p:cNvPr id="192" name="" descr="{&quot;isTemplate&quot;:true,&quot;type&quot;:&quot;text&quot;}"/>
           <p:cNvSpPr txBox="1"/>
           <p:nvPr/>
         </p:nvSpPr>
@@ -6766,7 +9065,7 @@
       </p:sp>
       <p:sp>
         <p:nvSpPr>
-          <p:cNvPr id="142" name="" descr="{&quot;isTemplate&quot;:true,&quot;type&quot;:&quot;text&quot;}"/>
+          <p:cNvPr id="193" name="" descr="{&quot;isTemplate&quot;:true,&quot;type&quot;:&quot;text&quot;}"/>
           <p:cNvSpPr txBox="1"/>
           <p:nvPr/>
         </p:nvSpPr>
@@ -6801,7 +9100,7 @@
       </p:sp>
       <p:sp>
         <p:nvSpPr>
-          <p:cNvPr id="143" name=""/>
+          <p:cNvPr id="194" name=""/>
           <p:cNvSpPr/>
           <p:nvPr/>
         </p:nvSpPr>
@@ -6835,7 +9134,7 @@
       </p:sp>
       <p:sp>
         <p:nvSpPr>
-          <p:cNvPr id="144" name="" descr="{&quot;isTemplate&quot;:true,&quot;type&quot;:&quot;text&quot;}"/>
+          <p:cNvPr id="195" name="" descr="{&quot;isTemplate&quot;:true,&quot;type&quot;:&quot;text&quot;}"/>
           <p:cNvSpPr txBox="1"/>
           <p:nvPr/>
         </p:nvSpPr>
@@ -6890,7 +9189,7 @@
       </p:sp>
       <p:sp>
         <p:nvSpPr>
-          <p:cNvPr id="145" name="" descr="{&quot;isTemplate&quot;:true,&quot;type&quot;:&quot;text&quot;}"/>
+          <p:cNvPr id="196" name="" descr="{&quot;isTemplate&quot;:true,&quot;type&quot;:&quot;text&quot;}"/>
           <p:cNvSpPr txBox="1"/>
           <p:nvPr/>
         </p:nvSpPr>
@@ -6999,7 +9298,7 @@
       </p:sp>
       <p:sp>
         <p:nvSpPr>
-          <p:cNvPr id="146" name="" descr="{&quot;isTemplate&quot;:true,&quot;type&quot;:&quot;text&quot;}"/>
+          <p:cNvPr id="197" name="" descr="{&quot;isTemplate&quot;:true,&quot;type&quot;:&quot;text&quot;}"/>
           <p:cNvSpPr txBox="1"/>
           <p:nvPr/>
         </p:nvSpPr>
@@ -7034,7 +9333,7 @@
       </p:sp>
       <p:sp>
         <p:nvSpPr>
-          <p:cNvPr id="147" name=""/>
+          <p:cNvPr id="198" name=""/>
           <p:cNvSpPr/>
           <p:nvPr/>
         </p:nvSpPr>
@@ -7095,7 +9394,7 @@
       </p:sp>
       <p:sp>
         <p:nvSpPr>
-          <p:cNvPr id="148" name=""/>
+          <p:cNvPr id="199" name=""/>
           <p:cNvSpPr/>
           <p:nvPr/>
         </p:nvSpPr>
@@ -7135,7 +9434,7 @@
       </p:sp>
       <p:sp>
         <p:nvSpPr>
-          <p:cNvPr id="149" name="" descr="{&quot;isTemplate&quot;:true,&quot;type&quot;:&quot;text&quot;}"/>
+          <p:cNvPr id="200" name="" descr="{&quot;isTemplate&quot;:true,&quot;type&quot;:&quot;text&quot;}"/>
           <p:cNvSpPr txBox="1"/>
           <p:nvPr/>
         </p:nvSpPr>
@@ -7312,7 +9611,7 @@
       </p:sp>
       <p:sp>
         <p:nvSpPr>
-          <p:cNvPr id="150" name="" descr="{&quot;isTemplate&quot;:true,&quot;type&quot;:&quot;text&quot;}"/>
+          <p:cNvPr id="201" name="" descr="{&quot;isTemplate&quot;:true,&quot;type&quot;:&quot;text&quot;}"/>
           <p:cNvSpPr txBox="1"/>
           <p:nvPr/>
         </p:nvSpPr>
@@ -7367,7 +9666,7 @@
       </p:sp>
       <p:sp>
         <p:nvSpPr>
-          <p:cNvPr id="151" name="" descr="{&quot;isTemplate&quot;:true,&quot;type&quot;:&quot;text&quot;}"/>
+          <p:cNvPr id="202" name="" descr="{&quot;isTemplate&quot;:true,&quot;type&quot;:&quot;text&quot;}"/>
           <p:cNvSpPr txBox="1"/>
           <p:nvPr/>
         </p:nvSpPr>
@@ -7394,7 +9693,7 @@
                 <a:latin typeface="Microsoft YaHei"/>
                 <a:ea typeface="Microsoft YaHei"/>
               </a:rPr>
-              <a:t>12 / 15</a:t>
+              <a:t>15 / 19</a:t>
             </a:r>
             <a:endParaRPr/>
           </a:p>
@@ -7405,12 +9704,12 @@
 </p:sld>
 </file>
 
-<file path=ppt/slides/slide13.xml><?xml version="1.0" encoding="utf-8"?>
-<p:sld xmlns:p="http://schemas.openxmlformats.org/presentationml/2006/main" xmlns:r="http://schemas.openxmlformats.org/officeDocument/2006/relationships" xmlns:a="http://schemas.openxmlformats.org/drawingml/2006/main" xmlns:asvg="http://schemas.microsoft.com/office/drawing/2016/SVG/main" xmlns:mc="http://schemas.openxmlformats.org/markup-compatibility/2006" mc:Ignorable="asvg">
+<file path=ppt/slides/slide16.xml><?xml version="1.0" encoding="utf-8"?>
+<p:sld xmlns:p="http://schemas.openxmlformats.org/presentationml/2006/main" xmlns:a="http://schemas.openxmlformats.org/drawingml/2006/main">
   <p:cSld>
     <p:spTree>
       <p:nvGrpSpPr>
-        <p:cNvPr id="152" name="" descr="&lt;Slide style={{ width: '1280px', height: '720px', background: '#FBFCFA', position: 'relative', padding: '36px 64px', boxSizing: 'border-box', display: 'flex', flexDirection: 'column' }}&gt;&#10;  &lt;div style={{ flexShrink: 0 }}&gt;&#10;    &lt;div style={{ color: '#BD9B56', fontSize: 13, letterSpacing: '0.25em', marginBottom: 6 }}&gt;04 · 总结与展望&lt;/div&gt;&#10;    &lt;h2 style={{ fontSize: 30, fontWeight: 'bold', color: '#172133', margin: 0, lineHeight: 1.3 }}&gt;技术路线回顾：八个阶段 · 从 0 到上线&lt;/h2&gt;&#10;    &lt;div style={{ fontSize: 14, color: '#6b7075', marginTop: 6 }}&gt;每个阶段都有代码、测试、可运行交付，循序渐进验证&lt;/div&gt;&#10;  &lt;/div&gt;&#10;  &lt;div style={{ flex: 1, display: 'flex', alignItems: 'center', justifyContent: 'center' }}&gt;&#10;    &lt;div style={{ width: '100%', background: '#fff', borderRadius: 12, padding: '30px 26px', boxShadow: '0 6px 24px rgba(23,33,51,0.08)' }}&gt;&#10;      &lt;svg width=&quot;1100&quot; height=&quot;300&quot; viewBox=&quot;0 0 1100 300&quot;&gt;&#10;        &lt;g fontFamily=&quot;Inter, sans-serif&quot;&gt;&#10;          {/* 主时间轴 */}&#10;          &lt;line x1=&quot;60&quot; y1=&quot;70&quot; x2=&quot;1060&quot; y2=&quot;70&quot; stroke=&quot;#22395E&quot; strokeWidth=&quot;2.5&quot; /&gt;&#10;          {[&#10;            ['P0', '项目初始化', '仓库 · Docker · CI'],&#10;            ['P1', '数据库', '21 表 + 仿真数据'],&#10;            ['P2', '后端', 'FastAPI 三层'],&#10;            ['P3', '前端', '三端 + PWA'],&#10;            ['P4', 'AI Agent', '多意图 + 状态机'],&#10;            ['P5', 'RAG', '向量化检索'],&#10;            ['P6', '评估', 'Intent/Tool/RAG'],&#10;            ['P7', '部署', '已上线'],&#10;          ].map(([p, t, d], i) =&gt; {&#10;            const cx = 60 + i * 143&#10;            return (&#10;              &lt;g key={p}&gt;&#10;                {/* 节点圆 */}&#10;                &lt;circle cx={cx} cy={70} r=&quot;9&quot; fill=&quot;#BD9B56&quot; /&gt;&#10;                &lt;circle cx={cx} cy={70} r=&quot;14&quot; fill=&quot;none&quot; stroke=&quot;#BD9B56&quot; strokeWidth=&quot;1.5&quot; strokeOpacity=&quot;0.35&quot; /&gt;&#10;                {/* 阶段标签 */}&#10;                &lt;text x={cx} y={46} textAnchor=&quot;middle&quot; fontSize=&quot;13&quot; fontWeight=&quot;bold&quot; fill=&quot;#BD9B56&quot;&gt;{p}&lt;/text&gt;&#10;                {/* 阶段名 */}&#10;                &lt;text x={cx} y={112} textAnchor=&quot;middle&quot; fontSize=&quot;15&quot; fontWeight=&quot;bold&quot; fill=&quot;#172133&quot;&gt;{t}&lt;/text&gt;&#10;                {/* 描述 */}&#10;                &lt;text x={cx} y={134} textAnchor=&quot;middle&quot; fontSize=&quot;11.5&quot; fill=&quot;#5F5E5A&quot;&gt;{d}&lt;/text&gt;&#10;                {/* 下方小圆点连接 */}&#10;                &lt;line x1={cx} y1={79} x2={cx} y2={100} stroke=&quot;#BD9B56&quot; strokeWidth=&quot;1.5&quot; strokeOpacity=&quot;0.5&quot; /&gt;&#10;              &lt;/g&gt;&#10;            )&#10;          })}&#10;        &lt;/g&gt;&#10;      &lt;/svg&gt;&#10;      &lt;div style={{ marginTop: 16, display: 'flex', gap: 14 }}&gt;&#10;        &lt;div style={{ flex: 1, background: 'rgba(189,155,86,0.08)', borderRadius: 8, padding: '12px 14px', borderLeft: '3px solid #BD9B56' }}&gt;&#10;          &lt;div style={{ fontSize: 13, color: '#BD9B56', fontWeight: 'bold', marginBottom: 5 }}&gt;P1 · 数据一致性&lt;/div&gt;&#10;          &lt;p style={{ fontSize: 12, color: '#5F5E5A', margin: 0, lineHeight: 1.5 }}&gt;8 栋 / 1664 套 / 746 账单，外键关联保证一致，8 个 SQL 可复现&lt;/p&gt;&#10;        &lt;/div&gt;&#10;        &lt;div style={{ flex: 1, background: 'rgba(189,155,86,0.08)', borderRadius: 8, padding: '12px 14px', borderLeft: '3px solid #BD9B56' }}&gt;&#10;          &lt;div style={{ fontSize: 13, color: '#BD9B56', fontWeight: 'bold', marginBottom: 5 }}&gt;P4 · 多轮状态机&lt;/div&gt;&#10;          &lt;p style={{ fontSize: 12, color: '#5F5E5A', margin: 0, lineHeight: 1.5 }}&gt;报修主动追问缺省字段，避免生成残缺工单&lt;/p&gt;&#10;        &lt;/div&gt;&#10;        &lt;div style={{ flex: 1, background: 'rgba(189,155,86,0.08)', borderRadius: 8, padding: '12px 14px', borderLeft: '3px solid #BD9B56' }}&gt;&#10;          &lt;div style={{ fontSize: 13, color: '#BD9B56', fontWeight: 'bold', marginBottom: 5 }}&gt;P6 · 评估找 bug&lt;/div&gt;&#10;          &lt;p style={{ fontSize: 12, color: '#5F5E5A', margin: 0, lineHeight: 1.5 }}&gt;意图 83.33%→100%、答案 50%→100%，数据驱动优化&lt;/p&gt;&#10;        &lt;/div&gt;&#10;        &lt;div style={{ flex: 1, background: 'rgba(189,155,86,0.08)', borderRadius: 8, padding: '12px 14px', borderLeft: '3px solid #BD9B56' }}&gt;&#10;          &lt;div style={{ fontSize: 13, color: '#BD9B56', fontWeight: 'bold', marginBottom: 5 }}&gt;P7 · 部署踩坑&lt;/div&gt;&#10;          &lt;p style={{ fontSize: 12, color: '#5F5E5A', margin: 0, lineHeight: 1.5 }}&gt;国内镜像源、SECRET_KEY、端口映射逐一踩平&lt;/p&gt;&#10;        &lt;/div&gt;&#10;      &lt;/div&gt;&#10;    &lt;/div&gt;&#10;  &lt;/div&gt;&#10;  &lt;div style={{ flexShrink: 0, height: 40, display: 'flex', alignItems: 'flex-end', justifyContent: 'space-between' }}&gt;&#10;    &lt;span style={{ color: '#BD9B56', fontSize: 12, letterSpacing: '0.1em' }}&gt;云溪花园 · 智慧社区&lt;/span&gt;&#10;    &lt;span style={{ color: '#a09b8c', fontSize: 12 }}&gt;13 / 15&lt;/span&gt;&#10;  &lt;/div&gt;&#10;&lt;/Slide&gt;"/>
+        <p:cNvPr id="203" name="" descr="&lt;Slide style={{ width: '1280px', height: '720px', background: 'linear-gradient(135deg, #172133 0%, #22395E 100%)', position: 'relative', display: 'flex', flexDirection: 'column', justifyContent: 'center', padding: '0 96px' }}&gt;&#10;  &lt;div style={{ color: '#BD9B56', fontSize: 15, letterSpacing: '0.35em', marginBottom: 24 }}&gt;SECTION 04&lt;/div&gt;&#10;  &lt;div style={{ display: 'flex', alignItems: 'baseline', gap: 28 }}&gt;&#10;    &lt;span style={{ fontSize: 110, fontWeight: 'bold', color: 'rgba(189,155,86,0.28)', fontFamily: 'Inter, sans-serif', lineHeight: 1 }}&gt;04&lt;/span&gt;&#10;    &lt;span style={{ fontSize: 46, fontWeight: 'bold', color: '#FBFCFA', letterSpacing: '0.02em' }}&gt;总结与展望&lt;/span&gt;&#10;  &lt;/div&gt;&#10;  &lt;div style={{ width: 72, height: 3, background: '#BD9B56', margin: '28px 0 20px' }} /&gt;&#10;  &lt;div style={{ fontSize: 16, color: 'rgba(251,252,250,0.72)', letterSpacing: '0.04em' }}&gt;项目价值 · 技术路线回顾 · 在线演示&lt;/div&gt;&#10;  &lt;div style={{ position: 'absolute', bottom: 42, right: 96, color: 'rgba(251,252,250,0.4)', fontSize: 13, fontFamily: 'Inter, sans-serif' }}&gt;16 / 19&lt;/div&gt;&#10;&lt;/Slide&gt;"/>
         <p:cNvGrpSpPr/>
         <p:nvPr/>
       </p:nvGrpSpPr>
@@ -7424,7 +9723,314 @@
       </p:grpSpPr>
       <p:sp>
         <p:nvSpPr>
-          <p:cNvPr id="153" name=""/>
+          <p:cNvPr id="204" name=""/>
+          <p:cNvSpPr/>
+          <p:nvPr/>
+        </p:nvSpPr>
+        <p:spPr>
+          <a:xfrm rot="0" flipH="0" flipV="0">
+            <a:off x="0" y="0"/>
+            <a:ext cx="12192000" cy="6858000"/>
+          </a:xfrm>
+          <a:prstGeom prst="rect">
+            <a:avLst/>
+          </a:prstGeom>
+          <a:gradFill>
+            <a:gsLst>
+              <a:gs pos="0">
+                <a:srgbClr val="172133"/>
+              </a:gs>
+              <a:gs pos="100000">
+                <a:srgbClr val="22395E"/>
+              </a:gs>
+            </a:gsLst>
+            <a:lin ang="2700000" scaled="1"/>
+          </a:gradFill>
+          <a:ln/>
+        </p:spPr>
+        <p:txBody>
+          <a:bodyPr/>
+          <a:p/>
+        </p:txBody>
+      </p:sp>
+      <p:sp>
+        <p:nvSpPr>
+          <p:cNvPr id="205" name="" descr="{&quot;isTemplate&quot;:true,&quot;type&quot;:&quot;text&quot;}"/>
+          <p:cNvSpPr txBox="1"/>
+          <p:nvPr/>
+        </p:nvSpPr>
+        <p:spPr>
+          <a:xfrm rot="0" flipH="0" flipV="0">
+            <a:off x="914400" y="2266950"/>
+            <a:ext cx="10363200" cy="171450"/>
+          </a:xfrm>
+          <a:prstGeom prst="rect"/>
+        </p:spPr>
+        <p:txBody>
+          <a:bodyPr wrap="none" lIns="0" tIns="0" rIns="0" bIns="0"/>
+          <a:p>
+            <a:pPr>
+              <a:lnSpc>
+                <a:spcPct val="100000"/>
+              </a:lnSpc>
+            </a:pPr>
+            <a:r>
+              <a:rPr lang="en-US" sz="1125" spc="-9223372036854775808">
+                <a:solidFill>
+                  <a:srgbClr val="BD9B56"/>
+                </a:solidFill>
+                <a:latin typeface="Microsoft YaHei"/>
+                <a:ea typeface="Microsoft YaHei"/>
+              </a:rPr>
+              <a:t>SECTION 04</a:t>
+            </a:r>
+            <a:endParaRPr/>
+          </a:p>
+        </p:txBody>
+      </p:sp>
+      <p:sp>
+        <p:nvSpPr>
+          <p:cNvPr id="206" name="" descr="{&quot;isTemplate&quot;:true,&quot;type&quot;:&quot;text&quot;}"/>
+          <p:cNvSpPr txBox="1"/>
+          <p:nvPr/>
+        </p:nvSpPr>
+        <p:spPr>
+          <a:xfrm rot="0" flipH="0" flipV="0">
+            <a:off x="914400" y="2667000"/>
+            <a:ext cx="1343025" cy="1257300"/>
+          </a:xfrm>
+          <a:prstGeom prst="rect"/>
+        </p:spPr>
+        <p:txBody>
+          <a:bodyPr wrap="none" lIns="0" tIns="0" rIns="0" bIns="0"/>
+          <a:p>
+            <a:pPr>
+              <a:lnSpc>
+                <a:spcPct val="100000"/>
+              </a:lnSpc>
+            </a:pPr>
+            <a:r>
+              <a:rPr lang="en-US" sz="8250" b="1">
+                <a:solidFill>
+                  <a:srgbClr val="BD9B56">
+                    <a:alpha val="28000"/>
+                  </a:srgbClr>
+                </a:solidFill>
+                <a:latin typeface="Inter"/>
+                <a:ea typeface="Inter"/>
+              </a:rPr>
+              <a:t>04</a:t>
+            </a:r>
+            <a:endParaRPr/>
+          </a:p>
+        </p:txBody>
+      </p:sp>
+      <p:sp>
+        <p:nvSpPr>
+          <p:cNvPr id="207" name="" descr="{&quot;isTemplate&quot;:true,&quot;type&quot;:&quot;text&quot;}"/>
+          <p:cNvSpPr txBox="1"/>
+          <p:nvPr/>
+        </p:nvSpPr>
+        <p:spPr>
+          <a:xfrm rot="0" flipH="0" flipV="0">
+            <a:off x="2524125" y="2667000"/>
+            <a:ext cx="2190750" cy="1257300"/>
+          </a:xfrm>
+          <a:prstGeom prst="rect"/>
+        </p:spPr>
+        <p:txBody>
+          <a:bodyPr wrap="none" lIns="0" tIns="0" rIns="0" bIns="0"/>
+          <a:p>
+            <a:pPr>
+              <a:lnSpc>
+                <a:spcPct val="100000"/>
+              </a:lnSpc>
+            </a:pPr>
+            <a:r>
+              <a:rPr lang="zh-CN" sz="3450" b="1">
+                <a:solidFill>
+                  <a:srgbClr val="FBFCFA"/>
+                </a:solidFill>
+                <a:latin typeface="Microsoft YaHei"/>
+                <a:ea typeface="Microsoft YaHei"/>
+              </a:rPr>
+              <a:t>总结与展望</a:t>
+            </a:r>
+            <a:endParaRPr/>
+          </a:p>
+        </p:txBody>
+      </p:sp>
+      <p:sp>
+        <p:nvSpPr>
+          <p:cNvPr id="208" name=""/>
+          <p:cNvSpPr/>
+          <p:nvPr/>
+        </p:nvSpPr>
+        <p:spPr>
+          <a:xfrm rot="0" flipH="0" flipV="0">
+            <a:off x="914400" y="4191000"/>
+            <a:ext cx="685800" cy="28575"/>
+          </a:xfrm>
+          <a:prstGeom prst="rect">
+            <a:avLst/>
+          </a:prstGeom>
+          <a:solidFill>
+            <a:srgbClr val="BD9B56"/>
+          </a:solidFill>
+          <a:ln/>
+        </p:spPr>
+        <p:txBody>
+          <a:bodyPr/>
+          <a:p/>
+        </p:txBody>
+      </p:sp>
+      <p:sp>
+        <p:nvSpPr>
+          <p:cNvPr id="209" name="" descr="{&quot;isTemplate&quot;:true,&quot;type&quot;:&quot;text&quot;}"/>
+          <p:cNvSpPr txBox="1"/>
+          <p:nvPr/>
+        </p:nvSpPr>
+        <p:spPr>
+          <a:xfrm rot="0" flipH="0" flipV="0">
+            <a:off x="914400" y="4410075"/>
+            <a:ext cx="10363200" cy="190500"/>
+          </a:xfrm>
+          <a:prstGeom prst="rect"/>
+        </p:spPr>
+        <p:txBody>
+          <a:bodyPr wrap="none" lIns="0" tIns="0" rIns="0" bIns="0"/>
+          <a:p>
+            <a:pPr>
+              <a:lnSpc>
+                <a:spcPct val="100000"/>
+              </a:lnSpc>
+            </a:pPr>
+            <a:r>
+              <a:rPr lang="zh-CN" sz="1200" spc="-9223372036854775808">
+                <a:solidFill>
+                  <a:srgbClr val="FBFCFA">
+                    <a:alpha val="72000"/>
+                  </a:srgbClr>
+                </a:solidFill>
+                <a:latin typeface="Microsoft YaHei"/>
+                <a:ea typeface="Microsoft YaHei"/>
+              </a:rPr>
+              <a:t>项目价值</a:t>
+            </a:r>
+            <a:r>
+              <a:rPr lang="en-US" sz="1200" spc="-9223372036854775808">
+                <a:solidFill>
+                  <a:srgbClr val="FBFCFA">
+                    <a:alpha val="72000"/>
+                  </a:srgbClr>
+                </a:solidFill>
+                <a:latin typeface="Microsoft YaHei"/>
+                <a:ea typeface="Microsoft YaHei"/>
+              </a:rPr>
+              <a:t> · </a:t>
+            </a:r>
+            <a:r>
+              <a:rPr lang="zh-CN" sz="1200" spc="-9223372036854775808">
+                <a:solidFill>
+                  <a:srgbClr val="FBFCFA">
+                    <a:alpha val="72000"/>
+                  </a:srgbClr>
+                </a:solidFill>
+                <a:latin typeface="Microsoft YaHei"/>
+                <a:ea typeface="Microsoft YaHei"/>
+              </a:rPr>
+              <a:t>技术路线回顾</a:t>
+            </a:r>
+            <a:r>
+              <a:rPr lang="en-US" sz="1200" spc="-9223372036854775808">
+                <a:solidFill>
+                  <a:srgbClr val="FBFCFA">
+                    <a:alpha val="72000"/>
+                  </a:srgbClr>
+                </a:solidFill>
+                <a:latin typeface="Microsoft YaHei"/>
+                <a:ea typeface="Microsoft YaHei"/>
+              </a:rPr>
+              <a:t> · </a:t>
+            </a:r>
+            <a:r>
+              <a:rPr lang="zh-CN" sz="1200" spc="-9223372036854775808">
+                <a:solidFill>
+                  <a:srgbClr val="FBFCFA">
+                    <a:alpha val="72000"/>
+                  </a:srgbClr>
+                </a:solidFill>
+                <a:latin typeface="Microsoft YaHei"/>
+                <a:ea typeface="Microsoft YaHei"/>
+              </a:rPr>
+              <a:t>在线演示</a:t>
+            </a:r>
+            <a:endParaRPr/>
+          </a:p>
+        </p:txBody>
+      </p:sp>
+      <p:sp>
+        <p:nvSpPr>
+          <p:cNvPr id="210" name="" descr="{&quot;isTemplate&quot;:true,&quot;type&quot;:&quot;text&quot;}"/>
+          <p:cNvSpPr txBox="1"/>
+          <p:nvPr/>
+        </p:nvSpPr>
+        <p:spPr>
+          <a:xfrm rot="0" flipH="0" flipV="0">
+            <a:off x="10877550" y="6305550"/>
+            <a:ext cx="400050" cy="152400"/>
+          </a:xfrm>
+          <a:prstGeom prst="rect"/>
+        </p:spPr>
+        <p:txBody>
+          <a:bodyPr wrap="none" lIns="0" tIns="0" rIns="0" bIns="0"/>
+          <a:p>
+            <a:pPr>
+              <a:lnSpc>
+                <a:spcPct val="100000"/>
+              </a:lnSpc>
+            </a:pPr>
+            <a:r>
+              <a:rPr lang="en-US" sz="975">
+                <a:solidFill>
+                  <a:srgbClr val="FBFCFA">
+                    <a:alpha val="40000"/>
+                  </a:srgbClr>
+                </a:solidFill>
+                <a:latin typeface="Inter"/>
+                <a:ea typeface="Inter"/>
+              </a:rPr>
+              <a:t>16 / 19</a:t>
+            </a:r>
+            <a:endParaRPr/>
+          </a:p>
+        </p:txBody>
+      </p:sp>
+    </p:spTree>
+  </p:cSld>
+</p:sld>
+</file>
+
+<file path=ppt/slides/slide17.xml><?xml version="1.0" encoding="utf-8"?>
+<p:sld xmlns:p="http://schemas.openxmlformats.org/presentationml/2006/main" xmlns:r="http://schemas.openxmlformats.org/officeDocument/2006/relationships" xmlns:a="http://schemas.openxmlformats.org/drawingml/2006/main" xmlns:asvg="http://schemas.microsoft.com/office/drawing/2016/SVG/main" xmlns:mc="http://schemas.openxmlformats.org/markup-compatibility/2006" mc:Ignorable="asvg">
+  <p:cSld>
+    <p:spTree>
+      <p:nvGrpSpPr>
+        <p:cNvPr id="211" name="" descr="&lt;Slide style={{ width: '1280px', height: '720px', background: '#FBFCFA', position: 'relative', padding: '36px 64px', boxSizing: 'border-box', display: 'flex', flexDirection: 'column' }}&gt;&#13;&#10;  &lt;div style={{ flexShrink: 0 }}&gt;&#13;&#10;    &lt;div style={{ color: '#BD9B56', fontSize: 13, letterSpacing: '0.25em', marginBottom: 6 }}&gt;04 · 总结与展望&lt;/div&gt;&#13;&#10;    &lt;h2 style={{ fontSize: 30, fontWeight: 'bold', color: '#172133', margin: 0, lineHeight: 1.3 }}&gt;技术路线回顾：八个阶段 · 从 0 到上线&lt;/h2&gt;&#13;&#10;    &lt;div style={{ fontSize: 14, color: '#6b7075', marginTop: 6 }}&gt;每个阶段都有代码、测试、可运行交付，循序渐进验证&lt;/div&gt;&#13;&#10;  &lt;/div&gt;&#13;&#10;  &lt;div style={{ flex: 1, display: 'flex', alignItems: 'center', justifyContent: 'center' }}&gt;&#13;&#10;    &lt;div style={{ width: '100%', background: '#fff', borderRadius: 12, padding: '30px 26px', boxShadow: '0 6px 24px rgba(23,33,51,0.08)' }}&gt;&#13;&#10;      &lt;svg width=&quot;1100&quot; height=&quot;300&quot; viewBox=&quot;0 0 1100 300&quot;&gt;&#13;&#10;        &lt;g fontFamily=&quot;Inter, sans-serif&quot;&gt;&#13;&#10;          {/* 主时间轴 */}&#13;&#10;          &lt;line x1=&quot;60&quot; y1=&quot;70&quot; x2=&quot;1060&quot; y2=&quot;70&quot; stroke=&quot;#22395E&quot; strokeWidth=&quot;2.5&quot; /&gt;&#13;&#10;          {[&#13;&#10;            ['P0', '项目初始化', '仓库 · Docker · CI'],&#13;&#10;            ['P1', '数据库', '21 表 + 仿真数据'],&#13;&#10;            ['P2', '后端', 'FastAPI 三层'],&#13;&#10;            ['P3', '前端', '三端 + PWA'],&#13;&#10;            ['P4', 'AI Agent', '多意图 + 状态机'],&#13;&#10;            ['P5', 'RAG', '向量化检索'],&#13;&#10;            ['P6', '评估', 'Intent/Tool/RAG'],&#13;&#10;            ['P7', '部署', '已上线'],&#13;&#10;          ].map(([p, t, d], i) =&gt; {&#13;&#10;            const cx = 60 + i * 143&#13;&#10;            return (&#13;&#10;              &lt;g key={p}&gt;&#13;&#10;                {/* 节点圆 */}&#13;&#10;                &lt;circle cx={cx} cy={70} r=&quot;9&quot; fill=&quot;#BD9B56&quot; /&gt;&#13;&#10;                &lt;circle cx={cx} cy={70} r=&quot;14&quot; fill=&quot;none&quot; stroke=&quot;#BD9B56&quot; strokeWidth=&quot;1.5&quot; strokeOpacity=&quot;0.35&quot; /&gt;&#13;&#10;                {/* 阶段标签 */}&#13;&#10;                &lt;text x={cx} y={46} textAnchor=&quot;middle&quot; fontSize=&quot;13&quot; fontWeight=&quot;bold&quot; fill=&quot;#BD9B56&quot;&gt;{p}&lt;/text&gt;&#13;&#10;                {/* 阶段名 */}&#13;&#10;                &lt;text x={cx} y={112} textAnchor=&quot;middle&quot; fontSize=&quot;15&quot; fontWeight=&quot;bold&quot; fill=&quot;#172133&quot;&gt;{t}&lt;/text&gt;&#13;&#10;                {/* 描述 */}&#13;&#10;                &lt;text x={cx} y={134} textAnchor=&quot;middle&quot; fontSize=&quot;11.5&quot; fill=&quot;#5F5E5A&quot;&gt;{d}&lt;/text&gt;&#13;&#10;                {/* 下方小圆点连接 */}&#13;&#10;                &lt;line x1={cx} y1={79} x2={cx} y2={100} stroke=&quot;#BD9B56&quot; strokeWidth=&quot;1.5&quot; strokeOpacity=&quot;0.5&quot; /&gt;&#13;&#10;              &lt;/g&gt;&#13;&#10;            )&#13;&#10;          })}&#13;&#10;        &lt;/g&gt;&#13;&#10;      &lt;/svg&gt;&#13;&#10;      &lt;div style={{ marginTop: 16, display: 'flex', gap: 14 }}&gt;&#13;&#10;        &lt;div style={{ flex: 1, background: 'rgba(189,155,86,0.08)', borderRadius: 8, padding: '12px 14px', borderLeft: '3px solid #BD9B56' }}&gt;&#13;&#10;          &lt;div style={{ fontSize: 13, color: '#BD9B56', fontWeight: 'bold', marginBottom: 5 }}&gt;P1 · 数据一致性&lt;/div&gt;&#13;&#10;          &lt;p style={{ fontSize: 12, color: '#5F5E5A', margin: 0, lineHeight: 1.5 }}&gt;8 栋 / 1664 套 / 746 账单，外键关联保证一致，8 个 SQL 可复现&lt;/p&gt;&#13;&#10;        &lt;/div&gt;&#13;&#10;        &lt;div style={{ flex: 1, background: 'rgba(189,155,86,0.08)', borderRadius: 8, padding: '12px 14px', borderLeft: '3px solid #BD9B56' }}&gt;&#13;&#10;          &lt;div style={{ fontSize: 13, color: '#BD9B56', fontWeight: 'bold', marginBottom: 5 }}&gt;P4 · 多轮状态机&lt;/div&gt;&#13;&#10;          &lt;p style={{ fontSize: 12, color: '#5F5E5A', margin: 0, lineHeight: 1.5 }}&gt;报修主动追问缺省字段，避免生成残缺工单&lt;/p&gt;&#13;&#10;        &lt;/div&gt;&#13;&#10;        &lt;div style={{ flex: 1, background: 'rgba(189,155,86,0.08)', borderRadius: 8, padding: '12px 14px', borderLeft: '3px solid #BD9B56' }}&gt;&#13;&#10;          &lt;div style={{ fontSize: 13, color: '#BD9B56', fontWeight: 'bold', marginBottom: 5 }}&gt;P6 · 评估找 bug&lt;/div&gt;&#13;&#10;          &lt;p style={{ fontSize: 12, color: '#5F5E5A', margin: 0, lineHeight: 1.5 }}&gt;意图 83.33%→100%、答案 50%→100%，数据驱动优化&lt;/p&gt;&#13;&#10;        &lt;/div&gt;&#13;&#10;        &lt;div style={{ flex: 1, background: 'rgba(189,155,86,0.08)', borderRadius: 8, padding: '12px 14px', borderLeft: '3px solid #BD9B56' }}&gt;&#13;&#10;          &lt;div style={{ fontSize: 13, color: '#BD9B56', fontWeight: 'bold', marginBottom: 5 }}&gt;P7 · 部署踩坑&lt;/div&gt;&#13;&#10;          &lt;p style={{ fontSize: 12, color: '#5F5E5A', margin: 0, lineHeight: 1.5 }}&gt;国内镜像源、SECRET_KEY、端口映射逐一踩平&lt;/p&gt;&#13;&#10;        &lt;/div&gt;&#13;&#10;      &lt;/div&gt;&#13;&#10;    &lt;/div&gt;&#13;&#10;  &lt;/div&gt;&#13;&#10;  &lt;div style={{ flexShrink: 0, height: 40, display: 'flex', alignItems: 'flex-end', justifyContent: 'space-between' }}&gt;&#13;&#10;    &lt;span style={{ color: '#BD9B56', fontSize: 12, letterSpacing: '0.1em' }}&gt;云溪花园 · 智慧社区&lt;/span&gt;&#13;&#10;    &lt;span style={{ color: '#a09b8c', fontSize: 12 }}&gt;17 / 19&lt;/span&gt;&#13;&#10;  &lt;/div&gt;&#13;&#10;&lt;/Slide&gt;"/>
+        <p:cNvGrpSpPr/>
+        <p:nvPr/>
+      </p:nvGrpSpPr>
+      <p:grpSpPr>
+        <a:xfrm>
+          <a:off x="0" y="0"/>
+          <a:ext cx="0" cy="0"/>
+          <a:chOff x="0" y="0"/>
+          <a:chExt cx="0" cy="0"/>
+        </a:xfrm>
+      </p:grpSpPr>
+      <p:sp>
+        <p:nvSpPr>
+          <p:cNvPr id="212" name=""/>
           <p:cNvSpPr/>
           <p:nvPr/>
         </p:nvSpPr>
@@ -7448,7 +10054,7 @@
       </p:sp>
       <p:sp>
         <p:nvSpPr>
-          <p:cNvPr id="154" name="" descr="{&quot;isTemplate&quot;:true,&quot;type&quot;:&quot;text&quot;}"/>
+          <p:cNvPr id="213" name="" descr="{&quot;isTemplate&quot;:true,&quot;type&quot;:&quot;text&quot;}"/>
           <p:cNvSpPr txBox="1"/>
           <p:nvPr/>
         </p:nvSpPr>
@@ -7493,7 +10099,7 @@
       </p:sp>
       <p:sp>
         <p:nvSpPr>
-          <p:cNvPr id="155" name="" descr="{&quot;isTemplate&quot;:true,&quot;type&quot;:&quot;text&quot;}"/>
+          <p:cNvPr id="214" name="" descr="{&quot;isTemplate&quot;:true,&quot;type&quot;:&quot;text&quot;}"/>
           <p:cNvSpPr txBox="1"/>
           <p:nvPr/>
         </p:nvSpPr>
@@ -7568,7 +10174,7 @@
       </p:sp>
       <p:sp>
         <p:nvSpPr>
-          <p:cNvPr id="156" name="" descr="{&quot;isTemplate&quot;:true,&quot;type&quot;:&quot;text&quot;}"/>
+          <p:cNvPr id="215" name="" descr="{&quot;isTemplate&quot;:true,&quot;type&quot;:&quot;text&quot;}"/>
           <p:cNvSpPr txBox="1"/>
           <p:nvPr/>
         </p:nvSpPr>
@@ -7603,7 +10209,7 @@
       </p:sp>
       <p:sp>
         <p:nvSpPr>
-          <p:cNvPr id="157" name=""/>
+          <p:cNvPr id="216" name=""/>
           <p:cNvSpPr/>
           <p:nvPr/>
         </p:nvSpPr>
@@ -7636,7 +10242,7 @@
       </p:sp>
       <p:pic>
         <p:nvPicPr>
-          <p:cNvPr id="158" name=""/>
+          <p:cNvPr id="217" name=""/>
           <p:cNvPicPr>
             <a:picLocks noChangeAspect="1"/>
           </p:cNvPicPr>
@@ -7667,7 +10273,7 @@
       </p:pic>
       <p:sp>
         <p:nvSpPr>
-          <p:cNvPr id="159" name=""/>
+          <p:cNvPr id="218" name=""/>
           <p:cNvSpPr/>
           <p:nvPr/>
         </p:nvSpPr>
@@ -7695,7 +10301,7 @@
       </p:sp>
       <p:sp>
         <p:nvSpPr>
-          <p:cNvPr id="160" name=""/>
+          <p:cNvPr id="219" name=""/>
           <p:cNvSpPr/>
           <p:nvPr/>
         </p:nvSpPr>
@@ -7752,7 +10358,7 @@
       </p:sp>
       <p:sp>
         <p:nvSpPr>
-          <p:cNvPr id="161" name="" descr="{&quot;isTemplate&quot;:true,&quot;type&quot;:&quot;text&quot;}"/>
+          <p:cNvPr id="220" name="" descr="{&quot;isTemplate&quot;:true,&quot;type&quot;:&quot;text&quot;}"/>
           <p:cNvSpPr txBox="1"/>
           <p:nvPr/>
         </p:nvSpPr>
@@ -7797,7 +10403,7 @@
       </p:sp>
       <p:sp>
         <p:nvSpPr>
-          <p:cNvPr id="162" name="" descr="{&quot;isTemplate&quot;:true,&quot;type&quot;:&quot;text&quot;}"/>
+          <p:cNvPr id="221" name="" descr="{&quot;isTemplate&quot;:true,&quot;type&quot;:&quot;text&quot;}"/>
           <p:cNvSpPr txBox="1"/>
           <p:nvPr/>
         </p:nvSpPr>
@@ -7924,7 +10530,7 @@
       </p:sp>
       <p:sp>
         <p:nvSpPr>
-          <p:cNvPr id="163" name=""/>
+          <p:cNvPr id="222" name=""/>
           <p:cNvSpPr/>
           <p:nvPr/>
         </p:nvSpPr>
@@ -7952,7 +10558,7 @@
       </p:sp>
       <p:sp>
         <p:nvSpPr>
-          <p:cNvPr id="164" name=""/>
+          <p:cNvPr id="223" name=""/>
           <p:cNvSpPr/>
           <p:nvPr/>
         </p:nvSpPr>
@@ -8009,7 +10615,7 @@
       </p:sp>
       <p:sp>
         <p:nvSpPr>
-          <p:cNvPr id="165" name="" descr="{&quot;isTemplate&quot;:true,&quot;type&quot;:&quot;text&quot;}"/>
+          <p:cNvPr id="224" name="" descr="{&quot;isTemplate&quot;:true,&quot;type&quot;:&quot;text&quot;}"/>
           <p:cNvSpPr txBox="1"/>
           <p:nvPr/>
         </p:nvSpPr>
@@ -8054,7 +10660,7 @@
       </p:sp>
       <p:sp>
         <p:nvSpPr>
-          <p:cNvPr id="166" name="" descr="{&quot;isTemplate&quot;:true,&quot;type&quot;:&quot;text&quot;}"/>
+          <p:cNvPr id="225" name="" descr="{&quot;isTemplate&quot;:true,&quot;type&quot;:&quot;text&quot;}"/>
           <p:cNvSpPr txBox="1"/>
           <p:nvPr/>
         </p:nvSpPr>
@@ -8089,7 +10695,7 @@
       </p:sp>
       <p:sp>
         <p:nvSpPr>
-          <p:cNvPr id="167" name=""/>
+          <p:cNvPr id="226" name=""/>
           <p:cNvSpPr/>
           <p:nvPr/>
         </p:nvSpPr>
@@ -8117,7 +10723,7 @@
       </p:sp>
       <p:sp>
         <p:nvSpPr>
-          <p:cNvPr id="168" name=""/>
+          <p:cNvPr id="227" name=""/>
           <p:cNvSpPr/>
           <p:nvPr/>
         </p:nvSpPr>
@@ -8174,7 +10780,7 @@
       </p:sp>
       <p:sp>
         <p:nvSpPr>
-          <p:cNvPr id="169" name="" descr="{&quot;isTemplate&quot;:true,&quot;type&quot;:&quot;text&quot;}"/>
+          <p:cNvPr id="228" name="" descr="{&quot;isTemplate&quot;:true,&quot;type&quot;:&quot;text&quot;}"/>
           <p:cNvSpPr txBox="1"/>
           <p:nvPr/>
         </p:nvSpPr>
@@ -8229,7 +10835,7 @@
       </p:sp>
       <p:sp>
         <p:nvSpPr>
-          <p:cNvPr id="170" name="" descr="{&quot;isTemplate&quot;:true,&quot;type&quot;:&quot;text&quot;}"/>
+          <p:cNvPr id="229" name="" descr="{&quot;isTemplate&quot;:true,&quot;type&quot;:&quot;text&quot;}"/>
           <p:cNvSpPr txBox="1"/>
           <p:nvPr/>
         </p:nvSpPr>
@@ -8306,7 +10912,7 @@
       </p:sp>
       <p:sp>
         <p:nvSpPr>
-          <p:cNvPr id="171" name=""/>
+          <p:cNvPr id="230" name=""/>
           <p:cNvSpPr/>
           <p:nvPr/>
         </p:nvSpPr>
@@ -8334,7 +10940,7 @@
       </p:sp>
       <p:sp>
         <p:nvSpPr>
-          <p:cNvPr id="172" name=""/>
+          <p:cNvPr id="231" name=""/>
           <p:cNvSpPr/>
           <p:nvPr/>
         </p:nvSpPr>
@@ -8391,7 +10997,7 @@
       </p:sp>
       <p:sp>
         <p:nvSpPr>
-          <p:cNvPr id="173" name="" descr="{&quot;isTemplate&quot;:true,&quot;type&quot;:&quot;text&quot;}"/>
+          <p:cNvPr id="232" name="" descr="{&quot;isTemplate&quot;:true,&quot;type&quot;:&quot;text&quot;}"/>
           <p:cNvSpPr txBox="1"/>
           <p:nvPr/>
         </p:nvSpPr>
@@ -8436,7 +11042,7 @@
       </p:sp>
       <p:sp>
         <p:nvSpPr>
-          <p:cNvPr id="174" name="" descr="{&quot;isTemplate&quot;:true,&quot;type&quot;:&quot;text&quot;}"/>
+          <p:cNvPr id="233" name="" descr="{&quot;isTemplate&quot;:true,&quot;type&quot;:&quot;text&quot;}"/>
           <p:cNvSpPr txBox="1"/>
           <p:nvPr/>
         </p:nvSpPr>
@@ -8493,7 +11099,7 @@
       </p:sp>
       <p:sp>
         <p:nvSpPr>
-          <p:cNvPr id="175" name="" descr="{&quot;isTemplate&quot;:true,&quot;type&quot;:&quot;text&quot;}"/>
+          <p:cNvPr id="234" name="" descr="{&quot;isTemplate&quot;:true,&quot;type&quot;:&quot;text&quot;}"/>
           <p:cNvSpPr txBox="1"/>
           <p:nvPr/>
         </p:nvSpPr>
@@ -8548,7 +11154,7 @@
       </p:sp>
       <p:sp>
         <p:nvSpPr>
-          <p:cNvPr id="176" name="" descr="{&quot;isTemplate&quot;:true,&quot;type&quot;:&quot;text&quot;}"/>
+          <p:cNvPr id="235" name="" descr="{&quot;isTemplate&quot;:true,&quot;type&quot;:&quot;text&quot;}"/>
           <p:cNvSpPr txBox="1"/>
           <p:nvPr/>
         </p:nvSpPr>
@@ -8575,7 +11181,7 @@
                 <a:latin typeface="Microsoft YaHei"/>
                 <a:ea typeface="Microsoft YaHei"/>
               </a:rPr>
-              <a:t>13 / 15</a:t>
+              <a:t>17 / 19</a:t>
             </a:r>
             <a:endParaRPr/>
           </a:p>
@@ -8586,12 +11192,12 @@
 </p:sld>
 </file>
 
-<file path=ppt/slides/slide14.xml><?xml version="1.0" encoding="utf-8"?>
+<file path=ppt/slides/slide18.xml><?xml version="1.0" encoding="utf-8"?>
 <p:sld xmlns:p="http://schemas.openxmlformats.org/presentationml/2006/main" xmlns:a="http://schemas.openxmlformats.org/drawingml/2006/main">
   <p:cSld>
     <p:spTree>
       <p:nvGrpSpPr>
-        <p:cNvPr id="177" name="" descr="&lt;Slide style={{ width: '1280px', height: '720px', background: '#FBFCFA', position: 'relative', padding: '26px 52px', boxSizing: 'border-box', display: 'flex', flexDirection: 'column' }}&gt;&#10;  &lt;div style={{ flexShrink: 0 }}&gt;&#10;    &lt;div style={{ color: '#BD9B56', fontSize: 12, letterSpacing: '0.25em', marginBottom: 4 }}&gt;04 · 总结与展望&lt;/div&gt;&#10;    &lt;h2 style={{ fontSize: 25, fontWeight: 'bold', color: '#172133', margin: 0, lineHeight: 1.2 }}&gt;三端功能 × 实现技术：每个功能怎么做出来的&lt;/h2&gt;&#10;  &lt;/div&gt;&#10;  &lt;div style={{ flex: 1, display: 'flex', alignItems: 'stretch', gap: 18, marginTop: 10 }}&gt;&#10;    {/* 左栏：三端功能实现 */}&#10;    &lt;div style={{ flex: 1, display: 'flex', flexDirection: 'column', gap: 8 }}&gt;&#10;      {/* 业主端 */}&#10;      &lt;div style={{ background: '#fff', borderRadius: 10, padding: '10px 14px', boxShadow: '0 4px 16px rgba(23,33,51,0.06)' }}&gt;&#10;        &lt;div style={{ display: 'flex', alignItems: 'center', gap: 8, marginBottom: 6 }}&gt;&#10;          &lt;span style={{ fontSize: 14, fontWeight: 'bold', color: '#172133' }}&gt;业主端&lt;/span&gt;&#10;          &lt;span style={{ fontSize: 10.5, color: '#BD9B56', background: 'rgba(189,155,86,0.12)', padding: '2px 7px', borderRadius: 4 }}&gt;ToC · Owner&lt;/span&gt;&#10;        &lt;/div&gt;&#10;        &lt;div style={{ display: 'flex', flexDirection: 'column', gap: 3.5 }}&gt;&#10;          &lt;div style={{ display: 'flex', gap: 8, alignItems: 'baseline', fontSize: 11.5, lineHeight: 1.4 }}&gt;&lt;span style={{ color: '#172133', fontWeight: 'bold', minWidth: 56 }}&gt;AI 助手&lt;/span&gt;&lt;span style={{ color: '#6b7075' }}&gt;LangGraph 多 Agent：Personal 对话 → Router 意图识别 → Domain 工具调用&lt;/span&gt;&lt;/div&gt;&#10;          &lt;div style={{ display: 'flex', gap: 8, alignItems: 'baseline', fontSize: 11.5, lineHeight: 1.4 }}&gt;&lt;span style={{ color: '#172133', fontWeight: 'bold', minWidth: 56 }}&gt;对话报修&lt;/span&gt;&lt;span style={{ color: '#6b7075' }}&gt;Repair Agent · 多轮状态机补全房屋/类型 · 自动派单（技能+在岗+工号）&lt;/span&gt;&lt;/div&gt;&#10;          &lt;div style={{ display: 'flex', gap: 8, alignItems: 'baseline', fontSize: 11.5, lineHeight: 1.4 }}&gt;&lt;span style={{ color: '#172133', fontWeight: 'bold', minWidth: 56 }}&gt;缴费查询&lt;/span&gt;&lt;span style={{ color: '#6b7075' }}&gt;Fee Agent 查 fee_bills 账单表 · 返回金额/状态/截止日&lt;/span&gt;&lt;/div&gt;&#10;          &lt;div style={{ display: 'flex', gap: 8, alignItems: 'baseline', fontSize: 11.5, lineHeight: 1.4 }}&gt;&lt;span style={{ color: '#172133', fontWeight: 'bold', minWidth: 56 }}&gt;公告&lt;/span&gt;&lt;span style={{ color: '#6b7075' }}&gt;公告列表 + AI 摘要（LLM 提炼要点）&lt;/span&gt;&lt;/div&gt;&#10;          &lt;div style={{ display: 'flex', gap: 8, alignItems: 'baseline', fontSize: 11.5, lineHeight: 1.4 }}&gt;&lt;span style={{ color: '#172133', fontWeight: 'bold', minWidth: 56 }}&gt;我的工单&lt;/span&gt;&lt;span style={{ color: '#6b7075' }}&gt;repair_order 状态追踪（创建→派单→接单→完成→关闭）&lt;/span&gt;&lt;/div&gt;&#10;          &lt;div style={{ display: 'flex', gap: 8, alignItems: 'baseline', fontSize: 11.5, lineHeight: 1.4 }}&gt;&lt;span style={{ color: '#172133', fontWeight: 'bold', minWidth: 56 }}&gt;问题上报&lt;/span&gt;&lt;span style={{ color: '#6b7075' }}&gt;IssueReport 上报 · 附图片 · 物业答复&lt;/span&gt;&lt;/div&gt;&#10;        &lt;/div&gt;&#10;      &lt;/div&gt;&#10;      {/* 物业端 */}&#10;      &lt;div style={{ background: '#fff', borderRadius: 10, padding: '10px 14px', boxShadow: '0 4px 16px rgba(23,33,51,0.06)' }}&gt;&#10;        &lt;div style={{ display: 'flex', alignItems: 'center', gap: 8, marginBottom: 6 }}&gt;&#10;          &lt;span style={{ fontSize: 14, fontWeight: 'bold', color: '#172133' }}&gt;物业端&lt;/span&gt;&#10;          &lt;span style={{ fontSize: 10.5, color: '#BD9B56', background: 'rgba(189,155,86,0.12)', padding: '2px 7px', borderRadius: 4 }}&gt;ToB · Admin/Staff&lt;/span&gt;&#10;        &lt;/div&gt;&#10;        &lt;div style={{ display: 'flex', flexDirection: 'column', gap: 3.5 }}&gt;&#10;          &lt;div style={{ display: 'flex', gap: 8, alignItems: 'baseline', fontSize: 11.5, lineHeight: 1.4 }}&gt;&lt;span style={{ color: '#172133', fontWeight: 'bold', minWidth: 56 }}&gt;数据看板&lt;/span&gt;&lt;span style={{ color: '#6b7075' }}&gt;统计聚合 API · 今日报修/处理中/已完成实时汇总&lt;/span&gt;&lt;/div&gt;&#10;          &lt;div style={{ display: 'flex', gap: 8, alignItems: 'baseline', fontSize: 11.5, lineHeight: 1.4 }}&gt;&lt;span style={{ color: '#172133', fontWeight: 'bold', minWidth: 56 }}&gt;工单管理&lt;/span&gt;&lt;span style={{ color: '#6b7075' }}&gt;repair_order CRUD · 状态流转 · 人工派单/改派&lt;/span&gt;&lt;/div&gt;&#10;          &lt;div style={{ display: 'flex', gap: 8, alignItems: 'baseline', fontSize: 11.5, lineHeight: 1.4 }}&gt;&lt;span style={{ color: '#172133', fontWeight: 'bold', minWidth: 56 }}&gt;用户/房屋&lt;/span&gt;&lt;span style={{ color: '#6b7075' }}&gt;user / house / house_binding 绑定关系管理&lt;/span&gt;&lt;/div&gt;&#10;          &lt;div style={{ display: 'flex', gap: 8, alignItems: 'baseline', fontSize: 11.5, lineHeight: 1.4 }}&gt;&lt;span style={{ color: '#172133', fontWeight: 'bold', minWidth: 56 }}&gt;公告 AI 生成&lt;/span&gt;&lt;span style={{ color: '#6b7075' }}&gt;Notice Agent + LLM 生成标题/正文/影响范围 · 人工审核发布&lt;/span&gt;&lt;/div&gt;&#10;          &lt;div style={{ display: 'flex', gap: 8, alignItems: 'baseline', fontSize: 11.5, lineHeight: 1.4 }}&gt;&lt;span style={{ color: '#172133', fontWeight: 'bold', minWidth: 56 }}&gt;巡检管理&lt;/span&gt;&lt;span style={{ color: '#6b7075' }}&gt;摄像头抓拍 → 视觉模型识别异常 → 巡检记录 + 告警&lt;/span&gt;&lt;/div&gt;&#10;          &lt;div style={{ display: 'flex', gap: 8, alignItems: 'baseline', fontSize: 11.5, lineHeight: 1.4 }}&gt;&lt;span style={{ color: '#172133', fontWeight: 'bold', minWidth: 56 }}&gt;知识缺口审核&lt;/span&gt;&lt;span style={{ color: '#6b7075' }}&gt;knowledge_gap 审核 → 通过自动写入 pgvector 知识库&lt;/span&gt;&lt;/div&gt;&#10;        &lt;/div&gt;&#10;      &lt;/div&gt;&#10;      {/* 维修端 */}&#10;      &lt;div style={{ background: '#fff', borderRadius: 10, padding: '10px 14px', boxShadow: '0 4px 16px rgba(23,33,51,0.06)' }}&gt;&#10;        &lt;div style={{ display: 'flex', alignItems: 'center', gap: 8, marginBottom: 6 }}&gt;&#10;          &lt;span style={{ fontSize: 14, fontWeight: 'bold', color: '#172133' }}&gt;维修端&lt;/span&gt;&#10;          &lt;span style={{ fontSize: 10.5, color: '#BD9B56', background: 'rgba(189,155,86,0.12)', padding: '2px 7px', borderRadius: 4 }}&gt;ToC · Worker&lt;/span&gt;&#10;        &lt;/div&gt;&#10;        &lt;div style={{ display: 'flex', flexDirection: 'column', gap: 3.5 }}&gt;&#10;          &lt;div style={{ display: 'flex', gap: 8, alignItems: 'baseline', fontSize: 11.5, lineHeight: 1.4 }}&gt;&lt;span style={{ color: '#172133', fontWeight: 'bold', minWidth: 56 }}&gt;任务列表&lt;/span&gt;&lt;span style={{ color: '#6b7075' }}&gt;自动派单后查询「我的待处理」工单&lt;/span&gt;&lt;/div&gt;&#10;          &lt;div style={{ display: 'flex', gap: 8, alignItems: 'baseline', fontSize: 11.5, lineHeight: 1.4 }}&gt;&lt;span style={{ color: '#172133', fontWeight: 'bold', minWidth: 56 }}&gt;接单/处理/完成&lt;/span&gt;&lt;span style={{ color: '#6b7075' }}&gt;状态机流转 · 每步触发实时通知&lt;/span&gt;&lt;/div&gt;&#10;          &lt;div style={{ display: 'flex', gap: 8, alignItems: 'baseline', fontSize: 11.5, lineHeight: 1.4 }}&gt;&lt;span style={{ color: '#172133', fontWeight: 'bold', minWidth: 56 }}&gt;消息&lt;/span&gt;&lt;span style={{ color: '#6b7075' }}&gt;事件驱动通知（派单/答复/完成）&lt;/span&gt;&lt;/div&gt;&#10;          &lt;div style={{ display: 'flex', gap: 8, alignItems: 'baseline', fontSize: 11.5, lineHeight: 1.4 }}&gt;&lt;span style={{ color: '#172133', fontWeight: 'bold', minWidth: 56 }}&gt;巡检任务&lt;/span&gt;&lt;span style={{ color: '#6b7075' }}&gt;巡检记录查看 · 异常处理&lt;/span&gt;&lt;/div&gt;&#10;        &lt;/div&gt;&#10;      &lt;/div&gt;&#10;    &lt;/div&gt;&#10;    {/* 右栏：自维护 + Demo */}&#10;    &lt;div style={{ flex: '0 0 285px', display: 'flex', flexDirection: 'column', gap: 10 }}&gt;&#10;      &lt;div style={{ background: 'linear-gradient(135deg, #172133 0%, #22395E 100%)', borderRadius: 12, padding: '16px 18px', color: '#FBFCFA', display: 'flex', flexDirection: 'column', gap: 9 }}&gt;&#10;        &lt;div style={{ color: '#BD9B56', fontSize: 12, letterSpacing: '0.2em' }}&gt;系统自维护自更新&lt;/div&gt;&#10;        &lt;div style={{ display: 'flex', flexDirection: 'column', gap: 6, fontSize: 11.5, lineHeight: 1.45 }}&gt;&#10;          &lt;div&gt;&lt;span style={{ color: '#BD9B56', fontWeight: 'bold' }}&gt;定时清理&lt;/span&gt;&lt;span style={{ color: 'rgba(251,252,250,0.8)' }}&gt;　APScheduler 每日清过期数据/孤儿文件&lt;/span&gt;&lt;/div&gt;&#10;          &lt;div&gt;&lt;span style={{ color: '#BD9B56', fontWeight: 'bold' }}&gt;巡检自动化&lt;/span&gt;&lt;span style={{ color: 'rgba(251,252,250,0.8)' }}&gt;　定时抓拍 + 视觉识别异常&lt;/span&gt;&lt;/div&gt;&#10;          &lt;div&gt;&lt;span style={{ color: '#BD9B56', fontWeight: 'bold' }}&gt;知识自进化&lt;/span&gt;&lt;span style={{ color: 'rgba(251,252,250,0.8)' }}&gt;　反馈→知识缺口→审核→入库&lt;/span&gt;&lt;/div&gt;&#10;          &lt;div&gt;&lt;span style={{ color: '#BD9B56', fontWeight: 'bold' }}&gt;监控告警&lt;/span&gt;&lt;span style={{ color: 'rgba(251,252,250,0.8)' }}&gt;　Prometheus + Grafana&lt;/span&gt;&lt;/div&gt;&#10;          &lt;div&gt;&lt;span style={{ color: '#BD9B56', fontWeight: 'bold' }}&gt;持续交付&lt;/span&gt;&lt;span style={{ color: 'rgba(251,252,250,0.8)' }}&gt;　GitHub Actions 自动测试+发布&lt;/span&gt;&lt;/div&gt;&#10;        &lt;/div&gt;&#10;        &lt;div style={{ fontSize: 11, color: 'rgba(251,252,250,0.6)', lineHeight: 1.5, paddingTop: 7, borderTop: '1px solid rgba(189,155,86,0.3)' }}&gt;无需人工值守，越用越准、越用越稳&lt;/div&gt;&#10;      &lt;/div&gt;&#10;      &lt;div style={{ background: '#fff', borderRadius: 12, padding: '14px 16px', boxShadow: '0 4px 16px rgba(23,33,51,0.06)' }}&gt;&#10;        &lt;div style={{ color: '#BD9B56', fontSize: 11.5, letterSpacing: '0.2em', marginBottom: 8 }}&gt;ONLINE DEMO&lt;/div&gt;&#10;        &lt;div style={{ fontSize: 15, fontFamily: 'Inter, sans-serif', color: '#172133', lineHeight: 1.4 }}&gt;http://119.91.236.85&lt;/div&gt;&#10;        &lt;div style={{ fontSize: 11, color: '#6b7075', lineHeight: 1.6, marginTop: 6 }}&gt;&#10;          业主 guoyi378 · 物业 mayun420&lt;br/&gt;维修 yangfei423　&lt;span style={{ color: '#BD9B56' }}&gt;密码 123456&lt;/span&gt;&#10;        &lt;/div&gt;&#10;        &lt;div style={{ fontSize: 10.5, color: '#a09b8c', marginTop: 6, paddingTop: 6, borderTop: '1px solid rgba(34,57,94,0.1)' }}&gt;GitHub：Xuuuukkk/ai-property-community-agent · MIT&lt;/div&gt;&#10;      &lt;/div&gt;&#10;    &lt;/div&gt;&#10;  &lt;/div&gt;&#10;  &lt;div style={{ flexShrink: 0, height: 30, display: 'flex', alignItems: 'flex-end', justifyContent: 'space-between' }}&gt;&#10;    &lt;span style={{ color: '#BD9B56', fontSize: 12, letterSpacing: '0.1em' }}&gt;云溪花园 · 智慧社区&lt;/span&gt;&#10;    &lt;span style={{ color: '#a09b8c', fontSize: 12 }}&gt;14 / 15&lt;/span&gt;&#10;  &lt;/div&gt;&#10;&lt;/Slide&gt;"/>
+        <p:cNvPr id="236" name="" descr="&lt;Slide style={{ width: '1280px', height: '720px', background: '#FBFCFA', position: 'relative', padding: '26px 52px', boxSizing: 'border-box', display: 'flex', flexDirection: 'column' }}&gt;&#13;&#10;  &lt;div style={{ flexShrink: 0 }}&gt;&#13;&#10;    &lt;div style={{ color: '#BD9B56', fontSize: 12, letterSpacing: '0.25em', marginBottom: 4 }}&gt;04 · 总结与展望&lt;/div&gt;&#13;&#10;    &lt;h2 style={{ fontSize: 25, fontWeight: 'bold', color: '#172133', margin: 0, lineHeight: 1.2 }}&gt;三端功能 × 实现技术：每个功能怎么做出来的&lt;/h2&gt;&#13;&#10;  &lt;/div&gt;&#13;&#10;  &lt;div style={{ flex: 1, display: 'flex', alignItems: 'stretch', gap: 18, marginTop: 10 }}&gt;&#13;&#10;    {/* 左栏：三端功能实现 */}&#13;&#10;    &lt;div style={{ flex: 1, display: 'flex', flexDirection: 'column', gap: 8 }}&gt;&#13;&#10;      {/* 业主端 */}&#13;&#10;      &lt;div style={{ background: '#fff', borderRadius: 10, padding: '10px 14px', boxShadow: '0 4px 16px rgba(23,33,51,0.06)' }}&gt;&#13;&#10;        &lt;div style={{ display: 'flex', alignItems: 'center', gap: 8, marginBottom: 6 }}&gt;&#13;&#10;          &lt;span style={{ fontSize: 14, fontWeight: 'bold', color: '#172133' }}&gt;业主端&lt;/span&gt;&#13;&#10;          &lt;span style={{ fontSize: 10.5, color: '#BD9B56', background: 'rgba(189,155,86,0.12)', padding: '2px 7px', borderRadius: 4 }}&gt;ToC · Owner&lt;/span&gt;&#13;&#10;        &lt;/div&gt;&#13;&#10;        &lt;div style={{ display: 'flex', flexDirection: 'column', gap: 3.5 }}&gt;&#13;&#10;          &lt;div style={{ display: 'flex', gap: 8, alignItems: 'baseline', fontSize: 11.5, lineHeight: 1.4 }}&gt;&lt;span style={{ color: '#172133', fontWeight: 'bold', minWidth: 56 }}&gt;AI 助手&lt;/span&gt;&lt;span style={{ color: '#6b7075' }}&gt;LangGraph 多 Agent：Personal 对话 → Router 意图识别 → Domain 工具调用&lt;/span&gt;&lt;/div&gt;&#13;&#10;          &lt;div style={{ display: 'flex', gap: 8, alignItems: 'baseline', fontSize: 11.5, lineHeight: 1.4 }}&gt;&lt;span style={{ color: '#172133', fontWeight: 'bold', minWidth: 56 }}&gt;对话报修&lt;/span&gt;&lt;span style={{ color: '#6b7075' }}&gt;Repair Agent · 多轮状态机补全房屋/类型 · 自动派单（技能+在岗+工号）&lt;/span&gt;&lt;/div&gt;&#13;&#10;          &lt;div style={{ display: 'flex', gap: 8, alignItems: 'baseline', fontSize: 11.5, lineHeight: 1.4 }}&gt;&lt;span style={{ color: '#172133', fontWeight: 'bold', minWidth: 56 }}&gt;缴费查询&lt;/span&gt;&lt;span style={{ color: '#6b7075' }}&gt;Fee Agent 查 fee_bills 账单表 · 返回金额/状态/截止日&lt;/span&gt;&lt;/div&gt;&#13;&#10;          &lt;div style={{ display: 'flex', gap: 8, alignItems: 'baseline', fontSize: 11.5, lineHeight: 1.4 }}&gt;&lt;span style={{ color: '#172133', fontWeight: 'bold', minWidth: 56 }}&gt;公告&lt;/span&gt;&lt;span style={{ color: '#6b7075' }}&gt;公告列表 + AI 摘要（LLM 提炼要点）&lt;/span&gt;&lt;/div&gt;&#13;&#10;          &lt;div style={{ display: 'flex', gap: 8, alignItems: 'baseline', fontSize: 11.5, lineHeight: 1.4 }}&gt;&lt;span style={{ color: '#172133', fontWeight: 'bold', minWidth: 56 }}&gt;我的工单&lt;/span&gt;&lt;span style={{ color: '#6b7075' }}&gt;repair_order 状态追踪（创建→派单→接单→完成→关闭）&lt;/span&gt;&lt;/div&gt;&#13;&#10;          &lt;div style={{ display: 'flex', gap: 8, alignItems: 'baseline', fontSize: 11.5, lineHeight: 1.4 }}&gt;&lt;span style={{ color: '#172133', fontWeight: 'bold', minWidth: 56 }}&gt;问题上报&lt;/span&gt;&lt;span style={{ color: '#6b7075' }}&gt;IssueReport 上报 · 附图片 · 物业答复&lt;/span&gt;&lt;/div&gt;&#13;&#10;        &lt;/div&gt;&#13;&#10;      &lt;/div&gt;&#13;&#10;      {/* 物业端 */}&#13;&#10;      &lt;div style={{ background: '#fff', borderRadius: 10, padding: '10px 14px', boxShadow: '0 4px 16px rgba(23,33,51,0.06)' }}&gt;&#13;&#10;        &lt;div style={{ display: 'flex', alignItems: 'center', gap: 8, marginBottom: 6 }}&gt;&#13;&#10;          &lt;span style={{ fontSize: 14, fontWeight: 'bold', color: '#172133' }}&gt;物业端&lt;/span&gt;&#13;&#10;          &lt;span style={{ fontSize: 10.5, color: '#BD9B56', background: 'rgba(189,155,86,0.12)', padding: '2px 7px', borderRadius: 4 }}&gt;ToB · Admin/Staff&lt;/span&gt;&#13;&#10;        &lt;/div&gt;&#13;&#10;        &lt;div style={{ display: 'flex', flexDirection: 'column', gap: 3.5 }}&gt;&#13;&#10;          &lt;div style={{ display: 'flex', gap: 8, alignItems: 'baseline', fontSize: 11.5, lineHeight: 1.4 }}&gt;&lt;span style={{ color: '#172133', fontWeight: 'bold', minWidth: 56 }}&gt;数据看板&lt;/span&gt;&lt;span style={{ color: '#6b7075' }}&gt;统计聚合 API · 今日报修/处理中/已完成实时汇总&lt;/span&gt;&lt;/div&gt;&#13;&#10;          &lt;div style={{ display: 'flex', gap: 8, alignItems: 'baseline', fontSize: 11.5, lineHeight: 1.4 }}&gt;&lt;span style={{ color: '#172133', fontWeight: 'bold', minWidth: 56 }}&gt;工单管理&lt;/span&gt;&lt;span style={{ color: '#6b7075' }}&gt;repair_order CRUD · 状态流转 · 人工派单/改派&lt;/span&gt;&lt;/div&gt;&#13;&#10;          &lt;div style={{ display: 'flex', gap: 8, alignItems: 'baseline', fontSize: 11.5, lineHeight: 1.4 }}&gt;&lt;span style={{ color: '#172133', fontWeight: 'bold', minWidth: 56 }}&gt;用户/房屋&lt;/span&gt;&lt;span style={{ color: '#6b7075' }}&gt;user / house / house_binding 绑定关系管理&lt;/span&gt;&lt;/div&gt;&#13;&#10;          &lt;div style={{ display: 'flex', gap: 8, alignItems: 'baseline', fontSize: 11.5, lineHeight: 1.4 }}&gt;&lt;span style={{ color: '#172133', fontWeight: 'bold', minWidth: 56 }}&gt;公告 AI 生成&lt;/span&gt;&lt;span style={{ color: '#6b7075' }}&gt;Notice Agent + LLM 生成标题/正文/影响范围 · 人工审核发布&lt;/span&gt;&lt;/div&gt;&#13;&#10;          &lt;div style={{ display: 'flex', gap: 8, alignItems: 'baseline', fontSize: 11.5, lineHeight: 1.4 }}&gt;&lt;span style={{ color: '#172133', fontWeight: 'bold', minWidth: 56 }}&gt;巡检管理&lt;/span&gt;&lt;span style={{ color: '#6b7075' }}&gt;摄像头抓拍 → 视觉模型识别异常 → 巡检记录 + 告警&lt;/span&gt;&lt;/div&gt;&#13;&#10;          &lt;div style={{ display: 'flex', gap: 8, alignItems: 'baseline', fontSize: 11.5, lineHeight: 1.4 }}&gt;&lt;span style={{ color: '#172133', fontWeight: 'bold', minWidth: 56 }}&gt;知识缺口审核&lt;/span&gt;&lt;span style={{ color: '#6b7075' }}&gt;knowledge_gap 审核 → 通过自动写入 pgvector 知识库&lt;/span&gt;&lt;/div&gt;&#13;&#10;        &lt;/div&gt;&#13;&#10;      &lt;/div&gt;&#13;&#10;      {/* 维修端 */}&#13;&#10;      &lt;div style={{ background: '#fff', borderRadius: 10, padding: '10px 14px', boxShadow: '0 4px 16px rgba(23,33,51,0.06)' }}&gt;&#13;&#10;        &lt;div style={{ display: 'flex', alignItems: 'center', gap: 8, marginBottom: 6 }}&gt;&#13;&#10;          &lt;span style={{ fontSize: 14, fontWeight: 'bold', color: '#172133' }}&gt;维修端&lt;/span&gt;&#13;&#10;          &lt;span style={{ fontSize: 10.5, color: '#BD9B56', background: 'rgba(189,155,86,0.12)', padding: '2px 7px', borderRadius: 4 }}&gt;ToC · Worker&lt;/span&gt;&#13;&#10;        &lt;/div&gt;&#13;&#10;        &lt;div style={{ display: 'flex', flexDirection: 'column', gap: 3.5 }}&gt;&#13;&#10;          &lt;div style={{ display: 'flex', gap: 8, alignItems: 'baseline', fontSize: 11.5, lineHeight: 1.4 }}&gt;&lt;span style={{ color: '#172133', fontWeight: 'bold', minWidth: 56 }}&gt;任务列表&lt;/span&gt;&lt;span style={{ color: '#6b7075' }}&gt;自动派单后查询「我的待处理」工单&lt;/span&gt;&lt;/div&gt;&#13;&#10;          &lt;div style={{ display: 'flex', gap: 8, alignItems: 'baseline', fontSize: 11.5, lineHeight: 1.4 }}&gt;&lt;span style={{ color: '#172133', fontWeight: 'bold', minWidth: 56 }}&gt;接单/处理/完成&lt;/span&gt;&lt;span style={{ color: '#6b7075' }}&gt;状态机流转 · 每步触发实时通知&lt;/span&gt;&lt;/div&gt;&#13;&#10;          &lt;div style={{ display: 'flex', gap: 8, alignItems: 'baseline', fontSize: 11.5, lineHeight: 1.4 }}&gt;&lt;span style={{ color: '#172133', fontWeight: 'bold', minWidth: 56 }}&gt;消息&lt;/span&gt;&lt;span style={{ color: '#6b7075' }}&gt;事件驱动通知（派单/答复/完成）&lt;/span&gt;&lt;/div&gt;&#13;&#10;          &lt;div style={{ display: 'flex', gap: 8, alignItems: 'baseline', fontSize: 11.5, lineHeight: 1.4 }}&gt;&lt;span style={{ color: '#172133', fontWeight: 'bold', minWidth: 56 }}&gt;巡检任务&lt;/span&gt;&lt;span style={{ color: '#6b7075' }}&gt;巡检记录查看 · 异常处理&lt;/span&gt;&lt;/div&gt;&#13;&#10;        &lt;/div&gt;&#13;&#10;      &lt;/div&gt;&#13;&#10;    &lt;/div&gt;&#13;&#10;    {/* 右栏：自维护 + Demo */}&#13;&#10;    &lt;div style={{ flex: '0 0 285px', display: 'flex', flexDirection: 'column', gap: 10 }}&gt;&#13;&#10;      &lt;div style={{ background: 'linear-gradient(135deg, #172133 0%, #22395E 100%)', borderRadius: 12, padding: '16px 18px', color: '#FBFCFA', display: 'flex', flexDirection: 'column', gap: 9 }}&gt;&#13;&#10;        &lt;div style={{ color: '#BD9B56', fontSize: 12, letterSpacing: '0.2em' }}&gt;系统自维护自更新&lt;/div&gt;&#13;&#10;        &lt;div style={{ display: 'flex', flexDirection: 'column', gap: 6, fontSize: 11.5, lineHeight: 1.45 }}&gt;&#13;&#10;          &lt;div&gt;&lt;span style={{ color: '#BD9B56', fontWeight: 'bold' }}&gt;定时清理&lt;/span&gt;&lt;span style={{ color: 'rgba(251,252,250,0.8)' }}&gt;　APScheduler 每日清过期数据/孤儿文件&lt;/span&gt;&lt;/div&gt;&#13;&#10;          &lt;div&gt;&lt;span style={{ color: '#BD9B56', fontWeight: 'bold' }}&gt;巡检自动化&lt;/span&gt;&lt;span style={{ color: 'rgba(251,252,250,0.8)' }}&gt;　定时抓拍 + 视觉识别异常&lt;/span&gt;&lt;/div&gt;&#13;&#10;          &lt;div&gt;&lt;span style={{ color: '#BD9B56', fontWeight: 'bold' }}&gt;知识自进化&lt;/span&gt;&lt;span style={{ color: 'rgba(251,252,250,0.8)' }}&gt;　反馈→知识缺口→审核→入库&lt;/span&gt;&lt;/div&gt;&#13;&#10;          &lt;div&gt;&lt;span style={{ color: '#BD9B56', fontWeight: 'bold' }}&gt;监控告警&lt;/span&gt;&lt;span style={{ color: 'rgba(251,252,250,0.8)' }}&gt;　Prometheus + Grafana&lt;/span&gt;&lt;/div&gt;&#13;&#10;          &lt;div&gt;&lt;span style={{ color: '#BD9B56', fontWeight: 'bold' }}&gt;持续交付&lt;/span&gt;&lt;span style={{ color: 'rgba(251,252,250,0.8)' }}&gt;　GitHub Actions 自动测试+发布&lt;/span&gt;&lt;/div&gt;&#13;&#10;        &lt;/div&gt;&#13;&#10;        &lt;div style={{ fontSize: 11, color: 'rgba(251,252,250,0.6)', lineHeight: 1.5, paddingTop: 7, borderTop: '1px solid rgba(189,155,86,0.3)' }}&gt;无需人工值守，越用越准、越用越稳&lt;/div&gt;&#13;&#10;      &lt;/div&gt;&#13;&#10;      &lt;div style={{ background: '#fff', borderRadius: 12, padding: '14px 16px', boxShadow: '0 4px 16px rgba(23,33,51,0.06)' }}&gt;&#13;&#10;        &lt;div style={{ color: '#BD9B56', fontSize: 11.5, letterSpacing: '0.2em', marginBottom: 8 }}&gt;ONLINE DEMO&lt;/div&gt;&#13;&#10;        &lt;div style={{ fontSize: 15, fontFamily: 'Inter, sans-serif', color: '#172133', lineHeight: 1.4 }}&gt;http://119.91.236.85&lt;/div&gt;&#13;&#10;        &lt;div style={{ fontSize: 11, color: '#6b7075', lineHeight: 1.6, marginTop: 6 }}&gt;&#13;&#10;          业主 guoyi378 · 物业 mayun420&lt;br/&gt;维修 yangfei423　&lt;span style={{ color: '#BD9B56' }}&gt;密码 123456&lt;/span&gt;&#13;&#10;        &lt;/div&gt;&#13;&#10;        &lt;div style={{ fontSize: 10.5, color: '#a09b8c', marginTop: 6, paddingTop: 6, borderTop: '1px solid rgba(34,57,94,0.1)' }}&gt;GitHub：Xuuuukkk/ai-property-community-agent · MIT&lt;/div&gt;&#13;&#10;      &lt;/div&gt;&#13;&#10;    &lt;/div&gt;&#13;&#10;  &lt;/div&gt;&#13;&#10;  &lt;div style={{ flexShrink: 0, height: 30, display: 'flex', alignItems: 'flex-end', justifyContent: 'space-between' }}&gt;&#13;&#10;    &lt;span style={{ color: '#BD9B56', fontSize: 12, letterSpacing: '0.1em' }}&gt;云溪花园 · 智慧社区&lt;/span&gt;&#13;&#10;    &lt;span style={{ color: '#a09b8c', fontSize: 12 }}&gt;18 / 19&lt;/span&gt;&#13;&#10;  &lt;/div&gt;&#13;&#10;&lt;/Slide&gt;"/>
         <p:cNvGrpSpPr/>
         <p:nvPr/>
       </p:nvGrpSpPr>
@@ -8605,7 +11211,7 @@
       </p:grpSpPr>
       <p:sp>
         <p:nvSpPr>
-          <p:cNvPr id="178" name=""/>
+          <p:cNvPr id="237" name=""/>
           <p:cNvSpPr/>
           <p:nvPr/>
         </p:nvSpPr>
@@ -8629,7 +11235,7 @@
       </p:sp>
       <p:sp>
         <p:nvSpPr>
-          <p:cNvPr id="179" name="" descr="{&quot;isTemplate&quot;:true,&quot;type&quot;:&quot;text&quot;}"/>
+          <p:cNvPr id="238" name="" descr="{&quot;isTemplate&quot;:true,&quot;type&quot;:&quot;text&quot;}"/>
           <p:cNvSpPr txBox="1"/>
           <p:nvPr/>
         </p:nvSpPr>
@@ -8674,7 +11280,7 @@
       </p:sp>
       <p:sp>
         <p:nvSpPr>
-          <p:cNvPr id="180" name="" descr="{&quot;isTemplate&quot;:true,&quot;type&quot;:&quot;text&quot;}"/>
+          <p:cNvPr id="239" name="" descr="{&quot;isTemplate&quot;:true,&quot;type&quot;:&quot;text&quot;}"/>
           <p:cNvSpPr txBox="1"/>
           <p:nvPr/>
         </p:nvSpPr>
@@ -8729,7 +11335,7 @@
       </p:sp>
       <p:sp>
         <p:nvSpPr>
-          <p:cNvPr id="181" name=""/>
+          <p:cNvPr id="240" name=""/>
           <p:cNvSpPr/>
           <p:nvPr/>
         </p:nvSpPr>
@@ -8762,7 +11368,7 @@
       </p:sp>
       <p:sp>
         <p:nvSpPr>
-          <p:cNvPr id="182" name="" descr="{&quot;isTemplate&quot;:true,&quot;type&quot;:&quot;text&quot;}"/>
+          <p:cNvPr id="241" name="" descr="{&quot;isTemplate&quot;:true,&quot;type&quot;:&quot;text&quot;}"/>
           <p:cNvSpPr txBox="1"/>
           <p:nvPr/>
         </p:nvSpPr>
@@ -8797,7 +11403,7 @@
       </p:sp>
       <p:sp>
         <p:nvSpPr>
-          <p:cNvPr id="183" name=""/>
+          <p:cNvPr id="242" name=""/>
           <p:cNvSpPr/>
           <p:nvPr/>
         </p:nvSpPr>
@@ -8825,7 +11431,7 @@
       </p:sp>
       <p:sp>
         <p:nvSpPr>
-          <p:cNvPr id="184" name="" descr="{&quot;isTemplate&quot;:true,&quot;type&quot;:&quot;text&quot;}"/>
+          <p:cNvPr id="243" name="" descr="{&quot;isTemplate&quot;:true,&quot;type&quot;:&quot;text&quot;}"/>
           <p:cNvSpPr txBox="1"/>
           <p:nvPr/>
         </p:nvSpPr>
@@ -8865,7 +11471,7 @@
       </p:sp>
       <p:sp>
         <p:nvSpPr>
-          <p:cNvPr id="185" name="" descr="{&quot;isTemplate&quot;:true,&quot;type&quot;:&quot;text&quot;}"/>
+          <p:cNvPr id="244" name="" descr="{&quot;isTemplate&quot;:true,&quot;type&quot;:&quot;text&quot;}"/>
           <p:cNvSpPr txBox="1"/>
           <p:nvPr/>
         </p:nvSpPr>
@@ -8910,7 +11516,7 @@
       </p:sp>
       <p:sp>
         <p:nvSpPr>
-          <p:cNvPr id="186" name="" descr="{&quot;isTemplate&quot;:true,&quot;type&quot;:&quot;text&quot;}"/>
+          <p:cNvPr id="245" name="" descr="{&quot;isTemplate&quot;:true,&quot;type&quot;:&quot;text&quot;}"/>
           <p:cNvSpPr txBox="1"/>
           <p:nvPr/>
         </p:nvSpPr>
@@ -9035,7 +11641,7 @@
       </p:sp>
       <p:sp>
         <p:nvSpPr>
-          <p:cNvPr id="187" name="" descr="{&quot;isTemplate&quot;:true,&quot;type&quot;:&quot;text&quot;}"/>
+          <p:cNvPr id="246" name="" descr="{&quot;isTemplate&quot;:true,&quot;type&quot;:&quot;text&quot;}"/>
           <p:cNvSpPr txBox="1"/>
           <p:nvPr/>
         </p:nvSpPr>
@@ -9070,7 +11676,7 @@
       </p:sp>
       <p:sp>
         <p:nvSpPr>
-          <p:cNvPr id="188" name="" descr="{&quot;isTemplate&quot;:true,&quot;type&quot;:&quot;text&quot;}"/>
+          <p:cNvPr id="247" name="" descr="{&quot;isTemplate&quot;:true,&quot;type&quot;:&quot;text&quot;}"/>
           <p:cNvSpPr txBox="1"/>
           <p:nvPr/>
         </p:nvSpPr>
@@ -9195,7 +11801,7 @@
       </p:sp>
       <p:sp>
         <p:nvSpPr>
-          <p:cNvPr id="189" name="" descr="{&quot;isTemplate&quot;:true,&quot;type&quot;:&quot;text&quot;}"/>
+          <p:cNvPr id="248" name="" descr="{&quot;isTemplate&quot;:true,&quot;type&quot;:&quot;text&quot;}"/>
           <p:cNvSpPr txBox="1"/>
           <p:nvPr/>
         </p:nvSpPr>
@@ -9230,7 +11836,7 @@
       </p:sp>
       <p:sp>
         <p:nvSpPr>
-          <p:cNvPr id="190" name="" descr="{&quot;isTemplate&quot;:true,&quot;type&quot;:&quot;text&quot;}"/>
+          <p:cNvPr id="249" name="" descr="{&quot;isTemplate&quot;:true,&quot;type&quot;:&quot;text&quot;}"/>
           <p:cNvSpPr txBox="1"/>
           <p:nvPr/>
         </p:nvSpPr>
@@ -9355,7 +11961,7 @@
       </p:sp>
       <p:sp>
         <p:nvSpPr>
-          <p:cNvPr id="191" name="" descr="{&quot;isTemplate&quot;:true,&quot;type&quot;:&quot;text&quot;}"/>
+          <p:cNvPr id="250" name="" descr="{&quot;isTemplate&quot;:true,&quot;type&quot;:&quot;text&quot;}"/>
           <p:cNvSpPr txBox="1"/>
           <p:nvPr/>
         </p:nvSpPr>
@@ -9390,7 +11996,7 @@
       </p:sp>
       <p:sp>
         <p:nvSpPr>
-          <p:cNvPr id="192" name="" descr="{&quot;isTemplate&quot;:true,&quot;type&quot;:&quot;text&quot;}"/>
+          <p:cNvPr id="251" name="" descr="{&quot;isTemplate&quot;:true,&quot;type&quot;:&quot;text&quot;}"/>
           <p:cNvSpPr txBox="1"/>
           <p:nvPr/>
         </p:nvSpPr>
@@ -9465,7 +12071,7 @@
       </p:sp>
       <p:sp>
         <p:nvSpPr>
-          <p:cNvPr id="193" name="" descr="{&quot;isTemplate&quot;:true,&quot;type&quot;:&quot;text&quot;}"/>
+          <p:cNvPr id="252" name="" descr="{&quot;isTemplate&quot;:true,&quot;type&quot;:&quot;text&quot;}"/>
           <p:cNvSpPr txBox="1"/>
           <p:nvPr/>
         </p:nvSpPr>
@@ -9500,7 +12106,7 @@
       </p:sp>
       <p:sp>
         <p:nvSpPr>
-          <p:cNvPr id="194" name="" descr="{&quot;isTemplate&quot;:true,&quot;type&quot;:&quot;text&quot;}"/>
+          <p:cNvPr id="253" name="" descr="{&quot;isTemplate&quot;:true,&quot;type&quot;:&quot;text&quot;}"/>
           <p:cNvSpPr txBox="1"/>
           <p:nvPr/>
         </p:nvSpPr>
@@ -9545,7 +12151,7 @@
       </p:sp>
       <p:sp>
         <p:nvSpPr>
-          <p:cNvPr id="195" name="" descr="{&quot;isTemplate&quot;:true,&quot;type&quot;:&quot;text&quot;}"/>
+          <p:cNvPr id="254" name="" descr="{&quot;isTemplate&quot;:true,&quot;type&quot;:&quot;text&quot;}"/>
           <p:cNvSpPr txBox="1"/>
           <p:nvPr/>
         </p:nvSpPr>
@@ -9580,7 +12186,7 @@
       </p:sp>
       <p:sp>
         <p:nvSpPr>
-          <p:cNvPr id="196" name="" descr="{&quot;isTemplate&quot;:true,&quot;type&quot;:&quot;text&quot;}"/>
+          <p:cNvPr id="255" name="" descr="{&quot;isTemplate&quot;:true,&quot;type&quot;:&quot;text&quot;}"/>
           <p:cNvSpPr txBox="1"/>
           <p:nvPr/>
         </p:nvSpPr>
@@ -9665,7 +12271,7 @@
       </p:sp>
       <p:sp>
         <p:nvSpPr>
-          <p:cNvPr id="197" name=""/>
+          <p:cNvPr id="256" name=""/>
           <p:cNvSpPr/>
           <p:nvPr/>
         </p:nvSpPr>
@@ -9698,7 +12304,7 @@
       </p:sp>
       <p:sp>
         <p:nvSpPr>
-          <p:cNvPr id="198" name="" descr="{&quot;isTemplate&quot;:true,&quot;type&quot;:&quot;text&quot;}"/>
+          <p:cNvPr id="257" name="" descr="{&quot;isTemplate&quot;:true,&quot;type&quot;:&quot;text&quot;}"/>
           <p:cNvSpPr txBox="1"/>
           <p:nvPr/>
         </p:nvSpPr>
@@ -9733,7 +12339,7 @@
       </p:sp>
       <p:sp>
         <p:nvSpPr>
-          <p:cNvPr id="199" name=""/>
+          <p:cNvPr id="258" name=""/>
           <p:cNvSpPr/>
           <p:nvPr/>
         </p:nvSpPr>
@@ -9761,7 +12367,7 @@
       </p:sp>
       <p:sp>
         <p:nvSpPr>
-          <p:cNvPr id="200" name="" descr="{&quot;isTemplate&quot;:true,&quot;type&quot;:&quot;text&quot;}"/>
+          <p:cNvPr id="259" name="" descr="{&quot;isTemplate&quot;:true,&quot;type&quot;:&quot;text&quot;}"/>
           <p:cNvSpPr txBox="1"/>
           <p:nvPr/>
         </p:nvSpPr>
@@ -9801,7 +12407,7 @@
       </p:sp>
       <p:sp>
         <p:nvSpPr>
-          <p:cNvPr id="201" name="" descr="{&quot;isTemplate&quot;:true,&quot;type&quot;:&quot;text&quot;}"/>
+          <p:cNvPr id="260" name="" descr="{&quot;isTemplate&quot;:true,&quot;type&quot;:&quot;text&quot;}"/>
           <p:cNvSpPr txBox="1"/>
           <p:nvPr/>
         </p:nvSpPr>
@@ -9836,7 +12442,7 @@
       </p:sp>
       <p:sp>
         <p:nvSpPr>
-          <p:cNvPr id="202" name="" descr="{&quot;isTemplate&quot;:true,&quot;type&quot;:&quot;text&quot;}"/>
+          <p:cNvPr id="261" name="" descr="{&quot;isTemplate&quot;:true,&quot;type&quot;:&quot;text&quot;}"/>
           <p:cNvSpPr txBox="1"/>
           <p:nvPr/>
         </p:nvSpPr>
@@ -9931,7 +12537,7 @@
       </p:sp>
       <p:sp>
         <p:nvSpPr>
-          <p:cNvPr id="203" name="" descr="{&quot;isTemplate&quot;:true,&quot;type&quot;:&quot;text&quot;}"/>
+          <p:cNvPr id="262" name="" descr="{&quot;isTemplate&quot;:true,&quot;type&quot;:&quot;text&quot;}"/>
           <p:cNvSpPr txBox="1"/>
           <p:nvPr/>
         </p:nvSpPr>
@@ -9966,7 +12572,7 @@
       </p:sp>
       <p:sp>
         <p:nvSpPr>
-          <p:cNvPr id="204" name="" descr="{&quot;isTemplate&quot;:true,&quot;type&quot;:&quot;text&quot;}"/>
+          <p:cNvPr id="263" name="" descr="{&quot;isTemplate&quot;:true,&quot;type&quot;:&quot;text&quot;}"/>
           <p:cNvSpPr txBox="1"/>
           <p:nvPr/>
         </p:nvSpPr>
@@ -10051,7 +12657,7 @@
       </p:sp>
       <p:sp>
         <p:nvSpPr>
-          <p:cNvPr id="205" name="" descr="{&quot;isTemplate&quot;:true,&quot;type&quot;:&quot;text&quot;}"/>
+          <p:cNvPr id="264" name="" descr="{&quot;isTemplate&quot;:true,&quot;type&quot;:&quot;text&quot;}"/>
           <p:cNvSpPr txBox="1"/>
           <p:nvPr/>
         </p:nvSpPr>
@@ -10106,7 +12712,7 @@
       </p:sp>
       <p:sp>
         <p:nvSpPr>
-          <p:cNvPr id="206" name="" descr="{&quot;isTemplate&quot;:true,&quot;type&quot;:&quot;text&quot;}"/>
+          <p:cNvPr id="265" name="" descr="{&quot;isTemplate&quot;:true,&quot;type&quot;:&quot;text&quot;}"/>
           <p:cNvSpPr txBox="1"/>
           <p:nvPr/>
         </p:nvSpPr>
@@ -10151,7 +12757,7 @@
       </p:sp>
       <p:sp>
         <p:nvSpPr>
-          <p:cNvPr id="207" name="" descr="{&quot;isTemplate&quot;:true,&quot;type&quot;:&quot;text&quot;}"/>
+          <p:cNvPr id="266" name="" descr="{&quot;isTemplate&quot;:true,&quot;type&quot;:&quot;text&quot;}"/>
           <p:cNvSpPr txBox="1"/>
           <p:nvPr/>
         </p:nvSpPr>
@@ -10206,7 +12812,7 @@
       </p:sp>
       <p:sp>
         <p:nvSpPr>
-          <p:cNvPr id="208" name="" descr="{&quot;isTemplate&quot;:true,&quot;type&quot;:&quot;text&quot;}"/>
+          <p:cNvPr id="267" name="" descr="{&quot;isTemplate&quot;:true,&quot;type&quot;:&quot;text&quot;}"/>
           <p:cNvSpPr txBox="1"/>
           <p:nvPr/>
         </p:nvSpPr>
@@ -10311,7 +12917,7 @@
       </p:sp>
       <p:sp>
         <p:nvSpPr>
-          <p:cNvPr id="209" name="" descr="{&quot;isTemplate&quot;:true,&quot;type&quot;:&quot;text&quot;}"/>
+          <p:cNvPr id="268" name="" descr="{&quot;isTemplate&quot;:true,&quot;type&quot;:&quot;text&quot;}"/>
           <p:cNvSpPr txBox="1"/>
           <p:nvPr/>
         </p:nvSpPr>
@@ -10346,7 +12952,7 @@
       </p:sp>
       <p:sp>
         <p:nvSpPr>
-          <p:cNvPr id="210" name="" descr="{&quot;isTemplate&quot;:true,&quot;type&quot;:&quot;text&quot;}"/>
+          <p:cNvPr id="269" name="" descr="{&quot;isTemplate&quot;:true,&quot;type&quot;:&quot;text&quot;}"/>
           <p:cNvSpPr txBox="1"/>
           <p:nvPr/>
         </p:nvSpPr>
@@ -10441,7 +13047,7 @@
       </p:sp>
       <p:sp>
         <p:nvSpPr>
-          <p:cNvPr id="211" name="" descr="{&quot;isTemplate&quot;:true,&quot;type&quot;:&quot;text&quot;}"/>
+          <p:cNvPr id="270" name="" descr="{&quot;isTemplate&quot;:true,&quot;type&quot;:&quot;text&quot;}"/>
           <p:cNvSpPr txBox="1"/>
           <p:nvPr/>
         </p:nvSpPr>
@@ -10476,7 +13082,7 @@
       </p:sp>
       <p:sp>
         <p:nvSpPr>
-          <p:cNvPr id="212" name="" descr="{&quot;isTemplate&quot;:true,&quot;type&quot;:&quot;text&quot;}"/>
+          <p:cNvPr id="271" name="" descr="{&quot;isTemplate&quot;:true,&quot;type&quot;:&quot;text&quot;}"/>
           <p:cNvSpPr txBox="1"/>
           <p:nvPr/>
         </p:nvSpPr>
@@ -10561,7 +13167,7 @@
       </p:sp>
       <p:sp>
         <p:nvSpPr>
-          <p:cNvPr id="213" name=""/>
+          <p:cNvPr id="272" name=""/>
           <p:cNvSpPr/>
           <p:nvPr/>
         </p:nvSpPr>
@@ -10594,7 +13200,7 @@
       </p:sp>
       <p:sp>
         <p:nvSpPr>
-          <p:cNvPr id="214" name="" descr="{&quot;isTemplate&quot;:true,&quot;type&quot;:&quot;text&quot;}"/>
+          <p:cNvPr id="273" name="" descr="{&quot;isTemplate&quot;:true,&quot;type&quot;:&quot;text&quot;}"/>
           <p:cNvSpPr txBox="1"/>
           <p:nvPr/>
         </p:nvSpPr>
@@ -10629,7 +13235,7 @@
       </p:sp>
       <p:sp>
         <p:nvSpPr>
-          <p:cNvPr id="215" name=""/>
+          <p:cNvPr id="274" name=""/>
           <p:cNvSpPr/>
           <p:nvPr/>
         </p:nvSpPr>
@@ -10657,7 +13263,7 @@
       </p:sp>
       <p:sp>
         <p:nvSpPr>
-          <p:cNvPr id="216" name="" descr="{&quot;isTemplate&quot;:true,&quot;type&quot;:&quot;text&quot;}"/>
+          <p:cNvPr id="275" name="" descr="{&quot;isTemplate&quot;:true,&quot;type&quot;:&quot;text&quot;}"/>
           <p:cNvSpPr txBox="1"/>
           <p:nvPr/>
         </p:nvSpPr>
@@ -10697,7 +13303,7 @@
       </p:sp>
       <p:sp>
         <p:nvSpPr>
-          <p:cNvPr id="217" name="" descr="{&quot;isTemplate&quot;:true,&quot;type&quot;:&quot;text&quot;}"/>
+          <p:cNvPr id="276" name="" descr="{&quot;isTemplate&quot;:true,&quot;type&quot;:&quot;text&quot;}"/>
           <p:cNvSpPr txBox="1"/>
           <p:nvPr/>
         </p:nvSpPr>
@@ -10732,7 +13338,7 @@
       </p:sp>
       <p:sp>
         <p:nvSpPr>
-          <p:cNvPr id="218" name="" descr="{&quot;isTemplate&quot;:true,&quot;type&quot;:&quot;text&quot;}"/>
+          <p:cNvPr id="277" name="" descr="{&quot;isTemplate&quot;:true,&quot;type&quot;:&quot;text&quot;}"/>
           <p:cNvSpPr txBox="1"/>
           <p:nvPr/>
         </p:nvSpPr>
@@ -10767,7 +13373,7 @@
       </p:sp>
       <p:sp>
         <p:nvSpPr>
-          <p:cNvPr id="219" name="" descr="{&quot;isTemplate&quot;:true,&quot;type&quot;:&quot;text&quot;}"/>
+          <p:cNvPr id="278" name="" descr="{&quot;isTemplate&quot;:true,&quot;type&quot;:&quot;text&quot;}"/>
           <p:cNvSpPr txBox="1"/>
           <p:nvPr/>
         </p:nvSpPr>
@@ -10842,7 +13448,7 @@
       </p:sp>
       <p:sp>
         <p:nvSpPr>
-          <p:cNvPr id="220" name="" descr="{&quot;isTemplate&quot;:true,&quot;type&quot;:&quot;text&quot;}"/>
+          <p:cNvPr id="279" name="" descr="{&quot;isTemplate&quot;:true,&quot;type&quot;:&quot;text&quot;}"/>
           <p:cNvSpPr txBox="1"/>
           <p:nvPr/>
         </p:nvSpPr>
@@ -10897,7 +13503,7 @@
       </p:sp>
       <p:sp>
         <p:nvSpPr>
-          <p:cNvPr id="221" name="" descr="{&quot;isTemplate&quot;:true,&quot;type&quot;:&quot;text&quot;}"/>
+          <p:cNvPr id="280" name="" descr="{&quot;isTemplate&quot;:true,&quot;type&quot;:&quot;text&quot;}"/>
           <p:cNvSpPr txBox="1"/>
           <p:nvPr/>
         </p:nvSpPr>
@@ -10932,7 +13538,7 @@
       </p:sp>
       <p:sp>
         <p:nvSpPr>
-          <p:cNvPr id="222" name="" descr="{&quot;isTemplate&quot;:true,&quot;type&quot;:&quot;text&quot;}"/>
+          <p:cNvPr id="281" name="" descr="{&quot;isTemplate&quot;:true,&quot;type&quot;:&quot;text&quot;}"/>
           <p:cNvSpPr txBox="1"/>
           <p:nvPr/>
         </p:nvSpPr>
@@ -11007,7 +13613,7 @@
       </p:sp>
       <p:sp>
         <p:nvSpPr>
-          <p:cNvPr id="223" name="" descr="{&quot;isTemplate&quot;:true,&quot;type&quot;:&quot;text&quot;}"/>
+          <p:cNvPr id="282" name="" descr="{&quot;isTemplate&quot;:true,&quot;type&quot;:&quot;text&quot;}"/>
           <p:cNvSpPr txBox="1"/>
           <p:nvPr/>
         </p:nvSpPr>
@@ -11042,7 +13648,7 @@
       </p:sp>
       <p:sp>
         <p:nvSpPr>
-          <p:cNvPr id="224" name="" descr="{&quot;isTemplate&quot;:true,&quot;type&quot;:&quot;text&quot;}"/>
+          <p:cNvPr id="283" name="" descr="{&quot;isTemplate&quot;:true,&quot;type&quot;:&quot;text&quot;}"/>
           <p:cNvSpPr txBox="1"/>
           <p:nvPr/>
         </p:nvSpPr>
@@ -11097,7 +13703,7 @@
       </p:sp>
       <p:sp>
         <p:nvSpPr>
-          <p:cNvPr id="225" name=""/>
+          <p:cNvPr id="284" name=""/>
           <p:cNvSpPr/>
           <p:nvPr/>
         </p:nvSpPr>
@@ -11131,7 +13737,7 @@
       </p:sp>
       <p:sp>
         <p:nvSpPr>
-          <p:cNvPr id="226" name="" descr="{&quot;isTemplate&quot;:true,&quot;type&quot;:&quot;text&quot;}"/>
+          <p:cNvPr id="285" name="" descr="{&quot;isTemplate&quot;:true,&quot;type&quot;:&quot;text&quot;}"/>
           <p:cNvSpPr txBox="1"/>
           <p:nvPr/>
         </p:nvSpPr>
@@ -11166,7 +13772,7 @@
       </p:sp>
       <p:sp>
         <p:nvSpPr>
-          <p:cNvPr id="227" name="" descr="{&quot;isTemplate&quot;:true,&quot;type&quot;:&quot;text&quot;}"/>
+          <p:cNvPr id="286" name="" descr="{&quot;isTemplate&quot;:true,&quot;type&quot;:&quot;text&quot;}"/>
           <p:cNvSpPr txBox="1"/>
           <p:nvPr/>
         </p:nvSpPr>
@@ -11201,7 +13807,7 @@
       </p:sp>
       <p:sp>
         <p:nvSpPr>
-          <p:cNvPr id="228" name="" descr="{&quot;isTemplate&quot;:true,&quot;type&quot;:&quot;text&quot;}"/>
+          <p:cNvPr id="287" name="" descr="{&quot;isTemplate&quot;:true,&quot;type&quot;:&quot;text&quot;}"/>
           <p:cNvSpPr txBox="1"/>
           <p:nvPr/>
         </p:nvSpPr>
@@ -11286,7 +13892,7 @@
       </p:sp>
       <p:sp>
         <p:nvSpPr>
-          <p:cNvPr id="229" name="" descr="{&quot;isTemplate&quot;:true,&quot;type&quot;:&quot;text&quot;}"/>
+          <p:cNvPr id="288" name="" descr="{&quot;isTemplate&quot;:true,&quot;type&quot;:&quot;text&quot;}"/>
           <p:cNvSpPr txBox="1"/>
           <p:nvPr/>
         </p:nvSpPr>
@@ -11321,7 +13927,7 @@
       </p:sp>
       <p:sp>
         <p:nvSpPr>
-          <p:cNvPr id="230" name="" descr="{&quot;isTemplate&quot;:true,&quot;type&quot;:&quot;text&quot;}"/>
+          <p:cNvPr id="289" name="" descr="{&quot;isTemplate&quot;:true,&quot;type&quot;:&quot;text&quot;}"/>
           <p:cNvSpPr txBox="1"/>
           <p:nvPr/>
         </p:nvSpPr>
@@ -11382,7 +13988,7 @@
       </p:sp>
       <p:sp>
         <p:nvSpPr>
-          <p:cNvPr id="231" name="" descr="{&quot;isTemplate&quot;:true,&quot;type&quot;:&quot;text&quot;}"/>
+          <p:cNvPr id="290" name="" descr="{&quot;isTemplate&quot;:true,&quot;type&quot;:&quot;text&quot;}"/>
           <p:cNvSpPr txBox="1"/>
           <p:nvPr/>
         </p:nvSpPr>
@@ -11417,7 +14023,7 @@
       </p:sp>
       <p:sp>
         <p:nvSpPr>
-          <p:cNvPr id="232" name="" descr="{&quot;isTemplate&quot;:true,&quot;type&quot;:&quot;text&quot;}"/>
+          <p:cNvPr id="291" name="" descr="{&quot;isTemplate&quot;:true,&quot;type&quot;:&quot;text&quot;}"/>
           <p:cNvSpPr txBox="1"/>
           <p:nvPr/>
         </p:nvSpPr>
@@ -11454,7 +14060,7 @@
       </p:sp>
       <p:sp>
         <p:nvSpPr>
-          <p:cNvPr id="233" name="" descr="{&quot;isTemplate&quot;:true,&quot;type&quot;:&quot;text&quot;}"/>
+          <p:cNvPr id="292" name="" descr="{&quot;isTemplate&quot;:true,&quot;type&quot;:&quot;text&quot;}"/>
           <p:cNvSpPr txBox="1"/>
           <p:nvPr/>
         </p:nvSpPr>
@@ -11489,7 +14095,7 @@
       </p:sp>
       <p:sp>
         <p:nvSpPr>
-          <p:cNvPr id="234" name="" descr="{&quot;isTemplate&quot;:true,&quot;type&quot;:&quot;text&quot;}"/>
+          <p:cNvPr id="293" name="" descr="{&quot;isTemplate&quot;:true,&quot;type&quot;:&quot;text&quot;}"/>
           <p:cNvSpPr txBox="1"/>
           <p:nvPr/>
         </p:nvSpPr>
@@ -11538,7 +14144,7 @@
       </p:sp>
       <p:sp>
         <p:nvSpPr>
-          <p:cNvPr id="235" name="" descr="{&quot;isTemplate&quot;:true,&quot;type&quot;:&quot;text&quot;}"/>
+          <p:cNvPr id="294" name="" descr="{&quot;isTemplate&quot;:true,&quot;type&quot;:&quot;text&quot;}"/>
           <p:cNvSpPr txBox="1"/>
           <p:nvPr/>
         </p:nvSpPr>
@@ -11573,7 +14179,7 @@
       </p:sp>
       <p:sp>
         <p:nvSpPr>
-          <p:cNvPr id="236" name="" descr="{&quot;isTemplate&quot;:true,&quot;type&quot;:&quot;text&quot;}"/>
+          <p:cNvPr id="295" name="" descr="{&quot;isTemplate&quot;:true,&quot;type&quot;:&quot;text&quot;}"/>
           <p:cNvSpPr txBox="1"/>
           <p:nvPr/>
         </p:nvSpPr>
@@ -11658,7 +14264,7 @@
       </p:sp>
       <p:sp>
         <p:nvSpPr>
-          <p:cNvPr id="237" name=""/>
+          <p:cNvPr id="296" name=""/>
           <p:cNvSpPr/>
           <p:nvPr/>
         </p:nvSpPr>
@@ -11700,7 +14306,7 @@
       </p:sp>
       <p:sp>
         <p:nvSpPr>
-          <p:cNvPr id="238" name="" descr="{&quot;isTemplate&quot;:true,&quot;type&quot;:&quot;text&quot;}"/>
+          <p:cNvPr id="297" name="" descr="{&quot;isTemplate&quot;:true,&quot;type&quot;:&quot;text&quot;}"/>
           <p:cNvSpPr txBox="1"/>
           <p:nvPr/>
         </p:nvSpPr>
@@ -11737,7 +14343,7 @@
       </p:sp>
       <p:sp>
         <p:nvSpPr>
-          <p:cNvPr id="239" name=""/>
+          <p:cNvPr id="298" name=""/>
           <p:cNvSpPr/>
           <p:nvPr/>
         </p:nvSpPr>
@@ -11770,7 +14376,7 @@
       </p:sp>
       <p:sp>
         <p:nvSpPr>
-          <p:cNvPr id="240" name="" descr="{&quot;isTemplate&quot;:true,&quot;type&quot;:&quot;text&quot;}"/>
+          <p:cNvPr id="299" name="" descr="{&quot;isTemplate&quot;:true,&quot;type&quot;:&quot;text&quot;}"/>
           <p:cNvSpPr txBox="1"/>
           <p:nvPr/>
         </p:nvSpPr>
@@ -11805,7 +14411,7 @@
       </p:sp>
       <p:sp>
         <p:nvSpPr>
-          <p:cNvPr id="241" name="" descr="{&quot;isTemplate&quot;:true,&quot;type&quot;:&quot;text&quot;}"/>
+          <p:cNvPr id="300" name="" descr="{&quot;isTemplate&quot;:true,&quot;type&quot;:&quot;text&quot;}"/>
           <p:cNvSpPr txBox="1"/>
           <p:nvPr/>
         </p:nvSpPr>
@@ -11840,7 +14446,7 @@
       </p:sp>
       <p:sp>
         <p:nvSpPr>
-          <p:cNvPr id="242" name="" descr="{&quot;isTemplate&quot;:true,&quot;type&quot;:&quot;text&quot;}"/>
+          <p:cNvPr id="301" name="" descr="{&quot;isTemplate&quot;:true,&quot;type&quot;:&quot;text&quot;}"/>
           <p:cNvSpPr txBox="1"/>
           <p:nvPr/>
         </p:nvSpPr>
@@ -11861,7 +14467,7 @@
       </p:sp>
       <p:sp>
         <p:nvSpPr>
-          <p:cNvPr id="243" name="" descr="{&quot;isTemplate&quot;:true,&quot;type&quot;:&quot;text&quot;}"/>
+          <p:cNvPr id="302" name="" descr="{&quot;isTemplate&quot;:true,&quot;type&quot;:&quot;text&quot;}"/>
           <p:cNvSpPr txBox="1"/>
           <p:nvPr/>
         </p:nvSpPr>
@@ -11906,7 +14512,7 @@
       </p:sp>
       <p:sp>
         <p:nvSpPr>
-          <p:cNvPr id="244" name=""/>
+          <p:cNvPr id="303" name=""/>
           <p:cNvSpPr/>
           <p:nvPr/>
         </p:nvSpPr>
@@ -11948,7 +14554,7 @@
       </p:sp>
       <p:sp>
         <p:nvSpPr>
-          <p:cNvPr id="245" name="" descr="{&quot;isTemplate&quot;:true,&quot;type&quot;:&quot;text&quot;}"/>
+          <p:cNvPr id="304" name="" descr="{&quot;isTemplate&quot;:true,&quot;type&quot;:&quot;text&quot;}"/>
           <p:cNvSpPr txBox="1"/>
           <p:nvPr/>
         </p:nvSpPr>
@@ -12005,7 +14611,7 @@
       </p:sp>
       <p:sp>
         <p:nvSpPr>
-          <p:cNvPr id="246" name="" descr="{&quot;isTemplate&quot;:true,&quot;type&quot;:&quot;text&quot;}"/>
+          <p:cNvPr id="305" name="" descr="{&quot;isTemplate&quot;:true,&quot;type&quot;:&quot;text&quot;}"/>
           <p:cNvSpPr txBox="1"/>
           <p:nvPr/>
         </p:nvSpPr>
@@ -12060,7 +14666,7 @@
       </p:sp>
       <p:sp>
         <p:nvSpPr>
-          <p:cNvPr id="247" name="" descr="{&quot;isTemplate&quot;:true,&quot;type&quot;:&quot;text&quot;}"/>
+          <p:cNvPr id="306" name="" descr="{&quot;isTemplate&quot;:true,&quot;type&quot;:&quot;text&quot;}"/>
           <p:cNvSpPr txBox="1"/>
           <p:nvPr/>
         </p:nvSpPr>
@@ -12087,7 +14693,7 @@
                 <a:latin typeface="Microsoft YaHei"/>
                 <a:ea typeface="Microsoft YaHei"/>
               </a:rPr>
-              <a:t>14 / 15</a:t>
+              <a:t>18 / 19</a:t>
             </a:r>
             <a:endParaRPr/>
           </a:p>
@@ -12098,12 +14704,12 @@
 </p:sld>
 </file>
 
-<file path=ppt/slides/slide15.xml><?xml version="1.0" encoding="utf-8"?>
+<file path=ppt/slides/slide19.xml><?xml version="1.0" encoding="utf-8"?>
 <p:sld xmlns:p="http://schemas.openxmlformats.org/presentationml/2006/main" xmlns:a="http://schemas.openxmlformats.org/drawingml/2006/main">
   <p:cSld>
     <p:spTree>
       <p:nvGrpSpPr>
-        <p:cNvPr id="248" name="" descr="&lt;Slide style={{ width: '1280px', height: '720px', background: 'linear-gradient(135deg, #172133 0%, #22395E 100%)', position: 'relative' }}&gt;&#10;  &lt;div style={{ position: 'absolute', inset: 0, display: 'flex', flexDirection: 'column', alignItems: 'center', justifyContent: 'center', color: '#FBFCFA' }}&gt;&#10;    &lt;div style={{ color: '#BD9B56', fontSize: 26, marginBottom: 22, letterSpacing: '0.4em' }}&gt;◆&lt;/div&gt;&#10;    &lt;h1 style={{ fontSize: 56, fontWeight: 'bold', margin: 0, color: '#FBFCFA', letterSpacing: '0.12em' }}&gt;感谢聆听&lt;/h1&gt;&#10;    &lt;div style={{ width: 80, height: 3, background: '#BD9B56', marginTop: 26, marginBottom: 26 }} /&gt;&#10;    &lt;p style={{ fontSize: 20, color: 'rgba(189,155,86,0.9)', margin: 0, letterSpacing: '0.15em' }}&gt;让 AI 真正走进社区&lt;/p&gt;&#10;    &lt;div style={{ marginTop: 56, padding: '20px 40px', background: 'rgba(189,155,86,0.08)', border: '1px solid rgba(189,155,86,0.3)', borderRadius: 8, textAlign: 'center' }}&gt;&#10;      &lt;div style={{ fontSize: 12, color: '#BD9B56', letterSpacing: '0.25em', marginBottom: 10 }}&gt;ONLINE DEMO&lt;/div&gt;&#10;      &lt;div style={{ fontSize: 17, color: '#FBFCFA', fontFamily: 'Inter, sans-serif', marginBottom: 4 }}&gt;http://119.91.236.85&lt;/div&gt;&#10;      &lt;div style={{ fontSize: 12, color: 'rgba(251,252,250,0.7)' }}&gt;业主 guoyi378 · 物业 mayun420 · 维修 yangfei423（密码 123456）&lt;/div&gt;&#10;    &lt;/div&gt;&#10;  &lt;/div&gt;&#10;  &lt;div style={{ position: 'absolute', left: 64, bottom: 28, color: '#BD9B56', fontSize: 13, letterSpacing: '0.12em' }}&gt;云溪花园 · 智慧社区&lt;/div&gt;&#10;  &lt;div style={{ position: 'absolute', right: 28, bottom: 28, color: 'rgba(189,155,86,0.75)', fontSize: 13 }}&gt;15 / 15&lt;/div&gt;&#10;&lt;/Slide&gt;"/>
+        <p:cNvPr id="307" name="" descr="&lt;Slide style={{ width: '1280px', height: '720px', background: 'linear-gradient(135deg, #172133 0%, #22395E 100%)', position: 'relative' }}&gt;&#13;&#10;  &lt;div style={{ position: 'absolute', inset: 0, display: 'flex', flexDirection: 'column', alignItems: 'center', justifyContent: 'center', color: '#FBFCFA' }}&gt;&#13;&#10;    &lt;div style={{ color: '#BD9B56', fontSize: 26, marginBottom: 22, letterSpacing: '0.4em' }}&gt;◆&lt;/div&gt;&#13;&#10;    &lt;h1 style={{ fontSize: 56, fontWeight: 'bold', margin: 0, color: '#FBFCFA', letterSpacing: '0.12em' }}&gt;感谢聆听&lt;/h1&gt;&#13;&#10;    &lt;div style={{ width: 80, height: 3, background: '#BD9B56', marginTop: 26, marginBottom: 26 }} /&gt;&#13;&#10;    &lt;p style={{ fontSize: 20, color: 'rgba(189,155,86,0.9)', margin: 0, letterSpacing: '0.15em' }}&gt;让 AI 真正走进社区&lt;/p&gt;&#13;&#10;    &lt;div style={{ marginTop: 56, padding: '20px 40px', background: 'rgba(189,155,86,0.08)', border: '1px solid rgba(189,155,86,0.3)', borderRadius: 8, textAlign: 'center' }}&gt;&#13;&#10;      &lt;div style={{ fontSize: 12, color: '#BD9B56', letterSpacing: '0.25em', marginBottom: 10 }}&gt;ONLINE DEMO&lt;/div&gt;&#13;&#10;      &lt;div style={{ fontSize: 17, color: '#FBFCFA', fontFamily: 'Inter, sans-serif', marginBottom: 4 }}&gt;http://119.91.236.85&lt;/div&gt;&#13;&#10;      &lt;div style={{ fontSize: 12, color: 'rgba(251,252,250,0.7)' }}&gt;业主 guoyi378 · 物业 mayun420 · 维修 yangfei423（密码 123456）&lt;/div&gt;&#13;&#10;    &lt;/div&gt;&#13;&#10;  &lt;/div&gt;&#13;&#10;  &lt;div style={{ position: 'absolute', left: 64, bottom: 28, color: '#BD9B56', fontSize: 13, letterSpacing: '0.12em' }}&gt;云溪花园 · 智慧社区&lt;/div&gt;&#13;&#10;  &lt;div style={{ position: 'absolute', right: 28, bottom: 28, color: 'rgba(189,155,86,0.75)', fontSize: 13 }}&gt;19 / 19&lt;/div&gt;&#13;&#10;&lt;/Slide&gt;"/>
         <p:cNvGrpSpPr/>
         <p:nvPr/>
       </p:nvGrpSpPr>
@@ -12117,7 +14723,7 @@
       </p:grpSpPr>
       <p:sp>
         <p:nvSpPr>
-          <p:cNvPr id="249" name=""/>
+          <p:cNvPr id="308" name=""/>
           <p:cNvSpPr/>
           <p:nvPr/>
         </p:nvSpPr>
@@ -12149,7 +14755,7 @@
       </p:sp>
       <p:sp>
         <p:nvSpPr>
-          <p:cNvPr id="250" name="" descr="{&quot;isTemplate&quot;:true,&quot;type&quot;:&quot;text&quot;}"/>
+          <p:cNvPr id="309" name="" descr="{&quot;isTemplate&quot;:true,&quot;type&quot;:&quot;text&quot;}"/>
           <p:cNvSpPr txBox="1"/>
           <p:nvPr/>
         </p:nvSpPr>
@@ -12184,7 +14790,7 @@
       </p:sp>
       <p:sp>
         <p:nvSpPr>
-          <p:cNvPr id="251" name="" descr="{&quot;isTemplate&quot;:true,&quot;type&quot;:&quot;text&quot;}"/>
+          <p:cNvPr id="310" name="" descr="{&quot;isTemplate&quot;:true,&quot;type&quot;:&quot;text&quot;}"/>
           <p:cNvSpPr txBox="1"/>
           <p:nvPr/>
         </p:nvSpPr>
@@ -12219,7 +14825,7 @@
       </p:sp>
       <p:sp>
         <p:nvSpPr>
-          <p:cNvPr id="252" name=""/>
+          <p:cNvPr id="311" name=""/>
           <p:cNvSpPr/>
           <p:nvPr/>
         </p:nvSpPr>
@@ -12243,7 +14849,7 @@
       </p:sp>
       <p:sp>
         <p:nvSpPr>
-          <p:cNvPr id="253" name="" descr="{&quot;isTemplate&quot;:true,&quot;type&quot;:&quot;text&quot;}"/>
+          <p:cNvPr id="312" name="" descr="{&quot;isTemplate&quot;:true,&quot;type&quot;:&quot;text&quot;}"/>
           <p:cNvSpPr txBox="1"/>
           <p:nvPr/>
         </p:nvSpPr>
@@ -12304,7 +14910,7 @@
       </p:sp>
       <p:sp>
         <p:nvSpPr>
-          <p:cNvPr id="254" name=""/>
+          <p:cNvPr id="313" name=""/>
           <p:cNvSpPr/>
           <p:nvPr/>
         </p:nvSpPr>
@@ -12339,7 +14945,7 @@
       </p:sp>
       <p:sp>
         <p:nvSpPr>
-          <p:cNvPr id="255" name="" descr="{&quot;isTemplate&quot;:true,&quot;type&quot;:&quot;text&quot;}"/>
+          <p:cNvPr id="314" name="" descr="{&quot;isTemplate&quot;:true,&quot;type&quot;:&quot;text&quot;}"/>
           <p:cNvSpPr txBox="1"/>
           <p:nvPr/>
         </p:nvSpPr>
@@ -12374,7 +14980,7 @@
       </p:sp>
       <p:sp>
         <p:nvSpPr>
-          <p:cNvPr id="256" name="" descr="{&quot;isTemplate&quot;:true,&quot;type&quot;:&quot;text&quot;}"/>
+          <p:cNvPr id="315" name="" descr="{&quot;isTemplate&quot;:true,&quot;type&quot;:&quot;text&quot;}"/>
           <p:cNvSpPr txBox="1"/>
           <p:nvPr/>
         </p:nvSpPr>
@@ -12409,7 +15015,7 @@
       </p:sp>
       <p:sp>
         <p:nvSpPr>
-          <p:cNvPr id="257" name="" descr="{&quot;isTemplate&quot;:true,&quot;type&quot;:&quot;text&quot;}"/>
+          <p:cNvPr id="316" name="" descr="{&quot;isTemplate&quot;:true,&quot;type&quot;:&quot;text&quot;}"/>
           <p:cNvSpPr txBox="1"/>
           <p:nvPr/>
         </p:nvSpPr>
@@ -12542,7 +15148,7 @@
       </p:sp>
       <p:sp>
         <p:nvSpPr>
-          <p:cNvPr id="258" name="" descr="{&quot;isTemplate&quot;:true,&quot;type&quot;:&quot;text&quot;}"/>
+          <p:cNvPr id="317" name="" descr="{&quot;isTemplate&quot;:true,&quot;type&quot;:&quot;text&quot;}"/>
           <p:cNvSpPr txBox="1"/>
           <p:nvPr/>
         </p:nvSpPr>
@@ -12597,7 +15203,7 @@
       </p:sp>
       <p:sp>
         <p:nvSpPr>
-          <p:cNvPr id="259" name="" descr="{&quot;isTemplate&quot;:true,&quot;type&quot;:&quot;text&quot;}"/>
+          <p:cNvPr id="318" name="" descr="{&quot;isTemplate&quot;:true,&quot;type&quot;:&quot;text&quot;}"/>
           <p:cNvSpPr txBox="1"/>
           <p:nvPr/>
         </p:nvSpPr>
@@ -12626,7 +15232,7 @@
                 <a:latin typeface="Microsoft YaHei"/>
                 <a:ea typeface="Microsoft YaHei"/>
               </a:rPr>
-              <a:t>15 / 15</a:t>
+              <a:t>19 / 19</a:t>
             </a:r>
             <a:endParaRPr/>
           </a:p>
@@ -12642,7 +15248,7 @@
   <p:cSld>
     <p:spTree>
       <p:nvGrpSpPr>
-        <p:cNvPr id="260" name="" descr="&lt;Slide style={{ width: '1280px', height: '720px', background: '#FBFCFA', position: 'relative', padding: '40px 64px', boxSizing: 'border-box', display: 'flex', flexDirection: 'column' }}&gt;&#10;  &lt;div style={{ flexShrink: 0 }}&gt;&#10;    &lt;div style={{ color: '#BD9B56', fontSize: 14, letterSpacing: '0.3em', marginBottom: 10 }}&gt;CONTENTS&lt;/div&gt;&#10;    &lt;h2 style={{ fontSize: 34, fontWeight: 'bold', color: '#172133', margin: 0 }}&gt;目录&lt;/h2&gt;&#10;    &lt;div style={{ width: 64, height: 3, background: '#BD9B56', marginTop: 16 }} /&gt;&#10;  &lt;/div&gt;&#10;  &lt;div style={{ flex: 1, display: 'flex', alignItems: 'center' }}&gt;&#10;    &lt;div style={{ width: '100%', display: 'flex', flexDirection: 'column', gap: 20 }}&gt;&#10;      &lt;div style={{ display: 'flex', alignItems: 'center', gap: 28, paddingBottom: 18, borderBottom: '1px solid rgba(34,57,94,0.12)' }}&gt;&#10;        &lt;span style={{ color: '#BD9B56', fontSize: 40, fontWeight: 'bold', lineHeight: 1, minWidth: 72, fontFamily: 'Inter, sans-serif' }}&gt;01&lt;/span&gt;&#10;        &lt;div style={{ flex: 1 }}&gt;&#10;          &lt;div style={{ fontSize: 22, fontWeight: 'bold', color: '#172133' }}&gt;项目背景与规模&lt;/div&gt;&#10;          &lt;div style={{ fontSize: 14, color: '#6b7075', marginTop: 6 }}&gt;传统物业痛点 · 虚拟社区「云溪花园」数据资产&lt;/div&gt;&#10;        &lt;/div&gt;&#10;      &lt;/div&gt;&#10;      &lt;div style={{ display: 'flex', alignItems: 'center', gap: 28, paddingBottom: 18, borderBottom: '1px solid rgba(34,57,94,0.12)' }}&gt;&#10;        &lt;span style={{ color: '#BD9B56', fontSize: 40, fontWeight: 'bold', lineHeight: 1, minWidth: 72, fontFamily: 'Inter, sans-serif' }}&gt;02&lt;/span&gt;&#10;        &lt;div style={{ flex: 1 }}&gt;&#10;          &lt;div style={{ fontSize: 22, fontWeight: 'bold', color: '#172133' }}&gt;技术构建过程&lt;/div&gt;&#10;          &lt;div style={{ fontSize: 14, color: '#6b7075', marginTop: 6 }}&gt;数据库设计 → 后端 → 前端 → AI Agent → RAG 知识库&lt;/div&gt;&#10;        &lt;/div&gt;&#10;      &lt;/div&gt;&#10;      &lt;div style={{ display: 'flex', alignItems: 'center', gap: 28, paddingBottom: 18, borderBottom: '1px solid rgba(34,57,94,0.12)' }}&gt;&#10;        &lt;span style={{ color: '#BD9B56', fontSize: 40, fontWeight: 'bold', lineHeight: 1, minWidth: 72, fontFamily: 'Inter, sans-serif' }}&gt;03&lt;/span&gt;&#10;        &lt;div style={{ flex: 1 }}&gt;&#10;          &lt;div style={{ fontSize: 22, fontWeight: 'bold', color: '#172133' }}&gt;成果与验证&lt;/div&gt;&#10;          &lt;div style={{ fontSize: 14, color: '#6b7075', marginTop: 6 }}&gt;三条功能闭环 · 量化评估指标&lt;/div&gt;&#10;        &lt;/div&gt;&#10;      &lt;/div&gt;&#10;      &lt;div style={{ display: 'flex', alignItems: 'center', gap: 28 }}&gt;&#10;        &lt;span style={{ color: '#BD9B56', fontSize: 40, fontWeight: 'bold', lineHeight: 1, minWidth: 72, fontFamily: 'Inter, sans-serif' }}&gt;04&lt;/span&gt;&#10;        &lt;div style={{ flex: 1 }}&gt;&#10;          &lt;div style={{ fontSize: 22, fontWeight: 'bold', color: '#172133' }}&gt;总结与展望&lt;/div&gt;&#10;          &lt;div style={{ fontSize: 14, color: '#6b7075', marginTop: 6 }}&gt;项目价值 · 在线演示入口&lt;/div&gt;&#10;        &lt;/div&gt;&#10;      &lt;/div&gt;&#10;    &lt;/div&gt;&#10;  &lt;/div&gt;&#10;  &lt;div style={{ flexShrink: 0, height: 44, display: 'flex', alignItems: 'flex-end', justifyContent: 'space-between' }}&gt;&#10;    &lt;span style={{ color: '#BD9B56', fontSize: 12, letterSpacing: '0.1em' }}&gt;云溪花园 · 智慧社区&lt;/span&gt;&#10;    &lt;span style={{ color: '#a09b8c', fontSize: 12 }}&gt;02 / 15&lt;/span&gt;&#10;  &lt;/div&gt;&#10;&lt;/Slide&gt;"/>
+        <p:cNvPr id="319" name="" descr="&lt;Slide style={{ width: '1280px', height: '720px', background: '#FBFCFA', position: 'relative', padding: '40px 64px', boxSizing: 'border-box', display: 'flex', flexDirection: 'column' }}&gt;&#13;&#10;  &lt;div style={{ flexShrink: 0 }}&gt;&#13;&#10;    &lt;div style={{ color: '#BD9B56', fontSize: 14, letterSpacing: '0.3em', marginBottom: 10 }}&gt;CONTENTS&lt;/div&gt;&#13;&#10;    &lt;h2 style={{ fontSize: 34, fontWeight: 'bold', color: '#172133', margin: 0 }}&gt;目录&lt;/h2&gt;&#13;&#10;    &lt;div style={{ width: 64, height: 3, background: '#BD9B56', marginTop: 16 }} /&gt;&#13;&#10;  &lt;/div&gt;&#13;&#10;  &lt;div style={{ flex: 1, display: 'flex', alignItems: 'center' }}&gt;&#13;&#10;    &lt;div style={{ width: '100%', display: 'flex', flexDirection: 'column', gap: 20 }}&gt;&#13;&#10;      &lt;div style={{ display: 'flex', alignItems: 'center', gap: 28, paddingBottom: 18, borderBottom: '1px solid rgba(34,57,94,0.12)' }}&gt;&#13;&#10;        &lt;span style={{ color: '#BD9B56', fontSize: 40, fontWeight: 'bold', lineHeight: 1, minWidth: 72, fontFamily: 'Inter, sans-serif' }}&gt;01&lt;/span&gt;&#13;&#10;        &lt;div style={{ flex: 1 }}&gt;&#13;&#10;          &lt;div style={{ fontSize: 22, fontWeight: 'bold', color: '#172133' }}&gt;项目背景与规模&lt;/div&gt;&#13;&#10;          &lt;div style={{ fontSize: 14, color: '#6b7075', marginTop: 6 }}&gt;传统物业痛点 · 虚拟社区「云溪花园」数据资产&lt;/div&gt;&#13;&#10;        &lt;/div&gt;&#13;&#10;      &lt;/div&gt;&#13;&#10;      &lt;div style={{ display: 'flex', alignItems: 'center', gap: 28, paddingBottom: 18, borderBottom: '1px solid rgba(34,57,94,0.12)' }}&gt;&#13;&#10;        &lt;span style={{ color: '#BD9B56', fontSize: 40, fontWeight: 'bold', lineHeight: 1, minWidth: 72, fontFamily: 'Inter, sans-serif' }}&gt;02&lt;/span&gt;&#13;&#10;        &lt;div style={{ flex: 1 }}&gt;&#13;&#10;          &lt;div style={{ fontSize: 22, fontWeight: 'bold', color: '#172133' }}&gt;技术构建过程&lt;/div&gt;&#13;&#10;          &lt;div style={{ fontSize: 14, color: '#6b7075', marginTop: 6 }}&gt;数据库设计 → 后端 → 前端 → AI Agent → RAG 知识库&lt;/div&gt;&#13;&#10;        &lt;/div&gt;&#13;&#10;      &lt;/div&gt;&#13;&#10;      &lt;div style={{ display: 'flex', alignItems: 'center', gap: 28, paddingBottom: 18, borderBottom: '1px solid rgba(34,57,94,0.12)' }}&gt;&#13;&#10;        &lt;span style={{ color: '#BD9B56', fontSize: 40, fontWeight: 'bold', lineHeight: 1, minWidth: 72, fontFamily: 'Inter, sans-serif' }}&gt;03&lt;/span&gt;&#13;&#10;        &lt;div style={{ flex: 1 }}&gt;&#13;&#10;          &lt;div style={{ fontSize: 22, fontWeight: 'bold', color: '#172133' }}&gt;成果与验证&lt;/div&gt;&#13;&#10;          &lt;div style={{ fontSize: 14, color: '#6b7075', marginTop: 6 }}&gt;三条功能闭环 · 量化评估指标&lt;/div&gt;&#13;&#10;        &lt;/div&gt;&#13;&#10;      &lt;/div&gt;&#13;&#10;      &lt;div style={{ display: 'flex', alignItems: 'center', gap: 28 }}&gt;&#13;&#10;        &lt;span style={{ color: '#BD9B56', fontSize: 40, fontWeight: 'bold', lineHeight: 1, minWidth: 72, fontFamily: 'Inter, sans-serif' }}&gt;04&lt;/span&gt;&#13;&#10;        &lt;div style={{ flex: 1 }}&gt;&#13;&#10;          &lt;div style={{ fontSize: 22, fontWeight: 'bold', color: '#172133' }}&gt;总结与展望&lt;/div&gt;&#13;&#10;          &lt;div style={{ fontSize: 14, color: '#6b7075', marginTop: 6 }}&gt;项目价值 · 在线演示入口&lt;/div&gt;&#13;&#10;        &lt;/div&gt;&#13;&#10;      &lt;/div&gt;&#13;&#10;    &lt;/div&gt;&#13;&#10;  &lt;/div&gt;&#13;&#10;  &lt;div style={{ flexShrink: 0, height: 44, display: 'flex', alignItems: 'flex-end', justifyContent: 'space-between' }}&gt;&#13;&#10;    &lt;span style={{ color: '#BD9B56', fontSize: 12, letterSpacing: '0.1em' }}&gt;云溪花园 · 智慧社区&lt;/span&gt;&#13;&#10;    &lt;span style={{ color: '#a09b8c', fontSize: 12 }}&gt;02 / 19&lt;/span&gt;&#13;&#10;  &lt;/div&gt;&#13;&#10;&lt;/Slide&gt;"/>
         <p:cNvGrpSpPr/>
         <p:nvPr/>
       </p:nvGrpSpPr>
@@ -12656,7 +15262,7 @@
       </p:grpSpPr>
       <p:sp>
         <p:nvSpPr>
-          <p:cNvPr id="261" name=""/>
+          <p:cNvPr id="320" name=""/>
           <p:cNvSpPr/>
           <p:nvPr/>
         </p:nvSpPr>
@@ -12680,7 +15286,7 @@
       </p:sp>
       <p:sp>
         <p:nvSpPr>
-          <p:cNvPr id="262" name="" descr="{&quot;isTemplate&quot;:true,&quot;type&quot;:&quot;text&quot;}"/>
+          <p:cNvPr id="321" name="" descr="{&quot;isTemplate&quot;:true,&quot;type&quot;:&quot;text&quot;}"/>
           <p:cNvSpPr txBox="1"/>
           <p:nvPr/>
         </p:nvSpPr>
@@ -12715,7 +15321,7 @@
       </p:sp>
       <p:sp>
         <p:nvSpPr>
-          <p:cNvPr id="263" name="" descr="{&quot;isTemplate&quot;:true,&quot;type&quot;:&quot;text&quot;}"/>
+          <p:cNvPr id="322" name="" descr="{&quot;isTemplate&quot;:true,&quot;type&quot;:&quot;text&quot;}"/>
           <p:cNvSpPr txBox="1"/>
           <p:nvPr/>
         </p:nvSpPr>
@@ -12750,7 +15356,7 @@
       </p:sp>
       <p:sp>
         <p:nvSpPr>
-          <p:cNvPr id="264" name=""/>
+          <p:cNvPr id="323" name=""/>
           <p:cNvSpPr/>
           <p:nvPr/>
         </p:nvSpPr>
@@ -12774,7 +15380,7 @@
       </p:sp>
       <p:sp>
         <p:nvSpPr>
-          <p:cNvPr id="265" name=""/>
+          <p:cNvPr id="324" name=""/>
           <p:cNvSpPr/>
           <p:nvPr/>
         </p:nvSpPr>
@@ -12816,7 +15422,7 @@
       </p:sp>
       <p:sp>
         <p:nvSpPr>
-          <p:cNvPr id="266" name="" descr="{&quot;isTemplate&quot;:true,&quot;type&quot;:&quot;text&quot;}"/>
+          <p:cNvPr id="325" name="" descr="{&quot;isTemplate&quot;:true,&quot;type&quot;:&quot;text&quot;}"/>
           <p:cNvSpPr txBox="1"/>
           <p:nvPr/>
         </p:nvSpPr>
@@ -12851,7 +15457,7 @@
       </p:sp>
       <p:sp>
         <p:nvSpPr>
-          <p:cNvPr id="267" name="" descr="{&quot;isTemplate&quot;:true,&quot;type&quot;:&quot;text&quot;}"/>
+          <p:cNvPr id="326" name="" descr="{&quot;isTemplate&quot;:true,&quot;type&quot;:&quot;text&quot;}"/>
           <p:cNvSpPr txBox="1"/>
           <p:nvPr/>
         </p:nvSpPr>
@@ -12886,7 +15492,7 @@
       </p:sp>
       <p:sp>
         <p:nvSpPr>
-          <p:cNvPr id="268" name="" descr="{&quot;isTemplate&quot;:true,&quot;type&quot;:&quot;text&quot;}"/>
+          <p:cNvPr id="327" name="" descr="{&quot;isTemplate&quot;:true,&quot;type&quot;:&quot;text&quot;}"/>
           <p:cNvSpPr txBox="1"/>
           <p:nvPr/>
         </p:nvSpPr>
@@ -12941,7 +15547,7 @@
       </p:sp>
       <p:sp>
         <p:nvSpPr>
-          <p:cNvPr id="269" name=""/>
+          <p:cNvPr id="328" name=""/>
           <p:cNvSpPr/>
           <p:nvPr/>
         </p:nvSpPr>
@@ -12983,7 +15589,7 @@
       </p:sp>
       <p:sp>
         <p:nvSpPr>
-          <p:cNvPr id="270" name="" descr="{&quot;isTemplate&quot;:true,&quot;type&quot;:&quot;text&quot;}"/>
+          <p:cNvPr id="329" name="" descr="{&quot;isTemplate&quot;:true,&quot;type&quot;:&quot;text&quot;}"/>
           <p:cNvSpPr txBox="1"/>
           <p:nvPr/>
         </p:nvSpPr>
@@ -13018,7 +15624,7 @@
       </p:sp>
       <p:sp>
         <p:nvSpPr>
-          <p:cNvPr id="271" name="" descr="{&quot;isTemplate&quot;:true,&quot;type&quot;:&quot;text&quot;}"/>
+          <p:cNvPr id="330" name="" descr="{&quot;isTemplate&quot;:true,&quot;type&quot;:&quot;text&quot;}"/>
           <p:cNvSpPr txBox="1"/>
           <p:nvPr/>
         </p:nvSpPr>
@@ -13053,7 +15659,7 @@
       </p:sp>
       <p:sp>
         <p:nvSpPr>
-          <p:cNvPr id="272" name="" descr="{&quot;isTemplate&quot;:true,&quot;type&quot;:&quot;text&quot;}"/>
+          <p:cNvPr id="331" name="" descr="{&quot;isTemplate&quot;:true,&quot;type&quot;:&quot;text&quot;}"/>
           <p:cNvSpPr txBox="1"/>
           <p:nvPr/>
         </p:nvSpPr>
@@ -13148,7 +15754,7 @@
       </p:sp>
       <p:sp>
         <p:nvSpPr>
-          <p:cNvPr id="273" name=""/>
+          <p:cNvPr id="332" name=""/>
           <p:cNvSpPr/>
           <p:nvPr/>
         </p:nvSpPr>
@@ -13190,7 +15796,7 @@
       </p:sp>
       <p:sp>
         <p:nvSpPr>
-          <p:cNvPr id="274" name="" descr="{&quot;isTemplate&quot;:true,&quot;type&quot;:&quot;text&quot;}"/>
+          <p:cNvPr id="333" name="" descr="{&quot;isTemplate&quot;:true,&quot;type&quot;:&quot;text&quot;}"/>
           <p:cNvSpPr txBox="1"/>
           <p:nvPr/>
         </p:nvSpPr>
@@ -13225,7 +15831,7 @@
       </p:sp>
       <p:sp>
         <p:nvSpPr>
-          <p:cNvPr id="275" name="" descr="{&quot;isTemplate&quot;:true,&quot;type&quot;:&quot;text&quot;}"/>
+          <p:cNvPr id="334" name="" descr="{&quot;isTemplate&quot;:true,&quot;type&quot;:&quot;text&quot;}"/>
           <p:cNvSpPr txBox="1"/>
           <p:nvPr/>
         </p:nvSpPr>
@@ -13260,7 +15866,7 @@
       </p:sp>
       <p:sp>
         <p:nvSpPr>
-          <p:cNvPr id="276" name="" descr="{&quot;isTemplate&quot;:true,&quot;type&quot;:&quot;text&quot;}"/>
+          <p:cNvPr id="335" name="" descr="{&quot;isTemplate&quot;:true,&quot;type&quot;:&quot;text&quot;}"/>
           <p:cNvSpPr txBox="1"/>
           <p:nvPr/>
         </p:nvSpPr>
@@ -13315,7 +15921,7 @@
       </p:sp>
       <p:sp>
         <p:nvSpPr>
-          <p:cNvPr id="277" name="" descr="{&quot;isTemplate&quot;:true,&quot;type&quot;:&quot;text&quot;}"/>
+          <p:cNvPr id="336" name="" descr="{&quot;isTemplate&quot;:true,&quot;type&quot;:&quot;text&quot;}"/>
           <p:cNvSpPr txBox="1"/>
           <p:nvPr/>
         </p:nvSpPr>
@@ -13350,7 +15956,7 @@
       </p:sp>
       <p:sp>
         <p:nvSpPr>
-          <p:cNvPr id="278" name="" descr="{&quot;isTemplate&quot;:true,&quot;type&quot;:&quot;text&quot;}"/>
+          <p:cNvPr id="337" name="" descr="{&quot;isTemplate&quot;:true,&quot;type&quot;:&quot;text&quot;}"/>
           <p:cNvSpPr txBox="1"/>
           <p:nvPr/>
         </p:nvSpPr>
@@ -13385,7 +15991,7 @@
       </p:sp>
       <p:sp>
         <p:nvSpPr>
-          <p:cNvPr id="279" name="" descr="{&quot;isTemplate&quot;:true,&quot;type&quot;:&quot;text&quot;}"/>
+          <p:cNvPr id="338" name="" descr="{&quot;isTemplate&quot;:true,&quot;type&quot;:&quot;text&quot;}"/>
           <p:cNvSpPr txBox="1"/>
           <p:nvPr/>
         </p:nvSpPr>
@@ -13440,7 +16046,7 @@
       </p:sp>
       <p:sp>
         <p:nvSpPr>
-          <p:cNvPr id="280" name="" descr="{&quot;isTemplate&quot;:true,&quot;type&quot;:&quot;text&quot;}"/>
+          <p:cNvPr id="339" name="" descr="{&quot;isTemplate&quot;:true,&quot;type&quot;:&quot;text&quot;}"/>
           <p:cNvSpPr txBox="1"/>
           <p:nvPr/>
         </p:nvSpPr>
@@ -13495,7 +16101,7 @@
       </p:sp>
       <p:sp>
         <p:nvSpPr>
-          <p:cNvPr id="281" name="" descr="{&quot;isTemplate&quot;:true,&quot;type&quot;:&quot;text&quot;}"/>
+          <p:cNvPr id="340" name="" descr="{&quot;isTemplate&quot;:true,&quot;type&quot;:&quot;text&quot;}"/>
           <p:cNvSpPr txBox="1"/>
           <p:nvPr/>
         </p:nvSpPr>
@@ -13522,7 +16128,7 @@
                 <a:latin typeface="Microsoft YaHei"/>
                 <a:ea typeface="Microsoft YaHei"/>
               </a:rPr>
-              <a:t>02 / 15</a:t>
+              <a:t>02 / 19</a:t>
             </a:r>
             <a:endParaRPr/>
           </a:p>
@@ -13538,7 +16144,7 @@
   <p:cSld>
     <p:spTree>
       <p:nvGrpSpPr>
-        <p:cNvPr id="282" name="" descr="&lt;Slide style={{ width: '1280px', height: '720px', background: '#FBFCFA', position: 'relative', padding: '40px 64px', boxSizing: 'border-box', display: 'flex', flexDirection: 'column' }}&gt;&#10;  &lt;div style={{ flexShrink: 0 }}&gt;&#10;    &lt;div style={{ color: '#BD9B56', fontSize: 13, letterSpacing: '0.25em', marginBottom: 8 }}&gt;01 · 项目背景&lt;/div&gt;&#10;    &lt;h2 style={{ fontSize: 30, fontWeight: 'bold', color: '#172133', margin: 0, lineHeight: 1.3 }}&gt;传统物业的三重困境&lt;/h2&gt;&#10;    &lt;div style={{ fontSize: 14, color: '#6b7075', marginTop: 8 }}&gt;业务、数据、知识「三张皮」，需要用 AI 重新缝合&lt;/div&gt;&#10;  &lt;/div&gt;&#10;  &lt;div style={{ flex: 1, display: 'flex', alignItems: 'center' }}&gt;&#10;    &lt;div style={{ width: '100%', display: 'flex', flexDirection: 'column', gap: 18 }}&gt;&#10;      &lt;div style={{ display: 'flex', gap: 20, background: '#fff', borderRadius: 10, padding: '20px 24px', boxShadow: '0 4px 16px rgba(23,33,51,0.06)', borderLeft: '4px solid #BD9B56' }}&gt;&#10;        &lt;span style={{ color: '#BD9B56', fontSize: 22, lineHeight: 1.2, flexShrink: 0 }}&gt;!&lt;/span&gt;&#10;        &lt;div&gt;&#10;          &lt;div style={{ fontSize: 17, fontWeight: 'bold', color: '#172133', marginBottom: 6 }}&gt;信息孤岛&lt;/div&gt;&#10;          &lt;p style={{ fontSize: 14, color: '#5F5E5A', margin: 0, lineHeight: 1.6 }}&gt;业主报修、费用缴纳、巡检记录分散在多个系统，彼此不打通，物业无法掌握完整的社区运行状态，业主也看不到工单的处理进度。&lt;/p&gt;&#10;        &lt;/div&gt;&#10;      &lt;/div&gt;&#10;      &lt;div style={{ display: 'flex', gap: 20, background: '#fff', borderRadius: 10, padding: '20px 24px', boxShadow: '0 4px 16px rgba(23,33,51,0.06)', borderLeft: '4px solid #BD9B56' }}&gt;&#10;        &lt;span style={{ color: '#BD9B56', fontSize: 22, lineHeight: 1.2, flexShrink: 0 }}&gt;!&lt;/span&gt;&#10;        &lt;div&gt;&#10;          &lt;div style={{ fontSize: 17, fontWeight: 'bold', color: '#172133', marginBottom: 6 }}&gt;响应迟缓&lt;/div&gt;&#10;          &lt;p style={{ fontSize: 14, color: '#5F5E5A', margin: 0, lineHeight: 1.6 }}&gt;传统报修依赖电话和微信群，客服人工登记后再手动派单，从「业主报修」到「师傅上门」平均要数小时甚至隔天，响应效率低。&lt;/p&gt;&#10;        &lt;/div&gt;&#10;      &lt;/div&gt;&#10;      &lt;div style={{ display: 'flex', gap: 20, background: '#fff', borderRadius: 10, padding: '20px 24px', boxShadow: '0 4px 16px rgba(23,33,51,0.06)', borderLeft: '4px solid #BD9B56' }}&gt;&#10;        &lt;span style={{ color: '#BD9B56', fontSize: 22, lineHeight: 1.2, flexShrink: 0 }}&gt;!&lt;/span&gt;&#10;        &lt;div&gt;&#10;          &lt;div style={{ fontSize: 17, fontWeight: 'bold', color: '#172133', marginBottom: 6 }}&gt;隐性知识散落&lt;/div&gt;&#10;          &lt;p style={{ fontSize: 14, color: '#5F5E5A', margin: 0, lineHeight: 1.6 }}&gt;装修施工时间、停车规则、宠物管理等规定，往往只存在于物业员工的个人经验里，新人上岗难以快速掌握，业主咨询也得不到统一准确的答案。&lt;/p&gt;&#10;        &lt;/div&gt;&#10;      &lt;/div&gt;&#10;    &lt;/div&gt;&#10;  &lt;/div&gt;&#10;  &lt;div style={{ flexShrink: 0, height: 44, display: 'flex', alignItems: 'flex-end', justifyContent: 'space-between' }}&gt;&#10;    &lt;span style={{ color: '#BD9B56', fontSize: 12, letterSpacing: '0.1em' }}&gt;云溪花园 · 智慧社区&lt;/span&gt;&#10;    &lt;span style={{ color: '#a09b8c', fontSize: 12 }}&gt;03 / 15&lt;/span&gt;&#10;  &lt;/div&gt;&#10;&lt;/Slide&gt;"/>
+        <p:cNvPr id="341" name="" descr="&lt;Slide style={{ width: '1280px', height: '720px', background: 'linear-gradient(135deg, #172133 0%, #22395E 100%)', position: 'relative', display: 'flex', flexDirection: 'column', justifyContent: 'center', padding: '0 96px' }}&gt;&#10;  &lt;div style={{ color: '#BD9B56', fontSize: 15, letterSpacing: '0.35em', marginBottom: 24 }}&gt;SECTION 01&lt;/div&gt;&#10;  &lt;div style={{ display: 'flex', alignItems: 'baseline', gap: 28 }}&gt;&#10;    &lt;span style={{ fontSize: 110, fontWeight: 'bold', color: 'rgba(189,155,86,0.28)', fontFamily: 'Inter, sans-serif', lineHeight: 1 }}&gt;01&lt;/span&gt;&#10;    &lt;span style={{ fontSize: 46, fontWeight: 'bold', color: '#FBFCFA', letterSpacing: '0.02em' }}&gt;项目背景与规模&lt;/span&gt;&#10;  &lt;/div&gt;&#10;  &lt;div style={{ width: 72, height: 3, background: '#BD9B56', margin: '28px 0 20px' }} /&gt;&#10;  &lt;div style={{ fontSize: 16, color: 'rgba(251,252,250,0.72)', letterSpacing: '0.04em' }}&gt;传统物业痛点 · 虚拟社区「云溪花园」数据资产&lt;/div&gt;&#10;  &lt;div style={{ position: 'absolute', bottom: 42, right: 96, color: 'rgba(251,252,250,0.4)', fontSize: 13, fontFamily: 'Inter, sans-serif' }}&gt;03 / 19&lt;/div&gt;&#10;&lt;/Slide&gt;"/>
         <p:cNvGrpSpPr/>
         <p:nvPr/>
       </p:nvGrpSpPr>
@@ -13552,7 +16158,290 @@
       </p:grpSpPr>
       <p:sp>
         <p:nvSpPr>
-          <p:cNvPr id="283" name=""/>
+          <p:cNvPr id="342" name=""/>
+          <p:cNvSpPr/>
+          <p:nvPr/>
+        </p:nvSpPr>
+        <p:spPr>
+          <a:xfrm rot="0" flipH="0" flipV="0">
+            <a:off x="0" y="0"/>
+            <a:ext cx="12192000" cy="6858000"/>
+          </a:xfrm>
+          <a:prstGeom prst="rect">
+            <a:avLst/>
+          </a:prstGeom>
+          <a:gradFill>
+            <a:gsLst>
+              <a:gs pos="0">
+                <a:srgbClr val="172133"/>
+              </a:gs>
+              <a:gs pos="100000">
+                <a:srgbClr val="22395E"/>
+              </a:gs>
+            </a:gsLst>
+            <a:lin ang="2700000" scaled="1"/>
+          </a:gradFill>
+          <a:ln/>
+        </p:spPr>
+        <p:txBody>
+          <a:bodyPr/>
+          <a:p/>
+        </p:txBody>
+      </p:sp>
+      <p:sp>
+        <p:nvSpPr>
+          <p:cNvPr id="343" name="" descr="{&quot;isTemplate&quot;:true,&quot;type&quot;:&quot;text&quot;}"/>
+          <p:cNvSpPr txBox="1"/>
+          <p:nvPr/>
+        </p:nvSpPr>
+        <p:spPr>
+          <a:xfrm rot="0" flipH="0" flipV="0">
+            <a:off x="914400" y="2266950"/>
+            <a:ext cx="10363200" cy="171450"/>
+          </a:xfrm>
+          <a:prstGeom prst="rect"/>
+        </p:spPr>
+        <p:txBody>
+          <a:bodyPr wrap="none" lIns="0" tIns="0" rIns="0" bIns="0"/>
+          <a:p>
+            <a:pPr>
+              <a:lnSpc>
+                <a:spcPct val="100000"/>
+              </a:lnSpc>
+            </a:pPr>
+            <a:r>
+              <a:rPr lang="en-US" sz="1125" spc="-9223372036854775808">
+                <a:solidFill>
+                  <a:srgbClr val="BD9B56"/>
+                </a:solidFill>
+                <a:latin typeface="Microsoft YaHei"/>
+                <a:ea typeface="Microsoft YaHei"/>
+              </a:rPr>
+              <a:t>SECTION 01</a:t>
+            </a:r>
+            <a:endParaRPr/>
+          </a:p>
+        </p:txBody>
+      </p:sp>
+      <p:sp>
+        <p:nvSpPr>
+          <p:cNvPr id="344" name="" descr="{&quot;isTemplate&quot;:true,&quot;type&quot;:&quot;text&quot;}"/>
+          <p:cNvSpPr txBox="1"/>
+          <p:nvPr/>
+        </p:nvSpPr>
+        <p:spPr>
+          <a:xfrm rot="0" flipH="0" flipV="0">
+            <a:off x="914400" y="2667000"/>
+            <a:ext cx="1343025" cy="1257300"/>
+          </a:xfrm>
+          <a:prstGeom prst="rect"/>
+        </p:spPr>
+        <p:txBody>
+          <a:bodyPr wrap="none" lIns="0" tIns="0" rIns="0" bIns="0"/>
+          <a:p>
+            <a:pPr>
+              <a:lnSpc>
+                <a:spcPct val="100000"/>
+              </a:lnSpc>
+            </a:pPr>
+            <a:r>
+              <a:rPr lang="en-US" sz="8250" b="1">
+                <a:solidFill>
+                  <a:srgbClr val="BD9B56">
+                    <a:alpha val="28000"/>
+                  </a:srgbClr>
+                </a:solidFill>
+                <a:latin typeface="Inter"/>
+                <a:ea typeface="Inter"/>
+              </a:rPr>
+              <a:t>01</a:t>
+            </a:r>
+            <a:endParaRPr/>
+          </a:p>
+        </p:txBody>
+      </p:sp>
+      <p:sp>
+        <p:nvSpPr>
+          <p:cNvPr id="345" name="" descr="{&quot;isTemplate&quot;:true,&quot;type&quot;:&quot;text&quot;}"/>
+          <p:cNvSpPr txBox="1"/>
+          <p:nvPr/>
+        </p:nvSpPr>
+        <p:spPr>
+          <a:xfrm rot="0" flipH="0" flipV="0">
+            <a:off x="2524125" y="2667000"/>
+            <a:ext cx="3067050" cy="1257300"/>
+          </a:xfrm>
+          <a:prstGeom prst="rect"/>
+        </p:spPr>
+        <p:txBody>
+          <a:bodyPr wrap="none" lIns="0" tIns="0" rIns="0" bIns="0"/>
+          <a:p>
+            <a:pPr>
+              <a:lnSpc>
+                <a:spcPct val="100000"/>
+              </a:lnSpc>
+            </a:pPr>
+            <a:r>
+              <a:rPr lang="zh-CN" sz="3450" b="1">
+                <a:solidFill>
+                  <a:srgbClr val="FBFCFA"/>
+                </a:solidFill>
+                <a:latin typeface="Microsoft YaHei"/>
+                <a:ea typeface="Microsoft YaHei"/>
+              </a:rPr>
+              <a:t>项目背景与规模</a:t>
+            </a:r>
+            <a:endParaRPr/>
+          </a:p>
+        </p:txBody>
+      </p:sp>
+      <p:sp>
+        <p:nvSpPr>
+          <p:cNvPr id="346" name=""/>
+          <p:cNvSpPr/>
+          <p:nvPr/>
+        </p:nvSpPr>
+        <p:spPr>
+          <a:xfrm rot="0" flipH="0" flipV="0">
+            <a:off x="914400" y="4191000"/>
+            <a:ext cx="685800" cy="28575"/>
+          </a:xfrm>
+          <a:prstGeom prst="rect">
+            <a:avLst/>
+          </a:prstGeom>
+          <a:solidFill>
+            <a:srgbClr val="BD9B56"/>
+          </a:solidFill>
+          <a:ln/>
+        </p:spPr>
+        <p:txBody>
+          <a:bodyPr/>
+          <a:p/>
+        </p:txBody>
+      </p:sp>
+      <p:sp>
+        <p:nvSpPr>
+          <p:cNvPr id="347" name="" descr="{&quot;isTemplate&quot;:true,&quot;type&quot;:&quot;text&quot;}"/>
+          <p:cNvSpPr txBox="1"/>
+          <p:nvPr/>
+        </p:nvSpPr>
+        <p:spPr>
+          <a:xfrm rot="0" flipH="0" flipV="0">
+            <a:off x="914400" y="4410075"/>
+            <a:ext cx="10363200" cy="190500"/>
+          </a:xfrm>
+          <a:prstGeom prst="rect"/>
+        </p:spPr>
+        <p:txBody>
+          <a:bodyPr wrap="none" lIns="0" tIns="0" rIns="0" bIns="0"/>
+          <a:p>
+            <a:pPr>
+              <a:lnSpc>
+                <a:spcPct val="100000"/>
+              </a:lnSpc>
+            </a:pPr>
+            <a:r>
+              <a:rPr lang="zh-CN" sz="1200" spc="-9223372036854775808">
+                <a:solidFill>
+                  <a:srgbClr val="FBFCFA">
+                    <a:alpha val="72000"/>
+                  </a:srgbClr>
+                </a:solidFill>
+                <a:latin typeface="Microsoft YaHei"/>
+                <a:ea typeface="Microsoft YaHei"/>
+              </a:rPr>
+              <a:t>传统物业痛点</a:t>
+            </a:r>
+            <a:r>
+              <a:rPr lang="en-US" sz="1200" spc="-9223372036854775808">
+                <a:solidFill>
+                  <a:srgbClr val="FBFCFA">
+                    <a:alpha val="72000"/>
+                  </a:srgbClr>
+                </a:solidFill>
+                <a:latin typeface="Microsoft YaHei"/>
+                <a:ea typeface="Microsoft YaHei"/>
+              </a:rPr>
+              <a:t> · </a:t>
+            </a:r>
+            <a:r>
+              <a:rPr lang="zh-CN" sz="1200" spc="-9223372036854775808">
+                <a:solidFill>
+                  <a:srgbClr val="FBFCFA">
+                    <a:alpha val="72000"/>
+                  </a:srgbClr>
+                </a:solidFill>
+                <a:latin typeface="Microsoft YaHei"/>
+                <a:ea typeface="Microsoft YaHei"/>
+              </a:rPr>
+              <a:t>虚拟社区「云溪花园」数据资产</a:t>
+            </a:r>
+            <a:endParaRPr/>
+          </a:p>
+        </p:txBody>
+      </p:sp>
+      <p:sp>
+        <p:nvSpPr>
+          <p:cNvPr id="348" name="" descr="{&quot;isTemplate&quot;:true,&quot;type&quot;:&quot;text&quot;}"/>
+          <p:cNvSpPr txBox="1"/>
+          <p:nvPr/>
+        </p:nvSpPr>
+        <p:spPr>
+          <a:xfrm rot="0" flipH="0" flipV="0">
+            <a:off x="10877550" y="6305550"/>
+            <a:ext cx="400050" cy="152400"/>
+          </a:xfrm>
+          <a:prstGeom prst="rect"/>
+        </p:spPr>
+        <p:txBody>
+          <a:bodyPr wrap="none" lIns="0" tIns="0" rIns="0" bIns="0"/>
+          <a:p>
+            <a:pPr>
+              <a:lnSpc>
+                <a:spcPct val="100000"/>
+              </a:lnSpc>
+            </a:pPr>
+            <a:r>
+              <a:rPr lang="en-US" sz="975">
+                <a:solidFill>
+                  <a:srgbClr val="FBFCFA">
+                    <a:alpha val="40000"/>
+                  </a:srgbClr>
+                </a:solidFill>
+                <a:latin typeface="Inter"/>
+                <a:ea typeface="Inter"/>
+              </a:rPr>
+              <a:t>03 / 19</a:t>
+            </a:r>
+            <a:endParaRPr/>
+          </a:p>
+        </p:txBody>
+      </p:sp>
+    </p:spTree>
+  </p:cSld>
+</p:sld>
+</file>
+
+<file path=ppt/slides/slide4.xml><?xml version="1.0" encoding="utf-8"?>
+<p:sld xmlns:p="http://schemas.openxmlformats.org/presentationml/2006/main" xmlns:a="http://schemas.openxmlformats.org/drawingml/2006/main">
+  <p:cSld>
+    <p:spTree>
+      <p:nvGrpSpPr>
+        <p:cNvPr id="349" name="" descr="&lt;Slide style={{ width: '1280px', height: '720px', background: '#FBFCFA', position: 'relative', padding: '40px 64px', boxSizing: 'border-box', display: 'flex', flexDirection: 'column' }}&gt;&#13;&#10;  &lt;div style={{ flexShrink: 0 }}&gt;&#13;&#10;    &lt;div style={{ color: '#BD9B56', fontSize: 13, letterSpacing: '0.25em', marginBottom: 8 }}&gt;01 · 项目背景&lt;/div&gt;&#13;&#10;    &lt;h2 style={{ fontSize: 30, fontWeight: 'bold', color: '#172133', margin: 0, lineHeight: 1.3 }}&gt;传统物业的三重困境&lt;/h2&gt;&#13;&#10;    &lt;div style={{ fontSize: 14, color: '#6b7075', marginTop: 8 }}&gt;业务、数据、知识「三张皮」，需要用 AI 重新缝合&lt;/div&gt;&#13;&#10;  &lt;/div&gt;&#13;&#10;  &lt;div style={{ flex: 1, display: 'flex', alignItems: 'center' }}&gt;&#13;&#10;    &lt;div style={{ width: '100%', display: 'flex', flexDirection: 'column', gap: 18 }}&gt;&#13;&#10;      &lt;div style={{ display: 'flex', gap: 20, background: '#fff', borderRadius: 10, padding: '20px 24px', boxShadow: '0 4px 16px rgba(23,33,51,0.06)', borderLeft: '4px solid #BD9B56' }}&gt;&#13;&#10;        &lt;span style={{ color: '#BD9B56', fontSize: 22, lineHeight: 1.2, flexShrink: 0 }}&gt;!&lt;/span&gt;&#13;&#10;        &lt;div&gt;&#13;&#10;          &lt;div style={{ fontSize: 17, fontWeight: 'bold', color: '#172133', marginBottom: 6 }}&gt;信息孤岛&lt;/div&gt;&#13;&#10;          &lt;p style={{ fontSize: 14, color: '#5F5E5A', margin: 0, lineHeight: 1.6 }}&gt;业主报修、费用缴纳、巡检记录分散在多个系统，彼此不打通，物业无法掌握完整的社区运行状态，业主也看不到工单的处理进度。&lt;/p&gt;&#13;&#10;        &lt;/div&gt;&#13;&#10;      &lt;/div&gt;&#13;&#10;      &lt;div style={{ display: 'flex', gap: 20, background: '#fff', borderRadius: 10, padding: '20px 24px', boxShadow: '0 4px 16px rgba(23,33,51,0.06)', borderLeft: '4px solid #BD9B56' }}&gt;&#13;&#10;        &lt;span style={{ color: '#BD9B56', fontSize: 22, lineHeight: 1.2, flexShrink: 0 }}&gt;!&lt;/span&gt;&#13;&#10;        &lt;div&gt;&#13;&#10;          &lt;div style={{ fontSize: 17, fontWeight: 'bold', color: '#172133', marginBottom: 6 }}&gt;响应迟缓&lt;/div&gt;&#13;&#10;          &lt;p style={{ fontSize: 14, color: '#5F5E5A', margin: 0, lineHeight: 1.6 }}&gt;传统报修依赖电话和微信群，客服人工登记后再手动派单，从「业主报修」到「师傅上门」平均要数小时甚至隔天，响应效率低。&lt;/p&gt;&#13;&#10;        &lt;/div&gt;&#13;&#10;      &lt;/div&gt;&#13;&#10;      &lt;div style={{ display: 'flex', gap: 20, background: '#fff', borderRadius: 10, padding: '20px 24px', boxShadow: '0 4px 16px rgba(23,33,51,0.06)', borderLeft: '4px solid #BD9B56' }}&gt;&#13;&#10;        &lt;span style={{ color: '#BD9B56', fontSize: 22, lineHeight: 1.2, flexShrink: 0 }}&gt;!&lt;/span&gt;&#13;&#10;        &lt;div&gt;&#13;&#10;          &lt;div style={{ fontSize: 17, fontWeight: 'bold', color: '#172133', marginBottom: 6 }}&gt;隐性知识散落&lt;/div&gt;&#13;&#10;          &lt;p style={{ fontSize: 14, color: '#5F5E5A', margin: 0, lineHeight: 1.6 }}&gt;装修施工时间、停车规则、宠物管理等规定，往往只存在于物业员工的个人经验里，新人上岗难以快速掌握，业主咨询也得不到统一准确的答案。&lt;/p&gt;&#13;&#10;        &lt;/div&gt;&#13;&#10;      &lt;/div&gt;&#13;&#10;    &lt;/div&gt;&#13;&#10;  &lt;/div&gt;&#13;&#10;  &lt;div style={{ flexShrink: 0, height: 44, display: 'flex', alignItems: 'flex-end', justifyContent: 'space-between' }}&gt;&#13;&#10;    &lt;span style={{ color: '#BD9B56', fontSize: 12, letterSpacing: '0.1em' }}&gt;云溪花园 · 智慧社区&lt;/span&gt;&#13;&#10;    &lt;span style={{ color: '#a09b8c', fontSize: 12 }}&gt;4 / 19&lt;/span&gt;&#13;&#10;  &lt;/div&gt;&#13;&#10;&lt;/Slide&gt;"/>
+        <p:cNvGrpSpPr/>
+        <p:nvPr/>
+      </p:nvGrpSpPr>
+      <p:grpSpPr>
+        <a:xfrm>
+          <a:off x="0" y="0"/>
+          <a:ext cx="0" cy="0"/>
+          <a:chOff x="0" y="0"/>
+          <a:chExt cx="0" cy="0"/>
+        </a:xfrm>
+      </p:grpSpPr>
+      <p:sp>
+        <p:nvSpPr>
+          <p:cNvPr id="350" name=""/>
           <p:cNvSpPr/>
           <p:nvPr/>
         </p:nvSpPr>
@@ -13576,7 +16465,7 @@
       </p:sp>
       <p:sp>
         <p:nvSpPr>
-          <p:cNvPr id="284" name="" descr="{&quot;isTemplate&quot;:true,&quot;type&quot;:&quot;text&quot;}"/>
+          <p:cNvPr id="351" name="" descr="{&quot;isTemplate&quot;:true,&quot;type&quot;:&quot;text&quot;}"/>
           <p:cNvSpPr txBox="1"/>
           <p:nvPr/>
         </p:nvSpPr>
@@ -13621,7 +16510,7 @@
       </p:sp>
       <p:sp>
         <p:nvSpPr>
-          <p:cNvPr id="285" name="" descr="{&quot;isTemplate&quot;:true,&quot;type&quot;:&quot;text&quot;}"/>
+          <p:cNvPr id="352" name="" descr="{&quot;isTemplate&quot;:true,&quot;type&quot;:&quot;text&quot;}"/>
           <p:cNvSpPr txBox="1"/>
           <p:nvPr/>
         </p:nvSpPr>
@@ -13656,7 +16545,7 @@
       </p:sp>
       <p:sp>
         <p:nvSpPr>
-          <p:cNvPr id="286" name="" descr="{&quot;isTemplate&quot;:true,&quot;type&quot;:&quot;text&quot;}"/>
+          <p:cNvPr id="353" name="" descr="{&quot;isTemplate&quot;:true,&quot;type&quot;:&quot;text&quot;}"/>
           <p:cNvSpPr txBox="1"/>
           <p:nvPr/>
         </p:nvSpPr>
@@ -13711,7 +16600,7 @@
       </p:sp>
       <p:sp>
         <p:nvSpPr>
-          <p:cNvPr id="287" name=""/>
+          <p:cNvPr id="354" name=""/>
           <p:cNvSpPr/>
           <p:nvPr/>
         </p:nvSpPr>
@@ -13744,7 +16633,7 @@
       </p:sp>
       <p:sp>
         <p:nvSpPr>
-          <p:cNvPr id="288" name=""/>
+          <p:cNvPr id="355" name=""/>
           <p:cNvSpPr/>
           <p:nvPr/>
         </p:nvSpPr>
@@ -13801,7 +16690,7 @@
       </p:sp>
       <p:sp>
         <p:nvSpPr>
-          <p:cNvPr id="289" name="" descr="{&quot;isTemplate&quot;:true,&quot;type&quot;:&quot;text&quot;}"/>
+          <p:cNvPr id="356" name="" descr="{&quot;isTemplate&quot;:true,&quot;type&quot;:&quot;text&quot;}"/>
           <p:cNvSpPr txBox="1"/>
           <p:nvPr/>
         </p:nvSpPr>
@@ -13836,7 +16725,7 @@
       </p:sp>
       <p:sp>
         <p:nvSpPr>
-          <p:cNvPr id="290" name="" descr="{&quot;isTemplate&quot;:true,&quot;type&quot;:&quot;text&quot;}"/>
+          <p:cNvPr id="357" name="" descr="{&quot;isTemplate&quot;:true,&quot;type&quot;:&quot;text&quot;}"/>
           <p:cNvSpPr txBox="1"/>
           <p:nvPr/>
         </p:nvSpPr>
@@ -13871,7 +16760,7 @@
       </p:sp>
       <p:sp>
         <p:nvSpPr>
-          <p:cNvPr id="291" name="" descr="{&quot;isTemplate&quot;:true,&quot;type&quot;:&quot;text&quot;}"/>
+          <p:cNvPr id="358" name="" descr="{&quot;isTemplate&quot;:true,&quot;type&quot;:&quot;text&quot;}"/>
           <p:cNvSpPr txBox="1"/>
           <p:nvPr/>
         </p:nvSpPr>
@@ -13906,7 +16795,7 @@
       </p:sp>
       <p:sp>
         <p:nvSpPr>
-          <p:cNvPr id="292" name=""/>
+          <p:cNvPr id="359" name=""/>
           <p:cNvSpPr/>
           <p:nvPr/>
         </p:nvSpPr>
@@ -13939,7 +16828,7 @@
       </p:sp>
       <p:sp>
         <p:nvSpPr>
-          <p:cNvPr id="293" name=""/>
+          <p:cNvPr id="360" name=""/>
           <p:cNvSpPr/>
           <p:nvPr/>
         </p:nvSpPr>
@@ -13996,7 +16885,7 @@
       </p:sp>
       <p:sp>
         <p:nvSpPr>
-          <p:cNvPr id="294" name="" descr="{&quot;isTemplate&quot;:true,&quot;type&quot;:&quot;text&quot;}"/>
+          <p:cNvPr id="361" name="" descr="{&quot;isTemplate&quot;:true,&quot;type&quot;:&quot;text&quot;}"/>
           <p:cNvSpPr txBox="1"/>
           <p:nvPr/>
         </p:nvSpPr>
@@ -14031,7 +16920,7 @@
       </p:sp>
       <p:sp>
         <p:nvSpPr>
-          <p:cNvPr id="295" name="" descr="{&quot;isTemplate&quot;:true,&quot;type&quot;:&quot;text&quot;}"/>
+          <p:cNvPr id="362" name="" descr="{&quot;isTemplate&quot;:true,&quot;type&quot;:&quot;text&quot;}"/>
           <p:cNvSpPr txBox="1"/>
           <p:nvPr/>
         </p:nvSpPr>
@@ -14066,7 +16955,7 @@
       </p:sp>
       <p:sp>
         <p:nvSpPr>
-          <p:cNvPr id="296" name="" descr="{&quot;isTemplate&quot;:true,&quot;type&quot;:&quot;text&quot;}"/>
+          <p:cNvPr id="363" name="" descr="{&quot;isTemplate&quot;:true,&quot;type&quot;:&quot;text&quot;}"/>
           <p:cNvSpPr txBox="1"/>
           <p:nvPr/>
         </p:nvSpPr>
@@ -14101,7 +16990,7 @@
       </p:sp>
       <p:sp>
         <p:nvSpPr>
-          <p:cNvPr id="297" name=""/>
+          <p:cNvPr id="364" name=""/>
           <p:cNvSpPr/>
           <p:nvPr/>
         </p:nvSpPr>
@@ -14134,7 +17023,7 @@
       </p:sp>
       <p:sp>
         <p:nvSpPr>
-          <p:cNvPr id="298" name=""/>
+          <p:cNvPr id="365" name=""/>
           <p:cNvSpPr/>
           <p:nvPr/>
         </p:nvSpPr>
@@ -14191,7 +17080,7 @@
       </p:sp>
       <p:sp>
         <p:nvSpPr>
-          <p:cNvPr id="299" name="" descr="{&quot;isTemplate&quot;:true,&quot;type&quot;:&quot;text&quot;}"/>
+          <p:cNvPr id="366" name="" descr="{&quot;isTemplate&quot;:true,&quot;type&quot;:&quot;text&quot;}"/>
           <p:cNvSpPr txBox="1"/>
           <p:nvPr/>
         </p:nvSpPr>
@@ -14226,7 +17115,7 @@
       </p:sp>
       <p:sp>
         <p:nvSpPr>
-          <p:cNvPr id="300" name="" descr="{&quot;isTemplate&quot;:true,&quot;type&quot;:&quot;text&quot;}"/>
+          <p:cNvPr id="367" name="" descr="{&quot;isTemplate&quot;:true,&quot;type&quot;:&quot;text&quot;}"/>
           <p:cNvSpPr txBox="1"/>
           <p:nvPr/>
         </p:nvSpPr>
@@ -14261,7 +17150,7 @@
       </p:sp>
       <p:sp>
         <p:nvSpPr>
-          <p:cNvPr id="301" name="" descr="{&quot;isTemplate&quot;:true,&quot;type&quot;:&quot;text&quot;}"/>
+          <p:cNvPr id="368" name="" descr="{&quot;isTemplate&quot;:true,&quot;type&quot;:&quot;text&quot;}"/>
           <p:cNvSpPr txBox="1"/>
           <p:nvPr/>
         </p:nvSpPr>
@@ -14296,7 +17185,7 @@
       </p:sp>
       <p:sp>
         <p:nvSpPr>
-          <p:cNvPr id="302" name="" descr="{&quot;isTemplate&quot;:true,&quot;type&quot;:&quot;text&quot;}"/>
+          <p:cNvPr id="369" name="" descr="{&quot;isTemplate&quot;:true,&quot;type&quot;:&quot;text&quot;}"/>
           <p:cNvSpPr txBox="1"/>
           <p:nvPr/>
         </p:nvSpPr>
@@ -14351,14 +17240,14 @@
       </p:sp>
       <p:sp>
         <p:nvSpPr>
-          <p:cNvPr id="303" name="" descr="{&quot;isTemplate&quot;:true,&quot;type&quot;:&quot;text&quot;}"/>
-          <p:cNvSpPr txBox="1"/>
-          <p:nvPr/>
-        </p:nvSpPr>
-        <p:spPr>
-          <a:xfrm rot="0" flipH="0" flipV="0">
-            <a:off x="11191875" y="6334125"/>
-            <a:ext cx="390525" cy="142875"/>
+          <p:cNvPr id="370" name="" descr="{&quot;isTemplate&quot;:true,&quot;type&quot;:&quot;text&quot;}"/>
+          <p:cNvSpPr txBox="1"/>
+          <p:nvPr/>
+        </p:nvSpPr>
+        <p:spPr>
+          <a:xfrm rot="0" flipH="0" flipV="0">
+            <a:off x="11258550" y="6334125"/>
+            <a:ext cx="323850" cy="142875"/>
           </a:xfrm>
           <a:prstGeom prst="rect"/>
         </p:spPr>
@@ -14378,7 +17267,7 @@
                 <a:latin typeface="Microsoft YaHei"/>
                 <a:ea typeface="Microsoft YaHei"/>
               </a:rPr>
-              <a:t>03 / 15</a:t>
+              <a:t>4 / 19</a:t>
             </a:r>
             <a:endParaRPr/>
           </a:p>
@@ -14389,12 +17278,12 @@
 </p:sld>
 </file>
 
-<file path=ppt/slides/slide4.xml><?xml version="1.0" encoding="utf-8"?>
+<file path=ppt/slides/slide5.xml><?xml version="1.0" encoding="utf-8"?>
 <p:sld xmlns:p="http://schemas.openxmlformats.org/presentationml/2006/main" xmlns:a="http://schemas.openxmlformats.org/drawingml/2006/main">
   <p:cSld>
     <p:spTree>
       <p:nvGrpSpPr>
-        <p:cNvPr id="304" name="" descr="&lt;Slide style={{ width: '1280px', height: '720px', background: '#FBFCFA', position: 'relative', padding: '32px 64px', boxSizing: 'border-box', display: 'flex', flexDirection: 'column' }}&gt;&#10;  &lt;div style={{ flexShrink: 0 }}&gt;&#10;    &lt;div style={{ color: '#BD9B56', fontSize: 13, letterSpacing: '0.25em', marginBottom: 6 }}&gt;01 · 项目目标&lt;/div&gt;&#10;    &lt;h2 style={{ fontSize: 30, fontWeight: 'bold', color: '#172133', margin: 0, lineHeight: 1.3 }}&gt;本项目要验证的四件事&lt;/h2&gt;&#10;  &lt;/div&gt;&#10;  &lt;div style={{ flex: 1, display: 'flex', alignItems: 'center', minHeight: 0 }}&gt;&#10;    &lt;div style={{ width: '100%', display: 'grid', gridTemplateColumns: '1fr 1fr', gap: 16 }}&gt;&#10;      &lt;div style={{ background: '#fff', borderRadius: 10, padding: '18px 22px', boxShadow: '0 4px 16px rgba(23,33,51,0.06)', borderTop: '3px solid #BD9B56' }}&gt;&#10;        &lt;div style={{ fontSize: 17, fontWeight: 'bold', color: '#172133', marginBottom: 6 }}&gt;1.  AI 能否理解业务意图&lt;/div&gt;&#10;        &lt;p style={{ fontSize: 14, color: '#5F5E5A', margin: 0, lineHeight: 1.55 }}&gt;用户说一句「厨房漏水了」，系统能否准确识别为报修需求，而非闲聊或误判。&lt;/p&gt;&#10;      &lt;/div&gt;&#10;      &lt;div style={{ background: '#fff', borderRadius: 10, padding: '18px 22px', boxShadow: '0 4px 16px rgba(23,33,51,0.06)', borderTop: '3px solid #BD9B56' }}&gt;&#10;        &lt;div style={{ fontSize: 17, fontWeight: 'bold', color: '#172133', marginBottom: 6 }}&gt;2.  Agent 能否调用业务工具&lt;/div&gt;&#10;        &lt;p style={{ fontSize: 14, color: '#5F5E5A', margin: 0, lineHeight: 1.55 }}&gt;识别意图后，能否自动创建工单、查询费用、检索知识，而不是停留在「回答」层面。&lt;/p&gt;&#10;      &lt;/div&gt;&#10;      &lt;div style={{ background: '#fff', borderRadius: 10, padding: '18px 22px', boxShadow: '0 4px 16px rgba(23,33,51,0.06)', borderTop: '3px solid #BD9B56' }}&gt;&#10;        &lt;div style={{ fontSize: 17, fontWeight: 'bold', color: '#172133', marginBottom: 6 }}&gt;3.  能否跑通业务闭环&lt;/div&gt;&#10;        &lt;p style={{ fontSize: 14, color: '#5F5E5A', margin: 0, lineHeight: 1.55 }}&gt;从报修到派单到完成，AI 是否真正参与了业务流程，而非只在前端加了一个聊天窗口。&lt;/p&gt;&#10;      &lt;/div&gt;&#10;      &lt;div style={{ background: '#fff', borderRadius: 10, padding: '18px 22px', boxShadow: '0 4px 16px rgba(23,33,51,0.06)', borderTop: '3px solid #BD9B56' }}&gt;&#10;        &lt;div style={{ fontSize: 17, fontWeight: 'bold', color: '#172133', marginBottom: 6 }}&gt;4.  RAG 能否准确回答&lt;/div&gt;&#10;        &lt;p style={{ fontSize: 14, color: '#5F5E5A', margin: 0, lineHeight: 1.55 }}&gt;对「装修几点施工」这类制度问题，能否检索到正确依据并给出准确、有出处的答案。&lt;/p&gt;&#10;      &lt;/div&gt;&#10;    &lt;/div&gt;&#10;  &lt;/div&gt;&#10;  &lt;div style={{ flexShrink: 0, height: 40, display: 'flex', alignItems: 'flex-end', justifyContent: 'space-between' }}&gt;&#10;    &lt;span style={{ color: '#BD9B56', fontSize: 12, letterSpacing: '0.1em' }}&gt;云溪花园 · 智慧社区&lt;/span&gt;&#10;    &lt;span style={{ color: '#a09b8c', fontSize: 12 }}&gt;04 / 15&lt;/span&gt;&#10;  &lt;/div&gt;&#10;&lt;/Slide&gt;"/>
+        <p:cNvPr id="371" name="" descr="&lt;Slide style={{ width: '1280px', height: '720px', background: '#FBFCFA', position: 'relative', padding: '32px 64px', boxSizing: 'border-box', display: 'flex', flexDirection: 'column' }}&gt;&#13;&#10;  &lt;div style={{ flexShrink: 0 }}&gt;&#13;&#10;    &lt;div style={{ color: '#BD9B56', fontSize: 13, letterSpacing: '0.25em', marginBottom: 6 }}&gt;01 · 项目目标&lt;/div&gt;&#13;&#10;    &lt;h2 style={{ fontSize: 30, fontWeight: 'bold', color: '#172133', margin: 0, lineHeight: 1.3 }}&gt;本项目要验证的四件事&lt;/h2&gt;&#13;&#10;  &lt;/div&gt;&#13;&#10;  &lt;div style={{ flex: 1, display: 'flex', alignItems: 'center', minHeight: 0 }}&gt;&#13;&#10;    &lt;div style={{ width: '100%', display: 'grid', gridTemplateColumns: '1fr 1fr', gap: 16 }}&gt;&#13;&#10;      &lt;div style={{ background: '#fff', borderRadius: 10, padding: '18px 22px', boxShadow: '0 4px 16px rgba(23,33,51,0.06)', borderTop: '3px solid #BD9B56' }}&gt;&#13;&#10;        &lt;div style={{ fontSize: 17, fontWeight: 'bold', color: '#172133', marginBottom: 6 }}&gt;1.  AI 能否理解业务意图&lt;/div&gt;&#13;&#10;        &lt;p style={{ fontSize: 14, color: '#5F5E5A', margin: 0, lineHeight: 1.55 }}&gt;用户说一句「厨房漏水了」，系统能否准确识别为报修需求，而非闲聊或误判。&lt;/p&gt;&#13;&#10;      &lt;/div&gt;&#13;&#10;      &lt;div style={{ background: '#fff', borderRadius: 10, padding: '18px 22px', boxShadow: '0 4px 16px rgba(23,33,51,0.06)', borderTop: '3px solid #BD9B56' }}&gt;&#13;&#10;        &lt;div style={{ fontSize: 17, fontWeight: 'bold', color: '#172133', marginBottom: 6 }}&gt;2.  Agent 能否调用业务工具&lt;/div&gt;&#13;&#10;        &lt;p style={{ fontSize: 14, color: '#5F5E5A', margin: 0, lineHeight: 1.55 }}&gt;识别意图后，能否自动创建工单、查询费用、检索知识，而不是停留在「回答」层面。&lt;/p&gt;&#13;&#10;      &lt;/div&gt;&#13;&#10;      &lt;div style={{ background: '#fff', borderRadius: 10, padding: '18px 22px', boxShadow: '0 4px 16px rgba(23,33,51,0.06)', borderTop: '3px solid #BD9B56' }}&gt;&#13;&#10;        &lt;div style={{ fontSize: 17, fontWeight: 'bold', color: '#172133', marginBottom: 6 }}&gt;3.  能否跑通业务闭环&lt;/div&gt;&#13;&#10;        &lt;p style={{ fontSize: 14, color: '#5F5E5A', margin: 0, lineHeight: 1.55 }}&gt;从报修到派单到完成，AI 是否真正参与了业务流程，而非只在前端加了一个聊天窗口。&lt;/p&gt;&#13;&#10;      &lt;/div&gt;&#13;&#10;      &lt;div style={{ background: '#fff', borderRadius: 10, padding: '18px 22px', boxShadow: '0 4px 16px rgba(23,33,51,0.06)', borderTop: '3px solid #BD9B56' }}&gt;&#13;&#10;        &lt;div style={{ fontSize: 17, fontWeight: 'bold', color: '#172133', marginBottom: 6 }}&gt;4.  RAG 能否准确回答&lt;/div&gt;&#13;&#10;        &lt;p style={{ fontSize: 14, color: '#5F5E5A', margin: 0, lineHeight: 1.55 }}&gt;对「装修几点施工」这类制度问题，能否检索到正确依据并给出准确、有出处的答案。&lt;/p&gt;&#13;&#10;      &lt;/div&gt;&#13;&#10;    &lt;/div&gt;&#13;&#10;  &lt;/div&gt;&#13;&#10;  &lt;div style={{ flexShrink: 0, height: 40, display: 'flex', alignItems: 'flex-end', justifyContent: 'space-between' }}&gt;&#13;&#10;    &lt;span style={{ color: '#BD9B56', fontSize: 12, letterSpacing: '0.1em' }}&gt;云溪花园 · 智慧社区&lt;/span&gt;&#13;&#10;    &lt;span style={{ color: '#a09b8c', fontSize: 12 }}&gt;5 / 19&lt;/span&gt;&#13;&#10;  &lt;/div&gt;&#13;&#10;&lt;/Slide&gt;"/>
         <p:cNvGrpSpPr/>
         <p:nvPr/>
       </p:nvGrpSpPr>
@@ -14408,7 +17297,7 @@
       </p:grpSpPr>
       <p:sp>
         <p:nvSpPr>
-          <p:cNvPr id="305" name=""/>
+          <p:cNvPr id="372" name=""/>
           <p:cNvSpPr/>
           <p:nvPr/>
         </p:nvSpPr>
@@ -14432,7 +17321,7 @@
       </p:sp>
       <p:sp>
         <p:nvSpPr>
-          <p:cNvPr id="306" name="" descr="{&quot;isTemplate&quot;:true,&quot;type&quot;:&quot;text&quot;}"/>
+          <p:cNvPr id="373" name="" descr="{&quot;isTemplate&quot;:true,&quot;type&quot;:&quot;text&quot;}"/>
           <p:cNvSpPr txBox="1"/>
           <p:nvPr/>
         </p:nvSpPr>
@@ -14477,7 +17366,7 @@
       </p:sp>
       <p:sp>
         <p:nvSpPr>
-          <p:cNvPr id="307" name="" descr="{&quot;isTemplate&quot;:true,&quot;type&quot;:&quot;text&quot;}"/>
+          <p:cNvPr id="374" name="" descr="{&quot;isTemplate&quot;:true,&quot;type&quot;:&quot;text&quot;}"/>
           <p:cNvSpPr txBox="1"/>
           <p:nvPr/>
         </p:nvSpPr>
@@ -14512,7 +17401,7 @@
       </p:sp>
       <p:sp>
         <p:nvSpPr>
-          <p:cNvPr id="308" name=""/>
+          <p:cNvPr id="375" name=""/>
           <p:cNvSpPr/>
           <p:nvPr/>
         </p:nvSpPr>
@@ -14545,7 +17434,7 @@
       </p:sp>
       <p:sp>
         <p:nvSpPr>
-          <p:cNvPr id="309" name=""/>
+          <p:cNvPr id="376" name=""/>
           <p:cNvSpPr/>
           <p:nvPr/>
         </p:nvSpPr>
@@ -14602,7 +17491,7 @@
       </p:sp>
       <p:sp>
         <p:nvSpPr>
-          <p:cNvPr id="310" name="" descr="{&quot;isTemplate&quot;:true,&quot;type&quot;:&quot;text&quot;}"/>
+          <p:cNvPr id="377" name="" descr="{&quot;isTemplate&quot;:true,&quot;type&quot;:&quot;text&quot;}"/>
           <p:cNvSpPr txBox="1"/>
           <p:nvPr/>
         </p:nvSpPr>
@@ -14647,7 +17536,7 @@
       </p:sp>
       <p:sp>
         <p:nvSpPr>
-          <p:cNvPr id="311" name="" descr="{&quot;isTemplate&quot;:true,&quot;type&quot;:&quot;text&quot;}"/>
+          <p:cNvPr id="378" name="" descr="{&quot;isTemplate&quot;:true,&quot;type&quot;:&quot;text&quot;}"/>
           <p:cNvSpPr txBox="1"/>
           <p:nvPr/>
         </p:nvSpPr>
@@ -14682,7 +17571,7 @@
       </p:sp>
       <p:sp>
         <p:nvSpPr>
-          <p:cNvPr id="312" name=""/>
+          <p:cNvPr id="379" name=""/>
           <p:cNvSpPr/>
           <p:nvPr/>
         </p:nvSpPr>
@@ -14715,7 +17604,7 @@
       </p:sp>
       <p:sp>
         <p:nvSpPr>
-          <p:cNvPr id="313" name=""/>
+          <p:cNvPr id="380" name=""/>
           <p:cNvSpPr/>
           <p:nvPr/>
         </p:nvSpPr>
@@ -14772,7 +17661,7 @@
       </p:sp>
       <p:sp>
         <p:nvSpPr>
-          <p:cNvPr id="314" name="" descr="{&quot;isTemplate&quot;:true,&quot;type&quot;:&quot;text&quot;}"/>
+          <p:cNvPr id="381" name="" descr="{&quot;isTemplate&quot;:true,&quot;type&quot;:&quot;text&quot;}"/>
           <p:cNvSpPr txBox="1"/>
           <p:nvPr/>
         </p:nvSpPr>
@@ -14817,7 +17706,7 @@
       </p:sp>
       <p:sp>
         <p:nvSpPr>
-          <p:cNvPr id="315" name="" descr="{&quot;isTemplate&quot;:true,&quot;type&quot;:&quot;text&quot;}"/>
+          <p:cNvPr id="382" name="" descr="{&quot;isTemplate&quot;:true,&quot;type&quot;:&quot;text&quot;}"/>
           <p:cNvSpPr txBox="1"/>
           <p:nvPr/>
         </p:nvSpPr>
@@ -14852,7 +17741,7 @@
       </p:sp>
       <p:sp>
         <p:nvSpPr>
-          <p:cNvPr id="316" name=""/>
+          <p:cNvPr id="383" name=""/>
           <p:cNvSpPr/>
           <p:nvPr/>
         </p:nvSpPr>
@@ -14885,7 +17774,7 @@
       </p:sp>
       <p:sp>
         <p:nvSpPr>
-          <p:cNvPr id="317" name=""/>
+          <p:cNvPr id="384" name=""/>
           <p:cNvSpPr/>
           <p:nvPr/>
         </p:nvSpPr>
@@ -14942,7 +17831,7 @@
       </p:sp>
       <p:sp>
         <p:nvSpPr>
-          <p:cNvPr id="318" name="" descr="{&quot;isTemplate&quot;:true,&quot;type&quot;:&quot;text&quot;}"/>
+          <p:cNvPr id="385" name="" descr="{&quot;isTemplate&quot;:true,&quot;type&quot;:&quot;text&quot;}"/>
           <p:cNvSpPr txBox="1"/>
           <p:nvPr/>
         </p:nvSpPr>
@@ -14987,7 +17876,7 @@
       </p:sp>
       <p:sp>
         <p:nvSpPr>
-          <p:cNvPr id="319" name="" descr="{&quot;isTemplate&quot;:true,&quot;type&quot;:&quot;text&quot;}"/>
+          <p:cNvPr id="386" name="" descr="{&quot;isTemplate&quot;:true,&quot;type&quot;:&quot;text&quot;}"/>
           <p:cNvSpPr txBox="1"/>
           <p:nvPr/>
         </p:nvSpPr>
@@ -15042,7 +17931,7 @@
       </p:sp>
       <p:sp>
         <p:nvSpPr>
-          <p:cNvPr id="320" name=""/>
+          <p:cNvPr id="387" name=""/>
           <p:cNvSpPr/>
           <p:nvPr/>
         </p:nvSpPr>
@@ -15075,7 +17964,7 @@
       </p:sp>
       <p:sp>
         <p:nvSpPr>
-          <p:cNvPr id="321" name=""/>
+          <p:cNvPr id="388" name=""/>
           <p:cNvSpPr/>
           <p:nvPr/>
         </p:nvSpPr>
@@ -15132,7 +18021,7 @@
       </p:sp>
       <p:sp>
         <p:nvSpPr>
-          <p:cNvPr id="322" name="" descr="{&quot;isTemplate&quot;:true,&quot;type&quot;:&quot;text&quot;}"/>
+          <p:cNvPr id="389" name="" descr="{&quot;isTemplate&quot;:true,&quot;type&quot;:&quot;text&quot;}"/>
           <p:cNvSpPr txBox="1"/>
           <p:nvPr/>
         </p:nvSpPr>
@@ -15177,7 +18066,7 @@
       </p:sp>
       <p:sp>
         <p:nvSpPr>
-          <p:cNvPr id="323" name="" descr="{&quot;isTemplate&quot;:true,&quot;type&quot;:&quot;text&quot;}"/>
+          <p:cNvPr id="390" name="" descr="{&quot;isTemplate&quot;:true,&quot;type&quot;:&quot;text&quot;}"/>
           <p:cNvSpPr txBox="1"/>
           <p:nvPr/>
         </p:nvSpPr>
@@ -15212,7 +18101,7 @@
       </p:sp>
       <p:sp>
         <p:nvSpPr>
-          <p:cNvPr id="324" name="" descr="{&quot;isTemplate&quot;:true,&quot;type&quot;:&quot;text&quot;}"/>
+          <p:cNvPr id="391" name="" descr="{&quot;isTemplate&quot;:true,&quot;type&quot;:&quot;text&quot;}"/>
           <p:cNvSpPr txBox="1"/>
           <p:nvPr/>
         </p:nvSpPr>
@@ -15267,14 +18156,14 @@
       </p:sp>
       <p:sp>
         <p:nvSpPr>
-          <p:cNvPr id="325" name="" descr="{&quot;isTemplate&quot;:true,&quot;type&quot;:&quot;text&quot;}"/>
-          <p:cNvSpPr txBox="1"/>
-          <p:nvPr/>
-        </p:nvSpPr>
-        <p:spPr>
-          <a:xfrm rot="0" flipH="0" flipV="0">
-            <a:off x="11191875" y="6410325"/>
-            <a:ext cx="390525" cy="142875"/>
+          <p:cNvPr id="392" name="" descr="{&quot;isTemplate&quot;:true,&quot;type&quot;:&quot;text&quot;}"/>
+          <p:cNvSpPr txBox="1"/>
+          <p:nvPr/>
+        </p:nvSpPr>
+        <p:spPr>
+          <a:xfrm rot="0" flipH="0" flipV="0">
+            <a:off x="11258550" y="6410325"/>
+            <a:ext cx="323850" cy="142875"/>
           </a:xfrm>
           <a:prstGeom prst="rect"/>
         </p:spPr>
@@ -15294,7 +18183,7 @@
                 <a:latin typeface="Microsoft YaHei"/>
                 <a:ea typeface="Microsoft YaHei"/>
               </a:rPr>
-              <a:t>04 / 15</a:t>
+              <a:t>5 / 19</a:t>
             </a:r>
             <a:endParaRPr/>
           </a:p>
@@ -15305,12 +18194,12 @@
 </p:sld>
 </file>
 
-<file path=ppt/slides/slide5.xml><?xml version="1.0" encoding="utf-8"?>
+<file path=ppt/slides/slide6.xml><?xml version="1.0" encoding="utf-8"?>
 <p:sld xmlns:p="http://schemas.openxmlformats.org/presentationml/2006/main" xmlns:r="http://schemas.openxmlformats.org/officeDocument/2006/relationships" xmlns:a="http://schemas.openxmlformats.org/drawingml/2006/main" xmlns:asvg="http://schemas.microsoft.com/office/drawing/2016/SVG/main" xmlns:mc="http://schemas.openxmlformats.org/markup-compatibility/2006" mc:Ignorable="asvg">
   <p:cSld>
     <p:spTree>
       <p:nvGrpSpPr>
-        <p:cNvPr id="326" name="" descr="&lt;Slide style={{ width: '1280px', height: '720px', background: '#FBFCFA', position: 'relative', padding: '32px 64px', boxSizing: 'border-box', display: 'flex', flexDirection: 'column' }}&gt;&#10;  &lt;div style={{ flexShrink: 0 }}&gt;&#10;    &lt;div style={{ color: '#BD9B56', fontSize: 13, letterSpacing: '0.25em', marginBottom: 6 }}&gt;01 · 项目规模&lt;/div&gt;&#10;    &lt;h2 style={{ fontSize: 30, fontWeight: 'bold', color: '#172133', margin: 0, lineHeight: 1.3 }}&gt;虚拟社区数据资产：云溪花园&lt;/h2&gt;&#10;    &lt;div style={{ fontSize: 14, color: '#6b7075', marginTop: 6 }}&gt;以一个社区为根，向下延伸出空间、人员、业务、知识四类数据资产&lt;/div&gt;&#10;  &lt;/div&gt;&#10;  &lt;div style={{ flex: 1, display: 'flex', alignItems: 'center', justifyContent: 'center' }}&gt;&#10;    &lt;svg width=&quot;1150&quot; height=&quot;470&quot; viewBox=&quot;0 0 1150 470&quot;&gt;&#10;      &lt;g fontFamily=&quot;Inter, sans-serif&quot;&gt;&#10;        {/* 根节点 community */}&#10;        &lt;rect x=&quot;450&quot; y=&quot;14&quot; width=&quot;250&quot; height=&quot;58&quot; rx=&quot;10&quot; fill=&quot;#172133&quot; /&gt;&#10;        &lt;text x=&quot;575&quot; y=&quot;38&quot; textAnchor=&quot;middle&quot; fontSize=&quot;15&quot; fontWeight=&quot;bold&quot; fill=&quot;#FBFCFA&quot;&gt;community 云溪花园&lt;/text&gt;&#10;        &lt;text x=&quot;575&quot; y=&quot;58&quot; textAnchor=&quot;middle&quot; fontSize=&quot;11&quot; fill=&quot;#BD9B56&quot;&gt;1 个小区 · 上海浦东张江路1268号&lt;/text&gt;&#10;        {/* 根节点连接线 */}&#10;        &lt;line x1=&quot;575&quot; y1=&quot;72&quot; x2=&quot;575&quot; y2=&quot;92&quot; stroke=&quot;#BD9B56&quot; strokeWidth=&quot;1.5&quot; /&gt;&#10;        &lt;line x1=&quot;150&quot; y1=&quot;92&quot; x2=&quot;1015&quot; y2=&quot;92&quot; stroke=&quot;#BD9B56&quot; strokeWidth=&quot;1.5&quot; /&gt;&#10;        &lt;line x1=&quot;150&quot; y1=&quot;92&quot; x2=&quot;150&quot; y2=&quot;108&quot; stroke=&quot;#BD9B56&quot; strokeWidth=&quot;1.5&quot; /&gt;&#10;        &lt;line x1=&quot;438&quot; y1=&quot;92&quot; x2=&quot;438&quot; y2=&quot;108&quot; stroke=&quot;#BD9B56&quot; strokeWidth=&quot;1.5&quot; /&gt;&#10;        &lt;line x1=&quot;726&quot; y1=&quot;92&quot; x2=&quot;726&quot; y2=&quot;108&quot; stroke=&quot;#BD9B56&quot; strokeWidth=&quot;1.5&quot; /&gt;&#10;        &lt;line x1=&quot;1015&quot; y1=&quot;92&quot; x2=&quot;1015&quot; y2=&quot;108&quot; stroke=&quot;#BD9B56&quot; strokeWidth=&quot;1.5&quot; /&gt;&#10;&#10;        {/* 分组1：空间资产 */}&#10;        &lt;text x=&quot;150&quot; y=&quot;128&quot; textAnchor=&quot;middle&quot; fontSize=&quot;12&quot; fontWeight=&quot;bold&quot; fill=&quot;#BD9B56&quot;&gt;空间资产&lt;/text&gt;&#10;        &lt;rect x=&quot;20&quot; y=&quot;138&quot; width=&quot;260&quot; height=&quot;56&quot; rx=&quot;8&quot; fill=&quot;rgba(34,57,94,0.06)&quot; stroke=&quot;#22395E&quot; strokeWidth=&quot;1.5&quot; /&gt;&#10;        &lt;text x=&quot;150&quot; y=&quot;162&quot; textAnchor=&quot;middle&quot; fontSize=&quot;14&quot; fontWeight=&quot;bold&quot; fill=&quot;#172133&quot;&gt;building 楼栋 ×8&lt;/text&gt;&#10;        &lt;text x=&quot;150&quot; y=&quot;182&quot; textAnchor=&quot;middle&quot; fontSize=&quot;11&quot; fill=&quot;#5F5E5A&quot;&gt;每栋 26 层 · 2 单元 · 4 户/层&lt;/text&gt;&#10;        &lt;line x1=&quot;150&quot; y1=&quot;194&quot; x2=&quot;150&quot; y2=&quot;206&quot; stroke=&quot;#BD9B56&quot; strokeWidth=&quot;1.2&quot; /&gt;&#10;        &lt;rect x=&quot;20&quot; y=&quot;210&quot; width=&quot;260&quot; height=&quot;56&quot; rx=&quot;8&quot; fill=&quot;rgba(34,57,94,0.06)&quot; stroke=&quot;#22395E&quot; strokeWidth=&quot;1.5&quot; /&gt;&#10;        &lt;text x=&quot;150&quot; y=&quot;234&quot; textAnchor=&quot;middle&quot; fontSize=&quot;14&quot; fontWeight=&quot;bold&quot; fill=&quot;#172133&quot;&gt;house 房屋 ×1664&lt;/text&gt;&#10;        &lt;text x=&quot;150&quot; y=&quot;254&quot; textAnchor=&quot;middle&quot; fontSize=&quot;11&quot; fill=&quot;#5F5E5A&quot;&gt;入住约 1200 户 · 800 车位&lt;/text&gt;&#10;&#10;        {/* 分组2：人员资产 */}&#10;        &lt;text x=&quot;438&quot; y=&quot;128&quot; textAnchor=&quot;middle&quot; fontSize=&quot;12&quot; fontWeight=&quot;bold&quot; fill=&quot;#BD9B56&quot;&gt;人员资产&lt;/text&gt;&#10;        &lt;rect x=&quot;308&quot; y=&quot;138&quot; width=&quot;260&quot; height=&quot;56&quot; rx=&quot;8&quot; fill=&quot;rgba(189,155,86,0.10)&quot; stroke=&quot;#BD9B56&quot; strokeWidth=&quot;1.5&quot; /&gt;&#10;        &lt;text x=&quot;438&quot; y=&quot;162&quot; textAnchor=&quot;middle&quot; fontSize=&quot;14&quot; fontWeight=&quot;bold&quot; fill=&quot;#172133&quot;&gt;user 业主 ×200&lt;/text&gt;&#10;        &lt;text x=&quot;438&quot; y=&quot;182&quot; textAnchor=&quot;middle&quot; fontSize=&quot;11&quot; fill=&quot;#5F5E5A&quot;&gt;house_binding 绑定 200 套&lt;/text&gt;&#10;        &lt;line x1=&quot;438&quot; y1=&quot;194&quot; x2=&quot;438&quot; y2=&quot;206&quot; stroke=&quot;#BD9B56&quot; strokeWidth=&quot;1.2&quot; /&gt;&#10;        &lt;rect x=&quot;308&quot; y=&quot;210&quot; width=&quot;260&quot; height=&quot;56&quot; rx=&quot;8&quot; fill=&quot;rgba(189,155,86,0.10)&quot; stroke=&quot;#BD9B56&quot; strokeWidth=&quot;1.5&quot; /&gt;&#10;        &lt;text x=&quot;438&quot; y=&quot;234&quot; textAnchor=&quot;middle&quot; fontSize=&quot;14&quot; fontWeight=&quot;bold&quot; fill=&quot;#172133&quot;&gt;worker 物业 ×75&lt;/text&gt;&#10;        &lt;text x=&quot;438&quot; y=&quot;254&quot; textAnchor=&quot;middle&quot; fontSize=&quot;11&quot; fill=&quot;#5F5E5A&quot;&gt;10 管理 / 15 维修 / 50 一线&lt;/text&gt;&#10;&#10;        {/* 分组3：业务数据 */}&#10;        &lt;text x=&quot;726&quot; y=&quot;128&quot; textAnchor=&quot;middle&quot; fontSize=&quot;12&quot; fontWeight=&quot;bold&quot; fill=&quot;#BD9B56&quot;&gt;业务数据&lt;/text&gt;&#10;        &lt;rect x=&quot;596&quot; y=&quot;138&quot; width=&quot;260&quot; height=&quot;40&quot; rx=&quot;8&quot; fill=&quot;rgba(34,57,94,0.06)&quot; stroke=&quot;#22395E&quot; strokeWidth=&quot;1.5&quot; /&gt;&#10;        &lt;text x=&quot;726&quot; y=&quot;163&quot; textAnchor=&quot;middle&quot; fontSize=&quot;13&quot; fontWeight=&quot;bold&quot; fill=&quot;#172133&quot;&gt;repair_order 工单 ×50&lt;/text&gt;&#10;        &lt;rect x=&quot;596&quot; y=&quot;186&quot; width=&quot;260&quot; height=&quot;40&quot; rx=&quot;8&quot; fill=&quot;rgba(34,57,94,0.06)&quot; stroke=&quot;#22395E&quot; strokeWidth=&quot;1.5&quot; /&gt;&#10;        &lt;text x=&quot;726&quot; y=&quot;211&quot; textAnchor=&quot;middle&quot; fontSize=&quot;13&quot; fontWeight=&quot;bold&quot; fill=&quot;#172133&quot;&gt;fee_bill 账单 ×746&lt;/text&gt;&#10;        &lt;rect x=&quot;596&quot; y=&quot;234&quot; width=&quot;260&quot; height=&quot;40&quot; rx=&quot;8&quot; fill=&quot;rgba(34,57,94,0.06)&quot; stroke=&quot;#22395E&quot; strokeWidth=&quot;1.5&quot; /&gt;&#10;        &lt;text x=&quot;726&quot; y=&quot;259&quot; textAnchor=&quot;middle&quot; fontSize=&quot;13&quot; fontWeight=&quot;bold&quot; fill=&quot;#172133&quot;&gt;notice 公告 ×24&lt;/text&gt;&#10;&#10;        {/* 分组4：知识资产 */}&#10;        &lt;text x=&quot;1015&quot; y=&quot;128&quot; textAnchor=&quot;middle&quot; fontSize=&quot;12&quot; fontWeight=&quot;bold&quot; fill=&quot;#BD9B56&quot;&gt;知识资产&lt;/text&gt;&#10;        &lt;rect x=&quot;885&quot; y=&quot;138&quot; width=&quot;260&quot; height=&quot;56&quot; rx=&quot;8&quot; fill=&quot;#22395E&quot; /&gt;&#10;        &lt;text x=&quot;1015&quot; y=&quot;162&quot; textAnchor=&quot;middle&quot; fontSize=&quot;14&quot; fontWeight=&quot;bold&quot; fill=&quot;#FBFCFA&quot;&gt;knowledge 文档 ×22&lt;/text&gt;&#10;        &lt;text x=&quot;1015&quot; y=&quot;182&quot; textAnchor=&quot;middle&quot; fontSize=&quot;11&quot; fill=&quot;#BD9B56&quot;&gt;7 个分类（规约/装修/停车…）&lt;/text&gt;&#10;        &lt;line x1=&quot;1015&quot; y1=&quot;194&quot; x2=&quot;1015&quot; y2=&quot;206&quot; stroke=&quot;#BD9B56&quot; strokeWidth=&quot;1.2&quot; /&gt;&#10;        &lt;rect x=&quot;885&quot; y=&quot;210&quot; width=&quot;260&quot; height=&quot;56&quot; rx=&quot;8&quot; fill=&quot;rgba(34,57,94,0.06)&quot; stroke=&quot;#BD9B56&quot; strokeWidth=&quot;1.5&quot; /&gt;&#10;        &lt;text x=&quot;1015&quot; y=&quot;234&quot; textAnchor=&quot;middle&quot; fontSize=&quot;14&quot; fontWeight=&quot;bold&quot; fill=&quot;#172133&quot;&gt;chunk 切片 ×99&lt;/text&gt;&#10;        &lt;text x=&quot;1015&quot; y=&quot;254&quot; textAnchor=&quot;middle&quot; fontSize=&quot;11&quot; fill=&quot;#5F5E5A&quot;&gt;pgvector 1024 维向量&lt;/text&gt;&#10;&#10;        {/* 底部关系说明 */}&#10;        &lt;rect x=&quot;300&quot; y=&quot;290&quot; width=&quot;550&quot; height=&quot;48&quot; rx=&quot;8&quot; fill=&quot;rgba(189,155,86,0.10)&quot; /&gt;&#10;        &lt;text x=&quot;575&quot; y=&quot;318&quot; textAnchor=&quot;middle&quot; fontSize=&quot;12&quot; fill=&quot;#172133&quot;&gt;repair_order → user + house + worker · fee_bill → house + user · 外键关联&lt;/text&gt;&#10;        &lt;text x=&quot;575&quot; y=&quot;334&quot; textAnchor=&quot;middle&quot; fontSize=&quot;11&quot; fill=&quot;#5F5E5A&quot;&gt;8 个 SQL 种子文件 · 一键导入可复现&lt;/text&gt;&#10;      &lt;/g&gt;&#10;    &lt;/svg&gt;&#10;  &lt;/div&gt;&#10;  &lt;div style={{ flexShrink: 0, height: 40, display: 'flex', alignItems: 'flex-end', justifyContent: 'space-between' }}&gt;&#10;    &lt;span style={{ color: '#BD9B56', fontSize: 12, letterSpacing: '0.1em' }}&gt;云溪花园 · 智慧社区&lt;/span&gt;&#10;    &lt;span style={{ color: '#a09b8c', fontSize: 12 }}&gt;05 / 15&lt;/span&gt;&#10;  &lt;/div&gt;&#10;&lt;/Slide&gt;"/>
+        <p:cNvPr id="393" name="" descr="&lt;Slide style={{ width: '1280px', height: '720px', background: '#FBFCFA', position: 'relative', padding: '32px 64px', boxSizing: 'border-box', display: 'flex', flexDirection: 'column' }}&gt;&#13;&#10;  &lt;div style={{ flexShrink: 0 }}&gt;&#13;&#10;    &lt;div style={{ color: '#BD9B56', fontSize: 13, letterSpacing: '0.25em', marginBottom: 6 }}&gt;01 · 项目规模&lt;/div&gt;&#13;&#10;    &lt;h2 style={{ fontSize: 30, fontWeight: 'bold', color: '#172133', margin: 0, lineHeight: 1.3 }}&gt;虚拟社区数据资产：云溪花园&lt;/h2&gt;&#13;&#10;    &lt;div style={{ fontSize: 14, color: '#6b7075', marginTop: 6 }}&gt;以一个社区为根，向下延伸出空间、人员、业务、知识四类数据资产&lt;/div&gt;&#13;&#10;  &lt;/div&gt;&#13;&#10;  &lt;div style={{ flex: 1, display: 'flex', alignItems: 'center', justifyContent: 'center' }}&gt;&#13;&#10;    &lt;svg width=&quot;1150&quot; height=&quot;470&quot; viewBox=&quot;0 0 1150 470&quot;&gt;&#13;&#10;      &lt;g fontFamily=&quot;Inter, sans-serif&quot;&gt;&#13;&#10;        {/* 根节点 community */}&#13;&#10;        &lt;rect x=&quot;450&quot; y=&quot;14&quot; width=&quot;250&quot; height=&quot;58&quot; rx=&quot;10&quot; fill=&quot;#172133&quot; /&gt;&#13;&#10;        &lt;text x=&quot;575&quot; y=&quot;38&quot; textAnchor=&quot;middle&quot; fontSize=&quot;15&quot; fontWeight=&quot;bold&quot; fill=&quot;#FBFCFA&quot;&gt;community 云溪花园&lt;/text&gt;&#13;&#10;        &lt;text x=&quot;575&quot; y=&quot;58&quot; textAnchor=&quot;middle&quot; fontSize=&quot;11&quot; fill=&quot;#BD9B56&quot;&gt;1 个小区 · 上海浦东张江路1268号&lt;/text&gt;&#13;&#10;        {/* 根节点连接线 */}&#13;&#10;        &lt;line x1=&quot;575&quot; y1=&quot;72&quot; x2=&quot;575&quot; y2=&quot;92&quot; stroke=&quot;#BD9B56&quot; strokeWidth=&quot;1.5&quot; /&gt;&#13;&#10;        &lt;line x1=&quot;150&quot; y1=&quot;92&quot; x2=&quot;1015&quot; y2=&quot;92&quot; stroke=&quot;#BD9B56&quot; strokeWidth=&quot;1.5&quot; /&gt;&#13;&#10;        &lt;line x1=&quot;150&quot; y1=&quot;92&quot; x2=&quot;150&quot; y2=&quot;108&quot; stroke=&quot;#BD9B56&quot; strokeWidth=&quot;1.5&quot; /&gt;&#13;&#10;        &lt;line x1=&quot;438&quot; y1=&quot;92&quot; x2=&quot;438&quot; y2=&quot;108&quot; stroke=&quot;#BD9B56&quot; strokeWidth=&quot;1.5&quot; /&gt;&#13;&#10;        &lt;line x1=&quot;726&quot; y1=&quot;92&quot; x2=&quot;726&quot; y2=&quot;108&quot; stroke=&quot;#BD9B56&quot; strokeWidth=&quot;1.5&quot; /&gt;&#13;&#10;        &lt;line x1=&quot;1015&quot; y1=&quot;92&quot; x2=&quot;1015&quot; y2=&quot;108&quot; stroke=&quot;#BD9B56&quot; strokeWidth=&quot;1.5&quot; /&gt;&#13;&#10;&#13;&#10;        {/* 分组1：空间资产 */}&#13;&#10;        &lt;text x=&quot;150&quot; y=&quot;128&quot; textAnchor=&quot;middle&quot; fontSize=&quot;12&quot; fontWeight=&quot;bold&quot; fill=&quot;#BD9B56&quot;&gt;空间资产&lt;/text&gt;&#13;&#10;        &lt;rect x=&quot;20&quot; y=&quot;138&quot; width=&quot;260&quot; height=&quot;56&quot; rx=&quot;8&quot; fill=&quot;rgba(34,57,94,0.06)&quot; stroke=&quot;#22395E&quot; strokeWidth=&quot;1.5&quot; /&gt;&#13;&#10;        &lt;text x=&quot;150&quot; y=&quot;162&quot; textAnchor=&quot;middle&quot; fontSize=&quot;14&quot; fontWeight=&quot;bold&quot; fill=&quot;#172133&quot;&gt;building 楼栋 ×8&lt;/text&gt;&#13;&#10;        &lt;text x=&quot;150&quot; y=&quot;182&quot; textAnchor=&quot;middle&quot; fontSize=&quot;11&quot; fill=&quot;#5F5E5A&quot;&gt;每栋 26 层 · 2 单元 · 4 户/层&lt;/text&gt;&#13;&#10;        &lt;line x1=&quot;150&quot; y1=&quot;194&quot; x2=&quot;150&quot; y2=&quot;206&quot; stroke=&quot;#BD9B56&quot; strokeWidth=&quot;1.2&quot; /&gt;&#13;&#10;        &lt;rect x=&quot;20&quot; y=&quot;210&quot; width=&quot;260&quot; height=&quot;56&quot; rx=&quot;8&quot; fill=&quot;rgba(34,57,94,0.06)&quot; stroke=&quot;#22395E&quot; strokeWidth=&quot;1.5&quot; /&gt;&#13;&#10;        &lt;text x=&quot;150&quot; y=&quot;234&quot; textAnchor=&quot;middle&quot; fontSize=&quot;14&quot; fontWeight=&quot;bold&quot; fill=&quot;#172133&quot;&gt;house 房屋 ×1664&lt;/text&gt;&#13;&#10;        &lt;text x=&quot;150&quot; y=&quot;254&quot; textAnchor=&quot;middle&quot; fontSize=&quot;11&quot; fill=&quot;#5F5E5A&quot;&gt;入住约 1200 户 · 800 车位&lt;/text&gt;&#13;&#10;&#13;&#10;        {/* 分组2：人员资产 */}&#13;&#10;        &lt;text x=&quot;438&quot; y=&quot;128&quot; textAnchor=&quot;middle&quot; fontSize=&quot;12&quot; fontWeight=&quot;bold&quot; fill=&quot;#BD9B56&quot;&gt;人员资产&lt;/text&gt;&#13;&#10;        &lt;rect x=&quot;308&quot; y=&quot;138&quot; width=&quot;260&quot; height=&quot;56&quot; rx=&quot;8&quot; fill=&quot;rgba(189,155,86,0.10)&quot; stroke=&quot;#BD9B56&quot; strokeWidth=&quot;1.5&quot; /&gt;&#13;&#10;        &lt;text x=&quot;438&quot; y=&quot;162&quot; textAnchor=&quot;middle&quot; fontSize=&quot;14&quot; fontWeight=&quot;bold&quot; fill=&quot;#172133&quot;&gt;user 业主 ×200&lt;/text&gt;&#13;&#10;        &lt;text x=&quot;438&quot; y=&quot;182&quot; textAnchor=&quot;middle&quot; fontSize=&quot;11&quot; fill=&quot;#5F5E5A&quot;&gt;house_binding 绑定 200 套&lt;/text&gt;&#13;&#10;        &lt;line x1=&quot;438&quot; y1=&quot;194&quot; x2=&quot;438&quot; y2=&quot;206&quot; stroke=&quot;#BD9B56&quot; strokeWidth=&quot;1.2&quot; /&gt;&#13;&#10;        &lt;rect x=&quot;308&quot; y=&quot;210&quot; width=&quot;260&quot; height=&quot;56&quot; rx=&quot;8&quot; fill=&quot;rgba(189,155,86,0.10)&quot; stroke=&quot;#BD9B56&quot; strokeWidth=&quot;1.5&quot; /&gt;&#13;&#10;        &lt;text x=&quot;438&quot; y=&quot;234&quot; textAnchor=&quot;middle&quot; fontSize=&quot;14&quot; fontWeight=&quot;bold&quot; fill=&quot;#172133&quot;&gt;worker 物业 ×75&lt;/text&gt;&#13;&#10;        &lt;text x=&quot;438&quot; y=&quot;254&quot; textAnchor=&quot;middle&quot; fontSize=&quot;11&quot; fill=&quot;#5F5E5A&quot;&gt;10 管理 / 15 维修 / 50 一线&lt;/text&gt;&#13;&#10;&#13;&#10;        {/* 分组3：业务数据 */}&#13;&#10;        &lt;text x=&quot;726&quot; y=&quot;128&quot; textAnchor=&quot;middle&quot; fontSize=&quot;12&quot; fontWeight=&quot;bold&quot; fill=&quot;#BD9B56&quot;&gt;业务数据&lt;/text&gt;&#13;&#10;        &lt;rect x=&quot;596&quot; y=&quot;138&quot; width=&quot;260&quot; height=&quot;40&quot; rx=&quot;8&quot; fill=&quot;rgba(34,57,94,0.06)&quot; stroke=&quot;#22395E&quot; strokeWidth=&quot;1.5&quot; /&gt;&#13;&#10;        &lt;text x=&quot;726&quot; y=&quot;163&quot; textAnchor=&quot;middle&quot; fontSize=&quot;13&quot; fontWeight=&quot;bold&quot; fill=&quot;#172133&quot;&gt;repair_order 工单 ×50&lt;/text&gt;&#13;&#10;        &lt;rect x=&quot;596&quot; y=&quot;186&quot; width=&quot;260&quot; height=&quot;40&quot; rx=&quot;8&quot; fill=&quot;rgba(34,57,94,0.06)&quot; stroke=&quot;#22395E&quot; strokeWidth=&quot;1.5&quot; /&gt;&#13;&#10;        &lt;text x=&quot;726&quot; y=&quot;211&quot; textAnchor=&quot;middle&quot; fontSize=&quot;13&quot; fontWeight=&quot;bold&quot; fill=&quot;#172133&quot;&gt;fee_bill 账单 ×746&lt;/text&gt;&#13;&#10;        &lt;rect x=&quot;596&quot; y=&quot;234&quot; width=&quot;260&quot; height=&quot;40&quot; rx=&quot;8&quot; fill=&quot;rgba(34,57,94,0.06)&quot; stroke=&quot;#22395E&quot; strokeWidth=&quot;1.5&quot; /&gt;&#13;&#10;        &lt;text x=&quot;726&quot; y=&quot;259&quot; textAnchor=&quot;middle&quot; fontSize=&quot;13&quot; fontWeight=&quot;bold&quot; fill=&quot;#172133&quot;&gt;notice 公告 ×24&lt;/text&gt;&#13;&#10;&#13;&#10;        {/* 分组4：知识资产 */}&#13;&#10;        &lt;text x=&quot;1015&quot; y=&quot;128&quot; textAnchor=&quot;middle&quot; fontSize=&quot;12&quot; fontWeight=&quot;bold&quot; fill=&quot;#BD9B56&quot;&gt;知识资产&lt;/text&gt;&#13;&#10;        &lt;rect x=&quot;885&quot; y=&quot;138&quot; width=&quot;260&quot; height=&quot;56&quot; rx=&quot;8&quot; fill=&quot;#22395E&quot; /&gt;&#13;&#10;        &lt;text x=&quot;1015&quot; y=&quot;162&quot; textAnchor=&quot;middle&quot; fontSize=&quot;14&quot; fontWeight=&quot;bold&quot; fill=&quot;#FBFCFA&quot;&gt;knowledge 文档 ×22&lt;/text&gt;&#13;&#10;        &lt;text x=&quot;1015&quot; y=&quot;182&quot; textAnchor=&quot;middle&quot; fontSize=&quot;11&quot; fill=&quot;#BD9B56&quot;&gt;7 个分类（规约/装修/停车…）&lt;/text&gt;&#13;&#10;        &lt;line x1=&quot;1015&quot; y1=&quot;194&quot; x2=&quot;1015&quot; y2=&quot;206&quot; stroke=&quot;#BD9B56&quot; strokeWidth=&quot;1.2&quot; /&gt;&#13;&#10;        &lt;rect x=&quot;885&quot; y=&quot;210&quot; width=&quot;260&quot; height=&quot;56&quot; rx=&quot;8&quot; fill=&quot;rgba(34,57,94,0.06)&quot; stroke=&quot;#BD9B56&quot; strokeWidth=&quot;1.5&quot; /&gt;&#13;&#10;        &lt;text x=&quot;1015&quot; y=&quot;234&quot; textAnchor=&quot;middle&quot; fontSize=&quot;14&quot; fontWeight=&quot;bold&quot; fill=&quot;#172133&quot;&gt;chunk 切片 ×99&lt;/text&gt;&#13;&#10;        &lt;text x=&quot;1015&quot; y=&quot;254&quot; textAnchor=&quot;middle&quot; fontSize=&quot;11&quot; fill=&quot;#5F5E5A&quot;&gt;pgvector 1024 维向量&lt;/text&gt;&#13;&#10;&#13;&#10;        {/* 底部关系说明 */}&#13;&#10;        &lt;rect x=&quot;300&quot; y=&quot;290&quot; width=&quot;550&quot; height=&quot;48&quot; rx=&quot;8&quot; fill=&quot;rgba(189,155,86,0.10)&quot; /&gt;&#13;&#10;        &lt;text x=&quot;575&quot; y=&quot;318&quot; textAnchor=&quot;middle&quot; fontSize=&quot;12&quot; fill=&quot;#172133&quot;&gt;repair_order → user + house + worker · fee_bill → house + user · 外键关联&lt;/text&gt;&#13;&#10;        &lt;text x=&quot;575&quot; y=&quot;334&quot; textAnchor=&quot;middle&quot; fontSize=&quot;11&quot; fill=&quot;#5F5E5A&quot;&gt;8 个 SQL 种子文件 · 一键导入可复现&lt;/text&gt;&#13;&#10;      &lt;/g&gt;&#13;&#10;    &lt;/svg&gt;&#13;&#10;  &lt;/div&gt;&#13;&#10;  &lt;div style={{ flexShrink: 0, height: 40, display: 'flex', alignItems: 'flex-end', justifyContent: 'space-between' }}&gt;&#13;&#10;    &lt;span style={{ color: '#BD9B56', fontSize: 12, letterSpacing: '0.1em' }}&gt;云溪花园 · 智慧社区&lt;/span&gt;&#13;&#10;    &lt;span style={{ color: '#a09b8c', fontSize: 12 }}&gt;6 / 19&lt;/span&gt;&#13;&#10;  &lt;/div&gt;&#13;&#10;&lt;/Slide&gt;"/>
         <p:cNvGrpSpPr/>
         <p:nvPr/>
       </p:nvGrpSpPr>
@@ -15324,7 +18213,7 @@
       </p:grpSpPr>
       <p:sp>
         <p:nvSpPr>
-          <p:cNvPr id="327" name=""/>
+          <p:cNvPr id="394" name=""/>
           <p:cNvSpPr/>
           <p:nvPr/>
         </p:nvSpPr>
@@ -15348,7 +18237,7 @@
       </p:sp>
       <p:sp>
         <p:nvSpPr>
-          <p:cNvPr id="328" name="" descr="{&quot;isTemplate&quot;:true,&quot;type&quot;:&quot;text&quot;}"/>
+          <p:cNvPr id="395" name="" descr="{&quot;isTemplate&quot;:true,&quot;type&quot;:&quot;text&quot;}"/>
           <p:cNvSpPr txBox="1"/>
           <p:nvPr/>
         </p:nvSpPr>
@@ -15393,7 +18282,7 @@
       </p:sp>
       <p:sp>
         <p:nvSpPr>
-          <p:cNvPr id="329" name="" descr="{&quot;isTemplate&quot;:true,&quot;type&quot;:&quot;text&quot;}"/>
+          <p:cNvPr id="396" name="" descr="{&quot;isTemplate&quot;:true,&quot;type&quot;:&quot;text&quot;}"/>
           <p:cNvSpPr txBox="1"/>
           <p:nvPr/>
         </p:nvSpPr>
@@ -15428,7 +18317,7 @@
       </p:sp>
       <p:sp>
         <p:nvSpPr>
-          <p:cNvPr id="330" name="" descr="{&quot;isTemplate&quot;:true,&quot;type&quot;:&quot;text&quot;}"/>
+          <p:cNvPr id="397" name="" descr="{&quot;isTemplate&quot;:true,&quot;type&quot;:&quot;text&quot;}"/>
           <p:cNvSpPr txBox="1"/>
           <p:nvPr/>
         </p:nvSpPr>
@@ -15463,7 +18352,7 @@
       </p:sp>
       <p:pic>
         <p:nvPicPr>
-          <p:cNvPr id="331" name=""/>
+          <p:cNvPr id="398" name=""/>
           <p:cNvPicPr>
             <a:picLocks noChangeAspect="1"/>
           </p:cNvPicPr>
@@ -15494,7 +18383,7 @@
       </p:pic>
       <p:sp>
         <p:nvSpPr>
-          <p:cNvPr id="332" name="" descr="{&quot;isTemplate&quot;:true,&quot;type&quot;:&quot;text&quot;}"/>
+          <p:cNvPr id="399" name="" descr="{&quot;isTemplate&quot;:true,&quot;type&quot;:&quot;text&quot;}"/>
           <p:cNvSpPr txBox="1"/>
           <p:nvPr/>
         </p:nvSpPr>
@@ -15549,14 +18438,14 @@
       </p:sp>
       <p:sp>
         <p:nvSpPr>
-          <p:cNvPr id="333" name="" descr="{&quot;isTemplate&quot;:true,&quot;type&quot;:&quot;text&quot;}"/>
-          <p:cNvSpPr txBox="1"/>
-          <p:nvPr/>
-        </p:nvSpPr>
-        <p:spPr>
-          <a:xfrm rot="0" flipH="0" flipV="0">
-            <a:off x="11191875" y="6410325"/>
-            <a:ext cx="390525" cy="142875"/>
+          <p:cNvPr id="400" name="" descr="{&quot;isTemplate&quot;:true,&quot;type&quot;:&quot;text&quot;}"/>
+          <p:cNvSpPr txBox="1"/>
+          <p:nvPr/>
+        </p:nvSpPr>
+        <p:spPr>
+          <a:xfrm rot="0" flipH="0" flipV="0">
+            <a:off x="11258550" y="6410325"/>
+            <a:ext cx="323850" cy="142875"/>
           </a:xfrm>
           <a:prstGeom prst="rect"/>
         </p:spPr>
@@ -15576,7 +18465,7 @@
                 <a:latin typeface="Microsoft YaHei"/>
                 <a:ea typeface="Microsoft YaHei"/>
               </a:rPr>
-              <a:t>05 / 15</a:t>
+              <a:t>6 / 19</a:t>
             </a:r>
             <a:endParaRPr/>
           </a:p>
@@ -15587,12 +18476,12 @@
 </p:sld>
 </file>
 
-<file path=ppt/slides/slide6.xml><?xml version="1.0" encoding="utf-8"?>
-<p:sld xmlns:p="http://schemas.openxmlformats.org/presentationml/2006/main" xmlns:r="http://schemas.openxmlformats.org/officeDocument/2006/relationships" xmlns:a="http://schemas.openxmlformats.org/drawingml/2006/main" xmlns:asvg="http://schemas.microsoft.com/office/drawing/2016/SVG/main" xmlns:mc="http://schemas.openxmlformats.org/markup-compatibility/2006" mc:Ignorable="asvg">
+<file path=ppt/slides/slide7.xml><?xml version="1.0" encoding="utf-8"?>
+<p:sld xmlns:p="http://schemas.openxmlformats.org/presentationml/2006/main" xmlns:a="http://schemas.openxmlformats.org/drawingml/2006/main">
   <p:cSld>
     <p:spTree>
       <p:nvGrpSpPr>
-        <p:cNvPr id="334" name="" descr="&lt;Slide style={{ width: '1280px', height: '720px', background: '#FBFCFA', position: 'relative', padding: '40px 64px', boxSizing: 'border-box', display: 'flex', flexDirection: 'column' }}&gt;&#10;  &lt;div style={{ flexShrink: 0 }}&gt;&#10;    &lt;div style={{ color: '#BD9B56', fontSize: 13, letterSpacing: '0.25em', marginBottom: 8 }}&gt;02 · 技术构建过程&lt;/div&gt;&#10;    &lt;h2 style={{ fontSize: 30, fontWeight: 'bold', color: '#172133', margin: 0, lineHeight: 1.3 }}&gt;技术架构：六层分离的 AI Native 系统&lt;/h2&gt;&#10;  &lt;/div&gt;&#10;  &lt;div style={{ flex: 1, display: 'flex', alignItems: 'center', gap: 32 }}&gt;&#10;    &lt;div style={{ flex: '0 0 620px', background: '#fff', borderRadius: 12, padding: '22px 24px', boxShadow: '0 6px 24px rgba(23,33,51,0.08)' }}&gt;&#10;      &lt;svg width=&quot;572&quot; height=&quot;470&quot; viewBox=&quot;0 0 572 470&quot;&gt;&#10;        &lt;defs&gt;&#10;          &lt;marker id=&quot;ar6&quot; viewBox=&quot;0 0 10 10&quot; refX=&quot;9&quot; refY=&quot;5&quot; markerWidth=&quot;6&quot; markerHeight=&quot;6&quot; orient=&quot;auto&quot;&gt;&#10;            &lt;path d=&quot;M0 0L10 5L0 10z&quot; fill=&quot;#22395E&quot; /&gt;&#10;          &lt;/marker&gt;&#10;        &lt;/defs&gt;&#10;        &lt;g fontFamily=&quot;Inter, sans-serif&quot;&gt;&#10;          &lt;rect x=&quot;36&quot; y=&quot;18&quot; width=&quot;500&quot; height=&quot;52&quot; rx=&quot;6&quot; fill=&quot;#F5F8F8&quot; stroke=&quot;#22395E&quot; strokeWidth=&quot;1.5&quot; /&gt;&#10;          &lt;text x=&quot;286&quot; y=&quot;49&quot; textAnchor=&quot;middle&quot; fontSize=&quot;14&quot; fontWeight=&quot;bold&quot; fill=&quot;#172133&quot;&gt;客户端 · 业主 / 物业 / 维修 三端&lt;/text&gt;&#10;          &lt;line x1=&quot;286&quot; y1=&quot;70&quot; x2=&quot;286&quot; y2=&quot;92&quot; stroke=&quot;#22395E&quot; strokeWidth=&quot;1.2&quot; markerEnd=&quot;url(#ar6)&quot; /&gt;&#10;          &lt;rect x=&quot;36&quot; y=&quot;96&quot; width=&quot;500&quot; height=&quot;48&quot; rx=&quot;6&quot; fill=&quot;#F5F8F8&quot; stroke=&quot;#22395E&quot; strokeWidth=&quot;1.5&quot; /&gt;&#10;          &lt;text x=&quot;286&quot; y=&quot;125&quot; textAnchor=&quot;middle&quot; fontSize=&quot;14&quot; fontWeight=&quot;bold&quot; fill=&quot;#172133&quot;&gt;API 网关 · FastAPI&lt;/text&gt;&#10;          &lt;line x1=&quot;286&quot; y1=&quot;144&quot; x2=&quot;286&quot; y2=&quot;166&quot; stroke=&quot;#22395E&quot; strokeWidth=&quot;1.2&quot; markerEnd=&quot;url(#ar6)&quot; /&gt;&#10;          &lt;rect x=&quot;36&quot; y=&quot;170&quot; width=&quot;500&quot; height=&quot;70&quot; rx=&quot;6&quot; fill=&quot;rgba(34,57,94,0.08)&quot; stroke=&quot;#22395E&quot; strokeWidth=&quot;2&quot; /&gt;&#10;          &lt;text x=&quot;64&quot; y=&quot;196&quot; fontSize=&quot;13&quot; fontWeight=&quot;bold&quot; fill=&quot;#BD9B56&quot;&gt;AI Agent 层&lt;/text&gt;&#10;          &lt;text x=&quot;286&quot; y=&quot;218&quot; textAnchor=&quot;middle&quot; fontSize=&quot;14&quot; fontWeight=&quot;bold&quot; fill=&quot;#172133&quot;&gt;Router Agent + 领域 Agent + 工具调用&lt;/text&gt;&#10;          &lt;line x1=&quot;286&quot; y1=&quot;240&quot; x2=&quot;286&quot; y2=&quot;262&quot; stroke=&quot;#22395E&quot; strokeWidth=&quot;1.2&quot; markerEnd=&quot;url(#ar6)&quot; /&gt;&#10;          &lt;rect x=&quot;36&quot; y=&quot;266&quot; width=&quot;500&quot; height=&quot;56&quot; rx=&quot;6&quot; fill=&quot;rgba(189,155,86,0.08)&quot; stroke=&quot;#BD9B56&quot; strokeWidth=&quot;1.5&quot; /&gt;&#10;          &lt;text x=&quot;64&quot; y=&quot;290&quot; fontSize=&quot;13&quot; fontWeight=&quot;bold&quot; fill=&quot;#BD9B56&quot;&gt;业务服务层&lt;/text&gt;&#10;          &lt;text x=&quot;286&quot; y=&quot;312&quot; textAnchor=&quot;middle&quot; fontSize=&quot;14&quot; fontWeight=&quot;bold&quot; fill=&quot;#172133&quot;&gt;工单 · 费用 · 巡检 · 通知 · 反馈 · 知识库&lt;/text&gt;&#10;          &lt;line x1=&quot;286&quot; y1=&quot;322&quot; x2=&quot;286&quot; y2=&quot;344&quot; stroke=&quot;#22395E&quot; strokeWidth=&quot;1.2&quot; markerEnd=&quot;url(#ar6)&quot; /&gt;&#10;          &lt;rect x=&quot;36&quot; y=&quot;348&quot; width=&quot;240&quot; height=&quot;60&quot; rx=&quot;6&quot; fill=&quot;#F5F8F8&quot; stroke=&quot;#22395E&quot; strokeWidth=&quot;1.5&quot; /&gt;&#10;          &lt;text x=&quot;156&quot; y=&quot;374&quot; textAnchor=&quot;middle&quot; fontSize=&quot;13&quot; fontWeight=&quot;bold&quot; fill=&quot;#BD9B56&quot;&gt;PostgreSQL + pgvector&lt;/text&gt;&#10;          &lt;text x=&quot;156&quot; y=&quot;394&quot; textAnchor=&quot;middle&quot; fontSize=&quot;11&quot; fill=&quot;#5F5E5A&quot;&gt;事务数据 + 向量检索&lt;/text&gt;&#10;          &lt;rect x=&quot;296&quot; y=&quot;348&quot; width=&quot;240&quot; height=&quot;60&quot; rx=&quot;6&quot; fill=&quot;#F5F8F8&quot; stroke=&quot;#22395E&quot; strokeWidth=&quot;1.5&quot; /&gt;&#10;          &lt;text x=&quot;416&quot; y=&quot;374&quot; textAnchor=&quot;middle&quot; fontSize=&quot;13&quot; fontWeight=&quot;bold&quot; fill=&quot;#BD9B56&quot;&gt;Redis + 智谱 GLM&lt;/text&gt;&#10;          &lt;text x=&quot;416&quot; y=&quot;394&quot; textAnchor=&quot;middle&quot; fontSize=&quot;11&quot; fill=&quot;#5F5E5A&quot;&gt;缓存 · LLM · embedding&lt;/text&gt;&#10;        &lt;/g&gt;&#10;      &lt;/svg&gt;&#10;    &lt;/div&gt;&#10;    &lt;div style={{ flex: 1, display: 'flex', flexDirection: 'column', gap: 18 }}&gt;&#10;      &lt;div&gt;&#10;        &lt;div style={{ fontSize: 14, color: '#BD9B56', fontWeight: 'bold', letterSpacing: '0.1em', marginBottom: 6 }}&gt;1.  Agent 与业务解耦&lt;/div&gt;&#10;        &lt;p style={{ fontSize: 14, color: '#5F5E5A', margin: 0, lineHeight: 1.65 }}&gt;AI Agent 只负责理解意图、编排工具，不直接操作数据库，严守 Agent → Tool → Service → Repository → Database 分层，杜绝 LLM 直连 SQL 的风险。&lt;/p&gt;&#10;      &lt;/div&gt;&#10;      &lt;div&gt;&#10;        &lt;div style={{ fontSize: 14, color: '#BD9B56', fontWeight: 'bold', letterSpacing: '0.1em', marginBottom: 6 }}&gt;2.  pgvector 一库双角色&lt;/div&gt;&#10;        &lt;p style={{ fontSize: 14, color: '#5F5E5A', margin: 0, lineHeight: 1.65 }}&gt;PostgreSQL 同时承载业务数据（工单、费用）和向量数据（知识切片），无需额外向量数据库，降低部署与运维复杂度。&lt;/p&gt;&#10;      &lt;/div&gt;&#10;      &lt;div&gt;&#10;        &lt;div style={{ fontSize: 14, color: '#BD9B56', fontWeight: 'bold', letterSpacing: '0.1em', marginBottom: 6 }}&gt;3.  可观测可评估&lt;/div&gt;&#10;        &lt;p style={{ fontSize: 14, color: '#5F5E5A', margin: 0, lineHeight: 1.65 }}&gt;每次 AI 对话的意图、工具调用、结果全程记录，可回放、可追踪，支撑后续的量化评估与持续迭代。&lt;/p&gt;&#10;      &lt;/div&gt;&#10;    &lt;/div&gt;&#10;  &lt;/div&gt;&#10;  &lt;div style={{ flexShrink: 0, height: 40, display: 'flex', alignItems: 'flex-end', justifyContent: 'space-between' }}&gt;&#10;    &lt;span style={{ color: '#BD9B56', fontSize: 12, letterSpacing: '0.1em' }}&gt;云溪花园 · 智慧社区&lt;/span&gt;&#10;    &lt;span style={{ color: '#a09b8c', fontSize: 12 }}&gt;06 / 15&lt;/span&gt;&#10;  &lt;/div&gt;&#10;&lt;/Slide&gt;"/>
+        <p:cNvPr id="401" name="" descr="&lt;Slide style={{ width: '1280px', height: '720px', background: 'linear-gradient(135deg, #172133 0%, #22395E 100%)', position: 'relative', display: 'flex', flexDirection: 'column', justifyContent: 'center', padding: '0 96px' }}&gt;&#10;  &lt;div style={{ color: '#BD9B56', fontSize: 15, letterSpacing: '0.35em', marginBottom: 24 }}&gt;SECTION 02&lt;/div&gt;&#10;  &lt;div style={{ display: 'flex', alignItems: 'baseline', gap: 28 }}&gt;&#10;    &lt;span style={{ fontSize: 110, fontWeight: 'bold', color: 'rgba(189,155,86,0.28)', fontFamily: 'Inter, sans-serif', lineHeight: 1 }}&gt;02&lt;/span&gt;&#10;    &lt;span style={{ fontSize: 46, fontWeight: 'bold', color: '#FBFCFA', letterSpacing: '0.02em' }}&gt;技术构建过程&lt;/span&gt;&#10;  &lt;/div&gt;&#10;  &lt;div style={{ width: 72, height: 3, background: '#BD9B56', margin: '28px 0 20px' }} /&gt;&#10;  &lt;div style={{ fontSize: 16, color: 'rgba(251,252,250,0.72)', letterSpacing: '0.04em' }}&gt;数据库 → 后端 → 前端 → AI Agent → RAG 知识库&lt;/div&gt;&#10;  &lt;div style={{ position: 'absolute', bottom: 42, right: 96, color: 'rgba(251,252,250,0.4)', fontSize: 13, fontFamily: 'Inter, sans-serif' }}&gt;07 / 19&lt;/div&gt;&#10;&lt;/Slide&gt;"/>
         <p:cNvGrpSpPr/>
         <p:nvPr/>
       </p:nvGrpSpPr>
@@ -15606,7 +18495,338 @@
       </p:grpSpPr>
       <p:sp>
         <p:nvSpPr>
-          <p:cNvPr id="335" name=""/>
+          <p:cNvPr id="402" name=""/>
+          <p:cNvSpPr/>
+          <p:nvPr/>
+        </p:nvSpPr>
+        <p:spPr>
+          <a:xfrm rot="0" flipH="0" flipV="0">
+            <a:off x="0" y="0"/>
+            <a:ext cx="12192000" cy="6858000"/>
+          </a:xfrm>
+          <a:prstGeom prst="rect">
+            <a:avLst/>
+          </a:prstGeom>
+          <a:gradFill>
+            <a:gsLst>
+              <a:gs pos="0">
+                <a:srgbClr val="172133"/>
+              </a:gs>
+              <a:gs pos="100000">
+                <a:srgbClr val="22395E"/>
+              </a:gs>
+            </a:gsLst>
+            <a:lin ang="2700000" scaled="1"/>
+          </a:gradFill>
+          <a:ln/>
+        </p:spPr>
+        <p:txBody>
+          <a:bodyPr/>
+          <a:p/>
+        </p:txBody>
+      </p:sp>
+      <p:sp>
+        <p:nvSpPr>
+          <p:cNvPr id="403" name="" descr="{&quot;isTemplate&quot;:true,&quot;type&quot;:&quot;text&quot;}"/>
+          <p:cNvSpPr txBox="1"/>
+          <p:nvPr/>
+        </p:nvSpPr>
+        <p:spPr>
+          <a:xfrm rot="0" flipH="0" flipV="0">
+            <a:off x="914400" y="2266950"/>
+            <a:ext cx="10363200" cy="171450"/>
+          </a:xfrm>
+          <a:prstGeom prst="rect"/>
+        </p:spPr>
+        <p:txBody>
+          <a:bodyPr wrap="none" lIns="0" tIns="0" rIns="0" bIns="0"/>
+          <a:p>
+            <a:pPr>
+              <a:lnSpc>
+                <a:spcPct val="100000"/>
+              </a:lnSpc>
+            </a:pPr>
+            <a:r>
+              <a:rPr lang="en-US" sz="1125" spc="-9223372036854775808">
+                <a:solidFill>
+                  <a:srgbClr val="BD9B56"/>
+                </a:solidFill>
+                <a:latin typeface="Microsoft YaHei"/>
+                <a:ea typeface="Microsoft YaHei"/>
+              </a:rPr>
+              <a:t>SECTION 02</a:t>
+            </a:r>
+            <a:endParaRPr/>
+          </a:p>
+        </p:txBody>
+      </p:sp>
+      <p:sp>
+        <p:nvSpPr>
+          <p:cNvPr id="404" name="" descr="{&quot;isTemplate&quot;:true,&quot;type&quot;:&quot;text&quot;}"/>
+          <p:cNvSpPr txBox="1"/>
+          <p:nvPr/>
+        </p:nvSpPr>
+        <p:spPr>
+          <a:xfrm rot="0" flipH="0" flipV="0">
+            <a:off x="914400" y="2667000"/>
+            <a:ext cx="1343025" cy="1257300"/>
+          </a:xfrm>
+          <a:prstGeom prst="rect"/>
+        </p:spPr>
+        <p:txBody>
+          <a:bodyPr wrap="none" lIns="0" tIns="0" rIns="0" bIns="0"/>
+          <a:p>
+            <a:pPr>
+              <a:lnSpc>
+                <a:spcPct val="100000"/>
+              </a:lnSpc>
+            </a:pPr>
+            <a:r>
+              <a:rPr lang="en-US" sz="8250" b="1">
+                <a:solidFill>
+                  <a:srgbClr val="BD9B56">
+                    <a:alpha val="28000"/>
+                  </a:srgbClr>
+                </a:solidFill>
+                <a:latin typeface="Inter"/>
+                <a:ea typeface="Inter"/>
+              </a:rPr>
+              <a:t>02</a:t>
+            </a:r>
+            <a:endParaRPr/>
+          </a:p>
+        </p:txBody>
+      </p:sp>
+      <p:sp>
+        <p:nvSpPr>
+          <p:cNvPr id="405" name="" descr="{&quot;isTemplate&quot;:true,&quot;type&quot;:&quot;text&quot;}"/>
+          <p:cNvSpPr txBox="1"/>
+          <p:nvPr/>
+        </p:nvSpPr>
+        <p:spPr>
+          <a:xfrm rot="0" flipH="0" flipV="0">
+            <a:off x="2524125" y="2667000"/>
+            <a:ext cx="2628900" cy="1257300"/>
+          </a:xfrm>
+          <a:prstGeom prst="rect"/>
+        </p:spPr>
+        <p:txBody>
+          <a:bodyPr wrap="none" lIns="0" tIns="0" rIns="0" bIns="0"/>
+          <a:p>
+            <a:pPr>
+              <a:lnSpc>
+                <a:spcPct val="100000"/>
+              </a:lnSpc>
+            </a:pPr>
+            <a:r>
+              <a:rPr lang="zh-CN" sz="3450" b="1">
+                <a:solidFill>
+                  <a:srgbClr val="FBFCFA"/>
+                </a:solidFill>
+                <a:latin typeface="Microsoft YaHei"/>
+                <a:ea typeface="Microsoft YaHei"/>
+              </a:rPr>
+              <a:t>技术构建过程</a:t>
+            </a:r>
+            <a:endParaRPr/>
+          </a:p>
+        </p:txBody>
+      </p:sp>
+      <p:sp>
+        <p:nvSpPr>
+          <p:cNvPr id="406" name=""/>
+          <p:cNvSpPr/>
+          <p:nvPr/>
+        </p:nvSpPr>
+        <p:spPr>
+          <a:xfrm rot="0" flipH="0" flipV="0">
+            <a:off x="914400" y="4191000"/>
+            <a:ext cx="685800" cy="28575"/>
+          </a:xfrm>
+          <a:prstGeom prst="rect">
+            <a:avLst/>
+          </a:prstGeom>
+          <a:solidFill>
+            <a:srgbClr val="BD9B56"/>
+          </a:solidFill>
+          <a:ln/>
+        </p:spPr>
+        <p:txBody>
+          <a:bodyPr/>
+          <a:p/>
+        </p:txBody>
+      </p:sp>
+      <p:sp>
+        <p:nvSpPr>
+          <p:cNvPr id="407" name="" descr="{&quot;isTemplate&quot;:true,&quot;type&quot;:&quot;text&quot;}"/>
+          <p:cNvSpPr txBox="1"/>
+          <p:nvPr/>
+        </p:nvSpPr>
+        <p:spPr>
+          <a:xfrm rot="0" flipH="0" flipV="0">
+            <a:off x="914400" y="4410075"/>
+            <a:ext cx="10363200" cy="190500"/>
+          </a:xfrm>
+          <a:prstGeom prst="rect"/>
+        </p:spPr>
+        <p:txBody>
+          <a:bodyPr wrap="none" lIns="0" tIns="0" rIns="0" bIns="0"/>
+          <a:p>
+            <a:pPr>
+              <a:lnSpc>
+                <a:spcPct val="100000"/>
+              </a:lnSpc>
+            </a:pPr>
+            <a:r>
+              <a:rPr lang="zh-CN" sz="1200" spc="-9223372036854775808">
+                <a:solidFill>
+                  <a:srgbClr val="FBFCFA">
+                    <a:alpha val="72000"/>
+                  </a:srgbClr>
+                </a:solidFill>
+                <a:latin typeface="Microsoft YaHei"/>
+                <a:ea typeface="Microsoft YaHei"/>
+              </a:rPr>
+              <a:t>数据库</a:t>
+            </a:r>
+            <a:r>
+              <a:rPr lang="en-US" sz="1200" spc="-9223372036854775808">
+                <a:solidFill>
+                  <a:srgbClr val="FBFCFA">
+                    <a:alpha val="72000"/>
+                  </a:srgbClr>
+                </a:solidFill>
+                <a:latin typeface="Microsoft YaHei"/>
+                <a:ea typeface="Microsoft YaHei"/>
+              </a:rPr>
+              <a:t> → </a:t>
+            </a:r>
+            <a:r>
+              <a:rPr lang="zh-CN" sz="1200" spc="-9223372036854775808">
+                <a:solidFill>
+                  <a:srgbClr val="FBFCFA">
+                    <a:alpha val="72000"/>
+                  </a:srgbClr>
+                </a:solidFill>
+                <a:latin typeface="Microsoft YaHei"/>
+                <a:ea typeface="Microsoft YaHei"/>
+              </a:rPr>
+              <a:t>后端</a:t>
+            </a:r>
+            <a:r>
+              <a:rPr lang="en-US" sz="1200" spc="-9223372036854775808">
+                <a:solidFill>
+                  <a:srgbClr val="FBFCFA">
+                    <a:alpha val="72000"/>
+                  </a:srgbClr>
+                </a:solidFill>
+                <a:latin typeface="Microsoft YaHei"/>
+                <a:ea typeface="Microsoft YaHei"/>
+              </a:rPr>
+              <a:t> → </a:t>
+            </a:r>
+            <a:r>
+              <a:rPr lang="zh-CN" sz="1200" spc="-9223372036854775808">
+                <a:solidFill>
+                  <a:srgbClr val="FBFCFA">
+                    <a:alpha val="72000"/>
+                  </a:srgbClr>
+                </a:solidFill>
+                <a:latin typeface="Microsoft YaHei"/>
+                <a:ea typeface="Microsoft YaHei"/>
+              </a:rPr>
+              <a:t>前端</a:t>
+            </a:r>
+            <a:r>
+              <a:rPr lang="en-US" sz="1200" spc="-9223372036854775808">
+                <a:solidFill>
+                  <a:srgbClr val="FBFCFA">
+                    <a:alpha val="72000"/>
+                  </a:srgbClr>
+                </a:solidFill>
+                <a:latin typeface="Microsoft YaHei"/>
+                <a:ea typeface="Microsoft YaHei"/>
+              </a:rPr>
+              <a:t> → AI Agent → RAG </a:t>
+            </a:r>
+            <a:r>
+              <a:rPr lang="zh-CN" sz="1200" spc="-9223372036854775808">
+                <a:solidFill>
+                  <a:srgbClr val="FBFCFA">
+                    <a:alpha val="72000"/>
+                  </a:srgbClr>
+                </a:solidFill>
+                <a:latin typeface="Microsoft YaHei"/>
+                <a:ea typeface="Microsoft YaHei"/>
+              </a:rPr>
+              <a:t>知识库</a:t>
+            </a:r>
+            <a:endParaRPr/>
+          </a:p>
+        </p:txBody>
+      </p:sp>
+      <p:sp>
+        <p:nvSpPr>
+          <p:cNvPr id="408" name="" descr="{&quot;isTemplate&quot;:true,&quot;type&quot;:&quot;text&quot;}"/>
+          <p:cNvSpPr txBox="1"/>
+          <p:nvPr/>
+        </p:nvSpPr>
+        <p:spPr>
+          <a:xfrm rot="0" flipH="0" flipV="0">
+            <a:off x="10877550" y="6305550"/>
+            <a:ext cx="400050" cy="152400"/>
+          </a:xfrm>
+          <a:prstGeom prst="rect"/>
+        </p:spPr>
+        <p:txBody>
+          <a:bodyPr wrap="none" lIns="0" tIns="0" rIns="0" bIns="0"/>
+          <a:p>
+            <a:pPr>
+              <a:lnSpc>
+                <a:spcPct val="100000"/>
+              </a:lnSpc>
+            </a:pPr>
+            <a:r>
+              <a:rPr lang="en-US" sz="975">
+                <a:solidFill>
+                  <a:srgbClr val="FBFCFA">
+                    <a:alpha val="40000"/>
+                  </a:srgbClr>
+                </a:solidFill>
+                <a:latin typeface="Inter"/>
+                <a:ea typeface="Inter"/>
+              </a:rPr>
+              <a:t>07 / 19</a:t>
+            </a:r>
+            <a:endParaRPr/>
+          </a:p>
+        </p:txBody>
+      </p:sp>
+    </p:spTree>
+  </p:cSld>
+</p:sld>
+</file>
+
+<file path=ppt/slides/slide8.xml><?xml version="1.0" encoding="utf-8"?>
+<p:sld xmlns:p="http://schemas.openxmlformats.org/presentationml/2006/main" xmlns:r="http://schemas.openxmlformats.org/officeDocument/2006/relationships" xmlns:a="http://schemas.openxmlformats.org/drawingml/2006/main" xmlns:asvg="http://schemas.microsoft.com/office/drawing/2016/SVG/main" xmlns:mc="http://schemas.openxmlformats.org/markup-compatibility/2006" mc:Ignorable="asvg">
+  <p:cSld>
+    <p:spTree>
+      <p:nvGrpSpPr>
+        <p:cNvPr id="409" name="" descr="&lt;Slide style={{ width: '1280px', height: '720px', background: '#FBFCFA', position: 'relative', padding: '40px 64px', boxSizing: 'border-box', display: 'flex', flexDirection: 'column' }}&gt;&#13;&#10;  &lt;div style={{ flexShrink: 0 }}&gt;&#13;&#10;    &lt;div style={{ color: '#BD9B56', fontSize: 13, letterSpacing: '0.25em', marginBottom: 8 }}&gt;02 · 技术构建过程&lt;/div&gt;&#13;&#10;    &lt;h2 style={{ fontSize: 30, fontWeight: 'bold', color: '#172133', margin: 0, lineHeight: 1.3 }}&gt;技术架构：六层分离的 AI Native 系统&lt;/h2&gt;&#13;&#10;  &lt;/div&gt;&#13;&#10;  &lt;div style={{ flex: 1, display: 'flex', alignItems: 'center', gap: 32 }}&gt;&#13;&#10;    &lt;div style={{ flex: '0 0 620px', background: '#fff', borderRadius: 12, padding: '22px 24px', boxShadow: '0 6px 24px rgba(23,33,51,0.08)' }}&gt;&#13;&#10;      &lt;svg width=&quot;572&quot; height=&quot;470&quot; viewBox=&quot;0 0 572 470&quot;&gt;&#13;&#10;        &lt;defs&gt;&#13;&#10;          &lt;marker id=&quot;ar6&quot; viewBox=&quot;0 0 10 10&quot; refX=&quot;9&quot; refY=&quot;5&quot; markerWidth=&quot;6&quot; markerHeight=&quot;6&quot; orient=&quot;auto&quot;&gt;&#13;&#10;            &lt;path d=&quot;M0 0L10 5L0 10z&quot; fill=&quot;#22395E&quot; /&gt;&#13;&#10;          &lt;/marker&gt;&#13;&#10;        &lt;/defs&gt;&#13;&#10;        &lt;g fontFamily=&quot;Inter, sans-serif&quot;&gt;&#13;&#10;          &lt;rect x=&quot;36&quot; y=&quot;18&quot; width=&quot;500&quot; height=&quot;52&quot; rx=&quot;6&quot; fill=&quot;#F5F8F8&quot; stroke=&quot;#22395E&quot; strokeWidth=&quot;1.5&quot; /&gt;&#13;&#10;          &lt;text x=&quot;286&quot; y=&quot;49&quot; textAnchor=&quot;middle&quot; fontSize=&quot;14&quot; fontWeight=&quot;bold&quot; fill=&quot;#172133&quot;&gt;客户端 · 业主 / 物业 / 维修 三端&lt;/text&gt;&#13;&#10;          &lt;line x1=&quot;286&quot; y1=&quot;70&quot; x2=&quot;286&quot; y2=&quot;92&quot; stroke=&quot;#22395E&quot; strokeWidth=&quot;1.2&quot; markerEnd=&quot;url(#ar6)&quot; /&gt;&#13;&#10;          &lt;rect x=&quot;36&quot; y=&quot;96&quot; width=&quot;500&quot; height=&quot;48&quot; rx=&quot;6&quot; fill=&quot;#F5F8F8&quot; stroke=&quot;#22395E&quot; strokeWidth=&quot;1.5&quot; /&gt;&#13;&#10;          &lt;text x=&quot;286&quot; y=&quot;125&quot; textAnchor=&quot;middle&quot; fontSize=&quot;14&quot; fontWeight=&quot;bold&quot; fill=&quot;#172133&quot;&gt;API 网关 · FastAPI&lt;/text&gt;&#13;&#10;          &lt;line x1=&quot;286&quot; y1=&quot;144&quot; x2=&quot;286&quot; y2=&quot;166&quot; stroke=&quot;#22395E&quot; strokeWidth=&quot;1.2&quot; markerEnd=&quot;url(#ar6)&quot; /&gt;&#13;&#10;          &lt;rect x=&quot;36&quot; y=&quot;170&quot; width=&quot;500&quot; height=&quot;70&quot; rx=&quot;6&quot; fill=&quot;rgba(34,57,94,0.08)&quot; stroke=&quot;#22395E&quot; strokeWidth=&quot;2&quot; /&gt;&#13;&#10;          &lt;text x=&quot;64&quot; y=&quot;196&quot; fontSize=&quot;13&quot; fontWeight=&quot;bold&quot; fill=&quot;#BD9B56&quot;&gt;AI Agent 层&lt;/text&gt;&#13;&#10;          &lt;text x=&quot;286&quot; y=&quot;218&quot; textAnchor=&quot;middle&quot; fontSize=&quot;14&quot; fontWeight=&quot;bold&quot; fill=&quot;#172133&quot;&gt;Router Agent + 领域 Agent + 工具调用&lt;/text&gt;&#13;&#10;          &lt;line x1=&quot;286&quot; y1=&quot;240&quot; x2=&quot;286&quot; y2=&quot;262&quot; stroke=&quot;#22395E&quot; strokeWidth=&quot;1.2&quot; markerEnd=&quot;url(#ar6)&quot; /&gt;&#13;&#10;          &lt;rect x=&quot;36&quot; y=&quot;266&quot; width=&quot;500&quot; height=&quot;56&quot; rx=&quot;6&quot; fill=&quot;rgba(189,155,86,0.08)&quot; stroke=&quot;#BD9B56&quot; strokeWidth=&quot;1.5&quot; /&gt;&#13;&#10;          &lt;text x=&quot;64&quot; y=&quot;290&quot; fontSize=&quot;13&quot; fontWeight=&quot;bold&quot; fill=&quot;#BD9B56&quot;&gt;业务服务层&lt;/text&gt;&#13;&#10;          &lt;text x=&quot;286&quot; y=&quot;312&quot; textAnchor=&quot;middle&quot; fontSize=&quot;14&quot; fontWeight=&quot;bold&quot; fill=&quot;#172133&quot;&gt;工单 · 费用 · 巡检 · 通知 · 反馈 · 知识库&lt;/text&gt;&#13;&#10;          &lt;line x1=&quot;286&quot; y1=&quot;322&quot; x2=&quot;286&quot; y2=&quot;344&quot; stroke=&quot;#22395E&quot; strokeWidth=&quot;1.2&quot; markerEnd=&quot;url(#ar6)&quot; /&gt;&#13;&#10;          &lt;rect x=&quot;36&quot; y=&quot;348&quot; width=&quot;240&quot; height=&quot;60&quot; rx=&quot;6&quot; fill=&quot;#F5F8F8&quot; stroke=&quot;#22395E&quot; strokeWidth=&quot;1.5&quot; /&gt;&#13;&#10;          &lt;text x=&quot;156&quot; y=&quot;374&quot; textAnchor=&quot;middle&quot; fontSize=&quot;13&quot; fontWeight=&quot;bold&quot; fill=&quot;#BD9B56&quot;&gt;PostgreSQL + pgvector&lt;/text&gt;&#13;&#10;          &lt;text x=&quot;156&quot; y=&quot;394&quot; textAnchor=&quot;middle&quot; fontSize=&quot;11&quot; fill=&quot;#5F5E5A&quot;&gt;事务数据 + 向量检索&lt;/text&gt;&#13;&#10;          &lt;rect x=&quot;296&quot; y=&quot;348&quot; width=&quot;240&quot; height=&quot;60&quot; rx=&quot;6&quot; fill=&quot;#F5F8F8&quot; stroke=&quot;#22395E&quot; strokeWidth=&quot;1.5&quot; /&gt;&#13;&#10;          &lt;text x=&quot;416&quot; y=&quot;374&quot; textAnchor=&quot;middle&quot; fontSize=&quot;13&quot; fontWeight=&quot;bold&quot; fill=&quot;#BD9B56&quot;&gt;Redis + 智谱 GLM&lt;/text&gt;&#13;&#10;          &lt;text x=&quot;416&quot; y=&quot;394&quot; textAnchor=&quot;middle&quot; fontSize=&quot;11&quot; fill=&quot;#5F5E5A&quot;&gt;缓存 · LLM · embedding&lt;/text&gt;&#13;&#10;        &lt;/g&gt;&#13;&#10;      &lt;/svg&gt;&#13;&#10;    &lt;/div&gt;&#13;&#10;    &lt;div style={{ flex: 1, display: 'flex', flexDirection: 'column', gap: 18 }}&gt;&#13;&#10;      &lt;div&gt;&#13;&#10;        &lt;div style={{ fontSize: 14, color: '#BD9B56', fontWeight: 'bold', letterSpacing: '0.1em', marginBottom: 6 }}&gt;1.  Agent 与业务解耦&lt;/div&gt;&#13;&#10;        &lt;p style={{ fontSize: 14, color: '#5F5E5A', margin: 0, lineHeight: 1.65 }}&gt;AI Agent 只负责理解意图、编排工具，不直接操作数据库，严守 Agent → Tool → Service → Repository → Database 分层，杜绝 LLM 直连 SQL 的风险。&lt;/p&gt;&#13;&#10;      &lt;/div&gt;&#13;&#10;      &lt;div&gt;&#13;&#10;        &lt;div style={{ fontSize: 14, color: '#BD9B56', fontWeight: 'bold', letterSpacing: '0.1em', marginBottom: 6 }}&gt;2.  pgvector 一库双角色&lt;/div&gt;&#13;&#10;        &lt;p style={{ fontSize: 14, color: '#5F5E5A', margin: 0, lineHeight: 1.65 }}&gt;PostgreSQL 同时承载业务数据（工单、费用）和向量数据（知识切片），无需额外向量数据库，降低部署与运维复杂度。&lt;/p&gt;&#13;&#10;      &lt;/div&gt;&#13;&#10;      &lt;div&gt;&#13;&#10;        &lt;div style={{ fontSize: 14, color: '#BD9B56', fontWeight: 'bold', letterSpacing: '0.1em', marginBottom: 6 }}&gt;3.  可观测可评估&lt;/div&gt;&#13;&#10;        &lt;p style={{ fontSize: 14, color: '#5F5E5A', margin: 0, lineHeight: 1.65 }}&gt;每次 AI 对话的意图、工具调用、结果全程记录，可回放、可追踪，支撑后续的量化评估与持续迭代。&lt;/p&gt;&#13;&#10;      &lt;/div&gt;&#13;&#10;    &lt;/div&gt;&#13;&#10;  &lt;/div&gt;&#13;&#10;  &lt;div style={{ flexShrink: 0, height: 40, display: 'flex', alignItems: 'flex-end', justifyContent: 'space-between' }}&gt;&#13;&#10;    &lt;span style={{ color: '#BD9B56', fontSize: 12, letterSpacing: '0.1em' }}&gt;云溪花园 · 智慧社区&lt;/span&gt;&#13;&#10;    &lt;span style={{ color: '#a09b8c', fontSize: 12 }}&gt;8 / 19&lt;/span&gt;&#13;&#10;  &lt;/div&gt;&#13;&#10;&lt;/Slide&gt;"/>
+        <p:cNvGrpSpPr/>
+        <p:nvPr/>
+      </p:nvGrpSpPr>
+      <p:grpSpPr>
+        <a:xfrm>
+          <a:off x="0" y="0"/>
+          <a:ext cx="0" cy="0"/>
+          <a:chOff x="0" y="0"/>
+          <a:chExt cx="0" cy="0"/>
+        </a:xfrm>
+      </p:grpSpPr>
+      <p:sp>
+        <p:nvSpPr>
+          <p:cNvPr id="410" name=""/>
           <p:cNvSpPr/>
           <p:nvPr/>
         </p:nvSpPr>
@@ -15630,7 +18850,7 @@
       </p:sp>
       <p:sp>
         <p:nvSpPr>
-          <p:cNvPr id="336" name="" descr="{&quot;isTemplate&quot;:true,&quot;type&quot;:&quot;text&quot;}"/>
+          <p:cNvPr id="411" name="" descr="{&quot;isTemplate&quot;:true,&quot;type&quot;:&quot;text&quot;}"/>
           <p:cNvSpPr txBox="1"/>
           <p:nvPr/>
         </p:nvSpPr>
@@ -15675,7 +18895,7 @@
       </p:sp>
       <p:sp>
         <p:nvSpPr>
-          <p:cNvPr id="337" name="" descr="{&quot;isTemplate&quot;:true,&quot;type&quot;:&quot;text&quot;}"/>
+          <p:cNvPr id="412" name="" descr="{&quot;isTemplate&quot;:true,&quot;type&quot;:&quot;text&quot;}"/>
           <p:cNvSpPr txBox="1"/>
           <p:nvPr/>
         </p:nvSpPr>
@@ -15730,7 +18950,7 @@
       </p:sp>
       <p:sp>
         <p:nvSpPr>
-          <p:cNvPr id="338" name=""/>
+          <p:cNvPr id="413" name=""/>
           <p:cNvSpPr/>
           <p:nvPr/>
         </p:nvSpPr>
@@ -15763,7 +18983,7 @@
       </p:sp>
       <p:pic>
         <p:nvPicPr>
-          <p:cNvPr id="339" name=""/>
+          <p:cNvPr id="414" name=""/>
           <p:cNvPicPr>
             <a:picLocks noChangeAspect="1"/>
           </p:cNvPicPr>
@@ -15794,7 +19014,7 @@
       </p:pic>
       <p:sp>
         <p:nvSpPr>
-          <p:cNvPr id="340" name="" descr="{&quot;isTemplate&quot;:true,&quot;type&quot;:&quot;text&quot;}"/>
+          <p:cNvPr id="415" name="" descr="{&quot;isTemplate&quot;:true,&quot;type&quot;:&quot;text&quot;}"/>
           <p:cNvSpPr txBox="1"/>
           <p:nvPr/>
         </p:nvSpPr>
@@ -15839,7 +19059,7 @@
       </p:sp>
       <p:sp>
         <p:nvSpPr>
-          <p:cNvPr id="341" name="" descr="{&quot;isTemplate&quot;:true,&quot;type&quot;:&quot;text&quot;}"/>
+          <p:cNvPr id="416" name="" descr="{&quot;isTemplate&quot;:true,&quot;type&quot;:&quot;text&quot;}"/>
           <p:cNvSpPr txBox="1"/>
           <p:nvPr/>
         </p:nvSpPr>
@@ -15946,7 +19166,7 @@
       </p:sp>
       <p:sp>
         <p:nvSpPr>
-          <p:cNvPr id="342" name="" descr="{&quot;isTemplate&quot;:true,&quot;type&quot;:&quot;text&quot;}"/>
+          <p:cNvPr id="417" name="" descr="{&quot;isTemplate&quot;:true,&quot;type&quot;:&quot;text&quot;}"/>
           <p:cNvSpPr txBox="1"/>
           <p:nvPr/>
         </p:nvSpPr>
@@ -15991,7 +19211,7 @@
       </p:sp>
       <p:sp>
         <p:nvSpPr>
-          <p:cNvPr id="343" name="" descr="{&quot;isTemplate&quot;:true,&quot;type&quot;:&quot;text&quot;}"/>
+          <p:cNvPr id="418" name="" descr="{&quot;isTemplate&quot;:true,&quot;type&quot;:&quot;text&quot;}"/>
           <p:cNvSpPr txBox="1"/>
           <p:nvPr/>
         </p:nvSpPr>
@@ -16038,7 +19258,7 @@
       </p:sp>
       <p:sp>
         <p:nvSpPr>
-          <p:cNvPr id="344" name="" descr="{&quot;isTemplate&quot;:true,&quot;type&quot;:&quot;text&quot;}"/>
+          <p:cNvPr id="419" name="" descr="{&quot;isTemplate&quot;:true,&quot;type&quot;:&quot;text&quot;}"/>
           <p:cNvSpPr txBox="1"/>
           <p:nvPr/>
         </p:nvSpPr>
@@ -16083,7 +19303,7 @@
       </p:sp>
       <p:sp>
         <p:nvSpPr>
-          <p:cNvPr id="345" name="" descr="{&quot;isTemplate&quot;:true,&quot;type&quot;:&quot;text&quot;}"/>
+          <p:cNvPr id="420" name="" descr="{&quot;isTemplate&quot;:true,&quot;type&quot;:&quot;text&quot;}"/>
           <p:cNvSpPr txBox="1"/>
           <p:nvPr/>
         </p:nvSpPr>
@@ -16140,7 +19360,7 @@
       </p:sp>
       <p:sp>
         <p:nvSpPr>
-          <p:cNvPr id="346" name="" descr="{&quot;isTemplate&quot;:true,&quot;type&quot;:&quot;text&quot;}"/>
+          <p:cNvPr id="421" name="" descr="{&quot;isTemplate&quot;:true,&quot;type&quot;:&quot;text&quot;}"/>
           <p:cNvSpPr txBox="1"/>
           <p:nvPr/>
         </p:nvSpPr>
@@ -16195,14 +19415,14 @@
       </p:sp>
       <p:sp>
         <p:nvSpPr>
-          <p:cNvPr id="347" name="" descr="{&quot;isTemplate&quot;:true,&quot;type&quot;:&quot;text&quot;}"/>
-          <p:cNvSpPr txBox="1"/>
-          <p:nvPr/>
-        </p:nvSpPr>
-        <p:spPr>
-          <a:xfrm rot="0" flipH="0" flipV="0">
-            <a:off x="11191875" y="6334125"/>
-            <a:ext cx="390525" cy="142875"/>
+          <p:cNvPr id="422" name="" descr="{&quot;isTemplate&quot;:true,&quot;type&quot;:&quot;text&quot;}"/>
+          <p:cNvSpPr txBox="1"/>
+          <p:nvPr/>
+        </p:nvSpPr>
+        <p:spPr>
+          <a:xfrm rot="0" flipH="0" flipV="0">
+            <a:off x="11258550" y="6334125"/>
+            <a:ext cx="323850" cy="142875"/>
           </a:xfrm>
           <a:prstGeom prst="rect"/>
         </p:spPr>
@@ -16222,7 +19442,7 @@
                 <a:latin typeface="Microsoft YaHei"/>
                 <a:ea typeface="Microsoft YaHei"/>
               </a:rPr>
-              <a:t>06 / 15</a:t>
+              <a:t>8 / 19</a:t>
             </a:r>
             <a:endParaRPr/>
           </a:p>
@@ -16233,12 +19453,12 @@
 </p:sld>
 </file>
 
-<file path=ppt/slides/slide7.xml><?xml version="1.0" encoding="utf-8"?>
+<file path=ppt/slides/slide9.xml><?xml version="1.0" encoding="utf-8"?>
 <p:sld xmlns:p="http://schemas.openxmlformats.org/presentationml/2006/main" xmlns:r="http://schemas.openxmlformats.org/officeDocument/2006/relationships" xmlns:a="http://schemas.openxmlformats.org/drawingml/2006/main" xmlns:asvg="http://schemas.microsoft.com/office/drawing/2016/SVG/main" xmlns:mc="http://schemas.openxmlformats.org/markup-compatibility/2006" mc:Ignorable="asvg">
   <p:cSld>
     <p:spTree>
       <p:nvGrpSpPr>
-        <p:cNvPr id="348" name="" descr="&lt;Slide style={{ width: '1280px', height: '720px', background: '#FBFCFA', position: 'relative', padding: '32px 64px', boxSizing: 'border-box', display: 'flex', flexDirection: 'column' }}&gt;&#10;  &lt;div style={{ flexShrink: 0 }}&gt;&#10;    &lt;div style={{ color: '#BD9B56', fontSize: 13, letterSpacing: '0.25em', marginBottom: 6 }}&gt;02 · 技术构建过程&lt;/div&gt;&#10;    &lt;h2 style={{ fontSize: 30, fontWeight: 'bold', color: '#172133', margin: 0, lineHeight: 1.3 }}&gt;数据库设计：15+ 张表承载整个社区&lt;/h2&gt;&#10;    &lt;div style={{ fontSize: 14, color: '#6b7075', marginTop: 6 }}&gt;数据库是系统地基，通过外键建立完整 ER 关系，覆盖社区到知识库的全部实体&lt;/div&gt;&#10;  &lt;/div&gt;&#10;  &lt;div style={{ flex: 1, display: 'flex', alignItems: 'center', minHeight: 0, gap: 28 }}&gt;&#10;    &lt;div style={{ flex: '0 0 320px', background: 'linear-gradient(135deg, #172133 0%, #22395E 100%)', borderRadius: 12, padding: '24px 24px', color: '#FBFCFA' }}&gt;&#10;      &lt;div style={{ color: '#BD9B56', fontSize: 12, letterSpacing: '0.25em', marginBottom: 12 }}&gt;CORE ENTITIES&lt;/div&gt;&#10;      &lt;div style={{ fontSize: 14, color: 'rgba(251,252,250,0.9)', lineHeight: 1.9 }}&gt;&#10;        community 社区&lt;br/&gt;&#10;        building 楼栋（8）&lt;br/&gt;&#10;        house 房屋（1664）&lt;br/&gt;&#10;        user 用户（275）&lt;br/&gt;&#10;        house_binding 房屋绑定&lt;br/&gt;&#10;        worker 物业人员（75）&lt;br/&gt;&#10;        repair_order 工单&lt;br/&gt;&#10;        fee_bill 账单（746）&lt;br/&gt;&#10;        notice 公告（24）&lt;br/&gt;&#10;        conversation / message&lt;br/&gt;&#10;        agent_trace 追踪&lt;br/&gt;&#10;        &lt;span style={{ color: '#BD9B56' }}&gt;knowledge_document / chunk&lt;/span&gt;&#10;      &lt;/div&gt;&#10;    &lt;/div&gt;&#10;    &lt;div style={{ flex: 1, background: '#fff', borderRadius: 12, padding: '20px 22px', boxShadow: '0 6px 24px rgba(23,33,51,0.08)' }}&gt;&#10;      &lt;svg width=&quot;560&quot; height=&quot;470&quot; viewBox=&quot;0 0 560 470&quot;&gt;&#10;        &lt;g fontFamily=&quot;Inter, sans-serif&quot;&gt;&#10;          &lt;rect x=&quot;14&quot; y=&quot;14&quot; width=&quot;150&quot; height=&quot;50&quot; rx=&quot;6&quot; fill=&quot;rgba(34,57,94,0.08)&quot; stroke=&quot;#22395E&quot; strokeWidth=&quot;1.5&quot; /&gt;&#10;          &lt;text x=&quot;89&quot; y=&quot;44&quot; textAnchor=&quot;middle&quot; fontSize=&quot;14&quot; fontWeight=&quot;bold&quot; fill=&quot;#172133&quot;&gt;community&lt;/text&gt;&#10;          &lt;line x1=&quot;164&quot; y1=&quot;39&quot; x2=&quot;206&quot; y2=&quot;39&quot; stroke=&quot;#BD9B56&quot; strokeWidth=&quot;1.5&quot; /&gt;&#10;          &lt;rect x=&quot;210&quot; y=&quot;14&quot; width=&quot;150&quot; height=&quot;50&quot; rx=&quot;6&quot; fill=&quot;rgba(34,57,94,0.08)&quot; stroke=&quot;#22395E&quot; strokeWidth=&quot;1.5&quot; /&gt;&#10;          &lt;text x=&quot;285&quot; y=&quot;44&quot; textAnchor=&quot;middle&quot; fontSize=&quot;14&quot; fontWeight=&quot;bold&quot; fill=&quot;#172133&quot;&gt;building ×8&lt;/text&gt;&#10;          &lt;line x1=&quot;360&quot; y1=&quot;39&quot; x2=&quot;402&quot; y2=&quot;39&quot; stroke=&quot;#BD9B56&quot; strokeWidth=&quot;1.5&quot; /&gt;&#10;          &lt;rect x=&quot;406&quot; y=&quot;14&quot; width=&quot;150&quot; height=&quot;50&quot; rx=&quot;6&quot; fill=&quot;rgba(34,57,94,0.08)&quot; stroke=&quot;#22395E&quot; strokeWidth=&quot;1.5&quot; /&gt;&#10;          &lt;text x=&quot;481&quot; y=&quot;44&quot; textAnchor=&quot;middle&quot; fontSize=&quot;14&quot; fontWeight=&quot;bold&quot; fill=&quot;#172133&quot;&gt;house ×1664&lt;/text&gt;&#10;          &lt;line x1=&quot;285&quot; y1=&quot;64&quot; x2=&quot;285&quot; y2=&quot;104&quot; stroke=&quot;#BD9B56&quot; strokeWidth=&quot;1.5&quot; /&gt;&#10;          &lt;rect x=&quot;210&quot; y=&quot;108&quot; width=&quot;150&quot; height=&quot;50&quot; rx=&quot;6&quot; fill=&quot;rgba(189,155,86,0.10)&quot; stroke=&quot;#BD9B56&quot; strokeWidth=&quot;1.5&quot; /&gt;&#10;          &lt;text x=&quot;285&quot; y=&quot;138&quot; textAnchor=&quot;middle&quot; fontSize=&quot;14&quot; fontWeight=&quot;bold&quot; fill=&quot;#172133&quot;&gt;user ×275&lt;/text&gt;&#10;          &lt;line x1=&quot;210&quot; y1=&quot;133&quot; x2=&quot;164&quot; y2=&quot;133&quot; stroke=&quot;#BD9B56&quot; strokeWidth=&quot;1.5&quot; /&gt;&#10;          &lt;rect x=&quot;14&quot; y=&quot;108&quot; width=&quot;150&quot; height=&quot;50&quot; rx=&quot;6&quot; fill=&quot;rgba(189,155,86,0.10)&quot; stroke=&quot;#BD9B56&quot; strokeWidth=&quot;1.5&quot; /&gt;&#10;          &lt;text x=&quot;89&quot; y=&quot;138&quot; textAnchor=&quot;middle&quot; fontSize=&quot;14&quot; fontWeight=&quot;bold&quot; fill=&quot;#172133&quot;&gt;house_binding&lt;/text&gt;&#10;          &lt;line x1=&quot;285&quot; y1=&quot;158&quot; x2=&quot;285&quot; y2=&quot;198&quot; stroke=&quot;#BD9B56&quot; strokeWidth=&quot;1.5&quot; /&gt;&#10;          &lt;rect x=&quot;210&quot; y=&quot;202&quot; width=&quot;150&quot; height=&quot;50&quot; rx=&quot;6&quot; fill=&quot;rgba(34,57,94,0.08)&quot; stroke=&quot;#22395E&quot; strokeWidth=&quot;1.5&quot; /&gt;&#10;          &lt;text x=&quot;285&quot; y=&quot;232&quot; textAnchor=&quot;middle&quot; fontSize=&quot;14&quot; fontWeight=&quot;bold&quot; fill=&quot;#172133&quot;&gt;worker ×75&lt;/text&gt;&#10;          &lt;line x1=&quot;285&quot; y1=&quot;252&quot; x2=&quot;285&quot; y2=&quot;292&quot; stroke=&quot;#BD9B56&quot; strokeWidth=&quot;1.5&quot; /&gt;&#10;          &lt;rect x=&quot;160&quot; y=&quot;296&quot; width=&quot;130&quot; height=&quot;50&quot; rx=&quot;6&quot; fill=&quot;rgba(34,57,94,0.08)&quot; stroke=&quot;#22395E&quot; strokeWidth=&quot;1.5&quot; /&gt;&#10;          &lt;text x=&quot;225&quot; y=&quot;326&quot; textAnchor=&quot;middle&quot; fontSize=&quot;13&quot; fontWeight=&quot;bold&quot; fill=&quot;#172133&quot;&gt;repair_order&lt;/text&gt;&#10;          &lt;rect x=&quot;306&quot; y=&quot;296&quot; width=&quot;130&quot; height=&quot;50&quot; rx=&quot;6&quot; fill=&quot;rgba(34,57,94,0.08)&quot; stroke=&quot;#22395E&quot; strokeWidth=&quot;1.5&quot; /&gt;&#10;          &lt;text x=&quot;371&quot; y=&quot;326&quot; textAnchor=&quot;middle&quot; fontSize=&quot;13&quot; fontWeight=&quot;bold&quot; fill=&quot;#172133&quot;&gt;fee_bill ×746&lt;/text&gt;&#10;          &lt;line x1=&quot;225&quot; y1=&quot;346&quot; x2=&quot;225&quot; y2=&quot;386&quot; stroke=&quot;#BD9B56&quot; strokeWidth=&quot;1.5&quot; /&gt;&#10;          &lt;rect x=&quot;160&quot; y=&quot;390&quot; width=&quot;130&quot; height=&quot;50&quot; rx=&quot;6&quot; fill=&quot;rgba(34,57,94,0.08)&quot; stroke=&quot;#22395E&quot; strokeWidth=&quot;1.5&quot; /&gt;&#10;          &lt;text x=&quot;225&quot; y=&quot;420&quot; textAnchor=&quot;middle&quot; fontSize=&quot;13&quot; fontWeight=&quot;bold&quot; fill=&quot;#172133&quot;&gt;notice ×24&lt;/text&gt;&#10;          &lt;rect x=&quot;306&quot; y=&quot;390&quot; width=&quot;130&quot; height=&quot;50&quot; rx=&quot;6&quot; fill=&quot;#172133&quot; stroke=&quot;#BD9B56&quot; strokeWidth=&quot;1.5&quot; /&gt;&#10;          &lt;text x=&quot;371&quot; y=&quot;416&quot; textAnchor=&quot;middle&quot; fontSize=&quot;12&quot; fontWeight=&quot;bold&quot; fill=&quot;#BD9B56&quot;&gt;knowledge&lt;/text&gt;&#10;          &lt;text x=&quot;371&quot; y=&quot;434&quot; textAnchor=&quot;middle&quot; fontSize=&quot;10&quot; fill=&quot;#FBFCFA&quot;&gt;document + chunk&lt;/text&gt;&#10;        &lt;/g&gt;&#10;      &lt;/svg&gt;&#10;    &lt;/div&gt;&#10;  &lt;/div&gt;&#10;  &lt;div style={{ flexShrink: 0, height: 40, display: 'flex', alignItems: 'flex-end', justifyContent: 'space-between' }}&gt;&#10;    &lt;span style={{ color: '#BD9B56', fontSize: 12, letterSpacing: '0.1em' }}&gt;云溪花园 · 智慧社区&lt;/span&gt;&#10;    &lt;span style={{ color: '#a09b8c', fontSize: 12 }}&gt;07 / 15&lt;/span&gt;&#10;  &lt;/div&gt;&#10;&lt;/Slide&gt;"/>
+        <p:cNvPr id="423" name="" descr="&lt;Slide style={{ width: '1280px', height: '720px', background: '#FBFCFA', position: 'relative', padding: '32px 64px', boxSizing: 'border-box', display: 'flex', flexDirection: 'column' }}&gt;&#13;&#10;  &lt;div style={{ flexShrink: 0 }}&gt;&#13;&#10;    &lt;div style={{ color: '#BD9B56', fontSize: 13, letterSpacing: '0.25em', marginBottom: 6 }}&gt;02 · 技术构建过程&lt;/div&gt;&#13;&#10;    &lt;h2 style={{ fontSize: 30, fontWeight: 'bold', color: '#172133', margin: 0, lineHeight: 1.3 }}&gt;数据库设计：15+ 张表承载整个社区&lt;/h2&gt;&#13;&#10;    &lt;div style={{ fontSize: 14, color: '#6b7075', marginTop: 6 }}&gt;数据库是系统地基，通过外键建立完整 ER 关系，覆盖社区到知识库的全部实体&lt;/div&gt;&#13;&#10;  &lt;/div&gt;&#13;&#10;  &lt;div style={{ flex: 1, display: 'flex', alignItems: 'center', minHeight: 0, gap: 28 }}&gt;&#13;&#10;    &lt;div style={{ flex: '0 0 320px', background: 'linear-gradient(135deg, #172133 0%, #22395E 100%)', borderRadius: 12, padding: '24px 24px', color: '#FBFCFA' }}&gt;&#13;&#10;      &lt;div style={{ color: '#BD9B56', fontSize: 12, letterSpacing: '0.25em', marginBottom: 12 }}&gt;CORE ENTITIES&lt;/div&gt;&#13;&#10;      &lt;div style={{ fontSize: 14, color: 'rgba(251,252,250,0.9)', lineHeight: 1.9 }}&gt;&#13;&#10;        community 社区&lt;br/&gt;&#13;&#10;        building 楼栋（8）&lt;br/&gt;&#13;&#10;        house 房屋（1664）&lt;br/&gt;&#13;&#10;        user 用户（275）&lt;br/&gt;&#13;&#10;        house_binding 房屋绑定&lt;br/&gt;&#13;&#10;        worker 物业人员（75）&lt;br/&gt;&#13;&#10;        repair_order 工单&lt;br/&gt;&#13;&#10;        fee_bill 账单（746）&lt;br/&gt;&#13;&#10;        notice 公告（24）&lt;br/&gt;&#13;&#10;        conversation / message&lt;br/&gt;&#13;&#10;        agent_trace 追踪&lt;br/&gt;&#13;&#10;        &lt;span style={{ color: '#BD9B56' }}&gt;knowledge_document / chunk&lt;/span&gt;&#13;&#10;      &lt;/div&gt;&#13;&#10;    &lt;/div&gt;&#13;&#10;    &lt;div style={{ flex: 1, background: '#fff', borderRadius: 12, padding: '20px 22px', boxShadow: '0 6px 24px rgba(23,33,51,0.08)' }}&gt;&#13;&#10;      &lt;svg width=&quot;560&quot; height=&quot;470&quot; viewBox=&quot;0 0 560 470&quot;&gt;&#13;&#10;        &lt;g fontFamily=&quot;Inter, sans-serif&quot;&gt;&#13;&#10;          &lt;rect x=&quot;14&quot; y=&quot;14&quot; width=&quot;150&quot; height=&quot;50&quot; rx=&quot;6&quot; fill=&quot;rgba(34,57,94,0.08)&quot; stroke=&quot;#22395E&quot; strokeWidth=&quot;1.5&quot; /&gt;&#13;&#10;          &lt;text x=&quot;89&quot; y=&quot;44&quot; textAnchor=&quot;middle&quot; fontSize=&quot;14&quot; fontWeight=&quot;bold&quot; fill=&quot;#172133&quot;&gt;community&lt;/text&gt;&#13;&#10;          &lt;line x1=&quot;164&quot; y1=&quot;39&quot; x2=&quot;206&quot; y2=&quot;39&quot; stroke=&quot;#BD9B56&quot; strokeWidth=&quot;1.5&quot; /&gt;&#13;&#10;          &lt;rect x=&quot;210&quot; y=&quot;14&quot; width=&quot;150&quot; height=&quot;50&quot; rx=&quot;6&quot; fill=&quot;rgba(34,57,94,0.08)&quot; stroke=&quot;#22395E&quot; strokeWidth=&quot;1.5&quot; /&gt;&#13;&#10;          &lt;text x=&quot;285&quot; y=&quot;44&quot; textAnchor=&quot;middle&quot; fontSize=&quot;14&quot; fontWeight=&quot;bold&quot; fill=&quot;#172133&quot;&gt;building ×8&lt;/text&gt;&#13;&#10;          &lt;line x1=&quot;360&quot; y1=&quot;39&quot; x2=&quot;402&quot; y2=&quot;39&quot; stroke=&quot;#BD9B56&quot; strokeWidth=&quot;1.5&quot; /&gt;&#13;&#10;          &lt;rect x=&quot;406&quot; y=&quot;14&quot; width=&quot;150&quot; height=&quot;50&quot; rx=&quot;6&quot; fill=&quot;rgba(34,57,94,0.08)&quot; stroke=&quot;#22395E&quot; strokeWidth=&quot;1.5&quot; /&gt;&#13;&#10;          &lt;text x=&quot;481&quot; y=&quot;44&quot; textAnchor=&quot;middle&quot; fontSize=&quot;14&quot; fontWeight=&quot;bold&quot; fill=&quot;#172133&quot;&gt;house ×1664&lt;/text&gt;&#13;&#10;          &lt;line x1=&quot;285&quot; y1=&quot;64&quot; x2=&quot;285&quot; y2=&quot;104&quot; stroke=&quot;#BD9B56&quot; strokeWidth=&quot;1.5&quot; /&gt;&#13;&#10;          &lt;rect x=&quot;210&quot; y=&quot;108&quot; width=&quot;150&quot; height=&quot;50&quot; rx=&quot;6&quot; fill=&quot;rgba(189,155,86,0.10)&quot; stroke=&quot;#BD9B56&quot; strokeWidth=&quot;1.5&quot; /&gt;&#13;&#10;          &lt;text x=&quot;285&quot; y=&quot;138&quot; textAnchor=&quot;middle&quot; fontSize=&quot;14&quot; fontWeight=&quot;bold&quot; fill=&quot;#172133&quot;&gt;user ×275&lt;/text&gt;&#13;&#10;          &lt;line x1=&quot;210&quot; y1=&quot;133&quot; x2=&quot;164&quot; y2=&quot;133&quot; stroke=&quot;#BD9B56&quot; strokeWidth=&quot;1.5&quot; /&gt;&#13;&#10;          &lt;rect x=&quot;14&quot; y=&quot;108&quot; width=&quot;150&quot; height=&quot;50&quot; rx=&quot;6&quot; fill=&quot;rgba(189,155,86,0.10)&quot; stroke=&quot;#BD9B56&quot; strokeWidth=&quot;1.5&quot; /&gt;&#13;&#10;          &lt;text x=&quot;89&quot; y=&quot;138&quot; textAnchor=&quot;middle&quot; fontSize=&quot;14&quot; fontWeight=&quot;bold&quot; fill=&quot;#172133&quot;&gt;house_binding&lt;/text&gt;&#13;&#10;          &lt;line x1=&quot;285&quot; y1=&quot;158&quot; x2=&quot;285&quot; y2=&quot;198&quot; stroke=&quot;#BD9B56&quot; strokeWidth=&quot;1.5&quot; /&gt;&#13;&#10;          &lt;rect x=&quot;210&quot; y=&quot;202&quot; width=&quot;150&quot; height=&quot;50&quot; rx=&quot;6&quot; fill=&quot;rgba(34,57,94,0.08)&quot; stroke=&quot;#22395E&quot; strokeWidth=&quot;1.5&quot; /&gt;&#13;&#10;          &lt;text x=&quot;285&quot; y=&quot;232&quot; textAnchor=&quot;middle&quot; fontSize=&quot;14&quot; fontWeight=&quot;bold&quot; fill=&quot;#172133&quot;&gt;worker ×75&lt;/text&gt;&#13;&#10;          &lt;line x1=&quot;285&quot; y1=&quot;252&quot; x2=&quot;285&quot; y2=&quot;292&quot; stroke=&quot;#BD9B56&quot; strokeWidth=&quot;1.5&quot; /&gt;&#13;&#10;          &lt;rect x=&quot;160&quot; y=&quot;296&quot; width=&quot;130&quot; height=&quot;50&quot; rx=&quot;6&quot; fill=&quot;rgba(34,57,94,0.08)&quot; stroke=&quot;#22395E&quot; strokeWidth=&quot;1.5&quot; /&gt;&#13;&#10;          &lt;text x=&quot;225&quot; y=&quot;326&quot; textAnchor=&quot;middle&quot; fontSize=&quot;13&quot; fontWeight=&quot;bold&quot; fill=&quot;#172133&quot;&gt;repair_order&lt;/text&gt;&#13;&#10;          &lt;rect x=&quot;306&quot; y=&quot;296&quot; width=&quot;130&quot; height=&quot;50&quot; rx=&quot;6&quot; fill=&quot;rgba(34,57,94,0.08)&quot; stroke=&quot;#22395E&quot; strokeWidth=&quot;1.5&quot; /&gt;&#13;&#10;          &lt;text x=&quot;371&quot; y=&quot;326&quot; textAnchor=&quot;middle&quot; fontSize=&quot;13&quot; fontWeight=&quot;bold&quot; fill=&quot;#172133&quot;&gt;fee_bill ×746&lt;/text&gt;&#13;&#10;          &lt;line x1=&quot;225&quot; y1=&quot;346&quot; x2=&quot;225&quot; y2=&quot;386&quot; stroke=&quot;#BD9B56&quot; strokeWidth=&quot;1.5&quot; /&gt;&#13;&#10;          &lt;rect x=&quot;160&quot; y=&quot;390&quot; width=&quot;130&quot; height=&quot;50&quot; rx=&quot;6&quot; fill=&quot;rgba(34,57,94,0.08)&quot; stroke=&quot;#22395E&quot; strokeWidth=&quot;1.5&quot; /&gt;&#13;&#10;          &lt;text x=&quot;225&quot; y=&quot;420&quot; textAnchor=&quot;middle&quot; fontSize=&quot;13&quot; fontWeight=&quot;bold&quot; fill=&quot;#172133&quot;&gt;notice ×24&lt;/text&gt;&#13;&#10;          &lt;rect x=&quot;306&quot; y=&quot;390&quot; width=&quot;130&quot; height=&quot;50&quot; rx=&quot;6&quot; fill=&quot;#172133&quot; stroke=&quot;#BD9B56&quot; strokeWidth=&quot;1.5&quot; /&gt;&#13;&#10;          &lt;text x=&quot;371&quot; y=&quot;416&quot; textAnchor=&quot;middle&quot; fontSize=&quot;12&quot; fontWeight=&quot;bold&quot; fill=&quot;#BD9B56&quot;&gt;knowledge&lt;/text&gt;&#13;&#10;          &lt;text x=&quot;371&quot; y=&quot;434&quot; textAnchor=&quot;middle&quot; fontSize=&quot;10&quot; fill=&quot;#FBFCFA&quot;&gt;document + chunk&lt;/text&gt;&#13;&#10;        &lt;/g&gt;&#13;&#10;      &lt;/svg&gt;&#13;&#10;    &lt;/div&gt;&#13;&#10;  &lt;/div&gt;&#13;&#10;  &lt;div style={{ flexShrink: 0, height: 40, display: 'flex', alignItems: 'flex-end', justifyContent: 'space-between' }}&gt;&#13;&#10;    &lt;span style={{ color: '#BD9B56', fontSize: 12, letterSpacing: '0.1em' }}&gt;云溪花园 · 智慧社区&lt;/span&gt;&#13;&#10;    &lt;span style={{ color: '#a09b8c', fontSize: 12 }}&gt;9 / 19&lt;/span&gt;&#13;&#10;  &lt;/div&gt;&#13;&#10;&lt;/Slide&gt;"/>
         <p:cNvGrpSpPr/>
         <p:nvPr/>
       </p:nvGrpSpPr>
@@ -16252,7 +19472,7 @@
       </p:grpSpPr>
       <p:sp>
         <p:nvSpPr>
-          <p:cNvPr id="349" name=""/>
+          <p:cNvPr id="424" name=""/>
           <p:cNvSpPr/>
           <p:nvPr/>
         </p:nvSpPr>
@@ -16276,7 +19496,7 @@
       </p:sp>
       <p:sp>
         <p:nvSpPr>
-          <p:cNvPr id="350" name="" descr="{&quot;isTemplate&quot;:true,&quot;type&quot;:&quot;text&quot;}"/>
+          <p:cNvPr id="425" name="" descr="{&quot;isTemplate&quot;:true,&quot;type&quot;:&quot;text&quot;}"/>
           <p:cNvSpPr txBox="1"/>
           <p:nvPr/>
         </p:nvSpPr>
@@ -16321,7 +19541,7 @@
       </p:sp>
       <p:sp>
         <p:nvSpPr>
-          <p:cNvPr id="351" name="" descr="{&quot;isTemplate&quot;:true,&quot;type&quot;:&quot;text&quot;}"/>
+          <p:cNvPr id="426" name="" descr="{&quot;isTemplate&quot;:true,&quot;type&quot;:&quot;text&quot;}"/>
           <p:cNvSpPr txBox="1"/>
           <p:nvPr/>
         </p:nvSpPr>
@@ -16376,7 +19596,7 @@
       </p:sp>
       <p:sp>
         <p:nvSpPr>
-          <p:cNvPr id="352" name="" descr="{&quot;isTemplate&quot;:true,&quot;type&quot;:&quot;text&quot;}"/>
+          <p:cNvPr id="427" name="" descr="{&quot;isTemplate&quot;:true,&quot;type&quot;:&quot;text&quot;}"/>
           <p:cNvSpPr txBox="1"/>
           <p:nvPr/>
         </p:nvSpPr>
@@ -16431,7 +19651,7 @@
       </p:sp>
       <p:sp>
         <p:nvSpPr>
-          <p:cNvPr id="353" name=""/>
+          <p:cNvPr id="428" name=""/>
           <p:cNvSpPr/>
           <p:nvPr/>
         </p:nvSpPr>
@@ -16465,7 +19685,7 @@
       </p:sp>
       <p:sp>
         <p:nvSpPr>
-          <p:cNvPr id="354" name="" descr="{&quot;isTemplate&quot;:true,&quot;type&quot;:&quot;text&quot;}"/>
+          <p:cNvPr id="429" name="" descr="{&quot;isTemplate&quot;:true,&quot;type&quot;:&quot;text&quot;}"/>
           <p:cNvSpPr txBox="1"/>
           <p:nvPr/>
         </p:nvSpPr>
@@ -16500,7 +19720,7 @@
       </p:sp>
       <p:sp>
         <p:nvSpPr>
-          <p:cNvPr id="355" name="" descr="{&quot;isTemplate&quot;:true,&quot;type&quot;:&quot;text&quot;}"/>
+          <p:cNvPr id="430" name="" descr="{&quot;isTemplate&quot;:true,&quot;type&quot;:&quot;text&quot;}"/>
           <p:cNvSpPr txBox="1"/>
           <p:nvPr/>
         </p:nvSpPr>
@@ -16521,7 +19741,7 @@
       </p:sp>
       <p:sp>
         <p:nvSpPr>
-          <p:cNvPr id="356" name="" descr="{&quot;isTemplate&quot;:true,&quot;type&quot;:&quot;text&quot;}"/>
+          <p:cNvPr id="431" name="" descr="{&quot;isTemplate&quot;:true,&quot;type&quot;:&quot;text&quot;}"/>
           <p:cNvSpPr txBox="1"/>
           <p:nvPr/>
         </p:nvSpPr>
@@ -16542,7 +19762,7 @@
       </p:sp>
       <p:sp>
         <p:nvSpPr>
-          <p:cNvPr id="357" name="" descr="{&quot;isTemplate&quot;:true,&quot;type&quot;:&quot;text&quot;}"/>
+          <p:cNvPr id="432" name="" descr="{&quot;isTemplate&quot;:true,&quot;type&quot;:&quot;text&quot;}"/>
           <p:cNvSpPr txBox="1"/>
           <p:nvPr/>
         </p:nvSpPr>
@@ -16563,7 +19783,7 @@
       </p:sp>
       <p:sp>
         <p:nvSpPr>
-          <p:cNvPr id="358" name="" descr="{&quot;isTemplate&quot;:true,&quot;type&quot;:&quot;text&quot;}"/>
+          <p:cNvPr id="433" name="" descr="{&quot;isTemplate&quot;:true,&quot;type&quot;:&quot;text&quot;}"/>
           <p:cNvSpPr txBox="1"/>
           <p:nvPr/>
         </p:nvSpPr>
@@ -16584,7 +19804,7 @@
       </p:sp>
       <p:sp>
         <p:nvSpPr>
-          <p:cNvPr id="359" name="" descr="{&quot;isTemplate&quot;:true,&quot;type&quot;:&quot;text&quot;}"/>
+          <p:cNvPr id="434" name="" descr="{&quot;isTemplate&quot;:true,&quot;type&quot;:&quot;text&quot;}"/>
           <p:cNvSpPr txBox="1"/>
           <p:nvPr/>
         </p:nvSpPr>
@@ -16605,7 +19825,7 @@
       </p:sp>
       <p:sp>
         <p:nvSpPr>
-          <p:cNvPr id="360" name="" descr="{&quot;isTemplate&quot;:true,&quot;type&quot;:&quot;text&quot;}"/>
+          <p:cNvPr id="435" name="" descr="{&quot;isTemplate&quot;:true,&quot;type&quot;:&quot;text&quot;}"/>
           <p:cNvSpPr txBox="1"/>
           <p:nvPr/>
         </p:nvSpPr>
@@ -16626,7 +19846,7 @@
       </p:sp>
       <p:sp>
         <p:nvSpPr>
-          <p:cNvPr id="361" name="" descr="{&quot;isTemplate&quot;:true,&quot;type&quot;:&quot;text&quot;}"/>
+          <p:cNvPr id="436" name="" descr="{&quot;isTemplate&quot;:true,&quot;type&quot;:&quot;text&quot;}"/>
           <p:cNvSpPr txBox="1"/>
           <p:nvPr/>
         </p:nvSpPr>
@@ -16647,7 +19867,7 @@
       </p:sp>
       <p:sp>
         <p:nvSpPr>
-          <p:cNvPr id="362" name="" descr="{&quot;isTemplate&quot;:true,&quot;type&quot;:&quot;text&quot;}"/>
+          <p:cNvPr id="437" name="" descr="{&quot;isTemplate&quot;:true,&quot;type&quot;:&quot;text&quot;}"/>
           <p:cNvSpPr txBox="1"/>
           <p:nvPr/>
         </p:nvSpPr>
@@ -16668,7 +19888,7 @@
       </p:sp>
       <p:sp>
         <p:nvSpPr>
-          <p:cNvPr id="363" name="" descr="{&quot;isTemplate&quot;:true,&quot;type&quot;:&quot;text&quot;}"/>
+          <p:cNvPr id="438" name="" descr="{&quot;isTemplate&quot;:true,&quot;type&quot;:&quot;text&quot;}"/>
           <p:cNvSpPr txBox="1"/>
           <p:nvPr/>
         </p:nvSpPr>
@@ -16689,7 +19909,7 @@
       </p:sp>
       <p:sp>
         <p:nvSpPr>
-          <p:cNvPr id="364" name="" descr="{&quot;isTemplate&quot;:true,&quot;type&quot;:&quot;text&quot;}"/>
+          <p:cNvPr id="439" name="" descr="{&quot;isTemplate&quot;:true,&quot;type&quot;:&quot;text&quot;}"/>
           <p:cNvSpPr txBox="1"/>
           <p:nvPr/>
         </p:nvSpPr>
@@ -16710,7 +19930,7 @@
       </p:sp>
       <p:sp>
         <p:nvSpPr>
-          <p:cNvPr id="365" name="" descr="{&quot;isTemplate&quot;:true,&quot;type&quot;:&quot;text&quot;}"/>
+          <p:cNvPr id="440" name="" descr="{&quot;isTemplate&quot;:true,&quot;type&quot;:&quot;text&quot;}"/>
           <p:cNvSpPr txBox="1"/>
           <p:nvPr/>
         </p:nvSpPr>
@@ -16731,7 +19951,7 @@
       </p:sp>
       <p:sp>
         <p:nvSpPr>
-          <p:cNvPr id="366" name="" descr="{&quot;isTemplate&quot;:true,&quot;type&quot;:&quot;text&quot;}"/>
+          <p:cNvPr id="441" name="" descr="{&quot;isTemplate&quot;:true,&quot;type&quot;:&quot;text&quot;}"/>
           <p:cNvSpPr txBox="1"/>
           <p:nvPr/>
         </p:nvSpPr>
@@ -16766,7 +19986,7 @@
       </p:sp>
       <p:sp>
         <p:nvSpPr>
-          <p:cNvPr id="367" name=""/>
+          <p:cNvPr id="442" name=""/>
           <p:cNvSpPr/>
           <p:nvPr/>
         </p:nvSpPr>
@@ -16799,7 +20019,7 @@
       </p:sp>
       <p:pic>
         <p:nvPicPr>
-          <p:cNvPr id="368" name=""/>
+          <p:cNvPr id="443" name=""/>
           <p:cNvPicPr>
             <a:picLocks noChangeAspect="1"/>
           </p:cNvPicPr>
@@ -16830,7 +20050,7 @@
       </p:pic>
       <p:sp>
         <p:nvSpPr>
-          <p:cNvPr id="369" name="" descr="{&quot;isTemplate&quot;:true,&quot;type&quot;:&quot;text&quot;}"/>
+          <p:cNvPr id="444" name="" descr="{&quot;isTemplate&quot;:true,&quot;type&quot;:&quot;text&quot;}"/>
           <p:cNvSpPr txBox="1"/>
           <p:nvPr/>
         </p:nvSpPr>
@@ -16885,14 +20105,14 @@
       </p:sp>
       <p:sp>
         <p:nvSpPr>
-          <p:cNvPr id="370" name="" descr="{&quot;isTemplate&quot;:true,&quot;type&quot;:&quot;text&quot;}"/>
-          <p:cNvSpPr txBox="1"/>
-          <p:nvPr/>
-        </p:nvSpPr>
-        <p:spPr>
-          <a:xfrm rot="0" flipH="0" flipV="0">
-            <a:off x="11191875" y="6410325"/>
-            <a:ext cx="390525" cy="142875"/>
+          <p:cNvPr id="445" name="" descr="{&quot;isTemplate&quot;:true,&quot;type&quot;:&quot;text&quot;}"/>
+          <p:cNvSpPr txBox="1"/>
+          <p:nvPr/>
+        </p:nvSpPr>
+        <p:spPr>
+          <a:xfrm rot="0" flipH="0" flipV="0">
+            <a:off x="11258550" y="6410325"/>
+            <a:ext cx="323850" cy="142875"/>
           </a:xfrm>
           <a:prstGeom prst="rect"/>
         </p:spPr>
@@ -16912,2019 +20132,7 @@
                 <a:latin typeface="Microsoft YaHei"/>
                 <a:ea typeface="Microsoft YaHei"/>
               </a:rPr>
-              <a:t>07 / 15</a:t>
-            </a:r>
-            <a:endParaRPr/>
-          </a:p>
-        </p:txBody>
-      </p:sp>
-    </p:spTree>
-  </p:cSld>
-</p:sld>
-</file>
-
-<file path=ppt/slides/slide8.xml><?xml version="1.0" encoding="utf-8"?>
-<p:sld xmlns:p="http://schemas.openxmlformats.org/presentationml/2006/main" xmlns:a="http://schemas.openxmlformats.org/drawingml/2006/main">
-  <p:cSld>
-    <p:spTree>
-      <p:nvGrpSpPr>
-        <p:cNvPr id="371" name="" descr="&lt;Slide style={{ width: '1280px', height: '720px', background: '#FBFCFA', position: 'relative', padding: '40px 64px', boxSizing: 'border-box', display: 'flex', flexDirection: 'column' }}&gt;&#10;  &lt;div style={{ flexShrink: 0 }}&gt;&#10;    &lt;div style={{ color: '#BD9B56', fontSize: 13, letterSpacing: '0.25em', marginBottom: 8 }}&gt;02 · 技术构建过程&lt;/div&gt;&#10;    &lt;h2 style={{ fontSize: 30, fontWeight: 'bold', color: '#172133', margin: 0, lineHeight: 1.3 }}&gt;后端分层 + 前端三端一体&lt;/h2&gt;&#10;  &lt;/div&gt;&#10;  &lt;div style={{ flex: 1, display: 'flex', alignItems: 'center', gap: 32 }}&gt;&#10;    &lt;div style={{ flex: 1, display: 'flex', flexDirection: 'column', gap: 16 }}&gt;&#10;      &lt;div style={{ background: '#fff', borderRadius: 10, padding: '18px 22px', boxShadow: '0 4px 16px rgba(23,33,51,0.06)' }}&gt;&#10;        &lt;div style={{ fontSize: 17, fontWeight: 'bold', color: '#172133', marginBottom: 6 }}&gt;后端：FastAPI 三层架构&lt;/div&gt;&#10;        &lt;p style={{ fontSize: 14, color: '#5F5E5A', margin: 0, lineHeight: 1.6 }}&gt;API 路由层 → Service 业务层 → Repository 数据层。业务与数据解耦，AI 逻辑不混入业务代码。&lt;/p&gt;&#10;      &lt;/div&gt;&#10;      &lt;div style={{ background: '#fff', borderRadius: 10, padding: '18px 22px', boxShadow: '0 4px 16px rgba(23,33,51,0.06)' }}&gt;&#10;        &lt;div style={{ fontSize: 17, fontWeight: 'bold', color: '#172133', marginBottom: 6 }}&gt;派单算法&lt;/div&gt;&#10;        &lt;p style={{ fontSize: 14, color: '#5F5E5A', margin: 0, lineHeight: 1.6 }}&gt;按「技能匹配 + 在岗状态 + 工号升序」自动选择维修师傅，无需人工指派，报修提交即自动派单。&lt;/p&gt;&#10;      &lt;/div&gt;&#10;      &lt;div style={{ background: '#fff', borderRadius: 10, padding: '18px 22px', boxShadow: '0 4px 16px rgba(23,33,51,0.06)' }}&gt;&#10;        &lt;div style={{ fontSize: 17, fontWeight: 'bold', color: '#172133', marginBottom: 6 }}&gt;消息通知&lt;/div&gt;&#10;        &lt;p style={{ fontSize: 14, color: '#5F5E5A', margin: 0, lineHeight: 1.6 }}&gt;派单、完成、答复、巡检异常等事件全链路实时通知相关角色，保证业务协同不遗漏。&lt;/p&gt;&#10;      &lt;/div&gt;&#10;    &lt;/div&gt;&#10;    &lt;div style={{ flex: 1, background: 'linear-gradient(135deg, #172133 0%, #22395E 100%)', borderRadius: 12, padding: '26px 26px', color: '#FBFCFA' }}&gt;&#10;      &lt;div style={{ color: '#BD9B56', fontSize: 13, letterSpacing: '0.25em', marginBottom: 18 }}&gt;FRONTEND · 三端&lt;/div&gt;&#10;      &lt;div style={{ display: 'flex', flexDirection: 'column', gap: 14 }}&gt;&#10;        &lt;div style={{ display: 'flex', alignItems: 'center', gap: 12, padding: '12px 16px', background: 'rgba(189,155,86,0.10)', borderRadius: 8 }}&gt;&#10;          &lt;span style={{ color: '#BD9B56', fontSize: 17, fontWeight: 'bold', minWidth: 64 }}&gt;业主端&lt;/span&gt;&#10;          &lt;span style={{ fontSize: 13, color: 'rgba(251,252,250,0.85)' }}&gt;AI 助手 · 报修 · 缴费 · 公告 · 问题上报&lt;/span&gt;&#10;        &lt;/div&gt;&#10;        &lt;div style={{ display: 'flex', alignItems: 'center', gap: 12, padding: '12px 16px', background: 'rgba(189,155,86,0.10)', borderRadius: 8 }}&gt;&#10;          &lt;span style={{ color: '#BD9B56', fontSize: 17, fontWeight: 'bold', minWidth: 64 }}&gt;物业端&lt;/span&gt;&#10;          &lt;span style={{ fontSize: 13, color: 'rgba(251,252,250,0.85)' }}&gt;工单管理 · 巡检 · 数据看板 · 知识审核&lt;/span&gt;&#10;        &lt;/div&gt;&#10;        &lt;div style={{ display: 'flex', alignItems: 'center', gap: 12, padding: '12px 16px', background: 'rgba(189,155,86,0.10)', borderRadius: 8 }}&gt;&#10;          &lt;span style={{ color: '#BD9B56', fontSize: 17, fontWeight: 'bold', minWidth: 64 }}&gt;维修端&lt;/span&gt;&#10;          &lt;span style={{ fontSize: 13, color: 'rgba(251,252,250,0.85)' }}&gt;接单 · 处理 · 消息 · 巡检任务&lt;/span&gt;&#10;        &lt;/div&gt;&#10;      &lt;/div&gt;&#10;      &lt;div style={{ marginTop: 20, paddingTop: 18, borderTop: '1px solid rgba(189,155,86,0.3)' }}&gt;&#10;        &lt;div style={{ fontSize: 13, color: 'rgba(251,252,250,0.8)', lineHeight: 1.7 }}&gt;&#10;          React + TypeScript + Tailwind&lt;br/&gt;JWT 鉴权 · 角色路由 · 支持 PWA 安装&lt;br/&gt;后端 113 测试 + 前端 30 测试全绿&#10;        &lt;/div&gt;&#10;      &lt;/div&gt;&#10;    &lt;/div&gt;&#10;  &lt;/div&gt;&#10;  &lt;div style={{ flexShrink: 0, height: 40, display: 'flex', alignItems: 'flex-end', justifyContent: 'space-between' }}&gt;&#10;    &lt;span style={{ color: '#BD9B56', fontSize: 12, letterSpacing: '0.1em' }}&gt;云溪花园 · 智慧社区&lt;/span&gt;&#10;    &lt;span style={{ color: '#a09b8c', fontSize: 12 }}&gt;08 / 15&lt;/span&gt;&#10;  &lt;/div&gt;&#10;&lt;/Slide&gt;"/>
-        <p:cNvGrpSpPr/>
-        <p:nvPr/>
-      </p:nvGrpSpPr>
-      <p:grpSpPr>
-        <a:xfrm>
-          <a:off x="0" y="0"/>
-          <a:ext cx="0" cy="0"/>
-          <a:chOff x="0" y="0"/>
-          <a:chExt cx="0" cy="0"/>
-        </a:xfrm>
-      </p:grpSpPr>
-      <p:sp>
-        <p:nvSpPr>
-          <p:cNvPr id="372" name=""/>
-          <p:cNvSpPr/>
-          <p:nvPr/>
-        </p:nvSpPr>
-        <p:spPr>
-          <a:xfrm rot="0" flipH="0" flipV="0">
-            <a:off x="0" y="0"/>
-            <a:ext cx="12192000" cy="6858000"/>
-          </a:xfrm>
-          <a:prstGeom prst="rect">
-            <a:avLst/>
-          </a:prstGeom>
-          <a:solidFill>
-            <a:srgbClr val="FBFCFA"/>
-          </a:solidFill>
-          <a:ln/>
-        </p:spPr>
-        <p:txBody>
-          <a:bodyPr/>
-          <a:p/>
-        </p:txBody>
-      </p:sp>
-      <p:sp>
-        <p:nvSpPr>
-          <p:cNvPr id="373" name="" descr="{&quot;isTemplate&quot;:true,&quot;type&quot;:&quot;text&quot;}"/>
-          <p:cNvSpPr txBox="1"/>
-          <p:nvPr/>
-        </p:nvSpPr>
-        <p:spPr>
-          <a:xfrm rot="0" flipH="0" flipV="0">
-            <a:off x="609600" y="381000"/>
-            <a:ext cx="10972800" cy="152400"/>
-          </a:xfrm>
-          <a:prstGeom prst="rect"/>
-        </p:spPr>
-        <p:txBody>
-          <a:bodyPr wrap="none" lIns="0" tIns="0" rIns="0" bIns="0"/>
-          <a:p>
-            <a:pPr>
-              <a:lnSpc>
-                <a:spcPct val="100000"/>
-              </a:lnSpc>
-            </a:pPr>
-            <a:r>
-              <a:rPr lang="en-US" sz="975" spc="-9223372036854775808">
-                <a:solidFill>
-                  <a:srgbClr val="BD9B56"/>
-                </a:solidFill>
-                <a:latin typeface="Microsoft YaHei"/>
-                <a:ea typeface="Microsoft YaHei"/>
-              </a:rPr>
-              <a:t>02 · </a:t>
-            </a:r>
-            <a:r>
-              <a:rPr lang="zh-CN" sz="975" spc="-9223372036854775808">
-                <a:solidFill>
-                  <a:srgbClr val="BD9B56"/>
-                </a:solidFill>
-                <a:latin typeface="Microsoft YaHei"/>
-                <a:ea typeface="Microsoft YaHei"/>
-              </a:rPr>
-              <a:t>技术构建过程</a:t>
-            </a:r>
-            <a:endParaRPr/>
-          </a:p>
-        </p:txBody>
-      </p:sp>
-      <p:sp>
-        <p:nvSpPr>
-          <p:cNvPr id="374" name="" descr="{&quot;isTemplate&quot;:true,&quot;type&quot;:&quot;text&quot;}"/>
-          <p:cNvSpPr txBox="1"/>
-          <p:nvPr/>
-        </p:nvSpPr>
-        <p:spPr>
-          <a:xfrm rot="0" flipH="0" flipV="0">
-            <a:off x="609600" y="609600"/>
-            <a:ext cx="10972800" cy="447675"/>
-          </a:xfrm>
-          <a:prstGeom prst="rect"/>
-        </p:spPr>
-        <p:txBody>
-          <a:bodyPr wrap="none" lIns="0" tIns="0" rIns="0" bIns="0"/>
-          <a:p>
-            <a:pPr>
-              <a:lnSpc>
-                <a:spcPct val="130000"/>
-              </a:lnSpc>
-            </a:pPr>
-            <a:r>
-              <a:rPr lang="zh-CN" sz="2250" b="1">
-                <a:solidFill>
-                  <a:srgbClr val="172133"/>
-                </a:solidFill>
-                <a:latin typeface="Microsoft YaHei"/>
-                <a:ea typeface="Microsoft YaHei"/>
-              </a:rPr>
-              <a:t>后端分层</a:t>
-            </a:r>
-            <a:r>
-              <a:rPr lang="en-US" sz="2250" b="1">
-                <a:solidFill>
-                  <a:srgbClr val="172133"/>
-                </a:solidFill>
-                <a:latin typeface="Microsoft YaHei"/>
-                <a:ea typeface="Microsoft YaHei"/>
-              </a:rPr>
-              <a:t> + </a:t>
-            </a:r>
-            <a:r>
-              <a:rPr lang="zh-CN" sz="2250" b="1">
-                <a:solidFill>
-                  <a:srgbClr val="172133"/>
-                </a:solidFill>
-                <a:latin typeface="Microsoft YaHei"/>
-                <a:ea typeface="Microsoft YaHei"/>
-              </a:rPr>
-              <a:t>前端三端一体</a:t>
-            </a:r>
-            <a:endParaRPr/>
-          </a:p>
-        </p:txBody>
-      </p:sp>
-      <p:sp>
-        <p:nvSpPr>
-          <p:cNvPr id="375" name=""/>
-          <p:cNvSpPr/>
-          <p:nvPr/>
-        </p:nvSpPr>
-        <p:spPr>
-          <a:xfrm rot="0" flipH="0" flipV="0">
-            <a:off x="609600" y="1752600"/>
-            <a:ext cx="5334000" cy="1114425"/>
-          </a:xfrm>
-          <a:prstGeom prst="roundRect">
-            <a:avLst>
-              <a:gd name="adj" fmla="val 8547"/>
-            </a:avLst>
-          </a:prstGeom>
-          <a:solidFill>
-            <a:srgbClr val="FFFFFF"/>
-          </a:solidFill>
-          <a:ln/>
-          <a:effectLst>
-            <a:outerShdw blurRad="152400" dist="38100" dir="5400000">
-              <a:srgbClr val="172133">
-                <a:alpha val="6000"/>
-              </a:srgbClr>
-            </a:outerShdw>
-          </a:effectLst>
-        </p:spPr>
-        <p:txBody>
-          <a:bodyPr/>
-          <a:p/>
-        </p:txBody>
-      </p:sp>
-      <p:sp>
-        <p:nvSpPr>
-          <p:cNvPr id="376" name="" descr="{&quot;isTemplate&quot;:true,&quot;type&quot;:&quot;text&quot;}"/>
-          <p:cNvSpPr txBox="1"/>
-          <p:nvPr/>
-        </p:nvSpPr>
-        <p:spPr>
-          <a:xfrm rot="0" flipH="0" flipV="0">
-            <a:off x="819150" y="1924050"/>
-            <a:ext cx="4914900" cy="200025"/>
-          </a:xfrm>
-          <a:prstGeom prst="rect"/>
-        </p:spPr>
-        <p:txBody>
-          <a:bodyPr wrap="none" lIns="0" tIns="0" rIns="0" bIns="0"/>
-          <a:p>
-            <a:pPr>
-              <a:lnSpc>
-                <a:spcPct val="100000"/>
-              </a:lnSpc>
-            </a:pPr>
-            <a:r>
-              <a:rPr lang="zh-CN" sz="1275">
-                <a:solidFill>
-                  <a:srgbClr val="172133"/>
-                </a:solidFill>
-                <a:latin typeface="Microsoft YaHei"/>
-                <a:ea typeface="Microsoft YaHei"/>
-              </a:rPr>
-              <a:t>后端：</a:t>
-            </a:r>
-            <a:r>
-              <a:rPr lang="en-US" sz="1275">
-                <a:solidFill>
-                  <a:srgbClr val="172133"/>
-                </a:solidFill>
-                <a:latin typeface="Microsoft YaHei"/>
-                <a:ea typeface="Microsoft YaHei"/>
-              </a:rPr>
-              <a:t>FastAPI </a:t>
-            </a:r>
-            <a:r>
-              <a:rPr lang="zh-CN" sz="1275">
-                <a:solidFill>
-                  <a:srgbClr val="172133"/>
-                </a:solidFill>
-                <a:latin typeface="Microsoft YaHei"/>
-                <a:ea typeface="Microsoft YaHei"/>
-              </a:rPr>
-              <a:t>三层架构</a:t>
-            </a:r>
-            <a:endParaRPr/>
-          </a:p>
-        </p:txBody>
-      </p:sp>
-      <p:sp>
-        <p:nvSpPr>
-          <p:cNvPr id="377" name="" descr="{&quot;isTemplate&quot;:true,&quot;type&quot;:&quot;text&quot;}"/>
-          <p:cNvSpPr txBox="1"/>
-          <p:nvPr/>
-        </p:nvSpPr>
-        <p:spPr>
-          <a:xfrm rot="0" flipH="0" flipV="0">
-            <a:off x="819150" y="2181225"/>
-            <a:ext cx="4914900" cy="514350"/>
-          </a:xfrm>
-          <a:prstGeom prst="rect"/>
-        </p:spPr>
-        <p:txBody>
-          <a:bodyPr wrap="square" lIns="0" tIns="0" rIns="0" bIns="0">
-            <a:normAutofit/>
-          </a:bodyPr>
-          <a:p>
-            <a:pPr>
-              <a:lnSpc>
-                <a:spcPct val="160000"/>
-              </a:lnSpc>
-            </a:pPr>
-            <a:r>
-              <a:rPr lang="en-US" sz="1050">
-                <a:solidFill>
-                  <a:srgbClr val="5F5E5A"/>
-                </a:solidFill>
-                <a:latin typeface="Microsoft YaHei"/>
-                <a:ea typeface="Microsoft YaHei"/>
-              </a:rPr>
-              <a:t>API </a:t>
-            </a:r>
-            <a:r>
-              <a:rPr lang="zh-CN" sz="1050">
-                <a:solidFill>
-                  <a:srgbClr val="5F5E5A"/>
-                </a:solidFill>
-                <a:latin typeface="Microsoft YaHei"/>
-                <a:ea typeface="Microsoft YaHei"/>
-              </a:rPr>
-              <a:t>路由层</a:t>
-            </a:r>
-            <a:r>
-              <a:rPr lang="en-US" sz="1050">
-                <a:solidFill>
-                  <a:srgbClr val="5F5E5A"/>
-                </a:solidFill>
-                <a:latin typeface="Microsoft YaHei"/>
-                <a:ea typeface="Microsoft YaHei"/>
-              </a:rPr>
-              <a:t> → Service </a:t>
-            </a:r>
-            <a:r>
-              <a:rPr lang="zh-CN" sz="1050">
-                <a:solidFill>
-                  <a:srgbClr val="5F5E5A"/>
-                </a:solidFill>
-                <a:latin typeface="Microsoft YaHei"/>
-                <a:ea typeface="Microsoft YaHei"/>
-              </a:rPr>
-              <a:t>业务层</a:t>
-            </a:r>
-            <a:r>
-              <a:rPr lang="en-US" sz="1050">
-                <a:solidFill>
-                  <a:srgbClr val="5F5E5A"/>
-                </a:solidFill>
-                <a:latin typeface="Microsoft YaHei"/>
-                <a:ea typeface="Microsoft YaHei"/>
-              </a:rPr>
-              <a:t> → Repository </a:t>
-            </a:r>
-            <a:r>
-              <a:rPr lang="zh-CN" sz="1050">
-                <a:solidFill>
-                  <a:srgbClr val="5F5E5A"/>
-                </a:solidFill>
-                <a:latin typeface="Microsoft YaHei"/>
-                <a:ea typeface="Microsoft YaHei"/>
-              </a:rPr>
-              <a:t>数据层。业务与数据解耦，</a:t>
-            </a:r>
-            <a:r>
-              <a:rPr lang="en-US" sz="1050">
-                <a:solidFill>
-                  <a:srgbClr val="5F5E5A"/>
-                </a:solidFill>
-                <a:latin typeface="Microsoft YaHei"/>
-                <a:ea typeface="Microsoft YaHei"/>
-              </a:rPr>
-              <a:t>AI </a:t>
-            </a:r>
-            <a:r>
-              <a:rPr lang="zh-CN" sz="1050">
-                <a:solidFill>
-                  <a:srgbClr val="5F5E5A"/>
-                </a:solidFill>
-                <a:latin typeface="Microsoft YaHei"/>
-                <a:ea typeface="Microsoft YaHei"/>
-              </a:rPr>
-              <a:t>逻辑不混入业务代码。</a:t>
-            </a:r>
-            <a:endParaRPr/>
-          </a:p>
-        </p:txBody>
-      </p:sp>
-      <p:sp>
-        <p:nvSpPr>
-          <p:cNvPr id="378" name=""/>
-          <p:cNvSpPr/>
-          <p:nvPr/>
-        </p:nvSpPr>
-        <p:spPr>
-          <a:xfrm rot="0" flipH="0" flipV="0">
-            <a:off x="609600" y="3019425"/>
-            <a:ext cx="5334000" cy="1114425"/>
-          </a:xfrm>
-          <a:prstGeom prst="roundRect">
-            <a:avLst>
-              <a:gd name="adj" fmla="val 8547"/>
-            </a:avLst>
-          </a:prstGeom>
-          <a:solidFill>
-            <a:srgbClr val="FFFFFF"/>
-          </a:solidFill>
-          <a:ln/>
-          <a:effectLst>
-            <a:outerShdw blurRad="152400" dist="38100" dir="5400000">
-              <a:srgbClr val="172133">
-                <a:alpha val="6000"/>
-              </a:srgbClr>
-            </a:outerShdw>
-          </a:effectLst>
-        </p:spPr>
-        <p:txBody>
-          <a:bodyPr/>
-          <a:p/>
-        </p:txBody>
-      </p:sp>
-      <p:sp>
-        <p:nvSpPr>
-          <p:cNvPr id="379" name="" descr="{&quot;isTemplate&quot;:true,&quot;type&quot;:&quot;text&quot;}"/>
-          <p:cNvSpPr txBox="1"/>
-          <p:nvPr/>
-        </p:nvSpPr>
-        <p:spPr>
-          <a:xfrm rot="0" flipH="0" flipV="0">
-            <a:off x="819150" y="3190875"/>
-            <a:ext cx="4914900" cy="200025"/>
-          </a:xfrm>
-          <a:prstGeom prst="rect"/>
-        </p:spPr>
-        <p:txBody>
-          <a:bodyPr wrap="none" lIns="0" tIns="0" rIns="0" bIns="0"/>
-          <a:p>
-            <a:pPr>
-              <a:lnSpc>
-                <a:spcPct val="100000"/>
-              </a:lnSpc>
-            </a:pPr>
-            <a:r>
-              <a:rPr lang="zh-CN" sz="1275">
-                <a:solidFill>
-                  <a:srgbClr val="172133"/>
-                </a:solidFill>
-                <a:latin typeface="Microsoft YaHei"/>
-                <a:ea typeface="Microsoft YaHei"/>
-              </a:rPr>
-              <a:t>派单算法</a:t>
-            </a:r>
-            <a:endParaRPr/>
-          </a:p>
-        </p:txBody>
-      </p:sp>
-      <p:sp>
-        <p:nvSpPr>
-          <p:cNvPr id="380" name="" descr="{&quot;isTemplate&quot;:true,&quot;type&quot;:&quot;text&quot;}"/>
-          <p:cNvSpPr txBox="1"/>
-          <p:nvPr/>
-        </p:nvSpPr>
-        <p:spPr>
-          <a:xfrm rot="0" flipH="0" flipV="0">
-            <a:off x="819150" y="3448050"/>
-            <a:ext cx="4914900" cy="514350"/>
-          </a:xfrm>
-          <a:prstGeom prst="rect"/>
-        </p:spPr>
-        <p:txBody>
-          <a:bodyPr wrap="square" lIns="0" tIns="0" rIns="0" bIns="0">
-            <a:normAutofit/>
-          </a:bodyPr>
-          <a:p>
-            <a:pPr>
-              <a:lnSpc>
-                <a:spcPct val="160000"/>
-              </a:lnSpc>
-            </a:pPr>
-            <a:r>
-              <a:rPr lang="zh-CN" sz="1050">
-                <a:solidFill>
-                  <a:srgbClr val="5F5E5A"/>
-                </a:solidFill>
-                <a:latin typeface="Microsoft YaHei"/>
-                <a:ea typeface="Microsoft YaHei"/>
-              </a:rPr>
-              <a:t>按「技能匹配</a:t>
-            </a:r>
-            <a:r>
-              <a:rPr lang="en-US" sz="1050">
-                <a:solidFill>
-                  <a:srgbClr val="5F5E5A"/>
-                </a:solidFill>
-                <a:latin typeface="Microsoft YaHei"/>
-                <a:ea typeface="Microsoft YaHei"/>
-              </a:rPr>
-              <a:t> + </a:t>
-            </a:r>
-            <a:r>
-              <a:rPr lang="zh-CN" sz="1050">
-                <a:solidFill>
-                  <a:srgbClr val="5F5E5A"/>
-                </a:solidFill>
-                <a:latin typeface="Microsoft YaHei"/>
-                <a:ea typeface="Microsoft YaHei"/>
-              </a:rPr>
-              <a:t>在岗状态</a:t>
-            </a:r>
-            <a:r>
-              <a:rPr lang="en-US" sz="1050">
-                <a:solidFill>
-                  <a:srgbClr val="5F5E5A"/>
-                </a:solidFill>
-                <a:latin typeface="Microsoft YaHei"/>
-                <a:ea typeface="Microsoft YaHei"/>
-              </a:rPr>
-              <a:t> + </a:t>
-            </a:r>
-            <a:r>
-              <a:rPr lang="zh-CN" sz="1050">
-                <a:solidFill>
-                  <a:srgbClr val="5F5E5A"/>
-                </a:solidFill>
-                <a:latin typeface="Microsoft YaHei"/>
-                <a:ea typeface="Microsoft YaHei"/>
-              </a:rPr>
-              <a:t>工号升序」自动选择维修师傅，无需人工指派，报修提交即自动派单。</a:t>
-            </a:r>
-            <a:endParaRPr/>
-          </a:p>
-        </p:txBody>
-      </p:sp>
-      <p:sp>
-        <p:nvSpPr>
-          <p:cNvPr id="381" name=""/>
-          <p:cNvSpPr/>
-          <p:nvPr/>
-        </p:nvSpPr>
-        <p:spPr>
-          <a:xfrm rot="0" flipH="0" flipV="0">
-            <a:off x="609600" y="4286250"/>
-            <a:ext cx="5334000" cy="1114425"/>
-          </a:xfrm>
-          <a:prstGeom prst="roundRect">
-            <a:avLst>
-              <a:gd name="adj" fmla="val 8547"/>
-            </a:avLst>
-          </a:prstGeom>
-          <a:solidFill>
-            <a:srgbClr val="FFFFFF"/>
-          </a:solidFill>
-          <a:ln/>
-          <a:effectLst>
-            <a:outerShdw blurRad="152400" dist="38100" dir="5400000">
-              <a:srgbClr val="172133">
-                <a:alpha val="6000"/>
-              </a:srgbClr>
-            </a:outerShdw>
-          </a:effectLst>
-        </p:spPr>
-        <p:txBody>
-          <a:bodyPr/>
-          <a:p/>
-        </p:txBody>
-      </p:sp>
-      <p:sp>
-        <p:nvSpPr>
-          <p:cNvPr id="382" name="" descr="{&quot;isTemplate&quot;:true,&quot;type&quot;:&quot;text&quot;}"/>
-          <p:cNvSpPr txBox="1"/>
-          <p:nvPr/>
-        </p:nvSpPr>
-        <p:spPr>
-          <a:xfrm rot="0" flipH="0" flipV="0">
-            <a:off x="819150" y="4457700"/>
-            <a:ext cx="4914900" cy="200025"/>
-          </a:xfrm>
-          <a:prstGeom prst="rect"/>
-        </p:spPr>
-        <p:txBody>
-          <a:bodyPr wrap="none" lIns="0" tIns="0" rIns="0" bIns="0"/>
-          <a:p>
-            <a:pPr>
-              <a:lnSpc>
-                <a:spcPct val="100000"/>
-              </a:lnSpc>
-            </a:pPr>
-            <a:r>
-              <a:rPr lang="zh-CN" sz="1275">
-                <a:solidFill>
-                  <a:srgbClr val="172133"/>
-                </a:solidFill>
-                <a:latin typeface="Microsoft YaHei"/>
-                <a:ea typeface="Microsoft YaHei"/>
-              </a:rPr>
-              <a:t>消息通知</a:t>
-            </a:r>
-            <a:endParaRPr/>
-          </a:p>
-        </p:txBody>
-      </p:sp>
-      <p:sp>
-        <p:nvSpPr>
-          <p:cNvPr id="383" name="" descr="{&quot;isTemplate&quot;:true,&quot;type&quot;:&quot;text&quot;}"/>
-          <p:cNvSpPr txBox="1"/>
-          <p:nvPr/>
-        </p:nvSpPr>
-        <p:spPr>
-          <a:xfrm rot="0" flipH="0" flipV="0">
-            <a:off x="819150" y="4714875"/>
-            <a:ext cx="4914900" cy="514350"/>
-          </a:xfrm>
-          <a:prstGeom prst="rect"/>
-        </p:spPr>
-        <p:txBody>
-          <a:bodyPr wrap="square" lIns="0" tIns="0" rIns="0" bIns="0">
-            <a:normAutofit/>
-          </a:bodyPr>
-          <a:p>
-            <a:pPr>
-              <a:lnSpc>
-                <a:spcPct val="160000"/>
-              </a:lnSpc>
-            </a:pPr>
-            <a:r>
-              <a:rPr lang="zh-CN" sz="1050">
-                <a:solidFill>
-                  <a:srgbClr val="5F5E5A"/>
-                </a:solidFill>
-                <a:latin typeface="Microsoft YaHei"/>
-                <a:ea typeface="Microsoft YaHei"/>
-              </a:rPr>
-              <a:t>派单、完成、答复、巡检异常等事件全链路实时通知相关角色，保证业务协同不遗漏。</a:t>
-            </a:r>
-            <a:endParaRPr/>
-          </a:p>
-        </p:txBody>
-      </p:sp>
-      <p:sp>
-        <p:nvSpPr>
-          <p:cNvPr id="384" name=""/>
-          <p:cNvSpPr/>
-          <p:nvPr/>
-        </p:nvSpPr>
-        <p:spPr>
-          <a:xfrm rot="0" flipH="0" flipV="0">
-            <a:off x="6248400" y="2209800"/>
-            <a:ext cx="5334000" cy="2743200"/>
-          </a:xfrm>
-          <a:prstGeom prst="roundRect">
-            <a:avLst>
-              <a:gd name="adj" fmla="val 4167"/>
-            </a:avLst>
-          </a:prstGeom>
-          <a:gradFill>
-            <a:gsLst>
-              <a:gs pos="0">
-                <a:srgbClr val="172133"/>
-              </a:gs>
-              <a:gs pos="100000">
-                <a:srgbClr val="22395E"/>
-              </a:gs>
-            </a:gsLst>
-            <a:lin ang="2700000" scaled="1"/>
-          </a:gradFill>
-          <a:ln/>
-        </p:spPr>
-        <p:txBody>
-          <a:bodyPr/>
-          <a:p/>
-        </p:txBody>
-      </p:sp>
-      <p:sp>
-        <p:nvSpPr>
-          <p:cNvPr id="385" name="" descr="{&quot;isTemplate&quot;:true,&quot;type&quot;:&quot;text&quot;}"/>
-          <p:cNvSpPr txBox="1"/>
-          <p:nvPr/>
-        </p:nvSpPr>
-        <p:spPr>
-          <a:xfrm rot="0" flipH="0" flipV="0">
-            <a:off x="6496050" y="2457450"/>
-            <a:ext cx="4838700" cy="152400"/>
-          </a:xfrm>
-          <a:prstGeom prst="rect"/>
-        </p:spPr>
-        <p:txBody>
-          <a:bodyPr wrap="none" lIns="0" tIns="0" rIns="0" bIns="0"/>
-          <a:p>
-            <a:pPr>
-              <a:lnSpc>
-                <a:spcPct val="100000"/>
-              </a:lnSpc>
-            </a:pPr>
-            <a:r>
-              <a:rPr lang="en-US" sz="975" spc="-9223372036854775808">
-                <a:solidFill>
-                  <a:srgbClr val="BD9B56"/>
-                </a:solidFill>
-                <a:latin typeface="Microsoft YaHei"/>
-                <a:ea typeface="Microsoft YaHei"/>
-              </a:rPr>
-              <a:t>FRONTEND · </a:t>
-            </a:r>
-            <a:r>
-              <a:rPr lang="zh-CN" sz="975" spc="-9223372036854775808">
-                <a:solidFill>
-                  <a:srgbClr val="BD9B56"/>
-                </a:solidFill>
-                <a:latin typeface="Microsoft YaHei"/>
-                <a:ea typeface="Microsoft YaHei"/>
-              </a:rPr>
-              <a:t>三端</a:t>
-            </a:r>
-            <a:endParaRPr/>
-          </a:p>
-        </p:txBody>
-      </p:sp>
-      <p:sp>
-        <p:nvSpPr>
-          <p:cNvPr id="386" name=""/>
-          <p:cNvSpPr/>
-          <p:nvPr/>
-        </p:nvSpPr>
-        <p:spPr>
-          <a:xfrm rot="0" flipH="0" flipV="0">
-            <a:off x="6496050" y="2781300"/>
-            <a:ext cx="4838700" cy="428625"/>
-          </a:xfrm>
-          <a:prstGeom prst="roundRect">
-            <a:avLst>
-              <a:gd name="adj" fmla="val 17778"/>
-            </a:avLst>
-          </a:prstGeom>
-          <a:solidFill>
-            <a:srgbClr val="BD9B56">
-              <a:alpha val="10000"/>
-            </a:srgbClr>
-          </a:solidFill>
-          <a:ln/>
-        </p:spPr>
-        <p:txBody>
-          <a:bodyPr/>
-          <a:p/>
-        </p:txBody>
-      </p:sp>
-      <p:sp>
-        <p:nvSpPr>
-          <p:cNvPr id="387" name="" descr="{&quot;isTemplate&quot;:true,&quot;type&quot;:&quot;text&quot;}"/>
-          <p:cNvSpPr txBox="1"/>
-          <p:nvPr/>
-        </p:nvSpPr>
-        <p:spPr>
-          <a:xfrm rot="0" flipH="0" flipV="0">
-            <a:off x="6648450" y="2895600"/>
-            <a:ext cx="609600" cy="200025"/>
-          </a:xfrm>
-          <a:prstGeom prst="rect"/>
-        </p:spPr>
-        <p:txBody>
-          <a:bodyPr wrap="none" lIns="0" tIns="0" rIns="0" bIns="0"/>
-          <a:p>
-            <a:pPr>
-              <a:lnSpc>
-                <a:spcPct val="100000"/>
-              </a:lnSpc>
-            </a:pPr>
-            <a:r>
-              <a:rPr lang="zh-CN" sz="1275" b="1">
-                <a:solidFill>
-                  <a:srgbClr val="BD9B56"/>
-                </a:solidFill>
-                <a:latin typeface="Microsoft YaHei"/>
-                <a:ea typeface="Microsoft YaHei"/>
-              </a:rPr>
-              <a:t>业主端</a:t>
-            </a:r>
-            <a:endParaRPr/>
-          </a:p>
-        </p:txBody>
-      </p:sp>
-      <p:sp>
-        <p:nvSpPr>
-          <p:cNvPr id="388" name="" descr="{&quot;isTemplate&quot;:true,&quot;type&quot;:&quot;text&quot;}"/>
-          <p:cNvSpPr txBox="1"/>
-          <p:nvPr/>
-        </p:nvSpPr>
-        <p:spPr>
-          <a:xfrm rot="0" flipH="0" flipV="0">
-            <a:off x="7372350" y="2924175"/>
-            <a:ext cx="2066925" cy="152400"/>
-          </a:xfrm>
-          <a:prstGeom prst="rect"/>
-        </p:spPr>
-        <p:txBody>
-          <a:bodyPr wrap="none" lIns="0" tIns="0" rIns="0" bIns="0"/>
-          <a:p>
-            <a:pPr>
-              <a:lnSpc>
-                <a:spcPct val="100000"/>
-              </a:lnSpc>
-            </a:pPr>
-            <a:r>
-              <a:rPr lang="en-US" sz="975">
-                <a:solidFill>
-                  <a:srgbClr val="FBFCFA">
-                    <a:alpha val="85000"/>
-                  </a:srgbClr>
-                </a:solidFill>
-                <a:latin typeface="Microsoft YaHei"/>
-                <a:ea typeface="Microsoft YaHei"/>
-              </a:rPr>
-              <a:t>AI </a:t>
-            </a:r>
-            <a:r>
-              <a:rPr lang="zh-CN" sz="975">
-                <a:solidFill>
-                  <a:srgbClr val="FBFCFA">
-                    <a:alpha val="85000"/>
-                  </a:srgbClr>
-                </a:solidFill>
-                <a:latin typeface="Microsoft YaHei"/>
-                <a:ea typeface="Microsoft YaHei"/>
-              </a:rPr>
-              <a:t>助手</a:t>
-            </a:r>
-            <a:r>
-              <a:rPr lang="en-US" sz="975">
-                <a:solidFill>
-                  <a:srgbClr val="FBFCFA">
-                    <a:alpha val="85000"/>
-                  </a:srgbClr>
-                </a:solidFill>
-                <a:latin typeface="Microsoft YaHei"/>
-                <a:ea typeface="Microsoft YaHei"/>
-              </a:rPr>
-              <a:t> · </a:t>
-            </a:r>
-            <a:r>
-              <a:rPr lang="zh-CN" sz="975">
-                <a:solidFill>
-                  <a:srgbClr val="FBFCFA">
-                    <a:alpha val="85000"/>
-                  </a:srgbClr>
-                </a:solidFill>
-                <a:latin typeface="Microsoft YaHei"/>
-                <a:ea typeface="Microsoft YaHei"/>
-              </a:rPr>
-              <a:t>报修</a:t>
-            </a:r>
-            <a:r>
-              <a:rPr lang="en-US" sz="975">
-                <a:solidFill>
-                  <a:srgbClr val="FBFCFA">
-                    <a:alpha val="85000"/>
-                  </a:srgbClr>
-                </a:solidFill>
-                <a:latin typeface="Microsoft YaHei"/>
-                <a:ea typeface="Microsoft YaHei"/>
-              </a:rPr>
-              <a:t> · </a:t>
-            </a:r>
-            <a:r>
-              <a:rPr lang="zh-CN" sz="975">
-                <a:solidFill>
-                  <a:srgbClr val="FBFCFA">
-                    <a:alpha val="85000"/>
-                  </a:srgbClr>
-                </a:solidFill>
-                <a:latin typeface="Microsoft YaHei"/>
-                <a:ea typeface="Microsoft YaHei"/>
-              </a:rPr>
-              <a:t>缴费</a:t>
-            </a:r>
-            <a:r>
-              <a:rPr lang="en-US" sz="975">
-                <a:solidFill>
-                  <a:srgbClr val="FBFCFA">
-                    <a:alpha val="85000"/>
-                  </a:srgbClr>
-                </a:solidFill>
-                <a:latin typeface="Microsoft YaHei"/>
-                <a:ea typeface="Microsoft YaHei"/>
-              </a:rPr>
-              <a:t> · </a:t>
-            </a:r>
-            <a:r>
-              <a:rPr lang="zh-CN" sz="975">
-                <a:solidFill>
-                  <a:srgbClr val="FBFCFA">
-                    <a:alpha val="85000"/>
-                  </a:srgbClr>
-                </a:solidFill>
-                <a:latin typeface="Microsoft YaHei"/>
-                <a:ea typeface="Microsoft YaHei"/>
-              </a:rPr>
-              <a:t>公告</a:t>
-            </a:r>
-            <a:r>
-              <a:rPr lang="en-US" sz="975">
-                <a:solidFill>
-                  <a:srgbClr val="FBFCFA">
-                    <a:alpha val="85000"/>
-                  </a:srgbClr>
-                </a:solidFill>
-                <a:latin typeface="Microsoft YaHei"/>
-                <a:ea typeface="Microsoft YaHei"/>
-              </a:rPr>
-              <a:t> · </a:t>
-            </a:r>
-            <a:r>
-              <a:rPr lang="zh-CN" sz="975">
-                <a:solidFill>
-                  <a:srgbClr val="FBFCFA">
-                    <a:alpha val="85000"/>
-                  </a:srgbClr>
-                </a:solidFill>
-                <a:latin typeface="Microsoft YaHei"/>
-                <a:ea typeface="Microsoft YaHei"/>
-              </a:rPr>
-              <a:t>问题上报</a:t>
-            </a:r>
-            <a:endParaRPr/>
-          </a:p>
-        </p:txBody>
-      </p:sp>
-      <p:sp>
-        <p:nvSpPr>
-          <p:cNvPr id="389" name=""/>
-          <p:cNvSpPr/>
-          <p:nvPr/>
-        </p:nvSpPr>
-        <p:spPr>
-          <a:xfrm rot="0" flipH="0" flipV="0">
-            <a:off x="6496050" y="3343275"/>
-            <a:ext cx="4838700" cy="428625"/>
-          </a:xfrm>
-          <a:prstGeom prst="roundRect">
-            <a:avLst>
-              <a:gd name="adj" fmla="val 17778"/>
-            </a:avLst>
-          </a:prstGeom>
-          <a:solidFill>
-            <a:srgbClr val="BD9B56">
-              <a:alpha val="10000"/>
-            </a:srgbClr>
-          </a:solidFill>
-          <a:ln/>
-        </p:spPr>
-        <p:txBody>
-          <a:bodyPr/>
-          <a:p/>
-        </p:txBody>
-      </p:sp>
-      <p:sp>
-        <p:nvSpPr>
-          <p:cNvPr id="390" name="" descr="{&quot;isTemplate&quot;:true,&quot;type&quot;:&quot;text&quot;}"/>
-          <p:cNvSpPr txBox="1"/>
-          <p:nvPr/>
-        </p:nvSpPr>
-        <p:spPr>
-          <a:xfrm rot="0" flipH="0" flipV="0">
-            <a:off x="6648450" y="3457575"/>
-            <a:ext cx="609600" cy="200025"/>
-          </a:xfrm>
-          <a:prstGeom prst="rect"/>
-        </p:spPr>
-        <p:txBody>
-          <a:bodyPr wrap="none" lIns="0" tIns="0" rIns="0" bIns="0"/>
-          <a:p>
-            <a:pPr>
-              <a:lnSpc>
-                <a:spcPct val="100000"/>
-              </a:lnSpc>
-            </a:pPr>
-            <a:r>
-              <a:rPr lang="zh-CN" sz="1275" b="1">
-                <a:solidFill>
-                  <a:srgbClr val="BD9B56"/>
-                </a:solidFill>
-                <a:latin typeface="Microsoft YaHei"/>
-                <a:ea typeface="Microsoft YaHei"/>
-              </a:rPr>
-              <a:t>物业端</a:t>
-            </a:r>
-            <a:endParaRPr/>
-          </a:p>
-        </p:txBody>
-      </p:sp>
-      <p:sp>
-        <p:nvSpPr>
-          <p:cNvPr id="391" name="" descr="{&quot;isTemplate&quot;:true,&quot;type&quot;:&quot;text&quot;}"/>
-          <p:cNvSpPr txBox="1"/>
-          <p:nvPr/>
-        </p:nvSpPr>
-        <p:spPr>
-          <a:xfrm rot="0" flipH="0" flipV="0">
-            <a:off x="7372350" y="3486150"/>
-            <a:ext cx="2047875" cy="152400"/>
-          </a:xfrm>
-          <a:prstGeom prst="rect"/>
-        </p:spPr>
-        <p:txBody>
-          <a:bodyPr wrap="none" lIns="0" tIns="0" rIns="0" bIns="0"/>
-          <a:p>
-            <a:pPr>
-              <a:lnSpc>
-                <a:spcPct val="100000"/>
-              </a:lnSpc>
-            </a:pPr>
-            <a:r>
-              <a:rPr lang="zh-CN" sz="975">
-                <a:solidFill>
-                  <a:srgbClr val="FBFCFA">
-                    <a:alpha val="85000"/>
-                  </a:srgbClr>
-                </a:solidFill>
-                <a:latin typeface="Microsoft YaHei"/>
-                <a:ea typeface="Microsoft YaHei"/>
-              </a:rPr>
-              <a:t>工单管理</a:t>
-            </a:r>
-            <a:r>
-              <a:rPr lang="en-US" sz="975">
-                <a:solidFill>
-                  <a:srgbClr val="FBFCFA">
-                    <a:alpha val="85000"/>
-                  </a:srgbClr>
-                </a:solidFill>
-                <a:latin typeface="Microsoft YaHei"/>
-                <a:ea typeface="Microsoft YaHei"/>
-              </a:rPr>
-              <a:t> · </a:t>
-            </a:r>
-            <a:r>
-              <a:rPr lang="zh-CN" sz="975">
-                <a:solidFill>
-                  <a:srgbClr val="FBFCFA">
-                    <a:alpha val="85000"/>
-                  </a:srgbClr>
-                </a:solidFill>
-                <a:latin typeface="Microsoft YaHei"/>
-                <a:ea typeface="Microsoft YaHei"/>
-              </a:rPr>
-              <a:t>巡检</a:t>
-            </a:r>
-            <a:r>
-              <a:rPr lang="en-US" sz="975">
-                <a:solidFill>
-                  <a:srgbClr val="FBFCFA">
-                    <a:alpha val="85000"/>
-                  </a:srgbClr>
-                </a:solidFill>
-                <a:latin typeface="Microsoft YaHei"/>
-                <a:ea typeface="Microsoft YaHei"/>
-              </a:rPr>
-              <a:t> · </a:t>
-            </a:r>
-            <a:r>
-              <a:rPr lang="zh-CN" sz="975">
-                <a:solidFill>
-                  <a:srgbClr val="FBFCFA">
-                    <a:alpha val="85000"/>
-                  </a:srgbClr>
-                </a:solidFill>
-                <a:latin typeface="Microsoft YaHei"/>
-                <a:ea typeface="Microsoft YaHei"/>
-              </a:rPr>
-              <a:t>数据看板</a:t>
-            </a:r>
-            <a:r>
-              <a:rPr lang="en-US" sz="975">
-                <a:solidFill>
-                  <a:srgbClr val="FBFCFA">
-                    <a:alpha val="85000"/>
-                  </a:srgbClr>
-                </a:solidFill>
-                <a:latin typeface="Microsoft YaHei"/>
-                <a:ea typeface="Microsoft YaHei"/>
-              </a:rPr>
-              <a:t> · </a:t>
-            </a:r>
-            <a:r>
-              <a:rPr lang="zh-CN" sz="975">
-                <a:solidFill>
-                  <a:srgbClr val="FBFCFA">
-                    <a:alpha val="85000"/>
-                  </a:srgbClr>
-                </a:solidFill>
-                <a:latin typeface="Microsoft YaHei"/>
-                <a:ea typeface="Microsoft YaHei"/>
-              </a:rPr>
-              <a:t>知识审核</a:t>
-            </a:r>
-            <a:endParaRPr/>
-          </a:p>
-        </p:txBody>
-      </p:sp>
-      <p:sp>
-        <p:nvSpPr>
-          <p:cNvPr id="392" name=""/>
-          <p:cNvSpPr/>
-          <p:nvPr/>
-        </p:nvSpPr>
-        <p:spPr>
-          <a:xfrm rot="0" flipH="0" flipV="0">
-            <a:off x="6496050" y="3905250"/>
-            <a:ext cx="4838700" cy="428625"/>
-          </a:xfrm>
-          <a:prstGeom prst="roundRect">
-            <a:avLst>
-              <a:gd name="adj" fmla="val 17778"/>
-            </a:avLst>
-          </a:prstGeom>
-          <a:solidFill>
-            <a:srgbClr val="BD9B56">
-              <a:alpha val="10000"/>
-            </a:srgbClr>
-          </a:solidFill>
-          <a:ln/>
-        </p:spPr>
-        <p:txBody>
-          <a:bodyPr/>
-          <a:p/>
-        </p:txBody>
-      </p:sp>
-      <p:sp>
-        <p:nvSpPr>
-          <p:cNvPr id="393" name="" descr="{&quot;isTemplate&quot;:true,&quot;type&quot;:&quot;text&quot;}"/>
-          <p:cNvSpPr txBox="1"/>
-          <p:nvPr/>
-        </p:nvSpPr>
-        <p:spPr>
-          <a:xfrm rot="0" flipH="0" flipV="0">
-            <a:off x="6648450" y="4019550"/>
-            <a:ext cx="609600" cy="200025"/>
-          </a:xfrm>
-          <a:prstGeom prst="rect"/>
-        </p:spPr>
-        <p:txBody>
-          <a:bodyPr wrap="none" lIns="0" tIns="0" rIns="0" bIns="0"/>
-          <a:p>
-            <a:pPr>
-              <a:lnSpc>
-                <a:spcPct val="100000"/>
-              </a:lnSpc>
-            </a:pPr>
-            <a:r>
-              <a:rPr lang="zh-CN" sz="1275" b="1">
-                <a:solidFill>
-                  <a:srgbClr val="BD9B56"/>
-                </a:solidFill>
-                <a:latin typeface="Microsoft YaHei"/>
-                <a:ea typeface="Microsoft YaHei"/>
-              </a:rPr>
-              <a:t>维修端</a:t>
-            </a:r>
-            <a:endParaRPr/>
-          </a:p>
-        </p:txBody>
-      </p:sp>
-      <p:sp>
-        <p:nvSpPr>
-          <p:cNvPr id="394" name="" descr="{&quot;isTemplate&quot;:true,&quot;type&quot;:&quot;text&quot;}"/>
-          <p:cNvSpPr txBox="1"/>
-          <p:nvPr/>
-        </p:nvSpPr>
-        <p:spPr>
-          <a:xfrm rot="0" flipH="0" flipV="0">
-            <a:off x="7372350" y="4048125"/>
-            <a:ext cx="1552575" cy="152400"/>
-          </a:xfrm>
-          <a:prstGeom prst="rect"/>
-        </p:spPr>
-        <p:txBody>
-          <a:bodyPr wrap="none" lIns="0" tIns="0" rIns="0" bIns="0"/>
-          <a:p>
-            <a:pPr>
-              <a:lnSpc>
-                <a:spcPct val="100000"/>
-              </a:lnSpc>
-            </a:pPr>
-            <a:r>
-              <a:rPr lang="zh-CN" sz="975">
-                <a:solidFill>
-                  <a:srgbClr val="FBFCFA">
-                    <a:alpha val="85000"/>
-                  </a:srgbClr>
-                </a:solidFill>
-                <a:latin typeface="Microsoft YaHei"/>
-                <a:ea typeface="Microsoft YaHei"/>
-              </a:rPr>
-              <a:t>接单</a:t>
-            </a:r>
-            <a:r>
-              <a:rPr lang="en-US" sz="975">
-                <a:solidFill>
-                  <a:srgbClr val="FBFCFA">
-                    <a:alpha val="85000"/>
-                  </a:srgbClr>
-                </a:solidFill>
-                <a:latin typeface="Microsoft YaHei"/>
-                <a:ea typeface="Microsoft YaHei"/>
-              </a:rPr>
-              <a:t> · </a:t>
-            </a:r>
-            <a:r>
-              <a:rPr lang="zh-CN" sz="975">
-                <a:solidFill>
-                  <a:srgbClr val="FBFCFA">
-                    <a:alpha val="85000"/>
-                  </a:srgbClr>
-                </a:solidFill>
-                <a:latin typeface="Microsoft YaHei"/>
-                <a:ea typeface="Microsoft YaHei"/>
-              </a:rPr>
-              <a:t>处理</a:t>
-            </a:r>
-            <a:r>
-              <a:rPr lang="en-US" sz="975">
-                <a:solidFill>
-                  <a:srgbClr val="FBFCFA">
-                    <a:alpha val="85000"/>
-                  </a:srgbClr>
-                </a:solidFill>
-                <a:latin typeface="Microsoft YaHei"/>
-                <a:ea typeface="Microsoft YaHei"/>
-              </a:rPr>
-              <a:t> · </a:t>
-            </a:r>
-            <a:r>
-              <a:rPr lang="zh-CN" sz="975">
-                <a:solidFill>
-                  <a:srgbClr val="FBFCFA">
-                    <a:alpha val="85000"/>
-                  </a:srgbClr>
-                </a:solidFill>
-                <a:latin typeface="Microsoft YaHei"/>
-                <a:ea typeface="Microsoft YaHei"/>
-              </a:rPr>
-              <a:t>消息</a:t>
-            </a:r>
-            <a:r>
-              <a:rPr lang="en-US" sz="975">
-                <a:solidFill>
-                  <a:srgbClr val="FBFCFA">
-                    <a:alpha val="85000"/>
-                  </a:srgbClr>
-                </a:solidFill>
-                <a:latin typeface="Microsoft YaHei"/>
-                <a:ea typeface="Microsoft YaHei"/>
-              </a:rPr>
-              <a:t> · </a:t>
-            </a:r>
-            <a:r>
-              <a:rPr lang="zh-CN" sz="975">
-                <a:solidFill>
-                  <a:srgbClr val="FBFCFA">
-                    <a:alpha val="85000"/>
-                  </a:srgbClr>
-                </a:solidFill>
-                <a:latin typeface="Microsoft YaHei"/>
-                <a:ea typeface="Microsoft YaHei"/>
-              </a:rPr>
-              <a:t>巡检任务</a:t>
-            </a:r>
-            <a:endParaRPr/>
-          </a:p>
-        </p:txBody>
-      </p:sp>
-      <p:sp>
-        <p:nvSpPr>
-          <p:cNvPr id="395" name=""/>
-          <p:cNvSpPr/>
-          <p:nvPr/>
-        </p:nvSpPr>
-        <p:spPr>
-          <a:xfrm rot="0" flipH="0" flipV="0">
-            <a:off x="6496050" y="4524375"/>
-            <a:ext cx="4838700" cy="190500"/>
-          </a:xfrm>
-          <a:custGeom>
-            <a:pathLst>
-              <a:path w="508" h="20">
-                <a:moveTo>
-                  <a:pt x="0" y="0"/>
-                </a:moveTo>
-                <a:lnTo>
-                  <a:pt x="508" y="0"/>
-                </a:lnTo>
-                <a:lnTo>
-                  <a:pt x="508" y="1"/>
-                </a:lnTo>
-                <a:lnTo>
-                  <a:pt x="0" y="1"/>
-                </a:lnTo>
-                <a:close/>
-              </a:path>
-            </a:pathLst>
-          </a:custGeom>
-          <a:solidFill>
-            <a:srgbClr val="BD9B56">
-              <a:alpha val="30000"/>
-            </a:srgbClr>
-          </a:solidFill>
-          <a:ln/>
-        </p:spPr>
-        <p:txBody>
-          <a:bodyPr/>
-          <a:p/>
-        </p:txBody>
-      </p:sp>
-      <p:sp>
-        <p:nvSpPr>
-          <p:cNvPr id="396" name="" descr="{&quot;isTemplate&quot;:true,&quot;type&quot;:&quot;text&quot;}"/>
-          <p:cNvSpPr txBox="1"/>
-          <p:nvPr/>
-        </p:nvSpPr>
-        <p:spPr>
-          <a:xfrm rot="0" flipH="0" flipV="0">
-            <a:off x="6496050" y="4705350"/>
-            <a:ext cx="4838700" cy="0"/>
-          </a:xfrm>
-          <a:prstGeom prst="rect"/>
-        </p:spPr>
-        <p:txBody>
-          <a:bodyPr wrap="none" lIns="0" tIns="0" rIns="0" bIns="0"/>
-          <a:p>
-            <a:pPr/>
-            <a:endParaRPr/>
-          </a:p>
-        </p:txBody>
-      </p:sp>
-      <p:sp>
-        <p:nvSpPr>
-          <p:cNvPr id="397" name="" descr="{&quot;isTemplate&quot;:true,&quot;type&quot;:&quot;text&quot;}"/>
-          <p:cNvSpPr txBox="1"/>
-          <p:nvPr/>
-        </p:nvSpPr>
-        <p:spPr>
-          <a:xfrm rot="0" flipH="0" flipV="0">
-            <a:off x="6496050" y="4705350"/>
-            <a:ext cx="4838700" cy="0"/>
-          </a:xfrm>
-          <a:prstGeom prst="rect"/>
-        </p:spPr>
-        <p:txBody>
-          <a:bodyPr wrap="none" lIns="0" tIns="0" rIns="0" bIns="0"/>
-          <a:p>
-            <a:pPr/>
-            <a:endParaRPr/>
-          </a:p>
-        </p:txBody>
-      </p:sp>
-      <p:sp>
-        <p:nvSpPr>
-          <p:cNvPr id="398" name="" descr="{&quot;isTemplate&quot;:true,&quot;type&quot;:&quot;text&quot;}"/>
-          <p:cNvSpPr txBox="1"/>
-          <p:nvPr/>
-        </p:nvSpPr>
-        <p:spPr>
-          <a:xfrm rot="0" flipH="0" flipV="0">
-            <a:off x="609600" y="6334125"/>
-            <a:ext cx="1009650" cy="142875"/>
-          </a:xfrm>
-          <a:prstGeom prst="rect"/>
-        </p:spPr>
-        <p:txBody>
-          <a:bodyPr wrap="none" lIns="0" tIns="0" rIns="0" bIns="0"/>
-          <a:p>
-            <a:pPr>
-              <a:lnSpc>
-                <a:spcPct val="100000"/>
-              </a:lnSpc>
-            </a:pPr>
-            <a:r>
-              <a:rPr lang="zh-CN" sz="900">
-                <a:solidFill>
-                  <a:srgbClr val="BD9B56"/>
-                </a:solidFill>
-                <a:latin typeface="Microsoft YaHei"/>
-                <a:ea typeface="Microsoft YaHei"/>
-              </a:rPr>
-              <a:t>云溪花园</a:t>
-            </a:r>
-            <a:r>
-              <a:rPr lang="en-US" sz="900">
-                <a:solidFill>
-                  <a:srgbClr val="BD9B56"/>
-                </a:solidFill>
-                <a:latin typeface="Microsoft YaHei"/>
-                <a:ea typeface="Microsoft YaHei"/>
-              </a:rPr>
-              <a:t> · </a:t>
-            </a:r>
-            <a:r>
-              <a:rPr lang="zh-CN" sz="900">
-                <a:solidFill>
-                  <a:srgbClr val="BD9B56"/>
-                </a:solidFill>
-                <a:latin typeface="Microsoft YaHei"/>
-                <a:ea typeface="Microsoft YaHei"/>
-              </a:rPr>
-              <a:t>智慧社区</a:t>
-            </a:r>
-            <a:endParaRPr/>
-          </a:p>
-        </p:txBody>
-      </p:sp>
-      <p:sp>
-        <p:nvSpPr>
-          <p:cNvPr id="399" name="" descr="{&quot;isTemplate&quot;:true,&quot;type&quot;:&quot;text&quot;}"/>
-          <p:cNvSpPr txBox="1"/>
-          <p:nvPr/>
-        </p:nvSpPr>
-        <p:spPr>
-          <a:xfrm rot="0" flipH="0" flipV="0">
-            <a:off x="11191875" y="6334125"/>
-            <a:ext cx="390525" cy="142875"/>
-          </a:xfrm>
-          <a:prstGeom prst="rect"/>
-        </p:spPr>
-        <p:txBody>
-          <a:bodyPr wrap="none" lIns="0" tIns="0" rIns="0" bIns="0"/>
-          <a:p>
-            <a:pPr>
-              <a:lnSpc>
-                <a:spcPct val="100000"/>
-              </a:lnSpc>
-            </a:pPr>
-            <a:r>
-              <a:rPr lang="en-US" sz="900">
-                <a:solidFill>
-                  <a:srgbClr val="A09B8C"/>
-                </a:solidFill>
-                <a:latin typeface="Microsoft YaHei"/>
-                <a:ea typeface="Microsoft YaHei"/>
-              </a:rPr>
-              <a:t>08 / 15</a:t>
-            </a:r>
-            <a:endParaRPr/>
-          </a:p>
-        </p:txBody>
-      </p:sp>
-    </p:spTree>
-  </p:cSld>
-</p:sld>
-</file>
-
-<file path=ppt/slides/slide9.xml><?xml version="1.0" encoding="utf-8"?>
-<p:sld xmlns:p="http://schemas.openxmlformats.org/presentationml/2006/main" xmlns:r="http://schemas.openxmlformats.org/officeDocument/2006/relationships" xmlns:a="http://schemas.openxmlformats.org/drawingml/2006/main" xmlns:asvg="http://schemas.microsoft.com/office/drawing/2016/SVG/main" xmlns:mc="http://schemas.openxmlformats.org/markup-compatibility/2006" mc:Ignorable="asvg">
-  <p:cSld>
-    <p:spTree>
-      <p:nvGrpSpPr>
-        <p:cNvPr id="400" name="" descr="&lt;Slide style={{ width: '1280px', height: '720px', background: '#FBFCFA', position: 'relative', padding: '40px 64px', boxSizing: 'border-box', display: 'flex', flexDirection: 'column' }}&gt;&#10;  &lt;div style={{ flexShrink: 0 }}&gt;&#10;    &lt;div style={{ color: '#BD9B56', fontSize: 13, letterSpacing: '0.25em', marginBottom: 8 }}&gt;02 · 技术构建过程&lt;/div&gt;&#10;    &lt;h2 style={{ fontSize: 30, fontWeight: 'bold', color: '#172133', margin: 0, lineHeight: 1.3 }}&gt;AI Agent 架构：LangGraph 多智能体协作&lt;/h2&gt;&#10;  &lt;/div&gt;&#10;  &lt;div style={{ flex: 1, display: 'flex', alignItems: 'center', gap: 32 }}&gt;&#10;    &lt;div style={{ flex: '0 0 560px', background: '#fff', borderRadius: 12, padding: '22px 24px', boxShadow: '0 6px 24px rgba(23,33,51,0.08)' }}&gt;&#10;      &lt;svg width=&quot;512&quot; height=&quot;470&quot; viewBox=&quot;0 0 512 470&quot;&gt;&#10;        &lt;defs&gt;&#10;          &lt;marker id=&quot;ar9&quot; viewBox=&quot;0 0 10 10&quot; refX=&quot;9&quot; refY=&quot;5&quot; markerWidth=&quot;6&quot; markerHeight=&quot;6&quot; orient=&quot;auto&quot;&gt;&#10;            &lt;path d=&quot;M0 0L10 5L0 10z&quot; fill=&quot;#BD9B56&quot; /&gt;&#10;          &lt;/marker&gt;&#10;        &lt;/defs&gt;&#10;        &lt;g fontFamily=&quot;Inter, sans-serif&quot;&gt;&#10;          &lt;rect x=&quot;156&quot; y=&quot;14&quot; width=&quot;200&quot; height=&quot;50&quot; rx=&quot;8&quot; fill=&quot;rgba(34,57,94,0.08)&quot; stroke=&quot;#22395E&quot; strokeWidth=&quot;1.5&quot; /&gt;&#10;          &lt;text x=&quot;256&quot; y=&quot;36&quot; textAnchor=&quot;middle&quot; fontSize=&quot;13&quot; fontWeight=&quot;bold&quot; fill=&quot;#172133&quot;&gt;用户自然语言输入&lt;/text&gt;&#10;          &lt;text x=&quot;256&quot; y=&quot;54&quot; textAnchor=&quot;middle&quot; fontSize=&quot;11&quot; fill=&quot;#5F5E5A&quot;&gt;「我家厨房漏水了」&lt;/text&gt;&#10;          &lt;line x1=&quot;256&quot; y1=&quot;64&quot; x2=&quot;256&quot; y2=&quot;84&quot; stroke=&quot;#BD9B56&quot; strokeWidth=&quot;1.5&quot; markerEnd=&quot;url(#ar9)&quot; /&gt;&#10;          &lt;rect x=&quot;96&quot; y=&quot;88&quot; width=&quot;320&quot; height=&quot;64&quot; rx=&quot;8&quot; fill=&quot;rgba(34,57,94,0.12)&quot; stroke=&quot;#22395E&quot; strokeWidth=&quot;2&quot; /&gt;&#10;          &lt;text x=&quot;256&quot; y=&quot;114&quot; textAnchor=&quot;middle&quot; fontSize=&quot;13&quot; fontWeight=&quot;bold&quot; fill=&quot;#BD9B56&quot;&gt;Router Agent · 意图分类&lt;/text&gt;&#10;          &lt;text x=&quot;256&quot; y=&quot;136&quot; textAnchor=&quot;middle&quot; fontSize=&quot;11&quot; fill=&quot;#172133&quot;&gt;报修 / 费用 / 公告 / 知识 / 上报&lt;/text&gt;&#10;          &lt;line x1=&quot;256&quot; y1=&quot;152&quot; x2=&quot;256&quot; y2=&quot;172&quot; stroke=&quot;#BD9B56&quot; strokeWidth=&quot;1.5&quot; markerEnd=&quot;url(#ar9)&quot; /&gt;&#10;          &lt;rect x=&quot;96&quot; y=&quot;176&quot; width=&quot;320&quot; height=&quot;64&quot; rx=&quot;8&quot; fill=&quot;rgba(189,155,86,0.10)&quot; stroke=&quot;#BD9B56&quot; strokeWidth=&quot;1.5&quot; /&gt;&#10;          &lt;text x=&quot;256&quot; y=&quot;202&quot; textAnchor=&quot;middle&quot; fontSize=&quot;13&quot; fontWeight=&quot;bold&quot; fill=&quot;#172133&quot;&gt;领域 Agent + 多轮状态机&lt;/text&gt;&#10;          &lt;text x=&quot;256&quot; y=&quot;224&quot; textAnchor=&quot;middle&quot; fontSize=&quot;11&quot; fill=&quot;#5F5E5A&quot;&gt;报修缺「位置/类型」→ 主动反问补全&lt;/text&gt;&#10;          &lt;line x1=&quot;256&quot; y1=&quot;240&quot; x2=&quot;256&quot; y2=&quot;260&quot; stroke=&quot;#BD9B56&quot; strokeWidth=&quot;1.5&quot; markerEnd=&quot;url(#ar9)&quot; /&gt;&#10;          &lt;rect x=&quot;16&quot; y=&quot;264&quot; width=&quot;140&quot; height=&quot;48&quot; rx=&quot;6&quot; fill=&quot;rgba(34,57,94,0.06)&quot; stroke=&quot;#22395E&quot; strokeWidth=&quot;1.5&quot; /&gt;&#10;          &lt;text x=&quot;86&quot; y=&quot;284&quot; textAnchor=&quot;middle&quot; fontSize=&quot;12&quot; fontWeight=&quot;bold&quot; fill=&quot;#172133&quot;&gt;create_repair&lt;/text&gt;&#10;          &lt;text x=&quot;86&quot; y=&quot;302&quot; textAnchor=&quot;middle&quot; fontSize=&quot;10&quot; fill=&quot;#5F5E5A&quot;&gt;创建工单&lt;/text&gt;&#10;          &lt;rect x=&quot;176&quot; y=&quot;264&quot; width=&quot;140&quot; height=&quot;48&quot; rx=&quot;6&quot; fill=&quot;rgba(34,57,94,0.06)&quot; stroke=&quot;#22395E&quot; strokeWidth=&quot;1.5&quot; /&gt;&#10;          &lt;text x=&quot;246&quot; y=&quot;284&quot; textAnchor=&quot;middle&quot; fontSize=&quot;12&quot; fontWeight=&quot;bold&quot; fill=&quot;#172133&quot;&gt;query_fee&lt;/text&gt;&#10;          &lt;text x=&quot;246&quot; y=&quot;302&quot; textAnchor=&quot;middle&quot; fontSize=&quot;10&quot; fill=&quot;#5F5E5A&quot;&gt;查询费用&lt;/text&gt;&#10;          &lt;rect x=&quot;336&quot; y=&quot;264&quot; width=&quot;160&quot; height=&quot;48&quot; rx=&quot;6&quot; fill=&quot;rgba(34,57,94,0.06)&quot; stroke=&quot;#22395E&quot; strokeWidth=&quot;1.5&quot; /&gt;&#10;          &lt;text x=&quot;416&quot; y=&quot;284&quot; textAnchor=&quot;middle&quot; fontSize=&quot;12&quot; fontWeight=&quot;bold&quot; fill=&quot;#172133&quot;&gt;search_knowledge&lt;/text&gt;&#10;          &lt;text x=&quot;416&quot; y=&quot;302&quot; textAnchor=&quot;middle&quot; fontSize=&quot;10&quot; fill=&quot;#5F5E5A&quot;&gt;检索知识&lt;/text&gt;&#10;          &lt;line x1=&quot;256&quot; y1=&quot;260&quot; x2=&quot;256&quot; y2=&quot;288&quot; stroke=&quot;#22395E&quot; strokeWidth=&quot;1.2&quot; /&gt;&#10;          &lt;line x1=&quot;256&quot; y1=&quot;288&quot; x2=&quot;86&quot; y2=&quot;288&quot; stroke=&quot;#22395E&quot; strokeWidth=&quot;1.2&quot; /&gt;&#10;          &lt;line x1=&quot;256&quot; y1=&quot;288&quot; x2=&quot;246&quot; y2=&quot;288&quot; stroke=&quot;#22395E&quot; strokeWidth=&quot;1.2&quot; /&gt;&#10;          &lt;line x1=&quot;256&quot; y1=&quot;288&quot; x2=&quot;416&quot; y2=&quot;288&quot; stroke=&quot;#22395E&quot; strokeWidth=&quot;1.2&quot; /&gt;&#10;          &lt;line x1=&quot;86&quot; y1=&quot;312&quot; x2=&quot;86&quot; y2=&quot;332&quot; stroke=&quot;#22395E&quot; strokeWidth=&quot;1.2&quot; /&gt;&#10;          &lt;line x1=&quot;246&quot; y1=&quot;312&quot; x2=&quot;246&quot; y2=&quot;332&quot; stroke=&quot;#22395E&quot; strokeWidth=&quot;1.2&quot; /&gt;&#10;          &lt;line x1=&quot;416&quot; y1=&quot;312&quot; x2=&quot;416&quot; y2=&quot;332&quot; stroke=&quot;#22395E&quot; strokeWidth=&quot;1.2&quot; /&gt;&#10;          &lt;rect x=&quot;16&quot; y=&quot;336&quot; width=&quot;480&quot; height=&quot;42&quot; rx=&quot;6&quot; fill=&quot;#172133&quot; /&gt;&#10;          &lt;text x=&quot;256&quot; y=&quot;362&quot; textAnchor=&quot;middle&quot; fontSize=&quot;12&quot; fontWeight=&quot;bold&quot; fill=&quot;#BD9B56&quot;&gt;业务 API 层 · 工具执行 · Trace 全程记录可评估&lt;/text&gt;&#10;          &lt;text x=&quot;256&quot; y=&quot;410&quot; textAnchor=&quot;middle&quot; fontSize=&quot;12&quot; fill=&quot;#5F5E5A&quot;&gt;驱动模型：智谱 GLM-4-Flash · 编排框架：LangGraph&lt;/text&gt;&#10;        &lt;/g&gt;&#10;      &lt;/svg&gt;&#10;    &lt;/div&gt;&#10;    &lt;div style={{ flex: 1, display: 'flex', flexDirection: 'column', gap: 18 }}&gt;&#10;      &lt;div&gt;&#10;        &lt;div style={{ fontSize: 14, color: '#BD9B56', fontWeight: 'bold', letterSpacing: '0.1em', marginBottom: 6 }}&gt;1.  多轮状态机&lt;/div&gt;&#10;        &lt;p style={{ fontSize: 14, color: '#5F5E5A', margin: 0, lineHeight: 1.65 }}&gt;报修不是单轮问答——业主只说「厨房漏水」时，Agent 会主动追问房屋位置、故障类型，把信息补全后才创建工单，避免生成残缺工单。&lt;/p&gt;&#10;      &lt;/div&gt;&#10;      &lt;div&gt;&#10;        &lt;div style={{ fontSize: 14, color: '#BD9B56', fontWeight: 'bold', letterSpacing: '0.1em', marginBottom: 6 }}&gt;2.  五类意图&lt;/div&gt;&#10;        &lt;p style={{ fontSize: 14, color: '#5F5E5A', margin: 0, lineHeight: 1.65 }}&gt;报修、费用、公告、知识咨询、问题上报，自然语言直达对应业务工具，实测意图识别准确率 100%。&lt;/p&gt;&#10;      &lt;/div&gt;&#10;      &lt;div&gt;&#10;        &lt;div style={{ fontSize: 14, color: '#BD9B56', fontWeight: 'bold', letterSpacing: '0.1em', marginBottom: 6 }}&gt;3.  可观测可评估&lt;/div&gt;&#10;        &lt;p style={{ fontSize: 14, color: '#5F5E5A', margin: 0, lineHeight: 1.65 }}&gt;每次对话的意图、工具、结果全程记录 Trace，可回放、可评估，是量化评估体系的数据基础。&lt;/p&gt;&#10;      &lt;/div&gt;&#10;    &lt;/div&gt;&#10;  &lt;/div&gt;&#10;  &lt;div style={{ flexShrink: 0, height: 40, display: 'flex', alignItems: 'flex-end', justifyContent: 'space-between' }}&gt;&#10;    &lt;span style={{ color: '#BD9B56', fontSize: 12, letterSpacing: '0.1em' }}&gt;云溪花园 · 智慧社区&lt;/span&gt;&#10;    &lt;span style={{ color: '#a09b8c', fontSize: 12 }}&gt;09 / 15&lt;/span&gt;&#10;  &lt;/div&gt;&#10;&lt;/Slide&gt;"/>
-        <p:cNvGrpSpPr/>
-        <p:nvPr/>
-      </p:nvGrpSpPr>
-      <p:grpSpPr>
-        <a:xfrm>
-          <a:off x="0" y="0"/>
-          <a:ext cx="0" cy="0"/>
-          <a:chOff x="0" y="0"/>
-          <a:chExt cx="0" cy="0"/>
-        </a:xfrm>
-      </p:grpSpPr>
-      <p:sp>
-        <p:nvSpPr>
-          <p:cNvPr id="401" name=""/>
-          <p:cNvSpPr/>
-          <p:nvPr/>
-        </p:nvSpPr>
-        <p:spPr>
-          <a:xfrm rot="0" flipH="0" flipV="0">
-            <a:off x="0" y="0"/>
-            <a:ext cx="12192000" cy="6858000"/>
-          </a:xfrm>
-          <a:prstGeom prst="rect">
-            <a:avLst/>
-          </a:prstGeom>
-          <a:solidFill>
-            <a:srgbClr val="FBFCFA"/>
-          </a:solidFill>
-          <a:ln/>
-        </p:spPr>
-        <p:txBody>
-          <a:bodyPr/>
-          <a:p/>
-        </p:txBody>
-      </p:sp>
-      <p:sp>
-        <p:nvSpPr>
-          <p:cNvPr id="402" name="" descr="{&quot;isTemplate&quot;:true,&quot;type&quot;:&quot;text&quot;}"/>
-          <p:cNvSpPr txBox="1"/>
-          <p:nvPr/>
-        </p:nvSpPr>
-        <p:spPr>
-          <a:xfrm rot="0" flipH="0" flipV="0">
-            <a:off x="609600" y="381000"/>
-            <a:ext cx="10972800" cy="152400"/>
-          </a:xfrm>
-          <a:prstGeom prst="rect"/>
-        </p:spPr>
-        <p:txBody>
-          <a:bodyPr wrap="none" lIns="0" tIns="0" rIns="0" bIns="0"/>
-          <a:p>
-            <a:pPr>
-              <a:lnSpc>
-                <a:spcPct val="100000"/>
-              </a:lnSpc>
-            </a:pPr>
-            <a:r>
-              <a:rPr lang="en-US" sz="975" spc="-9223372036854775808">
-                <a:solidFill>
-                  <a:srgbClr val="BD9B56"/>
-                </a:solidFill>
-                <a:latin typeface="Microsoft YaHei"/>
-                <a:ea typeface="Microsoft YaHei"/>
-              </a:rPr>
-              <a:t>02 · </a:t>
-            </a:r>
-            <a:r>
-              <a:rPr lang="zh-CN" sz="975" spc="-9223372036854775808">
-                <a:solidFill>
-                  <a:srgbClr val="BD9B56"/>
-                </a:solidFill>
-                <a:latin typeface="Microsoft YaHei"/>
-                <a:ea typeface="Microsoft YaHei"/>
-              </a:rPr>
-              <a:t>技术构建过程</a:t>
-            </a:r>
-            <a:endParaRPr/>
-          </a:p>
-        </p:txBody>
-      </p:sp>
-      <p:sp>
-        <p:nvSpPr>
-          <p:cNvPr id="403" name="" descr="{&quot;isTemplate&quot;:true,&quot;type&quot;:&quot;text&quot;}"/>
-          <p:cNvSpPr txBox="1"/>
-          <p:nvPr/>
-        </p:nvSpPr>
-        <p:spPr>
-          <a:xfrm rot="0" flipH="0" flipV="0">
-            <a:off x="609600" y="609600"/>
-            <a:ext cx="10972800" cy="447675"/>
-          </a:xfrm>
-          <a:prstGeom prst="rect"/>
-        </p:spPr>
-        <p:txBody>
-          <a:bodyPr wrap="none" lIns="0" tIns="0" rIns="0" bIns="0"/>
-          <a:p>
-            <a:pPr>
-              <a:lnSpc>
-                <a:spcPct val="130000"/>
-              </a:lnSpc>
-            </a:pPr>
-            <a:r>
-              <a:rPr lang="en-US" sz="2250" b="1">
-                <a:solidFill>
-                  <a:srgbClr val="172133"/>
-                </a:solidFill>
-                <a:latin typeface="Microsoft YaHei"/>
-                <a:ea typeface="Microsoft YaHei"/>
-              </a:rPr>
-              <a:t>AI Agent </a:t>
-            </a:r>
-            <a:r>
-              <a:rPr lang="zh-CN" sz="2250" b="1">
-                <a:solidFill>
-                  <a:srgbClr val="172133"/>
-                </a:solidFill>
-                <a:latin typeface="Microsoft YaHei"/>
-                <a:ea typeface="Microsoft YaHei"/>
-              </a:rPr>
-              <a:t>架构：</a:t>
-            </a:r>
-            <a:r>
-              <a:rPr lang="en-US" sz="2250" b="1">
-                <a:solidFill>
-                  <a:srgbClr val="172133"/>
-                </a:solidFill>
-                <a:latin typeface="Microsoft YaHei"/>
-                <a:ea typeface="Microsoft YaHei"/>
-              </a:rPr>
-              <a:t>LangGraph </a:t>
-            </a:r>
-            <a:r>
-              <a:rPr lang="zh-CN" sz="2250" b="1">
-                <a:solidFill>
-                  <a:srgbClr val="172133"/>
-                </a:solidFill>
-                <a:latin typeface="Microsoft YaHei"/>
-                <a:ea typeface="Microsoft YaHei"/>
-              </a:rPr>
-              <a:t>多智能体协作</a:t>
-            </a:r>
-            <a:endParaRPr/>
-          </a:p>
-        </p:txBody>
-      </p:sp>
-      <p:sp>
-        <p:nvSpPr>
-          <p:cNvPr id="404" name=""/>
-          <p:cNvSpPr/>
-          <p:nvPr/>
-        </p:nvSpPr>
-        <p:spPr>
-          <a:xfrm rot="0" flipH="0" flipV="0">
-            <a:off x="609600" y="1133475"/>
-            <a:ext cx="5334000" cy="4895850"/>
-          </a:xfrm>
-          <a:prstGeom prst="roundRect">
-            <a:avLst>
-              <a:gd name="adj" fmla="val 2335"/>
-            </a:avLst>
-          </a:prstGeom>
-          <a:solidFill>
-            <a:srgbClr val="FFFFFF"/>
-          </a:solidFill>
-          <a:ln/>
-          <a:effectLst>
-            <a:outerShdw blurRad="228600" dist="57150" dir="5400000">
-              <a:srgbClr val="172133">
-                <a:alpha val="8000"/>
-              </a:srgbClr>
-            </a:outerShdw>
-          </a:effectLst>
-        </p:spPr>
-        <p:txBody>
-          <a:bodyPr/>
-          <a:p/>
-        </p:txBody>
-      </p:sp>
-      <p:pic>
-        <p:nvPicPr>
-          <p:cNvPr id="405" name=""/>
-          <p:cNvPicPr>
-            <a:picLocks noChangeAspect="1"/>
-          </p:cNvPicPr>
-          <p:nvPr/>
-        </p:nvPicPr>
-        <p:blipFill>
-          <a:blip>
-            <a:extLst>
-              <a:ext uri="{96DAC541-7B7A-43D3-8B79-37D633B846F1}">
-                <asvg:svgBlip r:embed="rId1"/>
-              </a:ext>
-            </a:extLst>
-          </a:blip>
-          <a:stretch>
-            <a:fillRect/>
-          </a:stretch>
-        </p:blipFill>
-        <p:spPr>
-          <a:xfrm rot="0" flipH="0" flipV="0">
-            <a:off x="838200" y="1343025"/>
-            <a:ext cx="4876800" cy="4476750"/>
-          </a:xfrm>
-          <a:prstGeom prst="rect">
-            <a:avLst/>
-          </a:prstGeom>
-          <a:ln/>
-        </p:spPr>
-      </p:pic>
-      <p:sp>
-        <p:nvSpPr>
-          <p:cNvPr id="406" name="" descr="{&quot;isTemplate&quot;:true,&quot;type&quot;:&quot;text&quot;}"/>
-          <p:cNvSpPr txBox="1"/>
-          <p:nvPr/>
-        </p:nvSpPr>
-        <p:spPr>
-          <a:xfrm rot="0" flipH="0" flipV="0">
-            <a:off x="6248400" y="2276475"/>
-            <a:ext cx="5334000" cy="161925"/>
-          </a:xfrm>
-          <a:prstGeom prst="rect"/>
-        </p:spPr>
-        <p:txBody>
-          <a:bodyPr wrap="none" lIns="0" tIns="0" rIns="0" bIns="0"/>
-          <a:p>
-            <a:pPr>
-              <a:lnSpc>
-                <a:spcPct val="100000"/>
-              </a:lnSpc>
-            </a:pPr>
-            <a:r>
-              <a:rPr lang="en-US" sz="1050" spc="-9223372036854775808">
-                <a:solidFill>
-                  <a:srgbClr val="BD9B56"/>
-                </a:solidFill>
-                <a:latin typeface="Microsoft YaHei"/>
-                <a:ea typeface="Microsoft YaHei"/>
-              </a:rPr>
-              <a:t>1.  </a:t>
-            </a:r>
-            <a:r>
-              <a:rPr lang="zh-CN" sz="1050" spc="-9223372036854775808">
-                <a:solidFill>
-                  <a:srgbClr val="BD9B56"/>
-                </a:solidFill>
-                <a:latin typeface="Microsoft YaHei"/>
-                <a:ea typeface="Microsoft YaHei"/>
-              </a:rPr>
-              <a:t>多轮状态机</a:t>
-            </a:r>
-            <a:endParaRPr/>
-          </a:p>
-        </p:txBody>
-      </p:sp>
-      <p:sp>
-        <p:nvSpPr>
-          <p:cNvPr id="407" name="" descr="{&quot;isTemplate&quot;:true,&quot;type&quot;:&quot;text&quot;}"/>
-          <p:cNvSpPr txBox="1"/>
-          <p:nvPr/>
-        </p:nvSpPr>
-        <p:spPr>
-          <a:xfrm rot="0" flipH="0" flipV="0">
-            <a:off x="6248400" y="2495550"/>
-            <a:ext cx="5334000" cy="533400"/>
-          </a:xfrm>
-          <a:prstGeom prst="rect"/>
-        </p:spPr>
-        <p:txBody>
-          <a:bodyPr wrap="square" lIns="0" tIns="0" rIns="0" bIns="0">
-            <a:normAutofit/>
-          </a:bodyPr>
-          <a:p>
-            <a:pPr>
-              <a:lnSpc>
-                <a:spcPct val="165000"/>
-              </a:lnSpc>
-            </a:pPr>
-            <a:r>
-              <a:rPr lang="zh-CN" sz="1050">
-                <a:solidFill>
-                  <a:srgbClr val="5F5E5A"/>
-                </a:solidFill>
-                <a:latin typeface="Microsoft YaHei"/>
-                <a:ea typeface="Microsoft YaHei"/>
-              </a:rPr>
-              <a:t>报修不是单轮问答——业主只说「厨房漏水」时，</a:t>
-            </a:r>
-            <a:r>
-              <a:rPr lang="en-US" sz="1050">
-                <a:solidFill>
-                  <a:srgbClr val="5F5E5A"/>
-                </a:solidFill>
-                <a:latin typeface="Microsoft YaHei"/>
-                <a:ea typeface="Microsoft YaHei"/>
-              </a:rPr>
-              <a:t>Agent </a:t>
-            </a:r>
-            <a:r>
-              <a:rPr lang="zh-CN" sz="1050">
-                <a:solidFill>
-                  <a:srgbClr val="5F5E5A"/>
-                </a:solidFill>
-                <a:latin typeface="Microsoft YaHei"/>
-                <a:ea typeface="Microsoft YaHei"/>
-              </a:rPr>
-              <a:t>会主动追问房屋位置、故障类型，把信息补全后才创建工单，避免生成残缺工单。</a:t>
-            </a:r>
-            <a:endParaRPr/>
-          </a:p>
-        </p:txBody>
-      </p:sp>
-      <p:sp>
-        <p:nvSpPr>
-          <p:cNvPr id="408" name="" descr="{&quot;isTemplate&quot;:true,&quot;type&quot;:&quot;text&quot;}"/>
-          <p:cNvSpPr txBox="1"/>
-          <p:nvPr/>
-        </p:nvSpPr>
-        <p:spPr>
-          <a:xfrm rot="0" flipH="0" flipV="0">
-            <a:off x="6248400" y="3200400"/>
-            <a:ext cx="5334000" cy="161925"/>
-          </a:xfrm>
-          <a:prstGeom prst="rect"/>
-        </p:spPr>
-        <p:txBody>
-          <a:bodyPr wrap="none" lIns="0" tIns="0" rIns="0" bIns="0"/>
-          <a:p>
-            <a:pPr>
-              <a:lnSpc>
-                <a:spcPct val="100000"/>
-              </a:lnSpc>
-            </a:pPr>
-            <a:r>
-              <a:rPr lang="en-US" sz="1050" spc="-9223372036854775808">
-                <a:solidFill>
-                  <a:srgbClr val="BD9B56"/>
-                </a:solidFill>
-                <a:latin typeface="Microsoft YaHei"/>
-                <a:ea typeface="Microsoft YaHei"/>
-              </a:rPr>
-              <a:t>2.  </a:t>
-            </a:r>
-            <a:r>
-              <a:rPr lang="zh-CN" sz="1050" spc="-9223372036854775808">
-                <a:solidFill>
-                  <a:srgbClr val="BD9B56"/>
-                </a:solidFill>
-                <a:latin typeface="Microsoft YaHei"/>
-                <a:ea typeface="Microsoft YaHei"/>
-              </a:rPr>
-              <a:t>五类意图</a:t>
-            </a:r>
-            <a:endParaRPr/>
-          </a:p>
-        </p:txBody>
-      </p:sp>
-      <p:sp>
-        <p:nvSpPr>
-          <p:cNvPr id="409" name="" descr="{&quot;isTemplate&quot;:true,&quot;type&quot;:&quot;text&quot;}"/>
-          <p:cNvSpPr txBox="1"/>
-          <p:nvPr/>
-        </p:nvSpPr>
-        <p:spPr>
-          <a:xfrm rot="0" flipH="0" flipV="0">
-            <a:off x="6248400" y="3419475"/>
-            <a:ext cx="5334000" cy="533400"/>
-          </a:xfrm>
-          <a:prstGeom prst="rect"/>
-        </p:spPr>
-        <p:txBody>
-          <a:bodyPr wrap="square" lIns="0" tIns="0" rIns="0" bIns="0">
-            <a:normAutofit/>
-          </a:bodyPr>
-          <a:p>
-            <a:pPr>
-              <a:lnSpc>
-                <a:spcPct val="165000"/>
-              </a:lnSpc>
-            </a:pPr>
-            <a:r>
-              <a:rPr lang="zh-CN" sz="1050">
-                <a:solidFill>
-                  <a:srgbClr val="5F5E5A"/>
-                </a:solidFill>
-                <a:latin typeface="Microsoft YaHei"/>
-                <a:ea typeface="Microsoft YaHei"/>
-              </a:rPr>
-              <a:t>报修、费用、公告、知识咨询、问题上报，自然语言直达对应业务工具，实测意图识别准确率</a:t>
-            </a:r>
-            <a:r>
-              <a:rPr lang="en-US" sz="1050">
-                <a:solidFill>
-                  <a:srgbClr val="5F5E5A"/>
-                </a:solidFill>
-                <a:latin typeface="Microsoft YaHei"/>
-                <a:ea typeface="Microsoft YaHei"/>
-              </a:rPr>
-              <a:t> 100%</a:t>
-            </a:r>
-            <a:r>
-              <a:rPr lang="zh-CN" sz="1050">
-                <a:solidFill>
-                  <a:srgbClr val="5F5E5A"/>
-                </a:solidFill>
-                <a:latin typeface="Microsoft YaHei"/>
-                <a:ea typeface="Microsoft YaHei"/>
-              </a:rPr>
-              <a:t>。</a:t>
-            </a:r>
-            <a:endParaRPr/>
-          </a:p>
-        </p:txBody>
-      </p:sp>
-      <p:sp>
-        <p:nvSpPr>
-          <p:cNvPr id="410" name="" descr="{&quot;isTemplate&quot;:true,&quot;type&quot;:&quot;text&quot;}"/>
-          <p:cNvSpPr txBox="1"/>
-          <p:nvPr/>
-        </p:nvSpPr>
-        <p:spPr>
-          <a:xfrm rot="0" flipH="0" flipV="0">
-            <a:off x="6248400" y="4124325"/>
-            <a:ext cx="5334000" cy="161925"/>
-          </a:xfrm>
-          <a:prstGeom prst="rect"/>
-        </p:spPr>
-        <p:txBody>
-          <a:bodyPr wrap="none" lIns="0" tIns="0" rIns="0" bIns="0"/>
-          <a:p>
-            <a:pPr>
-              <a:lnSpc>
-                <a:spcPct val="100000"/>
-              </a:lnSpc>
-            </a:pPr>
-            <a:r>
-              <a:rPr lang="en-US" sz="1050" spc="-9223372036854775808">
-                <a:solidFill>
-                  <a:srgbClr val="BD9B56"/>
-                </a:solidFill>
-                <a:latin typeface="Microsoft YaHei"/>
-                <a:ea typeface="Microsoft YaHei"/>
-              </a:rPr>
-              <a:t>3.  </a:t>
-            </a:r>
-            <a:r>
-              <a:rPr lang="zh-CN" sz="1050" spc="-9223372036854775808">
-                <a:solidFill>
-                  <a:srgbClr val="BD9B56"/>
-                </a:solidFill>
-                <a:latin typeface="Microsoft YaHei"/>
-                <a:ea typeface="Microsoft YaHei"/>
-              </a:rPr>
-              <a:t>可观测可评估</a:t>
-            </a:r>
-            <a:endParaRPr/>
-          </a:p>
-        </p:txBody>
-      </p:sp>
-      <p:sp>
-        <p:nvSpPr>
-          <p:cNvPr id="411" name="" descr="{&quot;isTemplate&quot;:true,&quot;type&quot;:&quot;text&quot;}"/>
-          <p:cNvSpPr txBox="1"/>
-          <p:nvPr/>
-        </p:nvSpPr>
-        <p:spPr>
-          <a:xfrm rot="0" flipH="0" flipV="0">
-            <a:off x="6248400" y="4343400"/>
-            <a:ext cx="5334000" cy="533400"/>
-          </a:xfrm>
-          <a:prstGeom prst="rect"/>
-        </p:spPr>
-        <p:txBody>
-          <a:bodyPr wrap="square" lIns="0" tIns="0" rIns="0" bIns="0">
-            <a:normAutofit/>
-          </a:bodyPr>
-          <a:p>
-            <a:pPr>
-              <a:lnSpc>
-                <a:spcPct val="165000"/>
-              </a:lnSpc>
-            </a:pPr>
-            <a:r>
-              <a:rPr lang="zh-CN" sz="1050">
-                <a:solidFill>
-                  <a:srgbClr val="5F5E5A"/>
-                </a:solidFill>
-                <a:latin typeface="Microsoft YaHei"/>
-                <a:ea typeface="Microsoft YaHei"/>
-              </a:rPr>
-              <a:t>每次对话的意图、工具、结果全程记录</a:t>
-            </a:r>
-            <a:r>
-              <a:rPr lang="en-US" sz="1050">
-                <a:solidFill>
-                  <a:srgbClr val="5F5E5A"/>
-                </a:solidFill>
-                <a:latin typeface="Microsoft YaHei"/>
-                <a:ea typeface="Microsoft YaHei"/>
-              </a:rPr>
-              <a:t> Trace</a:t>
-            </a:r>
-            <a:r>
-              <a:rPr lang="zh-CN" sz="1050">
-                <a:solidFill>
-                  <a:srgbClr val="5F5E5A"/>
-                </a:solidFill>
-                <a:latin typeface="Microsoft YaHei"/>
-                <a:ea typeface="Microsoft YaHei"/>
-              </a:rPr>
-              <a:t>，可回放、可评估，是量化评估体系的数据基础。</a:t>
-            </a:r>
-            <a:endParaRPr/>
-          </a:p>
-        </p:txBody>
-      </p:sp>
-      <p:sp>
-        <p:nvSpPr>
-          <p:cNvPr id="412" name="" descr="{&quot;isTemplate&quot;:true,&quot;type&quot;:&quot;text&quot;}"/>
-          <p:cNvSpPr txBox="1"/>
-          <p:nvPr/>
-        </p:nvSpPr>
-        <p:spPr>
-          <a:xfrm rot="0" flipH="0" flipV="0">
-            <a:off x="609600" y="6334125"/>
-            <a:ext cx="1009650" cy="142875"/>
-          </a:xfrm>
-          <a:prstGeom prst="rect"/>
-        </p:spPr>
-        <p:txBody>
-          <a:bodyPr wrap="none" lIns="0" tIns="0" rIns="0" bIns="0"/>
-          <a:p>
-            <a:pPr>
-              <a:lnSpc>
-                <a:spcPct val="100000"/>
-              </a:lnSpc>
-            </a:pPr>
-            <a:r>
-              <a:rPr lang="zh-CN" sz="900">
-                <a:solidFill>
-                  <a:srgbClr val="BD9B56"/>
-                </a:solidFill>
-                <a:latin typeface="Microsoft YaHei"/>
-                <a:ea typeface="Microsoft YaHei"/>
-              </a:rPr>
-              <a:t>云溪花园</a:t>
-            </a:r>
-            <a:r>
-              <a:rPr lang="en-US" sz="900">
-                <a:solidFill>
-                  <a:srgbClr val="BD9B56"/>
-                </a:solidFill>
-                <a:latin typeface="Microsoft YaHei"/>
-                <a:ea typeface="Microsoft YaHei"/>
-              </a:rPr>
-              <a:t> · </a:t>
-            </a:r>
-            <a:r>
-              <a:rPr lang="zh-CN" sz="900">
-                <a:solidFill>
-                  <a:srgbClr val="BD9B56"/>
-                </a:solidFill>
-                <a:latin typeface="Microsoft YaHei"/>
-                <a:ea typeface="Microsoft YaHei"/>
-              </a:rPr>
-              <a:t>智慧社区</a:t>
-            </a:r>
-            <a:endParaRPr/>
-          </a:p>
-        </p:txBody>
-      </p:sp>
-      <p:sp>
-        <p:nvSpPr>
-          <p:cNvPr id="413" name="" descr="{&quot;isTemplate&quot;:true,&quot;type&quot;:&quot;text&quot;}"/>
-          <p:cNvSpPr txBox="1"/>
-          <p:nvPr/>
-        </p:nvSpPr>
-        <p:spPr>
-          <a:xfrm rot="0" flipH="0" flipV="0">
-            <a:off x="11191875" y="6334125"/>
-            <a:ext cx="390525" cy="142875"/>
-          </a:xfrm>
-          <a:prstGeom prst="rect"/>
-        </p:spPr>
-        <p:txBody>
-          <a:bodyPr wrap="none" lIns="0" tIns="0" rIns="0" bIns="0"/>
-          <a:p>
-            <a:pPr>
-              <a:lnSpc>
-                <a:spcPct val="100000"/>
-              </a:lnSpc>
-            </a:pPr>
-            <a:r>
-              <a:rPr lang="en-US" sz="900">
-                <a:solidFill>
-                  <a:srgbClr val="A09B8C"/>
-                </a:solidFill>
-                <a:latin typeface="Microsoft YaHei"/>
-                <a:ea typeface="Microsoft YaHei"/>
-              </a:rPr>
-              <a:t>09 / 15</a:t>
+              <a:t>9 / 19</a:t>
             </a:r>
             <a:endParaRPr/>
           </a:p>

--- a/ppt/AI物业社区智能体方案/AI物业社区智能体-方案.pptx
+++ b/ppt/AI物业社区智能体方案/AI物业社区智能体-方案.pptx
@@ -5444,7 +5444,7 @@
   <p:cSld>
     <p:spTree>
       <p:nvGrpSpPr>
-        <p:cNvPr id="110" name="" descr="&lt;Slide style={{ width: '1280px', height: '720px', background: 'linear-gradient(135deg, #172133 0%, #22395E 100%)', position: 'relative', display: 'flex', flexDirection: 'column', justifyContent: 'center', padding: '0 96px' }}&gt;&#10;  &lt;div style={{ color: '#BD9B56', fontSize: 15, letterSpacing: '0.35em', marginBottom: 24 }}&gt;SECTION 03&lt;/div&gt;&#10;  &lt;div style={{ display: 'flex', alignItems: 'baseline', gap: 28 }}&gt;&#10;    &lt;span style={{ fontSize: 110, fontWeight: 'bold', color: 'rgba(189,155,86,0.28)', fontFamily: 'Inter, sans-serif', lineHeight: 1 }}&gt;03&lt;/span&gt;&#10;    &lt;span style={{ fontSize: 46, fontWeight: 'bold', color: '#FBFCFA', letterSpacing: '0.02em' }}&gt;成果与验证&lt;/span&gt;&#10;  &lt;/div&gt;&#10;  &lt;div style={{ width: 72, height: 3, background: '#BD9B56', margin: '28px 0 20px' }} /&gt;&#10;  &lt;div style={{ fontSize: 16, color: 'rgba(251,252,250,0.72)', letterSpacing: '0.04em' }}&gt;三条功能闭环 · 量化评估指标&lt;/div&gt;&#10;  &lt;div style={{ position: 'absolute', bottom: 42, right: 96, color: 'rgba(251,252,250,0.4)', fontSize: 13, fontFamily: 'Inter, sans-serif' }}&gt;13 / 19&lt;/div&gt;&#10;&lt;/Slide&gt;"/>
+        <p:cNvPr id="110" name="" descr="&lt;Slide style={{ width: '1280px', height: '720px', background: 'linear-gradient(135deg, #172133 0%, #22395E 100%)', position: 'relative', display: 'flex', flexDirection: 'column', justifyContent: 'center', padding: '0 96px' }}&gt;&#10;  &lt;div style={{ color: '#BD9B56', fontSize: 15, letterSpacing: '0.35em', marginBottom: 24 }}&gt;SECTION 03&lt;/div&gt;&#10;  &lt;div style={{ display: 'flex', alignItems: 'center', gap: 36 }}&gt;&#10;    &lt;span style={{ fontSize: 160, fontWeight: 'bold', color: '#BD9B56', lineHeight: 1 }}&gt;03&lt;/span&gt;&#10;    &lt;div&gt;&#10;      &lt;div style={{ fontSize: 50, fontWeight: 'bold', color: '#FBFCFA', letterSpacing: '0.02em', lineHeight: 1.15 }}&gt;成果与验证&lt;/div&gt;&#10;      &lt;div style={{ fontSize: 17, color: 'rgba(251,252,250,0.55)', marginTop: 12, letterSpacing: '0.06em' }}&gt;RESULTS &amp;amp; VALIDATION&lt;/div&gt;&#10;    &lt;/div&gt;&#10;  &lt;/div&gt;&#10;  &lt;div style={{ width: 80, height: 3, background: '#BD9B56', margin: '32px 0 24px' }} /&gt;&#10;  &lt;div style={{ display: 'flex', gap: 14 }}&gt;&#10;    &lt;span style={{ fontSize: 15, color: 'rgba(251,252,250,0.88)', border: '1px solid rgba(189,155,86,0.65)', padding: '9px 20px', borderRadius: 22 }}&gt;三条功能闭环&lt;/span&gt;&#10;    &lt;span style={{ fontSize: 15, color: 'rgba(251,252,250,0.88)', border: '1px solid rgba(189,155,86,0.65)', padding: '9px 20px', borderRadius: 22 }}&gt;量化评估指标&lt;/span&gt;&#10;  &lt;/div&gt;&#10;  &lt;div style={{ position: 'absolute', bottom: 42, right: 96, color: 'rgba(251,252,250,0.4)', fontSize: 13 }}&gt;13 / 19&lt;/div&gt;&#10;&lt;/Slide&gt;"/>
         <p:cNvGrpSpPr/>
         <p:nvPr/>
       </p:nvGrpSpPr>
@@ -5496,8 +5496,43 @@
         </p:nvSpPr>
         <p:spPr>
           <a:xfrm rot="0" flipH="0" flipV="0">
+            <a:off x="914400" y="1866900"/>
+            <a:ext cx="10363200" cy="171450"/>
+          </a:xfrm>
+          <a:prstGeom prst="rect"/>
+        </p:spPr>
+        <p:txBody>
+          <a:bodyPr wrap="none" lIns="0" tIns="0" rIns="0" bIns="0"/>
+          <a:p>
+            <a:pPr>
+              <a:lnSpc>
+                <a:spcPct val="100000"/>
+              </a:lnSpc>
+            </a:pPr>
+            <a:r>
+              <a:rPr lang="en-US" sz="1125" spc="-9223372036854775808">
+                <a:solidFill>
+                  <a:srgbClr val="BD9B56"/>
+                </a:solidFill>
+                <a:latin typeface="Microsoft YaHei"/>
+                <a:ea typeface="Microsoft YaHei"/>
+              </a:rPr>
+              <a:t>SECTION 03</a:t>
+            </a:r>
+            <a:endParaRPr/>
+          </a:p>
+        </p:txBody>
+      </p:sp>
+      <p:sp>
+        <p:nvSpPr>
+          <p:cNvPr id="113" name="" descr="{&quot;isTemplate&quot;:true,&quot;type&quot;:&quot;text&quot;}"/>
+          <p:cNvSpPr txBox="1"/>
+          <p:nvPr/>
+        </p:nvSpPr>
+        <p:spPr>
+          <a:xfrm rot="0" flipH="0" flipV="0">
             <a:off x="914400" y="2266950"/>
-            <a:ext cx="10363200" cy="171450"/>
+            <a:ext cx="1885950" cy="1828800"/>
           </a:xfrm>
           <a:prstGeom prst="rect"/>
         </p:spPr>
@@ -5510,29 +5545,64 @@
               </a:lnSpc>
             </a:pPr>
             <a:r>
-              <a:rPr lang="en-US" sz="1125" spc="-9223372036854775808">
+              <a:rPr lang="en-US" sz="12000" b="1">
                 <a:solidFill>
                   <a:srgbClr val="BD9B56"/>
                 </a:solidFill>
                 <a:latin typeface="Microsoft YaHei"/>
                 <a:ea typeface="Microsoft YaHei"/>
               </a:rPr>
-              <a:t>SECTION 03</a:t>
-            </a:r>
-            <a:endParaRPr/>
-          </a:p>
-        </p:txBody>
-      </p:sp>
-      <p:sp>
-        <p:nvSpPr>
-          <p:cNvPr id="113" name="" descr="{&quot;isTemplate&quot;:true,&quot;type&quot;:&quot;text&quot;}"/>
-          <p:cNvSpPr txBox="1"/>
-          <p:nvPr/>
-        </p:nvSpPr>
-        <p:spPr>
-          <a:xfrm rot="0" flipH="0" flipV="0">
-            <a:off x="914400" y="2667000"/>
-            <a:ext cx="1343025" cy="1257300"/>
+              <a:t>03</a:t>
+            </a:r>
+            <a:endParaRPr/>
+          </a:p>
+        </p:txBody>
+      </p:sp>
+      <p:sp>
+        <p:nvSpPr>
+          <p:cNvPr id="114" name="" descr="{&quot;isTemplate&quot;:true,&quot;type&quot;:&quot;text&quot;}"/>
+          <p:cNvSpPr txBox="1"/>
+          <p:nvPr/>
+        </p:nvSpPr>
+        <p:spPr>
+          <a:xfrm rot="0" flipH="0" flipV="0">
+            <a:off x="3143250" y="2695575"/>
+            <a:ext cx="2381250" cy="657225"/>
+          </a:xfrm>
+          <a:prstGeom prst="rect"/>
+        </p:spPr>
+        <p:txBody>
+          <a:bodyPr wrap="none" lIns="0" tIns="0" rIns="0" bIns="0"/>
+          <a:p>
+            <a:pPr>
+              <a:lnSpc>
+                <a:spcPct val="114999"/>
+              </a:lnSpc>
+            </a:pPr>
+            <a:r>
+              <a:rPr lang="zh-CN" sz="3750" spc="-9223372036854775808">
+                <a:solidFill>
+                  <a:srgbClr val="FBFCFA"/>
+                </a:solidFill>
+                <a:latin typeface="Microsoft YaHei"/>
+                <a:ea typeface="Microsoft YaHei"/>
+              </a:rPr>
+              <a:t>成果与验证</a:t>
+            </a:r>
+            <a:endParaRPr/>
+          </a:p>
+        </p:txBody>
+      </p:sp>
+      <p:sp>
+        <p:nvSpPr>
+          <p:cNvPr id="115" name="" descr="{&quot;isTemplate&quot;:true,&quot;type&quot;:&quot;text&quot;}"/>
+          <p:cNvSpPr txBox="1"/>
+          <p:nvPr/>
+        </p:nvSpPr>
+        <p:spPr>
+          <a:xfrm rot="0" flipH="0" flipV="0">
+            <a:off x="3143250" y="3467100"/>
+            <a:ext cx="2381250" cy="200025"/>
           </a:xfrm>
           <a:prstGeom prst="rect"/>
         </p:spPr>
@@ -5545,66 +5615,31 @@
               </a:lnSpc>
             </a:pPr>
             <a:r>
-              <a:rPr lang="en-US" sz="8250" b="1">
-                <a:solidFill>
-                  <a:srgbClr val="BD9B56">
-                    <a:alpha val="28000"/>
+              <a:rPr lang="en-US" sz="1275" spc="-9223372036854775808">
+                <a:solidFill>
+                  <a:srgbClr val="FBFCFA">
+                    <a:alpha val="55000"/>
                   </a:srgbClr>
                 </a:solidFill>
-                <a:latin typeface="Inter"/>
-                <a:ea typeface="Inter"/>
-              </a:rPr>
-              <a:t>03</a:t>
-            </a:r>
-            <a:endParaRPr/>
-          </a:p>
-        </p:txBody>
-      </p:sp>
-      <p:sp>
-        <p:nvSpPr>
-          <p:cNvPr id="114" name="" descr="{&quot;isTemplate&quot;:true,&quot;type&quot;:&quot;text&quot;}"/>
-          <p:cNvSpPr txBox="1"/>
-          <p:nvPr/>
-        </p:nvSpPr>
-        <p:spPr>
-          <a:xfrm rot="0" flipH="0" flipV="0">
-            <a:off x="2524125" y="2667000"/>
-            <a:ext cx="2190750" cy="1257300"/>
-          </a:xfrm>
-          <a:prstGeom prst="rect"/>
-        </p:spPr>
-        <p:txBody>
-          <a:bodyPr wrap="none" lIns="0" tIns="0" rIns="0" bIns="0"/>
-          <a:p>
-            <a:pPr>
-              <a:lnSpc>
-                <a:spcPct val="100000"/>
-              </a:lnSpc>
-            </a:pPr>
-            <a:r>
-              <a:rPr lang="zh-CN" sz="3450" b="1">
-                <a:solidFill>
-                  <a:srgbClr val="FBFCFA"/>
-                </a:solidFill>
-                <a:latin typeface="Microsoft YaHei"/>
-                <a:ea typeface="Microsoft YaHei"/>
-              </a:rPr>
-              <a:t>成果与验证</a:t>
-            </a:r>
-            <a:endParaRPr/>
-          </a:p>
-        </p:txBody>
-      </p:sp>
-      <p:sp>
-        <p:nvSpPr>
-          <p:cNvPr id="115" name=""/>
+                <a:latin typeface="Microsoft YaHei"/>
+                <a:ea typeface="Microsoft YaHei"/>
+              </a:rPr>
+              <a:t>RESULTS &amp; VALIDATION</a:t>
+            </a:r>
+            <a:endParaRPr/>
+          </a:p>
+        </p:txBody>
+      </p:sp>
+      <p:sp>
+        <p:nvSpPr>
+          <p:cNvPr id="116" name=""/>
           <p:cNvSpPr/>
           <p:nvPr/>
         </p:nvSpPr>
         <p:spPr>
           <a:xfrm rot="0" flipH="0" flipV="0">
-            <a:off x="914400" y="4191000"/>
-            <a:ext cx="685800" cy="28575"/>
+            <a:off x="914400" y="4400550"/>
+            <a:ext cx="762000" cy="28575"/>
           </a:xfrm>
           <a:prstGeom prst="rect">
             <a:avLst/>
@@ -5621,19 +5656,49 @@
       </p:sp>
       <p:sp>
         <p:nvSpPr>
-          <p:cNvPr id="116" name="" descr="{&quot;isTemplate&quot;:true,&quot;type&quot;:&quot;text&quot;}"/>
-          <p:cNvSpPr txBox="1"/>
-          <p:nvPr/>
-        </p:nvSpPr>
-        <p:spPr>
-          <a:xfrm rot="0" flipH="0" flipV="0">
-            <a:off x="914400" y="4410075"/>
-            <a:ext cx="10363200" cy="190500"/>
-          </a:xfrm>
-          <a:prstGeom prst="rect"/>
-        </p:spPr>
-        <p:txBody>
-          <a:bodyPr wrap="none" lIns="0" tIns="0" rIns="0" bIns="0"/>
+          <p:cNvPr id="117" name=""/>
+          <p:cNvSpPr/>
+          <p:nvPr/>
+        </p:nvSpPr>
+        <p:spPr>
+          <a:xfrm rot="0" flipH="0" flipV="0">
+            <a:off x="914400" y="4657725"/>
+            <a:ext cx="1238250" cy="342900"/>
+          </a:xfrm>
+          <a:prstGeom prst="roundRect">
+            <a:avLst>
+              <a:gd name="adj" fmla="val 61111"/>
+            </a:avLst>
+          </a:prstGeom>
+          <a:ln w="12700">
+            <a:solidFill>
+              <a:srgbClr val="BD9B56">
+                <a:alpha val="65000"/>
+              </a:srgbClr>
+            </a:solidFill>
+            <a:prstDash val="solid"/>
+          </a:ln>
+        </p:spPr>
+        <p:txBody>
+          <a:bodyPr/>
+          <a:p/>
+        </p:txBody>
+      </p:sp>
+      <p:sp>
+        <p:nvSpPr>
+          <p:cNvPr id="118" name="" descr="{&quot;isTemplate&quot;:true,&quot;type&quot;:&quot;text&quot;}"/>
+          <p:cNvSpPr txBox="1"/>
+          <p:nvPr/>
+        </p:nvSpPr>
+        <p:spPr>
+          <a:xfrm rot="0" flipH="0" flipV="0">
+            <a:off x="914400" y="4657725"/>
+            <a:ext cx="1238250" cy="342900"/>
+          </a:xfrm>
+          <a:prstGeom prst="rect"/>
+        </p:spPr>
+        <p:txBody>
+          <a:bodyPr wrap="none" lIns="142875" tIns="64294" rIns="142875" bIns="64294"/>
           <a:p>
             <a:pPr>
               <a:lnSpc>
@@ -5641,10 +5706,10 @@
               </a:lnSpc>
             </a:pPr>
             <a:r>
-              <a:rPr lang="zh-CN" sz="1200" spc="-9223372036854775808">
+              <a:rPr lang="zh-CN" sz="1125">
                 <a:solidFill>
                   <a:srgbClr val="FBFCFA">
-                    <a:alpha val="72000"/>
+                    <a:alpha val="88000"/>
                   </a:srgbClr>
                 </a:solidFill>
                 <a:latin typeface="Microsoft YaHei"/>
@@ -5652,28 +5717,71 @@
               </a:rPr>
               <a:t>三条功能闭环</a:t>
             </a:r>
-            <a:r>
-              <a:rPr lang="en-US" sz="1200" spc="-9223372036854775808">
+            <a:endParaRPr/>
+          </a:p>
+        </p:txBody>
+      </p:sp>
+      <p:sp>
+        <p:nvSpPr>
+          <p:cNvPr id="119" name=""/>
+          <p:cNvSpPr/>
+          <p:nvPr/>
+        </p:nvSpPr>
+        <p:spPr>
+          <a:xfrm rot="0" flipH="0" flipV="0">
+            <a:off x="2286000" y="4657725"/>
+            <a:ext cx="1238250" cy="342900"/>
+          </a:xfrm>
+          <a:prstGeom prst="roundRect">
+            <a:avLst>
+              <a:gd name="adj" fmla="val 61111"/>
+            </a:avLst>
+          </a:prstGeom>
+          <a:ln w="12700">
+            <a:solidFill>
+              <a:srgbClr val="BD9B56">
+                <a:alpha val="65000"/>
+              </a:srgbClr>
+            </a:solidFill>
+            <a:prstDash val="solid"/>
+          </a:ln>
+        </p:spPr>
+        <p:txBody>
+          <a:bodyPr/>
+          <a:p/>
+        </p:txBody>
+      </p:sp>
+      <p:sp>
+        <p:nvSpPr>
+          <p:cNvPr id="120" name="" descr="{&quot;isTemplate&quot;:true,&quot;type&quot;:&quot;text&quot;}"/>
+          <p:cNvSpPr txBox="1"/>
+          <p:nvPr/>
+        </p:nvSpPr>
+        <p:spPr>
+          <a:xfrm rot="0" flipH="0" flipV="0">
+            <a:off x="2286000" y="4657725"/>
+            <a:ext cx="1238250" cy="342900"/>
+          </a:xfrm>
+          <a:prstGeom prst="rect"/>
+        </p:spPr>
+        <p:txBody>
+          <a:bodyPr wrap="none" lIns="142875" tIns="64294" rIns="142875" bIns="64294"/>
+          <a:p>
+            <a:pPr>
+              <a:lnSpc>
+                <a:spcPct val="100000"/>
+              </a:lnSpc>
+            </a:pPr>
+            <a:r>
+              <a:rPr lang="zh-CN" sz="1125">
                 <a:solidFill>
                   <a:srgbClr val="FBFCFA">
-                    <a:alpha val="72000"/>
+                    <a:alpha val="88000"/>
                   </a:srgbClr>
                 </a:solidFill>
                 <a:latin typeface="Microsoft YaHei"/>
                 <a:ea typeface="Microsoft YaHei"/>
               </a:rPr>
-              <a:t> · </a:t>
-            </a:r>
-            <a:r>
-              <a:rPr lang="zh-CN" sz="1200" spc="-9223372036854775808">
-                <a:solidFill>
-                  <a:srgbClr val="FBFCFA">
-                    <a:alpha val="72000"/>
-                  </a:srgbClr>
-                </a:solidFill>
-                <a:latin typeface="Microsoft YaHei"/>
-                <a:ea typeface="Microsoft YaHei"/>
-              </a:rPr>
               <a:t>量化评估指标</a:t>
             </a:r>
             <a:endParaRPr/>
@@ -5682,14 +5790,14 @@
       </p:sp>
       <p:sp>
         <p:nvSpPr>
-          <p:cNvPr id="117" name="" descr="{&quot;isTemplate&quot;:true,&quot;type&quot;:&quot;text&quot;}"/>
-          <p:cNvSpPr txBox="1"/>
-          <p:nvPr/>
-        </p:nvSpPr>
-        <p:spPr>
-          <a:xfrm rot="0" flipH="0" flipV="0">
-            <a:off x="10877550" y="6305550"/>
-            <a:ext cx="400050" cy="152400"/>
+          <p:cNvPr id="121" name="" descr="{&quot;isTemplate&quot;:true,&quot;type&quot;:&quot;text&quot;}"/>
+          <p:cNvSpPr txBox="1"/>
+          <p:nvPr/>
+        </p:nvSpPr>
+        <p:spPr>
+          <a:xfrm rot="0" flipH="0" flipV="0">
+            <a:off x="10858500" y="6305550"/>
+            <a:ext cx="419100" cy="152400"/>
           </a:xfrm>
           <a:prstGeom prst="rect"/>
         </p:spPr>
@@ -5708,8 +5816,8 @@
                     <a:alpha val="40000"/>
                   </a:srgbClr>
                 </a:solidFill>
-                <a:latin typeface="Inter"/>
-                <a:ea typeface="Inter"/>
+                <a:latin typeface="Microsoft YaHei"/>
+                <a:ea typeface="Microsoft YaHei"/>
               </a:rPr>
               <a:t>13 / 19</a:t>
             </a:r>
@@ -5727,7 +5835,7 @@
   <p:cSld>
     <p:spTree>
       <p:nvGrpSpPr>
-        <p:cNvPr id="118" name="" descr="&lt;Slide style={{ width: '1280px', height: '720px', background: '#FBFCFA', position: 'relative', padding: '40px 64px', boxSizing: 'border-box', display: 'flex', flexDirection: 'column' }}&gt;&#13;&#10;  &lt;div style={{ flexShrink: 0 }}&gt;&#13;&#10;    &lt;div style={{ color: '#BD9B56', fontSize: 13, letterSpacing: '0.25em', marginBottom: 8 }}&gt;03 · 成果与验证&lt;/div&gt;&#13;&#10;    &lt;h2 style={{ fontSize: 30, fontWeight: 'bold', color: '#172133', margin: 0, lineHeight: 1.3 }}&gt;功能闭环：AI 走完完整业务流程&lt;/h2&gt;&#13;&#10;    &lt;div style={{ fontSize: 14, color: '#6b7075', marginTop: 8 }}&gt;三条闭环验证「AI 不是聊天框，而是真正参与业务」——每条都真实写入数据库、流转状态、发出通知&lt;/div&gt;&#13;&#10;  &lt;/div&gt;&#13;&#10;  &lt;div style={{ flex: 1, display: 'flex', alignItems: 'center' }}&gt;&#13;&#10;    &lt;div style={{ width: '100%', display: 'flex', gap: 18 }}&gt;&#13;&#10;      &lt;div style={{ flex: 1, background: '#fff', borderRadius: 10, padding: '18px 18px', boxShadow: '0 4px 16px rgba(23,33,51,0.06)', display: 'flex', flexDirection: 'column' }}&gt;&#13;&#10;        &lt;div style={{ display: 'flex', alignItems: 'center', gap: 8, marginBottom: 10 }}&gt;&#13;&#10;          &lt;span style={{ fontSize: 17, fontWeight: 'bold', color: '#172133' }}&gt;1.  报修闭环&lt;/span&gt;&#13;&#10;          &lt;span style={{ fontSize: 12, color: '#BD9B56', background: 'rgba(189,155,86,0.12)', padding: '2px 8px', borderRadius: 4 }}&gt;业主 → 师傅&lt;/span&gt;&#13;&#10;        &lt;/div&gt;&#13;&#10;        &lt;p style={{ fontSize: 13, color: '#5F5E5A', margin: 0, lineHeight: 1.6, marginBottom: 12 }}&gt;对话报修 → 多轮补全位置/类型 → 技能+在岗自动派单 → 师傅接单处理 → 业主确认完成，全流程真实建单、流转状态、发通知。&lt;/p&gt;&#13;&#10;        &lt;div style={{ marginTop: 'auto', height: 130, border: '2px dashed #BD9B56', borderRadius: 8, background: 'rgba(189,155,86,0.05)', display: 'flex', alignItems: 'center', justifyContent: 'center', color: '#BD9B56', fontSize: 12 }}&gt;此处放「AI 报修对话」截图&lt;/div&gt;&#13;&#10;      &lt;/div&gt;&#13;&#10;      &lt;div style={{ flex: 1, background: '#fff', borderRadius: 10, padding: '18px 18px', boxShadow: '0 4px 16px rgba(23,33,51,0.06)', display: 'flex', flexDirection: 'column' }}&gt;&#13;&#10;        &lt;div style={{ display: 'flex', alignItems: 'center', gap: 8, marginBottom: 10 }}&gt;&#13;&#10;          &lt;span style={{ fontSize: 17, fontWeight: 'bold', color: '#172133' }}&gt;2.  巡检告警&lt;/span&gt;&#13;&#10;          &lt;span style={{ fontSize: 12, color: '#BD9B56', background: 'rgba(189,155,86,0.12)', padding: '2px 8px', borderRadius: 4 }}&gt;摄像头 → 物业&lt;/span&gt;&#13;&#10;        &lt;/div&gt;&#13;&#10;        &lt;p style={{ fontSize: 13, color: '#5F5E5A', margin: 0, lineHeight: 1.6, marginBottom: 12 }}&gt;摄像头抓拍社区画面 → 视觉模型识别异常（垃圾堆积、车辆违停、消防堵塞）→ 生成巡检记录并实时通知物业负责人。&lt;/p&gt;&#13;&#10;        &lt;div style={{ marginTop: 'auto', height: 130, border: '2px dashed #BD9B56', borderRadius: 8, background: 'rgba(189,155,86,0.05)', display: 'flex', alignItems: 'center', justifyContent: 'center', color: '#BD9B56', fontSize: 12 }}&gt;此处放「巡检异常识别」截图&lt;/div&gt;&#13;&#10;      &lt;/div&gt;&#13;&#10;      &lt;div style={{ flex: 1, background: '#fff', borderRadius: 10, padding: '18px 18px', boxShadow: '0 4px 16px rgba(23,33,51,0.06)', display: 'flex', flexDirection: 'column' }}&gt;&#13;&#10;        &lt;div style={{ display: 'flex', alignItems: 'center', gap: 8, marginBottom: 10 }}&gt;&#13;&#10;          &lt;span style={{ fontSize: 17, fontWeight: 'bold', color: '#172133' }}&gt;3.  反馈自进化&lt;/span&gt;&#13;&#10;          &lt;span style={{ fontSize: 12, color: '#BD9B56', background: 'rgba(189,155,86,0.12)', padding: '2px 8px', borderRadius: 4 }}&gt;对话 → 知识库&lt;/span&gt;&#13;&#10;        &lt;/div&gt;&#13;&#10;        &lt;p style={{ fontSize: 13, color: '#5F5E5A', margin: 0, lineHeight: 1.6, marginBottom: 12 }}&gt;业主对 AI 答案点赞/纠错 → 沉淀「知识缺口」→ 物业人员人工审核 → 审核通过自动写入知识库，越用越准。&lt;/p&gt;&#13;&#10;        &lt;div style={{ marginTop: 'auto', height: 130, border: '2px dashed #BD9B56', borderRadius: 8, background: 'rgba(189,155,86,0.05)', display: 'flex', alignItems: 'center', justifyContent: 'center', color: '#BD9B56', fontSize: 12 }}&gt;此处放「知识缺口审核」截图&lt;/div&gt;&#13;&#10;      &lt;/div&gt;&#13;&#10;    &lt;/div&gt;&#13;&#10;  &lt;/div&gt;&#13;&#10;  &lt;div style={{ flexShrink: 0, height: 40, display: 'flex', alignItems: 'flex-end', justifyContent: 'space-between' }}&gt;&#13;&#10;    &lt;span style={{ color: '#BD9B56', fontSize: 12, letterSpacing: '0.1em' }}&gt;云溪花园 · 智慧社区&lt;/span&gt;&#13;&#10;    &lt;span style={{ color: '#a09b8c', fontSize: 12 }}&gt;14 / 19&lt;/span&gt;&#13;&#10;  &lt;/div&gt;&#13;&#10;&lt;/Slide&gt;"/>
+        <p:cNvPr id="122" name="" descr="&lt;Slide style={{ width: '1280px', height: '720px', background: '#FBFCFA', position: 'relative', padding: '40px 64px', boxSizing: 'border-box', display: 'flex', flexDirection: 'column' }}&gt;&#13;&#10;  &lt;div style={{ flexShrink: 0 }}&gt;&#13;&#10;    &lt;div style={{ color: '#BD9B56', fontSize: 13, letterSpacing: '0.25em', marginBottom: 8 }}&gt;03 · 成果与验证&lt;/div&gt;&#13;&#10;    &lt;h2 style={{ fontSize: 30, fontWeight: 'bold', color: '#172133', margin: 0, lineHeight: 1.3 }}&gt;功能闭环：AI 走完完整业务流程&lt;/h2&gt;&#13;&#10;    &lt;div style={{ fontSize: 14, color: '#6b7075', marginTop: 8 }}&gt;三条闭环验证「AI 不是聊天框，而是真正参与业务」——每条都真实写入数据库、流转状态、发出通知&lt;/div&gt;&#13;&#10;  &lt;/div&gt;&#13;&#10;  &lt;div style={{ flex: 1, display: 'flex', alignItems: 'center' }}&gt;&#13;&#10;    &lt;div style={{ width: '100%', display: 'flex', gap: 18 }}&gt;&#13;&#10;      &lt;div style={{ flex: 1, background: '#fff', borderRadius: 10, padding: '18px 18px', boxShadow: '0 4px 16px rgba(23,33,51,0.06)', display: 'flex', flexDirection: 'column' }}&gt;&#13;&#10;        &lt;div style={{ display: 'flex', alignItems: 'center', gap: 8, marginBottom: 10 }}&gt;&#13;&#10;          &lt;span style={{ fontSize: 17, fontWeight: 'bold', color: '#172133' }}&gt;1.  报修闭环&lt;/span&gt;&#13;&#10;          &lt;span style={{ fontSize: 12, color: '#BD9B56', background: 'rgba(189,155,86,0.12)', padding: '2px 8px', borderRadius: 4 }}&gt;业主 → 师傅&lt;/span&gt;&#13;&#10;        &lt;/div&gt;&#13;&#10;        &lt;p style={{ fontSize: 13, color: '#5F5E5A', margin: 0, lineHeight: 1.6, marginBottom: 12 }}&gt;对话报修 → 多轮补全位置/类型 → 技能+在岗自动派单 → 师傅接单处理 → 业主确认完成，全流程真实建单、流转状态、发通知。&lt;/p&gt;&#13;&#10;        &lt;div style={{ marginTop: 'auto', height: 130, border: '2px dashed #BD9B56', borderRadius: 8, background: 'rgba(189,155,86,0.05)', display: 'flex', alignItems: 'center', justifyContent: 'center', color: '#BD9B56', fontSize: 12 }}&gt;此处放「AI 报修对话」截图&lt;/div&gt;&#13;&#10;      &lt;/div&gt;&#13;&#10;      &lt;div style={{ flex: 1, background: '#fff', borderRadius: 10, padding: '18px 18px', boxShadow: '0 4px 16px rgba(23,33,51,0.06)', display: 'flex', flexDirection: 'column' }}&gt;&#13;&#10;        &lt;div style={{ display: 'flex', alignItems: 'center', gap: 8, marginBottom: 10 }}&gt;&#13;&#10;          &lt;span style={{ fontSize: 17, fontWeight: 'bold', color: '#172133' }}&gt;2.  巡检告警&lt;/span&gt;&#13;&#10;          &lt;span style={{ fontSize: 12, color: '#BD9B56', background: 'rgba(189,155,86,0.12)', padding: '2px 8px', borderRadius: 4 }}&gt;摄像头 → 物业&lt;/span&gt;&#13;&#10;        &lt;/div&gt;&#13;&#10;        &lt;p style={{ fontSize: 13, color: '#5F5E5A', margin: 0, lineHeight: 1.6, marginBottom: 12 }}&gt;摄像头抓拍社区画面 → 视觉模型识别异常（垃圾堆积、车辆违停、消防堵塞）→ 生成巡检记录并实时通知物业负责人。&lt;/p&gt;&#13;&#10;        &lt;div style={{ marginTop: 'auto', height: 130, border: '2px dashed #BD9B56', borderRadius: 8, background: 'rgba(189,155,86,0.05)', display: 'flex', alignItems: 'center', justifyContent: 'center', color: '#BD9B56', fontSize: 12 }}&gt;此处放「巡检异常识别」截图&lt;/div&gt;&#13;&#10;      &lt;/div&gt;&#13;&#10;      &lt;div style={{ flex: 1, background: '#fff', borderRadius: 10, padding: '18px 18px', boxShadow: '0 4px 16px rgba(23,33,51,0.06)', display: 'flex', flexDirection: 'column' }}&gt;&#13;&#10;        &lt;div style={{ display: 'flex', alignItems: 'center', gap: 8, marginBottom: 10 }}&gt;&#13;&#10;          &lt;span style={{ fontSize: 17, fontWeight: 'bold', color: '#172133' }}&gt;3.  反馈自进化&lt;/span&gt;&#13;&#10;          &lt;span style={{ fontSize: 12, color: '#BD9B56', background: 'rgba(189,155,86,0.12)', padding: '2px 8px', borderRadius: 4 }}&gt;对话 → 知识库&lt;/span&gt;&#13;&#10;        &lt;/div&gt;&#13;&#10;        &lt;p style={{ fontSize: 13, color: '#5F5E5A', margin: 0, lineHeight: 1.6, marginBottom: 12 }}&gt;业主对 AI 答案点赞/纠错 → 沉淀「知识缺口」→ 物业人员人工审核 → 审核通过自动写入知识库，越用越准。&lt;/p&gt;&#13;&#10;        &lt;div style={{ marginTop: 'auto', height: 130, border: '2px dashed #BD9B56', borderRadius: 8, background: 'rgba(189,155,86,0.05)', display: 'flex', alignItems: 'center', justifyContent: 'center', color: '#BD9B56', fontSize: 12 }}&gt;此处放「知识缺口审核」截图&lt;/div&gt;&#13;&#10;      &lt;/div&gt;&#13;&#10;    &lt;/div&gt;&#13;&#10;  &lt;/div&gt;&#13;&#10;  &lt;div style={{ flexShrink: 0, height: 40, display: 'flex', alignItems: 'flex-end', justifyContent: 'space-between' }}&gt;&#13;&#10;    &lt;span style={{ color: '#BD9B56', fontSize: 12, letterSpacing: '0.1em' }}&gt;云溪花园 · 智慧社区&lt;/span&gt;&#13;&#10;    &lt;span style={{ color: '#a09b8c', fontSize: 12 }}&gt;14 / 19&lt;/span&gt;&#13;&#10;  &lt;/div&gt;&#13;&#10;&lt;/Slide&gt;"/>
         <p:cNvGrpSpPr/>
         <p:nvPr/>
       </p:nvGrpSpPr>
@@ -5741,7 +5849,7 @@
       </p:grpSpPr>
       <p:sp>
         <p:nvSpPr>
-          <p:cNvPr id="119" name=""/>
+          <p:cNvPr id="123" name=""/>
           <p:cNvSpPr/>
           <p:nvPr/>
         </p:nvSpPr>
@@ -5765,7 +5873,7 @@
       </p:sp>
       <p:sp>
         <p:nvSpPr>
-          <p:cNvPr id="120" name="" descr="{&quot;isTemplate&quot;:true,&quot;type&quot;:&quot;text&quot;}"/>
+          <p:cNvPr id="124" name="" descr="{&quot;isTemplate&quot;:true,&quot;type&quot;:&quot;text&quot;}"/>
           <p:cNvSpPr txBox="1"/>
           <p:nvPr/>
         </p:nvSpPr>
@@ -5810,7 +5918,7 @@
       </p:sp>
       <p:sp>
         <p:nvSpPr>
-          <p:cNvPr id="121" name="" descr="{&quot;isTemplate&quot;:true,&quot;type&quot;:&quot;text&quot;}"/>
+          <p:cNvPr id="125" name="" descr="{&quot;isTemplate&quot;:true,&quot;type&quot;:&quot;text&quot;}"/>
           <p:cNvSpPr txBox="1"/>
           <p:nvPr/>
         </p:nvSpPr>
@@ -5865,7 +5973,7 @@
       </p:sp>
       <p:sp>
         <p:nvSpPr>
-          <p:cNvPr id="122" name="" descr="{&quot;isTemplate&quot;:true,&quot;type&quot;:&quot;text&quot;}"/>
+          <p:cNvPr id="126" name="" descr="{&quot;isTemplate&quot;:true,&quot;type&quot;:&quot;text&quot;}"/>
           <p:cNvSpPr txBox="1"/>
           <p:nvPr/>
         </p:nvSpPr>
@@ -5920,7 +6028,7 @@
       </p:sp>
       <p:sp>
         <p:nvSpPr>
-          <p:cNvPr id="123" name=""/>
+          <p:cNvPr id="127" name=""/>
           <p:cNvSpPr/>
           <p:nvPr/>
         </p:nvSpPr>
@@ -5953,7 +6061,7 @@
       </p:sp>
       <p:sp>
         <p:nvSpPr>
-          <p:cNvPr id="124" name="" descr="{&quot;isTemplate&quot;:true,&quot;type&quot;:&quot;text&quot;}"/>
+          <p:cNvPr id="128" name="" descr="{&quot;isTemplate&quot;:true,&quot;type&quot;:&quot;text&quot;}"/>
           <p:cNvSpPr txBox="1"/>
           <p:nvPr/>
         </p:nvSpPr>
@@ -5998,7 +6106,7 @@
       </p:sp>
       <p:sp>
         <p:nvSpPr>
-          <p:cNvPr id="125" name=""/>
+          <p:cNvPr id="129" name=""/>
           <p:cNvSpPr/>
           <p:nvPr/>
         </p:nvSpPr>
@@ -6026,7 +6134,7 @@
       </p:sp>
       <p:sp>
         <p:nvSpPr>
-          <p:cNvPr id="126" name="" descr="{&quot;isTemplate&quot;:true,&quot;type&quot;:&quot;text&quot;}"/>
+          <p:cNvPr id="130" name="" descr="{&quot;isTemplate&quot;:true,&quot;type&quot;:&quot;text&quot;}"/>
           <p:cNvSpPr txBox="1"/>
           <p:nvPr/>
         </p:nvSpPr>
@@ -6096,7 +6204,7 @@
       </p:sp>
       <p:sp>
         <p:nvSpPr>
-          <p:cNvPr id="127" name="" descr="{&quot;isTemplate&quot;:true,&quot;type&quot;:&quot;text&quot;}"/>
+          <p:cNvPr id="131" name="" descr="{&quot;isTemplate&quot;:true,&quot;type&quot;:&quot;text&quot;}"/>
           <p:cNvSpPr txBox="1"/>
           <p:nvPr/>
         </p:nvSpPr>
@@ -6253,7 +6361,7 @@
       </p:sp>
       <p:sp>
         <p:nvSpPr>
-          <p:cNvPr id="128" name=""/>
+          <p:cNvPr id="132" name=""/>
           <p:cNvSpPr/>
           <p:nvPr/>
         </p:nvSpPr>
@@ -6286,7 +6394,7 @@
       </p:sp>
       <p:sp>
         <p:nvSpPr>
-          <p:cNvPr id="129" name="" descr="{&quot;isTemplate&quot;:true,&quot;type&quot;:&quot;text&quot;}"/>
+          <p:cNvPr id="133" name="" descr="{&quot;isTemplate&quot;:true,&quot;type&quot;:&quot;text&quot;}"/>
           <p:cNvSpPr txBox="1"/>
           <p:nvPr/>
         </p:nvSpPr>
@@ -6341,7 +6449,7 @@
       </p:sp>
       <p:sp>
         <p:nvSpPr>
-          <p:cNvPr id="130" name=""/>
+          <p:cNvPr id="134" name=""/>
           <p:cNvSpPr/>
           <p:nvPr/>
         </p:nvSpPr>
@@ -6374,7 +6482,7 @@
       </p:sp>
       <p:sp>
         <p:nvSpPr>
-          <p:cNvPr id="131" name="" descr="{&quot;isTemplate&quot;:true,&quot;type&quot;:&quot;text&quot;}"/>
+          <p:cNvPr id="135" name="" descr="{&quot;isTemplate&quot;:true,&quot;type&quot;:&quot;text&quot;}"/>
           <p:cNvSpPr txBox="1"/>
           <p:nvPr/>
         </p:nvSpPr>
@@ -6419,7 +6527,7 @@
       </p:sp>
       <p:sp>
         <p:nvSpPr>
-          <p:cNvPr id="132" name=""/>
+          <p:cNvPr id="136" name=""/>
           <p:cNvSpPr/>
           <p:nvPr/>
         </p:nvSpPr>
@@ -6447,7 +6555,7 @@
       </p:sp>
       <p:sp>
         <p:nvSpPr>
-          <p:cNvPr id="133" name="" descr="{&quot;isTemplate&quot;:true,&quot;type&quot;:&quot;text&quot;}"/>
+          <p:cNvPr id="137" name="" descr="{&quot;isTemplate&quot;:true,&quot;type&quot;:&quot;text&quot;}"/>
           <p:cNvSpPr txBox="1"/>
           <p:nvPr/>
         </p:nvSpPr>
@@ -6517,7 +6625,7 @@
       </p:sp>
       <p:sp>
         <p:nvSpPr>
-          <p:cNvPr id="134" name="" descr="{&quot;isTemplate&quot;:true,&quot;type&quot;:&quot;text&quot;}"/>
+          <p:cNvPr id="138" name="" descr="{&quot;isTemplate&quot;:true,&quot;type&quot;:&quot;text&quot;}"/>
           <p:cNvSpPr txBox="1"/>
           <p:nvPr/>
         </p:nvSpPr>
@@ -6594,7 +6702,7 @@
       </p:sp>
       <p:sp>
         <p:nvSpPr>
-          <p:cNvPr id="135" name=""/>
+          <p:cNvPr id="139" name=""/>
           <p:cNvSpPr/>
           <p:nvPr/>
         </p:nvSpPr>
@@ -6627,7 +6735,7 @@
       </p:sp>
       <p:sp>
         <p:nvSpPr>
-          <p:cNvPr id="136" name="" descr="{&quot;isTemplate&quot;:true,&quot;type&quot;:&quot;text&quot;}"/>
+          <p:cNvPr id="140" name="" descr="{&quot;isTemplate&quot;:true,&quot;type&quot;:&quot;text&quot;}"/>
           <p:cNvSpPr txBox="1"/>
           <p:nvPr/>
         </p:nvSpPr>
@@ -6662,7 +6770,7 @@
       </p:sp>
       <p:sp>
         <p:nvSpPr>
-          <p:cNvPr id="137" name=""/>
+          <p:cNvPr id="141" name=""/>
           <p:cNvSpPr/>
           <p:nvPr/>
         </p:nvSpPr>
@@ -6695,7 +6803,7 @@
       </p:sp>
       <p:sp>
         <p:nvSpPr>
-          <p:cNvPr id="138" name="" descr="{&quot;isTemplate&quot;:true,&quot;type&quot;:&quot;text&quot;}"/>
+          <p:cNvPr id="142" name="" descr="{&quot;isTemplate&quot;:true,&quot;type&quot;:&quot;text&quot;}"/>
           <p:cNvSpPr txBox="1"/>
           <p:nvPr/>
         </p:nvSpPr>
@@ -6740,7 +6848,7 @@
       </p:sp>
       <p:sp>
         <p:nvSpPr>
-          <p:cNvPr id="139" name=""/>
+          <p:cNvPr id="143" name=""/>
           <p:cNvSpPr/>
           <p:nvPr/>
         </p:nvSpPr>
@@ -6768,7 +6876,7 @@
       </p:sp>
       <p:sp>
         <p:nvSpPr>
-          <p:cNvPr id="140" name="" descr="{&quot;isTemplate&quot;:true,&quot;type&quot;:&quot;text&quot;}"/>
+          <p:cNvPr id="144" name="" descr="{&quot;isTemplate&quot;:true,&quot;type&quot;:&quot;text&quot;}"/>
           <p:cNvSpPr txBox="1"/>
           <p:nvPr/>
         </p:nvSpPr>
@@ -6838,7 +6946,7 @@
       </p:sp>
       <p:sp>
         <p:nvSpPr>
-          <p:cNvPr id="141" name="" descr="{&quot;isTemplate&quot;:true,&quot;type&quot;:&quot;text&quot;}"/>
+          <p:cNvPr id="145" name="" descr="{&quot;isTemplate&quot;:true,&quot;type&quot;:&quot;text&quot;}"/>
           <p:cNvSpPr txBox="1"/>
           <p:nvPr/>
         </p:nvSpPr>
@@ -6975,7 +7083,7 @@
       </p:sp>
       <p:sp>
         <p:nvSpPr>
-          <p:cNvPr id="142" name=""/>
+          <p:cNvPr id="146" name=""/>
           <p:cNvSpPr/>
           <p:nvPr/>
         </p:nvSpPr>
@@ -7008,7 +7116,7 @@
       </p:sp>
       <p:sp>
         <p:nvSpPr>
-          <p:cNvPr id="143" name="" descr="{&quot;isTemplate&quot;:true,&quot;type&quot;:&quot;text&quot;}"/>
+          <p:cNvPr id="147" name="" descr="{&quot;isTemplate&quot;:true,&quot;type&quot;:&quot;text&quot;}"/>
           <p:cNvSpPr txBox="1"/>
           <p:nvPr/>
         </p:nvSpPr>
@@ -7043,7 +7151,7 @@
       </p:sp>
       <p:sp>
         <p:nvSpPr>
-          <p:cNvPr id="144" name="" descr="{&quot;isTemplate&quot;:true,&quot;type&quot;:&quot;text&quot;}"/>
+          <p:cNvPr id="148" name="" descr="{&quot;isTemplate&quot;:true,&quot;type&quot;:&quot;text&quot;}"/>
           <p:cNvSpPr txBox="1"/>
           <p:nvPr/>
         </p:nvSpPr>
@@ -7098,7 +7206,7 @@
       </p:sp>
       <p:sp>
         <p:nvSpPr>
-          <p:cNvPr id="145" name="" descr="{&quot;isTemplate&quot;:true,&quot;type&quot;:&quot;text&quot;}"/>
+          <p:cNvPr id="149" name="" descr="{&quot;isTemplate&quot;:true,&quot;type&quot;:&quot;text&quot;}"/>
           <p:cNvSpPr txBox="1"/>
           <p:nvPr/>
         </p:nvSpPr>
@@ -7141,7 +7249,7 @@
   <p:cSld>
     <p:spTree>
       <p:nvGrpSpPr>
-        <p:cNvPr id="146" name="" descr="&lt;Slide style={{ width: '1280px', height: '720px', background: '#FBFCFA', position: 'relative', padding: '30px 56px', boxSizing: 'border-box', display: 'flex', flexDirection: 'column' }}&gt;&#13;&#10;  &lt;div style={{ flexShrink: 0 }}&gt;&#13;&#10;    &lt;div style={{ color: '#BD9B56', fontSize: 12, letterSpacing: '0.25em', marginBottom: 5 }}&gt;03 · 成果与验证&lt;/div&gt;&#13;&#10;    &lt;h2 style={{ fontSize: 27, fontWeight: 'bold', color: '#172133', margin: 0, lineHeight: 1.25 }}&gt;量化评估：方法 · 流程 · 指标判定&lt;/h2&gt;&#13;&#10;  &lt;/div&gt;&#13;&#10;  &lt;div style={{ flex: 1, display: 'flex', alignItems: 'stretch', gap: 18, marginTop: 12 }}&gt;&#13;&#10;    {/* 左栏：方法 + 流程 */}&#13;&#10;    &lt;div style={{ flex: 1, display: 'flex', flexDirection: 'column', gap: 10 }}&gt;&#13;&#10;      {/* 评估方法（前情） */}&#13;&#10;      &lt;div style={{ background: '#fff', borderRadius: 10, padding: '14px 18px', boxShadow: '0 4px 16px rgba(23,33,51,0.06)' }}&gt;&#13;&#10;        &lt;div style={{ fontSize: 13, color: '#BD9B56', fontWeight: 'bold', letterSpacing: '0.1em', marginBottom: 8 }}&gt;为什么要额外评估 AI&lt;/div&gt;&#13;&#10;        &lt;div style={{ fontSize: 12, color: '#5F5E5A', lineHeight: 1.65, marginBottom: 8 }}&gt;传统软件只验证「输入 → 输出」；AI Agent 还必须验证中间链路，否则「答得对」不等于「办得成」：&lt;/div&gt;&#13;&#10;        &lt;div style={{ display: 'flex', alignItems: 'center', gap: 6, flexWrap: 'wrap', fontSize: 11.5 }}&gt;&#13;&#10;          &lt;span style={{ color: '#172133', fontWeight: 'bold' }}&gt;输入&lt;/span&gt;&lt;span style={{ color: '#a09b8c' }}&gt;→&lt;/span&gt;&#13;&#10;          &lt;span style={{ color: '#172133', fontWeight: 'bold' }}&gt;理解&lt;/span&gt;&lt;span style={{ color: '#a09b8c' }}&gt;→&lt;/span&gt;&#13;&#10;          &lt;span style={{ color: '#172133', fontWeight: 'bold' }}&gt;决策&lt;/span&gt;&lt;span style={{ color: '#a09b8c' }}&gt;→&lt;/span&gt;&#13;&#10;          &lt;span style={{ color: '#172133', fontWeight: 'bold' }}&gt;工具选择&lt;/span&gt;&lt;span style={{ color: '#a09b8c' }}&gt;→&lt;/span&gt;&#13;&#10;          &lt;span style={{ color: '#172133', fontWeight: 'bold' }}&gt;知识检索&lt;/span&gt;&lt;span style={{ color: '#a09b8c' }}&gt;→&lt;/span&gt;&#13;&#10;          &lt;span style={{ color: '#172133', fontWeight: 'bold' }}&gt;最终答案&lt;/span&gt;&#13;&#10;        &lt;/div&gt;&#13;&#10;        &lt;div style={{ fontSize: 12, color: '#6b7075', lineHeight: 1.6, marginTop: 8, paddingTop: 8, borderTop: '1px solid rgba(34,57,94,0.08)' }}&gt;对应建立三层评估：&lt;span style={{ color: '#172133', fontWeight: 'bold' }}&gt;Agent 评估&lt;/span&gt;（意图 / 工具 / 工作流）＋ &lt;span style={{ color: '#172133', fontWeight: 'bold' }}&gt;RAG 评估&lt;/span&gt;（检索 / 答案）＋ &lt;span style={{ color: '#172133', fontWeight: 'bold' }}&gt;端到端评估&lt;/span&gt;（完整业务闭环）。&lt;/div&gt;&#13;&#10;      &lt;/div&gt;&#13;&#10;      {/* 测试流程 */}&#13;&#10;      &lt;div style={{ background: '#fff', borderRadius: 10, padding: '14px 18px', boxShadow: '0 4px 16px rgba(23,33,51,0.06)' }}&gt;&#13;&#10;        &lt;div style={{ fontSize: 13, color: '#BD9B56', fontWeight: 'bold', letterSpacing: '0.1em', marginBottom: 8 }}&gt;测试怎么进行&lt;/div&gt;&#13;&#10;        &lt;div style={{ display: 'flex', gap: 8 }}&gt;&#13;&#10;          {[&#13;&#10;            ['① 构建数据集', '意图 / 工具 / 工作流 / 知识问答 4 类用例'],&#13;&#10;            ['② 运行 Agent', 'python 跑评估，收集 trace'],&#13;&#10;            ['③ 比对期望', '预测值 vs 标注期望值'],&#13;&#10;            ['④ 生成报告', '指标 + 失败用例定位'],&#13;&#10;          ].map(([t, d]) =&gt; (&#13;&#10;            &lt;div key={t} style={{ flex: 1, background: 'rgba(189,155,86,0.07)', borderRadius: 8, padding: '8px 10px' }}&gt;&#13;&#10;              &lt;div style={{ fontSize: 11.5, color: '#172133', fontWeight: 'bold', marginBottom: 3 }}&gt;{t}&lt;/div&gt;&#13;&#10;              &lt;div style={{ fontSize: 10.5, color: '#6b7075', lineHeight: 1.4 }}&gt;{d}&lt;/div&gt;&#13;&#10;            &lt;/div&gt;&#13;&#10;          ))}&#13;&#10;        &lt;/div&gt;&#13;&#10;      &lt;/div&gt;&#13;&#10;    &lt;/div&gt;&#13;&#10;    {/* 右栏：指标判定 + 结果 */}&#13;&#10;    &lt;div style={{ flex: '0 0 440px', display: 'flex', flexDirection: 'column', gap: 8 }}&gt;&#13;&#10;      {[&#13;&#10;        ['意图识别', '100%', '预测意图 = 期望意图，正确数 / 总用例', '83.33% → 100%'],&#13;&#10;        ['RAG 召回 Recall@5', '100%', 'top-5 检索结果是否包含正确文档', '检索质量稳定达标'],&#13;&#10;        ['RAG 答案准确率', '100%', '期望关键词全部覆盖（关键词覆盖度）', '50% → 100%'],&#13;&#10;      ].map(([name, val, judge, note]) =&gt; (&#13;&#10;        &lt;div key={name} style={{ background: '#fff', borderRadius: 10, padding: '10px 16px', boxShadow: '0 4px 16px rgba(23,33,51,0.06)', display: 'flex', alignItems: 'center', gap: 14 }}&gt;&#13;&#10;          &lt;div style={{ flex: 1 }}&gt;&#13;&#10;            &lt;div style={{ fontSize: 13.5, color: '#172133', fontWeight: 'bold' }}&gt;{name}&lt;/div&gt;&#13;&#10;            &lt;div style={{ fontSize: 11, color: '#6b7075', marginTop: 3, lineHeight: 1.5 }}&gt;判定：{judge}&lt;/div&gt;&#13;&#10;            &lt;div style={{ fontSize: 10.5, color: '#a09b8c', marginTop: 2 }}&gt;{note}&lt;/div&gt;&#13;&#10;          &lt;/div&gt;&#13;&#10;          &lt;div style={{ fontSize: 30, fontWeight: 'bold', color: '#BD9B56', fontFamily: 'Inter, sans-serif', minWidth: 78, textAlign: 'right' }}&gt;{val}&lt;/div&gt;&#13;&#10;        &lt;/div&gt;&#13;&#10;      ))}&#13;&#10;      &lt;div style={{ background: 'linear-gradient(135deg, #172133 0%, #22395E 100%)', borderRadius: 10, padding: '10px 16px', display: 'flex', alignItems: 'center', gap: 14 }}&gt;&#13;&#10;        &lt;div style={{ flex: 1 }}&gt;&#13;&#10;          &lt;div style={{ fontSize: 13.5, color: '#FBFCFA', fontWeight: 'bold' }}&gt;单元测试 · CI 全绿&lt;/div&gt;&#13;&#10;          &lt;div style={{ fontSize: 11, color: 'rgba(251,252,250,0.75)', marginTop: 3, lineHeight: 1.5 }}&gt;判定：pytest 单测 + GitHub Actions 每次 push 自动跑&lt;/div&gt;&#13;&#10;        &lt;/div&gt;&#13;&#10;        &lt;div style={{ fontSize: 28, fontWeight: 'bold', color: '#BD9B56', fontFamily: 'Inter, sans-serif', minWidth: 78, textAlign: 'right' }}&gt;113+30&lt;/div&gt;&#13;&#10;      &lt;/div&gt;&#13;&#10;    &lt;/div&gt;&#13;&#10;  &lt;/div&gt;&#13;&#10;  &lt;div style={{ flexShrink: 0, background: 'rgba(189,155,86,0.10)', borderLeft: '4px solid #BD9B56', borderRadius: '0 8px 8px 0', padding: '10px 18px', marginTop: 10 }}&gt;&#13;&#10;    &lt;p style={{ fontSize: 12.5, color: '#172133', margin: 0, lineHeight: 1.55 }}&gt;&lt;span style={{ color: '#BD9B56', fontWeight: 'bold' }}&gt;评估驱动优化：&lt;/span&gt;RAG 答案 50% → 100% 源于发现「评估指标用脆弱子串匹配」并改为「关键词覆盖度」、同时优化答案生成 prompt。工具选择 / 参数提取 / 工作流三项受「报修多轮交互」设计影响（用例按单轮设计、实际走 pending_repair 多轮），已定位为评估框架升级项，而非 Agent 缺陷。&lt;/p&gt;&#13;&#10;  &lt;/div&gt;&#13;&#10;  &lt;div style={{ flexShrink: 0, height: 32, display: 'flex', alignItems: 'flex-end', justifyContent: 'space-between' }}&gt;&#13;&#10;    &lt;span style={{ color: '#BD9B56', fontSize: 12, letterSpacing: '0.1em' }}&gt;云溪花园 · 智慧社区&lt;/span&gt;&#13;&#10;    &lt;span style={{ color: '#a09b8c', fontSize: 12 }}&gt;15 / 19&lt;/span&gt;&#13;&#10;  &lt;/div&gt;&#13;&#10;&lt;/Slide&gt;"/>
+        <p:cNvPr id="150" name="" descr="&lt;Slide style={{ width: '1280px', height: '720px', background: '#FBFCFA', position: 'relative', padding: '30px 56px', boxSizing: 'border-box', display: 'flex', flexDirection: 'column' }}&gt;&#13;&#10;  &lt;div style={{ flexShrink: 0 }}&gt;&#13;&#10;    &lt;div style={{ color: '#BD9B56', fontSize: 12, letterSpacing: '0.25em', marginBottom: 5 }}&gt;03 · 成果与验证&lt;/div&gt;&#13;&#10;    &lt;h2 style={{ fontSize: 27, fontWeight: 'bold', color: '#172133', margin: 0, lineHeight: 1.25 }}&gt;量化评估：方法 · 流程 · 指标判定&lt;/h2&gt;&#13;&#10;  &lt;/div&gt;&#13;&#10;  &lt;div style={{ flex: 1, display: 'flex', alignItems: 'stretch', gap: 18, marginTop: 12 }}&gt;&#13;&#10;    {/* 左栏：方法 + 流程 */}&#13;&#10;    &lt;div style={{ flex: 1, display: 'flex', flexDirection: 'column', gap: 10 }}&gt;&#13;&#10;      {/* 评估方法（前情） */}&#13;&#10;      &lt;div style={{ background: '#fff', borderRadius: 10, padding: '14px 18px', boxShadow: '0 4px 16px rgba(23,33,51,0.06)' }}&gt;&#13;&#10;        &lt;div style={{ fontSize: 13, color: '#BD9B56', fontWeight: 'bold', letterSpacing: '0.1em', marginBottom: 8 }}&gt;为什么要额外评估 AI&lt;/div&gt;&#13;&#10;        &lt;div style={{ fontSize: 12, color: '#5F5E5A', lineHeight: 1.65, marginBottom: 8 }}&gt;传统软件只验证「输入 → 输出」；AI Agent 还必须验证中间链路，否则「答得对」不等于「办得成」：&lt;/div&gt;&#13;&#10;        &lt;div style={{ display: 'flex', alignItems: 'center', gap: 6, flexWrap: 'wrap', fontSize: 11.5 }}&gt;&#13;&#10;          &lt;span style={{ color: '#172133', fontWeight: 'bold' }}&gt;输入&lt;/span&gt;&lt;span style={{ color: '#a09b8c' }}&gt;→&lt;/span&gt;&#13;&#10;          &lt;span style={{ color: '#172133', fontWeight: 'bold' }}&gt;理解&lt;/span&gt;&lt;span style={{ color: '#a09b8c' }}&gt;→&lt;/span&gt;&#13;&#10;          &lt;span style={{ color: '#172133', fontWeight: 'bold' }}&gt;决策&lt;/span&gt;&lt;span style={{ color: '#a09b8c' }}&gt;→&lt;/span&gt;&#13;&#10;          &lt;span style={{ color: '#172133', fontWeight: 'bold' }}&gt;工具选择&lt;/span&gt;&lt;span style={{ color: '#a09b8c' }}&gt;→&lt;/span&gt;&#13;&#10;          &lt;span style={{ color: '#172133', fontWeight: 'bold' }}&gt;知识检索&lt;/span&gt;&lt;span style={{ color: '#a09b8c' }}&gt;→&lt;/span&gt;&#13;&#10;          &lt;span style={{ color: '#172133', fontWeight: 'bold' }}&gt;最终答案&lt;/span&gt;&#13;&#10;        &lt;/div&gt;&#13;&#10;        &lt;div style={{ fontSize: 12, color: '#6b7075', lineHeight: 1.6, marginTop: 8, paddingTop: 8, borderTop: '1px solid rgba(34,57,94,0.08)' }}&gt;对应建立三层评估：&lt;span style={{ color: '#172133', fontWeight: 'bold' }}&gt;Agent 评估&lt;/span&gt;（意图 / 工具 / 工作流）＋ &lt;span style={{ color: '#172133', fontWeight: 'bold' }}&gt;RAG 评估&lt;/span&gt;（检索 / 答案）＋ &lt;span style={{ color: '#172133', fontWeight: 'bold' }}&gt;端到端评估&lt;/span&gt;（完整业务闭环）。&lt;/div&gt;&#13;&#10;      &lt;/div&gt;&#13;&#10;      {/* 测试流程 */}&#13;&#10;      &lt;div style={{ background: '#fff', borderRadius: 10, padding: '14px 18px', boxShadow: '0 4px 16px rgba(23,33,51,0.06)' }}&gt;&#13;&#10;        &lt;div style={{ fontSize: 13, color: '#BD9B56', fontWeight: 'bold', letterSpacing: '0.1em', marginBottom: 8 }}&gt;测试怎么进行&lt;/div&gt;&#13;&#10;        &lt;div style={{ display: 'flex', gap: 8 }}&gt;&#13;&#10;          {[&#13;&#10;            ['① 构建数据集', '意图 / 工具 / 工作流 / 知识问答 4 类用例'],&#13;&#10;            ['② 运行 Agent', 'python 跑评估，收集 trace'],&#13;&#10;            ['③ 比对期望', '预测值 vs 标注期望值'],&#13;&#10;            ['④ 生成报告', '指标 + 失败用例定位'],&#13;&#10;          ].map(([t, d]) =&gt; (&#13;&#10;            &lt;div key={t} style={{ flex: 1, background: 'rgba(189,155,86,0.07)', borderRadius: 8, padding: '8px 10px' }}&gt;&#13;&#10;              &lt;div style={{ fontSize: 11.5, color: '#172133', fontWeight: 'bold', marginBottom: 3 }}&gt;{t}&lt;/div&gt;&#13;&#10;              &lt;div style={{ fontSize: 10.5, color: '#6b7075', lineHeight: 1.4 }}&gt;{d}&lt;/div&gt;&#13;&#10;            &lt;/div&gt;&#13;&#10;          ))}&#13;&#10;        &lt;/div&gt;&#13;&#10;      &lt;/div&gt;&#13;&#10;    &lt;/div&gt;&#13;&#10;    {/* 右栏：指标判定 + 结果 */}&#13;&#10;    &lt;div style={{ flex: '0 0 440px', display: 'flex', flexDirection: 'column', gap: 8 }}&gt;&#13;&#10;      {[&#13;&#10;        ['意图识别', '100%', '预测意图 = 期望意图，正确数 / 总用例', '83.33% → 100%'],&#13;&#10;        ['RAG 召回 Recall@5', '100%', 'top-5 检索结果是否包含正确文档', '检索质量稳定达标'],&#13;&#10;        ['RAG 答案准确率', '100%', '期望关键词全部覆盖（关键词覆盖度）', '50% → 100%'],&#13;&#10;      ].map(([name, val, judge, note]) =&gt; (&#13;&#10;        &lt;div key={name} style={{ background: '#fff', borderRadius: 10, padding: '10px 16px', boxShadow: '0 4px 16px rgba(23,33,51,0.06)', display: 'flex', alignItems: 'center', gap: 14 }}&gt;&#13;&#10;          &lt;div style={{ flex: 1 }}&gt;&#13;&#10;            &lt;div style={{ fontSize: 13.5, color: '#172133', fontWeight: 'bold' }}&gt;{name}&lt;/div&gt;&#13;&#10;            &lt;div style={{ fontSize: 11, color: '#6b7075', marginTop: 3, lineHeight: 1.5 }}&gt;判定：{judge}&lt;/div&gt;&#13;&#10;            &lt;div style={{ fontSize: 10.5, color: '#a09b8c', marginTop: 2 }}&gt;{note}&lt;/div&gt;&#13;&#10;          &lt;/div&gt;&#13;&#10;          &lt;div style={{ fontSize: 30, fontWeight: 'bold', color: '#BD9B56', fontFamily: 'Inter, sans-serif', minWidth: 78, textAlign: 'right' }}&gt;{val}&lt;/div&gt;&#13;&#10;        &lt;/div&gt;&#13;&#10;      ))}&#13;&#10;      &lt;div style={{ background: 'linear-gradient(135deg, #172133 0%, #22395E 100%)', borderRadius: 10, padding: '10px 16px', display: 'flex', alignItems: 'center', gap: 14 }}&gt;&#13;&#10;        &lt;div style={{ flex: 1 }}&gt;&#13;&#10;          &lt;div style={{ fontSize: 13.5, color: '#FBFCFA', fontWeight: 'bold' }}&gt;单元测试 · CI 全绿&lt;/div&gt;&#13;&#10;          &lt;div style={{ fontSize: 11, color: 'rgba(251,252,250,0.75)', marginTop: 3, lineHeight: 1.5 }}&gt;判定：pytest 单测 + GitHub Actions 每次 push 自动跑&lt;/div&gt;&#13;&#10;        &lt;/div&gt;&#13;&#10;        &lt;div style={{ fontSize: 28, fontWeight: 'bold', color: '#BD9B56', fontFamily: 'Inter, sans-serif', minWidth: 78, textAlign: 'right' }}&gt;113+30&lt;/div&gt;&#13;&#10;      &lt;/div&gt;&#13;&#10;    &lt;/div&gt;&#13;&#10;  &lt;/div&gt;&#13;&#10;  &lt;div style={{ flexShrink: 0, background: 'rgba(189,155,86,0.10)', borderLeft: '4px solid #BD9B56', borderRadius: '0 8px 8px 0', padding: '10px 18px', marginTop: 10 }}&gt;&#13;&#10;    &lt;p style={{ fontSize: 12.5, color: '#172133', margin: 0, lineHeight: 1.55 }}&gt;&lt;span style={{ color: '#BD9B56', fontWeight: 'bold' }}&gt;评估驱动优化：&lt;/span&gt;RAG 答案 50% → 100% 源于发现「评估指标用脆弱子串匹配」并改为「关键词覆盖度」、同时优化答案生成 prompt。工具选择 / 参数提取 / 工作流三项受「报修多轮交互」设计影响（用例按单轮设计、实际走 pending_repair 多轮），已定位为评估框架升级项，而非 Agent 缺陷。&lt;/p&gt;&#13;&#10;  &lt;/div&gt;&#13;&#10;  &lt;div style={{ flexShrink: 0, height: 32, display: 'flex', alignItems: 'flex-end', justifyContent: 'space-between' }}&gt;&#13;&#10;    &lt;span style={{ color: '#BD9B56', fontSize: 12, letterSpacing: '0.1em' }}&gt;云溪花园 · 智慧社区&lt;/span&gt;&#13;&#10;    &lt;span style={{ color: '#a09b8c', fontSize: 12 }}&gt;15 / 19&lt;/span&gt;&#13;&#10;  &lt;/div&gt;&#13;&#10;&lt;/Slide&gt;"/>
         <p:cNvGrpSpPr/>
         <p:nvPr/>
       </p:nvGrpSpPr>
@@ -7155,7 +7263,7 @@
       </p:grpSpPr>
       <p:sp>
         <p:nvSpPr>
-          <p:cNvPr id="147" name=""/>
+          <p:cNvPr id="151" name=""/>
           <p:cNvSpPr/>
           <p:nvPr/>
         </p:nvSpPr>
@@ -7179,7 +7287,7 @@
       </p:sp>
       <p:sp>
         <p:nvSpPr>
-          <p:cNvPr id="148" name="" descr="{&quot;isTemplate&quot;:true,&quot;type&quot;:&quot;text&quot;}"/>
+          <p:cNvPr id="152" name="" descr="{&quot;isTemplate&quot;:true,&quot;type&quot;:&quot;text&quot;}"/>
           <p:cNvSpPr txBox="1"/>
           <p:nvPr/>
         </p:nvSpPr>
@@ -7224,7 +7332,7 @@
       </p:sp>
       <p:sp>
         <p:nvSpPr>
-          <p:cNvPr id="149" name="" descr="{&quot;isTemplate&quot;:true,&quot;type&quot;:&quot;text&quot;}"/>
+          <p:cNvPr id="153" name="" descr="{&quot;isTemplate&quot;:true,&quot;type&quot;:&quot;text&quot;}"/>
           <p:cNvSpPr txBox="1"/>
           <p:nvPr/>
         </p:nvSpPr>
@@ -7299,7 +7407,7 @@
       </p:sp>
       <p:sp>
         <p:nvSpPr>
-          <p:cNvPr id="150" name=""/>
+          <p:cNvPr id="154" name=""/>
           <p:cNvSpPr/>
           <p:nvPr/>
         </p:nvSpPr>
@@ -7332,7 +7440,7 @@
       </p:sp>
       <p:sp>
         <p:nvSpPr>
-          <p:cNvPr id="151" name="" descr="{&quot;isTemplate&quot;:true,&quot;type&quot;:&quot;text&quot;}"/>
+          <p:cNvPr id="155" name="" descr="{&quot;isTemplate&quot;:true,&quot;type&quot;:&quot;text&quot;}"/>
           <p:cNvSpPr txBox="1"/>
           <p:nvPr/>
         </p:nvSpPr>
@@ -7377,7 +7485,7 @@
       </p:sp>
       <p:sp>
         <p:nvSpPr>
-          <p:cNvPr id="152" name="" descr="{&quot;isTemplate&quot;:true,&quot;type&quot;:&quot;text&quot;}"/>
+          <p:cNvPr id="156" name="" descr="{&quot;isTemplate&quot;:true,&quot;type&quot;:&quot;text&quot;}"/>
           <p:cNvSpPr txBox="1"/>
           <p:nvPr/>
         </p:nvSpPr>
@@ -7452,7 +7560,7 @@
       </p:sp>
       <p:sp>
         <p:nvSpPr>
-          <p:cNvPr id="153" name="" descr="{&quot;isTemplate&quot;:true,&quot;type&quot;:&quot;text&quot;}"/>
+          <p:cNvPr id="157" name="" descr="{&quot;isTemplate&quot;:true,&quot;type&quot;:&quot;text&quot;}"/>
           <p:cNvSpPr txBox="1"/>
           <p:nvPr/>
         </p:nvSpPr>
@@ -7487,7 +7595,7 @@
       </p:sp>
       <p:sp>
         <p:nvSpPr>
-          <p:cNvPr id="154" name="" descr="{&quot;isTemplate&quot;:true,&quot;type&quot;:&quot;text&quot;}"/>
+          <p:cNvPr id="158" name="" descr="{&quot;isTemplate&quot;:true,&quot;type&quot;:&quot;text&quot;}"/>
           <p:cNvSpPr txBox="1"/>
           <p:nvPr/>
         </p:nvSpPr>
@@ -7522,7 +7630,7 @@
       </p:sp>
       <p:sp>
         <p:nvSpPr>
-          <p:cNvPr id="155" name="" descr="{&quot;isTemplate&quot;:true,&quot;type&quot;:&quot;text&quot;}"/>
+          <p:cNvPr id="159" name="" descr="{&quot;isTemplate&quot;:true,&quot;type&quot;:&quot;text&quot;}"/>
           <p:cNvSpPr txBox="1"/>
           <p:nvPr/>
         </p:nvSpPr>
@@ -7557,7 +7665,7 @@
       </p:sp>
       <p:sp>
         <p:nvSpPr>
-          <p:cNvPr id="156" name="" descr="{&quot;isTemplate&quot;:true,&quot;type&quot;:&quot;text&quot;}"/>
+          <p:cNvPr id="160" name="" descr="{&quot;isTemplate&quot;:true,&quot;type&quot;:&quot;text&quot;}"/>
           <p:cNvSpPr txBox="1"/>
           <p:nvPr/>
         </p:nvSpPr>
@@ -7592,7 +7700,7 @@
       </p:sp>
       <p:sp>
         <p:nvSpPr>
-          <p:cNvPr id="157" name="" descr="{&quot;isTemplate&quot;:true,&quot;type&quot;:&quot;text&quot;}"/>
+          <p:cNvPr id="161" name="" descr="{&quot;isTemplate&quot;:true,&quot;type&quot;:&quot;text&quot;}"/>
           <p:cNvSpPr txBox="1"/>
           <p:nvPr/>
         </p:nvSpPr>
@@ -7627,7 +7735,7 @@
       </p:sp>
       <p:sp>
         <p:nvSpPr>
-          <p:cNvPr id="158" name="" descr="{&quot;isTemplate&quot;:true,&quot;type&quot;:&quot;text&quot;}"/>
+          <p:cNvPr id="162" name="" descr="{&quot;isTemplate&quot;:true,&quot;type&quot;:&quot;text&quot;}"/>
           <p:cNvSpPr txBox="1"/>
           <p:nvPr/>
         </p:nvSpPr>
@@ -7662,7 +7770,7 @@
       </p:sp>
       <p:sp>
         <p:nvSpPr>
-          <p:cNvPr id="159" name="" descr="{&quot;isTemplate&quot;:true,&quot;type&quot;:&quot;text&quot;}"/>
+          <p:cNvPr id="163" name="" descr="{&quot;isTemplate&quot;:true,&quot;type&quot;:&quot;text&quot;}"/>
           <p:cNvSpPr txBox="1"/>
           <p:nvPr/>
         </p:nvSpPr>
@@ -7697,7 +7805,7 @@
       </p:sp>
       <p:sp>
         <p:nvSpPr>
-          <p:cNvPr id="160" name="" descr="{&quot;isTemplate&quot;:true,&quot;type&quot;:&quot;text&quot;}"/>
+          <p:cNvPr id="164" name="" descr="{&quot;isTemplate&quot;:true,&quot;type&quot;:&quot;text&quot;}"/>
           <p:cNvSpPr txBox="1"/>
           <p:nvPr/>
         </p:nvSpPr>
@@ -7732,7 +7840,7 @@
       </p:sp>
       <p:sp>
         <p:nvSpPr>
-          <p:cNvPr id="161" name="" descr="{&quot;isTemplate&quot;:true,&quot;type&quot;:&quot;text&quot;}"/>
+          <p:cNvPr id="165" name="" descr="{&quot;isTemplate&quot;:true,&quot;type&quot;:&quot;text&quot;}"/>
           <p:cNvSpPr txBox="1"/>
           <p:nvPr/>
         </p:nvSpPr>
@@ -7767,7 +7875,7 @@
       </p:sp>
       <p:sp>
         <p:nvSpPr>
-          <p:cNvPr id="162" name="" descr="{&quot;isTemplate&quot;:true,&quot;type&quot;:&quot;text&quot;}"/>
+          <p:cNvPr id="166" name="" descr="{&quot;isTemplate&quot;:true,&quot;type&quot;:&quot;text&quot;}"/>
           <p:cNvSpPr txBox="1"/>
           <p:nvPr/>
         </p:nvSpPr>
@@ -7802,7 +7910,7 @@
       </p:sp>
       <p:sp>
         <p:nvSpPr>
-          <p:cNvPr id="163" name="" descr="{&quot;isTemplate&quot;:true,&quot;type&quot;:&quot;text&quot;}"/>
+          <p:cNvPr id="167" name="" descr="{&quot;isTemplate&quot;:true,&quot;type&quot;:&quot;text&quot;}"/>
           <p:cNvSpPr txBox="1"/>
           <p:nvPr/>
         </p:nvSpPr>
@@ -7837,7 +7945,7 @@
       </p:sp>
       <p:sp>
         <p:nvSpPr>
-          <p:cNvPr id="164" name=""/>
+          <p:cNvPr id="168" name=""/>
           <p:cNvSpPr/>
           <p:nvPr/>
         </p:nvSpPr>
@@ -7879,7 +7987,7 @@
       </p:sp>
       <p:sp>
         <p:nvSpPr>
-          <p:cNvPr id="165" name="" descr="{&quot;isTemplate&quot;:true,&quot;type&quot;:&quot;text&quot;}"/>
+          <p:cNvPr id="169" name="" descr="{&quot;isTemplate&quot;:true,&quot;type&quot;:&quot;text&quot;}"/>
           <p:cNvSpPr txBox="1"/>
           <p:nvPr/>
         </p:nvSpPr>
@@ -7924,7 +8032,7 @@
       </p:sp>
       <p:sp>
         <p:nvSpPr>
-          <p:cNvPr id="166" name="" descr="{&quot;isTemplate&quot;:true,&quot;type&quot;:&quot;text&quot;}"/>
+          <p:cNvPr id="170" name="" descr="{&quot;isTemplate&quot;:true,&quot;type&quot;:&quot;text&quot;}"/>
           <p:cNvSpPr txBox="1"/>
           <p:nvPr/>
         </p:nvSpPr>
@@ -7969,7 +8077,7 @@
       </p:sp>
       <p:sp>
         <p:nvSpPr>
-          <p:cNvPr id="167" name="" descr="{&quot;isTemplate&quot;:true,&quot;type&quot;:&quot;text&quot;}"/>
+          <p:cNvPr id="171" name="" descr="{&quot;isTemplate&quot;:true,&quot;type&quot;:&quot;text&quot;}"/>
           <p:cNvSpPr txBox="1"/>
           <p:nvPr/>
         </p:nvSpPr>
@@ -8004,7 +8112,7 @@
       </p:sp>
       <p:sp>
         <p:nvSpPr>
-          <p:cNvPr id="168" name=""/>
+          <p:cNvPr id="172" name=""/>
           <p:cNvSpPr/>
           <p:nvPr/>
         </p:nvSpPr>
@@ -8037,7 +8145,7 @@
       </p:sp>
       <p:sp>
         <p:nvSpPr>
-          <p:cNvPr id="169" name="" descr="{&quot;isTemplate&quot;:true,&quot;type&quot;:&quot;text&quot;}"/>
+          <p:cNvPr id="173" name="" descr="{&quot;isTemplate&quot;:true,&quot;type&quot;:&quot;text&quot;}"/>
           <p:cNvSpPr txBox="1"/>
           <p:nvPr/>
         </p:nvSpPr>
@@ -8072,7 +8180,7 @@
       </p:sp>
       <p:sp>
         <p:nvSpPr>
-          <p:cNvPr id="170" name=""/>
+          <p:cNvPr id="174" name=""/>
           <p:cNvSpPr/>
           <p:nvPr/>
         </p:nvSpPr>
@@ -8100,7 +8208,7 @@
       </p:sp>
       <p:sp>
         <p:nvSpPr>
-          <p:cNvPr id="171" name="" descr="{&quot;isTemplate&quot;:true,&quot;type&quot;:&quot;text&quot;}"/>
+          <p:cNvPr id="175" name="" descr="{&quot;isTemplate&quot;:true,&quot;type&quot;:&quot;text&quot;}"/>
           <p:cNvSpPr txBox="1"/>
           <p:nvPr/>
         </p:nvSpPr>
@@ -8145,7 +8253,7 @@
       </p:sp>
       <p:sp>
         <p:nvSpPr>
-          <p:cNvPr id="172" name="" descr="{&quot;isTemplate&quot;:true,&quot;type&quot;:&quot;text&quot;}"/>
+          <p:cNvPr id="176" name="" descr="{&quot;isTemplate&quot;:true,&quot;type&quot;:&quot;text&quot;}"/>
           <p:cNvSpPr txBox="1"/>
           <p:nvPr/>
         </p:nvSpPr>
@@ -8262,7 +8370,7 @@
       </p:sp>
       <p:sp>
         <p:nvSpPr>
-          <p:cNvPr id="173" name=""/>
+          <p:cNvPr id="177" name=""/>
           <p:cNvSpPr/>
           <p:nvPr/>
         </p:nvSpPr>
@@ -8290,7 +8398,7 @@
       </p:sp>
       <p:sp>
         <p:nvSpPr>
-          <p:cNvPr id="174" name="" descr="{&quot;isTemplate&quot;:true,&quot;type&quot;:&quot;text&quot;}"/>
+          <p:cNvPr id="178" name="" descr="{&quot;isTemplate&quot;:true,&quot;type&quot;:&quot;text&quot;}"/>
           <p:cNvSpPr txBox="1"/>
           <p:nvPr/>
         </p:nvSpPr>
@@ -8345,7 +8453,7 @@
       </p:sp>
       <p:sp>
         <p:nvSpPr>
-          <p:cNvPr id="175" name="" descr="{&quot;isTemplate&quot;:true,&quot;type&quot;:&quot;text&quot;}"/>
+          <p:cNvPr id="179" name="" descr="{&quot;isTemplate&quot;:true,&quot;type&quot;:&quot;text&quot;}"/>
           <p:cNvSpPr txBox="1"/>
           <p:nvPr/>
         </p:nvSpPr>
@@ -8400,7 +8508,7 @@
       </p:sp>
       <p:sp>
         <p:nvSpPr>
-          <p:cNvPr id="176" name=""/>
+          <p:cNvPr id="180" name=""/>
           <p:cNvSpPr/>
           <p:nvPr/>
         </p:nvSpPr>
@@ -8428,7 +8536,7 @@
       </p:sp>
       <p:sp>
         <p:nvSpPr>
-          <p:cNvPr id="177" name="" descr="{&quot;isTemplate&quot;:true,&quot;type&quot;:&quot;text&quot;}"/>
+          <p:cNvPr id="181" name="" descr="{&quot;isTemplate&quot;:true,&quot;type&quot;:&quot;text&quot;}"/>
           <p:cNvSpPr txBox="1"/>
           <p:nvPr/>
         </p:nvSpPr>
@@ -8473,7 +8581,7 @@
       </p:sp>
       <p:sp>
         <p:nvSpPr>
-          <p:cNvPr id="178" name="" descr="{&quot;isTemplate&quot;:true,&quot;type&quot;:&quot;text&quot;}"/>
+          <p:cNvPr id="182" name="" descr="{&quot;isTemplate&quot;:true,&quot;type&quot;:&quot;text&quot;}"/>
           <p:cNvSpPr txBox="1"/>
           <p:nvPr/>
         </p:nvSpPr>
@@ -8528,7 +8636,7 @@
       </p:sp>
       <p:sp>
         <p:nvSpPr>
-          <p:cNvPr id="179" name=""/>
+          <p:cNvPr id="183" name=""/>
           <p:cNvSpPr/>
           <p:nvPr/>
         </p:nvSpPr>
@@ -8556,7 +8664,7 @@
       </p:sp>
       <p:sp>
         <p:nvSpPr>
-          <p:cNvPr id="180" name="" descr="{&quot;isTemplate&quot;:true,&quot;type&quot;:&quot;text&quot;}"/>
+          <p:cNvPr id="184" name="" descr="{&quot;isTemplate&quot;:true,&quot;type&quot;:&quot;text&quot;}"/>
           <p:cNvSpPr txBox="1"/>
           <p:nvPr/>
         </p:nvSpPr>
@@ -8601,7 +8709,7 @@
       </p:sp>
       <p:sp>
         <p:nvSpPr>
-          <p:cNvPr id="181" name="" descr="{&quot;isTemplate&quot;:true,&quot;type&quot;:&quot;text&quot;}"/>
+          <p:cNvPr id="185" name="" descr="{&quot;isTemplate&quot;:true,&quot;type&quot;:&quot;text&quot;}"/>
           <p:cNvSpPr txBox="1"/>
           <p:nvPr/>
         </p:nvSpPr>
@@ -8656,7 +8764,7 @@
       </p:sp>
       <p:sp>
         <p:nvSpPr>
-          <p:cNvPr id="182" name=""/>
+          <p:cNvPr id="186" name=""/>
           <p:cNvSpPr/>
           <p:nvPr/>
         </p:nvSpPr>
@@ -8689,7 +8797,7 @@
       </p:sp>
       <p:sp>
         <p:nvSpPr>
-          <p:cNvPr id="183" name="" descr="{&quot;isTemplate&quot;:true,&quot;type&quot;:&quot;text&quot;}"/>
+          <p:cNvPr id="187" name="" descr="{&quot;isTemplate&quot;:true,&quot;type&quot;:&quot;text&quot;}"/>
           <p:cNvSpPr txBox="1"/>
           <p:nvPr/>
         </p:nvSpPr>
@@ -8724,7 +8832,7 @@
       </p:sp>
       <p:sp>
         <p:nvSpPr>
-          <p:cNvPr id="184" name="" descr="{&quot;isTemplate&quot;:true,&quot;type&quot;:&quot;text&quot;}"/>
+          <p:cNvPr id="188" name="" descr="{&quot;isTemplate&quot;:true,&quot;type&quot;:&quot;text&quot;}"/>
           <p:cNvSpPr txBox="1"/>
           <p:nvPr/>
         </p:nvSpPr>
@@ -8759,7 +8867,7 @@
       </p:sp>
       <p:sp>
         <p:nvSpPr>
-          <p:cNvPr id="185" name="" descr="{&quot;isTemplate&quot;:true,&quot;type&quot;:&quot;text&quot;}"/>
+          <p:cNvPr id="189" name="" descr="{&quot;isTemplate&quot;:true,&quot;type&quot;:&quot;text&quot;}"/>
           <p:cNvSpPr txBox="1"/>
           <p:nvPr/>
         </p:nvSpPr>
@@ -8794,7 +8902,7 @@
       </p:sp>
       <p:sp>
         <p:nvSpPr>
-          <p:cNvPr id="186" name=""/>
+          <p:cNvPr id="190" name=""/>
           <p:cNvSpPr/>
           <p:nvPr/>
         </p:nvSpPr>
@@ -8827,7 +8935,7 @@
       </p:sp>
       <p:sp>
         <p:nvSpPr>
-          <p:cNvPr id="187" name="" descr="{&quot;isTemplate&quot;:true,&quot;type&quot;:&quot;text&quot;}"/>
+          <p:cNvPr id="191" name="" descr="{&quot;isTemplate&quot;:true,&quot;type&quot;:&quot;text&quot;}"/>
           <p:cNvSpPr txBox="1"/>
           <p:nvPr/>
         </p:nvSpPr>
@@ -8882,7 +8990,7 @@
       </p:sp>
       <p:sp>
         <p:nvSpPr>
-          <p:cNvPr id="188" name="" descr="{&quot;isTemplate&quot;:true,&quot;type&quot;:&quot;text&quot;}"/>
+          <p:cNvPr id="192" name="" descr="{&quot;isTemplate&quot;:true,&quot;type&quot;:&quot;text&quot;}"/>
           <p:cNvSpPr txBox="1"/>
           <p:nvPr/>
         </p:nvSpPr>
@@ -8917,7 +9025,7 @@
       </p:sp>
       <p:sp>
         <p:nvSpPr>
-          <p:cNvPr id="189" name="" descr="{&quot;isTemplate&quot;:true,&quot;type&quot;:&quot;text&quot;}"/>
+          <p:cNvPr id="193" name="" descr="{&quot;isTemplate&quot;:true,&quot;type&quot;:&quot;text&quot;}"/>
           <p:cNvSpPr txBox="1"/>
           <p:nvPr/>
         </p:nvSpPr>
@@ -8952,7 +9060,7 @@
       </p:sp>
       <p:sp>
         <p:nvSpPr>
-          <p:cNvPr id="190" name=""/>
+          <p:cNvPr id="194" name=""/>
           <p:cNvSpPr/>
           <p:nvPr/>
         </p:nvSpPr>
@@ -8985,7 +9093,7 @@
       </p:sp>
       <p:sp>
         <p:nvSpPr>
-          <p:cNvPr id="191" name="" descr="{&quot;isTemplate&quot;:true,&quot;type&quot;:&quot;text&quot;}"/>
+          <p:cNvPr id="195" name="" descr="{&quot;isTemplate&quot;:true,&quot;type&quot;:&quot;text&quot;}"/>
           <p:cNvSpPr txBox="1"/>
           <p:nvPr/>
         </p:nvSpPr>
@@ -9030,7 +9138,7 @@
       </p:sp>
       <p:sp>
         <p:nvSpPr>
-          <p:cNvPr id="192" name="" descr="{&quot;isTemplate&quot;:true,&quot;type&quot;:&quot;text&quot;}"/>
+          <p:cNvPr id="196" name="" descr="{&quot;isTemplate&quot;:true,&quot;type&quot;:&quot;text&quot;}"/>
           <p:cNvSpPr txBox="1"/>
           <p:nvPr/>
         </p:nvSpPr>
@@ -9065,7 +9173,7 @@
       </p:sp>
       <p:sp>
         <p:nvSpPr>
-          <p:cNvPr id="193" name="" descr="{&quot;isTemplate&quot;:true,&quot;type&quot;:&quot;text&quot;}"/>
+          <p:cNvPr id="197" name="" descr="{&quot;isTemplate&quot;:true,&quot;type&quot;:&quot;text&quot;}"/>
           <p:cNvSpPr txBox="1"/>
           <p:nvPr/>
         </p:nvSpPr>
@@ -9100,7 +9208,7 @@
       </p:sp>
       <p:sp>
         <p:nvSpPr>
-          <p:cNvPr id="194" name=""/>
+          <p:cNvPr id="198" name=""/>
           <p:cNvSpPr/>
           <p:nvPr/>
         </p:nvSpPr>
@@ -9134,7 +9242,7 @@
       </p:sp>
       <p:sp>
         <p:nvSpPr>
-          <p:cNvPr id="195" name="" descr="{&quot;isTemplate&quot;:true,&quot;type&quot;:&quot;text&quot;}"/>
+          <p:cNvPr id="199" name="" descr="{&quot;isTemplate&quot;:true,&quot;type&quot;:&quot;text&quot;}"/>
           <p:cNvSpPr txBox="1"/>
           <p:nvPr/>
         </p:nvSpPr>
@@ -9189,7 +9297,7 @@
       </p:sp>
       <p:sp>
         <p:nvSpPr>
-          <p:cNvPr id="196" name="" descr="{&quot;isTemplate&quot;:true,&quot;type&quot;:&quot;text&quot;}"/>
+          <p:cNvPr id="200" name="" descr="{&quot;isTemplate&quot;:true,&quot;type&quot;:&quot;text&quot;}"/>
           <p:cNvSpPr txBox="1"/>
           <p:nvPr/>
         </p:nvSpPr>
@@ -9298,7 +9406,7 @@
       </p:sp>
       <p:sp>
         <p:nvSpPr>
-          <p:cNvPr id="197" name="" descr="{&quot;isTemplate&quot;:true,&quot;type&quot;:&quot;text&quot;}"/>
+          <p:cNvPr id="201" name="" descr="{&quot;isTemplate&quot;:true,&quot;type&quot;:&quot;text&quot;}"/>
           <p:cNvSpPr txBox="1"/>
           <p:nvPr/>
         </p:nvSpPr>
@@ -9333,7 +9441,7 @@
       </p:sp>
       <p:sp>
         <p:nvSpPr>
-          <p:cNvPr id="198" name=""/>
+          <p:cNvPr id="202" name=""/>
           <p:cNvSpPr/>
           <p:nvPr/>
         </p:nvSpPr>
@@ -9394,7 +9502,7 @@
       </p:sp>
       <p:sp>
         <p:nvSpPr>
-          <p:cNvPr id="199" name=""/>
+          <p:cNvPr id="203" name=""/>
           <p:cNvSpPr/>
           <p:nvPr/>
         </p:nvSpPr>
@@ -9434,7 +9542,7 @@
       </p:sp>
       <p:sp>
         <p:nvSpPr>
-          <p:cNvPr id="200" name="" descr="{&quot;isTemplate&quot;:true,&quot;type&quot;:&quot;text&quot;}"/>
+          <p:cNvPr id="204" name="" descr="{&quot;isTemplate&quot;:true,&quot;type&quot;:&quot;text&quot;}"/>
           <p:cNvSpPr txBox="1"/>
           <p:nvPr/>
         </p:nvSpPr>
@@ -9611,7 +9719,7 @@
       </p:sp>
       <p:sp>
         <p:nvSpPr>
-          <p:cNvPr id="201" name="" descr="{&quot;isTemplate&quot;:true,&quot;type&quot;:&quot;text&quot;}"/>
+          <p:cNvPr id="205" name="" descr="{&quot;isTemplate&quot;:true,&quot;type&quot;:&quot;text&quot;}"/>
           <p:cNvSpPr txBox="1"/>
           <p:nvPr/>
         </p:nvSpPr>
@@ -9666,7 +9774,7 @@
       </p:sp>
       <p:sp>
         <p:nvSpPr>
-          <p:cNvPr id="202" name="" descr="{&quot;isTemplate&quot;:true,&quot;type&quot;:&quot;text&quot;}"/>
+          <p:cNvPr id="206" name="" descr="{&quot;isTemplate&quot;:true,&quot;type&quot;:&quot;text&quot;}"/>
           <p:cNvSpPr txBox="1"/>
           <p:nvPr/>
         </p:nvSpPr>
@@ -9709,7 +9817,7 @@
   <p:cSld>
     <p:spTree>
       <p:nvGrpSpPr>
-        <p:cNvPr id="203" name="" descr="&lt;Slide style={{ width: '1280px', height: '720px', background: 'linear-gradient(135deg, #172133 0%, #22395E 100%)', position: 'relative', display: 'flex', flexDirection: 'column', justifyContent: 'center', padding: '0 96px' }}&gt;&#10;  &lt;div style={{ color: '#BD9B56', fontSize: 15, letterSpacing: '0.35em', marginBottom: 24 }}&gt;SECTION 04&lt;/div&gt;&#10;  &lt;div style={{ display: 'flex', alignItems: 'baseline', gap: 28 }}&gt;&#10;    &lt;span style={{ fontSize: 110, fontWeight: 'bold', color: 'rgba(189,155,86,0.28)', fontFamily: 'Inter, sans-serif', lineHeight: 1 }}&gt;04&lt;/span&gt;&#10;    &lt;span style={{ fontSize: 46, fontWeight: 'bold', color: '#FBFCFA', letterSpacing: '0.02em' }}&gt;总结与展望&lt;/span&gt;&#10;  &lt;/div&gt;&#10;  &lt;div style={{ width: 72, height: 3, background: '#BD9B56', margin: '28px 0 20px' }} /&gt;&#10;  &lt;div style={{ fontSize: 16, color: 'rgba(251,252,250,0.72)', letterSpacing: '0.04em' }}&gt;项目价值 · 技术路线回顾 · 在线演示&lt;/div&gt;&#10;  &lt;div style={{ position: 'absolute', bottom: 42, right: 96, color: 'rgba(251,252,250,0.4)', fontSize: 13, fontFamily: 'Inter, sans-serif' }}&gt;16 / 19&lt;/div&gt;&#10;&lt;/Slide&gt;"/>
+        <p:cNvPr id="207" name="" descr="&lt;Slide style={{ width: '1280px', height: '720px', background: 'linear-gradient(135deg, #172133 0%, #22395E 100%)', position: 'relative', display: 'flex', flexDirection: 'column', justifyContent: 'center', padding: '0 96px' }}&gt;&#10;  &lt;div style={{ color: '#BD9B56', fontSize: 15, letterSpacing: '0.35em', marginBottom: 24 }}&gt;SECTION 04&lt;/div&gt;&#10;  &lt;div style={{ display: 'flex', alignItems: 'center', gap: 36 }}&gt;&#10;    &lt;span style={{ fontSize: 160, fontWeight: 'bold', color: '#BD9B56', lineHeight: 1 }}&gt;04&lt;/span&gt;&#10;    &lt;div&gt;&#10;      &lt;div style={{ fontSize: 50, fontWeight: 'bold', color: '#FBFCFA', letterSpacing: '0.02em', lineHeight: 1.15 }}&gt;总结与展望&lt;/div&gt;&#10;      &lt;div style={{ fontSize: 17, color: 'rgba(251,252,250,0.55)', marginTop: 12, letterSpacing: '0.06em' }}&gt;SUMMARY &amp;amp; OUTLOOK&lt;/div&gt;&#10;    &lt;/div&gt;&#10;  &lt;/div&gt;&#10;  &lt;div style={{ width: 80, height: 3, background: '#BD9B56', margin: '32px 0 24px' }} /&gt;&#10;  &lt;div style={{ display: 'flex', gap: 14 }}&gt;&#10;    &lt;span style={{ fontSize: 15, color: 'rgba(251,252,250,0.88)', border: '1px solid rgba(189,155,86,0.65)', padding: '9px 20px', borderRadius: 22 }}&gt;技术路线回顾&lt;/span&gt;&#10;    &lt;span style={{ fontSize: 15, color: 'rgba(251,252,250,0.88)', border: '1px solid rgba(189,155,86,0.65)', padding: '9px 20px', borderRadius: 22 }}&gt;三端功能实现&lt;/span&gt;&#10;    &lt;span style={{ fontSize: 15, color: 'rgba(251,252,250,0.88)', border: '1px solid rgba(189,155,86,0.65)', padding: '9px 20px', borderRadius: 22 }}&gt;在线演示&lt;/span&gt;&#10;  &lt;/div&gt;&#10;  &lt;div style={{ position: 'absolute', bottom: 42, right: 96, color: 'rgba(251,252,250,0.4)', fontSize: 13 }}&gt;16 / 19&lt;/div&gt;&#10;&lt;/Slide&gt;"/>
         <p:cNvGrpSpPr/>
         <p:nvPr/>
       </p:nvGrpSpPr>
@@ -9723,7 +9831,7 @@
       </p:grpSpPr>
       <p:sp>
         <p:nvSpPr>
-          <p:cNvPr id="204" name=""/>
+          <p:cNvPr id="208" name=""/>
           <p:cNvSpPr/>
           <p:nvPr/>
         </p:nvSpPr>
@@ -9755,14 +9863,49 @@
       </p:sp>
       <p:sp>
         <p:nvSpPr>
-          <p:cNvPr id="205" name="" descr="{&quot;isTemplate&quot;:true,&quot;type&quot;:&quot;text&quot;}"/>
+          <p:cNvPr id="209" name="" descr="{&quot;isTemplate&quot;:true,&quot;type&quot;:&quot;text&quot;}"/>
+          <p:cNvSpPr txBox="1"/>
+          <p:nvPr/>
+        </p:nvSpPr>
+        <p:spPr>
+          <a:xfrm rot="0" flipH="0" flipV="0">
+            <a:off x="914400" y="1866900"/>
+            <a:ext cx="10363200" cy="171450"/>
+          </a:xfrm>
+          <a:prstGeom prst="rect"/>
+        </p:spPr>
+        <p:txBody>
+          <a:bodyPr wrap="none" lIns="0" tIns="0" rIns="0" bIns="0"/>
+          <a:p>
+            <a:pPr>
+              <a:lnSpc>
+                <a:spcPct val="100000"/>
+              </a:lnSpc>
+            </a:pPr>
+            <a:r>
+              <a:rPr lang="en-US" sz="1125" spc="-9223372036854775808">
+                <a:solidFill>
+                  <a:srgbClr val="BD9B56"/>
+                </a:solidFill>
+                <a:latin typeface="Microsoft YaHei"/>
+                <a:ea typeface="Microsoft YaHei"/>
+              </a:rPr>
+              <a:t>SECTION 04</a:t>
+            </a:r>
+            <a:endParaRPr/>
+          </a:p>
+        </p:txBody>
+      </p:sp>
+      <p:sp>
+        <p:nvSpPr>
+          <p:cNvPr id="210" name="" descr="{&quot;isTemplate&quot;:true,&quot;type&quot;:&quot;text&quot;}"/>
           <p:cNvSpPr txBox="1"/>
           <p:nvPr/>
         </p:nvSpPr>
         <p:spPr>
           <a:xfrm rot="0" flipH="0" flipV="0">
             <a:off x="914400" y="2266950"/>
-            <a:ext cx="10363200" cy="171450"/>
+            <a:ext cx="1885950" cy="1828800"/>
           </a:xfrm>
           <a:prstGeom prst="rect"/>
         </p:spPr>
@@ -9775,29 +9918,64 @@
               </a:lnSpc>
             </a:pPr>
             <a:r>
-              <a:rPr lang="en-US" sz="1125" spc="-9223372036854775808">
+              <a:rPr lang="en-US" sz="12000" b="1">
                 <a:solidFill>
                   <a:srgbClr val="BD9B56"/>
                 </a:solidFill>
                 <a:latin typeface="Microsoft YaHei"/>
                 <a:ea typeface="Microsoft YaHei"/>
               </a:rPr>
-              <a:t>SECTION 04</a:t>
-            </a:r>
-            <a:endParaRPr/>
-          </a:p>
-        </p:txBody>
-      </p:sp>
-      <p:sp>
-        <p:nvSpPr>
-          <p:cNvPr id="206" name="" descr="{&quot;isTemplate&quot;:true,&quot;type&quot;:&quot;text&quot;}"/>
-          <p:cNvSpPr txBox="1"/>
-          <p:nvPr/>
-        </p:nvSpPr>
-        <p:spPr>
-          <a:xfrm rot="0" flipH="0" flipV="0">
-            <a:off x="914400" y="2667000"/>
-            <a:ext cx="1343025" cy="1257300"/>
+              <a:t>04</a:t>
+            </a:r>
+            <a:endParaRPr/>
+          </a:p>
+        </p:txBody>
+      </p:sp>
+      <p:sp>
+        <p:nvSpPr>
+          <p:cNvPr id="211" name="" descr="{&quot;isTemplate&quot;:true,&quot;type&quot;:&quot;text&quot;}"/>
+          <p:cNvSpPr txBox="1"/>
+          <p:nvPr/>
+        </p:nvSpPr>
+        <p:spPr>
+          <a:xfrm rot="0" flipH="0" flipV="0">
+            <a:off x="3143250" y="2695575"/>
+            <a:ext cx="2381250" cy="657225"/>
+          </a:xfrm>
+          <a:prstGeom prst="rect"/>
+        </p:spPr>
+        <p:txBody>
+          <a:bodyPr wrap="none" lIns="0" tIns="0" rIns="0" bIns="0"/>
+          <a:p>
+            <a:pPr>
+              <a:lnSpc>
+                <a:spcPct val="114999"/>
+              </a:lnSpc>
+            </a:pPr>
+            <a:r>
+              <a:rPr lang="zh-CN" sz="3750" spc="-9223372036854775808">
+                <a:solidFill>
+                  <a:srgbClr val="FBFCFA"/>
+                </a:solidFill>
+                <a:latin typeface="Microsoft YaHei"/>
+                <a:ea typeface="Microsoft YaHei"/>
+              </a:rPr>
+              <a:t>总结与展望</a:t>
+            </a:r>
+            <a:endParaRPr/>
+          </a:p>
+        </p:txBody>
+      </p:sp>
+      <p:sp>
+        <p:nvSpPr>
+          <p:cNvPr id="212" name="" descr="{&quot;isTemplate&quot;:true,&quot;type&quot;:&quot;text&quot;}"/>
+          <p:cNvSpPr txBox="1"/>
+          <p:nvPr/>
+        </p:nvSpPr>
+        <p:spPr>
+          <a:xfrm rot="0" flipH="0" flipV="0">
+            <a:off x="3143250" y="3467100"/>
+            <a:ext cx="2381250" cy="200025"/>
           </a:xfrm>
           <a:prstGeom prst="rect"/>
         </p:spPr>
@@ -9810,66 +9988,31 @@
               </a:lnSpc>
             </a:pPr>
             <a:r>
-              <a:rPr lang="en-US" sz="8250" b="1">
-                <a:solidFill>
-                  <a:srgbClr val="BD9B56">
-                    <a:alpha val="28000"/>
+              <a:rPr lang="en-US" sz="1275" spc="-9223372036854775808">
+                <a:solidFill>
+                  <a:srgbClr val="FBFCFA">
+                    <a:alpha val="55000"/>
                   </a:srgbClr>
                 </a:solidFill>
-                <a:latin typeface="Inter"/>
-                <a:ea typeface="Inter"/>
-              </a:rPr>
-              <a:t>04</a:t>
-            </a:r>
-            <a:endParaRPr/>
-          </a:p>
-        </p:txBody>
-      </p:sp>
-      <p:sp>
-        <p:nvSpPr>
-          <p:cNvPr id="207" name="" descr="{&quot;isTemplate&quot;:true,&quot;type&quot;:&quot;text&quot;}"/>
-          <p:cNvSpPr txBox="1"/>
-          <p:nvPr/>
-        </p:nvSpPr>
-        <p:spPr>
-          <a:xfrm rot="0" flipH="0" flipV="0">
-            <a:off x="2524125" y="2667000"/>
-            <a:ext cx="2190750" cy="1257300"/>
-          </a:xfrm>
-          <a:prstGeom prst="rect"/>
-        </p:spPr>
-        <p:txBody>
-          <a:bodyPr wrap="none" lIns="0" tIns="0" rIns="0" bIns="0"/>
-          <a:p>
-            <a:pPr>
-              <a:lnSpc>
-                <a:spcPct val="100000"/>
-              </a:lnSpc>
-            </a:pPr>
-            <a:r>
-              <a:rPr lang="zh-CN" sz="3450" b="1">
-                <a:solidFill>
-                  <a:srgbClr val="FBFCFA"/>
-                </a:solidFill>
-                <a:latin typeface="Microsoft YaHei"/>
-                <a:ea typeface="Microsoft YaHei"/>
-              </a:rPr>
-              <a:t>总结与展望</a:t>
-            </a:r>
-            <a:endParaRPr/>
-          </a:p>
-        </p:txBody>
-      </p:sp>
-      <p:sp>
-        <p:nvSpPr>
-          <p:cNvPr id="208" name=""/>
+                <a:latin typeface="Microsoft YaHei"/>
+                <a:ea typeface="Microsoft YaHei"/>
+              </a:rPr>
+              <a:t>SUMMARY &amp; OUTLOOK</a:t>
+            </a:r>
+            <a:endParaRPr/>
+          </a:p>
+        </p:txBody>
+      </p:sp>
+      <p:sp>
+        <p:nvSpPr>
+          <p:cNvPr id="213" name=""/>
           <p:cNvSpPr/>
           <p:nvPr/>
         </p:nvSpPr>
         <p:spPr>
           <a:xfrm rot="0" flipH="0" flipV="0">
-            <a:off x="914400" y="4191000"/>
-            <a:ext cx="685800" cy="28575"/>
+            <a:off x="914400" y="4400550"/>
+            <a:ext cx="762000" cy="28575"/>
           </a:xfrm>
           <a:prstGeom prst="rect">
             <a:avLst/>
@@ -9886,19 +10029,49 @@
       </p:sp>
       <p:sp>
         <p:nvSpPr>
-          <p:cNvPr id="209" name="" descr="{&quot;isTemplate&quot;:true,&quot;type&quot;:&quot;text&quot;}"/>
-          <p:cNvSpPr txBox="1"/>
-          <p:nvPr/>
-        </p:nvSpPr>
-        <p:spPr>
-          <a:xfrm rot="0" flipH="0" flipV="0">
-            <a:off x="914400" y="4410075"/>
-            <a:ext cx="10363200" cy="190500"/>
-          </a:xfrm>
-          <a:prstGeom prst="rect"/>
-        </p:spPr>
-        <p:txBody>
-          <a:bodyPr wrap="none" lIns="0" tIns="0" rIns="0" bIns="0"/>
+          <p:cNvPr id="214" name=""/>
+          <p:cNvSpPr/>
+          <p:nvPr/>
+        </p:nvSpPr>
+        <p:spPr>
+          <a:xfrm rot="0" flipH="0" flipV="0">
+            <a:off x="914400" y="4657725"/>
+            <a:ext cx="1238250" cy="342900"/>
+          </a:xfrm>
+          <a:prstGeom prst="roundRect">
+            <a:avLst>
+              <a:gd name="adj" fmla="val 61111"/>
+            </a:avLst>
+          </a:prstGeom>
+          <a:ln w="12700">
+            <a:solidFill>
+              <a:srgbClr val="BD9B56">
+                <a:alpha val="65000"/>
+              </a:srgbClr>
+            </a:solidFill>
+            <a:prstDash val="solid"/>
+          </a:ln>
+        </p:spPr>
+        <p:txBody>
+          <a:bodyPr/>
+          <a:p/>
+        </p:txBody>
+      </p:sp>
+      <p:sp>
+        <p:nvSpPr>
+          <p:cNvPr id="215" name="" descr="{&quot;isTemplate&quot;:true,&quot;type&quot;:&quot;text&quot;}"/>
+          <p:cNvSpPr txBox="1"/>
+          <p:nvPr/>
+        </p:nvSpPr>
+        <p:spPr>
+          <a:xfrm rot="0" flipH="0" flipV="0">
+            <a:off x="914400" y="4657725"/>
+            <a:ext cx="1238250" cy="342900"/>
+          </a:xfrm>
+          <a:prstGeom prst="rect"/>
+        </p:spPr>
+        <p:txBody>
+          <a:bodyPr wrap="none" lIns="142875" tIns="64294" rIns="142875" bIns="64294"/>
           <a:p>
             <a:pPr>
               <a:lnSpc>
@@ -9906,63 +10079,149 @@
               </a:lnSpc>
             </a:pPr>
             <a:r>
-              <a:rPr lang="zh-CN" sz="1200" spc="-9223372036854775808">
+              <a:rPr lang="zh-CN" sz="1125">
                 <a:solidFill>
                   <a:srgbClr val="FBFCFA">
-                    <a:alpha val="72000"/>
+                    <a:alpha val="88000"/>
                   </a:srgbClr>
                 </a:solidFill>
                 <a:latin typeface="Microsoft YaHei"/>
                 <a:ea typeface="Microsoft YaHei"/>
               </a:rPr>
-              <a:t>项目价值</a:t>
-            </a:r>
-            <a:r>
-              <a:rPr lang="en-US" sz="1200" spc="-9223372036854775808">
+              <a:t>技术路线回顾</a:t>
+            </a:r>
+            <a:endParaRPr/>
+          </a:p>
+        </p:txBody>
+      </p:sp>
+      <p:sp>
+        <p:nvSpPr>
+          <p:cNvPr id="216" name=""/>
+          <p:cNvSpPr/>
+          <p:nvPr/>
+        </p:nvSpPr>
+        <p:spPr>
+          <a:xfrm rot="0" flipH="0" flipV="0">
+            <a:off x="2286000" y="4657725"/>
+            <a:ext cx="1238250" cy="342900"/>
+          </a:xfrm>
+          <a:prstGeom prst="roundRect">
+            <a:avLst>
+              <a:gd name="adj" fmla="val 61111"/>
+            </a:avLst>
+          </a:prstGeom>
+          <a:ln w="12700">
+            <a:solidFill>
+              <a:srgbClr val="BD9B56">
+                <a:alpha val="65000"/>
+              </a:srgbClr>
+            </a:solidFill>
+            <a:prstDash val="solid"/>
+          </a:ln>
+        </p:spPr>
+        <p:txBody>
+          <a:bodyPr/>
+          <a:p/>
+        </p:txBody>
+      </p:sp>
+      <p:sp>
+        <p:nvSpPr>
+          <p:cNvPr id="217" name="" descr="{&quot;isTemplate&quot;:true,&quot;type&quot;:&quot;text&quot;}"/>
+          <p:cNvSpPr txBox="1"/>
+          <p:nvPr/>
+        </p:nvSpPr>
+        <p:spPr>
+          <a:xfrm rot="0" flipH="0" flipV="0">
+            <a:off x="2286000" y="4657725"/>
+            <a:ext cx="1238250" cy="342900"/>
+          </a:xfrm>
+          <a:prstGeom prst="rect"/>
+        </p:spPr>
+        <p:txBody>
+          <a:bodyPr wrap="none" lIns="142875" tIns="64294" rIns="142875" bIns="64294"/>
+          <a:p>
+            <a:pPr>
+              <a:lnSpc>
+                <a:spcPct val="100000"/>
+              </a:lnSpc>
+            </a:pPr>
+            <a:r>
+              <a:rPr lang="zh-CN" sz="1125">
                 <a:solidFill>
                   <a:srgbClr val="FBFCFA">
-                    <a:alpha val="72000"/>
+                    <a:alpha val="88000"/>
                   </a:srgbClr>
                 </a:solidFill>
                 <a:latin typeface="Microsoft YaHei"/>
                 <a:ea typeface="Microsoft YaHei"/>
               </a:rPr>
-              <a:t> · </a:t>
-            </a:r>
-            <a:r>
-              <a:rPr lang="zh-CN" sz="1200" spc="-9223372036854775808">
+              <a:t>三端功能实现</a:t>
+            </a:r>
+            <a:endParaRPr/>
+          </a:p>
+        </p:txBody>
+      </p:sp>
+      <p:sp>
+        <p:nvSpPr>
+          <p:cNvPr id="218" name=""/>
+          <p:cNvSpPr/>
+          <p:nvPr/>
+        </p:nvSpPr>
+        <p:spPr>
+          <a:xfrm rot="0" flipH="0" flipV="0">
+            <a:off x="3657600" y="4657725"/>
+            <a:ext cx="952500" cy="342900"/>
+          </a:xfrm>
+          <a:prstGeom prst="roundRect">
+            <a:avLst>
+              <a:gd name="adj" fmla="val 61111"/>
+            </a:avLst>
+          </a:prstGeom>
+          <a:ln w="12700">
+            <a:solidFill>
+              <a:srgbClr val="BD9B56">
+                <a:alpha val="65000"/>
+              </a:srgbClr>
+            </a:solidFill>
+            <a:prstDash val="solid"/>
+          </a:ln>
+        </p:spPr>
+        <p:txBody>
+          <a:bodyPr/>
+          <a:p/>
+        </p:txBody>
+      </p:sp>
+      <p:sp>
+        <p:nvSpPr>
+          <p:cNvPr id="219" name="" descr="{&quot;isTemplate&quot;:true,&quot;type&quot;:&quot;text&quot;}"/>
+          <p:cNvSpPr txBox="1"/>
+          <p:nvPr/>
+        </p:nvSpPr>
+        <p:spPr>
+          <a:xfrm rot="0" flipH="0" flipV="0">
+            <a:off x="3657600" y="4657725"/>
+            <a:ext cx="952500" cy="342900"/>
+          </a:xfrm>
+          <a:prstGeom prst="rect"/>
+        </p:spPr>
+        <p:txBody>
+          <a:bodyPr wrap="none" lIns="142875" tIns="64294" rIns="142875" bIns="64294"/>
+          <a:p>
+            <a:pPr>
+              <a:lnSpc>
+                <a:spcPct val="100000"/>
+              </a:lnSpc>
+            </a:pPr>
+            <a:r>
+              <a:rPr lang="zh-CN" sz="1125">
                 <a:solidFill>
                   <a:srgbClr val="FBFCFA">
-                    <a:alpha val="72000"/>
+                    <a:alpha val="88000"/>
                   </a:srgbClr>
                 </a:solidFill>
                 <a:latin typeface="Microsoft YaHei"/>
                 <a:ea typeface="Microsoft YaHei"/>
               </a:rPr>
-              <a:t>技术路线回顾</a:t>
-            </a:r>
-            <a:r>
-              <a:rPr lang="en-US" sz="1200" spc="-9223372036854775808">
-                <a:solidFill>
-                  <a:srgbClr val="FBFCFA">
-                    <a:alpha val="72000"/>
-                  </a:srgbClr>
-                </a:solidFill>
-                <a:latin typeface="Microsoft YaHei"/>
-                <a:ea typeface="Microsoft YaHei"/>
-              </a:rPr>
-              <a:t> · </a:t>
-            </a:r>
-            <a:r>
-              <a:rPr lang="zh-CN" sz="1200" spc="-9223372036854775808">
-                <a:solidFill>
-                  <a:srgbClr val="FBFCFA">
-                    <a:alpha val="72000"/>
-                  </a:srgbClr>
-                </a:solidFill>
-                <a:latin typeface="Microsoft YaHei"/>
-                <a:ea typeface="Microsoft YaHei"/>
-              </a:rPr>
               <a:t>在线演示</a:t>
             </a:r>
             <a:endParaRPr/>
@@ -9971,14 +10230,14 @@
       </p:sp>
       <p:sp>
         <p:nvSpPr>
-          <p:cNvPr id="210" name="" descr="{&quot;isTemplate&quot;:true,&quot;type&quot;:&quot;text&quot;}"/>
-          <p:cNvSpPr txBox="1"/>
-          <p:nvPr/>
-        </p:nvSpPr>
-        <p:spPr>
-          <a:xfrm rot="0" flipH="0" flipV="0">
-            <a:off x="10877550" y="6305550"/>
-            <a:ext cx="400050" cy="152400"/>
+          <p:cNvPr id="220" name="" descr="{&quot;isTemplate&quot;:true,&quot;type&quot;:&quot;text&quot;}"/>
+          <p:cNvSpPr txBox="1"/>
+          <p:nvPr/>
+        </p:nvSpPr>
+        <p:spPr>
+          <a:xfrm rot="0" flipH="0" flipV="0">
+            <a:off x="10858500" y="6305550"/>
+            <a:ext cx="419100" cy="152400"/>
           </a:xfrm>
           <a:prstGeom prst="rect"/>
         </p:spPr>
@@ -9997,8 +10256,8 @@
                     <a:alpha val="40000"/>
                   </a:srgbClr>
                 </a:solidFill>
-                <a:latin typeface="Inter"/>
-                <a:ea typeface="Inter"/>
+                <a:latin typeface="Microsoft YaHei"/>
+                <a:ea typeface="Microsoft YaHei"/>
               </a:rPr>
               <a:t>16 / 19</a:t>
             </a:r>
@@ -10016,7 +10275,7 @@
   <p:cSld>
     <p:spTree>
       <p:nvGrpSpPr>
-        <p:cNvPr id="211" name="" descr="&lt;Slide style={{ width: '1280px', height: '720px', background: '#FBFCFA', position: 'relative', padding: '36px 64px', boxSizing: 'border-box', display: 'flex', flexDirection: 'column' }}&gt;&#13;&#10;  &lt;div style={{ flexShrink: 0 }}&gt;&#13;&#10;    &lt;div style={{ color: '#BD9B56', fontSize: 13, letterSpacing: '0.25em', marginBottom: 6 }}&gt;04 · 总结与展望&lt;/div&gt;&#13;&#10;    &lt;h2 style={{ fontSize: 30, fontWeight: 'bold', color: '#172133', margin: 0, lineHeight: 1.3 }}&gt;技术路线回顾：八个阶段 · 从 0 到上线&lt;/h2&gt;&#13;&#10;    &lt;div style={{ fontSize: 14, color: '#6b7075', marginTop: 6 }}&gt;每个阶段都有代码、测试、可运行交付，循序渐进验证&lt;/div&gt;&#13;&#10;  &lt;/div&gt;&#13;&#10;  &lt;div style={{ flex: 1, display: 'flex', alignItems: 'center', justifyContent: 'center' }}&gt;&#13;&#10;    &lt;div style={{ width: '100%', background: '#fff', borderRadius: 12, padding: '30px 26px', boxShadow: '0 6px 24px rgba(23,33,51,0.08)' }}&gt;&#13;&#10;      &lt;svg width=&quot;1100&quot; height=&quot;300&quot; viewBox=&quot;0 0 1100 300&quot;&gt;&#13;&#10;        &lt;g fontFamily=&quot;Inter, sans-serif&quot;&gt;&#13;&#10;          {/* 主时间轴 */}&#13;&#10;          &lt;line x1=&quot;60&quot; y1=&quot;70&quot; x2=&quot;1060&quot; y2=&quot;70&quot; stroke=&quot;#22395E&quot; strokeWidth=&quot;2.5&quot; /&gt;&#13;&#10;          {[&#13;&#10;            ['P0', '项目初始化', '仓库 · Docker · CI'],&#13;&#10;            ['P1', '数据库', '21 表 + 仿真数据'],&#13;&#10;            ['P2', '后端', 'FastAPI 三层'],&#13;&#10;            ['P3', '前端', '三端 + PWA'],&#13;&#10;            ['P4', 'AI Agent', '多意图 + 状态机'],&#13;&#10;            ['P5', 'RAG', '向量化检索'],&#13;&#10;            ['P6', '评估', 'Intent/Tool/RAG'],&#13;&#10;            ['P7', '部署', '已上线'],&#13;&#10;          ].map(([p, t, d], i) =&gt; {&#13;&#10;            const cx = 60 + i * 143&#13;&#10;            return (&#13;&#10;              &lt;g key={p}&gt;&#13;&#10;                {/* 节点圆 */}&#13;&#10;                &lt;circle cx={cx} cy={70} r=&quot;9&quot; fill=&quot;#BD9B56&quot; /&gt;&#13;&#10;                &lt;circle cx={cx} cy={70} r=&quot;14&quot; fill=&quot;none&quot; stroke=&quot;#BD9B56&quot; strokeWidth=&quot;1.5&quot; strokeOpacity=&quot;0.35&quot; /&gt;&#13;&#10;                {/* 阶段标签 */}&#13;&#10;                &lt;text x={cx} y={46} textAnchor=&quot;middle&quot; fontSize=&quot;13&quot; fontWeight=&quot;bold&quot; fill=&quot;#BD9B56&quot;&gt;{p}&lt;/text&gt;&#13;&#10;                {/* 阶段名 */}&#13;&#10;                &lt;text x={cx} y={112} textAnchor=&quot;middle&quot; fontSize=&quot;15&quot; fontWeight=&quot;bold&quot; fill=&quot;#172133&quot;&gt;{t}&lt;/text&gt;&#13;&#10;                {/* 描述 */}&#13;&#10;                &lt;text x={cx} y={134} textAnchor=&quot;middle&quot; fontSize=&quot;11.5&quot; fill=&quot;#5F5E5A&quot;&gt;{d}&lt;/text&gt;&#13;&#10;                {/* 下方小圆点连接 */}&#13;&#10;                &lt;line x1={cx} y1={79} x2={cx} y2={100} stroke=&quot;#BD9B56&quot; strokeWidth=&quot;1.5&quot; strokeOpacity=&quot;0.5&quot; /&gt;&#13;&#10;              &lt;/g&gt;&#13;&#10;            )&#13;&#10;          })}&#13;&#10;        &lt;/g&gt;&#13;&#10;      &lt;/svg&gt;&#13;&#10;      &lt;div style={{ marginTop: 16, display: 'flex', gap: 14 }}&gt;&#13;&#10;        &lt;div style={{ flex: 1, background: 'rgba(189,155,86,0.08)', borderRadius: 8, padding: '12px 14px', borderLeft: '3px solid #BD9B56' }}&gt;&#13;&#10;          &lt;div style={{ fontSize: 13, color: '#BD9B56', fontWeight: 'bold', marginBottom: 5 }}&gt;P1 · 数据一致性&lt;/div&gt;&#13;&#10;          &lt;p style={{ fontSize: 12, color: '#5F5E5A', margin: 0, lineHeight: 1.5 }}&gt;8 栋 / 1664 套 / 746 账单，外键关联保证一致，8 个 SQL 可复现&lt;/p&gt;&#13;&#10;        &lt;/div&gt;&#13;&#10;        &lt;div style={{ flex: 1, background: 'rgba(189,155,86,0.08)', borderRadius: 8, padding: '12px 14px', borderLeft: '3px solid #BD9B56' }}&gt;&#13;&#10;          &lt;div style={{ fontSize: 13, color: '#BD9B56', fontWeight: 'bold', marginBottom: 5 }}&gt;P4 · 多轮状态机&lt;/div&gt;&#13;&#10;          &lt;p style={{ fontSize: 12, color: '#5F5E5A', margin: 0, lineHeight: 1.5 }}&gt;报修主动追问缺省字段，避免生成残缺工单&lt;/p&gt;&#13;&#10;        &lt;/div&gt;&#13;&#10;        &lt;div style={{ flex: 1, background: 'rgba(189,155,86,0.08)', borderRadius: 8, padding: '12px 14px', borderLeft: '3px solid #BD9B56' }}&gt;&#13;&#10;          &lt;div style={{ fontSize: 13, color: '#BD9B56', fontWeight: 'bold', marginBottom: 5 }}&gt;P6 · 评估找 bug&lt;/div&gt;&#13;&#10;          &lt;p style={{ fontSize: 12, color: '#5F5E5A', margin: 0, lineHeight: 1.5 }}&gt;意图 83.33%→100%、答案 50%→100%，数据驱动优化&lt;/p&gt;&#13;&#10;        &lt;/div&gt;&#13;&#10;        &lt;div style={{ flex: 1, background: 'rgba(189,155,86,0.08)', borderRadius: 8, padding: '12px 14px', borderLeft: '3px solid #BD9B56' }}&gt;&#13;&#10;          &lt;div style={{ fontSize: 13, color: '#BD9B56', fontWeight: 'bold', marginBottom: 5 }}&gt;P7 · 部署踩坑&lt;/div&gt;&#13;&#10;          &lt;p style={{ fontSize: 12, color: '#5F5E5A', margin: 0, lineHeight: 1.5 }}&gt;国内镜像源、SECRET_KEY、端口映射逐一踩平&lt;/p&gt;&#13;&#10;        &lt;/div&gt;&#13;&#10;      &lt;/div&gt;&#13;&#10;    &lt;/div&gt;&#13;&#10;  &lt;/div&gt;&#13;&#10;  &lt;div style={{ flexShrink: 0, height: 40, display: 'flex', alignItems: 'flex-end', justifyContent: 'space-between' }}&gt;&#13;&#10;    &lt;span style={{ color: '#BD9B56', fontSize: 12, letterSpacing: '0.1em' }}&gt;云溪花园 · 智慧社区&lt;/span&gt;&#13;&#10;    &lt;span style={{ color: '#a09b8c', fontSize: 12 }}&gt;17 / 19&lt;/span&gt;&#13;&#10;  &lt;/div&gt;&#13;&#10;&lt;/Slide&gt;"/>
+        <p:cNvPr id="221" name="" descr="&lt;Slide style={{ width: '1280px', height: '720px', background: '#FBFCFA', position: 'relative', padding: '36px 64px', boxSizing: 'border-box', display: 'flex', flexDirection: 'column' }}&gt;&#13;&#10;  &lt;div style={{ flexShrink: 0 }}&gt;&#13;&#10;    &lt;div style={{ color: '#BD9B56', fontSize: 13, letterSpacing: '0.25em', marginBottom: 6 }}&gt;04 · 总结与展望&lt;/div&gt;&#13;&#10;    &lt;h2 style={{ fontSize: 30, fontWeight: 'bold', color: '#172133', margin: 0, lineHeight: 1.3 }}&gt;技术路线回顾：八个阶段 · 从 0 到上线&lt;/h2&gt;&#13;&#10;    &lt;div style={{ fontSize: 14, color: '#6b7075', marginTop: 6 }}&gt;每个阶段都有代码、测试、可运行交付，循序渐进验证&lt;/div&gt;&#13;&#10;  &lt;/div&gt;&#13;&#10;  &lt;div style={{ flex: 1, display: 'flex', alignItems: 'center', justifyContent: 'center' }}&gt;&#13;&#10;    &lt;div style={{ width: '100%', background: '#fff', borderRadius: 12, padding: '30px 26px', boxShadow: '0 6px 24px rgba(23,33,51,0.08)' }}&gt;&#13;&#10;      &lt;svg width=&quot;1100&quot; height=&quot;300&quot; viewBox=&quot;0 0 1100 300&quot;&gt;&#13;&#10;        &lt;g fontFamily=&quot;Inter, sans-serif&quot;&gt;&#13;&#10;          {/* 主时间轴 */}&#13;&#10;          &lt;line x1=&quot;60&quot; y1=&quot;70&quot; x2=&quot;1060&quot; y2=&quot;70&quot; stroke=&quot;#22395E&quot; strokeWidth=&quot;2.5&quot; /&gt;&#13;&#10;          {[&#13;&#10;            ['P0', '项目初始化', '仓库 · Docker · CI'],&#13;&#10;            ['P1', '数据库', '21 表 + 仿真数据'],&#13;&#10;            ['P2', '后端', 'FastAPI 三层'],&#13;&#10;            ['P3', '前端', '三端 + PWA'],&#13;&#10;            ['P4', 'AI Agent', '多意图 + 状态机'],&#13;&#10;            ['P5', 'RAG', '向量化检索'],&#13;&#10;            ['P6', '评估', 'Intent/Tool/RAG'],&#13;&#10;            ['P7', '部署', '已上线'],&#13;&#10;          ].map(([p, t, d], i) =&gt; {&#13;&#10;            const cx = 60 + i * 143&#13;&#10;            return (&#13;&#10;              &lt;g key={p}&gt;&#13;&#10;                {/* 节点圆 */}&#13;&#10;                &lt;circle cx={cx} cy={70} r=&quot;9&quot; fill=&quot;#BD9B56&quot; /&gt;&#13;&#10;                &lt;circle cx={cx} cy={70} r=&quot;14&quot; fill=&quot;none&quot; stroke=&quot;#BD9B56&quot; strokeWidth=&quot;1.5&quot; strokeOpacity=&quot;0.35&quot; /&gt;&#13;&#10;                {/* 阶段标签 */}&#13;&#10;                &lt;text x={cx} y={46} textAnchor=&quot;middle&quot; fontSize=&quot;13&quot; fontWeight=&quot;bold&quot; fill=&quot;#BD9B56&quot;&gt;{p}&lt;/text&gt;&#13;&#10;                {/* 阶段名 */}&#13;&#10;                &lt;text x={cx} y={112} textAnchor=&quot;middle&quot; fontSize=&quot;15&quot; fontWeight=&quot;bold&quot; fill=&quot;#172133&quot;&gt;{t}&lt;/text&gt;&#13;&#10;                {/* 描述 */}&#13;&#10;                &lt;text x={cx} y={134} textAnchor=&quot;middle&quot; fontSize=&quot;11.5&quot; fill=&quot;#5F5E5A&quot;&gt;{d}&lt;/text&gt;&#13;&#10;                {/* 下方小圆点连接 */}&#13;&#10;                &lt;line x1={cx} y1={79} x2={cx} y2={100} stroke=&quot;#BD9B56&quot; strokeWidth=&quot;1.5&quot; strokeOpacity=&quot;0.5&quot; /&gt;&#13;&#10;              &lt;/g&gt;&#13;&#10;            )&#13;&#10;          })}&#13;&#10;        &lt;/g&gt;&#13;&#10;      &lt;/svg&gt;&#13;&#10;      &lt;div style={{ marginTop: 16, display: 'flex', gap: 14 }}&gt;&#13;&#10;        &lt;div style={{ flex: 1, background: 'rgba(189,155,86,0.08)', borderRadius: 8, padding: '12px 14px', borderLeft: '3px solid #BD9B56' }}&gt;&#13;&#10;          &lt;div style={{ fontSize: 13, color: '#BD9B56', fontWeight: 'bold', marginBottom: 5 }}&gt;P1 · 数据一致性&lt;/div&gt;&#13;&#10;          &lt;p style={{ fontSize: 12, color: '#5F5E5A', margin: 0, lineHeight: 1.5 }}&gt;8 栋 / 1664 套 / 746 账单，外键关联保证一致，8 个 SQL 可复现&lt;/p&gt;&#13;&#10;        &lt;/div&gt;&#13;&#10;        &lt;div style={{ flex: 1, background: 'rgba(189,155,86,0.08)', borderRadius: 8, padding: '12px 14px', borderLeft: '3px solid #BD9B56' }}&gt;&#13;&#10;          &lt;div style={{ fontSize: 13, color: '#BD9B56', fontWeight: 'bold', marginBottom: 5 }}&gt;P4 · 多轮状态机&lt;/div&gt;&#13;&#10;          &lt;p style={{ fontSize: 12, color: '#5F5E5A', margin: 0, lineHeight: 1.5 }}&gt;报修主动追问缺省字段，避免生成残缺工单&lt;/p&gt;&#13;&#10;        &lt;/div&gt;&#13;&#10;        &lt;div style={{ flex: 1, background: 'rgba(189,155,86,0.08)', borderRadius: 8, padding: '12px 14px', borderLeft: '3px solid #BD9B56' }}&gt;&#13;&#10;          &lt;div style={{ fontSize: 13, color: '#BD9B56', fontWeight: 'bold', marginBottom: 5 }}&gt;P6 · 评估找 bug&lt;/div&gt;&#13;&#10;          &lt;p style={{ fontSize: 12, color: '#5F5E5A', margin: 0, lineHeight: 1.5 }}&gt;意图 83.33%→100%、答案 50%→100%，数据驱动优化&lt;/p&gt;&#13;&#10;        &lt;/div&gt;&#13;&#10;        &lt;div style={{ flex: 1, background: 'rgba(189,155,86,0.08)', borderRadius: 8, padding: '12px 14px', borderLeft: '3px solid #BD9B56' }}&gt;&#13;&#10;          &lt;div style={{ fontSize: 13, color: '#BD9B56', fontWeight: 'bold', marginBottom: 5 }}&gt;P7 · 部署踩坑&lt;/div&gt;&#13;&#10;          &lt;p style={{ fontSize: 12, color: '#5F5E5A', margin: 0, lineHeight: 1.5 }}&gt;国内镜像源、SECRET_KEY、端口映射逐一踩平&lt;/p&gt;&#13;&#10;        &lt;/div&gt;&#13;&#10;      &lt;/div&gt;&#13;&#10;    &lt;/div&gt;&#13;&#10;  &lt;/div&gt;&#13;&#10;  &lt;div style={{ flexShrink: 0, height: 40, display: 'flex', alignItems: 'flex-end', justifyContent: 'space-between' }}&gt;&#13;&#10;    &lt;span style={{ color: '#BD9B56', fontSize: 12, letterSpacing: '0.1em' }}&gt;云溪花园 · 智慧社区&lt;/span&gt;&#13;&#10;    &lt;span style={{ color: '#a09b8c', fontSize: 12 }}&gt;17 / 19&lt;/span&gt;&#13;&#10;  &lt;/div&gt;&#13;&#10;&lt;/Slide&gt;"/>
         <p:cNvGrpSpPr/>
         <p:nvPr/>
       </p:nvGrpSpPr>
@@ -10030,7 +10289,7 @@
       </p:grpSpPr>
       <p:sp>
         <p:nvSpPr>
-          <p:cNvPr id="212" name=""/>
+          <p:cNvPr id="222" name=""/>
           <p:cNvSpPr/>
           <p:nvPr/>
         </p:nvSpPr>
@@ -10054,7 +10313,7 @@
       </p:sp>
       <p:sp>
         <p:nvSpPr>
-          <p:cNvPr id="213" name="" descr="{&quot;isTemplate&quot;:true,&quot;type&quot;:&quot;text&quot;}"/>
+          <p:cNvPr id="223" name="" descr="{&quot;isTemplate&quot;:true,&quot;type&quot;:&quot;text&quot;}"/>
           <p:cNvSpPr txBox="1"/>
           <p:nvPr/>
         </p:nvSpPr>
@@ -10099,7 +10358,7 @@
       </p:sp>
       <p:sp>
         <p:nvSpPr>
-          <p:cNvPr id="214" name="" descr="{&quot;isTemplate&quot;:true,&quot;type&quot;:&quot;text&quot;}"/>
+          <p:cNvPr id="224" name="" descr="{&quot;isTemplate&quot;:true,&quot;type&quot;:&quot;text&quot;}"/>
           <p:cNvSpPr txBox="1"/>
           <p:nvPr/>
         </p:nvSpPr>
@@ -10174,7 +10433,7 @@
       </p:sp>
       <p:sp>
         <p:nvSpPr>
-          <p:cNvPr id="215" name="" descr="{&quot;isTemplate&quot;:true,&quot;type&quot;:&quot;text&quot;}"/>
+          <p:cNvPr id="225" name="" descr="{&quot;isTemplate&quot;:true,&quot;type&quot;:&quot;text&quot;}"/>
           <p:cNvSpPr txBox="1"/>
           <p:nvPr/>
         </p:nvSpPr>
@@ -10209,7 +10468,7 @@
       </p:sp>
       <p:sp>
         <p:nvSpPr>
-          <p:cNvPr id="216" name=""/>
+          <p:cNvPr id="226" name=""/>
           <p:cNvSpPr/>
           <p:nvPr/>
         </p:nvSpPr>
@@ -10242,7 +10501,7 @@
       </p:sp>
       <p:pic>
         <p:nvPicPr>
-          <p:cNvPr id="217" name=""/>
+          <p:cNvPr id="227" name=""/>
           <p:cNvPicPr>
             <a:picLocks noChangeAspect="1"/>
           </p:cNvPicPr>
@@ -10273,7 +10532,7 @@
       </p:pic>
       <p:sp>
         <p:nvSpPr>
-          <p:cNvPr id="218" name=""/>
+          <p:cNvPr id="228" name=""/>
           <p:cNvSpPr/>
           <p:nvPr/>
         </p:nvSpPr>
@@ -10301,7 +10560,7 @@
       </p:sp>
       <p:sp>
         <p:nvSpPr>
-          <p:cNvPr id="219" name=""/>
+          <p:cNvPr id="229" name=""/>
           <p:cNvSpPr/>
           <p:nvPr/>
         </p:nvSpPr>
@@ -10358,7 +10617,7 @@
       </p:sp>
       <p:sp>
         <p:nvSpPr>
-          <p:cNvPr id="220" name="" descr="{&quot;isTemplate&quot;:true,&quot;type&quot;:&quot;text&quot;}"/>
+          <p:cNvPr id="230" name="" descr="{&quot;isTemplate&quot;:true,&quot;type&quot;:&quot;text&quot;}"/>
           <p:cNvSpPr txBox="1"/>
           <p:nvPr/>
         </p:nvSpPr>
@@ -10403,7 +10662,7 @@
       </p:sp>
       <p:sp>
         <p:nvSpPr>
-          <p:cNvPr id="221" name="" descr="{&quot;isTemplate&quot;:true,&quot;type&quot;:&quot;text&quot;}"/>
+          <p:cNvPr id="231" name="" descr="{&quot;isTemplate&quot;:true,&quot;type&quot;:&quot;text&quot;}"/>
           <p:cNvSpPr txBox="1"/>
           <p:nvPr/>
         </p:nvSpPr>
@@ -10530,7 +10789,7 @@
       </p:sp>
       <p:sp>
         <p:nvSpPr>
-          <p:cNvPr id="222" name=""/>
+          <p:cNvPr id="232" name=""/>
           <p:cNvSpPr/>
           <p:nvPr/>
         </p:nvSpPr>
@@ -10558,7 +10817,7 @@
       </p:sp>
       <p:sp>
         <p:nvSpPr>
-          <p:cNvPr id="223" name=""/>
+          <p:cNvPr id="233" name=""/>
           <p:cNvSpPr/>
           <p:nvPr/>
         </p:nvSpPr>
@@ -10615,7 +10874,7 @@
       </p:sp>
       <p:sp>
         <p:nvSpPr>
-          <p:cNvPr id="224" name="" descr="{&quot;isTemplate&quot;:true,&quot;type&quot;:&quot;text&quot;}"/>
+          <p:cNvPr id="234" name="" descr="{&quot;isTemplate&quot;:true,&quot;type&quot;:&quot;text&quot;}"/>
           <p:cNvSpPr txBox="1"/>
           <p:nvPr/>
         </p:nvSpPr>
@@ -10660,7 +10919,7 @@
       </p:sp>
       <p:sp>
         <p:nvSpPr>
-          <p:cNvPr id="225" name="" descr="{&quot;isTemplate&quot;:true,&quot;type&quot;:&quot;text&quot;}"/>
+          <p:cNvPr id="235" name="" descr="{&quot;isTemplate&quot;:true,&quot;type&quot;:&quot;text&quot;}"/>
           <p:cNvSpPr txBox="1"/>
           <p:nvPr/>
         </p:nvSpPr>
@@ -10695,7 +10954,7 @@
       </p:sp>
       <p:sp>
         <p:nvSpPr>
-          <p:cNvPr id="226" name=""/>
+          <p:cNvPr id="236" name=""/>
           <p:cNvSpPr/>
           <p:nvPr/>
         </p:nvSpPr>
@@ -10723,7 +10982,7 @@
       </p:sp>
       <p:sp>
         <p:nvSpPr>
-          <p:cNvPr id="227" name=""/>
+          <p:cNvPr id="237" name=""/>
           <p:cNvSpPr/>
           <p:nvPr/>
         </p:nvSpPr>
@@ -10780,7 +11039,7 @@
       </p:sp>
       <p:sp>
         <p:nvSpPr>
-          <p:cNvPr id="228" name="" descr="{&quot;isTemplate&quot;:true,&quot;type&quot;:&quot;text&quot;}"/>
+          <p:cNvPr id="238" name="" descr="{&quot;isTemplate&quot;:true,&quot;type&quot;:&quot;text&quot;}"/>
           <p:cNvSpPr txBox="1"/>
           <p:nvPr/>
         </p:nvSpPr>
@@ -10835,7 +11094,7 @@
       </p:sp>
       <p:sp>
         <p:nvSpPr>
-          <p:cNvPr id="229" name="" descr="{&quot;isTemplate&quot;:true,&quot;type&quot;:&quot;text&quot;}"/>
+          <p:cNvPr id="239" name="" descr="{&quot;isTemplate&quot;:true,&quot;type&quot;:&quot;text&quot;}"/>
           <p:cNvSpPr txBox="1"/>
           <p:nvPr/>
         </p:nvSpPr>
@@ -10912,7 +11171,7 @@
       </p:sp>
       <p:sp>
         <p:nvSpPr>
-          <p:cNvPr id="230" name=""/>
+          <p:cNvPr id="240" name=""/>
           <p:cNvSpPr/>
           <p:nvPr/>
         </p:nvSpPr>
@@ -10940,7 +11199,7 @@
       </p:sp>
       <p:sp>
         <p:nvSpPr>
-          <p:cNvPr id="231" name=""/>
+          <p:cNvPr id="241" name=""/>
           <p:cNvSpPr/>
           <p:nvPr/>
         </p:nvSpPr>
@@ -10997,7 +11256,7 @@
       </p:sp>
       <p:sp>
         <p:nvSpPr>
-          <p:cNvPr id="232" name="" descr="{&quot;isTemplate&quot;:true,&quot;type&quot;:&quot;text&quot;}"/>
+          <p:cNvPr id="242" name="" descr="{&quot;isTemplate&quot;:true,&quot;type&quot;:&quot;text&quot;}"/>
           <p:cNvSpPr txBox="1"/>
           <p:nvPr/>
         </p:nvSpPr>
@@ -11042,7 +11301,7 @@
       </p:sp>
       <p:sp>
         <p:nvSpPr>
-          <p:cNvPr id="233" name="" descr="{&quot;isTemplate&quot;:true,&quot;type&quot;:&quot;text&quot;}"/>
+          <p:cNvPr id="243" name="" descr="{&quot;isTemplate&quot;:true,&quot;type&quot;:&quot;text&quot;}"/>
           <p:cNvSpPr txBox="1"/>
           <p:nvPr/>
         </p:nvSpPr>
@@ -11099,7 +11358,7 @@
       </p:sp>
       <p:sp>
         <p:nvSpPr>
-          <p:cNvPr id="234" name="" descr="{&quot;isTemplate&quot;:true,&quot;type&quot;:&quot;text&quot;}"/>
+          <p:cNvPr id="244" name="" descr="{&quot;isTemplate&quot;:true,&quot;type&quot;:&quot;text&quot;}"/>
           <p:cNvSpPr txBox="1"/>
           <p:nvPr/>
         </p:nvSpPr>
@@ -11154,7 +11413,7 @@
       </p:sp>
       <p:sp>
         <p:nvSpPr>
-          <p:cNvPr id="235" name="" descr="{&quot;isTemplate&quot;:true,&quot;type&quot;:&quot;text&quot;}"/>
+          <p:cNvPr id="245" name="" descr="{&quot;isTemplate&quot;:true,&quot;type&quot;:&quot;text&quot;}"/>
           <p:cNvSpPr txBox="1"/>
           <p:nvPr/>
         </p:nvSpPr>
@@ -11197,7 +11456,7 @@
   <p:cSld>
     <p:spTree>
       <p:nvGrpSpPr>
-        <p:cNvPr id="236" name="" descr="&lt;Slide style={{ width: '1280px', height: '720px', background: '#FBFCFA', position: 'relative', padding: '26px 52px', boxSizing: 'border-box', display: 'flex', flexDirection: 'column' }}&gt;&#13;&#10;  &lt;div style={{ flexShrink: 0 }}&gt;&#13;&#10;    &lt;div style={{ color: '#BD9B56', fontSize: 12, letterSpacing: '0.25em', marginBottom: 4 }}&gt;04 · 总结与展望&lt;/div&gt;&#13;&#10;    &lt;h2 style={{ fontSize: 25, fontWeight: 'bold', color: '#172133', margin: 0, lineHeight: 1.2 }}&gt;三端功能 × 实现技术：每个功能怎么做出来的&lt;/h2&gt;&#13;&#10;  &lt;/div&gt;&#13;&#10;  &lt;div style={{ flex: 1, display: 'flex', alignItems: 'stretch', gap: 18, marginTop: 10 }}&gt;&#13;&#10;    {/* 左栏：三端功能实现 */}&#13;&#10;    &lt;div style={{ flex: 1, display: 'flex', flexDirection: 'column', gap: 8 }}&gt;&#13;&#10;      {/* 业主端 */}&#13;&#10;      &lt;div style={{ background: '#fff', borderRadius: 10, padding: '10px 14px', boxShadow: '0 4px 16px rgba(23,33,51,0.06)' }}&gt;&#13;&#10;        &lt;div style={{ display: 'flex', alignItems: 'center', gap: 8, marginBottom: 6 }}&gt;&#13;&#10;          &lt;span style={{ fontSize: 14, fontWeight: 'bold', color: '#172133' }}&gt;业主端&lt;/span&gt;&#13;&#10;          &lt;span style={{ fontSize: 10.5, color: '#BD9B56', background: 'rgba(189,155,86,0.12)', padding: '2px 7px', borderRadius: 4 }}&gt;ToC · Owner&lt;/span&gt;&#13;&#10;        &lt;/div&gt;&#13;&#10;        &lt;div style={{ display: 'flex', flexDirection: 'column', gap: 3.5 }}&gt;&#13;&#10;          &lt;div style={{ display: 'flex', gap: 8, alignItems: 'baseline', fontSize: 11.5, lineHeight: 1.4 }}&gt;&lt;span style={{ color: '#172133', fontWeight: 'bold', minWidth: 56 }}&gt;AI 助手&lt;/span&gt;&lt;span style={{ color: '#6b7075' }}&gt;LangGraph 多 Agent：Personal 对话 → Router 意图识别 → Domain 工具调用&lt;/span&gt;&lt;/div&gt;&#13;&#10;          &lt;div style={{ display: 'flex', gap: 8, alignItems: 'baseline', fontSize: 11.5, lineHeight: 1.4 }}&gt;&lt;span style={{ color: '#172133', fontWeight: 'bold', minWidth: 56 }}&gt;对话报修&lt;/span&gt;&lt;span style={{ color: '#6b7075' }}&gt;Repair Agent · 多轮状态机补全房屋/类型 · 自动派单（技能+在岗+工号）&lt;/span&gt;&lt;/div&gt;&#13;&#10;          &lt;div style={{ display: 'flex', gap: 8, alignItems: 'baseline', fontSize: 11.5, lineHeight: 1.4 }}&gt;&lt;span style={{ color: '#172133', fontWeight: 'bold', minWidth: 56 }}&gt;缴费查询&lt;/span&gt;&lt;span style={{ color: '#6b7075' }}&gt;Fee Agent 查 fee_bills 账单表 · 返回金额/状态/截止日&lt;/span&gt;&lt;/div&gt;&#13;&#10;          &lt;div style={{ display: 'flex', gap: 8, alignItems: 'baseline', fontSize: 11.5, lineHeight: 1.4 }}&gt;&lt;span style={{ color: '#172133', fontWeight: 'bold', minWidth: 56 }}&gt;公告&lt;/span&gt;&lt;span style={{ color: '#6b7075' }}&gt;公告列表 + AI 摘要（LLM 提炼要点）&lt;/span&gt;&lt;/div&gt;&#13;&#10;          &lt;div style={{ display: 'flex', gap: 8, alignItems: 'baseline', fontSize: 11.5, lineHeight: 1.4 }}&gt;&lt;span style={{ color: '#172133', fontWeight: 'bold', minWidth: 56 }}&gt;我的工单&lt;/span&gt;&lt;span style={{ color: '#6b7075' }}&gt;repair_order 状态追踪（创建→派单→接单→完成→关闭）&lt;/span&gt;&lt;/div&gt;&#13;&#10;          &lt;div style={{ display: 'flex', gap: 8, alignItems: 'baseline', fontSize: 11.5, lineHeight: 1.4 }}&gt;&lt;span style={{ color: '#172133', fontWeight: 'bold', minWidth: 56 }}&gt;问题上报&lt;/span&gt;&lt;span style={{ color: '#6b7075' }}&gt;IssueReport 上报 · 附图片 · 物业答复&lt;/span&gt;&lt;/div&gt;&#13;&#10;        &lt;/div&gt;&#13;&#10;      &lt;/div&gt;&#13;&#10;      {/* 物业端 */}&#13;&#10;      &lt;div style={{ background: '#fff', borderRadius: 10, padding: '10px 14px', boxShadow: '0 4px 16px rgba(23,33,51,0.06)' }}&gt;&#13;&#10;        &lt;div style={{ display: 'flex', alignItems: 'center', gap: 8, marginBottom: 6 }}&gt;&#13;&#10;          &lt;span style={{ fontSize: 14, fontWeight: 'bold', color: '#172133' }}&gt;物业端&lt;/span&gt;&#13;&#10;          &lt;span style={{ fontSize: 10.5, color: '#BD9B56', background: 'rgba(189,155,86,0.12)', padding: '2px 7px', borderRadius: 4 }}&gt;ToB · Admin/Staff&lt;/span&gt;&#13;&#10;        &lt;/div&gt;&#13;&#10;        &lt;div style={{ display: 'flex', flexDirection: 'column', gap: 3.5 }}&gt;&#13;&#10;          &lt;div style={{ display: 'flex', gap: 8, alignItems: 'baseline', fontSize: 11.5, lineHeight: 1.4 }}&gt;&lt;span style={{ color: '#172133', fontWeight: 'bold', minWidth: 56 }}&gt;数据看板&lt;/span&gt;&lt;span style={{ color: '#6b7075' }}&gt;统计聚合 API · 今日报修/处理中/已完成实时汇总&lt;/span&gt;&lt;/div&gt;&#13;&#10;          &lt;div style={{ display: 'flex', gap: 8, alignItems: 'baseline', fontSize: 11.5, lineHeight: 1.4 }}&gt;&lt;span style={{ color: '#172133', fontWeight: 'bold', minWidth: 56 }}&gt;工单管理&lt;/span&gt;&lt;span style={{ color: '#6b7075' }}&gt;repair_order CRUD · 状态流转 · 人工派单/改派&lt;/span&gt;&lt;/div&gt;&#13;&#10;          &lt;div style={{ display: 'flex', gap: 8, alignItems: 'baseline', fontSize: 11.5, lineHeight: 1.4 }}&gt;&lt;span style={{ color: '#172133', fontWeight: 'bold', minWidth: 56 }}&gt;用户/房屋&lt;/span&gt;&lt;span style={{ color: '#6b7075' }}&gt;user / house / house_binding 绑定关系管理&lt;/span&gt;&lt;/div&gt;&#13;&#10;          &lt;div style={{ display: 'flex', gap: 8, alignItems: 'baseline', fontSize: 11.5, lineHeight: 1.4 }}&gt;&lt;span style={{ color: '#172133', fontWeight: 'bold', minWidth: 56 }}&gt;公告 AI 生成&lt;/span&gt;&lt;span style={{ color: '#6b7075' }}&gt;Notice Agent + LLM 生成标题/正文/影响范围 · 人工审核发布&lt;/span&gt;&lt;/div&gt;&#13;&#10;          &lt;div style={{ display: 'flex', gap: 8, alignItems: 'baseline', fontSize: 11.5, lineHeight: 1.4 }}&gt;&lt;span style={{ color: '#172133', fontWeight: 'bold', minWidth: 56 }}&gt;巡检管理&lt;/span&gt;&lt;span style={{ color: '#6b7075' }}&gt;摄像头抓拍 → 视觉模型识别异常 → 巡检记录 + 告警&lt;/span&gt;&lt;/div&gt;&#13;&#10;          &lt;div style={{ display: 'flex', gap: 8, alignItems: 'baseline', fontSize: 11.5, lineHeight: 1.4 }}&gt;&lt;span style={{ color: '#172133', fontWeight: 'bold', minWidth: 56 }}&gt;知识缺口审核&lt;/span&gt;&lt;span style={{ color: '#6b7075' }}&gt;knowledge_gap 审核 → 通过自动写入 pgvector 知识库&lt;/span&gt;&lt;/div&gt;&#13;&#10;        &lt;/div&gt;&#13;&#10;      &lt;/div&gt;&#13;&#10;      {/* 维修端 */}&#13;&#10;      &lt;div style={{ background: '#fff', borderRadius: 10, padding: '10px 14px', boxShadow: '0 4px 16px rgba(23,33,51,0.06)' }}&gt;&#13;&#10;        &lt;div style={{ display: 'flex', alignItems: 'center', gap: 8, marginBottom: 6 }}&gt;&#13;&#10;          &lt;span style={{ fontSize: 14, fontWeight: 'bold', color: '#172133' }}&gt;维修端&lt;/span&gt;&#13;&#10;          &lt;span style={{ fontSize: 10.5, color: '#BD9B56', background: 'rgba(189,155,86,0.12)', padding: '2px 7px', borderRadius: 4 }}&gt;ToC · Worker&lt;/span&gt;&#13;&#10;        &lt;/div&gt;&#13;&#10;        &lt;div style={{ display: 'flex', flexDirection: 'column', gap: 3.5 }}&gt;&#13;&#10;          &lt;div style={{ display: 'flex', gap: 8, alignItems: 'baseline', fontSize: 11.5, lineHeight: 1.4 }}&gt;&lt;span style={{ color: '#172133', fontWeight: 'bold', minWidth: 56 }}&gt;任务列表&lt;/span&gt;&lt;span style={{ color: '#6b7075' }}&gt;自动派单后查询「我的待处理」工单&lt;/span&gt;&lt;/div&gt;&#13;&#10;          &lt;div style={{ display: 'flex', gap: 8, alignItems: 'baseline', fontSize: 11.5, lineHeight: 1.4 }}&gt;&lt;span style={{ color: '#172133', fontWeight: 'bold', minWidth: 56 }}&gt;接单/处理/完成&lt;/span&gt;&lt;span style={{ color: '#6b7075' }}&gt;状态机流转 · 每步触发实时通知&lt;/span&gt;&lt;/div&gt;&#13;&#10;          &lt;div style={{ display: 'flex', gap: 8, alignItems: 'baseline', fontSize: 11.5, lineHeight: 1.4 }}&gt;&lt;span style={{ color: '#172133', fontWeight: 'bold', minWidth: 56 }}&gt;消息&lt;/span&gt;&lt;span style={{ color: '#6b7075' }}&gt;事件驱动通知（派单/答复/完成）&lt;/span&gt;&lt;/div&gt;&#13;&#10;          &lt;div style={{ display: 'flex', gap: 8, alignItems: 'baseline', fontSize: 11.5, lineHeight: 1.4 }}&gt;&lt;span style={{ color: '#172133', fontWeight: 'bold', minWidth: 56 }}&gt;巡检任务&lt;/span&gt;&lt;span style={{ color: '#6b7075' }}&gt;巡检记录查看 · 异常处理&lt;/span&gt;&lt;/div&gt;&#13;&#10;        &lt;/div&gt;&#13;&#10;      &lt;/div&gt;&#13;&#10;    &lt;/div&gt;&#13;&#10;    {/* 右栏：自维护 + Demo */}&#13;&#10;    &lt;div style={{ flex: '0 0 285px', display: 'flex', flexDirection: 'column', gap: 10 }}&gt;&#13;&#10;      &lt;div style={{ background: 'linear-gradient(135deg, #172133 0%, #22395E 100%)', borderRadius: 12, padding: '16px 18px', color: '#FBFCFA', display: 'flex', flexDirection: 'column', gap: 9 }}&gt;&#13;&#10;        &lt;div style={{ color: '#BD9B56', fontSize: 12, letterSpacing: '0.2em' }}&gt;系统自维护自更新&lt;/div&gt;&#13;&#10;        &lt;div style={{ display: 'flex', flexDirection: 'column', gap: 6, fontSize: 11.5, lineHeight: 1.45 }}&gt;&#13;&#10;          &lt;div&gt;&lt;span style={{ color: '#BD9B56', fontWeight: 'bold' }}&gt;定时清理&lt;/span&gt;&lt;span style={{ color: 'rgba(251,252,250,0.8)' }}&gt;　APScheduler 每日清过期数据/孤儿文件&lt;/span&gt;&lt;/div&gt;&#13;&#10;          &lt;div&gt;&lt;span style={{ color: '#BD9B56', fontWeight: 'bold' }}&gt;巡检自动化&lt;/span&gt;&lt;span style={{ color: 'rgba(251,252,250,0.8)' }}&gt;　定时抓拍 + 视觉识别异常&lt;/span&gt;&lt;/div&gt;&#13;&#10;          &lt;div&gt;&lt;span style={{ color: '#BD9B56', fontWeight: 'bold' }}&gt;知识自进化&lt;/span&gt;&lt;span style={{ color: 'rgba(251,252,250,0.8)' }}&gt;　反馈→知识缺口→审核→入库&lt;/span&gt;&lt;/div&gt;&#13;&#10;          &lt;div&gt;&lt;span style={{ color: '#BD9B56', fontWeight: 'bold' }}&gt;监控告警&lt;/span&gt;&lt;span style={{ color: 'rgba(251,252,250,0.8)' }}&gt;　Prometheus + Grafana&lt;/span&gt;&lt;/div&gt;&#13;&#10;          &lt;div&gt;&lt;span style={{ color: '#BD9B56', fontWeight: 'bold' }}&gt;持续交付&lt;/span&gt;&lt;span style={{ color: 'rgba(251,252,250,0.8)' }}&gt;　GitHub Actions 自动测试+发布&lt;/span&gt;&lt;/div&gt;&#13;&#10;        &lt;/div&gt;&#13;&#10;        &lt;div style={{ fontSize: 11, color: 'rgba(251,252,250,0.6)', lineHeight: 1.5, paddingTop: 7, borderTop: '1px solid rgba(189,155,86,0.3)' }}&gt;无需人工值守，越用越准、越用越稳&lt;/div&gt;&#13;&#10;      &lt;/div&gt;&#13;&#10;      &lt;div style={{ background: '#fff', borderRadius: 12, padding: '14px 16px', boxShadow: '0 4px 16px rgba(23,33,51,0.06)' }}&gt;&#13;&#10;        &lt;div style={{ color: '#BD9B56', fontSize: 11.5, letterSpacing: '0.2em', marginBottom: 8 }}&gt;ONLINE DEMO&lt;/div&gt;&#13;&#10;        &lt;div style={{ fontSize: 15, fontFamily: 'Inter, sans-serif', color: '#172133', lineHeight: 1.4 }}&gt;http://119.91.236.85&lt;/div&gt;&#13;&#10;        &lt;div style={{ fontSize: 11, color: '#6b7075', lineHeight: 1.6, marginTop: 6 }}&gt;&#13;&#10;          业主 guoyi378 · 物业 mayun420&lt;br/&gt;维修 yangfei423　&lt;span style={{ color: '#BD9B56' }}&gt;密码 123456&lt;/span&gt;&#13;&#10;        &lt;/div&gt;&#13;&#10;        &lt;div style={{ fontSize: 10.5, color: '#a09b8c', marginTop: 6, paddingTop: 6, borderTop: '1px solid rgba(34,57,94,0.1)' }}&gt;GitHub：Xuuuukkk/ai-property-community-agent · MIT&lt;/div&gt;&#13;&#10;      &lt;/div&gt;&#13;&#10;    &lt;/div&gt;&#13;&#10;  &lt;/div&gt;&#13;&#10;  &lt;div style={{ flexShrink: 0, height: 30, display: 'flex', alignItems: 'flex-end', justifyContent: 'space-between' }}&gt;&#13;&#10;    &lt;span style={{ color: '#BD9B56', fontSize: 12, letterSpacing: '0.1em' }}&gt;云溪花园 · 智慧社区&lt;/span&gt;&#13;&#10;    &lt;span style={{ color: '#a09b8c', fontSize: 12 }}&gt;18 / 19&lt;/span&gt;&#13;&#10;  &lt;/div&gt;&#13;&#10;&lt;/Slide&gt;"/>
+        <p:cNvPr id="246" name="" descr="&lt;Slide style={{ width: '1280px', height: '720px', background: '#FBFCFA', position: 'relative', padding: '26px 52px', boxSizing: 'border-box', display: 'flex', flexDirection: 'column' }}&gt;&#13;&#10;  &lt;div style={{ flexShrink: 0 }}&gt;&#13;&#10;    &lt;div style={{ color: '#BD9B56', fontSize: 12, letterSpacing: '0.25em', marginBottom: 4 }}&gt;04 · 总结与展望&lt;/div&gt;&#13;&#10;    &lt;h2 style={{ fontSize: 25, fontWeight: 'bold', color: '#172133', margin: 0, lineHeight: 1.2 }}&gt;三端功能 × 实现技术：每个功能怎么做出来的&lt;/h2&gt;&#13;&#10;  &lt;/div&gt;&#13;&#10;  &lt;div style={{ flex: 1, display: 'flex', alignItems: 'stretch', gap: 18, marginTop: 10 }}&gt;&#13;&#10;    {/* 左栏：三端功能实现 */}&#13;&#10;    &lt;div style={{ flex: 1, display: 'flex', flexDirection: 'column', gap: 8 }}&gt;&#13;&#10;      {/* 业主端 */}&#13;&#10;      &lt;div style={{ background: '#fff', borderRadius: 10, padding: '10px 14px', boxShadow: '0 4px 16px rgba(23,33,51,0.06)' }}&gt;&#13;&#10;        &lt;div style={{ display: 'flex', alignItems: 'center', gap: 8, marginBottom: 6 }}&gt;&#13;&#10;          &lt;span style={{ fontSize: 14, fontWeight: 'bold', color: '#172133' }}&gt;业主端&lt;/span&gt;&#13;&#10;          &lt;span style={{ fontSize: 10.5, color: '#BD9B56', background: 'rgba(189,155,86,0.12)', padding: '2px 7px', borderRadius: 4 }}&gt;ToC · Owner&lt;/span&gt;&#13;&#10;        &lt;/div&gt;&#13;&#10;        &lt;div style={{ display: 'flex', flexDirection: 'column', gap: 3.5 }}&gt;&#13;&#10;          &lt;div style={{ display: 'flex', gap: 8, alignItems: 'baseline', fontSize: 11.5, lineHeight: 1.4 }}&gt;&lt;span style={{ color: '#172133', fontWeight: 'bold', minWidth: 56 }}&gt;AI 助手&lt;/span&gt;&lt;span style={{ color: '#6b7075' }}&gt;LangGraph 多 Agent：Personal 对话 → Router 意图识别 → Domain 工具调用&lt;/span&gt;&lt;/div&gt;&#13;&#10;          &lt;div style={{ display: 'flex', gap: 8, alignItems: 'baseline', fontSize: 11.5, lineHeight: 1.4 }}&gt;&lt;span style={{ color: '#172133', fontWeight: 'bold', minWidth: 56 }}&gt;对话报修&lt;/span&gt;&lt;span style={{ color: '#6b7075' }}&gt;Repair Agent · 多轮状态机补全房屋/类型 · 自动派单（技能+在岗+工号）&lt;/span&gt;&lt;/div&gt;&#13;&#10;          &lt;div style={{ display: 'flex', gap: 8, alignItems: 'baseline', fontSize: 11.5, lineHeight: 1.4 }}&gt;&lt;span style={{ color: '#172133', fontWeight: 'bold', minWidth: 56 }}&gt;缴费查询&lt;/span&gt;&lt;span style={{ color: '#6b7075' }}&gt;Fee Agent 查 fee_bills 账单表 · 返回金额/状态/截止日&lt;/span&gt;&lt;/div&gt;&#13;&#10;          &lt;div style={{ display: 'flex', gap: 8, alignItems: 'baseline', fontSize: 11.5, lineHeight: 1.4 }}&gt;&lt;span style={{ color: '#172133', fontWeight: 'bold', minWidth: 56 }}&gt;公告&lt;/span&gt;&lt;span style={{ color: '#6b7075' }}&gt;公告列表 + AI 摘要（LLM 提炼要点）&lt;/span&gt;&lt;/div&gt;&#13;&#10;          &lt;div style={{ display: 'flex', gap: 8, alignItems: 'baseline', fontSize: 11.5, lineHeight: 1.4 }}&gt;&lt;span style={{ color: '#172133', fontWeight: 'bold', minWidth: 56 }}&gt;我的工单&lt;/span&gt;&lt;span style={{ color: '#6b7075' }}&gt;repair_order 状态追踪（创建→派单→接单→完成→关闭）&lt;/span&gt;&lt;/div&gt;&#13;&#10;          &lt;div style={{ display: 'flex', gap: 8, alignItems: 'baseline', fontSize: 11.5, lineHeight: 1.4 }}&gt;&lt;span style={{ color: '#172133', fontWeight: 'bold', minWidth: 56 }}&gt;问题上报&lt;/span&gt;&lt;span style={{ color: '#6b7075' }}&gt;IssueReport 上报 · 附图片 · 物业答复&lt;/span&gt;&lt;/div&gt;&#13;&#10;        &lt;/div&gt;&#13;&#10;      &lt;/div&gt;&#13;&#10;      {/* 物业端 */}&#13;&#10;      &lt;div style={{ background: '#fff', borderRadius: 10, padding: '10px 14px', boxShadow: '0 4px 16px rgba(23,33,51,0.06)' }}&gt;&#13;&#10;        &lt;div style={{ display: 'flex', alignItems: 'center', gap: 8, marginBottom: 6 }}&gt;&#13;&#10;          &lt;span style={{ fontSize: 14, fontWeight: 'bold', color: '#172133' }}&gt;物业端&lt;/span&gt;&#13;&#10;          &lt;span style={{ fontSize: 10.5, color: '#BD9B56', background: 'rgba(189,155,86,0.12)', padding: '2px 7px', borderRadius: 4 }}&gt;ToB · Admin/Staff&lt;/span&gt;&#13;&#10;        &lt;/div&gt;&#13;&#10;        &lt;div style={{ display: 'flex', flexDirection: 'column', gap: 3.5 }}&gt;&#13;&#10;          &lt;div style={{ display: 'flex', gap: 8, alignItems: 'baseline', fontSize: 11.5, lineHeight: 1.4 }}&gt;&lt;span style={{ color: '#172133', fontWeight: 'bold', minWidth: 56 }}&gt;数据看板&lt;/span&gt;&lt;span style={{ color: '#6b7075' }}&gt;统计聚合 API · 今日报修/处理中/已完成实时汇总&lt;/span&gt;&lt;/div&gt;&#13;&#10;          &lt;div style={{ display: 'flex', gap: 8, alignItems: 'baseline', fontSize: 11.5, lineHeight: 1.4 }}&gt;&lt;span style={{ color: '#172133', fontWeight: 'bold', minWidth: 56 }}&gt;工单管理&lt;/span&gt;&lt;span style={{ color: '#6b7075' }}&gt;repair_order CRUD · 状态流转 · 人工派单/改派&lt;/span&gt;&lt;/div&gt;&#13;&#10;          &lt;div style={{ display: 'flex', gap: 8, alignItems: 'baseline', fontSize: 11.5, lineHeight: 1.4 }}&gt;&lt;span style={{ color: '#172133', fontWeight: 'bold', minWidth: 56 }}&gt;用户/房屋&lt;/span&gt;&lt;span style={{ color: '#6b7075' }}&gt;user / house / house_binding 绑定关系管理&lt;/span&gt;&lt;/div&gt;&#13;&#10;          &lt;div style={{ display: 'flex', gap: 8, alignItems: 'baseline', fontSize: 11.5, lineHeight: 1.4 }}&gt;&lt;span style={{ color: '#172133', fontWeight: 'bold', minWidth: 56 }}&gt;公告 AI 生成&lt;/span&gt;&lt;span style={{ color: '#6b7075' }}&gt;Notice Agent + LLM 生成标题/正文/影响范围 · 人工审核发布&lt;/span&gt;&lt;/div&gt;&#13;&#10;          &lt;div style={{ display: 'flex', gap: 8, alignItems: 'baseline', fontSize: 11.5, lineHeight: 1.4 }}&gt;&lt;span style={{ color: '#172133', fontWeight: 'bold', minWidth: 56 }}&gt;巡检管理&lt;/span&gt;&lt;span style={{ color: '#6b7075' }}&gt;摄像头抓拍 → 视觉模型识别异常 → 巡检记录 + 告警&lt;/span&gt;&lt;/div&gt;&#13;&#10;          &lt;div style={{ display: 'flex', gap: 8, alignItems: 'baseline', fontSize: 11.5, lineHeight: 1.4 }}&gt;&lt;span style={{ color: '#172133', fontWeight: 'bold', minWidth: 56 }}&gt;知识缺口审核&lt;/span&gt;&lt;span style={{ color: '#6b7075' }}&gt;knowledge_gap 审核 → 通过自动写入 pgvector 知识库&lt;/span&gt;&lt;/div&gt;&#13;&#10;        &lt;/div&gt;&#13;&#10;      &lt;/div&gt;&#13;&#10;      {/* 维修端 */}&#13;&#10;      &lt;div style={{ background: '#fff', borderRadius: 10, padding: '10px 14px', boxShadow: '0 4px 16px rgba(23,33,51,0.06)' }}&gt;&#13;&#10;        &lt;div style={{ display: 'flex', alignItems: 'center', gap: 8, marginBottom: 6 }}&gt;&#13;&#10;          &lt;span style={{ fontSize: 14, fontWeight: 'bold', color: '#172133' }}&gt;维修端&lt;/span&gt;&#13;&#10;          &lt;span style={{ fontSize: 10.5, color: '#BD9B56', background: 'rgba(189,155,86,0.12)', padding: '2px 7px', borderRadius: 4 }}&gt;ToC · Worker&lt;/span&gt;&#13;&#10;        &lt;/div&gt;&#13;&#10;        &lt;div style={{ display: 'flex', flexDirection: 'column', gap: 3.5 }}&gt;&#13;&#10;          &lt;div style={{ display: 'flex', gap: 8, alignItems: 'baseline', fontSize: 11.5, lineHeight: 1.4 }}&gt;&lt;span style={{ color: '#172133', fontWeight: 'bold', minWidth: 56 }}&gt;任务列表&lt;/span&gt;&lt;span style={{ color: '#6b7075' }}&gt;自动派单后查询「我的待处理」工单&lt;/span&gt;&lt;/div&gt;&#13;&#10;          &lt;div style={{ display: 'flex', gap: 8, alignItems: 'baseline', fontSize: 11.5, lineHeight: 1.4 }}&gt;&lt;span style={{ color: '#172133', fontWeight: 'bold', minWidth: 56 }}&gt;接单/处理/完成&lt;/span&gt;&lt;span style={{ color: '#6b7075' }}&gt;状态机流转 · 每步触发实时通知&lt;/span&gt;&lt;/div&gt;&#13;&#10;          &lt;div style={{ display: 'flex', gap: 8, alignItems: 'baseline', fontSize: 11.5, lineHeight: 1.4 }}&gt;&lt;span style={{ color: '#172133', fontWeight: 'bold', minWidth: 56 }}&gt;消息&lt;/span&gt;&lt;span style={{ color: '#6b7075' }}&gt;事件驱动通知（派单/答复/完成）&lt;/span&gt;&lt;/div&gt;&#13;&#10;          &lt;div style={{ display: 'flex', gap: 8, alignItems: 'baseline', fontSize: 11.5, lineHeight: 1.4 }}&gt;&lt;span style={{ color: '#172133', fontWeight: 'bold', minWidth: 56 }}&gt;巡检任务&lt;/span&gt;&lt;span style={{ color: '#6b7075' }}&gt;巡检记录查看 · 异常处理&lt;/span&gt;&lt;/div&gt;&#13;&#10;        &lt;/div&gt;&#13;&#10;      &lt;/div&gt;&#13;&#10;    &lt;/div&gt;&#13;&#10;    {/* 右栏：自维护 + Demo */}&#13;&#10;    &lt;div style={{ flex: '0 0 285px', display: 'flex', flexDirection: 'column', gap: 10 }}&gt;&#13;&#10;      &lt;div style={{ background: 'linear-gradient(135deg, #172133 0%, #22395E 100%)', borderRadius: 12, padding: '16px 18px', color: '#FBFCFA', display: 'flex', flexDirection: 'column', gap: 9 }}&gt;&#13;&#10;        &lt;div style={{ color: '#BD9B56', fontSize: 12, letterSpacing: '0.2em' }}&gt;系统自维护自更新&lt;/div&gt;&#13;&#10;        &lt;div style={{ display: 'flex', flexDirection: 'column', gap: 6, fontSize: 11.5, lineHeight: 1.45 }}&gt;&#13;&#10;          &lt;div&gt;&lt;span style={{ color: '#BD9B56', fontWeight: 'bold' }}&gt;定时清理&lt;/span&gt;&lt;span style={{ color: 'rgba(251,252,250,0.8)' }}&gt;　APScheduler 每日清过期数据/孤儿文件&lt;/span&gt;&lt;/div&gt;&#13;&#10;          &lt;div&gt;&lt;span style={{ color: '#BD9B56', fontWeight: 'bold' }}&gt;巡检自动化&lt;/span&gt;&lt;span style={{ color: 'rgba(251,252,250,0.8)' }}&gt;　定时抓拍 + 视觉识别异常&lt;/span&gt;&lt;/div&gt;&#13;&#10;          &lt;div&gt;&lt;span style={{ color: '#BD9B56', fontWeight: 'bold' }}&gt;知识自进化&lt;/span&gt;&lt;span style={{ color: 'rgba(251,252,250,0.8)' }}&gt;　反馈→知识缺口→审核→入库&lt;/span&gt;&lt;/div&gt;&#13;&#10;          &lt;div&gt;&lt;span style={{ color: '#BD9B56', fontWeight: 'bold' }}&gt;监控告警&lt;/span&gt;&lt;span style={{ color: 'rgba(251,252,250,0.8)' }}&gt;　Prometheus + Grafana&lt;/span&gt;&lt;/div&gt;&#13;&#10;          &lt;div&gt;&lt;span style={{ color: '#BD9B56', fontWeight: 'bold' }}&gt;持续交付&lt;/span&gt;&lt;span style={{ color: 'rgba(251,252,250,0.8)' }}&gt;　GitHub Actions 自动测试+发布&lt;/span&gt;&lt;/div&gt;&#13;&#10;        &lt;/div&gt;&#13;&#10;        &lt;div style={{ fontSize: 11, color: 'rgba(251,252,250,0.6)', lineHeight: 1.5, paddingTop: 7, borderTop: '1px solid rgba(189,155,86,0.3)' }}&gt;无需人工值守，越用越准、越用越稳&lt;/div&gt;&#13;&#10;      &lt;/div&gt;&#13;&#10;      &lt;div style={{ background: '#fff', borderRadius: 12, padding: '14px 16px', boxShadow: '0 4px 16px rgba(23,33,51,0.06)' }}&gt;&#13;&#10;        &lt;div style={{ color: '#BD9B56', fontSize: 11.5, letterSpacing: '0.2em', marginBottom: 8 }}&gt;ONLINE DEMO&lt;/div&gt;&#13;&#10;        &lt;div style={{ fontSize: 15, fontFamily: 'Inter, sans-serif', color: '#172133', lineHeight: 1.4 }}&gt;http://119.91.236.85&lt;/div&gt;&#13;&#10;        &lt;div style={{ fontSize: 11, color: '#6b7075', lineHeight: 1.6, marginTop: 6 }}&gt;&#13;&#10;          业主 guoyi378 · 物业 mayun420&lt;br/&gt;维修 yangfei423　&lt;span style={{ color: '#BD9B56' }}&gt;密码 123456&lt;/span&gt;&#13;&#10;        &lt;/div&gt;&#13;&#10;        &lt;div style={{ fontSize: 10.5, color: '#a09b8c', marginTop: 6, paddingTop: 6, borderTop: '1px solid rgba(34,57,94,0.1)' }}&gt;GitHub：Xuuuukkk/ai-property-community-agent · MIT&lt;/div&gt;&#13;&#10;      &lt;/div&gt;&#13;&#10;    &lt;/div&gt;&#13;&#10;  &lt;/div&gt;&#13;&#10;  &lt;div style={{ flexShrink: 0, height: 30, display: 'flex', alignItems: 'flex-end', justifyContent: 'space-between' }}&gt;&#13;&#10;    &lt;span style={{ color: '#BD9B56', fontSize: 12, letterSpacing: '0.1em' }}&gt;云溪花园 · 智慧社区&lt;/span&gt;&#13;&#10;    &lt;span style={{ color: '#a09b8c', fontSize: 12 }}&gt;18 / 19&lt;/span&gt;&#13;&#10;  &lt;/div&gt;&#13;&#10;&lt;/Slide&gt;"/>
         <p:cNvGrpSpPr/>
         <p:nvPr/>
       </p:nvGrpSpPr>
@@ -11211,7 +11470,7 @@
       </p:grpSpPr>
       <p:sp>
         <p:nvSpPr>
-          <p:cNvPr id="237" name=""/>
+          <p:cNvPr id="247" name=""/>
           <p:cNvSpPr/>
           <p:nvPr/>
         </p:nvSpPr>
@@ -11235,7 +11494,7 @@
       </p:sp>
       <p:sp>
         <p:nvSpPr>
-          <p:cNvPr id="238" name="" descr="{&quot;isTemplate&quot;:true,&quot;type&quot;:&quot;text&quot;}"/>
+          <p:cNvPr id="248" name="" descr="{&quot;isTemplate&quot;:true,&quot;type&quot;:&quot;text&quot;}"/>
           <p:cNvSpPr txBox="1"/>
           <p:nvPr/>
         </p:nvSpPr>
@@ -11280,7 +11539,7 @@
       </p:sp>
       <p:sp>
         <p:nvSpPr>
-          <p:cNvPr id="239" name="" descr="{&quot;isTemplate&quot;:true,&quot;type&quot;:&quot;text&quot;}"/>
+          <p:cNvPr id="249" name="" descr="{&quot;isTemplate&quot;:true,&quot;type&quot;:&quot;text&quot;}"/>
           <p:cNvSpPr txBox="1"/>
           <p:nvPr/>
         </p:nvSpPr>
@@ -11335,7 +11594,7 @@
       </p:sp>
       <p:sp>
         <p:nvSpPr>
-          <p:cNvPr id="240" name=""/>
+          <p:cNvPr id="250" name=""/>
           <p:cNvSpPr/>
           <p:nvPr/>
         </p:nvSpPr>
@@ -11368,7 +11627,7 @@
       </p:sp>
       <p:sp>
         <p:nvSpPr>
-          <p:cNvPr id="241" name="" descr="{&quot;isTemplate&quot;:true,&quot;type&quot;:&quot;text&quot;}"/>
+          <p:cNvPr id="251" name="" descr="{&quot;isTemplate&quot;:true,&quot;type&quot;:&quot;text&quot;}"/>
           <p:cNvSpPr txBox="1"/>
           <p:nvPr/>
         </p:nvSpPr>
@@ -11403,7 +11662,7 @@
       </p:sp>
       <p:sp>
         <p:nvSpPr>
-          <p:cNvPr id="242" name=""/>
+          <p:cNvPr id="252" name=""/>
           <p:cNvSpPr/>
           <p:nvPr/>
         </p:nvSpPr>
@@ -11431,7 +11690,7 @@
       </p:sp>
       <p:sp>
         <p:nvSpPr>
-          <p:cNvPr id="243" name="" descr="{&quot;isTemplate&quot;:true,&quot;type&quot;:&quot;text&quot;}"/>
+          <p:cNvPr id="253" name="" descr="{&quot;isTemplate&quot;:true,&quot;type&quot;:&quot;text&quot;}"/>
           <p:cNvSpPr txBox="1"/>
           <p:nvPr/>
         </p:nvSpPr>
@@ -11471,7 +11730,7 @@
       </p:sp>
       <p:sp>
         <p:nvSpPr>
-          <p:cNvPr id="244" name="" descr="{&quot;isTemplate&quot;:true,&quot;type&quot;:&quot;text&quot;}"/>
+          <p:cNvPr id="254" name="" descr="{&quot;isTemplate&quot;:true,&quot;type&quot;:&quot;text&quot;}"/>
           <p:cNvSpPr txBox="1"/>
           <p:nvPr/>
         </p:nvSpPr>
@@ -11516,7 +11775,7 @@
       </p:sp>
       <p:sp>
         <p:nvSpPr>
-          <p:cNvPr id="245" name="" descr="{&quot;isTemplate&quot;:true,&quot;type&quot;:&quot;text&quot;}"/>
+          <p:cNvPr id="255" name="" descr="{&quot;isTemplate&quot;:true,&quot;type&quot;:&quot;text&quot;}"/>
           <p:cNvSpPr txBox="1"/>
           <p:nvPr/>
         </p:nvSpPr>
@@ -11641,7 +11900,7 @@
       </p:sp>
       <p:sp>
         <p:nvSpPr>
-          <p:cNvPr id="246" name="" descr="{&quot;isTemplate&quot;:true,&quot;type&quot;:&quot;text&quot;}"/>
+          <p:cNvPr id="256" name="" descr="{&quot;isTemplate&quot;:true,&quot;type&quot;:&quot;text&quot;}"/>
           <p:cNvSpPr txBox="1"/>
           <p:nvPr/>
         </p:nvSpPr>
@@ -11676,7 +11935,7 @@
       </p:sp>
       <p:sp>
         <p:nvSpPr>
-          <p:cNvPr id="247" name="" descr="{&quot;isTemplate&quot;:true,&quot;type&quot;:&quot;text&quot;}"/>
+          <p:cNvPr id="257" name="" descr="{&quot;isTemplate&quot;:true,&quot;type&quot;:&quot;text&quot;}"/>
           <p:cNvSpPr txBox="1"/>
           <p:nvPr/>
         </p:nvSpPr>
@@ -11801,7 +12060,7 @@
       </p:sp>
       <p:sp>
         <p:nvSpPr>
-          <p:cNvPr id="248" name="" descr="{&quot;isTemplate&quot;:true,&quot;type&quot;:&quot;text&quot;}"/>
+          <p:cNvPr id="258" name="" descr="{&quot;isTemplate&quot;:true,&quot;type&quot;:&quot;text&quot;}"/>
           <p:cNvSpPr txBox="1"/>
           <p:nvPr/>
         </p:nvSpPr>
@@ -11836,7 +12095,7 @@
       </p:sp>
       <p:sp>
         <p:nvSpPr>
-          <p:cNvPr id="249" name="" descr="{&quot;isTemplate&quot;:true,&quot;type&quot;:&quot;text&quot;}"/>
+          <p:cNvPr id="259" name="" descr="{&quot;isTemplate&quot;:true,&quot;type&quot;:&quot;text&quot;}"/>
           <p:cNvSpPr txBox="1"/>
           <p:nvPr/>
         </p:nvSpPr>
@@ -11961,7 +12220,7 @@
       </p:sp>
       <p:sp>
         <p:nvSpPr>
-          <p:cNvPr id="250" name="" descr="{&quot;isTemplate&quot;:true,&quot;type&quot;:&quot;text&quot;}"/>
+          <p:cNvPr id="260" name="" descr="{&quot;isTemplate&quot;:true,&quot;type&quot;:&quot;text&quot;}"/>
           <p:cNvSpPr txBox="1"/>
           <p:nvPr/>
         </p:nvSpPr>
@@ -11996,7 +12255,7 @@
       </p:sp>
       <p:sp>
         <p:nvSpPr>
-          <p:cNvPr id="251" name="" descr="{&quot;isTemplate&quot;:true,&quot;type&quot;:&quot;text&quot;}"/>
+          <p:cNvPr id="261" name="" descr="{&quot;isTemplate&quot;:true,&quot;type&quot;:&quot;text&quot;}"/>
           <p:cNvSpPr txBox="1"/>
           <p:nvPr/>
         </p:nvSpPr>
@@ -12071,7 +12330,7 @@
       </p:sp>
       <p:sp>
         <p:nvSpPr>
-          <p:cNvPr id="252" name="" descr="{&quot;isTemplate&quot;:true,&quot;type&quot;:&quot;text&quot;}"/>
+          <p:cNvPr id="262" name="" descr="{&quot;isTemplate&quot;:true,&quot;type&quot;:&quot;text&quot;}"/>
           <p:cNvSpPr txBox="1"/>
           <p:nvPr/>
         </p:nvSpPr>
@@ -12106,7 +12365,7 @@
       </p:sp>
       <p:sp>
         <p:nvSpPr>
-          <p:cNvPr id="253" name="" descr="{&quot;isTemplate&quot;:true,&quot;type&quot;:&quot;text&quot;}"/>
+          <p:cNvPr id="263" name="" descr="{&quot;isTemplate&quot;:true,&quot;type&quot;:&quot;text&quot;}"/>
           <p:cNvSpPr txBox="1"/>
           <p:nvPr/>
         </p:nvSpPr>
@@ -12151,7 +12410,7 @@
       </p:sp>
       <p:sp>
         <p:nvSpPr>
-          <p:cNvPr id="254" name="" descr="{&quot;isTemplate&quot;:true,&quot;type&quot;:&quot;text&quot;}"/>
+          <p:cNvPr id="264" name="" descr="{&quot;isTemplate&quot;:true,&quot;type&quot;:&quot;text&quot;}"/>
           <p:cNvSpPr txBox="1"/>
           <p:nvPr/>
         </p:nvSpPr>
@@ -12186,7 +12445,7 @@
       </p:sp>
       <p:sp>
         <p:nvSpPr>
-          <p:cNvPr id="255" name="" descr="{&quot;isTemplate&quot;:true,&quot;type&quot;:&quot;text&quot;}"/>
+          <p:cNvPr id="265" name="" descr="{&quot;isTemplate&quot;:true,&quot;type&quot;:&quot;text&quot;}"/>
           <p:cNvSpPr txBox="1"/>
           <p:nvPr/>
         </p:nvSpPr>
@@ -12271,7 +12530,7 @@
       </p:sp>
       <p:sp>
         <p:nvSpPr>
-          <p:cNvPr id="256" name=""/>
+          <p:cNvPr id="266" name=""/>
           <p:cNvSpPr/>
           <p:nvPr/>
         </p:nvSpPr>
@@ -12304,7 +12563,7 @@
       </p:sp>
       <p:sp>
         <p:nvSpPr>
-          <p:cNvPr id="257" name="" descr="{&quot;isTemplate&quot;:true,&quot;type&quot;:&quot;text&quot;}"/>
+          <p:cNvPr id="267" name="" descr="{&quot;isTemplate&quot;:true,&quot;type&quot;:&quot;text&quot;}"/>
           <p:cNvSpPr txBox="1"/>
           <p:nvPr/>
         </p:nvSpPr>
@@ -12339,7 +12598,7 @@
       </p:sp>
       <p:sp>
         <p:nvSpPr>
-          <p:cNvPr id="258" name=""/>
+          <p:cNvPr id="268" name=""/>
           <p:cNvSpPr/>
           <p:nvPr/>
         </p:nvSpPr>
@@ -12367,7 +12626,7 @@
       </p:sp>
       <p:sp>
         <p:nvSpPr>
-          <p:cNvPr id="259" name="" descr="{&quot;isTemplate&quot;:true,&quot;type&quot;:&quot;text&quot;}"/>
+          <p:cNvPr id="269" name="" descr="{&quot;isTemplate&quot;:true,&quot;type&quot;:&quot;text&quot;}"/>
           <p:cNvSpPr txBox="1"/>
           <p:nvPr/>
         </p:nvSpPr>
@@ -12407,7 +12666,7 @@
       </p:sp>
       <p:sp>
         <p:nvSpPr>
-          <p:cNvPr id="260" name="" descr="{&quot;isTemplate&quot;:true,&quot;type&quot;:&quot;text&quot;}"/>
+          <p:cNvPr id="270" name="" descr="{&quot;isTemplate&quot;:true,&quot;type&quot;:&quot;text&quot;}"/>
           <p:cNvSpPr txBox="1"/>
           <p:nvPr/>
         </p:nvSpPr>
@@ -12442,7 +12701,7 @@
       </p:sp>
       <p:sp>
         <p:nvSpPr>
-          <p:cNvPr id="261" name="" descr="{&quot;isTemplate&quot;:true,&quot;type&quot;:&quot;text&quot;}"/>
+          <p:cNvPr id="271" name="" descr="{&quot;isTemplate&quot;:true,&quot;type&quot;:&quot;text&quot;}"/>
           <p:cNvSpPr txBox="1"/>
           <p:nvPr/>
         </p:nvSpPr>
@@ -12537,7 +12796,7 @@
       </p:sp>
       <p:sp>
         <p:nvSpPr>
-          <p:cNvPr id="262" name="" descr="{&quot;isTemplate&quot;:true,&quot;type&quot;:&quot;text&quot;}"/>
+          <p:cNvPr id="272" name="" descr="{&quot;isTemplate&quot;:true,&quot;type&quot;:&quot;text&quot;}"/>
           <p:cNvSpPr txBox="1"/>
           <p:nvPr/>
         </p:nvSpPr>
@@ -12572,7 +12831,7 @@
       </p:sp>
       <p:sp>
         <p:nvSpPr>
-          <p:cNvPr id="263" name="" descr="{&quot;isTemplate&quot;:true,&quot;type&quot;:&quot;text&quot;}"/>
+          <p:cNvPr id="273" name="" descr="{&quot;isTemplate&quot;:true,&quot;type&quot;:&quot;text&quot;}"/>
           <p:cNvSpPr txBox="1"/>
           <p:nvPr/>
         </p:nvSpPr>
@@ -12657,7 +12916,7 @@
       </p:sp>
       <p:sp>
         <p:nvSpPr>
-          <p:cNvPr id="264" name="" descr="{&quot;isTemplate&quot;:true,&quot;type&quot;:&quot;text&quot;}"/>
+          <p:cNvPr id="274" name="" descr="{&quot;isTemplate&quot;:true,&quot;type&quot;:&quot;text&quot;}"/>
           <p:cNvSpPr txBox="1"/>
           <p:nvPr/>
         </p:nvSpPr>
@@ -12712,7 +12971,7 @@
       </p:sp>
       <p:sp>
         <p:nvSpPr>
-          <p:cNvPr id="265" name="" descr="{&quot;isTemplate&quot;:true,&quot;type&quot;:&quot;text&quot;}"/>
+          <p:cNvPr id="275" name="" descr="{&quot;isTemplate&quot;:true,&quot;type&quot;:&quot;text&quot;}"/>
           <p:cNvSpPr txBox="1"/>
           <p:nvPr/>
         </p:nvSpPr>
@@ -12757,7 +13016,7 @@
       </p:sp>
       <p:sp>
         <p:nvSpPr>
-          <p:cNvPr id="266" name="" descr="{&quot;isTemplate&quot;:true,&quot;type&quot;:&quot;text&quot;}"/>
+          <p:cNvPr id="276" name="" descr="{&quot;isTemplate&quot;:true,&quot;type&quot;:&quot;text&quot;}"/>
           <p:cNvSpPr txBox="1"/>
           <p:nvPr/>
         </p:nvSpPr>
@@ -12812,7 +13071,7 @@
       </p:sp>
       <p:sp>
         <p:nvSpPr>
-          <p:cNvPr id="267" name="" descr="{&quot;isTemplate&quot;:true,&quot;type&quot;:&quot;text&quot;}"/>
+          <p:cNvPr id="277" name="" descr="{&quot;isTemplate&quot;:true,&quot;type&quot;:&quot;text&quot;}"/>
           <p:cNvSpPr txBox="1"/>
           <p:nvPr/>
         </p:nvSpPr>
@@ -12917,7 +13176,7 @@
       </p:sp>
       <p:sp>
         <p:nvSpPr>
-          <p:cNvPr id="268" name="" descr="{&quot;isTemplate&quot;:true,&quot;type&quot;:&quot;text&quot;}"/>
+          <p:cNvPr id="278" name="" descr="{&quot;isTemplate&quot;:true,&quot;type&quot;:&quot;text&quot;}"/>
           <p:cNvSpPr txBox="1"/>
           <p:nvPr/>
         </p:nvSpPr>
@@ -12952,7 +13211,7 @@
       </p:sp>
       <p:sp>
         <p:nvSpPr>
-          <p:cNvPr id="269" name="" descr="{&quot;isTemplate&quot;:true,&quot;type&quot;:&quot;text&quot;}"/>
+          <p:cNvPr id="279" name="" descr="{&quot;isTemplate&quot;:true,&quot;type&quot;:&quot;text&quot;}"/>
           <p:cNvSpPr txBox="1"/>
           <p:nvPr/>
         </p:nvSpPr>
@@ -13047,7 +13306,7 @@
       </p:sp>
       <p:sp>
         <p:nvSpPr>
-          <p:cNvPr id="270" name="" descr="{&quot;isTemplate&quot;:true,&quot;type&quot;:&quot;text&quot;}"/>
+          <p:cNvPr id="280" name="" descr="{&quot;isTemplate&quot;:true,&quot;type&quot;:&quot;text&quot;}"/>
           <p:cNvSpPr txBox="1"/>
           <p:nvPr/>
         </p:nvSpPr>
@@ -13082,7 +13341,7 @@
       </p:sp>
       <p:sp>
         <p:nvSpPr>
-          <p:cNvPr id="271" name="" descr="{&quot;isTemplate&quot;:true,&quot;type&quot;:&quot;text&quot;}"/>
+          <p:cNvPr id="281" name="" descr="{&quot;isTemplate&quot;:true,&quot;type&quot;:&quot;text&quot;}"/>
           <p:cNvSpPr txBox="1"/>
           <p:nvPr/>
         </p:nvSpPr>
@@ -13167,7 +13426,7 @@
       </p:sp>
       <p:sp>
         <p:nvSpPr>
-          <p:cNvPr id="272" name=""/>
+          <p:cNvPr id="282" name=""/>
           <p:cNvSpPr/>
           <p:nvPr/>
         </p:nvSpPr>
@@ -13200,7 +13459,7 @@
       </p:sp>
       <p:sp>
         <p:nvSpPr>
-          <p:cNvPr id="273" name="" descr="{&quot;isTemplate&quot;:true,&quot;type&quot;:&quot;text&quot;}"/>
+          <p:cNvPr id="283" name="" descr="{&quot;isTemplate&quot;:true,&quot;type&quot;:&quot;text&quot;}"/>
           <p:cNvSpPr txBox="1"/>
           <p:nvPr/>
         </p:nvSpPr>
@@ -13235,7 +13494,7 @@
       </p:sp>
       <p:sp>
         <p:nvSpPr>
-          <p:cNvPr id="274" name=""/>
+          <p:cNvPr id="284" name=""/>
           <p:cNvSpPr/>
           <p:nvPr/>
         </p:nvSpPr>
@@ -13263,7 +13522,7 @@
       </p:sp>
       <p:sp>
         <p:nvSpPr>
-          <p:cNvPr id="275" name="" descr="{&quot;isTemplate&quot;:true,&quot;type&quot;:&quot;text&quot;}"/>
+          <p:cNvPr id="285" name="" descr="{&quot;isTemplate&quot;:true,&quot;type&quot;:&quot;text&quot;}"/>
           <p:cNvSpPr txBox="1"/>
           <p:nvPr/>
         </p:nvSpPr>
@@ -13303,7 +13562,7 @@
       </p:sp>
       <p:sp>
         <p:nvSpPr>
-          <p:cNvPr id="276" name="" descr="{&quot;isTemplate&quot;:true,&quot;type&quot;:&quot;text&quot;}"/>
+          <p:cNvPr id="286" name="" descr="{&quot;isTemplate&quot;:true,&quot;type&quot;:&quot;text&quot;}"/>
           <p:cNvSpPr txBox="1"/>
           <p:nvPr/>
         </p:nvSpPr>
@@ -13338,7 +13597,7 @@
       </p:sp>
       <p:sp>
         <p:nvSpPr>
-          <p:cNvPr id="277" name="" descr="{&quot;isTemplate&quot;:true,&quot;type&quot;:&quot;text&quot;}"/>
+          <p:cNvPr id="287" name="" descr="{&quot;isTemplate&quot;:true,&quot;type&quot;:&quot;text&quot;}"/>
           <p:cNvSpPr txBox="1"/>
           <p:nvPr/>
         </p:nvSpPr>
@@ -13373,7 +13632,7 @@
       </p:sp>
       <p:sp>
         <p:nvSpPr>
-          <p:cNvPr id="278" name="" descr="{&quot;isTemplate&quot;:true,&quot;type&quot;:&quot;text&quot;}"/>
+          <p:cNvPr id="288" name="" descr="{&quot;isTemplate&quot;:true,&quot;type&quot;:&quot;text&quot;}"/>
           <p:cNvSpPr txBox="1"/>
           <p:nvPr/>
         </p:nvSpPr>
@@ -13448,7 +13707,7 @@
       </p:sp>
       <p:sp>
         <p:nvSpPr>
-          <p:cNvPr id="279" name="" descr="{&quot;isTemplate&quot;:true,&quot;type&quot;:&quot;text&quot;}"/>
+          <p:cNvPr id="289" name="" descr="{&quot;isTemplate&quot;:true,&quot;type&quot;:&quot;text&quot;}"/>
           <p:cNvSpPr txBox="1"/>
           <p:nvPr/>
         </p:nvSpPr>
@@ -13503,7 +13762,7 @@
       </p:sp>
       <p:sp>
         <p:nvSpPr>
-          <p:cNvPr id="280" name="" descr="{&quot;isTemplate&quot;:true,&quot;type&quot;:&quot;text&quot;}"/>
+          <p:cNvPr id="290" name="" descr="{&quot;isTemplate&quot;:true,&quot;type&quot;:&quot;text&quot;}"/>
           <p:cNvSpPr txBox="1"/>
           <p:nvPr/>
         </p:nvSpPr>
@@ -13538,7 +13797,7 @@
       </p:sp>
       <p:sp>
         <p:nvSpPr>
-          <p:cNvPr id="281" name="" descr="{&quot;isTemplate&quot;:true,&quot;type&quot;:&quot;text&quot;}"/>
+          <p:cNvPr id="291" name="" descr="{&quot;isTemplate&quot;:true,&quot;type&quot;:&quot;text&quot;}"/>
           <p:cNvSpPr txBox="1"/>
           <p:nvPr/>
         </p:nvSpPr>
@@ -13613,7 +13872,7 @@
       </p:sp>
       <p:sp>
         <p:nvSpPr>
-          <p:cNvPr id="282" name="" descr="{&quot;isTemplate&quot;:true,&quot;type&quot;:&quot;text&quot;}"/>
+          <p:cNvPr id="292" name="" descr="{&quot;isTemplate&quot;:true,&quot;type&quot;:&quot;text&quot;}"/>
           <p:cNvSpPr txBox="1"/>
           <p:nvPr/>
         </p:nvSpPr>
@@ -13648,7 +13907,7 @@
       </p:sp>
       <p:sp>
         <p:nvSpPr>
-          <p:cNvPr id="283" name="" descr="{&quot;isTemplate&quot;:true,&quot;type&quot;:&quot;text&quot;}"/>
+          <p:cNvPr id="293" name="" descr="{&quot;isTemplate&quot;:true,&quot;type&quot;:&quot;text&quot;}"/>
           <p:cNvSpPr txBox="1"/>
           <p:nvPr/>
         </p:nvSpPr>
@@ -13703,7 +13962,7 @@
       </p:sp>
       <p:sp>
         <p:nvSpPr>
-          <p:cNvPr id="284" name=""/>
+          <p:cNvPr id="294" name=""/>
           <p:cNvSpPr/>
           <p:nvPr/>
         </p:nvSpPr>
@@ -13737,7 +13996,7 @@
       </p:sp>
       <p:sp>
         <p:nvSpPr>
-          <p:cNvPr id="285" name="" descr="{&quot;isTemplate&quot;:true,&quot;type&quot;:&quot;text&quot;}"/>
+          <p:cNvPr id="295" name="" descr="{&quot;isTemplate&quot;:true,&quot;type&quot;:&quot;text&quot;}"/>
           <p:cNvSpPr txBox="1"/>
           <p:nvPr/>
         </p:nvSpPr>
@@ -13772,7 +14031,7 @@
       </p:sp>
       <p:sp>
         <p:nvSpPr>
-          <p:cNvPr id="286" name="" descr="{&quot;isTemplate&quot;:true,&quot;type&quot;:&quot;text&quot;}"/>
+          <p:cNvPr id="296" name="" descr="{&quot;isTemplate&quot;:true,&quot;type&quot;:&quot;text&quot;}"/>
           <p:cNvSpPr txBox="1"/>
           <p:nvPr/>
         </p:nvSpPr>
@@ -13807,7 +14066,7 @@
       </p:sp>
       <p:sp>
         <p:nvSpPr>
-          <p:cNvPr id="287" name="" descr="{&quot;isTemplate&quot;:true,&quot;type&quot;:&quot;text&quot;}"/>
+          <p:cNvPr id="297" name="" descr="{&quot;isTemplate&quot;:true,&quot;type&quot;:&quot;text&quot;}"/>
           <p:cNvSpPr txBox="1"/>
           <p:nvPr/>
         </p:nvSpPr>
@@ -13892,7 +14151,7 @@
       </p:sp>
       <p:sp>
         <p:nvSpPr>
-          <p:cNvPr id="288" name="" descr="{&quot;isTemplate&quot;:true,&quot;type&quot;:&quot;text&quot;}"/>
+          <p:cNvPr id="298" name="" descr="{&quot;isTemplate&quot;:true,&quot;type&quot;:&quot;text&quot;}"/>
           <p:cNvSpPr txBox="1"/>
           <p:nvPr/>
         </p:nvSpPr>
@@ -13927,7 +14186,7 @@
       </p:sp>
       <p:sp>
         <p:nvSpPr>
-          <p:cNvPr id="289" name="" descr="{&quot;isTemplate&quot;:true,&quot;type&quot;:&quot;text&quot;}"/>
+          <p:cNvPr id="299" name="" descr="{&quot;isTemplate&quot;:true,&quot;type&quot;:&quot;text&quot;}"/>
           <p:cNvSpPr txBox="1"/>
           <p:nvPr/>
         </p:nvSpPr>
@@ -13988,7 +14247,7 @@
       </p:sp>
       <p:sp>
         <p:nvSpPr>
-          <p:cNvPr id="290" name="" descr="{&quot;isTemplate&quot;:true,&quot;type&quot;:&quot;text&quot;}"/>
+          <p:cNvPr id="300" name="" descr="{&quot;isTemplate&quot;:true,&quot;type&quot;:&quot;text&quot;}"/>
           <p:cNvSpPr txBox="1"/>
           <p:nvPr/>
         </p:nvSpPr>
@@ -14023,7 +14282,7 @@
       </p:sp>
       <p:sp>
         <p:nvSpPr>
-          <p:cNvPr id="291" name="" descr="{&quot;isTemplate&quot;:true,&quot;type&quot;:&quot;text&quot;}"/>
+          <p:cNvPr id="301" name="" descr="{&quot;isTemplate&quot;:true,&quot;type&quot;:&quot;text&quot;}"/>
           <p:cNvSpPr txBox="1"/>
           <p:nvPr/>
         </p:nvSpPr>
@@ -14060,7 +14319,7 @@
       </p:sp>
       <p:sp>
         <p:nvSpPr>
-          <p:cNvPr id="292" name="" descr="{&quot;isTemplate&quot;:true,&quot;type&quot;:&quot;text&quot;}"/>
+          <p:cNvPr id="302" name="" descr="{&quot;isTemplate&quot;:true,&quot;type&quot;:&quot;text&quot;}"/>
           <p:cNvSpPr txBox="1"/>
           <p:nvPr/>
         </p:nvSpPr>
@@ -14095,7 +14354,7 @@
       </p:sp>
       <p:sp>
         <p:nvSpPr>
-          <p:cNvPr id="293" name="" descr="{&quot;isTemplate&quot;:true,&quot;type&quot;:&quot;text&quot;}"/>
+          <p:cNvPr id="303" name="" descr="{&quot;isTemplate&quot;:true,&quot;type&quot;:&quot;text&quot;}"/>
           <p:cNvSpPr txBox="1"/>
           <p:nvPr/>
         </p:nvSpPr>
@@ -14144,7 +14403,7 @@
       </p:sp>
       <p:sp>
         <p:nvSpPr>
-          <p:cNvPr id="294" name="" descr="{&quot;isTemplate&quot;:true,&quot;type&quot;:&quot;text&quot;}"/>
+          <p:cNvPr id="304" name="" descr="{&quot;isTemplate&quot;:true,&quot;type&quot;:&quot;text&quot;}"/>
           <p:cNvSpPr txBox="1"/>
           <p:nvPr/>
         </p:nvSpPr>
@@ -14179,7 +14438,7 @@
       </p:sp>
       <p:sp>
         <p:nvSpPr>
-          <p:cNvPr id="295" name="" descr="{&quot;isTemplate&quot;:true,&quot;type&quot;:&quot;text&quot;}"/>
+          <p:cNvPr id="305" name="" descr="{&quot;isTemplate&quot;:true,&quot;type&quot;:&quot;text&quot;}"/>
           <p:cNvSpPr txBox="1"/>
           <p:nvPr/>
         </p:nvSpPr>
@@ -14264,7 +14523,7 @@
       </p:sp>
       <p:sp>
         <p:nvSpPr>
-          <p:cNvPr id="296" name=""/>
+          <p:cNvPr id="306" name=""/>
           <p:cNvSpPr/>
           <p:nvPr/>
         </p:nvSpPr>
@@ -14306,7 +14565,7 @@
       </p:sp>
       <p:sp>
         <p:nvSpPr>
-          <p:cNvPr id="297" name="" descr="{&quot;isTemplate&quot;:true,&quot;type&quot;:&quot;text&quot;}"/>
+          <p:cNvPr id="307" name="" descr="{&quot;isTemplate&quot;:true,&quot;type&quot;:&quot;text&quot;}"/>
           <p:cNvSpPr txBox="1"/>
           <p:nvPr/>
         </p:nvSpPr>
@@ -14343,7 +14602,7 @@
       </p:sp>
       <p:sp>
         <p:nvSpPr>
-          <p:cNvPr id="298" name=""/>
+          <p:cNvPr id="308" name=""/>
           <p:cNvSpPr/>
           <p:nvPr/>
         </p:nvSpPr>
@@ -14376,7 +14635,7 @@
       </p:sp>
       <p:sp>
         <p:nvSpPr>
-          <p:cNvPr id="299" name="" descr="{&quot;isTemplate&quot;:true,&quot;type&quot;:&quot;text&quot;}"/>
+          <p:cNvPr id="309" name="" descr="{&quot;isTemplate&quot;:true,&quot;type&quot;:&quot;text&quot;}"/>
           <p:cNvSpPr txBox="1"/>
           <p:nvPr/>
         </p:nvSpPr>
@@ -14411,7 +14670,7 @@
       </p:sp>
       <p:sp>
         <p:nvSpPr>
-          <p:cNvPr id="300" name="" descr="{&quot;isTemplate&quot;:true,&quot;type&quot;:&quot;text&quot;}"/>
+          <p:cNvPr id="310" name="" descr="{&quot;isTemplate&quot;:true,&quot;type&quot;:&quot;text&quot;}"/>
           <p:cNvSpPr txBox="1"/>
           <p:nvPr/>
         </p:nvSpPr>
@@ -14446,7 +14705,7 @@
       </p:sp>
       <p:sp>
         <p:nvSpPr>
-          <p:cNvPr id="301" name="" descr="{&quot;isTemplate&quot;:true,&quot;type&quot;:&quot;text&quot;}"/>
+          <p:cNvPr id="311" name="" descr="{&quot;isTemplate&quot;:true,&quot;type&quot;:&quot;text&quot;}"/>
           <p:cNvSpPr txBox="1"/>
           <p:nvPr/>
         </p:nvSpPr>
@@ -14467,7 +14726,7 @@
       </p:sp>
       <p:sp>
         <p:nvSpPr>
-          <p:cNvPr id="302" name="" descr="{&quot;isTemplate&quot;:true,&quot;type&quot;:&quot;text&quot;}"/>
+          <p:cNvPr id="312" name="" descr="{&quot;isTemplate&quot;:true,&quot;type&quot;:&quot;text&quot;}"/>
           <p:cNvSpPr txBox="1"/>
           <p:nvPr/>
         </p:nvSpPr>
@@ -14512,7 +14771,7 @@
       </p:sp>
       <p:sp>
         <p:nvSpPr>
-          <p:cNvPr id="303" name=""/>
+          <p:cNvPr id="313" name=""/>
           <p:cNvSpPr/>
           <p:nvPr/>
         </p:nvSpPr>
@@ -14554,7 +14813,7 @@
       </p:sp>
       <p:sp>
         <p:nvSpPr>
-          <p:cNvPr id="304" name="" descr="{&quot;isTemplate&quot;:true,&quot;type&quot;:&quot;text&quot;}"/>
+          <p:cNvPr id="314" name="" descr="{&quot;isTemplate&quot;:true,&quot;type&quot;:&quot;text&quot;}"/>
           <p:cNvSpPr txBox="1"/>
           <p:nvPr/>
         </p:nvSpPr>
@@ -14611,7 +14870,7 @@
       </p:sp>
       <p:sp>
         <p:nvSpPr>
-          <p:cNvPr id="305" name="" descr="{&quot;isTemplate&quot;:true,&quot;type&quot;:&quot;text&quot;}"/>
+          <p:cNvPr id="315" name="" descr="{&quot;isTemplate&quot;:true,&quot;type&quot;:&quot;text&quot;}"/>
           <p:cNvSpPr txBox="1"/>
           <p:nvPr/>
         </p:nvSpPr>
@@ -14666,7 +14925,7 @@
       </p:sp>
       <p:sp>
         <p:nvSpPr>
-          <p:cNvPr id="306" name="" descr="{&quot;isTemplate&quot;:true,&quot;type&quot;:&quot;text&quot;}"/>
+          <p:cNvPr id="316" name="" descr="{&quot;isTemplate&quot;:true,&quot;type&quot;:&quot;text&quot;}"/>
           <p:cNvSpPr txBox="1"/>
           <p:nvPr/>
         </p:nvSpPr>
@@ -14709,7 +14968,7 @@
   <p:cSld>
     <p:spTree>
       <p:nvGrpSpPr>
-        <p:cNvPr id="307" name="" descr="&lt;Slide style={{ width: '1280px', height: '720px', background: 'linear-gradient(135deg, #172133 0%, #22395E 100%)', position: 'relative' }}&gt;&#13;&#10;  &lt;div style={{ position: 'absolute', inset: 0, display: 'flex', flexDirection: 'column', alignItems: 'center', justifyContent: 'center', color: '#FBFCFA' }}&gt;&#13;&#10;    &lt;div style={{ color: '#BD9B56', fontSize: 26, marginBottom: 22, letterSpacing: '0.4em' }}&gt;◆&lt;/div&gt;&#13;&#10;    &lt;h1 style={{ fontSize: 56, fontWeight: 'bold', margin: 0, color: '#FBFCFA', letterSpacing: '0.12em' }}&gt;感谢聆听&lt;/h1&gt;&#13;&#10;    &lt;div style={{ width: 80, height: 3, background: '#BD9B56', marginTop: 26, marginBottom: 26 }} /&gt;&#13;&#10;    &lt;p style={{ fontSize: 20, color: 'rgba(189,155,86,0.9)', margin: 0, letterSpacing: '0.15em' }}&gt;让 AI 真正走进社区&lt;/p&gt;&#13;&#10;    &lt;div style={{ marginTop: 56, padding: '20px 40px', background: 'rgba(189,155,86,0.08)', border: '1px solid rgba(189,155,86,0.3)', borderRadius: 8, textAlign: 'center' }}&gt;&#13;&#10;      &lt;div style={{ fontSize: 12, color: '#BD9B56', letterSpacing: '0.25em', marginBottom: 10 }}&gt;ONLINE DEMO&lt;/div&gt;&#13;&#10;      &lt;div style={{ fontSize: 17, color: '#FBFCFA', fontFamily: 'Inter, sans-serif', marginBottom: 4 }}&gt;http://119.91.236.85&lt;/div&gt;&#13;&#10;      &lt;div style={{ fontSize: 12, color: 'rgba(251,252,250,0.7)' }}&gt;业主 guoyi378 · 物业 mayun420 · 维修 yangfei423（密码 123456）&lt;/div&gt;&#13;&#10;    &lt;/div&gt;&#13;&#10;  &lt;/div&gt;&#13;&#10;  &lt;div style={{ position: 'absolute', left: 64, bottom: 28, color: '#BD9B56', fontSize: 13, letterSpacing: '0.12em' }}&gt;云溪花园 · 智慧社区&lt;/div&gt;&#13;&#10;  &lt;div style={{ position: 'absolute', right: 28, bottom: 28, color: 'rgba(189,155,86,0.75)', fontSize: 13 }}&gt;19 / 19&lt;/div&gt;&#13;&#10;&lt;/Slide&gt;"/>
+        <p:cNvPr id="317" name="" descr="&lt;Slide style={{ width: '1280px', height: '720px', background: 'linear-gradient(135deg, #172133 0%, #22395E 100%)', position: 'relative' }}&gt;&#13;&#10;  &lt;div style={{ position: 'absolute', inset: 0, display: 'flex', flexDirection: 'column', alignItems: 'center', justifyContent: 'center', color: '#FBFCFA' }}&gt;&#13;&#10;    &lt;div style={{ color: '#BD9B56', fontSize: 26, marginBottom: 22, letterSpacing: '0.4em' }}&gt;◆&lt;/div&gt;&#13;&#10;    &lt;h1 style={{ fontSize: 56, fontWeight: 'bold', margin: 0, color: '#FBFCFA', letterSpacing: '0.12em' }}&gt;感谢聆听&lt;/h1&gt;&#13;&#10;    &lt;div style={{ width: 80, height: 3, background: '#BD9B56', marginTop: 26, marginBottom: 26 }} /&gt;&#13;&#10;    &lt;p style={{ fontSize: 20, color: 'rgba(189,155,86,0.9)', margin: 0, letterSpacing: '0.15em' }}&gt;让 AI 真正走进社区&lt;/p&gt;&#13;&#10;    &lt;div style={{ marginTop: 56, padding: '20px 40px', background: 'rgba(189,155,86,0.08)', border: '1px solid rgba(189,155,86,0.3)', borderRadius: 8, textAlign: 'center' }}&gt;&#13;&#10;      &lt;div style={{ fontSize: 12, color: '#BD9B56', letterSpacing: '0.25em', marginBottom: 10 }}&gt;ONLINE DEMO&lt;/div&gt;&#13;&#10;      &lt;div style={{ fontSize: 17, color: '#FBFCFA', fontFamily: 'Inter, sans-serif', marginBottom: 4 }}&gt;http://119.91.236.85&lt;/div&gt;&#13;&#10;      &lt;div style={{ fontSize: 12, color: 'rgba(251,252,250,0.7)' }}&gt;业主 guoyi378 · 物业 mayun420 · 维修 yangfei423（密码 123456）&lt;/div&gt;&#13;&#10;    &lt;/div&gt;&#13;&#10;  &lt;/div&gt;&#13;&#10;  &lt;div style={{ position: 'absolute', left: 64, bottom: 28, color: '#BD9B56', fontSize: 13, letterSpacing: '0.12em' }}&gt;云溪花园 · 智慧社区&lt;/div&gt;&#13;&#10;  &lt;div style={{ position: 'absolute', right: 28, bottom: 28, color: 'rgba(189,155,86,0.75)', fontSize: 13 }}&gt;19 / 19&lt;/div&gt;&#13;&#10;&lt;/Slide&gt;"/>
         <p:cNvGrpSpPr/>
         <p:nvPr/>
       </p:nvGrpSpPr>
@@ -14723,7 +14982,7 @@
       </p:grpSpPr>
       <p:sp>
         <p:nvSpPr>
-          <p:cNvPr id="308" name=""/>
+          <p:cNvPr id="318" name=""/>
           <p:cNvSpPr/>
           <p:nvPr/>
         </p:nvSpPr>
@@ -14755,7 +15014,7 @@
       </p:sp>
       <p:sp>
         <p:nvSpPr>
-          <p:cNvPr id="309" name="" descr="{&quot;isTemplate&quot;:true,&quot;type&quot;:&quot;text&quot;}"/>
+          <p:cNvPr id="319" name="" descr="{&quot;isTemplate&quot;:true,&quot;type&quot;:&quot;text&quot;}"/>
           <p:cNvSpPr txBox="1"/>
           <p:nvPr/>
         </p:nvSpPr>
@@ -14790,7 +15049,7 @@
       </p:sp>
       <p:sp>
         <p:nvSpPr>
-          <p:cNvPr id="310" name="" descr="{&quot;isTemplate&quot;:true,&quot;type&quot;:&quot;text&quot;}"/>
+          <p:cNvPr id="320" name="" descr="{&quot;isTemplate&quot;:true,&quot;type&quot;:&quot;text&quot;}"/>
           <p:cNvSpPr txBox="1"/>
           <p:nvPr/>
         </p:nvSpPr>
@@ -14825,7 +15084,7 @@
       </p:sp>
       <p:sp>
         <p:nvSpPr>
-          <p:cNvPr id="311" name=""/>
+          <p:cNvPr id="321" name=""/>
           <p:cNvSpPr/>
           <p:nvPr/>
         </p:nvSpPr>
@@ -14849,7 +15108,7 @@
       </p:sp>
       <p:sp>
         <p:nvSpPr>
-          <p:cNvPr id="312" name="" descr="{&quot;isTemplate&quot;:true,&quot;type&quot;:&quot;text&quot;}"/>
+          <p:cNvPr id="322" name="" descr="{&quot;isTemplate&quot;:true,&quot;type&quot;:&quot;text&quot;}"/>
           <p:cNvSpPr txBox="1"/>
           <p:nvPr/>
         </p:nvSpPr>
@@ -14910,7 +15169,7 @@
       </p:sp>
       <p:sp>
         <p:nvSpPr>
-          <p:cNvPr id="313" name=""/>
+          <p:cNvPr id="323" name=""/>
           <p:cNvSpPr/>
           <p:nvPr/>
         </p:nvSpPr>
@@ -14945,7 +15204,7 @@
       </p:sp>
       <p:sp>
         <p:nvSpPr>
-          <p:cNvPr id="314" name="" descr="{&quot;isTemplate&quot;:true,&quot;type&quot;:&quot;text&quot;}"/>
+          <p:cNvPr id="324" name="" descr="{&quot;isTemplate&quot;:true,&quot;type&quot;:&quot;text&quot;}"/>
           <p:cNvSpPr txBox="1"/>
           <p:nvPr/>
         </p:nvSpPr>
@@ -14980,7 +15239,7 @@
       </p:sp>
       <p:sp>
         <p:nvSpPr>
-          <p:cNvPr id="315" name="" descr="{&quot;isTemplate&quot;:true,&quot;type&quot;:&quot;text&quot;}"/>
+          <p:cNvPr id="325" name="" descr="{&quot;isTemplate&quot;:true,&quot;type&quot;:&quot;text&quot;}"/>
           <p:cNvSpPr txBox="1"/>
           <p:nvPr/>
         </p:nvSpPr>
@@ -15015,7 +15274,7 @@
       </p:sp>
       <p:sp>
         <p:nvSpPr>
-          <p:cNvPr id="316" name="" descr="{&quot;isTemplate&quot;:true,&quot;type&quot;:&quot;text&quot;}"/>
+          <p:cNvPr id="326" name="" descr="{&quot;isTemplate&quot;:true,&quot;type&quot;:&quot;text&quot;}"/>
           <p:cNvSpPr txBox="1"/>
           <p:nvPr/>
         </p:nvSpPr>
@@ -15148,7 +15407,7 @@
       </p:sp>
       <p:sp>
         <p:nvSpPr>
-          <p:cNvPr id="317" name="" descr="{&quot;isTemplate&quot;:true,&quot;type&quot;:&quot;text&quot;}"/>
+          <p:cNvPr id="327" name="" descr="{&quot;isTemplate&quot;:true,&quot;type&quot;:&quot;text&quot;}"/>
           <p:cNvSpPr txBox="1"/>
           <p:nvPr/>
         </p:nvSpPr>
@@ -15203,7 +15462,7 @@
       </p:sp>
       <p:sp>
         <p:nvSpPr>
-          <p:cNvPr id="318" name="" descr="{&quot;isTemplate&quot;:true,&quot;type&quot;:&quot;text&quot;}"/>
+          <p:cNvPr id="328" name="" descr="{&quot;isTemplate&quot;:true,&quot;type&quot;:&quot;text&quot;}"/>
           <p:cNvSpPr txBox="1"/>
           <p:nvPr/>
         </p:nvSpPr>
@@ -15248,7 +15507,7 @@
   <p:cSld>
     <p:spTree>
       <p:nvGrpSpPr>
-        <p:cNvPr id="319" name="" descr="&lt;Slide style={{ width: '1280px', height: '720px', background: '#FBFCFA', position: 'relative', padding: '40px 64px', boxSizing: 'border-box', display: 'flex', flexDirection: 'column' }}&gt;&#13;&#10;  &lt;div style={{ flexShrink: 0 }}&gt;&#13;&#10;    &lt;div style={{ color: '#BD9B56', fontSize: 14, letterSpacing: '0.3em', marginBottom: 10 }}&gt;CONTENTS&lt;/div&gt;&#13;&#10;    &lt;h2 style={{ fontSize: 34, fontWeight: 'bold', color: '#172133', margin: 0 }}&gt;目录&lt;/h2&gt;&#13;&#10;    &lt;div style={{ width: 64, height: 3, background: '#BD9B56', marginTop: 16 }} /&gt;&#13;&#10;  &lt;/div&gt;&#13;&#10;  &lt;div style={{ flex: 1, display: 'flex', alignItems: 'center' }}&gt;&#13;&#10;    &lt;div style={{ width: '100%', display: 'flex', flexDirection: 'column', gap: 20 }}&gt;&#13;&#10;      &lt;div style={{ display: 'flex', alignItems: 'center', gap: 28, paddingBottom: 18, borderBottom: '1px solid rgba(34,57,94,0.12)' }}&gt;&#13;&#10;        &lt;span style={{ color: '#BD9B56', fontSize: 40, fontWeight: 'bold', lineHeight: 1, minWidth: 72, fontFamily: 'Inter, sans-serif' }}&gt;01&lt;/span&gt;&#13;&#10;        &lt;div style={{ flex: 1 }}&gt;&#13;&#10;          &lt;div style={{ fontSize: 22, fontWeight: 'bold', color: '#172133' }}&gt;项目背景与规模&lt;/div&gt;&#13;&#10;          &lt;div style={{ fontSize: 14, color: '#6b7075', marginTop: 6 }}&gt;传统物业痛点 · 虚拟社区「云溪花园」数据资产&lt;/div&gt;&#13;&#10;        &lt;/div&gt;&#13;&#10;      &lt;/div&gt;&#13;&#10;      &lt;div style={{ display: 'flex', alignItems: 'center', gap: 28, paddingBottom: 18, borderBottom: '1px solid rgba(34,57,94,0.12)' }}&gt;&#13;&#10;        &lt;span style={{ color: '#BD9B56', fontSize: 40, fontWeight: 'bold', lineHeight: 1, minWidth: 72, fontFamily: 'Inter, sans-serif' }}&gt;02&lt;/span&gt;&#13;&#10;        &lt;div style={{ flex: 1 }}&gt;&#13;&#10;          &lt;div style={{ fontSize: 22, fontWeight: 'bold', color: '#172133' }}&gt;技术构建过程&lt;/div&gt;&#13;&#10;          &lt;div style={{ fontSize: 14, color: '#6b7075', marginTop: 6 }}&gt;数据库设计 → 后端 → 前端 → AI Agent → RAG 知识库&lt;/div&gt;&#13;&#10;        &lt;/div&gt;&#13;&#10;      &lt;/div&gt;&#13;&#10;      &lt;div style={{ display: 'flex', alignItems: 'center', gap: 28, paddingBottom: 18, borderBottom: '1px solid rgba(34,57,94,0.12)' }}&gt;&#13;&#10;        &lt;span style={{ color: '#BD9B56', fontSize: 40, fontWeight: 'bold', lineHeight: 1, minWidth: 72, fontFamily: 'Inter, sans-serif' }}&gt;03&lt;/span&gt;&#13;&#10;        &lt;div style={{ flex: 1 }}&gt;&#13;&#10;          &lt;div style={{ fontSize: 22, fontWeight: 'bold', color: '#172133' }}&gt;成果与验证&lt;/div&gt;&#13;&#10;          &lt;div style={{ fontSize: 14, color: '#6b7075', marginTop: 6 }}&gt;三条功能闭环 · 量化评估指标&lt;/div&gt;&#13;&#10;        &lt;/div&gt;&#13;&#10;      &lt;/div&gt;&#13;&#10;      &lt;div style={{ display: 'flex', alignItems: 'center', gap: 28 }}&gt;&#13;&#10;        &lt;span style={{ color: '#BD9B56', fontSize: 40, fontWeight: 'bold', lineHeight: 1, minWidth: 72, fontFamily: 'Inter, sans-serif' }}&gt;04&lt;/span&gt;&#13;&#10;        &lt;div style={{ flex: 1 }}&gt;&#13;&#10;          &lt;div style={{ fontSize: 22, fontWeight: 'bold', color: '#172133' }}&gt;总结与展望&lt;/div&gt;&#13;&#10;          &lt;div style={{ fontSize: 14, color: '#6b7075', marginTop: 6 }}&gt;项目价值 · 在线演示入口&lt;/div&gt;&#13;&#10;        &lt;/div&gt;&#13;&#10;      &lt;/div&gt;&#13;&#10;    &lt;/div&gt;&#13;&#10;  &lt;/div&gt;&#13;&#10;  &lt;div style={{ flexShrink: 0, height: 44, display: 'flex', alignItems: 'flex-end', justifyContent: 'space-between' }}&gt;&#13;&#10;    &lt;span style={{ color: '#BD9B56', fontSize: 12, letterSpacing: '0.1em' }}&gt;云溪花园 · 智慧社区&lt;/span&gt;&#13;&#10;    &lt;span style={{ color: '#a09b8c', fontSize: 12 }}&gt;02 / 19&lt;/span&gt;&#13;&#10;  &lt;/div&gt;&#13;&#10;&lt;/Slide&gt;"/>
+        <p:cNvPr id="329" name="" descr="&lt;Slide style={{ width: '1280px', height: '720px', background: '#FBFCFA', position: 'relative', padding: '40px 64px', boxSizing: 'border-box', display: 'flex', flexDirection: 'column' }}&gt;&#13;&#10;  &lt;div style={{ flexShrink: 0 }}&gt;&#13;&#10;    &lt;div style={{ color: '#BD9B56', fontSize: 14, letterSpacing: '0.3em', marginBottom: 10 }}&gt;CONTENTS&lt;/div&gt;&#13;&#10;    &lt;h2 style={{ fontSize: 34, fontWeight: 'bold', color: '#172133', margin: 0 }}&gt;目录&lt;/h2&gt;&#13;&#10;    &lt;div style={{ width: 64, height: 3, background: '#BD9B56', marginTop: 16 }} /&gt;&#13;&#10;  &lt;/div&gt;&#13;&#10;  &lt;div style={{ flex: 1, display: 'flex', alignItems: 'center' }}&gt;&#13;&#10;    &lt;div style={{ width: '100%', display: 'flex', flexDirection: 'column', gap: 20 }}&gt;&#13;&#10;      &lt;div style={{ display: 'flex', alignItems: 'center', gap: 28, paddingBottom: 18, borderBottom: '1px solid rgba(34,57,94,0.12)' }}&gt;&#13;&#10;        &lt;span style={{ color: '#BD9B56', fontSize: 40, fontWeight: 'bold', lineHeight: 1, minWidth: 72, fontFamily: 'Inter, sans-serif' }}&gt;01&lt;/span&gt;&#13;&#10;        &lt;div style={{ flex: 1 }}&gt;&#13;&#10;          &lt;div style={{ fontSize: 22, fontWeight: 'bold', color: '#172133' }}&gt;项目背景与规模&lt;/div&gt;&#13;&#10;          &lt;div style={{ fontSize: 14, color: '#6b7075', marginTop: 6 }}&gt;传统物业痛点 · 虚拟社区「云溪花园」数据资产&lt;/div&gt;&#13;&#10;        &lt;/div&gt;&#13;&#10;      &lt;/div&gt;&#13;&#10;      &lt;div style={{ display: 'flex', alignItems: 'center', gap: 28, paddingBottom: 18, borderBottom: '1px solid rgba(34,57,94,0.12)' }}&gt;&#13;&#10;        &lt;span style={{ color: '#BD9B56', fontSize: 40, fontWeight: 'bold', lineHeight: 1, minWidth: 72, fontFamily: 'Inter, sans-serif' }}&gt;02&lt;/span&gt;&#13;&#10;        &lt;div style={{ flex: 1 }}&gt;&#13;&#10;          &lt;div style={{ fontSize: 22, fontWeight: 'bold', color: '#172133' }}&gt;技术构建过程&lt;/div&gt;&#13;&#10;          &lt;div style={{ fontSize: 14, color: '#6b7075', marginTop: 6 }}&gt;数据库设计 → 后端 → 前端 → AI Agent → RAG 知识库&lt;/div&gt;&#13;&#10;        &lt;/div&gt;&#13;&#10;      &lt;/div&gt;&#13;&#10;      &lt;div style={{ display: 'flex', alignItems: 'center', gap: 28, paddingBottom: 18, borderBottom: '1px solid rgba(34,57,94,0.12)' }}&gt;&#13;&#10;        &lt;span style={{ color: '#BD9B56', fontSize: 40, fontWeight: 'bold', lineHeight: 1, minWidth: 72, fontFamily: 'Inter, sans-serif' }}&gt;03&lt;/span&gt;&#13;&#10;        &lt;div style={{ flex: 1 }}&gt;&#13;&#10;          &lt;div style={{ fontSize: 22, fontWeight: 'bold', color: '#172133' }}&gt;成果与验证&lt;/div&gt;&#13;&#10;          &lt;div style={{ fontSize: 14, color: '#6b7075', marginTop: 6 }}&gt;三条功能闭环 · 量化评估指标&lt;/div&gt;&#13;&#10;        &lt;/div&gt;&#13;&#10;      &lt;/div&gt;&#13;&#10;      &lt;div style={{ display: 'flex', alignItems: 'center', gap: 28 }}&gt;&#13;&#10;        &lt;span style={{ color: '#BD9B56', fontSize: 40, fontWeight: 'bold', lineHeight: 1, minWidth: 72, fontFamily: 'Inter, sans-serif' }}&gt;04&lt;/span&gt;&#13;&#10;        &lt;div style={{ flex: 1 }}&gt;&#13;&#10;          &lt;div style={{ fontSize: 22, fontWeight: 'bold', color: '#172133' }}&gt;总结与展望&lt;/div&gt;&#13;&#10;          &lt;div style={{ fontSize: 14, color: '#6b7075', marginTop: 6 }}&gt;项目价值 · 在线演示入口&lt;/div&gt;&#13;&#10;        &lt;/div&gt;&#13;&#10;      &lt;/div&gt;&#13;&#10;    &lt;/div&gt;&#13;&#10;  &lt;/div&gt;&#13;&#10;  &lt;div style={{ flexShrink: 0, height: 44, display: 'flex', alignItems: 'flex-end', justifyContent: 'space-between' }}&gt;&#13;&#10;    &lt;span style={{ color: '#BD9B56', fontSize: 12, letterSpacing: '0.1em' }}&gt;云溪花园 · 智慧社区&lt;/span&gt;&#13;&#10;    &lt;span style={{ color: '#a09b8c', fontSize: 12 }}&gt;02 / 19&lt;/span&gt;&#13;&#10;  &lt;/div&gt;&#13;&#10;&lt;/Slide&gt;"/>
         <p:cNvGrpSpPr/>
         <p:nvPr/>
       </p:nvGrpSpPr>
@@ -15262,7 +15521,7 @@
       </p:grpSpPr>
       <p:sp>
         <p:nvSpPr>
-          <p:cNvPr id="320" name=""/>
+          <p:cNvPr id="330" name=""/>
           <p:cNvSpPr/>
           <p:nvPr/>
         </p:nvSpPr>
@@ -15286,7 +15545,7 @@
       </p:sp>
       <p:sp>
         <p:nvSpPr>
-          <p:cNvPr id="321" name="" descr="{&quot;isTemplate&quot;:true,&quot;type&quot;:&quot;text&quot;}"/>
+          <p:cNvPr id="331" name="" descr="{&quot;isTemplate&quot;:true,&quot;type&quot;:&quot;text&quot;}"/>
           <p:cNvSpPr txBox="1"/>
           <p:nvPr/>
         </p:nvSpPr>
@@ -15321,7 +15580,7 @@
       </p:sp>
       <p:sp>
         <p:nvSpPr>
-          <p:cNvPr id="322" name="" descr="{&quot;isTemplate&quot;:true,&quot;type&quot;:&quot;text&quot;}"/>
+          <p:cNvPr id="332" name="" descr="{&quot;isTemplate&quot;:true,&quot;type&quot;:&quot;text&quot;}"/>
           <p:cNvSpPr txBox="1"/>
           <p:nvPr/>
         </p:nvSpPr>
@@ -15356,7 +15615,7 @@
       </p:sp>
       <p:sp>
         <p:nvSpPr>
-          <p:cNvPr id="323" name=""/>
+          <p:cNvPr id="333" name=""/>
           <p:cNvSpPr/>
           <p:nvPr/>
         </p:nvSpPr>
@@ -15380,7 +15639,7 @@
       </p:sp>
       <p:sp>
         <p:nvSpPr>
-          <p:cNvPr id="324" name=""/>
+          <p:cNvPr id="334" name=""/>
           <p:cNvSpPr/>
           <p:nvPr/>
         </p:nvSpPr>
@@ -15422,7 +15681,7 @@
       </p:sp>
       <p:sp>
         <p:nvSpPr>
-          <p:cNvPr id="325" name="" descr="{&quot;isTemplate&quot;:true,&quot;type&quot;:&quot;text&quot;}"/>
+          <p:cNvPr id="335" name="" descr="{&quot;isTemplate&quot;:true,&quot;type&quot;:&quot;text&quot;}"/>
           <p:cNvSpPr txBox="1"/>
           <p:nvPr/>
         </p:nvSpPr>
@@ -15457,7 +15716,7 @@
       </p:sp>
       <p:sp>
         <p:nvSpPr>
-          <p:cNvPr id="326" name="" descr="{&quot;isTemplate&quot;:true,&quot;type&quot;:&quot;text&quot;}"/>
+          <p:cNvPr id="336" name="" descr="{&quot;isTemplate&quot;:true,&quot;type&quot;:&quot;text&quot;}"/>
           <p:cNvSpPr txBox="1"/>
           <p:nvPr/>
         </p:nvSpPr>
@@ -15492,7 +15751,7 @@
       </p:sp>
       <p:sp>
         <p:nvSpPr>
-          <p:cNvPr id="327" name="" descr="{&quot;isTemplate&quot;:true,&quot;type&quot;:&quot;text&quot;}"/>
+          <p:cNvPr id="337" name="" descr="{&quot;isTemplate&quot;:true,&quot;type&quot;:&quot;text&quot;}"/>
           <p:cNvSpPr txBox="1"/>
           <p:nvPr/>
         </p:nvSpPr>
@@ -15547,7 +15806,7 @@
       </p:sp>
       <p:sp>
         <p:nvSpPr>
-          <p:cNvPr id="328" name=""/>
+          <p:cNvPr id="338" name=""/>
           <p:cNvSpPr/>
           <p:nvPr/>
         </p:nvSpPr>
@@ -15589,7 +15848,7 @@
       </p:sp>
       <p:sp>
         <p:nvSpPr>
-          <p:cNvPr id="329" name="" descr="{&quot;isTemplate&quot;:true,&quot;type&quot;:&quot;text&quot;}"/>
+          <p:cNvPr id="339" name="" descr="{&quot;isTemplate&quot;:true,&quot;type&quot;:&quot;text&quot;}"/>
           <p:cNvSpPr txBox="1"/>
           <p:nvPr/>
         </p:nvSpPr>
@@ -15624,7 +15883,7 @@
       </p:sp>
       <p:sp>
         <p:nvSpPr>
-          <p:cNvPr id="330" name="" descr="{&quot;isTemplate&quot;:true,&quot;type&quot;:&quot;text&quot;}"/>
+          <p:cNvPr id="340" name="" descr="{&quot;isTemplate&quot;:true,&quot;type&quot;:&quot;text&quot;}"/>
           <p:cNvSpPr txBox="1"/>
           <p:nvPr/>
         </p:nvSpPr>
@@ -15659,7 +15918,7 @@
       </p:sp>
       <p:sp>
         <p:nvSpPr>
-          <p:cNvPr id="331" name="" descr="{&quot;isTemplate&quot;:true,&quot;type&quot;:&quot;text&quot;}"/>
+          <p:cNvPr id="341" name="" descr="{&quot;isTemplate&quot;:true,&quot;type&quot;:&quot;text&quot;}"/>
           <p:cNvSpPr txBox="1"/>
           <p:nvPr/>
         </p:nvSpPr>
@@ -15754,7 +16013,7 @@
       </p:sp>
       <p:sp>
         <p:nvSpPr>
-          <p:cNvPr id="332" name=""/>
+          <p:cNvPr id="342" name=""/>
           <p:cNvSpPr/>
           <p:nvPr/>
         </p:nvSpPr>
@@ -15796,7 +16055,7 @@
       </p:sp>
       <p:sp>
         <p:nvSpPr>
-          <p:cNvPr id="333" name="" descr="{&quot;isTemplate&quot;:true,&quot;type&quot;:&quot;text&quot;}"/>
+          <p:cNvPr id="343" name="" descr="{&quot;isTemplate&quot;:true,&quot;type&quot;:&quot;text&quot;}"/>
           <p:cNvSpPr txBox="1"/>
           <p:nvPr/>
         </p:nvSpPr>
@@ -15831,7 +16090,7 @@
       </p:sp>
       <p:sp>
         <p:nvSpPr>
-          <p:cNvPr id="334" name="" descr="{&quot;isTemplate&quot;:true,&quot;type&quot;:&quot;text&quot;}"/>
+          <p:cNvPr id="344" name="" descr="{&quot;isTemplate&quot;:true,&quot;type&quot;:&quot;text&quot;}"/>
           <p:cNvSpPr txBox="1"/>
           <p:nvPr/>
         </p:nvSpPr>
@@ -15866,7 +16125,7 @@
       </p:sp>
       <p:sp>
         <p:nvSpPr>
-          <p:cNvPr id="335" name="" descr="{&quot;isTemplate&quot;:true,&quot;type&quot;:&quot;text&quot;}"/>
+          <p:cNvPr id="345" name="" descr="{&quot;isTemplate&quot;:true,&quot;type&quot;:&quot;text&quot;}"/>
           <p:cNvSpPr txBox="1"/>
           <p:nvPr/>
         </p:nvSpPr>
@@ -15921,7 +16180,7 @@
       </p:sp>
       <p:sp>
         <p:nvSpPr>
-          <p:cNvPr id="336" name="" descr="{&quot;isTemplate&quot;:true,&quot;type&quot;:&quot;text&quot;}"/>
+          <p:cNvPr id="346" name="" descr="{&quot;isTemplate&quot;:true,&quot;type&quot;:&quot;text&quot;}"/>
           <p:cNvSpPr txBox="1"/>
           <p:nvPr/>
         </p:nvSpPr>
@@ -15956,7 +16215,7 @@
       </p:sp>
       <p:sp>
         <p:nvSpPr>
-          <p:cNvPr id="337" name="" descr="{&quot;isTemplate&quot;:true,&quot;type&quot;:&quot;text&quot;}"/>
+          <p:cNvPr id="347" name="" descr="{&quot;isTemplate&quot;:true,&quot;type&quot;:&quot;text&quot;}"/>
           <p:cNvSpPr txBox="1"/>
           <p:nvPr/>
         </p:nvSpPr>
@@ -15991,7 +16250,7 @@
       </p:sp>
       <p:sp>
         <p:nvSpPr>
-          <p:cNvPr id="338" name="" descr="{&quot;isTemplate&quot;:true,&quot;type&quot;:&quot;text&quot;}"/>
+          <p:cNvPr id="348" name="" descr="{&quot;isTemplate&quot;:true,&quot;type&quot;:&quot;text&quot;}"/>
           <p:cNvSpPr txBox="1"/>
           <p:nvPr/>
         </p:nvSpPr>
@@ -16046,7 +16305,7 @@
       </p:sp>
       <p:sp>
         <p:nvSpPr>
-          <p:cNvPr id="339" name="" descr="{&quot;isTemplate&quot;:true,&quot;type&quot;:&quot;text&quot;}"/>
+          <p:cNvPr id="349" name="" descr="{&quot;isTemplate&quot;:true,&quot;type&quot;:&quot;text&quot;}"/>
           <p:cNvSpPr txBox="1"/>
           <p:nvPr/>
         </p:nvSpPr>
@@ -16101,7 +16360,7 @@
       </p:sp>
       <p:sp>
         <p:nvSpPr>
-          <p:cNvPr id="340" name="" descr="{&quot;isTemplate&quot;:true,&quot;type&quot;:&quot;text&quot;}"/>
+          <p:cNvPr id="350" name="" descr="{&quot;isTemplate&quot;:true,&quot;type&quot;:&quot;text&quot;}"/>
           <p:cNvSpPr txBox="1"/>
           <p:nvPr/>
         </p:nvSpPr>
@@ -16144,7 +16403,7 @@
   <p:cSld>
     <p:spTree>
       <p:nvGrpSpPr>
-        <p:cNvPr id="341" name="" descr="&lt;Slide style={{ width: '1280px', height: '720px', background: 'linear-gradient(135deg, #172133 0%, #22395E 100%)', position: 'relative', display: 'flex', flexDirection: 'column', justifyContent: 'center', padding: '0 96px' }}&gt;&#10;  &lt;div style={{ color: '#BD9B56', fontSize: 15, letterSpacing: '0.35em', marginBottom: 24 }}&gt;SECTION 01&lt;/div&gt;&#10;  &lt;div style={{ display: 'flex', alignItems: 'baseline', gap: 28 }}&gt;&#10;    &lt;span style={{ fontSize: 110, fontWeight: 'bold', color: 'rgba(189,155,86,0.28)', fontFamily: 'Inter, sans-serif', lineHeight: 1 }}&gt;01&lt;/span&gt;&#10;    &lt;span style={{ fontSize: 46, fontWeight: 'bold', color: '#FBFCFA', letterSpacing: '0.02em' }}&gt;项目背景与规模&lt;/span&gt;&#10;  &lt;/div&gt;&#10;  &lt;div style={{ width: 72, height: 3, background: '#BD9B56', margin: '28px 0 20px' }} /&gt;&#10;  &lt;div style={{ fontSize: 16, color: 'rgba(251,252,250,0.72)', letterSpacing: '0.04em' }}&gt;传统物业痛点 · 虚拟社区「云溪花园」数据资产&lt;/div&gt;&#10;  &lt;div style={{ position: 'absolute', bottom: 42, right: 96, color: 'rgba(251,252,250,0.4)', fontSize: 13, fontFamily: 'Inter, sans-serif' }}&gt;03 / 19&lt;/div&gt;&#10;&lt;/Slide&gt;"/>
+        <p:cNvPr id="351" name="" descr="&lt;Slide style={{ width: '1280px', height: '720px', background: 'linear-gradient(135deg, #172133 0%, #22395E 100%)', position: 'relative', display: 'flex', flexDirection: 'column', justifyContent: 'center', padding: '0 96px' }}&gt;&#10;  &lt;div style={{ color: '#BD9B56', fontSize: 15, letterSpacing: '0.35em', marginBottom: 24 }}&gt;SECTION 01&lt;/div&gt;&#10;  &lt;div style={{ display: 'flex', alignItems: 'center', gap: 36 }}&gt;&#10;    &lt;span style={{ fontSize: 160, fontWeight: 'bold', color: '#BD9B56', lineHeight: 1 }}&gt;01&lt;/span&gt;&#10;    &lt;div&gt;&#10;      &lt;div style={{ fontSize: 50, fontWeight: 'bold', color: '#FBFCFA', letterSpacing: '0.02em', lineHeight: 1.15 }}&gt;项目背景与规模&lt;/div&gt;&#10;      &lt;div style={{ fontSize: 17, color: 'rgba(251,252,250,0.55)', marginTop: 12, letterSpacing: '0.06em' }}&gt;PROJECT BACKGROUND &amp;amp; SCALE&lt;/div&gt;&#10;    &lt;/div&gt;&#10;  &lt;/div&gt;&#10;  &lt;div style={{ width: 80, height: 3, background: '#BD9B56', margin: '32px 0 24px' }} /&gt;&#10;  &lt;div style={{ display: 'flex', gap: 14 }}&gt;&#10;    &lt;span style={{ fontSize: 15, color: 'rgba(251,252,250,0.88)', border: '1px solid rgba(189,155,86,0.65)', padding: '9px 20px', borderRadius: 22 }}&gt;传统物业痛点&lt;/span&gt;&#10;    &lt;span style={{ fontSize: 15, color: 'rgba(251,252,250,0.88)', border: '1px solid rgba(189,155,86,0.65)', padding: '9px 20px', borderRadius: 22 }}&gt;AI Native 方案定位&lt;/span&gt;&#10;    &lt;span style={{ fontSize: 15, color: 'rgba(251,252,250,0.88)', border: '1px solid rgba(189,155,86,0.65)', padding: '9px 20px', borderRadius: 22 }}&gt;虚拟社区「云溪花园」&lt;/span&gt;&#10;  &lt;/div&gt;&#10;  &lt;div style={{ position: 'absolute', bottom: 42, right: 96, color: 'rgba(251,252,250,0.4)', fontSize: 13 }}&gt;03 / 19&lt;/div&gt;&#10;&lt;/Slide&gt;"/>
         <p:cNvGrpSpPr/>
         <p:nvPr/>
       </p:nvGrpSpPr>
@@ -16158,7 +16417,7 @@
       </p:grpSpPr>
       <p:sp>
         <p:nvSpPr>
-          <p:cNvPr id="342" name=""/>
+          <p:cNvPr id="352" name=""/>
           <p:cNvSpPr/>
           <p:nvPr/>
         </p:nvSpPr>
@@ -16190,14 +16449,49 @@
       </p:sp>
       <p:sp>
         <p:nvSpPr>
-          <p:cNvPr id="343" name="" descr="{&quot;isTemplate&quot;:true,&quot;type&quot;:&quot;text&quot;}"/>
+          <p:cNvPr id="353" name="" descr="{&quot;isTemplate&quot;:true,&quot;type&quot;:&quot;text&quot;}"/>
+          <p:cNvSpPr txBox="1"/>
+          <p:nvPr/>
+        </p:nvSpPr>
+        <p:spPr>
+          <a:xfrm rot="0" flipH="0" flipV="0">
+            <a:off x="914400" y="1866900"/>
+            <a:ext cx="10363200" cy="171450"/>
+          </a:xfrm>
+          <a:prstGeom prst="rect"/>
+        </p:spPr>
+        <p:txBody>
+          <a:bodyPr wrap="none" lIns="0" tIns="0" rIns="0" bIns="0"/>
+          <a:p>
+            <a:pPr>
+              <a:lnSpc>
+                <a:spcPct val="100000"/>
+              </a:lnSpc>
+            </a:pPr>
+            <a:r>
+              <a:rPr lang="en-US" sz="1125" spc="-9223372036854775808">
+                <a:solidFill>
+                  <a:srgbClr val="BD9B56"/>
+                </a:solidFill>
+                <a:latin typeface="Microsoft YaHei"/>
+                <a:ea typeface="Microsoft YaHei"/>
+              </a:rPr>
+              <a:t>SECTION 01</a:t>
+            </a:r>
+            <a:endParaRPr/>
+          </a:p>
+        </p:txBody>
+      </p:sp>
+      <p:sp>
+        <p:nvSpPr>
+          <p:cNvPr id="354" name="" descr="{&quot;isTemplate&quot;:true,&quot;type&quot;:&quot;text&quot;}"/>
           <p:cNvSpPr txBox="1"/>
           <p:nvPr/>
         </p:nvSpPr>
         <p:spPr>
           <a:xfrm rot="0" flipH="0" flipV="0">
             <a:off x="914400" y="2266950"/>
-            <a:ext cx="10363200" cy="171450"/>
+            <a:ext cx="1885950" cy="1828800"/>
           </a:xfrm>
           <a:prstGeom prst="rect"/>
         </p:spPr>
@@ -16210,29 +16504,64 @@
               </a:lnSpc>
             </a:pPr>
             <a:r>
-              <a:rPr lang="en-US" sz="1125" spc="-9223372036854775808">
+              <a:rPr lang="en-US" sz="12000" b="1">
                 <a:solidFill>
                   <a:srgbClr val="BD9B56"/>
                 </a:solidFill>
                 <a:latin typeface="Microsoft YaHei"/>
                 <a:ea typeface="Microsoft YaHei"/>
               </a:rPr>
-              <a:t>SECTION 01</a:t>
-            </a:r>
-            <a:endParaRPr/>
-          </a:p>
-        </p:txBody>
-      </p:sp>
-      <p:sp>
-        <p:nvSpPr>
-          <p:cNvPr id="344" name="" descr="{&quot;isTemplate&quot;:true,&quot;type&quot;:&quot;text&quot;}"/>
-          <p:cNvSpPr txBox="1"/>
-          <p:nvPr/>
-        </p:nvSpPr>
-        <p:spPr>
-          <a:xfrm rot="0" flipH="0" flipV="0">
-            <a:off x="914400" y="2667000"/>
-            <a:ext cx="1343025" cy="1257300"/>
+              <a:t>01</a:t>
+            </a:r>
+            <a:endParaRPr/>
+          </a:p>
+        </p:txBody>
+      </p:sp>
+      <p:sp>
+        <p:nvSpPr>
+          <p:cNvPr id="355" name="" descr="{&quot;isTemplate&quot;:true,&quot;type&quot;:&quot;text&quot;}"/>
+          <p:cNvSpPr txBox="1"/>
+          <p:nvPr/>
+        </p:nvSpPr>
+        <p:spPr>
+          <a:xfrm rot="0" flipH="0" flipV="0">
+            <a:off x="3143250" y="2695575"/>
+            <a:ext cx="3333750" cy="657225"/>
+          </a:xfrm>
+          <a:prstGeom prst="rect"/>
+        </p:spPr>
+        <p:txBody>
+          <a:bodyPr wrap="none" lIns="0" tIns="0" rIns="0" bIns="0"/>
+          <a:p>
+            <a:pPr>
+              <a:lnSpc>
+                <a:spcPct val="114999"/>
+              </a:lnSpc>
+            </a:pPr>
+            <a:r>
+              <a:rPr lang="zh-CN" sz="3750" spc="-9223372036854775808">
+                <a:solidFill>
+                  <a:srgbClr val="FBFCFA"/>
+                </a:solidFill>
+                <a:latin typeface="Microsoft YaHei"/>
+                <a:ea typeface="Microsoft YaHei"/>
+              </a:rPr>
+              <a:t>项目背景与规模</a:t>
+            </a:r>
+            <a:endParaRPr/>
+          </a:p>
+        </p:txBody>
+      </p:sp>
+      <p:sp>
+        <p:nvSpPr>
+          <p:cNvPr id="356" name="" descr="{&quot;isTemplate&quot;:true,&quot;type&quot;:&quot;text&quot;}"/>
+          <p:cNvSpPr txBox="1"/>
+          <p:nvPr/>
+        </p:nvSpPr>
+        <p:spPr>
+          <a:xfrm rot="0" flipH="0" flipV="0">
+            <a:off x="3143250" y="3467100"/>
+            <a:ext cx="3333750" cy="200025"/>
           </a:xfrm>
           <a:prstGeom prst="rect"/>
         </p:spPr>
@@ -16245,66 +16574,31 @@
               </a:lnSpc>
             </a:pPr>
             <a:r>
-              <a:rPr lang="en-US" sz="8250" b="1">
-                <a:solidFill>
-                  <a:srgbClr val="BD9B56">
-                    <a:alpha val="28000"/>
+              <a:rPr lang="en-US" sz="1275" spc="-9223372036854775808">
+                <a:solidFill>
+                  <a:srgbClr val="FBFCFA">
+                    <a:alpha val="55000"/>
                   </a:srgbClr>
                 </a:solidFill>
-                <a:latin typeface="Inter"/>
-                <a:ea typeface="Inter"/>
-              </a:rPr>
-              <a:t>01</a:t>
-            </a:r>
-            <a:endParaRPr/>
-          </a:p>
-        </p:txBody>
-      </p:sp>
-      <p:sp>
-        <p:nvSpPr>
-          <p:cNvPr id="345" name="" descr="{&quot;isTemplate&quot;:true,&quot;type&quot;:&quot;text&quot;}"/>
-          <p:cNvSpPr txBox="1"/>
-          <p:nvPr/>
-        </p:nvSpPr>
-        <p:spPr>
-          <a:xfrm rot="0" flipH="0" flipV="0">
-            <a:off x="2524125" y="2667000"/>
-            <a:ext cx="3067050" cy="1257300"/>
-          </a:xfrm>
-          <a:prstGeom prst="rect"/>
-        </p:spPr>
-        <p:txBody>
-          <a:bodyPr wrap="none" lIns="0" tIns="0" rIns="0" bIns="0"/>
-          <a:p>
-            <a:pPr>
-              <a:lnSpc>
-                <a:spcPct val="100000"/>
-              </a:lnSpc>
-            </a:pPr>
-            <a:r>
-              <a:rPr lang="zh-CN" sz="3450" b="1">
-                <a:solidFill>
-                  <a:srgbClr val="FBFCFA"/>
-                </a:solidFill>
-                <a:latin typeface="Microsoft YaHei"/>
-                <a:ea typeface="Microsoft YaHei"/>
-              </a:rPr>
-              <a:t>项目背景与规模</a:t>
-            </a:r>
-            <a:endParaRPr/>
-          </a:p>
-        </p:txBody>
-      </p:sp>
-      <p:sp>
-        <p:nvSpPr>
-          <p:cNvPr id="346" name=""/>
+                <a:latin typeface="Microsoft YaHei"/>
+                <a:ea typeface="Microsoft YaHei"/>
+              </a:rPr>
+              <a:t>PROJECT BACKGROUND &amp; SCALE</a:t>
+            </a:r>
+            <a:endParaRPr/>
+          </a:p>
+        </p:txBody>
+      </p:sp>
+      <p:sp>
+        <p:nvSpPr>
+          <p:cNvPr id="357" name=""/>
           <p:cNvSpPr/>
           <p:nvPr/>
         </p:nvSpPr>
         <p:spPr>
           <a:xfrm rot="0" flipH="0" flipV="0">
-            <a:off x="914400" y="4191000"/>
-            <a:ext cx="685800" cy="28575"/>
+            <a:off x="914400" y="4400550"/>
+            <a:ext cx="762000" cy="28575"/>
           </a:xfrm>
           <a:prstGeom prst="rect">
             <a:avLst/>
@@ -16321,19 +16615,49 @@
       </p:sp>
       <p:sp>
         <p:nvSpPr>
-          <p:cNvPr id="347" name="" descr="{&quot;isTemplate&quot;:true,&quot;type&quot;:&quot;text&quot;}"/>
-          <p:cNvSpPr txBox="1"/>
-          <p:nvPr/>
-        </p:nvSpPr>
-        <p:spPr>
-          <a:xfrm rot="0" flipH="0" flipV="0">
-            <a:off x="914400" y="4410075"/>
-            <a:ext cx="10363200" cy="190500"/>
-          </a:xfrm>
-          <a:prstGeom prst="rect"/>
-        </p:spPr>
-        <p:txBody>
-          <a:bodyPr wrap="none" lIns="0" tIns="0" rIns="0" bIns="0"/>
+          <p:cNvPr id="358" name=""/>
+          <p:cNvSpPr/>
+          <p:nvPr/>
+        </p:nvSpPr>
+        <p:spPr>
+          <a:xfrm rot="0" flipH="0" flipV="0">
+            <a:off x="914400" y="4657725"/>
+            <a:ext cx="1238250" cy="342900"/>
+          </a:xfrm>
+          <a:prstGeom prst="roundRect">
+            <a:avLst>
+              <a:gd name="adj" fmla="val 61111"/>
+            </a:avLst>
+          </a:prstGeom>
+          <a:ln w="12700">
+            <a:solidFill>
+              <a:srgbClr val="BD9B56">
+                <a:alpha val="65000"/>
+              </a:srgbClr>
+            </a:solidFill>
+            <a:prstDash val="solid"/>
+          </a:ln>
+        </p:spPr>
+        <p:txBody>
+          <a:bodyPr/>
+          <a:p/>
+        </p:txBody>
+      </p:sp>
+      <p:sp>
+        <p:nvSpPr>
+          <p:cNvPr id="359" name="" descr="{&quot;isTemplate&quot;:true,&quot;type&quot;:&quot;text&quot;}"/>
+          <p:cNvSpPr txBox="1"/>
+          <p:nvPr/>
+        </p:nvSpPr>
+        <p:spPr>
+          <a:xfrm rot="0" flipH="0" flipV="0">
+            <a:off x="914400" y="4657725"/>
+            <a:ext cx="1238250" cy="342900"/>
+          </a:xfrm>
+          <a:prstGeom prst="rect"/>
+        </p:spPr>
+        <p:txBody>
+          <a:bodyPr wrap="none" lIns="142875" tIns="64294" rIns="142875" bIns="64294"/>
           <a:p>
             <a:pPr>
               <a:lnSpc>
@@ -16341,10 +16665,10 @@
               </a:lnSpc>
             </a:pPr>
             <a:r>
-              <a:rPr lang="zh-CN" sz="1200" spc="-9223372036854775808">
+              <a:rPr lang="zh-CN" sz="1125">
                 <a:solidFill>
                   <a:srgbClr val="FBFCFA">
-                    <a:alpha val="72000"/>
+                    <a:alpha val="88000"/>
                   </a:srgbClr>
                 </a:solidFill>
                 <a:latin typeface="Microsoft YaHei"/>
@@ -16352,44 +16676,166 @@
               </a:rPr>
               <a:t>传统物业痛点</a:t>
             </a:r>
-            <a:r>
-              <a:rPr lang="en-US" sz="1200" spc="-9223372036854775808">
+            <a:endParaRPr/>
+          </a:p>
+        </p:txBody>
+      </p:sp>
+      <p:sp>
+        <p:nvSpPr>
+          <p:cNvPr id="360" name=""/>
+          <p:cNvSpPr/>
+          <p:nvPr/>
+        </p:nvSpPr>
+        <p:spPr>
+          <a:xfrm rot="0" flipH="0" flipV="0">
+            <a:off x="2286000" y="4657725"/>
+            <a:ext cx="1628775" cy="342900"/>
+          </a:xfrm>
+          <a:prstGeom prst="roundRect">
+            <a:avLst>
+              <a:gd name="adj" fmla="val 61111"/>
+            </a:avLst>
+          </a:prstGeom>
+          <a:ln w="12700">
+            <a:solidFill>
+              <a:srgbClr val="BD9B56">
+                <a:alpha val="65000"/>
+              </a:srgbClr>
+            </a:solidFill>
+            <a:prstDash val="solid"/>
+          </a:ln>
+        </p:spPr>
+        <p:txBody>
+          <a:bodyPr/>
+          <a:p/>
+        </p:txBody>
+      </p:sp>
+      <p:sp>
+        <p:nvSpPr>
+          <p:cNvPr id="361" name="" descr="{&quot;isTemplate&quot;:true,&quot;type&quot;:&quot;text&quot;}"/>
+          <p:cNvSpPr txBox="1"/>
+          <p:nvPr/>
+        </p:nvSpPr>
+        <p:spPr>
+          <a:xfrm rot="0" flipH="0" flipV="0">
+            <a:off x="2286000" y="4657725"/>
+            <a:ext cx="1628775" cy="342900"/>
+          </a:xfrm>
+          <a:prstGeom prst="rect"/>
+        </p:spPr>
+        <p:txBody>
+          <a:bodyPr wrap="none" lIns="142875" tIns="64294" rIns="142875" bIns="64294"/>
+          <a:p>
+            <a:pPr>
+              <a:lnSpc>
+                <a:spcPct val="100000"/>
+              </a:lnSpc>
+            </a:pPr>
+            <a:r>
+              <a:rPr lang="en-US" sz="1125">
                 <a:solidFill>
                   <a:srgbClr val="FBFCFA">
-                    <a:alpha val="72000"/>
+                    <a:alpha val="88000"/>
                   </a:srgbClr>
                 </a:solidFill>
                 <a:latin typeface="Microsoft YaHei"/>
                 <a:ea typeface="Microsoft YaHei"/>
               </a:rPr>
-              <a:t> · </a:t>
-            </a:r>
-            <a:r>
-              <a:rPr lang="zh-CN" sz="1200" spc="-9223372036854775808">
+              <a:t>AI Native </a:t>
+            </a:r>
+            <a:r>
+              <a:rPr lang="zh-CN" sz="1125">
                 <a:solidFill>
                   <a:srgbClr val="FBFCFA">
-                    <a:alpha val="72000"/>
+                    <a:alpha val="88000"/>
                   </a:srgbClr>
                 </a:solidFill>
                 <a:latin typeface="Microsoft YaHei"/>
                 <a:ea typeface="Microsoft YaHei"/>
               </a:rPr>
-              <a:t>虚拟社区「云溪花园」数据资产</a:t>
-            </a:r>
-            <a:endParaRPr/>
-          </a:p>
-        </p:txBody>
-      </p:sp>
-      <p:sp>
-        <p:nvSpPr>
-          <p:cNvPr id="348" name="" descr="{&quot;isTemplate&quot;:true,&quot;type&quot;:&quot;text&quot;}"/>
-          <p:cNvSpPr txBox="1"/>
-          <p:nvPr/>
-        </p:nvSpPr>
-        <p:spPr>
-          <a:xfrm rot="0" flipH="0" flipV="0">
-            <a:off x="10877550" y="6305550"/>
-            <a:ext cx="400050" cy="152400"/>
+              <a:t>方案定位</a:t>
+            </a:r>
+            <a:endParaRPr/>
+          </a:p>
+        </p:txBody>
+      </p:sp>
+      <p:sp>
+        <p:nvSpPr>
+          <p:cNvPr id="362" name=""/>
+          <p:cNvSpPr/>
+          <p:nvPr/>
+        </p:nvSpPr>
+        <p:spPr>
+          <a:xfrm rot="0" flipH="0" flipV="0">
+            <a:off x="4048125" y="4657725"/>
+            <a:ext cx="1809750" cy="342900"/>
+          </a:xfrm>
+          <a:prstGeom prst="roundRect">
+            <a:avLst>
+              <a:gd name="adj" fmla="val 61111"/>
+            </a:avLst>
+          </a:prstGeom>
+          <a:ln w="12700">
+            <a:solidFill>
+              <a:srgbClr val="BD9B56">
+                <a:alpha val="65000"/>
+              </a:srgbClr>
+            </a:solidFill>
+            <a:prstDash val="solid"/>
+          </a:ln>
+        </p:spPr>
+        <p:txBody>
+          <a:bodyPr/>
+          <a:p/>
+        </p:txBody>
+      </p:sp>
+      <p:sp>
+        <p:nvSpPr>
+          <p:cNvPr id="363" name="" descr="{&quot;isTemplate&quot;:true,&quot;type&quot;:&quot;text&quot;}"/>
+          <p:cNvSpPr txBox="1"/>
+          <p:nvPr/>
+        </p:nvSpPr>
+        <p:spPr>
+          <a:xfrm rot="0" flipH="0" flipV="0">
+            <a:off x="4048125" y="4657725"/>
+            <a:ext cx="1809750" cy="342900"/>
+          </a:xfrm>
+          <a:prstGeom prst="rect"/>
+        </p:spPr>
+        <p:txBody>
+          <a:bodyPr wrap="none" lIns="142875" tIns="64294" rIns="142875" bIns="64294"/>
+          <a:p>
+            <a:pPr>
+              <a:lnSpc>
+                <a:spcPct val="100000"/>
+              </a:lnSpc>
+            </a:pPr>
+            <a:r>
+              <a:rPr lang="zh-CN" sz="1125">
+                <a:solidFill>
+                  <a:srgbClr val="FBFCFA">
+                    <a:alpha val="88000"/>
+                  </a:srgbClr>
+                </a:solidFill>
+                <a:latin typeface="Microsoft YaHei"/>
+                <a:ea typeface="Microsoft YaHei"/>
+              </a:rPr>
+              <a:t>虚拟社区「云溪花园」</a:t>
+            </a:r>
+            <a:endParaRPr/>
+          </a:p>
+        </p:txBody>
+      </p:sp>
+      <p:sp>
+        <p:nvSpPr>
+          <p:cNvPr id="364" name="" descr="{&quot;isTemplate&quot;:true,&quot;type&quot;:&quot;text&quot;}"/>
+          <p:cNvSpPr txBox="1"/>
+          <p:nvPr/>
+        </p:nvSpPr>
+        <p:spPr>
+          <a:xfrm rot="0" flipH="0" flipV="0">
+            <a:off x="10858500" y="6305550"/>
+            <a:ext cx="419100" cy="152400"/>
           </a:xfrm>
           <a:prstGeom prst="rect"/>
         </p:spPr>
@@ -16408,8 +16854,8 @@
                     <a:alpha val="40000"/>
                   </a:srgbClr>
                 </a:solidFill>
-                <a:latin typeface="Inter"/>
-                <a:ea typeface="Inter"/>
+                <a:latin typeface="Microsoft YaHei"/>
+                <a:ea typeface="Microsoft YaHei"/>
               </a:rPr>
               <a:t>03 / 19</a:t>
             </a:r>
@@ -16427,7 +16873,7 @@
   <p:cSld>
     <p:spTree>
       <p:nvGrpSpPr>
-        <p:cNvPr id="349" name="" descr="&lt;Slide style={{ width: '1280px', height: '720px', background: '#FBFCFA', position: 'relative', padding: '40px 64px', boxSizing: 'border-box', display: 'flex', flexDirection: 'column' }}&gt;&#13;&#10;  &lt;div style={{ flexShrink: 0 }}&gt;&#13;&#10;    &lt;div style={{ color: '#BD9B56', fontSize: 13, letterSpacing: '0.25em', marginBottom: 8 }}&gt;01 · 项目背景&lt;/div&gt;&#13;&#10;    &lt;h2 style={{ fontSize: 30, fontWeight: 'bold', color: '#172133', margin: 0, lineHeight: 1.3 }}&gt;传统物业的三重困境&lt;/h2&gt;&#13;&#10;    &lt;div style={{ fontSize: 14, color: '#6b7075', marginTop: 8 }}&gt;业务、数据、知识「三张皮」，需要用 AI 重新缝合&lt;/div&gt;&#13;&#10;  &lt;/div&gt;&#13;&#10;  &lt;div style={{ flex: 1, display: 'flex', alignItems: 'center' }}&gt;&#13;&#10;    &lt;div style={{ width: '100%', display: 'flex', flexDirection: 'column', gap: 18 }}&gt;&#13;&#10;      &lt;div style={{ display: 'flex', gap: 20, background: '#fff', borderRadius: 10, padding: '20px 24px', boxShadow: '0 4px 16px rgba(23,33,51,0.06)', borderLeft: '4px solid #BD9B56' }}&gt;&#13;&#10;        &lt;span style={{ color: '#BD9B56', fontSize: 22, lineHeight: 1.2, flexShrink: 0 }}&gt;!&lt;/span&gt;&#13;&#10;        &lt;div&gt;&#13;&#10;          &lt;div style={{ fontSize: 17, fontWeight: 'bold', color: '#172133', marginBottom: 6 }}&gt;信息孤岛&lt;/div&gt;&#13;&#10;          &lt;p style={{ fontSize: 14, color: '#5F5E5A', margin: 0, lineHeight: 1.6 }}&gt;业主报修、费用缴纳、巡检记录分散在多个系统，彼此不打通，物业无法掌握完整的社区运行状态，业主也看不到工单的处理进度。&lt;/p&gt;&#13;&#10;        &lt;/div&gt;&#13;&#10;      &lt;/div&gt;&#13;&#10;      &lt;div style={{ display: 'flex', gap: 20, background: '#fff', borderRadius: 10, padding: '20px 24px', boxShadow: '0 4px 16px rgba(23,33,51,0.06)', borderLeft: '4px solid #BD9B56' }}&gt;&#13;&#10;        &lt;span style={{ color: '#BD9B56', fontSize: 22, lineHeight: 1.2, flexShrink: 0 }}&gt;!&lt;/span&gt;&#13;&#10;        &lt;div&gt;&#13;&#10;          &lt;div style={{ fontSize: 17, fontWeight: 'bold', color: '#172133', marginBottom: 6 }}&gt;响应迟缓&lt;/div&gt;&#13;&#10;          &lt;p style={{ fontSize: 14, color: '#5F5E5A', margin: 0, lineHeight: 1.6 }}&gt;传统报修依赖电话和微信群，客服人工登记后再手动派单，从「业主报修」到「师傅上门」平均要数小时甚至隔天，响应效率低。&lt;/p&gt;&#13;&#10;        &lt;/div&gt;&#13;&#10;      &lt;/div&gt;&#13;&#10;      &lt;div style={{ display: 'flex', gap: 20, background: '#fff', borderRadius: 10, padding: '20px 24px', boxShadow: '0 4px 16px rgba(23,33,51,0.06)', borderLeft: '4px solid #BD9B56' }}&gt;&#13;&#10;        &lt;span style={{ color: '#BD9B56', fontSize: 22, lineHeight: 1.2, flexShrink: 0 }}&gt;!&lt;/span&gt;&#13;&#10;        &lt;div&gt;&#13;&#10;          &lt;div style={{ fontSize: 17, fontWeight: 'bold', color: '#172133', marginBottom: 6 }}&gt;隐性知识散落&lt;/div&gt;&#13;&#10;          &lt;p style={{ fontSize: 14, color: '#5F5E5A', margin: 0, lineHeight: 1.6 }}&gt;装修施工时间、停车规则、宠物管理等规定，往往只存在于物业员工的个人经验里，新人上岗难以快速掌握，业主咨询也得不到统一准确的答案。&lt;/p&gt;&#13;&#10;        &lt;/div&gt;&#13;&#10;      &lt;/div&gt;&#13;&#10;    &lt;/div&gt;&#13;&#10;  &lt;/div&gt;&#13;&#10;  &lt;div style={{ flexShrink: 0, height: 44, display: 'flex', alignItems: 'flex-end', justifyContent: 'space-between' }}&gt;&#13;&#10;    &lt;span style={{ color: '#BD9B56', fontSize: 12, letterSpacing: '0.1em' }}&gt;云溪花园 · 智慧社区&lt;/span&gt;&#13;&#10;    &lt;span style={{ color: '#a09b8c', fontSize: 12 }}&gt;4 / 19&lt;/span&gt;&#13;&#10;  &lt;/div&gt;&#13;&#10;&lt;/Slide&gt;"/>
+        <p:cNvPr id="365" name="" descr="&lt;Slide style={{ width: '1280px', height: '720px', background: '#FBFCFA', position: 'relative', padding: '40px 64px', boxSizing: 'border-box', display: 'flex', flexDirection: 'column' }}&gt;&#13;&#10;  &lt;div style={{ flexShrink: 0 }}&gt;&#13;&#10;    &lt;div style={{ color: '#BD9B56', fontSize: 13, letterSpacing: '0.25em', marginBottom: 8 }}&gt;01 · 项目背景&lt;/div&gt;&#13;&#10;    &lt;h2 style={{ fontSize: 30, fontWeight: 'bold', color: '#172133', margin: 0, lineHeight: 1.3 }}&gt;传统物业的三重困境&lt;/h2&gt;&#13;&#10;    &lt;div style={{ fontSize: 14, color: '#6b7075', marginTop: 8 }}&gt;业务、数据、知识「三张皮」，需要用 AI 重新缝合&lt;/div&gt;&#13;&#10;  &lt;/div&gt;&#13;&#10;  &lt;div style={{ flex: 1, display: 'flex', alignItems: 'center' }}&gt;&#13;&#10;    &lt;div style={{ width: '100%', display: 'flex', flexDirection: 'column', gap: 18 }}&gt;&#13;&#10;      &lt;div style={{ display: 'flex', gap: 20, background: '#fff', borderRadius: 10, padding: '20px 24px', boxShadow: '0 4px 16px rgba(23,33,51,0.06)', borderLeft: '4px solid #BD9B56' }}&gt;&#13;&#10;        &lt;span style={{ color: '#BD9B56', fontSize: 22, lineHeight: 1.2, flexShrink: 0 }}&gt;!&lt;/span&gt;&#13;&#10;        &lt;div&gt;&#13;&#10;          &lt;div style={{ fontSize: 17, fontWeight: 'bold', color: '#172133', marginBottom: 6 }}&gt;信息孤岛&lt;/div&gt;&#13;&#10;          &lt;p style={{ fontSize: 14, color: '#5F5E5A', margin: 0, lineHeight: 1.6 }}&gt;业主报修、费用缴纳、巡检记录分散在多个系统，彼此不打通，物业无法掌握完整的社区运行状态，业主也看不到工单的处理进度。&lt;/p&gt;&#13;&#10;        &lt;/div&gt;&#13;&#10;      &lt;/div&gt;&#13;&#10;      &lt;div style={{ display: 'flex', gap: 20, background: '#fff', borderRadius: 10, padding: '20px 24px', boxShadow: '0 4px 16px rgba(23,33,51,0.06)', borderLeft: '4px solid #BD9B56' }}&gt;&#13;&#10;        &lt;span style={{ color: '#BD9B56', fontSize: 22, lineHeight: 1.2, flexShrink: 0 }}&gt;!&lt;/span&gt;&#13;&#10;        &lt;div&gt;&#13;&#10;          &lt;div style={{ fontSize: 17, fontWeight: 'bold', color: '#172133', marginBottom: 6 }}&gt;响应迟缓&lt;/div&gt;&#13;&#10;          &lt;p style={{ fontSize: 14, color: '#5F5E5A', margin: 0, lineHeight: 1.6 }}&gt;传统报修依赖电话和微信群，客服人工登记后再手动派单，从「业主报修」到「师傅上门」平均要数小时甚至隔天，响应效率低。&lt;/p&gt;&#13;&#10;        &lt;/div&gt;&#13;&#10;      &lt;/div&gt;&#13;&#10;      &lt;div style={{ display: 'flex', gap: 20, background: '#fff', borderRadius: 10, padding: '20px 24px', boxShadow: '0 4px 16px rgba(23,33,51,0.06)', borderLeft: '4px solid #BD9B56' }}&gt;&#13;&#10;        &lt;span style={{ color: '#BD9B56', fontSize: 22, lineHeight: 1.2, flexShrink: 0 }}&gt;!&lt;/span&gt;&#13;&#10;        &lt;div&gt;&#13;&#10;          &lt;div style={{ fontSize: 17, fontWeight: 'bold', color: '#172133', marginBottom: 6 }}&gt;隐性知识散落&lt;/div&gt;&#13;&#10;          &lt;p style={{ fontSize: 14, color: '#5F5E5A', margin: 0, lineHeight: 1.6 }}&gt;装修施工时间、停车规则、宠物管理等规定，往往只存在于物业员工的个人经验里，新人上岗难以快速掌握，业主咨询也得不到统一准确的答案。&lt;/p&gt;&#13;&#10;        &lt;/div&gt;&#13;&#10;      &lt;/div&gt;&#13;&#10;    &lt;/div&gt;&#13;&#10;  &lt;/div&gt;&#13;&#10;  &lt;div style={{ flexShrink: 0, height: 44, display: 'flex', alignItems: 'flex-end', justifyContent: 'space-between' }}&gt;&#13;&#10;    &lt;span style={{ color: '#BD9B56', fontSize: 12, letterSpacing: '0.1em' }}&gt;云溪花园 · 智慧社区&lt;/span&gt;&#13;&#10;    &lt;span style={{ color: '#a09b8c', fontSize: 12 }}&gt;4 / 19&lt;/span&gt;&#13;&#10;  &lt;/div&gt;&#13;&#10;&lt;/Slide&gt;"/>
         <p:cNvGrpSpPr/>
         <p:nvPr/>
       </p:nvGrpSpPr>
@@ -16441,7 +16887,7 @@
       </p:grpSpPr>
       <p:sp>
         <p:nvSpPr>
-          <p:cNvPr id="350" name=""/>
+          <p:cNvPr id="366" name=""/>
           <p:cNvSpPr/>
           <p:nvPr/>
         </p:nvSpPr>
@@ -16465,7 +16911,7 @@
       </p:sp>
       <p:sp>
         <p:nvSpPr>
-          <p:cNvPr id="351" name="" descr="{&quot;isTemplate&quot;:true,&quot;type&quot;:&quot;text&quot;}"/>
+          <p:cNvPr id="367" name="" descr="{&quot;isTemplate&quot;:true,&quot;type&quot;:&quot;text&quot;}"/>
           <p:cNvSpPr txBox="1"/>
           <p:nvPr/>
         </p:nvSpPr>
@@ -16510,7 +16956,7 @@
       </p:sp>
       <p:sp>
         <p:nvSpPr>
-          <p:cNvPr id="352" name="" descr="{&quot;isTemplate&quot;:true,&quot;type&quot;:&quot;text&quot;}"/>
+          <p:cNvPr id="368" name="" descr="{&quot;isTemplate&quot;:true,&quot;type&quot;:&quot;text&quot;}"/>
           <p:cNvSpPr txBox="1"/>
           <p:nvPr/>
         </p:nvSpPr>
@@ -16545,7 +16991,7 @@
       </p:sp>
       <p:sp>
         <p:nvSpPr>
-          <p:cNvPr id="353" name="" descr="{&quot;isTemplate&quot;:true,&quot;type&quot;:&quot;text&quot;}"/>
+          <p:cNvPr id="369" name="" descr="{&quot;isTemplate&quot;:true,&quot;type&quot;:&quot;text&quot;}"/>
           <p:cNvSpPr txBox="1"/>
           <p:nvPr/>
         </p:nvSpPr>
@@ -16600,7 +17046,7 @@
       </p:sp>
       <p:sp>
         <p:nvSpPr>
-          <p:cNvPr id="354" name=""/>
+          <p:cNvPr id="370" name=""/>
           <p:cNvSpPr/>
           <p:nvPr/>
         </p:nvSpPr>
@@ -16633,7 +17079,7 @@
       </p:sp>
       <p:sp>
         <p:nvSpPr>
-          <p:cNvPr id="355" name=""/>
+          <p:cNvPr id="371" name=""/>
           <p:cNvSpPr/>
           <p:nvPr/>
         </p:nvSpPr>
@@ -16690,7 +17136,7 @@
       </p:sp>
       <p:sp>
         <p:nvSpPr>
-          <p:cNvPr id="356" name="" descr="{&quot;isTemplate&quot;:true,&quot;type&quot;:&quot;text&quot;}"/>
+          <p:cNvPr id="372" name="" descr="{&quot;isTemplate&quot;:true,&quot;type&quot;:&quot;text&quot;}"/>
           <p:cNvSpPr txBox="1"/>
           <p:nvPr/>
         </p:nvSpPr>
@@ -16725,7 +17171,7 @@
       </p:sp>
       <p:sp>
         <p:nvSpPr>
-          <p:cNvPr id="357" name="" descr="{&quot;isTemplate&quot;:true,&quot;type&quot;:&quot;text&quot;}"/>
+          <p:cNvPr id="373" name="" descr="{&quot;isTemplate&quot;:true,&quot;type&quot;:&quot;text&quot;}"/>
           <p:cNvSpPr txBox="1"/>
           <p:nvPr/>
         </p:nvSpPr>
@@ -16760,7 +17206,7 @@
       </p:sp>
       <p:sp>
         <p:nvSpPr>
-          <p:cNvPr id="358" name="" descr="{&quot;isTemplate&quot;:true,&quot;type&quot;:&quot;text&quot;}"/>
+          <p:cNvPr id="374" name="" descr="{&quot;isTemplate&quot;:true,&quot;type&quot;:&quot;text&quot;}"/>
           <p:cNvSpPr txBox="1"/>
           <p:nvPr/>
         </p:nvSpPr>
@@ -16795,7 +17241,7 @@
       </p:sp>
       <p:sp>
         <p:nvSpPr>
-          <p:cNvPr id="359" name=""/>
+          <p:cNvPr id="375" name=""/>
           <p:cNvSpPr/>
           <p:nvPr/>
         </p:nvSpPr>
@@ -16828,7 +17274,7 @@
       </p:sp>
       <p:sp>
         <p:nvSpPr>
-          <p:cNvPr id="360" name=""/>
+          <p:cNvPr id="376" name=""/>
           <p:cNvSpPr/>
           <p:nvPr/>
         </p:nvSpPr>
@@ -16885,7 +17331,7 @@
       </p:sp>
       <p:sp>
         <p:nvSpPr>
-          <p:cNvPr id="361" name="" descr="{&quot;isTemplate&quot;:true,&quot;type&quot;:&quot;text&quot;}"/>
+          <p:cNvPr id="377" name="" descr="{&quot;isTemplate&quot;:true,&quot;type&quot;:&quot;text&quot;}"/>
           <p:cNvSpPr txBox="1"/>
           <p:nvPr/>
         </p:nvSpPr>
@@ -16920,7 +17366,7 @@
       </p:sp>
       <p:sp>
         <p:nvSpPr>
-          <p:cNvPr id="362" name="" descr="{&quot;isTemplate&quot;:true,&quot;type&quot;:&quot;text&quot;}"/>
+          <p:cNvPr id="378" name="" descr="{&quot;isTemplate&quot;:true,&quot;type&quot;:&quot;text&quot;}"/>
           <p:cNvSpPr txBox="1"/>
           <p:nvPr/>
         </p:nvSpPr>
@@ -16955,7 +17401,7 @@
       </p:sp>
       <p:sp>
         <p:nvSpPr>
-          <p:cNvPr id="363" name="" descr="{&quot;isTemplate&quot;:true,&quot;type&quot;:&quot;text&quot;}"/>
+          <p:cNvPr id="379" name="" descr="{&quot;isTemplate&quot;:true,&quot;type&quot;:&quot;text&quot;}"/>
           <p:cNvSpPr txBox="1"/>
           <p:nvPr/>
         </p:nvSpPr>
@@ -16990,7 +17436,7 @@
       </p:sp>
       <p:sp>
         <p:nvSpPr>
-          <p:cNvPr id="364" name=""/>
+          <p:cNvPr id="380" name=""/>
           <p:cNvSpPr/>
           <p:nvPr/>
         </p:nvSpPr>
@@ -17023,7 +17469,7 @@
       </p:sp>
       <p:sp>
         <p:nvSpPr>
-          <p:cNvPr id="365" name=""/>
+          <p:cNvPr id="381" name=""/>
           <p:cNvSpPr/>
           <p:nvPr/>
         </p:nvSpPr>
@@ -17080,7 +17526,7 @@
       </p:sp>
       <p:sp>
         <p:nvSpPr>
-          <p:cNvPr id="366" name="" descr="{&quot;isTemplate&quot;:true,&quot;type&quot;:&quot;text&quot;}"/>
+          <p:cNvPr id="382" name="" descr="{&quot;isTemplate&quot;:true,&quot;type&quot;:&quot;text&quot;}"/>
           <p:cNvSpPr txBox="1"/>
           <p:nvPr/>
         </p:nvSpPr>
@@ -17115,7 +17561,7 @@
       </p:sp>
       <p:sp>
         <p:nvSpPr>
-          <p:cNvPr id="367" name="" descr="{&quot;isTemplate&quot;:true,&quot;type&quot;:&quot;text&quot;}"/>
+          <p:cNvPr id="383" name="" descr="{&quot;isTemplate&quot;:true,&quot;type&quot;:&quot;text&quot;}"/>
           <p:cNvSpPr txBox="1"/>
           <p:nvPr/>
         </p:nvSpPr>
@@ -17150,7 +17596,7 @@
       </p:sp>
       <p:sp>
         <p:nvSpPr>
-          <p:cNvPr id="368" name="" descr="{&quot;isTemplate&quot;:true,&quot;type&quot;:&quot;text&quot;}"/>
+          <p:cNvPr id="384" name="" descr="{&quot;isTemplate&quot;:true,&quot;type&quot;:&quot;text&quot;}"/>
           <p:cNvSpPr txBox="1"/>
           <p:nvPr/>
         </p:nvSpPr>
@@ -17185,7 +17631,7 @@
       </p:sp>
       <p:sp>
         <p:nvSpPr>
-          <p:cNvPr id="369" name="" descr="{&quot;isTemplate&quot;:true,&quot;type&quot;:&quot;text&quot;}"/>
+          <p:cNvPr id="385" name="" descr="{&quot;isTemplate&quot;:true,&quot;type&quot;:&quot;text&quot;}"/>
           <p:cNvSpPr txBox="1"/>
           <p:nvPr/>
         </p:nvSpPr>
@@ -17240,7 +17686,7 @@
       </p:sp>
       <p:sp>
         <p:nvSpPr>
-          <p:cNvPr id="370" name="" descr="{&quot;isTemplate&quot;:true,&quot;type&quot;:&quot;text&quot;}"/>
+          <p:cNvPr id="386" name="" descr="{&quot;isTemplate&quot;:true,&quot;type&quot;:&quot;text&quot;}"/>
           <p:cNvSpPr txBox="1"/>
           <p:nvPr/>
         </p:nvSpPr>
@@ -17283,7 +17729,7 @@
   <p:cSld>
     <p:spTree>
       <p:nvGrpSpPr>
-        <p:cNvPr id="371" name="" descr="&lt;Slide style={{ width: '1280px', height: '720px', background: '#FBFCFA', position: 'relative', padding: '32px 64px', boxSizing: 'border-box', display: 'flex', flexDirection: 'column' }}&gt;&#13;&#10;  &lt;div style={{ flexShrink: 0 }}&gt;&#13;&#10;    &lt;div style={{ color: '#BD9B56', fontSize: 13, letterSpacing: '0.25em', marginBottom: 6 }}&gt;01 · 项目目标&lt;/div&gt;&#13;&#10;    &lt;h2 style={{ fontSize: 30, fontWeight: 'bold', color: '#172133', margin: 0, lineHeight: 1.3 }}&gt;本项目要验证的四件事&lt;/h2&gt;&#13;&#10;  &lt;/div&gt;&#13;&#10;  &lt;div style={{ flex: 1, display: 'flex', alignItems: 'center', minHeight: 0 }}&gt;&#13;&#10;    &lt;div style={{ width: '100%', display: 'grid', gridTemplateColumns: '1fr 1fr', gap: 16 }}&gt;&#13;&#10;      &lt;div style={{ background: '#fff', borderRadius: 10, padding: '18px 22px', boxShadow: '0 4px 16px rgba(23,33,51,0.06)', borderTop: '3px solid #BD9B56' }}&gt;&#13;&#10;        &lt;div style={{ fontSize: 17, fontWeight: 'bold', color: '#172133', marginBottom: 6 }}&gt;1.  AI 能否理解业务意图&lt;/div&gt;&#13;&#10;        &lt;p style={{ fontSize: 14, color: '#5F5E5A', margin: 0, lineHeight: 1.55 }}&gt;用户说一句「厨房漏水了」，系统能否准确识别为报修需求，而非闲聊或误判。&lt;/p&gt;&#13;&#10;      &lt;/div&gt;&#13;&#10;      &lt;div style={{ background: '#fff', borderRadius: 10, padding: '18px 22px', boxShadow: '0 4px 16px rgba(23,33,51,0.06)', borderTop: '3px solid #BD9B56' }}&gt;&#13;&#10;        &lt;div style={{ fontSize: 17, fontWeight: 'bold', color: '#172133', marginBottom: 6 }}&gt;2.  Agent 能否调用业务工具&lt;/div&gt;&#13;&#10;        &lt;p style={{ fontSize: 14, color: '#5F5E5A', margin: 0, lineHeight: 1.55 }}&gt;识别意图后，能否自动创建工单、查询费用、检索知识，而不是停留在「回答」层面。&lt;/p&gt;&#13;&#10;      &lt;/div&gt;&#13;&#10;      &lt;div style={{ background: '#fff', borderRadius: 10, padding: '18px 22px', boxShadow: '0 4px 16px rgba(23,33,51,0.06)', borderTop: '3px solid #BD9B56' }}&gt;&#13;&#10;        &lt;div style={{ fontSize: 17, fontWeight: 'bold', color: '#172133', marginBottom: 6 }}&gt;3.  能否跑通业务闭环&lt;/div&gt;&#13;&#10;        &lt;p style={{ fontSize: 14, color: '#5F5E5A', margin: 0, lineHeight: 1.55 }}&gt;从报修到派单到完成，AI 是否真正参与了业务流程，而非只在前端加了一个聊天窗口。&lt;/p&gt;&#13;&#10;      &lt;/div&gt;&#13;&#10;      &lt;div style={{ background: '#fff', borderRadius: 10, padding: '18px 22px', boxShadow: '0 4px 16px rgba(23,33,51,0.06)', borderTop: '3px solid #BD9B56' }}&gt;&#13;&#10;        &lt;div style={{ fontSize: 17, fontWeight: 'bold', color: '#172133', marginBottom: 6 }}&gt;4.  RAG 能否准确回答&lt;/div&gt;&#13;&#10;        &lt;p style={{ fontSize: 14, color: '#5F5E5A', margin: 0, lineHeight: 1.55 }}&gt;对「装修几点施工」这类制度问题，能否检索到正确依据并给出准确、有出处的答案。&lt;/p&gt;&#13;&#10;      &lt;/div&gt;&#13;&#10;    &lt;/div&gt;&#13;&#10;  &lt;/div&gt;&#13;&#10;  &lt;div style={{ flexShrink: 0, height: 40, display: 'flex', alignItems: 'flex-end', justifyContent: 'space-between' }}&gt;&#13;&#10;    &lt;span style={{ color: '#BD9B56', fontSize: 12, letterSpacing: '0.1em' }}&gt;云溪花园 · 智慧社区&lt;/span&gt;&#13;&#10;    &lt;span style={{ color: '#a09b8c', fontSize: 12 }}&gt;5 / 19&lt;/span&gt;&#13;&#10;  &lt;/div&gt;&#13;&#10;&lt;/Slide&gt;"/>
+        <p:cNvPr id="387" name="" descr="&lt;Slide style={{ width: '1280px', height: '720px', background: '#FBFCFA', position: 'relative', padding: '32px 64px', boxSizing: 'border-box', display: 'flex', flexDirection: 'column' }}&gt;&#13;&#10;  &lt;div style={{ flexShrink: 0 }}&gt;&#13;&#10;    &lt;div style={{ color: '#BD9B56', fontSize: 13, letterSpacing: '0.25em', marginBottom: 6 }}&gt;01 · 项目目标&lt;/div&gt;&#13;&#10;    &lt;h2 style={{ fontSize: 30, fontWeight: 'bold', color: '#172133', margin: 0, lineHeight: 1.3 }}&gt;本项目要验证的四件事&lt;/h2&gt;&#13;&#10;  &lt;/div&gt;&#13;&#10;  &lt;div style={{ flex: 1, display: 'flex', alignItems: 'center', minHeight: 0 }}&gt;&#13;&#10;    &lt;div style={{ width: '100%', display: 'grid', gridTemplateColumns: '1fr 1fr', gap: 16 }}&gt;&#13;&#10;      &lt;div style={{ background: '#fff', borderRadius: 10, padding: '18px 22px', boxShadow: '0 4px 16px rgba(23,33,51,0.06)', borderTop: '3px solid #BD9B56' }}&gt;&#13;&#10;        &lt;div style={{ fontSize: 17, fontWeight: 'bold', color: '#172133', marginBottom: 6 }}&gt;1.  AI 能否理解业务意图&lt;/div&gt;&#13;&#10;        &lt;p style={{ fontSize: 14, color: '#5F5E5A', margin: 0, lineHeight: 1.55 }}&gt;用户说一句「厨房漏水了」，系统能否准确识别为报修需求，而非闲聊或误判。&lt;/p&gt;&#13;&#10;      &lt;/div&gt;&#13;&#10;      &lt;div style={{ background: '#fff', borderRadius: 10, padding: '18px 22px', boxShadow: '0 4px 16px rgba(23,33,51,0.06)', borderTop: '3px solid #BD9B56' }}&gt;&#13;&#10;        &lt;div style={{ fontSize: 17, fontWeight: 'bold', color: '#172133', marginBottom: 6 }}&gt;2.  Agent 能否调用业务工具&lt;/div&gt;&#13;&#10;        &lt;p style={{ fontSize: 14, color: '#5F5E5A', margin: 0, lineHeight: 1.55 }}&gt;识别意图后，能否自动创建工单、查询费用、检索知识，而不是停留在「回答」层面。&lt;/p&gt;&#13;&#10;      &lt;/div&gt;&#13;&#10;      &lt;div style={{ background: '#fff', borderRadius: 10, padding: '18px 22px', boxShadow: '0 4px 16px rgba(23,33,51,0.06)', borderTop: '3px solid #BD9B56' }}&gt;&#13;&#10;        &lt;div style={{ fontSize: 17, fontWeight: 'bold', color: '#172133', marginBottom: 6 }}&gt;3.  能否跑通业务闭环&lt;/div&gt;&#13;&#10;        &lt;p style={{ fontSize: 14, color: '#5F5E5A', margin: 0, lineHeight: 1.55 }}&gt;从报修到派单到完成，AI 是否真正参与了业务流程，而非只在前端加了一个聊天窗口。&lt;/p&gt;&#13;&#10;      &lt;/div&gt;&#13;&#10;      &lt;div style={{ background: '#fff', borderRadius: 10, padding: '18px 22px', boxShadow: '0 4px 16px rgba(23,33,51,0.06)', borderTop: '3px solid #BD9B56' }}&gt;&#13;&#10;        &lt;div style={{ fontSize: 17, fontWeight: 'bold', color: '#172133', marginBottom: 6 }}&gt;4.  RAG 能否准确回答&lt;/div&gt;&#13;&#10;        &lt;p style={{ fontSize: 14, color: '#5F5E5A', margin: 0, lineHeight: 1.55 }}&gt;对「装修几点施工」这类制度问题，能否检索到正确依据并给出准确、有出处的答案。&lt;/p&gt;&#13;&#10;      &lt;/div&gt;&#13;&#10;    &lt;/div&gt;&#13;&#10;  &lt;/div&gt;&#13;&#10;  &lt;div style={{ flexShrink: 0, height: 40, display: 'flex', alignItems: 'flex-end', justifyContent: 'space-between' }}&gt;&#13;&#10;    &lt;span style={{ color: '#BD9B56', fontSize: 12, letterSpacing: '0.1em' }}&gt;云溪花园 · 智慧社区&lt;/span&gt;&#13;&#10;    &lt;span style={{ color: '#a09b8c', fontSize: 12 }}&gt;5 / 19&lt;/span&gt;&#13;&#10;  &lt;/div&gt;&#13;&#10;&lt;/Slide&gt;"/>
         <p:cNvGrpSpPr/>
         <p:nvPr/>
       </p:nvGrpSpPr>
@@ -17297,7 +17743,7 @@
       </p:grpSpPr>
       <p:sp>
         <p:nvSpPr>
-          <p:cNvPr id="372" name=""/>
+          <p:cNvPr id="388" name=""/>
           <p:cNvSpPr/>
           <p:nvPr/>
         </p:nvSpPr>
@@ -17321,7 +17767,7 @@
       </p:sp>
       <p:sp>
         <p:nvSpPr>
-          <p:cNvPr id="373" name="" descr="{&quot;isTemplate&quot;:true,&quot;type&quot;:&quot;text&quot;}"/>
+          <p:cNvPr id="389" name="" descr="{&quot;isTemplate&quot;:true,&quot;type&quot;:&quot;text&quot;}"/>
           <p:cNvSpPr txBox="1"/>
           <p:nvPr/>
         </p:nvSpPr>
@@ -17366,7 +17812,7 @@
       </p:sp>
       <p:sp>
         <p:nvSpPr>
-          <p:cNvPr id="374" name="" descr="{&quot;isTemplate&quot;:true,&quot;type&quot;:&quot;text&quot;}"/>
+          <p:cNvPr id="390" name="" descr="{&quot;isTemplate&quot;:true,&quot;type&quot;:&quot;text&quot;}"/>
           <p:cNvSpPr txBox="1"/>
           <p:nvPr/>
         </p:nvSpPr>
@@ -17401,7 +17847,7 @@
       </p:sp>
       <p:sp>
         <p:nvSpPr>
-          <p:cNvPr id="375" name=""/>
+          <p:cNvPr id="391" name=""/>
           <p:cNvSpPr/>
           <p:nvPr/>
         </p:nvSpPr>
@@ -17434,7 +17880,7 @@
       </p:sp>
       <p:sp>
         <p:nvSpPr>
-          <p:cNvPr id="376" name=""/>
+          <p:cNvPr id="392" name=""/>
           <p:cNvSpPr/>
           <p:nvPr/>
         </p:nvSpPr>
@@ -17491,7 +17937,7 @@
       </p:sp>
       <p:sp>
         <p:nvSpPr>
-          <p:cNvPr id="377" name="" descr="{&quot;isTemplate&quot;:true,&quot;type&quot;:&quot;text&quot;}"/>
+          <p:cNvPr id="393" name="" descr="{&quot;isTemplate&quot;:true,&quot;type&quot;:&quot;text&quot;}"/>
           <p:cNvSpPr txBox="1"/>
           <p:nvPr/>
         </p:nvSpPr>
@@ -17536,7 +17982,7 @@
       </p:sp>
       <p:sp>
         <p:nvSpPr>
-          <p:cNvPr id="378" name="" descr="{&quot;isTemplate&quot;:true,&quot;type&quot;:&quot;text&quot;}"/>
+          <p:cNvPr id="394" name="" descr="{&quot;isTemplate&quot;:true,&quot;type&quot;:&quot;text&quot;}"/>
           <p:cNvSpPr txBox="1"/>
           <p:nvPr/>
         </p:nvSpPr>
@@ -17571,7 +18017,7 @@
       </p:sp>
       <p:sp>
         <p:nvSpPr>
-          <p:cNvPr id="379" name=""/>
+          <p:cNvPr id="395" name=""/>
           <p:cNvSpPr/>
           <p:nvPr/>
         </p:nvSpPr>
@@ -17604,7 +18050,7 @@
       </p:sp>
       <p:sp>
         <p:nvSpPr>
-          <p:cNvPr id="380" name=""/>
+          <p:cNvPr id="396" name=""/>
           <p:cNvSpPr/>
           <p:nvPr/>
         </p:nvSpPr>
@@ -17661,7 +18107,7 @@
       </p:sp>
       <p:sp>
         <p:nvSpPr>
-          <p:cNvPr id="381" name="" descr="{&quot;isTemplate&quot;:true,&quot;type&quot;:&quot;text&quot;}"/>
+          <p:cNvPr id="397" name="" descr="{&quot;isTemplate&quot;:true,&quot;type&quot;:&quot;text&quot;}"/>
           <p:cNvSpPr txBox="1"/>
           <p:nvPr/>
         </p:nvSpPr>
@@ -17706,7 +18152,7 @@
       </p:sp>
       <p:sp>
         <p:nvSpPr>
-          <p:cNvPr id="382" name="" descr="{&quot;isTemplate&quot;:true,&quot;type&quot;:&quot;text&quot;}"/>
+          <p:cNvPr id="398" name="" descr="{&quot;isTemplate&quot;:true,&quot;type&quot;:&quot;text&quot;}"/>
           <p:cNvSpPr txBox="1"/>
           <p:nvPr/>
         </p:nvSpPr>
@@ -17741,7 +18187,7 @@
       </p:sp>
       <p:sp>
         <p:nvSpPr>
-          <p:cNvPr id="383" name=""/>
+          <p:cNvPr id="399" name=""/>
           <p:cNvSpPr/>
           <p:nvPr/>
         </p:nvSpPr>
@@ -17774,7 +18220,7 @@
       </p:sp>
       <p:sp>
         <p:nvSpPr>
-          <p:cNvPr id="384" name=""/>
+          <p:cNvPr id="400" name=""/>
           <p:cNvSpPr/>
           <p:nvPr/>
         </p:nvSpPr>
@@ -17831,7 +18277,7 @@
       </p:sp>
       <p:sp>
         <p:nvSpPr>
-          <p:cNvPr id="385" name="" descr="{&quot;isTemplate&quot;:true,&quot;type&quot;:&quot;text&quot;}"/>
+          <p:cNvPr id="401" name="" descr="{&quot;isTemplate&quot;:true,&quot;type&quot;:&quot;text&quot;}"/>
           <p:cNvSpPr txBox="1"/>
           <p:nvPr/>
         </p:nvSpPr>
@@ -17876,7 +18322,7 @@
       </p:sp>
       <p:sp>
         <p:nvSpPr>
-          <p:cNvPr id="386" name="" descr="{&quot;isTemplate&quot;:true,&quot;type&quot;:&quot;text&quot;}"/>
+          <p:cNvPr id="402" name="" descr="{&quot;isTemplate&quot;:true,&quot;type&quot;:&quot;text&quot;}"/>
           <p:cNvSpPr txBox="1"/>
           <p:nvPr/>
         </p:nvSpPr>
@@ -17931,7 +18377,7 @@
       </p:sp>
       <p:sp>
         <p:nvSpPr>
-          <p:cNvPr id="387" name=""/>
+          <p:cNvPr id="403" name=""/>
           <p:cNvSpPr/>
           <p:nvPr/>
         </p:nvSpPr>
@@ -17964,7 +18410,7 @@
       </p:sp>
       <p:sp>
         <p:nvSpPr>
-          <p:cNvPr id="388" name=""/>
+          <p:cNvPr id="404" name=""/>
           <p:cNvSpPr/>
           <p:nvPr/>
         </p:nvSpPr>
@@ -18021,7 +18467,7 @@
       </p:sp>
       <p:sp>
         <p:nvSpPr>
-          <p:cNvPr id="389" name="" descr="{&quot;isTemplate&quot;:true,&quot;type&quot;:&quot;text&quot;}"/>
+          <p:cNvPr id="405" name="" descr="{&quot;isTemplate&quot;:true,&quot;type&quot;:&quot;text&quot;}"/>
           <p:cNvSpPr txBox="1"/>
           <p:nvPr/>
         </p:nvSpPr>
@@ -18066,7 +18512,7 @@
       </p:sp>
       <p:sp>
         <p:nvSpPr>
-          <p:cNvPr id="390" name="" descr="{&quot;isTemplate&quot;:true,&quot;type&quot;:&quot;text&quot;}"/>
+          <p:cNvPr id="406" name="" descr="{&quot;isTemplate&quot;:true,&quot;type&quot;:&quot;text&quot;}"/>
           <p:cNvSpPr txBox="1"/>
           <p:nvPr/>
         </p:nvSpPr>
@@ -18101,7 +18547,7 @@
       </p:sp>
       <p:sp>
         <p:nvSpPr>
-          <p:cNvPr id="391" name="" descr="{&quot;isTemplate&quot;:true,&quot;type&quot;:&quot;text&quot;}"/>
+          <p:cNvPr id="407" name="" descr="{&quot;isTemplate&quot;:true,&quot;type&quot;:&quot;text&quot;}"/>
           <p:cNvSpPr txBox="1"/>
           <p:nvPr/>
         </p:nvSpPr>
@@ -18156,7 +18602,7 @@
       </p:sp>
       <p:sp>
         <p:nvSpPr>
-          <p:cNvPr id="392" name="" descr="{&quot;isTemplate&quot;:true,&quot;type&quot;:&quot;text&quot;}"/>
+          <p:cNvPr id="408" name="" descr="{&quot;isTemplate&quot;:true,&quot;type&quot;:&quot;text&quot;}"/>
           <p:cNvSpPr txBox="1"/>
           <p:nvPr/>
         </p:nvSpPr>
@@ -18199,7 +18645,7 @@
   <p:cSld>
     <p:spTree>
       <p:nvGrpSpPr>
-        <p:cNvPr id="393" name="" descr="&lt;Slide style={{ width: '1280px', height: '720px', background: '#FBFCFA', position: 'relative', padding: '32px 64px', boxSizing: 'border-box', display: 'flex', flexDirection: 'column' }}&gt;&#13;&#10;  &lt;div style={{ flexShrink: 0 }}&gt;&#13;&#10;    &lt;div style={{ color: '#BD9B56', fontSize: 13, letterSpacing: '0.25em', marginBottom: 6 }}&gt;01 · 项目规模&lt;/div&gt;&#13;&#10;    &lt;h2 style={{ fontSize: 30, fontWeight: 'bold', color: '#172133', margin: 0, lineHeight: 1.3 }}&gt;虚拟社区数据资产：云溪花园&lt;/h2&gt;&#13;&#10;    &lt;div style={{ fontSize: 14, color: '#6b7075', marginTop: 6 }}&gt;以一个社区为根，向下延伸出空间、人员、业务、知识四类数据资产&lt;/div&gt;&#13;&#10;  &lt;/div&gt;&#13;&#10;  &lt;div style={{ flex: 1, display: 'flex', alignItems: 'center', justifyContent: 'center' }}&gt;&#13;&#10;    &lt;svg width=&quot;1150&quot; height=&quot;470&quot; viewBox=&quot;0 0 1150 470&quot;&gt;&#13;&#10;      &lt;g fontFamily=&quot;Inter, sans-serif&quot;&gt;&#13;&#10;        {/* 根节点 community */}&#13;&#10;        &lt;rect x=&quot;450&quot; y=&quot;14&quot; width=&quot;250&quot; height=&quot;58&quot; rx=&quot;10&quot; fill=&quot;#172133&quot; /&gt;&#13;&#10;        &lt;text x=&quot;575&quot; y=&quot;38&quot; textAnchor=&quot;middle&quot; fontSize=&quot;15&quot; fontWeight=&quot;bold&quot; fill=&quot;#FBFCFA&quot;&gt;community 云溪花园&lt;/text&gt;&#13;&#10;        &lt;text x=&quot;575&quot; y=&quot;58&quot; textAnchor=&quot;middle&quot; fontSize=&quot;11&quot; fill=&quot;#BD9B56&quot;&gt;1 个小区 · 上海浦东张江路1268号&lt;/text&gt;&#13;&#10;        {/* 根节点连接线 */}&#13;&#10;        &lt;line x1=&quot;575&quot; y1=&quot;72&quot; x2=&quot;575&quot; y2=&quot;92&quot; stroke=&quot;#BD9B56&quot; strokeWidth=&quot;1.5&quot; /&gt;&#13;&#10;        &lt;line x1=&quot;150&quot; y1=&quot;92&quot; x2=&quot;1015&quot; y2=&quot;92&quot; stroke=&quot;#BD9B56&quot; strokeWidth=&quot;1.5&quot; /&gt;&#13;&#10;        &lt;line x1=&quot;150&quot; y1=&quot;92&quot; x2=&quot;150&quot; y2=&quot;108&quot; stroke=&quot;#BD9B56&quot; strokeWidth=&quot;1.5&quot; /&gt;&#13;&#10;        &lt;line x1=&quot;438&quot; y1=&quot;92&quot; x2=&quot;438&quot; y2=&quot;108&quot; stroke=&quot;#BD9B56&quot; strokeWidth=&quot;1.5&quot; /&gt;&#13;&#10;        &lt;line x1=&quot;726&quot; y1=&quot;92&quot; x2=&quot;726&quot; y2=&quot;108&quot; stroke=&quot;#BD9B56&quot; strokeWidth=&quot;1.5&quot; /&gt;&#13;&#10;        &lt;line x1=&quot;1015&quot; y1=&quot;92&quot; x2=&quot;1015&quot; y2=&quot;108&quot; stroke=&quot;#BD9B56&quot; strokeWidth=&quot;1.5&quot; /&gt;&#13;&#10;&#13;&#10;        {/* 分组1：空间资产 */}&#13;&#10;        &lt;text x=&quot;150&quot; y=&quot;128&quot; textAnchor=&quot;middle&quot; fontSize=&quot;12&quot; fontWeight=&quot;bold&quot; fill=&quot;#BD9B56&quot;&gt;空间资产&lt;/text&gt;&#13;&#10;        &lt;rect x=&quot;20&quot; y=&quot;138&quot; width=&quot;260&quot; height=&quot;56&quot; rx=&quot;8&quot; fill=&quot;rgba(34,57,94,0.06)&quot; stroke=&quot;#22395E&quot; strokeWidth=&quot;1.5&quot; /&gt;&#13;&#10;        &lt;text x=&quot;150&quot; y=&quot;162&quot; textAnchor=&quot;middle&quot; fontSize=&quot;14&quot; fontWeight=&quot;bold&quot; fill=&quot;#172133&quot;&gt;building 楼栋 ×8&lt;/text&gt;&#13;&#10;        &lt;text x=&quot;150&quot; y=&quot;182&quot; textAnchor=&quot;middle&quot; fontSize=&quot;11&quot; fill=&quot;#5F5E5A&quot;&gt;每栋 26 层 · 2 单元 · 4 户/层&lt;/text&gt;&#13;&#10;        &lt;line x1=&quot;150&quot; y1=&quot;194&quot; x2=&quot;150&quot; y2=&quot;206&quot; stroke=&quot;#BD9B56&quot; strokeWidth=&quot;1.2&quot; /&gt;&#13;&#10;        &lt;rect x=&quot;20&quot; y=&quot;210&quot; width=&quot;260&quot; height=&quot;56&quot; rx=&quot;8&quot; fill=&quot;rgba(34,57,94,0.06)&quot; stroke=&quot;#22395E&quot; strokeWidth=&quot;1.5&quot; /&gt;&#13;&#10;        &lt;text x=&quot;150&quot; y=&quot;234&quot; textAnchor=&quot;middle&quot; fontSize=&quot;14&quot; fontWeight=&quot;bold&quot; fill=&quot;#172133&quot;&gt;house 房屋 ×1664&lt;/text&gt;&#13;&#10;        &lt;text x=&quot;150&quot; y=&quot;254&quot; textAnchor=&quot;middle&quot; fontSize=&quot;11&quot; fill=&quot;#5F5E5A&quot;&gt;入住约 1200 户 · 800 车位&lt;/text&gt;&#13;&#10;&#13;&#10;        {/* 分组2：人员资产 */}&#13;&#10;        &lt;text x=&quot;438&quot; y=&quot;128&quot; textAnchor=&quot;middle&quot; fontSize=&quot;12&quot; fontWeight=&quot;bold&quot; fill=&quot;#BD9B56&quot;&gt;人员资产&lt;/text&gt;&#13;&#10;        &lt;rect x=&quot;308&quot; y=&quot;138&quot; width=&quot;260&quot; height=&quot;56&quot; rx=&quot;8&quot; fill=&quot;rgba(189,155,86,0.10)&quot; stroke=&quot;#BD9B56&quot; strokeWidth=&quot;1.5&quot; /&gt;&#13;&#10;        &lt;text x=&quot;438&quot; y=&quot;162&quot; textAnchor=&quot;middle&quot; fontSize=&quot;14&quot; fontWeight=&quot;bold&quot; fill=&quot;#172133&quot;&gt;user 业主 ×200&lt;/text&gt;&#13;&#10;        &lt;text x=&quot;438&quot; y=&quot;182&quot; textAnchor=&quot;middle&quot; fontSize=&quot;11&quot; fill=&quot;#5F5E5A&quot;&gt;house_binding 绑定 200 套&lt;/text&gt;&#13;&#10;        &lt;line x1=&quot;438&quot; y1=&quot;194&quot; x2=&quot;438&quot; y2=&quot;206&quot; stroke=&quot;#BD9B56&quot; strokeWidth=&quot;1.2&quot; /&gt;&#13;&#10;        &lt;rect x=&quot;308&quot; y=&quot;210&quot; width=&quot;260&quot; height=&quot;56&quot; rx=&quot;8&quot; fill=&quot;rgba(189,155,86,0.10)&quot; stroke=&quot;#BD9B56&quot; strokeWidth=&quot;1.5&quot; /&gt;&#13;&#10;        &lt;text x=&quot;438&quot; y=&quot;234&quot; textAnchor=&quot;middle&quot; fontSize=&quot;14&quot; fontWeight=&quot;bold&quot; fill=&quot;#172133&quot;&gt;worker 物业 ×75&lt;/text&gt;&#13;&#10;        &lt;text x=&quot;438&quot; y=&quot;254&quot; textAnchor=&quot;middle&quot; fontSize=&quot;11&quot; fill=&quot;#5F5E5A&quot;&gt;10 管理 / 15 维修 / 50 一线&lt;/text&gt;&#13;&#10;&#13;&#10;        {/* 分组3：业务数据 */}&#13;&#10;        &lt;text x=&quot;726&quot; y=&quot;128&quot; textAnchor=&quot;middle&quot; fontSize=&quot;12&quot; fontWeight=&quot;bold&quot; fill=&quot;#BD9B56&quot;&gt;业务数据&lt;/text&gt;&#13;&#10;        &lt;rect x=&quot;596&quot; y=&quot;138&quot; width=&quot;260&quot; height=&quot;40&quot; rx=&quot;8&quot; fill=&quot;rgba(34,57,94,0.06)&quot; stroke=&quot;#22395E&quot; strokeWidth=&quot;1.5&quot; /&gt;&#13;&#10;        &lt;text x=&quot;726&quot; y=&quot;163&quot; textAnchor=&quot;middle&quot; fontSize=&quot;13&quot; fontWeight=&quot;bold&quot; fill=&quot;#172133&quot;&gt;repair_order 工单 ×50&lt;/text&gt;&#13;&#10;        &lt;rect x=&quot;596&quot; y=&quot;186&quot; width=&quot;260&quot; height=&quot;40&quot; rx=&quot;8&quot; fill=&quot;rgba(34,57,94,0.06)&quot; stroke=&quot;#22395E&quot; strokeWidth=&quot;1.5&quot; /&gt;&#13;&#10;        &lt;text x=&quot;726&quot; y=&quot;211&quot; textAnchor=&quot;middle&quot; fontSize=&quot;13&quot; fontWeight=&quot;bold&quot; fill=&quot;#172133&quot;&gt;fee_bill 账单 ×746&lt;/text&gt;&#13;&#10;        &lt;rect x=&quot;596&quot; y=&quot;234&quot; width=&quot;260&quot; height=&quot;40&quot; rx=&quot;8&quot; fill=&quot;rgba(34,57,94,0.06)&quot; stroke=&quot;#22395E&quot; strokeWidth=&quot;1.5&quot; /&gt;&#13;&#10;        &lt;text x=&quot;726&quot; y=&quot;259&quot; textAnchor=&quot;middle&quot; fontSize=&quot;13&quot; fontWeight=&quot;bold&quot; fill=&quot;#172133&quot;&gt;notice 公告 ×24&lt;/text&gt;&#13;&#10;&#13;&#10;        {/* 分组4：知识资产 */}&#13;&#10;        &lt;text x=&quot;1015&quot; y=&quot;128&quot; textAnchor=&quot;middle&quot; fontSize=&quot;12&quot; fontWeight=&quot;bold&quot; fill=&quot;#BD9B56&quot;&gt;知识资产&lt;/text&gt;&#13;&#10;        &lt;rect x=&quot;885&quot; y=&quot;138&quot; width=&quot;260&quot; height=&quot;56&quot; rx=&quot;8&quot; fill=&quot;#22395E&quot; /&gt;&#13;&#10;        &lt;text x=&quot;1015&quot; y=&quot;162&quot; textAnchor=&quot;middle&quot; fontSize=&quot;14&quot; fontWeight=&quot;bold&quot; fill=&quot;#FBFCFA&quot;&gt;knowledge 文档 ×22&lt;/text&gt;&#13;&#10;        &lt;text x=&quot;1015&quot; y=&quot;182&quot; textAnchor=&quot;middle&quot; fontSize=&quot;11&quot; fill=&quot;#BD9B56&quot;&gt;7 个分类（规约/装修/停车…）&lt;/text&gt;&#13;&#10;        &lt;line x1=&quot;1015&quot; y1=&quot;194&quot; x2=&quot;1015&quot; y2=&quot;206&quot; stroke=&quot;#BD9B56&quot; strokeWidth=&quot;1.2&quot; /&gt;&#13;&#10;        &lt;rect x=&quot;885&quot; y=&quot;210&quot; width=&quot;260&quot; height=&quot;56&quot; rx=&quot;8&quot; fill=&quot;rgba(34,57,94,0.06)&quot; stroke=&quot;#BD9B56&quot; strokeWidth=&quot;1.5&quot; /&gt;&#13;&#10;        &lt;text x=&quot;1015&quot; y=&quot;234&quot; textAnchor=&quot;middle&quot; fontSize=&quot;14&quot; fontWeight=&quot;bold&quot; fill=&quot;#172133&quot;&gt;chunk 切片 ×99&lt;/text&gt;&#13;&#10;        &lt;text x=&quot;1015&quot; y=&quot;254&quot; textAnchor=&quot;middle&quot; fontSize=&quot;11&quot; fill=&quot;#5F5E5A&quot;&gt;pgvector 1024 维向量&lt;/text&gt;&#13;&#10;&#13;&#10;        {/* 底部关系说明 */}&#13;&#10;        &lt;rect x=&quot;300&quot; y=&quot;290&quot; width=&quot;550&quot; height=&quot;48&quot; rx=&quot;8&quot; fill=&quot;rgba(189,155,86,0.10)&quot; /&gt;&#13;&#10;        &lt;text x=&quot;575&quot; y=&quot;318&quot; textAnchor=&quot;middle&quot; fontSize=&quot;12&quot; fill=&quot;#172133&quot;&gt;repair_order → user + house + worker · fee_bill → house + user · 外键关联&lt;/text&gt;&#13;&#10;        &lt;text x=&quot;575&quot; y=&quot;334&quot; textAnchor=&quot;middle&quot; fontSize=&quot;11&quot; fill=&quot;#5F5E5A&quot;&gt;8 个 SQL 种子文件 · 一键导入可复现&lt;/text&gt;&#13;&#10;      &lt;/g&gt;&#13;&#10;    &lt;/svg&gt;&#13;&#10;  &lt;/div&gt;&#13;&#10;  &lt;div style={{ flexShrink: 0, height: 40, display: 'flex', alignItems: 'flex-end', justifyContent: 'space-between' }}&gt;&#13;&#10;    &lt;span style={{ color: '#BD9B56', fontSize: 12, letterSpacing: '0.1em' }}&gt;云溪花园 · 智慧社区&lt;/span&gt;&#13;&#10;    &lt;span style={{ color: '#a09b8c', fontSize: 12 }}&gt;6 / 19&lt;/span&gt;&#13;&#10;  &lt;/div&gt;&#13;&#10;&lt;/Slide&gt;"/>
+        <p:cNvPr id="409" name="" descr="&lt;Slide style={{ width: '1280px', height: '720px', background: '#FBFCFA', position: 'relative', padding: '32px 64px', boxSizing: 'border-box', display: 'flex', flexDirection: 'column' }}&gt;&#13;&#10;  &lt;div style={{ flexShrink: 0 }}&gt;&#13;&#10;    &lt;div style={{ color: '#BD9B56', fontSize: 13, letterSpacing: '0.25em', marginBottom: 6 }}&gt;01 · 项目规模&lt;/div&gt;&#13;&#10;    &lt;h2 style={{ fontSize: 30, fontWeight: 'bold', color: '#172133', margin: 0, lineHeight: 1.3 }}&gt;虚拟社区数据资产：云溪花园&lt;/h2&gt;&#13;&#10;    &lt;div style={{ fontSize: 14, color: '#6b7075', marginTop: 6 }}&gt;以一个社区为根，向下延伸出空间、人员、业务、知识四类数据资产&lt;/div&gt;&#13;&#10;  &lt;/div&gt;&#13;&#10;  &lt;div style={{ flex: 1, display: 'flex', alignItems: 'center', justifyContent: 'center' }}&gt;&#13;&#10;    &lt;svg width=&quot;1150&quot; height=&quot;470&quot; viewBox=&quot;0 0 1150 470&quot;&gt;&#13;&#10;      &lt;g fontFamily=&quot;Inter, sans-serif&quot;&gt;&#13;&#10;        {/* 根节点 community */}&#13;&#10;        &lt;rect x=&quot;450&quot; y=&quot;14&quot; width=&quot;250&quot; height=&quot;58&quot; rx=&quot;10&quot; fill=&quot;#172133&quot; /&gt;&#13;&#10;        &lt;text x=&quot;575&quot; y=&quot;38&quot; textAnchor=&quot;middle&quot; fontSize=&quot;15&quot; fontWeight=&quot;bold&quot; fill=&quot;#FBFCFA&quot;&gt;community 云溪花园&lt;/text&gt;&#13;&#10;        &lt;text x=&quot;575&quot; y=&quot;58&quot; textAnchor=&quot;middle&quot; fontSize=&quot;11&quot; fill=&quot;#BD9B56&quot;&gt;1 个小区 · 上海浦东张江路1268号&lt;/text&gt;&#13;&#10;        {/* 根节点连接线 */}&#13;&#10;        &lt;line x1=&quot;575&quot; y1=&quot;72&quot; x2=&quot;575&quot; y2=&quot;92&quot; stroke=&quot;#BD9B56&quot; strokeWidth=&quot;1.5&quot; /&gt;&#13;&#10;        &lt;line x1=&quot;150&quot; y1=&quot;92&quot; x2=&quot;1015&quot; y2=&quot;92&quot; stroke=&quot;#BD9B56&quot; strokeWidth=&quot;1.5&quot; /&gt;&#13;&#10;        &lt;line x1=&quot;150&quot; y1=&quot;92&quot; x2=&quot;150&quot; y2=&quot;108&quot; stroke=&quot;#BD9B56&quot; strokeWidth=&quot;1.5&quot; /&gt;&#13;&#10;        &lt;line x1=&quot;438&quot; y1=&quot;92&quot; x2=&quot;438&quot; y2=&quot;108&quot; stroke=&quot;#BD9B56&quot; strokeWidth=&quot;1.5&quot; /&gt;&#13;&#10;        &lt;line x1=&quot;726&quot; y1=&quot;92&quot; x2=&quot;726&quot; y2=&quot;108&quot; stroke=&quot;#BD9B56&quot; strokeWidth=&quot;1.5&quot; /&gt;&#13;&#10;        &lt;line x1=&quot;1015&quot; y1=&quot;92&quot; x2=&quot;1015&quot; y2=&quot;108&quot; stroke=&quot;#BD9B56&quot; strokeWidth=&quot;1.5&quot; /&gt;&#13;&#10;&#13;&#10;        {/* 分组1：空间资产 */}&#13;&#10;        &lt;text x=&quot;150&quot; y=&quot;128&quot; textAnchor=&quot;middle&quot; fontSize=&quot;12&quot; fontWeight=&quot;bold&quot; fill=&quot;#BD9B56&quot;&gt;空间资产&lt;/text&gt;&#13;&#10;        &lt;rect x=&quot;20&quot; y=&quot;138&quot; width=&quot;260&quot; height=&quot;56&quot; rx=&quot;8&quot; fill=&quot;rgba(34,57,94,0.06)&quot; stroke=&quot;#22395E&quot; strokeWidth=&quot;1.5&quot; /&gt;&#13;&#10;        &lt;text x=&quot;150&quot; y=&quot;162&quot; textAnchor=&quot;middle&quot; fontSize=&quot;14&quot; fontWeight=&quot;bold&quot; fill=&quot;#172133&quot;&gt;building 楼栋 ×8&lt;/text&gt;&#13;&#10;        &lt;text x=&quot;150&quot; y=&quot;182&quot; textAnchor=&quot;middle&quot; fontSize=&quot;11&quot; fill=&quot;#5F5E5A&quot;&gt;每栋 26 层 · 2 单元 · 4 户/层&lt;/text&gt;&#13;&#10;        &lt;line x1=&quot;150&quot; y1=&quot;194&quot; x2=&quot;150&quot; y2=&quot;206&quot; stroke=&quot;#BD9B56&quot; strokeWidth=&quot;1.2&quot; /&gt;&#13;&#10;        &lt;rect x=&quot;20&quot; y=&quot;210&quot; width=&quot;260&quot; height=&quot;56&quot; rx=&quot;8&quot; fill=&quot;rgba(34,57,94,0.06)&quot; stroke=&quot;#22395E&quot; strokeWidth=&quot;1.5&quot; /&gt;&#13;&#10;        &lt;text x=&quot;150&quot; y=&quot;234&quot; textAnchor=&quot;middle&quot; fontSize=&quot;14&quot; fontWeight=&quot;bold&quot; fill=&quot;#172133&quot;&gt;house 房屋 ×1664&lt;/text&gt;&#13;&#10;        &lt;text x=&quot;150&quot; y=&quot;254&quot; textAnchor=&quot;middle&quot; fontSize=&quot;11&quot; fill=&quot;#5F5E5A&quot;&gt;入住约 1200 户 · 800 车位&lt;/text&gt;&#13;&#10;&#13;&#10;        {/* 分组2：人员资产 */}&#13;&#10;        &lt;text x=&quot;438&quot; y=&quot;128&quot; textAnchor=&quot;middle&quot; fontSize=&quot;12&quot; fontWeight=&quot;bold&quot; fill=&quot;#BD9B56&quot;&gt;人员资产&lt;/text&gt;&#13;&#10;        &lt;rect x=&quot;308&quot; y=&quot;138&quot; width=&quot;260&quot; height=&quot;56&quot; rx=&quot;8&quot; fill=&quot;rgba(189,155,86,0.10)&quot; stroke=&quot;#BD9B56&quot; strokeWidth=&quot;1.5&quot; /&gt;&#13;&#10;        &lt;text x=&quot;438&quot; y=&quot;162&quot; textAnchor=&quot;middle&quot; fontSize=&quot;14&quot; fontWeight=&quot;bold&quot; fill=&quot;#172133&quot;&gt;user 业主 ×200&lt;/text&gt;&#13;&#10;        &lt;text x=&quot;438&quot; y=&quot;182&quot; textAnchor=&quot;middle&quot; fontSize=&quot;11&quot; fill=&quot;#5F5E5A&quot;&gt;house_binding 绑定 200 套&lt;/text&gt;&#13;&#10;        &lt;line x1=&quot;438&quot; y1=&quot;194&quot; x2=&quot;438&quot; y2=&quot;206&quot; stroke=&quot;#BD9B56&quot; strokeWidth=&quot;1.2&quot; /&gt;&#13;&#10;        &lt;rect x=&quot;308&quot; y=&quot;210&quot; width=&quot;260&quot; height=&quot;56&quot; rx=&quot;8&quot; fill=&quot;rgba(189,155,86,0.10)&quot; stroke=&quot;#BD9B56&quot; strokeWidth=&quot;1.5&quot; /&gt;&#13;&#10;        &lt;text x=&quot;438&quot; y=&quot;234&quot; textAnchor=&quot;middle&quot; fontSize=&quot;14&quot; fontWeight=&quot;bold&quot; fill=&quot;#172133&quot;&gt;worker 物业 ×75&lt;/text&gt;&#13;&#10;        &lt;text x=&quot;438&quot; y=&quot;254&quot; textAnchor=&quot;middle&quot; fontSize=&quot;11&quot; fill=&quot;#5F5E5A&quot;&gt;10 管理 / 15 维修 / 50 一线&lt;/text&gt;&#13;&#10;&#13;&#10;        {/* 分组3：业务数据 */}&#13;&#10;        &lt;text x=&quot;726&quot; y=&quot;128&quot; textAnchor=&quot;middle&quot; fontSize=&quot;12&quot; fontWeight=&quot;bold&quot; fill=&quot;#BD9B56&quot;&gt;业务数据&lt;/text&gt;&#13;&#10;        &lt;rect x=&quot;596&quot; y=&quot;138&quot; width=&quot;260&quot; height=&quot;40&quot; rx=&quot;8&quot; fill=&quot;rgba(34,57,94,0.06)&quot; stroke=&quot;#22395E&quot; strokeWidth=&quot;1.5&quot; /&gt;&#13;&#10;        &lt;text x=&quot;726&quot; y=&quot;163&quot; textAnchor=&quot;middle&quot; fontSize=&quot;13&quot; fontWeight=&quot;bold&quot; fill=&quot;#172133&quot;&gt;repair_order 工单 ×50&lt;/text&gt;&#13;&#10;        &lt;rect x=&quot;596&quot; y=&quot;186&quot; width=&quot;260&quot; height=&quot;40&quot; rx=&quot;8&quot; fill=&quot;rgba(34,57,94,0.06)&quot; stroke=&quot;#22395E&quot; strokeWidth=&quot;1.5&quot; /&gt;&#13;&#10;        &lt;text x=&quot;726&quot; y=&quot;211&quot; textAnchor=&quot;middle&quot; fontSize=&quot;13&quot; fontWeight=&quot;bold&quot; fill=&quot;#172133&quot;&gt;fee_bill 账单 ×746&lt;/text&gt;&#13;&#10;        &lt;rect x=&quot;596&quot; y=&quot;234&quot; width=&quot;260&quot; height=&quot;40&quot; rx=&quot;8&quot; fill=&quot;rgba(34,57,94,0.06)&quot; stroke=&quot;#22395E&quot; strokeWidth=&quot;1.5&quot; /&gt;&#13;&#10;        &lt;text x=&quot;726&quot; y=&quot;259&quot; textAnchor=&quot;middle&quot; fontSize=&quot;13&quot; fontWeight=&quot;bold&quot; fill=&quot;#172133&quot;&gt;notice 公告 ×24&lt;/text&gt;&#13;&#10;&#13;&#10;        {/* 分组4：知识资产 */}&#13;&#10;        &lt;text x=&quot;1015&quot; y=&quot;128&quot; textAnchor=&quot;middle&quot; fontSize=&quot;12&quot; fontWeight=&quot;bold&quot; fill=&quot;#BD9B56&quot;&gt;知识资产&lt;/text&gt;&#13;&#10;        &lt;rect x=&quot;885&quot; y=&quot;138&quot; width=&quot;260&quot; height=&quot;56&quot; rx=&quot;8&quot; fill=&quot;#22395E&quot; /&gt;&#13;&#10;        &lt;text x=&quot;1015&quot; y=&quot;162&quot; textAnchor=&quot;middle&quot; fontSize=&quot;14&quot; fontWeight=&quot;bold&quot; fill=&quot;#FBFCFA&quot;&gt;knowledge 文档 ×22&lt;/text&gt;&#13;&#10;        &lt;text x=&quot;1015&quot; y=&quot;182&quot; textAnchor=&quot;middle&quot; fontSize=&quot;11&quot; fill=&quot;#BD9B56&quot;&gt;7 个分类（规约/装修/停车…）&lt;/text&gt;&#13;&#10;        &lt;line x1=&quot;1015&quot; y1=&quot;194&quot; x2=&quot;1015&quot; y2=&quot;206&quot; stroke=&quot;#BD9B56&quot; strokeWidth=&quot;1.2&quot; /&gt;&#13;&#10;        &lt;rect x=&quot;885&quot; y=&quot;210&quot; width=&quot;260&quot; height=&quot;56&quot; rx=&quot;8&quot; fill=&quot;rgba(34,57,94,0.06)&quot; stroke=&quot;#BD9B56&quot; strokeWidth=&quot;1.5&quot; /&gt;&#13;&#10;        &lt;text x=&quot;1015&quot; y=&quot;234&quot; textAnchor=&quot;middle&quot; fontSize=&quot;14&quot; fontWeight=&quot;bold&quot; fill=&quot;#172133&quot;&gt;chunk 切片 ×99&lt;/text&gt;&#13;&#10;        &lt;text x=&quot;1015&quot; y=&quot;254&quot; textAnchor=&quot;middle&quot; fontSize=&quot;11&quot; fill=&quot;#5F5E5A&quot;&gt;pgvector 1024 维向量&lt;/text&gt;&#13;&#10;&#13;&#10;        {/* 底部关系说明 */}&#13;&#10;        &lt;rect x=&quot;300&quot; y=&quot;290&quot; width=&quot;550&quot; height=&quot;48&quot; rx=&quot;8&quot; fill=&quot;rgba(189,155,86,0.10)&quot; /&gt;&#13;&#10;        &lt;text x=&quot;575&quot; y=&quot;318&quot; textAnchor=&quot;middle&quot; fontSize=&quot;12&quot; fill=&quot;#172133&quot;&gt;repair_order → user + house + worker · fee_bill → house + user · 外键关联&lt;/text&gt;&#13;&#10;        &lt;text x=&quot;575&quot; y=&quot;334&quot; textAnchor=&quot;middle&quot; fontSize=&quot;11&quot; fill=&quot;#5F5E5A&quot;&gt;8 个 SQL 种子文件 · 一键导入可复现&lt;/text&gt;&#13;&#10;      &lt;/g&gt;&#13;&#10;    &lt;/svg&gt;&#13;&#10;  &lt;/div&gt;&#13;&#10;  &lt;div style={{ flexShrink: 0, height: 40, display: 'flex', alignItems: 'flex-end', justifyContent: 'space-between' }}&gt;&#13;&#10;    &lt;span style={{ color: '#BD9B56', fontSize: 12, letterSpacing: '0.1em' }}&gt;云溪花园 · 智慧社区&lt;/span&gt;&#13;&#10;    &lt;span style={{ color: '#a09b8c', fontSize: 12 }}&gt;6 / 19&lt;/span&gt;&#13;&#10;  &lt;/div&gt;&#13;&#10;&lt;/Slide&gt;"/>
         <p:cNvGrpSpPr/>
         <p:nvPr/>
       </p:nvGrpSpPr>
@@ -18213,7 +18659,7 @@
       </p:grpSpPr>
       <p:sp>
         <p:nvSpPr>
-          <p:cNvPr id="394" name=""/>
+          <p:cNvPr id="410" name=""/>
           <p:cNvSpPr/>
           <p:nvPr/>
         </p:nvSpPr>
@@ -18237,7 +18683,7 @@
       </p:sp>
       <p:sp>
         <p:nvSpPr>
-          <p:cNvPr id="395" name="" descr="{&quot;isTemplate&quot;:true,&quot;type&quot;:&quot;text&quot;}"/>
+          <p:cNvPr id="411" name="" descr="{&quot;isTemplate&quot;:true,&quot;type&quot;:&quot;text&quot;}"/>
           <p:cNvSpPr txBox="1"/>
           <p:nvPr/>
         </p:nvSpPr>
@@ -18282,7 +18728,7 @@
       </p:sp>
       <p:sp>
         <p:nvSpPr>
-          <p:cNvPr id="396" name="" descr="{&quot;isTemplate&quot;:true,&quot;type&quot;:&quot;text&quot;}"/>
+          <p:cNvPr id="412" name="" descr="{&quot;isTemplate&quot;:true,&quot;type&quot;:&quot;text&quot;}"/>
           <p:cNvSpPr txBox="1"/>
           <p:nvPr/>
         </p:nvSpPr>
@@ -18317,7 +18763,7 @@
       </p:sp>
       <p:sp>
         <p:nvSpPr>
-          <p:cNvPr id="397" name="" descr="{&quot;isTemplate&quot;:true,&quot;type&quot;:&quot;text&quot;}"/>
+          <p:cNvPr id="413" name="" descr="{&quot;isTemplate&quot;:true,&quot;type&quot;:&quot;text&quot;}"/>
           <p:cNvSpPr txBox="1"/>
           <p:nvPr/>
         </p:nvSpPr>
@@ -18352,7 +18798,7 @@
       </p:sp>
       <p:pic>
         <p:nvPicPr>
-          <p:cNvPr id="398" name=""/>
+          <p:cNvPr id="414" name=""/>
           <p:cNvPicPr>
             <a:picLocks noChangeAspect="1"/>
           </p:cNvPicPr>
@@ -18383,7 +18829,7 @@
       </p:pic>
       <p:sp>
         <p:nvSpPr>
-          <p:cNvPr id="399" name="" descr="{&quot;isTemplate&quot;:true,&quot;type&quot;:&quot;text&quot;}"/>
+          <p:cNvPr id="415" name="" descr="{&quot;isTemplate&quot;:true,&quot;type&quot;:&quot;text&quot;}"/>
           <p:cNvSpPr txBox="1"/>
           <p:nvPr/>
         </p:nvSpPr>
@@ -18438,7 +18884,7 @@
       </p:sp>
       <p:sp>
         <p:nvSpPr>
-          <p:cNvPr id="400" name="" descr="{&quot;isTemplate&quot;:true,&quot;type&quot;:&quot;text&quot;}"/>
+          <p:cNvPr id="416" name="" descr="{&quot;isTemplate&quot;:true,&quot;type&quot;:&quot;text&quot;}"/>
           <p:cNvSpPr txBox="1"/>
           <p:nvPr/>
         </p:nvSpPr>
@@ -18481,7 +18927,7 @@
   <p:cSld>
     <p:spTree>
       <p:nvGrpSpPr>
-        <p:cNvPr id="401" name="" descr="&lt;Slide style={{ width: '1280px', height: '720px', background: 'linear-gradient(135deg, #172133 0%, #22395E 100%)', position: 'relative', display: 'flex', flexDirection: 'column', justifyContent: 'center', padding: '0 96px' }}&gt;&#10;  &lt;div style={{ color: '#BD9B56', fontSize: 15, letterSpacing: '0.35em', marginBottom: 24 }}&gt;SECTION 02&lt;/div&gt;&#10;  &lt;div style={{ display: 'flex', alignItems: 'baseline', gap: 28 }}&gt;&#10;    &lt;span style={{ fontSize: 110, fontWeight: 'bold', color: 'rgba(189,155,86,0.28)', fontFamily: 'Inter, sans-serif', lineHeight: 1 }}&gt;02&lt;/span&gt;&#10;    &lt;span style={{ fontSize: 46, fontWeight: 'bold', color: '#FBFCFA', letterSpacing: '0.02em' }}&gt;技术构建过程&lt;/span&gt;&#10;  &lt;/div&gt;&#10;  &lt;div style={{ width: 72, height: 3, background: '#BD9B56', margin: '28px 0 20px' }} /&gt;&#10;  &lt;div style={{ fontSize: 16, color: 'rgba(251,252,250,0.72)', letterSpacing: '0.04em' }}&gt;数据库 → 后端 → 前端 → AI Agent → RAG 知识库&lt;/div&gt;&#10;  &lt;div style={{ position: 'absolute', bottom: 42, right: 96, color: 'rgba(251,252,250,0.4)', fontSize: 13, fontFamily: 'Inter, sans-serif' }}&gt;07 / 19&lt;/div&gt;&#10;&lt;/Slide&gt;"/>
+        <p:cNvPr id="417" name="" descr="&lt;Slide style={{ width: '1280px', height: '720px', background: 'linear-gradient(135deg, #172133 0%, #22395E 100%)', position: 'relative', display: 'flex', flexDirection: 'column', justifyContent: 'center', padding: '0 96px' }}&gt;&#10;  &lt;div style={{ color: '#BD9B56', fontSize: 15, letterSpacing: '0.35em', marginBottom: 24 }}&gt;SECTION 02&lt;/div&gt;&#10;  &lt;div style={{ display: 'flex', alignItems: 'center', gap: 36 }}&gt;&#10;    &lt;span style={{ fontSize: 160, fontWeight: 'bold', color: '#BD9B56', lineHeight: 1 }}&gt;02&lt;/span&gt;&#10;    &lt;div&gt;&#10;      &lt;div style={{ fontSize: 50, fontWeight: 'bold', color: '#FBFCFA', letterSpacing: '0.02em', lineHeight: 1.15 }}&gt;技术构建过程&lt;/div&gt;&#10;      &lt;div style={{ fontSize: 17, color: 'rgba(251,252,250,0.55)', marginTop: 12, letterSpacing: '0.06em' }}&gt;TECHNOLOGY CONSTRUCTION&lt;/div&gt;&#10;    &lt;/div&gt;&#10;  &lt;/div&gt;&#10;  &lt;div style={{ width: 80, height: 3, background: '#BD9B56', margin: '32px 0 24px' }} /&gt;&#10;  &lt;div style={{ display: 'flex', gap: 14 }}&gt;&#10;    &lt;span style={{ fontSize: 15, color: 'rgba(251,252,250,0.88)', border: '1px solid rgba(189,155,86,0.65)', padding: '9px 20px', borderRadius: 22 }}&gt;数据库设计&lt;/span&gt;&#10;    &lt;span style={{ fontSize: 15, color: 'rgba(251,252,250,0.88)', border: '1px solid rgba(189,155,86,0.65)', padding: '9px 20px', borderRadius: 22 }}&gt;后端 + 前端三端&lt;/span&gt;&#10;    &lt;span style={{ fontSize: 15, color: 'rgba(251,252,250,0.88)', border: '1px solid rgba(189,155,86,0.65)', padding: '9px 20px', borderRadius: 22 }}&gt;AI Agent&lt;/span&gt;&#10;    &lt;span style={{ fontSize: 15, color: 'rgba(251,252,250,0.88)', border: '1px solid rgba(189,155,86,0.65)', padding: '9px 20px', borderRadius: 22 }}&gt;RAG 知识库&lt;/span&gt;&#10;  &lt;/div&gt;&#10;  &lt;div style={{ position: 'absolute', bottom: 42, right: 96, color: 'rgba(251,252,250,0.4)', fontSize: 13 }}&gt;07 / 19&lt;/div&gt;&#10;&lt;/Slide&gt;"/>
         <p:cNvGrpSpPr/>
         <p:nvPr/>
       </p:nvGrpSpPr>
@@ -18495,7 +18941,7 @@
       </p:grpSpPr>
       <p:sp>
         <p:nvSpPr>
-          <p:cNvPr id="402" name=""/>
+          <p:cNvPr id="418" name=""/>
           <p:cNvSpPr/>
           <p:nvPr/>
         </p:nvSpPr>
@@ -18527,14 +18973,49 @@
       </p:sp>
       <p:sp>
         <p:nvSpPr>
-          <p:cNvPr id="403" name="" descr="{&quot;isTemplate&quot;:true,&quot;type&quot;:&quot;text&quot;}"/>
+          <p:cNvPr id="419" name="" descr="{&quot;isTemplate&quot;:true,&quot;type&quot;:&quot;text&quot;}"/>
+          <p:cNvSpPr txBox="1"/>
+          <p:nvPr/>
+        </p:nvSpPr>
+        <p:spPr>
+          <a:xfrm rot="0" flipH="0" flipV="0">
+            <a:off x="914400" y="1866900"/>
+            <a:ext cx="10363200" cy="171450"/>
+          </a:xfrm>
+          <a:prstGeom prst="rect"/>
+        </p:spPr>
+        <p:txBody>
+          <a:bodyPr wrap="none" lIns="0" tIns="0" rIns="0" bIns="0"/>
+          <a:p>
+            <a:pPr>
+              <a:lnSpc>
+                <a:spcPct val="100000"/>
+              </a:lnSpc>
+            </a:pPr>
+            <a:r>
+              <a:rPr lang="en-US" sz="1125" spc="-9223372036854775808">
+                <a:solidFill>
+                  <a:srgbClr val="BD9B56"/>
+                </a:solidFill>
+                <a:latin typeface="Microsoft YaHei"/>
+                <a:ea typeface="Microsoft YaHei"/>
+              </a:rPr>
+              <a:t>SECTION 02</a:t>
+            </a:r>
+            <a:endParaRPr/>
+          </a:p>
+        </p:txBody>
+      </p:sp>
+      <p:sp>
+        <p:nvSpPr>
+          <p:cNvPr id="420" name="" descr="{&quot;isTemplate&quot;:true,&quot;type&quot;:&quot;text&quot;}"/>
           <p:cNvSpPr txBox="1"/>
           <p:nvPr/>
         </p:nvSpPr>
         <p:spPr>
           <a:xfrm rot="0" flipH="0" flipV="0">
             <a:off x="914400" y="2266950"/>
-            <a:ext cx="10363200" cy="171450"/>
+            <a:ext cx="1885950" cy="1828800"/>
           </a:xfrm>
           <a:prstGeom prst="rect"/>
         </p:spPr>
@@ -18547,29 +19028,64 @@
               </a:lnSpc>
             </a:pPr>
             <a:r>
-              <a:rPr lang="en-US" sz="1125" spc="-9223372036854775808">
+              <a:rPr lang="en-US" sz="12000" b="1">
                 <a:solidFill>
                   <a:srgbClr val="BD9B56"/>
     